--- a/briefings/sezon-kadro-20260902/sunum-kadro-sezon2026.pptx
+++ b/briefings/sezon-kadro-20260902/sunum-kadro-sezon2026.pptx
@@ -5202,7 +5202,7 @@
           <a:lstStyle/>
           <a:p>
             <a:r>
-              <a:t>Sezon 2026 Kadro ve İş Hacmi Değerlendirmesi</a:t>
+              <a:t>Kadro ve İş Hacmi Değerlendirmesi</a:t>
             </a:r>
           </a:p>
         </p:txBody>
@@ -5223,7 +5223,7 @@
           <a:lstStyle/>
           <a:p>
             <a:r>
-              <a:t>Beş mağaza kadrosu · üç POS mağazası iş hacmi · 2025 karşılaştırmalı · 2 Eylül 2026</a:t>
+              <a:t>Sezon 2026 · Mağazalar · 2025 karşılaştırmalı · 2 Eylül 2026</a:t>
             </a:r>
           </a:p>
         </p:txBody>
@@ -5974,7 +5974,7 @@
                           </a:solidFill>
                           <a:latin typeface="Calibri"/>
                         </a:rPr>
-                        <a:t>Kasa</a:t>
+                        <a:t>Akademi</a:t>
                       </a:r>
                     </a:p>
                   </a:txBody>
@@ -5997,7 +5997,7 @@
                           </a:solidFill>
                           <a:latin typeface="Calibri"/>
                         </a:rPr>
-                        <a:t>+2</a:t>
+                        <a:t>+1</a:t>
                       </a:r>
                     </a:p>
                   </a:txBody>
@@ -6020,6 +6020,29 @@
                           </a:solidFill>
                           <a:latin typeface="Calibri"/>
                         </a:rPr>
+                        <a:t>0</a:t>
+                      </a:r>
+                    </a:p>
+                  </a:txBody>
+                  <a:tcPr>
+                    <a:solidFill>
+                      <a:srgbClr val="F2F2F2"/>
+                    </a:solidFill>
+                  </a:tcPr>
+                </a:tc>
+                <a:tc>
+                  <a:txBody>
+                    <a:bodyPr/>
+                    <a:lstStyle/>
+                    <a:p>
+                      <a:pPr algn="ctr"/>
+                      <a:r>
+                        <a:rPr sz="1050" b="0">
+                          <a:solidFill>
+                            <a:srgbClr val="333333"/>
+                          </a:solidFill>
+                          <a:latin typeface="Calibri"/>
+                        </a:rPr>
                         <a:t>+1</a:t>
                       </a:r>
                     </a:p>
@@ -6043,30 +6066,7 @@
                           </a:solidFill>
                           <a:latin typeface="Calibri"/>
                         </a:rPr>
-                        <a:t>-1</a:t>
-                      </a:r>
-                    </a:p>
-                  </a:txBody>
-                  <a:tcPr>
-                    <a:solidFill>
-                      <a:srgbClr val="F2F2F2"/>
-                    </a:solidFill>
-                  </a:tcPr>
-                </a:tc>
-                <a:tc>
-                  <a:txBody>
-                    <a:bodyPr/>
-                    <a:lstStyle/>
-                    <a:p>
-                      <a:pPr algn="ctr"/>
-                      <a:r>
-                        <a:rPr sz="1050" b="0">
-                          <a:solidFill>
-                            <a:srgbClr val="333333"/>
-                          </a:solidFill>
-                          <a:latin typeface="Calibri"/>
-                        </a:rPr>
-                        <a:t>—</a:t>
+                        <a:t>0</a:t>
                       </a:r>
                     </a:p>
                   </a:txBody>
@@ -6137,7 +6137,7 @@
                           </a:solidFill>
                           <a:latin typeface="Calibri"/>
                         </a:rPr>
-                        <a:t>Akademi</a:t>
+                        <a:t>Kasa</a:t>
                       </a:r>
                     </a:p>
                   </a:txBody>
@@ -6160,6 +6160,29 @@
                           </a:solidFill>
                           <a:latin typeface="Calibri"/>
                         </a:rPr>
+                        <a:t>+2</a:t>
+                      </a:r>
+                    </a:p>
+                  </a:txBody>
+                  <a:tcPr>
+                    <a:solidFill>
+                      <a:srgbClr val="FFFFFF"/>
+                    </a:solidFill>
+                  </a:tcPr>
+                </a:tc>
+                <a:tc>
+                  <a:txBody>
+                    <a:bodyPr/>
+                    <a:lstStyle/>
+                    <a:p>
+                      <a:pPr algn="ctr"/>
+                      <a:r>
+                        <a:rPr sz="1050" b="0">
+                          <a:solidFill>
+                            <a:srgbClr val="333333"/>
+                          </a:solidFill>
+                          <a:latin typeface="Calibri"/>
+                        </a:rPr>
                         <a:t>+1</a:t>
                       </a:r>
                     </a:p>
@@ -6183,7 +6206,7 @@
                           </a:solidFill>
                           <a:latin typeface="Calibri"/>
                         </a:rPr>
-                        <a:t>0</a:t>
+                        <a:t>-1</a:t>
                       </a:r>
                     </a:p>
                   </a:txBody>
@@ -6206,30 +6229,7 @@
                           </a:solidFill>
                           <a:latin typeface="Calibri"/>
                         </a:rPr>
-                        <a:t>+1</a:t>
-                      </a:r>
-                    </a:p>
-                  </a:txBody>
-                  <a:tcPr>
-                    <a:solidFill>
-                      <a:srgbClr val="FFFFFF"/>
-                    </a:solidFill>
-                  </a:tcPr>
-                </a:tc>
-                <a:tc>
-                  <a:txBody>
-                    <a:bodyPr/>
-                    <a:lstStyle/>
-                    <a:p>
-                      <a:pPr algn="ctr"/>
-                      <a:r>
-                        <a:rPr sz="1050" b="0">
-                          <a:solidFill>
-                            <a:srgbClr val="333333"/>
-                          </a:solidFill>
-                          <a:latin typeface="Calibri"/>
-                        </a:rPr>
-                        <a:t>0</a:t>
+                        <a:t>—</a:t>
                       </a:r>
                     </a:p>
                   </a:txBody>
@@ -6789,7 +6789,7 @@
                           </a:solidFill>
                           <a:latin typeface="Calibri"/>
                         </a:rPr>
-                        <a:t>Mağaza</a:t>
+                        <a:t>İdari İşler</a:t>
                       </a:r>
                     </a:p>
                   </a:txBody>
@@ -6812,6 +6812,52 @@
                           </a:solidFill>
                           <a:latin typeface="Calibri"/>
                         </a:rPr>
+                        <a:t>+1</a:t>
+                      </a:r>
+                    </a:p>
+                  </a:txBody>
+                  <a:tcPr>
+                    <a:solidFill>
+                      <a:srgbClr val="FFFFFF"/>
+                    </a:solidFill>
+                  </a:tcPr>
+                </a:tc>
+                <a:tc>
+                  <a:txBody>
+                    <a:bodyPr/>
+                    <a:lstStyle/>
+                    <a:p>
+                      <a:pPr algn="ctr"/>
+                      <a:r>
+                        <a:rPr sz="1050" b="0">
+                          <a:solidFill>
+                            <a:srgbClr val="333333"/>
+                          </a:solidFill>
+                          <a:latin typeface="Calibri"/>
+                        </a:rPr>
+                        <a:t>-1</a:t>
+                      </a:r>
+                    </a:p>
+                  </a:txBody>
+                  <a:tcPr>
+                    <a:solidFill>
+                      <a:srgbClr val="FFFFFF"/>
+                    </a:solidFill>
+                  </a:tcPr>
+                </a:tc>
+                <a:tc>
+                  <a:txBody>
+                    <a:bodyPr/>
+                    <a:lstStyle/>
+                    <a:p>
+                      <a:pPr algn="ctr"/>
+                      <a:r>
+                        <a:rPr sz="1050" b="0">
+                          <a:solidFill>
+                            <a:srgbClr val="333333"/>
+                          </a:solidFill>
+                          <a:latin typeface="Calibri"/>
+                        </a:rPr>
                         <a:t>0</a:t>
                       </a:r>
                     </a:p>
@@ -6835,53 +6881,7 @@
                           </a:solidFill>
                           <a:latin typeface="Calibri"/>
                         </a:rPr>
-                        <a:t>0</a:t>
-                      </a:r>
-                    </a:p>
-                  </a:txBody>
-                  <a:tcPr>
-                    <a:solidFill>
-                      <a:srgbClr val="FFFFFF"/>
-                    </a:solidFill>
-                  </a:tcPr>
-                </a:tc>
-                <a:tc>
-                  <a:txBody>
-                    <a:bodyPr/>
-                    <a:lstStyle/>
-                    <a:p>
-                      <a:pPr algn="ctr"/>
-                      <a:r>
-                        <a:rPr sz="1050" b="0">
-                          <a:solidFill>
-                            <a:srgbClr val="333333"/>
-                          </a:solidFill>
-                          <a:latin typeface="Calibri"/>
-                        </a:rPr>
-                        <a:t>0</a:t>
-                      </a:r>
-                    </a:p>
-                  </a:txBody>
-                  <a:tcPr>
-                    <a:solidFill>
-                      <a:srgbClr val="FFFFFF"/>
-                    </a:solidFill>
-                  </a:tcPr>
-                </a:tc>
-                <a:tc>
-                  <a:txBody>
-                    <a:bodyPr/>
-                    <a:lstStyle/>
-                    <a:p>
-                      <a:pPr algn="ctr"/>
-                      <a:r>
-                        <a:rPr sz="1050" b="0">
-                          <a:solidFill>
-                            <a:srgbClr val="333333"/>
-                          </a:solidFill>
-                          <a:latin typeface="Calibri"/>
-                        </a:rPr>
-                        <a:t>0</a:t>
+                        <a:t>—</a:t>
                       </a:r>
                     </a:p>
                   </a:txBody>
@@ -7115,7 +7115,7 @@
                           </a:solidFill>
                           <a:latin typeface="Calibri"/>
                         </a:rPr>
-                        <a:t>İdari İşler</a:t>
+                        <a:t>Mağaza</a:t>
                       </a:r>
                     </a:p>
                   </a:txBody>
@@ -7138,7 +7138,7 @@
                           </a:solidFill>
                           <a:latin typeface="Calibri"/>
                         </a:rPr>
-                        <a:t>+1</a:t>
+                        <a:t>0</a:t>
                       </a:r>
                     </a:p>
                   </a:txBody>
@@ -7161,7 +7161,7 @@
                           </a:solidFill>
                           <a:latin typeface="Calibri"/>
                         </a:rPr>
-                        <a:t>-1</a:t>
+                        <a:t>0</a:t>
                       </a:r>
                     </a:p>
                   </a:txBody>
@@ -7207,7 +7207,7 @@
                           </a:solidFill>
                           <a:latin typeface="Calibri"/>
                         </a:rPr>
-                        <a:t>—</a:t>
+                        <a:t>0</a:t>
                       </a:r>
                     </a:p>
                   </a:txBody>
@@ -7473,6 +7473,45 @@
       <p:sp>
         <p:nvSpPr>
           <p:cNvPr id="5" name="TextBox 4"/>
+          <p:cNvSpPr txBox="1"/>
+          <p:nvPr/>
+        </p:nvSpPr>
+        <p:spPr>
+          <a:xfrm>
+            <a:off x="548640" y="5504688"/>
+            <a:ext cx="7772400" cy="292608"/>
+          </a:xfrm>
+          <a:prstGeom prst="rect">
+            <a:avLst/>
+          </a:prstGeom>
+          <a:noFill/>
+        </p:spPr>
+        <p:txBody>
+          <a:bodyPr wrap="square" anchor="t">
+            <a:spAutoFit/>
+          </a:bodyPr>
+          <a:lstStyle/>
+          <a:p>
+            <a:pPr algn="l">
+              <a:lnSpc>
+                <a:spcPct val="100000"/>
+              </a:lnSpc>
+            </a:pPr>
+            <a:r>
+              <a:rPr sz="900" b="0">
+                <a:solidFill>
+                  <a:srgbClr val="9A9A9A"/>
+                </a:solidFill>
+                <a:latin typeface="Calibri"/>
+              </a:rPr>
+              <a:t>* Kapsam: beş mağazanın tamamı — FSM · Özlüce · İst. Yolu · Heykel · Şura.</a:t>
+            </a:r>
+          </a:p>
+        </p:txBody>
+      </p:sp>
+      <p:sp>
+        <p:nvSpPr>
+          <p:cNvPr id="6" name="TextBox 5"/>
           <p:cNvSpPr txBox="1"/>
           <p:nvPr/>
         </p:nvSpPr>
@@ -8535,6 +8574,45 @@
         </p:nvSpPr>
         <p:spPr>
           <a:xfrm>
+            <a:off x="548640" y="5504688"/>
+            <a:ext cx="7772400" cy="292608"/>
+          </a:xfrm>
+          <a:prstGeom prst="rect">
+            <a:avLst/>
+          </a:prstGeom>
+          <a:noFill/>
+        </p:spPr>
+        <p:txBody>
+          <a:bodyPr wrap="square" anchor="t">
+            <a:spAutoFit/>
+          </a:bodyPr>
+          <a:lstStyle/>
+          <a:p>
+            <a:pPr algn="l">
+              <a:lnSpc>
+                <a:spcPct val="100000"/>
+              </a:lnSpc>
+            </a:pPr>
+            <a:r>
+              <a:rPr sz="900" b="0">
+                <a:solidFill>
+                  <a:srgbClr val="9A9A9A"/>
+                </a:solidFill>
+                <a:latin typeface="Calibri"/>
+              </a:rPr>
+              <a:t>* Kapsam: üç POS mağazası — FSM · Özlüce · İst. Yolu. Heykel ve Şura POS raporlamasında olmadığı için iş hacmi ölçümlerine girmez.</a:t>
+            </a:r>
+          </a:p>
+        </p:txBody>
+      </p:sp>
+      <p:sp>
+        <p:nvSpPr>
+          <p:cNvPr id="8" name="TextBox 7"/>
+          <p:cNvSpPr txBox="1"/>
+          <p:nvPr/>
+        </p:nvSpPr>
+        <p:spPr>
+          <a:xfrm>
             <a:off x="8503920" y="6355080"/>
             <a:ext cx="3108960" cy="274320"/>
           </a:xfrm>
@@ -9795,6 +9873,45 @@
         </p:nvSpPr>
         <p:spPr>
           <a:xfrm>
+            <a:off x="548640" y="5504688"/>
+            <a:ext cx="7772400" cy="292608"/>
+          </a:xfrm>
+          <a:prstGeom prst="rect">
+            <a:avLst/>
+          </a:prstGeom>
+          <a:noFill/>
+        </p:spPr>
+        <p:txBody>
+          <a:bodyPr wrap="square" anchor="t">
+            <a:spAutoFit/>
+          </a:bodyPr>
+          <a:lstStyle/>
+          <a:p>
+            <a:pPr algn="l">
+              <a:lnSpc>
+                <a:spcPct val="100000"/>
+              </a:lnSpc>
+            </a:pPr>
+            <a:r>
+              <a:rPr sz="900" b="0">
+                <a:solidFill>
+                  <a:srgbClr val="9A9A9A"/>
+                </a:solidFill>
+                <a:latin typeface="Calibri"/>
+              </a:rPr>
+              <a:t>* Kapsam: üç POS mağazası — FSM · Özlüce · İst. Yolu. Heykel ve Şura POS raporlamasında olmadığı için iş hacmi ölçümlerine girmez.</a:t>
+            </a:r>
+          </a:p>
+        </p:txBody>
+      </p:sp>
+      <p:sp>
+        <p:nvSpPr>
+          <p:cNvPr id="9" name="TextBox 8"/>
+          <p:cNvSpPr txBox="1"/>
+          <p:nvPr/>
+        </p:nvSpPr>
+        <p:spPr>
+          <a:xfrm>
             <a:off x="8503920" y="6355080"/>
             <a:ext cx="3108960" cy="274320"/>
           </a:xfrm>
@@ -10655,6 +10772,45 @@
         </p:nvSpPr>
         <p:spPr>
           <a:xfrm>
+            <a:off x="548640" y="5504688"/>
+            <a:ext cx="7772400" cy="292608"/>
+          </a:xfrm>
+          <a:prstGeom prst="rect">
+            <a:avLst/>
+          </a:prstGeom>
+          <a:noFill/>
+        </p:spPr>
+        <p:txBody>
+          <a:bodyPr wrap="square" anchor="t">
+            <a:spAutoFit/>
+          </a:bodyPr>
+          <a:lstStyle/>
+          <a:p>
+            <a:pPr algn="l">
+              <a:lnSpc>
+                <a:spcPct val="100000"/>
+              </a:lnSpc>
+            </a:pPr>
+            <a:r>
+              <a:rPr sz="900" b="0">
+                <a:solidFill>
+                  <a:srgbClr val="9A9A9A"/>
+                </a:solidFill>
+                <a:latin typeface="Calibri"/>
+              </a:rPr>
+              <a:t>* Kapsam: üç POS mağazası — FSM · Özlüce · İst. Yolu. Heykel ve Şura POS raporlamasında olmadığı için iş hacmi ölçümlerine girmez.</a:t>
+            </a:r>
+          </a:p>
+        </p:txBody>
+      </p:sp>
+      <p:sp>
+        <p:nvSpPr>
+          <p:cNvPr id="24" name="TextBox 23"/>
+          <p:cNvSpPr txBox="1"/>
+          <p:nvPr/>
+        </p:nvSpPr>
+        <p:spPr>
+          <a:xfrm>
             <a:off x="8503920" y="6355080"/>
             <a:ext cx="3108960" cy="274320"/>
           </a:xfrm>
@@ -11264,6 +11420,45 @@
         </p:nvSpPr>
         <p:spPr>
           <a:xfrm>
+            <a:off x="548640" y="5504688"/>
+            <a:ext cx="7772400" cy="292608"/>
+          </a:xfrm>
+          <a:prstGeom prst="rect">
+            <a:avLst/>
+          </a:prstGeom>
+          <a:noFill/>
+        </p:spPr>
+        <p:txBody>
+          <a:bodyPr wrap="square" anchor="t">
+            <a:spAutoFit/>
+          </a:bodyPr>
+          <a:lstStyle/>
+          <a:p>
+            <a:pPr algn="l">
+              <a:lnSpc>
+                <a:spcPct val="100000"/>
+              </a:lnSpc>
+            </a:pPr>
+            <a:r>
+              <a:rPr sz="900" b="0">
+                <a:solidFill>
+                  <a:srgbClr val="9A9A9A"/>
+                </a:solidFill>
+                <a:latin typeface="Calibri"/>
+              </a:rPr>
+              <a:t>* Kapsam: beş mağazanın tamamı — FSM · Özlüce · İst. Yolu · Heykel · Şura. Tutunma ölçümü mağaza kadrosu üzerinden yapılmıştır.</a:t>
+            </a:r>
+          </a:p>
+        </p:txBody>
+      </p:sp>
+      <p:sp>
+        <p:nvSpPr>
+          <p:cNvPr id="16" name="TextBox 15"/>
+          <p:cNvSpPr txBox="1"/>
+          <p:nvPr/>
+        </p:nvSpPr>
+        <p:spPr>
+          <a:xfrm>
             <a:off x="8503920" y="6355080"/>
             <a:ext cx="3108960" cy="274320"/>
           </a:xfrm>
@@ -11364,7 +11559,7 @@
           <a:lstStyle/>
           <a:p>
             <a:r>
-              <a:t>Kadro farkı sezon öncesinde oluşmuştur · sezon dönemi kadrolu -4 · ürün adedi +%34,9 · personel başına iş +%20,6</a:t>
+              <a:t>Sezon dönemi kadrolu -4 · ürün adedi +%34,9 · personel başına iş +%20,6</a:t>
             </a:r>
           </a:p>
         </p:txBody>
@@ -14187,6 +14382,45 @@
         </p:nvSpPr>
         <p:spPr>
           <a:xfrm>
+            <a:off x="548640" y="5504688"/>
+            <a:ext cx="7772400" cy="292608"/>
+          </a:xfrm>
+          <a:prstGeom prst="rect">
+            <a:avLst/>
+          </a:prstGeom>
+          <a:noFill/>
+        </p:spPr>
+        <p:txBody>
+          <a:bodyPr wrap="square" anchor="t">
+            <a:spAutoFit/>
+          </a:bodyPr>
+          <a:lstStyle/>
+          <a:p>
+            <a:pPr algn="l">
+              <a:lnSpc>
+                <a:spcPct val="100000"/>
+              </a:lnSpc>
+            </a:pPr>
+            <a:r>
+              <a:rPr sz="900" b="0">
+                <a:solidFill>
+                  <a:srgbClr val="9A9A9A"/>
+                </a:solidFill>
+                <a:latin typeface="Calibri"/>
+              </a:rPr>
+              <a:t>* Kapsam: kadro rakamları beş mağaza (FSM · Özlüce · İst. Yolu · Heykel · Şura); iş hacmi ve personel başına rakamlar üç POS mağazası (FSM · Özlüce · İst. Yolu).</a:t>
+            </a:r>
+          </a:p>
+        </p:txBody>
+      </p:sp>
+      <p:sp>
+        <p:nvSpPr>
+          <p:cNvPr id="34" name="TextBox 33"/>
+          <p:cNvSpPr txBox="1"/>
+          <p:nvPr/>
+        </p:nvSpPr>
+        <p:spPr>
+          <a:xfrm>
             <a:off x="8503920" y="6355080"/>
             <a:ext cx="3108960" cy="274320"/>
           </a:xfrm>
@@ -15589,6 +15823,45 @@
         </p:nvSpPr>
         <p:spPr>
           <a:xfrm>
+            <a:off x="548640" y="5504688"/>
+            <a:ext cx="7772400" cy="292608"/>
+          </a:xfrm>
+          <a:prstGeom prst="rect">
+            <a:avLst/>
+          </a:prstGeom>
+          <a:noFill/>
+        </p:spPr>
+        <p:txBody>
+          <a:bodyPr wrap="square" anchor="t">
+            <a:spAutoFit/>
+          </a:bodyPr>
+          <a:lstStyle/>
+          <a:p>
+            <a:pPr algn="l">
+              <a:lnSpc>
+                <a:spcPct val="100000"/>
+              </a:lnSpc>
+            </a:pPr>
+            <a:r>
+              <a:rPr sz="900" b="0">
+                <a:solidFill>
+                  <a:srgbClr val="9A9A9A"/>
+                </a:solidFill>
+                <a:latin typeface="Calibri"/>
+              </a:rPr>
+              <a:t>* Kapsam: beş mağazanın tamamı — FSM · Özlüce · İst. Yolu · Heykel · Şura.</a:t>
+            </a:r>
+          </a:p>
+        </p:txBody>
+      </p:sp>
+      <p:sp>
+        <p:nvSpPr>
+          <p:cNvPr id="36" name="TextBox 35"/>
+          <p:cNvSpPr txBox="1"/>
+          <p:nvPr/>
+        </p:nvSpPr>
+        <p:spPr>
+          <a:xfrm>
             <a:off x="8503920" y="6355080"/>
             <a:ext cx="3108960" cy="274320"/>
           </a:xfrm>
@@ -17359,7 +17632,7 @@
         <p:spPr>
           <a:xfrm>
             <a:off x="548640" y="5285232"/>
-            <a:ext cx="11018520" cy="411480"/>
+            <a:ext cx="11018520" cy="274320"/>
           </a:xfrm>
           <a:prstGeom prst="rect">
             <a:avLst/>
@@ -17384,7 +17657,7 @@
                 </a:solidFill>
                 <a:latin typeface="Calibri"/>
               </a:rPr>
-              <a:t>Kadrolu = sezonluk dışı personel · Sezon içi = 31.08 kesimi ile 30.06 tabanı arasındaki değişim (her iki yılda da negatif: -4 ve -4) · Heykel ve Şura POS raporlamasında yok, kadro tablosunda beş mağazanın tamamı yer alır.</a:t>
+              <a:t>Kadrolu = sezonluk dışı personel · Sezon içi = 31.08 kesimi ile 30.06 tabanı arasındaki değişim (her iki yılda da negatif: -4 ve -4).</a:t>
             </a:r>
           </a:p>
         </p:txBody>
@@ -17392,6 +17665,45 @@
       <p:sp>
         <p:nvSpPr>
           <p:cNvPr id="7" name="TextBox 6"/>
+          <p:cNvSpPr txBox="1"/>
+          <p:nvPr/>
+        </p:nvSpPr>
+        <p:spPr>
+          <a:xfrm>
+            <a:off x="548640" y="5504688"/>
+            <a:ext cx="7772400" cy="292608"/>
+          </a:xfrm>
+          <a:prstGeom prst="rect">
+            <a:avLst/>
+          </a:prstGeom>
+          <a:noFill/>
+        </p:spPr>
+        <p:txBody>
+          <a:bodyPr wrap="square" anchor="t">
+            <a:spAutoFit/>
+          </a:bodyPr>
+          <a:lstStyle/>
+          <a:p>
+            <a:pPr algn="l">
+              <a:lnSpc>
+                <a:spcPct val="100000"/>
+              </a:lnSpc>
+            </a:pPr>
+            <a:r>
+              <a:rPr sz="900" b="0">
+                <a:solidFill>
+                  <a:srgbClr val="9A9A9A"/>
+                </a:solidFill>
+                <a:latin typeface="Calibri"/>
+              </a:rPr>
+              <a:t>* Kapsam: beş mağazanın tamamı — FSM · Özlüce · İst. Yolu · Heykel · Şura. İş hacmi kapsamı üç POS mağazasıdır (FSM · Özlüce · İst. Yolu).</a:t>
+            </a:r>
+          </a:p>
+        </p:txBody>
+      </p:sp>
+      <p:sp>
+        <p:nvSpPr>
+          <p:cNvPr id="8" name="TextBox 7"/>
           <p:cNvSpPr txBox="1"/>
           <p:nvPr/>
         </p:nvSpPr>
@@ -18268,6 +18580,45 @@
         </p:nvSpPr>
         <p:spPr>
           <a:xfrm>
+            <a:off x="548640" y="5504688"/>
+            <a:ext cx="7772400" cy="292608"/>
+          </a:xfrm>
+          <a:prstGeom prst="rect">
+            <a:avLst/>
+          </a:prstGeom>
+          <a:noFill/>
+        </p:spPr>
+        <p:txBody>
+          <a:bodyPr wrap="square" anchor="t">
+            <a:spAutoFit/>
+          </a:bodyPr>
+          <a:lstStyle/>
+          <a:p>
+            <a:pPr algn="l">
+              <a:lnSpc>
+                <a:spcPct val="100000"/>
+              </a:lnSpc>
+            </a:pPr>
+            <a:r>
+              <a:rPr sz="900" b="0">
+                <a:solidFill>
+                  <a:srgbClr val="9A9A9A"/>
+                </a:solidFill>
+                <a:latin typeface="Calibri"/>
+              </a:rPr>
+              <a:t>* Kapsam: üç POS mağazası — FSM · Özlüce · İst. Yolu. Heykel ve Şura POS raporlamasında olmadığı için iş hacmi ölçümlerine girmez.</a:t>
+            </a:r>
+          </a:p>
+        </p:txBody>
+      </p:sp>
+      <p:sp>
+        <p:nvSpPr>
+          <p:cNvPr id="23" name="TextBox 22"/>
+          <p:cNvSpPr txBox="1"/>
+          <p:nvPr/>
+        </p:nvSpPr>
+        <p:spPr>
+          <a:xfrm>
             <a:off x="8503920" y="6355080"/>
             <a:ext cx="3108960" cy="274320"/>
           </a:xfrm>
@@ -19038,6 +19389,45 @@
         </p:nvSpPr>
         <p:spPr>
           <a:xfrm>
+            <a:off x="548640" y="5504688"/>
+            <a:ext cx="7772400" cy="292608"/>
+          </a:xfrm>
+          <a:prstGeom prst="rect">
+            <a:avLst/>
+          </a:prstGeom>
+          <a:noFill/>
+        </p:spPr>
+        <p:txBody>
+          <a:bodyPr wrap="square" anchor="t">
+            <a:spAutoFit/>
+          </a:bodyPr>
+          <a:lstStyle/>
+          <a:p>
+            <a:pPr algn="l">
+              <a:lnSpc>
+                <a:spcPct val="100000"/>
+              </a:lnSpc>
+            </a:pPr>
+            <a:r>
+              <a:rPr sz="900" b="0">
+                <a:solidFill>
+                  <a:srgbClr val="9A9A9A"/>
+                </a:solidFill>
+                <a:latin typeface="Calibri"/>
+              </a:rPr>
+              <a:t>* Kapsam: üç POS mağazası — FSM · Özlüce · İst. Yolu. Heykel ve Şura POS raporlamasında olmadığı için iş hacmi ölçümlerine girmez.</a:t>
+            </a:r>
+          </a:p>
+        </p:txBody>
+      </p:sp>
+      <p:sp>
+        <p:nvSpPr>
+          <p:cNvPr id="21" name="TextBox 20"/>
+          <p:cNvSpPr txBox="1"/>
+          <p:nvPr/>
+        </p:nvSpPr>
+        <p:spPr>
+          <a:xfrm>
             <a:off x="8503920" y="6355080"/>
             <a:ext cx="3108960" cy="274320"/>
           </a:xfrm>
@@ -19691,6 +20081,45 @@
         </p:nvSpPr>
         <p:spPr>
           <a:xfrm>
+            <a:off x="548640" y="5504688"/>
+            <a:ext cx="7772400" cy="292608"/>
+          </a:xfrm>
+          <a:prstGeom prst="rect">
+            <a:avLst/>
+          </a:prstGeom>
+          <a:noFill/>
+        </p:spPr>
+        <p:txBody>
+          <a:bodyPr wrap="square" anchor="t">
+            <a:spAutoFit/>
+          </a:bodyPr>
+          <a:lstStyle/>
+          <a:p>
+            <a:pPr algn="l">
+              <a:lnSpc>
+                <a:spcPct val="100000"/>
+              </a:lnSpc>
+            </a:pPr>
+            <a:r>
+              <a:rPr sz="900" b="0">
+                <a:solidFill>
+                  <a:srgbClr val="9A9A9A"/>
+                </a:solidFill>
+                <a:latin typeface="Calibri"/>
+              </a:rPr>
+              <a:t>* Kapsam: üç POS mağazası — FSM · Özlüce · İst. Yolu. Heykel ve Şura POS raporlamasında olmadığı için iş hacmi ölçümlerine girmez.</a:t>
+            </a:r>
+          </a:p>
+        </p:txBody>
+      </p:sp>
+      <p:sp>
+        <p:nvSpPr>
+          <p:cNvPr id="18" name="TextBox 17"/>
+          <p:cNvSpPr txBox="1"/>
+          <p:nvPr/>
+        </p:nvSpPr>
+        <p:spPr>
+          <a:xfrm>
             <a:off x="8503920" y="6355080"/>
             <a:ext cx="3108960" cy="274320"/>
           </a:xfrm>
@@ -20233,6 +20662,45 @@
       <p:sp>
         <p:nvSpPr>
           <p:cNvPr id="14" name="TextBox 13"/>
+          <p:cNvSpPr txBox="1"/>
+          <p:nvPr/>
+        </p:nvSpPr>
+        <p:spPr>
+          <a:xfrm>
+            <a:off x="548640" y="5504688"/>
+            <a:ext cx="7772400" cy="292608"/>
+          </a:xfrm>
+          <a:prstGeom prst="rect">
+            <a:avLst/>
+          </a:prstGeom>
+          <a:noFill/>
+        </p:spPr>
+        <p:txBody>
+          <a:bodyPr wrap="square" anchor="t">
+            <a:spAutoFit/>
+          </a:bodyPr>
+          <a:lstStyle/>
+          <a:p>
+            <a:pPr algn="l">
+              <a:lnSpc>
+                <a:spcPct val="100000"/>
+              </a:lnSpc>
+            </a:pPr>
+            <a:r>
+              <a:rPr sz="900" b="0">
+                <a:solidFill>
+                  <a:srgbClr val="9A9A9A"/>
+                </a:solidFill>
+                <a:latin typeface="Calibri"/>
+              </a:rPr>
+              <a:t>* Kapsam: beş mağazanın tamamı — FSM · Özlüce · İst. Yolu · Heykel · Şura.</a:t>
+            </a:r>
+          </a:p>
+        </p:txBody>
+      </p:sp>
+      <p:sp>
+        <p:nvSpPr>
+          <p:cNvPr id="15" name="TextBox 14"/>
           <p:cNvSpPr txBox="1"/>
           <p:nvPr/>
         </p:nvSpPr>

--- a/briefings/sezon-kadro-20260902/sunum-kadro-sezon2026.pptx
+++ b/briefings/sezon-kadro-20260902/sunum-kadro-sezon2026.pptx
@@ -23,6 +23,7 @@
     <p:sldId id="268" r:id="rId19"/>
     <p:sldId id="269" r:id="rId20"/>
     <p:sldId id="270" r:id="rId21"/>
+    <p:sldId id="271" r:id="rId22"/>
   </p:sldIdLst>
   <p:sldSz cx="12192000" cy="6858000"/>
   <p:notesSz cx="6858000" cy="9144000"/>
@@ -368,7 +369,7 @@
                   <c:v>574.7176999999999</c:v>
                 </c:pt>
                 <c:pt idx="1">
-                  <c:v>71.837429119994</c:v>
+                  <c:v>71.83742911999343</c:v>
                 </c:pt>
                 <c:pt idx="2">
                   <c:v>143</c:v>
@@ -423,7 +424,7 @@
                   <c:v>775.19155</c:v>
                 </c:pt>
                 <c:pt idx="1">
-                  <c:v>122.60138084999437</c:v>
+                  <c:v>122.60138084999475</c:v>
                 </c:pt>
                 <c:pt idx="2">
                   <c:v>160</c:v>
@@ -616,7 +617,7 @@
                 <c:formatCode>General</c:formatCode>
                 <c:ptCount val="3"/>
                 <c:pt idx="0">
-                  <c:v>5578.704629629629</c:v>
+                  <c:v>5578.70462962963</c:v>
                 </c:pt>
                 <c:pt idx="1">
                   <c:v>4232.270491803279</c:v>
@@ -1316,7 +1317,7 @@
                 <c:formatCode>General</c:formatCode>
                 <c:ptCount val="3"/>
                 <c:pt idx="0">
-                  <c:v>30.54425135213488</c:v>
+                  <c:v>30.5442513521349</c:v>
                 </c:pt>
                 <c:pt idx="1">
                   <c:v>48.88781877530306</c:v>
@@ -1371,13 +1372,13 @@
                 <c:formatCode>General</c:formatCode>
                 <c:ptCount val="3"/>
                 <c:pt idx="0">
-                  <c:v>57.55862375816307</c:v>
+                  <c:v>57.5586237581637</c:v>
                 </c:pt>
                 <c:pt idx="1">
-                  <c:v>96.12850541161279</c:v>
+                  <c:v>96.12850541161808</c:v>
                 </c:pt>
                 <c:pt idx="2">
-                  <c:v>62.26752661004467</c:v>
+                  <c:v>62.26752661004522</c:v>
                 </c:pt>
               </c:numCache>
             </c:numRef>
@@ -1604,6 +1605,221 @@
     <a:p>
       <a:pPr>
         <a:defRPr sz="900">
+          <a:latin typeface="Calibri"/>
+        </a:defRPr>
+      </a:pPr>
+      <a:endParaRPr lang="en-US"/>
+    </a:p>
+  </c:txPr>
+  <c:externalData r:id="rId1">
+    <c:autoUpdate val="0"/>
+  </c:externalData>
+</c:chartSpace>
+</file>
+
+<file path=ppt/charts/chart9.xml><?xml version="1.0" encoding="utf-8"?>
+<c:chartSpace xmlns:c="http://schemas.openxmlformats.org/drawingml/2006/chart" xmlns:a="http://schemas.openxmlformats.org/drawingml/2006/main" xmlns:r="http://schemas.openxmlformats.org/officeDocument/2006/relationships">
+  <c:date1904 val="0"/>
+  <c:chart>
+    <c:autoTitleDeleted val="1"/>
+    <c:plotArea>
+      <c:barChart>
+        <c:barDir val="col"/>
+        <c:grouping val="clustered"/>
+        <c:ser>
+          <c:idx val="0"/>
+          <c:order val="0"/>
+          <c:tx>
+            <c:strRef>
+              <c:f>Sheet1!$B$1</c:f>
+              <c:strCache>
+                <c:ptCount val="1"/>
+                <c:pt idx="0">
+                  <c:v>2025 gerçekleşen</c:v>
+                </c:pt>
+              </c:strCache>
+            </c:strRef>
+          </c:tx>
+          <c:spPr>
+            <a:solidFill>
+              <a:srgbClr val="9A9A9A"/>
+            </a:solidFill>
+          </c:spPr>
+          <c:cat>
+            <c:strRef>
+              <c:f>Sheet1!$A$2:$A$2</c:f>
+              <c:strCache>
+                <c:ptCount val="1"/>
+                <c:pt idx="0">
+                  <c:v>Ağustos (adet, bin)</c:v>
+                </c:pt>
+              </c:strCache>
+            </c:strRef>
+          </c:cat>
+          <c:val>
+            <c:numRef>
+              <c:f>Sheet1!$B$2:$B$2</c:f>
+              <c:numCache>
+                <c:formatCode>General</c:formatCode>
+                <c:ptCount val="1"/>
+                <c:pt idx="0">
+                  <c:v>458.50870000000003</c:v>
+                </c:pt>
+              </c:numCache>
+            </c:numRef>
+          </c:val>
+        </c:ser>
+        <c:ser>
+          <c:idx val="1"/>
+          <c:order val="1"/>
+          <c:tx>
+            <c:strRef>
+              <c:f>Sheet1!$C$1</c:f>
+              <c:strCache>
+                <c:ptCount val="1"/>
+                <c:pt idx="0">
+                  <c:v>2026 gerçekleşen</c:v>
+                </c:pt>
+              </c:strCache>
+            </c:strRef>
+          </c:tx>
+          <c:spPr>
+            <a:solidFill>
+              <a:srgbClr val="E30622"/>
+            </a:solidFill>
+          </c:spPr>
+          <c:cat>
+            <c:strRef>
+              <c:f>Sheet1!$A$2:$A$2</c:f>
+              <c:strCache>
+                <c:ptCount val="1"/>
+                <c:pt idx="0">
+                  <c:v>Ağustos (adet, bin)</c:v>
+                </c:pt>
+              </c:strCache>
+            </c:strRef>
+          </c:cat>
+          <c:val>
+            <c:numRef>
+              <c:f>Sheet1!$C$2:$C$2</c:f>
+              <c:numCache>
+                <c:formatCode>General</c:formatCode>
+                <c:ptCount val="1"/>
+                <c:pt idx="0">
+                  <c:v>483.65855000000005</c:v>
+                </c:pt>
+              </c:numCache>
+            </c:numRef>
+          </c:val>
+        </c:ser>
+        <c:ser>
+          <c:idx val="2"/>
+          <c:order val="2"/>
+          <c:tx>
+            <c:strRef>
+              <c:f>Sheet1!$D$1</c:f>
+              <c:strCache>
+                <c:ptCount val="1"/>
+                <c:pt idx="0">
+                  <c:v>2026 kayma olmasaydı</c:v>
+                </c:pt>
+              </c:strCache>
+            </c:strRef>
+          </c:tx>
+          <c:spPr>
+            <a:solidFill>
+              <a:srgbClr val="7A1020"/>
+            </a:solidFill>
+          </c:spPr>
+          <c:cat>
+            <c:strRef>
+              <c:f>Sheet1!$A$2:$A$2</c:f>
+              <c:strCache>
+                <c:ptCount val="1"/>
+                <c:pt idx="0">
+                  <c:v>Ağustos (adet, bin)</c:v>
+                </c:pt>
+              </c:strCache>
+            </c:strRef>
+          </c:cat>
+          <c:val>
+            <c:numRef>
+              <c:f>Sheet1!$D$2:$D$2</c:f>
+              <c:numCache>
+                <c:formatCode>General</c:formatCode>
+                <c:ptCount val="1"/>
+                <c:pt idx="0">
+                  <c:v>617.2970044317599</c:v>
+                </c:pt>
+              </c:numCache>
+            </c:numRef>
+          </c:val>
+        </c:ser>
+        <c:dLbls>
+          <c:numFmt sourceLinked="0" formatCode="#,##0"/>
+          <c:txPr>
+            <a:bodyPr/>
+            <a:lstStyle/>
+            <a:p>
+              <a:pPr>
+                <a:defRPr sz="900"/>
+              </a:pPr>
+            </a:p>
+          </c:txPr>
+          <c:showLegendKey val="0"/>
+          <c:showVal val="1"/>
+          <c:showCatName val="0"/>
+          <c:showSerName val="0"/>
+          <c:showPercent val="0"/>
+          <c:showBubbleSize val="0"/>
+          <c:showLeaderLines val="1"/>
+        </c:dLbls>
+        <c:gapWidth val="80"/>
+        <c:axId val="-2068027336"/>
+        <c:axId val="-2113994440"/>
+      </c:barChart>
+      <c:catAx>
+        <c:axId val="-2068027336"/>
+        <c:scaling>
+          <c:orientation val="minMax"/>
+        </c:scaling>
+        <c:delete val="0"/>
+        <c:axPos val="b"/>
+        <c:majorTickMark val="out"/>
+        <c:minorTickMark val="none"/>
+        <c:tickLblPos val="nextTo"/>
+        <c:crossAx val="-2113994440"/>
+        <c:crosses val="autoZero"/>
+        <c:auto val="1"/>
+        <c:lblAlgn val="ctr"/>
+        <c:lblOffset val="100"/>
+        <c:noMultiLvlLbl val="0"/>
+      </c:catAx>
+      <c:valAx>
+        <c:axId val="-2113994440"/>
+        <c:scaling/>
+        <c:delete val="0"/>
+        <c:axPos val="l"/>
+        <c:majorGridlines/>
+        <c:majorTickMark val="out"/>
+        <c:minorTickMark val="none"/>
+        <c:tickLblPos val="nextTo"/>
+        <c:crossAx val="-2068027336"/>
+        <c:crosses val="autoZero"/>
+      </c:valAx>
+    </c:plotArea>
+    <c:legend>
+      <c:legendPos val="t"/>
+      <c:overlay val="0"/>
+    </c:legend>
+    <c:dispBlanksAs val="gap"/>
+  </c:chart>
+  <c:txPr>
+    <a:bodyPr/>
+    <a:lstStyle/>
+    <a:p>
+      <a:pPr>
+        <a:defRPr sz="950">
           <a:latin typeface="Calibri"/>
         </a:defRPr>
       </a:pPr>
@@ -5223,7 +5439,7 @@
           <a:lstStyle/>
           <a:p>
             <a:r>
-              <a:t>Sezon 2026 · Mağazalar · 2025 karşılaştırmalı · 2 Eylül 2026</a:t>
+              <a:t>Sezon 2026 · Mağazalar · kadro 30.06 ve 31.08 · iş hacmi 01.07.2025 – 25.08.2025 ile 07.07.2026 – 31.08.2026</a:t>
             </a:r>
           </a:p>
         </p:txBody>
@@ -5811,7 +6027,7 @@
                           </a:solidFill>
                           <a:latin typeface="Calibri"/>
                         </a:rPr>
-                        <a:t>Şura</a:t>
+                        <a:t>Kasa</a:t>
                       </a:r>
                     </a:p>
                   </a:txBody>
@@ -5834,6 +6050,75 @@
                           </a:solidFill>
                           <a:latin typeface="Calibri"/>
                         </a:rPr>
+                        <a:t>+2</a:t>
+                      </a:r>
+                    </a:p>
+                  </a:txBody>
+                  <a:tcPr>
+                    <a:solidFill>
+                      <a:srgbClr val="FFFFFF"/>
+                    </a:solidFill>
+                  </a:tcPr>
+                </a:tc>
+                <a:tc>
+                  <a:txBody>
+                    <a:bodyPr/>
+                    <a:lstStyle/>
+                    <a:p>
+                      <a:pPr algn="ctr"/>
+                      <a:r>
+                        <a:rPr sz="1050" b="0">
+                          <a:solidFill>
+                            <a:srgbClr val="333333"/>
+                          </a:solidFill>
+                          <a:latin typeface="Calibri"/>
+                        </a:rPr>
+                        <a:t>+1</a:t>
+                      </a:r>
+                    </a:p>
+                  </a:txBody>
+                  <a:tcPr>
+                    <a:solidFill>
+                      <a:srgbClr val="FFFFFF"/>
+                    </a:solidFill>
+                  </a:tcPr>
+                </a:tc>
+                <a:tc>
+                  <a:txBody>
+                    <a:bodyPr/>
+                    <a:lstStyle/>
+                    <a:p>
+                      <a:pPr algn="ctr"/>
+                      <a:r>
+                        <a:rPr sz="1050" b="0">
+                          <a:solidFill>
+                            <a:srgbClr val="333333"/>
+                          </a:solidFill>
+                          <a:latin typeface="Calibri"/>
+                        </a:rPr>
+                        <a:t>-1</a:t>
+                      </a:r>
+                    </a:p>
+                  </a:txBody>
+                  <a:tcPr>
+                    <a:solidFill>
+                      <a:srgbClr val="FFFFFF"/>
+                    </a:solidFill>
+                  </a:tcPr>
+                </a:tc>
+                <a:tc>
+                  <a:txBody>
+                    <a:bodyPr/>
+                    <a:lstStyle/>
+                    <a:p>
+                      <a:pPr algn="ctr"/>
+                      <a:r>
+                        <a:rPr sz="1050" b="0">
+                          <a:solidFill>
+                            <a:srgbClr val="333333"/>
+                          </a:solidFill>
+                          <a:latin typeface="Calibri"/>
+                        </a:rPr>
                         <a:t>—</a:t>
                       </a:r>
                     </a:p>
@@ -5858,75 +6143,6 @@
                           <a:latin typeface="Calibri"/>
                         </a:rPr>
                         <a:t>—</a:t>
-                      </a:r>
-                    </a:p>
-                  </a:txBody>
-                  <a:tcPr>
-                    <a:solidFill>
-                      <a:srgbClr val="FFFFFF"/>
-                    </a:solidFill>
-                  </a:tcPr>
-                </a:tc>
-                <a:tc>
-                  <a:txBody>
-                    <a:bodyPr/>
-                    <a:lstStyle/>
-                    <a:p>
-                      <a:pPr algn="ctr"/>
-                      <a:r>
-                        <a:rPr sz="1050" b="0">
-                          <a:solidFill>
-                            <a:srgbClr val="333333"/>
-                          </a:solidFill>
-                          <a:latin typeface="Calibri"/>
-                        </a:rPr>
-                        <a:t>—</a:t>
-                      </a:r>
-                    </a:p>
-                  </a:txBody>
-                  <a:tcPr>
-                    <a:solidFill>
-                      <a:srgbClr val="FFFFFF"/>
-                    </a:solidFill>
-                  </a:tcPr>
-                </a:tc>
-                <a:tc>
-                  <a:txBody>
-                    <a:bodyPr/>
-                    <a:lstStyle/>
-                    <a:p>
-                      <a:pPr algn="ctr"/>
-                      <a:r>
-                        <a:rPr sz="1050" b="0">
-                          <a:solidFill>
-                            <a:srgbClr val="333333"/>
-                          </a:solidFill>
-                          <a:latin typeface="Calibri"/>
-                        </a:rPr>
-                        <a:t>—</a:t>
-                      </a:r>
-                    </a:p>
-                  </a:txBody>
-                  <a:tcPr>
-                    <a:solidFill>
-                      <a:srgbClr val="FFFFFF"/>
-                    </a:solidFill>
-                  </a:tcPr>
-                </a:tc>
-                <a:tc>
-                  <a:txBody>
-                    <a:bodyPr/>
-                    <a:lstStyle/>
-                    <a:p>
-                      <a:pPr algn="ctr"/>
-                      <a:r>
-                        <a:rPr sz="1050" b="0">
-                          <a:solidFill>
-                            <a:srgbClr val="333333"/>
-                          </a:solidFill>
-                          <a:latin typeface="Calibri"/>
-                        </a:rPr>
-                        <a:t>+2</a:t>
                       </a:r>
                     </a:p>
                   </a:txBody>
@@ -6137,7 +6353,7 @@
                           </a:solidFill>
                           <a:latin typeface="Calibri"/>
                         </a:rPr>
-                        <a:t>Kasa</a:t>
+                        <a:t>Şura</a:t>
                       </a:r>
                     </a:p>
                   </a:txBody>
@@ -6160,99 +6376,99 @@
                           </a:solidFill>
                           <a:latin typeface="Calibri"/>
                         </a:rPr>
+                        <a:t>—</a:t>
+                      </a:r>
+                    </a:p>
+                  </a:txBody>
+                  <a:tcPr>
+                    <a:solidFill>
+                      <a:srgbClr val="FFFFFF"/>
+                    </a:solidFill>
+                  </a:tcPr>
+                </a:tc>
+                <a:tc>
+                  <a:txBody>
+                    <a:bodyPr/>
+                    <a:lstStyle/>
+                    <a:p>
+                      <a:pPr algn="ctr"/>
+                      <a:r>
+                        <a:rPr sz="1050" b="0">
+                          <a:solidFill>
+                            <a:srgbClr val="333333"/>
+                          </a:solidFill>
+                          <a:latin typeface="Calibri"/>
+                        </a:rPr>
+                        <a:t>—</a:t>
+                      </a:r>
+                    </a:p>
+                  </a:txBody>
+                  <a:tcPr>
+                    <a:solidFill>
+                      <a:srgbClr val="FFFFFF"/>
+                    </a:solidFill>
+                  </a:tcPr>
+                </a:tc>
+                <a:tc>
+                  <a:txBody>
+                    <a:bodyPr/>
+                    <a:lstStyle/>
+                    <a:p>
+                      <a:pPr algn="ctr"/>
+                      <a:r>
+                        <a:rPr sz="1050" b="0">
+                          <a:solidFill>
+                            <a:srgbClr val="333333"/>
+                          </a:solidFill>
+                          <a:latin typeface="Calibri"/>
+                        </a:rPr>
+                        <a:t>—</a:t>
+                      </a:r>
+                    </a:p>
+                  </a:txBody>
+                  <a:tcPr>
+                    <a:solidFill>
+                      <a:srgbClr val="FFFFFF"/>
+                    </a:solidFill>
+                  </a:tcPr>
+                </a:tc>
+                <a:tc>
+                  <a:txBody>
+                    <a:bodyPr/>
+                    <a:lstStyle/>
+                    <a:p>
+                      <a:pPr algn="ctr"/>
+                      <a:r>
+                        <a:rPr sz="1050" b="0">
+                          <a:solidFill>
+                            <a:srgbClr val="333333"/>
+                          </a:solidFill>
+                          <a:latin typeface="Calibri"/>
+                        </a:rPr>
+                        <a:t>—</a:t>
+                      </a:r>
+                    </a:p>
+                  </a:txBody>
+                  <a:tcPr>
+                    <a:solidFill>
+                      <a:srgbClr val="FFFFFF"/>
+                    </a:solidFill>
+                  </a:tcPr>
+                </a:tc>
+                <a:tc>
+                  <a:txBody>
+                    <a:bodyPr/>
+                    <a:lstStyle/>
+                    <a:p>
+                      <a:pPr algn="ctr"/>
+                      <a:r>
+                        <a:rPr sz="1050" b="0">
+                          <a:solidFill>
+                            <a:srgbClr val="333333"/>
+                          </a:solidFill>
+                          <a:latin typeface="Calibri"/>
+                        </a:rPr>
                         <a:t>+2</a:t>
-                      </a:r>
-                    </a:p>
-                  </a:txBody>
-                  <a:tcPr>
-                    <a:solidFill>
-                      <a:srgbClr val="FFFFFF"/>
-                    </a:solidFill>
-                  </a:tcPr>
-                </a:tc>
-                <a:tc>
-                  <a:txBody>
-                    <a:bodyPr/>
-                    <a:lstStyle/>
-                    <a:p>
-                      <a:pPr algn="ctr"/>
-                      <a:r>
-                        <a:rPr sz="1050" b="0">
-                          <a:solidFill>
-                            <a:srgbClr val="333333"/>
-                          </a:solidFill>
-                          <a:latin typeface="Calibri"/>
-                        </a:rPr>
-                        <a:t>+1</a:t>
-                      </a:r>
-                    </a:p>
-                  </a:txBody>
-                  <a:tcPr>
-                    <a:solidFill>
-                      <a:srgbClr val="FFFFFF"/>
-                    </a:solidFill>
-                  </a:tcPr>
-                </a:tc>
-                <a:tc>
-                  <a:txBody>
-                    <a:bodyPr/>
-                    <a:lstStyle/>
-                    <a:p>
-                      <a:pPr algn="ctr"/>
-                      <a:r>
-                        <a:rPr sz="1050" b="0">
-                          <a:solidFill>
-                            <a:srgbClr val="333333"/>
-                          </a:solidFill>
-                          <a:latin typeface="Calibri"/>
-                        </a:rPr>
-                        <a:t>-1</a:t>
-                      </a:r>
-                    </a:p>
-                  </a:txBody>
-                  <a:tcPr>
-                    <a:solidFill>
-                      <a:srgbClr val="FFFFFF"/>
-                    </a:solidFill>
-                  </a:tcPr>
-                </a:tc>
-                <a:tc>
-                  <a:txBody>
-                    <a:bodyPr/>
-                    <a:lstStyle/>
-                    <a:p>
-                      <a:pPr algn="ctr"/>
-                      <a:r>
-                        <a:rPr sz="1050" b="0">
-                          <a:solidFill>
-                            <a:srgbClr val="333333"/>
-                          </a:solidFill>
-                          <a:latin typeface="Calibri"/>
-                        </a:rPr>
-                        <a:t>—</a:t>
-                      </a:r>
-                    </a:p>
-                  </a:txBody>
-                  <a:tcPr>
-                    <a:solidFill>
-                      <a:srgbClr val="FFFFFF"/>
-                    </a:solidFill>
-                  </a:tcPr>
-                </a:tc>
-                <a:tc>
-                  <a:txBody>
-                    <a:bodyPr/>
-                    <a:lstStyle/>
-                    <a:p>
-                      <a:pPr algn="ctr"/>
-                      <a:r>
-                        <a:rPr sz="1050" b="0">
-                          <a:solidFill>
-                            <a:srgbClr val="333333"/>
-                          </a:solidFill>
-                          <a:latin typeface="Calibri"/>
-                        </a:rPr>
-                        <a:t>—</a:t>
                       </a:r>
                     </a:p>
                   </a:txBody>
@@ -6463,7 +6679,7 @@
                           </a:solidFill>
                           <a:latin typeface="Calibri"/>
                         </a:rPr>
-                        <a:t>Etkinlik</a:t>
+                        <a:t>Kültür</a:t>
                       </a:r>
                     </a:p>
                   </a:txBody>
@@ -6486,76 +6702,76 @@
                           </a:solidFill>
                           <a:latin typeface="Calibri"/>
                         </a:rPr>
+                        <a:t>+1</a:t>
+                      </a:r>
+                    </a:p>
+                  </a:txBody>
+                  <a:tcPr>
+                    <a:solidFill>
+                      <a:srgbClr val="FFFFFF"/>
+                    </a:solidFill>
+                  </a:tcPr>
+                </a:tc>
+                <a:tc>
+                  <a:txBody>
+                    <a:bodyPr/>
+                    <a:lstStyle/>
+                    <a:p>
+                      <a:pPr algn="ctr"/>
+                      <a:r>
+                        <a:rPr sz="1050" b="0">
+                          <a:solidFill>
+                            <a:srgbClr val="333333"/>
+                          </a:solidFill>
+                          <a:latin typeface="Calibri"/>
+                        </a:rPr>
+                        <a:t>+1</a:t>
+                      </a:r>
+                    </a:p>
+                  </a:txBody>
+                  <a:tcPr>
+                    <a:solidFill>
+                      <a:srgbClr val="FFFFFF"/>
+                    </a:solidFill>
+                  </a:tcPr>
+                </a:tc>
+                <a:tc>
+                  <a:txBody>
+                    <a:bodyPr/>
+                    <a:lstStyle/>
+                    <a:p>
+                      <a:pPr algn="ctr"/>
+                      <a:r>
+                        <a:rPr sz="1050" b="0">
+                          <a:solidFill>
+                            <a:srgbClr val="333333"/>
+                          </a:solidFill>
+                          <a:latin typeface="Calibri"/>
+                        </a:rPr>
+                        <a:t>-1</a:t>
+                      </a:r>
+                    </a:p>
+                  </a:txBody>
+                  <a:tcPr>
+                    <a:solidFill>
+                      <a:srgbClr val="FFFFFF"/>
+                    </a:solidFill>
+                  </a:tcPr>
+                </a:tc>
+                <a:tc>
+                  <a:txBody>
+                    <a:bodyPr/>
+                    <a:lstStyle/>
+                    <a:p>
+                      <a:pPr algn="ctr"/>
+                      <a:r>
+                        <a:rPr sz="1050" b="0">
+                          <a:solidFill>
+                            <a:srgbClr val="333333"/>
+                          </a:solidFill>
+                          <a:latin typeface="Calibri"/>
+                        </a:rPr>
                         <a:t>0</a:t>
-                      </a:r>
-                    </a:p>
-                  </a:txBody>
-                  <a:tcPr>
-                    <a:solidFill>
-                      <a:srgbClr val="FFFFFF"/>
-                    </a:solidFill>
-                  </a:tcPr>
-                </a:tc>
-                <a:tc>
-                  <a:txBody>
-                    <a:bodyPr/>
-                    <a:lstStyle/>
-                    <a:p>
-                      <a:pPr algn="ctr"/>
-                      <a:r>
-                        <a:rPr sz="1050" b="0">
-                          <a:solidFill>
-                            <a:srgbClr val="333333"/>
-                          </a:solidFill>
-                          <a:latin typeface="Calibri"/>
-                        </a:rPr>
-                        <a:t>+1</a:t>
-                      </a:r>
-                    </a:p>
-                  </a:txBody>
-                  <a:tcPr>
-                    <a:solidFill>
-                      <a:srgbClr val="FFFFFF"/>
-                    </a:solidFill>
-                  </a:tcPr>
-                </a:tc>
-                <a:tc>
-                  <a:txBody>
-                    <a:bodyPr/>
-                    <a:lstStyle/>
-                    <a:p>
-                      <a:pPr algn="ctr"/>
-                      <a:r>
-                        <a:rPr sz="1050" b="0">
-                          <a:solidFill>
-                            <a:srgbClr val="333333"/>
-                          </a:solidFill>
-                          <a:latin typeface="Calibri"/>
-                        </a:rPr>
-                        <a:t>0</a:t>
-                      </a:r>
-                    </a:p>
-                  </a:txBody>
-                  <a:tcPr>
-                    <a:solidFill>
-                      <a:srgbClr val="FFFFFF"/>
-                    </a:solidFill>
-                  </a:tcPr>
-                </a:tc>
-                <a:tc>
-                  <a:txBody>
-                    <a:bodyPr/>
-                    <a:lstStyle/>
-                    <a:p>
-                      <a:pPr algn="ctr"/>
-                      <a:r>
-                        <a:rPr sz="1050" b="0">
-                          <a:solidFill>
-                            <a:srgbClr val="333333"/>
-                          </a:solidFill>
-                          <a:latin typeface="Calibri"/>
-                        </a:rPr>
-                        <a:t>—</a:t>
                       </a:r>
                     </a:p>
                   </a:txBody>
@@ -6626,7 +6842,7 @@
                           </a:solidFill>
                           <a:latin typeface="Calibri"/>
                         </a:rPr>
-                        <a:t>Kültür</a:t>
+                        <a:t>Etkinlik</a:t>
                       </a:r>
                     </a:p>
                   </a:txBody>
@@ -6649,6 +6865,29 @@
                           </a:solidFill>
                           <a:latin typeface="Calibri"/>
                         </a:rPr>
+                        <a:t>0</a:t>
+                      </a:r>
+                    </a:p>
+                  </a:txBody>
+                  <a:tcPr>
+                    <a:solidFill>
+                      <a:srgbClr val="F2F2F2"/>
+                    </a:solidFill>
+                  </a:tcPr>
+                </a:tc>
+                <a:tc>
+                  <a:txBody>
+                    <a:bodyPr/>
+                    <a:lstStyle/>
+                    <a:p>
+                      <a:pPr algn="ctr"/>
+                      <a:r>
+                        <a:rPr sz="1050" b="0">
+                          <a:solidFill>
+                            <a:srgbClr val="333333"/>
+                          </a:solidFill>
+                          <a:latin typeface="Calibri"/>
+                        </a:rPr>
                         <a:t>+1</a:t>
                       </a:r>
                     </a:p>
@@ -6672,7 +6911,7 @@
                           </a:solidFill>
                           <a:latin typeface="Calibri"/>
                         </a:rPr>
-                        <a:t>+1</a:t>
+                        <a:t>0</a:t>
                       </a:r>
                     </a:p>
                   </a:txBody>
@@ -6695,30 +6934,7 @@
                           </a:solidFill>
                           <a:latin typeface="Calibri"/>
                         </a:rPr>
-                        <a:t>-1</a:t>
-                      </a:r>
-                    </a:p>
-                  </a:txBody>
-                  <a:tcPr>
-                    <a:solidFill>
-                      <a:srgbClr val="F2F2F2"/>
-                    </a:solidFill>
-                  </a:tcPr>
-                </a:tc>
-                <a:tc>
-                  <a:txBody>
-                    <a:bodyPr/>
-                    <a:lstStyle/>
-                    <a:p>
-                      <a:pPr algn="ctr"/>
-                      <a:r>
-                        <a:rPr sz="1050" b="0">
-                          <a:solidFill>
-                            <a:srgbClr val="333333"/>
-                          </a:solidFill>
-                          <a:latin typeface="Calibri"/>
-                        </a:rPr>
-                        <a:t>0</a:t>
+                        <a:t>—</a:t>
                       </a:r>
                     </a:p>
                   </a:txBody>
@@ -6789,7 +7005,7 @@
                           </a:solidFill>
                           <a:latin typeface="Calibri"/>
                         </a:rPr>
-                        <a:t>İdari İşler</a:t>
+                        <a:t>Mağaza</a:t>
                       </a:r>
                     </a:p>
                   </a:txBody>
@@ -6812,7 +7028,7 @@
                           </a:solidFill>
                           <a:latin typeface="Calibri"/>
                         </a:rPr>
-                        <a:t>+1</a:t>
+                        <a:t>0</a:t>
                       </a:r>
                     </a:p>
                   </a:txBody>
@@ -6835,7 +7051,7 @@
                           </a:solidFill>
                           <a:latin typeface="Calibri"/>
                         </a:rPr>
-                        <a:t>-1</a:t>
+                        <a:t>0</a:t>
                       </a:r>
                     </a:p>
                   </a:txBody>
@@ -6881,7 +7097,7 @@
                           </a:solidFill>
                           <a:latin typeface="Calibri"/>
                         </a:rPr>
-                        <a:t>—</a:t>
+                        <a:t>0</a:t>
                       </a:r>
                     </a:p>
                   </a:txBody>
@@ -6952,7 +7168,7 @@
                           </a:solidFill>
                           <a:latin typeface="Calibri"/>
                         </a:rPr>
-                        <a:t>MAL Kabul</a:t>
+                        <a:t>İdari İşler</a:t>
                       </a:r>
                     </a:p>
                   </a:txBody>
@@ -6998,6 +7214,29 @@
                           </a:solidFill>
                           <a:latin typeface="Calibri"/>
                         </a:rPr>
+                        <a:t>-1</a:t>
+                      </a:r>
+                    </a:p>
+                  </a:txBody>
+                  <a:tcPr>
+                    <a:solidFill>
+                      <a:srgbClr val="F2F2F2"/>
+                    </a:solidFill>
+                  </a:tcPr>
+                </a:tc>
+                <a:tc>
+                  <a:txBody>
+                    <a:bodyPr/>
+                    <a:lstStyle/>
+                    <a:p>
+                      <a:pPr algn="ctr"/>
+                      <a:r>
+                        <a:rPr sz="1050" b="0">
+                          <a:solidFill>
+                            <a:srgbClr val="333333"/>
+                          </a:solidFill>
+                          <a:latin typeface="Calibri"/>
+                        </a:rPr>
                         <a:t>0</a:t>
                       </a:r>
                     </a:p>
@@ -7021,30 +7260,7 @@
                           </a:solidFill>
                           <a:latin typeface="Calibri"/>
                         </a:rPr>
-                        <a:t>-1</a:t>
-                      </a:r>
-                    </a:p>
-                  </a:txBody>
-                  <a:tcPr>
-                    <a:solidFill>
-                      <a:srgbClr val="F2F2F2"/>
-                    </a:solidFill>
-                  </a:tcPr>
-                </a:tc>
-                <a:tc>
-                  <a:txBody>
-                    <a:bodyPr/>
-                    <a:lstStyle/>
-                    <a:p>
-                      <a:pPr algn="ctr"/>
-                      <a:r>
-                        <a:rPr sz="1050" b="0">
-                          <a:solidFill>
-                            <a:srgbClr val="333333"/>
-                          </a:solidFill>
-                          <a:latin typeface="Calibri"/>
-                        </a:rPr>
-                        <a:t>0</a:t>
+                        <a:t>—</a:t>
                       </a:r>
                     </a:p>
                   </a:txBody>
@@ -7115,7 +7331,7 @@
                           </a:solidFill>
                           <a:latin typeface="Calibri"/>
                         </a:rPr>
-                        <a:t>Mağaza</a:t>
+                        <a:t>MAL Kabul</a:t>
                       </a:r>
                     </a:p>
                   </a:txBody>
@@ -7138,6 +7354,29 @@
                           </a:solidFill>
                           <a:latin typeface="Calibri"/>
                         </a:rPr>
+                        <a:t>+1</a:t>
+                      </a:r>
+                    </a:p>
+                  </a:txBody>
+                  <a:tcPr>
+                    <a:solidFill>
+                      <a:srgbClr val="FFFFFF"/>
+                    </a:solidFill>
+                  </a:tcPr>
+                </a:tc>
+                <a:tc>
+                  <a:txBody>
+                    <a:bodyPr/>
+                    <a:lstStyle/>
+                    <a:p>
+                      <a:pPr algn="ctr"/>
+                      <a:r>
+                        <a:rPr sz="1050" b="0">
+                          <a:solidFill>
+                            <a:srgbClr val="333333"/>
+                          </a:solidFill>
+                          <a:latin typeface="Calibri"/>
+                        </a:rPr>
                         <a:t>0</a:t>
                       </a:r>
                     </a:p>
@@ -7161,30 +7400,7 @@
                           </a:solidFill>
                           <a:latin typeface="Calibri"/>
                         </a:rPr>
-                        <a:t>0</a:t>
-                      </a:r>
-                    </a:p>
-                  </a:txBody>
-                  <a:tcPr>
-                    <a:solidFill>
-                      <a:srgbClr val="FFFFFF"/>
-                    </a:solidFill>
-                  </a:tcPr>
-                </a:tc>
-                <a:tc>
-                  <a:txBody>
-                    <a:bodyPr/>
-                    <a:lstStyle/>
-                    <a:p>
-                      <a:pPr algn="ctr"/>
-                      <a:r>
-                        <a:rPr sz="1050" b="0">
-                          <a:solidFill>
-                            <a:srgbClr val="333333"/>
-                          </a:solidFill>
-                          <a:latin typeface="Calibri"/>
-                        </a:rPr>
-                        <a:t>0</a:t>
+                        <a:t>-1</a:t>
                       </a:r>
                     </a:p>
                   </a:txBody>
@@ -7504,7 +7720,7 @@
                 </a:solidFill>
                 <a:latin typeface="Calibri"/>
               </a:rPr>
-              <a:t>* Kapsam: beş mağazanın tamamı — FSM · Özlüce · İst. Yolu · Heykel · Şura.</a:t>
+              <a:t>* Kapsam: beş mağazanın tamamı — FSM · Özlüce · İst. Yolu · Heykel · Şura · Ölçüm noktaları: 30.06 tabanı ve 31.08 kesimi (tarih aralığı değil, o gün fiilen çalışan kişi)</a:t>
             </a:r>
           </a:p>
         </p:txBody>
@@ -8600,7 +8816,7 @@
                 </a:solidFill>
                 <a:latin typeface="Calibri"/>
               </a:rPr>
-              <a:t>* Kapsam: üç POS mağazası — FSM · Özlüce · İst. Yolu. Heykel ve Şura POS raporlamasında olmadığı için iş hacmi ölçümlerine girmez.</a:t>
+              <a:t>* Kapsam: üç POS mağazası — FSM · Özlüce · İst. Yolu (Heykel ve Şura POS raporlamasında yok) · Dönem: 01.07 – 25.08.2025 (2025) · 07.07 – 31.08.2026 (2026), her iki yıl 56 gün, okul açılışına hizalı</a:t>
             </a:r>
           </a:p>
         </p:txBody>
@@ -9899,7 +10115,7 @@
                 </a:solidFill>
                 <a:latin typeface="Calibri"/>
               </a:rPr>
-              <a:t>* Kapsam: üç POS mağazası — FSM · Özlüce · İst. Yolu. Heykel ve Şura POS raporlamasında olmadığı için iş hacmi ölçümlerine girmez.</a:t>
+              <a:t>* Kapsam: üç POS mağazası — FSM · Özlüce · İst. Yolu (Heykel ve Şura POS raporlamasında yok) · Dönem: 01.07 – 25.08.2025 (2025) · 07.07 – 31.08.2026 (2026), her iki yıl 56 gün, okul açılışına hizalı</a:t>
             </a:r>
           </a:p>
         </p:txBody>
@@ -9991,7 +10207,7 @@
           <a:lstStyle/>
           <a:p>
             <a:r>
-              <a:t>Yöntem ve Açıklamalar</a:t>
+              <a:t>Takvim Kayması: Ağustos ve Eylül</a:t>
             </a:r>
           </a:p>
         </p:txBody>
@@ -10004,8 +10220,8 @@
         </p:nvSpPr>
         <p:spPr>
           <a:xfrm>
-            <a:off x="548640" y="1325880"/>
-            <a:ext cx="11018520" cy="987552"/>
+            <a:off x="548640" y="1371600"/>
+            <a:ext cx="3566160" cy="1600200"/>
           </a:xfrm>
           <a:prstGeom prst="roundRect">
             <a:avLst/>
@@ -10050,14 +10266,14 @@
         </p:nvSpPr>
         <p:spPr>
           <a:xfrm>
-            <a:off x="548640" y="1325880"/>
-            <a:ext cx="11018520" cy="64008"/>
+            <a:off x="548640" y="1371600"/>
+            <a:ext cx="3566160" cy="64008"/>
           </a:xfrm>
           <a:prstGeom prst="rect">
             <a:avLst/>
           </a:prstGeom>
           <a:solidFill>
-            <a:srgbClr val="E30622"/>
+            <a:srgbClr val="9A9A9A"/>
           </a:solidFill>
           <a:ln>
             <a:noFill/>
@@ -10086,40 +10302,16 @@
           </a:p>
         </p:txBody>
       </p:sp>
-      <p:pic>
-        <p:nvPicPr>
-          <p:cNvPr id="5" name="Picture 4" descr="circle-check.png"/>
-          <p:cNvPicPr>
-            <a:picLocks noChangeAspect="1"/>
-          </p:cNvPicPr>
-          <p:nvPr/>
-        </p:nvPicPr>
-        <p:blipFill>
-          <a:blip r:embed="rId3"/>
-          <a:stretch>
-            <a:fillRect/>
-          </a:stretch>
-        </p:blipFill>
-        <p:spPr>
-          <a:xfrm>
-            <a:off x="777240" y="1481328"/>
-            <a:ext cx="274320" cy="274320"/>
-          </a:xfrm>
-          <a:prstGeom prst="rect">
-            <a:avLst/>
-          </a:prstGeom>
-        </p:spPr>
-      </p:pic>
-      <p:sp>
-        <p:nvSpPr>
-          <p:cNvPr id="6" name="TextBox 5"/>
+      <p:sp>
+        <p:nvSpPr>
+          <p:cNvPr id="5" name="TextBox 4"/>
           <p:cNvSpPr txBox="1"/>
           <p:nvPr/>
         </p:nvSpPr>
         <p:spPr>
           <a:xfrm>
-            <a:off x="1170432" y="1417320"/>
-            <a:ext cx="10058400" cy="329184"/>
+            <a:off x="749808" y="1572768"/>
+            <a:ext cx="3200400" cy="274320"/>
           </a:xfrm>
           <a:prstGeom prst="rect">
             <a:avLst/>
@@ -10138,27 +10330,27 @@
               </a:lnSpc>
             </a:pPr>
             <a:r>
-              <a:rPr sz="1300" b="1">
+              <a:rPr sz="1000" b="1">
                 <a:solidFill>
-                  <a:srgbClr val="A6001A"/>
+                  <a:srgbClr val="6E6E6E"/>
                 </a:solidFill>
                 <a:latin typeface="Calibri"/>
               </a:rPr>
-              <a:t>Büyüme kurumsal kanaldan mı geldi?</a:t>
-            </a:r>
-          </a:p>
-        </p:txBody>
-      </p:sp>
-      <p:sp>
-        <p:nvSpPr>
-          <p:cNvPr id="7" name="TextBox 6"/>
+              <a:t>AĞUSTOS · GERÇEKLEŞEN</a:t>
+            </a:r>
+          </a:p>
+        </p:txBody>
+      </p:sp>
+      <p:sp>
+        <p:nvSpPr>
+          <p:cNvPr id="6" name="TextBox 5"/>
           <p:cNvSpPr txBox="1"/>
           <p:nvPr/>
         </p:nvSpPr>
         <p:spPr>
           <a:xfrm>
-            <a:off x="1170432" y="1737360"/>
-            <a:ext cx="10058400" cy="530352"/>
+            <a:off x="749808" y="1847088"/>
+            <a:ext cx="3200400" cy="640080"/>
           </a:xfrm>
           <a:prstGeom prst="rect">
             <a:avLst/>
@@ -10173,17 +10365,56 @@
           <a:p>
             <a:pPr algn="l">
               <a:lnSpc>
-                <a:spcPct val="108000"/>
+                <a:spcPct val="100000"/>
               </a:lnSpc>
             </a:pPr>
             <a:r>
-              <a:rPr sz="1100" b="0">
+              <a:rPr sz="3000" b="1">
                 <a:solidFill>
-                  <a:srgbClr val="333333"/>
+                  <a:srgbClr val="9A9A9A"/>
                 </a:solidFill>
                 <a:latin typeface="Calibri"/>
               </a:rPr>
-              <a:t>Tersi: Sınav Okulları küçüldü. Ocak–Ağustos cirosu 136,1 → 105,6 milyon TL (−%22,4). Mağaza tarafı +%54,9 büyüdü — büyümenin tamamı raftan geldi.</a:t>
+              <a:t>+%5,5</a:t>
+            </a:r>
+          </a:p>
+        </p:txBody>
+      </p:sp>
+      <p:sp>
+        <p:nvSpPr>
+          <p:cNvPr id="7" name="TextBox 6"/>
+          <p:cNvSpPr txBox="1"/>
+          <p:nvPr/>
+        </p:nvSpPr>
+        <p:spPr>
+          <a:xfrm>
+            <a:off x="749808" y="2505456"/>
+            <a:ext cx="3200400" cy="411480"/>
+          </a:xfrm>
+          <a:prstGeom prst="rect">
+            <a:avLst/>
+          </a:prstGeom>
+          <a:noFill/>
+        </p:spPr>
+        <p:txBody>
+          <a:bodyPr wrap="square" anchor="t">
+            <a:spAutoFit/>
+          </a:bodyPr>
+          <a:lstStyle/>
+          <a:p>
+            <a:pPr algn="l">
+              <a:lnSpc>
+                <a:spcPct val="100000"/>
+              </a:lnSpc>
+            </a:pPr>
+            <a:r>
+              <a:rPr sz="1050" b="0">
+                <a:solidFill>
+                  <a:srgbClr val="6E6E6E"/>
+                </a:solidFill>
+                <a:latin typeface="Calibri"/>
+              </a:rPr>
+              <a:t>458.509 → 483.659 adet</a:t>
             </a:r>
           </a:p>
         </p:txBody>
@@ -10196,8 +10427,8 @@
         </p:nvSpPr>
         <p:spPr>
           <a:xfrm>
-            <a:off x="548640" y="2404872"/>
-            <a:ext cx="11018520" cy="987552"/>
+            <a:off x="4279392" y="1371600"/>
+            <a:ext cx="3566160" cy="1600200"/>
           </a:xfrm>
           <a:prstGeom prst="roundRect">
             <a:avLst/>
@@ -10242,14 +10473,14 @@
         </p:nvSpPr>
         <p:spPr>
           <a:xfrm>
-            <a:off x="548640" y="2404872"/>
-            <a:ext cx="11018520" cy="64008"/>
+            <a:off x="4279392" y="1371600"/>
+            <a:ext cx="3566160" cy="64008"/>
           </a:xfrm>
           <a:prstGeom prst="rect">
             <a:avLst/>
           </a:prstGeom>
           <a:solidFill>
-            <a:srgbClr val="C0142B"/>
+            <a:srgbClr val="A6001A"/>
           </a:solidFill>
           <a:ln>
             <a:noFill/>
@@ -10278,40 +10509,16 @@
           </a:p>
         </p:txBody>
       </p:sp>
-      <p:pic>
-        <p:nvPicPr>
-          <p:cNvPr id="10" name="Picture 9" descr="circle-check.png"/>
-          <p:cNvPicPr>
-            <a:picLocks noChangeAspect="1"/>
-          </p:cNvPicPr>
-          <p:nvPr/>
-        </p:nvPicPr>
-        <p:blipFill>
-          <a:blip r:embed="rId3"/>
-          <a:stretch>
-            <a:fillRect/>
-          </a:stretch>
-        </p:blipFill>
-        <p:spPr>
-          <a:xfrm>
-            <a:off x="777240" y="2560320"/>
-            <a:ext cx="274320" cy="274320"/>
-          </a:xfrm>
-          <a:prstGeom prst="rect">
-            <a:avLst/>
-          </a:prstGeom>
-        </p:spPr>
-      </p:pic>
-      <p:sp>
-        <p:nvSpPr>
-          <p:cNvPr id="11" name="TextBox 10"/>
+      <p:sp>
+        <p:nvSpPr>
+          <p:cNvPr id="10" name="TextBox 9"/>
           <p:cNvSpPr txBox="1"/>
           <p:nvPr/>
         </p:nvSpPr>
         <p:spPr>
           <a:xfrm>
-            <a:off x="1170432" y="2496312"/>
-            <a:ext cx="10058400" cy="329184"/>
+            <a:off x="4480559" y="1572768"/>
+            <a:ext cx="3200400" cy="274320"/>
           </a:xfrm>
           <a:prstGeom prst="rect">
             <a:avLst/>
@@ -10330,13 +10537,52 @@
               </a:lnSpc>
             </a:pPr>
             <a:r>
-              <a:rPr sz="1300" b="1">
+              <a:rPr sz="1000" b="1">
+                <a:solidFill>
+                  <a:srgbClr val="6E6E6E"/>
+                </a:solidFill>
+                <a:latin typeface="Calibri"/>
+              </a:rPr>
+              <a:t>AĞUSTOS · KAYMA OLMASAYDI</a:t>
+            </a:r>
+          </a:p>
+        </p:txBody>
+      </p:sp>
+      <p:sp>
+        <p:nvSpPr>
+          <p:cNvPr id="11" name="TextBox 10"/>
+          <p:cNvSpPr txBox="1"/>
+          <p:nvPr/>
+        </p:nvSpPr>
+        <p:spPr>
+          <a:xfrm>
+            <a:off x="4480559" y="1847088"/>
+            <a:ext cx="3200400" cy="640080"/>
+          </a:xfrm>
+          <a:prstGeom prst="rect">
+            <a:avLst/>
+          </a:prstGeom>
+          <a:noFill/>
+        </p:spPr>
+        <p:txBody>
+          <a:bodyPr wrap="square" anchor="t">
+            <a:spAutoFit/>
+          </a:bodyPr>
+          <a:lstStyle/>
+          <a:p>
+            <a:pPr algn="l">
+              <a:lnSpc>
+                <a:spcPct val="100000"/>
+              </a:lnSpc>
+            </a:pPr>
+            <a:r>
+              <a:rPr sz="2600" b="1">
                 <a:solidFill>
                   <a:srgbClr val="A6001A"/>
                 </a:solidFill>
                 <a:latin typeface="Calibri"/>
               </a:rPr>
-              <a:t>Ciro artışı enflasyon kaynaklı mı?</a:t>
+              <a:t>617.297</a:t>
             </a:r>
           </a:p>
         </p:txBody>
@@ -10349,8 +10595,8 @@
         </p:nvSpPr>
         <p:spPr>
           <a:xfrm>
-            <a:off x="1170432" y="2816352"/>
-            <a:ext cx="10058400" cy="530352"/>
+            <a:off x="4480559" y="2505456"/>
+            <a:ext cx="3200400" cy="411480"/>
           </a:xfrm>
           <a:prstGeom prst="rect">
             <a:avLst/>
@@ -10365,17 +10611,17 @@
           <a:p>
             <a:pPr algn="l">
               <a:lnSpc>
-                <a:spcPct val="108000"/>
+                <a:spcPct val="100000"/>
               </a:lnSpc>
             </a:pPr>
             <a:r>
-              <a:rPr sz="1100" b="0">
+              <a:rPr sz="1050" b="0">
                 <a:solidFill>
-                  <a:srgbClr val="333333"/>
+                  <a:srgbClr val="6E6E6E"/>
                 </a:solidFill>
                 <a:latin typeface="Calibri"/>
               </a:rPr>
-              <a:t>Kısmen doğru: eşleşen ürünlerde fiyat endeksi +%19,8. Bu yüzden savunma ciroya değil ADEDE dayanıyor: ürün adedi +%34,9 ve adet fiyattan etkilenmez.</a:t>
+              <a:t>adet tahmini · 102,9 M TL</a:t>
             </a:r>
           </a:p>
         </p:txBody>
@@ -10388,8 +10634,8 @@
         </p:nvSpPr>
         <p:spPr>
           <a:xfrm>
-            <a:off x="548640" y="3483863"/>
-            <a:ext cx="11018520" cy="987552"/>
+            <a:off x="8001000" y="1371600"/>
+            <a:ext cx="3566160" cy="1600200"/>
           </a:xfrm>
           <a:prstGeom prst="roundRect">
             <a:avLst/>
@@ -10434,14 +10680,14 @@
         </p:nvSpPr>
         <p:spPr>
           <a:xfrm>
-            <a:off x="548640" y="3483863"/>
-            <a:ext cx="11018520" cy="64008"/>
+            <a:off x="8001000" y="1371600"/>
+            <a:ext cx="3566160" cy="64008"/>
           </a:xfrm>
           <a:prstGeom prst="rect">
             <a:avLst/>
           </a:prstGeom>
           <a:solidFill>
-            <a:srgbClr val="E30622"/>
+            <a:srgbClr val="A6001A"/>
           </a:solidFill>
           <a:ln>
             <a:noFill/>
@@ -10470,40 +10716,16 @@
           </a:p>
         </p:txBody>
       </p:sp>
-      <p:pic>
-        <p:nvPicPr>
-          <p:cNvPr id="15" name="Picture 14" descr="circle-check.png"/>
-          <p:cNvPicPr>
-            <a:picLocks noChangeAspect="1"/>
-          </p:cNvPicPr>
-          <p:nvPr/>
-        </p:nvPicPr>
-        <p:blipFill>
-          <a:blip r:embed="rId3"/>
-          <a:stretch>
-            <a:fillRect/>
-          </a:stretch>
-        </p:blipFill>
-        <p:spPr>
-          <a:xfrm>
-            <a:off x="777240" y="3639311"/>
-            <a:ext cx="274320" cy="274320"/>
-          </a:xfrm>
-          <a:prstGeom prst="rect">
-            <a:avLst/>
-          </a:prstGeom>
-        </p:spPr>
-      </p:pic>
-      <p:sp>
-        <p:nvSpPr>
-          <p:cNvPr id="16" name="TextBox 15"/>
+      <p:sp>
+        <p:nvSpPr>
+          <p:cNvPr id="15" name="TextBox 14"/>
           <p:cNvSpPr txBox="1"/>
           <p:nvPr/>
         </p:nvSpPr>
         <p:spPr>
           <a:xfrm>
-            <a:off x="1170432" y="3575303"/>
-            <a:ext cx="10058400" cy="329184"/>
+            <a:off x="8202168" y="1572768"/>
+            <a:ext cx="3200400" cy="274320"/>
           </a:xfrm>
           <a:prstGeom prst="rect">
             <a:avLst/>
@@ -10522,13 +10744,52 @@
               </a:lnSpc>
             </a:pPr>
             <a:r>
-              <a:rPr sz="1300" b="1">
+              <a:rPr sz="1000" b="1">
+                <a:solidFill>
+                  <a:srgbClr val="6E6E6E"/>
+                </a:solidFill>
+                <a:latin typeface="Calibri"/>
+              </a:rPr>
+              <a:t>EYLÜL'E KAYAN</a:t>
+            </a:r>
+          </a:p>
+        </p:txBody>
+      </p:sp>
+      <p:sp>
+        <p:nvSpPr>
+          <p:cNvPr id="16" name="TextBox 15"/>
+          <p:cNvSpPr txBox="1"/>
+          <p:nvPr/>
+        </p:nvSpPr>
+        <p:spPr>
+          <a:xfrm>
+            <a:off x="8202168" y="1847088"/>
+            <a:ext cx="3200400" cy="640080"/>
+          </a:xfrm>
+          <a:prstGeom prst="rect">
+            <a:avLst/>
+          </a:prstGeom>
+          <a:noFill/>
+        </p:spPr>
+        <p:txBody>
+          <a:bodyPr wrap="square" anchor="t">
+            <a:spAutoFit/>
+          </a:bodyPr>
+          <a:lstStyle/>
+          <a:p>
+            <a:pPr algn="l">
+              <a:lnSpc>
+                <a:spcPct val="100000"/>
+              </a:lnSpc>
+            </a:pPr>
+            <a:r>
+              <a:rPr sz="2600" b="1">
                 <a:solidFill>
                   <a:srgbClr val="A6001A"/>
                 </a:solidFill>
                 <a:latin typeface="Calibri"/>
               </a:rPr>
-              <a:t>Kasa sistemi değişti, karşılaştırma geçerli mi?</a:t>
+              <a:t>133.638</a:t>
             </a:r>
           </a:p>
         </p:txBody>
@@ -10541,8 +10802,8 @@
         </p:nvSpPr>
         <p:spPr>
           <a:xfrm>
-            <a:off x="1170432" y="3895344"/>
-            <a:ext cx="10058400" cy="530352"/>
+            <a:off x="8202168" y="2505456"/>
+            <a:ext cx="3200400" cy="411480"/>
           </a:xfrm>
           <a:prstGeom prst="rect">
             <a:avLst/>
@@ -10557,7 +10818,126 @@
           <a:p>
             <a:pPr algn="l">
               <a:lnSpc>
-                <a:spcPct val="108000"/>
+                <a:spcPct val="100000"/>
+              </a:lnSpc>
+            </a:pPr>
+            <a:r>
+              <a:rPr sz="1050" b="0">
+                <a:solidFill>
+                  <a:srgbClr val="6E6E6E"/>
+                </a:solidFill>
+                <a:latin typeface="Calibri"/>
+              </a:rPr>
+              <a:t>adet · 24,7 M TL</a:t>
+            </a:r>
+          </a:p>
+        </p:txBody>
+      </p:sp>
+      <p:graphicFrame>
+        <p:nvGraphicFramePr>
+          <p:cNvPr id="18" name="Chart 17"/>
+          <p:cNvGraphicFramePr>
+            <a:graphicFrameLocks noGrp="1"/>
+          </p:cNvGraphicFramePr>
+          <p:nvPr/>
+        </p:nvGraphicFramePr>
+        <p:xfrm>
+          <a:off x="548640" y="3200400"/>
+          <a:ext cx="5577840" cy="2148840"/>
+        </p:xfrm>
+        <a:graphic>
+          <a:graphicData uri="http://schemas.openxmlformats.org/drawingml/2006/chart">
+            <c:chart xmlns:c="http://schemas.openxmlformats.org/drawingml/2006/chart" r:id="rId3"/>
+          </a:graphicData>
+        </a:graphic>
+      </p:graphicFrame>
+      <p:sp>
+        <p:nvSpPr>
+          <p:cNvPr id="19" name="Rounded Rectangle 18"/>
+          <p:cNvSpPr/>
+          <p:nvPr/>
+        </p:nvSpPr>
+        <p:spPr>
+          <a:xfrm>
+            <a:off x="6400800" y="3291840"/>
+            <a:ext cx="5166360" cy="1965960"/>
+          </a:xfrm>
+          <a:prstGeom prst="roundRect">
+            <a:avLst/>
+          </a:prstGeom>
+          <a:solidFill>
+            <a:srgbClr val="F2F2F2"/>
+          </a:solidFill>
+          <a:ln w="19050">
+            <a:solidFill>
+              <a:srgbClr val="E30622"/>
+            </a:solidFill>
+          </a:ln>
+          <a:effectLst/>
+        </p:spPr>
+        <p:style>
+          <a:lnRef idx="1">
+            <a:schemeClr val="accent1"/>
+          </a:lnRef>
+          <a:fillRef idx="3">
+            <a:schemeClr val="accent1"/>
+          </a:fillRef>
+          <a:effectRef idx="2">
+            <a:schemeClr val="accent1"/>
+          </a:effectRef>
+          <a:fontRef idx="minor">
+            <a:schemeClr val="lt1"/>
+          </a:fontRef>
+        </p:style>
+        <p:txBody>
+          <a:bodyPr rtlCol="0" anchor="ctr"/>
+          <a:lstStyle/>
+          <a:p>
+            <a:pPr algn="ctr"/>
+          </a:p>
+        </p:txBody>
+      </p:sp>
+      <p:sp>
+        <p:nvSpPr>
+          <p:cNvPr id="20" name="TextBox 19"/>
+          <p:cNvSpPr txBox="1"/>
+          <p:nvPr/>
+        </p:nvSpPr>
+        <p:spPr>
+          <a:xfrm>
+            <a:off x="6629400" y="3401568"/>
+            <a:ext cx="4754880" cy="1783080"/>
+          </a:xfrm>
+          <a:prstGeom prst="rect">
+            <a:avLst/>
+          </a:prstGeom>
+          <a:noFill/>
+        </p:spPr>
+        <p:txBody>
+          <a:bodyPr wrap="square" anchor="t">
+            <a:spAutoFit/>
+          </a:bodyPr>
+          <a:lstStyle/>
+          <a:p>
+            <a:pPr algn="l">
+              <a:lnSpc>
+                <a:spcPct val="115000"/>
+              </a:lnSpc>
+            </a:pPr>
+            <a:r>
+              <a:rPr sz="1350" b="1">
+                <a:solidFill>
+                  <a:srgbClr val="A6001A"/>
+                </a:solidFill>
+                <a:latin typeface="Calibri"/>
+              </a:rPr>
+              <a:t>Eylül'de beklenen dalga</a:t>
+            </a:r>
+          </a:p>
+          <a:p>
+            <a:pPr algn="l">
+              <a:lnSpc>
+                <a:spcPct val="115000"/>
               </a:lnSpc>
             </a:pPr>
             <a:r>
@@ -10567,206 +10947,14 @@
                 </a:solidFill>
                 <a:latin typeface="Calibri"/>
               </a:rPr>
-              <a:t>Bu yüzden ölçüm POS'tan değil ERP'den (DerinSIS) alındı — iki yılda da aynı kaynak, aynı belge tipi. Temmuz 2025 kasa geçişi ölçüye girmiyor.</a:t>
-            </a:r>
-          </a:p>
-        </p:txBody>
-      </p:sp>
-      <p:sp>
-        <p:nvSpPr>
-          <p:cNvPr id="18" name="Rounded Rectangle 17"/>
-          <p:cNvSpPr/>
-          <p:nvPr/>
-        </p:nvSpPr>
-        <p:spPr>
-          <a:xfrm>
-            <a:off x="548640" y="4562855"/>
-            <a:ext cx="11018520" cy="987552"/>
-          </a:xfrm>
-          <a:prstGeom prst="roundRect">
-            <a:avLst/>
-          </a:prstGeom>
-          <a:solidFill>
-            <a:srgbClr val="FFFFFF"/>
-          </a:solidFill>
-          <a:ln w="12700">
-            <a:solidFill>
-              <a:srgbClr val="E0E0E0"/>
-            </a:solidFill>
-          </a:ln>
-          <a:effectLst/>
-        </p:spPr>
-        <p:style>
-          <a:lnRef idx="1">
-            <a:schemeClr val="accent1"/>
-          </a:lnRef>
-          <a:fillRef idx="3">
-            <a:schemeClr val="accent1"/>
-          </a:fillRef>
-          <a:effectRef idx="2">
-            <a:schemeClr val="accent1"/>
-          </a:effectRef>
-          <a:fontRef idx="minor">
-            <a:schemeClr val="lt1"/>
-          </a:fontRef>
-        </p:style>
-        <p:txBody>
-          <a:bodyPr rtlCol="0" anchor="ctr"/>
-          <a:lstStyle/>
-          <a:p>
-            <a:pPr algn="ctr"/>
-          </a:p>
-        </p:txBody>
-      </p:sp>
-      <p:sp>
-        <p:nvSpPr>
-          <p:cNvPr id="19" name="Rectangle 18"/>
-          <p:cNvSpPr/>
-          <p:nvPr/>
-        </p:nvSpPr>
-        <p:spPr>
-          <a:xfrm>
-            <a:off x="548640" y="4562855"/>
-            <a:ext cx="11018520" cy="64008"/>
-          </a:xfrm>
-          <a:prstGeom prst="rect">
-            <a:avLst/>
-          </a:prstGeom>
-          <a:solidFill>
-            <a:srgbClr val="C0142B"/>
-          </a:solidFill>
-          <a:ln>
-            <a:noFill/>
-          </a:ln>
-          <a:effectLst/>
-        </p:spPr>
-        <p:style>
-          <a:lnRef idx="1">
-            <a:schemeClr val="accent1"/>
-          </a:lnRef>
-          <a:fillRef idx="3">
-            <a:schemeClr val="accent1"/>
-          </a:fillRef>
-          <a:effectRef idx="2">
-            <a:schemeClr val="accent1"/>
-          </a:effectRef>
-          <a:fontRef idx="minor">
-            <a:schemeClr val="lt1"/>
-          </a:fontRef>
-        </p:style>
-        <p:txBody>
-          <a:bodyPr rtlCol="0" anchor="ctr"/>
-          <a:lstStyle/>
-          <a:p>
-            <a:pPr algn="ctr"/>
-          </a:p>
-        </p:txBody>
-      </p:sp>
-      <p:pic>
-        <p:nvPicPr>
-          <p:cNvPr id="20" name="Picture 19" descr="circle-check.png"/>
-          <p:cNvPicPr>
-            <a:picLocks noChangeAspect="1"/>
-          </p:cNvPicPr>
-          <p:nvPr/>
-        </p:nvPicPr>
-        <p:blipFill>
-          <a:blip r:embed="rId3"/>
-          <a:stretch>
-            <a:fillRect/>
-          </a:stretch>
-        </p:blipFill>
-        <p:spPr>
-          <a:xfrm>
-            <a:off x="777240" y="4718303"/>
-            <a:ext cx="274320" cy="274320"/>
-          </a:xfrm>
-          <a:prstGeom prst="rect">
-            <a:avLst/>
-          </a:prstGeom>
-        </p:spPr>
-      </p:pic>
+              <a:t>2025'te okul öncesi alış dalgası 27.08 - 07.09.2025 aralığındaydı: 431.358 adet · 56,9 M TL. Aynı dalga 2026'da 02.09 - 13.09.2026 aralığına denk geliyor; hizalı büyüme oranıyla 580.744 adet · 95,5 M TL beklenmektedir.</a:t>
+            </a:r>
+          </a:p>
+        </p:txBody>
+      </p:sp>
       <p:sp>
         <p:nvSpPr>
           <p:cNvPr id="21" name="TextBox 20"/>
-          <p:cNvSpPr txBox="1"/>
-          <p:nvPr/>
-        </p:nvSpPr>
-        <p:spPr>
-          <a:xfrm>
-            <a:off x="1170432" y="4654295"/>
-            <a:ext cx="10058400" cy="329184"/>
-          </a:xfrm>
-          <a:prstGeom prst="rect">
-            <a:avLst/>
-          </a:prstGeom>
-          <a:noFill/>
-        </p:spPr>
-        <p:txBody>
-          <a:bodyPr wrap="square" anchor="t">
-            <a:spAutoFit/>
-          </a:bodyPr>
-          <a:lstStyle/>
-          <a:p>
-            <a:pPr algn="l">
-              <a:lnSpc>
-                <a:spcPct val="100000"/>
-              </a:lnSpc>
-            </a:pPr>
-            <a:r>
-              <a:rPr sz="1300" b="1">
-                <a:solidFill>
-                  <a:srgbClr val="A6001A"/>
-                </a:solidFill>
-                <a:latin typeface="Calibri"/>
-              </a:rPr>
-              <a:t>Ağustos ayında ivme düşüşü var mı?</a:t>
-            </a:r>
-          </a:p>
-        </p:txBody>
-      </p:sp>
-      <p:sp>
-        <p:nvSpPr>
-          <p:cNvPr id="22" name="TextBox 21"/>
-          <p:cNvSpPr txBox="1"/>
-          <p:nvPr/>
-        </p:nvSpPr>
-        <p:spPr>
-          <a:xfrm>
-            <a:off x="1170432" y="4974336"/>
-            <a:ext cx="10058400" cy="530352"/>
-          </a:xfrm>
-          <a:prstGeom prst="rect">
-            <a:avLst/>
-          </a:prstGeom>
-          <a:noFill/>
-        </p:spPr>
-        <p:txBody>
-          <a:bodyPr wrap="square" anchor="t">
-            <a:spAutoFit/>
-          </a:bodyPr>
-          <a:lstStyle/>
-          <a:p>
-            <a:pPr algn="l">
-              <a:lnSpc>
-                <a:spcPct val="108000"/>
-              </a:lnSpc>
-            </a:pPr>
-            <a:r>
-              <a:rPr sz="1100" b="0">
-                <a:solidFill>
-                  <a:srgbClr val="333333"/>
-                </a:solidFill>
-                <a:latin typeface="Calibri"/>
-              </a:rPr>
-              <a:t>Takvim etkisi: okullar 2025'te 8 Eylül, 2026'da 14 Eylül açıldı — sezon 6 gün geriye kaydı. Açılışa hizalanınca haftalık büyüme %65–79 bandında düz seyrediyor.</a:t>
-            </a:r>
-          </a:p>
-        </p:txBody>
-      </p:sp>
-      <p:sp>
-        <p:nvSpPr>
-          <p:cNvPr id="23" name="TextBox 22"/>
           <p:cNvSpPr txBox="1"/>
           <p:nvPr/>
         </p:nvSpPr>
@@ -10798,14 +10986,14 @@
                 </a:solidFill>
                 <a:latin typeface="Calibri"/>
               </a:rPr>
-              <a:t>* Kapsam: üç POS mağazası — FSM · Özlüce · İst. Yolu. Heykel ve Şura POS raporlamasında olmadığı için iş hacmi ölçümlerine girmez.</a:t>
-            </a:r>
-          </a:p>
-        </p:txBody>
-      </p:sp>
-      <p:sp>
-        <p:nvSpPr>
-          <p:cNvPr id="24" name="TextBox 23"/>
+              <a:t>* Kapsam: üç POS mağazası — FSM · Özlüce · İst. Yolu · Hizalı pencere 01.08 – 26.08.2025 ile 07.08 – 01.09.2026 (26 gün; bugün hariç, son tam gün 01.09.2026) · Tahmin yöntemi: hizalı büyüme +%34,6, talep kaybı olmadığı varsayımıyla.</a:t>
+            </a:r>
+          </a:p>
+        </p:txBody>
+      </p:sp>
+      <p:sp>
+        <p:nvSpPr>
+          <p:cNvPr id="22" name="TextBox 21"/>
           <p:cNvSpPr txBox="1"/>
           <p:nvPr/>
         </p:nvSpPr>
@@ -10890,7 +11078,7 @@
           <a:lstStyle/>
           <a:p>
             <a:r>
-              <a:t>İyileştirme Alanı</a:t>
+              <a:t>Yöntem ve Açıklamalar</a:t>
             </a:r>
           </a:p>
         </p:txBody>
@@ -10903,8 +11091,8 @@
         </p:nvSpPr>
         <p:spPr>
           <a:xfrm>
-            <a:off x="548640" y="1371600"/>
-            <a:ext cx="5394960" cy="2286000"/>
+            <a:off x="548640" y="1325880"/>
+            <a:ext cx="11018520" cy="987552"/>
           </a:xfrm>
           <a:prstGeom prst="roundRect">
             <a:avLst/>
@@ -10949,14 +11137,14 @@
         </p:nvSpPr>
         <p:spPr>
           <a:xfrm>
-            <a:off x="548640" y="1371600"/>
-            <a:ext cx="5394960" cy="64008"/>
+            <a:off x="548640" y="1325880"/>
+            <a:ext cx="11018520" cy="64008"/>
           </a:xfrm>
           <a:prstGeom prst="rect">
             <a:avLst/>
           </a:prstGeom>
           <a:solidFill>
-            <a:srgbClr val="A6001A"/>
+            <a:srgbClr val="E30622"/>
           </a:solidFill>
           <a:ln>
             <a:noFill/>
@@ -10985,16 +11173,40 @@
           </a:p>
         </p:txBody>
       </p:sp>
-      <p:sp>
-        <p:nvSpPr>
-          <p:cNvPr id="5" name="TextBox 4"/>
+      <p:pic>
+        <p:nvPicPr>
+          <p:cNvPr id="5" name="Picture 4" descr="circle-check.png"/>
+          <p:cNvPicPr>
+            <a:picLocks noChangeAspect="1"/>
+          </p:cNvPicPr>
+          <p:nvPr/>
+        </p:nvPicPr>
+        <p:blipFill>
+          <a:blip r:embed="rId3"/>
+          <a:stretch>
+            <a:fillRect/>
+          </a:stretch>
+        </p:blipFill>
+        <p:spPr>
+          <a:xfrm>
+            <a:off x="777240" y="1481328"/>
+            <a:ext cx="274320" cy="274320"/>
+          </a:xfrm>
+          <a:prstGeom prst="rect">
+            <a:avLst/>
+          </a:prstGeom>
+        </p:spPr>
+      </p:pic>
+      <p:sp>
+        <p:nvSpPr>
+          <p:cNvPr id="6" name="TextBox 5"/>
           <p:cNvSpPr txBox="1"/>
           <p:nvPr/>
         </p:nvSpPr>
         <p:spPr>
           <a:xfrm>
-            <a:off x="777240" y="1508760"/>
-            <a:ext cx="4937760" cy="365760"/>
+            <a:off x="1170432" y="1417320"/>
+            <a:ext cx="10058400" cy="329184"/>
           </a:xfrm>
           <a:prstGeom prst="rect">
             <a:avLst/>
@@ -11013,52 +11225,13 @@
               </a:lnSpc>
             </a:pPr>
             <a:r>
-              <a:rPr sz="1100" b="1">
-                <a:solidFill>
-                  <a:srgbClr val="6E6E6E"/>
-                </a:solidFill>
-                <a:latin typeface="Calibri"/>
-              </a:rPr>
-              <a:t>KADROLU ALIMDA KALMA ORANI</a:t>
-            </a:r>
-          </a:p>
-        </p:txBody>
-      </p:sp>
-      <p:sp>
-        <p:nvSpPr>
-          <p:cNvPr id="6" name="TextBox 5"/>
-          <p:cNvSpPr txBox="1"/>
-          <p:nvPr/>
-        </p:nvSpPr>
-        <p:spPr>
-          <a:xfrm>
-            <a:off x="777240" y="1874519"/>
-            <a:ext cx="4937760" cy="822960"/>
-          </a:xfrm>
-          <a:prstGeom prst="rect">
-            <a:avLst/>
-          </a:prstGeom>
-          <a:noFill/>
-        </p:spPr>
-        <p:txBody>
-          <a:bodyPr wrap="square" anchor="t">
-            <a:spAutoFit/>
-          </a:bodyPr>
-          <a:lstStyle/>
-          <a:p>
-            <a:pPr algn="l">
-              <a:lnSpc>
-                <a:spcPct val="100000"/>
-              </a:lnSpc>
-            </a:pPr>
-            <a:r>
-              <a:rPr sz="3200" b="1">
+              <a:rPr sz="1300" b="1">
                 <a:solidFill>
                   <a:srgbClr val="A6001A"/>
                 </a:solidFill>
                 <a:latin typeface="Calibri"/>
               </a:rPr>
-              <a:t>%95,7 → %75,0</a:t>
+              <a:t>Büyüme kurumsal kanaldan mı geldi?</a:t>
             </a:r>
           </a:p>
         </p:txBody>
@@ -11071,8 +11244,8 @@
         </p:nvSpPr>
         <p:spPr>
           <a:xfrm>
-            <a:off x="777240" y="2697480"/>
-            <a:ext cx="4937760" cy="868680"/>
+            <a:off x="1170432" y="1737360"/>
+            <a:ext cx="10058400" cy="530352"/>
           </a:xfrm>
           <a:prstGeom prst="rect">
             <a:avLst/>
@@ -11087,7 +11260,7 @@
           <a:p>
             <a:pPr algn="l">
               <a:lnSpc>
-                <a:spcPct val="110000"/>
+                <a:spcPct val="108000"/>
               </a:lnSpc>
             </a:pPr>
             <a:r>
@@ -11097,7 +11270,7 @@
                 </a:solidFill>
                 <a:latin typeface="Calibri"/>
               </a:rPr>
-              <a:t>İlk 14 günü tamamlama oranı. 32 alımdan 10'u kesim tarihine kadar ayrılmıştır (önceki yıl 24 alımdan 2). Aynı pozisyonun iki kez doldurulması maliyet yaratmaktadır.</a:t>
+              <a:t>Tersi: Sınav Okulları küçüldü. Ocak–Ağustos cirosu 136,1 → 105,6 milyon TL (−%22,4). Mağaza tarafı +%54,9 büyüdü — büyümenin tamamı raftan geldi.</a:t>
             </a:r>
           </a:p>
         </p:txBody>
@@ -11110,8 +11283,8 @@
         </p:nvSpPr>
         <p:spPr>
           <a:xfrm>
-            <a:off x="6172200" y="1371600"/>
-            <a:ext cx="5394960" cy="2286000"/>
+            <a:off x="548640" y="2404872"/>
+            <a:ext cx="11018520" cy="987552"/>
           </a:xfrm>
           <a:prstGeom prst="roundRect">
             <a:avLst/>
@@ -11156,14 +11329,14 @@
         </p:nvSpPr>
         <p:spPr>
           <a:xfrm>
-            <a:off x="6172200" y="1371600"/>
-            <a:ext cx="5394960" cy="64008"/>
+            <a:off x="548640" y="2404872"/>
+            <a:ext cx="11018520" cy="64008"/>
           </a:xfrm>
           <a:prstGeom prst="rect">
             <a:avLst/>
           </a:prstGeom>
           <a:solidFill>
-            <a:srgbClr val="9A9A9A"/>
+            <a:srgbClr val="C0142B"/>
           </a:solidFill>
           <a:ln>
             <a:noFill/>
@@ -11192,16 +11365,40 @@
           </a:p>
         </p:txBody>
       </p:sp>
-      <p:sp>
-        <p:nvSpPr>
-          <p:cNvPr id="10" name="TextBox 9"/>
+      <p:pic>
+        <p:nvPicPr>
+          <p:cNvPr id="10" name="Picture 9" descr="circle-check.png"/>
+          <p:cNvPicPr>
+            <a:picLocks noChangeAspect="1"/>
+          </p:cNvPicPr>
+          <p:nvPr/>
+        </p:nvPicPr>
+        <p:blipFill>
+          <a:blip r:embed="rId3"/>
+          <a:stretch>
+            <a:fillRect/>
+          </a:stretch>
+        </p:blipFill>
+        <p:spPr>
+          <a:xfrm>
+            <a:off x="777240" y="2560320"/>
+            <a:ext cx="274320" cy="274320"/>
+          </a:xfrm>
+          <a:prstGeom prst="rect">
+            <a:avLst/>
+          </a:prstGeom>
+        </p:spPr>
+      </p:pic>
+      <p:sp>
+        <p:nvSpPr>
+          <p:cNvPr id="11" name="TextBox 10"/>
           <p:cNvSpPr txBox="1"/>
           <p:nvPr/>
         </p:nvSpPr>
         <p:spPr>
           <a:xfrm>
-            <a:off x="6400800" y="1508760"/>
-            <a:ext cx="4937760" cy="365760"/>
+            <a:off x="1170432" y="2496312"/>
+            <a:ext cx="10058400" cy="329184"/>
           </a:xfrm>
           <a:prstGeom prst="rect">
             <a:avLst/>
@@ -11220,52 +11417,13 @@
               </a:lnSpc>
             </a:pPr>
             <a:r>
-              <a:rPr sz="1100" b="1">
-                <a:solidFill>
-                  <a:srgbClr val="6E6E6E"/>
-                </a:solidFill>
-                <a:latin typeface="Calibri"/>
-              </a:rPr>
-              <a:t>SEZONLUK KADRODA KALMA ORANI</a:t>
-            </a:r>
-          </a:p>
-        </p:txBody>
-      </p:sp>
-      <p:sp>
-        <p:nvSpPr>
-          <p:cNvPr id="11" name="TextBox 10"/>
-          <p:cNvSpPr txBox="1"/>
-          <p:nvPr/>
-        </p:nvSpPr>
-        <p:spPr>
-          <a:xfrm>
-            <a:off x="6400800" y="1874519"/>
-            <a:ext cx="4937760" cy="822960"/>
-          </a:xfrm>
-          <a:prstGeom prst="rect">
-            <a:avLst/>
-          </a:prstGeom>
-          <a:noFill/>
-        </p:spPr>
-        <p:txBody>
-          <a:bodyPr wrap="square" anchor="t">
-            <a:spAutoFit/>
-          </a:bodyPr>
-          <a:lstStyle/>
-          <a:p>
-            <a:pPr algn="l">
-              <a:lnSpc>
-                <a:spcPct val="100000"/>
-              </a:lnSpc>
-            </a:pPr>
-            <a:r>
-              <a:rPr sz="3200" b="1">
+              <a:rPr sz="1300" b="1">
                 <a:solidFill>
                   <a:srgbClr val="A6001A"/>
                 </a:solidFill>
                 <a:latin typeface="Calibri"/>
               </a:rPr>
-              <a:t>%93,9 → %95,1</a:t>
+              <a:t>Ciro artışı enflasyon kaynaklı mı?</a:t>
             </a:r>
           </a:p>
         </p:txBody>
@@ -11278,8 +11436,8 @@
         </p:nvSpPr>
         <p:spPr>
           <a:xfrm>
-            <a:off x="6400800" y="2697480"/>
-            <a:ext cx="4937760" cy="868680"/>
+            <a:off x="1170432" y="2816352"/>
+            <a:ext cx="10058400" cy="530352"/>
           </a:xfrm>
           <a:prstGeom prst="rect">
             <a:avLst/>
@@ -11294,7 +11452,7 @@
           <a:p>
             <a:pPr algn="l">
               <a:lnSpc>
-                <a:spcPct val="110000"/>
+                <a:spcPct val="108000"/>
               </a:lnSpc>
             </a:pPr>
             <a:r>
@@ -11304,7 +11462,7 @@
                 </a:solidFill>
                 <a:latin typeface="Calibri"/>
               </a:rPr>
-              <a:t>Sezonluk kadroda kalma oranı yükselmiştir. Sorun sezonluk alımda değil, kadrolu alımın ilk haftasındadır.</a:t>
+              <a:t>Kısmen doğru: eşleşen ürünlerde fiyat endeksi +%19,8. Bu yüzden savunma ciroya değil ADEDE dayanıyor: ürün adedi +%34,9 ve adet fiyattan etkilenmez.</a:t>
             </a:r>
           </a:p>
         </p:txBody>
@@ -11317,18 +11475,18 @@
         </p:nvSpPr>
         <p:spPr>
           <a:xfrm>
-            <a:off x="548640" y="3840480"/>
-            <a:ext cx="11018520" cy="1600200"/>
+            <a:off x="548640" y="3483863"/>
+            <a:ext cx="11018520" cy="987552"/>
           </a:xfrm>
           <a:prstGeom prst="roundRect">
             <a:avLst/>
           </a:prstGeom>
           <a:solidFill>
-            <a:srgbClr val="F2F2F2"/>
+            <a:srgbClr val="FFFFFF"/>
           </a:solidFill>
-          <a:ln w="19050">
+          <a:ln w="12700">
             <a:solidFill>
-              <a:srgbClr val="E30622"/>
+              <a:srgbClr val="E0E0E0"/>
             </a:solidFill>
           </a:ln>
           <a:effectLst/>
@@ -11357,14 +11515,82 @@
       </p:sp>
       <p:sp>
         <p:nvSpPr>
-          <p:cNvPr id="14" name="TextBox 13"/>
+          <p:cNvPr id="14" name="Rectangle 13"/>
+          <p:cNvSpPr/>
+          <p:nvPr/>
+        </p:nvSpPr>
+        <p:spPr>
+          <a:xfrm>
+            <a:off x="548640" y="3483863"/>
+            <a:ext cx="11018520" cy="64008"/>
+          </a:xfrm>
+          <a:prstGeom prst="rect">
+            <a:avLst/>
+          </a:prstGeom>
+          <a:solidFill>
+            <a:srgbClr val="E30622"/>
+          </a:solidFill>
+          <a:ln>
+            <a:noFill/>
+          </a:ln>
+          <a:effectLst/>
+        </p:spPr>
+        <p:style>
+          <a:lnRef idx="1">
+            <a:schemeClr val="accent1"/>
+          </a:lnRef>
+          <a:fillRef idx="3">
+            <a:schemeClr val="accent1"/>
+          </a:fillRef>
+          <a:effectRef idx="2">
+            <a:schemeClr val="accent1"/>
+          </a:effectRef>
+          <a:fontRef idx="minor">
+            <a:schemeClr val="lt1"/>
+          </a:fontRef>
+        </p:style>
+        <p:txBody>
+          <a:bodyPr rtlCol="0" anchor="ctr"/>
+          <a:lstStyle/>
+          <a:p>
+            <a:pPr algn="ctr"/>
+          </a:p>
+        </p:txBody>
+      </p:sp>
+      <p:pic>
+        <p:nvPicPr>
+          <p:cNvPr id="15" name="Picture 14" descr="circle-check.png"/>
+          <p:cNvPicPr>
+            <a:picLocks noChangeAspect="1"/>
+          </p:cNvPicPr>
+          <p:nvPr/>
+        </p:nvPicPr>
+        <p:blipFill>
+          <a:blip r:embed="rId3"/>
+          <a:stretch>
+            <a:fillRect/>
+          </a:stretch>
+        </p:blipFill>
+        <p:spPr>
+          <a:xfrm>
+            <a:off x="777240" y="3639311"/>
+            <a:ext cx="274320" cy="274320"/>
+          </a:xfrm>
+          <a:prstGeom prst="rect">
+            <a:avLst/>
+          </a:prstGeom>
+        </p:spPr>
+      </p:pic>
+      <p:sp>
+        <p:nvSpPr>
+          <p:cNvPr id="16" name="TextBox 15"/>
           <p:cNvSpPr txBox="1"/>
           <p:nvPr/>
         </p:nvSpPr>
         <p:spPr>
           <a:xfrm>
-            <a:off x="822960" y="3977639"/>
-            <a:ext cx="10515600" cy="1371600"/>
+            <a:off x="1170432" y="3575303"/>
+            <a:ext cx="10058400" cy="329184"/>
           </a:xfrm>
           <a:prstGeom prst="rect">
             <a:avLst/>
@@ -11379,42 +11605,255 @@
           <a:p>
             <a:pPr algn="l">
               <a:lnSpc>
-                <a:spcPct val="125000"/>
+                <a:spcPct val="100000"/>
               </a:lnSpc>
             </a:pPr>
             <a:r>
-              <a:rPr sz="1350" b="1">
+              <a:rPr sz="1300" b="1">
                 <a:solidFill>
                   <a:srgbClr val="A6001A"/>
                 </a:solidFill>
                 <a:latin typeface="Calibri"/>
               </a:rPr>
-              <a:t>Planlanan Aksiyonlar</a:t>
-            </a:r>
-          </a:p>
+              <a:t>Kasa sistemi değişti, karşılaştırma geçerli mi?</a:t>
+            </a:r>
+          </a:p>
+        </p:txBody>
+      </p:sp>
+      <p:sp>
+        <p:nvSpPr>
+          <p:cNvPr id="17" name="TextBox 16"/>
+          <p:cNvSpPr txBox="1"/>
+          <p:nvPr/>
+        </p:nvSpPr>
+        <p:spPr>
+          <a:xfrm>
+            <a:off x="1170432" y="3895344"/>
+            <a:ext cx="10058400" cy="530352"/>
+          </a:xfrm>
+          <a:prstGeom prst="rect">
+            <a:avLst/>
+          </a:prstGeom>
+          <a:noFill/>
+        </p:spPr>
+        <p:txBody>
+          <a:bodyPr wrap="square" anchor="t">
+            <a:spAutoFit/>
+          </a:bodyPr>
+          <a:lstStyle/>
           <a:p>
             <a:pPr algn="l">
               <a:lnSpc>
-                <a:spcPct val="125000"/>
+                <a:spcPct val="108000"/>
               </a:lnSpc>
             </a:pPr>
             <a:r>
-              <a:rPr sz="1200" b="0">
+              <a:rPr sz="1100" b="0">
                 <a:solidFill>
                   <a:srgbClr val="333333"/>
                 </a:solidFill>
                 <a:latin typeface="Calibri"/>
               </a:rPr>
-              <a:t>• En bozuk üç nokta: Özlüce, Heykel, Merkez Depo → ilk hafta karşılama protokolü.
-• İdari İşler pozisyonunda ücret–vardiya revizyonu.
-• Ölçüt: gelecek sezon Eylül öncesi kayıp %20'den %12'ye (2025 seviyesi).</a:t>
-            </a:r>
-          </a:p>
-        </p:txBody>
-      </p:sp>
-      <p:sp>
-        <p:nvSpPr>
-          <p:cNvPr id="15" name="TextBox 14"/>
+              <a:t>Bu yüzden ölçüm POS'tan değil ERP'den (DerinSIS) alındı — iki yılda da aynı kaynak, aynı belge tipi. Temmuz 2025 kasa geçişi ölçüye girmiyor.</a:t>
+            </a:r>
+          </a:p>
+        </p:txBody>
+      </p:sp>
+      <p:sp>
+        <p:nvSpPr>
+          <p:cNvPr id="18" name="Rounded Rectangle 17"/>
+          <p:cNvSpPr/>
+          <p:nvPr/>
+        </p:nvSpPr>
+        <p:spPr>
+          <a:xfrm>
+            <a:off x="548640" y="4562855"/>
+            <a:ext cx="11018520" cy="987552"/>
+          </a:xfrm>
+          <a:prstGeom prst="roundRect">
+            <a:avLst/>
+          </a:prstGeom>
+          <a:solidFill>
+            <a:srgbClr val="FFFFFF"/>
+          </a:solidFill>
+          <a:ln w="12700">
+            <a:solidFill>
+              <a:srgbClr val="E0E0E0"/>
+            </a:solidFill>
+          </a:ln>
+          <a:effectLst/>
+        </p:spPr>
+        <p:style>
+          <a:lnRef idx="1">
+            <a:schemeClr val="accent1"/>
+          </a:lnRef>
+          <a:fillRef idx="3">
+            <a:schemeClr val="accent1"/>
+          </a:fillRef>
+          <a:effectRef idx="2">
+            <a:schemeClr val="accent1"/>
+          </a:effectRef>
+          <a:fontRef idx="minor">
+            <a:schemeClr val="lt1"/>
+          </a:fontRef>
+        </p:style>
+        <p:txBody>
+          <a:bodyPr rtlCol="0" anchor="ctr"/>
+          <a:lstStyle/>
+          <a:p>
+            <a:pPr algn="ctr"/>
+          </a:p>
+        </p:txBody>
+      </p:sp>
+      <p:sp>
+        <p:nvSpPr>
+          <p:cNvPr id="19" name="Rectangle 18"/>
+          <p:cNvSpPr/>
+          <p:nvPr/>
+        </p:nvSpPr>
+        <p:spPr>
+          <a:xfrm>
+            <a:off x="548640" y="4562855"/>
+            <a:ext cx="11018520" cy="64008"/>
+          </a:xfrm>
+          <a:prstGeom prst="rect">
+            <a:avLst/>
+          </a:prstGeom>
+          <a:solidFill>
+            <a:srgbClr val="C0142B"/>
+          </a:solidFill>
+          <a:ln>
+            <a:noFill/>
+          </a:ln>
+          <a:effectLst/>
+        </p:spPr>
+        <p:style>
+          <a:lnRef idx="1">
+            <a:schemeClr val="accent1"/>
+          </a:lnRef>
+          <a:fillRef idx="3">
+            <a:schemeClr val="accent1"/>
+          </a:fillRef>
+          <a:effectRef idx="2">
+            <a:schemeClr val="accent1"/>
+          </a:effectRef>
+          <a:fontRef idx="minor">
+            <a:schemeClr val="lt1"/>
+          </a:fontRef>
+        </p:style>
+        <p:txBody>
+          <a:bodyPr rtlCol="0" anchor="ctr"/>
+          <a:lstStyle/>
+          <a:p>
+            <a:pPr algn="ctr"/>
+          </a:p>
+        </p:txBody>
+      </p:sp>
+      <p:pic>
+        <p:nvPicPr>
+          <p:cNvPr id="20" name="Picture 19" descr="circle-check.png"/>
+          <p:cNvPicPr>
+            <a:picLocks noChangeAspect="1"/>
+          </p:cNvPicPr>
+          <p:nvPr/>
+        </p:nvPicPr>
+        <p:blipFill>
+          <a:blip r:embed="rId3"/>
+          <a:stretch>
+            <a:fillRect/>
+          </a:stretch>
+        </p:blipFill>
+        <p:spPr>
+          <a:xfrm>
+            <a:off x="777240" y="4718303"/>
+            <a:ext cx="274320" cy="274320"/>
+          </a:xfrm>
+          <a:prstGeom prst="rect">
+            <a:avLst/>
+          </a:prstGeom>
+        </p:spPr>
+      </p:pic>
+      <p:sp>
+        <p:nvSpPr>
+          <p:cNvPr id="21" name="TextBox 20"/>
+          <p:cNvSpPr txBox="1"/>
+          <p:nvPr/>
+        </p:nvSpPr>
+        <p:spPr>
+          <a:xfrm>
+            <a:off x="1170432" y="4654295"/>
+            <a:ext cx="10058400" cy="329184"/>
+          </a:xfrm>
+          <a:prstGeom prst="rect">
+            <a:avLst/>
+          </a:prstGeom>
+          <a:noFill/>
+        </p:spPr>
+        <p:txBody>
+          <a:bodyPr wrap="square" anchor="t">
+            <a:spAutoFit/>
+          </a:bodyPr>
+          <a:lstStyle/>
+          <a:p>
+            <a:pPr algn="l">
+              <a:lnSpc>
+                <a:spcPct val="100000"/>
+              </a:lnSpc>
+            </a:pPr>
+            <a:r>
+              <a:rPr sz="1300" b="1">
+                <a:solidFill>
+                  <a:srgbClr val="A6001A"/>
+                </a:solidFill>
+                <a:latin typeface="Calibri"/>
+              </a:rPr>
+              <a:t>Ağustos ayında ivme düşüşü var mı?</a:t>
+            </a:r>
+          </a:p>
+        </p:txBody>
+      </p:sp>
+      <p:sp>
+        <p:nvSpPr>
+          <p:cNvPr id="22" name="TextBox 21"/>
+          <p:cNvSpPr txBox="1"/>
+          <p:nvPr/>
+        </p:nvSpPr>
+        <p:spPr>
+          <a:xfrm>
+            <a:off x="1170432" y="4974336"/>
+            <a:ext cx="10058400" cy="530352"/>
+          </a:xfrm>
+          <a:prstGeom prst="rect">
+            <a:avLst/>
+          </a:prstGeom>
+          <a:noFill/>
+        </p:spPr>
+        <p:txBody>
+          <a:bodyPr wrap="square" anchor="t">
+            <a:spAutoFit/>
+          </a:bodyPr>
+          <a:lstStyle/>
+          <a:p>
+            <a:pPr algn="l">
+              <a:lnSpc>
+                <a:spcPct val="108000"/>
+              </a:lnSpc>
+            </a:pPr>
+            <a:r>
+              <a:rPr sz="1100" b="0">
+                <a:solidFill>
+                  <a:srgbClr val="333333"/>
+                </a:solidFill>
+                <a:latin typeface="Calibri"/>
+              </a:rPr>
+              <a:t>Takvim etkisi: okullar 2025'te 8 Eylül, 2026'da 14 Eylül açıldı — sezon 6 gün geriye kaydı. Açılışa hizalanınca haftalık büyüme %65–79 bandında düz seyrediyor.</a:t>
+            </a:r>
+          </a:p>
+        </p:txBody>
+      </p:sp>
+      <p:sp>
+        <p:nvSpPr>
+          <p:cNvPr id="23" name="TextBox 22"/>
           <p:cNvSpPr txBox="1"/>
           <p:nvPr/>
         </p:nvSpPr>
@@ -11446,14 +11885,14 @@
                 </a:solidFill>
                 <a:latin typeface="Calibri"/>
               </a:rPr>
-              <a:t>* Kapsam: beş mağazanın tamamı — FSM · Özlüce · İst. Yolu · Heykel · Şura. Tutunma ölçümü mağaza kadrosu üzerinden yapılmıştır.</a:t>
-            </a:r>
-          </a:p>
-        </p:txBody>
-      </p:sp>
-      <p:sp>
-        <p:nvSpPr>
-          <p:cNvPr id="16" name="TextBox 15"/>
+              <a:t>* Kapsam: üç POS mağazası — FSM · Özlüce · İst. Yolu · Dönem: 01.01 – 31.08 (her iki yıl, kümülatif) (kurumsal/mağaza kıyası) · hizalı dönem: 01.07 – 25.08.2025 (2025) · 07.07 – 31.08.2026 (2026), her iki yıl 56 gün, okul açılışına hizalı</a:t>
+            </a:r>
+          </a:p>
+        </p:txBody>
+      </p:sp>
+      <p:sp>
+        <p:nvSpPr>
+          <p:cNvPr id="24" name="TextBox 23"/>
           <p:cNvSpPr txBox="1"/>
           <p:nvPr/>
         </p:nvSpPr>
@@ -11529,6 +11968,654 @@
             <a:spLocks noGrp="1"/>
           </p:cNvSpPr>
           <p:nvPr>
+            <p:ph type="title"/>
+          </p:nvPr>
+        </p:nvSpPr>
+        <p:spPr/>
+        <p:txBody>
+          <a:bodyPr/>
+          <a:lstStyle/>
+          <a:p>
+            <a:r>
+              <a:t>İyileştirme Alanı</a:t>
+            </a:r>
+          </a:p>
+        </p:txBody>
+      </p:sp>
+      <p:sp>
+        <p:nvSpPr>
+          <p:cNvPr id="3" name="Rounded Rectangle 2"/>
+          <p:cNvSpPr/>
+          <p:nvPr/>
+        </p:nvSpPr>
+        <p:spPr>
+          <a:xfrm>
+            <a:off x="548640" y="1371600"/>
+            <a:ext cx="5394960" cy="2286000"/>
+          </a:xfrm>
+          <a:prstGeom prst="roundRect">
+            <a:avLst/>
+          </a:prstGeom>
+          <a:solidFill>
+            <a:srgbClr val="FFFFFF"/>
+          </a:solidFill>
+          <a:ln w="12700">
+            <a:solidFill>
+              <a:srgbClr val="E0E0E0"/>
+            </a:solidFill>
+          </a:ln>
+          <a:effectLst/>
+        </p:spPr>
+        <p:style>
+          <a:lnRef idx="1">
+            <a:schemeClr val="accent1"/>
+          </a:lnRef>
+          <a:fillRef idx="3">
+            <a:schemeClr val="accent1"/>
+          </a:fillRef>
+          <a:effectRef idx="2">
+            <a:schemeClr val="accent1"/>
+          </a:effectRef>
+          <a:fontRef idx="minor">
+            <a:schemeClr val="lt1"/>
+          </a:fontRef>
+        </p:style>
+        <p:txBody>
+          <a:bodyPr rtlCol="0" anchor="ctr"/>
+          <a:lstStyle/>
+          <a:p>
+            <a:pPr algn="ctr"/>
+          </a:p>
+        </p:txBody>
+      </p:sp>
+      <p:sp>
+        <p:nvSpPr>
+          <p:cNvPr id="4" name="Rectangle 3"/>
+          <p:cNvSpPr/>
+          <p:nvPr/>
+        </p:nvSpPr>
+        <p:spPr>
+          <a:xfrm>
+            <a:off x="548640" y="1371600"/>
+            <a:ext cx="5394960" cy="64008"/>
+          </a:xfrm>
+          <a:prstGeom prst="rect">
+            <a:avLst/>
+          </a:prstGeom>
+          <a:solidFill>
+            <a:srgbClr val="A6001A"/>
+          </a:solidFill>
+          <a:ln>
+            <a:noFill/>
+          </a:ln>
+          <a:effectLst/>
+        </p:spPr>
+        <p:style>
+          <a:lnRef idx="1">
+            <a:schemeClr val="accent1"/>
+          </a:lnRef>
+          <a:fillRef idx="3">
+            <a:schemeClr val="accent1"/>
+          </a:fillRef>
+          <a:effectRef idx="2">
+            <a:schemeClr val="accent1"/>
+          </a:effectRef>
+          <a:fontRef idx="minor">
+            <a:schemeClr val="lt1"/>
+          </a:fontRef>
+        </p:style>
+        <p:txBody>
+          <a:bodyPr rtlCol="0" anchor="ctr"/>
+          <a:lstStyle/>
+          <a:p>
+            <a:pPr algn="ctr"/>
+          </a:p>
+        </p:txBody>
+      </p:sp>
+      <p:sp>
+        <p:nvSpPr>
+          <p:cNvPr id="5" name="TextBox 4"/>
+          <p:cNvSpPr txBox="1"/>
+          <p:nvPr/>
+        </p:nvSpPr>
+        <p:spPr>
+          <a:xfrm>
+            <a:off x="777240" y="1508760"/>
+            <a:ext cx="4937760" cy="365760"/>
+          </a:xfrm>
+          <a:prstGeom prst="rect">
+            <a:avLst/>
+          </a:prstGeom>
+          <a:noFill/>
+        </p:spPr>
+        <p:txBody>
+          <a:bodyPr wrap="square" anchor="t">
+            <a:spAutoFit/>
+          </a:bodyPr>
+          <a:lstStyle/>
+          <a:p>
+            <a:pPr algn="l">
+              <a:lnSpc>
+                <a:spcPct val="100000"/>
+              </a:lnSpc>
+            </a:pPr>
+            <a:r>
+              <a:rPr sz="1100" b="1">
+                <a:solidFill>
+                  <a:srgbClr val="6E6E6E"/>
+                </a:solidFill>
+                <a:latin typeface="Calibri"/>
+              </a:rPr>
+              <a:t>KADROLU ALIMDA KALMA ORANI</a:t>
+            </a:r>
+          </a:p>
+        </p:txBody>
+      </p:sp>
+      <p:sp>
+        <p:nvSpPr>
+          <p:cNvPr id="6" name="TextBox 5"/>
+          <p:cNvSpPr txBox="1"/>
+          <p:nvPr/>
+        </p:nvSpPr>
+        <p:spPr>
+          <a:xfrm>
+            <a:off x="777240" y="1874519"/>
+            <a:ext cx="4937760" cy="822960"/>
+          </a:xfrm>
+          <a:prstGeom prst="rect">
+            <a:avLst/>
+          </a:prstGeom>
+          <a:noFill/>
+        </p:spPr>
+        <p:txBody>
+          <a:bodyPr wrap="square" anchor="t">
+            <a:spAutoFit/>
+          </a:bodyPr>
+          <a:lstStyle/>
+          <a:p>
+            <a:pPr algn="l">
+              <a:lnSpc>
+                <a:spcPct val="100000"/>
+              </a:lnSpc>
+            </a:pPr>
+            <a:r>
+              <a:rPr sz="3200" b="1">
+                <a:solidFill>
+                  <a:srgbClr val="A6001A"/>
+                </a:solidFill>
+                <a:latin typeface="Calibri"/>
+              </a:rPr>
+              <a:t>%95,7 → %75,0</a:t>
+            </a:r>
+          </a:p>
+        </p:txBody>
+      </p:sp>
+      <p:sp>
+        <p:nvSpPr>
+          <p:cNvPr id="7" name="TextBox 6"/>
+          <p:cNvSpPr txBox="1"/>
+          <p:nvPr/>
+        </p:nvSpPr>
+        <p:spPr>
+          <a:xfrm>
+            <a:off x="777240" y="2697480"/>
+            <a:ext cx="4937760" cy="868680"/>
+          </a:xfrm>
+          <a:prstGeom prst="rect">
+            <a:avLst/>
+          </a:prstGeom>
+          <a:noFill/>
+        </p:spPr>
+        <p:txBody>
+          <a:bodyPr wrap="square" anchor="t">
+            <a:spAutoFit/>
+          </a:bodyPr>
+          <a:lstStyle/>
+          <a:p>
+            <a:pPr algn="l">
+              <a:lnSpc>
+                <a:spcPct val="110000"/>
+              </a:lnSpc>
+            </a:pPr>
+            <a:r>
+              <a:rPr sz="1100" b="0">
+                <a:solidFill>
+                  <a:srgbClr val="333333"/>
+                </a:solidFill>
+                <a:latin typeface="Calibri"/>
+              </a:rPr>
+              <a:t>İlk 14 günü tamamlama oranı. 32 alımdan 10'u kesim tarihine kadar ayrılmıştır (önceki yıl 24 alımdan 2). Aynı pozisyonun iki kez doldurulması maliyet yaratmaktadır.</a:t>
+            </a:r>
+          </a:p>
+        </p:txBody>
+      </p:sp>
+      <p:sp>
+        <p:nvSpPr>
+          <p:cNvPr id="8" name="Rounded Rectangle 7"/>
+          <p:cNvSpPr/>
+          <p:nvPr/>
+        </p:nvSpPr>
+        <p:spPr>
+          <a:xfrm>
+            <a:off x="6172200" y="1371600"/>
+            <a:ext cx="5394960" cy="2286000"/>
+          </a:xfrm>
+          <a:prstGeom prst="roundRect">
+            <a:avLst/>
+          </a:prstGeom>
+          <a:solidFill>
+            <a:srgbClr val="FFFFFF"/>
+          </a:solidFill>
+          <a:ln w="12700">
+            <a:solidFill>
+              <a:srgbClr val="E0E0E0"/>
+            </a:solidFill>
+          </a:ln>
+          <a:effectLst/>
+        </p:spPr>
+        <p:style>
+          <a:lnRef idx="1">
+            <a:schemeClr val="accent1"/>
+          </a:lnRef>
+          <a:fillRef idx="3">
+            <a:schemeClr val="accent1"/>
+          </a:fillRef>
+          <a:effectRef idx="2">
+            <a:schemeClr val="accent1"/>
+          </a:effectRef>
+          <a:fontRef idx="minor">
+            <a:schemeClr val="lt1"/>
+          </a:fontRef>
+        </p:style>
+        <p:txBody>
+          <a:bodyPr rtlCol="0" anchor="ctr"/>
+          <a:lstStyle/>
+          <a:p>
+            <a:pPr algn="ctr"/>
+          </a:p>
+        </p:txBody>
+      </p:sp>
+      <p:sp>
+        <p:nvSpPr>
+          <p:cNvPr id="9" name="Rectangle 8"/>
+          <p:cNvSpPr/>
+          <p:nvPr/>
+        </p:nvSpPr>
+        <p:spPr>
+          <a:xfrm>
+            <a:off x="6172200" y="1371600"/>
+            <a:ext cx="5394960" cy="64008"/>
+          </a:xfrm>
+          <a:prstGeom prst="rect">
+            <a:avLst/>
+          </a:prstGeom>
+          <a:solidFill>
+            <a:srgbClr val="9A9A9A"/>
+          </a:solidFill>
+          <a:ln>
+            <a:noFill/>
+          </a:ln>
+          <a:effectLst/>
+        </p:spPr>
+        <p:style>
+          <a:lnRef idx="1">
+            <a:schemeClr val="accent1"/>
+          </a:lnRef>
+          <a:fillRef idx="3">
+            <a:schemeClr val="accent1"/>
+          </a:fillRef>
+          <a:effectRef idx="2">
+            <a:schemeClr val="accent1"/>
+          </a:effectRef>
+          <a:fontRef idx="minor">
+            <a:schemeClr val="lt1"/>
+          </a:fontRef>
+        </p:style>
+        <p:txBody>
+          <a:bodyPr rtlCol="0" anchor="ctr"/>
+          <a:lstStyle/>
+          <a:p>
+            <a:pPr algn="ctr"/>
+          </a:p>
+        </p:txBody>
+      </p:sp>
+      <p:sp>
+        <p:nvSpPr>
+          <p:cNvPr id="10" name="TextBox 9"/>
+          <p:cNvSpPr txBox="1"/>
+          <p:nvPr/>
+        </p:nvSpPr>
+        <p:spPr>
+          <a:xfrm>
+            <a:off x="6400800" y="1508760"/>
+            <a:ext cx="4937760" cy="365760"/>
+          </a:xfrm>
+          <a:prstGeom prst="rect">
+            <a:avLst/>
+          </a:prstGeom>
+          <a:noFill/>
+        </p:spPr>
+        <p:txBody>
+          <a:bodyPr wrap="square" anchor="t">
+            <a:spAutoFit/>
+          </a:bodyPr>
+          <a:lstStyle/>
+          <a:p>
+            <a:pPr algn="l">
+              <a:lnSpc>
+                <a:spcPct val="100000"/>
+              </a:lnSpc>
+            </a:pPr>
+            <a:r>
+              <a:rPr sz="1100" b="1">
+                <a:solidFill>
+                  <a:srgbClr val="6E6E6E"/>
+                </a:solidFill>
+                <a:latin typeface="Calibri"/>
+              </a:rPr>
+              <a:t>SEZONLUK KADRODA KALMA ORANI</a:t>
+            </a:r>
+          </a:p>
+        </p:txBody>
+      </p:sp>
+      <p:sp>
+        <p:nvSpPr>
+          <p:cNvPr id="11" name="TextBox 10"/>
+          <p:cNvSpPr txBox="1"/>
+          <p:nvPr/>
+        </p:nvSpPr>
+        <p:spPr>
+          <a:xfrm>
+            <a:off x="6400800" y="1874519"/>
+            <a:ext cx="4937760" cy="822960"/>
+          </a:xfrm>
+          <a:prstGeom prst="rect">
+            <a:avLst/>
+          </a:prstGeom>
+          <a:noFill/>
+        </p:spPr>
+        <p:txBody>
+          <a:bodyPr wrap="square" anchor="t">
+            <a:spAutoFit/>
+          </a:bodyPr>
+          <a:lstStyle/>
+          <a:p>
+            <a:pPr algn="l">
+              <a:lnSpc>
+                <a:spcPct val="100000"/>
+              </a:lnSpc>
+            </a:pPr>
+            <a:r>
+              <a:rPr sz="3200" b="1">
+                <a:solidFill>
+                  <a:srgbClr val="A6001A"/>
+                </a:solidFill>
+                <a:latin typeface="Calibri"/>
+              </a:rPr>
+              <a:t>%93,9 → %95,1</a:t>
+            </a:r>
+          </a:p>
+        </p:txBody>
+      </p:sp>
+      <p:sp>
+        <p:nvSpPr>
+          <p:cNvPr id="12" name="TextBox 11"/>
+          <p:cNvSpPr txBox="1"/>
+          <p:nvPr/>
+        </p:nvSpPr>
+        <p:spPr>
+          <a:xfrm>
+            <a:off x="6400800" y="2697480"/>
+            <a:ext cx="4937760" cy="868680"/>
+          </a:xfrm>
+          <a:prstGeom prst="rect">
+            <a:avLst/>
+          </a:prstGeom>
+          <a:noFill/>
+        </p:spPr>
+        <p:txBody>
+          <a:bodyPr wrap="square" anchor="t">
+            <a:spAutoFit/>
+          </a:bodyPr>
+          <a:lstStyle/>
+          <a:p>
+            <a:pPr algn="l">
+              <a:lnSpc>
+                <a:spcPct val="110000"/>
+              </a:lnSpc>
+            </a:pPr>
+            <a:r>
+              <a:rPr sz="1100" b="0">
+                <a:solidFill>
+                  <a:srgbClr val="333333"/>
+                </a:solidFill>
+                <a:latin typeface="Calibri"/>
+              </a:rPr>
+              <a:t>Sezonluk kadroda kalma oranı yükselmiştir. Sorun sezonluk alımda değil, kadrolu alımın ilk haftasındadır.</a:t>
+            </a:r>
+          </a:p>
+        </p:txBody>
+      </p:sp>
+      <p:sp>
+        <p:nvSpPr>
+          <p:cNvPr id="13" name="Rounded Rectangle 12"/>
+          <p:cNvSpPr/>
+          <p:nvPr/>
+        </p:nvSpPr>
+        <p:spPr>
+          <a:xfrm>
+            <a:off x="548640" y="3840480"/>
+            <a:ext cx="11018520" cy="1600200"/>
+          </a:xfrm>
+          <a:prstGeom prst="roundRect">
+            <a:avLst/>
+          </a:prstGeom>
+          <a:solidFill>
+            <a:srgbClr val="F2F2F2"/>
+          </a:solidFill>
+          <a:ln w="19050">
+            <a:solidFill>
+              <a:srgbClr val="E30622"/>
+            </a:solidFill>
+          </a:ln>
+          <a:effectLst/>
+        </p:spPr>
+        <p:style>
+          <a:lnRef idx="1">
+            <a:schemeClr val="accent1"/>
+          </a:lnRef>
+          <a:fillRef idx="3">
+            <a:schemeClr val="accent1"/>
+          </a:fillRef>
+          <a:effectRef idx="2">
+            <a:schemeClr val="accent1"/>
+          </a:effectRef>
+          <a:fontRef idx="minor">
+            <a:schemeClr val="lt1"/>
+          </a:fontRef>
+        </p:style>
+        <p:txBody>
+          <a:bodyPr rtlCol="0" anchor="ctr"/>
+          <a:lstStyle/>
+          <a:p>
+            <a:pPr algn="ctr"/>
+          </a:p>
+        </p:txBody>
+      </p:sp>
+      <p:sp>
+        <p:nvSpPr>
+          <p:cNvPr id="14" name="TextBox 13"/>
+          <p:cNvSpPr txBox="1"/>
+          <p:nvPr/>
+        </p:nvSpPr>
+        <p:spPr>
+          <a:xfrm>
+            <a:off x="822960" y="3977639"/>
+            <a:ext cx="10515600" cy="1371600"/>
+          </a:xfrm>
+          <a:prstGeom prst="rect">
+            <a:avLst/>
+          </a:prstGeom>
+          <a:noFill/>
+        </p:spPr>
+        <p:txBody>
+          <a:bodyPr wrap="square" anchor="t">
+            <a:spAutoFit/>
+          </a:bodyPr>
+          <a:lstStyle/>
+          <a:p>
+            <a:pPr algn="l">
+              <a:lnSpc>
+                <a:spcPct val="125000"/>
+              </a:lnSpc>
+            </a:pPr>
+            <a:r>
+              <a:rPr sz="1350" b="1">
+                <a:solidFill>
+                  <a:srgbClr val="A6001A"/>
+                </a:solidFill>
+                <a:latin typeface="Calibri"/>
+              </a:rPr>
+              <a:t>Planlanan Aksiyonlar</a:t>
+            </a:r>
+          </a:p>
+          <a:p>
+            <a:pPr algn="l">
+              <a:lnSpc>
+                <a:spcPct val="125000"/>
+              </a:lnSpc>
+            </a:pPr>
+            <a:r>
+              <a:rPr sz="1200" b="0">
+                <a:solidFill>
+                  <a:srgbClr val="333333"/>
+                </a:solidFill>
+                <a:latin typeface="Calibri"/>
+              </a:rPr>
+              <a:t>• En bozuk üç nokta: Özlüce, Heykel, Merkez Depo → ilk hafta karşılama protokolü.
+• İdari İşler pozisyonunda ücret–vardiya revizyonu.
+• Ölçüt: gelecek sezon Eylül öncesi kayıp %20'den %12'ye (2025 seviyesi).</a:t>
+            </a:r>
+          </a:p>
+        </p:txBody>
+      </p:sp>
+      <p:sp>
+        <p:nvSpPr>
+          <p:cNvPr id="15" name="TextBox 14"/>
+          <p:cNvSpPr txBox="1"/>
+          <p:nvPr/>
+        </p:nvSpPr>
+        <p:spPr>
+          <a:xfrm>
+            <a:off x="548640" y="5504688"/>
+            <a:ext cx="7772400" cy="292608"/>
+          </a:xfrm>
+          <a:prstGeom prst="rect">
+            <a:avLst/>
+          </a:prstGeom>
+          <a:noFill/>
+        </p:spPr>
+        <p:txBody>
+          <a:bodyPr wrap="square" anchor="t">
+            <a:spAutoFit/>
+          </a:bodyPr>
+          <a:lstStyle/>
+          <a:p>
+            <a:pPr algn="l">
+              <a:lnSpc>
+                <a:spcPct val="100000"/>
+              </a:lnSpc>
+            </a:pPr>
+            <a:r>
+              <a:rPr sz="900" b="0">
+                <a:solidFill>
+                  <a:srgbClr val="9A9A9A"/>
+                </a:solidFill>
+                <a:latin typeface="Calibri"/>
+              </a:rPr>
+              <a:t>* Kapsam: beş mağazanın tamamı — FSM · Özlüce · İst. Yolu · Heykel · Şura · Ölçüm noktaları: 30.06 tabanı ve 31.08 kesimi (tarih aralığı değil, o gün fiilen çalışan kişi) Tutunma ölçümü mağaza kadrosu üzerinden yapılmıştır.</a:t>
+            </a:r>
+          </a:p>
+        </p:txBody>
+      </p:sp>
+      <p:sp>
+        <p:nvSpPr>
+          <p:cNvPr id="16" name="TextBox 15"/>
+          <p:cNvSpPr txBox="1"/>
+          <p:nvPr/>
+        </p:nvSpPr>
+        <p:spPr>
+          <a:xfrm>
+            <a:off x="8503920" y="6355080"/>
+            <a:ext cx="3108960" cy="274320"/>
+          </a:xfrm>
+          <a:prstGeom prst="rect">
+            <a:avLst/>
+          </a:prstGeom>
+          <a:noFill/>
+        </p:spPr>
+        <p:txBody>
+          <a:bodyPr wrap="square" anchor="t">
+            <a:spAutoFit/>
+          </a:bodyPr>
+          <a:lstStyle/>
+          <a:p>
+            <a:pPr algn="r">
+              <a:lnSpc>
+                <a:spcPct val="100000"/>
+              </a:lnSpc>
+            </a:pPr>
+            <a:r>
+              <a:rPr sz="900" b="0">
+                <a:solidFill>
+                  <a:srgbClr val="9A9A9A"/>
+                </a:solidFill>
+                <a:latin typeface="Calibri"/>
+              </a:rPr>
+              <a:t>© Fikri Eren 2026</a:t>
+            </a:r>
+          </a:p>
+        </p:txBody>
+      </p:sp>
+    </p:spTree>
+  </p:cSld>
+  <p:clrMapOvr>
+    <a:masterClrMapping/>
+  </p:clrMapOvr>
+</p:sld>
+</file>
+
+<file path=ppt/slides/slide16.xml><?xml version="1.0" encoding="utf-8"?>
+<p:sld xmlns:a="http://schemas.openxmlformats.org/drawingml/2006/main" xmlns:p="http://schemas.openxmlformats.org/presentationml/2006/main" xmlns:r="http://schemas.openxmlformats.org/officeDocument/2006/relationships">
+  <p:cSld>
+    <p:bg>
+      <p:bgPr>
+        <a:blipFill dpi="0" rotWithShape="1">
+          <a:blip r:embed="rId2">
+            <a:lum/>
+          </a:blip>
+          <a:srcRect/>
+          <a:stretch>
+            <a:fillRect/>
+          </a:stretch>
+        </a:blipFill>
+        <a:effectLst/>
+      </p:bgPr>
+    </p:bg>
+    <p:spTree>
+      <p:nvGrpSpPr>
+        <p:cNvPr id="1" name=""/>
+        <p:cNvGrpSpPr/>
+        <p:nvPr/>
+      </p:nvGrpSpPr>
+      <p:grpSpPr/>
+      <p:sp>
+        <p:nvSpPr>
+          <p:cNvPr id="2" name="Title 1"/>
+          <p:cNvSpPr>
+            <a:spLocks noGrp="1"/>
+          </p:cNvSpPr>
+          <p:nvPr>
             <p:ph type="ctrTitle"/>
           </p:nvPr>
         </p:nvSpPr>
@@ -14408,7 +15495,7 @@
                 </a:solidFill>
                 <a:latin typeface="Calibri"/>
               </a:rPr>
-              <a:t>* Kapsam: kadro rakamları beş mağaza (FSM · Özlüce · İst. Yolu · Heykel · Şura); iş hacmi ve personel başına rakamlar üç POS mağazası (FSM · Özlüce · İst. Yolu).</a:t>
+              <a:t>* Kadro: beş mağaza (FSM · Özlüce · İst. Yolu · Heykel · Şura), ölçüm noktaları 30.06 ve 31.08 · İş hacmi ve personel başına: üç POS mağazası (FSM · Özlüce · İst. Yolu), dönem 01.07 – 25.08.2025 (2025) · 07.07 – 31.08.2026 (2026), her iki yıl 56 gün, okul açılışına hizalı</a:t>
             </a:r>
           </a:p>
         </p:txBody>
@@ -15849,7 +16936,7 @@
                 </a:solidFill>
                 <a:latin typeface="Calibri"/>
               </a:rPr>
-              <a:t>* Kapsam: beş mağazanın tamamı — FSM · Özlüce · İst. Yolu · Heykel · Şura.</a:t>
+              <a:t>* Kapsam: beş mağazanın tamamı — FSM · Özlüce · İst. Yolu · Heykel · Şura · Ölçüm noktaları: 30.06 tabanı ve 31.08 kesimi (tarih aralığı değil, o gün fiilen çalışan kişi)</a:t>
             </a:r>
           </a:p>
         </p:txBody>
@@ -17696,7 +18783,7 @@
                 </a:solidFill>
                 <a:latin typeface="Calibri"/>
               </a:rPr>
-              <a:t>* Kapsam: beş mağazanın tamamı — FSM · Özlüce · İst. Yolu · Heykel · Şura. İş hacmi kapsamı üç POS mağazasıdır (FSM · Özlüce · İst. Yolu).</a:t>
+              <a:t>* Kapsam: beş mağazanın tamamı — FSM · Özlüce · İst. Yolu · Heykel · Şura · Ölçüm noktaları: 30.06 tabanı ve 31.08 kesimi (tarih aralığı değil, o gün fiilen çalışan kişi) İş hacmi kapsamı üç POS mağazasıdır (FSM · Özlüce · İst. Yolu).</a:t>
             </a:r>
           </a:p>
         </p:txBody>
@@ -18567,7 +19654,7 @@
                 </a:solidFill>
                 <a:latin typeface="Calibri"/>
               </a:rPr>
-              <a:t>Kıyas okul açılışına hizalı: 2025 açılış 8 Eylül, 2026 açılış 14 Eylül — her iki yıl da açılıştan geriye 56 gün. Kaynak: DerinSIS mağaza satışı, Sınav hariç, iadeler düşülmüş.</a:t>
+              <a:t>Kıyas okul açılışına hizalı: 2025 açılış 8 Eylül → dönem 01.07.2025 – 25.08.2025 · 2026 açılış 14 Eylül → dönem 07.07.2026 – 31.08.2026 (her iki yıl 56 gün). Kaynak: DerinSIS mağaza satışı, Sınav hariç, iadeler düşülmüş.</a:t>
             </a:r>
           </a:p>
         </p:txBody>
@@ -18606,7 +19693,7 @@
                 </a:solidFill>
                 <a:latin typeface="Calibri"/>
               </a:rPr>
-              <a:t>* Kapsam: üç POS mağazası — FSM · Özlüce · İst. Yolu. Heykel ve Şura POS raporlamasında olmadığı için iş hacmi ölçümlerine girmez.</a:t>
+              <a:t>* Kapsam: üç POS mağazası — FSM · Özlüce · İst. Yolu (Heykel ve Şura POS raporlamasında yok) · Dönem: 01.07 – 25.08.2025 (2025) · 07.07 – 31.08.2026 (2026), her iki yıl 56 gün, okul açılışına hizalı</a:t>
             </a:r>
           </a:p>
         </p:txBody>
@@ -19415,7 +20502,7 @@
                 </a:solidFill>
                 <a:latin typeface="Calibri"/>
               </a:rPr>
-              <a:t>* Kapsam: üç POS mağazası — FSM · Özlüce · İst. Yolu. Heykel ve Şura POS raporlamasında olmadığı için iş hacmi ölçümlerine girmez.</a:t>
+              <a:t>* Kapsam: üç POS mağazası — FSM · Özlüce · İst. Yolu (Heykel ve Şura POS raporlamasında yok) · Dönem: 01.07 – 25.08.2025 (2025) · 07.07 – 31.08.2026 (2026), her iki yıl 56 gün, okul açılışına hizalı</a:t>
             </a:r>
           </a:p>
         </p:txBody>
@@ -20107,7 +21194,7 @@
                 </a:solidFill>
                 <a:latin typeface="Calibri"/>
               </a:rPr>
-              <a:t>* Kapsam: üç POS mağazası — FSM · Özlüce · İst. Yolu. Heykel ve Şura POS raporlamasında olmadığı için iş hacmi ölçümlerine girmez.</a:t>
+              <a:t>* Kapsam: üç POS mağazası — FSM · Özlüce · İst. Yolu · Dönem: 01.01 – 31.08 (her iki yıl, kümülatif) · kadro: 31.08 kesimi, her yıl</a:t>
             </a:r>
           </a:p>
         </p:txBody>
@@ -20693,7 +21780,7 @@
                 </a:solidFill>
                 <a:latin typeface="Calibri"/>
               </a:rPr>
-              <a:t>* Kapsam: beş mağazanın tamamı — FSM · Özlüce · İst. Yolu · Heykel · Şura.</a:t>
+              <a:t>* Kapsam: beş mağazanın tamamı — FSM · Özlüce · İst. Yolu · Heykel · Şura · Ölçüm noktaları: 30.06 tabanı ve 31.08 kesimi (tarih aralığı değil, o gün fiilen çalışan kişi)</a:t>
             </a:r>
           </a:p>
         </p:txBody>

--- a/briefings/sezon-kadro-20260902/sunum-kadro-sezon2026.pptx
+++ b/briefings/sezon-kadro-20260902/sunum-kadro-sezon2026.pptx
@@ -736,6 +736,20 @@
               </a:solidFill>
             </a:ln>
           </c:spPr>
+          <c:marker>
+            <c:symbol val="circle"/>
+            <c:size val="7"/>
+            <c:spPr>
+              <a:solidFill>
+                <a:srgbClr val="E30622"/>
+              </a:solidFill>
+              <a:ln>
+                <a:solidFill>
+                  <a:srgbClr val="FFFFFF"/>
+                </a:solidFill>
+              </a:ln>
+            </c:spPr>
+          </c:marker>
           <c:cat>
             <c:strRef>
               <c:f>Sheet1!$A$2:$A$5</c:f>
@@ -6190,7 +6204,7 @@
                           </a:solidFill>
                           <a:latin typeface="Calibri"/>
                         </a:rPr>
-                        <a:t>Akademi</a:t>
+                        <a:t>Şura</a:t>
                       </a:r>
                     </a:p>
                   </a:txBody>
@@ -6213,7 +6227,7 @@
                           </a:solidFill>
                           <a:latin typeface="Calibri"/>
                         </a:rPr>
-                        <a:t>+1</a:t>
+                        <a:t>—</a:t>
                       </a:r>
                     </a:p>
                   </a:txBody>
@@ -6236,7 +6250,7 @@
                           </a:solidFill>
                           <a:latin typeface="Calibri"/>
                         </a:rPr>
-                        <a:t>0</a:t>
+                        <a:t>—</a:t>
                       </a:r>
                     </a:p>
                   </a:txBody>
@@ -6259,7 +6273,7 @@
                           </a:solidFill>
                           <a:latin typeface="Calibri"/>
                         </a:rPr>
-                        <a:t>+1</a:t>
+                        <a:t>—</a:t>
                       </a:r>
                     </a:p>
                   </a:txBody>
@@ -6282,7 +6296,7 @@
                           </a:solidFill>
                           <a:latin typeface="Calibri"/>
                         </a:rPr>
-                        <a:t>0</a:t>
+                        <a:t>—</a:t>
                       </a:r>
                     </a:p>
                   </a:txBody>
@@ -6305,7 +6319,7 @@
                           </a:solidFill>
                           <a:latin typeface="Calibri"/>
                         </a:rPr>
-                        <a:t>—</a:t>
+                        <a:t>+2</a:t>
                       </a:r>
                     </a:p>
                   </a:txBody>
@@ -6353,7 +6367,7 @@
                           </a:solidFill>
                           <a:latin typeface="Calibri"/>
                         </a:rPr>
-                        <a:t>Şura</a:t>
+                        <a:t>Akademi</a:t>
                       </a:r>
                     </a:p>
                   </a:txBody>
@@ -6376,99 +6390,99 @@
                           </a:solidFill>
                           <a:latin typeface="Calibri"/>
                         </a:rPr>
+                        <a:t>+1</a:t>
+                      </a:r>
+                    </a:p>
+                  </a:txBody>
+                  <a:tcPr>
+                    <a:solidFill>
+                      <a:srgbClr val="FFFFFF"/>
+                    </a:solidFill>
+                  </a:tcPr>
+                </a:tc>
+                <a:tc>
+                  <a:txBody>
+                    <a:bodyPr/>
+                    <a:lstStyle/>
+                    <a:p>
+                      <a:pPr algn="ctr"/>
+                      <a:r>
+                        <a:rPr sz="1050" b="0">
+                          <a:solidFill>
+                            <a:srgbClr val="333333"/>
+                          </a:solidFill>
+                          <a:latin typeface="Calibri"/>
+                        </a:rPr>
+                        <a:t>0</a:t>
+                      </a:r>
+                    </a:p>
+                  </a:txBody>
+                  <a:tcPr>
+                    <a:solidFill>
+                      <a:srgbClr val="FFFFFF"/>
+                    </a:solidFill>
+                  </a:tcPr>
+                </a:tc>
+                <a:tc>
+                  <a:txBody>
+                    <a:bodyPr/>
+                    <a:lstStyle/>
+                    <a:p>
+                      <a:pPr algn="ctr"/>
+                      <a:r>
+                        <a:rPr sz="1050" b="0">
+                          <a:solidFill>
+                            <a:srgbClr val="333333"/>
+                          </a:solidFill>
+                          <a:latin typeface="Calibri"/>
+                        </a:rPr>
+                        <a:t>+1</a:t>
+                      </a:r>
+                    </a:p>
+                  </a:txBody>
+                  <a:tcPr>
+                    <a:solidFill>
+                      <a:srgbClr val="FFFFFF"/>
+                    </a:solidFill>
+                  </a:tcPr>
+                </a:tc>
+                <a:tc>
+                  <a:txBody>
+                    <a:bodyPr/>
+                    <a:lstStyle/>
+                    <a:p>
+                      <a:pPr algn="ctr"/>
+                      <a:r>
+                        <a:rPr sz="1050" b="0">
+                          <a:solidFill>
+                            <a:srgbClr val="333333"/>
+                          </a:solidFill>
+                          <a:latin typeface="Calibri"/>
+                        </a:rPr>
+                        <a:t>0</a:t>
+                      </a:r>
+                    </a:p>
+                  </a:txBody>
+                  <a:tcPr>
+                    <a:solidFill>
+                      <a:srgbClr val="FFFFFF"/>
+                    </a:solidFill>
+                  </a:tcPr>
+                </a:tc>
+                <a:tc>
+                  <a:txBody>
+                    <a:bodyPr/>
+                    <a:lstStyle/>
+                    <a:p>
+                      <a:pPr algn="ctr"/>
+                      <a:r>
+                        <a:rPr sz="1050" b="0">
+                          <a:solidFill>
+                            <a:srgbClr val="333333"/>
+                          </a:solidFill>
+                          <a:latin typeface="Calibri"/>
+                        </a:rPr>
                         <a:t>—</a:t>
-                      </a:r>
-                    </a:p>
-                  </a:txBody>
-                  <a:tcPr>
-                    <a:solidFill>
-                      <a:srgbClr val="FFFFFF"/>
-                    </a:solidFill>
-                  </a:tcPr>
-                </a:tc>
-                <a:tc>
-                  <a:txBody>
-                    <a:bodyPr/>
-                    <a:lstStyle/>
-                    <a:p>
-                      <a:pPr algn="ctr"/>
-                      <a:r>
-                        <a:rPr sz="1050" b="0">
-                          <a:solidFill>
-                            <a:srgbClr val="333333"/>
-                          </a:solidFill>
-                          <a:latin typeface="Calibri"/>
-                        </a:rPr>
-                        <a:t>—</a:t>
-                      </a:r>
-                    </a:p>
-                  </a:txBody>
-                  <a:tcPr>
-                    <a:solidFill>
-                      <a:srgbClr val="FFFFFF"/>
-                    </a:solidFill>
-                  </a:tcPr>
-                </a:tc>
-                <a:tc>
-                  <a:txBody>
-                    <a:bodyPr/>
-                    <a:lstStyle/>
-                    <a:p>
-                      <a:pPr algn="ctr"/>
-                      <a:r>
-                        <a:rPr sz="1050" b="0">
-                          <a:solidFill>
-                            <a:srgbClr val="333333"/>
-                          </a:solidFill>
-                          <a:latin typeface="Calibri"/>
-                        </a:rPr>
-                        <a:t>—</a:t>
-                      </a:r>
-                    </a:p>
-                  </a:txBody>
-                  <a:tcPr>
-                    <a:solidFill>
-                      <a:srgbClr val="FFFFFF"/>
-                    </a:solidFill>
-                  </a:tcPr>
-                </a:tc>
-                <a:tc>
-                  <a:txBody>
-                    <a:bodyPr/>
-                    <a:lstStyle/>
-                    <a:p>
-                      <a:pPr algn="ctr"/>
-                      <a:r>
-                        <a:rPr sz="1050" b="0">
-                          <a:solidFill>
-                            <a:srgbClr val="333333"/>
-                          </a:solidFill>
-                          <a:latin typeface="Calibri"/>
-                        </a:rPr>
-                        <a:t>—</a:t>
-                      </a:r>
-                    </a:p>
-                  </a:txBody>
-                  <a:tcPr>
-                    <a:solidFill>
-                      <a:srgbClr val="FFFFFF"/>
-                    </a:solidFill>
-                  </a:tcPr>
-                </a:tc>
-                <a:tc>
-                  <a:txBody>
-                    <a:bodyPr/>
-                    <a:lstStyle/>
-                    <a:p>
-                      <a:pPr algn="ctr"/>
-                      <a:r>
-                        <a:rPr sz="1050" b="0">
-                          <a:solidFill>
-                            <a:srgbClr val="333333"/>
-                          </a:solidFill>
-                          <a:latin typeface="Calibri"/>
-                        </a:rPr>
-                        <a:t>+2</a:t>
                       </a:r>
                     </a:p>
                   </a:txBody>
@@ -6516,7 +6530,7 @@
                           </a:solidFill>
                           <a:latin typeface="Calibri"/>
                         </a:rPr>
-                        <a:t>Oyuncak</a:t>
+                        <a:t>Etkinlik</a:t>
                       </a:r>
                     </a:p>
                   </a:txBody>
@@ -6539,30 +6553,30 @@
                           </a:solidFill>
                           <a:latin typeface="Calibri"/>
                         </a:rPr>
+                        <a:t>0</a:t>
+                      </a:r>
+                    </a:p>
+                  </a:txBody>
+                  <a:tcPr>
+                    <a:solidFill>
+                      <a:srgbClr val="F2F2F2"/>
+                    </a:solidFill>
+                  </a:tcPr>
+                </a:tc>
+                <a:tc>
+                  <a:txBody>
+                    <a:bodyPr/>
+                    <a:lstStyle/>
+                    <a:p>
+                      <a:pPr algn="ctr"/>
+                      <a:r>
+                        <a:rPr sz="1050" b="0">
+                          <a:solidFill>
+                            <a:srgbClr val="333333"/>
+                          </a:solidFill>
+                          <a:latin typeface="Calibri"/>
+                        </a:rPr>
                         <a:t>+1</a:t>
-                      </a:r>
-                    </a:p>
-                  </a:txBody>
-                  <a:tcPr>
-                    <a:solidFill>
-                      <a:srgbClr val="F2F2F2"/>
-                    </a:solidFill>
-                  </a:tcPr>
-                </a:tc>
-                <a:tc>
-                  <a:txBody>
-                    <a:bodyPr/>
-                    <a:lstStyle/>
-                    <a:p>
-                      <a:pPr algn="ctr"/>
-                      <a:r>
-                        <a:rPr sz="1050" b="0">
-                          <a:solidFill>
-                            <a:srgbClr val="333333"/>
-                          </a:solidFill>
-                          <a:latin typeface="Calibri"/>
-                        </a:rPr>
-                        <a:t>0</a:t>
                       </a:r>
                     </a:p>
                   </a:txBody>
@@ -6842,7 +6856,7 @@
                           </a:solidFill>
                           <a:latin typeface="Calibri"/>
                         </a:rPr>
-                        <a:t>Etkinlik</a:t>
+                        <a:t>Oyuncak</a:t>
                       </a:r>
                     </a:p>
                   </a:txBody>
@@ -6865,30 +6879,30 @@
                           </a:solidFill>
                           <a:latin typeface="Calibri"/>
                         </a:rPr>
+                        <a:t>+1</a:t>
+                      </a:r>
+                    </a:p>
+                  </a:txBody>
+                  <a:tcPr>
+                    <a:solidFill>
+                      <a:srgbClr val="F2F2F2"/>
+                    </a:solidFill>
+                  </a:tcPr>
+                </a:tc>
+                <a:tc>
+                  <a:txBody>
+                    <a:bodyPr/>
+                    <a:lstStyle/>
+                    <a:p>
+                      <a:pPr algn="ctr"/>
+                      <a:r>
+                        <a:rPr sz="1050" b="0">
+                          <a:solidFill>
+                            <a:srgbClr val="333333"/>
+                          </a:solidFill>
+                          <a:latin typeface="Calibri"/>
+                        </a:rPr>
                         <a:t>0</a:t>
-                      </a:r>
-                    </a:p>
-                  </a:txBody>
-                  <a:tcPr>
-                    <a:solidFill>
-                      <a:srgbClr val="F2F2F2"/>
-                    </a:solidFill>
-                  </a:tcPr>
-                </a:tc>
-                <a:tc>
-                  <a:txBody>
-                    <a:bodyPr/>
-                    <a:lstStyle/>
-                    <a:p>
-                      <a:pPr algn="ctr"/>
-                      <a:r>
-                        <a:rPr sz="1050" b="0">
-                          <a:solidFill>
-                            <a:srgbClr val="333333"/>
-                          </a:solidFill>
-                          <a:latin typeface="Calibri"/>
-                        </a:rPr>
-                        <a:t>+1</a:t>
                       </a:r>
                     </a:p>
                   </a:txBody>
@@ -7005,7 +7019,7 @@
                           </a:solidFill>
                           <a:latin typeface="Calibri"/>
                         </a:rPr>
-                        <a:t>Mağaza</a:t>
+                        <a:t>İdari İşler</a:t>
                       </a:r>
                     </a:p>
                   </a:txBody>
@@ -7028,6 +7042,52 @@
                           </a:solidFill>
                           <a:latin typeface="Calibri"/>
                         </a:rPr>
+                        <a:t>+1</a:t>
+                      </a:r>
+                    </a:p>
+                  </a:txBody>
+                  <a:tcPr>
+                    <a:solidFill>
+                      <a:srgbClr val="FFFFFF"/>
+                    </a:solidFill>
+                  </a:tcPr>
+                </a:tc>
+                <a:tc>
+                  <a:txBody>
+                    <a:bodyPr/>
+                    <a:lstStyle/>
+                    <a:p>
+                      <a:pPr algn="ctr"/>
+                      <a:r>
+                        <a:rPr sz="1050" b="0">
+                          <a:solidFill>
+                            <a:srgbClr val="333333"/>
+                          </a:solidFill>
+                          <a:latin typeface="Calibri"/>
+                        </a:rPr>
+                        <a:t>-1</a:t>
+                      </a:r>
+                    </a:p>
+                  </a:txBody>
+                  <a:tcPr>
+                    <a:solidFill>
+                      <a:srgbClr val="FFFFFF"/>
+                    </a:solidFill>
+                  </a:tcPr>
+                </a:tc>
+                <a:tc>
+                  <a:txBody>
+                    <a:bodyPr/>
+                    <a:lstStyle/>
+                    <a:p>
+                      <a:pPr algn="ctr"/>
+                      <a:r>
+                        <a:rPr sz="1050" b="0">
+                          <a:solidFill>
+                            <a:srgbClr val="333333"/>
+                          </a:solidFill>
+                          <a:latin typeface="Calibri"/>
+                        </a:rPr>
                         <a:t>0</a:t>
                       </a:r>
                     </a:p>
@@ -7051,53 +7111,7 @@
                           </a:solidFill>
                           <a:latin typeface="Calibri"/>
                         </a:rPr>
-                        <a:t>0</a:t>
-                      </a:r>
-                    </a:p>
-                  </a:txBody>
-                  <a:tcPr>
-                    <a:solidFill>
-                      <a:srgbClr val="FFFFFF"/>
-                    </a:solidFill>
-                  </a:tcPr>
-                </a:tc>
-                <a:tc>
-                  <a:txBody>
-                    <a:bodyPr/>
-                    <a:lstStyle/>
-                    <a:p>
-                      <a:pPr algn="ctr"/>
-                      <a:r>
-                        <a:rPr sz="1050" b="0">
-                          <a:solidFill>
-                            <a:srgbClr val="333333"/>
-                          </a:solidFill>
-                          <a:latin typeface="Calibri"/>
-                        </a:rPr>
-                        <a:t>0</a:t>
-                      </a:r>
-                    </a:p>
-                  </a:txBody>
-                  <a:tcPr>
-                    <a:solidFill>
-                      <a:srgbClr val="FFFFFF"/>
-                    </a:solidFill>
-                  </a:tcPr>
-                </a:tc>
-                <a:tc>
-                  <a:txBody>
-                    <a:bodyPr/>
-                    <a:lstStyle/>
-                    <a:p>
-                      <a:pPr algn="ctr"/>
-                      <a:r>
-                        <a:rPr sz="1050" b="0">
-                          <a:solidFill>
-                            <a:srgbClr val="333333"/>
-                          </a:solidFill>
-                          <a:latin typeface="Calibri"/>
-                        </a:rPr>
-                        <a:t>0</a:t>
+                        <a:t>—</a:t>
                       </a:r>
                     </a:p>
                   </a:txBody>
@@ -7168,7 +7182,7 @@
                           </a:solidFill>
                           <a:latin typeface="Calibri"/>
                         </a:rPr>
-                        <a:t>İdari İşler</a:t>
+                        <a:t>Mağaza</a:t>
                       </a:r>
                     </a:p>
                   </a:txBody>
@@ -7191,7 +7205,7 @@
                           </a:solidFill>
                           <a:latin typeface="Calibri"/>
                         </a:rPr>
-                        <a:t>+1</a:t>
+                        <a:t>0</a:t>
                       </a:r>
                     </a:p>
                   </a:txBody>
@@ -7214,7 +7228,7 @@
                           </a:solidFill>
                           <a:latin typeface="Calibri"/>
                         </a:rPr>
-                        <a:t>-1</a:t>
+                        <a:t>0</a:t>
                       </a:r>
                     </a:p>
                   </a:txBody>
@@ -7260,7 +7274,7 @@
                           </a:solidFill>
                           <a:latin typeface="Calibri"/>
                         </a:rPr>
-                        <a:t>—</a:t>
+                        <a:t>0</a:t>
                       </a:r>
                     </a:p>
                   </a:txBody>
@@ -7694,8 +7708,8 @@
         </p:nvSpPr>
         <p:spPr>
           <a:xfrm>
-            <a:off x="548640" y="5504688"/>
-            <a:ext cx="7772400" cy="292608"/>
+            <a:off x="1920240" y="5669280"/>
+            <a:ext cx="9555480" cy="566928"/>
           </a:xfrm>
           <a:prstGeom prst="rect">
             <a:avLst/>
@@ -7710,11 +7724,11 @@
           <a:p>
             <a:pPr algn="l">
               <a:lnSpc>
-                <a:spcPct val="100000"/>
+                <a:spcPct val="105000"/>
               </a:lnSpc>
             </a:pPr>
             <a:r>
-              <a:rPr sz="900" b="0">
+              <a:rPr sz="800" b="0">
                 <a:solidFill>
                   <a:srgbClr val="9A9A9A"/>
                 </a:solidFill>
@@ -8790,8 +8804,8 @@
         </p:nvSpPr>
         <p:spPr>
           <a:xfrm>
-            <a:off x="548640" y="5504688"/>
-            <a:ext cx="7772400" cy="292608"/>
+            <a:off x="1920240" y="5669280"/>
+            <a:ext cx="9555480" cy="566928"/>
           </a:xfrm>
           <a:prstGeom prst="rect">
             <a:avLst/>
@@ -8806,11 +8820,11 @@
           <a:p>
             <a:pPr algn="l">
               <a:lnSpc>
-                <a:spcPct val="100000"/>
+                <a:spcPct val="105000"/>
               </a:lnSpc>
             </a:pPr>
             <a:r>
-              <a:rPr sz="900" b="0">
+              <a:rPr sz="800" b="0">
                 <a:solidFill>
                   <a:srgbClr val="9A9A9A"/>
                 </a:solidFill>
@@ -10089,8 +10103,8 @@
         </p:nvSpPr>
         <p:spPr>
           <a:xfrm>
-            <a:off x="548640" y="5504688"/>
-            <a:ext cx="7772400" cy="292608"/>
+            <a:off x="1920240" y="5669280"/>
+            <a:ext cx="9555480" cy="566928"/>
           </a:xfrm>
           <a:prstGeom prst="rect">
             <a:avLst/>
@@ -10105,11 +10119,11 @@
           <a:p>
             <a:pPr algn="l">
               <a:lnSpc>
-                <a:spcPct val="100000"/>
+                <a:spcPct val="105000"/>
               </a:lnSpc>
             </a:pPr>
             <a:r>
-              <a:rPr sz="900" b="0">
+              <a:rPr sz="800" b="0">
                 <a:solidFill>
                   <a:srgbClr val="9A9A9A"/>
                 </a:solidFill>
@@ -10221,7 +10235,7 @@
         <p:spPr>
           <a:xfrm>
             <a:off x="548640" y="1371600"/>
-            <a:ext cx="3566160" cy="1600200"/>
+            <a:ext cx="3566160" cy="1828800"/>
           </a:xfrm>
           <a:prstGeom prst="roundRect">
             <a:avLst/>
@@ -10310,8 +10324,8 @@
         </p:nvSpPr>
         <p:spPr>
           <a:xfrm>
-            <a:off x="749808" y="1572768"/>
-            <a:ext cx="3200400" cy="274320"/>
+            <a:off x="749808" y="1536192"/>
+            <a:ext cx="3218688" cy="384048"/>
           </a:xfrm>
           <a:prstGeom prst="rect">
             <a:avLst/>
@@ -10326,17 +10340,17 @@
           <a:p>
             <a:pPr algn="l">
               <a:lnSpc>
-                <a:spcPct val="100000"/>
+                <a:spcPct val="105000"/>
               </a:lnSpc>
             </a:pPr>
             <a:r>
-              <a:rPr sz="1000" b="1">
+              <a:rPr sz="900" b="1">
                 <a:solidFill>
                   <a:srgbClr val="6E6E6E"/>
                 </a:solidFill>
                 <a:latin typeface="Calibri"/>
               </a:rPr>
-              <a:t>AĞUSTOS · GERÇEKLEŞEN</a:t>
+              <a:t>AĞUSTOS · GERÇEK</a:t>
             </a:r>
           </a:p>
         </p:txBody>
@@ -10349,8 +10363,8 @@
         </p:nvSpPr>
         <p:spPr>
           <a:xfrm>
-            <a:off x="749808" y="1847088"/>
-            <a:ext cx="3200400" cy="640080"/>
+            <a:off x="749808" y="1975104"/>
+            <a:ext cx="3218688" cy="658368"/>
           </a:xfrm>
           <a:prstGeom prst="rect">
             <a:avLst/>
@@ -10388,8 +10402,8 @@
         </p:nvSpPr>
         <p:spPr>
           <a:xfrm>
-            <a:off x="749808" y="2505456"/>
-            <a:ext cx="3200400" cy="411480"/>
+            <a:off x="749808" y="2688336"/>
+            <a:ext cx="3218688" cy="457200"/>
           </a:xfrm>
           <a:prstGeom prst="rect">
             <a:avLst/>
@@ -10404,11 +10418,11 @@
           <a:p>
             <a:pPr algn="l">
               <a:lnSpc>
-                <a:spcPct val="100000"/>
+                <a:spcPct val="105000"/>
               </a:lnSpc>
             </a:pPr>
             <a:r>
-              <a:rPr sz="1050" b="0">
+              <a:rPr sz="1000" b="0">
                 <a:solidFill>
                   <a:srgbClr val="6E6E6E"/>
                 </a:solidFill>
@@ -10428,7 +10442,7 @@
         <p:spPr>
           <a:xfrm>
             <a:off x="4279392" y="1371600"/>
-            <a:ext cx="3566160" cy="1600200"/>
+            <a:ext cx="3566160" cy="1828800"/>
           </a:xfrm>
           <a:prstGeom prst="roundRect">
             <a:avLst/>
@@ -10517,8 +10531,8 @@
         </p:nvSpPr>
         <p:spPr>
           <a:xfrm>
-            <a:off x="4480559" y="1572768"/>
-            <a:ext cx="3200400" cy="274320"/>
+            <a:off x="4480559" y="1536192"/>
+            <a:ext cx="3218688" cy="384048"/>
           </a:xfrm>
           <a:prstGeom prst="rect">
             <a:avLst/>
@@ -10533,17 +10547,17 @@
           <a:p>
             <a:pPr algn="l">
               <a:lnSpc>
-                <a:spcPct val="100000"/>
+                <a:spcPct val="105000"/>
               </a:lnSpc>
             </a:pPr>
             <a:r>
-              <a:rPr sz="1000" b="1">
+              <a:rPr sz="900" b="1">
                 <a:solidFill>
                   <a:srgbClr val="6E6E6E"/>
                 </a:solidFill>
                 <a:latin typeface="Calibri"/>
               </a:rPr>
-              <a:t>AĞUSTOS · KAYMA OLMASAYDI</a:t>
+              <a:t>AĞUSTOS · KAYMASIZ</a:t>
             </a:r>
           </a:p>
         </p:txBody>
@@ -10556,8 +10570,8 @@
         </p:nvSpPr>
         <p:spPr>
           <a:xfrm>
-            <a:off x="4480559" y="1847088"/>
-            <a:ext cx="3200400" cy="640080"/>
+            <a:off x="4480559" y="1975104"/>
+            <a:ext cx="3218688" cy="658368"/>
           </a:xfrm>
           <a:prstGeom prst="rect">
             <a:avLst/>
@@ -10595,8 +10609,8 @@
         </p:nvSpPr>
         <p:spPr>
           <a:xfrm>
-            <a:off x="4480559" y="2505456"/>
-            <a:ext cx="3200400" cy="411480"/>
+            <a:off x="4480559" y="2688336"/>
+            <a:ext cx="3218688" cy="457200"/>
           </a:xfrm>
           <a:prstGeom prst="rect">
             <a:avLst/>
@@ -10611,11 +10625,11 @@
           <a:p>
             <a:pPr algn="l">
               <a:lnSpc>
-                <a:spcPct val="100000"/>
+                <a:spcPct val="105000"/>
               </a:lnSpc>
             </a:pPr>
             <a:r>
-              <a:rPr sz="1050" b="0">
+              <a:rPr sz="1000" b="0">
                 <a:solidFill>
                   <a:srgbClr val="6E6E6E"/>
                 </a:solidFill>
@@ -10635,7 +10649,7 @@
         <p:spPr>
           <a:xfrm>
             <a:off x="8001000" y="1371600"/>
-            <a:ext cx="3566160" cy="1600200"/>
+            <a:ext cx="3566160" cy="1828800"/>
           </a:xfrm>
           <a:prstGeom prst="roundRect">
             <a:avLst/>
@@ -10724,8 +10738,8 @@
         </p:nvSpPr>
         <p:spPr>
           <a:xfrm>
-            <a:off x="8202168" y="1572768"/>
-            <a:ext cx="3200400" cy="274320"/>
+            <a:off x="8202168" y="1536192"/>
+            <a:ext cx="3218688" cy="384048"/>
           </a:xfrm>
           <a:prstGeom prst="rect">
             <a:avLst/>
@@ -10740,11 +10754,11 @@
           <a:p>
             <a:pPr algn="l">
               <a:lnSpc>
-                <a:spcPct val="100000"/>
+                <a:spcPct val="105000"/>
               </a:lnSpc>
             </a:pPr>
             <a:r>
-              <a:rPr sz="1000" b="1">
+              <a:rPr sz="900" b="1">
                 <a:solidFill>
                   <a:srgbClr val="6E6E6E"/>
                 </a:solidFill>
@@ -10763,8 +10777,8 @@
         </p:nvSpPr>
         <p:spPr>
           <a:xfrm>
-            <a:off x="8202168" y="1847088"/>
-            <a:ext cx="3200400" cy="640080"/>
+            <a:off x="8202168" y="1975104"/>
+            <a:ext cx="3218688" cy="658368"/>
           </a:xfrm>
           <a:prstGeom prst="rect">
             <a:avLst/>
@@ -10802,8 +10816,8 @@
         </p:nvSpPr>
         <p:spPr>
           <a:xfrm>
-            <a:off x="8202168" y="2505456"/>
-            <a:ext cx="3200400" cy="411480"/>
+            <a:off x="8202168" y="2688336"/>
+            <a:ext cx="3218688" cy="457200"/>
           </a:xfrm>
           <a:prstGeom prst="rect">
             <a:avLst/>
@@ -10818,11 +10832,11 @@
           <a:p>
             <a:pPr algn="l">
               <a:lnSpc>
-                <a:spcPct val="100000"/>
+                <a:spcPct val="105000"/>
               </a:lnSpc>
             </a:pPr>
             <a:r>
-              <a:rPr sz="1050" b="0">
+              <a:rPr sz="1000" b="0">
                 <a:solidFill>
                   <a:srgbClr val="6E6E6E"/>
                 </a:solidFill>
@@ -10960,8 +10974,8 @@
         </p:nvSpPr>
         <p:spPr>
           <a:xfrm>
-            <a:off x="548640" y="5504688"/>
-            <a:ext cx="7772400" cy="292608"/>
+            <a:off x="1920240" y="5669280"/>
+            <a:ext cx="9555480" cy="566928"/>
           </a:xfrm>
           <a:prstGeom prst="rect">
             <a:avLst/>
@@ -10976,11 +10990,11 @@
           <a:p>
             <a:pPr algn="l">
               <a:lnSpc>
-                <a:spcPct val="100000"/>
+                <a:spcPct val="105000"/>
               </a:lnSpc>
             </a:pPr>
             <a:r>
-              <a:rPr sz="900" b="0">
+              <a:rPr sz="800" b="0">
                 <a:solidFill>
                   <a:srgbClr val="9A9A9A"/>
                 </a:solidFill>
@@ -11859,8 +11873,8 @@
         </p:nvSpPr>
         <p:spPr>
           <a:xfrm>
-            <a:off x="548640" y="5504688"/>
-            <a:ext cx="7772400" cy="292608"/>
+            <a:off x="1920240" y="5669280"/>
+            <a:ext cx="9555480" cy="566928"/>
           </a:xfrm>
           <a:prstGeom prst="rect">
             <a:avLst/>
@@ -11875,11 +11889,11 @@
           <a:p>
             <a:pPr algn="l">
               <a:lnSpc>
-                <a:spcPct val="100000"/>
+                <a:spcPct val="105000"/>
               </a:lnSpc>
             </a:pPr>
             <a:r>
-              <a:rPr sz="900" b="0">
+              <a:rPr sz="800" b="0">
                 <a:solidFill>
                   <a:srgbClr val="9A9A9A"/>
                 </a:solidFill>
@@ -12507,8 +12521,8 @@
         </p:nvSpPr>
         <p:spPr>
           <a:xfrm>
-            <a:off x="548640" y="5504688"/>
-            <a:ext cx="7772400" cy="292608"/>
+            <a:off x="1920240" y="5669280"/>
+            <a:ext cx="9555480" cy="566928"/>
           </a:xfrm>
           <a:prstGeom prst="rect">
             <a:avLst/>
@@ -12523,11 +12537,11 @@
           <a:p>
             <a:pPr algn="l">
               <a:lnSpc>
-                <a:spcPct val="100000"/>
+                <a:spcPct val="105000"/>
               </a:lnSpc>
             </a:pPr>
             <a:r>
-              <a:rPr sz="900" b="0">
+              <a:rPr sz="800" b="0">
                 <a:solidFill>
                   <a:srgbClr val="9A9A9A"/>
                 </a:solidFill>
@@ -14221,7 +14235,7 @@
         <p:spPr>
           <a:xfrm>
             <a:off x="548640" y="1371600"/>
-            <a:ext cx="2651760" cy="1600200"/>
+            <a:ext cx="2651760" cy="1828800"/>
           </a:xfrm>
           <a:prstGeom prst="roundRect">
             <a:avLst/>
@@ -14310,8 +14324,8 @@
         </p:nvSpPr>
         <p:spPr>
           <a:xfrm>
-            <a:off x="749808" y="1572768"/>
-            <a:ext cx="2286000" cy="274320"/>
+            <a:off x="749808" y="1536192"/>
+            <a:ext cx="2304288" cy="384048"/>
           </a:xfrm>
           <a:prstGeom prst="rect">
             <a:avLst/>
@@ -14326,11 +14340,11 @@
           <a:p>
             <a:pPr algn="l">
               <a:lnSpc>
-                <a:spcPct val="100000"/>
+                <a:spcPct val="105000"/>
               </a:lnSpc>
             </a:pPr>
             <a:r>
-              <a:rPr sz="1000" b="1">
+              <a:rPr sz="900" b="1">
                 <a:solidFill>
                   <a:srgbClr val="6E6E6E"/>
                 </a:solidFill>
@@ -14349,8 +14363,8 @@
         </p:nvSpPr>
         <p:spPr>
           <a:xfrm>
-            <a:off x="749808" y="1847088"/>
-            <a:ext cx="2286000" cy="640080"/>
+            <a:off x="749808" y="1975104"/>
+            <a:ext cx="2304288" cy="658368"/>
           </a:xfrm>
           <a:prstGeom prst="rect">
             <a:avLst/>
@@ -14388,8 +14402,8 @@
         </p:nvSpPr>
         <p:spPr>
           <a:xfrm>
-            <a:off x="749808" y="2505456"/>
-            <a:ext cx="2286000" cy="411480"/>
+            <a:off x="749808" y="2688336"/>
+            <a:ext cx="2304288" cy="457200"/>
           </a:xfrm>
           <a:prstGeom prst="rect">
             <a:avLst/>
@@ -14404,11 +14418,11 @@
           <a:p>
             <a:pPr algn="l">
               <a:lnSpc>
-                <a:spcPct val="100000"/>
+                <a:spcPct val="105000"/>
               </a:lnSpc>
             </a:pPr>
             <a:r>
-              <a:rPr sz="1050" b="0">
+              <a:rPr sz="1000" b="0">
                 <a:solidFill>
                   <a:srgbClr val="6E6E6E"/>
                 </a:solidFill>
@@ -14428,7 +14442,7 @@
         <p:spPr>
           <a:xfrm>
             <a:off x="3337560" y="1371600"/>
-            <a:ext cx="2651760" cy="1600200"/>
+            <a:ext cx="2651760" cy="1828800"/>
           </a:xfrm>
           <a:prstGeom prst="roundRect">
             <a:avLst/>
@@ -14517,8 +14531,8 @@
         </p:nvSpPr>
         <p:spPr>
           <a:xfrm>
-            <a:off x="3538728" y="1572768"/>
-            <a:ext cx="2286000" cy="274320"/>
+            <a:off x="3538728" y="1536192"/>
+            <a:ext cx="2304288" cy="384048"/>
           </a:xfrm>
           <a:prstGeom prst="rect">
             <a:avLst/>
@@ -14533,11 +14547,11 @@
           <a:p>
             <a:pPr algn="l">
               <a:lnSpc>
-                <a:spcPct val="100000"/>
+                <a:spcPct val="105000"/>
               </a:lnSpc>
             </a:pPr>
             <a:r>
-              <a:rPr sz="1000" b="1">
+              <a:rPr sz="900" b="1">
                 <a:solidFill>
                   <a:srgbClr val="6E6E6E"/>
                 </a:solidFill>
@@ -14556,8 +14570,8 @@
         </p:nvSpPr>
         <p:spPr>
           <a:xfrm>
-            <a:off x="3538728" y="1847088"/>
-            <a:ext cx="2286000" cy="640080"/>
+            <a:off x="3538728" y="1975104"/>
+            <a:ext cx="2304288" cy="658368"/>
           </a:xfrm>
           <a:prstGeom prst="rect">
             <a:avLst/>
@@ -14595,8 +14609,8 @@
         </p:nvSpPr>
         <p:spPr>
           <a:xfrm>
-            <a:off x="3538728" y="2505456"/>
-            <a:ext cx="2286000" cy="411480"/>
+            <a:off x="3538728" y="2688336"/>
+            <a:ext cx="2304288" cy="457200"/>
           </a:xfrm>
           <a:prstGeom prst="rect">
             <a:avLst/>
@@ -14611,11 +14625,11 @@
           <a:p>
             <a:pPr algn="l">
               <a:lnSpc>
-                <a:spcPct val="100000"/>
+                <a:spcPct val="105000"/>
               </a:lnSpc>
             </a:pPr>
             <a:r>
-              <a:rPr sz="1050" b="0">
+              <a:rPr sz="1000" b="0">
                 <a:solidFill>
                   <a:srgbClr val="6E6E6E"/>
                 </a:solidFill>
@@ -14635,7 +14649,7 @@
         <p:spPr>
           <a:xfrm>
             <a:off x="6126480" y="1371600"/>
-            <a:ext cx="2651760" cy="1600200"/>
+            <a:ext cx="2651760" cy="1828800"/>
           </a:xfrm>
           <a:prstGeom prst="roundRect">
             <a:avLst/>
@@ -14724,8 +14738,8 @@
         </p:nvSpPr>
         <p:spPr>
           <a:xfrm>
-            <a:off x="6327648" y="1572768"/>
-            <a:ext cx="2286000" cy="274320"/>
+            <a:off x="6327648" y="1536192"/>
+            <a:ext cx="2304288" cy="384048"/>
           </a:xfrm>
           <a:prstGeom prst="rect">
             <a:avLst/>
@@ -14740,11 +14754,11 @@
           <a:p>
             <a:pPr algn="l">
               <a:lnSpc>
-                <a:spcPct val="100000"/>
+                <a:spcPct val="105000"/>
               </a:lnSpc>
             </a:pPr>
             <a:r>
-              <a:rPr sz="1000" b="1">
+              <a:rPr sz="900" b="1">
                 <a:solidFill>
                   <a:srgbClr val="6E6E6E"/>
                 </a:solidFill>
@@ -14763,8 +14777,8 @@
         </p:nvSpPr>
         <p:spPr>
           <a:xfrm>
-            <a:off x="6327648" y="1847088"/>
-            <a:ext cx="2286000" cy="640080"/>
+            <a:off x="6327648" y="1975104"/>
+            <a:ext cx="2304288" cy="658368"/>
           </a:xfrm>
           <a:prstGeom prst="rect">
             <a:avLst/>
@@ -14802,8 +14816,8 @@
         </p:nvSpPr>
         <p:spPr>
           <a:xfrm>
-            <a:off x="6327648" y="2505456"/>
-            <a:ext cx="2286000" cy="411480"/>
+            <a:off x="6327648" y="2688336"/>
+            <a:ext cx="2304288" cy="457200"/>
           </a:xfrm>
           <a:prstGeom prst="rect">
             <a:avLst/>
@@ -14818,11 +14832,11 @@
           <a:p>
             <a:pPr algn="l">
               <a:lnSpc>
-                <a:spcPct val="100000"/>
+                <a:spcPct val="105000"/>
               </a:lnSpc>
             </a:pPr>
             <a:r>
-              <a:rPr sz="1050" b="0">
+              <a:rPr sz="1000" b="0">
                 <a:solidFill>
                   <a:srgbClr val="6E6E6E"/>
                 </a:solidFill>
@@ -14842,7 +14856,7 @@
         <p:spPr>
           <a:xfrm>
             <a:off x="8915400" y="1371600"/>
-            <a:ext cx="2651760" cy="1600200"/>
+            <a:ext cx="2651760" cy="1828800"/>
           </a:xfrm>
           <a:prstGeom prst="roundRect">
             <a:avLst/>
@@ -14931,8 +14945,8 @@
         </p:nvSpPr>
         <p:spPr>
           <a:xfrm>
-            <a:off x="9116568" y="1572768"/>
-            <a:ext cx="2286000" cy="274320"/>
+            <a:off x="9116568" y="1536192"/>
+            <a:ext cx="2304288" cy="384048"/>
           </a:xfrm>
           <a:prstGeom prst="rect">
             <a:avLst/>
@@ -14947,11 +14961,11 @@
           <a:p>
             <a:pPr algn="l">
               <a:lnSpc>
-                <a:spcPct val="100000"/>
+                <a:spcPct val="105000"/>
               </a:lnSpc>
             </a:pPr>
             <a:r>
-              <a:rPr sz="1000" b="1">
+              <a:rPr sz="900" b="1">
                 <a:solidFill>
                   <a:srgbClr val="6E6E6E"/>
                 </a:solidFill>
@@ -14970,8 +14984,8 @@
         </p:nvSpPr>
         <p:spPr>
           <a:xfrm>
-            <a:off x="9116568" y="1847088"/>
-            <a:ext cx="2286000" cy="640080"/>
+            <a:off x="9116568" y="1975104"/>
+            <a:ext cx="2304288" cy="658368"/>
           </a:xfrm>
           <a:prstGeom prst="rect">
             <a:avLst/>
@@ -15009,8 +15023,8 @@
         </p:nvSpPr>
         <p:spPr>
           <a:xfrm>
-            <a:off x="9116568" y="2505456"/>
-            <a:ext cx="2286000" cy="411480"/>
+            <a:off x="9116568" y="2688336"/>
+            <a:ext cx="2304288" cy="457200"/>
           </a:xfrm>
           <a:prstGeom prst="rect">
             <a:avLst/>
@@ -15025,11 +15039,11 @@
           <a:p>
             <a:pPr algn="l">
               <a:lnSpc>
-                <a:spcPct val="100000"/>
+                <a:spcPct val="105000"/>
               </a:lnSpc>
             </a:pPr>
             <a:r>
-              <a:rPr sz="1050" b="0">
+              <a:rPr sz="1000" b="0">
                 <a:solidFill>
                   <a:srgbClr val="6E6E6E"/>
                 </a:solidFill>
@@ -15048,8 +15062,8 @@
         </p:nvSpPr>
         <p:spPr>
           <a:xfrm>
-            <a:off x="548640" y="3291840"/>
-            <a:ext cx="11018520" cy="914400"/>
+            <a:off x="548640" y="3429000"/>
+            <a:ext cx="11018520" cy="868680"/>
           </a:xfrm>
           <a:prstGeom prst="roundRect">
             <a:avLst/>
@@ -15094,8 +15108,8 @@
         </p:nvSpPr>
         <p:spPr>
           <a:xfrm>
-            <a:off x="822960" y="3291840"/>
-            <a:ext cx="10515600" cy="914400"/>
+            <a:off x="822960" y="3429000"/>
+            <a:ext cx="10515600" cy="868680"/>
           </a:xfrm>
           <a:prstGeom prst="rect">
             <a:avLst/>
@@ -15133,8 +15147,8 @@
         </p:nvSpPr>
         <p:spPr>
           <a:xfrm>
-            <a:off x="548640" y="4389120"/>
-            <a:ext cx="5394960" cy="1051560"/>
+            <a:off x="548640" y="4434840"/>
+            <a:ext cx="5394960" cy="1005840"/>
           </a:xfrm>
           <a:prstGeom prst="roundRect">
             <a:avLst/>
@@ -15179,7 +15193,7 @@
         </p:nvSpPr>
         <p:spPr>
           <a:xfrm>
-            <a:off x="548640" y="4389120"/>
+            <a:off x="548640" y="4434840"/>
             <a:ext cx="5394960" cy="64008"/>
           </a:xfrm>
           <a:prstGeom prst="rect">
@@ -15223,7 +15237,7 @@
         </p:nvSpPr>
         <p:spPr>
           <a:xfrm>
-            <a:off x="777240" y="4498848"/>
+            <a:off x="777240" y="4526280"/>
             <a:ext cx="4937760" cy="274320"/>
           </a:xfrm>
           <a:prstGeom prst="rect">
@@ -15262,8 +15276,8 @@
         </p:nvSpPr>
         <p:spPr>
           <a:xfrm>
-            <a:off x="777240" y="4773168"/>
-            <a:ext cx="4937760" cy="594360"/>
+            <a:off x="777240" y="4800600"/>
+            <a:ext cx="4937760" cy="548640"/>
           </a:xfrm>
           <a:prstGeom prst="rect">
             <a:avLst/>
@@ -15301,8 +15315,8 @@
         </p:nvSpPr>
         <p:spPr>
           <a:xfrm>
-            <a:off x="6172200" y="4389120"/>
-            <a:ext cx="5394960" cy="1051560"/>
+            <a:off x="6172200" y="4434840"/>
+            <a:ext cx="5394960" cy="1005840"/>
           </a:xfrm>
           <a:prstGeom prst="roundRect">
             <a:avLst/>
@@ -15347,7 +15361,7 @@
         </p:nvSpPr>
         <p:spPr>
           <a:xfrm>
-            <a:off x="6172200" y="4389120"/>
+            <a:off x="6172200" y="4434840"/>
             <a:ext cx="5394960" cy="64008"/>
           </a:xfrm>
           <a:prstGeom prst="rect">
@@ -15391,7 +15405,7 @@
         </p:nvSpPr>
         <p:spPr>
           <a:xfrm>
-            <a:off x="6400800" y="4498848"/>
+            <a:off x="6400800" y="4526280"/>
             <a:ext cx="4937760" cy="274320"/>
           </a:xfrm>
           <a:prstGeom prst="rect">
@@ -15430,8 +15444,8 @@
         </p:nvSpPr>
         <p:spPr>
           <a:xfrm>
-            <a:off x="6400800" y="4773168"/>
-            <a:ext cx="4937760" cy="594360"/>
+            <a:off x="6400800" y="4800600"/>
+            <a:ext cx="4937760" cy="548640"/>
           </a:xfrm>
           <a:prstGeom prst="rect">
             <a:avLst/>
@@ -15469,8 +15483,8 @@
         </p:nvSpPr>
         <p:spPr>
           <a:xfrm>
-            <a:off x="548640" y="5504688"/>
-            <a:ext cx="7772400" cy="292608"/>
+            <a:off x="1920240" y="5669280"/>
+            <a:ext cx="9555480" cy="566928"/>
           </a:xfrm>
           <a:prstGeom prst="rect">
             <a:avLst/>
@@ -15485,11 +15499,11 @@
           <a:p>
             <a:pPr algn="l">
               <a:lnSpc>
-                <a:spcPct val="100000"/>
+                <a:spcPct val="105000"/>
               </a:lnSpc>
             </a:pPr>
             <a:r>
-              <a:rPr sz="900" b="0">
+              <a:rPr sz="800" b="0">
                 <a:solidFill>
                   <a:srgbClr val="9A9A9A"/>
                 </a:solidFill>
@@ -16910,8 +16924,8 @@
         </p:nvSpPr>
         <p:spPr>
           <a:xfrm>
-            <a:off x="548640" y="5504688"/>
-            <a:ext cx="7772400" cy="292608"/>
+            <a:off x="1920240" y="5669280"/>
+            <a:ext cx="9555480" cy="566928"/>
           </a:xfrm>
           <a:prstGeom prst="rect">
             <a:avLst/>
@@ -16926,11 +16940,11 @@
           <a:p>
             <a:pPr algn="l">
               <a:lnSpc>
-                <a:spcPct val="100000"/>
+                <a:spcPct val="105000"/>
               </a:lnSpc>
             </a:pPr>
             <a:r>
-              <a:rPr sz="900" b="0">
+              <a:rPr sz="800" b="0">
                 <a:solidFill>
                   <a:srgbClr val="9A9A9A"/>
                 </a:solidFill>
@@ -18757,8 +18771,8 @@
         </p:nvSpPr>
         <p:spPr>
           <a:xfrm>
-            <a:off x="548640" y="5504688"/>
-            <a:ext cx="7772400" cy="292608"/>
+            <a:off x="1920240" y="5669280"/>
+            <a:ext cx="9555480" cy="566928"/>
           </a:xfrm>
           <a:prstGeom prst="rect">
             <a:avLst/>
@@ -18773,11 +18787,11 @@
           <a:p>
             <a:pPr algn="l">
               <a:lnSpc>
-                <a:spcPct val="100000"/>
+                <a:spcPct val="105000"/>
               </a:lnSpc>
             </a:pPr>
             <a:r>
-              <a:rPr sz="900" b="0">
+              <a:rPr sz="800" b="0">
                 <a:solidFill>
                   <a:srgbClr val="9A9A9A"/>
                 </a:solidFill>
@@ -18889,7 +18903,7 @@
         <p:spPr>
           <a:xfrm>
             <a:off x="548640" y="1371600"/>
-            <a:ext cx="3566160" cy="1600200"/>
+            <a:ext cx="3566160" cy="1828800"/>
           </a:xfrm>
           <a:prstGeom prst="roundRect">
             <a:avLst/>
@@ -18978,8 +18992,8 @@
         </p:nvSpPr>
         <p:spPr>
           <a:xfrm>
-            <a:off x="749808" y="1572768"/>
-            <a:ext cx="3200400" cy="274320"/>
+            <a:off x="749808" y="1536192"/>
+            <a:ext cx="3218688" cy="384048"/>
           </a:xfrm>
           <a:prstGeom prst="rect">
             <a:avLst/>
@@ -18994,11 +19008,11 @@
           <a:p>
             <a:pPr algn="l">
               <a:lnSpc>
-                <a:spcPct val="100000"/>
+                <a:spcPct val="105000"/>
               </a:lnSpc>
             </a:pPr>
             <a:r>
-              <a:rPr sz="1000" b="1">
+              <a:rPr sz="900" b="1">
                 <a:solidFill>
                   <a:srgbClr val="6E6E6E"/>
                 </a:solidFill>
@@ -19017,8 +19031,8 @@
         </p:nvSpPr>
         <p:spPr>
           <a:xfrm>
-            <a:off x="749808" y="1847088"/>
-            <a:ext cx="3200400" cy="640080"/>
+            <a:off x="749808" y="1975104"/>
+            <a:ext cx="3218688" cy="658368"/>
           </a:xfrm>
           <a:prstGeom prst="rect">
             <a:avLst/>
@@ -19056,8 +19070,8 @@
         </p:nvSpPr>
         <p:spPr>
           <a:xfrm>
-            <a:off x="749808" y="2505456"/>
-            <a:ext cx="3200400" cy="411480"/>
+            <a:off x="749808" y="2688336"/>
+            <a:ext cx="3218688" cy="457200"/>
           </a:xfrm>
           <a:prstGeom prst="rect">
             <a:avLst/>
@@ -19072,11 +19086,11 @@
           <a:p>
             <a:pPr algn="l">
               <a:lnSpc>
-                <a:spcPct val="100000"/>
+                <a:spcPct val="105000"/>
               </a:lnSpc>
             </a:pPr>
             <a:r>
-              <a:rPr sz="1050" b="0">
+              <a:rPr sz="1000" b="0">
                 <a:solidFill>
                   <a:srgbClr val="6E6E6E"/>
                 </a:solidFill>
@@ -19096,7 +19110,7 @@
         <p:spPr>
           <a:xfrm>
             <a:off x="4279392" y="1371600"/>
-            <a:ext cx="3566160" cy="1600200"/>
+            <a:ext cx="3566160" cy="1828800"/>
           </a:xfrm>
           <a:prstGeom prst="roundRect">
             <a:avLst/>
@@ -19185,8 +19199,8 @@
         </p:nvSpPr>
         <p:spPr>
           <a:xfrm>
-            <a:off x="4480559" y="1572768"/>
-            <a:ext cx="3200400" cy="274320"/>
+            <a:off x="4480559" y="1536192"/>
+            <a:ext cx="3218688" cy="384048"/>
           </a:xfrm>
           <a:prstGeom prst="rect">
             <a:avLst/>
@@ -19201,17 +19215,17 @@
           <a:p>
             <a:pPr algn="l">
               <a:lnSpc>
-                <a:spcPct val="100000"/>
+                <a:spcPct val="105000"/>
               </a:lnSpc>
             </a:pPr>
             <a:r>
-              <a:rPr sz="1000" b="1">
+              <a:rPr sz="900" b="1">
                 <a:solidFill>
                   <a:srgbClr val="6E6E6E"/>
                 </a:solidFill>
                 <a:latin typeface="Calibri"/>
               </a:rPr>
-              <a:t>CİRO (KDV DAHİL)</a:t>
+              <a:t>CİRO · KDV DAHİL</a:t>
             </a:r>
           </a:p>
         </p:txBody>
@@ -19224,8 +19238,8 @@
         </p:nvSpPr>
         <p:spPr>
           <a:xfrm>
-            <a:off x="4480559" y="1847088"/>
-            <a:ext cx="3200400" cy="640080"/>
+            <a:off x="4480559" y="1975104"/>
+            <a:ext cx="3218688" cy="658368"/>
           </a:xfrm>
           <a:prstGeom prst="rect">
             <a:avLst/>
@@ -19263,8 +19277,8 @@
         </p:nvSpPr>
         <p:spPr>
           <a:xfrm>
-            <a:off x="4480559" y="2505456"/>
-            <a:ext cx="3200400" cy="411480"/>
+            <a:off x="4480559" y="2688336"/>
+            <a:ext cx="3218688" cy="457200"/>
           </a:xfrm>
           <a:prstGeom prst="rect">
             <a:avLst/>
@@ -19279,11 +19293,11 @@
           <a:p>
             <a:pPr algn="l">
               <a:lnSpc>
-                <a:spcPct val="100000"/>
+                <a:spcPct val="105000"/>
               </a:lnSpc>
             </a:pPr>
             <a:r>
-              <a:rPr sz="1050" b="0">
+              <a:rPr sz="1000" b="0">
                 <a:solidFill>
                   <a:srgbClr val="6E6E6E"/>
                 </a:solidFill>
@@ -19303,7 +19317,7 @@
         <p:spPr>
           <a:xfrm>
             <a:off x="8001000" y="1371600"/>
-            <a:ext cx="3566160" cy="1600200"/>
+            <a:ext cx="3566160" cy="1828800"/>
           </a:xfrm>
           <a:prstGeom prst="roundRect">
             <a:avLst/>
@@ -19355,7 +19369,7 @@
             <a:avLst/>
           </a:prstGeom>
           <a:solidFill>
-            <a:srgbClr val="2B2B2B"/>
+            <a:srgbClr val="9A9A9A"/>
           </a:solidFill>
           <a:ln>
             <a:noFill/>
@@ -19392,8 +19406,47 @@
         </p:nvSpPr>
         <p:spPr>
           <a:xfrm>
-            <a:off x="8202168" y="1572768"/>
-            <a:ext cx="3200400" cy="274320"/>
+            <a:off x="8202168" y="1536192"/>
+            <a:ext cx="3218688" cy="384048"/>
+          </a:xfrm>
+          <a:prstGeom prst="rect">
+            <a:avLst/>
+          </a:prstGeom>
+          <a:noFill/>
+        </p:spPr>
+        <p:txBody>
+          <a:bodyPr wrap="square" anchor="t">
+            <a:spAutoFit/>
+          </a:bodyPr>
+          <a:lstStyle/>
+          <a:p>
+            <a:pPr algn="l">
+              <a:lnSpc>
+                <a:spcPct val="105000"/>
+              </a:lnSpc>
+            </a:pPr>
+            <a:r>
+              <a:rPr sz="900" b="1">
+                <a:solidFill>
+                  <a:srgbClr val="6E6E6E"/>
+                </a:solidFill>
+                <a:latin typeface="Calibri"/>
+              </a:rPr>
+              <a:t>KADRO · 3 MAĞAZA</a:t>
+            </a:r>
+          </a:p>
+        </p:txBody>
+      </p:sp>
+      <p:sp>
+        <p:nvSpPr>
+          <p:cNvPr id="16" name="TextBox 15"/>
+          <p:cNvSpPr txBox="1"/>
+          <p:nvPr/>
+        </p:nvSpPr>
+        <p:spPr>
+          <a:xfrm>
+            <a:off x="8202168" y="1975104"/>
+            <a:ext cx="3218688" cy="658368"/>
           </a:xfrm>
           <a:prstGeom prst="rect">
             <a:avLst/>
@@ -19412,48 +19465,9 @@
               </a:lnSpc>
             </a:pPr>
             <a:r>
-              <a:rPr sz="1000" b="1">
-                <a:solidFill>
-                  <a:srgbClr val="6E6E6E"/>
-                </a:solidFill>
-                <a:latin typeface="Calibri"/>
-              </a:rPr>
-              <a:t>KADRO · 3 POS MAĞAZASI</a:t>
-            </a:r>
-          </a:p>
-        </p:txBody>
-      </p:sp>
-      <p:sp>
-        <p:nvSpPr>
-          <p:cNvPr id="16" name="TextBox 15"/>
-          <p:cNvSpPr txBox="1"/>
-          <p:nvPr/>
-        </p:nvSpPr>
-        <p:spPr>
-          <a:xfrm>
-            <a:off x="8202168" y="1847088"/>
-            <a:ext cx="3200400" cy="640080"/>
-          </a:xfrm>
-          <a:prstGeom prst="rect">
-            <a:avLst/>
-          </a:prstGeom>
-          <a:noFill/>
-        </p:spPr>
-        <p:txBody>
-          <a:bodyPr wrap="square" anchor="t">
-            <a:spAutoFit/>
-          </a:bodyPr>
-          <a:lstStyle/>
-          <a:p>
-            <a:pPr algn="l">
-              <a:lnSpc>
-                <a:spcPct val="100000"/>
-              </a:lnSpc>
-            </a:pPr>
-            <a:r>
               <a:rPr sz="3200" b="1">
                 <a:solidFill>
-                  <a:srgbClr val="2B2B2B"/>
+                  <a:srgbClr val="9A9A9A"/>
                 </a:solidFill>
                 <a:latin typeface="Calibri"/>
               </a:rPr>
@@ -19470,8 +19484,8 @@
         </p:nvSpPr>
         <p:spPr>
           <a:xfrm>
-            <a:off x="8202168" y="2505456"/>
-            <a:ext cx="3200400" cy="411480"/>
+            <a:off x="8202168" y="2688336"/>
+            <a:ext cx="3218688" cy="457200"/>
           </a:xfrm>
           <a:prstGeom prst="rect">
             <a:avLst/>
@@ -19486,11 +19500,11 @@
           <a:p>
             <a:pPr algn="l">
               <a:lnSpc>
-                <a:spcPct val="100000"/>
+                <a:spcPct val="105000"/>
               </a:lnSpc>
             </a:pPr>
             <a:r>
-              <a:rPr sz="1050" b="0">
+              <a:rPr sz="1000" b="0">
                 <a:solidFill>
                   <a:srgbClr val="6E6E6E"/>
                 </a:solidFill>
@@ -19654,7 +19668,7 @@
                 </a:solidFill>
                 <a:latin typeface="Calibri"/>
               </a:rPr>
-              <a:t>Kıyas okul açılışına hizalı: 2025 açılış 8 Eylül → dönem 01.07.2025 – 25.08.2025 · 2026 açılış 14 Eylül → dönem 07.07.2026 – 31.08.2026 (her iki yıl 56 gün). Kaynak: DerinSIS mağaza satışı, Sınav hariç, iadeler düşülmüş.</a:t>
+              <a:t>Kaynak: DerinSIS mağaza satışı · Sınav hariç · iadeler düşülmüş · KDV dahil.</a:t>
             </a:r>
           </a:p>
         </p:txBody>
@@ -19667,8 +19681,8 @@
         </p:nvSpPr>
         <p:spPr>
           <a:xfrm>
-            <a:off x="548640" y="5504688"/>
-            <a:ext cx="7772400" cy="292608"/>
+            <a:off x="1920240" y="5669280"/>
+            <a:ext cx="9555480" cy="566928"/>
           </a:xfrm>
           <a:prstGeom prst="rect">
             <a:avLst/>
@@ -19683,11 +19697,11 @@
           <a:p>
             <a:pPr algn="l">
               <a:lnSpc>
-                <a:spcPct val="100000"/>
+                <a:spcPct val="105000"/>
               </a:lnSpc>
             </a:pPr>
             <a:r>
-              <a:rPr sz="900" b="0">
+              <a:rPr sz="800" b="0">
                 <a:solidFill>
                   <a:srgbClr val="9A9A9A"/>
                 </a:solidFill>
@@ -20457,13 +20471,13 @@
               </a:lnSpc>
             </a:pPr>
             <a:r>
-              <a:rPr sz="1100" b="0">
+              <a:rPr sz="1000" b="0">
                 <a:solidFill>
                   <a:srgbClr val="6E6E6E"/>
                 </a:solidFill>
                 <a:latin typeface="Calibri"/>
               </a:rPr>
-              <a:t>Kişi başı = o mağazada 31 Ağustos'ta fiilen çalışan TÜM personel (sezonluk dahil). En çok kadro büyüyen mağazada (İst. Yolu 50 → 61 kişi) bile kişi başı iş arttı.</a:t>
+              <a:t>Kişi başı = 31 Ağustos'ta o mağazada fiilen çalışan TÜM personel (sezonluk dahil). Kadrosu en çok büyüyen mağazada (İst. Yolu 50 → 61) dahi kişi başı iş artmıştır.</a:t>
             </a:r>
           </a:p>
         </p:txBody>
@@ -20476,8 +20490,8 @@
         </p:nvSpPr>
         <p:spPr>
           <a:xfrm>
-            <a:off x="548640" y="5504688"/>
-            <a:ext cx="7772400" cy="292608"/>
+            <a:off x="1920240" y="5669280"/>
+            <a:ext cx="9555480" cy="566928"/>
           </a:xfrm>
           <a:prstGeom prst="rect">
             <a:avLst/>
@@ -20492,11 +20506,11 @@
           <a:p>
             <a:pPr algn="l">
               <a:lnSpc>
-                <a:spcPct val="100000"/>
+                <a:spcPct val="105000"/>
               </a:lnSpc>
             </a:pPr>
             <a:r>
-              <a:rPr sz="900" b="0">
+              <a:rPr sz="800" b="0">
                 <a:solidFill>
                   <a:srgbClr val="9A9A9A"/>
                 </a:solidFill>
@@ -21149,13 +21163,13 @@
               </a:lnSpc>
             </a:pPr>
             <a:r>
-              <a:rPr sz="1050" b="0">
+              <a:rPr sz="1000" b="0">
                 <a:solidFill>
                   <a:srgbClr val="9A9A9A"/>
                 </a:solidFill>
                 <a:latin typeface="Calibri"/>
               </a:rPr>
-              <a:t>Ocak–Ağustos kümülatif, üç POS mağazası, Sınav hariç. Kadro = 31.08 itibarıyla kadrolu (sezonluk hariç — yıllar arası tahliye zamanlaması kıyası bozar).</a:t>
+              <a:t>Kadro = 31.08 itibarıyla kadrolu (sezonluk hariç; yıllar arası tahliye zamanlaması kıyası bozar).</a:t>
             </a:r>
           </a:p>
         </p:txBody>
@@ -21168,8 +21182,8 @@
         </p:nvSpPr>
         <p:spPr>
           <a:xfrm>
-            <a:off x="548640" y="5504688"/>
-            <a:ext cx="7772400" cy="292608"/>
+            <a:off x="1920240" y="5669280"/>
+            <a:ext cx="9555480" cy="566928"/>
           </a:xfrm>
           <a:prstGeom prst="rect">
             <a:avLst/>
@@ -21184,11 +21198,11 @@
           <a:p>
             <a:pPr algn="l">
               <a:lnSpc>
-                <a:spcPct val="100000"/>
+                <a:spcPct val="105000"/>
               </a:lnSpc>
             </a:pPr>
             <a:r>
-              <a:rPr sz="900" b="0">
+              <a:rPr sz="800" b="0">
                 <a:solidFill>
                   <a:srgbClr val="9A9A9A"/>
                 </a:solidFill>
@@ -21754,8 +21768,8 @@
         </p:nvSpPr>
         <p:spPr>
           <a:xfrm>
-            <a:off x="548640" y="5504688"/>
-            <a:ext cx="7772400" cy="292608"/>
+            <a:off x="1920240" y="5669280"/>
+            <a:ext cx="9555480" cy="566928"/>
           </a:xfrm>
           <a:prstGeom prst="rect">
             <a:avLst/>
@@ -21770,11 +21784,11 @@
           <a:p>
             <a:pPr algn="l">
               <a:lnSpc>
-                <a:spcPct val="100000"/>
+                <a:spcPct val="105000"/>
               </a:lnSpc>
             </a:pPr>
             <a:r>
-              <a:rPr sz="900" b="0">
+              <a:rPr sz="800" b="0">
                 <a:solidFill>
                   <a:srgbClr val="9A9A9A"/>
                 </a:solidFill>

--- a/briefings/sezon-kadro-20260902/sunum-kadro-sezon2026.pptx
+++ b/briefings/sezon-kadro-20260902/sunum-kadro-sezon2026.pptx
@@ -922,7 +922,7 @@
                   <c:v>Mağaza</c:v>
                 </c:pt>
                 <c:pt idx="6">
-                  <c:v>MAL Kabul</c:v>
+                  <c:v>Mal Kabul</c:v>
                 </c:pt>
                 <c:pt idx="7">
                   <c:v>İdari İşler</c:v>
@@ -5500,7 +5500,12 @@
             <p:ph type="title"/>
           </p:nvPr>
         </p:nvSpPr>
-        <p:spPr/>
+        <p:spPr>
+          <a:xfrm>
+            <a:off x="548640" y="274320"/>
+            <a:ext cx="11018520" cy="914400"/>
+          </a:xfrm>
+        </p:spPr>
         <p:txBody>
           <a:bodyPr/>
           <a:lstStyle/>
@@ -6041,7 +6046,7 @@
                           </a:solidFill>
                           <a:latin typeface="Calibri"/>
                         </a:rPr>
-                        <a:t>Kasa</a:t>
+                        <a:t>Akademi</a:t>
                       </a:r>
                     </a:p>
                   </a:txBody>
@@ -6064,7 +6069,7 @@
                           </a:solidFill>
                           <a:latin typeface="Calibri"/>
                         </a:rPr>
-                        <a:t>+2</a:t>
+                        <a:t>+1</a:t>
                       </a:r>
                     </a:p>
                   </a:txBody>
@@ -6087,6 +6092,29 @@
                           </a:solidFill>
                           <a:latin typeface="Calibri"/>
                         </a:rPr>
+                        <a:t>0</a:t>
+                      </a:r>
+                    </a:p>
+                  </a:txBody>
+                  <a:tcPr>
+                    <a:solidFill>
+                      <a:srgbClr val="FFFFFF"/>
+                    </a:solidFill>
+                  </a:tcPr>
+                </a:tc>
+                <a:tc>
+                  <a:txBody>
+                    <a:bodyPr/>
+                    <a:lstStyle/>
+                    <a:p>
+                      <a:pPr algn="ctr"/>
+                      <a:r>
+                        <a:rPr sz="1050" b="0">
+                          <a:solidFill>
+                            <a:srgbClr val="333333"/>
+                          </a:solidFill>
+                          <a:latin typeface="Calibri"/>
+                        </a:rPr>
                         <a:t>+1</a:t>
                       </a:r>
                     </a:p>
@@ -6110,30 +6138,7 @@
                           </a:solidFill>
                           <a:latin typeface="Calibri"/>
                         </a:rPr>
-                        <a:t>-1</a:t>
-                      </a:r>
-                    </a:p>
-                  </a:txBody>
-                  <a:tcPr>
-                    <a:solidFill>
-                      <a:srgbClr val="FFFFFF"/>
-                    </a:solidFill>
-                  </a:tcPr>
-                </a:tc>
-                <a:tc>
-                  <a:txBody>
-                    <a:bodyPr/>
-                    <a:lstStyle/>
-                    <a:p>
-                      <a:pPr algn="ctr"/>
-                      <a:r>
-                        <a:rPr sz="1050" b="0">
-                          <a:solidFill>
-                            <a:srgbClr val="333333"/>
-                          </a:solidFill>
-                          <a:latin typeface="Calibri"/>
-                        </a:rPr>
-                        <a:t>—</a:t>
+                        <a:t>0</a:t>
                       </a:r>
                     </a:p>
                   </a:txBody>
@@ -6204,7 +6209,7 @@
                           </a:solidFill>
                           <a:latin typeface="Calibri"/>
                         </a:rPr>
-                        <a:t>Şura</a:t>
+                        <a:t>Kasa</a:t>
                       </a:r>
                     </a:p>
                   </a:txBody>
@@ -6227,6 +6232,75 @@
                           </a:solidFill>
                           <a:latin typeface="Calibri"/>
                         </a:rPr>
+                        <a:t>+2</a:t>
+                      </a:r>
+                    </a:p>
+                  </a:txBody>
+                  <a:tcPr>
+                    <a:solidFill>
+                      <a:srgbClr val="F2F2F2"/>
+                    </a:solidFill>
+                  </a:tcPr>
+                </a:tc>
+                <a:tc>
+                  <a:txBody>
+                    <a:bodyPr/>
+                    <a:lstStyle/>
+                    <a:p>
+                      <a:pPr algn="ctr"/>
+                      <a:r>
+                        <a:rPr sz="1050" b="0">
+                          <a:solidFill>
+                            <a:srgbClr val="333333"/>
+                          </a:solidFill>
+                          <a:latin typeface="Calibri"/>
+                        </a:rPr>
+                        <a:t>+1</a:t>
+                      </a:r>
+                    </a:p>
+                  </a:txBody>
+                  <a:tcPr>
+                    <a:solidFill>
+                      <a:srgbClr val="F2F2F2"/>
+                    </a:solidFill>
+                  </a:tcPr>
+                </a:tc>
+                <a:tc>
+                  <a:txBody>
+                    <a:bodyPr/>
+                    <a:lstStyle/>
+                    <a:p>
+                      <a:pPr algn="ctr"/>
+                      <a:r>
+                        <a:rPr sz="1050" b="0">
+                          <a:solidFill>
+                            <a:srgbClr val="333333"/>
+                          </a:solidFill>
+                          <a:latin typeface="Calibri"/>
+                        </a:rPr>
+                        <a:t>-1</a:t>
+                      </a:r>
+                    </a:p>
+                  </a:txBody>
+                  <a:tcPr>
+                    <a:solidFill>
+                      <a:srgbClr val="F2F2F2"/>
+                    </a:solidFill>
+                  </a:tcPr>
+                </a:tc>
+                <a:tc>
+                  <a:txBody>
+                    <a:bodyPr/>
+                    <a:lstStyle/>
+                    <a:p>
+                      <a:pPr algn="ctr"/>
+                      <a:r>
+                        <a:rPr sz="1050" b="0">
+                          <a:solidFill>
+                            <a:srgbClr val="333333"/>
+                          </a:solidFill>
+                          <a:latin typeface="Calibri"/>
+                        </a:rPr>
                         <a:t>—</a:t>
                       </a:r>
                     </a:p>
@@ -6251,75 +6325,6 @@
                           <a:latin typeface="Calibri"/>
                         </a:rPr>
                         <a:t>—</a:t>
-                      </a:r>
-                    </a:p>
-                  </a:txBody>
-                  <a:tcPr>
-                    <a:solidFill>
-                      <a:srgbClr val="F2F2F2"/>
-                    </a:solidFill>
-                  </a:tcPr>
-                </a:tc>
-                <a:tc>
-                  <a:txBody>
-                    <a:bodyPr/>
-                    <a:lstStyle/>
-                    <a:p>
-                      <a:pPr algn="ctr"/>
-                      <a:r>
-                        <a:rPr sz="1050" b="0">
-                          <a:solidFill>
-                            <a:srgbClr val="333333"/>
-                          </a:solidFill>
-                          <a:latin typeface="Calibri"/>
-                        </a:rPr>
-                        <a:t>—</a:t>
-                      </a:r>
-                    </a:p>
-                  </a:txBody>
-                  <a:tcPr>
-                    <a:solidFill>
-                      <a:srgbClr val="F2F2F2"/>
-                    </a:solidFill>
-                  </a:tcPr>
-                </a:tc>
-                <a:tc>
-                  <a:txBody>
-                    <a:bodyPr/>
-                    <a:lstStyle/>
-                    <a:p>
-                      <a:pPr algn="ctr"/>
-                      <a:r>
-                        <a:rPr sz="1050" b="0">
-                          <a:solidFill>
-                            <a:srgbClr val="333333"/>
-                          </a:solidFill>
-                          <a:latin typeface="Calibri"/>
-                        </a:rPr>
-                        <a:t>—</a:t>
-                      </a:r>
-                    </a:p>
-                  </a:txBody>
-                  <a:tcPr>
-                    <a:solidFill>
-                      <a:srgbClr val="F2F2F2"/>
-                    </a:solidFill>
-                  </a:tcPr>
-                </a:tc>
-                <a:tc>
-                  <a:txBody>
-                    <a:bodyPr/>
-                    <a:lstStyle/>
-                    <a:p>
-                      <a:pPr algn="ctr"/>
-                      <a:r>
-                        <a:rPr sz="1050" b="0">
-                          <a:solidFill>
-                            <a:srgbClr val="333333"/>
-                          </a:solidFill>
-                          <a:latin typeface="Calibri"/>
-                        </a:rPr>
-                        <a:t>+2</a:t>
                       </a:r>
                     </a:p>
                   </a:txBody>
@@ -6367,7 +6372,7 @@
                           </a:solidFill>
                           <a:latin typeface="Calibri"/>
                         </a:rPr>
-                        <a:t>Akademi</a:t>
+                        <a:t>Şura</a:t>
                       </a:r>
                     </a:p>
                   </a:txBody>
@@ -6390,7 +6395,7 @@
                           </a:solidFill>
                           <a:latin typeface="Calibri"/>
                         </a:rPr>
-                        <a:t>+1</a:t>
+                        <a:t>—</a:t>
                       </a:r>
                     </a:p>
                   </a:txBody>
@@ -6413,7 +6418,7 @@
                           </a:solidFill>
                           <a:latin typeface="Calibri"/>
                         </a:rPr>
-                        <a:t>0</a:t>
+                        <a:t>—</a:t>
                       </a:r>
                     </a:p>
                   </a:txBody>
@@ -6436,7 +6441,7 @@
                           </a:solidFill>
                           <a:latin typeface="Calibri"/>
                         </a:rPr>
-                        <a:t>+1</a:t>
+                        <a:t>—</a:t>
                       </a:r>
                     </a:p>
                   </a:txBody>
@@ -6459,7 +6464,7 @@
                           </a:solidFill>
                           <a:latin typeface="Calibri"/>
                         </a:rPr>
-                        <a:t>0</a:t>
+                        <a:t>—</a:t>
                       </a:r>
                     </a:p>
                   </a:txBody>
@@ -6482,7 +6487,7 @@
                           </a:solidFill>
                           <a:latin typeface="Calibri"/>
                         </a:rPr>
-                        <a:t>—</a:t>
+                        <a:t>+2</a:t>
                       </a:r>
                     </a:p>
                   </a:txBody>
@@ -6530,7 +6535,7 @@
                           </a:solidFill>
                           <a:latin typeface="Calibri"/>
                         </a:rPr>
-                        <a:t>Etkinlik</a:t>
+                        <a:t>Kültür</a:t>
                       </a:r>
                     </a:p>
                   </a:txBody>
@@ -6553,76 +6558,76 @@
                           </a:solidFill>
                           <a:latin typeface="Calibri"/>
                         </a:rPr>
+                        <a:t>+1</a:t>
+                      </a:r>
+                    </a:p>
+                  </a:txBody>
+                  <a:tcPr>
+                    <a:solidFill>
+                      <a:srgbClr val="F2F2F2"/>
+                    </a:solidFill>
+                  </a:tcPr>
+                </a:tc>
+                <a:tc>
+                  <a:txBody>
+                    <a:bodyPr/>
+                    <a:lstStyle/>
+                    <a:p>
+                      <a:pPr algn="ctr"/>
+                      <a:r>
+                        <a:rPr sz="1050" b="0">
+                          <a:solidFill>
+                            <a:srgbClr val="333333"/>
+                          </a:solidFill>
+                          <a:latin typeface="Calibri"/>
+                        </a:rPr>
+                        <a:t>+1</a:t>
+                      </a:r>
+                    </a:p>
+                  </a:txBody>
+                  <a:tcPr>
+                    <a:solidFill>
+                      <a:srgbClr val="F2F2F2"/>
+                    </a:solidFill>
+                  </a:tcPr>
+                </a:tc>
+                <a:tc>
+                  <a:txBody>
+                    <a:bodyPr/>
+                    <a:lstStyle/>
+                    <a:p>
+                      <a:pPr algn="ctr"/>
+                      <a:r>
+                        <a:rPr sz="1050" b="0">
+                          <a:solidFill>
+                            <a:srgbClr val="333333"/>
+                          </a:solidFill>
+                          <a:latin typeface="Calibri"/>
+                        </a:rPr>
+                        <a:t>-1</a:t>
+                      </a:r>
+                    </a:p>
+                  </a:txBody>
+                  <a:tcPr>
+                    <a:solidFill>
+                      <a:srgbClr val="F2F2F2"/>
+                    </a:solidFill>
+                  </a:tcPr>
+                </a:tc>
+                <a:tc>
+                  <a:txBody>
+                    <a:bodyPr/>
+                    <a:lstStyle/>
+                    <a:p>
+                      <a:pPr algn="ctr"/>
+                      <a:r>
+                        <a:rPr sz="1050" b="0">
+                          <a:solidFill>
+                            <a:srgbClr val="333333"/>
+                          </a:solidFill>
+                          <a:latin typeface="Calibri"/>
+                        </a:rPr>
                         <a:t>0</a:t>
-                      </a:r>
-                    </a:p>
-                  </a:txBody>
-                  <a:tcPr>
-                    <a:solidFill>
-                      <a:srgbClr val="F2F2F2"/>
-                    </a:solidFill>
-                  </a:tcPr>
-                </a:tc>
-                <a:tc>
-                  <a:txBody>
-                    <a:bodyPr/>
-                    <a:lstStyle/>
-                    <a:p>
-                      <a:pPr algn="ctr"/>
-                      <a:r>
-                        <a:rPr sz="1050" b="0">
-                          <a:solidFill>
-                            <a:srgbClr val="333333"/>
-                          </a:solidFill>
-                          <a:latin typeface="Calibri"/>
-                        </a:rPr>
-                        <a:t>+1</a:t>
-                      </a:r>
-                    </a:p>
-                  </a:txBody>
-                  <a:tcPr>
-                    <a:solidFill>
-                      <a:srgbClr val="F2F2F2"/>
-                    </a:solidFill>
-                  </a:tcPr>
-                </a:tc>
-                <a:tc>
-                  <a:txBody>
-                    <a:bodyPr/>
-                    <a:lstStyle/>
-                    <a:p>
-                      <a:pPr algn="ctr"/>
-                      <a:r>
-                        <a:rPr sz="1050" b="0">
-                          <a:solidFill>
-                            <a:srgbClr val="333333"/>
-                          </a:solidFill>
-                          <a:latin typeface="Calibri"/>
-                        </a:rPr>
-                        <a:t>0</a:t>
-                      </a:r>
-                    </a:p>
-                  </a:txBody>
-                  <a:tcPr>
-                    <a:solidFill>
-                      <a:srgbClr val="F2F2F2"/>
-                    </a:solidFill>
-                  </a:tcPr>
-                </a:tc>
-                <a:tc>
-                  <a:txBody>
-                    <a:bodyPr/>
-                    <a:lstStyle/>
-                    <a:p>
-                      <a:pPr algn="ctr"/>
-                      <a:r>
-                        <a:rPr sz="1050" b="0">
-                          <a:solidFill>
-                            <a:srgbClr val="333333"/>
-                          </a:solidFill>
-                          <a:latin typeface="Calibri"/>
-                        </a:rPr>
-                        <a:t>—</a:t>
                       </a:r>
                     </a:p>
                   </a:txBody>
@@ -6693,7 +6698,7 @@
                           </a:solidFill>
                           <a:latin typeface="Calibri"/>
                         </a:rPr>
-                        <a:t>Kültür</a:t>
+                        <a:t>Oyuncak</a:t>
                       </a:r>
                     </a:p>
                   </a:txBody>
@@ -6739,7 +6744,7 @@
                           </a:solidFill>
                           <a:latin typeface="Calibri"/>
                         </a:rPr>
-                        <a:t>+1</a:t>
+                        <a:t>0</a:t>
                       </a:r>
                     </a:p>
                   </a:txBody>
@@ -6762,7 +6767,7 @@
                           </a:solidFill>
                           <a:latin typeface="Calibri"/>
                         </a:rPr>
-                        <a:t>-1</a:t>
+                        <a:t>0</a:t>
                       </a:r>
                     </a:p>
                   </a:txBody>
@@ -6785,7 +6790,7 @@
                           </a:solidFill>
                           <a:latin typeface="Calibri"/>
                         </a:rPr>
-                        <a:t>0</a:t>
+                        <a:t>—</a:t>
                       </a:r>
                     </a:p>
                   </a:txBody>
@@ -6856,7 +6861,7 @@
                           </a:solidFill>
                           <a:latin typeface="Calibri"/>
                         </a:rPr>
-                        <a:t>Oyuncak</a:t>
+                        <a:t>Etkinlik</a:t>
                       </a:r>
                     </a:p>
                   </a:txBody>
@@ -6879,30 +6884,30 @@
                           </a:solidFill>
                           <a:latin typeface="Calibri"/>
                         </a:rPr>
+                        <a:t>0</a:t>
+                      </a:r>
+                    </a:p>
+                  </a:txBody>
+                  <a:tcPr>
+                    <a:solidFill>
+                      <a:srgbClr val="F2F2F2"/>
+                    </a:solidFill>
+                  </a:tcPr>
+                </a:tc>
+                <a:tc>
+                  <a:txBody>
+                    <a:bodyPr/>
+                    <a:lstStyle/>
+                    <a:p>
+                      <a:pPr algn="ctr"/>
+                      <a:r>
+                        <a:rPr sz="1050" b="0">
+                          <a:solidFill>
+                            <a:srgbClr val="333333"/>
+                          </a:solidFill>
+                          <a:latin typeface="Calibri"/>
+                        </a:rPr>
                         <a:t>+1</a:t>
-                      </a:r>
-                    </a:p>
-                  </a:txBody>
-                  <a:tcPr>
-                    <a:solidFill>
-                      <a:srgbClr val="F2F2F2"/>
-                    </a:solidFill>
-                  </a:tcPr>
-                </a:tc>
-                <a:tc>
-                  <a:txBody>
-                    <a:bodyPr/>
-                    <a:lstStyle/>
-                    <a:p>
-                      <a:pPr algn="ctr"/>
-                      <a:r>
-                        <a:rPr sz="1050" b="0">
-                          <a:solidFill>
-                            <a:srgbClr val="333333"/>
-                          </a:solidFill>
-                          <a:latin typeface="Calibri"/>
-                        </a:rPr>
-                        <a:t>0</a:t>
                       </a:r>
                     </a:p>
                   </a:txBody>
@@ -7019,7 +7024,7 @@
                           </a:solidFill>
                           <a:latin typeface="Calibri"/>
                         </a:rPr>
-                        <a:t>İdari İşler</a:t>
+                        <a:t>Mağaza</a:t>
                       </a:r>
                     </a:p>
                   </a:txBody>
@@ -7042,7 +7047,7 @@
                           </a:solidFill>
                           <a:latin typeface="Calibri"/>
                         </a:rPr>
-                        <a:t>+1</a:t>
+                        <a:t>0</a:t>
                       </a:r>
                     </a:p>
                   </a:txBody>
@@ -7065,7 +7070,7 @@
                           </a:solidFill>
                           <a:latin typeface="Calibri"/>
                         </a:rPr>
-                        <a:t>-1</a:t>
+                        <a:t>0</a:t>
                       </a:r>
                     </a:p>
                   </a:txBody>
@@ -7111,7 +7116,7 @@
                           </a:solidFill>
                           <a:latin typeface="Calibri"/>
                         </a:rPr>
-                        <a:t>—</a:t>
+                        <a:t>0</a:t>
                       </a:r>
                     </a:p>
                   </a:txBody>
@@ -7182,7 +7187,7 @@
                           </a:solidFill>
                           <a:latin typeface="Calibri"/>
                         </a:rPr>
-                        <a:t>Mağaza</a:t>
+                        <a:t>İdari İşler</a:t>
                       </a:r>
                     </a:p>
                   </a:txBody>
@@ -7205,6 +7210,52 @@
                           </a:solidFill>
                           <a:latin typeface="Calibri"/>
                         </a:rPr>
+                        <a:t>+1</a:t>
+                      </a:r>
+                    </a:p>
+                  </a:txBody>
+                  <a:tcPr>
+                    <a:solidFill>
+                      <a:srgbClr val="F2F2F2"/>
+                    </a:solidFill>
+                  </a:tcPr>
+                </a:tc>
+                <a:tc>
+                  <a:txBody>
+                    <a:bodyPr/>
+                    <a:lstStyle/>
+                    <a:p>
+                      <a:pPr algn="ctr"/>
+                      <a:r>
+                        <a:rPr sz="1050" b="0">
+                          <a:solidFill>
+                            <a:srgbClr val="333333"/>
+                          </a:solidFill>
+                          <a:latin typeface="Calibri"/>
+                        </a:rPr>
+                        <a:t>-1</a:t>
+                      </a:r>
+                    </a:p>
+                  </a:txBody>
+                  <a:tcPr>
+                    <a:solidFill>
+                      <a:srgbClr val="F2F2F2"/>
+                    </a:solidFill>
+                  </a:tcPr>
+                </a:tc>
+                <a:tc>
+                  <a:txBody>
+                    <a:bodyPr/>
+                    <a:lstStyle/>
+                    <a:p>
+                      <a:pPr algn="ctr"/>
+                      <a:r>
+                        <a:rPr sz="1050" b="0">
+                          <a:solidFill>
+                            <a:srgbClr val="333333"/>
+                          </a:solidFill>
+                          <a:latin typeface="Calibri"/>
+                        </a:rPr>
                         <a:t>0</a:t>
                       </a:r>
                     </a:p>
@@ -7228,53 +7279,7 @@
                           </a:solidFill>
                           <a:latin typeface="Calibri"/>
                         </a:rPr>
-                        <a:t>0</a:t>
-                      </a:r>
-                    </a:p>
-                  </a:txBody>
-                  <a:tcPr>
-                    <a:solidFill>
-                      <a:srgbClr val="F2F2F2"/>
-                    </a:solidFill>
-                  </a:tcPr>
-                </a:tc>
-                <a:tc>
-                  <a:txBody>
-                    <a:bodyPr/>
-                    <a:lstStyle/>
-                    <a:p>
-                      <a:pPr algn="ctr"/>
-                      <a:r>
-                        <a:rPr sz="1050" b="0">
-                          <a:solidFill>
-                            <a:srgbClr val="333333"/>
-                          </a:solidFill>
-                          <a:latin typeface="Calibri"/>
-                        </a:rPr>
-                        <a:t>0</a:t>
-                      </a:r>
-                    </a:p>
-                  </a:txBody>
-                  <a:tcPr>
-                    <a:solidFill>
-                      <a:srgbClr val="F2F2F2"/>
-                    </a:solidFill>
-                  </a:tcPr>
-                </a:tc>
-                <a:tc>
-                  <a:txBody>
-                    <a:bodyPr/>
-                    <a:lstStyle/>
-                    <a:p>
-                      <a:pPr algn="ctr"/>
-                      <a:r>
-                        <a:rPr sz="1050" b="0">
-                          <a:solidFill>
-                            <a:srgbClr val="333333"/>
-                          </a:solidFill>
-                          <a:latin typeface="Calibri"/>
-                        </a:rPr>
-                        <a:t>0</a:t>
+                        <a:t>—</a:t>
                       </a:r>
                     </a:p>
                   </a:txBody>
@@ -7345,7 +7350,7 @@
                           </a:solidFill>
                           <a:latin typeface="Calibri"/>
                         </a:rPr>
-                        <a:t>MAL Kabul</a:t>
+                        <a:t>Mal Kabul</a:t>
                       </a:r>
                     </a:p>
                   </a:txBody>
@@ -7508,7 +7513,7 @@
                           </a:solidFill>
                           <a:latin typeface="Calibri"/>
                         </a:rPr>
-                        <a:t>Bilgi İşlem</a:t>
+                        <a:t>Muhasebe</a:t>
                       </a:r>
                     </a:p>
                   </a:txBody>
@@ -7600,30 +7605,30 @@
                           </a:solidFill>
                           <a:latin typeface="Calibri"/>
                         </a:rPr>
+                        <a:t>-1</a:t>
+                      </a:r>
+                    </a:p>
+                  </a:txBody>
+                  <a:tcPr>
+                    <a:solidFill>
+                      <a:srgbClr val="F2F2F2"/>
+                    </a:solidFill>
+                  </a:tcPr>
+                </a:tc>
+                <a:tc>
+                  <a:txBody>
+                    <a:bodyPr/>
+                    <a:lstStyle/>
+                    <a:p>
+                      <a:pPr algn="ctr"/>
+                      <a:r>
+                        <a:rPr sz="1050" b="1">
+                          <a:solidFill>
+                            <a:srgbClr val="333333"/>
+                          </a:solidFill>
+                          <a:latin typeface="Calibri"/>
+                        </a:rPr>
                         <a:t>—</a:t>
-                      </a:r>
-                    </a:p>
-                  </a:txBody>
-                  <a:tcPr>
-                    <a:solidFill>
-                      <a:srgbClr val="F2F2F2"/>
-                    </a:solidFill>
-                  </a:tcPr>
-                </a:tc>
-                <a:tc>
-                  <a:txBody>
-                    <a:bodyPr/>
-                    <a:lstStyle/>
-                    <a:p>
-                      <a:pPr algn="ctr"/>
-                      <a:r>
-                        <a:rPr sz="1050" b="1">
-                          <a:solidFill>
-                            <a:srgbClr val="333333"/>
-                          </a:solidFill>
-                          <a:latin typeface="Calibri"/>
-                        </a:rPr>
-                        <a:t>-1</a:t>
                       </a:r>
                     </a:p>
                   </a:txBody>
@@ -7669,8 +7674,8 @@
         </p:nvSpPr>
         <p:spPr>
           <a:xfrm>
-            <a:off x="548640" y="5285232"/>
-            <a:ext cx="11018520" cy="777240"/>
+            <a:off x="548640" y="5248656"/>
+            <a:ext cx="11018520" cy="292608"/>
           </a:xfrm>
           <a:prstGeom prst="rect">
             <a:avLst/>
@@ -7685,17 +7690,17 @@
           <a:p>
             <a:pPr algn="l">
               <a:lnSpc>
-                <a:spcPct val="115000"/>
+                <a:spcPct val="110000"/>
               </a:lnSpc>
             </a:pPr>
             <a:r>
-              <a:rPr sz="1050" b="0">
+              <a:rPr sz="950" b="0">
                 <a:solidFill>
                   <a:srgbClr val="6E6E6E"/>
                 </a:solidFill>
                 <a:latin typeface="Calibri"/>
               </a:rPr>
-              <a:t>'—' ilgili mağazada o bölümün bulunmadığını gösterir. Yönetim (Mağaza), Mal Kabul ve İdari İşler satırları tüm mağazalarda sıfır veya negatiftir.</a:t>
+              <a:t>'—' ilgili mağazada o bölüm yoktur · Yönetim, Mal Kabul ve İdari İşler satırları tüm mağazalarda sıfır veya negatiftir.</a:t>
             </a:r>
           </a:p>
         </p:txBody>
@@ -7820,7 +7825,12 @@
             <p:ph type="title"/>
           </p:nvPr>
         </p:nvSpPr>
-        <p:spPr/>
+        <p:spPr>
+          <a:xfrm>
+            <a:off x="548640" y="274320"/>
+            <a:ext cx="11018520" cy="914400"/>
+          </a:xfrm>
+        </p:spPr>
         <p:txBody>
           <a:bodyPr/>
           <a:lstStyle/>
@@ -8916,7 +8926,12 @@
             <p:ph type="title"/>
           </p:nvPr>
         </p:nvSpPr>
-        <p:spPr/>
+        <p:spPr>
+          <a:xfrm>
+            <a:off x="548640" y="274320"/>
+            <a:ext cx="11018520" cy="914400"/>
+          </a:xfrm>
+        </p:spPr>
         <p:txBody>
           <a:bodyPr/>
           <a:lstStyle/>
@@ -9946,8 +9961,8 @@
           <p:nvPr/>
         </p:nvGraphicFramePr>
         <p:xfrm>
-          <a:off x="548640" y="3977639"/>
-          <a:ext cx="6766560" cy="1600200"/>
+          <a:off x="548640" y="4059936"/>
+          <a:ext cx="6766560" cy="1426464"/>
         </p:xfrm>
         <a:graphic>
           <a:graphicData uri="http://schemas.openxmlformats.org/drawingml/2006/chart">
@@ -9963,8 +9978,8 @@
         </p:nvSpPr>
         <p:spPr>
           <a:xfrm>
-            <a:off x="548640" y="3703320"/>
-            <a:ext cx="6766560" cy="256032"/>
+            <a:off x="548640" y="3803904"/>
+            <a:ext cx="6766560" cy="237744"/>
           </a:xfrm>
           <a:prstGeom prst="rect">
             <a:avLst/>
@@ -10215,7 +10230,12 @@
             <p:ph type="title"/>
           </p:nvPr>
         </p:nvSpPr>
-        <p:spPr/>
+        <p:spPr>
+          <a:xfrm>
+            <a:off x="548640" y="274320"/>
+            <a:ext cx="11018520" cy="914400"/>
+          </a:xfrm>
+        </p:spPr>
         <p:txBody>
           <a:bodyPr/>
           <a:lstStyle/>
@@ -11086,7 +11106,12 @@
             <p:ph type="title"/>
           </p:nvPr>
         </p:nvSpPr>
-        <p:spPr/>
+        <p:spPr>
+          <a:xfrm>
+            <a:off x="548640" y="274320"/>
+            <a:ext cx="11018520" cy="914400"/>
+          </a:xfrm>
+        </p:spPr>
         <p:txBody>
           <a:bodyPr/>
           <a:lstStyle/>
@@ -11985,7 +12010,12 @@
             <p:ph type="title"/>
           </p:nvPr>
         </p:nvSpPr>
-        <p:spPr/>
+        <p:spPr>
+          <a:xfrm>
+            <a:off x="548640" y="274320"/>
+            <a:ext cx="11018520" cy="914400"/>
+          </a:xfrm>
+        </p:spPr>
         <p:txBody>
           <a:bodyPr/>
           <a:lstStyle/>
@@ -12707,7 +12737,12 @@
             <p:ph type="title"/>
           </p:nvPr>
         </p:nvSpPr>
-        <p:spPr/>
+        <p:spPr>
+          <a:xfrm>
+            <a:off x="548640" y="274320"/>
+            <a:ext cx="11018520" cy="914400"/>
+          </a:xfrm>
+        </p:spPr>
         <p:txBody>
           <a:bodyPr/>
           <a:lstStyle/>
@@ -14215,7 +14250,12 @@
             <p:ph type="title"/>
           </p:nvPr>
         </p:nvSpPr>
-        <p:spPr/>
+        <p:spPr>
+          <a:xfrm>
+            <a:off x="548640" y="274320"/>
+            <a:ext cx="11018520" cy="914400"/>
+          </a:xfrm>
+        </p:spPr>
         <p:txBody>
           <a:bodyPr/>
           <a:lstStyle/>
@@ -15595,7 +15635,12 @@
             <p:ph type="title"/>
           </p:nvPr>
         </p:nvSpPr>
-        <p:spPr/>
+        <p:spPr>
+          <a:xfrm>
+            <a:off x="548640" y="274320"/>
+            <a:ext cx="11018520" cy="914400"/>
+          </a:xfrm>
+        </p:spPr>
         <p:txBody>
           <a:bodyPr/>
           <a:lstStyle/>
@@ -17036,7 +17081,12 @@
             <p:ph type="title"/>
           </p:nvPr>
         </p:nvSpPr>
-        <p:spPr/>
+        <p:spPr>
+          <a:xfrm>
+            <a:off x="548640" y="274320"/>
+            <a:ext cx="11018520" cy="914400"/>
+          </a:xfrm>
+        </p:spPr>
         <p:txBody>
           <a:bodyPr/>
           <a:lstStyle/>
@@ -18883,7 +18933,12 @@
             <p:ph type="title"/>
           </p:nvPr>
         </p:nvSpPr>
-        <p:spPr/>
+        <p:spPr>
+          <a:xfrm>
+            <a:off x="548640" y="274320"/>
+            <a:ext cx="11018520" cy="914400"/>
+          </a:xfrm>
+        </p:spPr>
         <p:txBody>
           <a:bodyPr/>
           <a:lstStyle/>
@@ -19525,7 +19580,7 @@
         </p:nvGraphicFramePr>
         <p:xfrm>
           <a:off x="548640" y="3200400"/>
-          <a:ext cx="5577840" cy="2194560"/>
+          <a:ext cx="5577840" cy="1965960"/>
         </p:xfrm>
         <a:graphic>
           <a:graphicData uri="http://schemas.openxmlformats.org/drawingml/2006/chart">
@@ -19642,8 +19697,8 @@
         </p:nvSpPr>
         <p:spPr>
           <a:xfrm>
-            <a:off x="548640" y="5440680"/>
-            <a:ext cx="11018520" cy="365760"/>
+            <a:off x="548640" y="5230368"/>
+            <a:ext cx="11018520" cy="292608"/>
           </a:xfrm>
           <a:prstGeom prst="rect">
             <a:avLst/>
@@ -19793,7 +19848,12 @@
             <p:ph type="title"/>
           </p:nvPr>
         </p:nvSpPr>
-        <p:spPr/>
+        <p:spPr>
+          <a:xfrm>
+            <a:off x="548640" y="274320"/>
+            <a:ext cx="11018520" cy="914400"/>
+          </a:xfrm>
+        </p:spPr>
         <p:txBody>
           <a:bodyPr/>
           <a:lstStyle/>
@@ -19960,7 +20020,7 @@
         <p:spPr>
           <a:xfrm>
             <a:off x="6812280" y="2057400"/>
-            <a:ext cx="4480560" cy="457200"/>
+            <a:ext cx="2788920" cy="457200"/>
           </a:xfrm>
           <a:prstGeom prst="rect">
             <a:avLst/>
@@ -20167,7 +20227,7 @@
         <p:spPr>
           <a:xfrm>
             <a:off x="6812280" y="3246120"/>
-            <a:ext cx="4480560" cy="457200"/>
+            <a:ext cx="2788920" cy="457200"/>
           </a:xfrm>
           <a:prstGeom prst="rect">
             <a:avLst/>
@@ -20374,7 +20434,7 @@
         <p:spPr>
           <a:xfrm>
             <a:off x="6812280" y="4434840"/>
-            <a:ext cx="4480560" cy="457200"/>
+            <a:ext cx="2788920" cy="457200"/>
           </a:xfrm>
           <a:prstGeom prst="rect">
             <a:avLst/>
@@ -20451,8 +20511,8 @@
         </p:nvSpPr>
         <p:spPr>
           <a:xfrm>
-            <a:off x="548640" y="5120640"/>
-            <a:ext cx="11018520" cy="640080"/>
+            <a:off x="548640" y="5193792"/>
+            <a:ext cx="11018520" cy="310896"/>
           </a:xfrm>
           <a:prstGeom prst="rect">
             <a:avLst/>
@@ -20471,13 +20531,13 @@
               </a:lnSpc>
             </a:pPr>
             <a:r>
-              <a:rPr sz="1000" b="0">
+              <a:rPr sz="950" b="0">
                 <a:solidFill>
                   <a:srgbClr val="6E6E6E"/>
                 </a:solidFill>
                 <a:latin typeface="Calibri"/>
               </a:rPr>
-              <a:t>Kişi başı = 31 Ağustos'ta o mağazada fiilen çalışan TÜM personel (sezonluk dahil). Kadrosu en çok büyüyen mağazada (İst. Yolu 50 → 61) dahi kişi başı iş artmıştır.</a:t>
+              <a:t>Kişi başı = 31 Ağustos'ta o mağazada fiilen çalışan TÜM personel (sezonluk dahil). Kadrosu en çok büyüyen mağazada dahi kişi başı iş artmıştır (İst. Yolu 50 → 61).</a:t>
             </a:r>
           </a:p>
         </p:txBody>
@@ -20602,7 +20662,12 @@
             <p:ph type="title"/>
           </p:nvPr>
         </p:nvSpPr>
-        <p:spPr/>
+        <p:spPr>
+          <a:xfrm>
+            <a:off x="548640" y="274320"/>
+            <a:ext cx="11018520" cy="914400"/>
+          </a:xfrm>
+        </p:spPr>
         <p:txBody>
           <a:bodyPr/>
           <a:lstStyle/>
@@ -21294,7 +21359,12 @@
             <p:ph type="title"/>
           </p:nvPr>
         </p:nvSpPr>
-        <p:spPr/>
+        <p:spPr>
+          <a:xfrm>
+            <a:off x="548640" y="274320"/>
+            <a:ext cx="11018520" cy="914400"/>
+          </a:xfrm>
+        </p:spPr>
         <p:txBody>
           <a:bodyPr/>
           <a:lstStyle/>
@@ -21683,8 +21753,8 @@
         </p:nvSpPr>
         <p:spPr>
           <a:xfrm>
-            <a:off x="548640" y="4937760"/>
-            <a:ext cx="11018520" cy="777240"/>
+            <a:off x="548640" y="4828032"/>
+            <a:ext cx="11018520" cy="658368"/>
           </a:xfrm>
           <a:prstGeom prst="roundRect">
             <a:avLst/>
@@ -21729,8 +21799,8 @@
         </p:nvSpPr>
         <p:spPr>
           <a:xfrm>
-            <a:off x="822960" y="4937760"/>
-            <a:ext cx="10515600" cy="777240"/>
+            <a:off x="822960" y="4828032"/>
+            <a:ext cx="10515600" cy="658368"/>
           </a:xfrm>
           <a:prstGeom prst="rect">
             <a:avLst/>

--- a/briefings/sezon-kadro-20260902/sunum-kadro-sezon2026.pptx
+++ b/briefings/sezon-kadro-20260902/sunum-kadro-sezon2026.pptx
@@ -6046,7 +6046,7 @@
                           </a:solidFill>
                           <a:latin typeface="Calibri"/>
                         </a:rPr>
-                        <a:t>Akademi</a:t>
+                        <a:t>Kasa</a:t>
                       </a:r>
                     </a:p>
                   </a:txBody>
@@ -6069,6 +6069,29 @@
                           </a:solidFill>
                           <a:latin typeface="Calibri"/>
                         </a:rPr>
+                        <a:t>+2</a:t>
+                      </a:r>
+                    </a:p>
+                  </a:txBody>
+                  <a:tcPr>
+                    <a:solidFill>
+                      <a:srgbClr val="FFFFFF"/>
+                    </a:solidFill>
+                  </a:tcPr>
+                </a:tc>
+                <a:tc>
+                  <a:txBody>
+                    <a:bodyPr/>
+                    <a:lstStyle/>
+                    <a:p>
+                      <a:pPr algn="ctr"/>
+                      <a:r>
+                        <a:rPr sz="1050" b="0">
+                          <a:solidFill>
+                            <a:srgbClr val="333333"/>
+                          </a:solidFill>
+                          <a:latin typeface="Calibri"/>
+                        </a:rPr>
                         <a:t>+1</a:t>
                       </a:r>
                     </a:p>
@@ -6092,7 +6115,7 @@
                           </a:solidFill>
                           <a:latin typeface="Calibri"/>
                         </a:rPr>
-                        <a:t>0</a:t>
+                        <a:t>-1</a:t>
                       </a:r>
                     </a:p>
                   </a:txBody>
@@ -6115,30 +6138,7 @@
                           </a:solidFill>
                           <a:latin typeface="Calibri"/>
                         </a:rPr>
-                        <a:t>+1</a:t>
-                      </a:r>
-                    </a:p>
-                  </a:txBody>
-                  <a:tcPr>
-                    <a:solidFill>
-                      <a:srgbClr val="FFFFFF"/>
-                    </a:solidFill>
-                  </a:tcPr>
-                </a:tc>
-                <a:tc>
-                  <a:txBody>
-                    <a:bodyPr/>
-                    <a:lstStyle/>
-                    <a:p>
-                      <a:pPr algn="ctr"/>
-                      <a:r>
-                        <a:rPr sz="1050" b="0">
-                          <a:solidFill>
-                            <a:srgbClr val="333333"/>
-                          </a:solidFill>
-                          <a:latin typeface="Calibri"/>
-                        </a:rPr>
-                        <a:t>0</a:t>
+                        <a:t>—</a:t>
                       </a:r>
                     </a:p>
                   </a:txBody>
@@ -6209,7 +6209,7 @@
                           </a:solidFill>
                           <a:latin typeface="Calibri"/>
                         </a:rPr>
-                        <a:t>Kasa</a:t>
+                        <a:t>Akademi</a:t>
                       </a:r>
                     </a:p>
                   </a:txBody>
@@ -6232,7 +6232,7 @@
                           </a:solidFill>
                           <a:latin typeface="Calibri"/>
                         </a:rPr>
-                        <a:t>+2</a:t>
+                        <a:t>+1</a:t>
                       </a:r>
                     </a:p>
                   </a:txBody>
@@ -6255,6 +6255,29 @@
                           </a:solidFill>
                           <a:latin typeface="Calibri"/>
                         </a:rPr>
+                        <a:t>0</a:t>
+                      </a:r>
+                    </a:p>
+                  </a:txBody>
+                  <a:tcPr>
+                    <a:solidFill>
+                      <a:srgbClr val="F2F2F2"/>
+                    </a:solidFill>
+                  </a:tcPr>
+                </a:tc>
+                <a:tc>
+                  <a:txBody>
+                    <a:bodyPr/>
+                    <a:lstStyle/>
+                    <a:p>
+                      <a:pPr algn="ctr"/>
+                      <a:r>
+                        <a:rPr sz="1050" b="0">
+                          <a:solidFill>
+                            <a:srgbClr val="333333"/>
+                          </a:solidFill>
+                          <a:latin typeface="Calibri"/>
+                        </a:rPr>
                         <a:t>+1</a:t>
                       </a:r>
                     </a:p>
@@ -6278,30 +6301,7 @@
                           </a:solidFill>
                           <a:latin typeface="Calibri"/>
                         </a:rPr>
-                        <a:t>-1</a:t>
-                      </a:r>
-                    </a:p>
-                  </a:txBody>
-                  <a:tcPr>
-                    <a:solidFill>
-                      <a:srgbClr val="F2F2F2"/>
-                    </a:solidFill>
-                  </a:tcPr>
-                </a:tc>
-                <a:tc>
-                  <a:txBody>
-                    <a:bodyPr/>
-                    <a:lstStyle/>
-                    <a:p>
-                      <a:pPr algn="ctr"/>
-                      <a:r>
-                        <a:rPr sz="1050" b="0">
-                          <a:solidFill>
-                            <a:srgbClr val="333333"/>
-                          </a:solidFill>
-                          <a:latin typeface="Calibri"/>
-                        </a:rPr>
-                        <a:t>—</a:t>
+                        <a:t>0</a:t>
                       </a:r>
                     </a:p>
                   </a:txBody>
@@ -6698,7 +6698,7 @@
                           </a:solidFill>
                           <a:latin typeface="Calibri"/>
                         </a:rPr>
-                        <a:t>Oyuncak</a:t>
+                        <a:t>Etkinlik</a:t>
                       </a:r>
                     </a:p>
                   </a:txBody>
@@ -6721,30 +6721,30 @@
                           </a:solidFill>
                           <a:latin typeface="Calibri"/>
                         </a:rPr>
+                        <a:t>0</a:t>
+                      </a:r>
+                    </a:p>
+                  </a:txBody>
+                  <a:tcPr>
+                    <a:solidFill>
+                      <a:srgbClr val="FFFFFF"/>
+                    </a:solidFill>
+                  </a:tcPr>
+                </a:tc>
+                <a:tc>
+                  <a:txBody>
+                    <a:bodyPr/>
+                    <a:lstStyle/>
+                    <a:p>
+                      <a:pPr algn="ctr"/>
+                      <a:r>
+                        <a:rPr sz="1050" b="0">
+                          <a:solidFill>
+                            <a:srgbClr val="333333"/>
+                          </a:solidFill>
+                          <a:latin typeface="Calibri"/>
+                        </a:rPr>
                         <a:t>+1</a:t>
-                      </a:r>
-                    </a:p>
-                  </a:txBody>
-                  <a:tcPr>
-                    <a:solidFill>
-                      <a:srgbClr val="FFFFFF"/>
-                    </a:solidFill>
-                  </a:tcPr>
-                </a:tc>
-                <a:tc>
-                  <a:txBody>
-                    <a:bodyPr/>
-                    <a:lstStyle/>
-                    <a:p>
-                      <a:pPr algn="ctr"/>
-                      <a:r>
-                        <a:rPr sz="1050" b="0">
-                          <a:solidFill>
-                            <a:srgbClr val="333333"/>
-                          </a:solidFill>
-                          <a:latin typeface="Calibri"/>
-                        </a:rPr>
-                        <a:t>0</a:t>
                       </a:r>
                     </a:p>
                   </a:txBody>
@@ -6861,7 +6861,7 @@
                           </a:solidFill>
                           <a:latin typeface="Calibri"/>
                         </a:rPr>
-                        <a:t>Etkinlik</a:t>
+                        <a:t>Oyuncak</a:t>
                       </a:r>
                     </a:p>
                   </a:txBody>
@@ -6884,30 +6884,30 @@
                           </a:solidFill>
                           <a:latin typeface="Calibri"/>
                         </a:rPr>
+                        <a:t>+1</a:t>
+                      </a:r>
+                    </a:p>
+                  </a:txBody>
+                  <a:tcPr>
+                    <a:solidFill>
+                      <a:srgbClr val="F2F2F2"/>
+                    </a:solidFill>
+                  </a:tcPr>
+                </a:tc>
+                <a:tc>
+                  <a:txBody>
+                    <a:bodyPr/>
+                    <a:lstStyle/>
+                    <a:p>
+                      <a:pPr algn="ctr"/>
+                      <a:r>
+                        <a:rPr sz="1050" b="0">
+                          <a:solidFill>
+                            <a:srgbClr val="333333"/>
+                          </a:solidFill>
+                          <a:latin typeface="Calibri"/>
+                        </a:rPr>
                         <a:t>0</a:t>
-                      </a:r>
-                    </a:p>
-                  </a:txBody>
-                  <a:tcPr>
-                    <a:solidFill>
-                      <a:srgbClr val="F2F2F2"/>
-                    </a:solidFill>
-                  </a:tcPr>
-                </a:tc>
-                <a:tc>
-                  <a:txBody>
-                    <a:bodyPr/>
-                    <a:lstStyle/>
-                    <a:p>
-                      <a:pPr algn="ctr"/>
-                      <a:r>
-                        <a:rPr sz="1050" b="0">
-                          <a:solidFill>
-                            <a:srgbClr val="333333"/>
-                          </a:solidFill>
-                          <a:latin typeface="Calibri"/>
-                        </a:rPr>
-                        <a:t>+1</a:t>
                       </a:r>
                     </a:p>
                   </a:txBody>
@@ -7513,7 +7513,7 @@
                           </a:solidFill>
                           <a:latin typeface="Calibri"/>
                         </a:rPr>
-                        <a:t>Muhasebe</a:t>
+                        <a:t>Ön Muhasebe</a:t>
                       </a:r>
                     </a:p>
                   </a:txBody>
@@ -7605,30 +7605,30 @@
                           </a:solidFill>
                           <a:latin typeface="Calibri"/>
                         </a:rPr>
+                        <a:t>—</a:t>
+                      </a:r>
+                    </a:p>
+                  </a:txBody>
+                  <a:tcPr>
+                    <a:solidFill>
+                      <a:srgbClr val="F2F2F2"/>
+                    </a:solidFill>
+                  </a:tcPr>
+                </a:tc>
+                <a:tc>
+                  <a:txBody>
+                    <a:bodyPr/>
+                    <a:lstStyle/>
+                    <a:p>
+                      <a:pPr algn="ctr"/>
+                      <a:r>
+                        <a:rPr sz="1050" b="1">
+                          <a:solidFill>
+                            <a:srgbClr val="333333"/>
+                          </a:solidFill>
+                          <a:latin typeface="Calibri"/>
+                        </a:rPr>
                         <a:t>-1</a:t>
-                      </a:r>
-                    </a:p>
-                  </a:txBody>
-                  <a:tcPr>
-                    <a:solidFill>
-                      <a:srgbClr val="F2F2F2"/>
-                    </a:solidFill>
-                  </a:tcPr>
-                </a:tc>
-                <a:tc>
-                  <a:txBody>
-                    <a:bodyPr/>
-                    <a:lstStyle/>
-                    <a:p>
-                      <a:pPr algn="ctr"/>
-                      <a:r>
-                        <a:rPr sz="1050" b="1">
-                          <a:solidFill>
-                            <a:srgbClr val="333333"/>
-                          </a:solidFill>
-                          <a:latin typeface="Calibri"/>
-                        </a:rPr>
-                        <a:t>—</a:t>
                       </a:r>
                     </a:p>
                   </a:txBody>
@@ -10300,8 +10300,8 @@
         </p:nvSpPr>
         <p:spPr>
           <a:xfrm>
-            <a:off x="548640" y="1371600"/>
-            <a:ext cx="3566160" cy="64008"/>
+            <a:off x="630936" y="1399032"/>
+            <a:ext cx="3401568" cy="54864"/>
           </a:xfrm>
           <a:prstGeom prst="rect">
             <a:avLst/>
@@ -10507,8 +10507,8 @@
         </p:nvSpPr>
         <p:spPr>
           <a:xfrm>
-            <a:off x="4279392" y="1371600"/>
-            <a:ext cx="3566160" cy="64008"/>
+            <a:off x="4361688" y="1399032"/>
+            <a:ext cx="3401568" cy="54864"/>
           </a:xfrm>
           <a:prstGeom prst="rect">
             <a:avLst/>
@@ -10714,8 +10714,8 @@
         </p:nvSpPr>
         <p:spPr>
           <a:xfrm>
-            <a:off x="8001000" y="1371600"/>
-            <a:ext cx="3566160" cy="64008"/>
+            <a:off x="8083296" y="1399032"/>
+            <a:ext cx="3401568" cy="54864"/>
           </a:xfrm>
           <a:prstGeom prst="rect">
             <a:avLst/>
@@ -11176,8 +11176,8 @@
         </p:nvSpPr>
         <p:spPr>
           <a:xfrm>
-            <a:off x="548640" y="1325880"/>
-            <a:ext cx="11018520" cy="64008"/>
+            <a:off x="630936" y="1353312"/>
+            <a:ext cx="10853928" cy="54864"/>
           </a:xfrm>
           <a:prstGeom prst="rect">
             <a:avLst/>
@@ -11368,8 +11368,8 @@
         </p:nvSpPr>
         <p:spPr>
           <a:xfrm>
-            <a:off x="548640" y="2404872"/>
-            <a:ext cx="11018520" cy="64008"/>
+            <a:off x="630936" y="2432303"/>
+            <a:ext cx="10853928" cy="54864"/>
           </a:xfrm>
           <a:prstGeom prst="rect">
             <a:avLst/>
@@ -11560,8 +11560,8 @@
         </p:nvSpPr>
         <p:spPr>
           <a:xfrm>
-            <a:off x="548640" y="3483863"/>
-            <a:ext cx="11018520" cy="64008"/>
+            <a:off x="630936" y="3511295"/>
+            <a:ext cx="10853928" cy="54864"/>
           </a:xfrm>
           <a:prstGeom prst="rect">
             <a:avLst/>
@@ -11752,8 +11752,8 @@
         </p:nvSpPr>
         <p:spPr>
           <a:xfrm>
-            <a:off x="548640" y="4562855"/>
-            <a:ext cx="11018520" cy="64008"/>
+            <a:off x="630936" y="4590288"/>
+            <a:ext cx="10853928" cy="54864"/>
           </a:xfrm>
           <a:prstGeom prst="rect">
             <a:avLst/>
@@ -12080,8 +12080,8 @@
         </p:nvSpPr>
         <p:spPr>
           <a:xfrm>
-            <a:off x="548640" y="1371600"/>
-            <a:ext cx="5394960" cy="64008"/>
+            <a:off x="630936" y="1399032"/>
+            <a:ext cx="5230368" cy="54864"/>
           </a:xfrm>
           <a:prstGeom prst="rect">
             <a:avLst/>
@@ -12287,8 +12287,8 @@
         </p:nvSpPr>
         <p:spPr>
           <a:xfrm>
-            <a:off x="6172200" y="1371600"/>
-            <a:ext cx="5394960" cy="64008"/>
+            <a:off x="6254496" y="1399032"/>
+            <a:ext cx="5230368" cy="54864"/>
           </a:xfrm>
           <a:prstGeom prst="rect">
             <a:avLst/>
@@ -12807,8 +12807,8 @@
         </p:nvSpPr>
         <p:spPr>
           <a:xfrm>
-            <a:off x="548640" y="1371600"/>
-            <a:ext cx="3566160" cy="64008"/>
+            <a:off x="630936" y="1399032"/>
+            <a:ext cx="3401568" cy="54864"/>
           </a:xfrm>
           <a:prstGeom prst="rect">
             <a:avLst/>
@@ -13043,8 +13043,8 @@
         </p:nvSpPr>
         <p:spPr>
           <a:xfrm>
-            <a:off x="4343400" y="1371600"/>
-            <a:ext cx="3566160" cy="64008"/>
+            <a:off x="4425696" y="1399032"/>
+            <a:ext cx="3401568" cy="54864"/>
           </a:xfrm>
           <a:prstGeom prst="rect">
             <a:avLst/>
@@ -13279,8 +13279,8 @@
         </p:nvSpPr>
         <p:spPr>
           <a:xfrm>
-            <a:off x="8138160" y="1371600"/>
-            <a:ext cx="3566160" cy="64008"/>
+            <a:off x="8220456" y="1399032"/>
+            <a:ext cx="3401568" cy="54864"/>
           </a:xfrm>
           <a:prstGeom prst="rect">
             <a:avLst/>
@@ -13515,8 +13515,8 @@
         </p:nvSpPr>
         <p:spPr>
           <a:xfrm>
-            <a:off x="548640" y="3337560"/>
-            <a:ext cx="3566160" cy="64008"/>
+            <a:off x="630936" y="3364991"/>
+            <a:ext cx="3401568" cy="54864"/>
           </a:xfrm>
           <a:prstGeom prst="rect">
             <a:avLst/>
@@ -13751,8 +13751,8 @@
         </p:nvSpPr>
         <p:spPr>
           <a:xfrm>
-            <a:off x="4343400" y="3337560"/>
-            <a:ext cx="3566160" cy="64008"/>
+            <a:off x="4425696" y="3364991"/>
+            <a:ext cx="3401568" cy="54864"/>
           </a:xfrm>
           <a:prstGeom prst="rect">
             <a:avLst/>
@@ -13987,8 +13987,8 @@
         </p:nvSpPr>
         <p:spPr>
           <a:xfrm>
-            <a:off x="8138160" y="3337560"/>
-            <a:ext cx="3566160" cy="64008"/>
+            <a:off x="8220456" y="3364991"/>
+            <a:ext cx="3401568" cy="54864"/>
           </a:xfrm>
           <a:prstGeom prst="rect">
             <a:avLst/>
@@ -14320,8 +14320,8 @@
         </p:nvSpPr>
         <p:spPr>
           <a:xfrm>
-            <a:off x="548640" y="1371600"/>
-            <a:ext cx="2651760" cy="64008"/>
+            <a:off x="630936" y="1399032"/>
+            <a:ext cx="2487168" cy="54864"/>
           </a:xfrm>
           <a:prstGeom prst="rect">
             <a:avLst/>
@@ -14527,8 +14527,8 @@
         </p:nvSpPr>
         <p:spPr>
           <a:xfrm>
-            <a:off x="3337560" y="1371600"/>
-            <a:ext cx="2651760" cy="64008"/>
+            <a:off x="3419856" y="1399032"/>
+            <a:ext cx="2487168" cy="54864"/>
           </a:xfrm>
           <a:prstGeom prst="rect">
             <a:avLst/>
@@ -14734,8 +14734,8 @@
         </p:nvSpPr>
         <p:spPr>
           <a:xfrm>
-            <a:off x="6126480" y="1371600"/>
-            <a:ext cx="2651760" cy="64008"/>
+            <a:off x="6208776" y="1399032"/>
+            <a:ext cx="2487168" cy="54864"/>
           </a:xfrm>
           <a:prstGeom prst="rect">
             <a:avLst/>
@@ -14941,8 +14941,8 @@
         </p:nvSpPr>
         <p:spPr>
           <a:xfrm>
-            <a:off x="8915400" y="1371600"/>
-            <a:ext cx="2651760" cy="64008"/>
+            <a:off x="8997696" y="1399032"/>
+            <a:ext cx="2487168" cy="54864"/>
           </a:xfrm>
           <a:prstGeom prst="rect">
             <a:avLst/>
@@ -15233,8 +15233,8 @@
         </p:nvSpPr>
         <p:spPr>
           <a:xfrm>
-            <a:off x="548640" y="4434840"/>
-            <a:ext cx="5394960" cy="64008"/>
+            <a:off x="630936" y="4462272"/>
+            <a:ext cx="5230368" cy="54864"/>
           </a:xfrm>
           <a:prstGeom prst="rect">
             <a:avLst/>
@@ -15401,8 +15401,8 @@
         </p:nvSpPr>
         <p:spPr>
           <a:xfrm>
-            <a:off x="6172200" y="4434840"/>
-            <a:ext cx="5394960" cy="64008"/>
+            <a:off x="6254496" y="4462272"/>
+            <a:ext cx="5230368" cy="54864"/>
           </a:xfrm>
           <a:prstGeom prst="rect">
             <a:avLst/>
@@ -15705,8 +15705,8 @@
         </p:nvSpPr>
         <p:spPr>
           <a:xfrm>
-            <a:off x="548640" y="1417320"/>
-            <a:ext cx="2084831" cy="64008"/>
+            <a:off x="630936" y="1444752"/>
+            <a:ext cx="1920239" cy="54864"/>
           </a:xfrm>
           <a:prstGeom prst="rect">
             <a:avLst/>
@@ -15951,8 +15951,8 @@
         </p:nvSpPr>
         <p:spPr>
           <a:xfrm>
-            <a:off x="2779776" y="1417320"/>
-            <a:ext cx="2084831" cy="64008"/>
+            <a:off x="2862072" y="1444752"/>
+            <a:ext cx="1920239" cy="54864"/>
           </a:xfrm>
           <a:prstGeom prst="rect">
             <a:avLst/>
@@ -16197,8 +16197,8 @@
         </p:nvSpPr>
         <p:spPr>
           <a:xfrm>
-            <a:off x="5010912" y="1417320"/>
-            <a:ext cx="2084831" cy="64008"/>
+            <a:off x="5093207" y="1444752"/>
+            <a:ext cx="1920239" cy="54864"/>
           </a:xfrm>
           <a:prstGeom prst="rect">
             <a:avLst/>
@@ -16443,8 +16443,8 @@
         </p:nvSpPr>
         <p:spPr>
           <a:xfrm>
-            <a:off x="7242048" y="1417320"/>
-            <a:ext cx="2084831" cy="64008"/>
+            <a:off x="7324344" y="1444752"/>
+            <a:ext cx="1920239" cy="54864"/>
           </a:xfrm>
           <a:prstGeom prst="rect">
             <a:avLst/>
@@ -16689,8 +16689,8 @@
         </p:nvSpPr>
         <p:spPr>
           <a:xfrm>
-            <a:off x="9473184" y="1417320"/>
-            <a:ext cx="2084831" cy="64008"/>
+            <a:off x="9555480" y="1444752"/>
+            <a:ext cx="1920239" cy="54864"/>
           </a:xfrm>
           <a:prstGeom prst="rect">
             <a:avLst/>
@@ -19003,8 +19003,8 @@
         </p:nvSpPr>
         <p:spPr>
           <a:xfrm>
-            <a:off x="548640" y="1371600"/>
-            <a:ext cx="3566160" cy="64008"/>
+            <a:off x="630936" y="1399032"/>
+            <a:ext cx="3401568" cy="54864"/>
           </a:xfrm>
           <a:prstGeom prst="rect">
             <a:avLst/>
@@ -19210,8 +19210,8 @@
         </p:nvSpPr>
         <p:spPr>
           <a:xfrm>
-            <a:off x="4279392" y="1371600"/>
-            <a:ext cx="3566160" cy="64008"/>
+            <a:off x="4361688" y="1399032"/>
+            <a:ext cx="3401568" cy="54864"/>
           </a:xfrm>
           <a:prstGeom prst="rect">
             <a:avLst/>
@@ -19417,8 +19417,8 @@
         </p:nvSpPr>
         <p:spPr>
           <a:xfrm>
-            <a:off x="8001000" y="1371600"/>
-            <a:ext cx="3566160" cy="64008"/>
+            <a:off x="8083296" y="1399032"/>
+            <a:ext cx="3401568" cy="54864"/>
           </a:xfrm>
           <a:prstGeom prst="rect">
             <a:avLst/>
@@ -19936,8 +19936,8 @@
         </p:nvSpPr>
         <p:spPr>
           <a:xfrm>
-            <a:off x="6583680" y="1600200"/>
-            <a:ext cx="4983480" cy="64008"/>
+            <a:off x="6665976" y="1627632"/>
+            <a:ext cx="4818888" cy="54864"/>
           </a:xfrm>
           <a:prstGeom prst="rect">
             <a:avLst/>
@@ -20143,8 +20143,8 @@
         </p:nvSpPr>
         <p:spPr>
           <a:xfrm>
-            <a:off x="6583680" y="2788920"/>
-            <a:ext cx="4983480" cy="64008"/>
+            <a:off x="6665976" y="2816351"/>
+            <a:ext cx="4818888" cy="54864"/>
           </a:xfrm>
           <a:prstGeom prst="rect">
             <a:avLst/>
@@ -20350,8 +20350,8 @@
         </p:nvSpPr>
         <p:spPr>
           <a:xfrm>
-            <a:off x="6583680" y="3977639"/>
-            <a:ext cx="4983480" cy="64008"/>
+            <a:off x="6665976" y="4005072"/>
+            <a:ext cx="4818888" cy="54864"/>
           </a:xfrm>
           <a:prstGeom prst="rect">
             <a:avLst/>
@@ -20750,8 +20750,8 @@
         </p:nvSpPr>
         <p:spPr>
           <a:xfrm>
-            <a:off x="7406640" y="1600200"/>
-            <a:ext cx="4160520" cy="64008"/>
+            <a:off x="7488936" y="1627632"/>
+            <a:ext cx="3995928" cy="54864"/>
           </a:xfrm>
           <a:prstGeom prst="rect">
             <a:avLst/>
@@ -20918,8 +20918,8 @@
         </p:nvSpPr>
         <p:spPr>
           <a:xfrm>
-            <a:off x="7406640" y="2834640"/>
-            <a:ext cx="4160520" cy="64008"/>
+            <a:off x="7488936" y="2862072"/>
+            <a:ext cx="3995928" cy="54864"/>
           </a:xfrm>
           <a:prstGeom prst="rect">
             <a:avLst/>
@@ -21086,8 +21086,8 @@
         </p:nvSpPr>
         <p:spPr>
           <a:xfrm>
-            <a:off x="7406640" y="4069080"/>
-            <a:ext cx="4160520" cy="64008"/>
+            <a:off x="7488936" y="4096512"/>
+            <a:ext cx="3995928" cy="54864"/>
           </a:xfrm>
           <a:prstGeom prst="rect">
             <a:avLst/>
@@ -21447,8 +21447,8 @@
         </p:nvSpPr>
         <p:spPr>
           <a:xfrm>
-            <a:off x="7406640" y="1463040"/>
-            <a:ext cx="4160520" cy="64008"/>
+            <a:off x="7488936" y="1490472"/>
+            <a:ext cx="3995928" cy="54864"/>
           </a:xfrm>
           <a:prstGeom prst="rect">
             <a:avLst/>
@@ -21631,8 +21631,8 @@
         </p:nvSpPr>
         <p:spPr>
           <a:xfrm>
-            <a:off x="7406640" y="3200400"/>
-            <a:ext cx="4160520" cy="64008"/>
+            <a:off x="7488936" y="3227832"/>
+            <a:ext cx="3995928" cy="54864"/>
           </a:xfrm>
           <a:prstGeom prst="rect">
             <a:avLst/>

--- a/briefings/sezon-kadro-20260902/sunum-kadro-sezon2026.pptx
+++ b/briefings/sezon-kadro-20260902/sunum-kadro-sezon2026.pptx
@@ -6046,7 +6046,7 @@
                           </a:solidFill>
                           <a:latin typeface="Calibri"/>
                         </a:rPr>
-                        <a:t>Kasa</a:t>
+                        <a:t>Şura</a:t>
                       </a:r>
                     </a:p>
                   </a:txBody>
@@ -6069,99 +6069,99 @@
                           </a:solidFill>
                           <a:latin typeface="Calibri"/>
                         </a:rPr>
+                        <a:t>—</a:t>
+                      </a:r>
+                    </a:p>
+                  </a:txBody>
+                  <a:tcPr>
+                    <a:solidFill>
+                      <a:srgbClr val="FFFFFF"/>
+                    </a:solidFill>
+                  </a:tcPr>
+                </a:tc>
+                <a:tc>
+                  <a:txBody>
+                    <a:bodyPr/>
+                    <a:lstStyle/>
+                    <a:p>
+                      <a:pPr algn="ctr"/>
+                      <a:r>
+                        <a:rPr sz="1050" b="0">
+                          <a:solidFill>
+                            <a:srgbClr val="333333"/>
+                          </a:solidFill>
+                          <a:latin typeface="Calibri"/>
+                        </a:rPr>
+                        <a:t>—</a:t>
+                      </a:r>
+                    </a:p>
+                  </a:txBody>
+                  <a:tcPr>
+                    <a:solidFill>
+                      <a:srgbClr val="FFFFFF"/>
+                    </a:solidFill>
+                  </a:tcPr>
+                </a:tc>
+                <a:tc>
+                  <a:txBody>
+                    <a:bodyPr/>
+                    <a:lstStyle/>
+                    <a:p>
+                      <a:pPr algn="ctr"/>
+                      <a:r>
+                        <a:rPr sz="1050" b="0">
+                          <a:solidFill>
+                            <a:srgbClr val="333333"/>
+                          </a:solidFill>
+                          <a:latin typeface="Calibri"/>
+                        </a:rPr>
+                        <a:t>—</a:t>
+                      </a:r>
+                    </a:p>
+                  </a:txBody>
+                  <a:tcPr>
+                    <a:solidFill>
+                      <a:srgbClr val="FFFFFF"/>
+                    </a:solidFill>
+                  </a:tcPr>
+                </a:tc>
+                <a:tc>
+                  <a:txBody>
+                    <a:bodyPr/>
+                    <a:lstStyle/>
+                    <a:p>
+                      <a:pPr algn="ctr"/>
+                      <a:r>
+                        <a:rPr sz="1050" b="0">
+                          <a:solidFill>
+                            <a:srgbClr val="333333"/>
+                          </a:solidFill>
+                          <a:latin typeface="Calibri"/>
+                        </a:rPr>
+                        <a:t>—</a:t>
+                      </a:r>
+                    </a:p>
+                  </a:txBody>
+                  <a:tcPr>
+                    <a:solidFill>
+                      <a:srgbClr val="FFFFFF"/>
+                    </a:solidFill>
+                  </a:tcPr>
+                </a:tc>
+                <a:tc>
+                  <a:txBody>
+                    <a:bodyPr/>
+                    <a:lstStyle/>
+                    <a:p>
+                      <a:pPr algn="ctr"/>
+                      <a:r>
+                        <a:rPr sz="1050" b="0">
+                          <a:solidFill>
+                            <a:srgbClr val="333333"/>
+                          </a:solidFill>
+                          <a:latin typeface="Calibri"/>
+                        </a:rPr>
                         <a:t>+2</a:t>
-                      </a:r>
-                    </a:p>
-                  </a:txBody>
-                  <a:tcPr>
-                    <a:solidFill>
-                      <a:srgbClr val="FFFFFF"/>
-                    </a:solidFill>
-                  </a:tcPr>
-                </a:tc>
-                <a:tc>
-                  <a:txBody>
-                    <a:bodyPr/>
-                    <a:lstStyle/>
-                    <a:p>
-                      <a:pPr algn="ctr"/>
-                      <a:r>
-                        <a:rPr sz="1050" b="0">
-                          <a:solidFill>
-                            <a:srgbClr val="333333"/>
-                          </a:solidFill>
-                          <a:latin typeface="Calibri"/>
-                        </a:rPr>
-                        <a:t>+1</a:t>
-                      </a:r>
-                    </a:p>
-                  </a:txBody>
-                  <a:tcPr>
-                    <a:solidFill>
-                      <a:srgbClr val="FFFFFF"/>
-                    </a:solidFill>
-                  </a:tcPr>
-                </a:tc>
-                <a:tc>
-                  <a:txBody>
-                    <a:bodyPr/>
-                    <a:lstStyle/>
-                    <a:p>
-                      <a:pPr algn="ctr"/>
-                      <a:r>
-                        <a:rPr sz="1050" b="0">
-                          <a:solidFill>
-                            <a:srgbClr val="333333"/>
-                          </a:solidFill>
-                          <a:latin typeface="Calibri"/>
-                        </a:rPr>
-                        <a:t>-1</a:t>
-                      </a:r>
-                    </a:p>
-                  </a:txBody>
-                  <a:tcPr>
-                    <a:solidFill>
-                      <a:srgbClr val="FFFFFF"/>
-                    </a:solidFill>
-                  </a:tcPr>
-                </a:tc>
-                <a:tc>
-                  <a:txBody>
-                    <a:bodyPr/>
-                    <a:lstStyle/>
-                    <a:p>
-                      <a:pPr algn="ctr"/>
-                      <a:r>
-                        <a:rPr sz="1050" b="0">
-                          <a:solidFill>
-                            <a:srgbClr val="333333"/>
-                          </a:solidFill>
-                          <a:latin typeface="Calibri"/>
-                        </a:rPr>
-                        <a:t>—</a:t>
-                      </a:r>
-                    </a:p>
-                  </a:txBody>
-                  <a:tcPr>
-                    <a:solidFill>
-                      <a:srgbClr val="FFFFFF"/>
-                    </a:solidFill>
-                  </a:tcPr>
-                </a:tc>
-                <a:tc>
-                  <a:txBody>
-                    <a:bodyPr/>
-                    <a:lstStyle/>
-                    <a:p>
-                      <a:pPr algn="ctr"/>
-                      <a:r>
-                        <a:rPr sz="1050" b="0">
-                          <a:solidFill>
-                            <a:srgbClr val="333333"/>
-                          </a:solidFill>
-                          <a:latin typeface="Calibri"/>
-                        </a:rPr>
-                        <a:t>—</a:t>
                       </a:r>
                     </a:p>
                   </a:txBody>
@@ -6209,7 +6209,7 @@
                           </a:solidFill>
                           <a:latin typeface="Calibri"/>
                         </a:rPr>
-                        <a:t>Akademi</a:t>
+                        <a:t>Kasa</a:t>
                       </a:r>
                     </a:p>
                   </a:txBody>
@@ -6232,6 +6232,29 @@
                           </a:solidFill>
                           <a:latin typeface="Calibri"/>
                         </a:rPr>
+                        <a:t>+2</a:t>
+                      </a:r>
+                    </a:p>
+                  </a:txBody>
+                  <a:tcPr>
+                    <a:solidFill>
+                      <a:srgbClr val="F2F2F2"/>
+                    </a:solidFill>
+                  </a:tcPr>
+                </a:tc>
+                <a:tc>
+                  <a:txBody>
+                    <a:bodyPr/>
+                    <a:lstStyle/>
+                    <a:p>
+                      <a:pPr algn="ctr"/>
+                      <a:r>
+                        <a:rPr sz="1050" b="0">
+                          <a:solidFill>
+                            <a:srgbClr val="333333"/>
+                          </a:solidFill>
+                          <a:latin typeface="Calibri"/>
+                        </a:rPr>
                         <a:t>+1</a:t>
                       </a:r>
                     </a:p>
@@ -6255,7 +6278,7 @@
                           </a:solidFill>
                           <a:latin typeface="Calibri"/>
                         </a:rPr>
-                        <a:t>0</a:t>
+                        <a:t>-1</a:t>
                       </a:r>
                     </a:p>
                   </a:txBody>
@@ -6278,30 +6301,7 @@
                           </a:solidFill>
                           <a:latin typeface="Calibri"/>
                         </a:rPr>
-                        <a:t>+1</a:t>
-                      </a:r>
-                    </a:p>
-                  </a:txBody>
-                  <a:tcPr>
-                    <a:solidFill>
-                      <a:srgbClr val="F2F2F2"/>
-                    </a:solidFill>
-                  </a:tcPr>
-                </a:tc>
-                <a:tc>
-                  <a:txBody>
-                    <a:bodyPr/>
-                    <a:lstStyle/>
-                    <a:p>
-                      <a:pPr algn="ctr"/>
-                      <a:r>
-                        <a:rPr sz="1050" b="0">
-                          <a:solidFill>
-                            <a:srgbClr val="333333"/>
-                          </a:solidFill>
-                          <a:latin typeface="Calibri"/>
-                        </a:rPr>
-                        <a:t>0</a:t>
+                        <a:t>—</a:t>
                       </a:r>
                     </a:p>
                   </a:txBody>
@@ -6372,7 +6372,7 @@
                           </a:solidFill>
                           <a:latin typeface="Calibri"/>
                         </a:rPr>
-                        <a:t>Şura</a:t>
+                        <a:t>Akademi</a:t>
                       </a:r>
                     </a:p>
                   </a:txBody>
@@ -6395,99 +6395,99 @@
                           </a:solidFill>
                           <a:latin typeface="Calibri"/>
                         </a:rPr>
+                        <a:t>+1</a:t>
+                      </a:r>
+                    </a:p>
+                  </a:txBody>
+                  <a:tcPr>
+                    <a:solidFill>
+                      <a:srgbClr val="FFFFFF"/>
+                    </a:solidFill>
+                  </a:tcPr>
+                </a:tc>
+                <a:tc>
+                  <a:txBody>
+                    <a:bodyPr/>
+                    <a:lstStyle/>
+                    <a:p>
+                      <a:pPr algn="ctr"/>
+                      <a:r>
+                        <a:rPr sz="1050" b="0">
+                          <a:solidFill>
+                            <a:srgbClr val="333333"/>
+                          </a:solidFill>
+                          <a:latin typeface="Calibri"/>
+                        </a:rPr>
+                        <a:t>0</a:t>
+                      </a:r>
+                    </a:p>
+                  </a:txBody>
+                  <a:tcPr>
+                    <a:solidFill>
+                      <a:srgbClr val="FFFFFF"/>
+                    </a:solidFill>
+                  </a:tcPr>
+                </a:tc>
+                <a:tc>
+                  <a:txBody>
+                    <a:bodyPr/>
+                    <a:lstStyle/>
+                    <a:p>
+                      <a:pPr algn="ctr"/>
+                      <a:r>
+                        <a:rPr sz="1050" b="0">
+                          <a:solidFill>
+                            <a:srgbClr val="333333"/>
+                          </a:solidFill>
+                          <a:latin typeface="Calibri"/>
+                        </a:rPr>
+                        <a:t>+1</a:t>
+                      </a:r>
+                    </a:p>
+                  </a:txBody>
+                  <a:tcPr>
+                    <a:solidFill>
+                      <a:srgbClr val="FFFFFF"/>
+                    </a:solidFill>
+                  </a:tcPr>
+                </a:tc>
+                <a:tc>
+                  <a:txBody>
+                    <a:bodyPr/>
+                    <a:lstStyle/>
+                    <a:p>
+                      <a:pPr algn="ctr"/>
+                      <a:r>
+                        <a:rPr sz="1050" b="0">
+                          <a:solidFill>
+                            <a:srgbClr val="333333"/>
+                          </a:solidFill>
+                          <a:latin typeface="Calibri"/>
+                        </a:rPr>
+                        <a:t>0</a:t>
+                      </a:r>
+                    </a:p>
+                  </a:txBody>
+                  <a:tcPr>
+                    <a:solidFill>
+                      <a:srgbClr val="FFFFFF"/>
+                    </a:solidFill>
+                  </a:tcPr>
+                </a:tc>
+                <a:tc>
+                  <a:txBody>
+                    <a:bodyPr/>
+                    <a:lstStyle/>
+                    <a:p>
+                      <a:pPr algn="ctr"/>
+                      <a:r>
+                        <a:rPr sz="1050" b="0">
+                          <a:solidFill>
+                            <a:srgbClr val="333333"/>
+                          </a:solidFill>
+                          <a:latin typeface="Calibri"/>
+                        </a:rPr>
                         <a:t>—</a:t>
-                      </a:r>
-                    </a:p>
-                  </a:txBody>
-                  <a:tcPr>
-                    <a:solidFill>
-                      <a:srgbClr val="FFFFFF"/>
-                    </a:solidFill>
-                  </a:tcPr>
-                </a:tc>
-                <a:tc>
-                  <a:txBody>
-                    <a:bodyPr/>
-                    <a:lstStyle/>
-                    <a:p>
-                      <a:pPr algn="ctr"/>
-                      <a:r>
-                        <a:rPr sz="1050" b="0">
-                          <a:solidFill>
-                            <a:srgbClr val="333333"/>
-                          </a:solidFill>
-                          <a:latin typeface="Calibri"/>
-                        </a:rPr>
-                        <a:t>—</a:t>
-                      </a:r>
-                    </a:p>
-                  </a:txBody>
-                  <a:tcPr>
-                    <a:solidFill>
-                      <a:srgbClr val="FFFFFF"/>
-                    </a:solidFill>
-                  </a:tcPr>
-                </a:tc>
-                <a:tc>
-                  <a:txBody>
-                    <a:bodyPr/>
-                    <a:lstStyle/>
-                    <a:p>
-                      <a:pPr algn="ctr"/>
-                      <a:r>
-                        <a:rPr sz="1050" b="0">
-                          <a:solidFill>
-                            <a:srgbClr val="333333"/>
-                          </a:solidFill>
-                          <a:latin typeface="Calibri"/>
-                        </a:rPr>
-                        <a:t>—</a:t>
-                      </a:r>
-                    </a:p>
-                  </a:txBody>
-                  <a:tcPr>
-                    <a:solidFill>
-                      <a:srgbClr val="FFFFFF"/>
-                    </a:solidFill>
-                  </a:tcPr>
-                </a:tc>
-                <a:tc>
-                  <a:txBody>
-                    <a:bodyPr/>
-                    <a:lstStyle/>
-                    <a:p>
-                      <a:pPr algn="ctr"/>
-                      <a:r>
-                        <a:rPr sz="1050" b="0">
-                          <a:solidFill>
-                            <a:srgbClr val="333333"/>
-                          </a:solidFill>
-                          <a:latin typeface="Calibri"/>
-                        </a:rPr>
-                        <a:t>—</a:t>
-                      </a:r>
-                    </a:p>
-                  </a:txBody>
-                  <a:tcPr>
-                    <a:solidFill>
-                      <a:srgbClr val="FFFFFF"/>
-                    </a:solidFill>
-                  </a:tcPr>
-                </a:tc>
-                <a:tc>
-                  <a:txBody>
-                    <a:bodyPr/>
-                    <a:lstStyle/>
-                    <a:p>
-                      <a:pPr algn="ctr"/>
-                      <a:r>
-                        <a:rPr sz="1050" b="0">
-                          <a:solidFill>
-                            <a:srgbClr val="333333"/>
-                          </a:solidFill>
-                          <a:latin typeface="Calibri"/>
-                        </a:rPr>
-                        <a:t>+2</a:t>
                       </a:r>
                     </a:p>
                   </a:txBody>
@@ -6535,7 +6535,7 @@
                           </a:solidFill>
                           <a:latin typeface="Calibri"/>
                         </a:rPr>
-                        <a:t>Kültür</a:t>
+                        <a:t>Etkinlik</a:t>
                       </a:r>
                     </a:p>
                   </a:txBody>
@@ -6558,6 +6558,29 @@
                           </a:solidFill>
                           <a:latin typeface="Calibri"/>
                         </a:rPr>
+                        <a:t>0</a:t>
+                      </a:r>
+                    </a:p>
+                  </a:txBody>
+                  <a:tcPr>
+                    <a:solidFill>
+                      <a:srgbClr val="F2F2F2"/>
+                    </a:solidFill>
+                  </a:tcPr>
+                </a:tc>
+                <a:tc>
+                  <a:txBody>
+                    <a:bodyPr/>
+                    <a:lstStyle/>
+                    <a:p>
+                      <a:pPr algn="ctr"/>
+                      <a:r>
+                        <a:rPr sz="1050" b="0">
+                          <a:solidFill>
+                            <a:srgbClr val="333333"/>
+                          </a:solidFill>
+                          <a:latin typeface="Calibri"/>
+                        </a:rPr>
                         <a:t>+1</a:t>
                       </a:r>
                     </a:p>
@@ -6581,7 +6604,7 @@
                           </a:solidFill>
                           <a:latin typeface="Calibri"/>
                         </a:rPr>
-                        <a:t>+1</a:t>
+                        <a:t>0</a:t>
                       </a:r>
                     </a:p>
                   </a:txBody>
@@ -6604,30 +6627,7 @@
                           </a:solidFill>
                           <a:latin typeface="Calibri"/>
                         </a:rPr>
-                        <a:t>-1</a:t>
-                      </a:r>
-                    </a:p>
-                  </a:txBody>
-                  <a:tcPr>
-                    <a:solidFill>
-                      <a:srgbClr val="F2F2F2"/>
-                    </a:solidFill>
-                  </a:tcPr>
-                </a:tc>
-                <a:tc>
-                  <a:txBody>
-                    <a:bodyPr/>
-                    <a:lstStyle/>
-                    <a:p>
-                      <a:pPr algn="ctr"/>
-                      <a:r>
-                        <a:rPr sz="1050" b="0">
-                          <a:solidFill>
-                            <a:srgbClr val="333333"/>
-                          </a:solidFill>
-                          <a:latin typeface="Calibri"/>
-                        </a:rPr>
-                        <a:t>0</a:t>
+                        <a:t>—</a:t>
                       </a:r>
                     </a:p>
                   </a:txBody>
@@ -6698,7 +6698,7 @@
                           </a:solidFill>
                           <a:latin typeface="Calibri"/>
                         </a:rPr>
-                        <a:t>Etkinlik</a:t>
+                        <a:t>Oyuncak</a:t>
                       </a:r>
                     </a:p>
                   </a:txBody>
@@ -6721,30 +6721,30 @@
                           </a:solidFill>
                           <a:latin typeface="Calibri"/>
                         </a:rPr>
+                        <a:t>+1</a:t>
+                      </a:r>
+                    </a:p>
+                  </a:txBody>
+                  <a:tcPr>
+                    <a:solidFill>
+                      <a:srgbClr val="FFFFFF"/>
+                    </a:solidFill>
+                  </a:tcPr>
+                </a:tc>
+                <a:tc>
+                  <a:txBody>
+                    <a:bodyPr/>
+                    <a:lstStyle/>
+                    <a:p>
+                      <a:pPr algn="ctr"/>
+                      <a:r>
+                        <a:rPr sz="1050" b="0">
+                          <a:solidFill>
+                            <a:srgbClr val="333333"/>
+                          </a:solidFill>
+                          <a:latin typeface="Calibri"/>
+                        </a:rPr>
                         <a:t>0</a:t>
-                      </a:r>
-                    </a:p>
-                  </a:txBody>
-                  <a:tcPr>
-                    <a:solidFill>
-                      <a:srgbClr val="FFFFFF"/>
-                    </a:solidFill>
-                  </a:tcPr>
-                </a:tc>
-                <a:tc>
-                  <a:txBody>
-                    <a:bodyPr/>
-                    <a:lstStyle/>
-                    <a:p>
-                      <a:pPr algn="ctr"/>
-                      <a:r>
-                        <a:rPr sz="1050" b="0">
-                          <a:solidFill>
-                            <a:srgbClr val="333333"/>
-                          </a:solidFill>
-                          <a:latin typeface="Calibri"/>
-                        </a:rPr>
-                        <a:t>+1</a:t>
                       </a:r>
                     </a:p>
                   </a:txBody>
@@ -6861,7 +6861,7 @@
                           </a:solidFill>
                           <a:latin typeface="Calibri"/>
                         </a:rPr>
-                        <a:t>Oyuncak</a:t>
+                        <a:t>Kültür</a:t>
                       </a:r>
                     </a:p>
                   </a:txBody>
@@ -6907,53 +6907,53 @@
                           </a:solidFill>
                           <a:latin typeface="Calibri"/>
                         </a:rPr>
+                        <a:t>+1</a:t>
+                      </a:r>
+                    </a:p>
+                  </a:txBody>
+                  <a:tcPr>
+                    <a:solidFill>
+                      <a:srgbClr val="F2F2F2"/>
+                    </a:solidFill>
+                  </a:tcPr>
+                </a:tc>
+                <a:tc>
+                  <a:txBody>
+                    <a:bodyPr/>
+                    <a:lstStyle/>
+                    <a:p>
+                      <a:pPr algn="ctr"/>
+                      <a:r>
+                        <a:rPr sz="1050" b="0">
+                          <a:solidFill>
+                            <a:srgbClr val="333333"/>
+                          </a:solidFill>
+                          <a:latin typeface="Calibri"/>
+                        </a:rPr>
+                        <a:t>-1</a:t>
+                      </a:r>
+                    </a:p>
+                  </a:txBody>
+                  <a:tcPr>
+                    <a:solidFill>
+                      <a:srgbClr val="F2F2F2"/>
+                    </a:solidFill>
+                  </a:tcPr>
+                </a:tc>
+                <a:tc>
+                  <a:txBody>
+                    <a:bodyPr/>
+                    <a:lstStyle/>
+                    <a:p>
+                      <a:pPr algn="ctr"/>
+                      <a:r>
+                        <a:rPr sz="1050" b="0">
+                          <a:solidFill>
+                            <a:srgbClr val="333333"/>
+                          </a:solidFill>
+                          <a:latin typeface="Calibri"/>
+                        </a:rPr>
                         <a:t>0</a:t>
-                      </a:r>
-                    </a:p>
-                  </a:txBody>
-                  <a:tcPr>
-                    <a:solidFill>
-                      <a:srgbClr val="F2F2F2"/>
-                    </a:solidFill>
-                  </a:tcPr>
-                </a:tc>
-                <a:tc>
-                  <a:txBody>
-                    <a:bodyPr/>
-                    <a:lstStyle/>
-                    <a:p>
-                      <a:pPr algn="ctr"/>
-                      <a:r>
-                        <a:rPr sz="1050" b="0">
-                          <a:solidFill>
-                            <a:srgbClr val="333333"/>
-                          </a:solidFill>
-                          <a:latin typeface="Calibri"/>
-                        </a:rPr>
-                        <a:t>0</a:t>
-                      </a:r>
-                    </a:p>
-                  </a:txBody>
-                  <a:tcPr>
-                    <a:solidFill>
-                      <a:srgbClr val="F2F2F2"/>
-                    </a:solidFill>
-                  </a:tcPr>
-                </a:tc>
-                <a:tc>
-                  <a:txBody>
-                    <a:bodyPr/>
-                    <a:lstStyle/>
-                    <a:p>
-                      <a:pPr algn="ctr"/>
-                      <a:r>
-                        <a:rPr sz="1050" b="0">
-                          <a:solidFill>
-                            <a:srgbClr val="333333"/>
-                          </a:solidFill>
-                          <a:latin typeface="Calibri"/>
-                        </a:rPr>
-                        <a:t>—</a:t>
                       </a:r>
                     </a:p>
                   </a:txBody>
@@ -7024,7 +7024,7 @@
                           </a:solidFill>
                           <a:latin typeface="Calibri"/>
                         </a:rPr>
-                        <a:t>Mağaza</a:t>
+                        <a:t>İdari İşler</a:t>
                       </a:r>
                     </a:p>
                   </a:txBody>
@@ -7047,6 +7047,52 @@
                           </a:solidFill>
                           <a:latin typeface="Calibri"/>
                         </a:rPr>
+                        <a:t>+1</a:t>
+                      </a:r>
+                    </a:p>
+                  </a:txBody>
+                  <a:tcPr>
+                    <a:solidFill>
+                      <a:srgbClr val="FFFFFF"/>
+                    </a:solidFill>
+                  </a:tcPr>
+                </a:tc>
+                <a:tc>
+                  <a:txBody>
+                    <a:bodyPr/>
+                    <a:lstStyle/>
+                    <a:p>
+                      <a:pPr algn="ctr"/>
+                      <a:r>
+                        <a:rPr sz="1050" b="0">
+                          <a:solidFill>
+                            <a:srgbClr val="333333"/>
+                          </a:solidFill>
+                          <a:latin typeface="Calibri"/>
+                        </a:rPr>
+                        <a:t>-1</a:t>
+                      </a:r>
+                    </a:p>
+                  </a:txBody>
+                  <a:tcPr>
+                    <a:solidFill>
+                      <a:srgbClr val="FFFFFF"/>
+                    </a:solidFill>
+                  </a:tcPr>
+                </a:tc>
+                <a:tc>
+                  <a:txBody>
+                    <a:bodyPr/>
+                    <a:lstStyle/>
+                    <a:p>
+                      <a:pPr algn="ctr"/>
+                      <a:r>
+                        <a:rPr sz="1050" b="0">
+                          <a:solidFill>
+                            <a:srgbClr val="333333"/>
+                          </a:solidFill>
+                          <a:latin typeface="Calibri"/>
+                        </a:rPr>
                         <a:t>0</a:t>
                       </a:r>
                     </a:p>
@@ -7070,53 +7116,7 @@
                           </a:solidFill>
                           <a:latin typeface="Calibri"/>
                         </a:rPr>
-                        <a:t>0</a:t>
-                      </a:r>
-                    </a:p>
-                  </a:txBody>
-                  <a:tcPr>
-                    <a:solidFill>
-                      <a:srgbClr val="FFFFFF"/>
-                    </a:solidFill>
-                  </a:tcPr>
-                </a:tc>
-                <a:tc>
-                  <a:txBody>
-                    <a:bodyPr/>
-                    <a:lstStyle/>
-                    <a:p>
-                      <a:pPr algn="ctr"/>
-                      <a:r>
-                        <a:rPr sz="1050" b="0">
-                          <a:solidFill>
-                            <a:srgbClr val="333333"/>
-                          </a:solidFill>
-                          <a:latin typeface="Calibri"/>
-                        </a:rPr>
-                        <a:t>0</a:t>
-                      </a:r>
-                    </a:p>
-                  </a:txBody>
-                  <a:tcPr>
-                    <a:solidFill>
-                      <a:srgbClr val="FFFFFF"/>
-                    </a:solidFill>
-                  </a:tcPr>
-                </a:tc>
-                <a:tc>
-                  <a:txBody>
-                    <a:bodyPr/>
-                    <a:lstStyle/>
-                    <a:p>
-                      <a:pPr algn="ctr"/>
-                      <a:r>
-                        <a:rPr sz="1050" b="0">
-                          <a:solidFill>
-                            <a:srgbClr val="333333"/>
-                          </a:solidFill>
-                          <a:latin typeface="Calibri"/>
-                        </a:rPr>
-                        <a:t>0</a:t>
+                        <a:t>—</a:t>
                       </a:r>
                     </a:p>
                   </a:txBody>
@@ -7187,7 +7187,7 @@
                           </a:solidFill>
                           <a:latin typeface="Calibri"/>
                         </a:rPr>
-                        <a:t>İdari İşler</a:t>
+                        <a:t>Mağaza</a:t>
                       </a:r>
                     </a:p>
                   </a:txBody>
@@ -7210,7 +7210,7 @@
                           </a:solidFill>
                           <a:latin typeface="Calibri"/>
                         </a:rPr>
-                        <a:t>+1</a:t>
+                        <a:t>0</a:t>
                       </a:r>
                     </a:p>
                   </a:txBody>
@@ -7233,7 +7233,7 @@
                           </a:solidFill>
                           <a:latin typeface="Calibri"/>
                         </a:rPr>
-                        <a:t>-1</a:t>
+                        <a:t>0</a:t>
                       </a:r>
                     </a:p>
                   </a:txBody>
@@ -7279,7 +7279,7 @@
                           </a:solidFill>
                           <a:latin typeface="Calibri"/>
                         </a:rPr>
-                        <a:t>—</a:t>
+                        <a:t>0</a:t>
                       </a:r>
                     </a:p>
                   </a:txBody>
@@ -7513,7 +7513,7 @@
                           </a:solidFill>
                           <a:latin typeface="Calibri"/>
                         </a:rPr>
-                        <a:t>Ön Muhasebe</a:t>
+                        <a:t>Bilgi İşlem</a:t>
                       </a:r>
                     </a:p>
                   </a:txBody>
@@ -10248,7 +10248,7 @@
       </p:sp>
       <p:sp>
         <p:nvSpPr>
-          <p:cNvPr id="3" name="Rounded Rectangle 2"/>
+          <p:cNvPr id="3" name="Rectangle 2"/>
           <p:cNvSpPr/>
           <p:nvPr/>
         </p:nvSpPr>
@@ -10257,7 +10257,7 @@
             <a:off x="548640" y="1371600"/>
             <a:ext cx="3566160" cy="1828800"/>
           </a:xfrm>
-          <a:prstGeom prst="roundRect">
+          <a:prstGeom prst="rect">
             <a:avLst/>
           </a:prstGeom>
           <a:solidFill>
@@ -10265,7 +10265,7 @@
           </a:solidFill>
           <a:ln w="12700">
             <a:solidFill>
-              <a:srgbClr val="E0E0E0"/>
+              <a:srgbClr val="DCDCDC"/>
             </a:solidFill>
           </a:ln>
           <a:effectLst/>
@@ -10300,8 +10300,8 @@
         </p:nvSpPr>
         <p:spPr>
           <a:xfrm>
-            <a:off x="630936" y="1399032"/>
-            <a:ext cx="3401568" cy="54864"/>
+            <a:off x="548640" y="1371600"/>
+            <a:ext cx="68580" cy="1828800"/>
           </a:xfrm>
           <a:prstGeom prst="rect">
             <a:avLst/>
@@ -10336,16 +10336,40 @@
           </a:p>
         </p:txBody>
       </p:sp>
-      <p:sp>
-        <p:nvSpPr>
-          <p:cNvPr id="5" name="TextBox 4"/>
+      <p:pic>
+        <p:nvPicPr>
+          <p:cNvPr id="5" name="Picture 4" descr="workflow.png"/>
+          <p:cNvPicPr>
+            <a:picLocks noChangeAspect="1"/>
+          </p:cNvPicPr>
+          <p:nvPr/>
+        </p:nvPicPr>
+        <p:blipFill>
+          <a:blip r:embed="rId3"/>
+          <a:stretch>
+            <a:fillRect/>
+          </a:stretch>
+        </p:blipFill>
+        <p:spPr>
+          <a:xfrm>
+            <a:off x="3639312" y="1536192"/>
+            <a:ext cx="274320" cy="274320"/>
+          </a:xfrm>
+          <a:prstGeom prst="rect">
+            <a:avLst/>
+          </a:prstGeom>
+        </p:spPr>
+      </p:pic>
+      <p:sp>
+        <p:nvSpPr>
+          <p:cNvPr id="6" name="TextBox 5"/>
           <p:cNvSpPr txBox="1"/>
           <p:nvPr/>
         </p:nvSpPr>
         <p:spPr>
           <a:xfrm>
-            <a:off x="749808" y="1536192"/>
-            <a:ext cx="3218688" cy="384048"/>
+            <a:off x="804672" y="1536192"/>
+            <a:ext cx="2697480" cy="384048"/>
           </a:xfrm>
           <a:prstGeom prst="rect">
             <a:avLst/>
@@ -10377,14 +10401,14 @@
       </p:sp>
       <p:sp>
         <p:nvSpPr>
-          <p:cNvPr id="6" name="TextBox 5"/>
+          <p:cNvPr id="7" name="TextBox 6"/>
           <p:cNvSpPr txBox="1"/>
           <p:nvPr/>
         </p:nvSpPr>
         <p:spPr>
           <a:xfrm>
-            <a:off x="749808" y="1975104"/>
-            <a:ext cx="3218688" cy="658368"/>
+            <a:off x="804672" y="1975104"/>
+            <a:ext cx="3154679" cy="658368"/>
           </a:xfrm>
           <a:prstGeom prst="rect">
             <a:avLst/>
@@ -10416,14 +10440,14 @@
       </p:sp>
       <p:sp>
         <p:nvSpPr>
-          <p:cNvPr id="7" name="TextBox 6"/>
+          <p:cNvPr id="8" name="TextBox 7"/>
           <p:cNvSpPr txBox="1"/>
           <p:nvPr/>
         </p:nvSpPr>
         <p:spPr>
           <a:xfrm>
-            <a:off x="749808" y="2688336"/>
-            <a:ext cx="3218688" cy="457200"/>
+            <a:off x="804672" y="2688336"/>
+            <a:ext cx="3154679" cy="457200"/>
           </a:xfrm>
           <a:prstGeom prst="rect">
             <a:avLst/>
@@ -10455,7 +10479,7 @@
       </p:sp>
       <p:sp>
         <p:nvSpPr>
-          <p:cNvPr id="8" name="Rounded Rectangle 7"/>
+          <p:cNvPr id="9" name="Rectangle 8"/>
           <p:cNvSpPr/>
           <p:nvPr/>
         </p:nvSpPr>
@@ -10464,7 +10488,7 @@
             <a:off x="4279392" y="1371600"/>
             <a:ext cx="3566160" cy="1828800"/>
           </a:xfrm>
-          <a:prstGeom prst="roundRect">
+          <a:prstGeom prst="rect">
             <a:avLst/>
           </a:prstGeom>
           <a:solidFill>
@@ -10472,7 +10496,7 @@
           </a:solidFill>
           <a:ln w="12700">
             <a:solidFill>
-              <a:srgbClr val="E0E0E0"/>
+              <a:srgbClr val="DCDCDC"/>
             </a:solidFill>
           </a:ln>
           <a:effectLst/>
@@ -10501,14 +10525,14 @@
       </p:sp>
       <p:sp>
         <p:nvSpPr>
-          <p:cNvPr id="9" name="Rectangle 8"/>
+          <p:cNvPr id="10" name="Rectangle 9"/>
           <p:cNvSpPr/>
           <p:nvPr/>
         </p:nvSpPr>
         <p:spPr>
           <a:xfrm>
-            <a:off x="4361688" y="1399032"/>
-            <a:ext cx="3401568" cy="54864"/>
+            <a:off x="4279392" y="1371600"/>
+            <a:ext cx="68580" cy="1828800"/>
           </a:xfrm>
           <a:prstGeom prst="rect">
             <a:avLst/>
@@ -10543,16 +10567,40 @@
           </a:p>
         </p:txBody>
       </p:sp>
-      <p:sp>
-        <p:nvSpPr>
-          <p:cNvPr id="10" name="TextBox 9"/>
+      <p:pic>
+        <p:nvPicPr>
+          <p:cNvPr id="11" name="Picture 10" descr="rocket.png"/>
+          <p:cNvPicPr>
+            <a:picLocks noChangeAspect="1"/>
+          </p:cNvPicPr>
+          <p:nvPr/>
+        </p:nvPicPr>
+        <p:blipFill>
+          <a:blip r:embed="rId4"/>
+          <a:stretch>
+            <a:fillRect/>
+          </a:stretch>
+        </p:blipFill>
+        <p:spPr>
+          <a:xfrm>
+            <a:off x="7370064" y="1536192"/>
+            <a:ext cx="274320" cy="274320"/>
+          </a:xfrm>
+          <a:prstGeom prst="rect">
+            <a:avLst/>
+          </a:prstGeom>
+        </p:spPr>
+      </p:pic>
+      <p:sp>
+        <p:nvSpPr>
+          <p:cNvPr id="12" name="TextBox 11"/>
           <p:cNvSpPr txBox="1"/>
           <p:nvPr/>
         </p:nvSpPr>
         <p:spPr>
           <a:xfrm>
-            <a:off x="4480559" y="1536192"/>
-            <a:ext cx="3218688" cy="384048"/>
+            <a:off x="4535424" y="1536192"/>
+            <a:ext cx="2697480" cy="384048"/>
           </a:xfrm>
           <a:prstGeom prst="rect">
             <a:avLst/>
@@ -10584,14 +10632,14 @@
       </p:sp>
       <p:sp>
         <p:nvSpPr>
-          <p:cNvPr id="11" name="TextBox 10"/>
+          <p:cNvPr id="13" name="TextBox 12"/>
           <p:cNvSpPr txBox="1"/>
           <p:nvPr/>
         </p:nvSpPr>
         <p:spPr>
           <a:xfrm>
-            <a:off x="4480559" y="1975104"/>
-            <a:ext cx="3218688" cy="658368"/>
+            <a:off x="4535424" y="1975104"/>
+            <a:ext cx="3154679" cy="658368"/>
           </a:xfrm>
           <a:prstGeom prst="rect">
             <a:avLst/>
@@ -10623,14 +10671,14 @@
       </p:sp>
       <p:sp>
         <p:nvSpPr>
-          <p:cNvPr id="12" name="TextBox 11"/>
+          <p:cNvPr id="14" name="TextBox 13"/>
           <p:cNvSpPr txBox="1"/>
           <p:nvPr/>
         </p:nvSpPr>
         <p:spPr>
           <a:xfrm>
-            <a:off x="4480559" y="2688336"/>
-            <a:ext cx="3218688" cy="457200"/>
+            <a:off x="4535424" y="2688336"/>
+            <a:ext cx="3154679" cy="457200"/>
           </a:xfrm>
           <a:prstGeom prst="rect">
             <a:avLst/>
@@ -10662,7 +10710,7 @@
       </p:sp>
       <p:sp>
         <p:nvSpPr>
-          <p:cNvPr id="13" name="Rounded Rectangle 12"/>
+          <p:cNvPr id="15" name="Rectangle 14"/>
           <p:cNvSpPr/>
           <p:nvPr/>
         </p:nvSpPr>
@@ -10671,7 +10719,7 @@
             <a:off x="8001000" y="1371600"/>
             <a:ext cx="3566160" cy="1828800"/>
           </a:xfrm>
-          <a:prstGeom prst="roundRect">
+          <a:prstGeom prst="rect">
             <a:avLst/>
           </a:prstGeom>
           <a:solidFill>
@@ -10679,7 +10727,7 @@
           </a:solidFill>
           <a:ln w="12700">
             <a:solidFill>
-              <a:srgbClr val="E0E0E0"/>
+              <a:srgbClr val="DCDCDC"/>
             </a:solidFill>
           </a:ln>
           <a:effectLst/>
@@ -10708,14 +10756,14 @@
       </p:sp>
       <p:sp>
         <p:nvSpPr>
-          <p:cNvPr id="14" name="Rectangle 13"/>
+          <p:cNvPr id="16" name="Rectangle 15"/>
           <p:cNvSpPr/>
           <p:nvPr/>
         </p:nvSpPr>
         <p:spPr>
           <a:xfrm>
-            <a:off x="8083296" y="1399032"/>
-            <a:ext cx="3401568" cy="54864"/>
+            <a:off x="8001000" y="1371600"/>
+            <a:ext cx="68580" cy="1828800"/>
           </a:xfrm>
           <a:prstGeom prst="rect">
             <a:avLst/>
@@ -10750,16 +10798,40 @@
           </a:p>
         </p:txBody>
       </p:sp>
-      <p:sp>
-        <p:nvSpPr>
-          <p:cNvPr id="15" name="TextBox 14"/>
+      <p:pic>
+        <p:nvPicPr>
+          <p:cNvPr id="17" name="Picture 16" descr="workflow.png"/>
+          <p:cNvPicPr>
+            <a:picLocks noChangeAspect="1"/>
+          </p:cNvPicPr>
+          <p:nvPr/>
+        </p:nvPicPr>
+        <p:blipFill>
+          <a:blip r:embed="rId3"/>
+          <a:stretch>
+            <a:fillRect/>
+          </a:stretch>
+        </p:blipFill>
+        <p:spPr>
+          <a:xfrm>
+            <a:off x="11091672" y="1536192"/>
+            <a:ext cx="274320" cy="274320"/>
+          </a:xfrm>
+          <a:prstGeom prst="rect">
+            <a:avLst/>
+          </a:prstGeom>
+        </p:spPr>
+      </p:pic>
+      <p:sp>
+        <p:nvSpPr>
+          <p:cNvPr id="18" name="TextBox 17"/>
           <p:cNvSpPr txBox="1"/>
           <p:nvPr/>
         </p:nvSpPr>
         <p:spPr>
           <a:xfrm>
-            <a:off x="8202168" y="1536192"/>
-            <a:ext cx="3218688" cy="384048"/>
+            <a:off x="8257031" y="1536192"/>
+            <a:ext cx="2697480" cy="384048"/>
           </a:xfrm>
           <a:prstGeom prst="rect">
             <a:avLst/>
@@ -10791,14 +10863,14 @@
       </p:sp>
       <p:sp>
         <p:nvSpPr>
-          <p:cNvPr id="16" name="TextBox 15"/>
+          <p:cNvPr id="19" name="TextBox 18"/>
           <p:cNvSpPr txBox="1"/>
           <p:nvPr/>
         </p:nvSpPr>
         <p:spPr>
           <a:xfrm>
-            <a:off x="8202168" y="1975104"/>
-            <a:ext cx="3218688" cy="658368"/>
+            <a:off x="8257031" y="1975104"/>
+            <a:ext cx="3154679" cy="658368"/>
           </a:xfrm>
           <a:prstGeom prst="rect">
             <a:avLst/>
@@ -10830,14 +10902,14 @@
       </p:sp>
       <p:sp>
         <p:nvSpPr>
-          <p:cNvPr id="17" name="TextBox 16"/>
+          <p:cNvPr id="20" name="TextBox 19"/>
           <p:cNvSpPr txBox="1"/>
           <p:nvPr/>
         </p:nvSpPr>
         <p:spPr>
           <a:xfrm>
-            <a:off x="8202168" y="2688336"/>
-            <a:ext cx="3218688" cy="457200"/>
+            <a:off x="8257031" y="2688336"/>
+            <a:ext cx="3154679" cy="457200"/>
           </a:xfrm>
           <a:prstGeom prst="rect">
             <a:avLst/>
@@ -10869,7 +10941,7 @@
       </p:sp>
       <p:graphicFrame>
         <p:nvGraphicFramePr>
-          <p:cNvPr id="18" name="Chart 17"/>
+          <p:cNvPr id="21" name="Chart 20"/>
           <p:cNvGraphicFramePr>
             <a:graphicFrameLocks noGrp="1"/>
           </p:cNvGraphicFramePr>
@@ -10881,13 +10953,13 @@
         </p:xfrm>
         <a:graphic>
           <a:graphicData uri="http://schemas.openxmlformats.org/drawingml/2006/chart">
-            <c:chart xmlns:c="http://schemas.openxmlformats.org/drawingml/2006/chart" r:id="rId3"/>
+            <c:chart xmlns:c="http://schemas.openxmlformats.org/drawingml/2006/chart" r:id="rId5"/>
           </a:graphicData>
         </a:graphic>
       </p:graphicFrame>
       <p:sp>
         <p:nvSpPr>
-          <p:cNvPr id="19" name="Rounded Rectangle 18"/>
+          <p:cNvPr id="22" name="Rounded Rectangle 21"/>
           <p:cNvSpPr/>
           <p:nvPr/>
         </p:nvSpPr>
@@ -10933,7 +11005,7 @@
       </p:sp>
       <p:sp>
         <p:nvSpPr>
-          <p:cNvPr id="20" name="TextBox 19"/>
+          <p:cNvPr id="23" name="TextBox 22"/>
           <p:cNvSpPr txBox="1"/>
           <p:nvPr/>
         </p:nvSpPr>
@@ -10988,7 +11060,7 @@
       </p:sp>
       <p:sp>
         <p:nvSpPr>
-          <p:cNvPr id="21" name="TextBox 20"/>
+          <p:cNvPr id="24" name="TextBox 23"/>
           <p:cNvSpPr txBox="1"/>
           <p:nvPr/>
         </p:nvSpPr>
@@ -11027,7 +11099,7 @@
       </p:sp>
       <p:sp>
         <p:nvSpPr>
-          <p:cNvPr id="22" name="TextBox 21"/>
+          <p:cNvPr id="25" name="TextBox 24"/>
           <p:cNvSpPr txBox="1"/>
           <p:nvPr/>
         </p:nvSpPr>
@@ -11124,7 +11196,7 @@
       </p:sp>
       <p:sp>
         <p:nvSpPr>
-          <p:cNvPr id="3" name="Rounded Rectangle 2"/>
+          <p:cNvPr id="3" name="Rectangle 2"/>
           <p:cNvSpPr/>
           <p:nvPr/>
         </p:nvSpPr>
@@ -11133,7 +11205,7 @@
             <a:off x="548640" y="1325880"/>
             <a:ext cx="11018520" cy="987552"/>
           </a:xfrm>
-          <a:prstGeom prst="roundRect">
+          <a:prstGeom prst="rect">
             <a:avLst/>
           </a:prstGeom>
           <a:solidFill>
@@ -11141,7 +11213,7 @@
           </a:solidFill>
           <a:ln w="12700">
             <a:solidFill>
-              <a:srgbClr val="E0E0E0"/>
+              <a:srgbClr val="DCDCDC"/>
             </a:solidFill>
           </a:ln>
           <a:effectLst/>
@@ -11176,8 +11248,8 @@
         </p:nvSpPr>
         <p:spPr>
           <a:xfrm>
-            <a:off x="630936" y="1353312"/>
-            <a:ext cx="10853928" cy="54864"/>
+            <a:off x="548640" y="1325880"/>
+            <a:ext cx="68580" cy="987552"/>
           </a:xfrm>
           <a:prstGeom prst="rect">
             <a:avLst/>
@@ -11316,7 +11388,7 @@
       </p:sp>
       <p:sp>
         <p:nvSpPr>
-          <p:cNvPr id="8" name="Rounded Rectangle 7"/>
+          <p:cNvPr id="8" name="Rectangle 7"/>
           <p:cNvSpPr/>
           <p:nvPr/>
         </p:nvSpPr>
@@ -11325,7 +11397,7 @@
             <a:off x="548640" y="2404872"/>
             <a:ext cx="11018520" cy="987552"/>
           </a:xfrm>
-          <a:prstGeom prst="roundRect">
+          <a:prstGeom prst="rect">
             <a:avLst/>
           </a:prstGeom>
           <a:solidFill>
@@ -11333,7 +11405,7 @@
           </a:solidFill>
           <a:ln w="12700">
             <a:solidFill>
-              <a:srgbClr val="E0E0E0"/>
+              <a:srgbClr val="DCDCDC"/>
             </a:solidFill>
           </a:ln>
           <a:effectLst/>
@@ -11368,14 +11440,14 @@
         </p:nvSpPr>
         <p:spPr>
           <a:xfrm>
-            <a:off x="630936" y="2432303"/>
-            <a:ext cx="10853928" cy="54864"/>
+            <a:off x="548640" y="2404872"/>
+            <a:ext cx="68580" cy="987552"/>
           </a:xfrm>
           <a:prstGeom prst="rect">
             <a:avLst/>
           </a:prstGeom>
           <a:solidFill>
-            <a:srgbClr val="C0142B"/>
+            <a:srgbClr val="E30622"/>
           </a:solidFill>
           <a:ln>
             <a:noFill/>
@@ -11508,7 +11580,7 @@
       </p:sp>
       <p:sp>
         <p:nvSpPr>
-          <p:cNvPr id="13" name="Rounded Rectangle 12"/>
+          <p:cNvPr id="13" name="Rectangle 12"/>
           <p:cNvSpPr/>
           <p:nvPr/>
         </p:nvSpPr>
@@ -11517,7 +11589,7 @@
             <a:off x="548640" y="3483863"/>
             <a:ext cx="11018520" cy="987552"/>
           </a:xfrm>
-          <a:prstGeom prst="roundRect">
+          <a:prstGeom prst="rect">
             <a:avLst/>
           </a:prstGeom>
           <a:solidFill>
@@ -11525,7 +11597,7 @@
           </a:solidFill>
           <a:ln w="12700">
             <a:solidFill>
-              <a:srgbClr val="E0E0E0"/>
+              <a:srgbClr val="DCDCDC"/>
             </a:solidFill>
           </a:ln>
           <a:effectLst/>
@@ -11560,8 +11632,8 @@
         </p:nvSpPr>
         <p:spPr>
           <a:xfrm>
-            <a:off x="630936" y="3511295"/>
-            <a:ext cx="10853928" cy="54864"/>
+            <a:off x="548640" y="3483863"/>
+            <a:ext cx="68580" cy="987552"/>
           </a:xfrm>
           <a:prstGeom prst="rect">
             <a:avLst/>
@@ -11700,7 +11772,7 @@
       </p:sp>
       <p:sp>
         <p:nvSpPr>
-          <p:cNvPr id="18" name="Rounded Rectangle 17"/>
+          <p:cNvPr id="18" name="Rectangle 17"/>
           <p:cNvSpPr/>
           <p:nvPr/>
         </p:nvSpPr>
@@ -11709,7 +11781,7 @@
             <a:off x="548640" y="4562855"/>
             <a:ext cx="11018520" cy="987552"/>
           </a:xfrm>
-          <a:prstGeom prst="roundRect">
+          <a:prstGeom prst="rect">
             <a:avLst/>
           </a:prstGeom>
           <a:solidFill>
@@ -11717,7 +11789,7 @@
           </a:solidFill>
           <a:ln w="12700">
             <a:solidFill>
-              <a:srgbClr val="E0E0E0"/>
+              <a:srgbClr val="DCDCDC"/>
             </a:solidFill>
           </a:ln>
           <a:effectLst/>
@@ -11752,14 +11824,14 @@
         </p:nvSpPr>
         <p:spPr>
           <a:xfrm>
-            <a:off x="630936" y="4590288"/>
-            <a:ext cx="10853928" cy="54864"/>
+            <a:off x="548640" y="4562855"/>
+            <a:ext cx="68580" cy="987552"/>
           </a:xfrm>
           <a:prstGeom prst="rect">
             <a:avLst/>
           </a:prstGeom>
           <a:solidFill>
-            <a:srgbClr val="C0142B"/>
+            <a:srgbClr val="E30622"/>
           </a:solidFill>
           <a:ln>
             <a:noFill/>
@@ -12028,7 +12100,7 @@
       </p:sp>
       <p:sp>
         <p:nvSpPr>
-          <p:cNvPr id="3" name="Rounded Rectangle 2"/>
+          <p:cNvPr id="3" name="Rectangle 2"/>
           <p:cNvSpPr/>
           <p:nvPr/>
         </p:nvSpPr>
@@ -12037,7 +12109,7 @@
             <a:off x="548640" y="1371600"/>
             <a:ext cx="5394960" cy="2286000"/>
           </a:xfrm>
-          <a:prstGeom prst="roundRect">
+          <a:prstGeom prst="rect">
             <a:avLst/>
           </a:prstGeom>
           <a:solidFill>
@@ -12045,7 +12117,7 @@
           </a:solidFill>
           <a:ln w="12700">
             <a:solidFill>
-              <a:srgbClr val="E0E0E0"/>
+              <a:srgbClr val="DCDCDC"/>
             </a:solidFill>
           </a:ln>
           <a:effectLst/>
@@ -12080,8 +12152,8 @@
         </p:nvSpPr>
         <p:spPr>
           <a:xfrm>
-            <a:off x="630936" y="1399032"/>
-            <a:ext cx="5230368" cy="54864"/>
+            <a:off x="548640" y="1371600"/>
+            <a:ext cx="68580" cy="2286000"/>
           </a:xfrm>
           <a:prstGeom prst="rect">
             <a:avLst/>
@@ -12235,7 +12307,7 @@
       </p:sp>
       <p:sp>
         <p:nvSpPr>
-          <p:cNvPr id="8" name="Rounded Rectangle 7"/>
+          <p:cNvPr id="8" name="Rectangle 7"/>
           <p:cNvSpPr/>
           <p:nvPr/>
         </p:nvSpPr>
@@ -12244,7 +12316,7 @@
             <a:off x="6172200" y="1371600"/>
             <a:ext cx="5394960" cy="2286000"/>
           </a:xfrm>
-          <a:prstGeom prst="roundRect">
+          <a:prstGeom prst="rect">
             <a:avLst/>
           </a:prstGeom>
           <a:solidFill>
@@ -12252,7 +12324,7 @@
           </a:solidFill>
           <a:ln w="12700">
             <a:solidFill>
-              <a:srgbClr val="E0E0E0"/>
+              <a:srgbClr val="DCDCDC"/>
             </a:solidFill>
           </a:ln>
           <a:effectLst/>
@@ -12287,8 +12359,8 @@
         </p:nvSpPr>
         <p:spPr>
           <a:xfrm>
-            <a:off x="6254496" y="1399032"/>
-            <a:ext cx="5230368" cy="54864"/>
+            <a:off x="6172200" y="1371600"/>
+            <a:ext cx="68580" cy="2286000"/>
           </a:xfrm>
           <a:prstGeom prst="rect">
             <a:avLst/>
@@ -12755,7 +12827,7 @@
       </p:sp>
       <p:sp>
         <p:nvSpPr>
-          <p:cNvPr id="3" name="Rounded Rectangle 2"/>
+          <p:cNvPr id="3" name="Rectangle 2"/>
           <p:cNvSpPr/>
           <p:nvPr/>
         </p:nvSpPr>
@@ -12764,7 +12836,7 @@
             <a:off x="548640" y="1371600"/>
             <a:ext cx="3566160" cy="1783080"/>
           </a:xfrm>
-          <a:prstGeom prst="roundRect">
+          <a:prstGeom prst="rect">
             <a:avLst/>
           </a:prstGeom>
           <a:solidFill>
@@ -12772,7 +12844,7 @@
           </a:solidFill>
           <a:ln w="12700">
             <a:solidFill>
-              <a:srgbClr val="E0E0E0"/>
+              <a:srgbClr val="DCDCDC"/>
             </a:solidFill>
           </a:ln>
           <a:effectLst/>
@@ -12807,8 +12879,8 @@
         </p:nvSpPr>
         <p:spPr>
           <a:xfrm>
-            <a:off x="630936" y="1399032"/>
-            <a:ext cx="3401568" cy="54864"/>
+            <a:off x="548640" y="1371600"/>
+            <a:ext cx="68580" cy="1783080"/>
           </a:xfrm>
           <a:prstGeom prst="rect">
             <a:avLst/>
@@ -12991,7 +13063,7 @@
       </p:sp>
       <p:sp>
         <p:nvSpPr>
-          <p:cNvPr id="9" name="Rounded Rectangle 8"/>
+          <p:cNvPr id="9" name="Rectangle 8"/>
           <p:cNvSpPr/>
           <p:nvPr/>
         </p:nvSpPr>
@@ -13000,7 +13072,7 @@
             <a:off x="4343400" y="1371600"/>
             <a:ext cx="3566160" cy="1783080"/>
           </a:xfrm>
-          <a:prstGeom prst="roundRect">
+          <a:prstGeom prst="rect">
             <a:avLst/>
           </a:prstGeom>
           <a:solidFill>
@@ -13008,7 +13080,7 @@
           </a:solidFill>
           <a:ln w="12700">
             <a:solidFill>
-              <a:srgbClr val="E0E0E0"/>
+              <a:srgbClr val="DCDCDC"/>
             </a:solidFill>
           </a:ln>
           <a:effectLst/>
@@ -13043,54 +13115,10 @@
         </p:nvSpPr>
         <p:spPr>
           <a:xfrm>
-            <a:off x="4425696" y="1399032"/>
-            <a:ext cx="3401568" cy="54864"/>
-          </a:xfrm>
-          <a:prstGeom prst="rect">
-            <a:avLst/>
-          </a:prstGeom>
-          <a:solidFill>
-            <a:srgbClr val="C0142B"/>
-          </a:solidFill>
-          <a:ln>
-            <a:noFill/>
-          </a:ln>
-          <a:effectLst/>
-        </p:spPr>
-        <p:style>
-          <a:lnRef idx="1">
-            <a:schemeClr val="accent1"/>
-          </a:lnRef>
-          <a:fillRef idx="3">
-            <a:schemeClr val="accent1"/>
-          </a:fillRef>
-          <a:effectRef idx="2">
-            <a:schemeClr val="accent1"/>
-          </a:effectRef>
-          <a:fontRef idx="minor">
-            <a:schemeClr val="lt1"/>
-          </a:fontRef>
-        </p:style>
-        <p:txBody>
-          <a:bodyPr rtlCol="0" anchor="ctr"/>
-          <a:lstStyle/>
-          <a:p>
-            <a:pPr algn="ctr"/>
-          </a:p>
-        </p:txBody>
-      </p:sp>
-      <p:sp>
-        <p:nvSpPr>
-          <p:cNvPr id="11" name="Oval 10"/>
-          <p:cNvSpPr/>
-          <p:nvPr/>
-        </p:nvSpPr>
-        <p:spPr>
-          <a:xfrm>
-            <a:off x="4572000" y="1572768"/>
-            <a:ext cx="530352" cy="530352"/>
-          </a:xfrm>
-          <a:prstGeom prst="ellipse">
+            <a:off x="4343400" y="1371600"/>
+            <a:ext cx="68580" cy="1783080"/>
+          </a:xfrm>
+          <a:prstGeom prst="rect">
             <a:avLst/>
           </a:prstGeom>
           <a:solidFill>
@@ -13123,6 +13151,50 @@
           </a:p>
         </p:txBody>
       </p:sp>
+      <p:sp>
+        <p:nvSpPr>
+          <p:cNvPr id="11" name="Oval 10"/>
+          <p:cNvSpPr/>
+          <p:nvPr/>
+        </p:nvSpPr>
+        <p:spPr>
+          <a:xfrm>
+            <a:off x="4572000" y="1572768"/>
+            <a:ext cx="530352" cy="530352"/>
+          </a:xfrm>
+          <a:prstGeom prst="ellipse">
+            <a:avLst/>
+          </a:prstGeom>
+          <a:solidFill>
+            <a:srgbClr val="E30622"/>
+          </a:solidFill>
+          <a:ln>
+            <a:noFill/>
+          </a:ln>
+          <a:effectLst/>
+        </p:spPr>
+        <p:style>
+          <a:lnRef idx="1">
+            <a:schemeClr val="accent1"/>
+          </a:lnRef>
+          <a:fillRef idx="3">
+            <a:schemeClr val="accent1"/>
+          </a:fillRef>
+          <a:effectRef idx="2">
+            <a:schemeClr val="accent1"/>
+          </a:effectRef>
+          <a:fontRef idx="minor">
+            <a:schemeClr val="lt1"/>
+          </a:fontRef>
+        </p:style>
+        <p:txBody>
+          <a:bodyPr rtlCol="0" anchor="ctr"/>
+          <a:lstStyle/>
+          <a:p>
+            <a:pPr algn="ctr"/>
+          </a:p>
+        </p:txBody>
+      </p:sp>
       <p:pic>
         <p:nvPicPr>
           <p:cNvPr id="12" name="Picture 11" descr="package.png"/>
@@ -13227,7 +13299,7 @@
       </p:sp>
       <p:sp>
         <p:nvSpPr>
-          <p:cNvPr id="15" name="Rounded Rectangle 14"/>
+          <p:cNvPr id="15" name="Rectangle 14"/>
           <p:cNvSpPr/>
           <p:nvPr/>
         </p:nvSpPr>
@@ -13236,7 +13308,7 @@
             <a:off x="8138160" y="1371600"/>
             <a:ext cx="3566160" cy="1783080"/>
           </a:xfrm>
-          <a:prstGeom prst="roundRect">
+          <a:prstGeom prst="rect">
             <a:avLst/>
           </a:prstGeom>
           <a:solidFill>
@@ -13244,7 +13316,7 @@
           </a:solidFill>
           <a:ln w="12700">
             <a:solidFill>
-              <a:srgbClr val="E0E0E0"/>
+              <a:srgbClr val="DCDCDC"/>
             </a:solidFill>
           </a:ln>
           <a:effectLst/>
@@ -13279,54 +13351,10 @@
         </p:nvSpPr>
         <p:spPr>
           <a:xfrm>
-            <a:off x="8220456" y="1399032"/>
-            <a:ext cx="3401568" cy="54864"/>
-          </a:xfrm>
-          <a:prstGeom prst="rect">
-            <a:avLst/>
-          </a:prstGeom>
-          <a:solidFill>
-            <a:srgbClr val="7A1020"/>
-          </a:solidFill>
-          <a:ln>
-            <a:noFill/>
-          </a:ln>
-          <a:effectLst/>
-        </p:spPr>
-        <p:style>
-          <a:lnRef idx="1">
-            <a:schemeClr val="accent1"/>
-          </a:lnRef>
-          <a:fillRef idx="3">
-            <a:schemeClr val="accent1"/>
-          </a:fillRef>
-          <a:effectRef idx="2">
-            <a:schemeClr val="accent1"/>
-          </a:effectRef>
-          <a:fontRef idx="minor">
-            <a:schemeClr val="lt1"/>
-          </a:fontRef>
-        </p:style>
-        <p:txBody>
-          <a:bodyPr rtlCol="0" anchor="ctr"/>
-          <a:lstStyle/>
-          <a:p>
-            <a:pPr algn="ctr"/>
-          </a:p>
-        </p:txBody>
-      </p:sp>
-      <p:sp>
-        <p:nvSpPr>
-          <p:cNvPr id="17" name="Oval 16"/>
-          <p:cNvSpPr/>
-          <p:nvPr/>
-        </p:nvSpPr>
-        <p:spPr>
-          <a:xfrm>
-            <a:off x="8366760" y="1572768"/>
-            <a:ext cx="530352" cy="530352"/>
-          </a:xfrm>
-          <a:prstGeom prst="ellipse">
+            <a:off x="8138160" y="1371600"/>
+            <a:ext cx="68580" cy="1783080"/>
+          </a:xfrm>
+          <a:prstGeom prst="rect">
             <a:avLst/>
           </a:prstGeom>
           <a:solidFill>
@@ -13359,6 +13387,50 @@
           </a:p>
         </p:txBody>
       </p:sp>
+      <p:sp>
+        <p:nvSpPr>
+          <p:cNvPr id="17" name="Oval 16"/>
+          <p:cNvSpPr/>
+          <p:nvPr/>
+        </p:nvSpPr>
+        <p:spPr>
+          <a:xfrm>
+            <a:off x="8366760" y="1572768"/>
+            <a:ext cx="530352" cy="530352"/>
+          </a:xfrm>
+          <a:prstGeom prst="ellipse">
+            <a:avLst/>
+          </a:prstGeom>
+          <a:solidFill>
+            <a:srgbClr val="E30622"/>
+          </a:solidFill>
+          <a:ln>
+            <a:noFill/>
+          </a:ln>
+          <a:effectLst/>
+        </p:spPr>
+        <p:style>
+          <a:lnRef idx="1">
+            <a:schemeClr val="accent1"/>
+          </a:lnRef>
+          <a:fillRef idx="3">
+            <a:schemeClr val="accent1"/>
+          </a:fillRef>
+          <a:effectRef idx="2">
+            <a:schemeClr val="accent1"/>
+          </a:effectRef>
+          <a:fontRef idx="minor">
+            <a:schemeClr val="lt1"/>
+          </a:fontRef>
+        </p:style>
+        <p:txBody>
+          <a:bodyPr rtlCol="0" anchor="ctr"/>
+          <a:lstStyle/>
+          <a:p>
+            <a:pPr algn="ctr"/>
+          </a:p>
+        </p:txBody>
+      </p:sp>
       <p:pic>
         <p:nvPicPr>
           <p:cNvPr id="18" name="Picture 17" descr="zap.png"/>
@@ -13463,7 +13535,7 @@
       </p:sp>
       <p:sp>
         <p:nvSpPr>
-          <p:cNvPr id="21" name="Rounded Rectangle 20"/>
+          <p:cNvPr id="21" name="Rectangle 20"/>
           <p:cNvSpPr/>
           <p:nvPr/>
         </p:nvSpPr>
@@ -13472,7 +13544,7 @@
             <a:off x="548640" y="3337560"/>
             <a:ext cx="3566160" cy="1783080"/>
           </a:xfrm>
-          <a:prstGeom prst="roundRect">
+          <a:prstGeom prst="rect">
             <a:avLst/>
           </a:prstGeom>
           <a:solidFill>
@@ -13480,7 +13552,7 @@
           </a:solidFill>
           <a:ln w="12700">
             <a:solidFill>
-              <a:srgbClr val="E0E0E0"/>
+              <a:srgbClr val="DCDCDC"/>
             </a:solidFill>
           </a:ln>
           <a:effectLst/>
@@ -13515,54 +13587,10 @@
         </p:nvSpPr>
         <p:spPr>
           <a:xfrm>
-            <a:off x="630936" y="3364991"/>
-            <a:ext cx="3401568" cy="54864"/>
-          </a:xfrm>
-          <a:prstGeom prst="rect">
-            <a:avLst/>
-          </a:prstGeom>
-          <a:solidFill>
-            <a:srgbClr val="4A4A4A"/>
-          </a:solidFill>
-          <a:ln>
-            <a:noFill/>
-          </a:ln>
-          <a:effectLst/>
-        </p:spPr>
-        <p:style>
-          <a:lnRef idx="1">
-            <a:schemeClr val="accent1"/>
-          </a:lnRef>
-          <a:fillRef idx="3">
-            <a:schemeClr val="accent1"/>
-          </a:fillRef>
-          <a:effectRef idx="2">
-            <a:schemeClr val="accent1"/>
-          </a:effectRef>
-          <a:fontRef idx="minor">
-            <a:schemeClr val="lt1"/>
-          </a:fontRef>
-        </p:style>
-        <p:txBody>
-          <a:bodyPr rtlCol="0" anchor="ctr"/>
-          <a:lstStyle/>
-          <a:p>
-            <a:pPr algn="ctr"/>
-          </a:p>
-        </p:txBody>
-      </p:sp>
-      <p:sp>
-        <p:nvSpPr>
-          <p:cNvPr id="23" name="Oval 22"/>
-          <p:cNvSpPr/>
-          <p:nvPr/>
-        </p:nvSpPr>
-        <p:spPr>
-          <a:xfrm>
-            <a:off x="777240" y="3538728"/>
-            <a:ext cx="530352" cy="530352"/>
-          </a:xfrm>
-          <a:prstGeom prst="ellipse">
+            <a:off x="548640" y="3337560"/>
+            <a:ext cx="68580" cy="1783080"/>
+          </a:xfrm>
+          <a:prstGeom prst="rect">
             <a:avLst/>
           </a:prstGeom>
           <a:solidFill>
@@ -13595,6 +13623,50 @@
           </a:p>
         </p:txBody>
       </p:sp>
+      <p:sp>
+        <p:nvSpPr>
+          <p:cNvPr id="23" name="Oval 22"/>
+          <p:cNvSpPr/>
+          <p:nvPr/>
+        </p:nvSpPr>
+        <p:spPr>
+          <a:xfrm>
+            <a:off x="777240" y="3538728"/>
+            <a:ext cx="530352" cy="530352"/>
+          </a:xfrm>
+          <a:prstGeom prst="ellipse">
+            <a:avLst/>
+          </a:prstGeom>
+          <a:solidFill>
+            <a:srgbClr val="E30622"/>
+          </a:solidFill>
+          <a:ln>
+            <a:noFill/>
+          </a:ln>
+          <a:effectLst/>
+        </p:spPr>
+        <p:style>
+          <a:lnRef idx="1">
+            <a:schemeClr val="accent1"/>
+          </a:lnRef>
+          <a:fillRef idx="3">
+            <a:schemeClr val="accent1"/>
+          </a:fillRef>
+          <a:effectRef idx="2">
+            <a:schemeClr val="accent1"/>
+          </a:effectRef>
+          <a:fontRef idx="minor">
+            <a:schemeClr val="lt1"/>
+          </a:fontRef>
+        </p:style>
+        <p:txBody>
+          <a:bodyPr rtlCol="0" anchor="ctr"/>
+          <a:lstStyle/>
+          <a:p>
+            <a:pPr algn="ctr"/>
+          </a:p>
+        </p:txBody>
+      </p:sp>
       <p:pic>
         <p:nvPicPr>
           <p:cNvPr id="24" name="Picture 23" descr="layers.png"/>
@@ -13699,7 +13771,7 @@
       </p:sp>
       <p:sp>
         <p:nvSpPr>
-          <p:cNvPr id="27" name="Rounded Rectangle 26"/>
+          <p:cNvPr id="27" name="Rectangle 26"/>
           <p:cNvSpPr/>
           <p:nvPr/>
         </p:nvSpPr>
@@ -13708,7 +13780,7 @@
             <a:off x="4343400" y="3337560"/>
             <a:ext cx="3566160" cy="1783080"/>
           </a:xfrm>
-          <a:prstGeom prst="roundRect">
+          <a:prstGeom prst="rect">
             <a:avLst/>
           </a:prstGeom>
           <a:solidFill>
@@ -13716,7 +13788,7 @@
           </a:solidFill>
           <a:ln w="12700">
             <a:solidFill>
-              <a:srgbClr val="E0E0E0"/>
+              <a:srgbClr val="DCDCDC"/>
             </a:solidFill>
           </a:ln>
           <a:effectLst/>
@@ -13751,54 +13823,10 @@
         </p:nvSpPr>
         <p:spPr>
           <a:xfrm>
-            <a:off x="4425696" y="3364991"/>
-            <a:ext cx="3401568" cy="54864"/>
-          </a:xfrm>
-          <a:prstGeom prst="rect">
-            <a:avLst/>
-          </a:prstGeom>
-          <a:solidFill>
-            <a:srgbClr val="8C8C8C"/>
-          </a:solidFill>
-          <a:ln>
-            <a:noFill/>
-          </a:ln>
-          <a:effectLst/>
-        </p:spPr>
-        <p:style>
-          <a:lnRef idx="1">
-            <a:schemeClr val="accent1"/>
-          </a:lnRef>
-          <a:fillRef idx="3">
-            <a:schemeClr val="accent1"/>
-          </a:fillRef>
-          <a:effectRef idx="2">
-            <a:schemeClr val="accent1"/>
-          </a:effectRef>
-          <a:fontRef idx="minor">
-            <a:schemeClr val="lt1"/>
-          </a:fontRef>
-        </p:style>
-        <p:txBody>
-          <a:bodyPr rtlCol="0" anchor="ctr"/>
-          <a:lstStyle/>
-          <a:p>
-            <a:pPr algn="ctr"/>
-          </a:p>
-        </p:txBody>
-      </p:sp>
-      <p:sp>
-        <p:nvSpPr>
-          <p:cNvPr id="29" name="Oval 28"/>
-          <p:cNvSpPr/>
-          <p:nvPr/>
-        </p:nvSpPr>
-        <p:spPr>
-          <a:xfrm>
-            <a:off x="4572000" y="3538728"/>
-            <a:ext cx="530352" cy="530352"/>
-          </a:xfrm>
-          <a:prstGeom prst="ellipse">
+            <a:off x="4343400" y="3337560"/>
+            <a:ext cx="68580" cy="1783080"/>
+          </a:xfrm>
+          <a:prstGeom prst="rect">
             <a:avLst/>
           </a:prstGeom>
           <a:solidFill>
@@ -13831,6 +13859,50 @@
           </a:p>
         </p:txBody>
       </p:sp>
+      <p:sp>
+        <p:nvSpPr>
+          <p:cNvPr id="29" name="Oval 28"/>
+          <p:cNvSpPr/>
+          <p:nvPr/>
+        </p:nvSpPr>
+        <p:spPr>
+          <a:xfrm>
+            <a:off x="4572000" y="3538728"/>
+            <a:ext cx="530352" cy="530352"/>
+          </a:xfrm>
+          <a:prstGeom prst="ellipse">
+            <a:avLst/>
+          </a:prstGeom>
+          <a:solidFill>
+            <a:srgbClr val="E30622"/>
+          </a:solidFill>
+          <a:ln>
+            <a:noFill/>
+          </a:ln>
+          <a:effectLst/>
+        </p:spPr>
+        <p:style>
+          <a:lnRef idx="1">
+            <a:schemeClr val="accent1"/>
+          </a:lnRef>
+          <a:fillRef idx="3">
+            <a:schemeClr val="accent1"/>
+          </a:fillRef>
+          <a:effectRef idx="2">
+            <a:schemeClr val="accent1"/>
+          </a:effectRef>
+          <a:fontRef idx="minor">
+            <a:schemeClr val="lt1"/>
+          </a:fontRef>
+        </p:style>
+        <p:txBody>
+          <a:bodyPr rtlCol="0" anchor="ctr"/>
+          <a:lstStyle/>
+          <a:p>
+            <a:pPr algn="ctr"/>
+          </a:p>
+        </p:txBody>
+      </p:sp>
       <p:pic>
         <p:nvPicPr>
           <p:cNvPr id="30" name="Picture 29" descr="shield-check.png"/>
@@ -13935,7 +14007,7 @@
       </p:sp>
       <p:sp>
         <p:nvSpPr>
-          <p:cNvPr id="33" name="Rounded Rectangle 32"/>
+          <p:cNvPr id="33" name="Rectangle 32"/>
           <p:cNvSpPr/>
           <p:nvPr/>
         </p:nvSpPr>
@@ -13944,7 +14016,7 @@
             <a:off x="8138160" y="3337560"/>
             <a:ext cx="3566160" cy="1783080"/>
           </a:xfrm>
-          <a:prstGeom prst="roundRect">
+          <a:prstGeom prst="rect">
             <a:avLst/>
           </a:prstGeom>
           <a:solidFill>
@@ -13952,7 +14024,7 @@
           </a:solidFill>
           <a:ln w="12700">
             <a:solidFill>
-              <a:srgbClr val="E0E0E0"/>
+              <a:srgbClr val="DCDCDC"/>
             </a:solidFill>
           </a:ln>
           <a:effectLst/>
@@ -13987,8 +14059,8 @@
         </p:nvSpPr>
         <p:spPr>
           <a:xfrm>
-            <a:off x="8220456" y="3364991"/>
-            <a:ext cx="3401568" cy="54864"/>
+            <a:off x="8138160" y="3337560"/>
+            <a:ext cx="68580" cy="1783080"/>
           </a:xfrm>
           <a:prstGeom prst="rect">
             <a:avLst/>
@@ -14268,7 +14340,7 @@
       </p:sp>
       <p:sp>
         <p:nvSpPr>
-          <p:cNvPr id="3" name="Rounded Rectangle 2"/>
+          <p:cNvPr id="3" name="Rectangle 2"/>
           <p:cNvSpPr/>
           <p:nvPr/>
         </p:nvSpPr>
@@ -14277,7 +14349,7 @@
             <a:off x="548640" y="1371600"/>
             <a:ext cx="2651760" cy="1828800"/>
           </a:xfrm>
-          <a:prstGeom prst="roundRect">
+          <a:prstGeom prst="rect">
             <a:avLst/>
           </a:prstGeom>
           <a:solidFill>
@@ -14285,7 +14357,7 @@
           </a:solidFill>
           <a:ln w="12700">
             <a:solidFill>
-              <a:srgbClr val="E0E0E0"/>
+              <a:srgbClr val="DCDCDC"/>
             </a:solidFill>
           </a:ln>
           <a:effectLst/>
@@ -14320,8 +14392,8 @@
         </p:nvSpPr>
         <p:spPr>
           <a:xfrm>
-            <a:off x="630936" y="1399032"/>
-            <a:ext cx="2487168" cy="54864"/>
+            <a:off x="548640" y="1371600"/>
+            <a:ext cx="68580" cy="1828800"/>
           </a:xfrm>
           <a:prstGeom prst="rect">
             <a:avLst/>
@@ -14356,16 +14428,40 @@
           </a:p>
         </p:txBody>
       </p:sp>
-      <p:sp>
-        <p:nvSpPr>
-          <p:cNvPr id="5" name="TextBox 4"/>
+      <p:pic>
+        <p:nvPicPr>
+          <p:cNvPr id="5" name="Picture 4" descr="users.png"/>
+          <p:cNvPicPr>
+            <a:picLocks noChangeAspect="1"/>
+          </p:cNvPicPr>
+          <p:nvPr/>
+        </p:nvPicPr>
+        <p:blipFill>
+          <a:blip r:embed="rId3"/>
+          <a:stretch>
+            <a:fillRect/>
+          </a:stretch>
+        </p:blipFill>
+        <p:spPr>
+          <a:xfrm>
+            <a:off x="2724912" y="1536192"/>
+            <a:ext cx="274320" cy="274320"/>
+          </a:xfrm>
+          <a:prstGeom prst="rect">
+            <a:avLst/>
+          </a:prstGeom>
+        </p:spPr>
+      </p:pic>
+      <p:sp>
+        <p:nvSpPr>
+          <p:cNvPr id="6" name="TextBox 5"/>
           <p:cNvSpPr txBox="1"/>
           <p:nvPr/>
         </p:nvSpPr>
         <p:spPr>
           <a:xfrm>
-            <a:off x="749808" y="1536192"/>
-            <a:ext cx="2304288" cy="384048"/>
+            <a:off x="804672" y="1536192"/>
+            <a:ext cx="1783080" cy="384048"/>
           </a:xfrm>
           <a:prstGeom prst="rect">
             <a:avLst/>
@@ -14397,14 +14493,14 @@
       </p:sp>
       <p:sp>
         <p:nvSpPr>
-          <p:cNvPr id="6" name="TextBox 5"/>
+          <p:cNvPr id="7" name="TextBox 6"/>
           <p:cNvSpPr txBox="1"/>
           <p:nvPr/>
         </p:nvSpPr>
         <p:spPr>
           <a:xfrm>
-            <a:off x="749808" y="1975104"/>
-            <a:ext cx="2304288" cy="658368"/>
+            <a:off x="804672" y="1975104"/>
+            <a:ext cx="2240279" cy="658368"/>
           </a:xfrm>
           <a:prstGeom prst="rect">
             <a:avLst/>
@@ -14436,14 +14532,14 @@
       </p:sp>
       <p:sp>
         <p:nvSpPr>
-          <p:cNvPr id="7" name="TextBox 6"/>
+          <p:cNvPr id="8" name="TextBox 7"/>
           <p:cNvSpPr txBox="1"/>
           <p:nvPr/>
         </p:nvSpPr>
         <p:spPr>
           <a:xfrm>
-            <a:off x="749808" y="2688336"/>
-            <a:ext cx="2304288" cy="457200"/>
+            <a:off x="804672" y="2688336"/>
+            <a:ext cx="2240279" cy="457200"/>
           </a:xfrm>
           <a:prstGeom prst="rect">
             <a:avLst/>
@@ -14475,7 +14571,7 @@
       </p:sp>
       <p:sp>
         <p:nvSpPr>
-          <p:cNvPr id="8" name="Rounded Rectangle 7"/>
+          <p:cNvPr id="9" name="Rectangle 8"/>
           <p:cNvSpPr/>
           <p:nvPr/>
         </p:nvSpPr>
@@ -14484,7 +14580,7 @@
             <a:off x="3337560" y="1371600"/>
             <a:ext cx="2651760" cy="1828800"/>
           </a:xfrm>
-          <a:prstGeom prst="roundRect">
+          <a:prstGeom prst="rect">
             <a:avLst/>
           </a:prstGeom>
           <a:solidFill>
@@ -14492,7 +14588,7 @@
           </a:solidFill>
           <a:ln w="12700">
             <a:solidFill>
-              <a:srgbClr val="E0E0E0"/>
+              <a:srgbClr val="DCDCDC"/>
             </a:solidFill>
           </a:ln>
           <a:effectLst/>
@@ -14521,14 +14617,14 @@
       </p:sp>
       <p:sp>
         <p:nvSpPr>
-          <p:cNvPr id="9" name="Rectangle 8"/>
+          <p:cNvPr id="10" name="Rectangle 9"/>
           <p:cNvSpPr/>
           <p:nvPr/>
         </p:nvSpPr>
         <p:spPr>
           <a:xfrm>
-            <a:off x="3419856" y="1399032"/>
-            <a:ext cx="2487168" cy="54864"/>
+            <a:off x="3337560" y="1371600"/>
+            <a:ext cx="68580" cy="1828800"/>
           </a:xfrm>
           <a:prstGeom prst="rect">
             <a:avLst/>
@@ -14563,16 +14659,40 @@
           </a:p>
         </p:txBody>
       </p:sp>
-      <p:sp>
-        <p:nvSpPr>
-          <p:cNvPr id="10" name="TextBox 9"/>
+      <p:pic>
+        <p:nvPicPr>
+          <p:cNvPr id="11" name="Picture 10" descr="users.png"/>
+          <p:cNvPicPr>
+            <a:picLocks noChangeAspect="1"/>
+          </p:cNvPicPr>
+          <p:nvPr/>
+        </p:nvPicPr>
+        <p:blipFill>
+          <a:blip r:embed="rId3"/>
+          <a:stretch>
+            <a:fillRect/>
+          </a:stretch>
+        </p:blipFill>
+        <p:spPr>
+          <a:xfrm>
+            <a:off x="5513831" y="1536192"/>
+            <a:ext cx="274320" cy="274320"/>
+          </a:xfrm>
+          <a:prstGeom prst="rect">
+            <a:avLst/>
+          </a:prstGeom>
+        </p:spPr>
+      </p:pic>
+      <p:sp>
+        <p:nvSpPr>
+          <p:cNvPr id="12" name="TextBox 11"/>
           <p:cNvSpPr txBox="1"/>
           <p:nvPr/>
         </p:nvSpPr>
         <p:spPr>
           <a:xfrm>
-            <a:off x="3538728" y="1536192"/>
-            <a:ext cx="2304288" cy="384048"/>
+            <a:off x="3593591" y="1536192"/>
+            <a:ext cx="1783080" cy="384048"/>
           </a:xfrm>
           <a:prstGeom prst="rect">
             <a:avLst/>
@@ -14604,14 +14724,14 @@
       </p:sp>
       <p:sp>
         <p:nvSpPr>
-          <p:cNvPr id="11" name="TextBox 10"/>
+          <p:cNvPr id="13" name="TextBox 12"/>
           <p:cNvSpPr txBox="1"/>
           <p:nvPr/>
         </p:nvSpPr>
         <p:spPr>
           <a:xfrm>
-            <a:off x="3538728" y="1975104"/>
-            <a:ext cx="2304288" cy="658368"/>
+            <a:off x="3593591" y="1975104"/>
+            <a:ext cx="2240279" cy="658368"/>
           </a:xfrm>
           <a:prstGeom prst="rect">
             <a:avLst/>
@@ -14643,14 +14763,14 @@
       </p:sp>
       <p:sp>
         <p:nvSpPr>
-          <p:cNvPr id="12" name="TextBox 11"/>
+          <p:cNvPr id="14" name="TextBox 13"/>
           <p:cNvSpPr txBox="1"/>
           <p:nvPr/>
         </p:nvSpPr>
         <p:spPr>
           <a:xfrm>
-            <a:off x="3538728" y="2688336"/>
-            <a:ext cx="2304288" cy="457200"/>
+            <a:off x="3593591" y="2688336"/>
+            <a:ext cx="2240279" cy="457200"/>
           </a:xfrm>
           <a:prstGeom prst="rect">
             <a:avLst/>
@@ -14682,7 +14802,7 @@
       </p:sp>
       <p:sp>
         <p:nvSpPr>
-          <p:cNvPr id="13" name="Rounded Rectangle 12"/>
+          <p:cNvPr id="15" name="Rectangle 14"/>
           <p:cNvSpPr/>
           <p:nvPr/>
         </p:nvSpPr>
@@ -14691,7 +14811,7 @@
             <a:off x="6126480" y="1371600"/>
             <a:ext cx="2651760" cy="1828800"/>
           </a:xfrm>
-          <a:prstGeom prst="roundRect">
+          <a:prstGeom prst="rect">
             <a:avLst/>
           </a:prstGeom>
           <a:solidFill>
@@ -14699,7 +14819,7 @@
           </a:solidFill>
           <a:ln w="12700">
             <a:solidFill>
-              <a:srgbClr val="E0E0E0"/>
+              <a:srgbClr val="DCDCDC"/>
             </a:solidFill>
           </a:ln>
           <a:effectLst/>
@@ -14728,14 +14848,14 @@
       </p:sp>
       <p:sp>
         <p:nvSpPr>
-          <p:cNvPr id="14" name="Rectangle 13"/>
+          <p:cNvPr id="16" name="Rectangle 15"/>
           <p:cNvSpPr/>
           <p:nvPr/>
         </p:nvSpPr>
         <p:spPr>
           <a:xfrm>
-            <a:off x="6208776" y="1399032"/>
-            <a:ext cx="2487168" cy="54864"/>
+            <a:off x="6126480" y="1371600"/>
+            <a:ext cx="68580" cy="1828800"/>
           </a:xfrm>
           <a:prstGeom prst="rect">
             <a:avLst/>
@@ -14770,16 +14890,40 @@
           </a:p>
         </p:txBody>
       </p:sp>
-      <p:sp>
-        <p:nvSpPr>
-          <p:cNvPr id="15" name="TextBox 14"/>
+      <p:pic>
+        <p:nvPicPr>
+          <p:cNvPr id="17" name="Picture 16" descr="package.png"/>
+          <p:cNvPicPr>
+            <a:picLocks noChangeAspect="1"/>
+          </p:cNvPicPr>
+          <p:nvPr/>
+        </p:nvPicPr>
+        <p:blipFill>
+          <a:blip r:embed="rId4"/>
+          <a:stretch>
+            <a:fillRect/>
+          </a:stretch>
+        </p:blipFill>
+        <p:spPr>
+          <a:xfrm>
+            <a:off x="8302752" y="1536192"/>
+            <a:ext cx="274320" cy="274320"/>
+          </a:xfrm>
+          <a:prstGeom prst="rect">
+            <a:avLst/>
+          </a:prstGeom>
+        </p:spPr>
+      </p:pic>
+      <p:sp>
+        <p:nvSpPr>
+          <p:cNvPr id="18" name="TextBox 17"/>
           <p:cNvSpPr txBox="1"/>
           <p:nvPr/>
         </p:nvSpPr>
         <p:spPr>
           <a:xfrm>
-            <a:off x="6327648" y="1536192"/>
-            <a:ext cx="2304288" cy="384048"/>
+            <a:off x="6382512" y="1536192"/>
+            <a:ext cx="1783080" cy="384048"/>
           </a:xfrm>
           <a:prstGeom prst="rect">
             <a:avLst/>
@@ -14811,14 +14955,14 @@
       </p:sp>
       <p:sp>
         <p:nvSpPr>
-          <p:cNvPr id="16" name="TextBox 15"/>
+          <p:cNvPr id="19" name="TextBox 18"/>
           <p:cNvSpPr txBox="1"/>
           <p:nvPr/>
         </p:nvSpPr>
         <p:spPr>
           <a:xfrm>
-            <a:off x="6327648" y="1975104"/>
-            <a:ext cx="2304288" cy="658368"/>
+            <a:off x="6382512" y="1975104"/>
+            <a:ext cx="2240279" cy="658368"/>
           </a:xfrm>
           <a:prstGeom prst="rect">
             <a:avLst/>
@@ -14850,14 +14994,14 @@
       </p:sp>
       <p:sp>
         <p:nvSpPr>
-          <p:cNvPr id="17" name="TextBox 16"/>
+          <p:cNvPr id="20" name="TextBox 19"/>
           <p:cNvSpPr txBox="1"/>
           <p:nvPr/>
         </p:nvSpPr>
         <p:spPr>
           <a:xfrm>
-            <a:off x="6327648" y="2688336"/>
-            <a:ext cx="2304288" cy="457200"/>
+            <a:off x="6382512" y="2688336"/>
+            <a:ext cx="2240279" cy="457200"/>
           </a:xfrm>
           <a:prstGeom prst="rect">
             <a:avLst/>
@@ -14889,7 +15033,7 @@
       </p:sp>
       <p:sp>
         <p:nvSpPr>
-          <p:cNvPr id="18" name="Rounded Rectangle 17"/>
+          <p:cNvPr id="21" name="Rectangle 20"/>
           <p:cNvSpPr/>
           <p:nvPr/>
         </p:nvSpPr>
@@ -14898,7 +15042,7 @@
             <a:off x="8915400" y="1371600"/>
             <a:ext cx="2651760" cy="1828800"/>
           </a:xfrm>
-          <a:prstGeom prst="roundRect">
+          <a:prstGeom prst="rect">
             <a:avLst/>
           </a:prstGeom>
           <a:solidFill>
@@ -14906,7 +15050,7 @@
           </a:solidFill>
           <a:ln w="12700">
             <a:solidFill>
-              <a:srgbClr val="E0E0E0"/>
+              <a:srgbClr val="DCDCDC"/>
             </a:solidFill>
           </a:ln>
           <a:effectLst/>
@@ -14935,14 +15079,14 @@
       </p:sp>
       <p:sp>
         <p:nvSpPr>
-          <p:cNvPr id="19" name="Rectangle 18"/>
+          <p:cNvPr id="22" name="Rectangle 21"/>
           <p:cNvSpPr/>
           <p:nvPr/>
         </p:nvSpPr>
         <p:spPr>
           <a:xfrm>
-            <a:off x="8997696" y="1399032"/>
-            <a:ext cx="2487168" cy="54864"/>
+            <a:off x="8915400" y="1371600"/>
+            <a:ext cx="68580" cy="1828800"/>
           </a:xfrm>
           <a:prstGeom prst="rect">
             <a:avLst/>
@@ -14977,16 +15121,40 @@
           </a:p>
         </p:txBody>
       </p:sp>
-      <p:sp>
-        <p:nvSpPr>
-          <p:cNvPr id="20" name="TextBox 19"/>
+      <p:pic>
+        <p:nvPicPr>
+          <p:cNvPr id="23" name="Picture 22" descr="zap.png"/>
+          <p:cNvPicPr>
+            <a:picLocks noChangeAspect="1"/>
+          </p:cNvPicPr>
+          <p:nvPr/>
+        </p:nvPicPr>
+        <p:blipFill>
+          <a:blip r:embed="rId5"/>
+          <a:stretch>
+            <a:fillRect/>
+          </a:stretch>
+        </p:blipFill>
+        <p:spPr>
+          <a:xfrm>
+            <a:off x="11091672" y="1536192"/>
+            <a:ext cx="274320" cy="274320"/>
+          </a:xfrm>
+          <a:prstGeom prst="rect">
+            <a:avLst/>
+          </a:prstGeom>
+        </p:spPr>
+      </p:pic>
+      <p:sp>
+        <p:nvSpPr>
+          <p:cNvPr id="24" name="TextBox 23"/>
           <p:cNvSpPr txBox="1"/>
           <p:nvPr/>
         </p:nvSpPr>
         <p:spPr>
           <a:xfrm>
-            <a:off x="9116568" y="1536192"/>
-            <a:ext cx="2304288" cy="384048"/>
+            <a:off x="9171432" y="1536192"/>
+            <a:ext cx="1783080" cy="384048"/>
           </a:xfrm>
           <a:prstGeom prst="rect">
             <a:avLst/>
@@ -15018,14 +15186,14 @@
       </p:sp>
       <p:sp>
         <p:nvSpPr>
-          <p:cNvPr id="21" name="TextBox 20"/>
+          <p:cNvPr id="25" name="TextBox 24"/>
           <p:cNvSpPr txBox="1"/>
           <p:nvPr/>
         </p:nvSpPr>
         <p:spPr>
           <a:xfrm>
-            <a:off x="9116568" y="1975104"/>
-            <a:ext cx="2304288" cy="658368"/>
+            <a:off x="9171432" y="1975104"/>
+            <a:ext cx="2240279" cy="658368"/>
           </a:xfrm>
           <a:prstGeom prst="rect">
             <a:avLst/>
@@ -15057,14 +15225,14 @@
       </p:sp>
       <p:sp>
         <p:nvSpPr>
-          <p:cNvPr id="22" name="TextBox 21"/>
+          <p:cNvPr id="26" name="TextBox 25"/>
           <p:cNvSpPr txBox="1"/>
           <p:nvPr/>
         </p:nvSpPr>
         <p:spPr>
           <a:xfrm>
-            <a:off x="9116568" y="2688336"/>
-            <a:ext cx="2304288" cy="457200"/>
+            <a:off x="9171432" y="2688336"/>
+            <a:ext cx="2240279" cy="457200"/>
           </a:xfrm>
           <a:prstGeom prst="rect">
             <a:avLst/>
@@ -15096,7 +15264,7 @@
       </p:sp>
       <p:sp>
         <p:nvSpPr>
-          <p:cNvPr id="23" name="Rounded Rectangle 22"/>
+          <p:cNvPr id="27" name="Rounded Rectangle 26"/>
           <p:cNvSpPr/>
           <p:nvPr/>
         </p:nvSpPr>
@@ -15142,7 +15310,7 @@
       </p:sp>
       <p:sp>
         <p:nvSpPr>
-          <p:cNvPr id="24" name="TextBox 23"/>
+          <p:cNvPr id="28" name="TextBox 27"/>
           <p:cNvSpPr txBox="1"/>
           <p:nvPr/>
         </p:nvSpPr>
@@ -15181,7 +15349,7 @@
       </p:sp>
       <p:sp>
         <p:nvSpPr>
-          <p:cNvPr id="25" name="Rounded Rectangle 24"/>
+          <p:cNvPr id="29" name="Rectangle 28"/>
           <p:cNvSpPr/>
           <p:nvPr/>
         </p:nvSpPr>
@@ -15190,7 +15358,7 @@
             <a:off x="548640" y="4434840"/>
             <a:ext cx="5394960" cy="1005840"/>
           </a:xfrm>
-          <a:prstGeom prst="roundRect">
+          <a:prstGeom prst="rect">
             <a:avLst/>
           </a:prstGeom>
           <a:solidFill>
@@ -15198,7 +15366,7 @@
           </a:solidFill>
           <a:ln w="12700">
             <a:solidFill>
-              <a:srgbClr val="E0E0E0"/>
+              <a:srgbClr val="DCDCDC"/>
             </a:solidFill>
           </a:ln>
           <a:effectLst/>
@@ -15227,14 +15395,14 @@
       </p:sp>
       <p:sp>
         <p:nvSpPr>
-          <p:cNvPr id="26" name="Rectangle 25"/>
+          <p:cNvPr id="30" name="Rectangle 29"/>
           <p:cNvSpPr/>
           <p:nvPr/>
         </p:nvSpPr>
         <p:spPr>
           <a:xfrm>
-            <a:off x="630936" y="4462272"/>
-            <a:ext cx="5230368" cy="54864"/>
+            <a:off x="548640" y="4434840"/>
+            <a:ext cx="68580" cy="1005840"/>
           </a:xfrm>
           <a:prstGeom prst="rect">
             <a:avLst/>
@@ -15271,7 +15439,7 @@
       </p:sp>
       <p:sp>
         <p:nvSpPr>
-          <p:cNvPr id="27" name="TextBox 26"/>
+          <p:cNvPr id="31" name="TextBox 30"/>
           <p:cNvSpPr txBox="1"/>
           <p:nvPr/>
         </p:nvSpPr>
@@ -15310,7 +15478,7 @@
       </p:sp>
       <p:sp>
         <p:nvSpPr>
-          <p:cNvPr id="28" name="TextBox 27"/>
+          <p:cNvPr id="32" name="TextBox 31"/>
           <p:cNvSpPr txBox="1"/>
           <p:nvPr/>
         </p:nvSpPr>
@@ -15349,7 +15517,7 @@
       </p:sp>
       <p:sp>
         <p:nvSpPr>
-          <p:cNvPr id="29" name="Rounded Rectangle 28"/>
+          <p:cNvPr id="33" name="Rectangle 32"/>
           <p:cNvSpPr/>
           <p:nvPr/>
         </p:nvSpPr>
@@ -15358,7 +15526,7 @@
             <a:off x="6172200" y="4434840"/>
             <a:ext cx="5394960" cy="1005840"/>
           </a:xfrm>
-          <a:prstGeom prst="roundRect">
+          <a:prstGeom prst="rect">
             <a:avLst/>
           </a:prstGeom>
           <a:solidFill>
@@ -15366,7 +15534,7 @@
           </a:solidFill>
           <a:ln w="12700">
             <a:solidFill>
-              <a:srgbClr val="E0E0E0"/>
+              <a:srgbClr val="DCDCDC"/>
             </a:solidFill>
           </a:ln>
           <a:effectLst/>
@@ -15395,14 +15563,14 @@
       </p:sp>
       <p:sp>
         <p:nvSpPr>
-          <p:cNvPr id="30" name="Rectangle 29"/>
+          <p:cNvPr id="34" name="Rectangle 33"/>
           <p:cNvSpPr/>
           <p:nvPr/>
         </p:nvSpPr>
         <p:spPr>
           <a:xfrm>
-            <a:off x="6254496" y="4462272"/>
-            <a:ext cx="5230368" cy="54864"/>
+            <a:off x="6172200" y="4434840"/>
+            <a:ext cx="68580" cy="1005840"/>
           </a:xfrm>
           <a:prstGeom prst="rect">
             <a:avLst/>
@@ -15439,7 +15607,7 @@
       </p:sp>
       <p:sp>
         <p:nvSpPr>
-          <p:cNvPr id="31" name="TextBox 30"/>
+          <p:cNvPr id="35" name="TextBox 34"/>
           <p:cNvSpPr txBox="1"/>
           <p:nvPr/>
         </p:nvSpPr>
@@ -15478,7 +15646,7 @@
       </p:sp>
       <p:sp>
         <p:nvSpPr>
-          <p:cNvPr id="32" name="TextBox 31"/>
+          <p:cNvPr id="36" name="TextBox 35"/>
           <p:cNvSpPr txBox="1"/>
           <p:nvPr/>
         </p:nvSpPr>
@@ -15517,7 +15685,7 @@
       </p:sp>
       <p:sp>
         <p:nvSpPr>
-          <p:cNvPr id="33" name="TextBox 32"/>
+          <p:cNvPr id="37" name="TextBox 36"/>
           <p:cNvSpPr txBox="1"/>
           <p:nvPr/>
         </p:nvSpPr>
@@ -15556,7 +15724,7 @@
       </p:sp>
       <p:sp>
         <p:nvSpPr>
-          <p:cNvPr id="34" name="TextBox 33"/>
+          <p:cNvPr id="38" name="TextBox 37"/>
           <p:cNvSpPr txBox="1"/>
           <p:nvPr/>
         </p:nvSpPr>
@@ -15653,7 +15821,7 @@
       </p:sp>
       <p:sp>
         <p:nvSpPr>
-          <p:cNvPr id="3" name="Rounded Rectangle 2"/>
+          <p:cNvPr id="3" name="Rectangle 2"/>
           <p:cNvSpPr/>
           <p:nvPr/>
         </p:nvSpPr>
@@ -15662,7 +15830,7 @@
             <a:off x="548640" y="1417320"/>
             <a:ext cx="2084831" cy="1737360"/>
           </a:xfrm>
-          <a:prstGeom prst="roundRect">
+          <a:prstGeom prst="rect">
             <a:avLst/>
           </a:prstGeom>
           <a:solidFill>
@@ -15670,7 +15838,7 @@
           </a:solidFill>
           <a:ln w="12700">
             <a:solidFill>
-              <a:srgbClr val="E0E0E0"/>
+              <a:srgbClr val="DCDCDC"/>
             </a:solidFill>
           </a:ln>
           <a:effectLst/>
@@ -15705,8 +15873,8 @@
         </p:nvSpPr>
         <p:spPr>
           <a:xfrm>
-            <a:off x="630936" y="1444752"/>
-            <a:ext cx="1920239" cy="54864"/>
+            <a:off x="548640" y="1417320"/>
+            <a:ext cx="68580" cy="1737360"/>
           </a:xfrm>
           <a:prstGeom prst="rect">
             <a:avLst/>
@@ -15899,7 +16067,7 @@
       </p:sp>
       <p:sp>
         <p:nvSpPr>
-          <p:cNvPr id="9" name="Rounded Rectangle 8"/>
+          <p:cNvPr id="9" name="Rectangle 8"/>
           <p:cNvSpPr/>
           <p:nvPr/>
         </p:nvSpPr>
@@ -15908,7 +16076,7 @@
             <a:off x="2779776" y="1417320"/>
             <a:ext cx="2084831" cy="1737360"/>
           </a:xfrm>
-          <a:prstGeom prst="roundRect">
+          <a:prstGeom prst="rect">
             <a:avLst/>
           </a:prstGeom>
           <a:solidFill>
@@ -15916,7 +16084,7 @@
           </a:solidFill>
           <a:ln w="12700">
             <a:solidFill>
-              <a:srgbClr val="E0E0E0"/>
+              <a:srgbClr val="DCDCDC"/>
             </a:solidFill>
           </a:ln>
           <a:effectLst/>
@@ -15951,8 +16119,8 @@
         </p:nvSpPr>
         <p:spPr>
           <a:xfrm>
-            <a:off x="2862072" y="1444752"/>
-            <a:ext cx="1920239" cy="54864"/>
+            <a:off x="2779776" y="1417320"/>
+            <a:ext cx="68580" cy="1737360"/>
           </a:xfrm>
           <a:prstGeom prst="rect">
             <a:avLst/>
@@ -16145,7 +16313,7 @@
       </p:sp>
       <p:sp>
         <p:nvSpPr>
-          <p:cNvPr id="15" name="Rounded Rectangle 14"/>
+          <p:cNvPr id="15" name="Rectangle 14"/>
           <p:cNvSpPr/>
           <p:nvPr/>
         </p:nvSpPr>
@@ -16154,7 +16322,7 @@
             <a:off x="5010912" y="1417320"/>
             <a:ext cx="2084831" cy="1737360"/>
           </a:xfrm>
-          <a:prstGeom prst="roundRect">
+          <a:prstGeom prst="rect">
             <a:avLst/>
           </a:prstGeom>
           <a:solidFill>
@@ -16162,7 +16330,7 @@
           </a:solidFill>
           <a:ln w="12700">
             <a:solidFill>
-              <a:srgbClr val="E0E0E0"/>
+              <a:srgbClr val="DCDCDC"/>
             </a:solidFill>
           </a:ln>
           <a:effectLst/>
@@ -16197,8 +16365,8 @@
         </p:nvSpPr>
         <p:spPr>
           <a:xfrm>
-            <a:off x="5093207" y="1444752"/>
-            <a:ext cx="1920239" cy="54864"/>
+            <a:off x="5010912" y="1417320"/>
+            <a:ext cx="68580" cy="1737360"/>
           </a:xfrm>
           <a:prstGeom prst="rect">
             <a:avLst/>
@@ -16391,7 +16559,7 @@
       </p:sp>
       <p:sp>
         <p:nvSpPr>
-          <p:cNvPr id="21" name="Rounded Rectangle 20"/>
+          <p:cNvPr id="21" name="Rectangle 20"/>
           <p:cNvSpPr/>
           <p:nvPr/>
         </p:nvSpPr>
@@ -16400,7 +16568,7 @@
             <a:off x="7242048" y="1417320"/>
             <a:ext cx="2084831" cy="1737360"/>
           </a:xfrm>
-          <a:prstGeom prst="roundRect">
+          <a:prstGeom prst="rect">
             <a:avLst/>
           </a:prstGeom>
           <a:solidFill>
@@ -16408,7 +16576,7 @@
           </a:solidFill>
           <a:ln w="12700">
             <a:solidFill>
-              <a:srgbClr val="E0E0E0"/>
+              <a:srgbClr val="DCDCDC"/>
             </a:solidFill>
           </a:ln>
           <a:effectLst/>
@@ -16443,8 +16611,8 @@
         </p:nvSpPr>
         <p:spPr>
           <a:xfrm>
-            <a:off x="7324344" y="1444752"/>
-            <a:ext cx="1920239" cy="54864"/>
+            <a:off x="7242048" y="1417320"/>
+            <a:ext cx="68580" cy="1737360"/>
           </a:xfrm>
           <a:prstGeom prst="rect">
             <a:avLst/>
@@ -16637,7 +16805,7 @@
       </p:sp>
       <p:sp>
         <p:nvSpPr>
-          <p:cNvPr id="27" name="Rounded Rectangle 26"/>
+          <p:cNvPr id="27" name="Rectangle 26"/>
           <p:cNvSpPr/>
           <p:nvPr/>
         </p:nvSpPr>
@@ -16646,7 +16814,7 @@
             <a:off x="9473184" y="1417320"/>
             <a:ext cx="2084831" cy="1737360"/>
           </a:xfrm>
-          <a:prstGeom prst="roundRect">
+          <a:prstGeom prst="rect">
             <a:avLst/>
           </a:prstGeom>
           <a:solidFill>
@@ -16654,7 +16822,7 @@
           </a:solidFill>
           <a:ln w="12700">
             <a:solidFill>
-              <a:srgbClr val="E0E0E0"/>
+              <a:srgbClr val="DCDCDC"/>
             </a:solidFill>
           </a:ln>
           <a:effectLst/>
@@ -16689,8 +16857,8 @@
         </p:nvSpPr>
         <p:spPr>
           <a:xfrm>
-            <a:off x="9555480" y="1444752"/>
-            <a:ext cx="1920239" cy="54864"/>
+            <a:off x="9473184" y="1417320"/>
+            <a:ext cx="68580" cy="1737360"/>
           </a:xfrm>
           <a:prstGeom prst="rect">
             <a:avLst/>
@@ -18951,7 +19119,7 @@
       </p:sp>
       <p:sp>
         <p:nvSpPr>
-          <p:cNvPr id="3" name="Rounded Rectangle 2"/>
+          <p:cNvPr id="3" name="Rectangle 2"/>
           <p:cNvSpPr/>
           <p:nvPr/>
         </p:nvSpPr>
@@ -18960,7 +19128,7 @@
             <a:off x="548640" y="1371600"/>
             <a:ext cx="3566160" cy="1828800"/>
           </a:xfrm>
-          <a:prstGeom prst="roundRect">
+          <a:prstGeom prst="rect">
             <a:avLst/>
           </a:prstGeom>
           <a:solidFill>
@@ -18968,7 +19136,7 @@
           </a:solidFill>
           <a:ln w="12700">
             <a:solidFill>
-              <a:srgbClr val="E0E0E0"/>
+              <a:srgbClr val="DCDCDC"/>
             </a:solidFill>
           </a:ln>
           <a:effectLst/>
@@ -19003,8 +19171,8 @@
         </p:nvSpPr>
         <p:spPr>
           <a:xfrm>
-            <a:off x="630936" y="1399032"/>
-            <a:ext cx="3401568" cy="54864"/>
+            <a:off x="548640" y="1371600"/>
+            <a:ext cx="68580" cy="1828800"/>
           </a:xfrm>
           <a:prstGeom prst="rect">
             <a:avLst/>
@@ -19039,16 +19207,40 @@
           </a:p>
         </p:txBody>
       </p:sp>
-      <p:sp>
-        <p:nvSpPr>
-          <p:cNvPr id="5" name="TextBox 4"/>
+      <p:pic>
+        <p:nvPicPr>
+          <p:cNvPr id="5" name="Picture 4" descr="package.png"/>
+          <p:cNvPicPr>
+            <a:picLocks noChangeAspect="1"/>
+          </p:cNvPicPr>
+          <p:nvPr/>
+        </p:nvPicPr>
+        <p:blipFill>
+          <a:blip r:embed="rId3"/>
+          <a:stretch>
+            <a:fillRect/>
+          </a:stretch>
+        </p:blipFill>
+        <p:spPr>
+          <a:xfrm>
+            <a:off x="3639312" y="1536192"/>
+            <a:ext cx="274320" cy="274320"/>
+          </a:xfrm>
+          <a:prstGeom prst="rect">
+            <a:avLst/>
+          </a:prstGeom>
+        </p:spPr>
+      </p:pic>
+      <p:sp>
+        <p:nvSpPr>
+          <p:cNvPr id="6" name="TextBox 5"/>
           <p:cNvSpPr txBox="1"/>
           <p:nvPr/>
         </p:nvSpPr>
         <p:spPr>
           <a:xfrm>
-            <a:off x="749808" y="1536192"/>
-            <a:ext cx="3218688" cy="384048"/>
+            <a:off x="804672" y="1536192"/>
+            <a:ext cx="2697480" cy="384048"/>
           </a:xfrm>
           <a:prstGeom prst="rect">
             <a:avLst/>
@@ -19080,14 +19272,14 @@
       </p:sp>
       <p:sp>
         <p:nvSpPr>
-          <p:cNvPr id="6" name="TextBox 5"/>
+          <p:cNvPr id="7" name="TextBox 6"/>
           <p:cNvSpPr txBox="1"/>
           <p:nvPr/>
         </p:nvSpPr>
         <p:spPr>
           <a:xfrm>
-            <a:off x="749808" y="1975104"/>
-            <a:ext cx="3218688" cy="658368"/>
+            <a:off x="804672" y="1975104"/>
+            <a:ext cx="3154679" cy="658368"/>
           </a:xfrm>
           <a:prstGeom prst="rect">
             <a:avLst/>
@@ -19119,14 +19311,14 @@
       </p:sp>
       <p:sp>
         <p:nvSpPr>
-          <p:cNvPr id="7" name="TextBox 6"/>
+          <p:cNvPr id="8" name="TextBox 7"/>
           <p:cNvSpPr txBox="1"/>
           <p:nvPr/>
         </p:nvSpPr>
         <p:spPr>
           <a:xfrm>
-            <a:off x="749808" y="2688336"/>
-            <a:ext cx="3218688" cy="457200"/>
+            <a:off x="804672" y="2688336"/>
+            <a:ext cx="3154679" cy="457200"/>
           </a:xfrm>
           <a:prstGeom prst="rect">
             <a:avLst/>
@@ -19158,7 +19350,7 @@
       </p:sp>
       <p:sp>
         <p:nvSpPr>
-          <p:cNvPr id="8" name="Rounded Rectangle 7"/>
+          <p:cNvPr id="9" name="Rectangle 8"/>
           <p:cNvSpPr/>
           <p:nvPr/>
         </p:nvSpPr>
@@ -19167,7 +19359,7 @@
             <a:off x="4279392" y="1371600"/>
             <a:ext cx="3566160" cy="1828800"/>
           </a:xfrm>
-          <a:prstGeom prst="roundRect">
+          <a:prstGeom prst="rect">
             <a:avLst/>
           </a:prstGeom>
           <a:solidFill>
@@ -19175,7 +19367,7 @@
           </a:solidFill>
           <a:ln w="12700">
             <a:solidFill>
-              <a:srgbClr val="E0E0E0"/>
+              <a:srgbClr val="DCDCDC"/>
             </a:solidFill>
           </a:ln>
           <a:effectLst/>
@@ -19204,14 +19396,14 @@
       </p:sp>
       <p:sp>
         <p:nvSpPr>
-          <p:cNvPr id="9" name="Rectangle 8"/>
+          <p:cNvPr id="10" name="Rectangle 9"/>
           <p:cNvSpPr/>
           <p:nvPr/>
         </p:nvSpPr>
         <p:spPr>
           <a:xfrm>
-            <a:off x="4361688" y="1399032"/>
-            <a:ext cx="3401568" cy="54864"/>
+            <a:off x="4279392" y="1371600"/>
+            <a:ext cx="68580" cy="1828800"/>
           </a:xfrm>
           <a:prstGeom prst="rect">
             <a:avLst/>
@@ -19246,16 +19438,40 @@
           </a:p>
         </p:txBody>
       </p:sp>
-      <p:sp>
-        <p:nvSpPr>
-          <p:cNvPr id="10" name="TextBox 9"/>
+      <p:pic>
+        <p:nvPicPr>
+          <p:cNvPr id="11" name="Picture 10" descr="layers.png"/>
+          <p:cNvPicPr>
+            <a:picLocks noChangeAspect="1"/>
+          </p:cNvPicPr>
+          <p:nvPr/>
+        </p:nvPicPr>
+        <p:blipFill>
+          <a:blip r:embed="rId4"/>
+          <a:stretch>
+            <a:fillRect/>
+          </a:stretch>
+        </p:blipFill>
+        <p:spPr>
+          <a:xfrm>
+            <a:off x="7370064" y="1536192"/>
+            <a:ext cx="274320" cy="274320"/>
+          </a:xfrm>
+          <a:prstGeom prst="rect">
+            <a:avLst/>
+          </a:prstGeom>
+        </p:spPr>
+      </p:pic>
+      <p:sp>
+        <p:nvSpPr>
+          <p:cNvPr id="12" name="TextBox 11"/>
           <p:cNvSpPr txBox="1"/>
           <p:nvPr/>
         </p:nvSpPr>
         <p:spPr>
           <a:xfrm>
-            <a:off x="4480559" y="1536192"/>
-            <a:ext cx="3218688" cy="384048"/>
+            <a:off x="4535424" y="1536192"/>
+            <a:ext cx="2697480" cy="384048"/>
           </a:xfrm>
           <a:prstGeom prst="rect">
             <a:avLst/>
@@ -19287,14 +19503,14 @@
       </p:sp>
       <p:sp>
         <p:nvSpPr>
-          <p:cNvPr id="11" name="TextBox 10"/>
+          <p:cNvPr id="13" name="TextBox 12"/>
           <p:cNvSpPr txBox="1"/>
           <p:nvPr/>
         </p:nvSpPr>
         <p:spPr>
           <a:xfrm>
-            <a:off x="4480559" y="1975104"/>
-            <a:ext cx="3218688" cy="658368"/>
+            <a:off x="4535424" y="1975104"/>
+            <a:ext cx="3154679" cy="658368"/>
           </a:xfrm>
           <a:prstGeom prst="rect">
             <a:avLst/>
@@ -19326,14 +19542,14 @@
       </p:sp>
       <p:sp>
         <p:nvSpPr>
-          <p:cNvPr id="12" name="TextBox 11"/>
+          <p:cNvPr id="14" name="TextBox 13"/>
           <p:cNvSpPr txBox="1"/>
           <p:nvPr/>
         </p:nvSpPr>
         <p:spPr>
           <a:xfrm>
-            <a:off x="4480559" y="2688336"/>
-            <a:ext cx="3218688" cy="457200"/>
+            <a:off x="4535424" y="2688336"/>
+            <a:ext cx="3154679" cy="457200"/>
           </a:xfrm>
           <a:prstGeom prst="rect">
             <a:avLst/>
@@ -19365,7 +19581,7 @@
       </p:sp>
       <p:sp>
         <p:nvSpPr>
-          <p:cNvPr id="13" name="Rounded Rectangle 12"/>
+          <p:cNvPr id="15" name="Rectangle 14"/>
           <p:cNvSpPr/>
           <p:nvPr/>
         </p:nvSpPr>
@@ -19374,7 +19590,7 @@
             <a:off x="8001000" y="1371600"/>
             <a:ext cx="3566160" cy="1828800"/>
           </a:xfrm>
-          <a:prstGeom prst="roundRect">
+          <a:prstGeom prst="rect">
             <a:avLst/>
           </a:prstGeom>
           <a:solidFill>
@@ -19382,7 +19598,7 @@
           </a:solidFill>
           <a:ln w="12700">
             <a:solidFill>
-              <a:srgbClr val="E0E0E0"/>
+              <a:srgbClr val="DCDCDC"/>
             </a:solidFill>
           </a:ln>
           <a:effectLst/>
@@ -19411,14 +19627,14 @@
       </p:sp>
       <p:sp>
         <p:nvSpPr>
-          <p:cNvPr id="14" name="Rectangle 13"/>
+          <p:cNvPr id="16" name="Rectangle 15"/>
           <p:cNvSpPr/>
           <p:nvPr/>
         </p:nvSpPr>
         <p:spPr>
           <a:xfrm>
-            <a:off x="8083296" y="1399032"/>
-            <a:ext cx="3401568" cy="54864"/>
+            <a:off x="8001000" y="1371600"/>
+            <a:ext cx="68580" cy="1828800"/>
           </a:xfrm>
           <a:prstGeom prst="rect">
             <a:avLst/>
@@ -19453,16 +19669,40 @@
           </a:p>
         </p:txBody>
       </p:sp>
-      <p:sp>
-        <p:nvSpPr>
-          <p:cNvPr id="15" name="TextBox 14"/>
+      <p:pic>
+        <p:nvPicPr>
+          <p:cNvPr id="17" name="Picture 16" descr="users.png"/>
+          <p:cNvPicPr>
+            <a:picLocks noChangeAspect="1"/>
+          </p:cNvPicPr>
+          <p:nvPr/>
+        </p:nvPicPr>
+        <p:blipFill>
+          <a:blip r:embed="rId5"/>
+          <a:stretch>
+            <a:fillRect/>
+          </a:stretch>
+        </p:blipFill>
+        <p:spPr>
+          <a:xfrm>
+            <a:off x="11091672" y="1536192"/>
+            <a:ext cx="274320" cy="274320"/>
+          </a:xfrm>
+          <a:prstGeom prst="rect">
+            <a:avLst/>
+          </a:prstGeom>
+        </p:spPr>
+      </p:pic>
+      <p:sp>
+        <p:nvSpPr>
+          <p:cNvPr id="18" name="TextBox 17"/>
           <p:cNvSpPr txBox="1"/>
           <p:nvPr/>
         </p:nvSpPr>
         <p:spPr>
           <a:xfrm>
-            <a:off x="8202168" y="1536192"/>
-            <a:ext cx="3218688" cy="384048"/>
+            <a:off x="8257031" y="1536192"/>
+            <a:ext cx="2697480" cy="384048"/>
           </a:xfrm>
           <a:prstGeom prst="rect">
             <a:avLst/>
@@ -19494,14 +19734,14 @@
       </p:sp>
       <p:sp>
         <p:nvSpPr>
-          <p:cNvPr id="16" name="TextBox 15"/>
+          <p:cNvPr id="19" name="TextBox 18"/>
           <p:cNvSpPr txBox="1"/>
           <p:nvPr/>
         </p:nvSpPr>
         <p:spPr>
           <a:xfrm>
-            <a:off x="8202168" y="1975104"/>
-            <a:ext cx="3218688" cy="658368"/>
+            <a:off x="8257031" y="1975104"/>
+            <a:ext cx="3154679" cy="658368"/>
           </a:xfrm>
           <a:prstGeom prst="rect">
             <a:avLst/>
@@ -19533,14 +19773,14 @@
       </p:sp>
       <p:sp>
         <p:nvSpPr>
-          <p:cNvPr id="17" name="TextBox 16"/>
+          <p:cNvPr id="20" name="TextBox 19"/>
           <p:cNvSpPr txBox="1"/>
           <p:nvPr/>
         </p:nvSpPr>
         <p:spPr>
           <a:xfrm>
-            <a:off x="8202168" y="2688336"/>
-            <a:ext cx="3218688" cy="457200"/>
+            <a:off x="8257031" y="2688336"/>
+            <a:ext cx="3154679" cy="457200"/>
           </a:xfrm>
           <a:prstGeom prst="rect">
             <a:avLst/>
@@ -19572,7 +19812,7 @@
       </p:sp>
       <p:graphicFrame>
         <p:nvGraphicFramePr>
-          <p:cNvPr id="18" name="Chart 17"/>
+          <p:cNvPr id="21" name="Chart 20"/>
           <p:cNvGraphicFramePr>
             <a:graphicFrameLocks noGrp="1"/>
           </p:cNvGraphicFramePr>
@@ -19584,13 +19824,13 @@
         </p:xfrm>
         <a:graphic>
           <a:graphicData uri="http://schemas.openxmlformats.org/drawingml/2006/chart">
-            <c:chart xmlns:c="http://schemas.openxmlformats.org/drawingml/2006/chart" r:id="rId3"/>
+            <c:chart xmlns:c="http://schemas.openxmlformats.org/drawingml/2006/chart" r:id="rId6"/>
           </a:graphicData>
         </a:graphic>
       </p:graphicFrame>
       <p:sp>
         <p:nvSpPr>
-          <p:cNvPr id="19" name="Rounded Rectangle 18"/>
+          <p:cNvPr id="22" name="Rounded Rectangle 21"/>
           <p:cNvSpPr/>
           <p:nvPr/>
         </p:nvSpPr>
@@ -19636,7 +19876,7 @@
       </p:sp>
       <p:sp>
         <p:nvSpPr>
-          <p:cNvPr id="20" name="TextBox 19"/>
+          <p:cNvPr id="23" name="TextBox 22"/>
           <p:cNvSpPr txBox="1"/>
           <p:nvPr/>
         </p:nvSpPr>
@@ -19691,7 +19931,7 @@
       </p:sp>
       <p:sp>
         <p:nvSpPr>
-          <p:cNvPr id="21" name="TextBox 20"/>
+          <p:cNvPr id="24" name="TextBox 23"/>
           <p:cNvSpPr txBox="1"/>
           <p:nvPr/>
         </p:nvSpPr>
@@ -19730,7 +19970,7 @@
       </p:sp>
       <p:sp>
         <p:nvSpPr>
-          <p:cNvPr id="22" name="TextBox 21"/>
+          <p:cNvPr id="25" name="TextBox 24"/>
           <p:cNvSpPr txBox="1"/>
           <p:nvPr/>
         </p:nvSpPr>
@@ -19769,7 +20009,7 @@
       </p:sp>
       <p:sp>
         <p:nvSpPr>
-          <p:cNvPr id="23" name="TextBox 22"/>
+          <p:cNvPr id="26" name="TextBox 25"/>
           <p:cNvSpPr txBox="1"/>
           <p:nvPr/>
         </p:nvSpPr>
@@ -19884,7 +20124,7 @@
       </p:graphicFrame>
       <p:sp>
         <p:nvSpPr>
-          <p:cNvPr id="4" name="Rounded Rectangle 3"/>
+          <p:cNvPr id="4" name="Rectangle 3"/>
           <p:cNvSpPr/>
           <p:nvPr/>
         </p:nvSpPr>
@@ -19893,7 +20133,7 @@
             <a:off x="6583680" y="1600200"/>
             <a:ext cx="4983480" cy="1051560"/>
           </a:xfrm>
-          <a:prstGeom prst="roundRect">
+          <a:prstGeom prst="rect">
             <a:avLst/>
           </a:prstGeom>
           <a:solidFill>
@@ -19901,7 +20141,7 @@
           </a:solidFill>
           <a:ln w="12700">
             <a:solidFill>
-              <a:srgbClr val="E0E0E0"/>
+              <a:srgbClr val="DCDCDC"/>
             </a:solidFill>
           </a:ln>
           <a:effectLst/>
@@ -19936,8 +20176,8 @@
         </p:nvSpPr>
         <p:spPr>
           <a:xfrm>
-            <a:off x="6665976" y="1627632"/>
-            <a:ext cx="4818888" cy="54864"/>
+            <a:off x="6583680" y="1600200"/>
+            <a:ext cx="68580" cy="1051560"/>
           </a:xfrm>
           <a:prstGeom prst="rect">
             <a:avLst/>
@@ -20091,7 +20331,7 @@
       </p:sp>
       <p:sp>
         <p:nvSpPr>
-          <p:cNvPr id="9" name="Rounded Rectangle 8"/>
+          <p:cNvPr id="9" name="Rectangle 8"/>
           <p:cNvSpPr/>
           <p:nvPr/>
         </p:nvSpPr>
@@ -20100,7 +20340,7 @@
             <a:off x="6583680" y="2788920"/>
             <a:ext cx="4983480" cy="1051560"/>
           </a:xfrm>
-          <a:prstGeom prst="roundRect">
+          <a:prstGeom prst="rect">
             <a:avLst/>
           </a:prstGeom>
           <a:solidFill>
@@ -20108,7 +20348,7 @@
           </a:solidFill>
           <a:ln w="12700">
             <a:solidFill>
-              <a:srgbClr val="E0E0E0"/>
+              <a:srgbClr val="DCDCDC"/>
             </a:solidFill>
           </a:ln>
           <a:effectLst/>
@@ -20143,8 +20383,8 @@
         </p:nvSpPr>
         <p:spPr>
           <a:xfrm>
-            <a:off x="6665976" y="2816351"/>
-            <a:ext cx="4818888" cy="54864"/>
+            <a:off x="6583680" y="2788920"/>
+            <a:ext cx="68580" cy="1051560"/>
           </a:xfrm>
           <a:prstGeom prst="rect">
             <a:avLst/>
@@ -20298,7 +20538,7 @@
       </p:sp>
       <p:sp>
         <p:nvSpPr>
-          <p:cNvPr id="14" name="Rounded Rectangle 13"/>
+          <p:cNvPr id="14" name="Rectangle 13"/>
           <p:cNvSpPr/>
           <p:nvPr/>
         </p:nvSpPr>
@@ -20307,7 +20547,7 @@
             <a:off x="6583680" y="3977639"/>
             <a:ext cx="4983480" cy="1051560"/>
           </a:xfrm>
-          <a:prstGeom prst="roundRect">
+          <a:prstGeom prst="rect">
             <a:avLst/>
           </a:prstGeom>
           <a:solidFill>
@@ -20315,7 +20555,7 @@
           </a:solidFill>
           <a:ln w="12700">
             <a:solidFill>
-              <a:srgbClr val="E0E0E0"/>
+              <a:srgbClr val="DCDCDC"/>
             </a:solidFill>
           </a:ln>
           <a:effectLst/>
@@ -20350,8 +20590,8 @@
         </p:nvSpPr>
         <p:spPr>
           <a:xfrm>
-            <a:off x="6665976" y="4005072"/>
-            <a:ext cx="4818888" cy="54864"/>
+            <a:off x="6583680" y="3977639"/>
+            <a:ext cx="68580" cy="1051560"/>
           </a:xfrm>
           <a:prstGeom prst="rect">
             <a:avLst/>
@@ -20698,7 +20938,7 @@
       </p:graphicFrame>
       <p:sp>
         <p:nvSpPr>
-          <p:cNvPr id="4" name="Rounded Rectangle 3"/>
+          <p:cNvPr id="4" name="Rectangle 3"/>
           <p:cNvSpPr/>
           <p:nvPr/>
         </p:nvSpPr>
@@ -20707,7 +20947,7 @@
             <a:off x="7406640" y="1600200"/>
             <a:ext cx="4160520" cy="1097280"/>
           </a:xfrm>
-          <a:prstGeom prst="roundRect">
+          <a:prstGeom prst="rect">
             <a:avLst/>
           </a:prstGeom>
           <a:solidFill>
@@ -20715,7 +20955,7 @@
           </a:solidFill>
           <a:ln w="12700">
             <a:solidFill>
-              <a:srgbClr val="E0E0E0"/>
+              <a:srgbClr val="DCDCDC"/>
             </a:solidFill>
           </a:ln>
           <a:effectLst/>
@@ -20750,8 +20990,8 @@
         </p:nvSpPr>
         <p:spPr>
           <a:xfrm>
-            <a:off x="7488936" y="1627632"/>
-            <a:ext cx="3995928" cy="54864"/>
+            <a:off x="7406640" y="1600200"/>
+            <a:ext cx="68580" cy="1097280"/>
           </a:xfrm>
           <a:prstGeom prst="rect">
             <a:avLst/>
@@ -20866,7 +21106,7 @@
       </p:sp>
       <p:sp>
         <p:nvSpPr>
-          <p:cNvPr id="8" name="Rounded Rectangle 7"/>
+          <p:cNvPr id="8" name="Rectangle 7"/>
           <p:cNvSpPr/>
           <p:nvPr/>
         </p:nvSpPr>
@@ -20875,7 +21115,7 @@
             <a:off x="7406640" y="2834640"/>
             <a:ext cx="4160520" cy="1097280"/>
           </a:xfrm>
-          <a:prstGeom prst="roundRect">
+          <a:prstGeom prst="rect">
             <a:avLst/>
           </a:prstGeom>
           <a:solidFill>
@@ -20883,7 +21123,7 @@
           </a:solidFill>
           <a:ln w="12700">
             <a:solidFill>
-              <a:srgbClr val="E0E0E0"/>
+              <a:srgbClr val="DCDCDC"/>
             </a:solidFill>
           </a:ln>
           <a:effectLst/>
@@ -20918,8 +21158,8 @@
         </p:nvSpPr>
         <p:spPr>
           <a:xfrm>
-            <a:off x="7488936" y="2862072"/>
-            <a:ext cx="3995928" cy="54864"/>
+            <a:off x="7406640" y="2834640"/>
+            <a:ext cx="68580" cy="1097280"/>
           </a:xfrm>
           <a:prstGeom prst="rect">
             <a:avLst/>
@@ -21034,7 +21274,7 @@
       </p:sp>
       <p:sp>
         <p:nvSpPr>
-          <p:cNvPr id="12" name="Rounded Rectangle 11"/>
+          <p:cNvPr id="12" name="Rectangle 11"/>
           <p:cNvSpPr/>
           <p:nvPr/>
         </p:nvSpPr>
@@ -21043,7 +21283,7 @@
             <a:off x="7406640" y="4069080"/>
             <a:ext cx="4160520" cy="1097280"/>
           </a:xfrm>
-          <a:prstGeom prst="roundRect">
+          <a:prstGeom prst="rect">
             <a:avLst/>
           </a:prstGeom>
           <a:solidFill>
@@ -21051,7 +21291,7 @@
           </a:solidFill>
           <a:ln w="12700">
             <a:solidFill>
-              <a:srgbClr val="E0E0E0"/>
+              <a:srgbClr val="DCDCDC"/>
             </a:solidFill>
           </a:ln>
           <a:effectLst/>
@@ -21086,8 +21326,8 @@
         </p:nvSpPr>
         <p:spPr>
           <a:xfrm>
-            <a:off x="7488936" y="4096512"/>
-            <a:ext cx="3995928" cy="54864"/>
+            <a:off x="7406640" y="4069080"/>
+            <a:ext cx="68580" cy="1097280"/>
           </a:xfrm>
           <a:prstGeom prst="rect">
             <a:avLst/>
@@ -21395,7 +21635,7 @@
       </p:graphicFrame>
       <p:sp>
         <p:nvSpPr>
-          <p:cNvPr id="4" name="Rounded Rectangle 3"/>
+          <p:cNvPr id="4" name="Rectangle 3"/>
           <p:cNvSpPr/>
           <p:nvPr/>
         </p:nvSpPr>
@@ -21404,7 +21644,7 @@
             <a:off x="7406640" y="1463040"/>
             <a:ext cx="4160520" cy="1600200"/>
           </a:xfrm>
-          <a:prstGeom prst="roundRect">
+          <a:prstGeom prst="rect">
             <a:avLst/>
           </a:prstGeom>
           <a:solidFill>
@@ -21412,7 +21652,7 @@
           </a:solidFill>
           <a:ln w="12700">
             <a:solidFill>
-              <a:srgbClr val="E0E0E0"/>
+              <a:srgbClr val="DCDCDC"/>
             </a:solidFill>
           </a:ln>
           <a:effectLst/>
@@ -21447,8 +21687,8 @@
         </p:nvSpPr>
         <p:spPr>
           <a:xfrm>
-            <a:off x="7488936" y="1490472"/>
-            <a:ext cx="3995928" cy="54864"/>
+            <a:off x="7406640" y="1463040"/>
+            <a:ext cx="68580" cy="1600200"/>
           </a:xfrm>
           <a:prstGeom prst="rect">
             <a:avLst/>
@@ -21579,7 +21819,7 @@
       </p:sp>
       <p:sp>
         <p:nvSpPr>
-          <p:cNvPr id="8" name="Rounded Rectangle 7"/>
+          <p:cNvPr id="8" name="Rectangle 7"/>
           <p:cNvSpPr/>
           <p:nvPr/>
         </p:nvSpPr>
@@ -21588,7 +21828,7 @@
             <a:off x="7406640" y="3200400"/>
             <a:ext cx="4160520" cy="1554480"/>
           </a:xfrm>
-          <a:prstGeom prst="roundRect">
+          <a:prstGeom prst="rect">
             <a:avLst/>
           </a:prstGeom>
           <a:solidFill>
@@ -21596,7 +21836,7 @@
           </a:solidFill>
           <a:ln w="12700">
             <a:solidFill>
-              <a:srgbClr val="E0E0E0"/>
+              <a:srgbClr val="DCDCDC"/>
             </a:solidFill>
           </a:ln>
           <a:effectLst/>
@@ -21631,8 +21871,8 @@
         </p:nvSpPr>
         <p:spPr>
           <a:xfrm>
-            <a:off x="7488936" y="3227832"/>
-            <a:ext cx="3995928" cy="54864"/>
+            <a:off x="7406640" y="3200400"/>
+            <a:ext cx="68580" cy="1554480"/>
           </a:xfrm>
           <a:prstGeom prst="rect">
             <a:avLst/>

--- a/briefings/sezon-kadro-20260902/sunum-kadro-sezon2026.pptx
+++ b/briefings/sezon-kadro-20260902/sunum-kadro-sezon2026.pptx
@@ -369,7 +369,7 @@
                   <c:v>574.7176999999999</c:v>
                 </c:pt>
                 <c:pt idx="1">
-                  <c:v>71.83742911999343</c:v>
+                  <c:v>71.8374291199963</c:v>
                 </c:pt>
                 <c:pt idx="2">
                   <c:v>143</c:v>
@@ -424,7 +424,7 @@
                   <c:v>775.19155</c:v>
                 </c:pt>
                 <c:pt idx="1">
-                  <c:v>122.60138084999475</c:v>
+                  <c:v>122.60138084999535</c:v>
                 </c:pt>
                 <c:pt idx="2">
                   <c:v>160</c:v>
@@ -1386,13 +1386,13 @@
                 <c:formatCode>General</c:formatCode>
                 <c:ptCount val="3"/>
                 <c:pt idx="0">
-                  <c:v>57.5586237581637</c:v>
+                  <c:v>57.558623758165474</c:v>
                 </c:pt>
                 <c:pt idx="1">
-                  <c:v>96.12850541161808</c:v>
+                  <c:v>96.12850541159601</c:v>
                 </c:pt>
                 <c:pt idx="2">
-                  <c:v>62.26752661004522</c:v>
+                  <c:v>62.26752661004211</c:v>
                 </c:pt>
               </c:numCache>
             </c:numRef>
@@ -6209,7 +6209,7 @@
                           </a:solidFill>
                           <a:latin typeface="Calibri"/>
                         </a:rPr>
-                        <a:t>Kasa</a:t>
+                        <a:t>Akademi</a:t>
                       </a:r>
                     </a:p>
                   </a:txBody>
@@ -6232,7 +6232,7 @@
                           </a:solidFill>
                           <a:latin typeface="Calibri"/>
                         </a:rPr>
-                        <a:t>+2</a:t>
+                        <a:t>+1</a:t>
                       </a:r>
                     </a:p>
                   </a:txBody>
@@ -6255,6 +6255,29 @@
                           </a:solidFill>
                           <a:latin typeface="Calibri"/>
                         </a:rPr>
+                        <a:t>0</a:t>
+                      </a:r>
+                    </a:p>
+                  </a:txBody>
+                  <a:tcPr>
+                    <a:solidFill>
+                      <a:srgbClr val="F2F2F2"/>
+                    </a:solidFill>
+                  </a:tcPr>
+                </a:tc>
+                <a:tc>
+                  <a:txBody>
+                    <a:bodyPr/>
+                    <a:lstStyle/>
+                    <a:p>
+                      <a:pPr algn="ctr"/>
+                      <a:r>
+                        <a:rPr sz="1050" b="0">
+                          <a:solidFill>
+                            <a:srgbClr val="333333"/>
+                          </a:solidFill>
+                          <a:latin typeface="Calibri"/>
+                        </a:rPr>
                         <a:t>+1</a:t>
                       </a:r>
                     </a:p>
@@ -6278,30 +6301,7 @@
                           </a:solidFill>
                           <a:latin typeface="Calibri"/>
                         </a:rPr>
-                        <a:t>-1</a:t>
-                      </a:r>
-                    </a:p>
-                  </a:txBody>
-                  <a:tcPr>
-                    <a:solidFill>
-                      <a:srgbClr val="F2F2F2"/>
-                    </a:solidFill>
-                  </a:tcPr>
-                </a:tc>
-                <a:tc>
-                  <a:txBody>
-                    <a:bodyPr/>
-                    <a:lstStyle/>
-                    <a:p>
-                      <a:pPr algn="ctr"/>
-                      <a:r>
-                        <a:rPr sz="1050" b="0">
-                          <a:solidFill>
-                            <a:srgbClr val="333333"/>
-                          </a:solidFill>
-                          <a:latin typeface="Calibri"/>
-                        </a:rPr>
-                        <a:t>—</a:t>
+                        <a:t>0</a:t>
                       </a:r>
                     </a:p>
                   </a:txBody>
@@ -6372,7 +6372,7 @@
                           </a:solidFill>
                           <a:latin typeface="Calibri"/>
                         </a:rPr>
-                        <a:t>Akademi</a:t>
+                        <a:t>Kasa</a:t>
                       </a:r>
                     </a:p>
                   </a:txBody>
@@ -6395,6 +6395,29 @@
                           </a:solidFill>
                           <a:latin typeface="Calibri"/>
                         </a:rPr>
+                        <a:t>+2</a:t>
+                      </a:r>
+                    </a:p>
+                  </a:txBody>
+                  <a:tcPr>
+                    <a:solidFill>
+                      <a:srgbClr val="FFFFFF"/>
+                    </a:solidFill>
+                  </a:tcPr>
+                </a:tc>
+                <a:tc>
+                  <a:txBody>
+                    <a:bodyPr/>
+                    <a:lstStyle/>
+                    <a:p>
+                      <a:pPr algn="ctr"/>
+                      <a:r>
+                        <a:rPr sz="1050" b="0">
+                          <a:solidFill>
+                            <a:srgbClr val="333333"/>
+                          </a:solidFill>
+                          <a:latin typeface="Calibri"/>
+                        </a:rPr>
                         <a:t>+1</a:t>
                       </a:r>
                     </a:p>
@@ -6418,7 +6441,7 @@
                           </a:solidFill>
                           <a:latin typeface="Calibri"/>
                         </a:rPr>
-                        <a:t>0</a:t>
+                        <a:t>-1</a:t>
                       </a:r>
                     </a:p>
                   </a:txBody>
@@ -6441,30 +6464,7 @@
                           </a:solidFill>
                           <a:latin typeface="Calibri"/>
                         </a:rPr>
-                        <a:t>+1</a:t>
-                      </a:r>
-                    </a:p>
-                  </a:txBody>
-                  <a:tcPr>
-                    <a:solidFill>
-                      <a:srgbClr val="FFFFFF"/>
-                    </a:solidFill>
-                  </a:tcPr>
-                </a:tc>
-                <a:tc>
-                  <a:txBody>
-                    <a:bodyPr/>
-                    <a:lstStyle/>
-                    <a:p>
-                      <a:pPr algn="ctr"/>
-                      <a:r>
-                        <a:rPr sz="1050" b="0">
-                          <a:solidFill>
-                            <a:srgbClr val="333333"/>
-                          </a:solidFill>
-                          <a:latin typeface="Calibri"/>
-                        </a:rPr>
-                        <a:t>0</a:t>
+                        <a:t>—</a:t>
                       </a:r>
                     </a:p>
                   </a:txBody>
@@ -6698,7 +6698,7 @@
                           </a:solidFill>
                           <a:latin typeface="Calibri"/>
                         </a:rPr>
-                        <a:t>Oyuncak</a:t>
+                        <a:t>Kültür</a:t>
                       </a:r>
                     </a:p>
                   </a:txBody>
@@ -6744,53 +6744,53 @@
                           </a:solidFill>
                           <a:latin typeface="Calibri"/>
                         </a:rPr>
+                        <a:t>+1</a:t>
+                      </a:r>
+                    </a:p>
+                  </a:txBody>
+                  <a:tcPr>
+                    <a:solidFill>
+                      <a:srgbClr val="FFFFFF"/>
+                    </a:solidFill>
+                  </a:tcPr>
+                </a:tc>
+                <a:tc>
+                  <a:txBody>
+                    <a:bodyPr/>
+                    <a:lstStyle/>
+                    <a:p>
+                      <a:pPr algn="ctr"/>
+                      <a:r>
+                        <a:rPr sz="1050" b="0">
+                          <a:solidFill>
+                            <a:srgbClr val="333333"/>
+                          </a:solidFill>
+                          <a:latin typeface="Calibri"/>
+                        </a:rPr>
+                        <a:t>-1</a:t>
+                      </a:r>
+                    </a:p>
+                  </a:txBody>
+                  <a:tcPr>
+                    <a:solidFill>
+                      <a:srgbClr val="FFFFFF"/>
+                    </a:solidFill>
+                  </a:tcPr>
+                </a:tc>
+                <a:tc>
+                  <a:txBody>
+                    <a:bodyPr/>
+                    <a:lstStyle/>
+                    <a:p>
+                      <a:pPr algn="ctr"/>
+                      <a:r>
+                        <a:rPr sz="1050" b="0">
+                          <a:solidFill>
+                            <a:srgbClr val="333333"/>
+                          </a:solidFill>
+                          <a:latin typeface="Calibri"/>
+                        </a:rPr>
                         <a:t>0</a:t>
-                      </a:r>
-                    </a:p>
-                  </a:txBody>
-                  <a:tcPr>
-                    <a:solidFill>
-                      <a:srgbClr val="FFFFFF"/>
-                    </a:solidFill>
-                  </a:tcPr>
-                </a:tc>
-                <a:tc>
-                  <a:txBody>
-                    <a:bodyPr/>
-                    <a:lstStyle/>
-                    <a:p>
-                      <a:pPr algn="ctr"/>
-                      <a:r>
-                        <a:rPr sz="1050" b="0">
-                          <a:solidFill>
-                            <a:srgbClr val="333333"/>
-                          </a:solidFill>
-                          <a:latin typeface="Calibri"/>
-                        </a:rPr>
-                        <a:t>0</a:t>
-                      </a:r>
-                    </a:p>
-                  </a:txBody>
-                  <a:tcPr>
-                    <a:solidFill>
-                      <a:srgbClr val="FFFFFF"/>
-                    </a:solidFill>
-                  </a:tcPr>
-                </a:tc>
-                <a:tc>
-                  <a:txBody>
-                    <a:bodyPr/>
-                    <a:lstStyle/>
-                    <a:p>
-                      <a:pPr algn="ctr"/>
-                      <a:r>
-                        <a:rPr sz="1050" b="0">
-                          <a:solidFill>
-                            <a:srgbClr val="333333"/>
-                          </a:solidFill>
-                          <a:latin typeface="Calibri"/>
-                        </a:rPr>
-                        <a:t>—</a:t>
                       </a:r>
                     </a:p>
                   </a:txBody>
@@ -6861,7 +6861,7 @@
                           </a:solidFill>
                           <a:latin typeface="Calibri"/>
                         </a:rPr>
-                        <a:t>Kültür</a:t>
+                        <a:t>Oyuncak</a:t>
                       </a:r>
                     </a:p>
                   </a:txBody>
@@ -6907,7 +6907,7 @@
                           </a:solidFill>
                           <a:latin typeface="Calibri"/>
                         </a:rPr>
-                        <a:t>+1</a:t>
+                        <a:t>0</a:t>
                       </a:r>
                     </a:p>
                   </a:txBody>
@@ -6930,7 +6930,7 @@
                           </a:solidFill>
                           <a:latin typeface="Calibri"/>
                         </a:rPr>
-                        <a:t>-1</a:t>
+                        <a:t>0</a:t>
                       </a:r>
                     </a:p>
                   </a:txBody>
@@ -6953,7 +6953,7 @@
                           </a:solidFill>
                           <a:latin typeface="Calibri"/>
                         </a:rPr>
-                        <a:t>0</a:t>
+                        <a:t>—</a:t>
                       </a:r>
                     </a:p>
                   </a:txBody>
@@ -7187,7 +7187,7 @@
                           </a:solidFill>
                           <a:latin typeface="Calibri"/>
                         </a:rPr>
-                        <a:t>Mağaza</a:t>
+                        <a:t>Mal Kabul</a:t>
                       </a:r>
                     </a:p>
                   </a:txBody>
@@ -7210,6 +7210,29 @@
                           </a:solidFill>
                           <a:latin typeface="Calibri"/>
                         </a:rPr>
+                        <a:t>+1</a:t>
+                      </a:r>
+                    </a:p>
+                  </a:txBody>
+                  <a:tcPr>
+                    <a:solidFill>
+                      <a:srgbClr val="F2F2F2"/>
+                    </a:solidFill>
+                  </a:tcPr>
+                </a:tc>
+                <a:tc>
+                  <a:txBody>
+                    <a:bodyPr/>
+                    <a:lstStyle/>
+                    <a:p>
+                      <a:pPr algn="ctr"/>
+                      <a:r>
+                        <a:rPr sz="1050" b="0">
+                          <a:solidFill>
+                            <a:srgbClr val="333333"/>
+                          </a:solidFill>
+                          <a:latin typeface="Calibri"/>
+                        </a:rPr>
                         <a:t>0</a:t>
                       </a:r>
                     </a:p>
@@ -7233,30 +7256,7 @@
                           </a:solidFill>
                           <a:latin typeface="Calibri"/>
                         </a:rPr>
-                        <a:t>0</a:t>
-                      </a:r>
-                    </a:p>
-                  </a:txBody>
-                  <a:tcPr>
-                    <a:solidFill>
-                      <a:srgbClr val="F2F2F2"/>
-                    </a:solidFill>
-                  </a:tcPr>
-                </a:tc>
-                <a:tc>
-                  <a:txBody>
-                    <a:bodyPr/>
-                    <a:lstStyle/>
-                    <a:p>
-                      <a:pPr algn="ctr"/>
-                      <a:r>
-                        <a:rPr sz="1050" b="0">
-                          <a:solidFill>
-                            <a:srgbClr val="333333"/>
-                          </a:solidFill>
-                          <a:latin typeface="Calibri"/>
-                        </a:rPr>
-                        <a:t>0</a:t>
+                        <a:t>-1</a:t>
                       </a:r>
                     </a:p>
                   </a:txBody>
@@ -7350,7 +7350,7 @@
                           </a:solidFill>
                           <a:latin typeface="Calibri"/>
                         </a:rPr>
-                        <a:t>Mal Kabul</a:t>
+                        <a:t>Mağaza</a:t>
                       </a:r>
                     </a:p>
                   </a:txBody>
@@ -7373,7 +7373,7 @@
                           </a:solidFill>
                           <a:latin typeface="Calibri"/>
                         </a:rPr>
-                        <a:t>+1</a:t>
+                        <a:t>0</a:t>
                       </a:r>
                     </a:p>
                   </a:txBody>
@@ -7419,7 +7419,7 @@
                           </a:solidFill>
                           <a:latin typeface="Calibri"/>
                         </a:rPr>
-                        <a:t>-1</a:t>
+                        <a:t>0</a:t>
                       </a:r>
                     </a:p>
                   </a:txBody>
@@ -7513,7 +7513,7 @@
                           </a:solidFill>
                           <a:latin typeface="Calibri"/>
                         </a:rPr>
-                        <a:t>Bilgi İşlem</a:t>
+                        <a:t>Çocuk</a:t>
                       </a:r>
                     </a:p>
                   </a:txBody>
@@ -7536,99 +7536,99 @@
                           </a:solidFill>
                           <a:latin typeface="Calibri"/>
                         </a:rPr>
+                        <a:t>0</a:t>
+                      </a:r>
+                    </a:p>
+                  </a:txBody>
+                  <a:tcPr>
+                    <a:solidFill>
+                      <a:srgbClr val="F2F2F2"/>
+                    </a:solidFill>
+                  </a:tcPr>
+                </a:tc>
+                <a:tc>
+                  <a:txBody>
+                    <a:bodyPr/>
+                    <a:lstStyle/>
+                    <a:p>
+                      <a:pPr algn="ctr"/>
+                      <a:r>
+                        <a:rPr sz="1050" b="1">
+                          <a:solidFill>
+                            <a:srgbClr val="333333"/>
+                          </a:solidFill>
+                          <a:latin typeface="Calibri"/>
+                        </a:rPr>
+                        <a:t>0</a:t>
+                      </a:r>
+                    </a:p>
+                  </a:txBody>
+                  <a:tcPr>
+                    <a:solidFill>
+                      <a:srgbClr val="F2F2F2"/>
+                    </a:solidFill>
+                  </a:tcPr>
+                </a:tc>
+                <a:tc>
+                  <a:txBody>
+                    <a:bodyPr/>
+                    <a:lstStyle/>
+                    <a:p>
+                      <a:pPr algn="ctr"/>
+                      <a:r>
+                        <a:rPr sz="1050" b="1">
+                          <a:solidFill>
+                            <a:srgbClr val="333333"/>
+                          </a:solidFill>
+                          <a:latin typeface="Calibri"/>
+                        </a:rPr>
+                        <a:t>+1</a:t>
+                      </a:r>
+                    </a:p>
+                  </a:txBody>
+                  <a:tcPr>
+                    <a:solidFill>
+                      <a:srgbClr val="F2F2F2"/>
+                    </a:solidFill>
+                  </a:tcPr>
+                </a:tc>
+                <a:tc>
+                  <a:txBody>
+                    <a:bodyPr/>
+                    <a:lstStyle/>
+                    <a:p>
+                      <a:pPr algn="ctr"/>
+                      <a:r>
+                        <a:rPr sz="1050" b="1">
+                          <a:solidFill>
+                            <a:srgbClr val="333333"/>
+                          </a:solidFill>
+                          <a:latin typeface="Calibri"/>
+                        </a:rPr>
+                        <a:t>-2</a:t>
+                      </a:r>
+                    </a:p>
+                  </a:txBody>
+                  <a:tcPr>
+                    <a:solidFill>
+                      <a:srgbClr val="F2F2F2"/>
+                    </a:solidFill>
+                  </a:tcPr>
+                </a:tc>
+                <a:tc>
+                  <a:txBody>
+                    <a:bodyPr/>
+                    <a:lstStyle/>
+                    <a:p>
+                      <a:pPr algn="ctr"/>
+                      <a:r>
+                        <a:rPr sz="1050" b="1">
+                          <a:solidFill>
+                            <a:srgbClr val="333333"/>
+                          </a:solidFill>
+                          <a:latin typeface="Calibri"/>
+                        </a:rPr>
                         <a:t>—</a:t>
-                      </a:r>
-                    </a:p>
-                  </a:txBody>
-                  <a:tcPr>
-                    <a:solidFill>
-                      <a:srgbClr val="F2F2F2"/>
-                    </a:solidFill>
-                  </a:tcPr>
-                </a:tc>
-                <a:tc>
-                  <a:txBody>
-                    <a:bodyPr/>
-                    <a:lstStyle/>
-                    <a:p>
-                      <a:pPr algn="ctr"/>
-                      <a:r>
-                        <a:rPr sz="1050" b="1">
-                          <a:solidFill>
-                            <a:srgbClr val="333333"/>
-                          </a:solidFill>
-                          <a:latin typeface="Calibri"/>
-                        </a:rPr>
-                        <a:t>—</a:t>
-                      </a:r>
-                    </a:p>
-                  </a:txBody>
-                  <a:tcPr>
-                    <a:solidFill>
-                      <a:srgbClr val="F2F2F2"/>
-                    </a:solidFill>
-                  </a:tcPr>
-                </a:tc>
-                <a:tc>
-                  <a:txBody>
-                    <a:bodyPr/>
-                    <a:lstStyle/>
-                    <a:p>
-                      <a:pPr algn="ctr"/>
-                      <a:r>
-                        <a:rPr sz="1050" b="1">
-                          <a:solidFill>
-                            <a:srgbClr val="333333"/>
-                          </a:solidFill>
-                          <a:latin typeface="Calibri"/>
-                        </a:rPr>
-                        <a:t>—</a:t>
-                      </a:r>
-                    </a:p>
-                  </a:txBody>
-                  <a:tcPr>
-                    <a:solidFill>
-                      <a:srgbClr val="F2F2F2"/>
-                    </a:solidFill>
-                  </a:tcPr>
-                </a:tc>
-                <a:tc>
-                  <a:txBody>
-                    <a:bodyPr/>
-                    <a:lstStyle/>
-                    <a:p>
-                      <a:pPr algn="ctr"/>
-                      <a:r>
-                        <a:rPr sz="1050" b="1">
-                          <a:solidFill>
-                            <a:srgbClr val="333333"/>
-                          </a:solidFill>
-                          <a:latin typeface="Calibri"/>
-                        </a:rPr>
-                        <a:t>—</a:t>
-                      </a:r>
-                    </a:p>
-                  </a:txBody>
-                  <a:tcPr>
-                    <a:solidFill>
-                      <a:srgbClr val="F2F2F2"/>
-                    </a:solidFill>
-                  </a:tcPr>
-                </a:tc>
-                <a:tc>
-                  <a:txBody>
-                    <a:bodyPr/>
-                    <a:lstStyle/>
-                    <a:p>
-                      <a:pPr algn="ctr"/>
-                      <a:r>
-                        <a:rPr sz="1050" b="1">
-                          <a:solidFill>
-                            <a:srgbClr val="333333"/>
-                          </a:solidFill>
-                          <a:latin typeface="Calibri"/>
-                        </a:rPr>
-                        <a:t>-1</a:t>
                       </a:r>
                     </a:p>
                   </a:txBody>
@@ -8952,7 +8952,7 @@
         </p:nvGraphicFramePr>
         <p:xfrm>
           <a:off x="548640" y="1371600"/>
-          <a:ext cx="11018520" cy="2377440"/>
+          <a:ext cx="11018520" cy="2573383"/>
         </p:xfrm>
         <a:graphic>
           <a:graphicData uri="http://schemas.openxmlformats.org/drawingml/2006/table">
@@ -8961,14 +8961,16 @@
                 <a:tableStyleId>{5C22544A-7EE6-4342-B048-85BDC9FD1C3A}</a:tableStyleId>
               </a:tblPr>
               <a:tblGrid>
-                <a:gridCol w="2377440"/>
-                <a:gridCol w="2011680"/>
-                <a:gridCol w="2651760"/>
-                <a:gridCol w="1371600"/>
-                <a:gridCol w="1371600"/>
-                <a:gridCol w="1234440"/>
+                <a:gridCol w="1965960"/>
+                <a:gridCol w="1600200"/>
+                <a:gridCol w="2148840"/>
+                <a:gridCol w="1097280"/>
+                <a:gridCol w="1051560"/>
+                <a:gridCol w="1143000"/>
+                <a:gridCol w="1051560"/>
+                <a:gridCol w="960120"/>
               </a:tblGrid>
-              <a:tr h="339634">
+              <a:tr h="457200">
                 <a:tc>
                   <a:txBody>
                     <a:bodyPr/>
@@ -9051,7 +9053,19 @@
                           </a:solidFill>
                           <a:latin typeface="Calibri"/>
                         </a:rPr>
-                        <a:t>Adet Δ</a:t>
+                        <a:t>SEZON</a:t>
+                      </a:r>
+                    </a:p>
+                    <a:p>
+                      <a:pPr algn="ctr"/>
+                      <a:r>
+                        <a:rPr sz="1150" b="1">
+                          <a:solidFill>
+                            <a:srgbClr val="FFFFFF"/>
+                          </a:solidFill>
+                          <a:latin typeface="Calibri"/>
+                        </a:rPr>
+                        <a:t>adet Δ</a:t>
                       </a:r>
                     </a:p>
                   </a:txBody>
@@ -9074,7 +9088,19 @@
                           </a:solidFill>
                           <a:latin typeface="Calibri"/>
                         </a:rPr>
-                        <a:t>Ciro Δ</a:t>
+                        <a:t>SEZON</a:t>
+                      </a:r>
+                    </a:p>
+                    <a:p>
+                      <a:pPr algn="ctr"/>
+                      <a:r>
+                        <a:rPr sz="1150" b="1">
+                          <a:solidFill>
+                            <a:srgbClr val="FFFFFF"/>
+                          </a:solidFill>
+                          <a:latin typeface="Calibri"/>
+                        </a:rPr>
+                        <a:t>ciro Δ</a:t>
                       </a:r>
                     </a:p>
                   </a:txBody>
@@ -9097,7 +9123,19 @@
                           </a:solidFill>
                           <a:latin typeface="Calibri"/>
                         </a:rPr>
-                        <a:t>Bölüm kadro Δ</a:t>
+                        <a:t>OCA-AĞU</a:t>
+                      </a:r>
+                    </a:p>
+                    <a:p>
+                      <a:pPr algn="ctr"/>
+                      <a:r>
+                        <a:rPr sz="1150" b="1">
+                          <a:solidFill>
+                            <a:srgbClr val="FFFFFF"/>
+                          </a:solidFill>
+                          <a:latin typeface="Calibri"/>
+                        </a:rPr>
+                        <a:t>adet Δ</a:t>
                       </a:r>
                     </a:p>
                   </a:txBody>
@@ -9107,8 +9145,78 @@
                     </a:solidFill>
                   </a:tcPr>
                 </a:tc>
+                <a:tc>
+                  <a:txBody>
+                    <a:bodyPr/>
+                    <a:lstStyle/>
+                    <a:p>
+                      <a:pPr algn="ctr"/>
+                      <a:r>
+                        <a:rPr sz="1150" b="1">
+                          <a:solidFill>
+                            <a:srgbClr val="FFFFFF"/>
+                          </a:solidFill>
+                          <a:latin typeface="Calibri"/>
+                        </a:rPr>
+                        <a:t>OCA-AĞU</a:t>
+                      </a:r>
+                    </a:p>
+                    <a:p>
+                      <a:pPr algn="ctr"/>
+                      <a:r>
+                        <a:rPr sz="1150" b="1">
+                          <a:solidFill>
+                            <a:srgbClr val="FFFFFF"/>
+                          </a:solidFill>
+                          <a:latin typeface="Calibri"/>
+                        </a:rPr>
+                        <a:t>ciro Δ</a:t>
+                      </a:r>
+                    </a:p>
+                  </a:txBody>
+                  <a:tcPr>
+                    <a:solidFill>
+                      <a:srgbClr val="E30622"/>
+                    </a:solidFill>
+                  </a:tcPr>
+                </a:tc>
+                <a:tc>
+                  <a:txBody>
+                    <a:bodyPr/>
+                    <a:lstStyle/>
+                    <a:p>
+                      <a:pPr algn="ctr"/>
+                      <a:r>
+                        <a:rPr sz="1150" b="1">
+                          <a:solidFill>
+                            <a:srgbClr val="FFFFFF"/>
+                          </a:solidFill>
+                          <a:latin typeface="Calibri"/>
+                        </a:rPr>
+                        <a:t>Bölüm</a:t>
+                      </a:r>
+                    </a:p>
+                    <a:p>
+                      <a:pPr algn="ctr"/>
+                      <a:r>
+                        <a:rPr sz="1150" b="1">
+                          <a:solidFill>
+                            <a:srgbClr val="FFFFFF"/>
+                          </a:solidFill>
+                          <a:latin typeface="Calibri"/>
+                        </a:rPr>
+                        <a:t>kadro Δ</a:t>
+                      </a:r>
+                    </a:p>
+                  </a:txBody>
+                  <a:tcPr>
+                    <a:solidFill>
+                      <a:srgbClr val="E30622"/>
+                    </a:solidFill>
+                  </a:tcPr>
+                </a:tc>
               </a:tr>
-              <a:tr h="339634">
+              <a:tr h="352697">
                 <a:tc>
                   <a:txBody>
                     <a:bodyPr/>
@@ -9237,6 +9345,52 @@
                           </a:solidFill>
                           <a:latin typeface="Calibri"/>
                         </a:rPr>
+                        <a:t>+%21,7</a:t>
+                      </a:r>
+                    </a:p>
+                  </a:txBody>
+                  <a:tcPr>
+                    <a:solidFill>
+                      <a:srgbClr val="FFFFFF"/>
+                    </a:solidFill>
+                  </a:tcPr>
+                </a:tc>
+                <a:tc>
+                  <a:txBody>
+                    <a:bodyPr/>
+                    <a:lstStyle/>
+                    <a:p>
+                      <a:pPr algn="ctr"/>
+                      <a:r>
+                        <a:rPr sz="1150" b="0">
+                          <a:solidFill>
+                            <a:srgbClr val="333333"/>
+                          </a:solidFill>
+                          <a:latin typeface="Calibri"/>
+                        </a:rPr>
+                        <a:t>+%46,2</a:t>
+                      </a:r>
+                    </a:p>
+                  </a:txBody>
+                  <a:tcPr>
+                    <a:solidFill>
+                      <a:srgbClr val="FFFFFF"/>
+                    </a:solidFill>
+                  </a:tcPr>
+                </a:tc>
+                <a:tc>
+                  <a:txBody>
+                    <a:bodyPr/>
+                    <a:lstStyle/>
+                    <a:p>
+                      <a:pPr algn="ctr"/>
+                      <a:r>
+                        <a:rPr sz="1150" b="0">
+                          <a:solidFill>
+                            <a:srgbClr val="333333"/>
+                          </a:solidFill>
+                          <a:latin typeface="Calibri"/>
+                        </a:rPr>
                         <a:t>+6 kişi</a:t>
                       </a:r>
                     </a:p>
@@ -9248,7 +9402,7 @@
                   </a:tcPr>
                 </a:tc>
               </a:tr>
-              <a:tr h="339634">
+              <a:tr h="352697">
                 <a:tc>
                   <a:txBody>
                     <a:bodyPr/>
@@ -9377,6 +9531,52 @@
                           </a:solidFill>
                           <a:latin typeface="Calibri"/>
                         </a:rPr>
+                        <a:t>+%22,8</a:t>
+                      </a:r>
+                    </a:p>
+                  </a:txBody>
+                  <a:tcPr>
+                    <a:solidFill>
+                      <a:srgbClr val="F2F2F2"/>
+                    </a:solidFill>
+                  </a:tcPr>
+                </a:tc>
+                <a:tc>
+                  <a:txBody>
+                    <a:bodyPr/>
+                    <a:lstStyle/>
+                    <a:p>
+                      <a:pPr algn="ctr"/>
+                      <a:r>
+                        <a:rPr sz="1150" b="0">
+                          <a:solidFill>
+                            <a:srgbClr val="333333"/>
+                          </a:solidFill>
+                          <a:latin typeface="Calibri"/>
+                        </a:rPr>
+                        <a:t>+%37,5</a:t>
+                      </a:r>
+                    </a:p>
+                  </a:txBody>
+                  <a:tcPr>
+                    <a:solidFill>
+                      <a:srgbClr val="F2F2F2"/>
+                    </a:solidFill>
+                  </a:tcPr>
+                </a:tc>
+                <a:tc>
+                  <a:txBody>
+                    <a:bodyPr/>
+                    <a:lstStyle/>
+                    <a:p>
+                      <a:pPr algn="ctr"/>
+                      <a:r>
+                        <a:rPr sz="1150" b="0">
+                          <a:solidFill>
+                            <a:srgbClr val="333333"/>
+                          </a:solidFill>
+                          <a:latin typeface="Calibri"/>
+                        </a:rPr>
                         <a:t>+3 kişi</a:t>
                       </a:r>
                     </a:p>
@@ -9388,7 +9588,7 @@
                   </a:tcPr>
                 </a:tc>
               </a:tr>
-              <a:tr h="339634">
+              <a:tr h="352697">
                 <a:tc>
                   <a:txBody>
                     <a:bodyPr/>
@@ -9517,6 +9717,52 @@
                           </a:solidFill>
                           <a:latin typeface="Calibri"/>
                         </a:rPr>
+                        <a:t>+%152,9</a:t>
+                      </a:r>
+                    </a:p>
+                  </a:txBody>
+                  <a:tcPr>
+                    <a:solidFill>
+                      <a:srgbClr val="FFFFFF"/>
+                    </a:solidFill>
+                  </a:tcPr>
+                </a:tc>
+                <a:tc>
+                  <a:txBody>
+                    <a:bodyPr/>
+                    <a:lstStyle/>
+                    <a:p>
+                      <a:pPr algn="ctr"/>
+                      <a:r>
+                        <a:rPr sz="1150" b="0">
+                          <a:solidFill>
+                            <a:srgbClr val="333333"/>
+                          </a:solidFill>
+                          <a:latin typeface="Calibri"/>
+                        </a:rPr>
+                        <a:t>+%176,9</a:t>
+                      </a:r>
+                    </a:p>
+                  </a:txBody>
+                  <a:tcPr>
+                    <a:solidFill>
+                      <a:srgbClr val="FFFFFF"/>
+                    </a:solidFill>
+                  </a:tcPr>
+                </a:tc>
+                <a:tc>
+                  <a:txBody>
+                    <a:bodyPr/>
+                    <a:lstStyle/>
+                    <a:p>
+                      <a:pPr algn="ctr"/>
+                      <a:r>
+                        <a:rPr sz="1150" b="0">
+                          <a:solidFill>
+                            <a:srgbClr val="333333"/>
+                          </a:solidFill>
+                          <a:latin typeface="Calibri"/>
+                        </a:rPr>
                         <a:t>+2 kişi</a:t>
                       </a:r>
                     </a:p>
@@ -9528,7 +9774,7 @@
                   </a:tcPr>
                 </a:tc>
               </a:tr>
-              <a:tr h="339634">
+              <a:tr h="352697">
                 <a:tc>
                   <a:txBody>
                     <a:bodyPr/>
@@ -9657,6 +9903,52 @@
                           </a:solidFill>
                           <a:latin typeface="Calibri"/>
                         </a:rPr>
+                        <a:t>+%16,7</a:t>
+                      </a:r>
+                    </a:p>
+                  </a:txBody>
+                  <a:tcPr>
+                    <a:solidFill>
+                      <a:srgbClr val="F2F2F2"/>
+                    </a:solidFill>
+                  </a:tcPr>
+                </a:tc>
+                <a:tc>
+                  <a:txBody>
+                    <a:bodyPr/>
+                    <a:lstStyle/>
+                    <a:p>
+                      <a:pPr algn="ctr"/>
+                      <a:r>
+                        <a:rPr sz="1150" b="0">
+                          <a:solidFill>
+                            <a:srgbClr val="333333"/>
+                          </a:solidFill>
+                          <a:latin typeface="Calibri"/>
+                        </a:rPr>
+                        <a:t>+%49,2</a:t>
+                      </a:r>
+                    </a:p>
+                  </a:txBody>
+                  <a:tcPr>
+                    <a:solidFill>
+                      <a:srgbClr val="F2F2F2"/>
+                    </a:solidFill>
+                  </a:tcPr>
+                </a:tc>
+                <a:tc>
+                  <a:txBody>
+                    <a:bodyPr/>
+                    <a:lstStyle/>
+                    <a:p>
+                      <a:pPr algn="ctr"/>
+                      <a:r>
+                        <a:rPr sz="1150" b="0">
+                          <a:solidFill>
+                            <a:srgbClr val="333333"/>
+                          </a:solidFill>
+                          <a:latin typeface="Calibri"/>
+                        </a:rPr>
                         <a:t>+1 kişi</a:t>
                       </a:r>
                     </a:p>
@@ -9668,7 +9960,7 @@
                   </a:tcPr>
                 </a:tc>
               </a:tr>
-              <a:tr h="339634">
+              <a:tr h="352697">
                 <a:tc>
                   <a:txBody>
                     <a:bodyPr/>
@@ -9797,6 +10089,52 @@
                           </a:solidFill>
                           <a:latin typeface="Calibri"/>
                         </a:rPr>
+                        <a:t>+%45,3</a:t>
+                      </a:r>
+                    </a:p>
+                  </a:txBody>
+                  <a:tcPr>
+                    <a:solidFill>
+                      <a:srgbClr val="FFFFFF"/>
+                    </a:solidFill>
+                  </a:tcPr>
+                </a:tc>
+                <a:tc>
+                  <a:txBody>
+                    <a:bodyPr/>
+                    <a:lstStyle/>
+                    <a:p>
+                      <a:pPr algn="ctr"/>
+                      <a:r>
+                        <a:rPr sz="1150" b="0">
+                          <a:solidFill>
+                            <a:srgbClr val="333333"/>
+                          </a:solidFill>
+                          <a:latin typeface="Calibri"/>
+                        </a:rPr>
+                        <a:t>+%66,6</a:t>
+                      </a:r>
+                    </a:p>
+                  </a:txBody>
+                  <a:tcPr>
+                    <a:solidFill>
+                      <a:srgbClr val="FFFFFF"/>
+                    </a:solidFill>
+                  </a:tcPr>
+                </a:tc>
+                <a:tc>
+                  <a:txBody>
+                    <a:bodyPr/>
+                    <a:lstStyle/>
+                    <a:p>
+                      <a:pPr algn="ctr"/>
+                      <a:r>
+                        <a:rPr sz="1150" b="0">
+                          <a:solidFill>
+                            <a:srgbClr val="333333"/>
+                          </a:solidFill>
+                          <a:latin typeface="Calibri"/>
+                        </a:rPr>
                         <a:t>+1 kişi</a:t>
                       </a:r>
                     </a:p>
@@ -9808,7 +10146,7 @@
                   </a:tcPr>
                 </a:tc>
               </a:tr>
-              <a:tr h="339636">
+              <a:tr h="352698">
                 <a:tc>
                   <a:txBody>
                     <a:bodyPr/>
@@ -9932,6 +10270,52 @@
                       <a:pPr algn="ctr"/>
                       <a:r>
                         <a:rPr sz="1150" b="1">
+                          <a:solidFill>
+                            <a:srgbClr val="333333"/>
+                          </a:solidFill>
+                          <a:latin typeface="Calibri"/>
+                        </a:rPr>
+                        <a:t>+%22,9</a:t>
+                      </a:r>
+                    </a:p>
+                  </a:txBody>
+                  <a:tcPr>
+                    <a:solidFill>
+                      <a:srgbClr val="F2F2F2"/>
+                    </a:solidFill>
+                  </a:tcPr>
+                </a:tc>
+                <a:tc>
+                  <a:txBody>
+                    <a:bodyPr/>
+                    <a:lstStyle/>
+                    <a:p>
+                      <a:pPr algn="ctr"/>
+                      <a:r>
+                        <a:rPr sz="1150" b="0">
+                          <a:solidFill>
+                            <a:srgbClr val="333333"/>
+                          </a:solidFill>
+                          <a:latin typeface="Calibri"/>
+                        </a:rPr>
+                        <a:t>+%57,7</a:t>
+                      </a:r>
+                    </a:p>
+                  </a:txBody>
+                  <a:tcPr>
+                    <a:solidFill>
+                      <a:srgbClr val="F2F2F2"/>
+                    </a:solidFill>
+                  </a:tcPr>
+                </a:tc>
+                <a:tc>
+                  <a:txBody>
+                    <a:bodyPr/>
+                    <a:lstStyle/>
+                    <a:p>
+                      <a:pPr algn="ctr"/>
+                      <a:r>
+                        <a:rPr sz="1150" b="0">
                           <a:solidFill>
                             <a:srgbClr val="333333"/>
                           </a:solidFill>
@@ -9961,8 +10345,8 @@
           <p:nvPr/>
         </p:nvGraphicFramePr>
         <p:xfrm>
-          <a:off x="548640" y="4059936"/>
-          <a:ext cx="6766560" cy="1426464"/>
+          <a:off x="548640" y="4224528"/>
+          <a:ext cx="6766560" cy="1298448"/>
         </p:xfrm>
         <a:graphic>
           <a:graphicData uri="http://schemas.openxmlformats.org/drawingml/2006/chart">
@@ -9978,7 +10362,7 @@
         </p:nvSpPr>
         <p:spPr>
           <a:xfrm>
-            <a:off x="548640" y="3803904"/>
+            <a:off x="548640" y="3968496"/>
             <a:ext cx="6766560" cy="237744"/>
           </a:xfrm>
           <a:prstGeom prst="rect">
@@ -10017,8 +10401,8 @@
         </p:nvSpPr>
         <p:spPr>
           <a:xfrm>
-            <a:off x="7498079" y="4023360"/>
-            <a:ext cx="4069080" cy="1554480"/>
+            <a:off x="7498079" y="4041648"/>
+            <a:ext cx="4069080" cy="1481328"/>
           </a:xfrm>
           <a:prstGeom prst="roundRect">
             <a:avLst/>
@@ -10064,7 +10448,7 @@
         <p:spPr>
           <a:xfrm>
             <a:off x="7726679" y="4114800"/>
-            <a:ext cx="3657600" cy="1371600"/>
+            <a:ext cx="3657600" cy="1353312"/>
           </a:xfrm>
           <a:prstGeom prst="rect">
             <a:avLst/>
@@ -10099,13 +10483,13 @@
               </a:lnSpc>
             </a:pPr>
             <a:r>
-              <a:rPr sz="1150" b="0">
+              <a:rPr sz="1050" b="0">
                 <a:solidFill>
                   <a:srgbClr val="333333"/>
                 </a:solidFill>
                 <a:latin typeface="Calibri"/>
               </a:rPr>
-              <a:t>Kadro artışı, ürün adedi en hızlı artan kategorilere yönlendirilmiştir. Artışın en düşük olduğu kategoride (Çocuk Kitabı) kadro azaltılmıştır.</a:t>
+              <a:t>Kadro artışı, ürün adedi en hızlı artan kategorilere yönlendirilmiştir. SEZON kolonları okul-hizalı pencereyi, OCA-AĞU kolonları yılın tamamını (01.01–31.08) gösterir; sıralama iki pencerede de aynıdır.</a:t>
             </a:r>
           </a:p>
         </p:txBody>
@@ -10144,46 +10528,7 @@
                 </a:solidFill>
                 <a:latin typeface="Calibri"/>
               </a:rPr>
-              <a:t>* Kapsam: üç POS mağazası — FSM · Özlüce · İst. Yolu (Heykel ve Şura POS raporlamasında yok) · Dönem: 01.07 – 25.08.2025 (2025) · 07.07 – 31.08.2026 (2026), her iki yıl 56 gün, okul açılışına hizalı</a:t>
-            </a:r>
-          </a:p>
-        </p:txBody>
-      </p:sp>
-      <p:sp>
-        <p:nvSpPr>
-          <p:cNvPr id="9" name="TextBox 8"/>
-          <p:cNvSpPr txBox="1"/>
-          <p:nvPr/>
-        </p:nvSpPr>
-        <p:spPr>
-          <a:xfrm>
-            <a:off x="8503920" y="6355080"/>
-            <a:ext cx="3108960" cy="274320"/>
-          </a:xfrm>
-          <a:prstGeom prst="rect">
-            <a:avLst/>
-          </a:prstGeom>
-          <a:noFill/>
-        </p:spPr>
-        <p:txBody>
-          <a:bodyPr wrap="square" anchor="t">
-            <a:spAutoFit/>
-          </a:bodyPr>
-          <a:lstStyle/>
-          <a:p>
-            <a:pPr algn="r">
-              <a:lnSpc>
-                <a:spcPct val="100000"/>
-              </a:lnSpc>
-            </a:pPr>
-            <a:r>
-              <a:rPr sz="900" b="0">
-                <a:solidFill>
-                  <a:srgbClr val="9A9A9A"/>
-                </a:solidFill>
-                <a:latin typeface="Calibri"/>
-              </a:rPr>
-              <a:t>© Fikri Eren 2026</a:t>
+              <a:t>* Kapsam: üç POS mağazası — FSM · Özlüce · İst. Yolu (Heykel ve Şura POS raporlamasında yok) · Dönem: 01.07 – 25.08.2025 (2025) · 07.07 – 31.08.2026 (2026), her iki yıl 56 gün, okul açılışına hizalı · OCA-AĞU kolonları: 01.01 – 31.08 kümülatif (her iki yıl)</a:t>
             </a:r>
           </a:p>
         </p:txBody>
@@ -17275,7 +17620,7 @@
         </p:nvGraphicFramePr>
         <p:xfrm>
           <a:off x="548640" y="1417320"/>
-          <a:ext cx="11018519" cy="3089366"/>
+          <a:ext cx="11018520" cy="3089366"/>
         </p:xfrm>
         <a:graphic>
           <a:graphicData uri="http://schemas.openxmlformats.org/drawingml/2006/table">
@@ -17284,15 +17629,17 @@
                 <a:tableStyleId>{5C22544A-7EE6-4342-B048-85BDC9FD1C3A}</a:tableStyleId>
               </a:tblPr>
               <a:tblGrid>
-                <a:gridCol w="1874519"/>
-                <a:gridCol w="1188720"/>
-                <a:gridCol w="1188720"/>
-                <a:gridCol w="1188720"/>
-                <a:gridCol w="1188720"/>
+                <a:gridCol w="1417320"/>
                 <a:gridCol w="1005840"/>
                 <a:gridCol w="1005840"/>
-                <a:gridCol w="1188720"/>
-                <a:gridCol w="1188720"/>
+                <a:gridCol w="1005840"/>
+                <a:gridCol w="1005840"/>
+                <a:gridCol w="841248"/>
+                <a:gridCol w="841248"/>
+                <a:gridCol w="1005840"/>
+                <a:gridCol w="1005840"/>
+                <a:gridCol w="941832"/>
+                <a:gridCol w="941832"/>
               </a:tblGrid>
               <a:tr h="502920">
                 <a:tc>
@@ -17302,7 +17649,7 @@
                     <a:p>
                       <a:pPr algn="l"/>
                       <a:r>
-                        <a:rPr sz="950" b="1">
+                        <a:rPr sz="850" b="1">
                           <a:solidFill>
                             <a:srgbClr val="FFFFFF"/>
                           </a:solidFill>
@@ -17325,7 +17672,7 @@
                     <a:p>
                       <a:pPr algn="ctr"/>
                       <a:r>
-                        <a:rPr sz="950" b="1">
+                        <a:rPr sz="850" b="1">
                           <a:solidFill>
                             <a:srgbClr val="FFFFFF"/>
                           </a:solidFill>
@@ -17337,7 +17684,7 @@
                     <a:p>
                       <a:pPr algn="ctr"/>
                       <a:r>
-                        <a:rPr sz="950" b="1">
+                        <a:rPr sz="850" b="1">
                           <a:solidFill>
                             <a:srgbClr val="FFFFFF"/>
                           </a:solidFill>
@@ -17360,7 +17707,7 @@
                     <a:p>
                       <a:pPr algn="ctr"/>
                       <a:r>
-                        <a:rPr sz="950" b="1">
+                        <a:rPr sz="850" b="1">
                           <a:solidFill>
                             <a:srgbClr val="FFFFFF"/>
                           </a:solidFill>
@@ -17372,7 +17719,7 @@
                     <a:p>
                       <a:pPr algn="ctr"/>
                       <a:r>
-                        <a:rPr sz="950" b="1">
+                        <a:rPr sz="850" b="1">
                           <a:solidFill>
                             <a:srgbClr val="FFFFFF"/>
                           </a:solidFill>
@@ -17395,7 +17742,7 @@
                     <a:p>
                       <a:pPr algn="ctr"/>
                       <a:r>
-                        <a:rPr sz="950" b="1">
+                        <a:rPr sz="850" b="1">
                           <a:solidFill>
                             <a:srgbClr val="FFFFFF"/>
                           </a:solidFill>
@@ -17407,7 +17754,7 @@
                     <a:p>
                       <a:pPr algn="ctr"/>
                       <a:r>
-                        <a:rPr sz="950" b="1">
+                        <a:rPr sz="850" b="1">
                           <a:solidFill>
                             <a:srgbClr val="FFFFFF"/>
                           </a:solidFill>
@@ -17430,7 +17777,7 @@
                     <a:p>
                       <a:pPr algn="ctr"/>
                       <a:r>
-                        <a:rPr sz="950" b="1">
+                        <a:rPr sz="850" b="1">
                           <a:solidFill>
                             <a:srgbClr val="FFFFFF"/>
                           </a:solidFill>
@@ -17442,7 +17789,7 @@
                     <a:p>
                       <a:pPr algn="ctr"/>
                       <a:r>
-                        <a:rPr sz="950" b="1">
+                        <a:rPr sz="850" b="1">
                           <a:solidFill>
                             <a:srgbClr val="FFFFFF"/>
                           </a:solidFill>
@@ -17465,7 +17812,7 @@
                     <a:p>
                       <a:pPr algn="ctr"/>
                       <a:r>
-                        <a:rPr sz="950" b="1">
+                        <a:rPr sz="850" b="1">
                           <a:solidFill>
                             <a:srgbClr val="FFFFFF"/>
                           </a:solidFill>
@@ -17477,7 +17824,7 @@
                     <a:p>
                       <a:pPr algn="ctr"/>
                       <a:r>
-                        <a:rPr sz="950" b="1">
+                        <a:rPr sz="850" b="1">
                           <a:solidFill>
                             <a:srgbClr val="FFFFFF"/>
                           </a:solidFill>
@@ -17500,7 +17847,7 @@
                     <a:p>
                       <a:pPr algn="ctr"/>
                       <a:r>
-                        <a:rPr sz="950" b="1">
+                        <a:rPr sz="850" b="1">
                           <a:solidFill>
                             <a:srgbClr val="FFFFFF"/>
                           </a:solidFill>
@@ -17512,7 +17859,7 @@
                     <a:p>
                       <a:pPr algn="ctr"/>
                       <a:r>
-                        <a:rPr sz="950" b="1">
+                        <a:rPr sz="850" b="1">
                           <a:solidFill>
                             <a:srgbClr val="FFFFFF"/>
                           </a:solidFill>
@@ -17535,7 +17882,7 @@
                     <a:p>
                       <a:pPr algn="ctr"/>
                       <a:r>
-                        <a:rPr sz="950" b="1">
+                        <a:rPr sz="850" b="1">
                           <a:solidFill>
                             <a:srgbClr val="FFFFFF"/>
                           </a:solidFill>
@@ -17547,7 +17894,7 @@
                     <a:p>
                       <a:pPr algn="ctr"/>
                       <a:r>
-                        <a:rPr sz="950" b="1">
+                        <a:rPr sz="850" b="1">
                           <a:solidFill>
                             <a:srgbClr val="FFFFFF"/>
                           </a:solidFill>
@@ -17570,7 +17917,7 @@
                     <a:p>
                       <a:pPr algn="ctr"/>
                       <a:r>
-                        <a:rPr sz="950" b="1">
+                        <a:rPr sz="850" b="1">
                           <a:solidFill>
                             <a:srgbClr val="FFFFFF"/>
                           </a:solidFill>
@@ -17582,13 +17929,83 @@
                     <a:p>
                       <a:pPr algn="ctr"/>
                       <a:r>
-                        <a:rPr sz="950" b="1">
+                        <a:rPr sz="850" b="1">
                           <a:solidFill>
                             <a:srgbClr val="FFFFFF"/>
                           </a:solidFill>
                           <a:latin typeface="Calibri"/>
                         </a:rPr>
                         <a:t>2026</a:t>
+                      </a:r>
+                    </a:p>
+                  </a:txBody>
+                  <a:tcPr>
+                    <a:solidFill>
+                      <a:srgbClr val="E30622"/>
+                    </a:solidFill>
+                  </a:tcPr>
+                </a:tc>
+                <a:tc>
+                  <a:txBody>
+                    <a:bodyPr/>
+                    <a:lstStyle/>
+                    <a:p>
+                      <a:pPr algn="ctr"/>
+                      <a:r>
+                        <a:rPr sz="850" b="1">
+                          <a:solidFill>
+                            <a:srgbClr val="FFFFFF"/>
+                          </a:solidFill>
+                          <a:latin typeface="Calibri"/>
+                        </a:rPr>
+                        <a:t>GENEL TOPLAM</a:t>
+                      </a:r>
+                    </a:p>
+                    <a:p>
+                      <a:pPr algn="ctr"/>
+                      <a:r>
+                        <a:rPr sz="850" b="1">
+                          <a:solidFill>
+                            <a:srgbClr val="FFFFFF"/>
+                          </a:solidFill>
+                          <a:latin typeface="Calibri"/>
+                        </a:rPr>
+                        <a:t>31.08 · 2025</a:t>
+                      </a:r>
+                    </a:p>
+                  </a:txBody>
+                  <a:tcPr>
+                    <a:solidFill>
+                      <a:srgbClr val="E30622"/>
+                    </a:solidFill>
+                  </a:tcPr>
+                </a:tc>
+                <a:tc>
+                  <a:txBody>
+                    <a:bodyPr/>
+                    <a:lstStyle/>
+                    <a:p>
+                      <a:pPr algn="ctr"/>
+                      <a:r>
+                        <a:rPr sz="850" b="1">
+                          <a:solidFill>
+                            <a:srgbClr val="FFFFFF"/>
+                          </a:solidFill>
+                          <a:latin typeface="Calibri"/>
+                        </a:rPr>
+                        <a:t>GENEL TOPLAM</a:t>
+                      </a:r>
+                    </a:p>
+                    <a:p>
+                      <a:pPr algn="ctr"/>
+                      <a:r>
+                        <a:rPr sz="850" b="1">
+                          <a:solidFill>
+                            <a:srgbClr val="FFFFFF"/>
+                          </a:solidFill>
+                          <a:latin typeface="Calibri"/>
+                        </a:rPr>
+                        <a:t>31.08 · 2026</a:t>
                       </a:r>
                     </a:p>
                   </a:txBody>
@@ -17607,7 +18024,7 @@
                     <a:p>
                       <a:pPr algn="l"/>
                       <a:r>
-                        <a:rPr sz="1100" b="0">
+                        <a:rPr sz="1050" b="0">
                           <a:solidFill>
                             <a:srgbClr val="333333"/>
                           </a:solidFill>
@@ -17630,7 +18047,7 @@
                     <a:p>
                       <a:pPr algn="ctr"/>
                       <a:r>
-                        <a:rPr sz="1100" b="0">
+                        <a:rPr sz="1050" b="0">
                           <a:solidFill>
                             <a:srgbClr val="333333"/>
                           </a:solidFill>
@@ -17653,7 +18070,7 @@
                     <a:p>
                       <a:pPr algn="ctr"/>
                       <a:r>
-                        <a:rPr sz="1100" b="0">
+                        <a:rPr sz="1050" b="0">
                           <a:solidFill>
                             <a:srgbClr val="333333"/>
                           </a:solidFill>
@@ -17676,7 +18093,7 @@
                     <a:p>
                       <a:pPr algn="ctr"/>
                       <a:r>
-                        <a:rPr sz="1100" b="0">
+                        <a:rPr sz="1050" b="0">
                           <a:solidFill>
                             <a:srgbClr val="333333"/>
                           </a:solidFill>
@@ -17699,7 +18116,7 @@
                     <a:p>
                       <a:pPr algn="ctr"/>
                       <a:r>
-                        <a:rPr sz="1100" b="0">
+                        <a:rPr sz="1050" b="0">
                           <a:solidFill>
                             <a:srgbClr val="333333"/>
                           </a:solidFill>
@@ -17722,7 +18139,7 @@
                     <a:p>
                       <a:pPr algn="ctr"/>
                       <a:r>
-                        <a:rPr sz="1100" b="1">
+                        <a:rPr sz="1050" b="1">
                           <a:solidFill>
                             <a:srgbClr val="A6001A"/>
                           </a:solidFill>
@@ -17745,7 +18162,7 @@
                     <a:p>
                       <a:pPr algn="ctr"/>
                       <a:r>
-                        <a:rPr sz="1100" b="1">
+                        <a:rPr sz="1050" b="1">
                           <a:solidFill>
                             <a:srgbClr val="A6001A"/>
                           </a:solidFill>
@@ -17768,7 +18185,7 @@
                     <a:p>
                       <a:pPr algn="ctr"/>
                       <a:r>
-                        <a:rPr sz="1100" b="0">
+                        <a:rPr sz="1050" b="0">
                           <a:solidFill>
                             <a:srgbClr val="333333"/>
                           </a:solidFill>
@@ -17791,7 +18208,7 @@
                     <a:p>
                       <a:pPr algn="ctr"/>
                       <a:r>
-                        <a:rPr sz="1100" b="0">
+                        <a:rPr sz="1050" b="0">
                           <a:solidFill>
                             <a:srgbClr val="333333"/>
                           </a:solidFill>
@@ -17804,6 +18221,52 @@
                   <a:tcPr>
                     <a:solidFill>
                       <a:srgbClr val="FFFFFF"/>
+                    </a:solidFill>
+                  </a:tcPr>
+                </a:tc>
+                <a:tc>
+                  <a:txBody>
+                    <a:bodyPr/>
+                    <a:lstStyle/>
+                    <a:p>
+                      <a:pPr algn="ctr"/>
+                      <a:r>
+                        <a:rPr sz="1050" b="1">
+                          <a:solidFill>
+                            <a:srgbClr val="A6001A"/>
+                          </a:solidFill>
+                          <a:latin typeface="Calibri"/>
+                        </a:rPr>
+                        <a:t>50</a:t>
+                      </a:r>
+                    </a:p>
+                  </a:txBody>
+                  <a:tcPr>
+                    <a:solidFill>
+                      <a:srgbClr val="FDF2F3"/>
+                    </a:solidFill>
+                  </a:tcPr>
+                </a:tc>
+                <a:tc>
+                  <a:txBody>
+                    <a:bodyPr/>
+                    <a:lstStyle/>
+                    <a:p>
+                      <a:pPr algn="ctr"/>
+                      <a:r>
+                        <a:rPr sz="1050" b="1">
+                          <a:solidFill>
+                            <a:srgbClr val="A6001A"/>
+                          </a:solidFill>
+                          <a:latin typeface="Calibri"/>
+                        </a:rPr>
+                        <a:t>61</a:t>
+                      </a:r>
+                    </a:p>
+                  </a:txBody>
+                  <a:tcPr>
+                    <a:solidFill>
+                      <a:srgbClr val="FDF2F3"/>
                     </a:solidFill>
                   </a:tcPr>
                 </a:tc>
@@ -17816,7 +18279,7 @@
                     <a:p>
                       <a:pPr algn="l"/>
                       <a:r>
-                        <a:rPr sz="1100" b="0">
+                        <a:rPr sz="1050" b="0">
                           <a:solidFill>
                             <a:srgbClr val="333333"/>
                           </a:solidFill>
@@ -17839,7 +18302,7 @@
                     <a:p>
                       <a:pPr algn="ctr"/>
                       <a:r>
-                        <a:rPr sz="1100" b="0">
+                        <a:rPr sz="1050" b="0">
                           <a:solidFill>
                             <a:srgbClr val="333333"/>
                           </a:solidFill>
@@ -17862,7 +18325,7 @@
                     <a:p>
                       <a:pPr algn="ctr"/>
                       <a:r>
-                        <a:rPr sz="1100" b="0">
+                        <a:rPr sz="1050" b="0">
                           <a:solidFill>
                             <a:srgbClr val="333333"/>
                           </a:solidFill>
@@ -17885,7 +18348,7 @@
                     <a:p>
                       <a:pPr algn="ctr"/>
                       <a:r>
-                        <a:rPr sz="1100" b="0">
+                        <a:rPr sz="1050" b="0">
                           <a:solidFill>
                             <a:srgbClr val="333333"/>
                           </a:solidFill>
@@ -17908,7 +18371,7 @@
                     <a:p>
                       <a:pPr algn="ctr"/>
                       <a:r>
-                        <a:rPr sz="1100" b="0">
+                        <a:rPr sz="1050" b="0">
                           <a:solidFill>
                             <a:srgbClr val="333333"/>
                           </a:solidFill>
@@ -17931,7 +18394,7 @@
                     <a:p>
                       <a:pPr algn="ctr"/>
                       <a:r>
-                        <a:rPr sz="1100" b="1">
+                        <a:rPr sz="1050" b="1">
                           <a:solidFill>
                             <a:srgbClr val="A6001A"/>
                           </a:solidFill>
@@ -17954,7 +18417,7 @@
                     <a:p>
                       <a:pPr algn="ctr"/>
                       <a:r>
-                        <a:rPr sz="1100" b="1">
+                        <a:rPr sz="1050" b="1">
                           <a:solidFill>
                             <a:srgbClr val="A6001A"/>
                           </a:solidFill>
@@ -17977,7 +18440,7 @@
                     <a:p>
                       <a:pPr algn="ctr"/>
                       <a:r>
-                        <a:rPr sz="1100" b="0">
+                        <a:rPr sz="1050" b="0">
                           <a:solidFill>
                             <a:srgbClr val="333333"/>
                           </a:solidFill>
@@ -18000,7 +18463,7 @@
                     <a:p>
                       <a:pPr algn="ctr"/>
                       <a:r>
-                        <a:rPr sz="1100" b="0">
+                        <a:rPr sz="1050" b="0">
                           <a:solidFill>
                             <a:srgbClr val="333333"/>
                           </a:solidFill>
@@ -18013,6 +18476,52 @@
                   <a:tcPr>
                     <a:solidFill>
                       <a:srgbClr val="FAFAFA"/>
+                    </a:solidFill>
+                  </a:tcPr>
+                </a:tc>
+                <a:tc>
+                  <a:txBody>
+                    <a:bodyPr/>
+                    <a:lstStyle/>
+                    <a:p>
+                      <a:pPr algn="ctr"/>
+                      <a:r>
+                        <a:rPr sz="1050" b="1">
+                          <a:solidFill>
+                            <a:srgbClr val="A6001A"/>
+                          </a:solidFill>
+                          <a:latin typeface="Calibri"/>
+                        </a:rPr>
+                        <a:t>51</a:t>
+                      </a:r>
+                    </a:p>
+                  </a:txBody>
+                  <a:tcPr>
+                    <a:solidFill>
+                      <a:srgbClr val="FDF2F3"/>
+                    </a:solidFill>
+                  </a:tcPr>
+                </a:tc>
+                <a:tc>
+                  <a:txBody>
+                    <a:bodyPr/>
+                    <a:lstStyle/>
+                    <a:p>
+                      <a:pPr algn="ctr"/>
+                      <a:r>
+                        <a:rPr sz="1050" b="1">
+                          <a:solidFill>
+                            <a:srgbClr val="A6001A"/>
+                          </a:solidFill>
+                          <a:latin typeface="Calibri"/>
+                        </a:rPr>
+                        <a:t>54</a:t>
+                      </a:r>
+                    </a:p>
+                  </a:txBody>
+                  <a:tcPr>
+                    <a:solidFill>
+                      <a:srgbClr val="FDF2F3"/>
                     </a:solidFill>
                   </a:tcPr>
                 </a:tc>
@@ -18025,7 +18534,7 @@
                     <a:p>
                       <a:pPr algn="l"/>
                       <a:r>
-                        <a:rPr sz="1100" b="0">
+                        <a:rPr sz="1050" b="0">
                           <a:solidFill>
                             <a:srgbClr val="333333"/>
                           </a:solidFill>
@@ -18048,7 +18557,7 @@
                     <a:p>
                       <a:pPr algn="ctr"/>
                       <a:r>
-                        <a:rPr sz="1100" b="0">
+                        <a:rPr sz="1050" b="0">
                           <a:solidFill>
                             <a:srgbClr val="333333"/>
                           </a:solidFill>
@@ -18071,7 +18580,7 @@
                     <a:p>
                       <a:pPr algn="ctr"/>
                       <a:r>
-                        <a:rPr sz="1100" b="0">
+                        <a:rPr sz="1050" b="0">
                           <a:solidFill>
                             <a:srgbClr val="333333"/>
                           </a:solidFill>
@@ -18094,7 +18603,7 @@
                     <a:p>
                       <a:pPr algn="ctr"/>
                       <a:r>
-                        <a:rPr sz="1100" b="0">
+                        <a:rPr sz="1050" b="0">
                           <a:solidFill>
                             <a:srgbClr val="333333"/>
                           </a:solidFill>
@@ -18117,7 +18626,7 @@
                     <a:p>
                       <a:pPr algn="ctr"/>
                       <a:r>
-                        <a:rPr sz="1100" b="0">
+                        <a:rPr sz="1050" b="0">
                           <a:solidFill>
                             <a:srgbClr val="333333"/>
                           </a:solidFill>
@@ -18140,7 +18649,7 @@
                     <a:p>
                       <a:pPr algn="ctr"/>
                       <a:r>
-                        <a:rPr sz="1100" b="1">
+                        <a:rPr sz="1050" b="1">
                           <a:solidFill>
                             <a:srgbClr val="A6001A"/>
                           </a:solidFill>
@@ -18163,7 +18672,7 @@
                     <a:p>
                       <a:pPr algn="ctr"/>
                       <a:r>
-                        <a:rPr sz="1100" b="1">
+                        <a:rPr sz="1050" b="1">
                           <a:solidFill>
                             <a:srgbClr val="A6001A"/>
                           </a:solidFill>
@@ -18186,7 +18695,7 @@
                     <a:p>
                       <a:pPr algn="ctr"/>
                       <a:r>
-                        <a:rPr sz="1100" b="0">
+                        <a:rPr sz="1050" b="0">
                           <a:solidFill>
                             <a:srgbClr val="333333"/>
                           </a:solidFill>
@@ -18209,7 +18718,7 @@
                     <a:p>
                       <a:pPr algn="ctr"/>
                       <a:r>
-                        <a:rPr sz="1100" b="0">
+                        <a:rPr sz="1050" b="0">
                           <a:solidFill>
                             <a:srgbClr val="333333"/>
                           </a:solidFill>
@@ -18222,6 +18731,52 @@
                   <a:tcPr>
                     <a:solidFill>
                       <a:srgbClr val="FFFFFF"/>
+                    </a:solidFill>
+                  </a:tcPr>
+                </a:tc>
+                <a:tc>
+                  <a:txBody>
+                    <a:bodyPr/>
+                    <a:lstStyle/>
+                    <a:p>
+                      <a:pPr algn="ctr"/>
+                      <a:r>
+                        <a:rPr sz="1050" b="1">
+                          <a:solidFill>
+                            <a:srgbClr val="A6001A"/>
+                          </a:solidFill>
+                          <a:latin typeface="Calibri"/>
+                        </a:rPr>
+                        <a:t>42</a:t>
+                      </a:r>
+                    </a:p>
+                  </a:txBody>
+                  <a:tcPr>
+                    <a:solidFill>
+                      <a:srgbClr val="FDF2F3"/>
+                    </a:solidFill>
+                  </a:tcPr>
+                </a:tc>
+                <a:tc>
+                  <a:txBody>
+                    <a:bodyPr/>
+                    <a:lstStyle/>
+                    <a:p>
+                      <a:pPr algn="ctr"/>
+                      <a:r>
+                        <a:rPr sz="1050" b="1">
+                          <a:solidFill>
+                            <a:srgbClr val="A6001A"/>
+                          </a:solidFill>
+                          <a:latin typeface="Calibri"/>
+                        </a:rPr>
+                        <a:t>45</a:t>
+                      </a:r>
+                    </a:p>
+                  </a:txBody>
+                  <a:tcPr>
+                    <a:solidFill>
+                      <a:srgbClr val="FDF2F3"/>
                     </a:solidFill>
                   </a:tcPr>
                 </a:tc>
@@ -18234,7 +18789,7 @@
                     <a:p>
                       <a:pPr algn="l"/>
                       <a:r>
-                        <a:rPr sz="1100" b="0">
+                        <a:rPr sz="1050" b="0">
                           <a:solidFill>
                             <a:srgbClr val="333333"/>
                           </a:solidFill>
@@ -18257,7 +18812,7 @@
                     <a:p>
                       <a:pPr algn="ctr"/>
                       <a:r>
-                        <a:rPr sz="1100" b="0">
+                        <a:rPr sz="1050" b="0">
                           <a:solidFill>
                             <a:srgbClr val="333333"/>
                           </a:solidFill>
@@ -18280,7 +18835,7 @@
                     <a:p>
                       <a:pPr algn="ctr"/>
                       <a:r>
-                        <a:rPr sz="1100" b="0">
+                        <a:rPr sz="1050" b="0">
                           <a:solidFill>
                             <a:srgbClr val="333333"/>
                           </a:solidFill>
@@ -18303,7 +18858,7 @@
                     <a:p>
                       <a:pPr algn="ctr"/>
                       <a:r>
-                        <a:rPr sz="1100" b="0">
+                        <a:rPr sz="1050" b="0">
                           <a:solidFill>
                             <a:srgbClr val="333333"/>
                           </a:solidFill>
@@ -18326,7 +18881,7 @@
                     <a:p>
                       <a:pPr algn="ctr"/>
                       <a:r>
-                        <a:rPr sz="1100" b="0">
+                        <a:rPr sz="1050" b="0">
                           <a:solidFill>
                             <a:srgbClr val="333333"/>
                           </a:solidFill>
@@ -18349,7 +18904,7 @@
                     <a:p>
                       <a:pPr algn="ctr"/>
                       <a:r>
-                        <a:rPr sz="1100" b="1">
+                        <a:rPr sz="1050" b="1">
                           <a:solidFill>
                             <a:srgbClr val="A6001A"/>
                           </a:solidFill>
@@ -18372,7 +18927,7 @@
                     <a:p>
                       <a:pPr algn="ctr"/>
                       <a:r>
-                        <a:rPr sz="1100" b="1">
+                        <a:rPr sz="1050" b="1">
                           <a:solidFill>
                             <a:srgbClr val="A6001A"/>
                           </a:solidFill>
@@ -18395,7 +18950,7 @@
                     <a:p>
                       <a:pPr algn="ctr"/>
                       <a:r>
-                        <a:rPr sz="1100" b="0">
+                        <a:rPr sz="1050" b="0">
                           <a:solidFill>
                             <a:srgbClr val="333333"/>
                           </a:solidFill>
@@ -18418,7 +18973,7 @@
                     <a:p>
                       <a:pPr algn="ctr"/>
                       <a:r>
-                        <a:rPr sz="1100" b="0">
+                        <a:rPr sz="1050" b="0">
                           <a:solidFill>
                             <a:srgbClr val="333333"/>
                           </a:solidFill>
@@ -18431,6 +18986,52 @@
                   <a:tcPr>
                     <a:solidFill>
                       <a:srgbClr val="FAFAFA"/>
+                    </a:solidFill>
+                  </a:tcPr>
+                </a:tc>
+                <a:tc>
+                  <a:txBody>
+                    <a:bodyPr/>
+                    <a:lstStyle/>
+                    <a:p>
+                      <a:pPr algn="ctr"/>
+                      <a:r>
+                        <a:rPr sz="1050" b="1">
+                          <a:solidFill>
+                            <a:srgbClr val="A6001A"/>
+                          </a:solidFill>
+                          <a:latin typeface="Calibri"/>
+                        </a:rPr>
+                        <a:t>40</a:t>
+                      </a:r>
+                    </a:p>
+                  </a:txBody>
+                  <a:tcPr>
+                    <a:solidFill>
+                      <a:srgbClr val="FDF2F3"/>
+                    </a:solidFill>
+                  </a:tcPr>
+                </a:tc>
+                <a:tc>
+                  <a:txBody>
+                    <a:bodyPr/>
+                    <a:lstStyle/>
+                    <a:p>
+                      <a:pPr algn="ctr"/>
+                      <a:r>
+                        <a:rPr sz="1050" b="1">
+                          <a:solidFill>
+                            <a:srgbClr val="A6001A"/>
+                          </a:solidFill>
+                          <a:latin typeface="Calibri"/>
+                        </a:rPr>
+                        <a:t>35</a:t>
+                      </a:r>
+                    </a:p>
+                  </a:txBody>
+                  <a:tcPr>
+                    <a:solidFill>
+                      <a:srgbClr val="FDF2F3"/>
                     </a:solidFill>
                   </a:tcPr>
                 </a:tc>
@@ -18443,7 +19044,7 @@
                     <a:p>
                       <a:pPr algn="l"/>
                       <a:r>
-                        <a:rPr sz="1100" b="0">
+                        <a:rPr sz="1050" b="0">
                           <a:solidFill>
                             <a:srgbClr val="333333"/>
                           </a:solidFill>
@@ -18466,7 +19067,7 @@
                     <a:p>
                       <a:pPr algn="ctr"/>
                       <a:r>
-                        <a:rPr sz="1100" b="0">
+                        <a:rPr sz="1050" b="0">
                           <a:solidFill>
                             <a:srgbClr val="333333"/>
                           </a:solidFill>
@@ -18489,7 +19090,7 @@
                     <a:p>
                       <a:pPr algn="ctr"/>
                       <a:r>
-                        <a:rPr sz="1100" b="0">
+                        <a:rPr sz="1050" b="0">
                           <a:solidFill>
                             <a:srgbClr val="333333"/>
                           </a:solidFill>
@@ -18512,7 +19113,7 @@
                     <a:p>
                       <a:pPr algn="ctr"/>
                       <a:r>
-                        <a:rPr sz="1100" b="0">
+                        <a:rPr sz="1050" b="0">
                           <a:solidFill>
                             <a:srgbClr val="333333"/>
                           </a:solidFill>
@@ -18535,7 +19136,7 @@
                     <a:p>
                       <a:pPr algn="ctr"/>
                       <a:r>
-                        <a:rPr sz="1100" b="0">
+                        <a:rPr sz="1050" b="0">
                           <a:solidFill>
                             <a:srgbClr val="333333"/>
                           </a:solidFill>
@@ -18558,7 +19159,7 @@
                     <a:p>
                       <a:pPr algn="ctr"/>
                       <a:r>
-                        <a:rPr sz="1100" b="1">
+                        <a:rPr sz="1050" b="1">
                           <a:solidFill>
                             <a:srgbClr val="A6001A"/>
                           </a:solidFill>
@@ -18581,7 +19182,7 @@
                     <a:p>
                       <a:pPr algn="ctr"/>
                       <a:r>
-                        <a:rPr sz="1100" b="1">
+                        <a:rPr sz="1050" b="1">
                           <a:solidFill>
                             <a:srgbClr val="A6001A"/>
                           </a:solidFill>
@@ -18604,7 +19205,7 @@
                     <a:p>
                       <a:pPr algn="ctr"/>
                       <a:r>
-                        <a:rPr sz="1100" b="0">
+                        <a:rPr sz="1050" b="0">
                           <a:solidFill>
                             <a:srgbClr val="333333"/>
                           </a:solidFill>
@@ -18627,7 +19228,7 @@
                     <a:p>
                       <a:pPr algn="ctr"/>
                       <a:r>
-                        <a:rPr sz="1100" b="0">
+                        <a:rPr sz="1050" b="0">
                           <a:solidFill>
                             <a:srgbClr val="333333"/>
                           </a:solidFill>
@@ -18640,6 +19241,52 @@
                   <a:tcPr>
                     <a:solidFill>
                       <a:srgbClr val="FFFFFF"/>
+                    </a:solidFill>
+                  </a:tcPr>
+                </a:tc>
+                <a:tc>
+                  <a:txBody>
+                    <a:bodyPr/>
+                    <a:lstStyle/>
+                    <a:p>
+                      <a:pPr algn="ctr"/>
+                      <a:r>
+                        <a:rPr sz="1050" b="1">
+                          <a:solidFill>
+                            <a:srgbClr val="A6001A"/>
+                          </a:solidFill>
+                          <a:latin typeface="Calibri"/>
+                        </a:rPr>
+                        <a:t>17</a:t>
+                      </a:r>
+                    </a:p>
+                  </a:txBody>
+                  <a:tcPr>
+                    <a:solidFill>
+                      <a:srgbClr val="FDF2F3"/>
+                    </a:solidFill>
+                  </a:tcPr>
+                </a:tc>
+                <a:tc>
+                  <a:txBody>
+                    <a:bodyPr/>
+                    <a:lstStyle/>
+                    <a:p>
+                      <a:pPr algn="ctr"/>
+                      <a:r>
+                        <a:rPr sz="1050" b="1">
+                          <a:solidFill>
+                            <a:srgbClr val="A6001A"/>
+                          </a:solidFill>
+                          <a:latin typeface="Calibri"/>
+                        </a:rPr>
+                        <a:t>16</a:t>
+                      </a:r>
+                    </a:p>
+                  </a:txBody>
+                  <a:tcPr>
+                    <a:solidFill>
+                      <a:srgbClr val="FDF2F3"/>
                     </a:solidFill>
                   </a:tcPr>
                 </a:tc>
@@ -18652,7 +19299,7 @@
                     <a:p>
                       <a:pPr algn="l"/>
                       <a:r>
-                        <a:rPr sz="1100" b="1">
+                        <a:rPr sz="1050" b="1">
                           <a:solidFill>
                             <a:srgbClr val="333333"/>
                           </a:solidFill>
@@ -18675,7 +19322,7 @@
                     <a:p>
                       <a:pPr algn="ctr"/>
                       <a:r>
-                        <a:rPr sz="1100" b="1">
+                        <a:rPr sz="1050" b="1">
                           <a:solidFill>
                             <a:srgbClr val="333333"/>
                           </a:solidFill>
@@ -18698,7 +19345,7 @@
                     <a:p>
                       <a:pPr algn="ctr"/>
                       <a:r>
-                        <a:rPr sz="1100" b="1">
+                        <a:rPr sz="1050" b="1">
                           <a:solidFill>
                             <a:srgbClr val="333333"/>
                           </a:solidFill>
@@ -18721,7 +19368,7 @@
                     <a:p>
                       <a:pPr algn="ctr"/>
                       <a:r>
-                        <a:rPr sz="1100" b="1">
+                        <a:rPr sz="1050" b="1">
                           <a:solidFill>
                             <a:srgbClr val="333333"/>
                           </a:solidFill>
@@ -18744,7 +19391,7 @@
                     <a:p>
                       <a:pPr algn="ctr"/>
                       <a:r>
-                        <a:rPr sz="1100" b="1">
+                        <a:rPr sz="1050" b="1">
                           <a:solidFill>
                             <a:srgbClr val="333333"/>
                           </a:solidFill>
@@ -18767,7 +19414,7 @@
                     <a:p>
                       <a:pPr algn="ctr"/>
                       <a:r>
-                        <a:rPr sz="1100" b="1">
+                        <a:rPr sz="1050" b="1">
                           <a:solidFill>
                             <a:srgbClr val="A6001A"/>
                           </a:solidFill>
@@ -18790,7 +19437,7 @@
                     <a:p>
                       <a:pPr algn="ctr"/>
                       <a:r>
-                        <a:rPr sz="1100" b="1">
+                        <a:rPr sz="1050" b="1">
                           <a:solidFill>
                             <a:srgbClr val="A6001A"/>
                           </a:solidFill>
@@ -18813,7 +19460,7 @@
                     <a:p>
                       <a:pPr algn="ctr"/>
                       <a:r>
-                        <a:rPr sz="1100" b="1">
+                        <a:rPr sz="1050" b="1">
                           <a:solidFill>
                             <a:srgbClr val="333333"/>
                           </a:solidFill>
@@ -18836,13 +19483,59 @@
                     <a:p>
                       <a:pPr algn="ctr"/>
                       <a:r>
-                        <a:rPr sz="1100" b="1">
+                        <a:rPr sz="1050" b="1">
                           <a:solidFill>
                             <a:srgbClr val="333333"/>
                           </a:solidFill>
                           <a:latin typeface="Calibri"/>
                         </a:rPr>
                         <a:t>62</a:t>
+                      </a:r>
+                    </a:p>
+                  </a:txBody>
+                  <a:tcPr>
+                    <a:solidFill>
+                      <a:srgbClr val="F2F2F2"/>
+                    </a:solidFill>
+                  </a:tcPr>
+                </a:tc>
+                <a:tc>
+                  <a:txBody>
+                    <a:bodyPr/>
+                    <a:lstStyle/>
+                    <a:p>
+                      <a:pPr algn="ctr"/>
+                      <a:r>
+                        <a:rPr sz="1050" b="1">
+                          <a:solidFill>
+                            <a:srgbClr val="A6001A"/>
+                          </a:solidFill>
+                          <a:latin typeface="Calibri"/>
+                        </a:rPr>
+                        <a:t>200</a:t>
+                      </a:r>
+                    </a:p>
+                  </a:txBody>
+                  <a:tcPr>
+                    <a:solidFill>
+                      <a:srgbClr val="F2F2F2"/>
+                    </a:solidFill>
+                  </a:tcPr>
+                </a:tc>
+                <a:tc>
+                  <a:txBody>
+                    <a:bodyPr/>
+                    <a:lstStyle/>
+                    <a:p>
+                      <a:pPr algn="ctr"/>
+                      <a:r>
+                        <a:rPr sz="1050" b="1">
+                          <a:solidFill>
+                            <a:srgbClr val="A6001A"/>
+                          </a:solidFill>
+                          <a:latin typeface="Calibri"/>
+                        </a:rPr>
+                        <a:t>211</a:t>
                       </a:r>
                     </a:p>
                   </a:txBody>

--- a/briefings/sezon-kadro-20260902/sunum-kadro-sezon2026.pptx
+++ b/briefings/sezon-kadro-20260902/sunum-kadro-sezon2026.pptx
@@ -24,6 +24,7 @@
     <p:sldId id="269" r:id="rId20"/>
     <p:sldId id="270" r:id="rId21"/>
     <p:sldId id="271" r:id="rId22"/>
+    <p:sldId id="272" r:id="rId23"/>
   </p:sldIdLst>
   <p:sldSz cx="12192000" cy="6858000"/>
   <p:notesSz cx="6858000" cy="9144000"/>
@@ -279,7 +280,9 @@
       </c:catAx>
       <c:valAx>
         <c:axId val="-2113994440"/>
-        <c:scaling/>
+        <c:scaling>
+          <c:min val="0.0"/>
+        </c:scaling>
         <c:delete val="0"/>
         <c:axPos val="l"/>
         <c:majorGridlines/>
@@ -369,7 +372,7 @@
                   <c:v>574.7176999999999</c:v>
                 </c:pt>
                 <c:pt idx="1">
-                  <c:v>71.8374291199963</c:v>
+                  <c:v>71.83742911999349</c:v>
                 </c:pt>
                 <c:pt idx="2">
                   <c:v>143</c:v>
@@ -424,7 +427,7 @@
                   <c:v>775.19155</c:v>
                 </c:pt>
                 <c:pt idx="1">
-                  <c:v>122.60138084999535</c:v>
+                  <c:v>122.60138084999305</c:v>
                 </c:pt>
                 <c:pt idx="2">
                   <c:v>160</c:v>
@@ -780,7 +783,7 @@
                   <c:v>34404.7405</c:v>
                 </c:pt>
                 <c:pt idx="1">
-                  <c:v>25239.927802197803</c:v>
+                  <c:v>25239.9278021978</c:v>
                 </c:pt>
                 <c:pt idx="2">
                   <c:v>28670.6775</c:v>
@@ -1386,13 +1389,13 @@
                 <c:formatCode>General</c:formatCode>
                 <c:ptCount val="3"/>
                 <c:pt idx="0">
-                  <c:v>57.558623758165474</c:v>
+                  <c:v>57.55862375816203</c:v>
                 </c:pt>
                 <c:pt idx="1">
-                  <c:v>96.12850541159601</c:v>
+                  <c:v>96.12850541161228</c:v>
                 </c:pt>
                 <c:pt idx="2">
-                  <c:v>62.26752661004211</c:v>
+                  <c:v>62.26752661004513</c:v>
                 </c:pt>
               </c:numCache>
             </c:numRef>
@@ -6046,7 +6049,7 @@
                           </a:solidFill>
                           <a:latin typeface="Calibri"/>
                         </a:rPr>
-                        <a:t>Şura</a:t>
+                        <a:t>Akademi</a:t>
                       </a:r>
                     </a:p>
                   </a:txBody>
@@ -6069,99 +6072,99 @@
                           </a:solidFill>
                           <a:latin typeface="Calibri"/>
                         </a:rPr>
+                        <a:t>+1</a:t>
+                      </a:r>
+                    </a:p>
+                  </a:txBody>
+                  <a:tcPr>
+                    <a:solidFill>
+                      <a:srgbClr val="FFFFFF"/>
+                    </a:solidFill>
+                  </a:tcPr>
+                </a:tc>
+                <a:tc>
+                  <a:txBody>
+                    <a:bodyPr/>
+                    <a:lstStyle/>
+                    <a:p>
+                      <a:pPr algn="ctr"/>
+                      <a:r>
+                        <a:rPr sz="1050" b="0">
+                          <a:solidFill>
+                            <a:srgbClr val="333333"/>
+                          </a:solidFill>
+                          <a:latin typeface="Calibri"/>
+                        </a:rPr>
+                        <a:t>0</a:t>
+                      </a:r>
+                    </a:p>
+                  </a:txBody>
+                  <a:tcPr>
+                    <a:solidFill>
+                      <a:srgbClr val="FFFFFF"/>
+                    </a:solidFill>
+                  </a:tcPr>
+                </a:tc>
+                <a:tc>
+                  <a:txBody>
+                    <a:bodyPr/>
+                    <a:lstStyle/>
+                    <a:p>
+                      <a:pPr algn="ctr"/>
+                      <a:r>
+                        <a:rPr sz="1050" b="0">
+                          <a:solidFill>
+                            <a:srgbClr val="333333"/>
+                          </a:solidFill>
+                          <a:latin typeface="Calibri"/>
+                        </a:rPr>
+                        <a:t>+1</a:t>
+                      </a:r>
+                    </a:p>
+                  </a:txBody>
+                  <a:tcPr>
+                    <a:solidFill>
+                      <a:srgbClr val="FFFFFF"/>
+                    </a:solidFill>
+                  </a:tcPr>
+                </a:tc>
+                <a:tc>
+                  <a:txBody>
+                    <a:bodyPr/>
+                    <a:lstStyle/>
+                    <a:p>
+                      <a:pPr algn="ctr"/>
+                      <a:r>
+                        <a:rPr sz="1050" b="0">
+                          <a:solidFill>
+                            <a:srgbClr val="333333"/>
+                          </a:solidFill>
+                          <a:latin typeface="Calibri"/>
+                        </a:rPr>
+                        <a:t>0</a:t>
+                      </a:r>
+                    </a:p>
+                  </a:txBody>
+                  <a:tcPr>
+                    <a:solidFill>
+                      <a:srgbClr val="FFFFFF"/>
+                    </a:solidFill>
+                  </a:tcPr>
+                </a:tc>
+                <a:tc>
+                  <a:txBody>
+                    <a:bodyPr/>
+                    <a:lstStyle/>
+                    <a:p>
+                      <a:pPr algn="ctr"/>
+                      <a:r>
+                        <a:rPr sz="1050" b="0">
+                          <a:solidFill>
+                            <a:srgbClr val="333333"/>
+                          </a:solidFill>
+                          <a:latin typeface="Calibri"/>
+                        </a:rPr>
                         <a:t>—</a:t>
-                      </a:r>
-                    </a:p>
-                  </a:txBody>
-                  <a:tcPr>
-                    <a:solidFill>
-                      <a:srgbClr val="FFFFFF"/>
-                    </a:solidFill>
-                  </a:tcPr>
-                </a:tc>
-                <a:tc>
-                  <a:txBody>
-                    <a:bodyPr/>
-                    <a:lstStyle/>
-                    <a:p>
-                      <a:pPr algn="ctr"/>
-                      <a:r>
-                        <a:rPr sz="1050" b="0">
-                          <a:solidFill>
-                            <a:srgbClr val="333333"/>
-                          </a:solidFill>
-                          <a:latin typeface="Calibri"/>
-                        </a:rPr>
-                        <a:t>—</a:t>
-                      </a:r>
-                    </a:p>
-                  </a:txBody>
-                  <a:tcPr>
-                    <a:solidFill>
-                      <a:srgbClr val="FFFFFF"/>
-                    </a:solidFill>
-                  </a:tcPr>
-                </a:tc>
-                <a:tc>
-                  <a:txBody>
-                    <a:bodyPr/>
-                    <a:lstStyle/>
-                    <a:p>
-                      <a:pPr algn="ctr"/>
-                      <a:r>
-                        <a:rPr sz="1050" b="0">
-                          <a:solidFill>
-                            <a:srgbClr val="333333"/>
-                          </a:solidFill>
-                          <a:latin typeface="Calibri"/>
-                        </a:rPr>
-                        <a:t>—</a:t>
-                      </a:r>
-                    </a:p>
-                  </a:txBody>
-                  <a:tcPr>
-                    <a:solidFill>
-                      <a:srgbClr val="FFFFFF"/>
-                    </a:solidFill>
-                  </a:tcPr>
-                </a:tc>
-                <a:tc>
-                  <a:txBody>
-                    <a:bodyPr/>
-                    <a:lstStyle/>
-                    <a:p>
-                      <a:pPr algn="ctr"/>
-                      <a:r>
-                        <a:rPr sz="1050" b="0">
-                          <a:solidFill>
-                            <a:srgbClr val="333333"/>
-                          </a:solidFill>
-                          <a:latin typeface="Calibri"/>
-                        </a:rPr>
-                        <a:t>—</a:t>
-                      </a:r>
-                    </a:p>
-                  </a:txBody>
-                  <a:tcPr>
-                    <a:solidFill>
-                      <a:srgbClr val="FFFFFF"/>
-                    </a:solidFill>
-                  </a:tcPr>
-                </a:tc>
-                <a:tc>
-                  <a:txBody>
-                    <a:bodyPr/>
-                    <a:lstStyle/>
-                    <a:p>
-                      <a:pPr algn="ctr"/>
-                      <a:r>
-                        <a:rPr sz="1050" b="0">
-                          <a:solidFill>
-                            <a:srgbClr val="333333"/>
-                          </a:solidFill>
-                          <a:latin typeface="Calibri"/>
-                        </a:rPr>
-                        <a:t>+2</a:t>
                       </a:r>
                     </a:p>
                   </a:txBody>
@@ -6209,7 +6212,7 @@
                           </a:solidFill>
                           <a:latin typeface="Calibri"/>
                         </a:rPr>
-                        <a:t>Akademi</a:t>
+                        <a:t>Şura</a:t>
                       </a:r>
                     </a:p>
                   </a:txBody>
@@ -6232,7 +6235,7 @@
                           </a:solidFill>
                           <a:latin typeface="Calibri"/>
                         </a:rPr>
-                        <a:t>+1</a:t>
+                        <a:t>—</a:t>
                       </a:r>
                     </a:p>
                   </a:txBody>
@@ -6255,7 +6258,7 @@
                           </a:solidFill>
                           <a:latin typeface="Calibri"/>
                         </a:rPr>
-                        <a:t>0</a:t>
+                        <a:t>—</a:t>
                       </a:r>
                     </a:p>
                   </a:txBody>
@@ -6278,7 +6281,7 @@
                           </a:solidFill>
                           <a:latin typeface="Calibri"/>
                         </a:rPr>
-                        <a:t>+1</a:t>
+                        <a:t>—</a:t>
                       </a:r>
                     </a:p>
                   </a:txBody>
@@ -6301,7 +6304,7 @@
                           </a:solidFill>
                           <a:latin typeface="Calibri"/>
                         </a:rPr>
-                        <a:t>0</a:t>
+                        <a:t>—</a:t>
                       </a:r>
                     </a:p>
                   </a:txBody>
@@ -6324,7 +6327,7 @@
                           </a:solidFill>
                           <a:latin typeface="Calibri"/>
                         </a:rPr>
-                        <a:t>—</a:t>
+                        <a:t>+2</a:t>
                       </a:r>
                     </a:p>
                   </a:txBody>
@@ -7024,7 +7027,7 @@
                           </a:solidFill>
                           <a:latin typeface="Calibri"/>
                         </a:rPr>
-                        <a:t>İdari İşler</a:t>
+                        <a:t>Mağaza</a:t>
                       </a:r>
                     </a:p>
                   </a:txBody>
@@ -7047,7 +7050,7 @@
                           </a:solidFill>
                           <a:latin typeface="Calibri"/>
                         </a:rPr>
-                        <a:t>+1</a:t>
+                        <a:t>0</a:t>
                       </a:r>
                     </a:p>
                   </a:txBody>
@@ -7070,7 +7073,7 @@
                           </a:solidFill>
                           <a:latin typeface="Calibri"/>
                         </a:rPr>
-                        <a:t>-1</a:t>
+                        <a:t>0</a:t>
                       </a:r>
                     </a:p>
                   </a:txBody>
@@ -7116,7 +7119,7 @@
                           </a:solidFill>
                           <a:latin typeface="Calibri"/>
                         </a:rPr>
-                        <a:t>—</a:t>
+                        <a:t>0</a:t>
                       </a:r>
                     </a:p>
                   </a:txBody>
@@ -7187,7 +7190,7 @@
                           </a:solidFill>
                           <a:latin typeface="Calibri"/>
                         </a:rPr>
-                        <a:t>Mal Kabul</a:t>
+                        <a:t>İdari İşler</a:t>
                       </a:r>
                     </a:p>
                   </a:txBody>
@@ -7233,6 +7236,29 @@
                           </a:solidFill>
                           <a:latin typeface="Calibri"/>
                         </a:rPr>
+                        <a:t>-1</a:t>
+                      </a:r>
+                    </a:p>
+                  </a:txBody>
+                  <a:tcPr>
+                    <a:solidFill>
+                      <a:srgbClr val="F2F2F2"/>
+                    </a:solidFill>
+                  </a:tcPr>
+                </a:tc>
+                <a:tc>
+                  <a:txBody>
+                    <a:bodyPr/>
+                    <a:lstStyle/>
+                    <a:p>
+                      <a:pPr algn="ctr"/>
+                      <a:r>
+                        <a:rPr sz="1050" b="0">
+                          <a:solidFill>
+                            <a:srgbClr val="333333"/>
+                          </a:solidFill>
+                          <a:latin typeface="Calibri"/>
+                        </a:rPr>
                         <a:t>0</a:t>
                       </a:r>
                     </a:p>
@@ -7256,30 +7282,7 @@
                           </a:solidFill>
                           <a:latin typeface="Calibri"/>
                         </a:rPr>
-                        <a:t>-1</a:t>
-                      </a:r>
-                    </a:p>
-                  </a:txBody>
-                  <a:tcPr>
-                    <a:solidFill>
-                      <a:srgbClr val="F2F2F2"/>
-                    </a:solidFill>
-                  </a:tcPr>
-                </a:tc>
-                <a:tc>
-                  <a:txBody>
-                    <a:bodyPr/>
-                    <a:lstStyle/>
-                    <a:p>
-                      <a:pPr algn="ctr"/>
-                      <a:r>
-                        <a:rPr sz="1050" b="0">
-                          <a:solidFill>
-                            <a:srgbClr val="333333"/>
-                          </a:solidFill>
-                          <a:latin typeface="Calibri"/>
-                        </a:rPr>
-                        <a:t>0</a:t>
+                        <a:t>—</a:t>
                       </a:r>
                     </a:p>
                   </a:txBody>
@@ -7350,7 +7353,7 @@
                           </a:solidFill>
                           <a:latin typeface="Calibri"/>
                         </a:rPr>
-                        <a:t>Mağaza</a:t>
+                        <a:t>Mal Kabul</a:t>
                       </a:r>
                     </a:p>
                   </a:txBody>
@@ -7373,6 +7376,29 @@
                           </a:solidFill>
                           <a:latin typeface="Calibri"/>
                         </a:rPr>
+                        <a:t>+1</a:t>
+                      </a:r>
+                    </a:p>
+                  </a:txBody>
+                  <a:tcPr>
+                    <a:solidFill>
+                      <a:srgbClr val="FFFFFF"/>
+                    </a:solidFill>
+                  </a:tcPr>
+                </a:tc>
+                <a:tc>
+                  <a:txBody>
+                    <a:bodyPr/>
+                    <a:lstStyle/>
+                    <a:p>
+                      <a:pPr algn="ctr"/>
+                      <a:r>
+                        <a:rPr sz="1050" b="0">
+                          <a:solidFill>
+                            <a:srgbClr val="333333"/>
+                          </a:solidFill>
+                          <a:latin typeface="Calibri"/>
+                        </a:rPr>
                         <a:t>0</a:t>
                       </a:r>
                     </a:p>
@@ -7396,30 +7422,7 @@
                           </a:solidFill>
                           <a:latin typeface="Calibri"/>
                         </a:rPr>
-                        <a:t>0</a:t>
-                      </a:r>
-                    </a:p>
-                  </a:txBody>
-                  <a:tcPr>
-                    <a:solidFill>
-                      <a:srgbClr val="FFFFFF"/>
-                    </a:solidFill>
-                  </a:tcPr>
-                </a:tc>
-                <a:tc>
-                  <a:txBody>
-                    <a:bodyPr/>
-                    <a:lstStyle/>
-                    <a:p>
-                      <a:pPr algn="ctr"/>
-                      <a:r>
-                        <a:rPr sz="1050" b="0">
-                          <a:solidFill>
-                            <a:srgbClr val="333333"/>
-                          </a:solidFill>
-                          <a:latin typeface="Calibri"/>
-                        </a:rPr>
-                        <a:t>0</a:t>
+                        <a:t>-1</a:t>
                       </a:r>
                     </a:p>
                   </a:txBody>
@@ -7513,7 +7516,7 @@
                           </a:solidFill>
                           <a:latin typeface="Calibri"/>
                         </a:rPr>
-                        <a:t>Çocuk</a:t>
+                        <a:t>Muhasebe</a:t>
                       </a:r>
                     </a:p>
                   </a:txBody>
@@ -7536,7 +7539,7 @@
                           </a:solidFill>
                           <a:latin typeface="Calibri"/>
                         </a:rPr>
-                        <a:t>0</a:t>
+                        <a:t>—</a:t>
                       </a:r>
                     </a:p>
                   </a:txBody>
@@ -7559,7 +7562,7 @@
                           </a:solidFill>
                           <a:latin typeface="Calibri"/>
                         </a:rPr>
-                        <a:t>0</a:t>
+                        <a:t>—</a:t>
                       </a:r>
                     </a:p>
                   </a:txBody>
@@ -7582,7 +7585,7 @@
                           </a:solidFill>
                           <a:latin typeface="Calibri"/>
                         </a:rPr>
-                        <a:t>+1</a:t>
+                        <a:t>—</a:t>
                       </a:r>
                     </a:p>
                   </a:txBody>
@@ -7605,7 +7608,7 @@
                           </a:solidFill>
                           <a:latin typeface="Calibri"/>
                         </a:rPr>
-                        <a:t>-2</a:t>
+                        <a:t>-1</a:t>
                       </a:r>
                     </a:p>
                   </a:txBody>
@@ -11534,7 +11537,7 @@
           <a:lstStyle/>
           <a:p>
             <a:r>
-              <a:t>Yöntem ve Açıklamalar</a:t>
+              <a:t>Sezonluk Alım Zamanlaması</a:t>
             </a:r>
           </a:p>
         </p:txBody>
@@ -11547,8 +11550,8 @@
         </p:nvSpPr>
         <p:spPr>
           <a:xfrm>
-            <a:off x="548640" y="1325880"/>
-            <a:ext cx="11018520" cy="987552"/>
+            <a:off x="548640" y="1371600"/>
+            <a:ext cx="3566160" cy="1828800"/>
           </a:xfrm>
           <a:prstGeom prst="rect">
             <a:avLst/>
@@ -11593,14 +11596,14 @@
         </p:nvSpPr>
         <p:spPr>
           <a:xfrm>
-            <a:off x="548640" y="1325880"/>
-            <a:ext cx="68580" cy="987552"/>
+            <a:off x="548640" y="1371600"/>
+            <a:ext cx="68580" cy="1828800"/>
           </a:xfrm>
           <a:prstGeom prst="rect">
             <a:avLst/>
           </a:prstGeom>
           <a:solidFill>
-            <a:srgbClr val="E30622"/>
+            <a:srgbClr val="9A9A9A"/>
           </a:solidFill>
           <a:ln>
             <a:noFill/>
@@ -11631,7 +11634,7 @@
       </p:sp>
       <p:pic>
         <p:nvPicPr>
-          <p:cNvPr id="5" name="Picture 4" descr="circle-check.png"/>
+          <p:cNvPr id="5" name="Picture 4" descr="workflow.png"/>
           <p:cNvPicPr>
             <a:picLocks noChangeAspect="1"/>
           </p:cNvPicPr>
@@ -11645,7 +11648,7 @@
         </p:blipFill>
         <p:spPr>
           <a:xfrm>
-            <a:off x="777240" y="1481328"/>
+            <a:off x="3639312" y="1536192"/>
             <a:ext cx="274320" cy="274320"/>
           </a:xfrm>
           <a:prstGeom prst="rect">
@@ -11661,8 +11664,47 @@
         </p:nvSpPr>
         <p:spPr>
           <a:xfrm>
-            <a:off x="1170432" y="1417320"/>
-            <a:ext cx="10058400" cy="329184"/>
+            <a:off x="804672" y="1536192"/>
+            <a:ext cx="2697480" cy="384048"/>
+          </a:xfrm>
+          <a:prstGeom prst="rect">
+            <a:avLst/>
+          </a:prstGeom>
+          <a:noFill/>
+        </p:spPr>
+        <p:txBody>
+          <a:bodyPr wrap="square" anchor="t">
+            <a:spAutoFit/>
+          </a:bodyPr>
+          <a:lstStyle/>
+          <a:p>
+            <a:pPr algn="l">
+              <a:lnSpc>
+                <a:spcPct val="105000"/>
+              </a:lnSpc>
+            </a:pPr>
+            <a:r>
+              <a:rPr sz="900" b="1">
+                <a:solidFill>
+                  <a:srgbClr val="6E6E6E"/>
+                </a:solidFill>
+                <a:latin typeface="Calibri"/>
+              </a:rPr>
+              <a:t>ORTALAMA ALIM GÜNÜ</a:t>
+            </a:r>
+          </a:p>
+        </p:txBody>
+      </p:sp>
+      <p:sp>
+        <p:nvSpPr>
+          <p:cNvPr id="7" name="TextBox 6"/>
+          <p:cNvSpPr txBox="1"/>
+          <p:nvPr/>
+        </p:nvSpPr>
+        <p:spPr>
+          <a:xfrm>
+            <a:off x="804672" y="1975104"/>
+            <a:ext cx="3154679" cy="658368"/>
           </a:xfrm>
           <a:prstGeom prst="rect">
             <a:avLst/>
@@ -11681,27 +11723,27 @@
               </a:lnSpc>
             </a:pPr>
             <a:r>
-              <a:rPr sz="1300" b="1">
+              <a:rPr sz="2200" b="1">
                 <a:solidFill>
-                  <a:srgbClr val="A6001A"/>
+                  <a:srgbClr val="9A9A9A"/>
                 </a:solidFill>
                 <a:latin typeface="Calibri"/>
               </a:rPr>
-              <a:t>Büyüme kurumsal kanaldan mı geldi?</a:t>
+              <a:t>2,5 gün geç</a:t>
             </a:r>
           </a:p>
         </p:txBody>
       </p:sp>
       <p:sp>
         <p:nvSpPr>
-          <p:cNvPr id="7" name="TextBox 6"/>
+          <p:cNvPr id="8" name="TextBox 7"/>
           <p:cNvSpPr txBox="1"/>
           <p:nvPr/>
         </p:nvSpPr>
         <p:spPr>
           <a:xfrm>
-            <a:off x="1170432" y="1737360"/>
-            <a:ext cx="10058400" cy="530352"/>
+            <a:off x="804672" y="2688336"/>
+            <a:ext cx="3154679" cy="457200"/>
           </a:xfrm>
           <a:prstGeom prst="rect">
             <a:avLst/>
@@ -11716,31 +11758,31 @@
           <a:p>
             <a:pPr algn="l">
               <a:lnSpc>
-                <a:spcPct val="108000"/>
+                <a:spcPct val="105000"/>
               </a:lnSpc>
             </a:pPr>
             <a:r>
-              <a:rPr sz="1100" b="0">
+              <a:rPr sz="1000" b="0">
                 <a:solidFill>
-                  <a:srgbClr val="333333"/>
+                  <a:srgbClr val="6E6E6E"/>
                 </a:solidFill>
                 <a:latin typeface="Calibri"/>
               </a:rPr>
-              <a:t>Tersi: Sınav Okulları küçüldü. Ocak–Ağustos cirosu 136,1 → 105,6 milyon TL (−%22,4). Mağaza tarafı +%54,9 büyüdü — büyümenin tamamı raftan geldi.</a:t>
+              <a:t>takvim ölçüsü · 225. → 228. gün</a:t>
             </a:r>
           </a:p>
         </p:txBody>
       </p:sp>
       <p:sp>
         <p:nvSpPr>
-          <p:cNvPr id="8" name="Rectangle 7"/>
+          <p:cNvPr id="9" name="Rectangle 8"/>
           <p:cNvSpPr/>
           <p:nvPr/>
         </p:nvSpPr>
         <p:spPr>
           <a:xfrm>
-            <a:off x="548640" y="2404872"/>
-            <a:ext cx="11018520" cy="987552"/>
+            <a:off x="4279392" y="1371600"/>
+            <a:ext cx="3566160" cy="1828800"/>
           </a:xfrm>
           <a:prstGeom prst="rect">
             <a:avLst/>
@@ -11779,20 +11821,20 @@
       </p:sp>
       <p:sp>
         <p:nvSpPr>
-          <p:cNvPr id="9" name="Rectangle 8"/>
+          <p:cNvPr id="10" name="Rectangle 9"/>
           <p:cNvSpPr/>
           <p:nvPr/>
         </p:nvSpPr>
         <p:spPr>
           <a:xfrm>
-            <a:off x="548640" y="2404872"/>
-            <a:ext cx="68580" cy="987552"/>
+            <a:off x="4279392" y="1371600"/>
+            <a:ext cx="68580" cy="1828800"/>
           </a:xfrm>
           <a:prstGeom prst="rect">
             <a:avLst/>
           </a:prstGeom>
           <a:solidFill>
-            <a:srgbClr val="E30622"/>
+            <a:srgbClr val="A6001A"/>
           </a:solidFill>
           <a:ln>
             <a:noFill/>
@@ -11823,21 +11865,21 @@
       </p:sp>
       <p:pic>
         <p:nvPicPr>
-          <p:cNvPr id="10" name="Picture 9" descr="circle-check.png"/>
+          <p:cNvPr id="11" name="Picture 10" descr="users.png"/>
           <p:cNvPicPr>
             <a:picLocks noChangeAspect="1"/>
           </p:cNvPicPr>
           <p:nvPr/>
         </p:nvPicPr>
         <p:blipFill>
-          <a:blip r:embed="rId3"/>
+          <a:blip r:embed="rId4"/>
           <a:stretch>
             <a:fillRect/>
           </a:stretch>
         </p:blipFill>
         <p:spPr>
           <a:xfrm>
-            <a:off x="777240" y="2560320"/>
+            <a:off x="7370064" y="1536192"/>
             <a:ext cx="274320" cy="274320"/>
           </a:xfrm>
           <a:prstGeom prst="rect">
@@ -11847,14 +11889,53 @@
       </p:pic>
       <p:sp>
         <p:nvSpPr>
-          <p:cNvPr id="11" name="TextBox 10"/>
+          <p:cNvPr id="12" name="TextBox 11"/>
           <p:cNvSpPr txBox="1"/>
           <p:nvPr/>
         </p:nvSpPr>
         <p:spPr>
           <a:xfrm>
-            <a:off x="1170432" y="2496312"/>
-            <a:ext cx="10058400" cy="329184"/>
+            <a:off x="4535424" y="1536192"/>
+            <a:ext cx="2697480" cy="384048"/>
+          </a:xfrm>
+          <a:prstGeom prst="rect">
+            <a:avLst/>
+          </a:prstGeom>
+          <a:noFill/>
+        </p:spPr>
+        <p:txBody>
+          <a:bodyPr wrap="square" anchor="t">
+            <a:spAutoFit/>
+          </a:bodyPr>
+          <a:lstStyle/>
+          <a:p>
+            <a:pPr algn="l">
+              <a:lnSpc>
+                <a:spcPct val="105000"/>
+              </a:lnSpc>
+            </a:pPr>
+            <a:r>
+              <a:rPr sz="900" b="1">
+                <a:solidFill>
+                  <a:srgbClr val="6E6E6E"/>
+                </a:solidFill>
+                <a:latin typeface="Calibri"/>
+              </a:rPr>
+              <a:t>TEMMUZ VE ÖNCESİ ALIM</a:t>
+            </a:r>
+          </a:p>
+        </p:txBody>
+      </p:sp>
+      <p:sp>
+        <p:nvSpPr>
+          <p:cNvPr id="13" name="TextBox 12"/>
+          <p:cNvSpPr txBox="1"/>
+          <p:nvPr/>
+        </p:nvSpPr>
+        <p:spPr>
+          <a:xfrm>
+            <a:off x="4535424" y="1975104"/>
+            <a:ext cx="3154679" cy="658368"/>
           </a:xfrm>
           <a:prstGeom prst="rect">
             <a:avLst/>
@@ -11873,27 +11954,27 @@
               </a:lnSpc>
             </a:pPr>
             <a:r>
-              <a:rPr sz="1300" b="1">
+              <a:rPr sz="3000" b="1">
                 <a:solidFill>
                   <a:srgbClr val="A6001A"/>
                 </a:solidFill>
                 <a:latin typeface="Calibri"/>
               </a:rPr>
-              <a:t>Ciro artışı enflasyon kaynaklı mı?</a:t>
+              <a:t>6 → 2</a:t>
             </a:r>
           </a:p>
         </p:txBody>
       </p:sp>
       <p:sp>
         <p:nvSpPr>
-          <p:cNvPr id="12" name="TextBox 11"/>
+          <p:cNvPr id="14" name="TextBox 13"/>
           <p:cNvSpPr txBox="1"/>
           <p:nvPr/>
         </p:nvSpPr>
         <p:spPr>
           <a:xfrm>
-            <a:off x="1170432" y="2816352"/>
-            <a:ext cx="10058400" cy="530352"/>
+            <a:off x="4535424" y="2688336"/>
+            <a:ext cx="3154679" cy="457200"/>
           </a:xfrm>
           <a:prstGeom prst="rect">
             <a:avLst/>
@@ -11908,31 +11989,31 @@
           <a:p>
             <a:pPr algn="l">
               <a:lnSpc>
-                <a:spcPct val="108000"/>
+                <a:spcPct val="105000"/>
               </a:lnSpc>
             </a:pPr>
             <a:r>
-              <a:rPr sz="1100" b="0">
+              <a:rPr sz="1000" b="0">
                 <a:solidFill>
-                  <a:srgbClr val="333333"/>
+                  <a:srgbClr val="6E6E6E"/>
                 </a:solidFill>
                 <a:latin typeface="Calibri"/>
               </a:rPr>
-              <a:t>Kısmen doğru: eşleşen ürünlerde fiyat endeksi +%19,8. Bu yüzden savunma ciroya değil ADEDE dayanıyor: ürün adedi +%34,9 ve adet fiyattan etkilenmez.</a:t>
+              <a:t>gerçek erken alım azaldı</a:t>
             </a:r>
           </a:p>
         </p:txBody>
       </p:sp>
       <p:sp>
         <p:nvSpPr>
-          <p:cNvPr id="13" name="Rectangle 12"/>
+          <p:cNvPr id="15" name="Rectangle 14"/>
           <p:cNvSpPr/>
           <p:nvPr/>
         </p:nvSpPr>
         <p:spPr>
           <a:xfrm>
-            <a:off x="548640" y="3483863"/>
-            <a:ext cx="11018520" cy="987552"/>
+            <a:off x="8001000" y="1371600"/>
+            <a:ext cx="3566160" cy="1828800"/>
           </a:xfrm>
           <a:prstGeom prst="rect">
             <a:avLst/>
@@ -11971,20 +12052,20 @@
       </p:sp>
       <p:sp>
         <p:nvSpPr>
-          <p:cNvPr id="14" name="Rectangle 13"/>
+          <p:cNvPr id="16" name="Rectangle 15"/>
           <p:cNvSpPr/>
           <p:nvPr/>
         </p:nvSpPr>
         <p:spPr>
           <a:xfrm>
-            <a:off x="548640" y="3483863"/>
-            <a:ext cx="68580" cy="987552"/>
+            <a:off x="8001000" y="1371600"/>
+            <a:ext cx="68580" cy="1828800"/>
           </a:xfrm>
           <a:prstGeom prst="rect">
             <a:avLst/>
           </a:prstGeom>
           <a:solidFill>
-            <a:srgbClr val="E30622"/>
+            <a:srgbClr val="A6001A"/>
           </a:solidFill>
           <a:ln>
             <a:noFill/>
@@ -12015,21 +12096,21 @@
       </p:sp>
       <p:pic>
         <p:nvPicPr>
-          <p:cNvPr id="15" name="Picture 14" descr="circle-check.png"/>
+          <p:cNvPr id="17" name="Picture 16" descr="package.png"/>
           <p:cNvPicPr>
             <a:picLocks noChangeAspect="1"/>
           </p:cNvPicPr>
           <p:nvPr/>
         </p:nvPicPr>
         <p:blipFill>
-          <a:blip r:embed="rId3"/>
+          <a:blip r:embed="rId5"/>
           <a:stretch>
             <a:fillRect/>
           </a:stretch>
         </p:blipFill>
         <p:spPr>
           <a:xfrm>
-            <a:off x="777240" y="3639311"/>
+            <a:off x="11091672" y="1536192"/>
             <a:ext cx="274320" cy="274320"/>
           </a:xfrm>
           <a:prstGeom prst="rect">
@@ -12039,14 +12120,53 @@
       </p:pic>
       <p:sp>
         <p:nvSpPr>
-          <p:cNvPr id="16" name="TextBox 15"/>
+          <p:cNvPr id="18" name="TextBox 17"/>
           <p:cNvSpPr txBox="1"/>
           <p:nvPr/>
         </p:nvSpPr>
         <p:spPr>
           <a:xfrm>
-            <a:off x="1170432" y="3575303"/>
-            <a:ext cx="10058400" cy="329184"/>
+            <a:off x="8257031" y="1536192"/>
+            <a:ext cx="2697480" cy="384048"/>
+          </a:xfrm>
+          <a:prstGeom prst="rect">
+            <a:avLst/>
+          </a:prstGeom>
+          <a:noFill/>
+        </p:spPr>
+        <p:txBody>
+          <a:bodyPr wrap="square" anchor="t">
+            <a:spAutoFit/>
+          </a:bodyPr>
+          <a:lstStyle/>
+          <a:p>
+            <a:pPr algn="l">
+              <a:lnSpc>
+                <a:spcPct val="105000"/>
+              </a:lnSpc>
+            </a:pPr>
+            <a:r>
+              <a:rPr sz="900" b="1">
+                <a:solidFill>
+                  <a:srgbClr val="6E6E6E"/>
+                </a:solidFill>
+                <a:latin typeface="Calibri"/>
+              </a:rPr>
+              <a:t>1–14 AĞUSTOS İŞ HACMİ</a:t>
+            </a:r>
+          </a:p>
+        </p:txBody>
+      </p:sp>
+      <p:sp>
+        <p:nvSpPr>
+          <p:cNvPr id="19" name="TextBox 18"/>
+          <p:cNvSpPr txBox="1"/>
+          <p:nvPr/>
+        </p:nvSpPr>
+        <p:spPr>
+          <a:xfrm>
+            <a:off x="8257031" y="1975104"/>
+            <a:ext cx="3154679" cy="658368"/>
           </a:xfrm>
           <a:prstGeom prst="rect">
             <a:avLst/>
@@ -12065,27 +12185,27 @@
               </a:lnSpc>
             </a:pPr>
             <a:r>
-              <a:rPr sz="1300" b="1">
+              <a:rPr sz="3000" b="1">
                 <a:solidFill>
                   <a:srgbClr val="A6001A"/>
                 </a:solidFill>
                 <a:latin typeface="Calibri"/>
               </a:rPr>
-              <a:t>Kasa sistemi değişti, karşılaştırma geçerli mi?</a:t>
+              <a:t>+%25,1</a:t>
             </a:r>
           </a:p>
         </p:txBody>
       </p:sp>
       <p:sp>
         <p:nvSpPr>
-          <p:cNvPr id="17" name="TextBox 16"/>
+          <p:cNvPr id="20" name="TextBox 19"/>
           <p:cNvSpPr txBox="1"/>
           <p:nvPr/>
         </p:nvSpPr>
         <p:spPr>
           <a:xfrm>
-            <a:off x="1170432" y="3895344"/>
-            <a:ext cx="10058400" cy="530352"/>
+            <a:off x="8257031" y="2688336"/>
+            <a:ext cx="3154679" cy="457200"/>
           </a:xfrm>
           <a:prstGeom prst="rect">
             <a:avLst/>
@@ -12100,216 +12220,804 @@
           <a:p>
             <a:pPr algn="l">
               <a:lnSpc>
-                <a:spcPct val="108000"/>
+                <a:spcPct val="105000"/>
               </a:lnSpc>
             </a:pPr>
             <a:r>
-              <a:rPr sz="1100" b="0">
+              <a:rPr sz="1000" b="0">
                 <a:solidFill>
-                  <a:srgbClr val="333333"/>
+                  <a:srgbClr val="6E6E6E"/>
                 </a:solidFill>
                 <a:latin typeface="Calibri"/>
               </a:rPr>
-              <a:t>Bu yüzden ölçüm POS'tan değil ERP'den (DerinSIS) alındı — iki yılda da aynı kaynak, aynı belge tipi. Temmuz 2025 kasa geçişi ölçüye girmiyor.</a:t>
+              <a:t>137.483 → 171.963 adet</a:t>
             </a:r>
           </a:p>
         </p:txBody>
       </p:sp>
-      <p:sp>
-        <p:nvSpPr>
-          <p:cNvPr id="18" name="Rectangle 17"/>
-          <p:cNvSpPr/>
-          <p:nvPr/>
-        </p:nvSpPr>
-        <p:spPr>
-          <a:xfrm>
-            <a:off x="548640" y="4562855"/>
-            <a:ext cx="11018520" cy="987552"/>
-          </a:xfrm>
-          <a:prstGeom prst="rect">
-            <a:avLst/>
-          </a:prstGeom>
-          <a:solidFill>
-            <a:srgbClr val="FFFFFF"/>
-          </a:solidFill>
-          <a:ln w="12700">
-            <a:solidFill>
-              <a:srgbClr val="DCDCDC"/>
-            </a:solidFill>
-          </a:ln>
-          <a:effectLst/>
-        </p:spPr>
-        <p:style>
-          <a:lnRef idx="1">
-            <a:schemeClr val="accent1"/>
-          </a:lnRef>
-          <a:fillRef idx="3">
-            <a:schemeClr val="accent1"/>
-          </a:fillRef>
-          <a:effectRef idx="2">
-            <a:schemeClr val="accent1"/>
-          </a:effectRef>
-          <a:fontRef idx="minor">
-            <a:schemeClr val="lt1"/>
-          </a:fontRef>
-        </p:style>
-        <p:txBody>
-          <a:bodyPr rtlCol="0" anchor="ctr"/>
-          <a:lstStyle/>
-          <a:p>
-            <a:pPr algn="ctr"/>
-          </a:p>
-        </p:txBody>
-      </p:sp>
-      <p:sp>
-        <p:nvSpPr>
-          <p:cNvPr id="19" name="Rectangle 18"/>
-          <p:cNvSpPr/>
-          <p:nvPr/>
-        </p:nvSpPr>
-        <p:spPr>
-          <a:xfrm>
-            <a:off x="548640" y="4562855"/>
-            <a:ext cx="68580" cy="987552"/>
-          </a:xfrm>
-          <a:prstGeom prst="rect">
-            <a:avLst/>
-          </a:prstGeom>
-          <a:solidFill>
-            <a:srgbClr val="E30622"/>
-          </a:solidFill>
-          <a:ln>
-            <a:noFill/>
-          </a:ln>
-          <a:effectLst/>
-        </p:spPr>
-        <p:style>
-          <a:lnRef idx="1">
-            <a:schemeClr val="accent1"/>
-          </a:lnRef>
-          <a:fillRef idx="3">
-            <a:schemeClr val="accent1"/>
-          </a:fillRef>
-          <a:effectRef idx="2">
-            <a:schemeClr val="accent1"/>
-          </a:effectRef>
-          <a:fontRef idx="minor">
-            <a:schemeClr val="lt1"/>
-          </a:fontRef>
-        </p:style>
-        <p:txBody>
-          <a:bodyPr rtlCol="0" anchor="ctr"/>
-          <a:lstStyle/>
-          <a:p>
-            <a:pPr algn="ctr"/>
-          </a:p>
-        </p:txBody>
-      </p:sp>
-      <p:pic>
-        <p:nvPicPr>
-          <p:cNvPr id="20" name="Picture 19" descr="circle-check.png"/>
-          <p:cNvPicPr>
-            <a:picLocks noChangeAspect="1"/>
-          </p:cNvPicPr>
-          <p:nvPr/>
-        </p:nvPicPr>
-        <p:blipFill>
-          <a:blip r:embed="rId3"/>
-          <a:stretch>
-            <a:fillRect/>
-          </a:stretch>
-        </p:blipFill>
-        <p:spPr>
-          <a:xfrm>
-            <a:off x="777240" y="4718303"/>
-            <a:ext cx="274320" cy="274320"/>
-          </a:xfrm>
-          <a:prstGeom prst="rect">
-            <a:avLst/>
-          </a:prstGeom>
-        </p:spPr>
-      </p:pic>
-      <p:sp>
-        <p:nvSpPr>
-          <p:cNvPr id="21" name="TextBox 20"/>
-          <p:cNvSpPr txBox="1"/>
-          <p:nvPr/>
-        </p:nvSpPr>
-        <p:spPr>
-          <a:xfrm>
-            <a:off x="1170432" y="4654295"/>
-            <a:ext cx="10058400" cy="329184"/>
-          </a:xfrm>
-          <a:prstGeom prst="rect">
-            <a:avLst/>
-          </a:prstGeom>
-          <a:noFill/>
-        </p:spPr>
-        <p:txBody>
-          <a:bodyPr wrap="square" anchor="t">
-            <a:spAutoFit/>
-          </a:bodyPr>
-          <a:lstStyle/>
-          <a:p>
-            <a:pPr algn="l">
-              <a:lnSpc>
-                <a:spcPct val="100000"/>
-              </a:lnSpc>
-            </a:pPr>
-            <a:r>
-              <a:rPr sz="1300" b="1">
-                <a:solidFill>
-                  <a:srgbClr val="A6001A"/>
-                </a:solidFill>
-                <a:latin typeface="Calibri"/>
-              </a:rPr>
-              <a:t>Ağustos ayında ivme düşüşü var mı?</a:t>
-            </a:r>
-          </a:p>
-        </p:txBody>
-      </p:sp>
+      <p:graphicFrame>
+        <p:nvGraphicFramePr>
+          <p:cNvPr id="21" name="Table 20"/>
+          <p:cNvGraphicFramePr>
+            <a:graphicFrameLocks noGrp="1"/>
+          </p:cNvGraphicFramePr>
+          <p:nvPr/>
+        </p:nvGraphicFramePr>
+        <p:xfrm>
+          <a:off x="548640" y="3429000"/>
+          <a:ext cx="11018520" cy="2103120"/>
+        </p:xfrm>
+        <a:graphic>
+          <a:graphicData uri="http://schemas.openxmlformats.org/drawingml/2006/table">
+            <a:tbl>
+              <a:tblPr firstRow="1" bandRow="1">
+                <a:tableStyleId>{5C22544A-7EE6-4342-B048-85BDC9FD1C3A}</a:tableStyleId>
+              </a:tblPr>
+              <a:tblGrid>
+                <a:gridCol w="3291840"/>
+                <a:gridCol w="1737360"/>
+                <a:gridCol w="1737360"/>
+                <a:gridCol w="4251960"/>
+              </a:tblGrid>
+              <a:tr h="262890">
+                <a:tc>
+                  <a:txBody>
+                    <a:bodyPr/>
+                    <a:lstStyle/>
+                    <a:p>
+                      <a:pPr algn="l"/>
+                      <a:r>
+                        <a:rPr sz="900" b="1">
+                          <a:solidFill>
+                            <a:srgbClr val="FFFFFF"/>
+                          </a:solidFill>
+                          <a:latin typeface="Calibri"/>
+                        </a:rPr>
+                        <a:t>Ölçü</a:t>
+                      </a:r>
+                    </a:p>
+                  </a:txBody>
+                  <a:tcPr>
+                    <a:solidFill>
+                      <a:srgbClr val="E30622"/>
+                    </a:solidFill>
+                  </a:tcPr>
+                </a:tc>
+                <a:tc>
+                  <a:txBody>
+                    <a:bodyPr/>
+                    <a:lstStyle/>
+                    <a:p>
+                      <a:pPr algn="ctr"/>
+                      <a:r>
+                        <a:rPr sz="900" b="1">
+                          <a:solidFill>
+                            <a:srgbClr val="FFFFFF"/>
+                          </a:solidFill>
+                          <a:latin typeface="Calibri"/>
+                        </a:rPr>
+                        <a:t>2025</a:t>
+                      </a:r>
+                    </a:p>
+                  </a:txBody>
+                  <a:tcPr>
+                    <a:solidFill>
+                      <a:srgbClr val="E30622"/>
+                    </a:solidFill>
+                  </a:tcPr>
+                </a:tc>
+                <a:tc>
+                  <a:txBody>
+                    <a:bodyPr/>
+                    <a:lstStyle/>
+                    <a:p>
+                      <a:pPr algn="ctr"/>
+                      <a:r>
+                        <a:rPr sz="900" b="1">
+                          <a:solidFill>
+                            <a:srgbClr val="FFFFFF"/>
+                          </a:solidFill>
+                          <a:latin typeface="Calibri"/>
+                        </a:rPr>
+                        <a:t>2026</a:t>
+                      </a:r>
+                    </a:p>
+                  </a:txBody>
+                  <a:tcPr>
+                    <a:solidFill>
+                      <a:srgbClr val="E30622"/>
+                    </a:solidFill>
+                  </a:tcPr>
+                </a:tc>
+                <a:tc>
+                  <a:txBody>
+                    <a:bodyPr/>
+                    <a:lstStyle/>
+                    <a:p>
+                      <a:pPr algn="l"/>
+                      <a:r>
+                        <a:rPr sz="900" b="1">
+                          <a:solidFill>
+                            <a:srgbClr val="FFFFFF"/>
+                          </a:solidFill>
+                          <a:latin typeface="Calibri"/>
+                        </a:rPr>
+                        <a:t>Yorum</a:t>
+                      </a:r>
+                    </a:p>
+                  </a:txBody>
+                  <a:tcPr>
+                    <a:solidFill>
+                      <a:srgbClr val="E30622"/>
+                    </a:solidFill>
+                  </a:tcPr>
+                </a:tc>
+              </a:tr>
+              <a:tr h="262890">
+                <a:tc>
+                  <a:txBody>
+                    <a:bodyPr/>
+                    <a:lstStyle/>
+                    <a:p>
+                      <a:pPr algn="l"/>
+                      <a:r>
+                        <a:rPr sz="1000" b="0">
+                          <a:solidFill>
+                            <a:srgbClr val="333333"/>
+                          </a:solidFill>
+                          <a:latin typeface="Calibri"/>
+                        </a:rPr>
+                        <a:t>Ortalama alım günü (takvim)</a:t>
+                      </a:r>
+                    </a:p>
+                  </a:txBody>
+                  <a:tcPr>
+                    <a:solidFill>
+                      <a:srgbClr val="FFFFFF"/>
+                    </a:solidFill>
+                  </a:tcPr>
+                </a:tc>
+                <a:tc>
+                  <a:txBody>
+                    <a:bodyPr/>
+                    <a:lstStyle/>
+                    <a:p>
+                      <a:pPr algn="ctr"/>
+                      <a:r>
+                        <a:rPr sz="1000" b="0">
+                          <a:solidFill>
+                            <a:srgbClr val="333333"/>
+                          </a:solidFill>
+                          <a:latin typeface="Calibri"/>
+                        </a:rPr>
+                        <a:t>225. gün</a:t>
+                      </a:r>
+                    </a:p>
+                  </a:txBody>
+                  <a:tcPr>
+                    <a:solidFill>
+                      <a:srgbClr val="FFFFFF"/>
+                    </a:solidFill>
+                  </a:tcPr>
+                </a:tc>
+                <a:tc>
+                  <a:txBody>
+                    <a:bodyPr/>
+                    <a:lstStyle/>
+                    <a:p>
+                      <a:pPr algn="ctr"/>
+                      <a:r>
+                        <a:rPr sz="1000" b="1">
+                          <a:solidFill>
+                            <a:srgbClr val="333333"/>
+                          </a:solidFill>
+                          <a:latin typeface="Calibri"/>
+                        </a:rPr>
+                        <a:t>228. gün</a:t>
+                      </a:r>
+                    </a:p>
+                  </a:txBody>
+                  <a:tcPr>
+                    <a:solidFill>
+                      <a:srgbClr val="FFFFFF"/>
+                    </a:solidFill>
+                  </a:tcPr>
+                </a:tc>
+                <a:tc>
+                  <a:txBody>
+                    <a:bodyPr/>
+                    <a:lstStyle/>
+                    <a:p>
+                      <a:pPr algn="l"/>
+                      <a:r>
+                        <a:rPr sz="1000" b="0">
+                          <a:solidFill>
+                            <a:srgbClr val="A6001A"/>
+                          </a:solidFill>
+                          <a:latin typeface="Calibri"/>
+                        </a:rPr>
+                        <a:t>2026 alımı ortalama 2,5 gün DAHA GEÇ</a:t>
+                      </a:r>
+                    </a:p>
+                  </a:txBody>
+                  <a:tcPr>
+                    <a:solidFill>
+                      <a:srgbClr val="FFFFFF"/>
+                    </a:solidFill>
+                  </a:tcPr>
+                </a:tc>
+              </a:tr>
+              <a:tr h="262890">
+                <a:tc>
+                  <a:txBody>
+                    <a:bodyPr/>
+                    <a:lstStyle/>
+                    <a:p>
+                      <a:pPr algn="l"/>
+                      <a:r>
+                        <a:rPr sz="1000" b="0">
+                          <a:solidFill>
+                            <a:srgbClr val="333333"/>
+                          </a:solidFill>
+                          <a:latin typeface="Calibri"/>
+                        </a:rPr>
+                        <a:t>Temmuz ve öncesi alınan</a:t>
+                      </a:r>
+                    </a:p>
+                  </a:txBody>
+                  <a:tcPr>
+                    <a:solidFill>
+                      <a:srgbClr val="FAFAFA"/>
+                    </a:solidFill>
+                  </a:tcPr>
+                </a:tc>
+                <a:tc>
+                  <a:txBody>
+                    <a:bodyPr/>
+                    <a:lstStyle/>
+                    <a:p>
+                      <a:pPr algn="ctr"/>
+                      <a:r>
+                        <a:rPr sz="1000" b="0">
+                          <a:solidFill>
+                            <a:srgbClr val="333333"/>
+                          </a:solidFill>
+                          <a:latin typeface="Calibri"/>
+                        </a:rPr>
+                        <a:t>6 kişi</a:t>
+                      </a:r>
+                    </a:p>
+                  </a:txBody>
+                  <a:tcPr>
+                    <a:solidFill>
+                      <a:srgbClr val="FAFAFA"/>
+                    </a:solidFill>
+                  </a:tcPr>
+                </a:tc>
+                <a:tc>
+                  <a:txBody>
+                    <a:bodyPr/>
+                    <a:lstStyle/>
+                    <a:p>
+                      <a:pPr algn="ctr"/>
+                      <a:r>
+                        <a:rPr sz="1000" b="1">
+                          <a:solidFill>
+                            <a:srgbClr val="333333"/>
+                          </a:solidFill>
+                          <a:latin typeface="Calibri"/>
+                        </a:rPr>
+                        <a:t>2 kişi</a:t>
+                      </a:r>
+                    </a:p>
+                  </a:txBody>
+                  <a:tcPr>
+                    <a:solidFill>
+                      <a:srgbClr val="FAFAFA"/>
+                    </a:solidFill>
+                  </a:tcPr>
+                </a:tc>
+                <a:tc>
+                  <a:txBody>
+                    <a:bodyPr/>
+                    <a:lstStyle/>
+                    <a:p>
+                      <a:pPr algn="l"/>
+                      <a:r>
+                        <a:rPr sz="1000" b="0">
+                          <a:solidFill>
+                            <a:srgbClr val="A6001A"/>
+                          </a:solidFill>
+                          <a:latin typeface="Calibri"/>
+                        </a:rPr>
+                        <a:t>erken alım azaldı</a:t>
+                      </a:r>
+                    </a:p>
+                  </a:txBody>
+                  <a:tcPr>
+                    <a:solidFill>
+                      <a:srgbClr val="FAFAFA"/>
+                    </a:solidFill>
+                  </a:tcPr>
+                </a:tc>
+              </a:tr>
+              <a:tr h="262890">
+                <a:tc>
+                  <a:txBody>
+                    <a:bodyPr/>
+                    <a:lstStyle/>
+                    <a:p>
+                      <a:pPr algn="l"/>
+                      <a:r>
+                        <a:rPr sz="1000" b="0">
+                          <a:solidFill>
+                            <a:srgbClr val="333333"/>
+                          </a:solidFill>
+                          <a:latin typeface="Calibri"/>
+                        </a:rPr>
+                        <a:t>Açılıştan 45+ gün önce alınan</a:t>
+                      </a:r>
+                    </a:p>
+                  </a:txBody>
+                  <a:tcPr>
+                    <a:solidFill>
+                      <a:srgbClr val="FFFFFF"/>
+                    </a:solidFill>
+                  </a:tcPr>
+                </a:tc>
+                <a:tc>
+                  <a:txBody>
+                    <a:bodyPr/>
+                    <a:lstStyle/>
+                    <a:p>
+                      <a:pPr algn="ctr"/>
+                      <a:r>
+                        <a:rPr sz="1000" b="0">
+                          <a:solidFill>
+                            <a:srgbClr val="333333"/>
+                          </a:solidFill>
+                          <a:latin typeface="Calibri"/>
+                        </a:rPr>
+                        <a:t>4 kişi</a:t>
+                      </a:r>
+                    </a:p>
+                  </a:txBody>
+                  <a:tcPr>
+                    <a:solidFill>
+                      <a:srgbClr val="FFFFFF"/>
+                    </a:solidFill>
+                  </a:tcPr>
+                </a:tc>
+                <a:tc>
+                  <a:txBody>
+                    <a:bodyPr/>
+                    <a:lstStyle/>
+                    <a:p>
+                      <a:pPr algn="ctr"/>
+                      <a:r>
+                        <a:rPr sz="1000" b="1">
+                          <a:solidFill>
+                            <a:srgbClr val="333333"/>
+                          </a:solidFill>
+                          <a:latin typeface="Calibri"/>
+                        </a:rPr>
+                        <a:t>2 kişi</a:t>
+                      </a:r>
+                    </a:p>
+                  </a:txBody>
+                  <a:tcPr>
+                    <a:solidFill>
+                      <a:srgbClr val="FFFFFF"/>
+                    </a:solidFill>
+                  </a:tcPr>
+                </a:tc>
+                <a:tc>
+                  <a:txBody>
+                    <a:bodyPr/>
+                    <a:lstStyle/>
+                    <a:p>
+                      <a:pPr algn="l"/>
+                      <a:r>
+                        <a:rPr sz="1000" b="0">
+                          <a:solidFill>
+                            <a:srgbClr val="A6001A"/>
+                          </a:solidFill>
+                          <a:latin typeface="Calibri"/>
+                        </a:rPr>
+                        <a:t>çok erken alım azaldı</a:t>
+                      </a:r>
+                    </a:p>
+                  </a:txBody>
+                  <a:tcPr>
+                    <a:solidFill>
+                      <a:srgbClr val="FFFFFF"/>
+                    </a:solidFill>
+                  </a:tcPr>
+                </a:tc>
+              </a:tr>
+              <a:tr h="262890">
+                <a:tc>
+                  <a:txBody>
+                    <a:bodyPr/>
+                    <a:lstStyle/>
+                    <a:p>
+                      <a:pPr algn="l"/>
+                      <a:r>
+                        <a:rPr sz="1000" b="0">
+                          <a:solidFill>
+                            <a:srgbClr val="333333"/>
+                          </a:solidFill>
+                          <a:latin typeface="Calibri"/>
+                        </a:rPr>
+                        <a:t>1–14 Ağustos alınan</a:t>
+                      </a:r>
+                    </a:p>
+                  </a:txBody>
+                  <a:tcPr>
+                    <a:solidFill>
+                      <a:srgbClr val="FAFAFA"/>
+                    </a:solidFill>
+                  </a:tcPr>
+                </a:tc>
+                <a:tc>
+                  <a:txBody>
+                    <a:bodyPr/>
+                    <a:lstStyle/>
+                    <a:p>
+                      <a:pPr algn="ctr"/>
+                      <a:r>
+                        <a:rPr sz="1000" b="0">
+                          <a:solidFill>
+                            <a:srgbClr val="333333"/>
+                          </a:solidFill>
+                          <a:latin typeface="Calibri"/>
+                        </a:rPr>
+                        <a:t>12 kişi</a:t>
+                      </a:r>
+                    </a:p>
+                  </a:txBody>
+                  <a:tcPr>
+                    <a:solidFill>
+                      <a:srgbClr val="FAFAFA"/>
+                    </a:solidFill>
+                  </a:tcPr>
+                </a:tc>
+                <a:tc>
+                  <a:txBody>
+                    <a:bodyPr/>
+                    <a:lstStyle/>
+                    <a:p>
+                      <a:pPr algn="ctr"/>
+                      <a:r>
+                        <a:rPr sz="1000" b="1">
+                          <a:solidFill>
+                            <a:srgbClr val="333333"/>
+                          </a:solidFill>
+                          <a:latin typeface="Calibri"/>
+                        </a:rPr>
+                        <a:t>30 kişi</a:t>
+                      </a:r>
+                    </a:p>
+                  </a:txBody>
+                  <a:tcPr>
+                    <a:solidFill>
+                      <a:srgbClr val="FAFAFA"/>
+                    </a:solidFill>
+                  </a:tcPr>
+                </a:tc>
+                <a:tc>
+                  <a:txBody>
+                    <a:bodyPr/>
+                    <a:lstStyle/>
+                    <a:p>
+                      <a:pPr algn="l"/>
+                      <a:r>
+                        <a:rPr sz="1000" b="0">
+                          <a:solidFill>
+                            <a:srgbClr val="A6001A"/>
+                          </a:solidFill>
+                          <a:latin typeface="Calibri"/>
+                        </a:rPr>
+                        <a:t>artış bu iki haftada</a:t>
+                      </a:r>
+                    </a:p>
+                  </a:txBody>
+                  <a:tcPr>
+                    <a:solidFill>
+                      <a:srgbClr val="FAFAFA"/>
+                    </a:solidFill>
+                  </a:tcPr>
+                </a:tc>
+              </a:tr>
+              <a:tr h="262890">
+                <a:tc>
+                  <a:txBody>
+                    <a:bodyPr/>
+                    <a:lstStyle/>
+                    <a:p>
+                      <a:pPr algn="l"/>
+                      <a:r>
+                        <a:rPr sz="1000" b="0">
+                          <a:solidFill>
+                            <a:srgbClr val="333333"/>
+                          </a:solidFill>
+                          <a:latin typeface="Calibri"/>
+                        </a:rPr>
+                        <a:t>1–14 Ağustos ürün adedi</a:t>
+                      </a:r>
+                    </a:p>
+                  </a:txBody>
+                  <a:tcPr>
+                    <a:solidFill>
+                      <a:srgbClr val="FFFFFF"/>
+                    </a:solidFill>
+                  </a:tcPr>
+                </a:tc>
+                <a:tc>
+                  <a:txBody>
+                    <a:bodyPr/>
+                    <a:lstStyle/>
+                    <a:p>
+                      <a:pPr algn="ctr"/>
+                      <a:r>
+                        <a:rPr sz="1000" b="0">
+                          <a:solidFill>
+                            <a:srgbClr val="333333"/>
+                          </a:solidFill>
+                          <a:latin typeface="Calibri"/>
+                        </a:rPr>
+                        <a:t>137.483</a:t>
+                      </a:r>
+                    </a:p>
+                  </a:txBody>
+                  <a:tcPr>
+                    <a:solidFill>
+                      <a:srgbClr val="FFFFFF"/>
+                    </a:solidFill>
+                  </a:tcPr>
+                </a:tc>
+                <a:tc>
+                  <a:txBody>
+                    <a:bodyPr/>
+                    <a:lstStyle/>
+                    <a:p>
+                      <a:pPr algn="ctr"/>
+                      <a:r>
+                        <a:rPr sz="1000" b="1">
+                          <a:solidFill>
+                            <a:srgbClr val="333333"/>
+                          </a:solidFill>
+                          <a:latin typeface="Calibri"/>
+                        </a:rPr>
+                        <a:t>171.963</a:t>
+                      </a:r>
+                    </a:p>
+                  </a:txBody>
+                  <a:tcPr>
+                    <a:solidFill>
+                      <a:srgbClr val="FFFFFF"/>
+                    </a:solidFill>
+                  </a:tcPr>
+                </a:tc>
+                <a:tc>
+                  <a:txBody>
+                    <a:bodyPr/>
+                    <a:lstStyle/>
+                    <a:p>
+                      <a:pPr algn="l"/>
+                      <a:r>
+                        <a:rPr sz="1000" b="0">
+                          <a:solidFill>
+                            <a:srgbClr val="A6001A"/>
+                          </a:solidFill>
+                          <a:latin typeface="Calibri"/>
+                        </a:rPr>
+                        <a:t>iş +%25,1 büyüdü — alım işi takip etti</a:t>
+                      </a:r>
+                    </a:p>
+                  </a:txBody>
+                  <a:tcPr>
+                    <a:solidFill>
+                      <a:srgbClr val="FFFFFF"/>
+                    </a:solidFill>
+                  </a:tcPr>
+                </a:tc>
+              </a:tr>
+              <a:tr h="262890">
+                <a:tc>
+                  <a:txBody>
+                    <a:bodyPr/>
+                    <a:lstStyle/>
+                    <a:p>
+                      <a:pPr algn="l"/>
+                      <a:r>
+                        <a:rPr sz="1000" b="0">
+                          <a:solidFill>
+                            <a:srgbClr val="333333"/>
+                          </a:solidFill>
+                          <a:latin typeface="Calibri"/>
+                        </a:rPr>
+                        <a:t>15–31 Ağustos ürün adedi</a:t>
+                      </a:r>
+                    </a:p>
+                  </a:txBody>
+                  <a:tcPr>
+                    <a:solidFill>
+                      <a:srgbClr val="FAFAFA"/>
+                    </a:solidFill>
+                  </a:tcPr>
+                </a:tc>
+                <a:tc>
+                  <a:txBody>
+                    <a:bodyPr/>
+                    <a:lstStyle/>
+                    <a:p>
+                      <a:pPr algn="ctr"/>
+                      <a:r>
+                        <a:rPr sz="1000" b="0">
+                          <a:solidFill>
+                            <a:srgbClr val="333333"/>
+                          </a:solidFill>
+                          <a:latin typeface="Calibri"/>
+                        </a:rPr>
+                        <a:t>321.026</a:t>
+                      </a:r>
+                    </a:p>
+                  </a:txBody>
+                  <a:tcPr>
+                    <a:solidFill>
+                      <a:srgbClr val="FAFAFA"/>
+                    </a:solidFill>
+                  </a:tcPr>
+                </a:tc>
+                <a:tc>
+                  <a:txBody>
+                    <a:bodyPr/>
+                    <a:lstStyle/>
+                    <a:p>
+                      <a:pPr algn="ctr"/>
+                      <a:r>
+                        <a:rPr sz="1000" b="1">
+                          <a:solidFill>
+                            <a:srgbClr val="333333"/>
+                          </a:solidFill>
+                          <a:latin typeface="Calibri"/>
+                        </a:rPr>
+                        <a:t>311.695</a:t>
+                      </a:r>
+                    </a:p>
+                  </a:txBody>
+                  <a:tcPr>
+                    <a:solidFill>
+                      <a:srgbClr val="FAFAFA"/>
+                    </a:solidFill>
+                  </a:tcPr>
+                </a:tc>
+                <a:tc>
+                  <a:txBody>
+                    <a:bodyPr/>
+                    <a:lstStyle/>
+                    <a:p>
+                      <a:pPr algn="l"/>
+                      <a:r>
+                        <a:rPr sz="1000" b="0">
+                          <a:solidFill>
+                            <a:srgbClr val="A6001A"/>
+                          </a:solidFill>
+                          <a:latin typeface="Calibri"/>
+                        </a:rPr>
+                        <a:t>−%2,9 — dalga Eylül'e kaydı</a:t>
+                      </a:r>
+                    </a:p>
+                  </a:txBody>
+                  <a:tcPr>
+                    <a:solidFill>
+                      <a:srgbClr val="FAFAFA"/>
+                    </a:solidFill>
+                  </a:tcPr>
+                </a:tc>
+              </a:tr>
+              <a:tr h="262890">
+                <a:tc>
+                  <a:txBody>
+                    <a:bodyPr/>
+                    <a:lstStyle/>
+                    <a:p>
+                      <a:pPr algn="l"/>
+                      <a:r>
+                        <a:rPr sz="1000" b="0">
+                          <a:solidFill>
+                            <a:srgbClr val="333333"/>
+                          </a:solidFill>
+                          <a:latin typeface="Calibri"/>
+                        </a:rPr>
+                        <a:t>31.08'de çalışan sezonluk</a:t>
+                      </a:r>
+                    </a:p>
+                  </a:txBody>
+                  <a:tcPr>
+                    <a:solidFill>
+                      <a:srgbClr val="FFFFFF"/>
+                    </a:solidFill>
+                  </a:tcPr>
+                </a:tc>
+                <a:tc>
+                  <a:txBody>
+                    <a:bodyPr/>
+                    <a:lstStyle/>
+                    <a:p>
+                      <a:pPr algn="ctr"/>
+                      <a:r>
+                        <a:rPr sz="1000" b="0">
+                          <a:solidFill>
+                            <a:srgbClr val="333333"/>
+                          </a:solidFill>
+                          <a:latin typeface="Calibri"/>
+                        </a:rPr>
+                        <a:t>65 kişi</a:t>
+                      </a:r>
+                    </a:p>
+                  </a:txBody>
+                  <a:tcPr>
+                    <a:solidFill>
+                      <a:srgbClr val="FFFFFF"/>
+                    </a:solidFill>
+                  </a:tcPr>
+                </a:tc>
+                <a:tc>
+                  <a:txBody>
+                    <a:bodyPr/>
+                    <a:lstStyle/>
+                    <a:p>
+                      <a:pPr algn="ctr"/>
+                      <a:r>
+                        <a:rPr sz="1000" b="1">
+                          <a:solidFill>
+                            <a:srgbClr val="333333"/>
+                          </a:solidFill>
+                          <a:latin typeface="Calibri"/>
+                        </a:rPr>
+                        <a:t>62 kişi</a:t>
+                      </a:r>
+                    </a:p>
+                  </a:txBody>
+                  <a:tcPr>
+                    <a:solidFill>
+                      <a:srgbClr val="FFFFFF"/>
+                    </a:solidFill>
+                  </a:tcPr>
+                </a:tc>
+                <a:tc>
+                  <a:txBody>
+                    <a:bodyPr/>
+                    <a:lstStyle/>
+                    <a:p>
+                      <a:pPr algn="l"/>
+                      <a:r>
+                        <a:rPr sz="1000" b="0">
+                          <a:solidFill>
+                            <a:srgbClr val="A6001A"/>
+                          </a:solidFill>
+                          <a:latin typeface="Calibri"/>
+                        </a:rPr>
+                        <a:t>kesimde 3 kişi DAHA AZ</a:t>
+                      </a:r>
+                    </a:p>
+                  </a:txBody>
+                  <a:tcPr>
+                    <a:solidFill>
+                      <a:srgbClr val="FFFFFF"/>
+                    </a:solidFill>
+                  </a:tcPr>
+                </a:tc>
+              </a:tr>
+            </a:tbl>
+          </a:graphicData>
+        </a:graphic>
+      </p:graphicFrame>
       <p:sp>
         <p:nvSpPr>
           <p:cNvPr id="22" name="TextBox 21"/>
-          <p:cNvSpPr txBox="1"/>
-          <p:nvPr/>
-        </p:nvSpPr>
-        <p:spPr>
-          <a:xfrm>
-            <a:off x="1170432" y="4974336"/>
-            <a:ext cx="10058400" cy="530352"/>
-          </a:xfrm>
-          <a:prstGeom prst="rect">
-            <a:avLst/>
-          </a:prstGeom>
-          <a:noFill/>
-        </p:spPr>
-        <p:txBody>
-          <a:bodyPr wrap="square" anchor="t">
-            <a:spAutoFit/>
-          </a:bodyPr>
-          <a:lstStyle/>
-          <a:p>
-            <a:pPr algn="l">
-              <a:lnSpc>
-                <a:spcPct val="108000"/>
-              </a:lnSpc>
-            </a:pPr>
-            <a:r>
-              <a:rPr sz="1100" b="0">
-                <a:solidFill>
-                  <a:srgbClr val="333333"/>
-                </a:solidFill>
-                <a:latin typeface="Calibri"/>
-              </a:rPr>
-              <a:t>Takvim etkisi: okullar 2025'te 8 Eylül, 2026'da 14 Eylül açıldı — sezon 6 gün geriye kaydı. Açılışa hizalanınca haftalık büyüme %65–79 bandında düz seyrediyor.</a:t>
-            </a:r>
-          </a:p>
-        </p:txBody>
-      </p:sp>
-      <p:sp>
-        <p:nvSpPr>
-          <p:cNvPr id="23" name="TextBox 22"/>
           <p:cNvSpPr txBox="1"/>
           <p:nvPr/>
         </p:nvSpPr>
@@ -12341,14 +13049,14 @@
                 </a:solidFill>
                 <a:latin typeface="Calibri"/>
               </a:rPr>
-              <a:t>* Kapsam: üç POS mağazası — FSM · Özlüce · İst. Yolu · Dönem: 01.01 – 31.08 (her iki yıl, kümülatif) (kurumsal/mağaza kıyası) · hizalı dönem: 01.07 – 25.08.2025 (2025) · 07.07 – 31.08.2026 (2026), her iki yıl 56 gün, okul açılışına hizalı</a:t>
+              <a:t>* Kapsam: beş mağaza (FSM · Özlüce · İst. Yolu · Heykel · Şura) · Kohortlar okul açılışına göre AYNI ofsette kesildi (T−12: 27.08.2025 ve 02.09.2026) · İş hacmi üç POS mağazası · ⚠ "açılıştan kaç gün önce" ölçüsü açılış 6 gün kaydığı için 2026'yı mekanik olarak erken gösterir, takvim ölçüsü esastır.</a:t>
             </a:r>
           </a:p>
         </p:txBody>
       </p:sp>
       <p:sp>
         <p:nvSpPr>
-          <p:cNvPr id="24" name="TextBox 23"/>
+          <p:cNvPr id="23" name="TextBox 22"/>
           <p:cNvSpPr txBox="1"/>
           <p:nvPr/>
         </p:nvSpPr>
@@ -12438,7 +13146,7 @@
           <a:lstStyle/>
           <a:p>
             <a:r>
-              <a:t>İyileştirme Alanı</a:t>
+              <a:t>Yöntem ve Açıklamalar</a:t>
             </a:r>
           </a:p>
         </p:txBody>
@@ -12451,8 +13159,8 @@
         </p:nvSpPr>
         <p:spPr>
           <a:xfrm>
-            <a:off x="548640" y="1371600"/>
-            <a:ext cx="5394960" cy="2286000"/>
+            <a:off x="548640" y="1325880"/>
+            <a:ext cx="11018520" cy="740664"/>
           </a:xfrm>
           <a:prstGeom prst="rect">
             <a:avLst/>
@@ -12497,14 +13205,14 @@
         </p:nvSpPr>
         <p:spPr>
           <a:xfrm>
-            <a:off x="548640" y="1371600"/>
-            <a:ext cx="68580" cy="2286000"/>
+            <a:off x="548640" y="1325880"/>
+            <a:ext cx="68580" cy="740664"/>
           </a:xfrm>
           <a:prstGeom prst="rect">
             <a:avLst/>
           </a:prstGeom>
           <a:solidFill>
-            <a:srgbClr val="A6001A"/>
+            <a:srgbClr val="E30622"/>
           </a:solidFill>
           <a:ln>
             <a:noFill/>
@@ -12533,16 +13241,40 @@
           </a:p>
         </p:txBody>
       </p:sp>
-      <p:sp>
-        <p:nvSpPr>
-          <p:cNvPr id="5" name="TextBox 4"/>
+      <p:pic>
+        <p:nvPicPr>
+          <p:cNvPr id="5" name="Picture 4" descr="circle-check.png"/>
+          <p:cNvPicPr>
+            <a:picLocks noChangeAspect="1"/>
+          </p:cNvPicPr>
+          <p:nvPr/>
+        </p:nvPicPr>
+        <p:blipFill>
+          <a:blip r:embed="rId3"/>
+          <a:stretch>
+            <a:fillRect/>
+          </a:stretch>
+        </p:blipFill>
+        <p:spPr>
+          <a:xfrm>
+            <a:off x="777240" y="1453895"/>
+            <a:ext cx="256032" cy="256032"/>
+          </a:xfrm>
+          <a:prstGeom prst="rect">
+            <a:avLst/>
+          </a:prstGeom>
+        </p:spPr>
+      </p:pic>
+      <p:sp>
+        <p:nvSpPr>
+          <p:cNvPr id="6" name="TextBox 5"/>
           <p:cNvSpPr txBox="1"/>
           <p:nvPr/>
         </p:nvSpPr>
         <p:spPr>
           <a:xfrm>
-            <a:off x="777240" y="1508760"/>
-            <a:ext cx="4937760" cy="365760"/>
+            <a:off x="1143000" y="1389888"/>
+            <a:ext cx="10058400" cy="292608"/>
           </a:xfrm>
           <a:prstGeom prst="rect">
             <a:avLst/>
@@ -12561,52 +13293,13 @@
               </a:lnSpc>
             </a:pPr>
             <a:r>
-              <a:rPr sz="1100" b="1">
-                <a:solidFill>
-                  <a:srgbClr val="6E6E6E"/>
-                </a:solidFill>
-                <a:latin typeface="Calibri"/>
-              </a:rPr>
-              <a:t>KADROLU ALIMDA KALMA ORANI</a:t>
-            </a:r>
-          </a:p>
-        </p:txBody>
-      </p:sp>
-      <p:sp>
-        <p:nvSpPr>
-          <p:cNvPr id="6" name="TextBox 5"/>
-          <p:cNvSpPr txBox="1"/>
-          <p:nvPr/>
-        </p:nvSpPr>
-        <p:spPr>
-          <a:xfrm>
-            <a:off x="777240" y="1874519"/>
-            <a:ext cx="4937760" cy="822960"/>
-          </a:xfrm>
-          <a:prstGeom prst="rect">
-            <a:avLst/>
-          </a:prstGeom>
-          <a:noFill/>
-        </p:spPr>
-        <p:txBody>
-          <a:bodyPr wrap="square" anchor="t">
-            <a:spAutoFit/>
-          </a:bodyPr>
-          <a:lstStyle/>
-          <a:p>
-            <a:pPr algn="l">
-              <a:lnSpc>
-                <a:spcPct val="100000"/>
-              </a:lnSpc>
-            </a:pPr>
-            <a:r>
-              <a:rPr sz="3200" b="1">
+              <a:rPr sz="1150" b="1">
                 <a:solidFill>
                   <a:srgbClr val="A6001A"/>
                 </a:solidFill>
                 <a:latin typeface="Calibri"/>
               </a:rPr>
-              <a:t>%95,7 → %75,0</a:t>
+              <a:t>Büyüme kurumsal kanaldan mı geldi?</a:t>
             </a:r>
           </a:p>
         </p:txBody>
@@ -12619,8 +13312,8 @@
         </p:nvSpPr>
         <p:spPr>
           <a:xfrm>
-            <a:off x="777240" y="2697480"/>
-            <a:ext cx="4937760" cy="868680"/>
+            <a:off x="1143000" y="1673352"/>
+            <a:ext cx="10058400" cy="356615"/>
           </a:xfrm>
           <a:prstGeom prst="rect">
             <a:avLst/>
@@ -12635,17 +13328,17 @@
           <a:p>
             <a:pPr algn="l">
               <a:lnSpc>
-                <a:spcPct val="110000"/>
+                <a:spcPct val="106000"/>
               </a:lnSpc>
             </a:pPr>
             <a:r>
-              <a:rPr sz="1100" b="0">
+              <a:rPr sz="950" b="0">
                 <a:solidFill>
                   <a:srgbClr val="333333"/>
                 </a:solidFill>
                 <a:latin typeface="Calibri"/>
               </a:rPr>
-              <a:t>İlk 14 günü tamamlama oranı. 32 alımdan 10'u kesim tarihine kadar ayrılmıştır (önceki yıl 24 alımdan 2). Aynı pozisyonun iki kez doldurulması maliyet yaratmaktadır.</a:t>
+              <a:t>Tersi: Sınav Okulları küçüldü. Ocak–Ağustos cirosu 136,1 → 105,6 milyon TL (−%22,4). Mağaza tarafı +%54,9 büyüdü — büyümenin tamamı raftan geldi.</a:t>
             </a:r>
           </a:p>
         </p:txBody>
@@ -12658,8 +13351,8 @@
         </p:nvSpPr>
         <p:spPr>
           <a:xfrm>
-            <a:off x="6172200" y="1371600"/>
-            <a:ext cx="5394960" cy="2286000"/>
+            <a:off x="548640" y="2157984"/>
+            <a:ext cx="11018520" cy="740664"/>
           </a:xfrm>
           <a:prstGeom prst="rect">
             <a:avLst/>
@@ -12704,14 +13397,14 @@
         </p:nvSpPr>
         <p:spPr>
           <a:xfrm>
-            <a:off x="6172200" y="1371600"/>
-            <a:ext cx="68580" cy="2286000"/>
+            <a:off x="548640" y="2157984"/>
+            <a:ext cx="68580" cy="740664"/>
           </a:xfrm>
           <a:prstGeom prst="rect">
             <a:avLst/>
           </a:prstGeom>
           <a:solidFill>
-            <a:srgbClr val="9A9A9A"/>
+            <a:srgbClr val="E30622"/>
           </a:solidFill>
           <a:ln>
             <a:noFill/>
@@ -12740,16 +13433,40 @@
           </a:p>
         </p:txBody>
       </p:sp>
-      <p:sp>
-        <p:nvSpPr>
-          <p:cNvPr id="10" name="TextBox 9"/>
+      <p:pic>
+        <p:nvPicPr>
+          <p:cNvPr id="10" name="Picture 9" descr="circle-check.png"/>
+          <p:cNvPicPr>
+            <a:picLocks noChangeAspect="1"/>
+          </p:cNvPicPr>
+          <p:nvPr/>
+        </p:nvPicPr>
+        <p:blipFill>
+          <a:blip r:embed="rId3"/>
+          <a:stretch>
+            <a:fillRect/>
+          </a:stretch>
+        </p:blipFill>
+        <p:spPr>
+          <a:xfrm>
+            <a:off x="777240" y="2286000"/>
+            <a:ext cx="256032" cy="256032"/>
+          </a:xfrm>
+          <a:prstGeom prst="rect">
+            <a:avLst/>
+          </a:prstGeom>
+        </p:spPr>
+      </p:pic>
+      <p:sp>
+        <p:nvSpPr>
+          <p:cNvPr id="11" name="TextBox 10"/>
           <p:cNvSpPr txBox="1"/>
           <p:nvPr/>
         </p:nvSpPr>
         <p:spPr>
           <a:xfrm>
-            <a:off x="6400800" y="1508760"/>
-            <a:ext cx="4937760" cy="365760"/>
+            <a:off x="1143000" y="2221991"/>
+            <a:ext cx="10058400" cy="292608"/>
           </a:xfrm>
           <a:prstGeom prst="rect">
             <a:avLst/>
@@ -12768,27 +13485,180 @@
               </a:lnSpc>
             </a:pPr>
             <a:r>
-              <a:rPr sz="1100" b="1">
+              <a:rPr sz="1150" b="1">
                 <a:solidFill>
-                  <a:srgbClr val="6E6E6E"/>
+                  <a:srgbClr val="A6001A"/>
                 </a:solidFill>
                 <a:latin typeface="Calibri"/>
               </a:rPr>
-              <a:t>SEZONLUK KADRODA KALMA ORANI</a:t>
+              <a:t>Ciro artışı enflasyon kaynaklı mı?</a:t>
             </a:r>
           </a:p>
         </p:txBody>
       </p:sp>
       <p:sp>
         <p:nvSpPr>
-          <p:cNvPr id="11" name="TextBox 10"/>
+          <p:cNvPr id="12" name="TextBox 11"/>
           <p:cNvSpPr txBox="1"/>
           <p:nvPr/>
         </p:nvSpPr>
         <p:spPr>
           <a:xfrm>
-            <a:off x="6400800" y="1874519"/>
-            <a:ext cx="4937760" cy="822960"/>
+            <a:off x="1143000" y="2505456"/>
+            <a:ext cx="10058400" cy="356615"/>
+          </a:xfrm>
+          <a:prstGeom prst="rect">
+            <a:avLst/>
+          </a:prstGeom>
+          <a:noFill/>
+        </p:spPr>
+        <p:txBody>
+          <a:bodyPr wrap="square" anchor="t">
+            <a:spAutoFit/>
+          </a:bodyPr>
+          <a:lstStyle/>
+          <a:p>
+            <a:pPr algn="l">
+              <a:lnSpc>
+                <a:spcPct val="106000"/>
+              </a:lnSpc>
+            </a:pPr>
+            <a:r>
+              <a:rPr sz="950" b="0">
+                <a:solidFill>
+                  <a:srgbClr val="333333"/>
+                </a:solidFill>
+                <a:latin typeface="Calibri"/>
+              </a:rPr>
+              <a:t>Kısmen doğru: eşleşen ürünlerde fiyat endeksi +%19,8. Bu yüzden savunma ciroya değil ADEDE dayanıyor: ürün adedi +%34,9 ve adet fiyattan etkilenmez.</a:t>
+            </a:r>
+          </a:p>
+        </p:txBody>
+      </p:sp>
+      <p:sp>
+        <p:nvSpPr>
+          <p:cNvPr id="13" name="Rectangle 12"/>
+          <p:cNvSpPr/>
+          <p:nvPr/>
+        </p:nvSpPr>
+        <p:spPr>
+          <a:xfrm>
+            <a:off x="548640" y="2990087"/>
+            <a:ext cx="11018520" cy="740664"/>
+          </a:xfrm>
+          <a:prstGeom prst="rect">
+            <a:avLst/>
+          </a:prstGeom>
+          <a:solidFill>
+            <a:srgbClr val="FFFFFF"/>
+          </a:solidFill>
+          <a:ln w="12700">
+            <a:solidFill>
+              <a:srgbClr val="DCDCDC"/>
+            </a:solidFill>
+          </a:ln>
+          <a:effectLst/>
+        </p:spPr>
+        <p:style>
+          <a:lnRef idx="1">
+            <a:schemeClr val="accent1"/>
+          </a:lnRef>
+          <a:fillRef idx="3">
+            <a:schemeClr val="accent1"/>
+          </a:fillRef>
+          <a:effectRef idx="2">
+            <a:schemeClr val="accent1"/>
+          </a:effectRef>
+          <a:fontRef idx="minor">
+            <a:schemeClr val="lt1"/>
+          </a:fontRef>
+        </p:style>
+        <p:txBody>
+          <a:bodyPr rtlCol="0" anchor="ctr"/>
+          <a:lstStyle/>
+          <a:p>
+            <a:pPr algn="ctr"/>
+          </a:p>
+        </p:txBody>
+      </p:sp>
+      <p:sp>
+        <p:nvSpPr>
+          <p:cNvPr id="14" name="Rectangle 13"/>
+          <p:cNvSpPr/>
+          <p:nvPr/>
+        </p:nvSpPr>
+        <p:spPr>
+          <a:xfrm>
+            <a:off x="548640" y="2990087"/>
+            <a:ext cx="68580" cy="740664"/>
+          </a:xfrm>
+          <a:prstGeom prst="rect">
+            <a:avLst/>
+          </a:prstGeom>
+          <a:solidFill>
+            <a:srgbClr val="E30622"/>
+          </a:solidFill>
+          <a:ln>
+            <a:noFill/>
+          </a:ln>
+          <a:effectLst/>
+        </p:spPr>
+        <p:style>
+          <a:lnRef idx="1">
+            <a:schemeClr val="accent1"/>
+          </a:lnRef>
+          <a:fillRef idx="3">
+            <a:schemeClr val="accent1"/>
+          </a:fillRef>
+          <a:effectRef idx="2">
+            <a:schemeClr val="accent1"/>
+          </a:effectRef>
+          <a:fontRef idx="minor">
+            <a:schemeClr val="lt1"/>
+          </a:fontRef>
+        </p:style>
+        <p:txBody>
+          <a:bodyPr rtlCol="0" anchor="ctr"/>
+          <a:lstStyle/>
+          <a:p>
+            <a:pPr algn="ctr"/>
+          </a:p>
+        </p:txBody>
+      </p:sp>
+      <p:pic>
+        <p:nvPicPr>
+          <p:cNvPr id="15" name="Picture 14" descr="circle-check.png"/>
+          <p:cNvPicPr>
+            <a:picLocks noChangeAspect="1"/>
+          </p:cNvPicPr>
+          <p:nvPr/>
+        </p:nvPicPr>
+        <p:blipFill>
+          <a:blip r:embed="rId3"/>
+          <a:stretch>
+            <a:fillRect/>
+          </a:stretch>
+        </p:blipFill>
+        <p:spPr>
+          <a:xfrm>
+            <a:off x="777240" y="3118103"/>
+            <a:ext cx="256032" cy="256032"/>
+          </a:xfrm>
+          <a:prstGeom prst="rect">
+            <a:avLst/>
+          </a:prstGeom>
+        </p:spPr>
+      </p:pic>
+      <p:sp>
+        <p:nvSpPr>
+          <p:cNvPr id="16" name="TextBox 15"/>
+          <p:cNvSpPr txBox="1"/>
+          <p:nvPr/>
+        </p:nvSpPr>
+        <p:spPr>
+          <a:xfrm>
+            <a:off x="1143000" y="3054095"/>
+            <a:ext cx="10058400" cy="292608"/>
           </a:xfrm>
           <a:prstGeom prst="rect">
             <a:avLst/>
@@ -12807,27 +13677,27 @@
               </a:lnSpc>
             </a:pPr>
             <a:r>
-              <a:rPr sz="3200" b="1">
+              <a:rPr sz="1150" b="1">
                 <a:solidFill>
                   <a:srgbClr val="A6001A"/>
                 </a:solidFill>
                 <a:latin typeface="Calibri"/>
               </a:rPr>
-              <a:t>%93,9 → %95,1</a:t>
+              <a:t>Kasa sistemi değişti, karşılaştırma geçerli mi?</a:t>
             </a:r>
           </a:p>
         </p:txBody>
       </p:sp>
       <p:sp>
         <p:nvSpPr>
-          <p:cNvPr id="12" name="TextBox 11"/>
+          <p:cNvPr id="17" name="TextBox 16"/>
           <p:cNvSpPr txBox="1"/>
           <p:nvPr/>
         </p:nvSpPr>
         <p:spPr>
           <a:xfrm>
-            <a:off x="6400800" y="2697480"/>
-            <a:ext cx="4937760" cy="868680"/>
+            <a:off x="1143000" y="3337559"/>
+            <a:ext cx="10058400" cy="356615"/>
           </a:xfrm>
           <a:prstGeom prst="rect">
             <a:avLst/>
@@ -12842,41 +13712,41 @@
           <a:p>
             <a:pPr algn="l">
               <a:lnSpc>
-                <a:spcPct val="110000"/>
+                <a:spcPct val="106000"/>
               </a:lnSpc>
             </a:pPr>
             <a:r>
-              <a:rPr sz="1100" b="0">
+              <a:rPr sz="950" b="0">
                 <a:solidFill>
                   <a:srgbClr val="333333"/>
                 </a:solidFill>
                 <a:latin typeface="Calibri"/>
               </a:rPr>
-              <a:t>Sezonluk kadroda kalma oranı yükselmiştir. Sorun sezonluk alımda değil, kadrolu alımın ilk haftasındadır.</a:t>
+              <a:t>Bu yüzden ölçüm POS'tan değil ERP'den (DerinSIS) alındı — iki yılda da aynı kaynak, aynı belge tipi. Temmuz 2025 kasa geçişi ölçüye girmiyor.</a:t>
             </a:r>
           </a:p>
         </p:txBody>
       </p:sp>
       <p:sp>
         <p:nvSpPr>
-          <p:cNvPr id="13" name="Rounded Rectangle 12"/>
+          <p:cNvPr id="18" name="Rectangle 17"/>
           <p:cNvSpPr/>
           <p:nvPr/>
         </p:nvSpPr>
         <p:spPr>
           <a:xfrm>
-            <a:off x="548640" y="3840480"/>
-            <a:ext cx="11018520" cy="1600200"/>
-          </a:xfrm>
-          <a:prstGeom prst="roundRect">
+            <a:off x="548640" y="3822191"/>
+            <a:ext cx="11018520" cy="740664"/>
+          </a:xfrm>
+          <a:prstGeom prst="rect">
             <a:avLst/>
           </a:prstGeom>
           <a:solidFill>
-            <a:srgbClr val="F2F2F2"/>
+            <a:srgbClr val="FFFFFF"/>
           </a:solidFill>
-          <a:ln w="19050">
+          <a:ln w="12700">
             <a:solidFill>
-              <a:srgbClr val="E30622"/>
+              <a:srgbClr val="DCDCDC"/>
             </a:solidFill>
           </a:ln>
           <a:effectLst/>
@@ -12905,14 +13775,82 @@
       </p:sp>
       <p:sp>
         <p:nvSpPr>
-          <p:cNvPr id="14" name="TextBox 13"/>
+          <p:cNvPr id="19" name="Rectangle 18"/>
+          <p:cNvSpPr/>
+          <p:nvPr/>
+        </p:nvSpPr>
+        <p:spPr>
+          <a:xfrm>
+            <a:off x="548640" y="3822191"/>
+            <a:ext cx="68580" cy="740664"/>
+          </a:xfrm>
+          <a:prstGeom prst="rect">
+            <a:avLst/>
+          </a:prstGeom>
+          <a:solidFill>
+            <a:srgbClr val="E30622"/>
+          </a:solidFill>
+          <a:ln>
+            <a:noFill/>
+          </a:ln>
+          <a:effectLst/>
+        </p:spPr>
+        <p:style>
+          <a:lnRef idx="1">
+            <a:schemeClr val="accent1"/>
+          </a:lnRef>
+          <a:fillRef idx="3">
+            <a:schemeClr val="accent1"/>
+          </a:fillRef>
+          <a:effectRef idx="2">
+            <a:schemeClr val="accent1"/>
+          </a:effectRef>
+          <a:fontRef idx="minor">
+            <a:schemeClr val="lt1"/>
+          </a:fontRef>
+        </p:style>
+        <p:txBody>
+          <a:bodyPr rtlCol="0" anchor="ctr"/>
+          <a:lstStyle/>
+          <a:p>
+            <a:pPr algn="ctr"/>
+          </a:p>
+        </p:txBody>
+      </p:sp>
+      <p:pic>
+        <p:nvPicPr>
+          <p:cNvPr id="20" name="Picture 19" descr="circle-check.png"/>
+          <p:cNvPicPr>
+            <a:picLocks noChangeAspect="1"/>
+          </p:cNvPicPr>
+          <p:nvPr/>
+        </p:nvPicPr>
+        <p:blipFill>
+          <a:blip r:embed="rId3"/>
+          <a:stretch>
+            <a:fillRect/>
+          </a:stretch>
+        </p:blipFill>
+        <p:spPr>
+          <a:xfrm>
+            <a:off x="777240" y="3950207"/>
+            <a:ext cx="256032" cy="256032"/>
+          </a:xfrm>
+          <a:prstGeom prst="rect">
+            <a:avLst/>
+          </a:prstGeom>
+        </p:spPr>
+      </p:pic>
+      <p:sp>
+        <p:nvSpPr>
+          <p:cNvPr id="21" name="TextBox 20"/>
           <p:cNvSpPr txBox="1"/>
           <p:nvPr/>
         </p:nvSpPr>
         <p:spPr>
           <a:xfrm>
-            <a:off x="822960" y="3977639"/>
-            <a:ext cx="10515600" cy="1371600"/>
+            <a:off x="1143000" y="3886200"/>
+            <a:ext cx="10058400" cy="292608"/>
           </a:xfrm>
           <a:prstGeom prst="rect">
             <a:avLst/>
@@ -12927,42 +13865,255 @@
           <a:p>
             <a:pPr algn="l">
               <a:lnSpc>
-                <a:spcPct val="125000"/>
+                <a:spcPct val="100000"/>
               </a:lnSpc>
             </a:pPr>
             <a:r>
-              <a:rPr sz="1350" b="1">
+              <a:rPr sz="1150" b="1">
                 <a:solidFill>
                   <a:srgbClr val="A6001A"/>
                 </a:solidFill>
                 <a:latin typeface="Calibri"/>
               </a:rPr>
-              <a:t>Planlanan Aksiyonlar</a:t>
+              <a:t>Sezonluk personel erken mi alındı?</a:t>
             </a:r>
           </a:p>
+        </p:txBody>
+      </p:sp>
+      <p:sp>
+        <p:nvSpPr>
+          <p:cNvPr id="22" name="TextBox 21"/>
+          <p:cNvSpPr txBox="1"/>
+          <p:nvPr/>
+        </p:nvSpPr>
+        <p:spPr>
+          <a:xfrm>
+            <a:off x="1143000" y="4169663"/>
+            <a:ext cx="10058400" cy="356615"/>
+          </a:xfrm>
+          <a:prstGeom prst="rect">
+            <a:avLst/>
+          </a:prstGeom>
+          <a:noFill/>
+        </p:spPr>
+        <p:txBody>
+          <a:bodyPr wrap="square" anchor="t">
+            <a:spAutoFit/>
+          </a:bodyPr>
+          <a:lstStyle/>
           <a:p>
             <a:pPr algn="l">
               <a:lnSpc>
-                <a:spcPct val="125000"/>
+                <a:spcPct val="106000"/>
               </a:lnSpc>
             </a:pPr>
             <a:r>
-              <a:rPr sz="1200" b="0">
+              <a:rPr sz="950" b="0">
                 <a:solidFill>
                   <a:srgbClr val="333333"/>
                 </a:solidFill>
                 <a:latin typeface="Calibri"/>
               </a:rPr>
-              <a:t>• En bozuk üç nokta: Özlüce, Heykel, Merkez Depo → ilk hafta karşılama protokolü.
-• İdari İşler pozisyonunda ücret–vardiya revizyonu.
-• Ölçüt: gelecek sezon Eylül öncesi kayıp %20'den %12'ye (2025 seviyesi).</a:t>
+              <a:t>Hayır: takvim ölçüsünde 2026 alımı ortalama 2,5 gün DAHA GEÇ; Temmuz ve öncesi alım 6 kişiden 2'ye indi. Artış 1–14 Ağustos'ta ve o iki haftada ürün adedi +%25,1 büyüdü — alım işi takip etti.</a:t>
             </a:r>
           </a:p>
         </p:txBody>
       </p:sp>
       <p:sp>
         <p:nvSpPr>
-          <p:cNvPr id="15" name="TextBox 14"/>
+          <p:cNvPr id="23" name="Rectangle 22"/>
+          <p:cNvSpPr/>
+          <p:nvPr/>
+        </p:nvSpPr>
+        <p:spPr>
+          <a:xfrm>
+            <a:off x="548640" y="4654296"/>
+            <a:ext cx="11018520" cy="740664"/>
+          </a:xfrm>
+          <a:prstGeom prst="rect">
+            <a:avLst/>
+          </a:prstGeom>
+          <a:solidFill>
+            <a:srgbClr val="FFFFFF"/>
+          </a:solidFill>
+          <a:ln w="12700">
+            <a:solidFill>
+              <a:srgbClr val="DCDCDC"/>
+            </a:solidFill>
+          </a:ln>
+          <a:effectLst/>
+        </p:spPr>
+        <p:style>
+          <a:lnRef idx="1">
+            <a:schemeClr val="accent1"/>
+          </a:lnRef>
+          <a:fillRef idx="3">
+            <a:schemeClr val="accent1"/>
+          </a:fillRef>
+          <a:effectRef idx="2">
+            <a:schemeClr val="accent1"/>
+          </a:effectRef>
+          <a:fontRef idx="minor">
+            <a:schemeClr val="lt1"/>
+          </a:fontRef>
+        </p:style>
+        <p:txBody>
+          <a:bodyPr rtlCol="0" anchor="ctr"/>
+          <a:lstStyle/>
+          <a:p>
+            <a:pPr algn="ctr"/>
+          </a:p>
+        </p:txBody>
+      </p:sp>
+      <p:sp>
+        <p:nvSpPr>
+          <p:cNvPr id="24" name="Rectangle 23"/>
+          <p:cNvSpPr/>
+          <p:nvPr/>
+        </p:nvSpPr>
+        <p:spPr>
+          <a:xfrm>
+            <a:off x="548640" y="4654296"/>
+            <a:ext cx="68580" cy="740664"/>
+          </a:xfrm>
+          <a:prstGeom prst="rect">
+            <a:avLst/>
+          </a:prstGeom>
+          <a:solidFill>
+            <a:srgbClr val="E30622"/>
+          </a:solidFill>
+          <a:ln>
+            <a:noFill/>
+          </a:ln>
+          <a:effectLst/>
+        </p:spPr>
+        <p:style>
+          <a:lnRef idx="1">
+            <a:schemeClr val="accent1"/>
+          </a:lnRef>
+          <a:fillRef idx="3">
+            <a:schemeClr val="accent1"/>
+          </a:fillRef>
+          <a:effectRef idx="2">
+            <a:schemeClr val="accent1"/>
+          </a:effectRef>
+          <a:fontRef idx="minor">
+            <a:schemeClr val="lt1"/>
+          </a:fontRef>
+        </p:style>
+        <p:txBody>
+          <a:bodyPr rtlCol="0" anchor="ctr"/>
+          <a:lstStyle/>
+          <a:p>
+            <a:pPr algn="ctr"/>
+          </a:p>
+        </p:txBody>
+      </p:sp>
+      <p:pic>
+        <p:nvPicPr>
+          <p:cNvPr id="25" name="Picture 24" descr="circle-check.png"/>
+          <p:cNvPicPr>
+            <a:picLocks noChangeAspect="1"/>
+          </p:cNvPicPr>
+          <p:nvPr/>
+        </p:nvPicPr>
+        <p:blipFill>
+          <a:blip r:embed="rId3"/>
+          <a:stretch>
+            <a:fillRect/>
+          </a:stretch>
+        </p:blipFill>
+        <p:spPr>
+          <a:xfrm>
+            <a:off x="777240" y="4782312"/>
+            <a:ext cx="256032" cy="256032"/>
+          </a:xfrm>
+          <a:prstGeom prst="rect">
+            <a:avLst/>
+          </a:prstGeom>
+        </p:spPr>
+      </p:pic>
+      <p:sp>
+        <p:nvSpPr>
+          <p:cNvPr id="26" name="TextBox 25"/>
+          <p:cNvSpPr txBox="1"/>
+          <p:nvPr/>
+        </p:nvSpPr>
+        <p:spPr>
+          <a:xfrm>
+            <a:off x="1143000" y="4718304"/>
+            <a:ext cx="10058400" cy="292608"/>
+          </a:xfrm>
+          <a:prstGeom prst="rect">
+            <a:avLst/>
+          </a:prstGeom>
+          <a:noFill/>
+        </p:spPr>
+        <p:txBody>
+          <a:bodyPr wrap="square" anchor="t">
+            <a:spAutoFit/>
+          </a:bodyPr>
+          <a:lstStyle/>
+          <a:p>
+            <a:pPr algn="l">
+              <a:lnSpc>
+                <a:spcPct val="100000"/>
+              </a:lnSpc>
+            </a:pPr>
+            <a:r>
+              <a:rPr sz="1150" b="1">
+                <a:solidFill>
+                  <a:srgbClr val="A6001A"/>
+                </a:solidFill>
+                <a:latin typeface="Calibri"/>
+              </a:rPr>
+              <a:t>Ağustos ayında ivme düşüşü var mı?</a:t>
+            </a:r>
+          </a:p>
+        </p:txBody>
+      </p:sp>
+      <p:sp>
+        <p:nvSpPr>
+          <p:cNvPr id="27" name="TextBox 26"/>
+          <p:cNvSpPr txBox="1"/>
+          <p:nvPr/>
+        </p:nvSpPr>
+        <p:spPr>
+          <a:xfrm>
+            <a:off x="1143000" y="5001768"/>
+            <a:ext cx="10058400" cy="356615"/>
+          </a:xfrm>
+          <a:prstGeom prst="rect">
+            <a:avLst/>
+          </a:prstGeom>
+          <a:noFill/>
+        </p:spPr>
+        <p:txBody>
+          <a:bodyPr wrap="square" anchor="t">
+            <a:spAutoFit/>
+          </a:bodyPr>
+          <a:lstStyle/>
+          <a:p>
+            <a:pPr algn="l">
+              <a:lnSpc>
+                <a:spcPct val="106000"/>
+              </a:lnSpc>
+            </a:pPr>
+            <a:r>
+              <a:rPr sz="950" b="0">
+                <a:solidFill>
+                  <a:srgbClr val="333333"/>
+                </a:solidFill>
+                <a:latin typeface="Calibri"/>
+              </a:rPr>
+              <a:t>Takvim etkisi: okullar 2025'te 8 Eylül, 2026'da 14 Eylül açıldı — sezon 6 gün geriye kaydı. Açılışa hizalanınca haftalık büyüme %65–79 bandında düz seyrediyor.</a:t>
+            </a:r>
+          </a:p>
+        </p:txBody>
+      </p:sp>
+      <p:sp>
+        <p:nvSpPr>
+          <p:cNvPr id="28" name="TextBox 27"/>
           <p:cNvSpPr txBox="1"/>
           <p:nvPr/>
         </p:nvSpPr>
@@ -12994,14 +14145,14 @@
                 </a:solidFill>
                 <a:latin typeface="Calibri"/>
               </a:rPr>
-              <a:t>* Kapsam: beş mağazanın tamamı — FSM · Özlüce · İst. Yolu · Heykel · Şura · Ölçüm noktaları: 30.06 tabanı ve 31.08 kesimi (tarih aralığı değil, o gün fiilen çalışan kişi) Tutunma ölçümü mağaza kadrosu üzerinden yapılmıştır.</a:t>
+              <a:t>* Kapsam: üç POS mağazası — FSM · Özlüce · İst. Yolu · Dönem: 01.01 – 31.08 (her iki yıl, kümülatif) (kurumsal/mağaza kıyası) · hizalı dönem: 01.07 – 25.08.2025 (2025) · 07.07 – 31.08.2026 (2026), her iki yıl 56 gün, okul açılışına hizalı</a:t>
             </a:r>
           </a:p>
         </p:txBody>
       </p:sp>
       <p:sp>
         <p:nvSpPr>
-          <p:cNvPr id="16" name="TextBox 15"/>
+          <p:cNvPr id="29" name="TextBox 28"/>
           <p:cNvSpPr txBox="1"/>
           <p:nvPr/>
         </p:nvSpPr>
@@ -13077,6 +14228,659 @@
             <a:spLocks noGrp="1"/>
           </p:cNvSpPr>
           <p:nvPr>
+            <p:ph type="title"/>
+          </p:nvPr>
+        </p:nvSpPr>
+        <p:spPr>
+          <a:xfrm>
+            <a:off x="548640" y="274320"/>
+            <a:ext cx="11018520" cy="914400"/>
+          </a:xfrm>
+        </p:spPr>
+        <p:txBody>
+          <a:bodyPr/>
+          <a:lstStyle/>
+          <a:p>
+            <a:r>
+              <a:t>İyileştirme Alanı</a:t>
+            </a:r>
+          </a:p>
+        </p:txBody>
+      </p:sp>
+      <p:sp>
+        <p:nvSpPr>
+          <p:cNvPr id="3" name="Rectangle 2"/>
+          <p:cNvSpPr/>
+          <p:nvPr/>
+        </p:nvSpPr>
+        <p:spPr>
+          <a:xfrm>
+            <a:off x="548640" y="1371600"/>
+            <a:ext cx="5394960" cy="2286000"/>
+          </a:xfrm>
+          <a:prstGeom prst="rect">
+            <a:avLst/>
+          </a:prstGeom>
+          <a:solidFill>
+            <a:srgbClr val="FFFFFF"/>
+          </a:solidFill>
+          <a:ln w="12700">
+            <a:solidFill>
+              <a:srgbClr val="DCDCDC"/>
+            </a:solidFill>
+          </a:ln>
+          <a:effectLst/>
+        </p:spPr>
+        <p:style>
+          <a:lnRef idx="1">
+            <a:schemeClr val="accent1"/>
+          </a:lnRef>
+          <a:fillRef idx="3">
+            <a:schemeClr val="accent1"/>
+          </a:fillRef>
+          <a:effectRef idx="2">
+            <a:schemeClr val="accent1"/>
+          </a:effectRef>
+          <a:fontRef idx="minor">
+            <a:schemeClr val="lt1"/>
+          </a:fontRef>
+        </p:style>
+        <p:txBody>
+          <a:bodyPr rtlCol="0" anchor="ctr"/>
+          <a:lstStyle/>
+          <a:p>
+            <a:pPr algn="ctr"/>
+          </a:p>
+        </p:txBody>
+      </p:sp>
+      <p:sp>
+        <p:nvSpPr>
+          <p:cNvPr id="4" name="Rectangle 3"/>
+          <p:cNvSpPr/>
+          <p:nvPr/>
+        </p:nvSpPr>
+        <p:spPr>
+          <a:xfrm>
+            <a:off x="548640" y="1371600"/>
+            <a:ext cx="68580" cy="2286000"/>
+          </a:xfrm>
+          <a:prstGeom prst="rect">
+            <a:avLst/>
+          </a:prstGeom>
+          <a:solidFill>
+            <a:srgbClr val="A6001A"/>
+          </a:solidFill>
+          <a:ln>
+            <a:noFill/>
+          </a:ln>
+          <a:effectLst/>
+        </p:spPr>
+        <p:style>
+          <a:lnRef idx="1">
+            <a:schemeClr val="accent1"/>
+          </a:lnRef>
+          <a:fillRef idx="3">
+            <a:schemeClr val="accent1"/>
+          </a:fillRef>
+          <a:effectRef idx="2">
+            <a:schemeClr val="accent1"/>
+          </a:effectRef>
+          <a:fontRef idx="minor">
+            <a:schemeClr val="lt1"/>
+          </a:fontRef>
+        </p:style>
+        <p:txBody>
+          <a:bodyPr rtlCol="0" anchor="ctr"/>
+          <a:lstStyle/>
+          <a:p>
+            <a:pPr algn="ctr"/>
+          </a:p>
+        </p:txBody>
+      </p:sp>
+      <p:sp>
+        <p:nvSpPr>
+          <p:cNvPr id="5" name="TextBox 4"/>
+          <p:cNvSpPr txBox="1"/>
+          <p:nvPr/>
+        </p:nvSpPr>
+        <p:spPr>
+          <a:xfrm>
+            <a:off x="777240" y="1508760"/>
+            <a:ext cx="4937760" cy="365760"/>
+          </a:xfrm>
+          <a:prstGeom prst="rect">
+            <a:avLst/>
+          </a:prstGeom>
+          <a:noFill/>
+        </p:spPr>
+        <p:txBody>
+          <a:bodyPr wrap="square" anchor="t">
+            <a:spAutoFit/>
+          </a:bodyPr>
+          <a:lstStyle/>
+          <a:p>
+            <a:pPr algn="l">
+              <a:lnSpc>
+                <a:spcPct val="100000"/>
+              </a:lnSpc>
+            </a:pPr>
+            <a:r>
+              <a:rPr sz="1100" b="1">
+                <a:solidFill>
+                  <a:srgbClr val="6E6E6E"/>
+                </a:solidFill>
+                <a:latin typeface="Calibri"/>
+              </a:rPr>
+              <a:t>KADROLU ALIMDA KALMA ORANI</a:t>
+            </a:r>
+          </a:p>
+        </p:txBody>
+      </p:sp>
+      <p:sp>
+        <p:nvSpPr>
+          <p:cNvPr id="6" name="TextBox 5"/>
+          <p:cNvSpPr txBox="1"/>
+          <p:nvPr/>
+        </p:nvSpPr>
+        <p:spPr>
+          <a:xfrm>
+            <a:off x="777240" y="1874519"/>
+            <a:ext cx="4937760" cy="822960"/>
+          </a:xfrm>
+          <a:prstGeom prst="rect">
+            <a:avLst/>
+          </a:prstGeom>
+          <a:noFill/>
+        </p:spPr>
+        <p:txBody>
+          <a:bodyPr wrap="square" anchor="t">
+            <a:spAutoFit/>
+          </a:bodyPr>
+          <a:lstStyle/>
+          <a:p>
+            <a:pPr algn="l">
+              <a:lnSpc>
+                <a:spcPct val="100000"/>
+              </a:lnSpc>
+            </a:pPr>
+            <a:r>
+              <a:rPr sz="3200" b="1">
+                <a:solidFill>
+                  <a:srgbClr val="A6001A"/>
+                </a:solidFill>
+                <a:latin typeface="Calibri"/>
+              </a:rPr>
+              <a:t>%95,7 → %75,0</a:t>
+            </a:r>
+          </a:p>
+        </p:txBody>
+      </p:sp>
+      <p:sp>
+        <p:nvSpPr>
+          <p:cNvPr id="7" name="TextBox 6"/>
+          <p:cNvSpPr txBox="1"/>
+          <p:nvPr/>
+        </p:nvSpPr>
+        <p:spPr>
+          <a:xfrm>
+            <a:off x="777240" y="2697480"/>
+            <a:ext cx="4937760" cy="868680"/>
+          </a:xfrm>
+          <a:prstGeom prst="rect">
+            <a:avLst/>
+          </a:prstGeom>
+          <a:noFill/>
+        </p:spPr>
+        <p:txBody>
+          <a:bodyPr wrap="square" anchor="t">
+            <a:spAutoFit/>
+          </a:bodyPr>
+          <a:lstStyle/>
+          <a:p>
+            <a:pPr algn="l">
+              <a:lnSpc>
+                <a:spcPct val="110000"/>
+              </a:lnSpc>
+            </a:pPr>
+            <a:r>
+              <a:rPr sz="1100" b="0">
+                <a:solidFill>
+                  <a:srgbClr val="333333"/>
+                </a:solidFill>
+                <a:latin typeface="Calibri"/>
+              </a:rPr>
+              <a:t>İlk 14 günü tamamlama oranı. 32 alımdan 10'u kesim tarihine kadar ayrılmıştır (önceki yıl 24 alımdan 2). Aynı pozisyonun iki kez doldurulması maliyet yaratmaktadır.</a:t>
+            </a:r>
+          </a:p>
+        </p:txBody>
+      </p:sp>
+      <p:sp>
+        <p:nvSpPr>
+          <p:cNvPr id="8" name="Rectangle 7"/>
+          <p:cNvSpPr/>
+          <p:nvPr/>
+        </p:nvSpPr>
+        <p:spPr>
+          <a:xfrm>
+            <a:off x="6172200" y="1371600"/>
+            <a:ext cx="5394960" cy="2286000"/>
+          </a:xfrm>
+          <a:prstGeom prst="rect">
+            <a:avLst/>
+          </a:prstGeom>
+          <a:solidFill>
+            <a:srgbClr val="FFFFFF"/>
+          </a:solidFill>
+          <a:ln w="12700">
+            <a:solidFill>
+              <a:srgbClr val="DCDCDC"/>
+            </a:solidFill>
+          </a:ln>
+          <a:effectLst/>
+        </p:spPr>
+        <p:style>
+          <a:lnRef idx="1">
+            <a:schemeClr val="accent1"/>
+          </a:lnRef>
+          <a:fillRef idx="3">
+            <a:schemeClr val="accent1"/>
+          </a:fillRef>
+          <a:effectRef idx="2">
+            <a:schemeClr val="accent1"/>
+          </a:effectRef>
+          <a:fontRef idx="minor">
+            <a:schemeClr val="lt1"/>
+          </a:fontRef>
+        </p:style>
+        <p:txBody>
+          <a:bodyPr rtlCol="0" anchor="ctr"/>
+          <a:lstStyle/>
+          <a:p>
+            <a:pPr algn="ctr"/>
+          </a:p>
+        </p:txBody>
+      </p:sp>
+      <p:sp>
+        <p:nvSpPr>
+          <p:cNvPr id="9" name="Rectangle 8"/>
+          <p:cNvSpPr/>
+          <p:nvPr/>
+        </p:nvSpPr>
+        <p:spPr>
+          <a:xfrm>
+            <a:off x="6172200" y="1371600"/>
+            <a:ext cx="68580" cy="2286000"/>
+          </a:xfrm>
+          <a:prstGeom prst="rect">
+            <a:avLst/>
+          </a:prstGeom>
+          <a:solidFill>
+            <a:srgbClr val="9A9A9A"/>
+          </a:solidFill>
+          <a:ln>
+            <a:noFill/>
+          </a:ln>
+          <a:effectLst/>
+        </p:spPr>
+        <p:style>
+          <a:lnRef idx="1">
+            <a:schemeClr val="accent1"/>
+          </a:lnRef>
+          <a:fillRef idx="3">
+            <a:schemeClr val="accent1"/>
+          </a:fillRef>
+          <a:effectRef idx="2">
+            <a:schemeClr val="accent1"/>
+          </a:effectRef>
+          <a:fontRef idx="minor">
+            <a:schemeClr val="lt1"/>
+          </a:fontRef>
+        </p:style>
+        <p:txBody>
+          <a:bodyPr rtlCol="0" anchor="ctr"/>
+          <a:lstStyle/>
+          <a:p>
+            <a:pPr algn="ctr"/>
+          </a:p>
+        </p:txBody>
+      </p:sp>
+      <p:sp>
+        <p:nvSpPr>
+          <p:cNvPr id="10" name="TextBox 9"/>
+          <p:cNvSpPr txBox="1"/>
+          <p:nvPr/>
+        </p:nvSpPr>
+        <p:spPr>
+          <a:xfrm>
+            <a:off x="6400800" y="1508760"/>
+            <a:ext cx="4937760" cy="365760"/>
+          </a:xfrm>
+          <a:prstGeom prst="rect">
+            <a:avLst/>
+          </a:prstGeom>
+          <a:noFill/>
+        </p:spPr>
+        <p:txBody>
+          <a:bodyPr wrap="square" anchor="t">
+            <a:spAutoFit/>
+          </a:bodyPr>
+          <a:lstStyle/>
+          <a:p>
+            <a:pPr algn="l">
+              <a:lnSpc>
+                <a:spcPct val="100000"/>
+              </a:lnSpc>
+            </a:pPr>
+            <a:r>
+              <a:rPr sz="1100" b="1">
+                <a:solidFill>
+                  <a:srgbClr val="6E6E6E"/>
+                </a:solidFill>
+                <a:latin typeface="Calibri"/>
+              </a:rPr>
+              <a:t>SEZONLUK KADRODA KALMA ORANI</a:t>
+            </a:r>
+          </a:p>
+        </p:txBody>
+      </p:sp>
+      <p:sp>
+        <p:nvSpPr>
+          <p:cNvPr id="11" name="TextBox 10"/>
+          <p:cNvSpPr txBox="1"/>
+          <p:nvPr/>
+        </p:nvSpPr>
+        <p:spPr>
+          <a:xfrm>
+            <a:off x="6400800" y="1874519"/>
+            <a:ext cx="4937760" cy="822960"/>
+          </a:xfrm>
+          <a:prstGeom prst="rect">
+            <a:avLst/>
+          </a:prstGeom>
+          <a:noFill/>
+        </p:spPr>
+        <p:txBody>
+          <a:bodyPr wrap="square" anchor="t">
+            <a:spAutoFit/>
+          </a:bodyPr>
+          <a:lstStyle/>
+          <a:p>
+            <a:pPr algn="l">
+              <a:lnSpc>
+                <a:spcPct val="100000"/>
+              </a:lnSpc>
+            </a:pPr>
+            <a:r>
+              <a:rPr sz="3200" b="1">
+                <a:solidFill>
+                  <a:srgbClr val="A6001A"/>
+                </a:solidFill>
+                <a:latin typeface="Calibri"/>
+              </a:rPr>
+              <a:t>%93,9 → %95,1</a:t>
+            </a:r>
+          </a:p>
+        </p:txBody>
+      </p:sp>
+      <p:sp>
+        <p:nvSpPr>
+          <p:cNvPr id="12" name="TextBox 11"/>
+          <p:cNvSpPr txBox="1"/>
+          <p:nvPr/>
+        </p:nvSpPr>
+        <p:spPr>
+          <a:xfrm>
+            <a:off x="6400800" y="2697480"/>
+            <a:ext cx="4937760" cy="868680"/>
+          </a:xfrm>
+          <a:prstGeom prst="rect">
+            <a:avLst/>
+          </a:prstGeom>
+          <a:noFill/>
+        </p:spPr>
+        <p:txBody>
+          <a:bodyPr wrap="square" anchor="t">
+            <a:spAutoFit/>
+          </a:bodyPr>
+          <a:lstStyle/>
+          <a:p>
+            <a:pPr algn="l">
+              <a:lnSpc>
+                <a:spcPct val="110000"/>
+              </a:lnSpc>
+            </a:pPr>
+            <a:r>
+              <a:rPr sz="1100" b="0">
+                <a:solidFill>
+                  <a:srgbClr val="333333"/>
+                </a:solidFill>
+                <a:latin typeface="Calibri"/>
+              </a:rPr>
+              <a:t>Sezonluk kadroda kalma oranı yükselmiştir. Sorun sezonluk alımda değil, kadrolu alımın ilk haftasındadır.</a:t>
+            </a:r>
+          </a:p>
+        </p:txBody>
+      </p:sp>
+      <p:sp>
+        <p:nvSpPr>
+          <p:cNvPr id="13" name="Rounded Rectangle 12"/>
+          <p:cNvSpPr/>
+          <p:nvPr/>
+        </p:nvSpPr>
+        <p:spPr>
+          <a:xfrm>
+            <a:off x="548640" y="3840480"/>
+            <a:ext cx="11018520" cy="1600200"/>
+          </a:xfrm>
+          <a:prstGeom prst="roundRect">
+            <a:avLst/>
+          </a:prstGeom>
+          <a:solidFill>
+            <a:srgbClr val="F2F2F2"/>
+          </a:solidFill>
+          <a:ln w="19050">
+            <a:solidFill>
+              <a:srgbClr val="E30622"/>
+            </a:solidFill>
+          </a:ln>
+          <a:effectLst/>
+        </p:spPr>
+        <p:style>
+          <a:lnRef idx="1">
+            <a:schemeClr val="accent1"/>
+          </a:lnRef>
+          <a:fillRef idx="3">
+            <a:schemeClr val="accent1"/>
+          </a:fillRef>
+          <a:effectRef idx="2">
+            <a:schemeClr val="accent1"/>
+          </a:effectRef>
+          <a:fontRef idx="minor">
+            <a:schemeClr val="lt1"/>
+          </a:fontRef>
+        </p:style>
+        <p:txBody>
+          <a:bodyPr rtlCol="0" anchor="ctr"/>
+          <a:lstStyle/>
+          <a:p>
+            <a:pPr algn="ctr"/>
+          </a:p>
+        </p:txBody>
+      </p:sp>
+      <p:sp>
+        <p:nvSpPr>
+          <p:cNvPr id="14" name="TextBox 13"/>
+          <p:cNvSpPr txBox="1"/>
+          <p:nvPr/>
+        </p:nvSpPr>
+        <p:spPr>
+          <a:xfrm>
+            <a:off x="822960" y="3977639"/>
+            <a:ext cx="10515600" cy="1371600"/>
+          </a:xfrm>
+          <a:prstGeom prst="rect">
+            <a:avLst/>
+          </a:prstGeom>
+          <a:noFill/>
+        </p:spPr>
+        <p:txBody>
+          <a:bodyPr wrap="square" anchor="t">
+            <a:spAutoFit/>
+          </a:bodyPr>
+          <a:lstStyle/>
+          <a:p>
+            <a:pPr algn="l">
+              <a:lnSpc>
+                <a:spcPct val="125000"/>
+              </a:lnSpc>
+            </a:pPr>
+            <a:r>
+              <a:rPr sz="1350" b="1">
+                <a:solidFill>
+                  <a:srgbClr val="A6001A"/>
+                </a:solidFill>
+                <a:latin typeface="Calibri"/>
+              </a:rPr>
+              <a:t>Planlanan Aksiyonlar</a:t>
+            </a:r>
+          </a:p>
+          <a:p>
+            <a:pPr algn="l">
+              <a:lnSpc>
+                <a:spcPct val="125000"/>
+              </a:lnSpc>
+            </a:pPr>
+            <a:r>
+              <a:rPr sz="1200" b="0">
+                <a:solidFill>
+                  <a:srgbClr val="333333"/>
+                </a:solidFill>
+                <a:latin typeface="Calibri"/>
+              </a:rPr>
+              <a:t>• En bozuk üç nokta: Özlüce, Heykel, Merkez Depo → ilk hafta karşılama protokolü.
+• İdari İşler pozisyonunda ücret–vardiya revizyonu.
+• Ölçüt: gelecek sezon Eylül öncesi kayıp %20'den %12'ye (2025 seviyesi).</a:t>
+            </a:r>
+          </a:p>
+        </p:txBody>
+      </p:sp>
+      <p:sp>
+        <p:nvSpPr>
+          <p:cNvPr id="15" name="TextBox 14"/>
+          <p:cNvSpPr txBox="1"/>
+          <p:nvPr/>
+        </p:nvSpPr>
+        <p:spPr>
+          <a:xfrm>
+            <a:off x="1920240" y="5669280"/>
+            <a:ext cx="9555480" cy="566928"/>
+          </a:xfrm>
+          <a:prstGeom prst="rect">
+            <a:avLst/>
+          </a:prstGeom>
+          <a:noFill/>
+        </p:spPr>
+        <p:txBody>
+          <a:bodyPr wrap="square" anchor="t">
+            <a:spAutoFit/>
+          </a:bodyPr>
+          <a:lstStyle/>
+          <a:p>
+            <a:pPr algn="l">
+              <a:lnSpc>
+                <a:spcPct val="105000"/>
+              </a:lnSpc>
+            </a:pPr>
+            <a:r>
+              <a:rPr sz="800" b="0">
+                <a:solidFill>
+                  <a:srgbClr val="9A9A9A"/>
+                </a:solidFill>
+                <a:latin typeface="Calibri"/>
+              </a:rPr>
+              <a:t>* Kapsam: beş mağazanın tamamı — FSM · Özlüce · İst. Yolu · Heykel · Şura · Ölçüm noktaları: 30.06 tabanı ve 31.08 kesimi (tarih aralığı değil, o gün fiilen çalışan kişi) Tutunma ölçümü mağaza kadrosu üzerinden yapılmıştır.</a:t>
+            </a:r>
+          </a:p>
+        </p:txBody>
+      </p:sp>
+      <p:sp>
+        <p:nvSpPr>
+          <p:cNvPr id="16" name="TextBox 15"/>
+          <p:cNvSpPr txBox="1"/>
+          <p:nvPr/>
+        </p:nvSpPr>
+        <p:spPr>
+          <a:xfrm>
+            <a:off x="8503920" y="6355080"/>
+            <a:ext cx="3108960" cy="274320"/>
+          </a:xfrm>
+          <a:prstGeom prst="rect">
+            <a:avLst/>
+          </a:prstGeom>
+          <a:noFill/>
+        </p:spPr>
+        <p:txBody>
+          <a:bodyPr wrap="square" anchor="t">
+            <a:spAutoFit/>
+          </a:bodyPr>
+          <a:lstStyle/>
+          <a:p>
+            <a:pPr algn="r">
+              <a:lnSpc>
+                <a:spcPct val="100000"/>
+              </a:lnSpc>
+            </a:pPr>
+            <a:r>
+              <a:rPr sz="900" b="0">
+                <a:solidFill>
+                  <a:srgbClr val="9A9A9A"/>
+                </a:solidFill>
+                <a:latin typeface="Calibri"/>
+              </a:rPr>
+              <a:t>© Fikri Eren 2026</a:t>
+            </a:r>
+          </a:p>
+        </p:txBody>
+      </p:sp>
+    </p:spTree>
+  </p:cSld>
+  <p:clrMapOvr>
+    <a:masterClrMapping/>
+  </p:clrMapOvr>
+</p:sld>
+</file>
+
+<file path=ppt/slides/slide17.xml><?xml version="1.0" encoding="utf-8"?>
+<p:sld xmlns:a="http://schemas.openxmlformats.org/drawingml/2006/main" xmlns:p="http://schemas.openxmlformats.org/presentationml/2006/main" xmlns:r="http://schemas.openxmlformats.org/officeDocument/2006/relationships">
+  <p:cSld>
+    <p:bg>
+      <p:bgPr>
+        <a:blipFill dpi="0" rotWithShape="1">
+          <a:blip r:embed="rId2">
+            <a:lum/>
+          </a:blip>
+          <a:srcRect/>
+          <a:stretch>
+            <a:fillRect/>
+          </a:stretch>
+        </a:blipFill>
+        <a:effectLst/>
+      </p:bgPr>
+    </p:bg>
+    <p:spTree>
+      <p:nvGrpSpPr>
+        <p:cNvPr id="1" name=""/>
+        <p:cNvGrpSpPr/>
+        <p:nvPr/>
+      </p:nvGrpSpPr>
+      <p:grpSpPr/>
+      <p:sp>
+        <p:nvSpPr>
+          <p:cNvPr id="2" name="Title 1"/>
+          <p:cNvSpPr>
+            <a:spLocks noGrp="1"/>
+          </p:cNvSpPr>
+          <p:nvPr>
             <p:ph type="ctrTitle"/>
           </p:nvPr>
         </p:nvSpPr>
@@ -13107,7 +14911,7 @@
           <a:lstStyle/>
           <a:p>
             <a:r>
-              <a:t>Sezon dönemi kadrolu -4 · ürün adedi +%34,9 · personel başına iş +%20,6</a:t>
+              <a:t>Kadrolu −4 · ürün adedi +%34,9 · personel başına iş +%20,6</a:t>
             </a:r>
           </a:p>
         </p:txBody>

--- a/briefings/sezon-kadro-20260902/sunum-kadro-sezon2026.pptx
+++ b/briefings/sezon-kadro-20260902/sunum-kadro-sezon2026.pptx
@@ -25,6 +25,7 @@
     <p:sldId id="270" r:id="rId21"/>
     <p:sldId id="271" r:id="rId22"/>
     <p:sldId id="272" r:id="rId23"/>
+    <p:sldId id="273" r:id="rId24"/>
   </p:sldIdLst>
   <p:sldSz cx="12192000" cy="6858000"/>
   <p:notesSz cx="6858000" cy="9144000"/>
@@ -372,7 +373,7 @@
                   <c:v>574.7176999999999</c:v>
                 </c:pt>
                 <c:pt idx="1">
-                  <c:v>71.83742911999349</c:v>
+                  <c:v>71.83742911999416</c:v>
                 </c:pt>
                 <c:pt idx="2">
                   <c:v>143</c:v>
@@ -427,7 +428,7 @@
                   <c:v>775.19155</c:v>
                 </c:pt>
                 <c:pt idx="1">
-                  <c:v>122.60138084999305</c:v>
+                  <c:v>122.60138084999467</c:v>
                 </c:pt>
                 <c:pt idx="2">
                   <c:v>160</c:v>
@@ -1389,13 +1390,13 @@
                 <c:formatCode>General</c:formatCode>
                 <c:ptCount val="3"/>
                 <c:pt idx="0">
-                  <c:v>57.55862375816203</c:v>
+                  <c:v>57.55862375816305</c:v>
                 </c:pt>
                 <c:pt idx="1">
-                  <c:v>96.12850541161228</c:v>
+                  <c:v>96.12850541161306</c:v>
                 </c:pt>
                 <c:pt idx="2">
-                  <c:v>62.26752661004513</c:v>
+                  <c:v>62.2675266100448</c:v>
                 </c:pt>
               </c:numCache>
             </c:numRef>
@@ -6049,7 +6050,7 @@
                           </a:solidFill>
                           <a:latin typeface="Calibri"/>
                         </a:rPr>
-                        <a:t>Akademi</a:t>
+                        <a:t>Şura</a:t>
                       </a:r>
                     </a:p>
                   </a:txBody>
@@ -6072,7 +6073,7 @@
                           </a:solidFill>
                           <a:latin typeface="Calibri"/>
                         </a:rPr>
-                        <a:t>+1</a:t>
+                        <a:t>—</a:t>
                       </a:r>
                     </a:p>
                   </a:txBody>
@@ -6095,7 +6096,7 @@
                           </a:solidFill>
                           <a:latin typeface="Calibri"/>
                         </a:rPr>
-                        <a:t>0</a:t>
+                        <a:t>—</a:t>
                       </a:r>
                     </a:p>
                   </a:txBody>
@@ -6118,7 +6119,7 @@
                           </a:solidFill>
                           <a:latin typeface="Calibri"/>
                         </a:rPr>
-                        <a:t>+1</a:t>
+                        <a:t>—</a:t>
                       </a:r>
                     </a:p>
                   </a:txBody>
@@ -6141,7 +6142,7 @@
                           </a:solidFill>
                           <a:latin typeface="Calibri"/>
                         </a:rPr>
-                        <a:t>0</a:t>
+                        <a:t>—</a:t>
                       </a:r>
                     </a:p>
                   </a:txBody>
@@ -6164,7 +6165,7 @@
                           </a:solidFill>
                           <a:latin typeface="Calibri"/>
                         </a:rPr>
-                        <a:t>—</a:t>
+                        <a:t>+2</a:t>
                       </a:r>
                     </a:p>
                   </a:txBody>
@@ -6212,7 +6213,7 @@
                           </a:solidFill>
                           <a:latin typeface="Calibri"/>
                         </a:rPr>
-                        <a:t>Şura</a:t>
+                        <a:t>Kasa</a:t>
                       </a:r>
                     </a:p>
                   </a:txBody>
@@ -6235,6 +6236,75 @@
                           </a:solidFill>
                           <a:latin typeface="Calibri"/>
                         </a:rPr>
+                        <a:t>+2</a:t>
+                      </a:r>
+                    </a:p>
+                  </a:txBody>
+                  <a:tcPr>
+                    <a:solidFill>
+                      <a:srgbClr val="F2F2F2"/>
+                    </a:solidFill>
+                  </a:tcPr>
+                </a:tc>
+                <a:tc>
+                  <a:txBody>
+                    <a:bodyPr/>
+                    <a:lstStyle/>
+                    <a:p>
+                      <a:pPr algn="ctr"/>
+                      <a:r>
+                        <a:rPr sz="1050" b="0">
+                          <a:solidFill>
+                            <a:srgbClr val="333333"/>
+                          </a:solidFill>
+                          <a:latin typeface="Calibri"/>
+                        </a:rPr>
+                        <a:t>+1</a:t>
+                      </a:r>
+                    </a:p>
+                  </a:txBody>
+                  <a:tcPr>
+                    <a:solidFill>
+                      <a:srgbClr val="F2F2F2"/>
+                    </a:solidFill>
+                  </a:tcPr>
+                </a:tc>
+                <a:tc>
+                  <a:txBody>
+                    <a:bodyPr/>
+                    <a:lstStyle/>
+                    <a:p>
+                      <a:pPr algn="ctr"/>
+                      <a:r>
+                        <a:rPr sz="1050" b="0">
+                          <a:solidFill>
+                            <a:srgbClr val="333333"/>
+                          </a:solidFill>
+                          <a:latin typeface="Calibri"/>
+                        </a:rPr>
+                        <a:t>-1</a:t>
+                      </a:r>
+                    </a:p>
+                  </a:txBody>
+                  <a:tcPr>
+                    <a:solidFill>
+                      <a:srgbClr val="F2F2F2"/>
+                    </a:solidFill>
+                  </a:tcPr>
+                </a:tc>
+                <a:tc>
+                  <a:txBody>
+                    <a:bodyPr/>
+                    <a:lstStyle/>
+                    <a:p>
+                      <a:pPr algn="ctr"/>
+                      <a:r>
+                        <a:rPr sz="1050" b="0">
+                          <a:solidFill>
+                            <a:srgbClr val="333333"/>
+                          </a:solidFill>
+                          <a:latin typeface="Calibri"/>
+                        </a:rPr>
                         <a:t>—</a:t>
                       </a:r>
                     </a:p>
@@ -6259,75 +6329,6 @@
                           <a:latin typeface="Calibri"/>
                         </a:rPr>
                         <a:t>—</a:t>
-                      </a:r>
-                    </a:p>
-                  </a:txBody>
-                  <a:tcPr>
-                    <a:solidFill>
-                      <a:srgbClr val="F2F2F2"/>
-                    </a:solidFill>
-                  </a:tcPr>
-                </a:tc>
-                <a:tc>
-                  <a:txBody>
-                    <a:bodyPr/>
-                    <a:lstStyle/>
-                    <a:p>
-                      <a:pPr algn="ctr"/>
-                      <a:r>
-                        <a:rPr sz="1050" b="0">
-                          <a:solidFill>
-                            <a:srgbClr val="333333"/>
-                          </a:solidFill>
-                          <a:latin typeface="Calibri"/>
-                        </a:rPr>
-                        <a:t>—</a:t>
-                      </a:r>
-                    </a:p>
-                  </a:txBody>
-                  <a:tcPr>
-                    <a:solidFill>
-                      <a:srgbClr val="F2F2F2"/>
-                    </a:solidFill>
-                  </a:tcPr>
-                </a:tc>
-                <a:tc>
-                  <a:txBody>
-                    <a:bodyPr/>
-                    <a:lstStyle/>
-                    <a:p>
-                      <a:pPr algn="ctr"/>
-                      <a:r>
-                        <a:rPr sz="1050" b="0">
-                          <a:solidFill>
-                            <a:srgbClr val="333333"/>
-                          </a:solidFill>
-                          <a:latin typeface="Calibri"/>
-                        </a:rPr>
-                        <a:t>—</a:t>
-                      </a:r>
-                    </a:p>
-                  </a:txBody>
-                  <a:tcPr>
-                    <a:solidFill>
-                      <a:srgbClr val="F2F2F2"/>
-                    </a:solidFill>
-                  </a:tcPr>
-                </a:tc>
-                <a:tc>
-                  <a:txBody>
-                    <a:bodyPr/>
-                    <a:lstStyle/>
-                    <a:p>
-                      <a:pPr algn="ctr"/>
-                      <a:r>
-                        <a:rPr sz="1050" b="0">
-                          <a:solidFill>
-                            <a:srgbClr val="333333"/>
-                          </a:solidFill>
-                          <a:latin typeface="Calibri"/>
-                        </a:rPr>
-                        <a:t>+2</a:t>
                       </a:r>
                     </a:p>
                   </a:txBody>
@@ -6375,7 +6376,7 @@
                           </a:solidFill>
                           <a:latin typeface="Calibri"/>
                         </a:rPr>
-                        <a:t>Kasa</a:t>
+                        <a:t>Akademi</a:t>
                       </a:r>
                     </a:p>
                   </a:txBody>
@@ -6398,7 +6399,7 @@
                           </a:solidFill>
                           <a:latin typeface="Calibri"/>
                         </a:rPr>
-                        <a:t>+2</a:t>
+                        <a:t>+1</a:t>
                       </a:r>
                     </a:p>
                   </a:txBody>
@@ -6421,6 +6422,29 @@
                           </a:solidFill>
                           <a:latin typeface="Calibri"/>
                         </a:rPr>
+                        <a:t>0</a:t>
+                      </a:r>
+                    </a:p>
+                  </a:txBody>
+                  <a:tcPr>
+                    <a:solidFill>
+                      <a:srgbClr val="FFFFFF"/>
+                    </a:solidFill>
+                  </a:tcPr>
+                </a:tc>
+                <a:tc>
+                  <a:txBody>
+                    <a:bodyPr/>
+                    <a:lstStyle/>
+                    <a:p>
+                      <a:pPr algn="ctr"/>
+                      <a:r>
+                        <a:rPr sz="1050" b="0">
+                          <a:solidFill>
+                            <a:srgbClr val="333333"/>
+                          </a:solidFill>
+                          <a:latin typeface="Calibri"/>
+                        </a:rPr>
                         <a:t>+1</a:t>
                       </a:r>
                     </a:p>
@@ -6444,30 +6468,7 @@
                           </a:solidFill>
                           <a:latin typeface="Calibri"/>
                         </a:rPr>
-                        <a:t>-1</a:t>
-                      </a:r>
-                    </a:p>
-                  </a:txBody>
-                  <a:tcPr>
-                    <a:solidFill>
-                      <a:srgbClr val="FFFFFF"/>
-                    </a:solidFill>
-                  </a:tcPr>
-                </a:tc>
-                <a:tc>
-                  <a:txBody>
-                    <a:bodyPr/>
-                    <a:lstStyle/>
-                    <a:p>
-                      <a:pPr algn="ctr"/>
-                      <a:r>
-                        <a:rPr sz="1050" b="0">
-                          <a:solidFill>
-                            <a:srgbClr val="333333"/>
-                          </a:solidFill>
-                          <a:latin typeface="Calibri"/>
-                        </a:rPr>
-                        <a:t>—</a:t>
+                        <a:t>0</a:t>
                       </a:r>
                     </a:p>
                   </a:txBody>
@@ -6701,7 +6702,7 @@
                           </a:solidFill>
                           <a:latin typeface="Calibri"/>
                         </a:rPr>
-                        <a:t>Kültür</a:t>
+                        <a:t>Oyuncak</a:t>
                       </a:r>
                     </a:p>
                   </a:txBody>
@@ -6747,7 +6748,7 @@
                           </a:solidFill>
                           <a:latin typeface="Calibri"/>
                         </a:rPr>
-                        <a:t>+1</a:t>
+                        <a:t>0</a:t>
                       </a:r>
                     </a:p>
                   </a:txBody>
@@ -6770,7 +6771,7 @@
                           </a:solidFill>
                           <a:latin typeface="Calibri"/>
                         </a:rPr>
-                        <a:t>-1</a:t>
+                        <a:t>0</a:t>
                       </a:r>
                     </a:p>
                   </a:txBody>
@@ -6793,7 +6794,7 @@
                           </a:solidFill>
                           <a:latin typeface="Calibri"/>
                         </a:rPr>
-                        <a:t>0</a:t>
+                        <a:t>—</a:t>
                       </a:r>
                     </a:p>
                   </a:txBody>
@@ -6864,7 +6865,7 @@
                           </a:solidFill>
                           <a:latin typeface="Calibri"/>
                         </a:rPr>
-                        <a:t>Oyuncak</a:t>
+                        <a:t>Kültür</a:t>
                       </a:r>
                     </a:p>
                   </a:txBody>
@@ -6910,53 +6911,53 @@
                           </a:solidFill>
                           <a:latin typeface="Calibri"/>
                         </a:rPr>
+                        <a:t>+1</a:t>
+                      </a:r>
+                    </a:p>
+                  </a:txBody>
+                  <a:tcPr>
+                    <a:solidFill>
+                      <a:srgbClr val="F2F2F2"/>
+                    </a:solidFill>
+                  </a:tcPr>
+                </a:tc>
+                <a:tc>
+                  <a:txBody>
+                    <a:bodyPr/>
+                    <a:lstStyle/>
+                    <a:p>
+                      <a:pPr algn="ctr"/>
+                      <a:r>
+                        <a:rPr sz="1050" b="0">
+                          <a:solidFill>
+                            <a:srgbClr val="333333"/>
+                          </a:solidFill>
+                          <a:latin typeface="Calibri"/>
+                        </a:rPr>
+                        <a:t>-1</a:t>
+                      </a:r>
+                    </a:p>
+                  </a:txBody>
+                  <a:tcPr>
+                    <a:solidFill>
+                      <a:srgbClr val="F2F2F2"/>
+                    </a:solidFill>
+                  </a:tcPr>
+                </a:tc>
+                <a:tc>
+                  <a:txBody>
+                    <a:bodyPr/>
+                    <a:lstStyle/>
+                    <a:p>
+                      <a:pPr algn="ctr"/>
+                      <a:r>
+                        <a:rPr sz="1050" b="0">
+                          <a:solidFill>
+                            <a:srgbClr val="333333"/>
+                          </a:solidFill>
+                          <a:latin typeface="Calibri"/>
+                        </a:rPr>
                         <a:t>0</a:t>
-                      </a:r>
-                    </a:p>
-                  </a:txBody>
-                  <a:tcPr>
-                    <a:solidFill>
-                      <a:srgbClr val="F2F2F2"/>
-                    </a:solidFill>
-                  </a:tcPr>
-                </a:tc>
-                <a:tc>
-                  <a:txBody>
-                    <a:bodyPr/>
-                    <a:lstStyle/>
-                    <a:p>
-                      <a:pPr algn="ctr"/>
-                      <a:r>
-                        <a:rPr sz="1050" b="0">
-                          <a:solidFill>
-                            <a:srgbClr val="333333"/>
-                          </a:solidFill>
-                          <a:latin typeface="Calibri"/>
-                        </a:rPr>
-                        <a:t>0</a:t>
-                      </a:r>
-                    </a:p>
-                  </a:txBody>
-                  <a:tcPr>
-                    <a:solidFill>
-                      <a:srgbClr val="F2F2F2"/>
-                    </a:solidFill>
-                  </a:tcPr>
-                </a:tc>
-                <a:tc>
-                  <a:txBody>
-                    <a:bodyPr/>
-                    <a:lstStyle/>
-                    <a:p>
-                      <a:pPr algn="ctr"/>
-                      <a:r>
-                        <a:rPr sz="1050" b="0">
-                          <a:solidFill>
-                            <a:srgbClr val="333333"/>
-                          </a:solidFill>
-                          <a:latin typeface="Calibri"/>
-                        </a:rPr>
-                        <a:t>—</a:t>
                       </a:r>
                     </a:p>
                   </a:txBody>
@@ -7027,7 +7028,7 @@
                           </a:solidFill>
                           <a:latin typeface="Calibri"/>
                         </a:rPr>
-                        <a:t>Mağaza</a:t>
+                        <a:t>Mal Kabul</a:t>
                       </a:r>
                     </a:p>
                   </a:txBody>
@@ -7050,6 +7051,29 @@
                           </a:solidFill>
                           <a:latin typeface="Calibri"/>
                         </a:rPr>
+                        <a:t>+1</a:t>
+                      </a:r>
+                    </a:p>
+                  </a:txBody>
+                  <a:tcPr>
+                    <a:solidFill>
+                      <a:srgbClr val="FFFFFF"/>
+                    </a:solidFill>
+                  </a:tcPr>
+                </a:tc>
+                <a:tc>
+                  <a:txBody>
+                    <a:bodyPr/>
+                    <a:lstStyle/>
+                    <a:p>
+                      <a:pPr algn="ctr"/>
+                      <a:r>
+                        <a:rPr sz="1050" b="0">
+                          <a:solidFill>
+                            <a:srgbClr val="333333"/>
+                          </a:solidFill>
+                          <a:latin typeface="Calibri"/>
+                        </a:rPr>
                         <a:t>0</a:t>
                       </a:r>
                     </a:p>
@@ -7073,30 +7097,7 @@
                           </a:solidFill>
                           <a:latin typeface="Calibri"/>
                         </a:rPr>
-                        <a:t>0</a:t>
-                      </a:r>
-                    </a:p>
-                  </a:txBody>
-                  <a:tcPr>
-                    <a:solidFill>
-                      <a:srgbClr val="FFFFFF"/>
-                    </a:solidFill>
-                  </a:tcPr>
-                </a:tc>
-                <a:tc>
-                  <a:txBody>
-                    <a:bodyPr/>
-                    <a:lstStyle/>
-                    <a:p>
-                      <a:pPr algn="ctr"/>
-                      <a:r>
-                        <a:rPr sz="1050" b="0">
-                          <a:solidFill>
-                            <a:srgbClr val="333333"/>
-                          </a:solidFill>
-                          <a:latin typeface="Calibri"/>
-                        </a:rPr>
-                        <a:t>0</a:t>
+                        <a:t>-1</a:t>
                       </a:r>
                     </a:p>
                   </a:txBody>
@@ -7190,7 +7191,7 @@
                           </a:solidFill>
                           <a:latin typeface="Calibri"/>
                         </a:rPr>
-                        <a:t>İdari İşler</a:t>
+                        <a:t>Mağaza</a:t>
                       </a:r>
                     </a:p>
                   </a:txBody>
@@ -7213,7 +7214,7 @@
                           </a:solidFill>
                           <a:latin typeface="Calibri"/>
                         </a:rPr>
-                        <a:t>+1</a:t>
+                        <a:t>0</a:t>
                       </a:r>
                     </a:p>
                   </a:txBody>
@@ -7236,7 +7237,7 @@
                           </a:solidFill>
                           <a:latin typeface="Calibri"/>
                         </a:rPr>
-                        <a:t>-1</a:t>
+                        <a:t>0</a:t>
                       </a:r>
                     </a:p>
                   </a:txBody>
@@ -7282,7 +7283,7 @@
                           </a:solidFill>
                           <a:latin typeface="Calibri"/>
                         </a:rPr>
-                        <a:t>—</a:t>
+                        <a:t>0</a:t>
                       </a:r>
                     </a:p>
                   </a:txBody>
@@ -7353,7 +7354,7 @@
                           </a:solidFill>
                           <a:latin typeface="Calibri"/>
                         </a:rPr>
-                        <a:t>Mal Kabul</a:t>
+                        <a:t>İdari İşler</a:t>
                       </a:r>
                     </a:p>
                   </a:txBody>
@@ -7399,6 +7400,29 @@
                           </a:solidFill>
                           <a:latin typeface="Calibri"/>
                         </a:rPr>
+                        <a:t>-1</a:t>
+                      </a:r>
+                    </a:p>
+                  </a:txBody>
+                  <a:tcPr>
+                    <a:solidFill>
+                      <a:srgbClr val="FFFFFF"/>
+                    </a:solidFill>
+                  </a:tcPr>
+                </a:tc>
+                <a:tc>
+                  <a:txBody>
+                    <a:bodyPr/>
+                    <a:lstStyle/>
+                    <a:p>
+                      <a:pPr algn="ctr"/>
+                      <a:r>
+                        <a:rPr sz="1050" b="0">
+                          <a:solidFill>
+                            <a:srgbClr val="333333"/>
+                          </a:solidFill>
+                          <a:latin typeface="Calibri"/>
+                        </a:rPr>
                         <a:t>0</a:t>
                       </a:r>
                     </a:p>
@@ -7422,30 +7446,7 @@
                           </a:solidFill>
                           <a:latin typeface="Calibri"/>
                         </a:rPr>
-                        <a:t>-1</a:t>
-                      </a:r>
-                    </a:p>
-                  </a:txBody>
-                  <a:tcPr>
-                    <a:solidFill>
-                      <a:srgbClr val="FFFFFF"/>
-                    </a:solidFill>
-                  </a:tcPr>
-                </a:tc>
-                <a:tc>
-                  <a:txBody>
-                    <a:bodyPr/>
-                    <a:lstStyle/>
-                    <a:p>
-                      <a:pPr algn="ctr"/>
-                      <a:r>
-                        <a:rPr sz="1050" b="0">
-                          <a:solidFill>
-                            <a:srgbClr val="333333"/>
-                          </a:solidFill>
-                          <a:latin typeface="Calibri"/>
-                        </a:rPr>
-                        <a:t>0</a:t>
+                        <a:t>—</a:t>
                       </a:r>
                     </a:p>
                   </a:txBody>
@@ -7516,7 +7517,7 @@
                           </a:solidFill>
                           <a:latin typeface="Calibri"/>
                         </a:rPr>
-                        <a:t>Muhasebe</a:t>
+                        <a:t>Çocuk</a:t>
                       </a:r>
                     </a:p>
                   </a:txBody>
@@ -7539,7 +7540,7 @@
                           </a:solidFill>
                           <a:latin typeface="Calibri"/>
                         </a:rPr>
-                        <a:t>—</a:t>
+                        <a:t>0</a:t>
                       </a:r>
                     </a:p>
                   </a:txBody>
@@ -7562,7 +7563,7 @@
                           </a:solidFill>
                           <a:latin typeface="Calibri"/>
                         </a:rPr>
-                        <a:t>—</a:t>
+                        <a:t>0</a:t>
                       </a:r>
                     </a:p>
                   </a:txBody>
@@ -7585,7 +7586,7 @@
                           </a:solidFill>
                           <a:latin typeface="Calibri"/>
                         </a:rPr>
-                        <a:t>—</a:t>
+                        <a:t>+1</a:t>
                       </a:r>
                     </a:p>
                   </a:txBody>
@@ -7608,7 +7609,7 @@
                           </a:solidFill>
                           <a:latin typeface="Calibri"/>
                         </a:rPr>
-                        <a:t>-1</a:t>
+                        <a:t>-2</a:t>
                       </a:r>
                     </a:p>
                   </a:txBody>
@@ -11537,7 +11538,7 @@
           <a:lstStyle/>
           <a:p>
             <a:r>
-              <a:t>Sezonluk Alım Zamanlaması</a:t>
+              <a:t>Norm Kadro Karşılaştırması</a:t>
             </a:r>
           </a:p>
         </p:txBody>
@@ -11634,7 +11635,7 @@
       </p:sp>
       <p:pic>
         <p:nvPicPr>
-          <p:cNvPr id="5" name="Picture 4" descr="workflow.png"/>
+          <p:cNvPr id="5" name="Picture 4" descr="users.png"/>
           <p:cNvPicPr>
             <a:picLocks noChangeAspect="1"/>
           </p:cNvPicPr>
@@ -11690,7 +11691,7 @@
                 </a:solidFill>
                 <a:latin typeface="Calibri"/>
               </a:rPr>
-              <a:t>ORTALAMA ALIM GÜNÜ</a:t>
+              <a:t>NORM KADRO · SEZON DIŞI</a:t>
             </a:r>
           </a:p>
         </p:txBody>
@@ -11723,13 +11724,13 @@
               </a:lnSpc>
             </a:pPr>
             <a:r>
-              <a:rPr sz="2200" b="1">
+              <a:rPr sz="3200" b="1">
                 <a:solidFill>
                   <a:srgbClr val="9A9A9A"/>
                 </a:solidFill>
                 <a:latin typeface="Calibri"/>
               </a:rPr>
-              <a:t>2,5 gün geç</a:t>
+              <a:t>145</a:t>
             </a:r>
           </a:p>
         </p:txBody>
@@ -11768,7 +11769,7 @@
                 </a:solidFill>
                 <a:latin typeface="Calibri"/>
               </a:rPr>
-              <a:t>takvim ölçüsü · 225. → 228. gün</a:t>
+              <a:t>11.08.2026 tarihli norm · dört mağaza</a:t>
             </a:r>
           </a:p>
         </p:txBody>
@@ -11834,7 +11835,7 @@
             <a:avLst/>
           </a:prstGeom>
           <a:solidFill>
-            <a:srgbClr val="A6001A"/>
+            <a:srgbClr val="9A9A9A"/>
           </a:solidFill>
           <a:ln>
             <a:noFill/>
@@ -11872,7 +11873,7 @@
           <p:nvPr/>
         </p:nvPicPr>
         <p:blipFill>
-          <a:blip r:embed="rId4"/>
+          <a:blip r:embed="rId3"/>
           <a:stretch>
             <a:fillRect/>
           </a:stretch>
@@ -11921,7 +11922,7 @@
                 </a:solidFill>
                 <a:latin typeface="Calibri"/>
               </a:rPr>
-              <a:t>TEMMUZ VE ÖNCESİ ALIM</a:t>
+              <a:t>GERÇEK KADROLU · 31.08</a:t>
             </a:r>
           </a:p>
         </p:txBody>
@@ -11935,6 +11936,237 @@
         <p:spPr>
           <a:xfrm>
             <a:off x="4535424" y="1975104"/>
+            <a:ext cx="3154679" cy="658368"/>
+          </a:xfrm>
+          <a:prstGeom prst="rect">
+            <a:avLst/>
+          </a:prstGeom>
+          <a:noFill/>
+        </p:spPr>
+        <p:txBody>
+          <a:bodyPr wrap="square" anchor="t">
+            <a:spAutoFit/>
+          </a:bodyPr>
+          <a:lstStyle/>
+          <a:p>
+            <a:pPr algn="l">
+              <a:lnSpc>
+                <a:spcPct val="100000"/>
+              </a:lnSpc>
+            </a:pPr>
+            <a:r>
+              <a:rPr sz="3200" b="1">
+                <a:solidFill>
+                  <a:srgbClr val="9A9A9A"/>
+                </a:solidFill>
+                <a:latin typeface="Calibri"/>
+              </a:rPr>
+              <a:t>137</a:t>
+            </a:r>
+          </a:p>
+        </p:txBody>
+      </p:sp>
+      <p:sp>
+        <p:nvSpPr>
+          <p:cNvPr id="14" name="TextBox 13"/>
+          <p:cNvSpPr txBox="1"/>
+          <p:nvPr/>
+        </p:nvSpPr>
+        <p:spPr>
+          <a:xfrm>
+            <a:off x="4535424" y="2688336"/>
+            <a:ext cx="3154679" cy="457200"/>
+          </a:xfrm>
+          <a:prstGeom prst="rect">
+            <a:avLst/>
+          </a:prstGeom>
+          <a:noFill/>
+        </p:spPr>
+        <p:txBody>
+          <a:bodyPr wrap="square" anchor="t">
+            <a:spAutoFit/>
+          </a:bodyPr>
+          <a:lstStyle/>
+          <a:p>
+            <a:pPr algn="l">
+              <a:lnSpc>
+                <a:spcPct val="105000"/>
+              </a:lnSpc>
+            </a:pPr>
+            <a:r>
+              <a:rPr sz="1000" b="0">
+                <a:solidFill>
+                  <a:srgbClr val="6E6E6E"/>
+                </a:solidFill>
+                <a:latin typeface="Calibri"/>
+              </a:rPr>
+              <a:t>30.06 tabanında 143 kişi</a:t>
+            </a:r>
+          </a:p>
+        </p:txBody>
+      </p:sp>
+      <p:sp>
+        <p:nvSpPr>
+          <p:cNvPr id="15" name="Rectangle 14"/>
+          <p:cNvSpPr/>
+          <p:nvPr/>
+        </p:nvSpPr>
+        <p:spPr>
+          <a:xfrm>
+            <a:off x="8001000" y="1371600"/>
+            <a:ext cx="3566160" cy="1828800"/>
+          </a:xfrm>
+          <a:prstGeom prst="rect">
+            <a:avLst/>
+          </a:prstGeom>
+          <a:solidFill>
+            <a:srgbClr val="FFFFFF"/>
+          </a:solidFill>
+          <a:ln w="12700">
+            <a:solidFill>
+              <a:srgbClr val="DCDCDC"/>
+            </a:solidFill>
+          </a:ln>
+          <a:effectLst/>
+        </p:spPr>
+        <p:style>
+          <a:lnRef idx="1">
+            <a:schemeClr val="accent1"/>
+          </a:lnRef>
+          <a:fillRef idx="3">
+            <a:schemeClr val="accent1"/>
+          </a:fillRef>
+          <a:effectRef idx="2">
+            <a:schemeClr val="accent1"/>
+          </a:effectRef>
+          <a:fontRef idx="minor">
+            <a:schemeClr val="lt1"/>
+          </a:fontRef>
+        </p:style>
+        <p:txBody>
+          <a:bodyPr rtlCol="0" anchor="ctr"/>
+          <a:lstStyle/>
+          <a:p>
+            <a:pPr algn="ctr"/>
+          </a:p>
+        </p:txBody>
+      </p:sp>
+      <p:sp>
+        <p:nvSpPr>
+          <p:cNvPr id="16" name="Rectangle 15"/>
+          <p:cNvSpPr/>
+          <p:nvPr/>
+        </p:nvSpPr>
+        <p:spPr>
+          <a:xfrm>
+            <a:off x="8001000" y="1371600"/>
+            <a:ext cx="68580" cy="1828800"/>
+          </a:xfrm>
+          <a:prstGeom prst="rect">
+            <a:avLst/>
+          </a:prstGeom>
+          <a:solidFill>
+            <a:srgbClr val="A6001A"/>
+          </a:solidFill>
+          <a:ln>
+            <a:noFill/>
+          </a:ln>
+          <a:effectLst/>
+        </p:spPr>
+        <p:style>
+          <a:lnRef idx="1">
+            <a:schemeClr val="accent1"/>
+          </a:lnRef>
+          <a:fillRef idx="3">
+            <a:schemeClr val="accent1"/>
+          </a:fillRef>
+          <a:effectRef idx="2">
+            <a:schemeClr val="accent1"/>
+          </a:effectRef>
+          <a:fontRef idx="minor">
+            <a:schemeClr val="lt1"/>
+          </a:fontRef>
+        </p:style>
+        <p:txBody>
+          <a:bodyPr rtlCol="0" anchor="ctr"/>
+          <a:lstStyle/>
+          <a:p>
+            <a:pPr algn="ctr"/>
+          </a:p>
+        </p:txBody>
+      </p:sp>
+      <p:pic>
+        <p:nvPicPr>
+          <p:cNvPr id="17" name="Picture 16" descr="check.png"/>
+          <p:cNvPicPr>
+            <a:picLocks noChangeAspect="1"/>
+          </p:cNvPicPr>
+          <p:nvPr/>
+        </p:nvPicPr>
+        <p:blipFill>
+          <a:blip r:embed="rId4"/>
+          <a:stretch>
+            <a:fillRect/>
+          </a:stretch>
+        </p:blipFill>
+        <p:spPr>
+          <a:xfrm>
+            <a:off x="11091672" y="1536192"/>
+            <a:ext cx="274320" cy="274320"/>
+          </a:xfrm>
+          <a:prstGeom prst="rect">
+            <a:avLst/>
+          </a:prstGeom>
+        </p:spPr>
+      </p:pic>
+      <p:sp>
+        <p:nvSpPr>
+          <p:cNvPr id="18" name="TextBox 17"/>
+          <p:cNvSpPr txBox="1"/>
+          <p:nvPr/>
+        </p:nvSpPr>
+        <p:spPr>
+          <a:xfrm>
+            <a:off x="8257031" y="1536192"/>
+            <a:ext cx="2697480" cy="384048"/>
+          </a:xfrm>
+          <a:prstGeom prst="rect">
+            <a:avLst/>
+          </a:prstGeom>
+          <a:noFill/>
+        </p:spPr>
+        <p:txBody>
+          <a:bodyPr wrap="square" anchor="t">
+            <a:spAutoFit/>
+          </a:bodyPr>
+          <a:lstStyle/>
+          <a:p>
+            <a:pPr algn="l">
+              <a:lnSpc>
+                <a:spcPct val="105000"/>
+              </a:lnSpc>
+            </a:pPr>
+            <a:r>
+              <a:rPr sz="900" b="1">
+                <a:solidFill>
+                  <a:srgbClr val="6E6E6E"/>
+                </a:solidFill>
+                <a:latin typeface="Calibri"/>
+              </a:rPr>
+              <a:t>NORM FARKI · 31.08</a:t>
+            </a:r>
+          </a:p>
+        </p:txBody>
+      </p:sp>
+      <p:sp>
+        <p:nvSpPr>
+          <p:cNvPr id="19" name="TextBox 18"/>
+          <p:cNvSpPr txBox="1"/>
+          <p:nvPr/>
+        </p:nvSpPr>
+        <p:spPr>
+          <a:xfrm>
+            <a:off x="8257031" y="1975104"/>
             <a:ext cx="3154679" cy="658368"/>
           </a:xfrm>
           <a:prstGeom prst="rect">
@@ -11960,20 +12192,20 @@
                 </a:solidFill>
                 <a:latin typeface="Calibri"/>
               </a:rPr>
-              <a:t>6 → 2</a:t>
+              <a:t>-8 kişi</a:t>
             </a:r>
           </a:p>
         </p:txBody>
       </p:sp>
       <p:sp>
         <p:nvSpPr>
-          <p:cNvPr id="14" name="TextBox 13"/>
+          <p:cNvPr id="20" name="TextBox 19"/>
           <p:cNvSpPr txBox="1"/>
           <p:nvPr/>
         </p:nvSpPr>
         <p:spPr>
           <a:xfrm>
-            <a:off x="4535424" y="2688336"/>
+            <a:off x="8257031" y="2688336"/>
             <a:ext cx="3154679" cy="457200"/>
           </a:xfrm>
           <a:prstGeom prst="rect">
@@ -11999,238 +12231,7 @@
                 </a:solidFill>
                 <a:latin typeface="Calibri"/>
               </a:rPr>
-              <a:t>gerçek erken alım azaldı</a:t>
-            </a:r>
-          </a:p>
-        </p:txBody>
-      </p:sp>
-      <p:sp>
-        <p:nvSpPr>
-          <p:cNvPr id="15" name="Rectangle 14"/>
-          <p:cNvSpPr/>
-          <p:nvPr/>
-        </p:nvSpPr>
-        <p:spPr>
-          <a:xfrm>
-            <a:off x="8001000" y="1371600"/>
-            <a:ext cx="3566160" cy="1828800"/>
-          </a:xfrm>
-          <a:prstGeom prst="rect">
-            <a:avLst/>
-          </a:prstGeom>
-          <a:solidFill>
-            <a:srgbClr val="FFFFFF"/>
-          </a:solidFill>
-          <a:ln w="12700">
-            <a:solidFill>
-              <a:srgbClr val="DCDCDC"/>
-            </a:solidFill>
-          </a:ln>
-          <a:effectLst/>
-        </p:spPr>
-        <p:style>
-          <a:lnRef idx="1">
-            <a:schemeClr val="accent1"/>
-          </a:lnRef>
-          <a:fillRef idx="3">
-            <a:schemeClr val="accent1"/>
-          </a:fillRef>
-          <a:effectRef idx="2">
-            <a:schemeClr val="accent1"/>
-          </a:effectRef>
-          <a:fontRef idx="minor">
-            <a:schemeClr val="lt1"/>
-          </a:fontRef>
-        </p:style>
-        <p:txBody>
-          <a:bodyPr rtlCol="0" anchor="ctr"/>
-          <a:lstStyle/>
-          <a:p>
-            <a:pPr algn="ctr"/>
-          </a:p>
-        </p:txBody>
-      </p:sp>
-      <p:sp>
-        <p:nvSpPr>
-          <p:cNvPr id="16" name="Rectangle 15"/>
-          <p:cNvSpPr/>
-          <p:nvPr/>
-        </p:nvSpPr>
-        <p:spPr>
-          <a:xfrm>
-            <a:off x="8001000" y="1371600"/>
-            <a:ext cx="68580" cy="1828800"/>
-          </a:xfrm>
-          <a:prstGeom prst="rect">
-            <a:avLst/>
-          </a:prstGeom>
-          <a:solidFill>
-            <a:srgbClr val="A6001A"/>
-          </a:solidFill>
-          <a:ln>
-            <a:noFill/>
-          </a:ln>
-          <a:effectLst/>
-        </p:spPr>
-        <p:style>
-          <a:lnRef idx="1">
-            <a:schemeClr val="accent1"/>
-          </a:lnRef>
-          <a:fillRef idx="3">
-            <a:schemeClr val="accent1"/>
-          </a:fillRef>
-          <a:effectRef idx="2">
-            <a:schemeClr val="accent1"/>
-          </a:effectRef>
-          <a:fontRef idx="minor">
-            <a:schemeClr val="lt1"/>
-          </a:fontRef>
-        </p:style>
-        <p:txBody>
-          <a:bodyPr rtlCol="0" anchor="ctr"/>
-          <a:lstStyle/>
-          <a:p>
-            <a:pPr algn="ctr"/>
-          </a:p>
-        </p:txBody>
-      </p:sp>
-      <p:pic>
-        <p:nvPicPr>
-          <p:cNvPr id="17" name="Picture 16" descr="package.png"/>
-          <p:cNvPicPr>
-            <a:picLocks noChangeAspect="1"/>
-          </p:cNvPicPr>
-          <p:nvPr/>
-        </p:nvPicPr>
-        <p:blipFill>
-          <a:blip r:embed="rId5"/>
-          <a:stretch>
-            <a:fillRect/>
-          </a:stretch>
-        </p:blipFill>
-        <p:spPr>
-          <a:xfrm>
-            <a:off x="11091672" y="1536192"/>
-            <a:ext cx="274320" cy="274320"/>
-          </a:xfrm>
-          <a:prstGeom prst="rect">
-            <a:avLst/>
-          </a:prstGeom>
-        </p:spPr>
-      </p:pic>
-      <p:sp>
-        <p:nvSpPr>
-          <p:cNvPr id="18" name="TextBox 17"/>
-          <p:cNvSpPr txBox="1"/>
-          <p:nvPr/>
-        </p:nvSpPr>
-        <p:spPr>
-          <a:xfrm>
-            <a:off x="8257031" y="1536192"/>
-            <a:ext cx="2697480" cy="384048"/>
-          </a:xfrm>
-          <a:prstGeom prst="rect">
-            <a:avLst/>
-          </a:prstGeom>
-          <a:noFill/>
-        </p:spPr>
-        <p:txBody>
-          <a:bodyPr wrap="square" anchor="t">
-            <a:spAutoFit/>
-          </a:bodyPr>
-          <a:lstStyle/>
-          <a:p>
-            <a:pPr algn="l">
-              <a:lnSpc>
-                <a:spcPct val="105000"/>
-              </a:lnSpc>
-            </a:pPr>
-            <a:r>
-              <a:rPr sz="900" b="1">
-                <a:solidFill>
-                  <a:srgbClr val="6E6E6E"/>
-                </a:solidFill>
-                <a:latin typeface="Calibri"/>
-              </a:rPr>
-              <a:t>1–14 AĞUSTOS İŞ HACMİ</a:t>
-            </a:r>
-          </a:p>
-        </p:txBody>
-      </p:sp>
-      <p:sp>
-        <p:nvSpPr>
-          <p:cNvPr id="19" name="TextBox 18"/>
-          <p:cNvSpPr txBox="1"/>
-          <p:nvPr/>
-        </p:nvSpPr>
-        <p:spPr>
-          <a:xfrm>
-            <a:off x="8257031" y="1975104"/>
-            <a:ext cx="3154679" cy="658368"/>
-          </a:xfrm>
-          <a:prstGeom prst="rect">
-            <a:avLst/>
-          </a:prstGeom>
-          <a:noFill/>
-        </p:spPr>
-        <p:txBody>
-          <a:bodyPr wrap="square" anchor="t">
-            <a:spAutoFit/>
-          </a:bodyPr>
-          <a:lstStyle/>
-          <a:p>
-            <a:pPr algn="l">
-              <a:lnSpc>
-                <a:spcPct val="100000"/>
-              </a:lnSpc>
-            </a:pPr>
-            <a:r>
-              <a:rPr sz="3000" b="1">
-                <a:solidFill>
-                  <a:srgbClr val="A6001A"/>
-                </a:solidFill>
-                <a:latin typeface="Calibri"/>
-              </a:rPr>
-              <a:t>+%25,1</a:t>
-            </a:r>
-          </a:p>
-        </p:txBody>
-      </p:sp>
-      <p:sp>
-        <p:nvSpPr>
-          <p:cNvPr id="20" name="TextBox 19"/>
-          <p:cNvSpPr txBox="1"/>
-          <p:nvPr/>
-        </p:nvSpPr>
-        <p:spPr>
-          <a:xfrm>
-            <a:off x="8257031" y="2688336"/>
-            <a:ext cx="3154679" cy="457200"/>
-          </a:xfrm>
-          <a:prstGeom prst="rect">
-            <a:avLst/>
-          </a:prstGeom>
-          <a:noFill/>
-        </p:spPr>
-        <p:txBody>
-          <a:bodyPr wrap="square" anchor="t">
-            <a:spAutoFit/>
-          </a:bodyPr>
-          <a:lstStyle/>
-          <a:p>
-            <a:pPr algn="l">
-              <a:lnSpc>
-                <a:spcPct val="105000"/>
-              </a:lnSpc>
-            </a:pPr>
-            <a:r>
-              <a:rPr sz="1000" b="0">
-                <a:solidFill>
-                  <a:srgbClr val="6E6E6E"/>
-                </a:solidFill>
-                <a:latin typeface="Calibri"/>
-              </a:rPr>
-              <a:t>137.483 → 171.963 adet</a:t>
+              <a:t>kadro normun ALTINDA</a:t>
             </a:r>
           </a:p>
         </p:txBody>
@@ -12245,7 +12246,7 @@
         </p:nvGraphicFramePr>
         <p:xfrm>
           <a:off x="548640" y="3429000"/>
-          <a:ext cx="11018520" cy="2103120"/>
+          <a:ext cx="6949440" cy="2011680"/>
         </p:xfrm>
         <a:graphic>
           <a:graphicData uri="http://schemas.openxmlformats.org/drawingml/2006/table">
@@ -12254,12 +12255,13 @@
                 <a:tableStyleId>{5C22544A-7EE6-4342-B048-85BDC9FD1C3A}</a:tableStyleId>
               </a:tblPr>
               <a:tblGrid>
-                <a:gridCol w="3291840"/>
-                <a:gridCol w="1737360"/>
-                <a:gridCol w="1737360"/>
-                <a:gridCol w="4251960"/>
+                <a:gridCol w="1645920"/>
+                <a:gridCol w="1463040"/>
+                <a:gridCol w="1325880"/>
+                <a:gridCol w="1325880"/>
+                <a:gridCol w="1188720"/>
               </a:tblGrid>
-              <a:tr h="262890">
+              <a:tr h="335280">
                 <a:tc>
                   <a:txBody>
                     <a:bodyPr/>
@@ -12273,7 +12275,7 @@
                           </a:solidFill>
                           <a:latin typeface="Calibri"/>
                         </a:rPr>
-                        <a:t>Ölçü</a:t>
+                        <a:t>Mağaza</a:t>
                       </a:r>
                     </a:p>
                   </a:txBody>
@@ -12296,7 +12298,7 @@
                           </a:solidFill>
                           <a:latin typeface="Calibri"/>
                         </a:rPr>
-                        <a:t>2025</a:t>
+                        <a:t>Norm (sezon dışı)</a:t>
                       </a:r>
                     </a:p>
                   </a:txBody>
@@ -12319,7 +12321,7 @@
                           </a:solidFill>
                           <a:latin typeface="Calibri"/>
                         </a:rPr>
-                        <a:t>2026</a:t>
+                        <a:t>Kadrolu 30.06</a:t>
                       </a:r>
                     </a:p>
                   </a:txBody>
@@ -12334,26 +12336,166 @@
                     <a:bodyPr/>
                     <a:lstStyle/>
                     <a:p>
+                      <a:pPr algn="ctr"/>
+                      <a:r>
+                        <a:rPr sz="900" b="1">
+                          <a:solidFill>
+                            <a:srgbClr val="FFFFFF"/>
+                          </a:solidFill>
+                          <a:latin typeface="Calibri"/>
+                        </a:rPr>
+                        <a:t>Kadrolu 31.08</a:t>
+                      </a:r>
+                    </a:p>
+                  </a:txBody>
+                  <a:tcPr>
+                    <a:solidFill>
+                      <a:srgbClr val="E30622"/>
+                    </a:solidFill>
+                  </a:tcPr>
+                </a:tc>
+                <a:tc>
+                  <a:txBody>
+                    <a:bodyPr/>
+                    <a:lstStyle/>
+                    <a:p>
+                      <a:pPr algn="ctr"/>
+                      <a:r>
+                        <a:rPr sz="900" b="1">
+                          <a:solidFill>
+                            <a:srgbClr val="FFFFFF"/>
+                          </a:solidFill>
+                          <a:latin typeface="Calibri"/>
+                        </a:rPr>
+                        <a:t>Norm farkı 31.08</a:t>
+                      </a:r>
+                    </a:p>
+                  </a:txBody>
+                  <a:tcPr>
+                    <a:solidFill>
+                      <a:srgbClr val="E30622"/>
+                    </a:solidFill>
+                  </a:tcPr>
+                </a:tc>
+              </a:tr>
+              <a:tr h="335280">
+                <a:tc>
+                  <a:txBody>
+                    <a:bodyPr/>
+                    <a:lstStyle/>
+                    <a:p>
                       <a:pPr algn="l"/>
                       <a:r>
-                        <a:rPr sz="900" b="1">
-                          <a:solidFill>
-                            <a:srgbClr val="FFFFFF"/>
-                          </a:solidFill>
-                          <a:latin typeface="Calibri"/>
-                        </a:rPr>
-                        <a:t>Yorum</a:t>
-                      </a:r>
-                    </a:p>
-                  </a:txBody>
-                  <a:tcPr>
-                    <a:solidFill>
-                      <a:srgbClr val="E30622"/>
+                        <a:rPr sz="1050" b="0">
+                          <a:solidFill>
+                            <a:srgbClr val="333333"/>
+                          </a:solidFill>
+                          <a:latin typeface="Calibri"/>
+                        </a:rPr>
+                        <a:t>Özlüce</a:t>
+                      </a:r>
+                    </a:p>
+                  </a:txBody>
+                  <a:tcPr>
+                    <a:solidFill>
+                      <a:srgbClr val="FFFFFF"/>
+                    </a:solidFill>
+                  </a:tcPr>
+                </a:tc>
+                <a:tc>
+                  <a:txBody>
+                    <a:bodyPr/>
+                    <a:lstStyle/>
+                    <a:p>
+                      <a:pPr algn="ctr"/>
+                      <a:r>
+                        <a:rPr sz="1050" b="0">
+                          <a:solidFill>
+                            <a:srgbClr val="333333"/>
+                          </a:solidFill>
+                          <a:latin typeface="Calibri"/>
+                        </a:rPr>
+                        <a:t>45</a:t>
+                      </a:r>
+                    </a:p>
+                  </a:txBody>
+                  <a:tcPr>
+                    <a:solidFill>
+                      <a:srgbClr val="FFFFFF"/>
+                    </a:solidFill>
+                  </a:tcPr>
+                </a:tc>
+                <a:tc>
+                  <a:txBody>
+                    <a:bodyPr/>
+                    <a:lstStyle/>
+                    <a:p>
+                      <a:pPr algn="ctr"/>
+                      <a:r>
+                        <a:rPr sz="1050" b="0">
+                          <a:solidFill>
+                            <a:srgbClr val="333333"/>
+                          </a:solidFill>
+                          <a:latin typeface="Calibri"/>
+                        </a:rPr>
+                        <a:t>44</a:t>
+                      </a:r>
+                    </a:p>
+                  </a:txBody>
+                  <a:tcPr>
+                    <a:solidFill>
+                      <a:srgbClr val="FFFFFF"/>
+                    </a:solidFill>
+                  </a:tcPr>
+                </a:tc>
+                <a:tc>
+                  <a:txBody>
+                    <a:bodyPr/>
+                    <a:lstStyle/>
+                    <a:p>
+                      <a:pPr algn="ctr"/>
+                      <a:r>
+                        <a:rPr sz="1050" b="0">
+                          <a:solidFill>
+                            <a:srgbClr val="333333"/>
+                          </a:solidFill>
+                          <a:latin typeface="Calibri"/>
+                        </a:rPr>
+                        <a:t>41</a:t>
+                      </a:r>
+                    </a:p>
+                  </a:txBody>
+                  <a:tcPr>
+                    <a:solidFill>
+                      <a:srgbClr val="FFFFFF"/>
+                    </a:solidFill>
+                  </a:tcPr>
+                </a:tc>
+                <a:tc>
+                  <a:txBody>
+                    <a:bodyPr/>
+                    <a:lstStyle/>
+                    <a:p>
+                      <a:pPr algn="ctr"/>
+                      <a:r>
+                        <a:rPr sz="1050" b="1">
+                          <a:solidFill>
+                            <a:srgbClr val="A6001A"/>
+                          </a:solidFill>
+                          <a:latin typeface="Calibri"/>
+                        </a:rPr>
+                        <a:t>-4</a:t>
+                      </a:r>
+                    </a:p>
+                  </a:txBody>
+                  <a:tcPr>
+                    <a:solidFill>
+                      <a:srgbClr val="FFFFFF"/>
                     </a:solidFill>
                   </a:tcPr>
                 </a:tc>
               </a:tr>
-              <a:tr h="262890">
+              <a:tr h="335280">
                 <a:tc>
                   <a:txBody>
                     <a:bodyPr/>
@@ -12361,13 +12503,130 @@
                     <a:p>
                       <a:pPr algn="l"/>
                       <a:r>
-                        <a:rPr sz="1000" b="0">
+                        <a:rPr sz="1050" b="0">
                           <a:solidFill>
                             <a:srgbClr val="333333"/>
                           </a:solidFill>
                           <a:latin typeface="Calibri"/>
                         </a:rPr>
-                        <a:t>Ortalama alım günü (takvim)</a:t>
+                        <a:t>FSM</a:t>
+                      </a:r>
+                    </a:p>
+                  </a:txBody>
+                  <a:tcPr>
+                    <a:solidFill>
+                      <a:srgbClr val="FAFAFA"/>
+                    </a:solidFill>
+                  </a:tcPr>
+                </a:tc>
+                <a:tc>
+                  <a:txBody>
+                    <a:bodyPr/>
+                    <a:lstStyle/>
+                    <a:p>
+                      <a:pPr algn="ctr"/>
+                      <a:r>
+                        <a:rPr sz="1050" b="0">
+                          <a:solidFill>
+                            <a:srgbClr val="333333"/>
+                          </a:solidFill>
+                          <a:latin typeface="Calibri"/>
+                        </a:rPr>
+                        <a:t>37</a:t>
+                      </a:r>
+                    </a:p>
+                  </a:txBody>
+                  <a:tcPr>
+                    <a:solidFill>
+                      <a:srgbClr val="FAFAFA"/>
+                    </a:solidFill>
+                  </a:tcPr>
+                </a:tc>
+                <a:tc>
+                  <a:txBody>
+                    <a:bodyPr/>
+                    <a:lstStyle/>
+                    <a:p>
+                      <a:pPr algn="ctr"/>
+                      <a:r>
+                        <a:rPr sz="1050" b="0">
+                          <a:solidFill>
+                            <a:srgbClr val="333333"/>
+                          </a:solidFill>
+                          <a:latin typeface="Calibri"/>
+                        </a:rPr>
+                        <a:t>35</a:t>
+                      </a:r>
+                    </a:p>
+                  </a:txBody>
+                  <a:tcPr>
+                    <a:solidFill>
+                      <a:srgbClr val="FAFAFA"/>
+                    </a:solidFill>
+                  </a:tcPr>
+                </a:tc>
+                <a:tc>
+                  <a:txBody>
+                    <a:bodyPr/>
+                    <a:lstStyle/>
+                    <a:p>
+                      <a:pPr algn="ctr"/>
+                      <a:r>
+                        <a:rPr sz="1050" b="0">
+                          <a:solidFill>
+                            <a:srgbClr val="333333"/>
+                          </a:solidFill>
+                          <a:latin typeface="Calibri"/>
+                        </a:rPr>
+                        <a:t>34</a:t>
+                      </a:r>
+                    </a:p>
+                  </a:txBody>
+                  <a:tcPr>
+                    <a:solidFill>
+                      <a:srgbClr val="FAFAFA"/>
+                    </a:solidFill>
+                  </a:tcPr>
+                </a:tc>
+                <a:tc>
+                  <a:txBody>
+                    <a:bodyPr/>
+                    <a:lstStyle/>
+                    <a:p>
+                      <a:pPr algn="ctr"/>
+                      <a:r>
+                        <a:rPr sz="1050" b="1">
+                          <a:solidFill>
+                            <a:srgbClr val="A6001A"/>
+                          </a:solidFill>
+                          <a:latin typeface="Calibri"/>
+                        </a:rPr>
+                        <a:t>-3</a:t>
+                      </a:r>
+                    </a:p>
+                  </a:txBody>
+                  <a:tcPr>
+                    <a:solidFill>
+                      <a:srgbClr val="FAFAFA"/>
+                    </a:solidFill>
+                  </a:tcPr>
+                </a:tc>
+              </a:tr>
+              <a:tr h="335280">
+                <a:tc>
+                  <a:txBody>
+                    <a:bodyPr/>
+                    <a:lstStyle/>
+                    <a:p>
+                      <a:pPr algn="l"/>
+                      <a:r>
+                        <a:rPr sz="1050" b="0">
+                          <a:solidFill>
+                            <a:srgbClr val="333333"/>
+                          </a:solidFill>
+                          <a:latin typeface="Calibri"/>
+                        </a:rPr>
+                        <a:t>İst. Yolu</a:t>
                       </a:r>
                     </a:p>
                   </a:txBody>
@@ -12384,13 +12643,13 @@
                     <a:p>
                       <a:pPr algn="ctr"/>
                       <a:r>
-                        <a:rPr sz="1000" b="0">
+                        <a:rPr sz="1050" b="0">
                           <a:solidFill>
                             <a:srgbClr val="333333"/>
                           </a:solidFill>
                           <a:latin typeface="Calibri"/>
                         </a:rPr>
-                        <a:t>225. gün</a:t>
+                        <a:t>33</a:t>
                       </a:r>
                     </a:p>
                   </a:txBody>
@@ -12407,13 +12666,13 @@
                     <a:p>
                       <a:pPr algn="ctr"/>
                       <a:r>
-                        <a:rPr sz="1000" b="1">
+                        <a:rPr sz="1050" b="0">
                           <a:solidFill>
                             <a:srgbClr val="333333"/>
                           </a:solidFill>
                           <a:latin typeface="Calibri"/>
                         </a:rPr>
-                        <a:t>228. gün</a:t>
+                        <a:t>35</a:t>
                       </a:r>
                     </a:p>
                   </a:txBody>
@@ -12428,26 +12687,166 @@
                     <a:bodyPr/>
                     <a:lstStyle/>
                     <a:p>
+                      <a:pPr algn="ctr"/>
+                      <a:r>
+                        <a:rPr sz="1050" b="0">
+                          <a:solidFill>
+                            <a:srgbClr val="333333"/>
+                          </a:solidFill>
+                          <a:latin typeface="Calibri"/>
+                        </a:rPr>
+                        <a:t>36</a:t>
+                      </a:r>
+                    </a:p>
+                  </a:txBody>
+                  <a:tcPr>
+                    <a:solidFill>
+                      <a:srgbClr val="FFFFFF"/>
+                    </a:solidFill>
+                  </a:tcPr>
+                </a:tc>
+                <a:tc>
+                  <a:txBody>
+                    <a:bodyPr/>
+                    <a:lstStyle/>
+                    <a:p>
+                      <a:pPr algn="ctr"/>
+                      <a:r>
+                        <a:rPr sz="1050" b="1">
+                          <a:solidFill>
+                            <a:srgbClr val="A6001A"/>
+                          </a:solidFill>
+                          <a:latin typeface="Calibri"/>
+                        </a:rPr>
+                        <a:t>+3</a:t>
+                      </a:r>
+                    </a:p>
+                  </a:txBody>
+                  <a:tcPr>
+                    <a:solidFill>
+                      <a:srgbClr val="FFFFFF"/>
+                    </a:solidFill>
+                  </a:tcPr>
+                </a:tc>
+              </a:tr>
+              <a:tr h="335280">
+                <a:tc>
+                  <a:txBody>
+                    <a:bodyPr/>
+                    <a:lstStyle/>
+                    <a:p>
                       <a:pPr algn="l"/>
                       <a:r>
-                        <a:rPr sz="1000" b="0">
+                        <a:rPr sz="1050" b="0">
+                          <a:solidFill>
+                            <a:srgbClr val="333333"/>
+                          </a:solidFill>
+                          <a:latin typeface="Calibri"/>
+                        </a:rPr>
+                        <a:t>Heykel</a:t>
+                      </a:r>
+                    </a:p>
+                  </a:txBody>
+                  <a:tcPr>
+                    <a:solidFill>
+                      <a:srgbClr val="FAFAFA"/>
+                    </a:solidFill>
+                  </a:tcPr>
+                </a:tc>
+                <a:tc>
+                  <a:txBody>
+                    <a:bodyPr/>
+                    <a:lstStyle/>
+                    <a:p>
+                      <a:pPr algn="ctr"/>
+                      <a:r>
+                        <a:rPr sz="1050" b="0">
+                          <a:solidFill>
+                            <a:srgbClr val="333333"/>
+                          </a:solidFill>
+                          <a:latin typeface="Calibri"/>
+                        </a:rPr>
+                        <a:t>30</a:t>
+                      </a:r>
+                    </a:p>
+                  </a:txBody>
+                  <a:tcPr>
+                    <a:solidFill>
+                      <a:srgbClr val="FAFAFA"/>
+                    </a:solidFill>
+                  </a:tcPr>
+                </a:tc>
+                <a:tc>
+                  <a:txBody>
+                    <a:bodyPr/>
+                    <a:lstStyle/>
+                    <a:p>
+                      <a:pPr algn="ctr"/>
+                      <a:r>
+                        <a:rPr sz="1050" b="0">
+                          <a:solidFill>
+                            <a:srgbClr val="333333"/>
+                          </a:solidFill>
+                          <a:latin typeface="Calibri"/>
+                        </a:rPr>
+                        <a:t>29</a:t>
+                      </a:r>
+                    </a:p>
+                  </a:txBody>
+                  <a:tcPr>
+                    <a:solidFill>
+                      <a:srgbClr val="FAFAFA"/>
+                    </a:solidFill>
+                  </a:tcPr>
+                </a:tc>
+                <a:tc>
+                  <a:txBody>
+                    <a:bodyPr/>
+                    <a:lstStyle/>
+                    <a:p>
+                      <a:pPr algn="ctr"/>
+                      <a:r>
+                        <a:rPr sz="1050" b="0">
+                          <a:solidFill>
+                            <a:srgbClr val="333333"/>
+                          </a:solidFill>
+                          <a:latin typeface="Calibri"/>
+                        </a:rPr>
+                        <a:t>26</a:t>
+                      </a:r>
+                    </a:p>
+                  </a:txBody>
+                  <a:tcPr>
+                    <a:solidFill>
+                      <a:srgbClr val="FAFAFA"/>
+                    </a:solidFill>
+                  </a:tcPr>
+                </a:tc>
+                <a:tc>
+                  <a:txBody>
+                    <a:bodyPr/>
+                    <a:lstStyle/>
+                    <a:p>
+                      <a:pPr algn="ctr"/>
+                      <a:r>
+                        <a:rPr sz="1050" b="1">
                           <a:solidFill>
                             <a:srgbClr val="A6001A"/>
                           </a:solidFill>
                           <a:latin typeface="Calibri"/>
                         </a:rPr>
-                        <a:t>2026 alımı ortalama 2,5 gün DAHA GEÇ</a:t>
-                      </a:r>
-                    </a:p>
-                  </a:txBody>
-                  <a:tcPr>
-                    <a:solidFill>
-                      <a:srgbClr val="FFFFFF"/>
+                        <a:t>-4</a:t>
+                      </a:r>
+                    </a:p>
+                  </a:txBody>
+                  <a:tcPr>
+                    <a:solidFill>
+                      <a:srgbClr val="FAFAFA"/>
                     </a:solidFill>
                   </a:tcPr>
                 </a:tc>
               </a:tr>
-              <a:tr h="262890">
+              <a:tr h="335280">
                 <a:tc>
                   <a:txBody>
                     <a:bodyPr/>
@@ -12455,558 +12854,111 @@
                     <a:p>
                       <a:pPr algn="l"/>
                       <a:r>
-                        <a:rPr sz="1000" b="0">
+                        <a:rPr sz="1050" b="1">
                           <a:solidFill>
                             <a:srgbClr val="333333"/>
                           </a:solidFill>
                           <a:latin typeface="Calibri"/>
                         </a:rPr>
-                        <a:t>Temmuz ve öncesi alınan</a:t>
-                      </a:r>
-                    </a:p>
-                  </a:txBody>
-                  <a:tcPr>
-                    <a:solidFill>
-                      <a:srgbClr val="FAFAFA"/>
-                    </a:solidFill>
-                  </a:tcPr>
-                </a:tc>
-                <a:tc>
-                  <a:txBody>
-                    <a:bodyPr/>
-                    <a:lstStyle/>
-                    <a:p>
-                      <a:pPr algn="ctr"/>
-                      <a:r>
-                        <a:rPr sz="1000" b="0">
+                        <a:t>TOPLAM</a:t>
+                      </a:r>
+                    </a:p>
+                  </a:txBody>
+                  <a:tcPr>
+                    <a:solidFill>
+                      <a:srgbClr val="F2F2F2"/>
+                    </a:solidFill>
+                  </a:tcPr>
+                </a:tc>
+                <a:tc>
+                  <a:txBody>
+                    <a:bodyPr/>
+                    <a:lstStyle/>
+                    <a:p>
+                      <a:pPr algn="ctr"/>
+                      <a:r>
+                        <a:rPr sz="1050" b="1">
                           <a:solidFill>
                             <a:srgbClr val="333333"/>
                           </a:solidFill>
                           <a:latin typeface="Calibri"/>
                         </a:rPr>
-                        <a:t>6 kişi</a:t>
-                      </a:r>
-                    </a:p>
-                  </a:txBody>
-                  <a:tcPr>
-                    <a:solidFill>
-                      <a:srgbClr val="FAFAFA"/>
-                    </a:solidFill>
-                  </a:tcPr>
-                </a:tc>
-                <a:tc>
-                  <a:txBody>
-                    <a:bodyPr/>
-                    <a:lstStyle/>
-                    <a:p>
-                      <a:pPr algn="ctr"/>
-                      <a:r>
-                        <a:rPr sz="1000" b="1">
+                        <a:t>145</a:t>
+                      </a:r>
+                    </a:p>
+                  </a:txBody>
+                  <a:tcPr>
+                    <a:solidFill>
+                      <a:srgbClr val="F2F2F2"/>
+                    </a:solidFill>
+                  </a:tcPr>
+                </a:tc>
+                <a:tc>
+                  <a:txBody>
+                    <a:bodyPr/>
+                    <a:lstStyle/>
+                    <a:p>
+                      <a:pPr algn="ctr"/>
+                      <a:r>
+                        <a:rPr sz="1050" b="1">
                           <a:solidFill>
                             <a:srgbClr val="333333"/>
                           </a:solidFill>
                           <a:latin typeface="Calibri"/>
                         </a:rPr>
-                        <a:t>2 kişi</a:t>
-                      </a:r>
-                    </a:p>
-                  </a:txBody>
-                  <a:tcPr>
-                    <a:solidFill>
-                      <a:srgbClr val="FAFAFA"/>
-                    </a:solidFill>
-                  </a:tcPr>
-                </a:tc>
-                <a:tc>
-                  <a:txBody>
-                    <a:bodyPr/>
-                    <a:lstStyle/>
-                    <a:p>
-                      <a:pPr algn="l"/>
-                      <a:r>
-                        <a:rPr sz="1000" b="0">
+                        <a:t>143</a:t>
+                      </a:r>
+                    </a:p>
+                  </a:txBody>
+                  <a:tcPr>
+                    <a:solidFill>
+                      <a:srgbClr val="F2F2F2"/>
+                    </a:solidFill>
+                  </a:tcPr>
+                </a:tc>
+                <a:tc>
+                  <a:txBody>
+                    <a:bodyPr/>
+                    <a:lstStyle/>
+                    <a:p>
+                      <a:pPr algn="ctr"/>
+                      <a:r>
+                        <a:rPr sz="1050" b="1">
+                          <a:solidFill>
+                            <a:srgbClr val="333333"/>
+                          </a:solidFill>
+                          <a:latin typeface="Calibri"/>
+                        </a:rPr>
+                        <a:t>137</a:t>
+                      </a:r>
+                    </a:p>
+                  </a:txBody>
+                  <a:tcPr>
+                    <a:solidFill>
+                      <a:srgbClr val="F2F2F2"/>
+                    </a:solidFill>
+                  </a:tcPr>
+                </a:tc>
+                <a:tc>
+                  <a:txBody>
+                    <a:bodyPr/>
+                    <a:lstStyle/>
+                    <a:p>
+                      <a:pPr algn="ctr"/>
+                      <a:r>
+                        <a:rPr sz="1050" b="1">
                           <a:solidFill>
                             <a:srgbClr val="A6001A"/>
                           </a:solidFill>
                           <a:latin typeface="Calibri"/>
                         </a:rPr>
-                        <a:t>erken alım azaldı</a:t>
-                      </a:r>
-                    </a:p>
-                  </a:txBody>
-                  <a:tcPr>
-                    <a:solidFill>
-                      <a:srgbClr val="FAFAFA"/>
-                    </a:solidFill>
-                  </a:tcPr>
-                </a:tc>
-              </a:tr>
-              <a:tr h="262890">
-                <a:tc>
-                  <a:txBody>
-                    <a:bodyPr/>
-                    <a:lstStyle/>
-                    <a:p>
-                      <a:pPr algn="l"/>
-                      <a:r>
-                        <a:rPr sz="1000" b="0">
-                          <a:solidFill>
-                            <a:srgbClr val="333333"/>
-                          </a:solidFill>
-                          <a:latin typeface="Calibri"/>
-                        </a:rPr>
-                        <a:t>Açılıştan 45+ gün önce alınan</a:t>
-                      </a:r>
-                    </a:p>
-                  </a:txBody>
-                  <a:tcPr>
-                    <a:solidFill>
-                      <a:srgbClr val="FFFFFF"/>
-                    </a:solidFill>
-                  </a:tcPr>
-                </a:tc>
-                <a:tc>
-                  <a:txBody>
-                    <a:bodyPr/>
-                    <a:lstStyle/>
-                    <a:p>
-                      <a:pPr algn="ctr"/>
-                      <a:r>
-                        <a:rPr sz="1000" b="0">
-                          <a:solidFill>
-                            <a:srgbClr val="333333"/>
-                          </a:solidFill>
-                          <a:latin typeface="Calibri"/>
-                        </a:rPr>
-                        <a:t>4 kişi</a:t>
-                      </a:r>
-                    </a:p>
-                  </a:txBody>
-                  <a:tcPr>
-                    <a:solidFill>
-                      <a:srgbClr val="FFFFFF"/>
-                    </a:solidFill>
-                  </a:tcPr>
-                </a:tc>
-                <a:tc>
-                  <a:txBody>
-                    <a:bodyPr/>
-                    <a:lstStyle/>
-                    <a:p>
-                      <a:pPr algn="ctr"/>
-                      <a:r>
-                        <a:rPr sz="1000" b="1">
-                          <a:solidFill>
-                            <a:srgbClr val="333333"/>
-                          </a:solidFill>
-                          <a:latin typeface="Calibri"/>
-                        </a:rPr>
-                        <a:t>2 kişi</a:t>
-                      </a:r>
-                    </a:p>
-                  </a:txBody>
-                  <a:tcPr>
-                    <a:solidFill>
-                      <a:srgbClr val="FFFFFF"/>
-                    </a:solidFill>
-                  </a:tcPr>
-                </a:tc>
-                <a:tc>
-                  <a:txBody>
-                    <a:bodyPr/>
-                    <a:lstStyle/>
-                    <a:p>
-                      <a:pPr algn="l"/>
-                      <a:r>
-                        <a:rPr sz="1000" b="0">
-                          <a:solidFill>
-                            <a:srgbClr val="A6001A"/>
-                          </a:solidFill>
-                          <a:latin typeface="Calibri"/>
-                        </a:rPr>
-                        <a:t>çok erken alım azaldı</a:t>
-                      </a:r>
-                    </a:p>
-                  </a:txBody>
-                  <a:tcPr>
-                    <a:solidFill>
-                      <a:srgbClr val="FFFFFF"/>
-                    </a:solidFill>
-                  </a:tcPr>
-                </a:tc>
-              </a:tr>
-              <a:tr h="262890">
-                <a:tc>
-                  <a:txBody>
-                    <a:bodyPr/>
-                    <a:lstStyle/>
-                    <a:p>
-                      <a:pPr algn="l"/>
-                      <a:r>
-                        <a:rPr sz="1000" b="0">
-                          <a:solidFill>
-                            <a:srgbClr val="333333"/>
-                          </a:solidFill>
-                          <a:latin typeface="Calibri"/>
-                        </a:rPr>
-                        <a:t>1–14 Ağustos alınan</a:t>
-                      </a:r>
-                    </a:p>
-                  </a:txBody>
-                  <a:tcPr>
-                    <a:solidFill>
-                      <a:srgbClr val="FAFAFA"/>
-                    </a:solidFill>
-                  </a:tcPr>
-                </a:tc>
-                <a:tc>
-                  <a:txBody>
-                    <a:bodyPr/>
-                    <a:lstStyle/>
-                    <a:p>
-                      <a:pPr algn="ctr"/>
-                      <a:r>
-                        <a:rPr sz="1000" b="0">
-                          <a:solidFill>
-                            <a:srgbClr val="333333"/>
-                          </a:solidFill>
-                          <a:latin typeface="Calibri"/>
-                        </a:rPr>
-                        <a:t>12 kişi</a:t>
-                      </a:r>
-                    </a:p>
-                  </a:txBody>
-                  <a:tcPr>
-                    <a:solidFill>
-                      <a:srgbClr val="FAFAFA"/>
-                    </a:solidFill>
-                  </a:tcPr>
-                </a:tc>
-                <a:tc>
-                  <a:txBody>
-                    <a:bodyPr/>
-                    <a:lstStyle/>
-                    <a:p>
-                      <a:pPr algn="ctr"/>
-                      <a:r>
-                        <a:rPr sz="1000" b="1">
-                          <a:solidFill>
-                            <a:srgbClr val="333333"/>
-                          </a:solidFill>
-                          <a:latin typeface="Calibri"/>
-                        </a:rPr>
-                        <a:t>30 kişi</a:t>
-                      </a:r>
-                    </a:p>
-                  </a:txBody>
-                  <a:tcPr>
-                    <a:solidFill>
-                      <a:srgbClr val="FAFAFA"/>
-                    </a:solidFill>
-                  </a:tcPr>
-                </a:tc>
-                <a:tc>
-                  <a:txBody>
-                    <a:bodyPr/>
-                    <a:lstStyle/>
-                    <a:p>
-                      <a:pPr algn="l"/>
-                      <a:r>
-                        <a:rPr sz="1000" b="0">
-                          <a:solidFill>
-                            <a:srgbClr val="A6001A"/>
-                          </a:solidFill>
-                          <a:latin typeface="Calibri"/>
-                        </a:rPr>
-                        <a:t>artış bu iki haftada</a:t>
-                      </a:r>
-                    </a:p>
-                  </a:txBody>
-                  <a:tcPr>
-                    <a:solidFill>
-                      <a:srgbClr val="FAFAFA"/>
-                    </a:solidFill>
-                  </a:tcPr>
-                </a:tc>
-              </a:tr>
-              <a:tr h="262890">
-                <a:tc>
-                  <a:txBody>
-                    <a:bodyPr/>
-                    <a:lstStyle/>
-                    <a:p>
-                      <a:pPr algn="l"/>
-                      <a:r>
-                        <a:rPr sz="1000" b="0">
-                          <a:solidFill>
-                            <a:srgbClr val="333333"/>
-                          </a:solidFill>
-                          <a:latin typeface="Calibri"/>
-                        </a:rPr>
-                        <a:t>1–14 Ağustos ürün adedi</a:t>
-                      </a:r>
-                    </a:p>
-                  </a:txBody>
-                  <a:tcPr>
-                    <a:solidFill>
-                      <a:srgbClr val="FFFFFF"/>
-                    </a:solidFill>
-                  </a:tcPr>
-                </a:tc>
-                <a:tc>
-                  <a:txBody>
-                    <a:bodyPr/>
-                    <a:lstStyle/>
-                    <a:p>
-                      <a:pPr algn="ctr"/>
-                      <a:r>
-                        <a:rPr sz="1000" b="0">
-                          <a:solidFill>
-                            <a:srgbClr val="333333"/>
-                          </a:solidFill>
-                          <a:latin typeface="Calibri"/>
-                        </a:rPr>
-                        <a:t>137.483</a:t>
-                      </a:r>
-                    </a:p>
-                  </a:txBody>
-                  <a:tcPr>
-                    <a:solidFill>
-                      <a:srgbClr val="FFFFFF"/>
-                    </a:solidFill>
-                  </a:tcPr>
-                </a:tc>
-                <a:tc>
-                  <a:txBody>
-                    <a:bodyPr/>
-                    <a:lstStyle/>
-                    <a:p>
-                      <a:pPr algn="ctr"/>
-                      <a:r>
-                        <a:rPr sz="1000" b="1">
-                          <a:solidFill>
-                            <a:srgbClr val="333333"/>
-                          </a:solidFill>
-                          <a:latin typeface="Calibri"/>
-                        </a:rPr>
-                        <a:t>171.963</a:t>
-                      </a:r>
-                    </a:p>
-                  </a:txBody>
-                  <a:tcPr>
-                    <a:solidFill>
-                      <a:srgbClr val="FFFFFF"/>
-                    </a:solidFill>
-                  </a:tcPr>
-                </a:tc>
-                <a:tc>
-                  <a:txBody>
-                    <a:bodyPr/>
-                    <a:lstStyle/>
-                    <a:p>
-                      <a:pPr algn="l"/>
-                      <a:r>
-                        <a:rPr sz="1000" b="0">
-                          <a:solidFill>
-                            <a:srgbClr val="A6001A"/>
-                          </a:solidFill>
-                          <a:latin typeface="Calibri"/>
-                        </a:rPr>
-                        <a:t>iş +%25,1 büyüdü — alım işi takip etti</a:t>
-                      </a:r>
-                    </a:p>
-                  </a:txBody>
-                  <a:tcPr>
-                    <a:solidFill>
-                      <a:srgbClr val="FFFFFF"/>
-                    </a:solidFill>
-                  </a:tcPr>
-                </a:tc>
-              </a:tr>
-              <a:tr h="262890">
-                <a:tc>
-                  <a:txBody>
-                    <a:bodyPr/>
-                    <a:lstStyle/>
-                    <a:p>
-                      <a:pPr algn="l"/>
-                      <a:r>
-                        <a:rPr sz="1000" b="0">
-                          <a:solidFill>
-                            <a:srgbClr val="333333"/>
-                          </a:solidFill>
-                          <a:latin typeface="Calibri"/>
-                        </a:rPr>
-                        <a:t>15–31 Ağustos ürün adedi</a:t>
-                      </a:r>
-                    </a:p>
-                  </a:txBody>
-                  <a:tcPr>
-                    <a:solidFill>
-                      <a:srgbClr val="FAFAFA"/>
-                    </a:solidFill>
-                  </a:tcPr>
-                </a:tc>
-                <a:tc>
-                  <a:txBody>
-                    <a:bodyPr/>
-                    <a:lstStyle/>
-                    <a:p>
-                      <a:pPr algn="ctr"/>
-                      <a:r>
-                        <a:rPr sz="1000" b="0">
-                          <a:solidFill>
-                            <a:srgbClr val="333333"/>
-                          </a:solidFill>
-                          <a:latin typeface="Calibri"/>
-                        </a:rPr>
-                        <a:t>321.026</a:t>
-                      </a:r>
-                    </a:p>
-                  </a:txBody>
-                  <a:tcPr>
-                    <a:solidFill>
-                      <a:srgbClr val="FAFAFA"/>
-                    </a:solidFill>
-                  </a:tcPr>
-                </a:tc>
-                <a:tc>
-                  <a:txBody>
-                    <a:bodyPr/>
-                    <a:lstStyle/>
-                    <a:p>
-                      <a:pPr algn="ctr"/>
-                      <a:r>
-                        <a:rPr sz="1000" b="1">
-                          <a:solidFill>
-                            <a:srgbClr val="333333"/>
-                          </a:solidFill>
-                          <a:latin typeface="Calibri"/>
-                        </a:rPr>
-                        <a:t>311.695</a:t>
-                      </a:r>
-                    </a:p>
-                  </a:txBody>
-                  <a:tcPr>
-                    <a:solidFill>
-                      <a:srgbClr val="FAFAFA"/>
-                    </a:solidFill>
-                  </a:tcPr>
-                </a:tc>
-                <a:tc>
-                  <a:txBody>
-                    <a:bodyPr/>
-                    <a:lstStyle/>
-                    <a:p>
-                      <a:pPr algn="l"/>
-                      <a:r>
-                        <a:rPr sz="1000" b="0">
-                          <a:solidFill>
-                            <a:srgbClr val="A6001A"/>
-                          </a:solidFill>
-                          <a:latin typeface="Calibri"/>
-                        </a:rPr>
-                        <a:t>−%2,9 — dalga Eylül'e kaydı</a:t>
-                      </a:r>
-                    </a:p>
-                  </a:txBody>
-                  <a:tcPr>
-                    <a:solidFill>
-                      <a:srgbClr val="FAFAFA"/>
-                    </a:solidFill>
-                  </a:tcPr>
-                </a:tc>
-              </a:tr>
-              <a:tr h="262890">
-                <a:tc>
-                  <a:txBody>
-                    <a:bodyPr/>
-                    <a:lstStyle/>
-                    <a:p>
-                      <a:pPr algn="l"/>
-                      <a:r>
-                        <a:rPr sz="1000" b="0">
-                          <a:solidFill>
-                            <a:srgbClr val="333333"/>
-                          </a:solidFill>
-                          <a:latin typeface="Calibri"/>
-                        </a:rPr>
-                        <a:t>31.08'de çalışan sezonluk</a:t>
-                      </a:r>
-                    </a:p>
-                  </a:txBody>
-                  <a:tcPr>
-                    <a:solidFill>
-                      <a:srgbClr val="FFFFFF"/>
-                    </a:solidFill>
-                  </a:tcPr>
-                </a:tc>
-                <a:tc>
-                  <a:txBody>
-                    <a:bodyPr/>
-                    <a:lstStyle/>
-                    <a:p>
-                      <a:pPr algn="ctr"/>
-                      <a:r>
-                        <a:rPr sz="1000" b="0">
-                          <a:solidFill>
-                            <a:srgbClr val="333333"/>
-                          </a:solidFill>
-                          <a:latin typeface="Calibri"/>
-                        </a:rPr>
-                        <a:t>65 kişi</a:t>
-                      </a:r>
-                    </a:p>
-                  </a:txBody>
-                  <a:tcPr>
-                    <a:solidFill>
-                      <a:srgbClr val="FFFFFF"/>
-                    </a:solidFill>
-                  </a:tcPr>
-                </a:tc>
-                <a:tc>
-                  <a:txBody>
-                    <a:bodyPr/>
-                    <a:lstStyle/>
-                    <a:p>
-                      <a:pPr algn="ctr"/>
-                      <a:r>
-                        <a:rPr sz="1000" b="1">
-                          <a:solidFill>
-                            <a:srgbClr val="333333"/>
-                          </a:solidFill>
-                          <a:latin typeface="Calibri"/>
-                        </a:rPr>
-                        <a:t>62 kişi</a:t>
-                      </a:r>
-                    </a:p>
-                  </a:txBody>
-                  <a:tcPr>
-                    <a:solidFill>
-                      <a:srgbClr val="FFFFFF"/>
-                    </a:solidFill>
-                  </a:tcPr>
-                </a:tc>
-                <a:tc>
-                  <a:txBody>
-                    <a:bodyPr/>
-                    <a:lstStyle/>
-                    <a:p>
-                      <a:pPr algn="l"/>
-                      <a:r>
-                        <a:rPr sz="1000" b="0">
-                          <a:solidFill>
-                            <a:srgbClr val="A6001A"/>
-                          </a:solidFill>
-                          <a:latin typeface="Calibri"/>
-                        </a:rPr>
-                        <a:t>kesimde 3 kişi DAHA AZ</a:t>
-                      </a:r>
-                    </a:p>
-                  </a:txBody>
-                  <a:tcPr>
-                    <a:solidFill>
-                      <a:srgbClr val="FFFFFF"/>
+                        <a:t>-8</a:t>
+                      </a:r>
+                    </a:p>
+                  </a:txBody>
+                  <a:tcPr>
+                    <a:solidFill>
+                      <a:srgbClr val="F2F2F2"/>
                     </a:solidFill>
                   </a:tcPr>
                 </a:tc>
@@ -13017,7 +12969,108 @@
       </p:graphicFrame>
       <p:sp>
         <p:nvSpPr>
-          <p:cNvPr id="22" name="TextBox 21"/>
+          <p:cNvPr id="22" name="Rounded Rectangle 21"/>
+          <p:cNvSpPr/>
+          <p:nvPr/>
+        </p:nvSpPr>
+        <p:spPr>
+          <a:xfrm>
+            <a:off x="7726679" y="3520440"/>
+            <a:ext cx="3840480" cy="1828800"/>
+          </a:xfrm>
+          <a:prstGeom prst="roundRect">
+            <a:avLst/>
+          </a:prstGeom>
+          <a:solidFill>
+            <a:srgbClr val="F2F2F2"/>
+          </a:solidFill>
+          <a:ln w="19050">
+            <a:solidFill>
+              <a:srgbClr val="E30622"/>
+            </a:solidFill>
+          </a:ln>
+          <a:effectLst/>
+        </p:spPr>
+        <p:style>
+          <a:lnRef idx="1">
+            <a:schemeClr val="accent1"/>
+          </a:lnRef>
+          <a:fillRef idx="3">
+            <a:schemeClr val="accent1"/>
+          </a:fillRef>
+          <a:effectRef idx="2">
+            <a:schemeClr val="accent1"/>
+          </a:effectRef>
+          <a:fontRef idx="minor">
+            <a:schemeClr val="lt1"/>
+          </a:fontRef>
+        </p:style>
+        <p:txBody>
+          <a:bodyPr rtlCol="0" anchor="ctr"/>
+          <a:lstStyle/>
+          <a:p>
+            <a:pPr algn="ctr"/>
+          </a:p>
+        </p:txBody>
+      </p:sp>
+      <p:sp>
+        <p:nvSpPr>
+          <p:cNvPr id="23" name="TextBox 22"/>
+          <p:cNvSpPr txBox="1"/>
+          <p:nvPr/>
+        </p:nvSpPr>
+        <p:spPr>
+          <a:xfrm>
+            <a:off x="7955279" y="3630168"/>
+            <a:ext cx="3429000" cy="1645920"/>
+          </a:xfrm>
+          <a:prstGeom prst="rect">
+            <a:avLst/>
+          </a:prstGeom>
+          <a:noFill/>
+        </p:spPr>
+        <p:txBody>
+          <a:bodyPr wrap="square" anchor="t">
+            <a:spAutoFit/>
+          </a:bodyPr>
+          <a:lstStyle/>
+          <a:p>
+            <a:pPr algn="l">
+              <a:lnSpc>
+                <a:spcPct val="112000"/>
+              </a:lnSpc>
+            </a:pPr>
+            <a:r>
+              <a:rPr sz="1300" b="1">
+                <a:solidFill>
+                  <a:srgbClr val="A6001A"/>
+                </a:solidFill>
+                <a:latin typeface="Calibri"/>
+              </a:rPr>
+              <a:t>Değerlendirme</a:t>
+            </a:r>
+          </a:p>
+          <a:p>
+            <a:pPr algn="l">
+              <a:lnSpc>
+                <a:spcPct val="112000"/>
+              </a:lnSpc>
+            </a:pPr>
+            <a:r>
+              <a:rPr sz="1050" b="0">
+                <a:solidFill>
+                  <a:srgbClr val="333333"/>
+                </a:solidFill>
+                <a:latin typeface="Calibri"/>
+              </a:rPr>
+              <a:t>31 Ağustos'ta kadrolu personel norm kadronun 8 kişi altındadır (30.06 tabanında -2). Normun üzerinde olan tek mağaza İst. Yolu (+3) ve iş hacmi en çok büyüyen mağaza da odur.</a:t>
+            </a:r>
+          </a:p>
+        </p:txBody>
+      </p:sp>
+      <p:sp>
+        <p:nvSpPr>
+          <p:cNvPr id="24" name="TextBox 23"/>
           <p:cNvSpPr txBox="1"/>
           <p:nvPr/>
         </p:nvSpPr>
@@ -13049,14 +13102,14 @@
                 </a:solidFill>
                 <a:latin typeface="Calibri"/>
               </a:rPr>
-              <a:t>* Kapsam: beş mağaza (FSM · Özlüce · İst. Yolu · Heykel · Şura) · Kohortlar okul açılışına göre AYNI ofsette kesildi (T−12: 27.08.2025 ve 02.09.2026) · İş hacmi üç POS mağazası · ⚠ "açılıştan kaç gün önce" ölçüsü açılış 6 gün kaydığı için 2026'yı mekanik olarak erken gösterir, takvim ölçüsü esastır.</a:t>
+              <a:t>* Norm SEZON DIŞI kadroyu tanımlar; sezonluk personel norma dahil değildir, kıyas yalnız kadrolu ile yapılır · Norm kaynağı: norm-kadro-20260811.json (11.08.2026), yönetim parametresi · Kapsam dışı: Şura norm tablosunda yok</a:t>
             </a:r>
           </a:p>
         </p:txBody>
       </p:sp>
       <p:sp>
         <p:nvSpPr>
-          <p:cNvPr id="23" name="TextBox 22"/>
+          <p:cNvPr id="25" name="TextBox 24"/>
           <p:cNvSpPr txBox="1"/>
           <p:nvPr/>
         </p:nvSpPr>
@@ -13146,7 +13199,7 @@
           <a:lstStyle/>
           <a:p>
             <a:r>
-              <a:t>Yöntem ve Açıklamalar</a:t>
+              <a:t>Sezonluk Alım Zamanlaması</a:t>
             </a:r>
           </a:p>
         </p:txBody>
@@ -13159,8 +13212,8 @@
         </p:nvSpPr>
         <p:spPr>
           <a:xfrm>
-            <a:off x="548640" y="1325880"/>
-            <a:ext cx="11018520" cy="740664"/>
+            <a:off x="548640" y="1371600"/>
+            <a:ext cx="3566160" cy="1828800"/>
           </a:xfrm>
           <a:prstGeom prst="rect">
             <a:avLst/>
@@ -13205,14 +13258,14 @@
         </p:nvSpPr>
         <p:spPr>
           <a:xfrm>
-            <a:off x="548640" y="1325880"/>
-            <a:ext cx="68580" cy="740664"/>
+            <a:off x="548640" y="1371600"/>
+            <a:ext cx="68580" cy="1828800"/>
           </a:xfrm>
           <a:prstGeom prst="rect">
             <a:avLst/>
           </a:prstGeom>
           <a:solidFill>
-            <a:srgbClr val="E30622"/>
+            <a:srgbClr val="9A9A9A"/>
           </a:solidFill>
           <a:ln>
             <a:noFill/>
@@ -13243,7 +13296,7 @@
       </p:sp>
       <p:pic>
         <p:nvPicPr>
-          <p:cNvPr id="5" name="Picture 4" descr="circle-check.png"/>
+          <p:cNvPr id="5" name="Picture 4" descr="workflow.png"/>
           <p:cNvPicPr>
             <a:picLocks noChangeAspect="1"/>
           </p:cNvPicPr>
@@ -13257,8 +13310,8 @@
         </p:blipFill>
         <p:spPr>
           <a:xfrm>
-            <a:off x="777240" y="1453895"/>
-            <a:ext cx="256032" cy="256032"/>
+            <a:off x="3639312" y="1536192"/>
+            <a:ext cx="274320" cy="274320"/>
           </a:xfrm>
           <a:prstGeom prst="rect">
             <a:avLst/>
@@ -13273,8 +13326,47 @@
         </p:nvSpPr>
         <p:spPr>
           <a:xfrm>
-            <a:off x="1143000" y="1389888"/>
-            <a:ext cx="10058400" cy="292608"/>
+            <a:off x="804672" y="1536192"/>
+            <a:ext cx="2697480" cy="384048"/>
+          </a:xfrm>
+          <a:prstGeom prst="rect">
+            <a:avLst/>
+          </a:prstGeom>
+          <a:noFill/>
+        </p:spPr>
+        <p:txBody>
+          <a:bodyPr wrap="square" anchor="t">
+            <a:spAutoFit/>
+          </a:bodyPr>
+          <a:lstStyle/>
+          <a:p>
+            <a:pPr algn="l">
+              <a:lnSpc>
+                <a:spcPct val="105000"/>
+              </a:lnSpc>
+            </a:pPr>
+            <a:r>
+              <a:rPr sz="900" b="1">
+                <a:solidFill>
+                  <a:srgbClr val="6E6E6E"/>
+                </a:solidFill>
+                <a:latin typeface="Calibri"/>
+              </a:rPr>
+              <a:t>ORTALAMA ALIM GÜNÜ</a:t>
+            </a:r>
+          </a:p>
+        </p:txBody>
+      </p:sp>
+      <p:sp>
+        <p:nvSpPr>
+          <p:cNvPr id="7" name="TextBox 6"/>
+          <p:cNvSpPr txBox="1"/>
+          <p:nvPr/>
+        </p:nvSpPr>
+        <p:spPr>
+          <a:xfrm>
+            <a:off x="804672" y="1975104"/>
+            <a:ext cx="3154679" cy="658368"/>
           </a:xfrm>
           <a:prstGeom prst="rect">
             <a:avLst/>
@@ -13293,27 +13385,27 @@
               </a:lnSpc>
             </a:pPr>
             <a:r>
-              <a:rPr sz="1150" b="1">
+              <a:rPr sz="2200" b="1">
                 <a:solidFill>
-                  <a:srgbClr val="A6001A"/>
+                  <a:srgbClr val="9A9A9A"/>
                 </a:solidFill>
                 <a:latin typeface="Calibri"/>
               </a:rPr>
-              <a:t>Büyüme kurumsal kanaldan mı geldi?</a:t>
+              <a:t>2,5 gün geç</a:t>
             </a:r>
           </a:p>
         </p:txBody>
       </p:sp>
       <p:sp>
         <p:nvSpPr>
-          <p:cNvPr id="7" name="TextBox 6"/>
+          <p:cNvPr id="8" name="TextBox 7"/>
           <p:cNvSpPr txBox="1"/>
           <p:nvPr/>
         </p:nvSpPr>
         <p:spPr>
           <a:xfrm>
-            <a:off x="1143000" y="1673352"/>
-            <a:ext cx="10058400" cy="356615"/>
+            <a:off x="804672" y="2688336"/>
+            <a:ext cx="3154679" cy="457200"/>
           </a:xfrm>
           <a:prstGeom prst="rect">
             <a:avLst/>
@@ -13328,31 +13420,31 @@
           <a:p>
             <a:pPr algn="l">
               <a:lnSpc>
-                <a:spcPct val="106000"/>
+                <a:spcPct val="105000"/>
               </a:lnSpc>
             </a:pPr>
             <a:r>
-              <a:rPr sz="950" b="0">
+              <a:rPr sz="1000" b="0">
                 <a:solidFill>
-                  <a:srgbClr val="333333"/>
+                  <a:srgbClr val="6E6E6E"/>
                 </a:solidFill>
                 <a:latin typeface="Calibri"/>
               </a:rPr>
-              <a:t>Tersi: Sınav Okulları küçüldü. Ocak–Ağustos cirosu 136,1 → 105,6 milyon TL (−%22,4). Mağaza tarafı +%54,9 büyüdü — büyümenin tamamı raftan geldi.</a:t>
+              <a:t>takvim ölçüsü · 225. → 228. gün</a:t>
             </a:r>
           </a:p>
         </p:txBody>
       </p:sp>
       <p:sp>
         <p:nvSpPr>
-          <p:cNvPr id="8" name="Rectangle 7"/>
+          <p:cNvPr id="9" name="Rectangle 8"/>
           <p:cNvSpPr/>
           <p:nvPr/>
         </p:nvSpPr>
         <p:spPr>
           <a:xfrm>
-            <a:off x="548640" y="2157984"/>
-            <a:ext cx="11018520" cy="740664"/>
+            <a:off x="4279392" y="1371600"/>
+            <a:ext cx="3566160" cy="1828800"/>
           </a:xfrm>
           <a:prstGeom prst="rect">
             <a:avLst/>
@@ -13391,20 +13483,20 @@
       </p:sp>
       <p:sp>
         <p:nvSpPr>
-          <p:cNvPr id="9" name="Rectangle 8"/>
+          <p:cNvPr id="10" name="Rectangle 9"/>
           <p:cNvSpPr/>
           <p:nvPr/>
         </p:nvSpPr>
         <p:spPr>
           <a:xfrm>
-            <a:off x="548640" y="2157984"/>
-            <a:ext cx="68580" cy="740664"/>
+            <a:off x="4279392" y="1371600"/>
+            <a:ext cx="68580" cy="1828800"/>
           </a:xfrm>
           <a:prstGeom prst="rect">
             <a:avLst/>
           </a:prstGeom>
           <a:solidFill>
-            <a:srgbClr val="E30622"/>
+            <a:srgbClr val="A6001A"/>
           </a:solidFill>
           <a:ln>
             <a:noFill/>
@@ -13435,22 +13527,22 @@
       </p:sp>
       <p:pic>
         <p:nvPicPr>
-          <p:cNvPr id="10" name="Picture 9" descr="circle-check.png"/>
+          <p:cNvPr id="11" name="Picture 10" descr="users.png"/>
           <p:cNvPicPr>
             <a:picLocks noChangeAspect="1"/>
           </p:cNvPicPr>
           <p:nvPr/>
         </p:nvPicPr>
         <p:blipFill>
-          <a:blip r:embed="rId3"/>
+          <a:blip r:embed="rId4"/>
           <a:stretch>
             <a:fillRect/>
           </a:stretch>
         </p:blipFill>
         <p:spPr>
           <a:xfrm>
-            <a:off x="777240" y="2286000"/>
-            <a:ext cx="256032" cy="256032"/>
+            <a:off x="7370064" y="1536192"/>
+            <a:ext cx="274320" cy="274320"/>
           </a:xfrm>
           <a:prstGeom prst="rect">
             <a:avLst/>
@@ -13459,14 +13551,53 @@
       </p:pic>
       <p:sp>
         <p:nvSpPr>
-          <p:cNvPr id="11" name="TextBox 10"/>
+          <p:cNvPr id="12" name="TextBox 11"/>
           <p:cNvSpPr txBox="1"/>
           <p:nvPr/>
         </p:nvSpPr>
         <p:spPr>
           <a:xfrm>
-            <a:off x="1143000" y="2221991"/>
-            <a:ext cx="10058400" cy="292608"/>
+            <a:off x="4535424" y="1536192"/>
+            <a:ext cx="2697480" cy="384048"/>
+          </a:xfrm>
+          <a:prstGeom prst="rect">
+            <a:avLst/>
+          </a:prstGeom>
+          <a:noFill/>
+        </p:spPr>
+        <p:txBody>
+          <a:bodyPr wrap="square" anchor="t">
+            <a:spAutoFit/>
+          </a:bodyPr>
+          <a:lstStyle/>
+          <a:p>
+            <a:pPr algn="l">
+              <a:lnSpc>
+                <a:spcPct val="105000"/>
+              </a:lnSpc>
+            </a:pPr>
+            <a:r>
+              <a:rPr sz="900" b="1">
+                <a:solidFill>
+                  <a:srgbClr val="6E6E6E"/>
+                </a:solidFill>
+                <a:latin typeface="Calibri"/>
+              </a:rPr>
+              <a:t>TEMMUZ VE ÖNCESİ ALIM</a:t>
+            </a:r>
+          </a:p>
+        </p:txBody>
+      </p:sp>
+      <p:sp>
+        <p:nvSpPr>
+          <p:cNvPr id="13" name="TextBox 12"/>
+          <p:cNvSpPr txBox="1"/>
+          <p:nvPr/>
+        </p:nvSpPr>
+        <p:spPr>
+          <a:xfrm>
+            <a:off x="4535424" y="1975104"/>
+            <a:ext cx="3154679" cy="658368"/>
           </a:xfrm>
           <a:prstGeom prst="rect">
             <a:avLst/>
@@ -13485,27 +13616,27 @@
               </a:lnSpc>
             </a:pPr>
             <a:r>
-              <a:rPr sz="1150" b="1">
+              <a:rPr sz="3000" b="1">
                 <a:solidFill>
                   <a:srgbClr val="A6001A"/>
                 </a:solidFill>
                 <a:latin typeface="Calibri"/>
               </a:rPr>
-              <a:t>Ciro artışı enflasyon kaynaklı mı?</a:t>
+              <a:t>6 → 2</a:t>
             </a:r>
           </a:p>
         </p:txBody>
       </p:sp>
       <p:sp>
         <p:nvSpPr>
-          <p:cNvPr id="12" name="TextBox 11"/>
+          <p:cNvPr id="14" name="TextBox 13"/>
           <p:cNvSpPr txBox="1"/>
           <p:nvPr/>
         </p:nvSpPr>
         <p:spPr>
           <a:xfrm>
-            <a:off x="1143000" y="2505456"/>
-            <a:ext cx="10058400" cy="356615"/>
+            <a:off x="4535424" y="2688336"/>
+            <a:ext cx="3154679" cy="457200"/>
           </a:xfrm>
           <a:prstGeom prst="rect">
             <a:avLst/>
@@ -13520,31 +13651,31 @@
           <a:p>
             <a:pPr algn="l">
               <a:lnSpc>
-                <a:spcPct val="106000"/>
+                <a:spcPct val="105000"/>
               </a:lnSpc>
             </a:pPr>
             <a:r>
-              <a:rPr sz="950" b="0">
+              <a:rPr sz="1000" b="0">
                 <a:solidFill>
-                  <a:srgbClr val="333333"/>
+                  <a:srgbClr val="6E6E6E"/>
                 </a:solidFill>
                 <a:latin typeface="Calibri"/>
               </a:rPr>
-              <a:t>Kısmen doğru: eşleşen ürünlerde fiyat endeksi +%19,8. Bu yüzden savunma ciroya değil ADEDE dayanıyor: ürün adedi +%34,9 ve adet fiyattan etkilenmez.</a:t>
+              <a:t>gerçek erken alım azaldı</a:t>
             </a:r>
           </a:p>
         </p:txBody>
       </p:sp>
       <p:sp>
         <p:nvSpPr>
-          <p:cNvPr id="13" name="Rectangle 12"/>
+          <p:cNvPr id="15" name="Rectangle 14"/>
           <p:cNvSpPr/>
           <p:nvPr/>
         </p:nvSpPr>
         <p:spPr>
           <a:xfrm>
-            <a:off x="548640" y="2990087"/>
-            <a:ext cx="11018520" cy="740664"/>
+            <a:off x="8001000" y="1371600"/>
+            <a:ext cx="3566160" cy="1828800"/>
           </a:xfrm>
           <a:prstGeom prst="rect">
             <a:avLst/>
@@ -13583,20 +13714,20 @@
       </p:sp>
       <p:sp>
         <p:nvSpPr>
-          <p:cNvPr id="14" name="Rectangle 13"/>
+          <p:cNvPr id="16" name="Rectangle 15"/>
           <p:cNvSpPr/>
           <p:nvPr/>
         </p:nvSpPr>
         <p:spPr>
           <a:xfrm>
-            <a:off x="548640" y="2990087"/>
-            <a:ext cx="68580" cy="740664"/>
+            <a:off x="8001000" y="1371600"/>
+            <a:ext cx="68580" cy="1828800"/>
           </a:xfrm>
           <a:prstGeom prst="rect">
             <a:avLst/>
           </a:prstGeom>
           <a:solidFill>
-            <a:srgbClr val="E30622"/>
+            <a:srgbClr val="A6001A"/>
           </a:solidFill>
           <a:ln>
             <a:noFill/>
@@ -13627,22 +13758,22 @@
       </p:sp>
       <p:pic>
         <p:nvPicPr>
-          <p:cNvPr id="15" name="Picture 14" descr="circle-check.png"/>
+          <p:cNvPr id="17" name="Picture 16" descr="package.png"/>
           <p:cNvPicPr>
             <a:picLocks noChangeAspect="1"/>
           </p:cNvPicPr>
           <p:nvPr/>
         </p:nvPicPr>
         <p:blipFill>
-          <a:blip r:embed="rId3"/>
+          <a:blip r:embed="rId5"/>
           <a:stretch>
             <a:fillRect/>
           </a:stretch>
         </p:blipFill>
         <p:spPr>
           <a:xfrm>
-            <a:off x="777240" y="3118103"/>
-            <a:ext cx="256032" cy="256032"/>
+            <a:off x="11091672" y="1536192"/>
+            <a:ext cx="274320" cy="274320"/>
           </a:xfrm>
           <a:prstGeom prst="rect">
             <a:avLst/>
@@ -13651,14 +13782,53 @@
       </p:pic>
       <p:sp>
         <p:nvSpPr>
-          <p:cNvPr id="16" name="TextBox 15"/>
+          <p:cNvPr id="18" name="TextBox 17"/>
           <p:cNvSpPr txBox="1"/>
           <p:nvPr/>
         </p:nvSpPr>
         <p:spPr>
           <a:xfrm>
-            <a:off x="1143000" y="3054095"/>
-            <a:ext cx="10058400" cy="292608"/>
+            <a:off x="8257031" y="1536192"/>
+            <a:ext cx="2697480" cy="384048"/>
+          </a:xfrm>
+          <a:prstGeom prst="rect">
+            <a:avLst/>
+          </a:prstGeom>
+          <a:noFill/>
+        </p:spPr>
+        <p:txBody>
+          <a:bodyPr wrap="square" anchor="t">
+            <a:spAutoFit/>
+          </a:bodyPr>
+          <a:lstStyle/>
+          <a:p>
+            <a:pPr algn="l">
+              <a:lnSpc>
+                <a:spcPct val="105000"/>
+              </a:lnSpc>
+            </a:pPr>
+            <a:r>
+              <a:rPr sz="900" b="1">
+                <a:solidFill>
+                  <a:srgbClr val="6E6E6E"/>
+                </a:solidFill>
+                <a:latin typeface="Calibri"/>
+              </a:rPr>
+              <a:t>1–14 AĞUSTOS İŞ HACMİ</a:t>
+            </a:r>
+          </a:p>
+        </p:txBody>
+      </p:sp>
+      <p:sp>
+        <p:nvSpPr>
+          <p:cNvPr id="19" name="TextBox 18"/>
+          <p:cNvSpPr txBox="1"/>
+          <p:nvPr/>
+        </p:nvSpPr>
+        <p:spPr>
+          <a:xfrm>
+            <a:off x="8257031" y="1975104"/>
+            <a:ext cx="3154679" cy="658368"/>
           </a:xfrm>
           <a:prstGeom prst="rect">
             <a:avLst/>
@@ -13677,27 +13847,27 @@
               </a:lnSpc>
             </a:pPr>
             <a:r>
-              <a:rPr sz="1150" b="1">
+              <a:rPr sz="3000" b="1">
                 <a:solidFill>
                   <a:srgbClr val="A6001A"/>
                 </a:solidFill>
                 <a:latin typeface="Calibri"/>
               </a:rPr>
-              <a:t>Kasa sistemi değişti, karşılaştırma geçerli mi?</a:t>
+              <a:t>+%25,1</a:t>
             </a:r>
           </a:p>
         </p:txBody>
       </p:sp>
       <p:sp>
         <p:nvSpPr>
-          <p:cNvPr id="17" name="TextBox 16"/>
+          <p:cNvPr id="20" name="TextBox 19"/>
           <p:cNvSpPr txBox="1"/>
           <p:nvPr/>
         </p:nvSpPr>
         <p:spPr>
           <a:xfrm>
-            <a:off x="1143000" y="3337559"/>
-            <a:ext cx="10058400" cy="356615"/>
+            <a:off x="8257031" y="2688336"/>
+            <a:ext cx="3154679" cy="457200"/>
           </a:xfrm>
           <a:prstGeom prst="rect">
             <a:avLst/>
@@ -13712,408 +13882,1180 @@
           <a:p>
             <a:pPr algn="l">
               <a:lnSpc>
-                <a:spcPct val="106000"/>
+                <a:spcPct val="105000"/>
               </a:lnSpc>
             </a:pPr>
             <a:r>
-              <a:rPr sz="950" b="0">
+              <a:rPr sz="1000" b="0">
                 <a:solidFill>
-                  <a:srgbClr val="333333"/>
+                  <a:srgbClr val="6E6E6E"/>
                 </a:solidFill>
                 <a:latin typeface="Calibri"/>
               </a:rPr>
-              <a:t>Bu yüzden ölçüm POS'tan değil ERP'den (DerinSIS) alındı — iki yılda da aynı kaynak, aynı belge tipi. Temmuz 2025 kasa geçişi ölçüye girmiyor.</a:t>
+              <a:t>137.483 → 171.963 adet</a:t>
             </a:r>
           </a:p>
         </p:txBody>
       </p:sp>
-      <p:sp>
-        <p:nvSpPr>
-          <p:cNvPr id="18" name="Rectangle 17"/>
-          <p:cNvSpPr/>
-          <p:nvPr/>
-        </p:nvSpPr>
-        <p:spPr>
-          <a:xfrm>
-            <a:off x="548640" y="3822191"/>
-            <a:ext cx="11018520" cy="740664"/>
-          </a:xfrm>
-          <a:prstGeom prst="rect">
-            <a:avLst/>
-          </a:prstGeom>
-          <a:solidFill>
-            <a:srgbClr val="FFFFFF"/>
-          </a:solidFill>
-          <a:ln w="12700">
-            <a:solidFill>
-              <a:srgbClr val="DCDCDC"/>
-            </a:solidFill>
-          </a:ln>
-          <a:effectLst/>
-        </p:spPr>
-        <p:style>
-          <a:lnRef idx="1">
-            <a:schemeClr val="accent1"/>
-          </a:lnRef>
-          <a:fillRef idx="3">
-            <a:schemeClr val="accent1"/>
-          </a:fillRef>
-          <a:effectRef idx="2">
-            <a:schemeClr val="accent1"/>
-          </a:effectRef>
-          <a:fontRef idx="minor">
-            <a:schemeClr val="lt1"/>
-          </a:fontRef>
-        </p:style>
-        <p:txBody>
-          <a:bodyPr rtlCol="0" anchor="ctr"/>
-          <a:lstStyle/>
-          <a:p>
-            <a:pPr algn="ctr"/>
-          </a:p>
-        </p:txBody>
-      </p:sp>
-      <p:sp>
-        <p:nvSpPr>
-          <p:cNvPr id="19" name="Rectangle 18"/>
-          <p:cNvSpPr/>
-          <p:nvPr/>
-        </p:nvSpPr>
-        <p:spPr>
-          <a:xfrm>
-            <a:off x="548640" y="3822191"/>
-            <a:ext cx="68580" cy="740664"/>
-          </a:xfrm>
-          <a:prstGeom prst="rect">
-            <a:avLst/>
-          </a:prstGeom>
-          <a:solidFill>
-            <a:srgbClr val="E30622"/>
-          </a:solidFill>
-          <a:ln>
-            <a:noFill/>
-          </a:ln>
-          <a:effectLst/>
-        </p:spPr>
-        <p:style>
-          <a:lnRef idx="1">
-            <a:schemeClr val="accent1"/>
-          </a:lnRef>
-          <a:fillRef idx="3">
-            <a:schemeClr val="accent1"/>
-          </a:fillRef>
-          <a:effectRef idx="2">
-            <a:schemeClr val="accent1"/>
-          </a:effectRef>
-          <a:fontRef idx="minor">
-            <a:schemeClr val="lt1"/>
-          </a:fontRef>
-        </p:style>
-        <p:txBody>
-          <a:bodyPr rtlCol="0" anchor="ctr"/>
-          <a:lstStyle/>
-          <a:p>
-            <a:pPr algn="ctr"/>
-          </a:p>
-        </p:txBody>
-      </p:sp>
-      <p:pic>
-        <p:nvPicPr>
-          <p:cNvPr id="20" name="Picture 19" descr="circle-check.png"/>
-          <p:cNvPicPr>
-            <a:picLocks noChangeAspect="1"/>
-          </p:cNvPicPr>
-          <p:nvPr/>
-        </p:nvPicPr>
-        <p:blipFill>
-          <a:blip r:embed="rId3"/>
-          <a:stretch>
-            <a:fillRect/>
-          </a:stretch>
-        </p:blipFill>
-        <p:spPr>
-          <a:xfrm>
-            <a:off x="777240" y="3950207"/>
-            <a:ext cx="256032" cy="256032"/>
-          </a:xfrm>
-          <a:prstGeom prst="rect">
-            <a:avLst/>
-          </a:prstGeom>
-        </p:spPr>
-      </p:pic>
-      <p:sp>
-        <p:nvSpPr>
-          <p:cNvPr id="21" name="TextBox 20"/>
-          <p:cNvSpPr txBox="1"/>
-          <p:nvPr/>
-        </p:nvSpPr>
-        <p:spPr>
-          <a:xfrm>
-            <a:off x="1143000" y="3886200"/>
-            <a:ext cx="10058400" cy="292608"/>
-          </a:xfrm>
-          <a:prstGeom prst="rect">
-            <a:avLst/>
-          </a:prstGeom>
-          <a:noFill/>
-        </p:spPr>
-        <p:txBody>
-          <a:bodyPr wrap="square" anchor="t">
-            <a:spAutoFit/>
-          </a:bodyPr>
-          <a:lstStyle/>
-          <a:p>
-            <a:pPr algn="l">
-              <a:lnSpc>
-                <a:spcPct val="100000"/>
-              </a:lnSpc>
-            </a:pPr>
-            <a:r>
-              <a:rPr sz="1150" b="1">
-                <a:solidFill>
-                  <a:srgbClr val="A6001A"/>
-                </a:solidFill>
-                <a:latin typeface="Calibri"/>
-              </a:rPr>
-              <a:t>Sezonluk personel erken mi alındı?</a:t>
-            </a:r>
-          </a:p>
-        </p:txBody>
-      </p:sp>
+      <p:graphicFrame>
+        <p:nvGraphicFramePr>
+          <p:cNvPr id="21" name="Table 20"/>
+          <p:cNvGraphicFramePr>
+            <a:graphicFrameLocks noGrp="1"/>
+          </p:cNvGraphicFramePr>
+          <p:nvPr/>
+        </p:nvGraphicFramePr>
+        <p:xfrm>
+          <a:off x="548640" y="3429000"/>
+          <a:ext cx="11018520" cy="2103120"/>
+        </p:xfrm>
+        <a:graphic>
+          <a:graphicData uri="http://schemas.openxmlformats.org/drawingml/2006/table">
+            <a:tbl>
+              <a:tblPr firstRow="1" bandRow="1">
+                <a:tableStyleId>{5C22544A-7EE6-4342-B048-85BDC9FD1C3A}</a:tableStyleId>
+              </a:tblPr>
+              <a:tblGrid>
+                <a:gridCol w="3291840"/>
+                <a:gridCol w="1737360"/>
+                <a:gridCol w="1737360"/>
+                <a:gridCol w="4251960"/>
+              </a:tblGrid>
+              <a:tr h="175260">
+                <a:tc>
+                  <a:txBody>
+                    <a:bodyPr/>
+                    <a:lstStyle/>
+                    <a:p>
+                      <a:pPr algn="l"/>
+                      <a:r>
+                        <a:rPr sz="900" b="1">
+                          <a:solidFill>
+                            <a:srgbClr val="FFFFFF"/>
+                          </a:solidFill>
+                          <a:latin typeface="Calibri"/>
+                        </a:rPr>
+                        <a:t>Ölçü</a:t>
+                      </a:r>
+                    </a:p>
+                  </a:txBody>
+                  <a:tcPr>
+                    <a:solidFill>
+                      <a:srgbClr val="E30622"/>
+                    </a:solidFill>
+                  </a:tcPr>
+                </a:tc>
+                <a:tc>
+                  <a:txBody>
+                    <a:bodyPr/>
+                    <a:lstStyle/>
+                    <a:p>
+                      <a:pPr algn="ctr"/>
+                      <a:r>
+                        <a:rPr sz="900" b="1">
+                          <a:solidFill>
+                            <a:srgbClr val="FFFFFF"/>
+                          </a:solidFill>
+                          <a:latin typeface="Calibri"/>
+                        </a:rPr>
+                        <a:t>2025</a:t>
+                      </a:r>
+                    </a:p>
+                  </a:txBody>
+                  <a:tcPr>
+                    <a:solidFill>
+                      <a:srgbClr val="E30622"/>
+                    </a:solidFill>
+                  </a:tcPr>
+                </a:tc>
+                <a:tc>
+                  <a:txBody>
+                    <a:bodyPr/>
+                    <a:lstStyle/>
+                    <a:p>
+                      <a:pPr algn="ctr"/>
+                      <a:r>
+                        <a:rPr sz="900" b="1">
+                          <a:solidFill>
+                            <a:srgbClr val="FFFFFF"/>
+                          </a:solidFill>
+                          <a:latin typeface="Calibri"/>
+                        </a:rPr>
+                        <a:t>2026</a:t>
+                      </a:r>
+                    </a:p>
+                  </a:txBody>
+                  <a:tcPr>
+                    <a:solidFill>
+                      <a:srgbClr val="E30622"/>
+                    </a:solidFill>
+                  </a:tcPr>
+                </a:tc>
+                <a:tc>
+                  <a:txBody>
+                    <a:bodyPr/>
+                    <a:lstStyle/>
+                    <a:p>
+                      <a:pPr algn="l"/>
+                      <a:r>
+                        <a:rPr sz="900" b="1">
+                          <a:solidFill>
+                            <a:srgbClr val="FFFFFF"/>
+                          </a:solidFill>
+                          <a:latin typeface="Calibri"/>
+                        </a:rPr>
+                        <a:t>Yorum</a:t>
+                      </a:r>
+                    </a:p>
+                  </a:txBody>
+                  <a:tcPr>
+                    <a:solidFill>
+                      <a:srgbClr val="E30622"/>
+                    </a:solidFill>
+                  </a:tcPr>
+                </a:tc>
+              </a:tr>
+              <a:tr h="175260">
+                <a:tc>
+                  <a:txBody>
+                    <a:bodyPr/>
+                    <a:lstStyle/>
+                    <a:p>
+                      <a:pPr algn="l"/>
+                      <a:r>
+                        <a:rPr sz="1000" b="0">
+                          <a:solidFill>
+                            <a:srgbClr val="333333"/>
+                          </a:solidFill>
+                          <a:latin typeface="Calibri"/>
+                        </a:rPr>
+                        <a:t>Ortalama alım günü (takvim)</a:t>
+                      </a:r>
+                    </a:p>
+                  </a:txBody>
+                  <a:tcPr>
+                    <a:solidFill>
+                      <a:srgbClr val="FFFFFF"/>
+                    </a:solidFill>
+                  </a:tcPr>
+                </a:tc>
+                <a:tc>
+                  <a:txBody>
+                    <a:bodyPr/>
+                    <a:lstStyle/>
+                    <a:p>
+                      <a:pPr algn="ctr"/>
+                      <a:r>
+                        <a:rPr sz="1000" b="0">
+                          <a:solidFill>
+                            <a:srgbClr val="333333"/>
+                          </a:solidFill>
+                          <a:latin typeface="Calibri"/>
+                        </a:rPr>
+                        <a:t>225. gün</a:t>
+                      </a:r>
+                    </a:p>
+                  </a:txBody>
+                  <a:tcPr>
+                    <a:solidFill>
+                      <a:srgbClr val="FFFFFF"/>
+                    </a:solidFill>
+                  </a:tcPr>
+                </a:tc>
+                <a:tc>
+                  <a:txBody>
+                    <a:bodyPr/>
+                    <a:lstStyle/>
+                    <a:p>
+                      <a:pPr algn="ctr"/>
+                      <a:r>
+                        <a:rPr sz="1000" b="1">
+                          <a:solidFill>
+                            <a:srgbClr val="333333"/>
+                          </a:solidFill>
+                          <a:latin typeface="Calibri"/>
+                        </a:rPr>
+                        <a:t>228. gün</a:t>
+                      </a:r>
+                    </a:p>
+                  </a:txBody>
+                  <a:tcPr>
+                    <a:solidFill>
+                      <a:srgbClr val="FFFFFF"/>
+                    </a:solidFill>
+                  </a:tcPr>
+                </a:tc>
+                <a:tc>
+                  <a:txBody>
+                    <a:bodyPr/>
+                    <a:lstStyle/>
+                    <a:p>
+                      <a:pPr algn="l"/>
+                      <a:r>
+                        <a:rPr sz="1000" b="0">
+                          <a:solidFill>
+                            <a:srgbClr val="A6001A"/>
+                          </a:solidFill>
+                          <a:latin typeface="Calibri"/>
+                        </a:rPr>
+                        <a:t>2026 alımı ortalama 2,5 gün DAHA GEÇ</a:t>
+                      </a:r>
+                    </a:p>
+                  </a:txBody>
+                  <a:tcPr>
+                    <a:solidFill>
+                      <a:srgbClr val="FFFFFF"/>
+                    </a:solidFill>
+                  </a:tcPr>
+                </a:tc>
+              </a:tr>
+              <a:tr h="175260">
+                <a:tc>
+                  <a:txBody>
+                    <a:bodyPr/>
+                    <a:lstStyle/>
+                    <a:p>
+                      <a:pPr algn="l"/>
+                      <a:r>
+                        <a:rPr sz="1000" b="0">
+                          <a:solidFill>
+                            <a:srgbClr val="333333"/>
+                          </a:solidFill>
+                          <a:latin typeface="Calibri"/>
+                        </a:rPr>
+                        <a:t>Temmuz ve öncesi alınan</a:t>
+                      </a:r>
+                    </a:p>
+                  </a:txBody>
+                  <a:tcPr>
+                    <a:solidFill>
+                      <a:srgbClr val="FAFAFA"/>
+                    </a:solidFill>
+                  </a:tcPr>
+                </a:tc>
+                <a:tc>
+                  <a:txBody>
+                    <a:bodyPr/>
+                    <a:lstStyle/>
+                    <a:p>
+                      <a:pPr algn="ctr"/>
+                      <a:r>
+                        <a:rPr sz="1000" b="0">
+                          <a:solidFill>
+                            <a:srgbClr val="333333"/>
+                          </a:solidFill>
+                          <a:latin typeface="Calibri"/>
+                        </a:rPr>
+                        <a:t>6 kişi</a:t>
+                      </a:r>
+                    </a:p>
+                  </a:txBody>
+                  <a:tcPr>
+                    <a:solidFill>
+                      <a:srgbClr val="FAFAFA"/>
+                    </a:solidFill>
+                  </a:tcPr>
+                </a:tc>
+                <a:tc>
+                  <a:txBody>
+                    <a:bodyPr/>
+                    <a:lstStyle/>
+                    <a:p>
+                      <a:pPr algn="ctr"/>
+                      <a:r>
+                        <a:rPr sz="1000" b="1">
+                          <a:solidFill>
+                            <a:srgbClr val="333333"/>
+                          </a:solidFill>
+                          <a:latin typeface="Calibri"/>
+                        </a:rPr>
+                        <a:t>2 kişi</a:t>
+                      </a:r>
+                    </a:p>
+                  </a:txBody>
+                  <a:tcPr>
+                    <a:solidFill>
+                      <a:srgbClr val="FAFAFA"/>
+                    </a:solidFill>
+                  </a:tcPr>
+                </a:tc>
+                <a:tc>
+                  <a:txBody>
+                    <a:bodyPr/>
+                    <a:lstStyle/>
+                    <a:p>
+                      <a:pPr algn="l"/>
+                      <a:r>
+                        <a:rPr sz="1000" b="0">
+                          <a:solidFill>
+                            <a:srgbClr val="A6001A"/>
+                          </a:solidFill>
+                          <a:latin typeface="Calibri"/>
+                        </a:rPr>
+                        <a:t>erken alım azaldı</a:t>
+                      </a:r>
+                    </a:p>
+                  </a:txBody>
+                  <a:tcPr>
+                    <a:solidFill>
+                      <a:srgbClr val="FAFAFA"/>
+                    </a:solidFill>
+                  </a:tcPr>
+                </a:tc>
+              </a:tr>
+              <a:tr h="175260">
+                <a:tc>
+                  <a:txBody>
+                    <a:bodyPr/>
+                    <a:lstStyle/>
+                    <a:p>
+                      <a:pPr algn="l"/>
+                      <a:r>
+                        <a:rPr sz="1000" b="0">
+                          <a:solidFill>
+                            <a:srgbClr val="333333"/>
+                          </a:solidFill>
+                          <a:latin typeface="Calibri"/>
+                        </a:rPr>
+                        <a:t>Açılıştan 45+ gün önce alınan</a:t>
+                      </a:r>
+                    </a:p>
+                  </a:txBody>
+                  <a:tcPr>
+                    <a:solidFill>
+                      <a:srgbClr val="FFFFFF"/>
+                    </a:solidFill>
+                  </a:tcPr>
+                </a:tc>
+                <a:tc>
+                  <a:txBody>
+                    <a:bodyPr/>
+                    <a:lstStyle/>
+                    <a:p>
+                      <a:pPr algn="ctr"/>
+                      <a:r>
+                        <a:rPr sz="1000" b="0">
+                          <a:solidFill>
+                            <a:srgbClr val="333333"/>
+                          </a:solidFill>
+                          <a:latin typeface="Calibri"/>
+                        </a:rPr>
+                        <a:t>4 kişi</a:t>
+                      </a:r>
+                    </a:p>
+                  </a:txBody>
+                  <a:tcPr>
+                    <a:solidFill>
+                      <a:srgbClr val="FFFFFF"/>
+                    </a:solidFill>
+                  </a:tcPr>
+                </a:tc>
+                <a:tc>
+                  <a:txBody>
+                    <a:bodyPr/>
+                    <a:lstStyle/>
+                    <a:p>
+                      <a:pPr algn="ctr"/>
+                      <a:r>
+                        <a:rPr sz="1000" b="1">
+                          <a:solidFill>
+                            <a:srgbClr val="333333"/>
+                          </a:solidFill>
+                          <a:latin typeface="Calibri"/>
+                        </a:rPr>
+                        <a:t>2 kişi</a:t>
+                      </a:r>
+                    </a:p>
+                  </a:txBody>
+                  <a:tcPr>
+                    <a:solidFill>
+                      <a:srgbClr val="FFFFFF"/>
+                    </a:solidFill>
+                  </a:tcPr>
+                </a:tc>
+                <a:tc>
+                  <a:txBody>
+                    <a:bodyPr/>
+                    <a:lstStyle/>
+                    <a:p>
+                      <a:pPr algn="l"/>
+                      <a:r>
+                        <a:rPr sz="1000" b="0">
+                          <a:solidFill>
+                            <a:srgbClr val="A6001A"/>
+                          </a:solidFill>
+                          <a:latin typeface="Calibri"/>
+                        </a:rPr>
+                        <a:t>çok erken alım azaldı</a:t>
+                      </a:r>
+                    </a:p>
+                  </a:txBody>
+                  <a:tcPr>
+                    <a:solidFill>
+                      <a:srgbClr val="FFFFFF"/>
+                    </a:solidFill>
+                  </a:tcPr>
+                </a:tc>
+              </a:tr>
+              <a:tr h="175260">
+                <a:tc>
+                  <a:txBody>
+                    <a:bodyPr/>
+                    <a:lstStyle/>
+                    <a:p>
+                      <a:pPr algn="l"/>
+                      <a:r>
+                        <a:rPr sz="1000" b="0">
+                          <a:solidFill>
+                            <a:srgbClr val="333333"/>
+                          </a:solidFill>
+                          <a:latin typeface="Calibri"/>
+                        </a:rPr>
+                        <a:t>1–14 Ağustos alınan</a:t>
+                      </a:r>
+                    </a:p>
+                  </a:txBody>
+                  <a:tcPr>
+                    <a:solidFill>
+                      <a:srgbClr val="FAFAFA"/>
+                    </a:solidFill>
+                  </a:tcPr>
+                </a:tc>
+                <a:tc>
+                  <a:txBody>
+                    <a:bodyPr/>
+                    <a:lstStyle/>
+                    <a:p>
+                      <a:pPr algn="ctr"/>
+                      <a:r>
+                        <a:rPr sz="1000" b="0">
+                          <a:solidFill>
+                            <a:srgbClr val="333333"/>
+                          </a:solidFill>
+                          <a:latin typeface="Calibri"/>
+                        </a:rPr>
+                        <a:t>12 kişi</a:t>
+                      </a:r>
+                    </a:p>
+                  </a:txBody>
+                  <a:tcPr>
+                    <a:solidFill>
+                      <a:srgbClr val="FAFAFA"/>
+                    </a:solidFill>
+                  </a:tcPr>
+                </a:tc>
+                <a:tc>
+                  <a:txBody>
+                    <a:bodyPr/>
+                    <a:lstStyle/>
+                    <a:p>
+                      <a:pPr algn="ctr"/>
+                      <a:r>
+                        <a:rPr sz="1000" b="1">
+                          <a:solidFill>
+                            <a:srgbClr val="333333"/>
+                          </a:solidFill>
+                          <a:latin typeface="Calibri"/>
+                        </a:rPr>
+                        <a:t>30 kişi</a:t>
+                      </a:r>
+                    </a:p>
+                  </a:txBody>
+                  <a:tcPr>
+                    <a:solidFill>
+                      <a:srgbClr val="FAFAFA"/>
+                    </a:solidFill>
+                  </a:tcPr>
+                </a:tc>
+                <a:tc>
+                  <a:txBody>
+                    <a:bodyPr/>
+                    <a:lstStyle/>
+                    <a:p>
+                      <a:pPr algn="l"/>
+                      <a:r>
+                        <a:rPr sz="1000" b="0">
+                          <a:solidFill>
+                            <a:srgbClr val="A6001A"/>
+                          </a:solidFill>
+                          <a:latin typeface="Calibri"/>
+                        </a:rPr>
+                        <a:t>artış bu iki haftada</a:t>
+                      </a:r>
+                    </a:p>
+                  </a:txBody>
+                  <a:tcPr>
+                    <a:solidFill>
+                      <a:srgbClr val="FAFAFA"/>
+                    </a:solidFill>
+                  </a:tcPr>
+                </a:tc>
+              </a:tr>
+              <a:tr h="175260">
+                <a:tc>
+                  <a:txBody>
+                    <a:bodyPr/>
+                    <a:lstStyle/>
+                    <a:p>
+                      <a:pPr algn="l"/>
+                      <a:r>
+                        <a:rPr sz="1000" b="0">
+                          <a:solidFill>
+                            <a:srgbClr val="333333"/>
+                          </a:solidFill>
+                          <a:latin typeface="Calibri"/>
+                        </a:rPr>
+                        <a:t>1–14 Ağustos ürün adedi</a:t>
+                      </a:r>
+                    </a:p>
+                  </a:txBody>
+                  <a:tcPr>
+                    <a:solidFill>
+                      <a:srgbClr val="FFFFFF"/>
+                    </a:solidFill>
+                  </a:tcPr>
+                </a:tc>
+                <a:tc>
+                  <a:txBody>
+                    <a:bodyPr/>
+                    <a:lstStyle/>
+                    <a:p>
+                      <a:pPr algn="ctr"/>
+                      <a:r>
+                        <a:rPr sz="1000" b="0">
+                          <a:solidFill>
+                            <a:srgbClr val="333333"/>
+                          </a:solidFill>
+                          <a:latin typeface="Calibri"/>
+                        </a:rPr>
+                        <a:t>137.483</a:t>
+                      </a:r>
+                    </a:p>
+                  </a:txBody>
+                  <a:tcPr>
+                    <a:solidFill>
+                      <a:srgbClr val="FFFFFF"/>
+                    </a:solidFill>
+                  </a:tcPr>
+                </a:tc>
+                <a:tc>
+                  <a:txBody>
+                    <a:bodyPr/>
+                    <a:lstStyle/>
+                    <a:p>
+                      <a:pPr algn="ctr"/>
+                      <a:r>
+                        <a:rPr sz="1000" b="1">
+                          <a:solidFill>
+                            <a:srgbClr val="333333"/>
+                          </a:solidFill>
+                          <a:latin typeface="Calibri"/>
+                        </a:rPr>
+                        <a:t>171.963</a:t>
+                      </a:r>
+                    </a:p>
+                  </a:txBody>
+                  <a:tcPr>
+                    <a:solidFill>
+                      <a:srgbClr val="FFFFFF"/>
+                    </a:solidFill>
+                  </a:tcPr>
+                </a:tc>
+                <a:tc>
+                  <a:txBody>
+                    <a:bodyPr/>
+                    <a:lstStyle/>
+                    <a:p>
+                      <a:pPr algn="l"/>
+                      <a:r>
+                        <a:rPr sz="1000" b="0">
+                          <a:solidFill>
+                            <a:srgbClr val="A6001A"/>
+                          </a:solidFill>
+                          <a:latin typeface="Calibri"/>
+                        </a:rPr>
+                        <a:t>iş +%25,1 büyüdü — alım işi takip etti</a:t>
+                      </a:r>
+                    </a:p>
+                  </a:txBody>
+                  <a:tcPr>
+                    <a:solidFill>
+                      <a:srgbClr val="FFFFFF"/>
+                    </a:solidFill>
+                  </a:tcPr>
+                </a:tc>
+              </a:tr>
+              <a:tr h="175260">
+                <a:tc>
+                  <a:txBody>
+                    <a:bodyPr/>
+                    <a:lstStyle/>
+                    <a:p>
+                      <a:pPr algn="l"/>
+                      <a:r>
+                        <a:rPr sz="1000" b="0">
+                          <a:solidFill>
+                            <a:srgbClr val="333333"/>
+                          </a:solidFill>
+                          <a:latin typeface="Calibri"/>
+                        </a:rPr>
+                        <a:t>15–31 Ağustos ürün adedi</a:t>
+                      </a:r>
+                    </a:p>
+                  </a:txBody>
+                  <a:tcPr>
+                    <a:solidFill>
+                      <a:srgbClr val="FAFAFA"/>
+                    </a:solidFill>
+                  </a:tcPr>
+                </a:tc>
+                <a:tc>
+                  <a:txBody>
+                    <a:bodyPr/>
+                    <a:lstStyle/>
+                    <a:p>
+                      <a:pPr algn="ctr"/>
+                      <a:r>
+                        <a:rPr sz="1000" b="0">
+                          <a:solidFill>
+                            <a:srgbClr val="333333"/>
+                          </a:solidFill>
+                          <a:latin typeface="Calibri"/>
+                        </a:rPr>
+                        <a:t>321.026</a:t>
+                      </a:r>
+                    </a:p>
+                  </a:txBody>
+                  <a:tcPr>
+                    <a:solidFill>
+                      <a:srgbClr val="FAFAFA"/>
+                    </a:solidFill>
+                  </a:tcPr>
+                </a:tc>
+                <a:tc>
+                  <a:txBody>
+                    <a:bodyPr/>
+                    <a:lstStyle/>
+                    <a:p>
+                      <a:pPr algn="ctr"/>
+                      <a:r>
+                        <a:rPr sz="1000" b="1">
+                          <a:solidFill>
+                            <a:srgbClr val="333333"/>
+                          </a:solidFill>
+                          <a:latin typeface="Calibri"/>
+                        </a:rPr>
+                        <a:t>311.695</a:t>
+                      </a:r>
+                    </a:p>
+                  </a:txBody>
+                  <a:tcPr>
+                    <a:solidFill>
+                      <a:srgbClr val="FAFAFA"/>
+                    </a:solidFill>
+                  </a:tcPr>
+                </a:tc>
+                <a:tc>
+                  <a:txBody>
+                    <a:bodyPr/>
+                    <a:lstStyle/>
+                    <a:p>
+                      <a:pPr algn="l"/>
+                      <a:r>
+                        <a:rPr sz="1000" b="0">
+                          <a:solidFill>
+                            <a:srgbClr val="A6001A"/>
+                          </a:solidFill>
+                          <a:latin typeface="Calibri"/>
+                        </a:rPr>
+                        <a:t>−%2,9 — dalga Eylül'e kaydı</a:t>
+                      </a:r>
+                    </a:p>
+                  </a:txBody>
+                  <a:tcPr>
+                    <a:solidFill>
+                      <a:srgbClr val="FAFAFA"/>
+                    </a:solidFill>
+                  </a:tcPr>
+                </a:tc>
+              </a:tr>
+              <a:tr h="175260">
+                <a:tc>
+                  <a:txBody>
+                    <a:bodyPr/>
+                    <a:lstStyle/>
+                    <a:p>
+                      <a:pPr algn="l"/>
+                      <a:r>
+                        <a:rPr sz="1000" b="0">
+                          <a:solidFill>
+                            <a:srgbClr val="333333"/>
+                          </a:solidFill>
+                          <a:latin typeface="Calibri"/>
+                        </a:rPr>
+                        <a:t>31.08'de çalışan sezonluk</a:t>
+                      </a:r>
+                    </a:p>
+                  </a:txBody>
+                  <a:tcPr>
+                    <a:solidFill>
+                      <a:srgbClr val="FFFFFF"/>
+                    </a:solidFill>
+                  </a:tcPr>
+                </a:tc>
+                <a:tc>
+                  <a:txBody>
+                    <a:bodyPr/>
+                    <a:lstStyle/>
+                    <a:p>
+                      <a:pPr algn="ctr"/>
+                      <a:r>
+                        <a:rPr sz="1000" b="0">
+                          <a:solidFill>
+                            <a:srgbClr val="333333"/>
+                          </a:solidFill>
+                          <a:latin typeface="Calibri"/>
+                        </a:rPr>
+                        <a:t>65 kişi</a:t>
+                      </a:r>
+                    </a:p>
+                  </a:txBody>
+                  <a:tcPr>
+                    <a:solidFill>
+                      <a:srgbClr val="FFFFFF"/>
+                    </a:solidFill>
+                  </a:tcPr>
+                </a:tc>
+                <a:tc>
+                  <a:txBody>
+                    <a:bodyPr/>
+                    <a:lstStyle/>
+                    <a:p>
+                      <a:pPr algn="ctr"/>
+                      <a:r>
+                        <a:rPr sz="1000" b="1">
+                          <a:solidFill>
+                            <a:srgbClr val="333333"/>
+                          </a:solidFill>
+                          <a:latin typeface="Calibri"/>
+                        </a:rPr>
+                        <a:t>62 kişi</a:t>
+                      </a:r>
+                    </a:p>
+                  </a:txBody>
+                  <a:tcPr>
+                    <a:solidFill>
+                      <a:srgbClr val="FFFFFF"/>
+                    </a:solidFill>
+                  </a:tcPr>
+                </a:tc>
+                <a:tc>
+                  <a:txBody>
+                    <a:bodyPr/>
+                    <a:lstStyle/>
+                    <a:p>
+                      <a:pPr algn="l"/>
+                      <a:r>
+                        <a:rPr sz="1000" b="0">
+                          <a:solidFill>
+                            <a:srgbClr val="A6001A"/>
+                          </a:solidFill>
+                          <a:latin typeface="Calibri"/>
+                        </a:rPr>
+                        <a:t>kesimde 3 kişi DAHA AZ</a:t>
+                      </a:r>
+                    </a:p>
+                  </a:txBody>
+                  <a:tcPr>
+                    <a:solidFill>
+                      <a:srgbClr val="FFFFFF"/>
+                    </a:solidFill>
+                  </a:tcPr>
+                </a:tc>
+              </a:tr>
+              <a:tr h="175260">
+                <a:tc>
+                  <a:txBody>
+                    <a:bodyPr/>
+                    <a:lstStyle/>
+                    <a:p>
+                      <a:pPr algn="l"/>
+                      <a:r>
+                        <a:rPr sz="1000" b="0">
+                          <a:solidFill>
+                            <a:srgbClr val="333333"/>
+                          </a:solidFill>
+                          <a:latin typeface="Calibri"/>
+                        </a:rPr>
+                        <a:t>   — Temmuz alımı</a:t>
+                      </a:r>
+                    </a:p>
+                  </a:txBody>
+                  <a:tcPr>
+                    <a:solidFill>
+                      <a:srgbClr val="FAFAFA"/>
+                    </a:solidFill>
+                  </a:tcPr>
+                </a:tc>
+                <a:tc>
+                  <a:txBody>
+                    <a:bodyPr/>
+                    <a:lstStyle/>
+                    <a:p>
+                      <a:pPr algn="ctr"/>
+                      <a:r>
+                        <a:rPr sz="1000" b="0">
+                          <a:solidFill>
+                            <a:srgbClr val="333333"/>
+                          </a:solidFill>
+                          <a:latin typeface="Calibri"/>
+                        </a:rPr>
+                        <a:t>4 kişi</a:t>
+                      </a:r>
+                    </a:p>
+                  </a:txBody>
+                  <a:tcPr>
+                    <a:solidFill>
+                      <a:srgbClr val="FAFAFA"/>
+                    </a:solidFill>
+                  </a:tcPr>
+                </a:tc>
+                <a:tc>
+                  <a:txBody>
+                    <a:bodyPr/>
+                    <a:lstStyle/>
+                    <a:p>
+                      <a:pPr algn="ctr"/>
+                      <a:r>
+                        <a:rPr sz="1000" b="1">
+                          <a:solidFill>
+                            <a:srgbClr val="333333"/>
+                          </a:solidFill>
+                          <a:latin typeface="Calibri"/>
+                        </a:rPr>
+                        <a:t>2 kişi</a:t>
+                      </a:r>
+                    </a:p>
+                  </a:txBody>
+                  <a:tcPr>
+                    <a:solidFill>
+                      <a:srgbClr val="FAFAFA"/>
+                    </a:solidFill>
+                  </a:tcPr>
+                </a:tc>
+                <a:tc>
+                  <a:txBody>
+                    <a:bodyPr/>
+                    <a:lstStyle/>
+                    <a:p>
+                      <a:pPr algn="l"/>
+                      <a:r>
+                        <a:rPr sz="1000" b="0">
+                          <a:solidFill>
+                            <a:srgbClr val="A6001A"/>
+                          </a:solidFill>
+                          <a:latin typeface="Calibri"/>
+                        </a:rPr>
+                        <a:t>erken alım payı düştü</a:t>
+                      </a:r>
+                    </a:p>
+                  </a:txBody>
+                  <a:tcPr>
+                    <a:solidFill>
+                      <a:srgbClr val="FAFAFA"/>
+                    </a:solidFill>
+                  </a:tcPr>
+                </a:tc>
+              </a:tr>
+              <a:tr h="175260">
+                <a:tc>
+                  <a:txBody>
+                    <a:bodyPr/>
+                    <a:lstStyle/>
+                    <a:p>
+                      <a:pPr algn="l"/>
+                      <a:r>
+                        <a:rPr sz="1000" b="0">
+                          <a:solidFill>
+                            <a:srgbClr val="333333"/>
+                          </a:solidFill>
+                          <a:latin typeface="Calibri"/>
+                        </a:rPr>
+                        <a:t>   — 1–14 Ağustos alımı</a:t>
+                      </a:r>
+                    </a:p>
+                  </a:txBody>
+                  <a:tcPr>
+                    <a:solidFill>
+                      <a:srgbClr val="FFFFFF"/>
+                    </a:solidFill>
+                  </a:tcPr>
+                </a:tc>
+                <a:tc>
+                  <a:txBody>
+                    <a:bodyPr/>
+                    <a:lstStyle/>
+                    <a:p>
+                      <a:pPr algn="ctr"/>
+                      <a:r>
+                        <a:rPr sz="1000" b="0">
+                          <a:solidFill>
+                            <a:srgbClr val="333333"/>
+                          </a:solidFill>
+                          <a:latin typeface="Calibri"/>
+                        </a:rPr>
+                        <a:t>12 kişi</a:t>
+                      </a:r>
+                    </a:p>
+                  </a:txBody>
+                  <a:tcPr>
+                    <a:solidFill>
+                      <a:srgbClr val="FFFFFF"/>
+                    </a:solidFill>
+                  </a:tcPr>
+                </a:tc>
+                <a:tc>
+                  <a:txBody>
+                    <a:bodyPr/>
+                    <a:lstStyle/>
+                    <a:p>
+                      <a:pPr algn="ctr"/>
+                      <a:r>
+                        <a:rPr sz="1000" b="1">
+                          <a:solidFill>
+                            <a:srgbClr val="333333"/>
+                          </a:solidFill>
+                          <a:latin typeface="Calibri"/>
+                        </a:rPr>
+                        <a:t>27 kişi</a:t>
+                      </a:r>
+                    </a:p>
+                  </a:txBody>
+                  <a:tcPr>
+                    <a:solidFill>
+                      <a:srgbClr val="FFFFFF"/>
+                    </a:solidFill>
+                  </a:tcPr>
+                </a:tc>
+                <a:tc>
+                  <a:txBody>
+                    <a:bodyPr/>
+                    <a:lstStyle/>
+                    <a:p>
+                      <a:pPr algn="l"/>
+                      <a:r>
+                        <a:rPr sz="1000" b="0">
+                          <a:solidFill>
+                            <a:srgbClr val="A6001A"/>
+                          </a:solidFill>
+                          <a:latin typeface="Calibri"/>
+                        </a:rPr>
+                        <a:t>iş +%25,1 büyüyen dönem</a:t>
+                      </a:r>
+                    </a:p>
+                  </a:txBody>
+                  <a:tcPr>
+                    <a:solidFill>
+                      <a:srgbClr val="FFFFFF"/>
+                    </a:solidFill>
+                  </a:tcPr>
+                </a:tc>
+              </a:tr>
+              <a:tr h="175260">
+                <a:tc>
+                  <a:txBody>
+                    <a:bodyPr/>
+                    <a:lstStyle/>
+                    <a:p>
+                      <a:pPr algn="l"/>
+                      <a:r>
+                        <a:rPr sz="1000" b="0">
+                          <a:solidFill>
+                            <a:srgbClr val="333333"/>
+                          </a:solidFill>
+                          <a:latin typeface="Calibri"/>
+                        </a:rPr>
+                        <a:t>   — 15–31 Ağustos alımı</a:t>
+                      </a:r>
+                    </a:p>
+                  </a:txBody>
+                  <a:tcPr>
+                    <a:solidFill>
+                      <a:srgbClr val="FAFAFA"/>
+                    </a:solidFill>
+                  </a:tcPr>
+                </a:tc>
+                <a:tc>
+                  <a:txBody>
+                    <a:bodyPr/>
+                    <a:lstStyle/>
+                    <a:p>
+                      <a:pPr algn="ctr"/>
+                      <a:r>
+                        <a:rPr sz="1000" b="0">
+                          <a:solidFill>
+                            <a:srgbClr val="333333"/>
+                          </a:solidFill>
+                          <a:latin typeface="Calibri"/>
+                        </a:rPr>
+                        <a:t>49 kişi</a:t>
+                      </a:r>
+                    </a:p>
+                  </a:txBody>
+                  <a:tcPr>
+                    <a:solidFill>
+                      <a:srgbClr val="FAFAFA"/>
+                    </a:solidFill>
+                  </a:tcPr>
+                </a:tc>
+                <a:tc>
+                  <a:txBody>
+                    <a:bodyPr/>
+                    <a:lstStyle/>
+                    <a:p>
+                      <a:pPr algn="ctr"/>
+                      <a:r>
+                        <a:rPr sz="1000" b="1">
+                          <a:solidFill>
+                            <a:srgbClr val="333333"/>
+                          </a:solidFill>
+                          <a:latin typeface="Calibri"/>
+                        </a:rPr>
+                        <a:t>32 kişi</a:t>
+                      </a:r>
+                    </a:p>
+                  </a:txBody>
+                  <a:tcPr>
+                    <a:solidFill>
+                      <a:srgbClr val="FAFAFA"/>
+                    </a:solidFill>
+                  </a:tcPr>
+                </a:tc>
+                <a:tc>
+                  <a:txBody>
+                    <a:bodyPr/>
+                    <a:lstStyle/>
+                    <a:p>
+                      <a:pPr algn="l"/>
+                      <a:r>
+                        <a:rPr sz="1000" b="0">
+                          <a:solidFill>
+                            <a:srgbClr val="A6001A"/>
+                          </a:solidFill>
+                          <a:latin typeface="Calibri"/>
+                        </a:rPr>
+                        <a:t>iş −%2,9 → alım azaltıldı</a:t>
+                      </a:r>
+                    </a:p>
+                  </a:txBody>
+                  <a:tcPr>
+                    <a:solidFill>
+                      <a:srgbClr val="FAFAFA"/>
+                    </a:solidFill>
+                  </a:tcPr>
+                </a:tc>
+              </a:tr>
+              <a:tr h="175260">
+                <a:tc>
+                  <a:txBody>
+                    <a:bodyPr/>
+                    <a:lstStyle/>
+                    <a:p>
+                      <a:pPr algn="l"/>
+                      <a:r>
+                        <a:rPr sz="1000" b="0">
+                          <a:solidFill>
+                            <a:srgbClr val="333333"/>
+                          </a:solidFill>
+                          <a:latin typeface="Calibri"/>
+                        </a:rPr>
+                        <a:t>   — önceki yıldan devreden</a:t>
+                      </a:r>
+                    </a:p>
+                  </a:txBody>
+                  <a:tcPr>
+                    <a:solidFill>
+                      <a:srgbClr val="FFFFFF"/>
+                    </a:solidFill>
+                  </a:tcPr>
+                </a:tc>
+                <a:tc>
+                  <a:txBody>
+                    <a:bodyPr/>
+                    <a:lstStyle/>
+                    <a:p>
+                      <a:pPr algn="ctr"/>
+                      <a:r>
+                        <a:rPr sz="1000" b="0">
+                          <a:solidFill>
+                            <a:srgbClr val="333333"/>
+                          </a:solidFill>
+                          <a:latin typeface="Calibri"/>
+                        </a:rPr>
+                        <a:t>0 kişi</a:t>
+                      </a:r>
+                    </a:p>
+                  </a:txBody>
+                  <a:tcPr>
+                    <a:solidFill>
+                      <a:srgbClr val="FFFFFF"/>
+                    </a:solidFill>
+                  </a:tcPr>
+                </a:tc>
+                <a:tc>
+                  <a:txBody>
+                    <a:bodyPr/>
+                    <a:lstStyle/>
+                    <a:p>
+                      <a:pPr algn="ctr"/>
+                      <a:r>
+                        <a:rPr sz="1000" b="1">
+                          <a:solidFill>
+                            <a:srgbClr val="333333"/>
+                          </a:solidFill>
+                          <a:latin typeface="Calibri"/>
+                        </a:rPr>
+                        <a:t>1 kişi</a:t>
+                      </a:r>
+                    </a:p>
+                  </a:txBody>
+                  <a:tcPr>
+                    <a:solidFill>
+                      <a:srgbClr val="FFFFFF"/>
+                    </a:solidFill>
+                  </a:tcPr>
+                </a:tc>
+                <a:tc>
+                  <a:txBody>
+                    <a:bodyPr/>
+                    <a:lstStyle/>
+                    <a:p>
+                      <a:pPr algn="l"/>
+                      <a:r>
+                        <a:rPr sz="1000" b="0">
+                          <a:solidFill>
+                            <a:srgbClr val="A6001A"/>
+                          </a:solidFill>
+                          <a:latin typeface="Calibri"/>
+                        </a:rPr>
+                        <a:t>2025 alımı, hâlâ sezonluk</a:t>
+                      </a:r>
+                    </a:p>
+                  </a:txBody>
+                  <a:tcPr>
+                    <a:solidFill>
+                      <a:srgbClr val="FFFFFF"/>
+                    </a:solidFill>
+                  </a:tcPr>
+                </a:tc>
+              </a:tr>
+            </a:tbl>
+          </a:graphicData>
+        </a:graphic>
+      </p:graphicFrame>
       <p:sp>
         <p:nvSpPr>
           <p:cNvPr id="22" name="TextBox 21"/>
-          <p:cNvSpPr txBox="1"/>
-          <p:nvPr/>
-        </p:nvSpPr>
-        <p:spPr>
-          <a:xfrm>
-            <a:off x="1143000" y="4169663"/>
-            <a:ext cx="10058400" cy="356615"/>
-          </a:xfrm>
-          <a:prstGeom prst="rect">
-            <a:avLst/>
-          </a:prstGeom>
-          <a:noFill/>
-        </p:spPr>
-        <p:txBody>
-          <a:bodyPr wrap="square" anchor="t">
-            <a:spAutoFit/>
-          </a:bodyPr>
-          <a:lstStyle/>
-          <a:p>
-            <a:pPr algn="l">
-              <a:lnSpc>
-                <a:spcPct val="106000"/>
-              </a:lnSpc>
-            </a:pPr>
-            <a:r>
-              <a:rPr sz="950" b="0">
-                <a:solidFill>
-                  <a:srgbClr val="333333"/>
-                </a:solidFill>
-                <a:latin typeface="Calibri"/>
-              </a:rPr>
-              <a:t>Hayır: takvim ölçüsünde 2026 alımı ortalama 2,5 gün DAHA GEÇ; Temmuz ve öncesi alım 6 kişiden 2'ye indi. Artış 1–14 Ağustos'ta ve o iki haftada ürün adedi +%25,1 büyüdü — alım işi takip etti.</a:t>
-            </a:r>
-          </a:p>
-        </p:txBody>
-      </p:sp>
-      <p:sp>
-        <p:nvSpPr>
-          <p:cNvPr id="23" name="Rectangle 22"/>
-          <p:cNvSpPr/>
-          <p:nvPr/>
-        </p:nvSpPr>
-        <p:spPr>
-          <a:xfrm>
-            <a:off x="548640" y="4654296"/>
-            <a:ext cx="11018520" cy="740664"/>
-          </a:xfrm>
-          <a:prstGeom prst="rect">
-            <a:avLst/>
-          </a:prstGeom>
-          <a:solidFill>
-            <a:srgbClr val="FFFFFF"/>
-          </a:solidFill>
-          <a:ln w="12700">
-            <a:solidFill>
-              <a:srgbClr val="DCDCDC"/>
-            </a:solidFill>
-          </a:ln>
-          <a:effectLst/>
-        </p:spPr>
-        <p:style>
-          <a:lnRef idx="1">
-            <a:schemeClr val="accent1"/>
-          </a:lnRef>
-          <a:fillRef idx="3">
-            <a:schemeClr val="accent1"/>
-          </a:fillRef>
-          <a:effectRef idx="2">
-            <a:schemeClr val="accent1"/>
-          </a:effectRef>
-          <a:fontRef idx="minor">
-            <a:schemeClr val="lt1"/>
-          </a:fontRef>
-        </p:style>
-        <p:txBody>
-          <a:bodyPr rtlCol="0" anchor="ctr"/>
-          <a:lstStyle/>
-          <a:p>
-            <a:pPr algn="ctr"/>
-          </a:p>
-        </p:txBody>
-      </p:sp>
-      <p:sp>
-        <p:nvSpPr>
-          <p:cNvPr id="24" name="Rectangle 23"/>
-          <p:cNvSpPr/>
-          <p:nvPr/>
-        </p:nvSpPr>
-        <p:spPr>
-          <a:xfrm>
-            <a:off x="548640" y="4654296"/>
-            <a:ext cx="68580" cy="740664"/>
-          </a:xfrm>
-          <a:prstGeom prst="rect">
-            <a:avLst/>
-          </a:prstGeom>
-          <a:solidFill>
-            <a:srgbClr val="E30622"/>
-          </a:solidFill>
-          <a:ln>
-            <a:noFill/>
-          </a:ln>
-          <a:effectLst/>
-        </p:spPr>
-        <p:style>
-          <a:lnRef idx="1">
-            <a:schemeClr val="accent1"/>
-          </a:lnRef>
-          <a:fillRef idx="3">
-            <a:schemeClr val="accent1"/>
-          </a:fillRef>
-          <a:effectRef idx="2">
-            <a:schemeClr val="accent1"/>
-          </a:effectRef>
-          <a:fontRef idx="minor">
-            <a:schemeClr val="lt1"/>
-          </a:fontRef>
-        </p:style>
-        <p:txBody>
-          <a:bodyPr rtlCol="0" anchor="ctr"/>
-          <a:lstStyle/>
-          <a:p>
-            <a:pPr algn="ctr"/>
-          </a:p>
-        </p:txBody>
-      </p:sp>
-      <p:pic>
-        <p:nvPicPr>
-          <p:cNvPr id="25" name="Picture 24" descr="circle-check.png"/>
-          <p:cNvPicPr>
-            <a:picLocks noChangeAspect="1"/>
-          </p:cNvPicPr>
-          <p:nvPr/>
-        </p:nvPicPr>
-        <p:blipFill>
-          <a:blip r:embed="rId3"/>
-          <a:stretch>
-            <a:fillRect/>
-          </a:stretch>
-        </p:blipFill>
-        <p:spPr>
-          <a:xfrm>
-            <a:off x="777240" y="4782312"/>
-            <a:ext cx="256032" cy="256032"/>
-          </a:xfrm>
-          <a:prstGeom prst="rect">
-            <a:avLst/>
-          </a:prstGeom>
-        </p:spPr>
-      </p:pic>
-      <p:sp>
-        <p:nvSpPr>
-          <p:cNvPr id="26" name="TextBox 25"/>
-          <p:cNvSpPr txBox="1"/>
-          <p:nvPr/>
-        </p:nvSpPr>
-        <p:spPr>
-          <a:xfrm>
-            <a:off x="1143000" y="4718304"/>
-            <a:ext cx="10058400" cy="292608"/>
-          </a:xfrm>
-          <a:prstGeom prst="rect">
-            <a:avLst/>
-          </a:prstGeom>
-          <a:noFill/>
-        </p:spPr>
-        <p:txBody>
-          <a:bodyPr wrap="square" anchor="t">
-            <a:spAutoFit/>
-          </a:bodyPr>
-          <a:lstStyle/>
-          <a:p>
-            <a:pPr algn="l">
-              <a:lnSpc>
-                <a:spcPct val="100000"/>
-              </a:lnSpc>
-            </a:pPr>
-            <a:r>
-              <a:rPr sz="1150" b="1">
-                <a:solidFill>
-                  <a:srgbClr val="A6001A"/>
-                </a:solidFill>
-                <a:latin typeface="Calibri"/>
-              </a:rPr>
-              <a:t>Ağustos ayında ivme düşüşü var mı?</a:t>
-            </a:r>
-          </a:p>
-        </p:txBody>
-      </p:sp>
-      <p:sp>
-        <p:nvSpPr>
-          <p:cNvPr id="27" name="TextBox 26"/>
-          <p:cNvSpPr txBox="1"/>
-          <p:nvPr/>
-        </p:nvSpPr>
-        <p:spPr>
-          <a:xfrm>
-            <a:off x="1143000" y="5001768"/>
-            <a:ext cx="10058400" cy="356615"/>
-          </a:xfrm>
-          <a:prstGeom prst="rect">
-            <a:avLst/>
-          </a:prstGeom>
-          <a:noFill/>
-        </p:spPr>
-        <p:txBody>
-          <a:bodyPr wrap="square" anchor="t">
-            <a:spAutoFit/>
-          </a:bodyPr>
-          <a:lstStyle/>
-          <a:p>
-            <a:pPr algn="l">
-              <a:lnSpc>
-                <a:spcPct val="106000"/>
-              </a:lnSpc>
-            </a:pPr>
-            <a:r>
-              <a:rPr sz="950" b="0">
-                <a:solidFill>
-                  <a:srgbClr val="333333"/>
-                </a:solidFill>
-                <a:latin typeface="Calibri"/>
-              </a:rPr>
-              <a:t>Takvim etkisi: okullar 2025'te 8 Eylül, 2026'da 14 Eylül açıldı — sezon 6 gün geriye kaydı. Açılışa hizalanınca haftalık büyüme %65–79 bandında düz seyrediyor.</a:t>
-            </a:r>
-          </a:p>
-        </p:txBody>
-      </p:sp>
-      <p:sp>
-        <p:nvSpPr>
-          <p:cNvPr id="28" name="TextBox 27"/>
           <p:cNvSpPr txBox="1"/>
           <p:nvPr/>
         </p:nvSpPr>
@@ -14145,14 +15087,14 @@
                 </a:solidFill>
                 <a:latin typeface="Calibri"/>
               </a:rPr>
-              <a:t>* Kapsam: üç POS mağazası — FSM · Özlüce · İst. Yolu · Dönem: 01.01 – 31.08 (her iki yıl, kümülatif) (kurumsal/mağaza kıyası) · hizalı dönem: 01.07 – 25.08.2025 (2025) · 07.07 – 31.08.2026 (2026), her iki yıl 56 gün, okul açılışına hizalı</a:t>
+              <a:t>* Kapsam: beş mağaza (FSM · Özlüce · İst. Yolu · Heykel · Şura) · Kohortlar okul açılışına göre AYNI ofsette kesildi (T−12: 27.08.2025 ve 02.09.2026) · İş hacmi üç POS mağazası · ⚠ "açılıştan kaç gün önce" ölçüsü açılış 6 gün kaydığı için 2026'yı mekanik olarak erken gösterir, takvim ölçüsü esastır.</a:t>
             </a:r>
           </a:p>
         </p:txBody>
       </p:sp>
       <p:sp>
         <p:nvSpPr>
-          <p:cNvPr id="29" name="TextBox 28"/>
+          <p:cNvPr id="23" name="TextBox 22"/>
           <p:cNvSpPr txBox="1"/>
           <p:nvPr/>
         </p:nvSpPr>
@@ -14242,6 +15184,1102 @@
           <a:lstStyle/>
           <a:p>
             <a:r>
+              <a:t>Yöntem ve Açıklamalar</a:t>
+            </a:r>
+          </a:p>
+        </p:txBody>
+      </p:sp>
+      <p:sp>
+        <p:nvSpPr>
+          <p:cNvPr id="3" name="Rectangle 2"/>
+          <p:cNvSpPr/>
+          <p:nvPr/>
+        </p:nvSpPr>
+        <p:spPr>
+          <a:xfrm>
+            <a:off x="548640" y="1325880"/>
+            <a:ext cx="11018520" cy="740664"/>
+          </a:xfrm>
+          <a:prstGeom prst="rect">
+            <a:avLst/>
+          </a:prstGeom>
+          <a:solidFill>
+            <a:srgbClr val="FFFFFF"/>
+          </a:solidFill>
+          <a:ln w="12700">
+            <a:solidFill>
+              <a:srgbClr val="DCDCDC"/>
+            </a:solidFill>
+          </a:ln>
+          <a:effectLst/>
+        </p:spPr>
+        <p:style>
+          <a:lnRef idx="1">
+            <a:schemeClr val="accent1"/>
+          </a:lnRef>
+          <a:fillRef idx="3">
+            <a:schemeClr val="accent1"/>
+          </a:fillRef>
+          <a:effectRef idx="2">
+            <a:schemeClr val="accent1"/>
+          </a:effectRef>
+          <a:fontRef idx="minor">
+            <a:schemeClr val="lt1"/>
+          </a:fontRef>
+        </p:style>
+        <p:txBody>
+          <a:bodyPr rtlCol="0" anchor="ctr"/>
+          <a:lstStyle/>
+          <a:p>
+            <a:pPr algn="ctr"/>
+          </a:p>
+        </p:txBody>
+      </p:sp>
+      <p:sp>
+        <p:nvSpPr>
+          <p:cNvPr id="4" name="Rectangle 3"/>
+          <p:cNvSpPr/>
+          <p:nvPr/>
+        </p:nvSpPr>
+        <p:spPr>
+          <a:xfrm>
+            <a:off x="548640" y="1325880"/>
+            <a:ext cx="68580" cy="740664"/>
+          </a:xfrm>
+          <a:prstGeom prst="rect">
+            <a:avLst/>
+          </a:prstGeom>
+          <a:solidFill>
+            <a:srgbClr val="E30622"/>
+          </a:solidFill>
+          <a:ln>
+            <a:noFill/>
+          </a:ln>
+          <a:effectLst/>
+        </p:spPr>
+        <p:style>
+          <a:lnRef idx="1">
+            <a:schemeClr val="accent1"/>
+          </a:lnRef>
+          <a:fillRef idx="3">
+            <a:schemeClr val="accent1"/>
+          </a:fillRef>
+          <a:effectRef idx="2">
+            <a:schemeClr val="accent1"/>
+          </a:effectRef>
+          <a:fontRef idx="minor">
+            <a:schemeClr val="lt1"/>
+          </a:fontRef>
+        </p:style>
+        <p:txBody>
+          <a:bodyPr rtlCol="0" anchor="ctr"/>
+          <a:lstStyle/>
+          <a:p>
+            <a:pPr algn="ctr"/>
+          </a:p>
+        </p:txBody>
+      </p:sp>
+      <p:pic>
+        <p:nvPicPr>
+          <p:cNvPr id="5" name="Picture 4" descr="circle-check.png"/>
+          <p:cNvPicPr>
+            <a:picLocks noChangeAspect="1"/>
+          </p:cNvPicPr>
+          <p:nvPr/>
+        </p:nvPicPr>
+        <p:blipFill>
+          <a:blip r:embed="rId3"/>
+          <a:stretch>
+            <a:fillRect/>
+          </a:stretch>
+        </p:blipFill>
+        <p:spPr>
+          <a:xfrm>
+            <a:off x="777240" y="1453895"/>
+            <a:ext cx="256032" cy="256032"/>
+          </a:xfrm>
+          <a:prstGeom prst="rect">
+            <a:avLst/>
+          </a:prstGeom>
+        </p:spPr>
+      </p:pic>
+      <p:sp>
+        <p:nvSpPr>
+          <p:cNvPr id="6" name="TextBox 5"/>
+          <p:cNvSpPr txBox="1"/>
+          <p:nvPr/>
+        </p:nvSpPr>
+        <p:spPr>
+          <a:xfrm>
+            <a:off x="1143000" y="1389888"/>
+            <a:ext cx="10058400" cy="292608"/>
+          </a:xfrm>
+          <a:prstGeom prst="rect">
+            <a:avLst/>
+          </a:prstGeom>
+          <a:noFill/>
+        </p:spPr>
+        <p:txBody>
+          <a:bodyPr wrap="square" anchor="t">
+            <a:spAutoFit/>
+          </a:bodyPr>
+          <a:lstStyle/>
+          <a:p>
+            <a:pPr algn="l">
+              <a:lnSpc>
+                <a:spcPct val="100000"/>
+              </a:lnSpc>
+            </a:pPr>
+            <a:r>
+              <a:rPr sz="1150" b="1">
+                <a:solidFill>
+                  <a:srgbClr val="A6001A"/>
+                </a:solidFill>
+                <a:latin typeface="Calibri"/>
+              </a:rPr>
+              <a:t>Büyüme kurumsal kanaldan mı geldi?</a:t>
+            </a:r>
+          </a:p>
+        </p:txBody>
+      </p:sp>
+      <p:sp>
+        <p:nvSpPr>
+          <p:cNvPr id="7" name="TextBox 6"/>
+          <p:cNvSpPr txBox="1"/>
+          <p:nvPr/>
+        </p:nvSpPr>
+        <p:spPr>
+          <a:xfrm>
+            <a:off x="1143000" y="1673352"/>
+            <a:ext cx="10058400" cy="356615"/>
+          </a:xfrm>
+          <a:prstGeom prst="rect">
+            <a:avLst/>
+          </a:prstGeom>
+          <a:noFill/>
+        </p:spPr>
+        <p:txBody>
+          <a:bodyPr wrap="square" anchor="t">
+            <a:spAutoFit/>
+          </a:bodyPr>
+          <a:lstStyle/>
+          <a:p>
+            <a:pPr algn="l">
+              <a:lnSpc>
+                <a:spcPct val="106000"/>
+              </a:lnSpc>
+            </a:pPr>
+            <a:r>
+              <a:rPr sz="950" b="0">
+                <a:solidFill>
+                  <a:srgbClr val="333333"/>
+                </a:solidFill>
+                <a:latin typeface="Calibri"/>
+              </a:rPr>
+              <a:t>Tersi: Sınav Okulları küçüldü. Ocak–Ağustos cirosu 136,1 → 105,6 milyon TL (−%22,4). Mağaza tarafı +%54,9 büyüdü — büyümenin tamamı raftan geldi.</a:t>
+            </a:r>
+          </a:p>
+        </p:txBody>
+      </p:sp>
+      <p:sp>
+        <p:nvSpPr>
+          <p:cNvPr id="8" name="Rectangle 7"/>
+          <p:cNvSpPr/>
+          <p:nvPr/>
+        </p:nvSpPr>
+        <p:spPr>
+          <a:xfrm>
+            <a:off x="548640" y="2157984"/>
+            <a:ext cx="11018520" cy="740664"/>
+          </a:xfrm>
+          <a:prstGeom prst="rect">
+            <a:avLst/>
+          </a:prstGeom>
+          <a:solidFill>
+            <a:srgbClr val="FFFFFF"/>
+          </a:solidFill>
+          <a:ln w="12700">
+            <a:solidFill>
+              <a:srgbClr val="DCDCDC"/>
+            </a:solidFill>
+          </a:ln>
+          <a:effectLst/>
+        </p:spPr>
+        <p:style>
+          <a:lnRef idx="1">
+            <a:schemeClr val="accent1"/>
+          </a:lnRef>
+          <a:fillRef idx="3">
+            <a:schemeClr val="accent1"/>
+          </a:fillRef>
+          <a:effectRef idx="2">
+            <a:schemeClr val="accent1"/>
+          </a:effectRef>
+          <a:fontRef idx="minor">
+            <a:schemeClr val="lt1"/>
+          </a:fontRef>
+        </p:style>
+        <p:txBody>
+          <a:bodyPr rtlCol="0" anchor="ctr"/>
+          <a:lstStyle/>
+          <a:p>
+            <a:pPr algn="ctr"/>
+          </a:p>
+        </p:txBody>
+      </p:sp>
+      <p:sp>
+        <p:nvSpPr>
+          <p:cNvPr id="9" name="Rectangle 8"/>
+          <p:cNvSpPr/>
+          <p:nvPr/>
+        </p:nvSpPr>
+        <p:spPr>
+          <a:xfrm>
+            <a:off x="548640" y="2157984"/>
+            <a:ext cx="68580" cy="740664"/>
+          </a:xfrm>
+          <a:prstGeom prst="rect">
+            <a:avLst/>
+          </a:prstGeom>
+          <a:solidFill>
+            <a:srgbClr val="E30622"/>
+          </a:solidFill>
+          <a:ln>
+            <a:noFill/>
+          </a:ln>
+          <a:effectLst/>
+        </p:spPr>
+        <p:style>
+          <a:lnRef idx="1">
+            <a:schemeClr val="accent1"/>
+          </a:lnRef>
+          <a:fillRef idx="3">
+            <a:schemeClr val="accent1"/>
+          </a:fillRef>
+          <a:effectRef idx="2">
+            <a:schemeClr val="accent1"/>
+          </a:effectRef>
+          <a:fontRef idx="minor">
+            <a:schemeClr val="lt1"/>
+          </a:fontRef>
+        </p:style>
+        <p:txBody>
+          <a:bodyPr rtlCol="0" anchor="ctr"/>
+          <a:lstStyle/>
+          <a:p>
+            <a:pPr algn="ctr"/>
+          </a:p>
+        </p:txBody>
+      </p:sp>
+      <p:pic>
+        <p:nvPicPr>
+          <p:cNvPr id="10" name="Picture 9" descr="circle-check.png"/>
+          <p:cNvPicPr>
+            <a:picLocks noChangeAspect="1"/>
+          </p:cNvPicPr>
+          <p:nvPr/>
+        </p:nvPicPr>
+        <p:blipFill>
+          <a:blip r:embed="rId3"/>
+          <a:stretch>
+            <a:fillRect/>
+          </a:stretch>
+        </p:blipFill>
+        <p:spPr>
+          <a:xfrm>
+            <a:off x="777240" y="2286000"/>
+            <a:ext cx="256032" cy="256032"/>
+          </a:xfrm>
+          <a:prstGeom prst="rect">
+            <a:avLst/>
+          </a:prstGeom>
+        </p:spPr>
+      </p:pic>
+      <p:sp>
+        <p:nvSpPr>
+          <p:cNvPr id="11" name="TextBox 10"/>
+          <p:cNvSpPr txBox="1"/>
+          <p:nvPr/>
+        </p:nvSpPr>
+        <p:spPr>
+          <a:xfrm>
+            <a:off x="1143000" y="2221991"/>
+            <a:ext cx="10058400" cy="292608"/>
+          </a:xfrm>
+          <a:prstGeom prst="rect">
+            <a:avLst/>
+          </a:prstGeom>
+          <a:noFill/>
+        </p:spPr>
+        <p:txBody>
+          <a:bodyPr wrap="square" anchor="t">
+            <a:spAutoFit/>
+          </a:bodyPr>
+          <a:lstStyle/>
+          <a:p>
+            <a:pPr algn="l">
+              <a:lnSpc>
+                <a:spcPct val="100000"/>
+              </a:lnSpc>
+            </a:pPr>
+            <a:r>
+              <a:rPr sz="1150" b="1">
+                <a:solidFill>
+                  <a:srgbClr val="A6001A"/>
+                </a:solidFill>
+                <a:latin typeface="Calibri"/>
+              </a:rPr>
+              <a:t>Ciro artışı enflasyon kaynaklı mı?</a:t>
+            </a:r>
+          </a:p>
+        </p:txBody>
+      </p:sp>
+      <p:sp>
+        <p:nvSpPr>
+          <p:cNvPr id="12" name="TextBox 11"/>
+          <p:cNvSpPr txBox="1"/>
+          <p:nvPr/>
+        </p:nvSpPr>
+        <p:spPr>
+          <a:xfrm>
+            <a:off x="1143000" y="2505456"/>
+            <a:ext cx="10058400" cy="356615"/>
+          </a:xfrm>
+          <a:prstGeom prst="rect">
+            <a:avLst/>
+          </a:prstGeom>
+          <a:noFill/>
+        </p:spPr>
+        <p:txBody>
+          <a:bodyPr wrap="square" anchor="t">
+            <a:spAutoFit/>
+          </a:bodyPr>
+          <a:lstStyle/>
+          <a:p>
+            <a:pPr algn="l">
+              <a:lnSpc>
+                <a:spcPct val="106000"/>
+              </a:lnSpc>
+            </a:pPr>
+            <a:r>
+              <a:rPr sz="950" b="0">
+                <a:solidFill>
+                  <a:srgbClr val="333333"/>
+                </a:solidFill>
+                <a:latin typeface="Calibri"/>
+              </a:rPr>
+              <a:t>Kısmen doğru: eşleşen ürünlerde fiyat endeksi +%19,8. Bu yüzden savunma ciroya değil ADEDE dayanıyor: ürün adedi +%34,9 ve adet fiyattan etkilenmez.</a:t>
+            </a:r>
+          </a:p>
+        </p:txBody>
+      </p:sp>
+      <p:sp>
+        <p:nvSpPr>
+          <p:cNvPr id="13" name="Rectangle 12"/>
+          <p:cNvSpPr/>
+          <p:nvPr/>
+        </p:nvSpPr>
+        <p:spPr>
+          <a:xfrm>
+            <a:off x="548640" y="2990087"/>
+            <a:ext cx="11018520" cy="740664"/>
+          </a:xfrm>
+          <a:prstGeom prst="rect">
+            <a:avLst/>
+          </a:prstGeom>
+          <a:solidFill>
+            <a:srgbClr val="FFFFFF"/>
+          </a:solidFill>
+          <a:ln w="12700">
+            <a:solidFill>
+              <a:srgbClr val="DCDCDC"/>
+            </a:solidFill>
+          </a:ln>
+          <a:effectLst/>
+        </p:spPr>
+        <p:style>
+          <a:lnRef idx="1">
+            <a:schemeClr val="accent1"/>
+          </a:lnRef>
+          <a:fillRef idx="3">
+            <a:schemeClr val="accent1"/>
+          </a:fillRef>
+          <a:effectRef idx="2">
+            <a:schemeClr val="accent1"/>
+          </a:effectRef>
+          <a:fontRef idx="minor">
+            <a:schemeClr val="lt1"/>
+          </a:fontRef>
+        </p:style>
+        <p:txBody>
+          <a:bodyPr rtlCol="0" anchor="ctr"/>
+          <a:lstStyle/>
+          <a:p>
+            <a:pPr algn="ctr"/>
+          </a:p>
+        </p:txBody>
+      </p:sp>
+      <p:sp>
+        <p:nvSpPr>
+          <p:cNvPr id="14" name="Rectangle 13"/>
+          <p:cNvSpPr/>
+          <p:nvPr/>
+        </p:nvSpPr>
+        <p:spPr>
+          <a:xfrm>
+            <a:off x="548640" y="2990087"/>
+            <a:ext cx="68580" cy="740664"/>
+          </a:xfrm>
+          <a:prstGeom prst="rect">
+            <a:avLst/>
+          </a:prstGeom>
+          <a:solidFill>
+            <a:srgbClr val="E30622"/>
+          </a:solidFill>
+          <a:ln>
+            <a:noFill/>
+          </a:ln>
+          <a:effectLst/>
+        </p:spPr>
+        <p:style>
+          <a:lnRef idx="1">
+            <a:schemeClr val="accent1"/>
+          </a:lnRef>
+          <a:fillRef idx="3">
+            <a:schemeClr val="accent1"/>
+          </a:fillRef>
+          <a:effectRef idx="2">
+            <a:schemeClr val="accent1"/>
+          </a:effectRef>
+          <a:fontRef idx="minor">
+            <a:schemeClr val="lt1"/>
+          </a:fontRef>
+        </p:style>
+        <p:txBody>
+          <a:bodyPr rtlCol="0" anchor="ctr"/>
+          <a:lstStyle/>
+          <a:p>
+            <a:pPr algn="ctr"/>
+          </a:p>
+        </p:txBody>
+      </p:sp>
+      <p:pic>
+        <p:nvPicPr>
+          <p:cNvPr id="15" name="Picture 14" descr="circle-check.png"/>
+          <p:cNvPicPr>
+            <a:picLocks noChangeAspect="1"/>
+          </p:cNvPicPr>
+          <p:nvPr/>
+        </p:nvPicPr>
+        <p:blipFill>
+          <a:blip r:embed="rId3"/>
+          <a:stretch>
+            <a:fillRect/>
+          </a:stretch>
+        </p:blipFill>
+        <p:spPr>
+          <a:xfrm>
+            <a:off x="777240" y="3118103"/>
+            <a:ext cx="256032" cy="256032"/>
+          </a:xfrm>
+          <a:prstGeom prst="rect">
+            <a:avLst/>
+          </a:prstGeom>
+        </p:spPr>
+      </p:pic>
+      <p:sp>
+        <p:nvSpPr>
+          <p:cNvPr id="16" name="TextBox 15"/>
+          <p:cNvSpPr txBox="1"/>
+          <p:nvPr/>
+        </p:nvSpPr>
+        <p:spPr>
+          <a:xfrm>
+            <a:off x="1143000" y="3054095"/>
+            <a:ext cx="10058400" cy="292608"/>
+          </a:xfrm>
+          <a:prstGeom prst="rect">
+            <a:avLst/>
+          </a:prstGeom>
+          <a:noFill/>
+        </p:spPr>
+        <p:txBody>
+          <a:bodyPr wrap="square" anchor="t">
+            <a:spAutoFit/>
+          </a:bodyPr>
+          <a:lstStyle/>
+          <a:p>
+            <a:pPr algn="l">
+              <a:lnSpc>
+                <a:spcPct val="100000"/>
+              </a:lnSpc>
+            </a:pPr>
+            <a:r>
+              <a:rPr sz="1150" b="1">
+                <a:solidFill>
+                  <a:srgbClr val="A6001A"/>
+                </a:solidFill>
+                <a:latin typeface="Calibri"/>
+              </a:rPr>
+              <a:t>Kasa sistemi değişti, karşılaştırma geçerli mi?</a:t>
+            </a:r>
+          </a:p>
+        </p:txBody>
+      </p:sp>
+      <p:sp>
+        <p:nvSpPr>
+          <p:cNvPr id="17" name="TextBox 16"/>
+          <p:cNvSpPr txBox="1"/>
+          <p:nvPr/>
+        </p:nvSpPr>
+        <p:spPr>
+          <a:xfrm>
+            <a:off x="1143000" y="3337559"/>
+            <a:ext cx="10058400" cy="356615"/>
+          </a:xfrm>
+          <a:prstGeom prst="rect">
+            <a:avLst/>
+          </a:prstGeom>
+          <a:noFill/>
+        </p:spPr>
+        <p:txBody>
+          <a:bodyPr wrap="square" anchor="t">
+            <a:spAutoFit/>
+          </a:bodyPr>
+          <a:lstStyle/>
+          <a:p>
+            <a:pPr algn="l">
+              <a:lnSpc>
+                <a:spcPct val="106000"/>
+              </a:lnSpc>
+            </a:pPr>
+            <a:r>
+              <a:rPr sz="950" b="0">
+                <a:solidFill>
+                  <a:srgbClr val="333333"/>
+                </a:solidFill>
+                <a:latin typeface="Calibri"/>
+              </a:rPr>
+              <a:t>Bu yüzden ölçüm POS'tan değil ERP'den (DerinSIS) alındı — iki yılda da aynı kaynak, aynı belge tipi. Temmuz 2025 kasa geçişi ölçüye girmiyor.</a:t>
+            </a:r>
+          </a:p>
+        </p:txBody>
+      </p:sp>
+      <p:sp>
+        <p:nvSpPr>
+          <p:cNvPr id="18" name="Rectangle 17"/>
+          <p:cNvSpPr/>
+          <p:nvPr/>
+        </p:nvSpPr>
+        <p:spPr>
+          <a:xfrm>
+            <a:off x="548640" y="3822191"/>
+            <a:ext cx="11018520" cy="740664"/>
+          </a:xfrm>
+          <a:prstGeom prst="rect">
+            <a:avLst/>
+          </a:prstGeom>
+          <a:solidFill>
+            <a:srgbClr val="FFFFFF"/>
+          </a:solidFill>
+          <a:ln w="12700">
+            <a:solidFill>
+              <a:srgbClr val="DCDCDC"/>
+            </a:solidFill>
+          </a:ln>
+          <a:effectLst/>
+        </p:spPr>
+        <p:style>
+          <a:lnRef idx="1">
+            <a:schemeClr val="accent1"/>
+          </a:lnRef>
+          <a:fillRef idx="3">
+            <a:schemeClr val="accent1"/>
+          </a:fillRef>
+          <a:effectRef idx="2">
+            <a:schemeClr val="accent1"/>
+          </a:effectRef>
+          <a:fontRef idx="minor">
+            <a:schemeClr val="lt1"/>
+          </a:fontRef>
+        </p:style>
+        <p:txBody>
+          <a:bodyPr rtlCol="0" anchor="ctr"/>
+          <a:lstStyle/>
+          <a:p>
+            <a:pPr algn="ctr"/>
+          </a:p>
+        </p:txBody>
+      </p:sp>
+      <p:sp>
+        <p:nvSpPr>
+          <p:cNvPr id="19" name="Rectangle 18"/>
+          <p:cNvSpPr/>
+          <p:nvPr/>
+        </p:nvSpPr>
+        <p:spPr>
+          <a:xfrm>
+            <a:off x="548640" y="3822191"/>
+            <a:ext cx="68580" cy="740664"/>
+          </a:xfrm>
+          <a:prstGeom prst="rect">
+            <a:avLst/>
+          </a:prstGeom>
+          <a:solidFill>
+            <a:srgbClr val="E30622"/>
+          </a:solidFill>
+          <a:ln>
+            <a:noFill/>
+          </a:ln>
+          <a:effectLst/>
+        </p:spPr>
+        <p:style>
+          <a:lnRef idx="1">
+            <a:schemeClr val="accent1"/>
+          </a:lnRef>
+          <a:fillRef idx="3">
+            <a:schemeClr val="accent1"/>
+          </a:fillRef>
+          <a:effectRef idx="2">
+            <a:schemeClr val="accent1"/>
+          </a:effectRef>
+          <a:fontRef idx="minor">
+            <a:schemeClr val="lt1"/>
+          </a:fontRef>
+        </p:style>
+        <p:txBody>
+          <a:bodyPr rtlCol="0" anchor="ctr"/>
+          <a:lstStyle/>
+          <a:p>
+            <a:pPr algn="ctr"/>
+          </a:p>
+        </p:txBody>
+      </p:sp>
+      <p:pic>
+        <p:nvPicPr>
+          <p:cNvPr id="20" name="Picture 19" descr="circle-check.png"/>
+          <p:cNvPicPr>
+            <a:picLocks noChangeAspect="1"/>
+          </p:cNvPicPr>
+          <p:nvPr/>
+        </p:nvPicPr>
+        <p:blipFill>
+          <a:blip r:embed="rId3"/>
+          <a:stretch>
+            <a:fillRect/>
+          </a:stretch>
+        </p:blipFill>
+        <p:spPr>
+          <a:xfrm>
+            <a:off x="777240" y="3950207"/>
+            <a:ext cx="256032" cy="256032"/>
+          </a:xfrm>
+          <a:prstGeom prst="rect">
+            <a:avLst/>
+          </a:prstGeom>
+        </p:spPr>
+      </p:pic>
+      <p:sp>
+        <p:nvSpPr>
+          <p:cNvPr id="21" name="TextBox 20"/>
+          <p:cNvSpPr txBox="1"/>
+          <p:nvPr/>
+        </p:nvSpPr>
+        <p:spPr>
+          <a:xfrm>
+            <a:off x="1143000" y="3886200"/>
+            <a:ext cx="10058400" cy="292608"/>
+          </a:xfrm>
+          <a:prstGeom prst="rect">
+            <a:avLst/>
+          </a:prstGeom>
+          <a:noFill/>
+        </p:spPr>
+        <p:txBody>
+          <a:bodyPr wrap="square" anchor="t">
+            <a:spAutoFit/>
+          </a:bodyPr>
+          <a:lstStyle/>
+          <a:p>
+            <a:pPr algn="l">
+              <a:lnSpc>
+                <a:spcPct val="100000"/>
+              </a:lnSpc>
+            </a:pPr>
+            <a:r>
+              <a:rPr sz="1150" b="1">
+                <a:solidFill>
+                  <a:srgbClr val="A6001A"/>
+                </a:solidFill>
+                <a:latin typeface="Calibri"/>
+              </a:rPr>
+              <a:t>Sezonluk personel erken mi alındı?</a:t>
+            </a:r>
+          </a:p>
+        </p:txBody>
+      </p:sp>
+      <p:sp>
+        <p:nvSpPr>
+          <p:cNvPr id="22" name="TextBox 21"/>
+          <p:cNvSpPr txBox="1"/>
+          <p:nvPr/>
+        </p:nvSpPr>
+        <p:spPr>
+          <a:xfrm>
+            <a:off x="1143000" y="4169663"/>
+            <a:ext cx="10058400" cy="356615"/>
+          </a:xfrm>
+          <a:prstGeom prst="rect">
+            <a:avLst/>
+          </a:prstGeom>
+          <a:noFill/>
+        </p:spPr>
+        <p:txBody>
+          <a:bodyPr wrap="square" anchor="t">
+            <a:spAutoFit/>
+          </a:bodyPr>
+          <a:lstStyle/>
+          <a:p>
+            <a:pPr algn="l">
+              <a:lnSpc>
+                <a:spcPct val="106000"/>
+              </a:lnSpc>
+            </a:pPr>
+            <a:r>
+              <a:rPr sz="950" b="0">
+                <a:solidFill>
+                  <a:srgbClr val="333333"/>
+                </a:solidFill>
+                <a:latin typeface="Calibri"/>
+              </a:rPr>
+              <a:t>Hayır: takvim ölçüsünde 2026 alımı ortalama 2,5 gün DAHA GEÇ; Temmuz ve öncesi alım 6 kişiden 2'ye indi. Artış 1–14 Ağustos'ta ve o iki haftada ürün adedi +%25,1 büyüdü — alım işi takip etti.</a:t>
+            </a:r>
+          </a:p>
+        </p:txBody>
+      </p:sp>
+      <p:sp>
+        <p:nvSpPr>
+          <p:cNvPr id="23" name="Rectangle 22"/>
+          <p:cNvSpPr/>
+          <p:nvPr/>
+        </p:nvSpPr>
+        <p:spPr>
+          <a:xfrm>
+            <a:off x="548640" y="4654296"/>
+            <a:ext cx="11018520" cy="740664"/>
+          </a:xfrm>
+          <a:prstGeom prst="rect">
+            <a:avLst/>
+          </a:prstGeom>
+          <a:solidFill>
+            <a:srgbClr val="FFFFFF"/>
+          </a:solidFill>
+          <a:ln w="12700">
+            <a:solidFill>
+              <a:srgbClr val="DCDCDC"/>
+            </a:solidFill>
+          </a:ln>
+          <a:effectLst/>
+        </p:spPr>
+        <p:style>
+          <a:lnRef idx="1">
+            <a:schemeClr val="accent1"/>
+          </a:lnRef>
+          <a:fillRef idx="3">
+            <a:schemeClr val="accent1"/>
+          </a:fillRef>
+          <a:effectRef idx="2">
+            <a:schemeClr val="accent1"/>
+          </a:effectRef>
+          <a:fontRef idx="minor">
+            <a:schemeClr val="lt1"/>
+          </a:fontRef>
+        </p:style>
+        <p:txBody>
+          <a:bodyPr rtlCol="0" anchor="ctr"/>
+          <a:lstStyle/>
+          <a:p>
+            <a:pPr algn="ctr"/>
+          </a:p>
+        </p:txBody>
+      </p:sp>
+      <p:sp>
+        <p:nvSpPr>
+          <p:cNvPr id="24" name="Rectangle 23"/>
+          <p:cNvSpPr/>
+          <p:nvPr/>
+        </p:nvSpPr>
+        <p:spPr>
+          <a:xfrm>
+            <a:off x="548640" y="4654296"/>
+            <a:ext cx="68580" cy="740664"/>
+          </a:xfrm>
+          <a:prstGeom prst="rect">
+            <a:avLst/>
+          </a:prstGeom>
+          <a:solidFill>
+            <a:srgbClr val="E30622"/>
+          </a:solidFill>
+          <a:ln>
+            <a:noFill/>
+          </a:ln>
+          <a:effectLst/>
+        </p:spPr>
+        <p:style>
+          <a:lnRef idx="1">
+            <a:schemeClr val="accent1"/>
+          </a:lnRef>
+          <a:fillRef idx="3">
+            <a:schemeClr val="accent1"/>
+          </a:fillRef>
+          <a:effectRef idx="2">
+            <a:schemeClr val="accent1"/>
+          </a:effectRef>
+          <a:fontRef idx="minor">
+            <a:schemeClr val="lt1"/>
+          </a:fontRef>
+        </p:style>
+        <p:txBody>
+          <a:bodyPr rtlCol="0" anchor="ctr"/>
+          <a:lstStyle/>
+          <a:p>
+            <a:pPr algn="ctr"/>
+          </a:p>
+        </p:txBody>
+      </p:sp>
+      <p:pic>
+        <p:nvPicPr>
+          <p:cNvPr id="25" name="Picture 24" descr="circle-check.png"/>
+          <p:cNvPicPr>
+            <a:picLocks noChangeAspect="1"/>
+          </p:cNvPicPr>
+          <p:nvPr/>
+        </p:nvPicPr>
+        <p:blipFill>
+          <a:blip r:embed="rId3"/>
+          <a:stretch>
+            <a:fillRect/>
+          </a:stretch>
+        </p:blipFill>
+        <p:spPr>
+          <a:xfrm>
+            <a:off x="777240" y="4782312"/>
+            <a:ext cx="256032" cy="256032"/>
+          </a:xfrm>
+          <a:prstGeom prst="rect">
+            <a:avLst/>
+          </a:prstGeom>
+        </p:spPr>
+      </p:pic>
+      <p:sp>
+        <p:nvSpPr>
+          <p:cNvPr id="26" name="TextBox 25"/>
+          <p:cNvSpPr txBox="1"/>
+          <p:nvPr/>
+        </p:nvSpPr>
+        <p:spPr>
+          <a:xfrm>
+            <a:off x="1143000" y="4718304"/>
+            <a:ext cx="10058400" cy="292608"/>
+          </a:xfrm>
+          <a:prstGeom prst="rect">
+            <a:avLst/>
+          </a:prstGeom>
+          <a:noFill/>
+        </p:spPr>
+        <p:txBody>
+          <a:bodyPr wrap="square" anchor="t">
+            <a:spAutoFit/>
+          </a:bodyPr>
+          <a:lstStyle/>
+          <a:p>
+            <a:pPr algn="l">
+              <a:lnSpc>
+                <a:spcPct val="100000"/>
+              </a:lnSpc>
+            </a:pPr>
+            <a:r>
+              <a:rPr sz="1150" b="1">
+                <a:solidFill>
+                  <a:srgbClr val="A6001A"/>
+                </a:solidFill>
+                <a:latin typeface="Calibri"/>
+              </a:rPr>
+              <a:t>Ağustos ayında ivme düşüşü var mı?</a:t>
+            </a:r>
+          </a:p>
+        </p:txBody>
+      </p:sp>
+      <p:sp>
+        <p:nvSpPr>
+          <p:cNvPr id="27" name="TextBox 26"/>
+          <p:cNvSpPr txBox="1"/>
+          <p:nvPr/>
+        </p:nvSpPr>
+        <p:spPr>
+          <a:xfrm>
+            <a:off x="1143000" y="5001768"/>
+            <a:ext cx="10058400" cy="356615"/>
+          </a:xfrm>
+          <a:prstGeom prst="rect">
+            <a:avLst/>
+          </a:prstGeom>
+          <a:noFill/>
+        </p:spPr>
+        <p:txBody>
+          <a:bodyPr wrap="square" anchor="t">
+            <a:spAutoFit/>
+          </a:bodyPr>
+          <a:lstStyle/>
+          <a:p>
+            <a:pPr algn="l">
+              <a:lnSpc>
+                <a:spcPct val="106000"/>
+              </a:lnSpc>
+            </a:pPr>
+            <a:r>
+              <a:rPr sz="950" b="0">
+                <a:solidFill>
+                  <a:srgbClr val="333333"/>
+                </a:solidFill>
+                <a:latin typeface="Calibri"/>
+              </a:rPr>
+              <a:t>Takvim etkisi: okullar 2025'te 8 Eylül, 2026'da 14 Eylül açıldı — sezon 6 gün geriye kaydı. Açılışa hizalanınca haftalık büyüme %65–79 bandında düz seyrediyor.</a:t>
+            </a:r>
+          </a:p>
+        </p:txBody>
+      </p:sp>
+      <p:sp>
+        <p:nvSpPr>
+          <p:cNvPr id="28" name="TextBox 27"/>
+          <p:cNvSpPr txBox="1"/>
+          <p:nvPr/>
+        </p:nvSpPr>
+        <p:spPr>
+          <a:xfrm>
+            <a:off x="1920240" y="5669280"/>
+            <a:ext cx="9555480" cy="566928"/>
+          </a:xfrm>
+          <a:prstGeom prst="rect">
+            <a:avLst/>
+          </a:prstGeom>
+          <a:noFill/>
+        </p:spPr>
+        <p:txBody>
+          <a:bodyPr wrap="square" anchor="t">
+            <a:spAutoFit/>
+          </a:bodyPr>
+          <a:lstStyle/>
+          <a:p>
+            <a:pPr algn="l">
+              <a:lnSpc>
+                <a:spcPct val="105000"/>
+              </a:lnSpc>
+            </a:pPr>
+            <a:r>
+              <a:rPr sz="800" b="0">
+                <a:solidFill>
+                  <a:srgbClr val="9A9A9A"/>
+                </a:solidFill>
+                <a:latin typeface="Calibri"/>
+              </a:rPr>
+              <a:t>* Kapsam: üç POS mağazası — FSM · Özlüce · İst. Yolu · Dönem: 01.01 – 31.08 (her iki yıl, kümülatif) (kurumsal/mağaza kıyası) · hizalı dönem: 01.07 – 25.08.2025 (2025) · 07.07 – 31.08.2026 (2026), her iki yıl 56 gün, okul açılışına hizalı</a:t>
+            </a:r>
+          </a:p>
+        </p:txBody>
+      </p:sp>
+      <p:sp>
+        <p:nvSpPr>
+          <p:cNvPr id="29" name="TextBox 28"/>
+          <p:cNvSpPr txBox="1"/>
+          <p:nvPr/>
+        </p:nvSpPr>
+        <p:spPr>
+          <a:xfrm>
+            <a:off x="8503920" y="6355080"/>
+            <a:ext cx="3108960" cy="274320"/>
+          </a:xfrm>
+          <a:prstGeom prst="rect">
+            <a:avLst/>
+          </a:prstGeom>
+          <a:noFill/>
+        </p:spPr>
+        <p:txBody>
+          <a:bodyPr wrap="square" anchor="t">
+            <a:spAutoFit/>
+          </a:bodyPr>
+          <a:lstStyle/>
+          <a:p>
+            <a:pPr algn="r">
+              <a:lnSpc>
+                <a:spcPct val="100000"/>
+              </a:lnSpc>
+            </a:pPr>
+            <a:r>
+              <a:rPr sz="900" b="0">
+                <a:solidFill>
+                  <a:srgbClr val="9A9A9A"/>
+                </a:solidFill>
+                <a:latin typeface="Calibri"/>
+              </a:rPr>
+              <a:t>© Fikri Eren 2026</a:t>
+            </a:r>
+          </a:p>
+        </p:txBody>
+      </p:sp>
+    </p:spTree>
+  </p:cSld>
+  <p:clrMapOvr>
+    <a:masterClrMapping/>
+  </p:clrMapOvr>
+</p:sld>
+</file>
+
+<file path=ppt/slides/slide17.xml><?xml version="1.0" encoding="utf-8"?>
+<p:sld xmlns:a="http://schemas.openxmlformats.org/drawingml/2006/main" xmlns:p="http://schemas.openxmlformats.org/presentationml/2006/main" xmlns:r="http://schemas.openxmlformats.org/officeDocument/2006/relationships">
+  <p:cSld>
+    <p:bg>
+      <p:bgPr>
+        <a:blipFill dpi="0" rotWithShape="1">
+          <a:blip r:embed="rId2">
+            <a:lum/>
+          </a:blip>
+          <a:srcRect/>
+          <a:stretch>
+            <a:fillRect/>
+          </a:stretch>
+        </a:blipFill>
+        <a:effectLst/>
+      </p:bgPr>
+    </p:bg>
+    <p:spTree>
+      <p:nvGrpSpPr>
+        <p:cNvPr id="1" name=""/>
+        <p:cNvGrpSpPr/>
+        <p:nvPr/>
+      </p:nvGrpSpPr>
+      <p:grpSpPr/>
+      <p:sp>
+        <p:nvSpPr>
+          <p:cNvPr id="2" name="Title 1"/>
+          <p:cNvSpPr>
+            <a:spLocks noGrp="1"/>
+          </p:cNvSpPr>
+          <p:nvPr>
+            <p:ph type="title"/>
+          </p:nvPr>
+        </p:nvSpPr>
+        <p:spPr>
+          <a:xfrm>
+            <a:off x="548640" y="274320"/>
+            <a:ext cx="11018520" cy="914400"/>
+          </a:xfrm>
+        </p:spPr>
+        <p:txBody>
+          <a:bodyPr/>
+          <a:lstStyle/>
+          <a:p>
+            <a:r>
               <a:t>İyileştirme Alanı</a:t>
             </a:r>
           </a:p>
@@ -14850,7 +16888,7 @@
 </p:sld>
 </file>
 
-<file path=ppt/slides/slide17.xml><?xml version="1.0" encoding="utf-8"?>
+<file path=ppt/slides/slide18.xml><?xml version="1.0" encoding="utf-8"?>
 <p:sld xmlns:a="http://schemas.openxmlformats.org/drawingml/2006/main" xmlns:p="http://schemas.openxmlformats.org/presentationml/2006/main" xmlns:r="http://schemas.openxmlformats.org/officeDocument/2006/relationships">
   <p:cSld>
     <p:bg>

--- a/briefings/sezon-kadro-20260902/sunum-kadro-sezon2026.pptx
+++ b/briefings/sezon-kadro-20260902/sunum-kadro-sezon2026.pptx
@@ -6050,7 +6050,7 @@
                           </a:solidFill>
                           <a:latin typeface="Calibri"/>
                         </a:rPr>
-                        <a:t>Şura</a:t>
+                        <a:t>Akademi</a:t>
                       </a:r>
                     </a:p>
                   </a:txBody>
@@ -6073,99 +6073,99 @@
                           </a:solidFill>
                           <a:latin typeface="Calibri"/>
                         </a:rPr>
+                        <a:t>+1</a:t>
+                      </a:r>
+                    </a:p>
+                  </a:txBody>
+                  <a:tcPr>
+                    <a:solidFill>
+                      <a:srgbClr val="FFFFFF"/>
+                    </a:solidFill>
+                  </a:tcPr>
+                </a:tc>
+                <a:tc>
+                  <a:txBody>
+                    <a:bodyPr/>
+                    <a:lstStyle/>
+                    <a:p>
+                      <a:pPr algn="ctr"/>
+                      <a:r>
+                        <a:rPr sz="1050" b="0">
+                          <a:solidFill>
+                            <a:srgbClr val="333333"/>
+                          </a:solidFill>
+                          <a:latin typeface="Calibri"/>
+                        </a:rPr>
+                        <a:t>0</a:t>
+                      </a:r>
+                    </a:p>
+                  </a:txBody>
+                  <a:tcPr>
+                    <a:solidFill>
+                      <a:srgbClr val="FFFFFF"/>
+                    </a:solidFill>
+                  </a:tcPr>
+                </a:tc>
+                <a:tc>
+                  <a:txBody>
+                    <a:bodyPr/>
+                    <a:lstStyle/>
+                    <a:p>
+                      <a:pPr algn="ctr"/>
+                      <a:r>
+                        <a:rPr sz="1050" b="0">
+                          <a:solidFill>
+                            <a:srgbClr val="333333"/>
+                          </a:solidFill>
+                          <a:latin typeface="Calibri"/>
+                        </a:rPr>
+                        <a:t>+1</a:t>
+                      </a:r>
+                    </a:p>
+                  </a:txBody>
+                  <a:tcPr>
+                    <a:solidFill>
+                      <a:srgbClr val="FFFFFF"/>
+                    </a:solidFill>
+                  </a:tcPr>
+                </a:tc>
+                <a:tc>
+                  <a:txBody>
+                    <a:bodyPr/>
+                    <a:lstStyle/>
+                    <a:p>
+                      <a:pPr algn="ctr"/>
+                      <a:r>
+                        <a:rPr sz="1050" b="0">
+                          <a:solidFill>
+                            <a:srgbClr val="333333"/>
+                          </a:solidFill>
+                          <a:latin typeface="Calibri"/>
+                        </a:rPr>
+                        <a:t>0</a:t>
+                      </a:r>
+                    </a:p>
+                  </a:txBody>
+                  <a:tcPr>
+                    <a:solidFill>
+                      <a:srgbClr val="FFFFFF"/>
+                    </a:solidFill>
+                  </a:tcPr>
+                </a:tc>
+                <a:tc>
+                  <a:txBody>
+                    <a:bodyPr/>
+                    <a:lstStyle/>
+                    <a:p>
+                      <a:pPr algn="ctr"/>
+                      <a:r>
+                        <a:rPr sz="1050" b="0">
+                          <a:solidFill>
+                            <a:srgbClr val="333333"/>
+                          </a:solidFill>
+                          <a:latin typeface="Calibri"/>
+                        </a:rPr>
                         <a:t>—</a:t>
-                      </a:r>
-                    </a:p>
-                  </a:txBody>
-                  <a:tcPr>
-                    <a:solidFill>
-                      <a:srgbClr val="FFFFFF"/>
-                    </a:solidFill>
-                  </a:tcPr>
-                </a:tc>
-                <a:tc>
-                  <a:txBody>
-                    <a:bodyPr/>
-                    <a:lstStyle/>
-                    <a:p>
-                      <a:pPr algn="ctr"/>
-                      <a:r>
-                        <a:rPr sz="1050" b="0">
-                          <a:solidFill>
-                            <a:srgbClr val="333333"/>
-                          </a:solidFill>
-                          <a:latin typeface="Calibri"/>
-                        </a:rPr>
-                        <a:t>—</a:t>
-                      </a:r>
-                    </a:p>
-                  </a:txBody>
-                  <a:tcPr>
-                    <a:solidFill>
-                      <a:srgbClr val="FFFFFF"/>
-                    </a:solidFill>
-                  </a:tcPr>
-                </a:tc>
-                <a:tc>
-                  <a:txBody>
-                    <a:bodyPr/>
-                    <a:lstStyle/>
-                    <a:p>
-                      <a:pPr algn="ctr"/>
-                      <a:r>
-                        <a:rPr sz="1050" b="0">
-                          <a:solidFill>
-                            <a:srgbClr val="333333"/>
-                          </a:solidFill>
-                          <a:latin typeface="Calibri"/>
-                        </a:rPr>
-                        <a:t>—</a:t>
-                      </a:r>
-                    </a:p>
-                  </a:txBody>
-                  <a:tcPr>
-                    <a:solidFill>
-                      <a:srgbClr val="FFFFFF"/>
-                    </a:solidFill>
-                  </a:tcPr>
-                </a:tc>
-                <a:tc>
-                  <a:txBody>
-                    <a:bodyPr/>
-                    <a:lstStyle/>
-                    <a:p>
-                      <a:pPr algn="ctr"/>
-                      <a:r>
-                        <a:rPr sz="1050" b="0">
-                          <a:solidFill>
-                            <a:srgbClr val="333333"/>
-                          </a:solidFill>
-                          <a:latin typeface="Calibri"/>
-                        </a:rPr>
-                        <a:t>—</a:t>
-                      </a:r>
-                    </a:p>
-                  </a:txBody>
-                  <a:tcPr>
-                    <a:solidFill>
-                      <a:srgbClr val="FFFFFF"/>
-                    </a:solidFill>
-                  </a:tcPr>
-                </a:tc>
-                <a:tc>
-                  <a:txBody>
-                    <a:bodyPr/>
-                    <a:lstStyle/>
-                    <a:p>
-                      <a:pPr algn="ctr"/>
-                      <a:r>
-                        <a:rPr sz="1050" b="0">
-                          <a:solidFill>
-                            <a:srgbClr val="333333"/>
-                          </a:solidFill>
-                          <a:latin typeface="Calibri"/>
-                        </a:rPr>
-                        <a:t>+2</a:t>
                       </a:r>
                     </a:p>
                   </a:txBody>
@@ -6376,7 +6376,7 @@
                           </a:solidFill>
                           <a:latin typeface="Calibri"/>
                         </a:rPr>
-                        <a:t>Akademi</a:t>
+                        <a:t>Şura</a:t>
                       </a:r>
                     </a:p>
                   </a:txBody>
@@ -6399,7 +6399,7 @@
                           </a:solidFill>
                           <a:latin typeface="Calibri"/>
                         </a:rPr>
-                        <a:t>+1</a:t>
+                        <a:t>—</a:t>
                       </a:r>
                     </a:p>
                   </a:txBody>
@@ -6422,7 +6422,7 @@
                           </a:solidFill>
                           <a:latin typeface="Calibri"/>
                         </a:rPr>
-                        <a:t>0</a:t>
+                        <a:t>—</a:t>
                       </a:r>
                     </a:p>
                   </a:txBody>
@@ -6445,7 +6445,7 @@
                           </a:solidFill>
                           <a:latin typeface="Calibri"/>
                         </a:rPr>
-                        <a:t>+1</a:t>
+                        <a:t>—</a:t>
                       </a:r>
                     </a:p>
                   </a:txBody>
@@ -6468,7 +6468,7 @@
                           </a:solidFill>
                           <a:latin typeface="Calibri"/>
                         </a:rPr>
-                        <a:t>0</a:t>
+                        <a:t>—</a:t>
                       </a:r>
                     </a:p>
                   </a:txBody>
@@ -6491,7 +6491,7 @@
                           </a:solidFill>
                           <a:latin typeface="Calibri"/>
                         </a:rPr>
-                        <a:t>—</a:t>
+                        <a:t>+2</a:t>
                       </a:r>
                     </a:p>
                   </a:txBody>
@@ -7028,7 +7028,7 @@
                           </a:solidFill>
                           <a:latin typeface="Calibri"/>
                         </a:rPr>
-                        <a:t>Mal Kabul</a:t>
+                        <a:t>İdari İşler</a:t>
                       </a:r>
                     </a:p>
                   </a:txBody>
@@ -7074,6 +7074,29 @@
                           </a:solidFill>
                           <a:latin typeface="Calibri"/>
                         </a:rPr>
+                        <a:t>-1</a:t>
+                      </a:r>
+                    </a:p>
+                  </a:txBody>
+                  <a:tcPr>
+                    <a:solidFill>
+                      <a:srgbClr val="FFFFFF"/>
+                    </a:solidFill>
+                  </a:tcPr>
+                </a:tc>
+                <a:tc>
+                  <a:txBody>
+                    <a:bodyPr/>
+                    <a:lstStyle/>
+                    <a:p>
+                      <a:pPr algn="ctr"/>
+                      <a:r>
+                        <a:rPr sz="1050" b="0">
+                          <a:solidFill>
+                            <a:srgbClr val="333333"/>
+                          </a:solidFill>
+                          <a:latin typeface="Calibri"/>
+                        </a:rPr>
                         <a:t>0</a:t>
                       </a:r>
                     </a:p>
@@ -7097,30 +7120,7 @@
                           </a:solidFill>
                           <a:latin typeface="Calibri"/>
                         </a:rPr>
-                        <a:t>-1</a:t>
-                      </a:r>
-                    </a:p>
-                  </a:txBody>
-                  <a:tcPr>
-                    <a:solidFill>
-                      <a:srgbClr val="FFFFFF"/>
-                    </a:solidFill>
-                  </a:tcPr>
-                </a:tc>
-                <a:tc>
-                  <a:txBody>
-                    <a:bodyPr/>
-                    <a:lstStyle/>
-                    <a:p>
-                      <a:pPr algn="ctr"/>
-                      <a:r>
-                        <a:rPr sz="1050" b="0">
-                          <a:solidFill>
-                            <a:srgbClr val="333333"/>
-                          </a:solidFill>
-                          <a:latin typeface="Calibri"/>
-                        </a:rPr>
-                        <a:t>0</a:t>
+                        <a:t>—</a:t>
                       </a:r>
                     </a:p>
                   </a:txBody>
@@ -7191,7 +7191,7 @@
                           </a:solidFill>
                           <a:latin typeface="Calibri"/>
                         </a:rPr>
-                        <a:t>Mağaza</a:t>
+                        <a:t>Mal Kabul</a:t>
                       </a:r>
                     </a:p>
                   </a:txBody>
@@ -7214,6 +7214,29 @@
                           </a:solidFill>
                           <a:latin typeface="Calibri"/>
                         </a:rPr>
+                        <a:t>+1</a:t>
+                      </a:r>
+                    </a:p>
+                  </a:txBody>
+                  <a:tcPr>
+                    <a:solidFill>
+                      <a:srgbClr val="F2F2F2"/>
+                    </a:solidFill>
+                  </a:tcPr>
+                </a:tc>
+                <a:tc>
+                  <a:txBody>
+                    <a:bodyPr/>
+                    <a:lstStyle/>
+                    <a:p>
+                      <a:pPr algn="ctr"/>
+                      <a:r>
+                        <a:rPr sz="1050" b="0">
+                          <a:solidFill>
+                            <a:srgbClr val="333333"/>
+                          </a:solidFill>
+                          <a:latin typeface="Calibri"/>
+                        </a:rPr>
                         <a:t>0</a:t>
                       </a:r>
                     </a:p>
@@ -7237,30 +7260,7 @@
                           </a:solidFill>
                           <a:latin typeface="Calibri"/>
                         </a:rPr>
-                        <a:t>0</a:t>
-                      </a:r>
-                    </a:p>
-                  </a:txBody>
-                  <a:tcPr>
-                    <a:solidFill>
-                      <a:srgbClr val="F2F2F2"/>
-                    </a:solidFill>
-                  </a:tcPr>
-                </a:tc>
-                <a:tc>
-                  <a:txBody>
-                    <a:bodyPr/>
-                    <a:lstStyle/>
-                    <a:p>
-                      <a:pPr algn="ctr"/>
-                      <a:r>
-                        <a:rPr sz="1050" b="0">
-                          <a:solidFill>
-                            <a:srgbClr val="333333"/>
-                          </a:solidFill>
-                          <a:latin typeface="Calibri"/>
-                        </a:rPr>
-                        <a:t>0</a:t>
+                        <a:t>-1</a:t>
                       </a:r>
                     </a:p>
                   </a:txBody>
@@ -7354,7 +7354,7 @@
                           </a:solidFill>
                           <a:latin typeface="Calibri"/>
                         </a:rPr>
-                        <a:t>İdari İşler</a:t>
+                        <a:t>Mağaza</a:t>
                       </a:r>
                     </a:p>
                   </a:txBody>
@@ -7377,7 +7377,7 @@
                           </a:solidFill>
                           <a:latin typeface="Calibri"/>
                         </a:rPr>
-                        <a:t>+1</a:t>
+                        <a:t>0</a:t>
                       </a:r>
                     </a:p>
                   </a:txBody>
@@ -7400,7 +7400,7 @@
                           </a:solidFill>
                           <a:latin typeface="Calibri"/>
                         </a:rPr>
-                        <a:t>-1</a:t>
+                        <a:t>0</a:t>
                       </a:r>
                     </a:p>
                   </a:txBody>
@@ -7446,7 +7446,7 @@
                           </a:solidFill>
                           <a:latin typeface="Calibri"/>
                         </a:rPr>
-                        <a:t>—</a:t>
+                        <a:t>0</a:t>
                       </a:r>
                     </a:p>
                   </a:txBody>
@@ -7517,7 +7517,7 @@
                           </a:solidFill>
                           <a:latin typeface="Calibri"/>
                         </a:rPr>
-                        <a:t>Çocuk</a:t>
+                        <a:t>Ön Muhasebe</a:t>
                       </a:r>
                     </a:p>
                   </a:txBody>
@@ -7540,7 +7540,7 @@
                           </a:solidFill>
                           <a:latin typeface="Calibri"/>
                         </a:rPr>
-                        <a:t>0</a:t>
+                        <a:t>—</a:t>
                       </a:r>
                     </a:p>
                   </a:txBody>
@@ -7563,7 +7563,7 @@
                           </a:solidFill>
                           <a:latin typeface="Calibri"/>
                         </a:rPr>
-                        <a:t>0</a:t>
+                        <a:t>—</a:t>
                       </a:r>
                     </a:p>
                   </a:txBody>
@@ -7586,7 +7586,7 @@
                           </a:solidFill>
                           <a:latin typeface="Calibri"/>
                         </a:rPr>
-                        <a:t>+1</a:t>
+                        <a:t>—</a:t>
                       </a:r>
                     </a:p>
                   </a:txBody>
@@ -7609,7 +7609,7 @@
                           </a:solidFill>
                           <a:latin typeface="Calibri"/>
                         </a:rPr>
-                        <a:t>-2</a:t>
+                        <a:t>—</a:t>
                       </a:r>
                     </a:p>
                   </a:txBody>
@@ -7632,7 +7632,7 @@
                           </a:solidFill>
                           <a:latin typeface="Calibri"/>
                         </a:rPr>
-                        <a:t>—</a:t>
+                        <a:t>-1</a:t>
                       </a:r>
                     </a:p>
                   </a:txBody>
@@ -12097,7 +12097,7 @@
       </p:sp>
       <p:pic>
         <p:nvPicPr>
-          <p:cNvPr id="17" name="Picture 16" descr="check.png"/>
+          <p:cNvPr id="17" name="Picture 16" descr="alert-triangle.png"/>
           <p:cNvPicPr>
             <a:picLocks noChangeAspect="1"/>
           </p:cNvPicPr>
@@ -12153,7 +12153,7 @@
                 </a:solidFill>
                 <a:latin typeface="Calibri"/>
               </a:rPr>
-              <a:t>NORM FARKI · 31.08</a:t>
+              <a:t>NORM AÇIĞI · 31.08</a:t>
             </a:r>
           </a:p>
         </p:txBody>
@@ -12192,7 +12192,7 @@
                 </a:solidFill>
                 <a:latin typeface="Calibri"/>
               </a:rPr>
-              <a:t>-8 kişi</a:t>
+              <a:t>11 kişi</a:t>
             </a:r>
           </a:p>
         </p:txBody>
@@ -12231,7 +12231,7 @@
                 </a:solidFill>
                 <a:latin typeface="Calibri"/>
               </a:rPr>
-              <a:t>kadro normun ALTINDA</a:t>
+              <a:t>kadrolu olarak DOLDURULMADI</a:t>
             </a:r>
           </a:p>
         </p:txBody>
@@ -12255,11 +12255,12 @@
                 <a:tableStyleId>{5C22544A-7EE6-4342-B048-85BDC9FD1C3A}</a:tableStyleId>
               </a:tblPr>
               <a:tblGrid>
-                <a:gridCol w="1645920"/>
-                <a:gridCol w="1463040"/>
-                <a:gridCol w="1325880"/>
-                <a:gridCol w="1325880"/>
-                <a:gridCol w="1188720"/>
+                <a:gridCol w="1417320"/>
+                <a:gridCol w="868680"/>
+                <a:gridCol w="1234440"/>
+                <a:gridCol w="1051560"/>
+                <a:gridCol w="1234440"/>
+                <a:gridCol w="1143000"/>
               </a:tblGrid>
               <a:tr h="335280">
                 <a:tc>
@@ -12298,7 +12299,7 @@
                           </a:solidFill>
                           <a:latin typeface="Calibri"/>
                         </a:rPr>
-                        <a:t>Norm (sezon dışı)</a:t>
+                        <a:t>Norm</a:t>
                       </a:r>
                     </a:p>
                   </a:txBody>
@@ -12321,7 +12322,7 @@
                           </a:solidFill>
                           <a:latin typeface="Calibri"/>
                         </a:rPr>
-                        <a:t>Kadrolu 30.06</a:t>
+                        <a:t>Kadrolu 31.08</a:t>
                       </a:r>
                     </a:p>
                   </a:txBody>
@@ -12344,7 +12345,7 @@
                           </a:solidFill>
                           <a:latin typeface="Calibri"/>
                         </a:rPr>
-                        <a:t>Kadrolu 31.08</a:t>
+                        <a:t>Norm açığı</a:t>
                       </a:r>
                     </a:p>
                   </a:txBody>
@@ -12367,7 +12368,30 @@
                           </a:solidFill>
                           <a:latin typeface="Calibri"/>
                         </a:rPr>
-                        <a:t>Norm farkı 31.08</a:t>
+                        <a:t>Sezonluk 31.08</a:t>
+                      </a:r>
+                    </a:p>
+                  </a:txBody>
+                  <a:tcPr>
+                    <a:solidFill>
+                      <a:srgbClr val="E30622"/>
+                    </a:solidFill>
+                  </a:tcPr>
+                </a:tc>
+                <a:tc>
+                  <a:txBody>
+                    <a:bodyPr/>
+                    <a:lstStyle/>
+                    <a:p>
+                      <a:pPr algn="ctr"/>
+                      <a:r>
+                        <a:rPr sz="900" b="1">
+                          <a:solidFill>
+                            <a:srgbClr val="FFFFFF"/>
+                          </a:solidFill>
+                          <a:latin typeface="Calibri"/>
+                        </a:rPr>
+                        <a:t>Sezon takviyesi</a:t>
                       </a:r>
                     </a:p>
                   </a:txBody>
@@ -12438,7 +12462,7 @@
                           </a:solidFill>
                           <a:latin typeface="Calibri"/>
                         </a:rPr>
-                        <a:t>44</a:t>
+                        <a:t>41</a:t>
                       </a:r>
                     </a:p>
                   </a:txBody>
@@ -12455,13 +12479,36 @@
                     <a:p>
                       <a:pPr algn="ctr"/>
                       <a:r>
+                        <a:rPr sz="1050" b="1">
+                          <a:solidFill>
+                            <a:srgbClr val="A6001A"/>
+                          </a:solidFill>
+                          <a:latin typeface="Calibri"/>
+                        </a:rPr>
+                        <a:t>4</a:t>
+                      </a:r>
+                    </a:p>
+                  </a:txBody>
+                  <a:tcPr>
+                    <a:solidFill>
+                      <a:srgbClr val="FFFFFF"/>
+                    </a:solidFill>
+                  </a:tcPr>
+                </a:tc>
+                <a:tc>
+                  <a:txBody>
+                    <a:bodyPr/>
+                    <a:lstStyle/>
+                    <a:p>
+                      <a:pPr algn="ctr"/>
+                      <a:r>
                         <a:rPr sz="1050" b="0">
                           <a:solidFill>
                             <a:srgbClr val="333333"/>
                           </a:solidFill>
                           <a:latin typeface="Calibri"/>
                         </a:rPr>
-                        <a:t>41</a:t>
+                        <a:t>13</a:t>
                       </a:r>
                     </a:p>
                   </a:txBody>
@@ -12484,7 +12531,7 @@
                           </a:solidFill>
                           <a:latin typeface="Calibri"/>
                         </a:rPr>
-                        <a:t>-4</a:t>
+                        <a:t>9</a:t>
                       </a:r>
                     </a:p>
                   </a:txBody>
@@ -12555,7 +12602,7 @@
                           </a:solidFill>
                           <a:latin typeface="Calibri"/>
                         </a:rPr>
-                        <a:t>35</a:t>
+                        <a:t>34</a:t>
                       </a:r>
                     </a:p>
                   </a:txBody>
@@ -12572,13 +12619,36 @@
                     <a:p>
                       <a:pPr algn="ctr"/>
                       <a:r>
+                        <a:rPr sz="1050" b="1">
+                          <a:solidFill>
+                            <a:srgbClr val="A6001A"/>
+                          </a:solidFill>
+                          <a:latin typeface="Calibri"/>
+                        </a:rPr>
+                        <a:t>3</a:t>
+                      </a:r>
+                    </a:p>
+                  </a:txBody>
+                  <a:tcPr>
+                    <a:solidFill>
+                      <a:srgbClr val="FAFAFA"/>
+                    </a:solidFill>
+                  </a:tcPr>
+                </a:tc>
+                <a:tc>
+                  <a:txBody>
+                    <a:bodyPr/>
+                    <a:lstStyle/>
+                    <a:p>
+                      <a:pPr algn="ctr"/>
+                      <a:r>
                         <a:rPr sz="1050" b="0">
                           <a:solidFill>
                             <a:srgbClr val="333333"/>
                           </a:solidFill>
                           <a:latin typeface="Calibri"/>
                         </a:rPr>
-                        <a:t>34</a:t>
+                        <a:t>11</a:t>
                       </a:r>
                     </a:p>
                   </a:txBody>
@@ -12601,7 +12671,7 @@
                           </a:solidFill>
                           <a:latin typeface="Calibri"/>
                         </a:rPr>
-                        <a:t>-3</a:t>
+                        <a:t>8</a:t>
                       </a:r>
                     </a:p>
                   </a:txBody>
@@ -12672,7 +12742,7 @@
                           </a:solidFill>
                           <a:latin typeface="Calibri"/>
                         </a:rPr>
-                        <a:t>35</a:t>
+                        <a:t>36</a:t>
                       </a:r>
                     </a:p>
                   </a:txBody>
@@ -12689,13 +12759,36 @@
                     <a:p>
                       <a:pPr algn="ctr"/>
                       <a:r>
+                        <a:rPr sz="1050" b="1">
+                          <a:solidFill>
+                            <a:srgbClr val="A6001A"/>
+                          </a:solidFill>
+                          <a:latin typeface="Calibri"/>
+                        </a:rPr>
+                        <a:t>—</a:t>
+                      </a:r>
+                    </a:p>
+                  </a:txBody>
+                  <a:tcPr>
+                    <a:solidFill>
+                      <a:srgbClr val="FFFFFF"/>
+                    </a:solidFill>
+                  </a:tcPr>
+                </a:tc>
+                <a:tc>
+                  <a:txBody>
+                    <a:bodyPr/>
+                    <a:lstStyle/>
+                    <a:p>
+                      <a:pPr algn="ctr"/>
+                      <a:r>
                         <a:rPr sz="1050" b="0">
                           <a:solidFill>
                             <a:srgbClr val="333333"/>
                           </a:solidFill>
                           <a:latin typeface="Calibri"/>
                         </a:rPr>
-                        <a:t>36</a:t>
+                        <a:t>25</a:t>
                       </a:r>
                     </a:p>
                   </a:txBody>
@@ -12718,7 +12811,7 @@
                           </a:solidFill>
                           <a:latin typeface="Calibri"/>
                         </a:rPr>
-                        <a:t>+3</a:t>
+                        <a:t>25</a:t>
                       </a:r>
                     </a:p>
                   </a:txBody>
@@ -12789,7 +12882,7 @@
                           </a:solidFill>
                           <a:latin typeface="Calibri"/>
                         </a:rPr>
-                        <a:t>29</a:t>
+                        <a:t>26</a:t>
                       </a:r>
                     </a:p>
                   </a:txBody>
@@ -12806,13 +12899,36 @@
                     <a:p>
                       <a:pPr algn="ctr"/>
                       <a:r>
+                        <a:rPr sz="1050" b="1">
+                          <a:solidFill>
+                            <a:srgbClr val="A6001A"/>
+                          </a:solidFill>
+                          <a:latin typeface="Calibri"/>
+                        </a:rPr>
+                        <a:t>4</a:t>
+                      </a:r>
+                    </a:p>
+                  </a:txBody>
+                  <a:tcPr>
+                    <a:solidFill>
+                      <a:srgbClr val="FAFAFA"/>
+                    </a:solidFill>
+                  </a:tcPr>
+                </a:tc>
+                <a:tc>
+                  <a:txBody>
+                    <a:bodyPr/>
+                    <a:lstStyle/>
+                    <a:p>
+                      <a:pPr algn="ctr"/>
+                      <a:r>
                         <a:rPr sz="1050" b="0">
                           <a:solidFill>
                             <a:srgbClr val="333333"/>
                           </a:solidFill>
                           <a:latin typeface="Calibri"/>
                         </a:rPr>
-                        <a:t>26</a:t>
+                        <a:t>9</a:t>
                       </a:r>
                     </a:p>
                   </a:txBody>
@@ -12835,7 +12951,7 @@
                           </a:solidFill>
                           <a:latin typeface="Calibri"/>
                         </a:rPr>
-                        <a:t>-4</a:t>
+                        <a:t>5</a:t>
                       </a:r>
                     </a:p>
                   </a:txBody>
@@ -12906,7 +13022,7 @@
                           </a:solidFill>
                           <a:latin typeface="Calibri"/>
                         </a:rPr>
-                        <a:t>143</a:t>
+                        <a:t>137</a:t>
                       </a:r>
                     </a:p>
                   </a:txBody>
@@ -12925,11 +13041,34 @@
                       <a:r>
                         <a:rPr sz="1050" b="1">
                           <a:solidFill>
+                            <a:srgbClr val="A6001A"/>
+                          </a:solidFill>
+                          <a:latin typeface="Calibri"/>
+                        </a:rPr>
+                        <a:t>11</a:t>
+                      </a:r>
+                    </a:p>
+                  </a:txBody>
+                  <a:tcPr>
+                    <a:solidFill>
+                      <a:srgbClr val="F2F2F2"/>
+                    </a:solidFill>
+                  </a:tcPr>
+                </a:tc>
+                <a:tc>
+                  <a:txBody>
+                    <a:bodyPr/>
+                    <a:lstStyle/>
+                    <a:p>
+                      <a:pPr algn="ctr"/>
+                      <a:r>
+                        <a:rPr sz="1050" b="1">
+                          <a:solidFill>
                             <a:srgbClr val="333333"/>
                           </a:solidFill>
                           <a:latin typeface="Calibri"/>
                         </a:rPr>
-                        <a:t>137</a:t>
+                        <a:t>58</a:t>
                       </a:r>
                     </a:p>
                   </a:txBody>
@@ -12952,7 +13091,7 @@
                           </a:solidFill>
                           <a:latin typeface="Calibri"/>
                         </a:rPr>
-                        <a:t>-8</a:t>
+                        <a:t>47</a:t>
                       </a:r>
                     </a:p>
                   </a:txBody>
@@ -13063,7 +13202,7 @@
                 </a:solidFill>
                 <a:latin typeface="Calibri"/>
               </a:rPr>
-              <a:t>31 Ağustos'ta kadrolu personel norm kadronun 8 kişi altındadır (30.06 tabanında -2). Normun üzerinde olan tek mağaza İst. Yolu (+3) ve iş hacmi en çok büyüyen mağaza da odur.</a:t>
+              <a:t>Norm kadro EKSİK: 11 kadrolu pozisyon açık (net -8). Bu açık kalıcı kadroyla doldurulmadı; sezonluk personelle geçici olarak kapatıldı. Yani sezonluk sayısının bir kısmı sezon takviyesi değil, NORM AÇIĞININ karşılığıdır — kalıcı maliyet artırılmadı.</a:t>
             </a:r>
           </a:p>
         </p:txBody>
@@ -13921,7 +14060,7 @@
                 <a:gridCol w="1737360"/>
                 <a:gridCol w="4251960"/>
               </a:tblGrid>
-              <a:tr h="175260">
+              <a:tr h="191192">
                 <a:tc>
                   <a:txBody>
                     <a:bodyPr/>
@@ -14015,7 +14154,7 @@
                   </a:tcPr>
                 </a:tc>
               </a:tr>
-              <a:tr h="175260">
+              <a:tr h="191192">
                 <a:tc>
                   <a:txBody>
                     <a:bodyPr/>
@@ -14109,7 +14248,7 @@
                   </a:tcPr>
                 </a:tc>
               </a:tr>
-              <a:tr h="175260">
+              <a:tr h="191192">
                 <a:tc>
                   <a:txBody>
                     <a:bodyPr/>
@@ -14203,7 +14342,7 @@
                   </a:tcPr>
                 </a:tc>
               </a:tr>
-              <a:tr h="175260">
+              <a:tr h="191192">
                 <a:tc>
                   <a:txBody>
                     <a:bodyPr/>
@@ -14297,7 +14436,7 @@
                   </a:tcPr>
                 </a:tc>
               </a:tr>
-              <a:tr h="175260">
+              <a:tr h="191192">
                 <a:tc>
                   <a:txBody>
                     <a:bodyPr/>
@@ -14391,7 +14530,7 @@
                   </a:tcPr>
                 </a:tc>
               </a:tr>
-              <a:tr h="175260">
+              <a:tr h="191192">
                 <a:tc>
                   <a:txBody>
                     <a:bodyPr/>
@@ -14485,7 +14624,7 @@
                   </a:tcPr>
                 </a:tc>
               </a:tr>
-              <a:tr h="175260">
+              <a:tr h="191192">
                 <a:tc>
                   <a:txBody>
                     <a:bodyPr/>
@@ -14579,7 +14718,7 @@
                   </a:tcPr>
                 </a:tc>
               </a:tr>
-              <a:tr h="175260">
+              <a:tr h="191192">
                 <a:tc>
                   <a:txBody>
                     <a:bodyPr/>
@@ -14673,7 +14812,7 @@
                   </a:tcPr>
                 </a:tc>
               </a:tr>
-              <a:tr h="175260">
+              <a:tr h="191192">
                 <a:tc>
                   <a:txBody>
                     <a:bodyPr/>
@@ -14767,7 +14906,7 @@
                   </a:tcPr>
                 </a:tc>
               </a:tr>
-              <a:tr h="175260">
+              <a:tr h="191192">
                 <a:tc>
                   <a:txBody>
                     <a:bodyPr/>
@@ -14861,7 +15000,7 @@
                   </a:tcPr>
                 </a:tc>
               </a:tr>
-              <a:tr h="175260">
+              <a:tr h="191200">
                 <a:tc>
                   <a:txBody>
                     <a:bodyPr/>
@@ -14951,100 +15090,6 @@
                   <a:tcPr>
                     <a:solidFill>
                       <a:srgbClr val="FAFAFA"/>
-                    </a:solidFill>
-                  </a:tcPr>
-                </a:tc>
-              </a:tr>
-              <a:tr h="175260">
-                <a:tc>
-                  <a:txBody>
-                    <a:bodyPr/>
-                    <a:lstStyle/>
-                    <a:p>
-                      <a:pPr algn="l"/>
-                      <a:r>
-                        <a:rPr sz="1000" b="0">
-                          <a:solidFill>
-                            <a:srgbClr val="333333"/>
-                          </a:solidFill>
-                          <a:latin typeface="Calibri"/>
-                        </a:rPr>
-                        <a:t>   — önceki yıldan devreden</a:t>
-                      </a:r>
-                    </a:p>
-                  </a:txBody>
-                  <a:tcPr>
-                    <a:solidFill>
-                      <a:srgbClr val="FFFFFF"/>
-                    </a:solidFill>
-                  </a:tcPr>
-                </a:tc>
-                <a:tc>
-                  <a:txBody>
-                    <a:bodyPr/>
-                    <a:lstStyle/>
-                    <a:p>
-                      <a:pPr algn="ctr"/>
-                      <a:r>
-                        <a:rPr sz="1000" b="0">
-                          <a:solidFill>
-                            <a:srgbClr val="333333"/>
-                          </a:solidFill>
-                          <a:latin typeface="Calibri"/>
-                        </a:rPr>
-                        <a:t>0 kişi</a:t>
-                      </a:r>
-                    </a:p>
-                  </a:txBody>
-                  <a:tcPr>
-                    <a:solidFill>
-                      <a:srgbClr val="FFFFFF"/>
-                    </a:solidFill>
-                  </a:tcPr>
-                </a:tc>
-                <a:tc>
-                  <a:txBody>
-                    <a:bodyPr/>
-                    <a:lstStyle/>
-                    <a:p>
-                      <a:pPr algn="ctr"/>
-                      <a:r>
-                        <a:rPr sz="1000" b="1">
-                          <a:solidFill>
-                            <a:srgbClr val="333333"/>
-                          </a:solidFill>
-                          <a:latin typeface="Calibri"/>
-                        </a:rPr>
-                        <a:t>1 kişi</a:t>
-                      </a:r>
-                    </a:p>
-                  </a:txBody>
-                  <a:tcPr>
-                    <a:solidFill>
-                      <a:srgbClr val="FFFFFF"/>
-                    </a:solidFill>
-                  </a:tcPr>
-                </a:tc>
-                <a:tc>
-                  <a:txBody>
-                    <a:bodyPr/>
-                    <a:lstStyle/>
-                    <a:p>
-                      <a:pPr algn="l"/>
-                      <a:r>
-                        <a:rPr sz="1000" b="0">
-                          <a:solidFill>
-                            <a:srgbClr val="A6001A"/>
-                          </a:solidFill>
-                          <a:latin typeface="Calibri"/>
-                        </a:rPr>
-                        <a:t>2025 alımı, hâlâ sezonluk</a:t>
-                      </a:r>
-                    </a:p>
-                  </a:txBody>
-                  <a:tcPr>
-                    <a:solidFill>
-                      <a:srgbClr val="FFFFFF"/>
                     </a:solidFill>
                   </a:tcPr>
                 </a:tc>

--- a/briefings/sezon-kadro-20260902/sunum-kadro-sezon2026.pptx
+++ b/briefings/sezon-kadro-20260902/sunum-kadro-sezon2026.pptx
@@ -375,7 +375,7 @@
                   <c:v>574.7176999999999</c:v>
                 </c:pt>
                 <c:pt idx="1">
-                  <c:v>71.83742911999592</c:v>
+                  <c:v>71.83742911999343</c:v>
                 </c:pt>
                 <c:pt idx="2">
                   <c:v>143</c:v>
@@ -430,7 +430,7 @@
                   <c:v>775.19155</c:v>
                 </c:pt>
                 <c:pt idx="1">
-                  <c:v>122.60138084999527</c:v>
+                  <c:v>122.60138084999475</c:v>
                 </c:pt>
                 <c:pt idx="2">
                   <c:v>160</c:v>
@@ -1392,13 +1392,13 @@
                 <c:formatCode>General</c:formatCode>
                 <c:ptCount val="3"/>
                 <c:pt idx="0">
-                  <c:v>57.55862375816649</c:v>
+                  <c:v>57.5586237581637</c:v>
                 </c:pt>
                 <c:pt idx="1">
-                  <c:v>96.12850541159426</c:v>
+                  <c:v>96.12850541161808</c:v>
                 </c:pt>
                 <c:pt idx="2">
-                  <c:v>62.26752661004473</c:v>
+                  <c:v>62.26752661004522</c:v>
                 </c:pt>
               </c:numCache>
             </c:numRef>
@@ -6643,7 +6643,7 @@
                           </a:solidFill>
                           <a:latin typeface="Calibri"/>
                         </a:rPr>
-                        <a:t>Akademi</a:t>
+                        <a:t>Şura</a:t>
                       </a:r>
                     </a:p>
                   </a:txBody>
@@ -6666,7 +6666,7 @@
                           </a:solidFill>
                           <a:latin typeface="Calibri"/>
                         </a:rPr>
-                        <a:t>+1</a:t>
+                        <a:t>—</a:t>
                       </a:r>
                     </a:p>
                   </a:txBody>
@@ -6689,7 +6689,7 @@
                           </a:solidFill>
                           <a:latin typeface="Calibri"/>
                         </a:rPr>
-                        <a:t>0</a:t>
+                        <a:t>—</a:t>
                       </a:r>
                     </a:p>
                   </a:txBody>
@@ -6712,7 +6712,7 @@
                           </a:solidFill>
                           <a:latin typeface="Calibri"/>
                         </a:rPr>
-                        <a:t>+1</a:t>
+                        <a:t>—</a:t>
                       </a:r>
                     </a:p>
                   </a:txBody>
@@ -6735,7 +6735,7 @@
                           </a:solidFill>
                           <a:latin typeface="Calibri"/>
                         </a:rPr>
-                        <a:t>0</a:t>
+                        <a:t>—</a:t>
                       </a:r>
                     </a:p>
                   </a:txBody>
@@ -6758,7 +6758,7 @@
                           </a:solidFill>
                           <a:latin typeface="Calibri"/>
                         </a:rPr>
-                        <a:t>—</a:t>
+                        <a:t>+2</a:t>
                       </a:r>
                     </a:p>
                   </a:txBody>
@@ -6969,7 +6969,7 @@
                           </a:solidFill>
                           <a:latin typeface="Calibri"/>
                         </a:rPr>
-                        <a:t>Şura</a:t>
+                        <a:t>Akademi</a:t>
                       </a:r>
                     </a:p>
                   </a:txBody>
@@ -6992,99 +6992,99 @@
                           </a:solidFill>
                           <a:latin typeface="Calibri"/>
                         </a:rPr>
+                        <a:t>+1</a:t>
+                      </a:r>
+                    </a:p>
+                  </a:txBody>
+                  <a:tcPr>
+                    <a:solidFill>
+                      <a:srgbClr val="FFFFFF"/>
+                    </a:solidFill>
+                  </a:tcPr>
+                </a:tc>
+                <a:tc>
+                  <a:txBody>
+                    <a:bodyPr/>
+                    <a:lstStyle/>
+                    <a:p>
+                      <a:pPr algn="ctr"/>
+                      <a:r>
+                        <a:rPr sz="1050" b="0">
+                          <a:solidFill>
+                            <a:srgbClr val="333333"/>
+                          </a:solidFill>
+                          <a:latin typeface="Calibri"/>
+                        </a:rPr>
+                        <a:t>0</a:t>
+                      </a:r>
+                    </a:p>
+                  </a:txBody>
+                  <a:tcPr>
+                    <a:solidFill>
+                      <a:srgbClr val="FFFFFF"/>
+                    </a:solidFill>
+                  </a:tcPr>
+                </a:tc>
+                <a:tc>
+                  <a:txBody>
+                    <a:bodyPr/>
+                    <a:lstStyle/>
+                    <a:p>
+                      <a:pPr algn="ctr"/>
+                      <a:r>
+                        <a:rPr sz="1050" b="0">
+                          <a:solidFill>
+                            <a:srgbClr val="333333"/>
+                          </a:solidFill>
+                          <a:latin typeface="Calibri"/>
+                        </a:rPr>
+                        <a:t>+1</a:t>
+                      </a:r>
+                    </a:p>
+                  </a:txBody>
+                  <a:tcPr>
+                    <a:solidFill>
+                      <a:srgbClr val="FFFFFF"/>
+                    </a:solidFill>
+                  </a:tcPr>
+                </a:tc>
+                <a:tc>
+                  <a:txBody>
+                    <a:bodyPr/>
+                    <a:lstStyle/>
+                    <a:p>
+                      <a:pPr algn="ctr"/>
+                      <a:r>
+                        <a:rPr sz="1050" b="0">
+                          <a:solidFill>
+                            <a:srgbClr val="333333"/>
+                          </a:solidFill>
+                          <a:latin typeface="Calibri"/>
+                        </a:rPr>
+                        <a:t>0</a:t>
+                      </a:r>
+                    </a:p>
+                  </a:txBody>
+                  <a:tcPr>
+                    <a:solidFill>
+                      <a:srgbClr val="FFFFFF"/>
+                    </a:solidFill>
+                  </a:tcPr>
+                </a:tc>
+                <a:tc>
+                  <a:txBody>
+                    <a:bodyPr/>
+                    <a:lstStyle/>
+                    <a:p>
+                      <a:pPr algn="ctr"/>
+                      <a:r>
+                        <a:rPr sz="1050" b="0">
+                          <a:solidFill>
+                            <a:srgbClr val="333333"/>
+                          </a:solidFill>
+                          <a:latin typeface="Calibri"/>
+                        </a:rPr>
                         <a:t>—</a:t>
-                      </a:r>
-                    </a:p>
-                  </a:txBody>
-                  <a:tcPr>
-                    <a:solidFill>
-                      <a:srgbClr val="FFFFFF"/>
-                    </a:solidFill>
-                  </a:tcPr>
-                </a:tc>
-                <a:tc>
-                  <a:txBody>
-                    <a:bodyPr/>
-                    <a:lstStyle/>
-                    <a:p>
-                      <a:pPr algn="ctr"/>
-                      <a:r>
-                        <a:rPr sz="1050" b="0">
-                          <a:solidFill>
-                            <a:srgbClr val="333333"/>
-                          </a:solidFill>
-                          <a:latin typeface="Calibri"/>
-                        </a:rPr>
-                        <a:t>—</a:t>
-                      </a:r>
-                    </a:p>
-                  </a:txBody>
-                  <a:tcPr>
-                    <a:solidFill>
-                      <a:srgbClr val="FFFFFF"/>
-                    </a:solidFill>
-                  </a:tcPr>
-                </a:tc>
-                <a:tc>
-                  <a:txBody>
-                    <a:bodyPr/>
-                    <a:lstStyle/>
-                    <a:p>
-                      <a:pPr algn="ctr"/>
-                      <a:r>
-                        <a:rPr sz="1050" b="0">
-                          <a:solidFill>
-                            <a:srgbClr val="333333"/>
-                          </a:solidFill>
-                          <a:latin typeface="Calibri"/>
-                        </a:rPr>
-                        <a:t>—</a:t>
-                      </a:r>
-                    </a:p>
-                  </a:txBody>
-                  <a:tcPr>
-                    <a:solidFill>
-                      <a:srgbClr val="FFFFFF"/>
-                    </a:solidFill>
-                  </a:tcPr>
-                </a:tc>
-                <a:tc>
-                  <a:txBody>
-                    <a:bodyPr/>
-                    <a:lstStyle/>
-                    <a:p>
-                      <a:pPr algn="ctr"/>
-                      <a:r>
-                        <a:rPr sz="1050" b="0">
-                          <a:solidFill>
-                            <a:srgbClr val="333333"/>
-                          </a:solidFill>
-                          <a:latin typeface="Calibri"/>
-                        </a:rPr>
-                        <a:t>—</a:t>
-                      </a:r>
-                    </a:p>
-                  </a:txBody>
-                  <a:tcPr>
-                    <a:solidFill>
-                      <a:srgbClr val="FFFFFF"/>
-                    </a:solidFill>
-                  </a:tcPr>
-                </a:tc>
-                <a:tc>
-                  <a:txBody>
-                    <a:bodyPr/>
-                    <a:lstStyle/>
-                    <a:p>
-                      <a:pPr algn="ctr"/>
-                      <a:r>
-                        <a:rPr sz="1050" b="0">
-                          <a:solidFill>
-                            <a:srgbClr val="333333"/>
-                          </a:solidFill>
-                          <a:latin typeface="Calibri"/>
-                        </a:rPr>
-                        <a:t>+2</a:t>
                       </a:r>
                     </a:p>
                   </a:txBody>
@@ -7295,7 +7295,7 @@
                           </a:solidFill>
                           <a:latin typeface="Calibri"/>
                         </a:rPr>
-                        <a:t>Kültür</a:t>
+                        <a:t>Oyuncak</a:t>
                       </a:r>
                     </a:p>
                   </a:txBody>
@@ -7341,7 +7341,7 @@
                           </a:solidFill>
                           <a:latin typeface="Calibri"/>
                         </a:rPr>
-                        <a:t>+1</a:t>
+                        <a:t>0</a:t>
                       </a:r>
                     </a:p>
                   </a:txBody>
@@ -7364,7 +7364,7 @@
                           </a:solidFill>
                           <a:latin typeface="Calibri"/>
                         </a:rPr>
-                        <a:t>-1</a:t>
+                        <a:t>0</a:t>
                       </a:r>
                     </a:p>
                   </a:txBody>
@@ -7387,7 +7387,7 @@
                           </a:solidFill>
                           <a:latin typeface="Calibri"/>
                         </a:rPr>
-                        <a:t>0</a:t>
+                        <a:t>—</a:t>
                       </a:r>
                     </a:p>
                   </a:txBody>
@@ -7458,7 +7458,7 @@
                           </a:solidFill>
                           <a:latin typeface="Calibri"/>
                         </a:rPr>
-                        <a:t>Oyuncak</a:t>
+                        <a:t>Kültür</a:t>
                       </a:r>
                     </a:p>
                   </a:txBody>
@@ -7504,53 +7504,53 @@
                           </a:solidFill>
                           <a:latin typeface="Calibri"/>
                         </a:rPr>
+                        <a:t>+1</a:t>
+                      </a:r>
+                    </a:p>
+                  </a:txBody>
+                  <a:tcPr>
+                    <a:solidFill>
+                      <a:srgbClr val="F2F2F2"/>
+                    </a:solidFill>
+                  </a:tcPr>
+                </a:tc>
+                <a:tc>
+                  <a:txBody>
+                    <a:bodyPr/>
+                    <a:lstStyle/>
+                    <a:p>
+                      <a:pPr algn="ctr"/>
+                      <a:r>
+                        <a:rPr sz="1050" b="0">
+                          <a:solidFill>
+                            <a:srgbClr val="333333"/>
+                          </a:solidFill>
+                          <a:latin typeface="Calibri"/>
+                        </a:rPr>
+                        <a:t>-1</a:t>
+                      </a:r>
+                    </a:p>
+                  </a:txBody>
+                  <a:tcPr>
+                    <a:solidFill>
+                      <a:srgbClr val="F2F2F2"/>
+                    </a:solidFill>
+                  </a:tcPr>
+                </a:tc>
+                <a:tc>
+                  <a:txBody>
+                    <a:bodyPr/>
+                    <a:lstStyle/>
+                    <a:p>
+                      <a:pPr algn="ctr"/>
+                      <a:r>
+                        <a:rPr sz="1050" b="0">
+                          <a:solidFill>
+                            <a:srgbClr val="333333"/>
+                          </a:solidFill>
+                          <a:latin typeface="Calibri"/>
+                        </a:rPr>
                         <a:t>0</a:t>
-                      </a:r>
-                    </a:p>
-                  </a:txBody>
-                  <a:tcPr>
-                    <a:solidFill>
-                      <a:srgbClr val="F2F2F2"/>
-                    </a:solidFill>
-                  </a:tcPr>
-                </a:tc>
-                <a:tc>
-                  <a:txBody>
-                    <a:bodyPr/>
-                    <a:lstStyle/>
-                    <a:p>
-                      <a:pPr algn="ctr"/>
-                      <a:r>
-                        <a:rPr sz="1050" b="0">
-                          <a:solidFill>
-                            <a:srgbClr val="333333"/>
-                          </a:solidFill>
-                          <a:latin typeface="Calibri"/>
-                        </a:rPr>
-                        <a:t>0</a:t>
-                      </a:r>
-                    </a:p>
-                  </a:txBody>
-                  <a:tcPr>
-                    <a:solidFill>
-                      <a:srgbClr val="F2F2F2"/>
-                    </a:solidFill>
-                  </a:tcPr>
-                </a:tc>
-                <a:tc>
-                  <a:txBody>
-                    <a:bodyPr/>
-                    <a:lstStyle/>
-                    <a:p>
-                      <a:pPr algn="ctr"/>
-                      <a:r>
-                        <a:rPr sz="1050" b="0">
-                          <a:solidFill>
-                            <a:srgbClr val="333333"/>
-                          </a:solidFill>
-                          <a:latin typeface="Calibri"/>
-                        </a:rPr>
-                        <a:t>—</a:t>
                       </a:r>
                     </a:p>
                   </a:txBody>
@@ -7621,7 +7621,7 @@
                           </a:solidFill>
                           <a:latin typeface="Calibri"/>
                         </a:rPr>
-                        <a:t>İdari İşler</a:t>
+                        <a:t>Mal Kabul</a:t>
                       </a:r>
                     </a:p>
                   </a:txBody>
@@ -7667,6 +7667,29 @@
                           </a:solidFill>
                           <a:latin typeface="Calibri"/>
                         </a:rPr>
+                        <a:t>0</a:t>
+                      </a:r>
+                    </a:p>
+                  </a:txBody>
+                  <a:tcPr>
+                    <a:solidFill>
+                      <a:srgbClr val="FFFFFF"/>
+                    </a:solidFill>
+                  </a:tcPr>
+                </a:tc>
+                <a:tc>
+                  <a:txBody>
+                    <a:bodyPr/>
+                    <a:lstStyle/>
+                    <a:p>
+                      <a:pPr algn="ctr"/>
+                      <a:r>
+                        <a:rPr sz="1050" b="0">
+                          <a:solidFill>
+                            <a:srgbClr val="333333"/>
+                          </a:solidFill>
+                          <a:latin typeface="Calibri"/>
+                        </a:rPr>
                         <a:t>-1</a:t>
                       </a:r>
                     </a:p>
@@ -7691,29 +7714,6 @@
                           <a:latin typeface="Calibri"/>
                         </a:rPr>
                         <a:t>0</a:t>
-                      </a:r>
-                    </a:p>
-                  </a:txBody>
-                  <a:tcPr>
-                    <a:solidFill>
-                      <a:srgbClr val="FFFFFF"/>
-                    </a:solidFill>
-                  </a:tcPr>
-                </a:tc>
-                <a:tc>
-                  <a:txBody>
-                    <a:bodyPr/>
-                    <a:lstStyle/>
-                    <a:p>
-                      <a:pPr algn="ctr"/>
-                      <a:r>
-                        <a:rPr sz="1050" b="0">
-                          <a:solidFill>
-                            <a:srgbClr val="333333"/>
-                          </a:solidFill>
-                          <a:latin typeface="Calibri"/>
-                        </a:rPr>
-                        <a:t>—</a:t>
                       </a:r>
                     </a:p>
                   </a:txBody>
@@ -7947,7 +7947,7 @@
                           </a:solidFill>
                           <a:latin typeface="Calibri"/>
                         </a:rPr>
-                        <a:t>Mal Kabul</a:t>
+                        <a:t>İdari İşler</a:t>
                       </a:r>
                     </a:p>
                   </a:txBody>
@@ -7993,6 +7993,29 @@
                           </a:solidFill>
                           <a:latin typeface="Calibri"/>
                         </a:rPr>
+                        <a:t>-1</a:t>
+                      </a:r>
+                    </a:p>
+                  </a:txBody>
+                  <a:tcPr>
+                    <a:solidFill>
+                      <a:srgbClr val="FFFFFF"/>
+                    </a:solidFill>
+                  </a:tcPr>
+                </a:tc>
+                <a:tc>
+                  <a:txBody>
+                    <a:bodyPr/>
+                    <a:lstStyle/>
+                    <a:p>
+                      <a:pPr algn="ctr"/>
+                      <a:r>
+                        <a:rPr sz="1050" b="0">
+                          <a:solidFill>
+                            <a:srgbClr val="333333"/>
+                          </a:solidFill>
+                          <a:latin typeface="Calibri"/>
+                        </a:rPr>
                         <a:t>0</a:t>
                       </a:r>
                     </a:p>
@@ -8016,30 +8039,7 @@
                           </a:solidFill>
                           <a:latin typeface="Calibri"/>
                         </a:rPr>
-                        <a:t>-1</a:t>
-                      </a:r>
-                    </a:p>
-                  </a:txBody>
-                  <a:tcPr>
-                    <a:solidFill>
-                      <a:srgbClr val="FFFFFF"/>
-                    </a:solidFill>
-                  </a:tcPr>
-                </a:tc>
-                <a:tc>
-                  <a:txBody>
-                    <a:bodyPr/>
-                    <a:lstStyle/>
-                    <a:p>
-                      <a:pPr algn="ctr"/>
-                      <a:r>
-                        <a:rPr sz="1050" b="0">
-                          <a:solidFill>
-                            <a:srgbClr val="333333"/>
-                          </a:solidFill>
-                          <a:latin typeface="Calibri"/>
-                        </a:rPr>
-                        <a:t>0</a:t>
+                        <a:t>—</a:t>
                       </a:r>
                     </a:p>
                   </a:txBody>
@@ -8110,7 +8110,7 @@
                           </a:solidFill>
                           <a:latin typeface="Calibri"/>
                         </a:rPr>
-                        <a:t>Muhasebe</a:t>
+                        <a:t>Çocuk</a:t>
                       </a:r>
                     </a:p>
                   </a:txBody>
@@ -8133,7 +8133,7 @@
                           </a:solidFill>
                           <a:latin typeface="Calibri"/>
                         </a:rPr>
-                        <a:t>—</a:t>
+                        <a:t>0</a:t>
                       </a:r>
                     </a:p>
                   </a:txBody>
@@ -8156,7 +8156,7 @@
                           </a:solidFill>
                           <a:latin typeface="Calibri"/>
                         </a:rPr>
-                        <a:t>—</a:t>
+                        <a:t>0</a:t>
                       </a:r>
                     </a:p>
                   </a:txBody>
@@ -8179,7 +8179,7 @@
                           </a:solidFill>
                           <a:latin typeface="Calibri"/>
                         </a:rPr>
-                        <a:t>—</a:t>
+                        <a:t>+1</a:t>
                       </a:r>
                     </a:p>
                   </a:txBody>
@@ -8202,7 +8202,7 @@
                           </a:solidFill>
                           <a:latin typeface="Calibri"/>
                         </a:rPr>
-                        <a:t>-1</a:t>
+                        <a:t>-2</a:t>
                       </a:r>
                     </a:p>
                   </a:txBody>
@@ -12839,7 +12839,7 @@
         </p:nvGraphicFramePr>
         <p:xfrm>
           <a:off x="548640" y="3246120"/>
-          <a:ext cx="10561320" cy="1371600"/>
+          <a:ext cx="10515599" cy="1627632"/>
         </p:xfrm>
         <a:graphic>
           <a:graphicData uri="http://schemas.openxmlformats.org/drawingml/2006/table">
@@ -12848,18 +12848,18 @@
                 <a:tableStyleId>{5C22544A-7EE6-4342-B048-85BDC9FD1C3A}</a:tableStyleId>
               </a:tblPr>
               <a:tblGrid>
-                <a:gridCol w="1371600"/>
-                <a:gridCol w="1024128"/>
-                <a:gridCol w="1078992"/>
-                <a:gridCol w="822960"/>
-                <a:gridCol w="1078992"/>
-                <a:gridCol w="1133856"/>
-                <a:gridCol w="822960"/>
-                <a:gridCol w="1170432"/>
-                <a:gridCol w="1234440"/>
-                <a:gridCol w="822960"/>
+                <a:gridCol w="2148840"/>
+                <a:gridCol w="932688"/>
+                <a:gridCol w="987552"/>
+                <a:gridCol w="749808"/>
+                <a:gridCol w="960120"/>
+                <a:gridCol w="1042415"/>
+                <a:gridCol w="749808"/>
+                <a:gridCol w="1051560"/>
+                <a:gridCol w="1143000"/>
+                <a:gridCol w="749808"/>
               </a:tblGrid>
-              <a:tr h="365760">
+              <a:tr h="347472">
                 <a:tc>
                   <a:txBody>
                     <a:bodyPr/>
@@ -12867,13 +12867,13 @@
                     <a:p>
                       <a:pPr algn="l"/>
                       <a:r>
-                        <a:rPr sz="800" b="1">
+                        <a:rPr sz="750" b="1">
                           <a:solidFill>
                             <a:srgbClr val="FFFFFF"/>
                           </a:solidFill>
                           <a:latin typeface="Calibri"/>
                         </a:rPr>
-                        <a:t>Mağaza</a:t>
+                        <a:t>Mağaza / Grup</a:t>
                       </a:r>
                     </a:p>
                   </a:txBody>
@@ -12890,7 +12890,7 @@
                     <a:p>
                       <a:pPr algn="ctr"/>
                       <a:r>
-                        <a:rPr sz="800" b="1">
+                        <a:rPr sz="750" b="1">
                           <a:solidFill>
                             <a:srgbClr val="FFFFFF"/>
                           </a:solidFill>
@@ -12902,7 +12902,7 @@
                     <a:p>
                       <a:pPr algn="ctr"/>
                       <a:r>
-                        <a:rPr sz="800" b="1">
+                        <a:rPr sz="750" b="1">
                           <a:solidFill>
                             <a:srgbClr val="FFFFFF"/>
                           </a:solidFill>
@@ -12925,7 +12925,7 @@
                     <a:p>
                       <a:pPr algn="ctr"/>
                       <a:r>
-                        <a:rPr sz="800" b="1">
+                        <a:rPr sz="750" b="1">
                           <a:solidFill>
                             <a:srgbClr val="FFFFFF"/>
                           </a:solidFill>
@@ -12937,7 +12937,7 @@
                     <a:p>
                       <a:pPr algn="ctr"/>
                       <a:r>
-                        <a:rPr sz="800" b="1">
+                        <a:rPr sz="750" b="1">
                           <a:solidFill>
                             <a:srgbClr val="FFFFFF"/>
                           </a:solidFill>
@@ -12960,7 +12960,7 @@
                     <a:p>
                       <a:pPr algn="ctr"/>
                       <a:r>
-                        <a:rPr sz="800" b="1">
+                        <a:rPr sz="750" b="1">
                           <a:solidFill>
                             <a:srgbClr val="FFFFFF"/>
                           </a:solidFill>
@@ -12983,7 +12983,7 @@
                     <a:p>
                       <a:pPr algn="ctr"/>
                       <a:r>
-                        <a:rPr sz="800" b="1">
+                        <a:rPr sz="750" b="1">
                           <a:solidFill>
                             <a:srgbClr val="FFFFFF"/>
                           </a:solidFill>
@@ -12995,7 +12995,7 @@
                     <a:p>
                       <a:pPr algn="ctr"/>
                       <a:r>
-                        <a:rPr sz="800" b="1">
+                        <a:rPr sz="750" b="1">
                           <a:solidFill>
                             <a:srgbClr val="FFFFFF"/>
                           </a:solidFill>
@@ -13018,7 +13018,7 @@
                     <a:p>
                       <a:pPr algn="ctr"/>
                       <a:r>
-                        <a:rPr sz="800" b="1">
+                        <a:rPr sz="750" b="1">
                           <a:solidFill>
                             <a:srgbClr val="FFFFFF"/>
                           </a:solidFill>
@@ -13030,7 +13030,7 @@
                     <a:p>
                       <a:pPr algn="ctr"/>
                       <a:r>
-                        <a:rPr sz="800" b="1">
+                        <a:rPr sz="750" b="1">
                           <a:solidFill>
                             <a:srgbClr val="FFFFFF"/>
                           </a:solidFill>
@@ -13053,7 +13053,7 @@
                     <a:p>
                       <a:pPr algn="ctr"/>
                       <a:r>
-                        <a:rPr sz="800" b="1">
+                        <a:rPr sz="750" b="1">
                           <a:solidFill>
                             <a:srgbClr val="FFFFFF"/>
                           </a:solidFill>
@@ -13076,7 +13076,7 @@
                     <a:p>
                       <a:pPr algn="ctr"/>
                       <a:r>
-                        <a:rPr sz="800" b="1">
+                        <a:rPr sz="750" b="1">
                           <a:solidFill>
                             <a:srgbClr val="FFFFFF"/>
                           </a:solidFill>
@@ -13088,7 +13088,7 @@
                     <a:p>
                       <a:pPr algn="ctr"/>
                       <a:r>
-                        <a:rPr sz="800" b="1">
+                        <a:rPr sz="750" b="1">
                           <a:solidFill>
                             <a:srgbClr val="FFFFFF"/>
                           </a:solidFill>
@@ -13111,7 +13111,7 @@
                     <a:p>
                       <a:pPr algn="ctr"/>
                       <a:r>
-                        <a:rPr sz="800" b="1">
+                        <a:rPr sz="750" b="1">
                           <a:solidFill>
                             <a:srgbClr val="FFFFFF"/>
                           </a:solidFill>
@@ -13123,7 +13123,7 @@
                     <a:p>
                       <a:pPr algn="ctr"/>
                       <a:r>
-                        <a:rPr sz="800" b="1">
+                        <a:rPr sz="750" b="1">
                           <a:solidFill>
                             <a:srgbClr val="FFFFFF"/>
                           </a:solidFill>
@@ -13146,7 +13146,7 @@
                     <a:p>
                       <a:pPr algn="ctr"/>
                       <a:r>
-                        <a:rPr sz="800" b="1">
+                        <a:rPr sz="750" b="1">
                           <a:solidFill>
                             <a:srgbClr val="FFFFFF"/>
                           </a:solidFill>
@@ -13163,7 +13163,7 @@
                   </a:tcPr>
                 </a:tc>
               </a:tr>
-              <a:tr h="201168">
+              <a:tr h="182880">
                 <a:tc>
                   <a:txBody>
                     <a:bodyPr/>
@@ -13171,7 +13171,7 @@
                     <a:p>
                       <a:pPr algn="l"/>
                       <a:r>
-                        <a:rPr sz="950" b="0">
+                        <a:rPr sz="900" b="0">
                           <a:solidFill>
                             <a:srgbClr val="333333"/>
                           </a:solidFill>
@@ -13194,7 +13194,7 @@
                     <a:p>
                       <a:pPr algn="ctr"/>
                       <a:r>
-                        <a:rPr sz="950" b="0">
+                        <a:rPr sz="900" b="0">
                           <a:solidFill>
                             <a:srgbClr val="333333"/>
                           </a:solidFill>
@@ -13217,13 +13217,13 @@
                     <a:p>
                       <a:pPr algn="ctr"/>
                       <a:r>
-                        <a:rPr sz="950" b="0">
-                          <a:solidFill>
-                            <a:srgbClr val="333333"/>
-                          </a:solidFill>
-                          <a:latin typeface="Calibri"/>
-                        </a:rPr>
-                        <a:t>41</a:t>
+                        <a:rPr sz="900" b="0">
+                          <a:solidFill>
+                            <a:srgbClr val="333333"/>
+                          </a:solidFill>
+                          <a:latin typeface="Calibri"/>
+                        </a:rPr>
+                        <a:t>40</a:t>
                       </a:r>
                     </a:p>
                   </a:txBody>
@@ -13240,12 +13240,81 @@
                     <a:p>
                       <a:pPr algn="ctr"/>
                       <a:r>
-                        <a:rPr sz="950" b="1">
+                        <a:rPr sz="900" b="1">
                           <a:solidFill>
                             <a:srgbClr val="A6001A"/>
                           </a:solidFill>
                           <a:latin typeface="Calibri"/>
                         </a:rPr>
+                        <a:t>-5</a:t>
+                      </a:r>
+                    </a:p>
+                  </a:txBody>
+                  <a:tcPr>
+                    <a:solidFill>
+                      <a:srgbClr val="FFFFFF"/>
+                    </a:solidFill>
+                  </a:tcPr>
+                </a:tc>
+                <a:tc>
+                  <a:txBody>
+                    <a:bodyPr/>
+                    <a:lstStyle/>
+                    <a:p>
+                      <a:pPr algn="ctr"/>
+                      <a:r>
+                        <a:rPr sz="900" b="0">
+                          <a:solidFill>
+                            <a:srgbClr val="333333"/>
+                          </a:solidFill>
+                          <a:latin typeface="Calibri"/>
+                        </a:rPr>
+                        <a:t>17</a:t>
+                      </a:r>
+                    </a:p>
+                  </a:txBody>
+                  <a:tcPr>
+                    <a:solidFill>
+                      <a:srgbClr val="FFFFFF"/>
+                    </a:solidFill>
+                  </a:tcPr>
+                </a:tc>
+                <a:tc>
+                  <a:txBody>
+                    <a:bodyPr/>
+                    <a:lstStyle/>
+                    <a:p>
+                      <a:pPr algn="ctr"/>
+                      <a:r>
+                        <a:rPr sz="900" b="0">
+                          <a:solidFill>
+                            <a:srgbClr val="333333"/>
+                          </a:solidFill>
+                          <a:latin typeface="Calibri"/>
+                        </a:rPr>
+                        <a:t>13</a:t>
+                      </a:r>
+                    </a:p>
+                  </a:txBody>
+                  <a:tcPr>
+                    <a:solidFill>
+                      <a:srgbClr val="FFFFFF"/>
+                    </a:solidFill>
+                  </a:tcPr>
+                </a:tc>
+                <a:tc>
+                  <a:txBody>
+                    <a:bodyPr/>
+                    <a:lstStyle/>
+                    <a:p>
+                      <a:pPr algn="ctr"/>
+                      <a:r>
+                        <a:rPr sz="900" b="1">
+                          <a:solidFill>
+                            <a:srgbClr val="A6001A"/>
+                          </a:solidFill>
+                          <a:latin typeface="Calibri"/>
+                        </a:rPr>
                         <a:t>-4</a:t>
                       </a:r>
                     </a:p>
@@ -13263,13 +13332,316 @@
                     <a:p>
                       <a:pPr algn="ctr"/>
                       <a:r>
-                        <a:rPr sz="950" b="0">
-                          <a:solidFill>
-                            <a:srgbClr val="333333"/>
-                          </a:solidFill>
-                          <a:latin typeface="Calibri"/>
-                        </a:rPr>
-                        <a:t>17</a:t>
+                        <a:rPr sz="900" b="0">
+                          <a:solidFill>
+                            <a:srgbClr val="333333"/>
+                          </a:solidFill>
+                          <a:latin typeface="Calibri"/>
+                        </a:rPr>
+                        <a:t>62</a:t>
+                      </a:r>
+                    </a:p>
+                  </a:txBody>
+                  <a:tcPr>
+                    <a:solidFill>
+                      <a:srgbClr val="FDF2F3"/>
+                    </a:solidFill>
+                  </a:tcPr>
+                </a:tc>
+                <a:tc>
+                  <a:txBody>
+                    <a:bodyPr/>
+                    <a:lstStyle/>
+                    <a:p>
+                      <a:pPr algn="ctr"/>
+                      <a:r>
+                        <a:rPr sz="900" b="0">
+                          <a:solidFill>
+                            <a:srgbClr val="333333"/>
+                          </a:solidFill>
+                          <a:latin typeface="Calibri"/>
+                        </a:rPr>
+                        <a:t>53</a:t>
+                      </a:r>
+                    </a:p>
+                  </a:txBody>
+                  <a:tcPr>
+                    <a:solidFill>
+                      <a:srgbClr val="FDF2F3"/>
+                    </a:solidFill>
+                  </a:tcPr>
+                </a:tc>
+                <a:tc>
+                  <a:txBody>
+                    <a:bodyPr/>
+                    <a:lstStyle/>
+                    <a:p>
+                      <a:pPr algn="ctr"/>
+                      <a:r>
+                        <a:rPr sz="900" b="1">
+                          <a:solidFill>
+                            <a:srgbClr val="A6001A"/>
+                          </a:solidFill>
+                          <a:latin typeface="Calibri"/>
+                        </a:rPr>
+                        <a:t>-9</a:t>
+                      </a:r>
+                    </a:p>
+                  </a:txBody>
+                  <a:tcPr>
+                    <a:solidFill>
+                      <a:srgbClr val="FDF2F3"/>
+                    </a:solidFill>
+                  </a:tcPr>
+                </a:tc>
+              </a:tr>
+              <a:tr h="182880">
+                <a:tc>
+                  <a:txBody>
+                    <a:bodyPr/>
+                    <a:lstStyle/>
+                    <a:p>
+                      <a:pPr algn="l"/>
+                      <a:r>
+                        <a:rPr sz="900" b="0">
+                          <a:solidFill>
+                            <a:srgbClr val="333333"/>
+                          </a:solidFill>
+                          <a:latin typeface="Calibri"/>
+                        </a:rPr>
+                        <a:t>FSM</a:t>
+                      </a:r>
+                    </a:p>
+                  </a:txBody>
+                  <a:tcPr>
+                    <a:solidFill>
+                      <a:srgbClr val="FAFAFA"/>
+                    </a:solidFill>
+                  </a:tcPr>
+                </a:tc>
+                <a:tc>
+                  <a:txBody>
+                    <a:bodyPr/>
+                    <a:lstStyle/>
+                    <a:p>
+                      <a:pPr algn="ctr"/>
+                      <a:r>
+                        <a:rPr sz="900" b="0">
+                          <a:solidFill>
+                            <a:srgbClr val="333333"/>
+                          </a:solidFill>
+                          <a:latin typeface="Calibri"/>
+                        </a:rPr>
+                        <a:t>37</a:t>
+                      </a:r>
+                    </a:p>
+                  </a:txBody>
+                  <a:tcPr>
+                    <a:solidFill>
+                      <a:srgbClr val="FAFAFA"/>
+                    </a:solidFill>
+                  </a:tcPr>
+                </a:tc>
+                <a:tc>
+                  <a:txBody>
+                    <a:bodyPr/>
+                    <a:lstStyle/>
+                    <a:p>
+                      <a:pPr algn="ctr"/>
+                      <a:r>
+                        <a:rPr sz="900" b="0">
+                          <a:solidFill>
+                            <a:srgbClr val="333333"/>
+                          </a:solidFill>
+                          <a:latin typeface="Calibri"/>
+                        </a:rPr>
+                        <a:t>33</a:t>
+                      </a:r>
+                    </a:p>
+                  </a:txBody>
+                  <a:tcPr>
+                    <a:solidFill>
+                      <a:srgbClr val="FAFAFA"/>
+                    </a:solidFill>
+                  </a:tcPr>
+                </a:tc>
+                <a:tc>
+                  <a:txBody>
+                    <a:bodyPr/>
+                    <a:lstStyle/>
+                    <a:p>
+                      <a:pPr algn="ctr"/>
+                      <a:r>
+                        <a:rPr sz="900" b="1">
+                          <a:solidFill>
+                            <a:srgbClr val="A6001A"/>
+                          </a:solidFill>
+                          <a:latin typeface="Calibri"/>
+                        </a:rPr>
+                        <a:t>-4</a:t>
+                      </a:r>
+                    </a:p>
+                  </a:txBody>
+                  <a:tcPr>
+                    <a:solidFill>
+                      <a:srgbClr val="FAFAFA"/>
+                    </a:solidFill>
+                  </a:tcPr>
+                </a:tc>
+                <a:tc>
+                  <a:txBody>
+                    <a:bodyPr/>
+                    <a:lstStyle/>
+                    <a:p>
+                      <a:pPr algn="ctr"/>
+                      <a:r>
+                        <a:rPr sz="900" b="0">
+                          <a:solidFill>
+                            <a:srgbClr val="333333"/>
+                          </a:solidFill>
+                          <a:latin typeface="Calibri"/>
+                        </a:rPr>
+                        <a:t>10</a:t>
+                      </a:r>
+                    </a:p>
+                  </a:txBody>
+                  <a:tcPr>
+                    <a:solidFill>
+                      <a:srgbClr val="FAFAFA"/>
+                    </a:solidFill>
+                  </a:tcPr>
+                </a:tc>
+                <a:tc>
+                  <a:txBody>
+                    <a:bodyPr/>
+                    <a:lstStyle/>
+                    <a:p>
+                      <a:pPr algn="ctr"/>
+                      <a:r>
+                        <a:rPr sz="900" b="0">
+                          <a:solidFill>
+                            <a:srgbClr val="333333"/>
+                          </a:solidFill>
+                          <a:latin typeface="Calibri"/>
+                        </a:rPr>
+                        <a:t>11</a:t>
+                      </a:r>
+                    </a:p>
+                  </a:txBody>
+                  <a:tcPr>
+                    <a:solidFill>
+                      <a:srgbClr val="FAFAFA"/>
+                    </a:solidFill>
+                  </a:tcPr>
+                </a:tc>
+                <a:tc>
+                  <a:txBody>
+                    <a:bodyPr/>
+                    <a:lstStyle/>
+                    <a:p>
+                      <a:pPr algn="ctr"/>
+                      <a:r>
+                        <a:rPr sz="900" b="1">
+                          <a:solidFill>
+                            <a:srgbClr val="A6001A"/>
+                          </a:solidFill>
+                          <a:latin typeface="Calibri"/>
+                        </a:rPr>
+                        <a:t>+1</a:t>
+                      </a:r>
+                    </a:p>
+                  </a:txBody>
+                  <a:tcPr>
+                    <a:solidFill>
+                      <a:srgbClr val="FAFAFA"/>
+                    </a:solidFill>
+                  </a:tcPr>
+                </a:tc>
+                <a:tc>
+                  <a:txBody>
+                    <a:bodyPr/>
+                    <a:lstStyle/>
+                    <a:p>
+                      <a:pPr algn="ctr"/>
+                      <a:r>
+                        <a:rPr sz="900" b="0">
+                          <a:solidFill>
+                            <a:srgbClr val="333333"/>
+                          </a:solidFill>
+                          <a:latin typeface="Calibri"/>
+                        </a:rPr>
+                        <a:t>47</a:t>
+                      </a:r>
+                    </a:p>
+                  </a:txBody>
+                  <a:tcPr>
+                    <a:solidFill>
+                      <a:srgbClr val="FDF2F3"/>
+                    </a:solidFill>
+                  </a:tcPr>
+                </a:tc>
+                <a:tc>
+                  <a:txBody>
+                    <a:bodyPr/>
+                    <a:lstStyle/>
+                    <a:p>
+                      <a:pPr algn="ctr"/>
+                      <a:r>
+                        <a:rPr sz="900" b="0">
+                          <a:solidFill>
+                            <a:srgbClr val="333333"/>
+                          </a:solidFill>
+                          <a:latin typeface="Calibri"/>
+                        </a:rPr>
+                        <a:t>44</a:t>
+                      </a:r>
+                    </a:p>
+                  </a:txBody>
+                  <a:tcPr>
+                    <a:solidFill>
+                      <a:srgbClr val="FDF2F3"/>
+                    </a:solidFill>
+                  </a:tcPr>
+                </a:tc>
+                <a:tc>
+                  <a:txBody>
+                    <a:bodyPr/>
+                    <a:lstStyle/>
+                    <a:p>
+                      <a:pPr algn="ctr"/>
+                      <a:r>
+                        <a:rPr sz="900" b="1">
+                          <a:solidFill>
+                            <a:srgbClr val="A6001A"/>
+                          </a:solidFill>
+                          <a:latin typeface="Calibri"/>
+                        </a:rPr>
+                        <a:t>-3</a:t>
+                      </a:r>
+                    </a:p>
+                  </a:txBody>
+                  <a:tcPr>
+                    <a:solidFill>
+                      <a:srgbClr val="FDF2F3"/>
+                    </a:solidFill>
+                  </a:tcPr>
+                </a:tc>
+              </a:tr>
+              <a:tr h="182880">
+                <a:tc>
+                  <a:txBody>
+                    <a:bodyPr/>
+                    <a:lstStyle/>
+                    <a:p>
+                      <a:pPr algn="l"/>
+                      <a:r>
+                        <a:rPr sz="900" b="0">
+                          <a:solidFill>
+                            <a:srgbClr val="333333"/>
+                          </a:solidFill>
+                          <a:latin typeface="Calibri"/>
+                        </a:rPr>
+                        <a:t>İst. Yolu</a:t>
                       </a:r>
                     </a:p>
                   </a:txBody>
@@ -13286,13 +13658,13 @@
                     <a:p>
                       <a:pPr algn="ctr"/>
                       <a:r>
-                        <a:rPr sz="950" b="0">
-                          <a:solidFill>
-                            <a:srgbClr val="333333"/>
-                          </a:solidFill>
-                          <a:latin typeface="Calibri"/>
-                        </a:rPr>
-                        <a:t>13</a:t>
+                        <a:rPr sz="900" b="0">
+                          <a:solidFill>
+                            <a:srgbClr val="333333"/>
+                          </a:solidFill>
+                          <a:latin typeface="Calibri"/>
+                        </a:rPr>
+                        <a:t>33</a:t>
                       </a:r>
                     </a:p>
                   </a:txBody>
@@ -13309,36 +13681,360 @@
                     <a:p>
                       <a:pPr algn="ctr"/>
                       <a:r>
-                        <a:rPr sz="950" b="1">
+                        <a:rPr sz="900" b="0">
+                          <a:solidFill>
+                            <a:srgbClr val="333333"/>
+                          </a:solidFill>
+                          <a:latin typeface="Calibri"/>
+                        </a:rPr>
+                        <a:t>35</a:t>
+                      </a:r>
+                    </a:p>
+                  </a:txBody>
+                  <a:tcPr>
+                    <a:solidFill>
+                      <a:srgbClr val="FFFFFF"/>
+                    </a:solidFill>
+                  </a:tcPr>
+                </a:tc>
+                <a:tc>
+                  <a:txBody>
+                    <a:bodyPr/>
+                    <a:lstStyle/>
+                    <a:p>
+                      <a:pPr algn="ctr"/>
+                      <a:r>
+                        <a:rPr sz="900" b="1">
                           <a:solidFill>
                             <a:srgbClr val="A6001A"/>
                           </a:solidFill>
                           <a:latin typeface="Calibri"/>
                         </a:rPr>
+                        <a:t>+2</a:t>
+                      </a:r>
+                    </a:p>
+                  </a:txBody>
+                  <a:tcPr>
+                    <a:solidFill>
+                      <a:srgbClr val="FFFFFF"/>
+                    </a:solidFill>
+                  </a:tcPr>
+                </a:tc>
+                <a:tc>
+                  <a:txBody>
+                    <a:bodyPr/>
+                    <a:lstStyle/>
+                    <a:p>
+                      <a:pPr algn="ctr"/>
+                      <a:r>
+                        <a:rPr sz="900" b="0">
+                          <a:solidFill>
+                            <a:srgbClr val="333333"/>
+                          </a:solidFill>
+                          <a:latin typeface="Calibri"/>
+                        </a:rPr>
+                        <a:t>25</a:t>
+                      </a:r>
+                    </a:p>
+                  </a:txBody>
+                  <a:tcPr>
+                    <a:solidFill>
+                      <a:srgbClr val="FFFFFF"/>
+                    </a:solidFill>
+                  </a:tcPr>
+                </a:tc>
+                <a:tc>
+                  <a:txBody>
+                    <a:bodyPr/>
+                    <a:lstStyle/>
+                    <a:p>
+                      <a:pPr algn="ctr"/>
+                      <a:r>
+                        <a:rPr sz="900" b="0">
+                          <a:solidFill>
+                            <a:srgbClr val="333333"/>
+                          </a:solidFill>
+                          <a:latin typeface="Calibri"/>
+                        </a:rPr>
+                        <a:t>25</a:t>
+                      </a:r>
+                    </a:p>
+                  </a:txBody>
+                  <a:tcPr>
+                    <a:solidFill>
+                      <a:srgbClr val="FFFFFF"/>
+                    </a:solidFill>
+                  </a:tcPr>
+                </a:tc>
+                <a:tc>
+                  <a:txBody>
+                    <a:bodyPr/>
+                    <a:lstStyle/>
+                    <a:p>
+                      <a:pPr algn="ctr"/>
+                      <a:r>
+                        <a:rPr sz="900" b="1">
+                          <a:solidFill>
+                            <a:srgbClr val="A6001A"/>
+                          </a:solidFill>
+                          <a:latin typeface="Calibri"/>
+                        </a:rPr>
+                        <a:t>+0</a:t>
+                      </a:r>
+                    </a:p>
+                  </a:txBody>
+                  <a:tcPr>
+                    <a:solidFill>
+                      <a:srgbClr val="FFFFFF"/>
+                    </a:solidFill>
+                  </a:tcPr>
+                </a:tc>
+                <a:tc>
+                  <a:txBody>
+                    <a:bodyPr/>
+                    <a:lstStyle/>
+                    <a:p>
+                      <a:pPr algn="ctr"/>
+                      <a:r>
+                        <a:rPr sz="900" b="0">
+                          <a:solidFill>
+                            <a:srgbClr val="333333"/>
+                          </a:solidFill>
+                          <a:latin typeface="Calibri"/>
+                        </a:rPr>
+                        <a:t>58</a:t>
+                      </a:r>
+                    </a:p>
+                  </a:txBody>
+                  <a:tcPr>
+                    <a:solidFill>
+                      <a:srgbClr val="FDF2F3"/>
+                    </a:solidFill>
+                  </a:tcPr>
+                </a:tc>
+                <a:tc>
+                  <a:txBody>
+                    <a:bodyPr/>
+                    <a:lstStyle/>
+                    <a:p>
+                      <a:pPr algn="ctr"/>
+                      <a:r>
+                        <a:rPr sz="900" b="0">
+                          <a:solidFill>
+                            <a:srgbClr val="333333"/>
+                          </a:solidFill>
+                          <a:latin typeface="Calibri"/>
+                        </a:rPr>
+                        <a:t>60</a:t>
+                      </a:r>
+                    </a:p>
+                  </a:txBody>
+                  <a:tcPr>
+                    <a:solidFill>
+                      <a:srgbClr val="FDF2F3"/>
+                    </a:solidFill>
+                  </a:tcPr>
+                </a:tc>
+                <a:tc>
+                  <a:txBody>
+                    <a:bodyPr/>
+                    <a:lstStyle/>
+                    <a:p>
+                      <a:pPr algn="ctr"/>
+                      <a:r>
+                        <a:rPr sz="900" b="1">
+                          <a:solidFill>
+                            <a:srgbClr val="A6001A"/>
+                          </a:solidFill>
+                          <a:latin typeface="Calibri"/>
+                        </a:rPr>
+                        <a:t>+2</a:t>
+                      </a:r>
+                    </a:p>
+                  </a:txBody>
+                  <a:tcPr>
+                    <a:solidFill>
+                      <a:srgbClr val="FDF2F3"/>
+                    </a:solidFill>
+                  </a:tcPr>
+                </a:tc>
+              </a:tr>
+              <a:tr h="182880">
+                <a:tc>
+                  <a:txBody>
+                    <a:bodyPr/>
+                    <a:lstStyle/>
+                    <a:p>
+                      <a:pPr algn="l"/>
+                      <a:r>
+                        <a:rPr sz="900" b="0">
+                          <a:solidFill>
+                            <a:srgbClr val="333333"/>
+                          </a:solidFill>
+                          <a:latin typeface="Calibri"/>
+                        </a:rPr>
+                        <a:t>Heykel</a:t>
+                      </a:r>
+                    </a:p>
+                  </a:txBody>
+                  <a:tcPr>
+                    <a:solidFill>
+                      <a:srgbClr val="FAFAFA"/>
+                    </a:solidFill>
+                  </a:tcPr>
+                </a:tc>
+                <a:tc>
+                  <a:txBody>
+                    <a:bodyPr/>
+                    <a:lstStyle/>
+                    <a:p>
+                      <a:pPr algn="ctr"/>
+                      <a:r>
+                        <a:rPr sz="900" b="0">
+                          <a:solidFill>
+                            <a:srgbClr val="333333"/>
+                          </a:solidFill>
+                          <a:latin typeface="Calibri"/>
+                        </a:rPr>
+                        <a:t>30</a:t>
+                      </a:r>
+                    </a:p>
+                  </a:txBody>
+                  <a:tcPr>
+                    <a:solidFill>
+                      <a:srgbClr val="FAFAFA"/>
+                    </a:solidFill>
+                  </a:tcPr>
+                </a:tc>
+                <a:tc>
+                  <a:txBody>
+                    <a:bodyPr/>
+                    <a:lstStyle/>
+                    <a:p>
+                      <a:pPr algn="ctr"/>
+                      <a:r>
+                        <a:rPr sz="900" b="0">
+                          <a:solidFill>
+                            <a:srgbClr val="333333"/>
+                          </a:solidFill>
+                          <a:latin typeface="Calibri"/>
+                        </a:rPr>
+                        <a:t>26</a:t>
+                      </a:r>
+                    </a:p>
+                  </a:txBody>
+                  <a:tcPr>
+                    <a:solidFill>
+                      <a:srgbClr val="FAFAFA"/>
+                    </a:solidFill>
+                  </a:tcPr>
+                </a:tc>
+                <a:tc>
+                  <a:txBody>
+                    <a:bodyPr/>
+                    <a:lstStyle/>
+                    <a:p>
+                      <a:pPr algn="ctr"/>
+                      <a:r>
+                        <a:rPr sz="900" b="1">
+                          <a:solidFill>
+                            <a:srgbClr val="A6001A"/>
+                          </a:solidFill>
+                          <a:latin typeface="Calibri"/>
+                        </a:rPr>
                         <a:t>-4</a:t>
                       </a:r>
                     </a:p>
                   </a:txBody>
                   <a:tcPr>
                     <a:solidFill>
-                      <a:srgbClr val="FFFFFF"/>
-                    </a:solidFill>
-                  </a:tcPr>
-                </a:tc>
-                <a:tc>
-                  <a:txBody>
-                    <a:bodyPr/>
-                    <a:lstStyle/>
-                    <a:p>
-                      <a:pPr algn="ctr"/>
-                      <a:r>
-                        <a:rPr sz="950" b="0">
-                          <a:solidFill>
-                            <a:srgbClr val="333333"/>
-                          </a:solidFill>
-                          <a:latin typeface="Calibri"/>
-                        </a:rPr>
-                        <a:t>62</a:t>
+                      <a:srgbClr val="FAFAFA"/>
+                    </a:solidFill>
+                  </a:tcPr>
+                </a:tc>
+                <a:tc>
+                  <a:txBody>
+                    <a:bodyPr/>
+                    <a:lstStyle/>
+                    <a:p>
+                      <a:pPr algn="ctr"/>
+                      <a:r>
+                        <a:rPr sz="900" b="0">
+                          <a:solidFill>
+                            <a:srgbClr val="333333"/>
+                          </a:solidFill>
+                          <a:latin typeface="Calibri"/>
+                        </a:rPr>
+                        <a:t>20</a:t>
+                      </a:r>
+                    </a:p>
+                  </a:txBody>
+                  <a:tcPr>
+                    <a:solidFill>
+                      <a:srgbClr val="FAFAFA"/>
+                    </a:solidFill>
+                  </a:tcPr>
+                </a:tc>
+                <a:tc>
+                  <a:txBody>
+                    <a:bodyPr/>
+                    <a:lstStyle/>
+                    <a:p>
+                      <a:pPr algn="ctr"/>
+                      <a:r>
+                        <a:rPr sz="900" b="0">
+                          <a:solidFill>
+                            <a:srgbClr val="333333"/>
+                          </a:solidFill>
+                          <a:latin typeface="Calibri"/>
+                        </a:rPr>
+                        <a:t>9</a:t>
+                      </a:r>
+                    </a:p>
+                  </a:txBody>
+                  <a:tcPr>
+                    <a:solidFill>
+                      <a:srgbClr val="FAFAFA"/>
+                    </a:solidFill>
+                  </a:tcPr>
+                </a:tc>
+                <a:tc>
+                  <a:txBody>
+                    <a:bodyPr/>
+                    <a:lstStyle/>
+                    <a:p>
+                      <a:pPr algn="ctr"/>
+                      <a:r>
+                        <a:rPr sz="900" b="1">
+                          <a:solidFill>
+                            <a:srgbClr val="A6001A"/>
+                          </a:solidFill>
+                          <a:latin typeface="Calibri"/>
+                        </a:rPr>
+                        <a:t>-11</a:t>
+                      </a:r>
+                    </a:p>
+                  </a:txBody>
+                  <a:tcPr>
+                    <a:solidFill>
+                      <a:srgbClr val="FAFAFA"/>
+                    </a:solidFill>
+                  </a:tcPr>
+                </a:tc>
+                <a:tc>
+                  <a:txBody>
+                    <a:bodyPr/>
+                    <a:lstStyle/>
+                    <a:p>
+                      <a:pPr algn="ctr"/>
+                      <a:r>
+                        <a:rPr sz="900" b="0">
+                          <a:solidFill>
+                            <a:srgbClr val="333333"/>
+                          </a:solidFill>
+                          <a:latin typeface="Calibri"/>
+                        </a:rPr>
+                        <a:t>50</a:t>
                       </a:r>
                     </a:p>
                   </a:txBody>
@@ -13355,13 +14051,13 @@
                     <a:p>
                       <a:pPr algn="ctr"/>
                       <a:r>
-                        <a:rPr sz="950" b="0">
-                          <a:solidFill>
-                            <a:srgbClr val="333333"/>
-                          </a:solidFill>
-                          <a:latin typeface="Calibri"/>
-                        </a:rPr>
-                        <a:t>54</a:t>
+                        <a:rPr sz="900" b="0">
+                          <a:solidFill>
+                            <a:srgbClr val="333333"/>
+                          </a:solidFill>
+                          <a:latin typeface="Calibri"/>
+                        </a:rPr>
+                        <a:t>35</a:t>
                       </a:r>
                     </a:p>
                   </a:txBody>
@@ -13378,734 +14074,640 @@
                     <a:p>
                       <a:pPr algn="ctr"/>
                       <a:r>
-                        <a:rPr sz="950" b="1">
+                        <a:rPr sz="900" b="1">
                           <a:solidFill>
                             <a:srgbClr val="A6001A"/>
                           </a:solidFill>
                           <a:latin typeface="Calibri"/>
                         </a:rPr>
+                        <a:t>-15</a:t>
+                      </a:r>
+                    </a:p>
+                  </a:txBody>
+                  <a:tcPr>
+                    <a:solidFill>
+                      <a:srgbClr val="FDF2F3"/>
+                    </a:solidFill>
+                  </a:tcPr>
+                </a:tc>
+              </a:tr>
+              <a:tr h="182880">
+                <a:tc>
+                  <a:txBody>
+                    <a:bodyPr/>
+                    <a:lstStyle/>
+                    <a:p>
+                      <a:pPr algn="l"/>
+                      <a:r>
+                        <a:rPr sz="900" b="0">
+                          <a:solidFill>
+                            <a:srgbClr val="333333"/>
+                          </a:solidFill>
+                          <a:latin typeface="Calibri"/>
+                        </a:rPr>
+                        <a:t>Etkinlik (normda 0)</a:t>
+                      </a:r>
+                    </a:p>
+                  </a:txBody>
+                  <a:tcPr>
+                    <a:solidFill>
+                      <a:srgbClr val="FFF6E6"/>
+                    </a:solidFill>
+                  </a:tcPr>
+                </a:tc>
+                <a:tc>
+                  <a:txBody>
+                    <a:bodyPr/>
+                    <a:lstStyle/>
+                    <a:p>
+                      <a:pPr algn="ctr"/>
+                      <a:r>
+                        <a:rPr sz="900" b="0">
+                          <a:solidFill>
+                            <a:srgbClr val="333333"/>
+                          </a:solidFill>
+                          <a:latin typeface="Calibri"/>
+                        </a:rPr>
+                        <a:t>0</a:t>
+                      </a:r>
+                    </a:p>
+                  </a:txBody>
+                  <a:tcPr>
+                    <a:solidFill>
+                      <a:srgbClr val="FFF6E6"/>
+                    </a:solidFill>
+                  </a:tcPr>
+                </a:tc>
+                <a:tc>
+                  <a:txBody>
+                    <a:bodyPr/>
+                    <a:lstStyle/>
+                    <a:p>
+                      <a:pPr algn="ctr"/>
+                      <a:r>
+                        <a:rPr sz="900" b="0">
+                          <a:solidFill>
+                            <a:srgbClr val="333333"/>
+                          </a:solidFill>
+                          <a:latin typeface="Calibri"/>
+                        </a:rPr>
+                        <a:t>3</a:t>
+                      </a:r>
+                    </a:p>
+                  </a:txBody>
+                  <a:tcPr>
+                    <a:solidFill>
+                      <a:srgbClr val="FFF6E6"/>
+                    </a:solidFill>
+                  </a:tcPr>
+                </a:tc>
+                <a:tc>
+                  <a:txBody>
+                    <a:bodyPr/>
+                    <a:lstStyle/>
+                    <a:p>
+                      <a:pPr algn="ctr"/>
+                      <a:r>
+                        <a:rPr sz="900" b="1">
+                          <a:solidFill>
+                            <a:srgbClr val="A6001A"/>
+                          </a:solidFill>
+                          <a:latin typeface="Calibri"/>
+                        </a:rPr>
+                        <a:t>+3</a:t>
+                      </a:r>
+                    </a:p>
+                  </a:txBody>
+                  <a:tcPr>
+                    <a:solidFill>
+                      <a:srgbClr val="FFF6E6"/>
+                    </a:solidFill>
+                  </a:tcPr>
+                </a:tc>
+                <a:tc>
+                  <a:txBody>
+                    <a:bodyPr/>
+                    <a:lstStyle/>
+                    <a:p>
+                      <a:pPr algn="ctr"/>
+                      <a:r>
+                        <a:rPr sz="900" b="0">
+                          <a:solidFill>
+                            <a:srgbClr val="333333"/>
+                          </a:solidFill>
+                          <a:latin typeface="Calibri"/>
+                        </a:rPr>
+                        <a:t>0</a:t>
+                      </a:r>
+                    </a:p>
+                  </a:txBody>
+                  <a:tcPr>
+                    <a:solidFill>
+                      <a:srgbClr val="FFF6E6"/>
+                    </a:solidFill>
+                  </a:tcPr>
+                </a:tc>
+                <a:tc>
+                  <a:txBody>
+                    <a:bodyPr/>
+                    <a:lstStyle/>
+                    <a:p>
+                      <a:pPr algn="ctr"/>
+                      <a:r>
+                        <a:rPr sz="900" b="0">
+                          <a:solidFill>
+                            <a:srgbClr val="333333"/>
+                          </a:solidFill>
+                          <a:latin typeface="Calibri"/>
+                        </a:rPr>
+                        <a:t>0</a:t>
+                      </a:r>
+                    </a:p>
+                  </a:txBody>
+                  <a:tcPr>
+                    <a:solidFill>
+                      <a:srgbClr val="FFF6E6"/>
+                    </a:solidFill>
+                  </a:tcPr>
+                </a:tc>
+                <a:tc>
+                  <a:txBody>
+                    <a:bodyPr/>
+                    <a:lstStyle/>
+                    <a:p>
+                      <a:pPr algn="ctr"/>
+                      <a:r>
+                        <a:rPr sz="900" b="1">
+                          <a:solidFill>
+                            <a:srgbClr val="A6001A"/>
+                          </a:solidFill>
+                          <a:latin typeface="Calibri"/>
+                        </a:rPr>
+                        <a:t>0</a:t>
+                      </a:r>
+                    </a:p>
+                  </a:txBody>
+                  <a:tcPr>
+                    <a:solidFill>
+                      <a:srgbClr val="FFF6E6"/>
+                    </a:solidFill>
+                  </a:tcPr>
+                </a:tc>
+                <a:tc>
+                  <a:txBody>
+                    <a:bodyPr/>
+                    <a:lstStyle/>
+                    <a:p>
+                      <a:pPr algn="ctr"/>
+                      <a:r>
+                        <a:rPr sz="900" b="0">
+                          <a:solidFill>
+                            <a:srgbClr val="333333"/>
+                          </a:solidFill>
+                          <a:latin typeface="Calibri"/>
+                        </a:rPr>
+                        <a:t>0</a:t>
+                      </a:r>
+                    </a:p>
+                  </a:txBody>
+                  <a:tcPr>
+                    <a:solidFill>
+                      <a:srgbClr val="FFF6E6"/>
+                    </a:solidFill>
+                  </a:tcPr>
+                </a:tc>
+                <a:tc>
+                  <a:txBody>
+                    <a:bodyPr/>
+                    <a:lstStyle/>
+                    <a:p>
+                      <a:pPr algn="ctr"/>
+                      <a:r>
+                        <a:rPr sz="900" b="0">
+                          <a:solidFill>
+                            <a:srgbClr val="333333"/>
+                          </a:solidFill>
+                          <a:latin typeface="Calibri"/>
+                        </a:rPr>
+                        <a:t>3</a:t>
+                      </a:r>
+                    </a:p>
+                  </a:txBody>
+                  <a:tcPr>
+                    <a:solidFill>
+                      <a:srgbClr val="FFF6E6"/>
+                    </a:solidFill>
+                  </a:tcPr>
+                </a:tc>
+                <a:tc>
+                  <a:txBody>
+                    <a:bodyPr/>
+                    <a:lstStyle/>
+                    <a:p>
+                      <a:pPr algn="ctr"/>
+                      <a:r>
+                        <a:rPr sz="900" b="1">
+                          <a:solidFill>
+                            <a:srgbClr val="A6001A"/>
+                          </a:solidFill>
+                          <a:latin typeface="Calibri"/>
+                        </a:rPr>
+                        <a:t>+3</a:t>
+                      </a:r>
+                    </a:p>
+                  </a:txBody>
+                  <a:tcPr>
+                    <a:solidFill>
+                      <a:srgbClr val="FFF6E6"/>
+                    </a:solidFill>
+                  </a:tcPr>
+                </a:tc>
+              </a:tr>
+              <a:tr h="182880">
+                <a:tc>
+                  <a:txBody>
+                    <a:bodyPr/>
+                    <a:lstStyle/>
+                    <a:p>
+                      <a:pPr algn="l"/>
+                      <a:r>
+                        <a:rPr sz="900" b="0">
+                          <a:solidFill>
+                            <a:srgbClr val="333333"/>
+                          </a:solidFill>
+                          <a:latin typeface="Calibri"/>
+                        </a:rPr>
+                        <a:t>Engelli ** (norma dahil)</a:t>
+                      </a:r>
+                    </a:p>
+                  </a:txBody>
+                  <a:tcPr>
+                    <a:solidFill>
+                      <a:srgbClr val="FFF6E6"/>
+                    </a:solidFill>
+                  </a:tcPr>
+                </a:tc>
+                <a:tc>
+                  <a:txBody>
+                    <a:bodyPr/>
+                    <a:lstStyle/>
+                    <a:p>
+                      <a:pPr algn="ctr"/>
+                      <a:r>
+                        <a:rPr sz="900" b="0">
+                          <a:solidFill>
+                            <a:srgbClr val="333333"/>
+                          </a:solidFill>
+                          <a:latin typeface="Calibri"/>
+                        </a:rPr>
+                        <a:t>dahil</a:t>
+                      </a:r>
+                    </a:p>
+                  </a:txBody>
+                  <a:tcPr>
+                    <a:solidFill>
+                      <a:srgbClr val="FFF6E6"/>
+                    </a:solidFill>
+                  </a:tcPr>
+                </a:tc>
+                <a:tc>
+                  <a:txBody>
+                    <a:bodyPr/>
+                    <a:lstStyle/>
+                    <a:p>
+                      <a:pPr algn="ctr"/>
+                      <a:r>
+                        <a:rPr sz="900" b="0">
+                          <a:solidFill>
+                            <a:srgbClr val="333333"/>
+                          </a:solidFill>
+                          <a:latin typeface="Calibri"/>
+                        </a:rPr>
+                        <a:t>3</a:t>
+                      </a:r>
+                    </a:p>
+                  </a:txBody>
+                  <a:tcPr>
+                    <a:solidFill>
+                      <a:srgbClr val="FFF6E6"/>
+                    </a:solidFill>
+                  </a:tcPr>
+                </a:tc>
+                <a:tc>
+                  <a:txBody>
+                    <a:bodyPr/>
+                    <a:lstStyle/>
+                    <a:p>
+                      <a:pPr algn="ctr"/>
+                      <a:r>
+                        <a:rPr sz="900" b="1">
+                          <a:solidFill>
+                            <a:srgbClr val="A6001A"/>
+                          </a:solidFill>
+                          <a:latin typeface="Calibri"/>
+                        </a:rPr>
+                        <a:t>—</a:t>
+                      </a:r>
+                    </a:p>
+                  </a:txBody>
+                  <a:tcPr>
+                    <a:solidFill>
+                      <a:srgbClr val="FFF6E6"/>
+                    </a:solidFill>
+                  </a:tcPr>
+                </a:tc>
+                <a:tc>
+                  <a:txBody>
+                    <a:bodyPr/>
+                    <a:lstStyle/>
+                    <a:p>
+                      <a:pPr algn="ctr"/>
+                      <a:r>
+                        <a:rPr sz="900" b="0">
+                          <a:solidFill>
+                            <a:srgbClr val="333333"/>
+                          </a:solidFill>
+                          <a:latin typeface="Calibri"/>
+                        </a:rPr>
+                        <a:t>—</a:t>
+                      </a:r>
+                    </a:p>
+                  </a:txBody>
+                  <a:tcPr>
+                    <a:solidFill>
+                      <a:srgbClr val="FFF6E6"/>
+                    </a:solidFill>
+                  </a:tcPr>
+                </a:tc>
+                <a:tc>
+                  <a:txBody>
+                    <a:bodyPr/>
+                    <a:lstStyle/>
+                    <a:p>
+                      <a:pPr algn="ctr"/>
+                      <a:r>
+                        <a:rPr sz="900" b="0">
+                          <a:solidFill>
+                            <a:srgbClr val="333333"/>
+                          </a:solidFill>
+                          <a:latin typeface="Calibri"/>
+                        </a:rPr>
+                        <a:t>0</a:t>
+                      </a:r>
+                    </a:p>
+                  </a:txBody>
+                  <a:tcPr>
+                    <a:solidFill>
+                      <a:srgbClr val="FFF6E6"/>
+                    </a:solidFill>
+                  </a:tcPr>
+                </a:tc>
+                <a:tc>
+                  <a:txBody>
+                    <a:bodyPr/>
+                    <a:lstStyle/>
+                    <a:p>
+                      <a:pPr algn="ctr"/>
+                      <a:r>
+                        <a:rPr sz="900" b="1">
+                          <a:solidFill>
+                            <a:srgbClr val="A6001A"/>
+                          </a:solidFill>
+                          <a:latin typeface="Calibri"/>
+                        </a:rPr>
+                        <a:t>—</a:t>
+                      </a:r>
+                    </a:p>
+                  </a:txBody>
+                  <a:tcPr>
+                    <a:solidFill>
+                      <a:srgbClr val="FFF6E6"/>
+                    </a:solidFill>
+                  </a:tcPr>
+                </a:tc>
+                <a:tc>
+                  <a:txBody>
+                    <a:bodyPr/>
+                    <a:lstStyle/>
+                    <a:p>
+                      <a:pPr algn="ctr"/>
+                      <a:r>
+                        <a:rPr sz="900" b="0">
+                          <a:solidFill>
+                            <a:srgbClr val="333333"/>
+                          </a:solidFill>
+                          <a:latin typeface="Calibri"/>
+                        </a:rPr>
+                        <a:t>dahil</a:t>
+                      </a:r>
+                    </a:p>
+                  </a:txBody>
+                  <a:tcPr>
+                    <a:solidFill>
+                      <a:srgbClr val="FFF6E6"/>
+                    </a:solidFill>
+                  </a:tcPr>
+                </a:tc>
+                <a:tc>
+                  <a:txBody>
+                    <a:bodyPr/>
+                    <a:lstStyle/>
+                    <a:p>
+                      <a:pPr algn="ctr"/>
+                      <a:r>
+                        <a:rPr sz="900" b="0">
+                          <a:solidFill>
+                            <a:srgbClr val="333333"/>
+                          </a:solidFill>
+                          <a:latin typeface="Calibri"/>
+                        </a:rPr>
+                        <a:t>3</a:t>
+                      </a:r>
+                    </a:p>
+                  </a:txBody>
+                  <a:tcPr>
+                    <a:solidFill>
+                      <a:srgbClr val="FFF6E6"/>
+                    </a:solidFill>
+                  </a:tcPr>
+                </a:tc>
+                <a:tc>
+                  <a:txBody>
+                    <a:bodyPr/>
+                    <a:lstStyle/>
+                    <a:p>
+                      <a:pPr algn="ctr"/>
+                      <a:r>
+                        <a:rPr sz="900" b="1">
+                          <a:solidFill>
+                            <a:srgbClr val="A6001A"/>
+                          </a:solidFill>
+                          <a:latin typeface="Calibri"/>
+                        </a:rPr>
+                        <a:t>—</a:t>
+                      </a:r>
+                    </a:p>
+                  </a:txBody>
+                  <a:tcPr>
+                    <a:solidFill>
+                      <a:srgbClr val="FFF6E6"/>
+                    </a:solidFill>
+                  </a:tcPr>
+                </a:tc>
+              </a:tr>
+              <a:tr h="182880">
+                <a:tc>
+                  <a:txBody>
+                    <a:bodyPr/>
+                    <a:lstStyle/>
+                    <a:p>
+                      <a:pPr algn="l"/>
+                      <a:r>
+                        <a:rPr sz="900" b="1">
+                          <a:solidFill>
+                            <a:srgbClr val="333333"/>
+                          </a:solidFill>
+                          <a:latin typeface="Calibri"/>
+                        </a:rPr>
+                        <a:t>GENEL TOPLAM</a:t>
+                      </a:r>
+                    </a:p>
+                  </a:txBody>
+                  <a:tcPr>
+                    <a:solidFill>
+                      <a:srgbClr val="F2F2F2"/>
+                    </a:solidFill>
+                  </a:tcPr>
+                </a:tc>
+                <a:tc>
+                  <a:txBody>
+                    <a:bodyPr/>
+                    <a:lstStyle/>
+                    <a:p>
+                      <a:pPr algn="ctr"/>
+                      <a:r>
+                        <a:rPr sz="900" b="1">
+                          <a:solidFill>
+                            <a:srgbClr val="333333"/>
+                          </a:solidFill>
+                          <a:latin typeface="Calibri"/>
+                        </a:rPr>
+                        <a:t>145</a:t>
+                      </a:r>
+                    </a:p>
+                  </a:txBody>
+                  <a:tcPr>
+                    <a:solidFill>
+                      <a:srgbClr val="F2F2F2"/>
+                    </a:solidFill>
+                  </a:tcPr>
+                </a:tc>
+                <a:tc>
+                  <a:txBody>
+                    <a:bodyPr/>
+                    <a:lstStyle/>
+                    <a:p>
+                      <a:pPr algn="ctr"/>
+                      <a:r>
+                        <a:rPr sz="900" b="1">
+                          <a:solidFill>
+                            <a:srgbClr val="333333"/>
+                          </a:solidFill>
+                          <a:latin typeface="Calibri"/>
+                        </a:rPr>
+                        <a:t>137</a:t>
+                      </a:r>
+                    </a:p>
+                  </a:txBody>
+                  <a:tcPr>
+                    <a:solidFill>
+                      <a:srgbClr val="F2F2F2"/>
+                    </a:solidFill>
+                  </a:tcPr>
+                </a:tc>
+                <a:tc>
+                  <a:txBody>
+                    <a:bodyPr/>
+                    <a:lstStyle/>
+                    <a:p>
+                      <a:pPr algn="ctr"/>
+                      <a:r>
+                        <a:rPr sz="900" b="1">
+                          <a:solidFill>
+                            <a:srgbClr val="A6001A"/>
+                          </a:solidFill>
+                          <a:latin typeface="Calibri"/>
+                        </a:rPr>
                         <a:t>-8</a:t>
                       </a:r>
                     </a:p>
                   </a:txBody>
                   <a:tcPr>
                     <a:solidFill>
-                      <a:srgbClr val="FDF2F3"/>
-                    </a:solidFill>
-                  </a:tcPr>
-                </a:tc>
-              </a:tr>
-              <a:tr h="201168">
-                <a:tc>
-                  <a:txBody>
-                    <a:bodyPr/>
-                    <a:lstStyle/>
-                    <a:p>
-                      <a:pPr algn="l"/>
-                      <a:r>
-                        <a:rPr sz="950" b="0">
-                          <a:solidFill>
-                            <a:srgbClr val="333333"/>
-                          </a:solidFill>
-                          <a:latin typeface="Calibri"/>
-                        </a:rPr>
-                        <a:t>FSM</a:t>
-                      </a:r>
-                    </a:p>
-                  </a:txBody>
-                  <a:tcPr>
-                    <a:solidFill>
-                      <a:srgbClr val="FAFAFA"/>
-                    </a:solidFill>
-                  </a:tcPr>
-                </a:tc>
-                <a:tc>
-                  <a:txBody>
-                    <a:bodyPr/>
-                    <a:lstStyle/>
-                    <a:p>
-                      <a:pPr algn="ctr"/>
-                      <a:r>
-                        <a:rPr sz="950" b="0">
-                          <a:solidFill>
-                            <a:srgbClr val="333333"/>
-                          </a:solidFill>
-                          <a:latin typeface="Calibri"/>
-                        </a:rPr>
-                        <a:t>37</a:t>
-                      </a:r>
-                    </a:p>
-                  </a:txBody>
-                  <a:tcPr>
-                    <a:solidFill>
-                      <a:srgbClr val="FAFAFA"/>
-                    </a:solidFill>
-                  </a:tcPr>
-                </a:tc>
-                <a:tc>
-                  <a:txBody>
-                    <a:bodyPr/>
-                    <a:lstStyle/>
-                    <a:p>
-                      <a:pPr algn="ctr"/>
-                      <a:r>
-                        <a:rPr sz="950" b="0">
-                          <a:solidFill>
-                            <a:srgbClr val="333333"/>
-                          </a:solidFill>
-                          <a:latin typeface="Calibri"/>
-                        </a:rPr>
-                        <a:t>34</a:t>
-                      </a:r>
-                    </a:p>
-                  </a:txBody>
-                  <a:tcPr>
-                    <a:solidFill>
-                      <a:srgbClr val="FAFAFA"/>
-                    </a:solidFill>
-                  </a:tcPr>
-                </a:tc>
-                <a:tc>
-                  <a:txBody>
-                    <a:bodyPr/>
-                    <a:lstStyle/>
-                    <a:p>
-                      <a:pPr algn="ctr"/>
-                      <a:r>
-                        <a:rPr sz="950" b="1">
+                      <a:srgbClr val="F2F2F2"/>
+                    </a:solidFill>
+                  </a:tcPr>
+                </a:tc>
+                <a:tc>
+                  <a:txBody>
+                    <a:bodyPr/>
+                    <a:lstStyle/>
+                    <a:p>
+                      <a:pPr algn="ctr"/>
+                      <a:r>
+                        <a:rPr sz="900" b="1">
+                          <a:solidFill>
+                            <a:srgbClr val="333333"/>
+                          </a:solidFill>
+                          <a:latin typeface="Calibri"/>
+                        </a:rPr>
+                        <a:t>72</a:t>
+                      </a:r>
+                    </a:p>
+                  </a:txBody>
+                  <a:tcPr>
+                    <a:solidFill>
+                      <a:srgbClr val="F2F2F2"/>
+                    </a:solidFill>
+                  </a:tcPr>
+                </a:tc>
+                <a:tc>
+                  <a:txBody>
+                    <a:bodyPr/>
+                    <a:lstStyle/>
+                    <a:p>
+                      <a:pPr algn="ctr"/>
+                      <a:r>
+                        <a:rPr sz="900" b="1">
+                          <a:solidFill>
+                            <a:srgbClr val="333333"/>
+                          </a:solidFill>
+                          <a:latin typeface="Calibri"/>
+                        </a:rPr>
+                        <a:t>58</a:t>
+                      </a:r>
+                    </a:p>
+                  </a:txBody>
+                  <a:tcPr>
+                    <a:solidFill>
+                      <a:srgbClr val="F2F2F2"/>
+                    </a:solidFill>
+                  </a:tcPr>
+                </a:tc>
+                <a:tc>
+                  <a:txBody>
+                    <a:bodyPr/>
+                    <a:lstStyle/>
+                    <a:p>
+                      <a:pPr algn="ctr"/>
+                      <a:r>
+                        <a:rPr sz="900" b="1">
                           <a:solidFill>
                             <a:srgbClr val="A6001A"/>
                           </a:solidFill>
                           <a:latin typeface="Calibri"/>
                         </a:rPr>
-                        <a:t>-3</a:t>
-                      </a:r>
-                    </a:p>
-                  </a:txBody>
-                  <a:tcPr>
-                    <a:solidFill>
-                      <a:srgbClr val="FAFAFA"/>
-                    </a:solidFill>
-                  </a:tcPr>
-                </a:tc>
-                <a:tc>
-                  <a:txBody>
-                    <a:bodyPr/>
-                    <a:lstStyle/>
-                    <a:p>
-                      <a:pPr algn="ctr"/>
-                      <a:r>
-                        <a:rPr sz="950" b="0">
-                          <a:solidFill>
-                            <a:srgbClr val="333333"/>
-                          </a:solidFill>
-                          <a:latin typeface="Calibri"/>
-                        </a:rPr>
-                        <a:t>10</a:t>
-                      </a:r>
-                    </a:p>
-                  </a:txBody>
-                  <a:tcPr>
-                    <a:solidFill>
-                      <a:srgbClr val="FAFAFA"/>
-                    </a:solidFill>
-                  </a:tcPr>
-                </a:tc>
-                <a:tc>
-                  <a:txBody>
-                    <a:bodyPr/>
-                    <a:lstStyle/>
-                    <a:p>
-                      <a:pPr algn="ctr"/>
-                      <a:r>
-                        <a:rPr sz="950" b="0">
-                          <a:solidFill>
-                            <a:srgbClr val="333333"/>
-                          </a:solidFill>
-                          <a:latin typeface="Calibri"/>
-                        </a:rPr>
-                        <a:t>11</a:t>
-                      </a:r>
-                    </a:p>
-                  </a:txBody>
-                  <a:tcPr>
-                    <a:solidFill>
-                      <a:srgbClr val="FAFAFA"/>
-                    </a:solidFill>
-                  </a:tcPr>
-                </a:tc>
-                <a:tc>
-                  <a:txBody>
-                    <a:bodyPr/>
-                    <a:lstStyle/>
-                    <a:p>
-                      <a:pPr algn="ctr"/>
-                      <a:r>
-                        <a:rPr sz="950" b="1">
-                          <a:solidFill>
-                            <a:srgbClr val="A6001A"/>
-                          </a:solidFill>
-                          <a:latin typeface="Calibri"/>
-                        </a:rPr>
-                        <a:t>+1</a:t>
-                      </a:r>
-                    </a:p>
-                  </a:txBody>
-                  <a:tcPr>
-                    <a:solidFill>
-                      <a:srgbClr val="FAFAFA"/>
-                    </a:solidFill>
-                  </a:tcPr>
-                </a:tc>
-                <a:tc>
-                  <a:txBody>
-                    <a:bodyPr/>
-                    <a:lstStyle/>
-                    <a:p>
-                      <a:pPr algn="ctr"/>
-                      <a:r>
-                        <a:rPr sz="950" b="0">
-                          <a:solidFill>
-                            <a:srgbClr val="333333"/>
-                          </a:solidFill>
-                          <a:latin typeface="Calibri"/>
-                        </a:rPr>
-                        <a:t>47</a:t>
-                      </a:r>
-                    </a:p>
-                  </a:txBody>
-                  <a:tcPr>
-                    <a:solidFill>
-                      <a:srgbClr val="FDF2F3"/>
-                    </a:solidFill>
-                  </a:tcPr>
-                </a:tc>
-                <a:tc>
-                  <a:txBody>
-                    <a:bodyPr/>
-                    <a:lstStyle/>
-                    <a:p>
-                      <a:pPr algn="ctr"/>
-                      <a:r>
-                        <a:rPr sz="950" b="0">
-                          <a:solidFill>
-                            <a:srgbClr val="333333"/>
-                          </a:solidFill>
-                          <a:latin typeface="Calibri"/>
-                        </a:rPr>
-                        <a:t>45</a:t>
-                      </a:r>
-                    </a:p>
-                  </a:txBody>
-                  <a:tcPr>
-                    <a:solidFill>
-                      <a:srgbClr val="FDF2F3"/>
-                    </a:solidFill>
-                  </a:tcPr>
-                </a:tc>
-                <a:tc>
-                  <a:txBody>
-                    <a:bodyPr/>
-                    <a:lstStyle/>
-                    <a:p>
-                      <a:pPr algn="ctr"/>
-                      <a:r>
-                        <a:rPr sz="950" b="1">
-                          <a:solidFill>
-                            <a:srgbClr val="A6001A"/>
-                          </a:solidFill>
-                          <a:latin typeface="Calibri"/>
-                        </a:rPr>
-                        <a:t>-2</a:t>
-                      </a:r>
-                    </a:p>
-                  </a:txBody>
-                  <a:tcPr>
-                    <a:solidFill>
-                      <a:srgbClr val="FDF2F3"/>
-                    </a:solidFill>
-                  </a:tcPr>
-                </a:tc>
-              </a:tr>
-              <a:tr h="201168">
-                <a:tc>
-                  <a:txBody>
-                    <a:bodyPr/>
-                    <a:lstStyle/>
-                    <a:p>
-                      <a:pPr algn="l"/>
-                      <a:r>
-                        <a:rPr sz="950" b="0">
-                          <a:solidFill>
-                            <a:srgbClr val="333333"/>
-                          </a:solidFill>
-                          <a:latin typeface="Calibri"/>
-                        </a:rPr>
-                        <a:t>İst. Yolu</a:t>
-                      </a:r>
-                    </a:p>
-                  </a:txBody>
-                  <a:tcPr>
-                    <a:solidFill>
-                      <a:srgbClr val="FFFFFF"/>
-                    </a:solidFill>
-                  </a:tcPr>
-                </a:tc>
-                <a:tc>
-                  <a:txBody>
-                    <a:bodyPr/>
-                    <a:lstStyle/>
-                    <a:p>
-                      <a:pPr algn="ctr"/>
-                      <a:r>
-                        <a:rPr sz="950" b="0">
-                          <a:solidFill>
-                            <a:srgbClr val="333333"/>
-                          </a:solidFill>
-                          <a:latin typeface="Calibri"/>
-                        </a:rPr>
-                        <a:t>33</a:t>
-                      </a:r>
-                    </a:p>
-                  </a:txBody>
-                  <a:tcPr>
-                    <a:solidFill>
-                      <a:srgbClr val="FFFFFF"/>
-                    </a:solidFill>
-                  </a:tcPr>
-                </a:tc>
-                <a:tc>
-                  <a:txBody>
-                    <a:bodyPr/>
-                    <a:lstStyle/>
-                    <a:p>
-                      <a:pPr algn="ctr"/>
-                      <a:r>
-                        <a:rPr sz="950" b="0">
-                          <a:solidFill>
-                            <a:srgbClr val="333333"/>
-                          </a:solidFill>
-                          <a:latin typeface="Calibri"/>
-                        </a:rPr>
-                        <a:t>36</a:t>
-                      </a:r>
-                    </a:p>
-                  </a:txBody>
-                  <a:tcPr>
-                    <a:solidFill>
-                      <a:srgbClr val="FFFFFF"/>
-                    </a:solidFill>
-                  </a:tcPr>
-                </a:tc>
-                <a:tc>
-                  <a:txBody>
-                    <a:bodyPr/>
-                    <a:lstStyle/>
-                    <a:p>
-                      <a:pPr algn="ctr"/>
-                      <a:r>
-                        <a:rPr sz="950" b="1">
-                          <a:solidFill>
-                            <a:srgbClr val="A6001A"/>
-                          </a:solidFill>
-                          <a:latin typeface="Calibri"/>
-                        </a:rPr>
-                        <a:t>+3</a:t>
-                      </a:r>
-                    </a:p>
-                  </a:txBody>
-                  <a:tcPr>
-                    <a:solidFill>
-                      <a:srgbClr val="FFFFFF"/>
-                    </a:solidFill>
-                  </a:tcPr>
-                </a:tc>
-                <a:tc>
-                  <a:txBody>
-                    <a:bodyPr/>
-                    <a:lstStyle/>
-                    <a:p>
-                      <a:pPr algn="ctr"/>
-                      <a:r>
-                        <a:rPr sz="950" b="0">
-                          <a:solidFill>
-                            <a:srgbClr val="333333"/>
-                          </a:solidFill>
-                          <a:latin typeface="Calibri"/>
-                        </a:rPr>
-                        <a:t>25</a:t>
-                      </a:r>
-                    </a:p>
-                  </a:txBody>
-                  <a:tcPr>
-                    <a:solidFill>
-                      <a:srgbClr val="FFFFFF"/>
-                    </a:solidFill>
-                  </a:tcPr>
-                </a:tc>
-                <a:tc>
-                  <a:txBody>
-                    <a:bodyPr/>
-                    <a:lstStyle/>
-                    <a:p>
-                      <a:pPr algn="ctr"/>
-                      <a:r>
-                        <a:rPr sz="950" b="0">
-                          <a:solidFill>
-                            <a:srgbClr val="333333"/>
-                          </a:solidFill>
-                          <a:latin typeface="Calibri"/>
-                        </a:rPr>
-                        <a:t>25</a:t>
-                      </a:r>
-                    </a:p>
-                  </a:txBody>
-                  <a:tcPr>
-                    <a:solidFill>
-                      <a:srgbClr val="FFFFFF"/>
-                    </a:solidFill>
-                  </a:tcPr>
-                </a:tc>
-                <a:tc>
-                  <a:txBody>
-                    <a:bodyPr/>
-                    <a:lstStyle/>
-                    <a:p>
-                      <a:pPr algn="ctr"/>
-                      <a:r>
-                        <a:rPr sz="950" b="1">
-                          <a:solidFill>
-                            <a:srgbClr val="A6001A"/>
-                          </a:solidFill>
-                          <a:latin typeface="Calibri"/>
-                        </a:rPr>
-                        <a:t>+0</a:t>
-                      </a:r>
-                    </a:p>
-                  </a:txBody>
-                  <a:tcPr>
-                    <a:solidFill>
-                      <a:srgbClr val="FFFFFF"/>
-                    </a:solidFill>
-                  </a:tcPr>
-                </a:tc>
-                <a:tc>
-                  <a:txBody>
-                    <a:bodyPr/>
-                    <a:lstStyle/>
-                    <a:p>
-                      <a:pPr algn="ctr"/>
-                      <a:r>
-                        <a:rPr sz="950" b="0">
-                          <a:solidFill>
-                            <a:srgbClr val="333333"/>
-                          </a:solidFill>
-                          <a:latin typeface="Calibri"/>
-                        </a:rPr>
-                        <a:t>58</a:t>
-                      </a:r>
-                    </a:p>
-                  </a:txBody>
-                  <a:tcPr>
-                    <a:solidFill>
-                      <a:srgbClr val="FDF2F3"/>
-                    </a:solidFill>
-                  </a:tcPr>
-                </a:tc>
-                <a:tc>
-                  <a:txBody>
-                    <a:bodyPr/>
-                    <a:lstStyle/>
-                    <a:p>
-                      <a:pPr algn="ctr"/>
-                      <a:r>
-                        <a:rPr sz="950" b="0">
-                          <a:solidFill>
-                            <a:srgbClr val="333333"/>
-                          </a:solidFill>
-                          <a:latin typeface="Calibri"/>
-                        </a:rPr>
-                        <a:t>61</a:t>
-                      </a:r>
-                    </a:p>
-                  </a:txBody>
-                  <a:tcPr>
-                    <a:solidFill>
-                      <a:srgbClr val="FDF2F3"/>
-                    </a:solidFill>
-                  </a:tcPr>
-                </a:tc>
-                <a:tc>
-                  <a:txBody>
-                    <a:bodyPr/>
-                    <a:lstStyle/>
-                    <a:p>
-                      <a:pPr algn="ctr"/>
-                      <a:r>
-                        <a:rPr sz="950" b="1">
-                          <a:solidFill>
-                            <a:srgbClr val="A6001A"/>
-                          </a:solidFill>
-                          <a:latin typeface="Calibri"/>
-                        </a:rPr>
-                        <a:t>+3</a:t>
-                      </a:r>
-                    </a:p>
-                  </a:txBody>
-                  <a:tcPr>
-                    <a:solidFill>
-                      <a:srgbClr val="FDF2F3"/>
-                    </a:solidFill>
-                  </a:tcPr>
-                </a:tc>
-              </a:tr>
-              <a:tr h="201168">
-                <a:tc>
-                  <a:txBody>
-                    <a:bodyPr/>
-                    <a:lstStyle/>
-                    <a:p>
-                      <a:pPr algn="l"/>
-                      <a:r>
-                        <a:rPr sz="950" b="0">
-                          <a:solidFill>
-                            <a:srgbClr val="333333"/>
-                          </a:solidFill>
-                          <a:latin typeface="Calibri"/>
-                        </a:rPr>
-                        <a:t>Heykel</a:t>
-                      </a:r>
-                    </a:p>
-                  </a:txBody>
-                  <a:tcPr>
-                    <a:solidFill>
-                      <a:srgbClr val="FAFAFA"/>
-                    </a:solidFill>
-                  </a:tcPr>
-                </a:tc>
-                <a:tc>
-                  <a:txBody>
-                    <a:bodyPr/>
-                    <a:lstStyle/>
-                    <a:p>
-                      <a:pPr algn="ctr"/>
-                      <a:r>
-                        <a:rPr sz="950" b="0">
-                          <a:solidFill>
-                            <a:srgbClr val="333333"/>
-                          </a:solidFill>
-                          <a:latin typeface="Calibri"/>
-                        </a:rPr>
-                        <a:t>30</a:t>
-                      </a:r>
-                    </a:p>
-                  </a:txBody>
-                  <a:tcPr>
-                    <a:solidFill>
-                      <a:srgbClr val="FAFAFA"/>
-                    </a:solidFill>
-                  </a:tcPr>
-                </a:tc>
-                <a:tc>
-                  <a:txBody>
-                    <a:bodyPr/>
-                    <a:lstStyle/>
-                    <a:p>
-                      <a:pPr algn="ctr"/>
-                      <a:r>
-                        <a:rPr sz="950" b="0">
-                          <a:solidFill>
-                            <a:srgbClr val="333333"/>
-                          </a:solidFill>
-                          <a:latin typeface="Calibri"/>
-                        </a:rPr>
-                        <a:t>26</a:t>
-                      </a:r>
-                    </a:p>
-                  </a:txBody>
-                  <a:tcPr>
-                    <a:solidFill>
-                      <a:srgbClr val="FAFAFA"/>
-                    </a:solidFill>
-                  </a:tcPr>
-                </a:tc>
-                <a:tc>
-                  <a:txBody>
-                    <a:bodyPr/>
-                    <a:lstStyle/>
-                    <a:p>
-                      <a:pPr algn="ctr"/>
-                      <a:r>
-                        <a:rPr sz="950" b="1">
-                          <a:solidFill>
-                            <a:srgbClr val="A6001A"/>
-                          </a:solidFill>
-                          <a:latin typeface="Calibri"/>
-                        </a:rPr>
-                        <a:t>-4</a:t>
-                      </a:r>
-                    </a:p>
-                  </a:txBody>
-                  <a:tcPr>
-                    <a:solidFill>
-                      <a:srgbClr val="FAFAFA"/>
-                    </a:solidFill>
-                  </a:tcPr>
-                </a:tc>
-                <a:tc>
-                  <a:txBody>
-                    <a:bodyPr/>
-                    <a:lstStyle/>
-                    <a:p>
-                      <a:pPr algn="ctr"/>
-                      <a:r>
-                        <a:rPr sz="950" b="0">
-                          <a:solidFill>
-                            <a:srgbClr val="333333"/>
-                          </a:solidFill>
-                          <a:latin typeface="Calibri"/>
-                        </a:rPr>
-                        <a:t>20</a:t>
-                      </a:r>
-                    </a:p>
-                  </a:txBody>
-                  <a:tcPr>
-                    <a:solidFill>
-                      <a:srgbClr val="FAFAFA"/>
-                    </a:solidFill>
-                  </a:tcPr>
-                </a:tc>
-                <a:tc>
-                  <a:txBody>
-                    <a:bodyPr/>
-                    <a:lstStyle/>
-                    <a:p>
-                      <a:pPr algn="ctr"/>
-                      <a:r>
-                        <a:rPr sz="950" b="0">
-                          <a:solidFill>
-                            <a:srgbClr val="333333"/>
-                          </a:solidFill>
-                          <a:latin typeface="Calibri"/>
-                        </a:rPr>
-                        <a:t>9</a:t>
-                      </a:r>
-                    </a:p>
-                  </a:txBody>
-                  <a:tcPr>
-                    <a:solidFill>
-                      <a:srgbClr val="FAFAFA"/>
-                    </a:solidFill>
-                  </a:tcPr>
-                </a:tc>
-                <a:tc>
-                  <a:txBody>
-                    <a:bodyPr/>
-                    <a:lstStyle/>
-                    <a:p>
-                      <a:pPr algn="ctr"/>
-                      <a:r>
-                        <a:rPr sz="950" b="1">
-                          <a:solidFill>
-                            <a:srgbClr val="A6001A"/>
-                          </a:solidFill>
-                          <a:latin typeface="Calibri"/>
-                        </a:rPr>
-                        <a:t>-11</a:t>
-                      </a:r>
-                    </a:p>
-                  </a:txBody>
-                  <a:tcPr>
-                    <a:solidFill>
-                      <a:srgbClr val="FAFAFA"/>
-                    </a:solidFill>
-                  </a:tcPr>
-                </a:tc>
-                <a:tc>
-                  <a:txBody>
-                    <a:bodyPr/>
-                    <a:lstStyle/>
-                    <a:p>
-                      <a:pPr algn="ctr"/>
-                      <a:r>
-                        <a:rPr sz="950" b="0">
-                          <a:solidFill>
-                            <a:srgbClr val="333333"/>
-                          </a:solidFill>
-                          <a:latin typeface="Calibri"/>
-                        </a:rPr>
-                        <a:t>50</a:t>
-                      </a:r>
-                    </a:p>
-                  </a:txBody>
-                  <a:tcPr>
-                    <a:solidFill>
-                      <a:srgbClr val="FDF2F3"/>
-                    </a:solidFill>
-                  </a:tcPr>
-                </a:tc>
-                <a:tc>
-                  <a:txBody>
-                    <a:bodyPr/>
-                    <a:lstStyle/>
-                    <a:p>
-                      <a:pPr algn="ctr"/>
-                      <a:r>
-                        <a:rPr sz="950" b="0">
-                          <a:solidFill>
-                            <a:srgbClr val="333333"/>
-                          </a:solidFill>
-                          <a:latin typeface="Calibri"/>
-                        </a:rPr>
-                        <a:t>35</a:t>
-                      </a:r>
-                    </a:p>
-                  </a:txBody>
-                  <a:tcPr>
-                    <a:solidFill>
-                      <a:srgbClr val="FDF2F3"/>
-                    </a:solidFill>
-                  </a:tcPr>
-                </a:tc>
-                <a:tc>
-                  <a:txBody>
-                    <a:bodyPr/>
-                    <a:lstStyle/>
-                    <a:p>
-                      <a:pPr algn="ctr"/>
-                      <a:r>
-                        <a:rPr sz="950" b="1">
-                          <a:solidFill>
-                            <a:srgbClr val="A6001A"/>
-                          </a:solidFill>
-                          <a:latin typeface="Calibri"/>
-                        </a:rPr>
-                        <a:t>-15</a:t>
-                      </a:r>
-                    </a:p>
-                  </a:txBody>
-                  <a:tcPr>
-                    <a:solidFill>
-                      <a:srgbClr val="FDF2F3"/>
-                    </a:solidFill>
-                  </a:tcPr>
-                </a:tc>
-              </a:tr>
-              <a:tr h="201168">
-                <a:tc>
-                  <a:txBody>
-                    <a:bodyPr/>
-                    <a:lstStyle/>
-                    <a:p>
-                      <a:pPr algn="l"/>
-                      <a:r>
-                        <a:rPr sz="950" b="1">
-                          <a:solidFill>
-                            <a:srgbClr val="333333"/>
-                          </a:solidFill>
-                          <a:latin typeface="Calibri"/>
-                        </a:rPr>
-                        <a:t>TOPLAM</a:t>
+                        <a:t>-14</a:t>
                       </a:r>
                     </a:p>
                   </a:txBody>
@@ -14122,13 +14724,13 @@
                     <a:p>
                       <a:pPr algn="ctr"/>
                       <a:r>
-                        <a:rPr sz="950" b="1">
-                          <a:solidFill>
-                            <a:srgbClr val="333333"/>
-                          </a:solidFill>
-                          <a:latin typeface="Calibri"/>
-                        </a:rPr>
-                        <a:t>145</a:t>
+                        <a:rPr sz="900" b="1">
+                          <a:solidFill>
+                            <a:srgbClr val="333333"/>
+                          </a:solidFill>
+                          <a:latin typeface="Calibri"/>
+                        </a:rPr>
+                        <a:t>217</a:t>
                       </a:r>
                     </a:p>
                   </a:txBody>
@@ -14145,13 +14747,13 @@
                     <a:p>
                       <a:pPr algn="ctr"/>
                       <a:r>
-                        <a:rPr sz="950" b="1">
-                          <a:solidFill>
-                            <a:srgbClr val="333333"/>
-                          </a:solidFill>
-                          <a:latin typeface="Calibri"/>
-                        </a:rPr>
-                        <a:t>137</a:t>
+                        <a:rPr sz="900" b="1">
+                          <a:solidFill>
+                            <a:srgbClr val="333333"/>
+                          </a:solidFill>
+                          <a:latin typeface="Calibri"/>
+                        </a:rPr>
+                        <a:t>195</a:t>
                       </a:r>
                     </a:p>
                   </a:txBody>
@@ -14168,145 +14770,7 @@
                     <a:p>
                       <a:pPr algn="ctr"/>
                       <a:r>
-                        <a:rPr sz="950" b="1">
-                          <a:solidFill>
-                            <a:srgbClr val="A6001A"/>
-                          </a:solidFill>
-                          <a:latin typeface="Calibri"/>
-                        </a:rPr>
-                        <a:t>-8</a:t>
-                      </a:r>
-                    </a:p>
-                  </a:txBody>
-                  <a:tcPr>
-                    <a:solidFill>
-                      <a:srgbClr val="F2F2F2"/>
-                    </a:solidFill>
-                  </a:tcPr>
-                </a:tc>
-                <a:tc>
-                  <a:txBody>
-                    <a:bodyPr/>
-                    <a:lstStyle/>
-                    <a:p>
-                      <a:pPr algn="ctr"/>
-                      <a:r>
-                        <a:rPr sz="950" b="1">
-                          <a:solidFill>
-                            <a:srgbClr val="333333"/>
-                          </a:solidFill>
-                          <a:latin typeface="Calibri"/>
-                        </a:rPr>
-                        <a:t>72</a:t>
-                      </a:r>
-                    </a:p>
-                  </a:txBody>
-                  <a:tcPr>
-                    <a:solidFill>
-                      <a:srgbClr val="F2F2F2"/>
-                    </a:solidFill>
-                  </a:tcPr>
-                </a:tc>
-                <a:tc>
-                  <a:txBody>
-                    <a:bodyPr/>
-                    <a:lstStyle/>
-                    <a:p>
-                      <a:pPr algn="ctr"/>
-                      <a:r>
-                        <a:rPr sz="950" b="1">
-                          <a:solidFill>
-                            <a:srgbClr val="333333"/>
-                          </a:solidFill>
-                          <a:latin typeface="Calibri"/>
-                        </a:rPr>
-                        <a:t>58</a:t>
-                      </a:r>
-                    </a:p>
-                  </a:txBody>
-                  <a:tcPr>
-                    <a:solidFill>
-                      <a:srgbClr val="F2F2F2"/>
-                    </a:solidFill>
-                  </a:tcPr>
-                </a:tc>
-                <a:tc>
-                  <a:txBody>
-                    <a:bodyPr/>
-                    <a:lstStyle/>
-                    <a:p>
-                      <a:pPr algn="ctr"/>
-                      <a:r>
-                        <a:rPr sz="950" b="1">
-                          <a:solidFill>
-                            <a:srgbClr val="A6001A"/>
-                          </a:solidFill>
-                          <a:latin typeface="Calibri"/>
-                        </a:rPr>
-                        <a:t>-14</a:t>
-                      </a:r>
-                    </a:p>
-                  </a:txBody>
-                  <a:tcPr>
-                    <a:solidFill>
-                      <a:srgbClr val="F2F2F2"/>
-                    </a:solidFill>
-                  </a:tcPr>
-                </a:tc>
-                <a:tc>
-                  <a:txBody>
-                    <a:bodyPr/>
-                    <a:lstStyle/>
-                    <a:p>
-                      <a:pPr algn="ctr"/>
-                      <a:r>
-                        <a:rPr sz="950" b="1">
-                          <a:solidFill>
-                            <a:srgbClr val="333333"/>
-                          </a:solidFill>
-                          <a:latin typeface="Calibri"/>
-                        </a:rPr>
-                        <a:t>217</a:t>
-                      </a:r>
-                    </a:p>
-                  </a:txBody>
-                  <a:tcPr>
-                    <a:solidFill>
-                      <a:srgbClr val="F2F2F2"/>
-                    </a:solidFill>
-                  </a:tcPr>
-                </a:tc>
-                <a:tc>
-                  <a:txBody>
-                    <a:bodyPr/>
-                    <a:lstStyle/>
-                    <a:p>
-                      <a:pPr algn="ctr"/>
-                      <a:r>
-                        <a:rPr sz="950" b="1">
-                          <a:solidFill>
-                            <a:srgbClr val="333333"/>
-                          </a:solidFill>
-                          <a:latin typeface="Calibri"/>
-                        </a:rPr>
-                        <a:t>195</a:t>
-                      </a:r>
-                    </a:p>
-                  </a:txBody>
-                  <a:tcPr>
-                    <a:solidFill>
-                      <a:srgbClr val="F2F2F2"/>
-                    </a:solidFill>
-                  </a:tcPr>
-                </a:tc>
-                <a:tc>
-                  <a:txBody>
-                    <a:bodyPr/>
-                    <a:lstStyle/>
-                    <a:p>
-                      <a:pPr algn="ctr"/>
-                      <a:r>
-                        <a:rPr sz="950" b="1">
+                        <a:rPr sz="900" b="1">
                           <a:solidFill>
                             <a:srgbClr val="A6001A"/>
                           </a:solidFill>
@@ -14335,8 +14799,8 @@
         </p:nvSpPr>
         <p:spPr>
           <a:xfrm>
-            <a:off x="548640" y="4956048"/>
-            <a:ext cx="11018520" cy="274320"/>
+            <a:off x="548640" y="5120640"/>
+            <a:ext cx="11018520" cy="201168"/>
           </a:xfrm>
           <a:prstGeom prst="rect">
             <a:avLst/>
@@ -14355,13 +14819,13 @@
               </a:lnSpc>
             </a:pPr>
             <a:r>
-              <a:rPr sz="900" b="0">
+              <a:rPr sz="850" b="0">
                 <a:solidFill>
                   <a:srgbClr val="6E6E6E"/>
                 </a:solidFill>
                 <a:latin typeface="Calibri"/>
               </a:rPr>
-              <a:t>Bunlardan: ETKİNLİK 3 kişi (FSM 1 · İst. Yolu 1 · Özlüce 1) — norm tablosunda 0 tanımlı · ENGELLİ (teşvik izli) 3 kişi (FSM 1 · İst. Yolu 2) — norma dahil, düşülmedi · her ikisi yukarıdaki mağaza satırlarının İÇİNDE sayılıdır.</a:t>
+              <a:t>** Engelli mağaza satırlarından düşülmedi (norm tablosu engelliyi departmanlara dağıtmış) · Heykel ve Şura'da engelli kadro YOK: 50 çalışan altı, 4857/30 yükümlülüğü doğmuyor.</a:t>
             </a:r>
           </a:p>
         </p:txBody>
@@ -14374,8 +14838,8 @@
         </p:nvSpPr>
         <p:spPr>
           <a:xfrm>
-            <a:off x="548640" y="5230368"/>
-            <a:ext cx="11018520" cy="384048"/>
+            <a:off x="548640" y="5340096"/>
+            <a:ext cx="11018520" cy="274320"/>
           </a:xfrm>
           <a:prstGeom prst="roundRect">
             <a:avLst/>
@@ -14420,8 +14884,8 @@
         </p:nvSpPr>
         <p:spPr>
           <a:xfrm>
-            <a:off x="822960" y="5230368"/>
-            <a:ext cx="10607040" cy="384048"/>
+            <a:off x="822960" y="5340096"/>
+            <a:ext cx="10607040" cy="274320"/>
           </a:xfrm>
           <a:prstGeom prst="rect">
             <a:avLst/>
@@ -14440,13 +14904,13 @@
               </a:lnSpc>
             </a:pPr>
             <a:r>
-              <a:rPr sz="1150" b="1">
+              <a:rPr sz="1050" b="1">
                 <a:solidFill>
                   <a:srgbClr val="A6001A"/>
                 </a:solidFill>
                 <a:latin typeface="Calibri"/>
               </a:rPr>
-              <a:t>Şirketin kendi norm tablosuna göre 31 Ağustos'ta toplam personel 22 kişi EKSİK (norm 217 · gerçek 195): kadrolu -8, sezonluk -14.</a:t>
+              <a:t>Şirketin kendi norm tablosuna göre 31 Ağustos'ta toplam personel 22 kişi EKSİK (norm 217 · gerçek 195): kadrolu -8, sezonluk -14 — etkinlik hariç kadrolu açığı -11.</a:t>
             </a:r>
           </a:p>
         </p:txBody>
@@ -14485,7 +14949,7 @@
                 </a:solidFill>
                 <a:latin typeface="Calibri"/>
               </a:rPr>
-              <a:t>* ENGELLİ kadro norm tablosuna DAHİL (düşülmedi; ölçülen teşvik izi 3 kişi — Heykel/Şura ayrı firma olduğu için tespit edilemiyor, alt sınır) · ETKİNLİK normda 0 tanımlı ama kadroda 3 kişi var; düşülürse kadrolu açık −8 yerine −11 olur · Norm kaynağı: BKMKİTAP Mağaza Kadro ve Sezon Takip Tablosu, 11.08.2026 (norm-kadro-20260811.json) — kadrolu normu departman bazında, sezonluk normu mağaza toplamı olarak verir; engelli kadro dahildir · Kapsam dışı: Şura norm tablosunda yok · Gerçek sayılar 31.08 as-of.</a:t>
+              <a:t>* ETKİNLİK normda 0 tanımlı olduğu için mağaza satırlarından DÜŞÜLDÜ — düşülünce kadrolu açığı −8 yerine −11 · ENGELLİ norma dahil olduğundan düşülmedi, ayrı satırda bilgi olarak verildi (FSM 1 · İst. Yolu 2; Heykel/Şura 50 çalışan altı olduğu için yükümlülük yok) · Norm kaynağı: BKMKİTAP Mağaza Kadro ve Sezon Takip Tablosu, 11.08.2026 · Kapsam dışı: Şura norm tablosunda yok · Gerçek sayılar 31.08 as-of.</a:t>
             </a:r>
           </a:p>
         </p:txBody>
@@ -15327,7 +15791,7 @@
                           </a:solidFill>
                           <a:latin typeface="Calibri"/>
                         </a:rPr>
-                        <a:t>Akademi</a:t>
+                        <a:t>Kasa</a:t>
                       </a:r>
                     </a:p>
                   </a:txBody>
@@ -15350,7 +15814,7 @@
                           </a:solidFill>
                           <a:latin typeface="Calibri"/>
                         </a:rPr>
-                        <a:t>10</a:t>
+                        <a:t>16</a:t>
                       </a:r>
                     </a:p>
                   </a:txBody>
@@ -15373,76 +15837,76 @@
                           </a:solidFill>
                           <a:latin typeface="Calibri"/>
                         </a:rPr>
+                        <a:t>15</a:t>
+                      </a:r>
+                    </a:p>
+                  </a:txBody>
+                  <a:tcPr>
+                    <a:solidFill>
+                      <a:srgbClr val="FFFFFF"/>
+                    </a:solidFill>
+                  </a:tcPr>
+                </a:tc>
+                <a:tc>
+                  <a:txBody>
+                    <a:bodyPr/>
+                    <a:lstStyle/>
+                    <a:p>
+                      <a:pPr algn="ctr"/>
+                      <a:r>
+                        <a:rPr sz="950" b="1">
+                          <a:solidFill>
+                            <a:srgbClr val="A6001A"/>
+                          </a:solidFill>
+                          <a:latin typeface="Calibri"/>
+                        </a:rPr>
+                        <a:t>1</a:t>
+                      </a:r>
+                    </a:p>
+                  </a:txBody>
+                  <a:tcPr>
+                    <a:solidFill>
+                      <a:srgbClr val="FFFFFF"/>
+                    </a:solidFill>
+                  </a:tcPr>
+                </a:tc>
+                <a:tc>
+                  <a:txBody>
+                    <a:bodyPr/>
+                    <a:lstStyle/>
+                    <a:p>
+                      <a:pPr algn="ctr"/>
+                      <a:r>
+                        <a:rPr sz="950" b="0">
+                          <a:solidFill>
+                            <a:srgbClr val="333333"/>
+                          </a:solidFill>
+                          <a:latin typeface="Calibri"/>
+                        </a:rPr>
+                        <a:t>—</a:t>
+                      </a:r>
+                    </a:p>
+                  </a:txBody>
+                  <a:tcPr>
+                    <a:solidFill>
+                      <a:srgbClr val="FFFFFF"/>
+                    </a:solidFill>
+                  </a:tcPr>
+                </a:tc>
+                <a:tc>
+                  <a:txBody>
+                    <a:bodyPr/>
+                    <a:lstStyle/>
+                    <a:p>
+                      <a:pPr algn="ctr"/>
+                      <a:r>
+                        <a:rPr sz="950" b="0">
+                          <a:solidFill>
+                            <a:srgbClr val="333333"/>
+                          </a:solidFill>
+                          <a:latin typeface="Calibri"/>
+                        </a:rPr>
                         <a:t>9</a:t>
-                      </a:r>
-                    </a:p>
-                  </a:txBody>
-                  <a:tcPr>
-                    <a:solidFill>
-                      <a:srgbClr val="FFFFFF"/>
-                    </a:solidFill>
-                  </a:tcPr>
-                </a:tc>
-                <a:tc>
-                  <a:txBody>
-                    <a:bodyPr/>
-                    <a:lstStyle/>
-                    <a:p>
-                      <a:pPr algn="ctr"/>
-                      <a:r>
-                        <a:rPr sz="950" b="1">
-                          <a:solidFill>
-                            <a:srgbClr val="A6001A"/>
-                          </a:solidFill>
-                          <a:latin typeface="Calibri"/>
-                        </a:rPr>
-                        <a:t>1</a:t>
-                      </a:r>
-                    </a:p>
-                  </a:txBody>
-                  <a:tcPr>
-                    <a:solidFill>
-                      <a:srgbClr val="FFFFFF"/>
-                    </a:solidFill>
-                  </a:tcPr>
-                </a:tc>
-                <a:tc>
-                  <a:txBody>
-                    <a:bodyPr/>
-                    <a:lstStyle/>
-                    <a:p>
-                      <a:pPr algn="ctr"/>
-                      <a:r>
-                        <a:rPr sz="950" b="0">
-                          <a:solidFill>
-                            <a:srgbClr val="333333"/>
-                          </a:solidFill>
-                          <a:latin typeface="Calibri"/>
-                        </a:rPr>
-                        <a:t>—</a:t>
-                      </a:r>
-                    </a:p>
-                  </a:txBody>
-                  <a:tcPr>
-                    <a:solidFill>
-                      <a:srgbClr val="FFFFFF"/>
-                    </a:solidFill>
-                  </a:tcPr>
-                </a:tc>
-                <a:tc>
-                  <a:txBody>
-                    <a:bodyPr/>
-                    <a:lstStyle/>
-                    <a:p>
-                      <a:pPr algn="ctr"/>
-                      <a:r>
-                        <a:rPr sz="950" b="0">
-                          <a:solidFill>
-                            <a:srgbClr val="333333"/>
-                          </a:solidFill>
-                          <a:latin typeface="Calibri"/>
-                        </a:rPr>
-                        <a:t>—</a:t>
                       </a:r>
                     </a:p>
                   </a:txBody>
@@ -15467,7 +15931,7 @@
                           </a:solidFill>
                           <a:latin typeface="Calibri"/>
                         </a:rPr>
-                        <a:t>Oyun Alanı</a:t>
+                        <a:t>Muhasebe</a:t>
                       </a:r>
                     </a:p>
                   </a:txBody>
@@ -15607,7 +16071,7 @@
                           </a:solidFill>
                           <a:latin typeface="Calibri"/>
                         </a:rPr>
-                        <a:t>Muhasebe</a:t>
+                        <a:t>Oyun Alanı</a:t>
                       </a:r>
                     </a:p>
                   </a:txBody>
@@ -15747,7 +16211,7 @@
                           </a:solidFill>
                           <a:latin typeface="Calibri"/>
                         </a:rPr>
-                        <a:t>Kasa</a:t>
+                        <a:t>Akademi</a:t>
                       </a:r>
                     </a:p>
                   </a:txBody>
@@ -15770,7 +16234,7 @@
                           </a:solidFill>
                           <a:latin typeface="Calibri"/>
                         </a:rPr>
-                        <a:t>16</a:t>
+                        <a:t>10</a:t>
                       </a:r>
                     </a:p>
                   </a:txBody>
@@ -15793,7 +16257,7 @@
                           </a:solidFill>
                           <a:latin typeface="Calibri"/>
                         </a:rPr>
-                        <a:t>15</a:t>
+                        <a:t>9</a:t>
                       </a:r>
                     </a:p>
                   </a:txBody>
@@ -15862,7 +16326,7 @@
                           </a:solidFill>
                           <a:latin typeface="Calibri"/>
                         </a:rPr>
-                        <a:t>9</a:t>
+                        <a:t>—</a:t>
                       </a:r>
                     </a:p>
                   </a:txBody>
@@ -15887,7 +16351,7 @@
                           </a:solidFill>
                           <a:latin typeface="Calibri"/>
                         </a:rPr>
-                        <a:t>Mal Kabul</a:t>
+                        <a:t>Kıyafet</a:t>
                       </a:r>
                     </a:p>
                   </a:txBody>
@@ -15910,7 +16374,7 @@
                           </a:solidFill>
                           <a:latin typeface="Calibri"/>
                         </a:rPr>
-                        <a:t>6</a:t>
+                        <a:t>0</a:t>
                       </a:r>
                     </a:p>
                   </a:txBody>
@@ -15933,7 +16397,7 @@
                           </a:solidFill>
                           <a:latin typeface="Calibri"/>
                         </a:rPr>
-                        <a:t>6</a:t>
+                        <a:t>0</a:t>
                       </a:r>
                     </a:p>
                   </a:txBody>
@@ -16002,7 +16466,7 @@
                           </a:solidFill>
                           <a:latin typeface="Calibri"/>
                         </a:rPr>
-                        <a:t>1</a:t>
+                        <a:t>4</a:t>
                       </a:r>
                     </a:p>
                   </a:txBody>
@@ -16027,7 +16491,7 @@
                           </a:solidFill>
                           <a:latin typeface="Calibri"/>
                         </a:rPr>
-                        <a:t>Yardımcı Kitap</a:t>
+                        <a:t>Kırtasiye</a:t>
                       </a:r>
                     </a:p>
                   </a:txBody>
@@ -16050,7 +16514,7 @@
                           </a:solidFill>
                           <a:latin typeface="Calibri"/>
                         </a:rPr>
-                        <a:t>18</a:t>
+                        <a:t>24</a:t>
                       </a:r>
                     </a:p>
                   </a:txBody>
@@ -16073,7 +16537,7 @@
                           </a:solidFill>
                           <a:latin typeface="Calibri"/>
                         </a:rPr>
-                        <a:t>21</a:t>
+                        <a:t>25</a:t>
                       </a:r>
                     </a:p>
                   </a:txBody>
@@ -16119,7 +16583,7 @@
                           </a:solidFill>
                           <a:latin typeface="Calibri"/>
                         </a:rPr>
-                        <a:t>3</a:t>
+                        <a:t>1</a:t>
                       </a:r>
                     </a:p>
                   </a:txBody>
@@ -16142,7 +16606,7 @@
                           </a:solidFill>
                           <a:latin typeface="Calibri"/>
                         </a:rPr>
-                        <a:t>15</a:t>
+                        <a:t>22</a:t>
                       </a:r>
                     </a:p>
                   </a:txBody>
@@ -16167,7 +16631,7 @@
                           </a:solidFill>
                           <a:latin typeface="Calibri"/>
                         </a:rPr>
-                        <a:t>Kıyafet</a:t>
+                        <a:t>Mal Kabul</a:t>
                       </a:r>
                     </a:p>
                   </a:txBody>
@@ -16190,7 +16654,7 @@
                           </a:solidFill>
                           <a:latin typeface="Calibri"/>
                         </a:rPr>
-                        <a:t>0</a:t>
+                        <a:t>6</a:t>
                       </a:r>
                     </a:p>
                   </a:txBody>
@@ -16213,7 +16677,7 @@
                           </a:solidFill>
                           <a:latin typeface="Calibri"/>
                         </a:rPr>
-                        <a:t>0</a:t>
+                        <a:t>6</a:t>
                       </a:r>
                     </a:p>
                   </a:txBody>
@@ -16282,7 +16746,7 @@
                           </a:solidFill>
                           <a:latin typeface="Calibri"/>
                         </a:rPr>
-                        <a:t>4</a:t>
+                        <a:t>1</a:t>
                       </a:r>
                     </a:p>
                   </a:txBody>
@@ -16307,7 +16771,7 @@
                           </a:solidFill>
                           <a:latin typeface="Calibri"/>
                         </a:rPr>
-                        <a:t>Oyuncak</a:t>
+                        <a:t>Yardımcı Kitap</a:t>
                       </a:r>
                     </a:p>
                   </a:txBody>
@@ -16330,7 +16794,7 @@
                           </a:solidFill>
                           <a:latin typeface="Calibri"/>
                         </a:rPr>
-                        <a:t>10</a:t>
+                        <a:t>18</a:t>
                       </a:r>
                     </a:p>
                   </a:txBody>
@@ -16353,7 +16817,7 @@
                           </a:solidFill>
                           <a:latin typeface="Calibri"/>
                         </a:rPr>
-                        <a:t>10</a:t>
+                        <a:t>21</a:t>
                       </a:r>
                     </a:p>
                   </a:txBody>
@@ -16399,7 +16863,7 @@
                           </a:solidFill>
                           <a:latin typeface="Calibri"/>
                         </a:rPr>
-                        <a:t>—</a:t>
+                        <a:t>3</a:t>
                       </a:r>
                     </a:p>
                   </a:txBody>
@@ -16422,7 +16886,7 @@
                           </a:solidFill>
                           <a:latin typeface="Calibri"/>
                         </a:rPr>
-                        <a:t>—</a:t>
+                        <a:t>15</a:t>
                       </a:r>
                     </a:p>
                   </a:txBody>
@@ -16447,7 +16911,7 @@
                           </a:solidFill>
                           <a:latin typeface="Calibri"/>
                         </a:rPr>
-                        <a:t>Kırtasiye</a:t>
+                        <a:t>Etkinlik</a:t>
                       </a:r>
                     </a:p>
                   </a:txBody>
@@ -16470,7 +16934,7 @@
                           </a:solidFill>
                           <a:latin typeface="Calibri"/>
                         </a:rPr>
-                        <a:t>24</a:t>
+                        <a:t>0</a:t>
                       </a:r>
                     </a:p>
                   </a:txBody>
@@ -16493,7 +16957,7 @@
                           </a:solidFill>
                           <a:latin typeface="Calibri"/>
                         </a:rPr>
-                        <a:t>25</a:t>
+                        <a:t>3</a:t>
                       </a:r>
                     </a:p>
                   </a:txBody>
@@ -16539,7 +17003,7 @@
                           </a:solidFill>
                           <a:latin typeface="Calibri"/>
                         </a:rPr>
-                        <a:t>1</a:t>
+                        <a:t>3</a:t>
                       </a:r>
                     </a:p>
                   </a:txBody>
@@ -16562,7 +17026,7 @@
                           </a:solidFill>
                           <a:latin typeface="Calibri"/>
                         </a:rPr>
-                        <a:t>22</a:t>
+                        <a:t>—</a:t>
                       </a:r>
                     </a:p>
                   </a:txBody>
@@ -16587,7 +17051,7 @@
                           </a:solidFill>
                           <a:latin typeface="Calibri"/>
                         </a:rPr>
-                        <a:t>Etkinlik</a:t>
+                        <a:t>Oyuncak</a:t>
                       </a:r>
                     </a:p>
                   </a:txBody>
@@ -16610,7 +17074,7 @@
                           </a:solidFill>
                           <a:latin typeface="Calibri"/>
                         </a:rPr>
-                        <a:t>0</a:t>
+                        <a:t>10</a:t>
                       </a:r>
                     </a:p>
                   </a:txBody>
@@ -16633,7 +17097,7 @@
                           </a:solidFill>
                           <a:latin typeface="Calibri"/>
                         </a:rPr>
-                        <a:t>3</a:t>
+                        <a:t>10</a:t>
                       </a:r>
                     </a:p>
                   </a:txBody>
@@ -16679,7 +17143,7 @@
                           </a:solidFill>
                           <a:latin typeface="Calibri"/>
                         </a:rPr>
-                        <a:t>3</a:t>
+                        <a:t>—</a:t>
                       </a:r>
                     </a:p>
                   </a:txBody>

--- a/briefings/sezon-kadro-20260902/sunum-kadro-sezon2026.pptx
+++ b/briefings/sezon-kadro-20260902/sunum-kadro-sezon2026.pptx
@@ -8144,13 +8144,13 @@
               </a:lnSpc>
             </a:pPr>
             <a:r>
-              <a:rPr sz="1200" b="1">
+              <a:rPr sz="1150" b="1">
                 <a:solidFill>
                   <a:srgbClr val="A6001A"/>
                 </a:solidFill>
                 <a:latin typeface="Calibri"/>
               </a:rPr>
-              <a:t>Norm 217 (kadrolu 145 + sezonluk 72) · gerçek 195 (kadrolu 137 + sezonluk 58) · fark -22 kişi — aşağıda mağaza ve grup kırılımı.</a:t>
+              <a:t>Norm 217 (kadrolu 145 + sezonluk 72) · operasyonel gerçek 189 (kadrolu 131 + sezonluk 58) · fark -28 kişi — engelli ve etkinlik norm dışı tutuldu.</a:t>
             </a:r>
           </a:p>
         </p:txBody>
@@ -8164,8 +8164,8 @@
           <p:nvPr/>
         </p:nvGraphicFramePr>
         <p:xfrm>
-          <a:off x="548640" y="1828800"/>
-          <a:ext cx="10515599" cy="1627632"/>
+          <a:off x="548640" y="1810512"/>
+          <a:ext cx="10515599" cy="1810512"/>
         </p:xfrm>
         <a:graphic>
           <a:graphicData uri="http://schemas.openxmlformats.org/drawingml/2006/table">
@@ -8781,7 +8781,7 @@
                           </a:solidFill>
                           <a:latin typeface="Calibri"/>
                         </a:rPr>
-                        <a:t>33</a:t>
+                        <a:t>32</a:t>
                       </a:r>
                     </a:p>
                   </a:txBody>
@@ -8804,145 +8804,145 @@
                           </a:solidFill>
                           <a:latin typeface="Calibri"/>
                         </a:rPr>
+                        <a:t>-5</a:t>
+                      </a:r>
+                    </a:p>
+                  </a:txBody>
+                  <a:tcPr>
+                    <a:solidFill>
+                      <a:srgbClr val="FAFAFA"/>
+                    </a:solidFill>
+                  </a:tcPr>
+                </a:tc>
+                <a:tc>
+                  <a:txBody>
+                    <a:bodyPr/>
+                    <a:lstStyle/>
+                    <a:p>
+                      <a:pPr algn="ctr"/>
+                      <a:r>
+                        <a:rPr sz="900" b="0">
+                          <a:solidFill>
+                            <a:srgbClr val="333333"/>
+                          </a:solidFill>
+                          <a:latin typeface="Calibri"/>
+                        </a:rPr>
+                        <a:t>10</a:t>
+                      </a:r>
+                    </a:p>
+                  </a:txBody>
+                  <a:tcPr>
+                    <a:solidFill>
+                      <a:srgbClr val="FAFAFA"/>
+                    </a:solidFill>
+                  </a:tcPr>
+                </a:tc>
+                <a:tc>
+                  <a:txBody>
+                    <a:bodyPr/>
+                    <a:lstStyle/>
+                    <a:p>
+                      <a:pPr algn="ctr"/>
+                      <a:r>
+                        <a:rPr sz="900" b="0">
+                          <a:solidFill>
+                            <a:srgbClr val="333333"/>
+                          </a:solidFill>
+                          <a:latin typeface="Calibri"/>
+                        </a:rPr>
+                        <a:t>11</a:t>
+                      </a:r>
+                    </a:p>
+                  </a:txBody>
+                  <a:tcPr>
+                    <a:solidFill>
+                      <a:srgbClr val="FAFAFA"/>
+                    </a:solidFill>
+                  </a:tcPr>
+                </a:tc>
+                <a:tc>
+                  <a:txBody>
+                    <a:bodyPr/>
+                    <a:lstStyle/>
+                    <a:p>
+                      <a:pPr algn="ctr"/>
+                      <a:r>
+                        <a:rPr sz="900" b="1">
+                          <a:solidFill>
+                            <a:srgbClr val="A6001A"/>
+                          </a:solidFill>
+                          <a:latin typeface="Calibri"/>
+                        </a:rPr>
+                        <a:t>+1</a:t>
+                      </a:r>
+                    </a:p>
+                  </a:txBody>
+                  <a:tcPr>
+                    <a:solidFill>
+                      <a:srgbClr val="FAFAFA"/>
+                    </a:solidFill>
+                  </a:tcPr>
+                </a:tc>
+                <a:tc>
+                  <a:txBody>
+                    <a:bodyPr/>
+                    <a:lstStyle/>
+                    <a:p>
+                      <a:pPr algn="ctr"/>
+                      <a:r>
+                        <a:rPr sz="900" b="0">
+                          <a:solidFill>
+                            <a:srgbClr val="333333"/>
+                          </a:solidFill>
+                          <a:latin typeface="Calibri"/>
+                        </a:rPr>
+                        <a:t>47</a:t>
+                      </a:r>
+                    </a:p>
+                  </a:txBody>
+                  <a:tcPr>
+                    <a:solidFill>
+                      <a:srgbClr val="FDF2F3"/>
+                    </a:solidFill>
+                  </a:tcPr>
+                </a:tc>
+                <a:tc>
+                  <a:txBody>
+                    <a:bodyPr/>
+                    <a:lstStyle/>
+                    <a:p>
+                      <a:pPr algn="ctr"/>
+                      <a:r>
+                        <a:rPr sz="900" b="0">
+                          <a:solidFill>
+                            <a:srgbClr val="333333"/>
+                          </a:solidFill>
+                          <a:latin typeface="Calibri"/>
+                        </a:rPr>
+                        <a:t>43</a:t>
+                      </a:r>
+                    </a:p>
+                  </a:txBody>
+                  <a:tcPr>
+                    <a:solidFill>
+                      <a:srgbClr val="FDF2F3"/>
+                    </a:solidFill>
+                  </a:tcPr>
+                </a:tc>
+                <a:tc>
+                  <a:txBody>
+                    <a:bodyPr/>
+                    <a:lstStyle/>
+                    <a:p>
+                      <a:pPr algn="ctr"/>
+                      <a:r>
+                        <a:rPr sz="900" b="1">
+                          <a:solidFill>
+                            <a:srgbClr val="A6001A"/>
+                          </a:solidFill>
+                          <a:latin typeface="Calibri"/>
+                        </a:rPr>
                         <a:t>-4</a:t>
-                      </a:r>
-                    </a:p>
-                  </a:txBody>
-                  <a:tcPr>
-                    <a:solidFill>
-                      <a:srgbClr val="FAFAFA"/>
-                    </a:solidFill>
-                  </a:tcPr>
-                </a:tc>
-                <a:tc>
-                  <a:txBody>
-                    <a:bodyPr/>
-                    <a:lstStyle/>
-                    <a:p>
-                      <a:pPr algn="ctr"/>
-                      <a:r>
-                        <a:rPr sz="900" b="0">
-                          <a:solidFill>
-                            <a:srgbClr val="333333"/>
-                          </a:solidFill>
-                          <a:latin typeface="Calibri"/>
-                        </a:rPr>
-                        <a:t>10</a:t>
-                      </a:r>
-                    </a:p>
-                  </a:txBody>
-                  <a:tcPr>
-                    <a:solidFill>
-                      <a:srgbClr val="FAFAFA"/>
-                    </a:solidFill>
-                  </a:tcPr>
-                </a:tc>
-                <a:tc>
-                  <a:txBody>
-                    <a:bodyPr/>
-                    <a:lstStyle/>
-                    <a:p>
-                      <a:pPr algn="ctr"/>
-                      <a:r>
-                        <a:rPr sz="900" b="0">
-                          <a:solidFill>
-                            <a:srgbClr val="333333"/>
-                          </a:solidFill>
-                          <a:latin typeface="Calibri"/>
-                        </a:rPr>
-                        <a:t>11</a:t>
-                      </a:r>
-                    </a:p>
-                  </a:txBody>
-                  <a:tcPr>
-                    <a:solidFill>
-                      <a:srgbClr val="FAFAFA"/>
-                    </a:solidFill>
-                  </a:tcPr>
-                </a:tc>
-                <a:tc>
-                  <a:txBody>
-                    <a:bodyPr/>
-                    <a:lstStyle/>
-                    <a:p>
-                      <a:pPr algn="ctr"/>
-                      <a:r>
-                        <a:rPr sz="900" b="1">
-                          <a:solidFill>
-                            <a:srgbClr val="A6001A"/>
-                          </a:solidFill>
-                          <a:latin typeface="Calibri"/>
-                        </a:rPr>
-                        <a:t>+1</a:t>
-                      </a:r>
-                    </a:p>
-                  </a:txBody>
-                  <a:tcPr>
-                    <a:solidFill>
-                      <a:srgbClr val="FAFAFA"/>
-                    </a:solidFill>
-                  </a:tcPr>
-                </a:tc>
-                <a:tc>
-                  <a:txBody>
-                    <a:bodyPr/>
-                    <a:lstStyle/>
-                    <a:p>
-                      <a:pPr algn="ctr"/>
-                      <a:r>
-                        <a:rPr sz="900" b="0">
-                          <a:solidFill>
-                            <a:srgbClr val="333333"/>
-                          </a:solidFill>
-                          <a:latin typeface="Calibri"/>
-                        </a:rPr>
-                        <a:t>47</a:t>
-                      </a:r>
-                    </a:p>
-                  </a:txBody>
-                  <a:tcPr>
-                    <a:solidFill>
-                      <a:srgbClr val="FDF2F3"/>
-                    </a:solidFill>
-                  </a:tcPr>
-                </a:tc>
-                <a:tc>
-                  <a:txBody>
-                    <a:bodyPr/>
-                    <a:lstStyle/>
-                    <a:p>
-                      <a:pPr algn="ctr"/>
-                      <a:r>
-                        <a:rPr sz="900" b="0">
-                          <a:solidFill>
-                            <a:srgbClr val="333333"/>
-                          </a:solidFill>
-                          <a:latin typeface="Calibri"/>
-                        </a:rPr>
-                        <a:t>44</a:t>
-                      </a:r>
-                    </a:p>
-                  </a:txBody>
-                  <a:tcPr>
-                    <a:solidFill>
-                      <a:srgbClr val="FDF2F3"/>
-                    </a:solidFill>
-                  </a:tcPr>
-                </a:tc>
-                <a:tc>
-                  <a:txBody>
-                    <a:bodyPr/>
-                    <a:lstStyle/>
-                    <a:p>
-                      <a:pPr algn="ctr"/>
-                      <a:r>
-                        <a:rPr sz="900" b="1">
-                          <a:solidFill>
-                            <a:srgbClr val="A6001A"/>
-                          </a:solidFill>
-                          <a:latin typeface="Calibri"/>
-                        </a:rPr>
-                        <a:t>-3</a:t>
                       </a:r>
                     </a:p>
                   </a:txBody>
@@ -9013,7 +9013,7 @@
                           </a:solidFill>
                           <a:latin typeface="Calibri"/>
                         </a:rPr>
-                        <a:t>35</a:t>
+                        <a:t>33</a:t>
                       </a:r>
                     </a:p>
                   </a:txBody>
@@ -9036,7 +9036,7 @@
                           </a:solidFill>
                           <a:latin typeface="Calibri"/>
                         </a:rPr>
-                        <a:t>+2</a:t>
+                        <a:t>+0</a:t>
                       </a:r>
                     </a:p>
                   </a:txBody>
@@ -9151,7 +9151,7 @@
                           </a:solidFill>
                           <a:latin typeface="Calibri"/>
                         </a:rPr>
-                        <a:t>60</a:t>
+                        <a:t>58</a:t>
                       </a:r>
                     </a:p>
                   </a:txBody>
@@ -9174,7 +9174,7 @@
                           </a:solidFill>
                           <a:latin typeface="Calibri"/>
                         </a:rPr>
-                        <a:t>+2</a:t>
+                        <a:t>+0</a:t>
                       </a:r>
                     </a:p>
                   </a:txBody>
@@ -9431,7 +9431,7 @@
                           </a:solidFill>
                           <a:latin typeface="Calibri"/>
                         </a:rPr>
-                        <a:t>Etkinlik (normda 0)</a:t>
+                        <a:t>Etkinlik (norm dışı)</a:t>
                       </a:r>
                     </a:p>
                   </a:txBody>
@@ -9454,6 +9454,98 @@
                           </a:solidFill>
                           <a:latin typeface="Calibri"/>
                         </a:rPr>
+                        <a:t>—</a:t>
+                      </a:r>
+                    </a:p>
+                  </a:txBody>
+                  <a:tcPr>
+                    <a:solidFill>
+                      <a:srgbClr val="FFF6E6"/>
+                    </a:solidFill>
+                  </a:tcPr>
+                </a:tc>
+                <a:tc>
+                  <a:txBody>
+                    <a:bodyPr/>
+                    <a:lstStyle/>
+                    <a:p>
+                      <a:pPr algn="ctr"/>
+                      <a:r>
+                        <a:rPr sz="900" b="0">
+                          <a:solidFill>
+                            <a:srgbClr val="333333"/>
+                          </a:solidFill>
+                          <a:latin typeface="Calibri"/>
+                        </a:rPr>
+                        <a:t>3</a:t>
+                      </a:r>
+                    </a:p>
+                  </a:txBody>
+                  <a:tcPr>
+                    <a:solidFill>
+                      <a:srgbClr val="FFF6E6"/>
+                    </a:solidFill>
+                  </a:tcPr>
+                </a:tc>
+                <a:tc>
+                  <a:txBody>
+                    <a:bodyPr/>
+                    <a:lstStyle/>
+                    <a:p>
+                      <a:pPr algn="ctr"/>
+                      <a:r>
+                        <a:rPr sz="900" b="1">
+                          <a:solidFill>
+                            <a:srgbClr val="A6001A"/>
+                          </a:solidFill>
+                          <a:latin typeface="Calibri"/>
+                        </a:rPr>
+                        <a:t>—</a:t>
+                      </a:r>
+                    </a:p>
+                  </a:txBody>
+                  <a:tcPr>
+                    <a:solidFill>
+                      <a:srgbClr val="FFF6E6"/>
+                    </a:solidFill>
+                  </a:tcPr>
+                </a:tc>
+                <a:tc>
+                  <a:txBody>
+                    <a:bodyPr/>
+                    <a:lstStyle/>
+                    <a:p>
+                      <a:pPr algn="ctr"/>
+                      <a:r>
+                        <a:rPr sz="900" b="0">
+                          <a:solidFill>
+                            <a:srgbClr val="333333"/>
+                          </a:solidFill>
+                          <a:latin typeface="Calibri"/>
+                        </a:rPr>
+                        <a:t>—</a:t>
+                      </a:r>
+                    </a:p>
+                  </a:txBody>
+                  <a:tcPr>
+                    <a:solidFill>
+                      <a:srgbClr val="FFF6E6"/>
+                    </a:solidFill>
+                  </a:tcPr>
+                </a:tc>
+                <a:tc>
+                  <a:txBody>
+                    <a:bodyPr/>
+                    <a:lstStyle/>
+                    <a:p>
+                      <a:pPr algn="ctr"/>
+                      <a:r>
+                        <a:rPr sz="900" b="0">
+                          <a:solidFill>
+                            <a:srgbClr val="333333"/>
+                          </a:solidFill>
+                          <a:latin typeface="Calibri"/>
+                        </a:rPr>
                         <a:t>0</a:t>
                       </a:r>
                     </a:p>
@@ -9471,12 +9563,58 @@
                     <a:p>
                       <a:pPr algn="ctr"/>
                       <a:r>
+                        <a:rPr sz="900" b="1">
+                          <a:solidFill>
+                            <a:srgbClr val="A6001A"/>
+                          </a:solidFill>
+                          <a:latin typeface="Calibri"/>
+                        </a:rPr>
+                        <a:t>—</a:t>
+                      </a:r>
+                    </a:p>
+                  </a:txBody>
+                  <a:tcPr>
+                    <a:solidFill>
+                      <a:srgbClr val="FFF6E6"/>
+                    </a:solidFill>
+                  </a:tcPr>
+                </a:tc>
+                <a:tc>
+                  <a:txBody>
+                    <a:bodyPr/>
+                    <a:lstStyle/>
+                    <a:p>
+                      <a:pPr algn="ctr"/>
+                      <a:r>
                         <a:rPr sz="900" b="0">
                           <a:solidFill>
                             <a:srgbClr val="333333"/>
                           </a:solidFill>
                           <a:latin typeface="Calibri"/>
                         </a:rPr>
+                        <a:t>—</a:t>
+                      </a:r>
+                    </a:p>
+                  </a:txBody>
+                  <a:tcPr>
+                    <a:solidFill>
+                      <a:srgbClr val="FFF6E6"/>
+                    </a:solidFill>
+                  </a:tcPr>
+                </a:tc>
+                <a:tc>
+                  <a:txBody>
+                    <a:bodyPr/>
+                    <a:lstStyle/>
+                    <a:p>
+                      <a:pPr algn="ctr"/>
+                      <a:r>
+                        <a:rPr sz="900" b="0">
+                          <a:solidFill>
+                            <a:srgbClr val="333333"/>
+                          </a:solidFill>
+                          <a:latin typeface="Calibri"/>
+                        </a:rPr>
                         <a:t>3</a:t>
                       </a:r>
                     </a:p>
@@ -9500,145 +9638,7 @@
                           </a:solidFill>
                           <a:latin typeface="Calibri"/>
                         </a:rPr>
-                        <a:t>+3</a:t>
-                      </a:r>
-                    </a:p>
-                  </a:txBody>
-                  <a:tcPr>
-                    <a:solidFill>
-                      <a:srgbClr val="FFF6E6"/>
-                    </a:solidFill>
-                  </a:tcPr>
-                </a:tc>
-                <a:tc>
-                  <a:txBody>
-                    <a:bodyPr/>
-                    <a:lstStyle/>
-                    <a:p>
-                      <a:pPr algn="ctr"/>
-                      <a:r>
-                        <a:rPr sz="900" b="0">
-                          <a:solidFill>
-                            <a:srgbClr val="333333"/>
-                          </a:solidFill>
-                          <a:latin typeface="Calibri"/>
-                        </a:rPr>
-                        <a:t>0</a:t>
-                      </a:r>
-                    </a:p>
-                  </a:txBody>
-                  <a:tcPr>
-                    <a:solidFill>
-                      <a:srgbClr val="FFF6E6"/>
-                    </a:solidFill>
-                  </a:tcPr>
-                </a:tc>
-                <a:tc>
-                  <a:txBody>
-                    <a:bodyPr/>
-                    <a:lstStyle/>
-                    <a:p>
-                      <a:pPr algn="ctr"/>
-                      <a:r>
-                        <a:rPr sz="900" b="0">
-                          <a:solidFill>
-                            <a:srgbClr val="333333"/>
-                          </a:solidFill>
-                          <a:latin typeface="Calibri"/>
-                        </a:rPr>
-                        <a:t>0</a:t>
-                      </a:r>
-                    </a:p>
-                  </a:txBody>
-                  <a:tcPr>
-                    <a:solidFill>
-                      <a:srgbClr val="FFF6E6"/>
-                    </a:solidFill>
-                  </a:tcPr>
-                </a:tc>
-                <a:tc>
-                  <a:txBody>
-                    <a:bodyPr/>
-                    <a:lstStyle/>
-                    <a:p>
-                      <a:pPr algn="ctr"/>
-                      <a:r>
-                        <a:rPr sz="900" b="1">
-                          <a:solidFill>
-                            <a:srgbClr val="A6001A"/>
-                          </a:solidFill>
-                          <a:latin typeface="Calibri"/>
-                        </a:rPr>
-                        <a:t>0</a:t>
-                      </a:r>
-                    </a:p>
-                  </a:txBody>
-                  <a:tcPr>
-                    <a:solidFill>
-                      <a:srgbClr val="FFF6E6"/>
-                    </a:solidFill>
-                  </a:tcPr>
-                </a:tc>
-                <a:tc>
-                  <a:txBody>
-                    <a:bodyPr/>
-                    <a:lstStyle/>
-                    <a:p>
-                      <a:pPr algn="ctr"/>
-                      <a:r>
-                        <a:rPr sz="900" b="0">
-                          <a:solidFill>
-                            <a:srgbClr val="333333"/>
-                          </a:solidFill>
-                          <a:latin typeface="Calibri"/>
-                        </a:rPr>
-                        <a:t>0</a:t>
-                      </a:r>
-                    </a:p>
-                  </a:txBody>
-                  <a:tcPr>
-                    <a:solidFill>
-                      <a:srgbClr val="FFF6E6"/>
-                    </a:solidFill>
-                  </a:tcPr>
-                </a:tc>
-                <a:tc>
-                  <a:txBody>
-                    <a:bodyPr/>
-                    <a:lstStyle/>
-                    <a:p>
-                      <a:pPr algn="ctr"/>
-                      <a:r>
-                        <a:rPr sz="900" b="0">
-                          <a:solidFill>
-                            <a:srgbClr val="333333"/>
-                          </a:solidFill>
-                          <a:latin typeface="Calibri"/>
-                        </a:rPr>
-                        <a:t>3</a:t>
-                      </a:r>
-                    </a:p>
-                  </a:txBody>
-                  <a:tcPr>
-                    <a:solidFill>
-                      <a:srgbClr val="FFF6E6"/>
-                    </a:solidFill>
-                  </a:tcPr>
-                </a:tc>
-                <a:tc>
-                  <a:txBody>
-                    <a:bodyPr/>
-                    <a:lstStyle/>
-                    <a:p>
-                      <a:pPr algn="ctr"/>
-                      <a:r>
-                        <a:rPr sz="900" b="1">
-                          <a:solidFill>
-                            <a:srgbClr val="A6001A"/>
-                          </a:solidFill>
-                          <a:latin typeface="Calibri"/>
-                        </a:rPr>
-                        <a:t>+3</a:t>
+                        <a:t>—</a:t>
                       </a:r>
                     </a:p>
                   </a:txBody>
@@ -9663,7 +9663,7 @@
                           </a:solidFill>
                           <a:latin typeface="Calibri"/>
                         </a:rPr>
-                        <a:t>Engelli ** (norma dahil)</a:t>
+                        <a:t>Engelli ** (norm dışı)</a:t>
                       </a:r>
                     </a:p>
                   </a:txBody>
@@ -9686,7 +9686,7 @@
                           </a:solidFill>
                           <a:latin typeface="Calibri"/>
                         </a:rPr>
-                        <a:t>dahil</a:t>
+                        <a:t>—</a:t>
                       </a:r>
                     </a:p>
                   </a:txBody>
@@ -9824,7 +9824,7 @@
                           </a:solidFill>
                           <a:latin typeface="Calibri"/>
                         </a:rPr>
-                        <a:t>dahil</a:t>
+                        <a:t>—</a:t>
                       </a:r>
                     </a:p>
                   </a:txBody>
@@ -9895,7 +9895,7 @@
                           </a:solidFill>
                           <a:latin typeface="Calibri"/>
                         </a:rPr>
-                        <a:t>GENEL TOPLAM</a:t>
+                        <a:t>OPERASYONEL TOPLAM</a:t>
                       </a:r>
                     </a:p>
                   </a:txBody>
@@ -9941,13 +9941,245 @@
                           </a:solidFill>
                           <a:latin typeface="Calibri"/>
                         </a:rPr>
+                        <a:t>131</a:t>
+                      </a:r>
+                    </a:p>
+                  </a:txBody>
+                  <a:tcPr>
+                    <a:solidFill>
+                      <a:srgbClr val="F2F2F2"/>
+                    </a:solidFill>
+                  </a:tcPr>
+                </a:tc>
+                <a:tc>
+                  <a:txBody>
+                    <a:bodyPr/>
+                    <a:lstStyle/>
+                    <a:p>
+                      <a:pPr algn="ctr"/>
+                      <a:r>
+                        <a:rPr sz="900" b="1">
+                          <a:solidFill>
+                            <a:srgbClr val="A6001A"/>
+                          </a:solidFill>
+                          <a:latin typeface="Calibri"/>
+                        </a:rPr>
+                        <a:t>-14</a:t>
+                      </a:r>
+                    </a:p>
+                  </a:txBody>
+                  <a:tcPr>
+                    <a:solidFill>
+                      <a:srgbClr val="F2F2F2"/>
+                    </a:solidFill>
+                  </a:tcPr>
+                </a:tc>
+                <a:tc>
+                  <a:txBody>
+                    <a:bodyPr/>
+                    <a:lstStyle/>
+                    <a:p>
+                      <a:pPr algn="ctr"/>
+                      <a:r>
+                        <a:rPr sz="900" b="1">
+                          <a:solidFill>
+                            <a:srgbClr val="333333"/>
+                          </a:solidFill>
+                          <a:latin typeface="Calibri"/>
+                        </a:rPr>
+                        <a:t>72</a:t>
+                      </a:r>
+                    </a:p>
+                  </a:txBody>
+                  <a:tcPr>
+                    <a:solidFill>
+                      <a:srgbClr val="F2F2F2"/>
+                    </a:solidFill>
+                  </a:tcPr>
+                </a:tc>
+                <a:tc>
+                  <a:txBody>
+                    <a:bodyPr/>
+                    <a:lstStyle/>
+                    <a:p>
+                      <a:pPr algn="ctr"/>
+                      <a:r>
+                        <a:rPr sz="900" b="1">
+                          <a:solidFill>
+                            <a:srgbClr val="333333"/>
+                          </a:solidFill>
+                          <a:latin typeface="Calibri"/>
+                        </a:rPr>
+                        <a:t>58</a:t>
+                      </a:r>
+                    </a:p>
+                  </a:txBody>
+                  <a:tcPr>
+                    <a:solidFill>
+                      <a:srgbClr val="F2F2F2"/>
+                    </a:solidFill>
+                  </a:tcPr>
+                </a:tc>
+                <a:tc>
+                  <a:txBody>
+                    <a:bodyPr/>
+                    <a:lstStyle/>
+                    <a:p>
+                      <a:pPr algn="ctr"/>
+                      <a:r>
+                        <a:rPr sz="900" b="1">
+                          <a:solidFill>
+                            <a:srgbClr val="A6001A"/>
+                          </a:solidFill>
+                          <a:latin typeface="Calibri"/>
+                        </a:rPr>
+                        <a:t>-14</a:t>
+                      </a:r>
+                    </a:p>
+                  </a:txBody>
+                  <a:tcPr>
+                    <a:solidFill>
+                      <a:srgbClr val="F2F2F2"/>
+                    </a:solidFill>
+                  </a:tcPr>
+                </a:tc>
+                <a:tc>
+                  <a:txBody>
+                    <a:bodyPr/>
+                    <a:lstStyle/>
+                    <a:p>
+                      <a:pPr algn="ctr"/>
+                      <a:r>
+                        <a:rPr sz="900" b="1">
+                          <a:solidFill>
+                            <a:srgbClr val="333333"/>
+                          </a:solidFill>
+                          <a:latin typeface="Calibri"/>
+                        </a:rPr>
+                        <a:t>217</a:t>
+                      </a:r>
+                    </a:p>
+                  </a:txBody>
+                  <a:tcPr>
+                    <a:solidFill>
+                      <a:srgbClr val="F2F2F2"/>
+                    </a:solidFill>
+                  </a:tcPr>
+                </a:tc>
+                <a:tc>
+                  <a:txBody>
+                    <a:bodyPr/>
+                    <a:lstStyle/>
+                    <a:p>
+                      <a:pPr algn="ctr"/>
+                      <a:r>
+                        <a:rPr sz="900" b="1">
+                          <a:solidFill>
+                            <a:srgbClr val="333333"/>
+                          </a:solidFill>
+                          <a:latin typeface="Calibri"/>
+                        </a:rPr>
+                        <a:t>189</a:t>
+                      </a:r>
+                    </a:p>
+                  </a:txBody>
+                  <a:tcPr>
+                    <a:solidFill>
+                      <a:srgbClr val="F2F2F2"/>
+                    </a:solidFill>
+                  </a:tcPr>
+                </a:tc>
+                <a:tc>
+                  <a:txBody>
+                    <a:bodyPr/>
+                    <a:lstStyle/>
+                    <a:p>
+                      <a:pPr algn="ctr"/>
+                      <a:r>
+                        <a:rPr sz="900" b="1">
+                          <a:solidFill>
+                            <a:srgbClr val="A6001A"/>
+                          </a:solidFill>
+                          <a:latin typeface="Calibri"/>
+                        </a:rPr>
+                        <a:t>-28</a:t>
+                      </a:r>
+                    </a:p>
+                  </a:txBody>
+                  <a:tcPr>
+                    <a:solidFill>
+                      <a:srgbClr val="F2F2F2"/>
+                    </a:solidFill>
+                  </a:tcPr>
+                </a:tc>
+              </a:tr>
+              <a:tr h="182880">
+                <a:tc>
+                  <a:txBody>
+                    <a:bodyPr/>
+                    <a:lstStyle/>
+                    <a:p>
+                      <a:pPr algn="l"/>
+                      <a:r>
+                        <a:rPr sz="900" b="0">
+                          <a:solidFill>
+                            <a:srgbClr val="333333"/>
+                          </a:solidFill>
+                          <a:latin typeface="Calibri"/>
+                        </a:rPr>
+                        <a:t>Kayıt toplamı (İK, tüm gruplar)</a:t>
+                      </a:r>
+                    </a:p>
+                  </a:txBody>
+                  <a:tcPr>
+                    <a:solidFill>
+                      <a:srgbClr val="FFF6E6"/>
+                    </a:solidFill>
+                  </a:tcPr>
+                </a:tc>
+                <a:tc>
+                  <a:txBody>
+                    <a:bodyPr/>
+                    <a:lstStyle/>
+                    <a:p>
+                      <a:pPr algn="ctr"/>
+                      <a:r>
+                        <a:rPr sz="900" b="0">
+                          <a:solidFill>
+                            <a:srgbClr val="333333"/>
+                          </a:solidFill>
+                          <a:latin typeface="Calibri"/>
+                        </a:rPr>
+                        <a:t>—</a:t>
+                      </a:r>
+                    </a:p>
+                  </a:txBody>
+                  <a:tcPr>
+                    <a:solidFill>
+                      <a:srgbClr val="FFF6E6"/>
+                    </a:solidFill>
+                  </a:tcPr>
+                </a:tc>
+                <a:tc>
+                  <a:txBody>
+                    <a:bodyPr/>
+                    <a:lstStyle/>
+                    <a:p>
+                      <a:pPr algn="ctr"/>
+                      <a:r>
+                        <a:rPr sz="900" b="0">
+                          <a:solidFill>
+                            <a:srgbClr val="333333"/>
+                          </a:solidFill>
+                          <a:latin typeface="Calibri"/>
+                        </a:rPr>
                         <a:t>137</a:t>
                       </a:r>
                     </a:p>
                   </a:txBody>
                   <a:tcPr>
                     <a:solidFill>
-                      <a:srgbClr val="F2F2F2"/>
+                      <a:srgbClr val="FFF6E6"/>
                     </a:solidFill>
                   </a:tcPr>
                 </a:tc>
@@ -9964,13 +10196,59 @@
                           </a:solidFill>
                           <a:latin typeface="Calibri"/>
                         </a:rPr>
-                        <a:t>-8</a:t>
-                      </a:r>
-                    </a:p>
-                  </a:txBody>
-                  <a:tcPr>
-                    <a:solidFill>
-                      <a:srgbClr val="F2F2F2"/>
+                        <a:t>—</a:t>
+                      </a:r>
+                    </a:p>
+                  </a:txBody>
+                  <a:tcPr>
+                    <a:solidFill>
+                      <a:srgbClr val="FFF6E6"/>
+                    </a:solidFill>
+                  </a:tcPr>
+                </a:tc>
+                <a:tc>
+                  <a:txBody>
+                    <a:bodyPr/>
+                    <a:lstStyle/>
+                    <a:p>
+                      <a:pPr algn="ctr"/>
+                      <a:r>
+                        <a:rPr sz="900" b="0">
+                          <a:solidFill>
+                            <a:srgbClr val="333333"/>
+                          </a:solidFill>
+                          <a:latin typeface="Calibri"/>
+                        </a:rPr>
+                        <a:t>—</a:t>
+                      </a:r>
+                    </a:p>
+                  </a:txBody>
+                  <a:tcPr>
+                    <a:solidFill>
+                      <a:srgbClr val="FFF6E6"/>
+                    </a:solidFill>
+                  </a:tcPr>
+                </a:tc>
+                <a:tc>
+                  <a:txBody>
+                    <a:bodyPr/>
+                    <a:lstStyle/>
+                    <a:p>
+                      <a:pPr algn="ctr"/>
+                      <a:r>
+                        <a:rPr sz="900" b="0">
+                          <a:solidFill>
+                            <a:srgbClr val="333333"/>
+                          </a:solidFill>
+                          <a:latin typeface="Calibri"/>
+                        </a:rPr>
+                        <a:t>58</a:t>
+                      </a:r>
+                    </a:p>
+                  </a:txBody>
+                  <a:tcPr>
+                    <a:solidFill>
+                      <a:srgbClr val="FFF6E6"/>
                     </a:solidFill>
                   </a:tcPr>
                 </a:tc>
@@ -9983,17 +10261,63 @@
                       <a:r>
                         <a:rPr sz="900" b="1">
                           <a:solidFill>
+                            <a:srgbClr val="A6001A"/>
+                          </a:solidFill>
+                          <a:latin typeface="Calibri"/>
+                        </a:rPr>
+                        <a:t>—</a:t>
+                      </a:r>
+                    </a:p>
+                  </a:txBody>
+                  <a:tcPr>
+                    <a:solidFill>
+                      <a:srgbClr val="FFF6E6"/>
+                    </a:solidFill>
+                  </a:tcPr>
+                </a:tc>
+                <a:tc>
+                  <a:txBody>
+                    <a:bodyPr/>
+                    <a:lstStyle/>
+                    <a:p>
+                      <a:pPr algn="ctr"/>
+                      <a:r>
+                        <a:rPr sz="900" b="0">
+                          <a:solidFill>
                             <a:srgbClr val="333333"/>
                           </a:solidFill>
                           <a:latin typeface="Calibri"/>
                         </a:rPr>
-                        <a:t>72</a:t>
-                      </a:r>
-                    </a:p>
-                  </a:txBody>
-                  <a:tcPr>
-                    <a:solidFill>
-                      <a:srgbClr val="F2F2F2"/>
+                        <a:t>—</a:t>
+                      </a:r>
+                    </a:p>
+                  </a:txBody>
+                  <a:tcPr>
+                    <a:solidFill>
+                      <a:srgbClr val="FFF6E6"/>
+                    </a:solidFill>
+                  </a:tcPr>
+                </a:tc>
+                <a:tc>
+                  <a:txBody>
+                    <a:bodyPr/>
+                    <a:lstStyle/>
+                    <a:p>
+                      <a:pPr algn="ctr"/>
+                      <a:r>
+                        <a:rPr sz="900" b="0">
+                          <a:solidFill>
+                            <a:srgbClr val="333333"/>
+                          </a:solidFill>
+                          <a:latin typeface="Calibri"/>
+                        </a:rPr>
+                        <a:t>195</a:t>
+                      </a:r>
+                    </a:p>
+                  </a:txBody>
+                  <a:tcPr>
+                    <a:solidFill>
+                      <a:srgbClr val="FFF6E6"/>
                     </a:solidFill>
                   </a:tcPr>
                 </a:tc>
@@ -10006,109 +10330,17 @@
                       <a:r>
                         <a:rPr sz="900" b="1">
                           <a:solidFill>
-                            <a:srgbClr val="333333"/>
-                          </a:solidFill>
-                          <a:latin typeface="Calibri"/>
-                        </a:rPr>
-                        <a:t>58</a:t>
-                      </a:r>
-                    </a:p>
-                  </a:txBody>
-                  <a:tcPr>
-                    <a:solidFill>
-                      <a:srgbClr val="F2F2F2"/>
-                    </a:solidFill>
-                  </a:tcPr>
-                </a:tc>
-                <a:tc>
-                  <a:txBody>
-                    <a:bodyPr/>
-                    <a:lstStyle/>
-                    <a:p>
-                      <a:pPr algn="ctr"/>
-                      <a:r>
-                        <a:rPr sz="900" b="1">
-                          <a:solidFill>
                             <a:srgbClr val="A6001A"/>
                           </a:solidFill>
                           <a:latin typeface="Calibri"/>
                         </a:rPr>
-                        <a:t>-14</a:t>
-                      </a:r>
-                    </a:p>
-                  </a:txBody>
-                  <a:tcPr>
-                    <a:solidFill>
-                      <a:srgbClr val="F2F2F2"/>
-                    </a:solidFill>
-                  </a:tcPr>
-                </a:tc>
-                <a:tc>
-                  <a:txBody>
-                    <a:bodyPr/>
-                    <a:lstStyle/>
-                    <a:p>
-                      <a:pPr algn="ctr"/>
-                      <a:r>
-                        <a:rPr sz="900" b="1">
-                          <a:solidFill>
-                            <a:srgbClr val="333333"/>
-                          </a:solidFill>
-                          <a:latin typeface="Calibri"/>
-                        </a:rPr>
-                        <a:t>217</a:t>
-                      </a:r>
-                    </a:p>
-                  </a:txBody>
-                  <a:tcPr>
-                    <a:solidFill>
-                      <a:srgbClr val="F2F2F2"/>
-                    </a:solidFill>
-                  </a:tcPr>
-                </a:tc>
-                <a:tc>
-                  <a:txBody>
-                    <a:bodyPr/>
-                    <a:lstStyle/>
-                    <a:p>
-                      <a:pPr algn="ctr"/>
-                      <a:r>
-                        <a:rPr sz="900" b="1">
-                          <a:solidFill>
-                            <a:srgbClr val="333333"/>
-                          </a:solidFill>
-                          <a:latin typeface="Calibri"/>
-                        </a:rPr>
-                        <a:t>195</a:t>
-                      </a:r>
-                    </a:p>
-                  </a:txBody>
-                  <a:tcPr>
-                    <a:solidFill>
-                      <a:srgbClr val="F2F2F2"/>
-                    </a:solidFill>
-                  </a:tcPr>
-                </a:tc>
-                <a:tc>
-                  <a:txBody>
-                    <a:bodyPr/>
-                    <a:lstStyle/>
-                    <a:p>
-                      <a:pPr algn="ctr"/>
-                      <a:r>
-                        <a:rPr sz="900" b="1">
-                          <a:solidFill>
-                            <a:srgbClr val="A6001A"/>
-                          </a:solidFill>
-                          <a:latin typeface="Calibri"/>
-                        </a:rPr>
-                        <a:t>-22</a:t>
-                      </a:r>
-                    </a:p>
-                  </a:txBody>
-                  <a:tcPr>
-                    <a:solidFill>
-                      <a:srgbClr val="F2F2F2"/>
+                        <a:t>—</a:t>
+                      </a:r>
+                    </a:p>
+                  </a:txBody>
+                  <a:tcPr>
+                    <a:solidFill>
+                      <a:srgbClr val="FFF6E6"/>
                     </a:solidFill>
                   </a:tcPr>
                 </a:tc>
@@ -10125,8 +10357,8 @@
         </p:nvSpPr>
         <p:spPr>
           <a:xfrm>
-            <a:off x="548640" y="3749039"/>
-            <a:ext cx="11018520" cy="201168"/>
+            <a:off x="548640" y="3913632"/>
+            <a:ext cx="11018520" cy="310896"/>
           </a:xfrm>
           <a:prstGeom prst="rect">
             <a:avLst/>
@@ -10151,7 +10383,7 @@
                 </a:solidFill>
                 <a:latin typeface="Calibri"/>
               </a:rPr>
-              <a:t>** Engelli mağaza satırlarından düşülmedi (norm tablosu engelliyi departmanlara dağıtmış) · Heykel ve Şura'da engelli kadro YOK: 50 çalışan altı, 4857/30 yükümlülüğü doğmuyor.</a:t>
+              <a:t>** YÖNETİM KARARI: engelli ve etkinlik kadrosu NORM DIŞIDIR — norm doluluğuna sayılmaz, mağaza satırlarından düşülmüştür. Heykel ve Şura'da engelli kadro yoktur (ayrı tüzel kişilik, 50 çalışan altı → 4857/30 yükümlülüğü doğmaz).</a:t>
             </a:r>
           </a:p>
         </p:txBody>
@@ -10164,8 +10396,8 @@
         </p:nvSpPr>
         <p:spPr>
           <a:xfrm>
-            <a:off x="548640" y="4041648"/>
-            <a:ext cx="11018520" cy="457200"/>
+            <a:off x="548640" y="4370832"/>
+            <a:ext cx="11018520" cy="475488"/>
           </a:xfrm>
           <a:prstGeom prst="roundRect">
             <a:avLst/>
@@ -10210,8 +10442,8 @@
         </p:nvSpPr>
         <p:spPr>
           <a:xfrm>
-            <a:off x="822960" y="4041648"/>
-            <a:ext cx="10607040" cy="457200"/>
+            <a:off x="822960" y="4370832"/>
+            <a:ext cx="10607040" cy="475488"/>
           </a:xfrm>
           <a:prstGeom prst="rect">
             <a:avLst/>
@@ -10230,13 +10462,13 @@
               </a:lnSpc>
             </a:pPr>
             <a:r>
-              <a:rPr sz="1050" b="1">
+              <a:rPr sz="1100" b="1">
                 <a:solidFill>
                   <a:srgbClr val="A6001A"/>
                 </a:solidFill>
                 <a:latin typeface="Calibri"/>
               </a:rPr>
-              <a:t>Şirketin kendi norm tablosuna göre 31 Ağustos'ta toplam personel 22 kişi EKSİK (norm 217 · gerçek 195): kadrolu -8, sezonluk -14 — etkinlik hariç kadrolu açığı -11.</a:t>
+              <a:t>Norm doluluğu (engelli ve etkinlik hariç): norm 217 · operasyonel gerçek 189 → -28 KİŞİ EKSİK (kadrolu -14 · sezonluk -14).</a:t>
             </a:r>
           </a:p>
         </p:txBody>
@@ -10275,7 +10507,7 @@
                 </a:solidFill>
                 <a:latin typeface="Calibri"/>
               </a:rPr>
-              <a:t>* ETKİNLİK normda 0 tanımlı olduğu için mağaza satırlarından DÜŞÜLDÜ — düşülünce kadrolu açığı −8 yerine −11 · ENGELLİ norma dahil olduğundan düşülmedi, ayrı satırda bilgi olarak verildi (FSM 1 · İst. Yolu 2; Heykel/Şura 50 çalışan altı olduğu için yükümlülük yok) · Norm kaynağı: BKMKİTAP Mağaza Kadro ve Sezon Takip Tablosu, 11.08.2026 · Kapsam dışı: Şura norm tablosunda yok · Gerçek sayılar 31.08 as-of.</a:t>
+              <a:t>* Norm = ENGELLİ DIŞINDAKİ personel sayısı (yönetim kararı); etkinlik de norm dışı. Mağaza satırları operasyonel kadroyu gösterir (kadrolu − engelli − etkinlik). Engelli 3 · etkinlik 3 kişi ayrı satırda; en alttaki kayıt toplamı İK'nın resmi rakamıdır (kadrolu 137 · sezonluk 58) · Norm kaynağı: BKMKİTAP Mağaza Kadro ve Sezon Takip Tablosu, 11.08.2026 · Kapsam dışı: Şura · Gerçek sayılar 31.08 as-of.</a:t>
             </a:r>
           </a:p>
         </p:txBody>
@@ -12977,7 +13209,7 @@
                 </a:solidFill>
                 <a:latin typeface="Calibri"/>
               </a:rPr>
-              <a:t>* Kapsam: norm tablosundaki dört mağaza (FSM · İst. Yolu · Özlüce · Heykel; Şura norm tablosunda yok) · Norm 11.08.2026 tarihli, SEZON DIŞI kadroyu tanımlar · Kıyas yalnız kadrolu personel ile; sezonluk kolonu açığın nasıl kapatıldığını gösterir.</a:t>
+              <a:t>* Kapsam: norm tablosundaki dört mağaza (Şura yok) · Norm 11.08.2026 tarihli · ETKİNLİK zaten ayrı bölüm satırı (normda 0) · ⚠ ENGELLİ bu tabloda düşülmedi: bölüm dağılımı ölçülmemiştir, bu yüzden ilgili bölümlerin açığı toplamda 3 kişiye kadar daha büyük olabilir · Mağaza toplamı ve operasyonel kıyas için 'Norm Kadro — Mağaza Detayı' slaytına bakılır.</a:t>
             </a:r>
           </a:p>
         </p:txBody>
@@ -17172,7 +17404,7 @@
                 </a:solidFill>
                 <a:latin typeface="Calibri"/>
               </a:rPr>
-              <a:t>GERÇEK · 31 AĞUSTOS</a:t>
+              <a:t>GERÇEK · 31 AĞUSTOS (OPERASYONEL)</a:t>
             </a:r>
           </a:p>
         </p:txBody>
@@ -17211,7 +17443,7 @@
                 </a:solidFill>
                 <a:latin typeface="Calibri"/>
               </a:rPr>
-              <a:t>195</a:t>
+              <a:t>189</a:t>
             </a:r>
           </a:p>
         </p:txBody>
@@ -17250,7 +17482,7 @@
                 </a:solidFill>
                 <a:latin typeface="Calibri"/>
               </a:rPr>
-              <a:t>kadrolu 137 + sezonluk 58</a:t>
+              <a:t>engelli ve etkinlik norm dışı tutuldu</a:t>
             </a:r>
           </a:p>
         </p:txBody>
@@ -17436,13 +17668,13 @@
               </a:lnSpc>
             </a:pPr>
             <a:r>
-              <a:rPr sz="3000" b="1">
+              <a:rPr sz="2800" b="1">
                 <a:solidFill>
                   <a:srgbClr val="A6001A"/>
                 </a:solidFill>
                 <a:latin typeface="Calibri"/>
               </a:rPr>
-              <a:t>-22 kişi</a:t>
+              <a:t>-28 kişi</a:t>
             </a:r>
           </a:p>
         </p:txBody>
@@ -17481,7 +17713,7 @@
                 </a:solidFill>
                 <a:latin typeface="Calibri"/>
               </a:rPr>
-              <a:t>kadrolu -8 · sezonluk -14</a:t>
+              <a:t>kadrolu -14 · sezonluk -14 (engelli/etkinlik norm dışı)</a:t>
             </a:r>
           </a:p>
         </p:txBody>
@@ -17566,7 +17798,7 @@
                 </a:solidFill>
                 <a:latin typeface="Calibri"/>
               </a:rPr>
-              <a:t>Kadro fazlası yok: 31 Ağustos'ta toplam personel şirketin kendi norm tablosunun 22 KİŞİ ALTINDADIR.</a:t>
+              <a:t>Kadro fazlası yok: 31 Ağustos'ta toplam personel şirketin kendi norm tablosunun 28 KİŞİ ALTINDADIR.</a:t>
             </a:r>
           </a:p>
         </p:txBody>
@@ -17836,7 +18068,7 @@
                 </a:solidFill>
                 <a:latin typeface="Calibri"/>
               </a:rPr>
-              <a:t>* Norm: BKMKİTAP Mağaza Kadro ve Sezon Takip Tablosu, 11.08.2026 (kadrolu norm departman bazında, sezonluk norm mağaza toplamı; engelli kadro dahil) · Kapsam: dört mağaza — Şura norm tablosunda yok · Gerçek sayılar 31.08 as-of · İş hacmi üç POS mağazası.</a:t>
+              <a:t>* Norm = ENGELLİ DIŞINDAKİ personel sayısı (yönetim kararı); etkinlik kadrosu da norm dışı — gerçek rakamdan düşüldü (engelli 3 · etkinlik 3 kişi). İK'nın kayıt toplamı kadrolu 137 + sezonluk 58 = 195 · Norm kaynağı: BKMKİTAP Mağaza Kadro ve Sezon Takip Tablosu, 11.08.2026 · Kapsam: dört mağaza (Şura norm tablosunda yok) · İş hacmi üç POS mağazası.</a:t>
             </a:r>
           </a:p>
         </p:txBody>

--- a/briefings/sezon-kadro-20260902/sunum-kadro-sezon2026.pptx
+++ b/briefings/sezon-kadro-20260902/sunum-kadro-sezon2026.pptx
@@ -372,7 +372,7 @@
                   <c:v>574.7176999999999</c:v>
                 </c:pt>
                 <c:pt idx="1">
-                  <c:v>71.83742911999343</c:v>
+                  <c:v>71.83742912000012</c:v>
                 </c:pt>
                 <c:pt idx="2">
                   <c:v>143</c:v>
@@ -427,7 +427,7 @@
                   <c:v>775.19155</c:v>
                 </c:pt>
                 <c:pt idx="1">
-                  <c:v>122.60138084999475</c:v>
+                  <c:v>122.60138085000007</c:v>
                 </c:pt>
                 <c:pt idx="2">
                   <c:v>160</c:v>
@@ -1389,13 +1389,13 @@
                 <c:formatCode>General</c:formatCode>
                 <c:ptCount val="3"/>
                 <c:pt idx="0">
-                  <c:v>57.5586237581637</c:v>
+                  <c:v>57.55862375814158</c:v>
                 </c:pt>
                 <c:pt idx="1">
-                  <c:v>96.12850541161808</c:v>
+                  <c:v>96.12850541161207</c:v>
                 </c:pt>
                 <c:pt idx="2">
-                  <c:v>62.26752661004522</c:v>
+                  <c:v>62.26752661005723</c:v>
                 </c:pt>
               </c:numCache>
             </c:numRef>
@@ -10619,7 +10619,7 @@
         </p:nvGraphicFramePr>
         <p:xfrm>
           <a:off x="548640" y="1371600"/>
-          <a:ext cx="6949440" cy="3977639"/>
+          <a:ext cx="6858000" cy="3054096"/>
         </p:xfrm>
         <a:graphic>
           <a:graphicData uri="http://schemas.openxmlformats.org/drawingml/2006/table">
@@ -10628,14 +10628,15 @@
                 <a:tableStyleId>{5C22544A-7EE6-4342-B048-85BDC9FD1C3A}</a:tableStyleId>
               </a:tblPr>
               <a:tblGrid>
-                <a:gridCol w="1965960"/>
-                <a:gridCol w="868680"/>
-                <a:gridCol w="1234440"/>
-                <a:gridCol w="822960"/>
-                <a:gridCol w="822960"/>
-                <a:gridCol w="1234440"/>
+                <a:gridCol w="1691640"/>
+                <a:gridCol w="731520"/>
+                <a:gridCol w="1143000"/>
+                <a:gridCol w="960120"/>
+                <a:gridCol w="685800"/>
+                <a:gridCol w="685800"/>
+                <a:gridCol w="960120"/>
               </a:tblGrid>
-              <a:tr h="248602">
+              <a:tr h="310896">
                 <a:tc>
                   <a:txBody>
                     <a:bodyPr/>
@@ -10643,7 +10644,7 @@
                     <a:p>
                       <a:pPr algn="l"/>
                       <a:r>
-                        <a:rPr sz="850" b="1">
+                        <a:rPr sz="750" b="1">
                           <a:solidFill>
                             <a:srgbClr val="FFFFFF"/>
                           </a:solidFill>
@@ -10666,7 +10667,7 @@
                     <a:p>
                       <a:pPr algn="ctr"/>
                       <a:r>
-                        <a:rPr sz="850" b="1">
+                        <a:rPr sz="750" b="1">
                           <a:solidFill>
                             <a:srgbClr val="FFFFFF"/>
                           </a:solidFill>
@@ -10689,13 +10690,25 @@
                     <a:p>
                       <a:pPr algn="ctr"/>
                       <a:r>
-                        <a:rPr sz="850" b="1">
+                        <a:rPr sz="750" b="1">
                           <a:solidFill>
                             <a:srgbClr val="FFFFFF"/>
                           </a:solidFill>
                           <a:latin typeface="Calibri"/>
                         </a:rPr>
-                        <a:t>Kadrolu 31.08</a:t>
+                        <a:t>Operasyonel</a:t>
+                      </a:r>
+                    </a:p>
+                    <a:p>
+                      <a:pPr algn="ctr"/>
+                      <a:r>
+                        <a:rPr sz="750" b="1">
+                          <a:solidFill>
+                            <a:srgbClr val="FFFFFF"/>
+                          </a:solidFill>
+                          <a:latin typeface="Calibri"/>
+                        </a:rPr>
+                        <a:t>kadrolu</a:t>
                       </a:r>
                     </a:p>
                   </a:txBody>
@@ -10712,12 +10725,47 @@
                     <a:p>
                       <a:pPr algn="ctr"/>
                       <a:r>
-                        <a:rPr sz="850" b="1">
+                        <a:rPr sz="750" b="1">
                           <a:solidFill>
                             <a:srgbClr val="FFFFFF"/>
                           </a:solidFill>
                           <a:latin typeface="Calibri"/>
                         </a:rPr>
+                        <a:t>Engelli</a:t>
+                      </a:r>
+                    </a:p>
+                    <a:p>
+                      <a:pPr algn="ctr"/>
+                      <a:r>
+                        <a:rPr sz="750" b="1">
+                          <a:solidFill>
+                            <a:srgbClr val="FFFFFF"/>
+                          </a:solidFill>
+                          <a:latin typeface="Calibri"/>
+                        </a:rPr>
+                        <a:t>(norm dışı)</a:t>
+                      </a:r>
+                    </a:p>
+                  </a:txBody>
+                  <a:tcPr>
+                    <a:solidFill>
+                      <a:srgbClr val="E30622"/>
+                    </a:solidFill>
+                  </a:tcPr>
+                </a:tc>
+                <a:tc>
+                  <a:txBody>
+                    <a:bodyPr/>
+                    <a:lstStyle/>
+                    <a:p>
+                      <a:pPr algn="ctr"/>
+                      <a:r>
+                        <a:rPr sz="750" b="1">
+                          <a:solidFill>
+                            <a:srgbClr val="FFFFFF"/>
+                          </a:solidFill>
+                          <a:latin typeface="Calibri"/>
+                        </a:rPr>
                         <a:t>Açık</a:t>
                       </a:r>
                     </a:p>
@@ -10735,7 +10783,7 @@
                     <a:p>
                       <a:pPr algn="ctr"/>
                       <a:r>
-                        <a:rPr sz="850" b="1">
+                        <a:rPr sz="750" b="1">
                           <a:solidFill>
                             <a:srgbClr val="FFFFFF"/>
                           </a:solidFill>
@@ -10758,13 +10806,25 @@
                     <a:p>
                       <a:pPr algn="ctr"/>
                       <a:r>
-                        <a:rPr sz="850" b="1">
+                        <a:rPr sz="750" b="1">
                           <a:solidFill>
                             <a:srgbClr val="FFFFFF"/>
                           </a:solidFill>
                           <a:latin typeface="Calibri"/>
                         </a:rPr>
-                        <a:t>Sezonluk 31.08</a:t>
+                        <a:t>Sezonluk</a:t>
+                      </a:r>
+                    </a:p>
+                    <a:p>
+                      <a:pPr algn="ctr"/>
+                      <a:r>
+                        <a:rPr sz="750" b="1">
+                          <a:solidFill>
+                            <a:srgbClr val="FFFFFF"/>
+                          </a:solidFill>
+                          <a:latin typeface="Calibri"/>
+                        </a:rPr>
+                        <a:t>31.08</a:t>
                       </a:r>
                     </a:p>
                   </a:txBody>
@@ -10775,7 +10835,7 @@
                   </a:tcPr>
                 </a:tc>
               </a:tr>
-              <a:tr h="248602">
+              <a:tr h="182880">
                 <a:tc>
                   <a:txBody>
                     <a:bodyPr/>
@@ -10783,7 +10843,7 @@
                     <a:p>
                       <a:pPr algn="l"/>
                       <a:r>
-                        <a:rPr sz="950" b="0">
+                        <a:rPr sz="900" b="0">
                           <a:solidFill>
                             <a:srgbClr val="333333"/>
                           </a:solidFill>
@@ -10806,7 +10866,7 @@
                     <a:p>
                       <a:pPr algn="ctr"/>
                       <a:r>
-                        <a:rPr sz="950" b="0">
+                        <a:rPr sz="900" b="0">
                           <a:solidFill>
                             <a:srgbClr val="333333"/>
                           </a:solidFill>
@@ -10829,7 +10889,7 @@
                     <a:p>
                       <a:pPr algn="ctr"/>
                       <a:r>
-                        <a:rPr sz="950" b="0">
+                        <a:rPr sz="900" b="0">
                           <a:solidFill>
                             <a:srgbClr val="333333"/>
                           </a:solidFill>
@@ -10852,7 +10912,30 @@
                     <a:p>
                       <a:pPr algn="ctr"/>
                       <a:r>
-                        <a:rPr sz="950" b="1">
+                        <a:rPr sz="900" b="0">
+                          <a:solidFill>
+                            <a:srgbClr val="333333"/>
+                          </a:solidFill>
+                          <a:latin typeface="Calibri"/>
+                        </a:rPr>
+                        <a:t>—</a:t>
+                      </a:r>
+                    </a:p>
+                  </a:txBody>
+                  <a:tcPr>
+                    <a:solidFill>
+                      <a:srgbClr val="FFFFFF"/>
+                    </a:solidFill>
+                  </a:tcPr>
+                </a:tc>
+                <a:tc>
+                  <a:txBody>
+                    <a:bodyPr/>
+                    <a:lstStyle/>
+                    <a:p>
+                      <a:pPr algn="ctr"/>
+                      <a:r>
+                        <a:rPr sz="900" b="1">
                           <a:solidFill>
                             <a:srgbClr val="A6001A"/>
                           </a:solidFill>
@@ -10875,7 +10958,7 @@
                     <a:p>
                       <a:pPr algn="ctr"/>
                       <a:r>
-                        <a:rPr sz="950" b="0">
+                        <a:rPr sz="900" b="0">
                           <a:solidFill>
                             <a:srgbClr val="333333"/>
                           </a:solidFill>
@@ -10898,7 +10981,7 @@
                     <a:p>
                       <a:pPr algn="ctr"/>
                       <a:r>
-                        <a:rPr sz="950" b="0">
+                        <a:rPr sz="900" b="0">
                           <a:solidFill>
                             <a:srgbClr val="333333"/>
                           </a:solidFill>
@@ -10915,7 +10998,7 @@
                   </a:tcPr>
                 </a:tc>
               </a:tr>
-              <a:tr h="248602">
+              <a:tr h="182880">
                 <a:tc>
                   <a:txBody>
                     <a:bodyPr/>
@@ -10923,12 +11006,338 @@
                     <a:p>
                       <a:pPr algn="l"/>
                       <a:r>
-                        <a:rPr sz="950" b="0">
+                        <a:rPr sz="900" b="0">
                           <a:solidFill>
                             <a:srgbClr val="333333"/>
                           </a:solidFill>
                           <a:latin typeface="Calibri"/>
                         </a:rPr>
+                        <a:t>Mağaza</a:t>
+                      </a:r>
+                    </a:p>
+                  </a:txBody>
+                  <a:tcPr>
+                    <a:solidFill>
+                      <a:srgbClr val="FAFAFA"/>
+                    </a:solidFill>
+                  </a:tcPr>
+                </a:tc>
+                <a:tc>
+                  <a:txBody>
+                    <a:bodyPr/>
+                    <a:lstStyle/>
+                    <a:p>
+                      <a:pPr algn="ctr"/>
+                      <a:r>
+                        <a:rPr sz="900" b="0">
+                          <a:solidFill>
+                            <a:srgbClr val="333333"/>
+                          </a:solidFill>
+                          <a:latin typeface="Calibri"/>
+                        </a:rPr>
+                        <a:t>10</a:t>
+                      </a:r>
+                    </a:p>
+                  </a:txBody>
+                  <a:tcPr>
+                    <a:solidFill>
+                      <a:srgbClr val="FAFAFA"/>
+                    </a:solidFill>
+                  </a:tcPr>
+                </a:tc>
+                <a:tc>
+                  <a:txBody>
+                    <a:bodyPr/>
+                    <a:lstStyle/>
+                    <a:p>
+                      <a:pPr algn="ctr"/>
+                      <a:r>
+                        <a:rPr sz="900" b="0">
+                          <a:solidFill>
+                            <a:srgbClr val="333333"/>
+                          </a:solidFill>
+                          <a:latin typeface="Calibri"/>
+                        </a:rPr>
+                        <a:t>8</a:t>
+                      </a:r>
+                    </a:p>
+                  </a:txBody>
+                  <a:tcPr>
+                    <a:solidFill>
+                      <a:srgbClr val="FAFAFA"/>
+                    </a:solidFill>
+                  </a:tcPr>
+                </a:tc>
+                <a:tc>
+                  <a:txBody>
+                    <a:bodyPr/>
+                    <a:lstStyle/>
+                    <a:p>
+                      <a:pPr algn="ctr"/>
+                      <a:r>
+                        <a:rPr sz="900" b="0">
+                          <a:solidFill>
+                            <a:srgbClr val="333333"/>
+                          </a:solidFill>
+                          <a:latin typeface="Calibri"/>
+                        </a:rPr>
+                        <a:t>—</a:t>
+                      </a:r>
+                    </a:p>
+                  </a:txBody>
+                  <a:tcPr>
+                    <a:solidFill>
+                      <a:srgbClr val="FAFAFA"/>
+                    </a:solidFill>
+                  </a:tcPr>
+                </a:tc>
+                <a:tc>
+                  <a:txBody>
+                    <a:bodyPr/>
+                    <a:lstStyle/>
+                    <a:p>
+                      <a:pPr algn="ctr"/>
+                      <a:r>
+                        <a:rPr sz="900" b="1">
+                          <a:solidFill>
+                            <a:srgbClr val="A6001A"/>
+                          </a:solidFill>
+                          <a:latin typeface="Calibri"/>
+                        </a:rPr>
+                        <a:t>2</a:t>
+                      </a:r>
+                    </a:p>
+                  </a:txBody>
+                  <a:tcPr>
+                    <a:solidFill>
+                      <a:srgbClr val="FAFAFA"/>
+                    </a:solidFill>
+                  </a:tcPr>
+                </a:tc>
+                <a:tc>
+                  <a:txBody>
+                    <a:bodyPr/>
+                    <a:lstStyle/>
+                    <a:p>
+                      <a:pPr algn="ctr"/>
+                      <a:r>
+                        <a:rPr sz="900" b="0">
+                          <a:solidFill>
+                            <a:srgbClr val="333333"/>
+                          </a:solidFill>
+                          <a:latin typeface="Calibri"/>
+                        </a:rPr>
+                        <a:t>—</a:t>
+                      </a:r>
+                    </a:p>
+                  </a:txBody>
+                  <a:tcPr>
+                    <a:solidFill>
+                      <a:srgbClr val="FAFAFA"/>
+                    </a:solidFill>
+                  </a:tcPr>
+                </a:tc>
+                <a:tc>
+                  <a:txBody>
+                    <a:bodyPr/>
+                    <a:lstStyle/>
+                    <a:p>
+                      <a:pPr algn="ctr"/>
+                      <a:r>
+                        <a:rPr sz="900" b="0">
+                          <a:solidFill>
+                            <a:srgbClr val="333333"/>
+                          </a:solidFill>
+                          <a:latin typeface="Calibri"/>
+                        </a:rPr>
+                        <a:t>—</a:t>
+                      </a:r>
+                    </a:p>
+                  </a:txBody>
+                  <a:tcPr>
+                    <a:solidFill>
+                      <a:srgbClr val="FAFAFA"/>
+                    </a:solidFill>
+                  </a:tcPr>
+                </a:tc>
+              </a:tr>
+              <a:tr h="182880">
+                <a:tc>
+                  <a:txBody>
+                    <a:bodyPr/>
+                    <a:lstStyle/>
+                    <a:p>
+                      <a:pPr algn="l"/>
+                      <a:r>
+                        <a:rPr sz="900" b="0">
+                          <a:solidFill>
+                            <a:srgbClr val="333333"/>
+                          </a:solidFill>
+                          <a:latin typeface="Calibri"/>
+                        </a:rPr>
+                        <a:t>İdari İşler</a:t>
+                      </a:r>
+                    </a:p>
+                  </a:txBody>
+                  <a:tcPr>
+                    <a:solidFill>
+                      <a:srgbClr val="FFFFFF"/>
+                    </a:solidFill>
+                  </a:tcPr>
+                </a:tc>
+                <a:tc>
+                  <a:txBody>
+                    <a:bodyPr/>
+                    <a:lstStyle/>
+                    <a:p>
+                      <a:pPr algn="ctr"/>
+                      <a:r>
+                        <a:rPr sz="900" b="0">
+                          <a:solidFill>
+                            <a:srgbClr val="333333"/>
+                          </a:solidFill>
+                          <a:latin typeface="Calibri"/>
+                        </a:rPr>
+                        <a:t>8</a:t>
+                      </a:r>
+                    </a:p>
+                  </a:txBody>
+                  <a:tcPr>
+                    <a:solidFill>
+                      <a:srgbClr val="FFFFFF"/>
+                    </a:solidFill>
+                  </a:tcPr>
+                </a:tc>
+                <a:tc>
+                  <a:txBody>
+                    <a:bodyPr/>
+                    <a:lstStyle/>
+                    <a:p>
+                      <a:pPr algn="ctr"/>
+                      <a:r>
+                        <a:rPr sz="900" b="0">
+                          <a:solidFill>
+                            <a:srgbClr val="333333"/>
+                          </a:solidFill>
+                          <a:latin typeface="Calibri"/>
+                        </a:rPr>
+                        <a:t>6</a:t>
+                      </a:r>
+                    </a:p>
+                  </a:txBody>
+                  <a:tcPr>
+                    <a:solidFill>
+                      <a:srgbClr val="FFFFFF"/>
+                    </a:solidFill>
+                  </a:tcPr>
+                </a:tc>
+                <a:tc>
+                  <a:txBody>
+                    <a:bodyPr/>
+                    <a:lstStyle/>
+                    <a:p>
+                      <a:pPr algn="ctr"/>
+                      <a:r>
+                        <a:rPr sz="900" b="0">
+                          <a:solidFill>
+                            <a:srgbClr val="333333"/>
+                          </a:solidFill>
+                          <a:latin typeface="Calibri"/>
+                        </a:rPr>
+                        <a:t>—</a:t>
+                      </a:r>
+                    </a:p>
+                  </a:txBody>
+                  <a:tcPr>
+                    <a:solidFill>
+                      <a:srgbClr val="FFFFFF"/>
+                    </a:solidFill>
+                  </a:tcPr>
+                </a:tc>
+                <a:tc>
+                  <a:txBody>
+                    <a:bodyPr/>
+                    <a:lstStyle/>
+                    <a:p>
+                      <a:pPr algn="ctr"/>
+                      <a:r>
+                        <a:rPr sz="900" b="1">
+                          <a:solidFill>
+                            <a:srgbClr val="A6001A"/>
+                          </a:solidFill>
+                          <a:latin typeface="Calibri"/>
+                        </a:rPr>
+                        <a:t>2</a:t>
+                      </a:r>
+                    </a:p>
+                  </a:txBody>
+                  <a:tcPr>
+                    <a:solidFill>
+                      <a:srgbClr val="FFFFFF"/>
+                    </a:solidFill>
+                  </a:tcPr>
+                </a:tc>
+                <a:tc>
+                  <a:txBody>
+                    <a:bodyPr/>
+                    <a:lstStyle/>
+                    <a:p>
+                      <a:pPr algn="ctr"/>
+                      <a:r>
+                        <a:rPr sz="900" b="0">
+                          <a:solidFill>
+                            <a:srgbClr val="333333"/>
+                          </a:solidFill>
+                          <a:latin typeface="Calibri"/>
+                        </a:rPr>
+                        <a:t>—</a:t>
+                      </a:r>
+                    </a:p>
+                  </a:txBody>
+                  <a:tcPr>
+                    <a:solidFill>
+                      <a:srgbClr val="FFFFFF"/>
+                    </a:solidFill>
+                  </a:tcPr>
+                </a:tc>
+                <a:tc>
+                  <a:txBody>
+                    <a:bodyPr/>
+                    <a:lstStyle/>
+                    <a:p>
+                      <a:pPr algn="ctr"/>
+                      <a:r>
+                        <a:rPr sz="900" b="0">
+                          <a:solidFill>
+                            <a:srgbClr val="333333"/>
+                          </a:solidFill>
+                          <a:latin typeface="Calibri"/>
+                        </a:rPr>
+                        <a:t>—</a:t>
+                      </a:r>
+                    </a:p>
+                  </a:txBody>
+                  <a:tcPr>
+                    <a:solidFill>
+                      <a:srgbClr val="FFFFFF"/>
+                    </a:solidFill>
+                  </a:tcPr>
+                </a:tc>
+              </a:tr>
+              <a:tr h="182880">
+                <a:tc>
+                  <a:txBody>
+                    <a:bodyPr/>
+                    <a:lstStyle/>
+                    <a:p>
+                      <a:pPr algn="l"/>
+                      <a:r>
+                        <a:rPr sz="900" b="0">
+                          <a:solidFill>
+                            <a:srgbClr val="333333"/>
+                          </a:solidFill>
+                          <a:latin typeface="Calibri"/>
+                        </a:rPr>
                         <a:t>Kültür</a:t>
                       </a:r>
                     </a:p>
@@ -10946,7 +11355,7 @@
                     <a:p>
                       <a:pPr algn="ctr"/>
                       <a:r>
-                        <a:rPr sz="950" b="0">
+                        <a:rPr sz="900" b="0">
                           <a:solidFill>
                             <a:srgbClr val="333333"/>
                           </a:solidFill>
@@ -10969,7 +11378,7 @@
                     <a:p>
                       <a:pPr algn="ctr"/>
                       <a:r>
-                        <a:rPr sz="950" b="0">
+                        <a:rPr sz="900" b="0">
                           <a:solidFill>
                             <a:srgbClr val="333333"/>
                           </a:solidFill>
@@ -10992,7 +11401,30 @@
                     <a:p>
                       <a:pPr algn="ctr"/>
                       <a:r>
-                        <a:rPr sz="950" b="1">
+                        <a:rPr sz="900" b="0">
+                          <a:solidFill>
+                            <a:srgbClr val="333333"/>
+                          </a:solidFill>
+                          <a:latin typeface="Calibri"/>
+                        </a:rPr>
+                        <a:t>—</a:t>
+                      </a:r>
+                    </a:p>
+                  </a:txBody>
+                  <a:tcPr>
+                    <a:solidFill>
+                      <a:srgbClr val="FAFAFA"/>
+                    </a:solidFill>
+                  </a:tcPr>
+                </a:tc>
+                <a:tc>
+                  <a:txBody>
+                    <a:bodyPr/>
+                    <a:lstStyle/>
+                    <a:p>
+                      <a:pPr algn="ctr"/>
+                      <a:r>
+                        <a:rPr sz="900" b="1">
                           <a:solidFill>
                             <a:srgbClr val="A6001A"/>
                           </a:solidFill>
@@ -11015,7 +11447,7 @@
                     <a:p>
                       <a:pPr algn="ctr"/>
                       <a:r>
-                        <a:rPr sz="950" b="0">
+                        <a:rPr sz="900" b="0">
                           <a:solidFill>
                             <a:srgbClr val="333333"/>
                           </a:solidFill>
@@ -11038,7 +11470,7 @@
                     <a:p>
                       <a:pPr algn="ctr"/>
                       <a:r>
-                        <a:rPr sz="950" b="0">
+                        <a:rPr sz="900" b="0">
                           <a:solidFill>
                             <a:srgbClr val="333333"/>
                           </a:solidFill>
@@ -11055,7 +11487,7 @@
                   </a:tcPr>
                 </a:tc>
               </a:tr>
-              <a:tr h="248602">
+              <a:tr h="182880">
                 <a:tc>
                   <a:txBody>
                     <a:bodyPr/>
@@ -11063,13 +11495,13 @@
                     <a:p>
                       <a:pPr algn="l"/>
                       <a:r>
-                        <a:rPr sz="950" b="0">
+                        <a:rPr sz="900" b="0">
                           <a:solidFill>
                             <a:srgbClr val="333333"/>
                           </a:solidFill>
                           <a:latin typeface="Calibri"/>
                         </a:rPr>
-                        <a:t>Mağaza</a:t>
+                        <a:t>Kasa</a:t>
                       </a:r>
                     </a:p>
                   </a:txBody>
@@ -11086,12 +11518,338 @@
                     <a:p>
                       <a:pPr algn="ctr"/>
                       <a:r>
-                        <a:rPr sz="950" b="0">
+                        <a:rPr sz="900" b="0">
                           <a:solidFill>
                             <a:srgbClr val="333333"/>
                           </a:solidFill>
                           <a:latin typeface="Calibri"/>
                         </a:rPr>
+                        <a:t>16</a:t>
+                      </a:r>
+                    </a:p>
+                  </a:txBody>
+                  <a:tcPr>
+                    <a:solidFill>
+                      <a:srgbClr val="FFFFFF"/>
+                    </a:solidFill>
+                  </a:tcPr>
+                </a:tc>
+                <a:tc>
+                  <a:txBody>
+                    <a:bodyPr/>
+                    <a:lstStyle/>
+                    <a:p>
+                      <a:pPr algn="ctr"/>
+                      <a:r>
+                        <a:rPr sz="900" b="0">
+                          <a:solidFill>
+                            <a:srgbClr val="333333"/>
+                          </a:solidFill>
+                          <a:latin typeface="Calibri"/>
+                        </a:rPr>
+                        <a:t>15</a:t>
+                      </a:r>
+                    </a:p>
+                  </a:txBody>
+                  <a:tcPr>
+                    <a:solidFill>
+                      <a:srgbClr val="FFFFFF"/>
+                    </a:solidFill>
+                  </a:tcPr>
+                </a:tc>
+                <a:tc>
+                  <a:txBody>
+                    <a:bodyPr/>
+                    <a:lstStyle/>
+                    <a:p>
+                      <a:pPr algn="ctr"/>
+                      <a:r>
+                        <a:rPr sz="900" b="0">
+                          <a:solidFill>
+                            <a:srgbClr val="333333"/>
+                          </a:solidFill>
+                          <a:latin typeface="Calibri"/>
+                        </a:rPr>
+                        <a:t>—</a:t>
+                      </a:r>
+                    </a:p>
+                  </a:txBody>
+                  <a:tcPr>
+                    <a:solidFill>
+                      <a:srgbClr val="FFFFFF"/>
+                    </a:solidFill>
+                  </a:tcPr>
+                </a:tc>
+                <a:tc>
+                  <a:txBody>
+                    <a:bodyPr/>
+                    <a:lstStyle/>
+                    <a:p>
+                      <a:pPr algn="ctr"/>
+                      <a:r>
+                        <a:rPr sz="900" b="1">
+                          <a:solidFill>
+                            <a:srgbClr val="A6001A"/>
+                          </a:solidFill>
+                          <a:latin typeface="Calibri"/>
+                        </a:rPr>
+                        <a:t>1</a:t>
+                      </a:r>
+                    </a:p>
+                  </a:txBody>
+                  <a:tcPr>
+                    <a:solidFill>
+                      <a:srgbClr val="FFFFFF"/>
+                    </a:solidFill>
+                  </a:tcPr>
+                </a:tc>
+                <a:tc>
+                  <a:txBody>
+                    <a:bodyPr/>
+                    <a:lstStyle/>
+                    <a:p>
+                      <a:pPr algn="ctr"/>
+                      <a:r>
+                        <a:rPr sz="900" b="0">
+                          <a:solidFill>
+                            <a:srgbClr val="333333"/>
+                          </a:solidFill>
+                          <a:latin typeface="Calibri"/>
+                        </a:rPr>
+                        <a:t>—</a:t>
+                      </a:r>
+                    </a:p>
+                  </a:txBody>
+                  <a:tcPr>
+                    <a:solidFill>
+                      <a:srgbClr val="FFFFFF"/>
+                    </a:solidFill>
+                  </a:tcPr>
+                </a:tc>
+                <a:tc>
+                  <a:txBody>
+                    <a:bodyPr/>
+                    <a:lstStyle/>
+                    <a:p>
+                      <a:pPr algn="ctr"/>
+                      <a:r>
+                        <a:rPr sz="900" b="0">
+                          <a:solidFill>
+                            <a:srgbClr val="333333"/>
+                          </a:solidFill>
+                          <a:latin typeface="Calibri"/>
+                        </a:rPr>
+                        <a:t>9</a:t>
+                      </a:r>
+                    </a:p>
+                  </a:txBody>
+                  <a:tcPr>
+                    <a:solidFill>
+                      <a:srgbClr val="FFFFFF"/>
+                    </a:solidFill>
+                  </a:tcPr>
+                </a:tc>
+              </a:tr>
+              <a:tr h="182880">
+                <a:tc>
+                  <a:txBody>
+                    <a:bodyPr/>
+                    <a:lstStyle/>
+                    <a:p>
+                      <a:pPr algn="l"/>
+                      <a:r>
+                        <a:rPr sz="900" b="0">
+                          <a:solidFill>
+                            <a:srgbClr val="333333"/>
+                          </a:solidFill>
+                          <a:latin typeface="Calibri"/>
+                        </a:rPr>
+                        <a:t>Muhasebe</a:t>
+                      </a:r>
+                    </a:p>
+                  </a:txBody>
+                  <a:tcPr>
+                    <a:solidFill>
+                      <a:srgbClr val="FAFAFA"/>
+                    </a:solidFill>
+                  </a:tcPr>
+                </a:tc>
+                <a:tc>
+                  <a:txBody>
+                    <a:bodyPr/>
+                    <a:lstStyle/>
+                    <a:p>
+                      <a:pPr algn="ctr"/>
+                      <a:r>
+                        <a:rPr sz="900" b="0">
+                          <a:solidFill>
+                            <a:srgbClr val="333333"/>
+                          </a:solidFill>
+                          <a:latin typeface="Calibri"/>
+                        </a:rPr>
+                        <a:t>1</a:t>
+                      </a:r>
+                    </a:p>
+                  </a:txBody>
+                  <a:tcPr>
+                    <a:solidFill>
+                      <a:srgbClr val="FAFAFA"/>
+                    </a:solidFill>
+                  </a:tcPr>
+                </a:tc>
+                <a:tc>
+                  <a:txBody>
+                    <a:bodyPr/>
+                    <a:lstStyle/>
+                    <a:p>
+                      <a:pPr algn="ctr"/>
+                      <a:r>
+                        <a:rPr sz="900" b="0">
+                          <a:solidFill>
+                            <a:srgbClr val="333333"/>
+                          </a:solidFill>
+                          <a:latin typeface="Calibri"/>
+                        </a:rPr>
+                        <a:t>0</a:t>
+                      </a:r>
+                    </a:p>
+                  </a:txBody>
+                  <a:tcPr>
+                    <a:solidFill>
+                      <a:srgbClr val="FAFAFA"/>
+                    </a:solidFill>
+                  </a:tcPr>
+                </a:tc>
+                <a:tc>
+                  <a:txBody>
+                    <a:bodyPr/>
+                    <a:lstStyle/>
+                    <a:p>
+                      <a:pPr algn="ctr"/>
+                      <a:r>
+                        <a:rPr sz="900" b="0">
+                          <a:solidFill>
+                            <a:srgbClr val="333333"/>
+                          </a:solidFill>
+                          <a:latin typeface="Calibri"/>
+                        </a:rPr>
+                        <a:t>—</a:t>
+                      </a:r>
+                    </a:p>
+                  </a:txBody>
+                  <a:tcPr>
+                    <a:solidFill>
+                      <a:srgbClr val="FAFAFA"/>
+                    </a:solidFill>
+                  </a:tcPr>
+                </a:tc>
+                <a:tc>
+                  <a:txBody>
+                    <a:bodyPr/>
+                    <a:lstStyle/>
+                    <a:p>
+                      <a:pPr algn="ctr"/>
+                      <a:r>
+                        <a:rPr sz="900" b="1">
+                          <a:solidFill>
+                            <a:srgbClr val="A6001A"/>
+                          </a:solidFill>
+                          <a:latin typeface="Calibri"/>
+                        </a:rPr>
+                        <a:t>1</a:t>
+                      </a:r>
+                    </a:p>
+                  </a:txBody>
+                  <a:tcPr>
+                    <a:solidFill>
+                      <a:srgbClr val="FAFAFA"/>
+                    </a:solidFill>
+                  </a:tcPr>
+                </a:tc>
+                <a:tc>
+                  <a:txBody>
+                    <a:bodyPr/>
+                    <a:lstStyle/>
+                    <a:p>
+                      <a:pPr algn="ctr"/>
+                      <a:r>
+                        <a:rPr sz="900" b="0">
+                          <a:solidFill>
+                            <a:srgbClr val="333333"/>
+                          </a:solidFill>
+                          <a:latin typeface="Calibri"/>
+                        </a:rPr>
+                        <a:t>—</a:t>
+                      </a:r>
+                    </a:p>
+                  </a:txBody>
+                  <a:tcPr>
+                    <a:solidFill>
+                      <a:srgbClr val="FAFAFA"/>
+                    </a:solidFill>
+                  </a:tcPr>
+                </a:tc>
+                <a:tc>
+                  <a:txBody>
+                    <a:bodyPr/>
+                    <a:lstStyle/>
+                    <a:p>
+                      <a:pPr algn="ctr"/>
+                      <a:r>
+                        <a:rPr sz="900" b="0">
+                          <a:solidFill>
+                            <a:srgbClr val="333333"/>
+                          </a:solidFill>
+                          <a:latin typeface="Calibri"/>
+                        </a:rPr>
+                        <a:t>—</a:t>
+                      </a:r>
+                    </a:p>
+                  </a:txBody>
+                  <a:tcPr>
+                    <a:solidFill>
+                      <a:srgbClr val="FAFAFA"/>
+                    </a:solidFill>
+                  </a:tcPr>
+                </a:tc>
+              </a:tr>
+              <a:tr h="182880">
+                <a:tc>
+                  <a:txBody>
+                    <a:bodyPr/>
+                    <a:lstStyle/>
+                    <a:p>
+                      <a:pPr algn="l"/>
+                      <a:r>
+                        <a:rPr sz="900" b="0">
+                          <a:solidFill>
+                            <a:srgbClr val="333333"/>
+                          </a:solidFill>
+                          <a:latin typeface="Calibri"/>
+                        </a:rPr>
+                        <a:t>Akademi</a:t>
+                      </a:r>
+                    </a:p>
+                  </a:txBody>
+                  <a:tcPr>
+                    <a:solidFill>
+                      <a:srgbClr val="FFFFFF"/>
+                    </a:solidFill>
+                  </a:tcPr>
+                </a:tc>
+                <a:tc>
+                  <a:txBody>
+                    <a:bodyPr/>
+                    <a:lstStyle/>
+                    <a:p>
+                      <a:pPr algn="ctr"/>
+                      <a:r>
+                        <a:rPr sz="900" b="0">
+                          <a:solidFill>
+                            <a:srgbClr val="333333"/>
+                          </a:solidFill>
+                          <a:latin typeface="Calibri"/>
+                        </a:rPr>
                         <a:t>10</a:t>
                       </a:r>
                     </a:p>
@@ -11109,13 +11867,13 @@
                     <a:p>
                       <a:pPr algn="ctr"/>
                       <a:r>
-                        <a:rPr sz="950" b="0">
+                        <a:rPr sz="900" b="0">
                           <a:solidFill>
                             <a:srgbClr val="333333"/>
                           </a:solidFill>
                           <a:latin typeface="Calibri"/>
                         </a:rPr>
-                        <a:t>8</a:t>
+                        <a:t>9</a:t>
                       </a:r>
                     </a:p>
                   </a:txBody>
@@ -11132,18 +11890,927 @@
                     <a:p>
                       <a:pPr algn="ctr"/>
                       <a:r>
-                        <a:rPr sz="950" b="1">
+                        <a:rPr sz="900" b="0">
+                          <a:solidFill>
+                            <a:srgbClr val="333333"/>
+                          </a:solidFill>
+                          <a:latin typeface="Calibri"/>
+                        </a:rPr>
+                        <a:t>—</a:t>
+                      </a:r>
+                    </a:p>
+                  </a:txBody>
+                  <a:tcPr>
+                    <a:solidFill>
+                      <a:srgbClr val="FFFFFF"/>
+                    </a:solidFill>
+                  </a:tcPr>
+                </a:tc>
+                <a:tc>
+                  <a:txBody>
+                    <a:bodyPr/>
+                    <a:lstStyle/>
+                    <a:p>
+                      <a:pPr algn="ctr"/>
+                      <a:r>
+                        <a:rPr sz="900" b="1">
                           <a:solidFill>
                             <a:srgbClr val="A6001A"/>
                           </a:solidFill>
                           <a:latin typeface="Calibri"/>
                         </a:rPr>
+                        <a:t>1</a:t>
+                      </a:r>
+                    </a:p>
+                  </a:txBody>
+                  <a:tcPr>
+                    <a:solidFill>
+                      <a:srgbClr val="FFFFFF"/>
+                    </a:solidFill>
+                  </a:tcPr>
+                </a:tc>
+                <a:tc>
+                  <a:txBody>
+                    <a:bodyPr/>
+                    <a:lstStyle/>
+                    <a:p>
+                      <a:pPr algn="ctr"/>
+                      <a:r>
+                        <a:rPr sz="900" b="0">
+                          <a:solidFill>
+                            <a:srgbClr val="333333"/>
+                          </a:solidFill>
+                          <a:latin typeface="Calibri"/>
+                        </a:rPr>
+                        <a:t>—</a:t>
+                      </a:r>
+                    </a:p>
+                  </a:txBody>
+                  <a:tcPr>
+                    <a:solidFill>
+                      <a:srgbClr val="FFFFFF"/>
+                    </a:solidFill>
+                  </a:tcPr>
+                </a:tc>
+                <a:tc>
+                  <a:txBody>
+                    <a:bodyPr/>
+                    <a:lstStyle/>
+                    <a:p>
+                      <a:pPr algn="ctr"/>
+                      <a:r>
+                        <a:rPr sz="900" b="0">
+                          <a:solidFill>
+                            <a:srgbClr val="333333"/>
+                          </a:solidFill>
+                          <a:latin typeface="Calibri"/>
+                        </a:rPr>
+                        <a:t>—</a:t>
+                      </a:r>
+                    </a:p>
+                  </a:txBody>
+                  <a:tcPr>
+                    <a:solidFill>
+                      <a:srgbClr val="FFFFFF"/>
+                    </a:solidFill>
+                  </a:tcPr>
+                </a:tc>
+              </a:tr>
+              <a:tr h="182880">
+                <a:tc>
+                  <a:txBody>
+                    <a:bodyPr/>
+                    <a:lstStyle/>
+                    <a:p>
+                      <a:pPr algn="l"/>
+                      <a:r>
+                        <a:rPr sz="900" b="0">
+                          <a:solidFill>
+                            <a:srgbClr val="333333"/>
+                          </a:solidFill>
+                          <a:latin typeface="Calibri"/>
+                        </a:rPr>
+                        <a:t>Oyun Alanı</a:t>
+                      </a:r>
+                    </a:p>
+                  </a:txBody>
+                  <a:tcPr>
+                    <a:solidFill>
+                      <a:srgbClr val="FAFAFA"/>
+                    </a:solidFill>
+                  </a:tcPr>
+                </a:tc>
+                <a:tc>
+                  <a:txBody>
+                    <a:bodyPr/>
+                    <a:lstStyle/>
+                    <a:p>
+                      <a:pPr algn="ctr"/>
+                      <a:r>
+                        <a:rPr sz="900" b="0">
+                          <a:solidFill>
+                            <a:srgbClr val="333333"/>
+                          </a:solidFill>
+                          <a:latin typeface="Calibri"/>
+                        </a:rPr>
+                        <a:t>1</a:t>
+                      </a:r>
+                    </a:p>
+                  </a:txBody>
+                  <a:tcPr>
+                    <a:solidFill>
+                      <a:srgbClr val="FAFAFA"/>
+                    </a:solidFill>
+                  </a:tcPr>
+                </a:tc>
+                <a:tc>
+                  <a:txBody>
+                    <a:bodyPr/>
+                    <a:lstStyle/>
+                    <a:p>
+                      <a:pPr algn="ctr"/>
+                      <a:r>
+                        <a:rPr sz="900" b="0">
+                          <a:solidFill>
+                            <a:srgbClr val="333333"/>
+                          </a:solidFill>
+                          <a:latin typeface="Calibri"/>
+                        </a:rPr>
+                        <a:t>0</a:t>
+                      </a:r>
+                    </a:p>
+                  </a:txBody>
+                  <a:tcPr>
+                    <a:solidFill>
+                      <a:srgbClr val="FAFAFA"/>
+                    </a:solidFill>
+                  </a:tcPr>
+                </a:tc>
+                <a:tc>
+                  <a:txBody>
+                    <a:bodyPr/>
+                    <a:lstStyle/>
+                    <a:p>
+                      <a:pPr algn="ctr"/>
+                      <a:r>
+                        <a:rPr sz="900" b="0">
+                          <a:solidFill>
+                            <a:srgbClr val="333333"/>
+                          </a:solidFill>
+                          <a:latin typeface="Calibri"/>
+                        </a:rPr>
+                        <a:t>—</a:t>
+                      </a:r>
+                    </a:p>
+                  </a:txBody>
+                  <a:tcPr>
+                    <a:solidFill>
+                      <a:srgbClr val="FAFAFA"/>
+                    </a:solidFill>
+                  </a:tcPr>
+                </a:tc>
+                <a:tc>
+                  <a:txBody>
+                    <a:bodyPr/>
+                    <a:lstStyle/>
+                    <a:p>
+                      <a:pPr algn="ctr"/>
+                      <a:r>
+                        <a:rPr sz="900" b="1">
+                          <a:solidFill>
+                            <a:srgbClr val="A6001A"/>
+                          </a:solidFill>
+                          <a:latin typeface="Calibri"/>
+                        </a:rPr>
+                        <a:t>1</a:t>
+                      </a:r>
+                    </a:p>
+                  </a:txBody>
+                  <a:tcPr>
+                    <a:solidFill>
+                      <a:srgbClr val="FAFAFA"/>
+                    </a:solidFill>
+                  </a:tcPr>
+                </a:tc>
+                <a:tc>
+                  <a:txBody>
+                    <a:bodyPr/>
+                    <a:lstStyle/>
+                    <a:p>
+                      <a:pPr algn="ctr"/>
+                      <a:r>
+                        <a:rPr sz="900" b="0">
+                          <a:solidFill>
+                            <a:srgbClr val="333333"/>
+                          </a:solidFill>
+                          <a:latin typeface="Calibri"/>
+                        </a:rPr>
+                        <a:t>—</a:t>
+                      </a:r>
+                    </a:p>
+                  </a:txBody>
+                  <a:tcPr>
+                    <a:solidFill>
+                      <a:srgbClr val="FAFAFA"/>
+                    </a:solidFill>
+                  </a:tcPr>
+                </a:tc>
+                <a:tc>
+                  <a:txBody>
+                    <a:bodyPr/>
+                    <a:lstStyle/>
+                    <a:p>
+                      <a:pPr algn="ctr"/>
+                      <a:r>
+                        <a:rPr sz="900" b="0">
+                          <a:solidFill>
+                            <a:srgbClr val="333333"/>
+                          </a:solidFill>
+                          <a:latin typeface="Calibri"/>
+                        </a:rPr>
+                        <a:t>—</a:t>
+                      </a:r>
+                    </a:p>
+                  </a:txBody>
+                  <a:tcPr>
+                    <a:solidFill>
+                      <a:srgbClr val="FAFAFA"/>
+                    </a:solidFill>
+                  </a:tcPr>
+                </a:tc>
+              </a:tr>
+              <a:tr h="182880">
+                <a:tc>
+                  <a:txBody>
+                    <a:bodyPr/>
+                    <a:lstStyle/>
+                    <a:p>
+                      <a:pPr algn="l"/>
+                      <a:r>
+                        <a:rPr sz="900" b="0">
+                          <a:solidFill>
+                            <a:srgbClr val="333333"/>
+                          </a:solidFill>
+                          <a:latin typeface="Calibri"/>
+                        </a:rPr>
+                        <a:t>Mal Kabul</a:t>
+                      </a:r>
+                    </a:p>
+                  </a:txBody>
+                  <a:tcPr>
+                    <a:solidFill>
+                      <a:srgbClr val="FFFFFF"/>
+                    </a:solidFill>
+                  </a:tcPr>
+                </a:tc>
+                <a:tc>
+                  <a:txBody>
+                    <a:bodyPr/>
+                    <a:lstStyle/>
+                    <a:p>
+                      <a:pPr algn="ctr"/>
+                      <a:r>
+                        <a:rPr sz="900" b="0">
+                          <a:solidFill>
+                            <a:srgbClr val="333333"/>
+                          </a:solidFill>
+                          <a:latin typeface="Calibri"/>
+                        </a:rPr>
+                        <a:t>6</a:t>
+                      </a:r>
+                    </a:p>
+                  </a:txBody>
+                  <a:tcPr>
+                    <a:solidFill>
+                      <a:srgbClr val="FFFFFF"/>
+                    </a:solidFill>
+                  </a:tcPr>
+                </a:tc>
+                <a:tc>
+                  <a:txBody>
+                    <a:bodyPr/>
+                    <a:lstStyle/>
+                    <a:p>
+                      <a:pPr algn="ctr"/>
+                      <a:r>
+                        <a:rPr sz="900" b="0">
+                          <a:solidFill>
+                            <a:srgbClr val="333333"/>
+                          </a:solidFill>
+                          <a:latin typeface="Calibri"/>
+                        </a:rPr>
+                        <a:t>5</a:t>
+                      </a:r>
+                    </a:p>
+                  </a:txBody>
+                  <a:tcPr>
+                    <a:solidFill>
+                      <a:srgbClr val="FFFFFF"/>
+                    </a:solidFill>
+                  </a:tcPr>
+                </a:tc>
+                <a:tc>
+                  <a:txBody>
+                    <a:bodyPr/>
+                    <a:lstStyle/>
+                    <a:p>
+                      <a:pPr algn="ctr"/>
+                      <a:r>
+                        <a:rPr sz="900" b="0">
+                          <a:solidFill>
+                            <a:srgbClr val="333333"/>
+                          </a:solidFill>
+                          <a:latin typeface="Calibri"/>
+                        </a:rPr>
+                        <a:t>1</a:t>
+                      </a:r>
+                    </a:p>
+                  </a:txBody>
+                  <a:tcPr>
+                    <a:solidFill>
+                      <a:srgbClr val="FFFFFF"/>
+                    </a:solidFill>
+                  </a:tcPr>
+                </a:tc>
+                <a:tc>
+                  <a:txBody>
+                    <a:bodyPr/>
+                    <a:lstStyle/>
+                    <a:p>
+                      <a:pPr algn="ctr"/>
+                      <a:r>
+                        <a:rPr sz="900" b="1">
+                          <a:solidFill>
+                            <a:srgbClr val="A6001A"/>
+                          </a:solidFill>
+                          <a:latin typeface="Calibri"/>
+                        </a:rPr>
+                        <a:t>1</a:t>
+                      </a:r>
+                    </a:p>
+                  </a:txBody>
+                  <a:tcPr>
+                    <a:solidFill>
+                      <a:srgbClr val="FFFFFF"/>
+                    </a:solidFill>
+                  </a:tcPr>
+                </a:tc>
+                <a:tc>
+                  <a:txBody>
+                    <a:bodyPr/>
+                    <a:lstStyle/>
+                    <a:p>
+                      <a:pPr algn="ctr"/>
+                      <a:r>
+                        <a:rPr sz="900" b="0">
+                          <a:solidFill>
+                            <a:srgbClr val="333333"/>
+                          </a:solidFill>
+                          <a:latin typeface="Calibri"/>
+                        </a:rPr>
+                        <a:t>—</a:t>
+                      </a:r>
+                    </a:p>
+                  </a:txBody>
+                  <a:tcPr>
+                    <a:solidFill>
+                      <a:srgbClr val="FFFFFF"/>
+                    </a:solidFill>
+                  </a:tcPr>
+                </a:tc>
+                <a:tc>
+                  <a:txBody>
+                    <a:bodyPr/>
+                    <a:lstStyle/>
+                    <a:p>
+                      <a:pPr algn="ctr"/>
+                      <a:r>
+                        <a:rPr sz="900" b="0">
+                          <a:solidFill>
+                            <a:srgbClr val="333333"/>
+                          </a:solidFill>
+                          <a:latin typeface="Calibri"/>
+                        </a:rPr>
+                        <a:t>1</a:t>
+                      </a:r>
+                    </a:p>
+                  </a:txBody>
+                  <a:tcPr>
+                    <a:solidFill>
+                      <a:srgbClr val="FFFFFF"/>
+                    </a:solidFill>
+                  </a:tcPr>
+                </a:tc>
+              </a:tr>
+              <a:tr h="182880">
+                <a:tc>
+                  <a:txBody>
+                    <a:bodyPr/>
+                    <a:lstStyle/>
+                    <a:p>
+                      <a:pPr algn="l"/>
+                      <a:r>
+                        <a:rPr sz="900" b="0">
+                          <a:solidFill>
+                            <a:srgbClr val="333333"/>
+                          </a:solidFill>
+                          <a:latin typeface="Calibri"/>
+                        </a:rPr>
+                        <a:t>Oyuncak</a:t>
+                      </a:r>
+                    </a:p>
+                  </a:txBody>
+                  <a:tcPr>
+                    <a:solidFill>
+                      <a:srgbClr val="FAFAFA"/>
+                    </a:solidFill>
+                  </a:tcPr>
+                </a:tc>
+                <a:tc>
+                  <a:txBody>
+                    <a:bodyPr/>
+                    <a:lstStyle/>
+                    <a:p>
+                      <a:pPr algn="ctr"/>
+                      <a:r>
+                        <a:rPr sz="900" b="0">
+                          <a:solidFill>
+                            <a:srgbClr val="333333"/>
+                          </a:solidFill>
+                          <a:latin typeface="Calibri"/>
+                        </a:rPr>
+                        <a:t>10</a:t>
+                      </a:r>
+                    </a:p>
+                  </a:txBody>
+                  <a:tcPr>
+                    <a:solidFill>
+                      <a:srgbClr val="FAFAFA"/>
+                    </a:solidFill>
+                  </a:tcPr>
+                </a:tc>
+                <a:tc>
+                  <a:txBody>
+                    <a:bodyPr/>
+                    <a:lstStyle/>
+                    <a:p>
+                      <a:pPr algn="ctr"/>
+                      <a:r>
+                        <a:rPr sz="900" b="0">
+                          <a:solidFill>
+                            <a:srgbClr val="333333"/>
+                          </a:solidFill>
+                          <a:latin typeface="Calibri"/>
+                        </a:rPr>
+                        <a:t>10</a:t>
+                      </a:r>
+                    </a:p>
+                  </a:txBody>
+                  <a:tcPr>
+                    <a:solidFill>
+                      <a:srgbClr val="FAFAFA"/>
+                    </a:solidFill>
+                  </a:tcPr>
+                </a:tc>
+                <a:tc>
+                  <a:txBody>
+                    <a:bodyPr/>
+                    <a:lstStyle/>
+                    <a:p>
+                      <a:pPr algn="ctr"/>
+                      <a:r>
+                        <a:rPr sz="900" b="0">
+                          <a:solidFill>
+                            <a:srgbClr val="333333"/>
+                          </a:solidFill>
+                          <a:latin typeface="Calibri"/>
+                        </a:rPr>
+                        <a:t>—</a:t>
+                      </a:r>
+                    </a:p>
+                  </a:txBody>
+                  <a:tcPr>
+                    <a:solidFill>
+                      <a:srgbClr val="FAFAFA"/>
+                    </a:solidFill>
+                  </a:tcPr>
+                </a:tc>
+                <a:tc>
+                  <a:txBody>
+                    <a:bodyPr/>
+                    <a:lstStyle/>
+                    <a:p>
+                      <a:pPr algn="ctr"/>
+                      <a:r>
+                        <a:rPr sz="900" b="1">
+                          <a:solidFill>
+                            <a:srgbClr val="A6001A"/>
+                          </a:solidFill>
+                          <a:latin typeface="Calibri"/>
+                        </a:rPr>
+                        <a:t>—</a:t>
+                      </a:r>
+                    </a:p>
+                  </a:txBody>
+                  <a:tcPr>
+                    <a:solidFill>
+                      <a:srgbClr val="FAFAFA"/>
+                    </a:solidFill>
+                  </a:tcPr>
+                </a:tc>
+                <a:tc>
+                  <a:txBody>
+                    <a:bodyPr/>
+                    <a:lstStyle/>
+                    <a:p>
+                      <a:pPr algn="ctr"/>
+                      <a:r>
+                        <a:rPr sz="900" b="0">
+                          <a:solidFill>
+                            <a:srgbClr val="333333"/>
+                          </a:solidFill>
+                          <a:latin typeface="Calibri"/>
+                        </a:rPr>
+                        <a:t>—</a:t>
+                      </a:r>
+                    </a:p>
+                  </a:txBody>
+                  <a:tcPr>
+                    <a:solidFill>
+                      <a:srgbClr val="FAFAFA"/>
+                    </a:solidFill>
+                  </a:tcPr>
+                </a:tc>
+                <a:tc>
+                  <a:txBody>
+                    <a:bodyPr/>
+                    <a:lstStyle/>
+                    <a:p>
+                      <a:pPr algn="ctr"/>
+                      <a:r>
+                        <a:rPr sz="900" b="0">
+                          <a:solidFill>
+                            <a:srgbClr val="333333"/>
+                          </a:solidFill>
+                          <a:latin typeface="Calibri"/>
+                        </a:rPr>
+                        <a:t>—</a:t>
+                      </a:r>
+                    </a:p>
+                  </a:txBody>
+                  <a:tcPr>
+                    <a:solidFill>
+                      <a:srgbClr val="FAFAFA"/>
+                    </a:solidFill>
+                  </a:tcPr>
+                </a:tc>
+              </a:tr>
+              <a:tr h="182880">
+                <a:tc>
+                  <a:txBody>
+                    <a:bodyPr/>
+                    <a:lstStyle/>
+                    <a:p>
+                      <a:pPr algn="l"/>
+                      <a:r>
+                        <a:rPr sz="900" b="0">
+                          <a:solidFill>
+                            <a:srgbClr val="333333"/>
+                          </a:solidFill>
+                          <a:latin typeface="Calibri"/>
+                        </a:rPr>
+                        <a:t>Yardımcı Kitap</a:t>
+                      </a:r>
+                    </a:p>
+                  </a:txBody>
+                  <a:tcPr>
+                    <a:solidFill>
+                      <a:srgbClr val="FFFFFF"/>
+                    </a:solidFill>
+                  </a:tcPr>
+                </a:tc>
+                <a:tc>
+                  <a:txBody>
+                    <a:bodyPr/>
+                    <a:lstStyle/>
+                    <a:p>
+                      <a:pPr algn="ctr"/>
+                      <a:r>
+                        <a:rPr sz="900" b="0">
+                          <a:solidFill>
+                            <a:srgbClr val="333333"/>
+                          </a:solidFill>
+                          <a:latin typeface="Calibri"/>
+                        </a:rPr>
+                        <a:t>18</a:t>
+                      </a:r>
+                    </a:p>
+                  </a:txBody>
+                  <a:tcPr>
+                    <a:solidFill>
+                      <a:srgbClr val="FFFFFF"/>
+                    </a:solidFill>
+                  </a:tcPr>
+                </a:tc>
+                <a:tc>
+                  <a:txBody>
+                    <a:bodyPr/>
+                    <a:lstStyle/>
+                    <a:p>
+                      <a:pPr algn="ctr"/>
+                      <a:r>
+                        <a:rPr sz="900" b="0">
+                          <a:solidFill>
+                            <a:srgbClr val="333333"/>
+                          </a:solidFill>
+                          <a:latin typeface="Calibri"/>
+                        </a:rPr>
+                        <a:t>21</a:t>
+                      </a:r>
+                    </a:p>
+                  </a:txBody>
+                  <a:tcPr>
+                    <a:solidFill>
+                      <a:srgbClr val="FFFFFF"/>
+                    </a:solidFill>
+                  </a:tcPr>
+                </a:tc>
+                <a:tc>
+                  <a:txBody>
+                    <a:bodyPr/>
+                    <a:lstStyle/>
+                    <a:p>
+                      <a:pPr algn="ctr"/>
+                      <a:r>
+                        <a:rPr sz="900" b="0">
+                          <a:solidFill>
+                            <a:srgbClr val="333333"/>
+                          </a:solidFill>
+                          <a:latin typeface="Calibri"/>
+                        </a:rPr>
+                        <a:t>—</a:t>
+                      </a:r>
+                    </a:p>
+                  </a:txBody>
+                  <a:tcPr>
+                    <a:solidFill>
+                      <a:srgbClr val="FFFFFF"/>
+                    </a:solidFill>
+                  </a:tcPr>
+                </a:tc>
+                <a:tc>
+                  <a:txBody>
+                    <a:bodyPr/>
+                    <a:lstStyle/>
+                    <a:p>
+                      <a:pPr algn="ctr"/>
+                      <a:r>
+                        <a:rPr sz="900" b="1">
+                          <a:solidFill>
+                            <a:srgbClr val="A6001A"/>
+                          </a:solidFill>
+                          <a:latin typeface="Calibri"/>
+                        </a:rPr>
+                        <a:t>—</a:t>
+                      </a:r>
+                    </a:p>
+                  </a:txBody>
+                  <a:tcPr>
+                    <a:solidFill>
+                      <a:srgbClr val="FFFFFF"/>
+                    </a:solidFill>
+                  </a:tcPr>
+                </a:tc>
+                <a:tc>
+                  <a:txBody>
+                    <a:bodyPr/>
+                    <a:lstStyle/>
+                    <a:p>
+                      <a:pPr algn="ctr"/>
+                      <a:r>
+                        <a:rPr sz="900" b="0">
+                          <a:solidFill>
+                            <a:srgbClr val="333333"/>
+                          </a:solidFill>
+                          <a:latin typeface="Calibri"/>
+                        </a:rPr>
+                        <a:t>3</a:t>
+                      </a:r>
+                    </a:p>
+                  </a:txBody>
+                  <a:tcPr>
+                    <a:solidFill>
+                      <a:srgbClr val="FFFFFF"/>
+                    </a:solidFill>
+                  </a:tcPr>
+                </a:tc>
+                <a:tc>
+                  <a:txBody>
+                    <a:bodyPr/>
+                    <a:lstStyle/>
+                    <a:p>
+                      <a:pPr algn="ctr"/>
+                      <a:r>
+                        <a:rPr sz="900" b="0">
+                          <a:solidFill>
+                            <a:srgbClr val="333333"/>
+                          </a:solidFill>
+                          <a:latin typeface="Calibri"/>
+                        </a:rPr>
+                        <a:t>15</a:t>
+                      </a:r>
+                    </a:p>
+                  </a:txBody>
+                  <a:tcPr>
+                    <a:solidFill>
+                      <a:srgbClr val="FFFFFF"/>
+                    </a:solidFill>
+                  </a:tcPr>
+                </a:tc>
+              </a:tr>
+              <a:tr h="182880">
+                <a:tc>
+                  <a:txBody>
+                    <a:bodyPr/>
+                    <a:lstStyle/>
+                    <a:p>
+                      <a:pPr algn="l"/>
+                      <a:r>
+                        <a:rPr sz="900" b="0">
+                          <a:solidFill>
+                            <a:srgbClr val="333333"/>
+                          </a:solidFill>
+                          <a:latin typeface="Calibri"/>
+                        </a:rPr>
+                        <a:t>Kırtasiye</a:t>
+                      </a:r>
+                    </a:p>
+                  </a:txBody>
+                  <a:tcPr>
+                    <a:solidFill>
+                      <a:srgbClr val="FAFAFA"/>
+                    </a:solidFill>
+                  </a:tcPr>
+                </a:tc>
+                <a:tc>
+                  <a:txBody>
+                    <a:bodyPr/>
+                    <a:lstStyle/>
+                    <a:p>
+                      <a:pPr algn="ctr"/>
+                      <a:r>
+                        <a:rPr sz="900" b="0">
+                          <a:solidFill>
+                            <a:srgbClr val="333333"/>
+                          </a:solidFill>
+                          <a:latin typeface="Calibri"/>
+                        </a:rPr>
+                        <a:t>24</a:t>
+                      </a:r>
+                    </a:p>
+                  </a:txBody>
+                  <a:tcPr>
+                    <a:solidFill>
+                      <a:srgbClr val="FAFAFA"/>
+                    </a:solidFill>
+                  </a:tcPr>
+                </a:tc>
+                <a:tc>
+                  <a:txBody>
+                    <a:bodyPr/>
+                    <a:lstStyle/>
+                    <a:p>
+                      <a:pPr algn="ctr"/>
+                      <a:r>
+                        <a:rPr sz="900" b="0">
+                          <a:solidFill>
+                            <a:srgbClr val="333333"/>
+                          </a:solidFill>
+                          <a:latin typeface="Calibri"/>
+                        </a:rPr>
+                        <a:t>23</a:t>
+                      </a:r>
+                    </a:p>
+                  </a:txBody>
+                  <a:tcPr>
+                    <a:solidFill>
+                      <a:srgbClr val="FAFAFA"/>
+                    </a:solidFill>
+                  </a:tcPr>
+                </a:tc>
+                <a:tc>
+                  <a:txBody>
+                    <a:bodyPr/>
+                    <a:lstStyle/>
+                    <a:p>
+                      <a:pPr algn="ctr"/>
+                      <a:r>
+                        <a:rPr sz="900" b="0">
+                          <a:solidFill>
+                            <a:srgbClr val="333333"/>
+                          </a:solidFill>
+                          <a:latin typeface="Calibri"/>
+                        </a:rPr>
                         <a:t>2</a:t>
                       </a:r>
                     </a:p>
                   </a:txBody>
                   <a:tcPr>
                     <a:solidFill>
+                      <a:srgbClr val="FAFAFA"/>
+                    </a:solidFill>
+                  </a:tcPr>
+                </a:tc>
+                <a:tc>
+                  <a:txBody>
+                    <a:bodyPr/>
+                    <a:lstStyle/>
+                    <a:p>
+                      <a:pPr algn="ctr"/>
+                      <a:r>
+                        <a:rPr sz="900" b="1">
+                          <a:solidFill>
+                            <a:srgbClr val="A6001A"/>
+                          </a:solidFill>
+                          <a:latin typeface="Calibri"/>
+                        </a:rPr>
+                        <a:t>1</a:t>
+                      </a:r>
+                    </a:p>
+                  </a:txBody>
+                  <a:tcPr>
+                    <a:solidFill>
+                      <a:srgbClr val="FAFAFA"/>
+                    </a:solidFill>
+                  </a:tcPr>
+                </a:tc>
+                <a:tc>
+                  <a:txBody>
+                    <a:bodyPr/>
+                    <a:lstStyle/>
+                    <a:p>
+                      <a:pPr algn="ctr"/>
+                      <a:r>
+                        <a:rPr sz="900" b="0">
+                          <a:solidFill>
+                            <a:srgbClr val="333333"/>
+                          </a:solidFill>
+                          <a:latin typeface="Calibri"/>
+                        </a:rPr>
+                        <a:t>—</a:t>
+                      </a:r>
+                    </a:p>
+                  </a:txBody>
+                  <a:tcPr>
+                    <a:solidFill>
+                      <a:srgbClr val="FAFAFA"/>
+                    </a:solidFill>
+                  </a:tcPr>
+                </a:tc>
+                <a:tc>
+                  <a:txBody>
+                    <a:bodyPr/>
+                    <a:lstStyle/>
+                    <a:p>
+                      <a:pPr algn="ctr"/>
+                      <a:r>
+                        <a:rPr sz="900" b="0">
+                          <a:solidFill>
+                            <a:srgbClr val="333333"/>
+                          </a:solidFill>
+                          <a:latin typeface="Calibri"/>
+                        </a:rPr>
+                        <a:t>22</a:t>
+                      </a:r>
+                    </a:p>
+                  </a:txBody>
+                  <a:tcPr>
+                    <a:solidFill>
+                      <a:srgbClr val="FAFAFA"/>
+                    </a:solidFill>
+                  </a:tcPr>
+                </a:tc>
+              </a:tr>
+              <a:tr h="182880">
+                <a:tc>
+                  <a:txBody>
+                    <a:bodyPr/>
+                    <a:lstStyle/>
+                    <a:p>
+                      <a:pPr algn="l"/>
+                      <a:r>
+                        <a:rPr sz="900" b="0">
+                          <a:solidFill>
+                            <a:srgbClr val="333333"/>
+                          </a:solidFill>
+                          <a:latin typeface="Calibri"/>
+                        </a:rPr>
+                        <a:t>Kıyafet</a:t>
+                      </a:r>
+                    </a:p>
+                  </a:txBody>
+                  <a:tcPr>
+                    <a:solidFill>
                       <a:srgbClr val="FFFFFF"/>
                     </a:solidFill>
                   </a:tcPr>
@@ -11155,12 +12822,58 @@
                     <a:p>
                       <a:pPr algn="ctr"/>
                       <a:r>
-                        <a:rPr sz="950" b="0">
+                        <a:rPr sz="900" b="0">
                           <a:solidFill>
                             <a:srgbClr val="333333"/>
                           </a:solidFill>
                           <a:latin typeface="Calibri"/>
                         </a:rPr>
+                        <a:t>0</a:t>
+                      </a:r>
+                    </a:p>
+                  </a:txBody>
+                  <a:tcPr>
+                    <a:solidFill>
+                      <a:srgbClr val="FFFFFF"/>
+                    </a:solidFill>
+                  </a:tcPr>
+                </a:tc>
+                <a:tc>
+                  <a:txBody>
+                    <a:bodyPr/>
+                    <a:lstStyle/>
+                    <a:p>
+                      <a:pPr algn="ctr"/>
+                      <a:r>
+                        <a:rPr sz="900" b="0">
+                          <a:solidFill>
+                            <a:srgbClr val="333333"/>
+                          </a:solidFill>
+                          <a:latin typeface="Calibri"/>
+                        </a:rPr>
+                        <a:t>0</a:t>
+                      </a:r>
+                    </a:p>
+                  </a:txBody>
+                  <a:tcPr>
+                    <a:solidFill>
+                      <a:srgbClr val="FFFFFF"/>
+                    </a:solidFill>
+                  </a:tcPr>
+                </a:tc>
+                <a:tc>
+                  <a:txBody>
+                    <a:bodyPr/>
+                    <a:lstStyle/>
+                    <a:p>
+                      <a:pPr algn="ctr"/>
+                      <a:r>
+                        <a:rPr sz="900" b="0">
+                          <a:solidFill>
+                            <a:srgbClr val="333333"/>
+                          </a:solidFill>
+                          <a:latin typeface="Calibri"/>
+                        </a:rPr>
                         <a:t>—</a:t>
                       </a:r>
                     </a:p>
@@ -11178,7 +12891,30 @@
                     <a:p>
                       <a:pPr algn="ctr"/>
                       <a:r>
-                        <a:rPr sz="950" b="0">
+                        <a:rPr sz="900" b="1">
+                          <a:solidFill>
+                            <a:srgbClr val="A6001A"/>
+                          </a:solidFill>
+                          <a:latin typeface="Calibri"/>
+                        </a:rPr>
+                        <a:t>—</a:t>
+                      </a:r>
+                    </a:p>
+                  </a:txBody>
+                  <a:tcPr>
+                    <a:solidFill>
+                      <a:srgbClr val="FFFFFF"/>
+                    </a:solidFill>
+                  </a:tcPr>
+                </a:tc>
+                <a:tc>
+                  <a:txBody>
+                    <a:bodyPr/>
+                    <a:lstStyle/>
+                    <a:p>
+                      <a:pPr algn="ctr"/>
+                      <a:r>
+                        <a:rPr sz="900" b="0">
                           <a:solidFill>
                             <a:srgbClr val="333333"/>
                           </a:solidFill>
@@ -11194,8 +12930,31 @@
                     </a:solidFill>
                   </a:tcPr>
                 </a:tc>
+                <a:tc>
+                  <a:txBody>
+                    <a:bodyPr/>
+                    <a:lstStyle/>
+                    <a:p>
+                      <a:pPr algn="ctr"/>
+                      <a:r>
+                        <a:rPr sz="900" b="0">
+                          <a:solidFill>
+                            <a:srgbClr val="333333"/>
+                          </a:solidFill>
+                          <a:latin typeface="Calibri"/>
+                        </a:rPr>
+                        <a:t>4</a:t>
+                      </a:r>
+                    </a:p>
+                  </a:txBody>
+                  <a:tcPr>
+                    <a:solidFill>
+                      <a:srgbClr val="FFFFFF"/>
+                    </a:solidFill>
+                  </a:tcPr>
+                </a:tc>
               </a:tr>
-              <a:tr h="248602">
+              <a:tr h="182880">
                 <a:tc>
                   <a:txBody>
                     <a:bodyPr/>
@@ -11203,1674 +12962,320 @@
                     <a:p>
                       <a:pPr algn="l"/>
                       <a:r>
-                        <a:rPr sz="950" b="0">
+                        <a:rPr sz="900" b="1">
                           <a:solidFill>
                             <a:srgbClr val="333333"/>
                           </a:solidFill>
                           <a:latin typeface="Calibri"/>
                         </a:rPr>
-                        <a:t>İdari İşler</a:t>
-                      </a:r>
-                    </a:p>
-                  </a:txBody>
-                  <a:tcPr>
-                    <a:solidFill>
-                      <a:srgbClr val="FAFAFA"/>
-                    </a:solidFill>
-                  </a:tcPr>
-                </a:tc>
-                <a:tc>
-                  <a:txBody>
-                    <a:bodyPr/>
-                    <a:lstStyle/>
-                    <a:p>
-                      <a:pPr algn="ctr"/>
-                      <a:r>
-                        <a:rPr sz="950" b="0">
+                        <a:t>TOPLAM</a:t>
+                      </a:r>
+                    </a:p>
+                  </a:txBody>
+                  <a:tcPr>
+                    <a:solidFill>
+                      <a:srgbClr val="F2F2F2"/>
+                    </a:solidFill>
+                  </a:tcPr>
+                </a:tc>
+                <a:tc>
+                  <a:txBody>
+                    <a:bodyPr/>
+                    <a:lstStyle/>
+                    <a:p>
+                      <a:pPr algn="ctr"/>
+                      <a:r>
+                        <a:rPr sz="900" b="1">
                           <a:solidFill>
                             <a:srgbClr val="333333"/>
                           </a:solidFill>
                           <a:latin typeface="Calibri"/>
                         </a:rPr>
-                        <a:t>8</a:t>
-                      </a:r>
-                    </a:p>
-                  </a:txBody>
-                  <a:tcPr>
-                    <a:solidFill>
-                      <a:srgbClr val="FAFAFA"/>
-                    </a:solidFill>
-                  </a:tcPr>
-                </a:tc>
-                <a:tc>
-                  <a:txBody>
-                    <a:bodyPr/>
-                    <a:lstStyle/>
-                    <a:p>
-                      <a:pPr algn="ctr"/>
-                      <a:r>
-                        <a:rPr sz="950" b="0">
+                        <a:t>145</a:t>
+                      </a:r>
+                    </a:p>
+                  </a:txBody>
+                  <a:tcPr>
+                    <a:solidFill>
+                      <a:srgbClr val="F2F2F2"/>
+                    </a:solidFill>
+                  </a:tcPr>
+                </a:tc>
+                <a:tc>
+                  <a:txBody>
+                    <a:bodyPr/>
+                    <a:lstStyle/>
+                    <a:p>
+                      <a:pPr algn="ctr"/>
+                      <a:r>
+                        <a:rPr sz="900" b="1">
                           <a:solidFill>
                             <a:srgbClr val="333333"/>
                           </a:solidFill>
                           <a:latin typeface="Calibri"/>
                         </a:rPr>
-                        <a:t>6</a:t>
-                      </a:r>
-                    </a:p>
-                  </a:txBody>
-                  <a:tcPr>
-                    <a:solidFill>
-                      <a:srgbClr val="FAFAFA"/>
-                    </a:solidFill>
-                  </a:tcPr>
-                </a:tc>
-                <a:tc>
-                  <a:txBody>
-                    <a:bodyPr/>
-                    <a:lstStyle/>
-                    <a:p>
-                      <a:pPr algn="ctr"/>
-                      <a:r>
-                        <a:rPr sz="950" b="1">
+                        <a:t>131</a:t>
+                      </a:r>
+                    </a:p>
+                  </a:txBody>
+                  <a:tcPr>
+                    <a:solidFill>
+                      <a:srgbClr val="F2F2F2"/>
+                    </a:solidFill>
+                  </a:tcPr>
+                </a:tc>
+                <a:tc>
+                  <a:txBody>
+                    <a:bodyPr/>
+                    <a:lstStyle/>
+                    <a:p>
+                      <a:pPr algn="ctr"/>
+                      <a:r>
+                        <a:rPr sz="900" b="1">
+                          <a:solidFill>
+                            <a:srgbClr val="333333"/>
+                          </a:solidFill>
+                          <a:latin typeface="Calibri"/>
+                        </a:rPr>
+                        <a:t>3</a:t>
+                      </a:r>
+                    </a:p>
+                  </a:txBody>
+                  <a:tcPr>
+                    <a:solidFill>
+                      <a:srgbClr val="F2F2F2"/>
+                    </a:solidFill>
+                  </a:tcPr>
+                </a:tc>
+                <a:tc>
+                  <a:txBody>
+                    <a:bodyPr/>
+                    <a:lstStyle/>
+                    <a:p>
+                      <a:pPr algn="ctr"/>
+                      <a:r>
+                        <a:rPr sz="900" b="1">
                           <a:solidFill>
                             <a:srgbClr val="A6001A"/>
                           </a:solidFill>
                           <a:latin typeface="Calibri"/>
                         </a:rPr>
-                        <a:t>2</a:t>
-                      </a:r>
-                    </a:p>
-                  </a:txBody>
-                  <a:tcPr>
-                    <a:solidFill>
-                      <a:srgbClr val="FAFAFA"/>
-                    </a:solidFill>
-                  </a:tcPr>
-                </a:tc>
-                <a:tc>
-                  <a:txBody>
-                    <a:bodyPr/>
-                    <a:lstStyle/>
-                    <a:p>
-                      <a:pPr algn="ctr"/>
-                      <a:r>
-                        <a:rPr sz="950" b="0">
+                        <a:t>17</a:t>
+                      </a:r>
+                    </a:p>
+                  </a:txBody>
+                  <a:tcPr>
+                    <a:solidFill>
+                      <a:srgbClr val="F2F2F2"/>
+                    </a:solidFill>
+                  </a:tcPr>
+                </a:tc>
+                <a:tc>
+                  <a:txBody>
+                    <a:bodyPr/>
+                    <a:lstStyle/>
+                    <a:p>
+                      <a:pPr algn="ctr"/>
+                      <a:r>
+                        <a:rPr sz="900" b="1">
                           <a:solidFill>
                             <a:srgbClr val="333333"/>
                           </a:solidFill>
                           <a:latin typeface="Calibri"/>
                         </a:rPr>
+                        <a:t>3</a:t>
+                      </a:r>
+                    </a:p>
+                  </a:txBody>
+                  <a:tcPr>
+                    <a:solidFill>
+                      <a:srgbClr val="F2F2F2"/>
+                    </a:solidFill>
+                  </a:tcPr>
+                </a:tc>
+                <a:tc>
+                  <a:txBody>
+                    <a:bodyPr/>
+                    <a:lstStyle/>
+                    <a:p>
+                      <a:pPr algn="ctr"/>
+                      <a:r>
+                        <a:rPr sz="900" b="1">
+                          <a:solidFill>
+                            <a:srgbClr val="333333"/>
+                          </a:solidFill>
+                          <a:latin typeface="Calibri"/>
+                        </a:rPr>
+                        <a:t>58</a:t>
+                      </a:r>
+                    </a:p>
+                  </a:txBody>
+                  <a:tcPr>
+                    <a:solidFill>
+                      <a:srgbClr val="F2F2F2"/>
+                    </a:solidFill>
+                  </a:tcPr>
+                </a:tc>
+              </a:tr>
+              <a:tr h="182880">
+                <a:tc>
+                  <a:txBody>
+                    <a:bodyPr/>
+                    <a:lstStyle/>
+                    <a:p>
+                      <a:pPr algn="l"/>
+                      <a:r>
+                        <a:rPr sz="900" b="0">
+                          <a:solidFill>
+                            <a:srgbClr val="333333"/>
+                          </a:solidFill>
+                          <a:latin typeface="Calibri"/>
+                        </a:rPr>
+                        <a:t>Etkinlik (norm dışı)</a:t>
+                      </a:r>
+                    </a:p>
+                  </a:txBody>
+                  <a:tcPr>
+                    <a:solidFill>
+                      <a:srgbClr val="FFF6E6"/>
+                    </a:solidFill>
+                  </a:tcPr>
+                </a:tc>
+                <a:tc>
+                  <a:txBody>
+                    <a:bodyPr/>
+                    <a:lstStyle/>
+                    <a:p>
+                      <a:pPr algn="ctr"/>
+                      <a:r>
+                        <a:rPr sz="900" b="0">
+                          <a:solidFill>
+                            <a:srgbClr val="333333"/>
+                          </a:solidFill>
+                          <a:latin typeface="Calibri"/>
+                        </a:rPr>
                         <a:t>—</a:t>
                       </a:r>
                     </a:p>
                   </a:txBody>
                   <a:tcPr>
                     <a:solidFill>
-                      <a:srgbClr val="FAFAFA"/>
-                    </a:solidFill>
-                  </a:tcPr>
-                </a:tc>
-                <a:tc>
-                  <a:txBody>
-                    <a:bodyPr/>
-                    <a:lstStyle/>
-                    <a:p>
-                      <a:pPr algn="ctr"/>
-                      <a:r>
-                        <a:rPr sz="950" b="0">
+                      <a:srgbClr val="FFF6E6"/>
+                    </a:solidFill>
+                  </a:tcPr>
+                </a:tc>
+                <a:tc>
+                  <a:txBody>
+                    <a:bodyPr/>
+                    <a:lstStyle/>
+                    <a:p>
+                      <a:pPr algn="ctr"/>
+                      <a:r>
+                        <a:rPr sz="900" b="0">
                           <a:solidFill>
                             <a:srgbClr val="333333"/>
                           </a:solidFill>
                           <a:latin typeface="Calibri"/>
                         </a:rPr>
+                        <a:t>3</a:t>
+                      </a:r>
+                    </a:p>
+                  </a:txBody>
+                  <a:tcPr>
+                    <a:solidFill>
+                      <a:srgbClr val="FFF6E6"/>
+                    </a:solidFill>
+                  </a:tcPr>
+                </a:tc>
+                <a:tc>
+                  <a:txBody>
+                    <a:bodyPr/>
+                    <a:lstStyle/>
+                    <a:p>
+                      <a:pPr algn="ctr"/>
+                      <a:r>
+                        <a:rPr sz="900" b="0">
+                          <a:solidFill>
+                            <a:srgbClr val="333333"/>
+                          </a:solidFill>
+                          <a:latin typeface="Calibri"/>
+                        </a:rPr>
                         <a:t>—</a:t>
                       </a:r>
                     </a:p>
                   </a:txBody>
                   <a:tcPr>
                     <a:solidFill>
-                      <a:srgbClr val="FAFAFA"/>
-                    </a:solidFill>
-                  </a:tcPr>
-                </a:tc>
-              </a:tr>
-              <a:tr h="248602">
-                <a:tc>
-                  <a:txBody>
-                    <a:bodyPr/>
-                    <a:lstStyle/>
-                    <a:p>
-                      <a:pPr algn="l"/>
-                      <a:r>
-                        <a:rPr sz="950" b="0">
+                      <a:srgbClr val="FFF6E6"/>
+                    </a:solidFill>
+                  </a:tcPr>
+                </a:tc>
+                <a:tc>
+                  <a:txBody>
+                    <a:bodyPr/>
+                    <a:lstStyle/>
+                    <a:p>
+                      <a:pPr algn="ctr"/>
+                      <a:r>
+                        <a:rPr sz="900" b="1">
+                          <a:solidFill>
+                            <a:srgbClr val="A6001A"/>
+                          </a:solidFill>
+                          <a:latin typeface="Calibri"/>
+                        </a:rPr>
+                        <a:t>—</a:t>
+                      </a:r>
+                    </a:p>
+                  </a:txBody>
+                  <a:tcPr>
+                    <a:solidFill>
+                      <a:srgbClr val="FFF6E6"/>
+                    </a:solidFill>
+                  </a:tcPr>
+                </a:tc>
+                <a:tc>
+                  <a:txBody>
+                    <a:bodyPr/>
+                    <a:lstStyle/>
+                    <a:p>
+                      <a:pPr algn="ctr"/>
+                      <a:r>
+                        <a:rPr sz="900" b="0">
                           <a:solidFill>
                             <a:srgbClr val="333333"/>
                           </a:solidFill>
                           <a:latin typeface="Calibri"/>
                         </a:rPr>
-                        <a:t>Kasa</a:t>
-                      </a:r>
-                    </a:p>
-                  </a:txBody>
-                  <a:tcPr>
-                    <a:solidFill>
-                      <a:srgbClr val="FFFFFF"/>
-                    </a:solidFill>
-                  </a:tcPr>
-                </a:tc>
-                <a:tc>
-                  <a:txBody>
-                    <a:bodyPr/>
-                    <a:lstStyle/>
-                    <a:p>
-                      <a:pPr algn="ctr"/>
-                      <a:r>
-                        <a:rPr sz="950" b="0">
+                        <a:t>—</a:t>
+                      </a:r>
+                    </a:p>
+                  </a:txBody>
+                  <a:tcPr>
+                    <a:solidFill>
+                      <a:srgbClr val="FFF6E6"/>
+                    </a:solidFill>
+                  </a:tcPr>
+                </a:tc>
+                <a:tc>
+                  <a:txBody>
+                    <a:bodyPr/>
+                    <a:lstStyle/>
+                    <a:p>
+                      <a:pPr algn="ctr"/>
+                      <a:r>
+                        <a:rPr sz="900" b="0">
                           <a:solidFill>
                             <a:srgbClr val="333333"/>
                           </a:solidFill>
                           <a:latin typeface="Calibri"/>
                         </a:rPr>
-                        <a:t>16</a:t>
-                      </a:r>
-                    </a:p>
-                  </a:txBody>
-                  <a:tcPr>
-                    <a:solidFill>
-                      <a:srgbClr val="FFFFFF"/>
-                    </a:solidFill>
-                  </a:tcPr>
-                </a:tc>
-                <a:tc>
-                  <a:txBody>
-                    <a:bodyPr/>
-                    <a:lstStyle/>
-                    <a:p>
-                      <a:pPr algn="ctr"/>
-                      <a:r>
-                        <a:rPr sz="950" b="0">
-                          <a:solidFill>
-                            <a:srgbClr val="333333"/>
-                          </a:solidFill>
-                          <a:latin typeface="Calibri"/>
-                        </a:rPr>
-                        <a:t>15</a:t>
-                      </a:r>
-                    </a:p>
-                  </a:txBody>
-                  <a:tcPr>
-                    <a:solidFill>
-                      <a:srgbClr val="FFFFFF"/>
-                    </a:solidFill>
-                  </a:tcPr>
-                </a:tc>
-                <a:tc>
-                  <a:txBody>
-                    <a:bodyPr/>
-                    <a:lstStyle/>
-                    <a:p>
-                      <a:pPr algn="ctr"/>
-                      <a:r>
-                        <a:rPr sz="950" b="1">
-                          <a:solidFill>
-                            <a:srgbClr val="A6001A"/>
-                          </a:solidFill>
-                          <a:latin typeface="Calibri"/>
-                        </a:rPr>
-                        <a:t>1</a:t>
-                      </a:r>
-                    </a:p>
-                  </a:txBody>
-                  <a:tcPr>
-                    <a:solidFill>
-                      <a:srgbClr val="FFFFFF"/>
-                    </a:solidFill>
-                  </a:tcPr>
-                </a:tc>
-                <a:tc>
-                  <a:txBody>
-                    <a:bodyPr/>
-                    <a:lstStyle/>
-                    <a:p>
-                      <a:pPr algn="ctr"/>
-                      <a:r>
-                        <a:rPr sz="950" b="0">
-                          <a:solidFill>
-                            <a:srgbClr val="333333"/>
-                          </a:solidFill>
-                          <a:latin typeface="Calibri"/>
-                        </a:rPr>
                         <a:t>—</a:t>
                       </a:r>
                     </a:p>
                   </a:txBody>
                   <a:tcPr>
                     <a:solidFill>
-                      <a:srgbClr val="FFFFFF"/>
-                    </a:solidFill>
-                  </a:tcPr>
-                </a:tc>
-                <a:tc>
-                  <a:txBody>
-                    <a:bodyPr/>
-                    <a:lstStyle/>
-                    <a:p>
-                      <a:pPr algn="ctr"/>
-                      <a:r>
-                        <a:rPr sz="950" b="0">
-                          <a:solidFill>
-                            <a:srgbClr val="333333"/>
-                          </a:solidFill>
-                          <a:latin typeface="Calibri"/>
-                        </a:rPr>
-                        <a:t>9</a:t>
-                      </a:r>
-                    </a:p>
-                  </a:txBody>
-                  <a:tcPr>
-                    <a:solidFill>
-                      <a:srgbClr val="FFFFFF"/>
-                    </a:solidFill>
-                  </a:tcPr>
-                </a:tc>
-              </a:tr>
-              <a:tr h="248602">
-                <a:tc>
-                  <a:txBody>
-                    <a:bodyPr/>
-                    <a:lstStyle/>
-                    <a:p>
-                      <a:pPr algn="l"/>
-                      <a:r>
-                        <a:rPr sz="950" b="0">
-                          <a:solidFill>
-                            <a:srgbClr val="333333"/>
-                          </a:solidFill>
-                          <a:latin typeface="Calibri"/>
-                        </a:rPr>
-                        <a:t>Muhasebe</a:t>
-                      </a:r>
-                    </a:p>
-                  </a:txBody>
-                  <a:tcPr>
-                    <a:solidFill>
-                      <a:srgbClr val="FAFAFA"/>
-                    </a:solidFill>
-                  </a:tcPr>
-                </a:tc>
-                <a:tc>
-                  <a:txBody>
-                    <a:bodyPr/>
-                    <a:lstStyle/>
-                    <a:p>
-                      <a:pPr algn="ctr"/>
-                      <a:r>
-                        <a:rPr sz="950" b="0">
-                          <a:solidFill>
-                            <a:srgbClr val="333333"/>
-                          </a:solidFill>
-                          <a:latin typeface="Calibri"/>
-                        </a:rPr>
-                        <a:t>1</a:t>
-                      </a:r>
-                    </a:p>
-                  </a:txBody>
-                  <a:tcPr>
-                    <a:solidFill>
-                      <a:srgbClr val="FAFAFA"/>
-                    </a:solidFill>
-                  </a:tcPr>
-                </a:tc>
-                <a:tc>
-                  <a:txBody>
-                    <a:bodyPr/>
-                    <a:lstStyle/>
-                    <a:p>
-                      <a:pPr algn="ctr"/>
-                      <a:r>
-                        <a:rPr sz="950" b="0">
-                          <a:solidFill>
-                            <a:srgbClr val="333333"/>
-                          </a:solidFill>
-                          <a:latin typeface="Calibri"/>
-                        </a:rPr>
-                        <a:t>0</a:t>
-                      </a:r>
-                    </a:p>
-                  </a:txBody>
-                  <a:tcPr>
-                    <a:solidFill>
-                      <a:srgbClr val="FAFAFA"/>
-                    </a:solidFill>
-                  </a:tcPr>
-                </a:tc>
-                <a:tc>
-                  <a:txBody>
-                    <a:bodyPr/>
-                    <a:lstStyle/>
-                    <a:p>
-                      <a:pPr algn="ctr"/>
-                      <a:r>
-                        <a:rPr sz="950" b="1">
-                          <a:solidFill>
-                            <a:srgbClr val="A6001A"/>
-                          </a:solidFill>
-                          <a:latin typeface="Calibri"/>
-                        </a:rPr>
-                        <a:t>1</a:t>
-                      </a:r>
-                    </a:p>
-                  </a:txBody>
-                  <a:tcPr>
-                    <a:solidFill>
-                      <a:srgbClr val="FAFAFA"/>
-                    </a:solidFill>
-                  </a:tcPr>
-                </a:tc>
-                <a:tc>
-                  <a:txBody>
-                    <a:bodyPr/>
-                    <a:lstStyle/>
-                    <a:p>
-                      <a:pPr algn="ctr"/>
-                      <a:r>
-                        <a:rPr sz="950" b="0">
-                          <a:solidFill>
-                            <a:srgbClr val="333333"/>
-                          </a:solidFill>
-                          <a:latin typeface="Calibri"/>
-                        </a:rPr>
-                        <a:t>—</a:t>
-                      </a:r>
-                    </a:p>
-                  </a:txBody>
-                  <a:tcPr>
-                    <a:solidFill>
-                      <a:srgbClr val="FAFAFA"/>
-                    </a:solidFill>
-                  </a:tcPr>
-                </a:tc>
-                <a:tc>
-                  <a:txBody>
-                    <a:bodyPr/>
-                    <a:lstStyle/>
-                    <a:p>
-                      <a:pPr algn="ctr"/>
-                      <a:r>
-                        <a:rPr sz="950" b="0">
-                          <a:solidFill>
-                            <a:srgbClr val="333333"/>
-                          </a:solidFill>
-                          <a:latin typeface="Calibri"/>
-                        </a:rPr>
-                        <a:t>—</a:t>
-                      </a:r>
-                    </a:p>
-                  </a:txBody>
-                  <a:tcPr>
-                    <a:solidFill>
-                      <a:srgbClr val="FAFAFA"/>
-                    </a:solidFill>
-                  </a:tcPr>
-                </a:tc>
-              </a:tr>
-              <a:tr h="248602">
-                <a:tc>
-                  <a:txBody>
-                    <a:bodyPr/>
-                    <a:lstStyle/>
-                    <a:p>
-                      <a:pPr algn="l"/>
-                      <a:r>
-                        <a:rPr sz="950" b="0">
-                          <a:solidFill>
-                            <a:srgbClr val="333333"/>
-                          </a:solidFill>
-                          <a:latin typeface="Calibri"/>
-                        </a:rPr>
-                        <a:t>Oyun Alanı</a:t>
-                      </a:r>
-                    </a:p>
-                  </a:txBody>
-                  <a:tcPr>
-                    <a:solidFill>
-                      <a:srgbClr val="FFFFFF"/>
-                    </a:solidFill>
-                  </a:tcPr>
-                </a:tc>
-                <a:tc>
-                  <a:txBody>
-                    <a:bodyPr/>
-                    <a:lstStyle/>
-                    <a:p>
-                      <a:pPr algn="ctr"/>
-                      <a:r>
-                        <a:rPr sz="950" b="0">
-                          <a:solidFill>
-                            <a:srgbClr val="333333"/>
-                          </a:solidFill>
-                          <a:latin typeface="Calibri"/>
-                        </a:rPr>
-                        <a:t>1</a:t>
-                      </a:r>
-                    </a:p>
-                  </a:txBody>
-                  <a:tcPr>
-                    <a:solidFill>
-                      <a:srgbClr val="FFFFFF"/>
-                    </a:solidFill>
-                  </a:tcPr>
-                </a:tc>
-                <a:tc>
-                  <a:txBody>
-                    <a:bodyPr/>
-                    <a:lstStyle/>
-                    <a:p>
-                      <a:pPr algn="ctr"/>
-                      <a:r>
-                        <a:rPr sz="950" b="0">
-                          <a:solidFill>
-                            <a:srgbClr val="333333"/>
-                          </a:solidFill>
-                          <a:latin typeface="Calibri"/>
-                        </a:rPr>
-                        <a:t>0</a:t>
-                      </a:r>
-                    </a:p>
-                  </a:txBody>
-                  <a:tcPr>
-                    <a:solidFill>
-                      <a:srgbClr val="FFFFFF"/>
-                    </a:solidFill>
-                  </a:tcPr>
-                </a:tc>
-                <a:tc>
-                  <a:txBody>
-                    <a:bodyPr/>
-                    <a:lstStyle/>
-                    <a:p>
-                      <a:pPr algn="ctr"/>
-                      <a:r>
-                        <a:rPr sz="950" b="1">
-                          <a:solidFill>
-                            <a:srgbClr val="A6001A"/>
-                          </a:solidFill>
-                          <a:latin typeface="Calibri"/>
-                        </a:rPr>
-                        <a:t>1</a:t>
-                      </a:r>
-                    </a:p>
-                  </a:txBody>
-                  <a:tcPr>
-                    <a:solidFill>
-                      <a:srgbClr val="FFFFFF"/>
-                    </a:solidFill>
-                  </a:tcPr>
-                </a:tc>
-                <a:tc>
-                  <a:txBody>
-                    <a:bodyPr/>
-                    <a:lstStyle/>
-                    <a:p>
-                      <a:pPr algn="ctr"/>
-                      <a:r>
-                        <a:rPr sz="950" b="0">
-                          <a:solidFill>
-                            <a:srgbClr val="333333"/>
-                          </a:solidFill>
-                          <a:latin typeface="Calibri"/>
-                        </a:rPr>
-                        <a:t>—</a:t>
-                      </a:r>
-                    </a:p>
-                  </a:txBody>
-                  <a:tcPr>
-                    <a:solidFill>
-                      <a:srgbClr val="FFFFFF"/>
-                    </a:solidFill>
-                  </a:tcPr>
-                </a:tc>
-                <a:tc>
-                  <a:txBody>
-                    <a:bodyPr/>
-                    <a:lstStyle/>
-                    <a:p>
-                      <a:pPr algn="ctr"/>
-                      <a:r>
-                        <a:rPr sz="950" b="0">
-                          <a:solidFill>
-                            <a:srgbClr val="333333"/>
-                          </a:solidFill>
-                          <a:latin typeface="Calibri"/>
-                        </a:rPr>
-                        <a:t>—</a:t>
-                      </a:r>
-                    </a:p>
-                  </a:txBody>
-                  <a:tcPr>
-                    <a:solidFill>
-                      <a:srgbClr val="FFFFFF"/>
-                    </a:solidFill>
-                  </a:tcPr>
-                </a:tc>
-              </a:tr>
-              <a:tr h="248602">
-                <a:tc>
-                  <a:txBody>
-                    <a:bodyPr/>
-                    <a:lstStyle/>
-                    <a:p>
-                      <a:pPr algn="l"/>
-                      <a:r>
-                        <a:rPr sz="950" b="0">
-                          <a:solidFill>
-                            <a:srgbClr val="333333"/>
-                          </a:solidFill>
-                          <a:latin typeface="Calibri"/>
-                        </a:rPr>
-                        <a:t>Akademi</a:t>
-                      </a:r>
-                    </a:p>
-                  </a:txBody>
-                  <a:tcPr>
-                    <a:solidFill>
-                      <a:srgbClr val="FAFAFA"/>
-                    </a:solidFill>
-                  </a:tcPr>
-                </a:tc>
-                <a:tc>
-                  <a:txBody>
-                    <a:bodyPr/>
-                    <a:lstStyle/>
-                    <a:p>
-                      <a:pPr algn="ctr"/>
-                      <a:r>
-                        <a:rPr sz="950" b="0">
-                          <a:solidFill>
-                            <a:srgbClr val="333333"/>
-                          </a:solidFill>
-                          <a:latin typeface="Calibri"/>
-                        </a:rPr>
-                        <a:t>10</a:t>
-                      </a:r>
-                    </a:p>
-                  </a:txBody>
-                  <a:tcPr>
-                    <a:solidFill>
-                      <a:srgbClr val="FAFAFA"/>
-                    </a:solidFill>
-                  </a:tcPr>
-                </a:tc>
-                <a:tc>
-                  <a:txBody>
-                    <a:bodyPr/>
-                    <a:lstStyle/>
-                    <a:p>
-                      <a:pPr algn="ctr"/>
-                      <a:r>
-                        <a:rPr sz="950" b="0">
-                          <a:solidFill>
-                            <a:srgbClr val="333333"/>
-                          </a:solidFill>
-                          <a:latin typeface="Calibri"/>
-                        </a:rPr>
-                        <a:t>9</a:t>
-                      </a:r>
-                    </a:p>
-                  </a:txBody>
-                  <a:tcPr>
-                    <a:solidFill>
-                      <a:srgbClr val="FAFAFA"/>
-                    </a:solidFill>
-                  </a:tcPr>
-                </a:tc>
-                <a:tc>
-                  <a:txBody>
-                    <a:bodyPr/>
-                    <a:lstStyle/>
-                    <a:p>
-                      <a:pPr algn="ctr"/>
-                      <a:r>
-                        <a:rPr sz="950" b="1">
-                          <a:solidFill>
-                            <a:srgbClr val="A6001A"/>
-                          </a:solidFill>
-                          <a:latin typeface="Calibri"/>
-                        </a:rPr>
-                        <a:t>1</a:t>
-                      </a:r>
-                    </a:p>
-                  </a:txBody>
-                  <a:tcPr>
-                    <a:solidFill>
-                      <a:srgbClr val="FAFAFA"/>
-                    </a:solidFill>
-                  </a:tcPr>
-                </a:tc>
-                <a:tc>
-                  <a:txBody>
-                    <a:bodyPr/>
-                    <a:lstStyle/>
-                    <a:p>
-                      <a:pPr algn="ctr"/>
-                      <a:r>
-                        <a:rPr sz="950" b="0">
-                          <a:solidFill>
-                            <a:srgbClr val="333333"/>
-                          </a:solidFill>
-                          <a:latin typeface="Calibri"/>
-                        </a:rPr>
-                        <a:t>—</a:t>
-                      </a:r>
-                    </a:p>
-                  </a:txBody>
-                  <a:tcPr>
-                    <a:solidFill>
-                      <a:srgbClr val="FAFAFA"/>
-                    </a:solidFill>
-                  </a:tcPr>
-                </a:tc>
-                <a:tc>
-                  <a:txBody>
-                    <a:bodyPr/>
-                    <a:lstStyle/>
-                    <a:p>
-                      <a:pPr algn="ctr"/>
-                      <a:r>
-                        <a:rPr sz="950" b="0">
-                          <a:solidFill>
-                            <a:srgbClr val="333333"/>
-                          </a:solidFill>
-                          <a:latin typeface="Calibri"/>
-                        </a:rPr>
-                        <a:t>—</a:t>
-                      </a:r>
-                    </a:p>
-                  </a:txBody>
-                  <a:tcPr>
-                    <a:solidFill>
-                      <a:srgbClr val="FAFAFA"/>
-                    </a:solidFill>
-                  </a:tcPr>
-                </a:tc>
-              </a:tr>
-              <a:tr h="248602">
-                <a:tc>
-                  <a:txBody>
-                    <a:bodyPr/>
-                    <a:lstStyle/>
-                    <a:p>
-                      <a:pPr algn="l"/>
-                      <a:r>
-                        <a:rPr sz="950" b="0">
-                          <a:solidFill>
-                            <a:srgbClr val="333333"/>
-                          </a:solidFill>
-                          <a:latin typeface="Calibri"/>
-                        </a:rPr>
-                        <a:t>Kıyafet</a:t>
-                      </a:r>
-                    </a:p>
-                  </a:txBody>
-                  <a:tcPr>
-                    <a:solidFill>
-                      <a:srgbClr val="FFFFFF"/>
-                    </a:solidFill>
-                  </a:tcPr>
-                </a:tc>
-                <a:tc>
-                  <a:txBody>
-                    <a:bodyPr/>
-                    <a:lstStyle/>
-                    <a:p>
-                      <a:pPr algn="ctr"/>
-                      <a:r>
-                        <a:rPr sz="950" b="0">
-                          <a:solidFill>
-                            <a:srgbClr val="333333"/>
-                          </a:solidFill>
-                          <a:latin typeface="Calibri"/>
-                        </a:rPr>
-                        <a:t>0</a:t>
-                      </a:r>
-                    </a:p>
-                  </a:txBody>
-                  <a:tcPr>
-                    <a:solidFill>
-                      <a:srgbClr val="FFFFFF"/>
-                    </a:solidFill>
-                  </a:tcPr>
-                </a:tc>
-                <a:tc>
-                  <a:txBody>
-                    <a:bodyPr/>
-                    <a:lstStyle/>
-                    <a:p>
-                      <a:pPr algn="ctr"/>
-                      <a:r>
-                        <a:rPr sz="950" b="0">
-                          <a:solidFill>
-                            <a:srgbClr val="333333"/>
-                          </a:solidFill>
-                          <a:latin typeface="Calibri"/>
-                        </a:rPr>
-                        <a:t>0</a:t>
-                      </a:r>
-                    </a:p>
-                  </a:txBody>
-                  <a:tcPr>
-                    <a:solidFill>
-                      <a:srgbClr val="FFFFFF"/>
-                    </a:solidFill>
-                  </a:tcPr>
-                </a:tc>
-                <a:tc>
-                  <a:txBody>
-                    <a:bodyPr/>
-                    <a:lstStyle/>
-                    <a:p>
-                      <a:pPr algn="ctr"/>
-                      <a:r>
-                        <a:rPr sz="950" b="1">
-                          <a:solidFill>
-                            <a:srgbClr val="A6001A"/>
-                          </a:solidFill>
-                          <a:latin typeface="Calibri"/>
-                        </a:rPr>
-                        <a:t>—</a:t>
-                      </a:r>
-                    </a:p>
-                  </a:txBody>
-                  <a:tcPr>
-                    <a:solidFill>
-                      <a:srgbClr val="FFFFFF"/>
-                    </a:solidFill>
-                  </a:tcPr>
-                </a:tc>
-                <a:tc>
-                  <a:txBody>
-                    <a:bodyPr/>
-                    <a:lstStyle/>
-                    <a:p>
-                      <a:pPr algn="ctr"/>
-                      <a:r>
-                        <a:rPr sz="950" b="0">
-                          <a:solidFill>
-                            <a:srgbClr val="333333"/>
-                          </a:solidFill>
-                          <a:latin typeface="Calibri"/>
-                        </a:rPr>
-                        <a:t>—</a:t>
-                      </a:r>
-                    </a:p>
-                  </a:txBody>
-                  <a:tcPr>
-                    <a:solidFill>
-                      <a:srgbClr val="FFFFFF"/>
-                    </a:solidFill>
-                  </a:tcPr>
-                </a:tc>
-                <a:tc>
-                  <a:txBody>
-                    <a:bodyPr/>
-                    <a:lstStyle/>
-                    <a:p>
-                      <a:pPr algn="ctr"/>
-                      <a:r>
-                        <a:rPr sz="950" b="0">
-                          <a:solidFill>
-                            <a:srgbClr val="333333"/>
-                          </a:solidFill>
-                          <a:latin typeface="Calibri"/>
-                        </a:rPr>
-                        <a:t>4</a:t>
-                      </a:r>
-                    </a:p>
-                  </a:txBody>
-                  <a:tcPr>
-                    <a:solidFill>
-                      <a:srgbClr val="FFFFFF"/>
-                    </a:solidFill>
-                  </a:tcPr>
-                </a:tc>
-              </a:tr>
-              <a:tr h="248602">
-                <a:tc>
-                  <a:txBody>
-                    <a:bodyPr/>
-                    <a:lstStyle/>
-                    <a:p>
-                      <a:pPr algn="l"/>
-                      <a:r>
-                        <a:rPr sz="950" b="0">
-                          <a:solidFill>
-                            <a:srgbClr val="333333"/>
-                          </a:solidFill>
-                          <a:latin typeface="Calibri"/>
-                        </a:rPr>
-                        <a:t>Kırtasiye</a:t>
-                      </a:r>
-                    </a:p>
-                  </a:txBody>
-                  <a:tcPr>
-                    <a:solidFill>
-                      <a:srgbClr val="FAFAFA"/>
-                    </a:solidFill>
-                  </a:tcPr>
-                </a:tc>
-                <a:tc>
-                  <a:txBody>
-                    <a:bodyPr/>
-                    <a:lstStyle/>
-                    <a:p>
-                      <a:pPr algn="ctr"/>
-                      <a:r>
-                        <a:rPr sz="950" b="0">
-                          <a:solidFill>
-                            <a:srgbClr val="333333"/>
-                          </a:solidFill>
-                          <a:latin typeface="Calibri"/>
-                        </a:rPr>
-                        <a:t>24</a:t>
-                      </a:r>
-                    </a:p>
-                  </a:txBody>
-                  <a:tcPr>
-                    <a:solidFill>
-                      <a:srgbClr val="FAFAFA"/>
-                    </a:solidFill>
-                  </a:tcPr>
-                </a:tc>
-                <a:tc>
-                  <a:txBody>
-                    <a:bodyPr/>
-                    <a:lstStyle/>
-                    <a:p>
-                      <a:pPr algn="ctr"/>
-                      <a:r>
-                        <a:rPr sz="950" b="0">
-                          <a:solidFill>
-                            <a:srgbClr val="333333"/>
-                          </a:solidFill>
-                          <a:latin typeface="Calibri"/>
-                        </a:rPr>
-                        <a:t>25</a:t>
-                      </a:r>
-                    </a:p>
-                  </a:txBody>
-                  <a:tcPr>
-                    <a:solidFill>
-                      <a:srgbClr val="FAFAFA"/>
-                    </a:solidFill>
-                  </a:tcPr>
-                </a:tc>
-                <a:tc>
-                  <a:txBody>
-                    <a:bodyPr/>
-                    <a:lstStyle/>
-                    <a:p>
-                      <a:pPr algn="ctr"/>
-                      <a:r>
-                        <a:rPr sz="950" b="1">
-                          <a:solidFill>
-                            <a:srgbClr val="A6001A"/>
-                          </a:solidFill>
-                          <a:latin typeface="Calibri"/>
-                        </a:rPr>
-                        <a:t>—</a:t>
-                      </a:r>
-                    </a:p>
-                  </a:txBody>
-                  <a:tcPr>
-                    <a:solidFill>
-                      <a:srgbClr val="FAFAFA"/>
-                    </a:solidFill>
-                  </a:tcPr>
-                </a:tc>
-                <a:tc>
-                  <a:txBody>
-                    <a:bodyPr/>
-                    <a:lstStyle/>
-                    <a:p>
-                      <a:pPr algn="ctr"/>
-                      <a:r>
-                        <a:rPr sz="950" b="0">
-                          <a:solidFill>
-                            <a:srgbClr val="333333"/>
-                          </a:solidFill>
-                          <a:latin typeface="Calibri"/>
-                        </a:rPr>
-                        <a:t>1</a:t>
-                      </a:r>
-                    </a:p>
-                  </a:txBody>
-                  <a:tcPr>
-                    <a:solidFill>
-                      <a:srgbClr val="FAFAFA"/>
-                    </a:solidFill>
-                  </a:tcPr>
-                </a:tc>
-                <a:tc>
-                  <a:txBody>
-                    <a:bodyPr/>
-                    <a:lstStyle/>
-                    <a:p>
-                      <a:pPr algn="ctr"/>
-                      <a:r>
-                        <a:rPr sz="950" b="0">
-                          <a:solidFill>
-                            <a:srgbClr val="333333"/>
-                          </a:solidFill>
-                          <a:latin typeface="Calibri"/>
-                        </a:rPr>
-                        <a:t>22</a:t>
-                      </a:r>
-                    </a:p>
-                  </a:txBody>
-                  <a:tcPr>
-                    <a:solidFill>
-                      <a:srgbClr val="FAFAFA"/>
-                    </a:solidFill>
-                  </a:tcPr>
-                </a:tc>
-              </a:tr>
-              <a:tr h="248602">
-                <a:tc>
-                  <a:txBody>
-                    <a:bodyPr/>
-                    <a:lstStyle/>
-                    <a:p>
-                      <a:pPr algn="l"/>
-                      <a:r>
-                        <a:rPr sz="950" b="0">
-                          <a:solidFill>
-                            <a:srgbClr val="333333"/>
-                          </a:solidFill>
-                          <a:latin typeface="Calibri"/>
-                        </a:rPr>
-                        <a:t>Mal Kabul</a:t>
-                      </a:r>
-                    </a:p>
-                  </a:txBody>
-                  <a:tcPr>
-                    <a:solidFill>
-                      <a:srgbClr val="FFFFFF"/>
-                    </a:solidFill>
-                  </a:tcPr>
-                </a:tc>
-                <a:tc>
-                  <a:txBody>
-                    <a:bodyPr/>
-                    <a:lstStyle/>
-                    <a:p>
-                      <a:pPr algn="ctr"/>
-                      <a:r>
-                        <a:rPr sz="950" b="0">
-                          <a:solidFill>
-                            <a:srgbClr val="333333"/>
-                          </a:solidFill>
-                          <a:latin typeface="Calibri"/>
-                        </a:rPr>
-                        <a:t>6</a:t>
-                      </a:r>
-                    </a:p>
-                  </a:txBody>
-                  <a:tcPr>
-                    <a:solidFill>
-                      <a:srgbClr val="FFFFFF"/>
-                    </a:solidFill>
-                  </a:tcPr>
-                </a:tc>
-                <a:tc>
-                  <a:txBody>
-                    <a:bodyPr/>
-                    <a:lstStyle/>
-                    <a:p>
-                      <a:pPr algn="ctr"/>
-                      <a:r>
-                        <a:rPr sz="950" b="0">
-                          <a:solidFill>
-                            <a:srgbClr val="333333"/>
-                          </a:solidFill>
-                          <a:latin typeface="Calibri"/>
-                        </a:rPr>
-                        <a:t>6</a:t>
-                      </a:r>
-                    </a:p>
-                  </a:txBody>
-                  <a:tcPr>
-                    <a:solidFill>
-                      <a:srgbClr val="FFFFFF"/>
-                    </a:solidFill>
-                  </a:tcPr>
-                </a:tc>
-                <a:tc>
-                  <a:txBody>
-                    <a:bodyPr/>
-                    <a:lstStyle/>
-                    <a:p>
-                      <a:pPr algn="ctr"/>
-                      <a:r>
-                        <a:rPr sz="950" b="1">
-                          <a:solidFill>
-                            <a:srgbClr val="A6001A"/>
-                          </a:solidFill>
-                          <a:latin typeface="Calibri"/>
-                        </a:rPr>
-                        <a:t>—</a:t>
-                      </a:r>
-                    </a:p>
-                  </a:txBody>
-                  <a:tcPr>
-                    <a:solidFill>
-                      <a:srgbClr val="FFFFFF"/>
-                    </a:solidFill>
-                  </a:tcPr>
-                </a:tc>
-                <a:tc>
-                  <a:txBody>
-                    <a:bodyPr/>
-                    <a:lstStyle/>
-                    <a:p>
-                      <a:pPr algn="ctr"/>
-                      <a:r>
-                        <a:rPr sz="950" b="0">
-                          <a:solidFill>
-                            <a:srgbClr val="333333"/>
-                          </a:solidFill>
-                          <a:latin typeface="Calibri"/>
-                        </a:rPr>
-                        <a:t>—</a:t>
-                      </a:r>
-                    </a:p>
-                  </a:txBody>
-                  <a:tcPr>
-                    <a:solidFill>
-                      <a:srgbClr val="FFFFFF"/>
-                    </a:solidFill>
-                  </a:tcPr>
-                </a:tc>
-                <a:tc>
-                  <a:txBody>
-                    <a:bodyPr/>
-                    <a:lstStyle/>
-                    <a:p>
-                      <a:pPr algn="ctr"/>
-                      <a:r>
-                        <a:rPr sz="950" b="0">
-                          <a:solidFill>
-                            <a:srgbClr val="333333"/>
-                          </a:solidFill>
-                          <a:latin typeface="Calibri"/>
-                        </a:rPr>
-                        <a:t>1</a:t>
-                      </a:r>
-                    </a:p>
-                  </a:txBody>
-                  <a:tcPr>
-                    <a:solidFill>
-                      <a:srgbClr val="FFFFFF"/>
-                    </a:solidFill>
-                  </a:tcPr>
-                </a:tc>
-              </a:tr>
-              <a:tr h="248602">
-                <a:tc>
-                  <a:txBody>
-                    <a:bodyPr/>
-                    <a:lstStyle/>
-                    <a:p>
-                      <a:pPr algn="l"/>
-                      <a:r>
-                        <a:rPr sz="950" b="0">
-                          <a:solidFill>
-                            <a:srgbClr val="333333"/>
-                          </a:solidFill>
-                          <a:latin typeface="Calibri"/>
-                        </a:rPr>
-                        <a:t>Yardımcı Kitap</a:t>
-                      </a:r>
-                    </a:p>
-                  </a:txBody>
-                  <a:tcPr>
-                    <a:solidFill>
-                      <a:srgbClr val="FAFAFA"/>
-                    </a:solidFill>
-                  </a:tcPr>
-                </a:tc>
-                <a:tc>
-                  <a:txBody>
-                    <a:bodyPr/>
-                    <a:lstStyle/>
-                    <a:p>
-                      <a:pPr algn="ctr"/>
-                      <a:r>
-                        <a:rPr sz="950" b="0">
-                          <a:solidFill>
-                            <a:srgbClr val="333333"/>
-                          </a:solidFill>
-                          <a:latin typeface="Calibri"/>
-                        </a:rPr>
-                        <a:t>18</a:t>
-                      </a:r>
-                    </a:p>
-                  </a:txBody>
-                  <a:tcPr>
-                    <a:solidFill>
-                      <a:srgbClr val="FAFAFA"/>
-                    </a:solidFill>
-                  </a:tcPr>
-                </a:tc>
-                <a:tc>
-                  <a:txBody>
-                    <a:bodyPr/>
-                    <a:lstStyle/>
-                    <a:p>
-                      <a:pPr algn="ctr"/>
-                      <a:r>
-                        <a:rPr sz="950" b="0">
-                          <a:solidFill>
-                            <a:srgbClr val="333333"/>
-                          </a:solidFill>
-                          <a:latin typeface="Calibri"/>
-                        </a:rPr>
-                        <a:t>21</a:t>
-                      </a:r>
-                    </a:p>
-                  </a:txBody>
-                  <a:tcPr>
-                    <a:solidFill>
-                      <a:srgbClr val="FAFAFA"/>
-                    </a:solidFill>
-                  </a:tcPr>
-                </a:tc>
-                <a:tc>
-                  <a:txBody>
-                    <a:bodyPr/>
-                    <a:lstStyle/>
-                    <a:p>
-                      <a:pPr algn="ctr"/>
-                      <a:r>
-                        <a:rPr sz="950" b="1">
-                          <a:solidFill>
-                            <a:srgbClr val="A6001A"/>
-                          </a:solidFill>
-                          <a:latin typeface="Calibri"/>
-                        </a:rPr>
-                        <a:t>—</a:t>
-                      </a:r>
-                    </a:p>
-                  </a:txBody>
-                  <a:tcPr>
-                    <a:solidFill>
-                      <a:srgbClr val="FAFAFA"/>
-                    </a:solidFill>
-                  </a:tcPr>
-                </a:tc>
-                <a:tc>
-                  <a:txBody>
-                    <a:bodyPr/>
-                    <a:lstStyle/>
-                    <a:p>
-                      <a:pPr algn="ctr"/>
-                      <a:r>
-                        <a:rPr sz="950" b="0">
-                          <a:solidFill>
-                            <a:srgbClr val="333333"/>
-                          </a:solidFill>
-                          <a:latin typeface="Calibri"/>
-                        </a:rPr>
-                        <a:t>3</a:t>
-                      </a:r>
-                    </a:p>
-                  </a:txBody>
-                  <a:tcPr>
-                    <a:solidFill>
-                      <a:srgbClr val="FAFAFA"/>
-                    </a:solidFill>
-                  </a:tcPr>
-                </a:tc>
-                <a:tc>
-                  <a:txBody>
-                    <a:bodyPr/>
-                    <a:lstStyle/>
-                    <a:p>
-                      <a:pPr algn="ctr"/>
-                      <a:r>
-                        <a:rPr sz="950" b="0">
-                          <a:solidFill>
-                            <a:srgbClr val="333333"/>
-                          </a:solidFill>
-                          <a:latin typeface="Calibri"/>
-                        </a:rPr>
-                        <a:t>15</a:t>
-                      </a:r>
-                    </a:p>
-                  </a:txBody>
-                  <a:tcPr>
-                    <a:solidFill>
-                      <a:srgbClr val="FAFAFA"/>
-                    </a:solidFill>
-                  </a:tcPr>
-                </a:tc>
-              </a:tr>
-              <a:tr h="248602">
-                <a:tc>
-                  <a:txBody>
-                    <a:bodyPr/>
-                    <a:lstStyle/>
-                    <a:p>
-                      <a:pPr algn="l"/>
-                      <a:r>
-                        <a:rPr sz="950" b="0">
-                          <a:solidFill>
-                            <a:srgbClr val="333333"/>
-                          </a:solidFill>
-                          <a:latin typeface="Calibri"/>
-                        </a:rPr>
-                        <a:t>Etkinlik</a:t>
-                      </a:r>
-                    </a:p>
-                  </a:txBody>
-                  <a:tcPr>
-                    <a:solidFill>
-                      <a:srgbClr val="FFFFFF"/>
-                    </a:solidFill>
-                  </a:tcPr>
-                </a:tc>
-                <a:tc>
-                  <a:txBody>
-                    <a:bodyPr/>
-                    <a:lstStyle/>
-                    <a:p>
-                      <a:pPr algn="ctr"/>
-                      <a:r>
-                        <a:rPr sz="950" b="0">
-                          <a:solidFill>
-                            <a:srgbClr val="333333"/>
-                          </a:solidFill>
-                          <a:latin typeface="Calibri"/>
-                        </a:rPr>
-                        <a:t>0</a:t>
-                      </a:r>
-                    </a:p>
-                  </a:txBody>
-                  <a:tcPr>
-                    <a:solidFill>
-                      <a:srgbClr val="FFFFFF"/>
-                    </a:solidFill>
-                  </a:tcPr>
-                </a:tc>
-                <a:tc>
-                  <a:txBody>
-                    <a:bodyPr/>
-                    <a:lstStyle/>
-                    <a:p>
-                      <a:pPr algn="ctr"/>
-                      <a:r>
-                        <a:rPr sz="950" b="0">
-                          <a:solidFill>
-                            <a:srgbClr val="333333"/>
-                          </a:solidFill>
-                          <a:latin typeface="Calibri"/>
-                        </a:rPr>
-                        <a:t>3</a:t>
-                      </a:r>
-                    </a:p>
-                  </a:txBody>
-                  <a:tcPr>
-                    <a:solidFill>
-                      <a:srgbClr val="FFFFFF"/>
-                    </a:solidFill>
-                  </a:tcPr>
-                </a:tc>
-                <a:tc>
-                  <a:txBody>
-                    <a:bodyPr/>
-                    <a:lstStyle/>
-                    <a:p>
-                      <a:pPr algn="ctr"/>
-                      <a:r>
-                        <a:rPr sz="950" b="1">
-                          <a:solidFill>
-                            <a:srgbClr val="A6001A"/>
-                          </a:solidFill>
-                          <a:latin typeface="Calibri"/>
-                        </a:rPr>
-                        <a:t>—</a:t>
-                      </a:r>
-                    </a:p>
-                  </a:txBody>
-                  <a:tcPr>
-                    <a:solidFill>
-                      <a:srgbClr val="FFFFFF"/>
-                    </a:solidFill>
-                  </a:tcPr>
-                </a:tc>
-                <a:tc>
-                  <a:txBody>
-                    <a:bodyPr/>
-                    <a:lstStyle/>
-                    <a:p>
-                      <a:pPr algn="ctr"/>
-                      <a:r>
-                        <a:rPr sz="950" b="0">
-                          <a:solidFill>
-                            <a:srgbClr val="333333"/>
-                          </a:solidFill>
-                          <a:latin typeface="Calibri"/>
-                        </a:rPr>
-                        <a:t>3</a:t>
-                      </a:r>
-                    </a:p>
-                  </a:txBody>
-                  <a:tcPr>
-                    <a:solidFill>
-                      <a:srgbClr val="FFFFFF"/>
-                    </a:solidFill>
-                  </a:tcPr>
-                </a:tc>
-                <a:tc>
-                  <a:txBody>
-                    <a:bodyPr/>
-                    <a:lstStyle/>
-                    <a:p>
-                      <a:pPr algn="ctr"/>
-                      <a:r>
-                        <a:rPr sz="950" b="0">
-                          <a:solidFill>
-                            <a:srgbClr val="333333"/>
-                          </a:solidFill>
-                          <a:latin typeface="Calibri"/>
-                        </a:rPr>
-                        <a:t>—</a:t>
-                      </a:r>
-                    </a:p>
-                  </a:txBody>
-                  <a:tcPr>
-                    <a:solidFill>
-                      <a:srgbClr val="FFFFFF"/>
-                    </a:solidFill>
-                  </a:tcPr>
-                </a:tc>
-              </a:tr>
-              <a:tr h="248602">
-                <a:tc>
-                  <a:txBody>
-                    <a:bodyPr/>
-                    <a:lstStyle/>
-                    <a:p>
-                      <a:pPr algn="l"/>
-                      <a:r>
-                        <a:rPr sz="950" b="0">
-                          <a:solidFill>
-                            <a:srgbClr val="333333"/>
-                          </a:solidFill>
-                          <a:latin typeface="Calibri"/>
-                        </a:rPr>
-                        <a:t>Oyuncak</a:t>
-                      </a:r>
-                    </a:p>
-                  </a:txBody>
-                  <a:tcPr>
-                    <a:solidFill>
-                      <a:srgbClr val="FAFAFA"/>
-                    </a:solidFill>
-                  </a:tcPr>
-                </a:tc>
-                <a:tc>
-                  <a:txBody>
-                    <a:bodyPr/>
-                    <a:lstStyle/>
-                    <a:p>
-                      <a:pPr algn="ctr"/>
-                      <a:r>
-                        <a:rPr sz="950" b="0">
-                          <a:solidFill>
-                            <a:srgbClr val="333333"/>
-                          </a:solidFill>
-                          <a:latin typeface="Calibri"/>
-                        </a:rPr>
-                        <a:t>10</a:t>
-                      </a:r>
-                    </a:p>
-                  </a:txBody>
-                  <a:tcPr>
-                    <a:solidFill>
-                      <a:srgbClr val="FAFAFA"/>
-                    </a:solidFill>
-                  </a:tcPr>
-                </a:tc>
-                <a:tc>
-                  <a:txBody>
-                    <a:bodyPr/>
-                    <a:lstStyle/>
-                    <a:p>
-                      <a:pPr algn="ctr"/>
-                      <a:r>
-                        <a:rPr sz="950" b="0">
-                          <a:solidFill>
-                            <a:srgbClr val="333333"/>
-                          </a:solidFill>
-                          <a:latin typeface="Calibri"/>
-                        </a:rPr>
-                        <a:t>10</a:t>
-                      </a:r>
-                    </a:p>
-                  </a:txBody>
-                  <a:tcPr>
-                    <a:solidFill>
-                      <a:srgbClr val="FAFAFA"/>
-                    </a:solidFill>
-                  </a:tcPr>
-                </a:tc>
-                <a:tc>
-                  <a:txBody>
-                    <a:bodyPr/>
-                    <a:lstStyle/>
-                    <a:p>
-                      <a:pPr algn="ctr"/>
-                      <a:r>
-                        <a:rPr sz="950" b="1">
-                          <a:solidFill>
-                            <a:srgbClr val="A6001A"/>
-                          </a:solidFill>
-                          <a:latin typeface="Calibri"/>
-                        </a:rPr>
-                        <a:t>—</a:t>
-                      </a:r>
-                    </a:p>
-                  </a:txBody>
-                  <a:tcPr>
-                    <a:solidFill>
-                      <a:srgbClr val="FAFAFA"/>
-                    </a:solidFill>
-                  </a:tcPr>
-                </a:tc>
-                <a:tc>
-                  <a:txBody>
-                    <a:bodyPr/>
-                    <a:lstStyle/>
-                    <a:p>
-                      <a:pPr algn="ctr"/>
-                      <a:r>
-                        <a:rPr sz="950" b="0">
-                          <a:solidFill>
-                            <a:srgbClr val="333333"/>
-                          </a:solidFill>
-                          <a:latin typeface="Calibri"/>
-                        </a:rPr>
-                        <a:t>—</a:t>
-                      </a:r>
-                    </a:p>
-                  </a:txBody>
-                  <a:tcPr>
-                    <a:solidFill>
-                      <a:srgbClr val="FAFAFA"/>
-                    </a:solidFill>
-                  </a:tcPr>
-                </a:tc>
-                <a:tc>
-                  <a:txBody>
-                    <a:bodyPr/>
-                    <a:lstStyle/>
-                    <a:p>
-                      <a:pPr algn="ctr"/>
-                      <a:r>
-                        <a:rPr sz="950" b="0">
-                          <a:solidFill>
-                            <a:srgbClr val="333333"/>
-                          </a:solidFill>
-                          <a:latin typeface="Calibri"/>
-                        </a:rPr>
-                        <a:t>—</a:t>
-                      </a:r>
-                    </a:p>
-                  </a:txBody>
-                  <a:tcPr>
-                    <a:solidFill>
-                      <a:srgbClr val="FAFAFA"/>
-                    </a:solidFill>
-                  </a:tcPr>
-                </a:tc>
-              </a:tr>
-              <a:tr h="248609">
-                <a:tc>
-                  <a:txBody>
-                    <a:bodyPr/>
-                    <a:lstStyle/>
-                    <a:p>
-                      <a:pPr algn="l"/>
-                      <a:r>
-                        <a:rPr sz="950" b="1">
-                          <a:solidFill>
-                            <a:srgbClr val="333333"/>
-                          </a:solidFill>
-                          <a:latin typeface="Calibri"/>
-                        </a:rPr>
-                        <a:t>TOPLAM</a:t>
-                      </a:r>
-                    </a:p>
-                  </a:txBody>
-                  <a:tcPr>
-                    <a:solidFill>
-                      <a:srgbClr val="F2F2F2"/>
-                    </a:solidFill>
-                  </a:tcPr>
-                </a:tc>
-                <a:tc>
-                  <a:txBody>
-                    <a:bodyPr/>
-                    <a:lstStyle/>
-                    <a:p>
-                      <a:pPr algn="ctr"/>
-                      <a:r>
-                        <a:rPr sz="950" b="1">
-                          <a:solidFill>
-                            <a:srgbClr val="333333"/>
-                          </a:solidFill>
-                          <a:latin typeface="Calibri"/>
-                        </a:rPr>
-                        <a:t>145</a:t>
-                      </a:r>
-                    </a:p>
-                  </a:txBody>
-                  <a:tcPr>
-                    <a:solidFill>
-                      <a:srgbClr val="F2F2F2"/>
-                    </a:solidFill>
-                  </a:tcPr>
-                </a:tc>
-                <a:tc>
-                  <a:txBody>
-                    <a:bodyPr/>
-                    <a:lstStyle/>
-                    <a:p>
-                      <a:pPr algn="ctr"/>
-                      <a:r>
-                        <a:rPr sz="950" b="1">
-                          <a:solidFill>
-                            <a:srgbClr val="333333"/>
-                          </a:solidFill>
-                          <a:latin typeface="Calibri"/>
-                        </a:rPr>
-                        <a:t>137</a:t>
-                      </a:r>
-                    </a:p>
-                  </a:txBody>
-                  <a:tcPr>
-                    <a:solidFill>
-                      <a:srgbClr val="F2F2F2"/>
-                    </a:solidFill>
-                  </a:tcPr>
-                </a:tc>
-                <a:tc>
-                  <a:txBody>
-                    <a:bodyPr/>
-                    <a:lstStyle/>
-                    <a:p>
-                      <a:pPr algn="ctr"/>
-                      <a:r>
-                        <a:rPr sz="950" b="1">
-                          <a:solidFill>
-                            <a:srgbClr val="A6001A"/>
-                          </a:solidFill>
-                          <a:latin typeface="Calibri"/>
-                        </a:rPr>
-                        <a:t>15</a:t>
-                      </a:r>
-                    </a:p>
-                  </a:txBody>
-                  <a:tcPr>
-                    <a:solidFill>
-                      <a:srgbClr val="F2F2F2"/>
-                    </a:solidFill>
-                  </a:tcPr>
-                </a:tc>
-                <a:tc>
-                  <a:txBody>
-                    <a:bodyPr/>
-                    <a:lstStyle/>
-                    <a:p>
-                      <a:pPr algn="ctr"/>
-                      <a:r>
-                        <a:rPr sz="950" b="1">
-                          <a:solidFill>
-                            <a:srgbClr val="333333"/>
-                          </a:solidFill>
-                          <a:latin typeface="Calibri"/>
-                        </a:rPr>
-                        <a:t>7</a:t>
-                      </a:r>
-                    </a:p>
-                  </a:txBody>
-                  <a:tcPr>
-                    <a:solidFill>
-                      <a:srgbClr val="F2F2F2"/>
-                    </a:solidFill>
-                  </a:tcPr>
-                </a:tc>
-                <a:tc>
-                  <a:txBody>
-                    <a:bodyPr/>
-                    <a:lstStyle/>
-                    <a:p>
-                      <a:pPr algn="ctr"/>
-                      <a:r>
-                        <a:rPr sz="950" b="1">
-                          <a:solidFill>
-                            <a:srgbClr val="333333"/>
-                          </a:solidFill>
-                          <a:latin typeface="Calibri"/>
-                        </a:rPr>
-                        <a:t>58</a:t>
-                      </a:r>
-                    </a:p>
-                  </a:txBody>
-                  <a:tcPr>
-                    <a:solidFill>
-                      <a:srgbClr val="F2F2F2"/>
+                      <a:srgbClr val="FFF6E6"/>
                     </a:solidFill>
                   </a:tcPr>
                 </a:tc>
@@ -13067,9 +13472,9 @@
                 <a:latin typeface="Calibri"/>
               </a:rPr>
               <a:t>Çocuk  5 kişi
-Kültür  2 kişi
 Mağaza  2 kişi
-İdari İşler  2 kişi</a:t>
+İdari İşler  2 kişi
+Kültür  2 kişi</a:t>
             </a:r>
           </a:p>
         </p:txBody>
@@ -13170,7 +13575,7 @@
                 </a:solidFill>
                 <a:latin typeface="Calibri"/>
               </a:rPr>
-              <a:t>Bölüm bazında açık 15 kişi, mağaza bazında 11. Aradaki fark, bir mağazada bir bölümün fazlasının başka bölümün açığını maskelemesinden gelir. Gerçek ihtiyaç bölüm bazında okunur.</a:t>
+              <a:t>Bölüm bazında açık 17 kişi, mağaza bazında 14. Aradaki fark, bir mağazada bir bölümün fazlasının başka bölümün açığını maskelemesinden gelir. Gerçek ihtiyaç bölüm bazında okunur.</a:t>
             </a:r>
           </a:p>
         </p:txBody>
@@ -13209,7 +13614,7 @@
                 </a:solidFill>
                 <a:latin typeface="Calibri"/>
               </a:rPr>
-              <a:t>* Kapsam: norm tablosundaki dört mağaza (Şura yok) · Norm 11.08.2026 tarihli · ETKİNLİK zaten ayrı bölüm satırı (normda 0) · ⚠ ENGELLİ bu tabloda düşülmedi: bölüm dağılımı ölçülmemiştir, bu yüzden ilgili bölümlerin açığı toplamda 3 kişiye kadar daha büyük olabilir · Mağaza toplamı ve operasyonel kıyas için 'Norm Kadro — Mağaza Detayı' slaytına bakılır.</a:t>
+              <a:t>* Norm = engelli DIŞINDAKİ personel (yönetim kararı) — engelli bölüm bazında da DÜŞÜLDÜ: Kırtasiye 2 · Mal Kabul 1 · ETKİNLİK normda tanımlı olmadığı için norm dışı satır olarak en altta · Kapsam: norm tablosundaki dört mağaza (Şura yok) · Norm 11.08.2026 tarihli · Gerçek sayılar 31.08 as-of.</a:t>
             </a:r>
           </a:p>
         </p:txBody>

--- a/briefings/sezon-kadro-20260902/sunum-kadro-sezon2026.pptx
+++ b/briefings/sezon-kadro-20260902/sunum-kadro-sezon2026.pptx
@@ -10475,7 +10475,177 @@
       </p:sp>
       <p:sp>
         <p:nvSpPr>
-          <p:cNvPr id="8" name="TextBox 7"/>
+          <p:cNvPr id="8" name="Rectangle 7"/>
+          <p:cNvSpPr/>
+          <p:nvPr/>
+        </p:nvSpPr>
+        <p:spPr>
+          <a:xfrm>
+            <a:off x="548640" y="4882896"/>
+            <a:ext cx="11018520" cy="676656"/>
+          </a:xfrm>
+          <a:prstGeom prst="rect">
+            <a:avLst/>
+          </a:prstGeom>
+          <a:solidFill>
+            <a:srgbClr val="FFFFFF"/>
+          </a:solidFill>
+          <a:ln w="12700">
+            <a:solidFill>
+              <a:srgbClr val="DCDCDC"/>
+            </a:solidFill>
+          </a:ln>
+          <a:effectLst/>
+        </p:spPr>
+        <p:style>
+          <a:lnRef idx="1">
+            <a:schemeClr val="accent1"/>
+          </a:lnRef>
+          <a:fillRef idx="3">
+            <a:schemeClr val="accent1"/>
+          </a:fillRef>
+          <a:effectRef idx="2">
+            <a:schemeClr val="accent1"/>
+          </a:effectRef>
+          <a:fontRef idx="minor">
+            <a:schemeClr val="lt1"/>
+          </a:fontRef>
+        </p:style>
+        <p:txBody>
+          <a:bodyPr rtlCol="0" anchor="ctr"/>
+          <a:lstStyle/>
+          <a:p>
+            <a:pPr algn="ctr"/>
+          </a:p>
+        </p:txBody>
+      </p:sp>
+      <p:sp>
+        <p:nvSpPr>
+          <p:cNvPr id="9" name="Rectangle 8"/>
+          <p:cNvSpPr/>
+          <p:nvPr/>
+        </p:nvSpPr>
+        <p:spPr>
+          <a:xfrm>
+            <a:off x="548640" y="4882896"/>
+            <a:ext cx="68580" cy="676656"/>
+          </a:xfrm>
+          <a:prstGeom prst="rect">
+            <a:avLst/>
+          </a:prstGeom>
+          <a:solidFill>
+            <a:srgbClr val="9A9A9A"/>
+          </a:solidFill>
+          <a:ln>
+            <a:noFill/>
+          </a:ln>
+          <a:effectLst/>
+        </p:spPr>
+        <p:style>
+          <a:lnRef idx="1">
+            <a:schemeClr val="accent1"/>
+          </a:lnRef>
+          <a:fillRef idx="3">
+            <a:schemeClr val="accent1"/>
+          </a:fillRef>
+          <a:effectRef idx="2">
+            <a:schemeClr val="accent1"/>
+          </a:effectRef>
+          <a:fontRef idx="minor">
+            <a:schemeClr val="lt1"/>
+          </a:fontRef>
+        </p:style>
+        <p:txBody>
+          <a:bodyPr rtlCol="0" anchor="ctr"/>
+          <a:lstStyle/>
+          <a:p>
+            <a:pPr algn="ctr"/>
+          </a:p>
+        </p:txBody>
+      </p:sp>
+      <p:sp>
+        <p:nvSpPr>
+          <p:cNvPr id="10" name="TextBox 9"/>
+          <p:cNvSpPr txBox="1"/>
+          <p:nvPr/>
+        </p:nvSpPr>
+        <p:spPr>
+          <a:xfrm>
+            <a:off x="777240" y="4901184"/>
+            <a:ext cx="10607040" cy="219456"/>
+          </a:xfrm>
+          <a:prstGeom prst="rect">
+            <a:avLst/>
+          </a:prstGeom>
+          <a:noFill/>
+        </p:spPr>
+        <p:txBody>
+          <a:bodyPr wrap="square" anchor="t">
+            <a:spAutoFit/>
+          </a:bodyPr>
+          <a:lstStyle/>
+          <a:p>
+            <a:pPr algn="l">
+              <a:lnSpc>
+                <a:spcPct val="100000"/>
+              </a:lnSpc>
+            </a:pPr>
+            <a:r>
+              <a:rPr sz="950" b="1">
+                <a:solidFill>
+                  <a:srgbClr val="6E6E6E"/>
+                </a:solidFill>
+                <a:latin typeface="Calibri"/>
+              </a:rPr>
+              <a:t>KAPSAM SÖZLÜĞÜ — bu destede üç ayrı kapsam kullanılır</a:t>
+            </a:r>
+          </a:p>
+        </p:txBody>
+      </p:sp>
+      <p:sp>
+        <p:nvSpPr>
+          <p:cNvPr id="11" name="TextBox 10"/>
+          <p:cNvSpPr txBox="1"/>
+          <p:nvPr/>
+        </p:nvSpPr>
+        <p:spPr>
+          <a:xfrm>
+            <a:off x="777240" y="5102352"/>
+            <a:ext cx="10835640" cy="457200"/>
+          </a:xfrm>
+          <a:prstGeom prst="rect">
+            <a:avLst/>
+          </a:prstGeom>
+          <a:noFill/>
+        </p:spPr>
+        <p:txBody>
+          <a:bodyPr wrap="square" anchor="t">
+            <a:spAutoFit/>
+          </a:bodyPr>
+          <a:lstStyle/>
+          <a:p>
+            <a:pPr algn="l">
+              <a:lnSpc>
+                <a:spcPct val="108000"/>
+              </a:lnSpc>
+            </a:pPr>
+            <a:r>
+              <a:rPr sz="800" b="0">
+                <a:solidFill>
+                  <a:srgbClr val="333333"/>
+                </a:solidFill>
+                <a:latin typeface="Calibri"/>
+              </a:rPr>
+              <a:t>• 3 POS mağazası (FSM · Özlüce · İst. Yolu) — iş hacminin ölçülebildiği kapsam: kadro 143 → 160
+• 4 norm mağazası (+ Heykel) — norm karşılaştırması: norm 217 · kayıt 195 · operasyonel 189
+• 5 mağaza (+ Şura) — İK kadro raporu: kadrolu 149 + sezonluk 62 = 211</a:t>
+            </a:r>
+          </a:p>
+        </p:txBody>
+      </p:sp>
+      <p:sp>
+        <p:nvSpPr>
+          <p:cNvPr id="12" name="TextBox 11"/>
           <p:cNvSpPr txBox="1"/>
           <p:nvPr/>
         </p:nvSpPr>
@@ -10514,7 +10684,7 @@
       </p:sp>
       <p:sp>
         <p:nvSpPr>
-          <p:cNvPr id="9" name="TextBox 8"/>
+          <p:cNvPr id="13" name="TextBox 12"/>
           <p:cNvSpPr txBox="1"/>
           <p:nvPr/>
         </p:nvSpPr>

--- a/briefings/sezon-kadro-20260902/sunum-kadro-sezon2026.pptx
+++ b/briefings/sezon-kadro-20260902/sunum-kadro-sezon2026.pptx
@@ -17537,7 +17537,7 @@
           <a:lstStyle/>
           <a:p>
             <a:r>
-              <a:t>Norma göre -22 kişi · kadrolu −4 · ürün adedi +%34,9 · personel başına iş +%20,6</a:t>
+              <a:t>Norma göre -28 kişi · kadrolu −4 · ürün adedi +%34,9 · personel başına iş +%20,6</a:t>
             </a:r>
           </a:p>
         </p:txBody>

--- a/briefings/sezon-kadro-20260902/sunum-kadro-sezon2026.pptx
+++ b/briefings/sezon-kadro-20260902/sunum-kadro-sezon2026.pptx
@@ -369,10 +369,10 @@
                 <c:formatCode>General</c:formatCode>
                 <c:ptCount val="3"/>
                 <c:pt idx="0">
-                  <c:v>574.7176999999999</c:v>
+                  <c:v>574.6556999999999</c:v>
                 </c:pt>
                 <c:pt idx="1">
-                  <c:v>71.83742912000012</c:v>
+                  <c:v>71.8170457700001</c:v>
                 </c:pt>
                 <c:pt idx="2">
                   <c:v>143</c:v>
@@ -424,10 +424,10 @@
                 <c:formatCode>General</c:formatCode>
                 <c:ptCount val="3"/>
                 <c:pt idx="0">
-                  <c:v>775.19155</c:v>
+                  <c:v>775.03155</c:v>
                 </c:pt>
                 <c:pt idx="1">
-                  <c:v>122.60138085000007</c:v>
+                  <c:v>122.53417561000006</c:v>
                 </c:pt>
                 <c:pt idx="2">
                   <c:v>160</c:v>
@@ -568,7 +568,7 @@
                   <c:v>4524.798039215687</c:v>
                 </c:pt>
                 <c:pt idx="1">
-                  <c:v>3467.96</c:v>
+                  <c:v>3466.72</c:v>
                 </c:pt>
                 <c:pt idx="2">
                   <c:v>4060.8333333333335</c:v>
@@ -623,7 +623,7 @@
                   <c:v>5578.70462962963</c:v>
                 </c:pt>
                 <c:pt idx="1">
-                  <c:v>4232.270491803279</c:v>
+                  <c:v>4229.647540983607</c:v>
                 </c:pt>
                 <c:pt idx="2">
                   <c:v>4794.955555555555</c:v>
@@ -780,16 +780,16 @@
                 <c:formatCode>General</c:formatCode>
                 <c:ptCount val="4"/>
                 <c:pt idx="0">
-                  <c:v>34404.7405</c:v>
+                  <c:v>34377.72383333333</c:v>
                 </c:pt>
                 <c:pt idx="1">
-                  <c:v>25239.9278021978</c:v>
+                  <c:v>25227.68604395604</c:v>
                 </c:pt>
                 <c:pt idx="2">
-                  <c:v>28670.6775</c:v>
+                  <c:v>28668.031666666666</c:v>
                 </c:pt>
                 <c:pt idx="3">
-                  <c:v>32498.27846846847</c:v>
+                  <c:v>32496.782972972975</c:v>
                 </c:pt>
               </c:numCache>
             </c:numRef>
@@ -1337,7 +1337,7 @@
                   <c:v>30.5442513521349</c:v>
                 </c:pt>
                 <c:pt idx="1">
-                  <c:v>48.88781877530306</c:v>
+                  <c:v>48.848767711265985</c:v>
                 </c:pt>
                 <c:pt idx="2">
                   <c:v>26.512268769605107</c:v>
@@ -1392,10 +1392,10 @@
                   <c:v>57.55862375814158</c:v>
                 </c:pt>
                 <c:pt idx="1">
-                  <c:v>96.12850541161207</c:v>
+                  <c:v>96.00493094594302</c:v>
                 </c:pt>
                 <c:pt idx="2">
-                  <c:v>62.26752661005723</c:v>
+                  <c:v>62.267526610057274</c:v>
                 </c:pt>
               </c:numCache>
             </c:numRef>
@@ -1540,7 +1540,7 @@
                 <c:formatCode>General</c:formatCode>
                 <c:ptCount val="6"/>
                 <c:pt idx="0">
-                  <c:v>39.08924756094421</c:v>
+                  <c:v>38.89905891452881</c:v>
                 </c:pt>
                 <c:pt idx="1">
                   <c:v>33.552172719623094</c:v>
@@ -1680,7 +1680,7 @@
                 <c:formatCode>General</c:formatCode>
                 <c:ptCount val="1"/>
                 <c:pt idx="0">
-                  <c:v>458.50870000000003</c:v>
+                  <c:v>458.25870000000003</c:v>
                 </c:pt>
               </c:numCache>
             </c:numRef>
@@ -1723,7 +1723,7 @@
                 <c:formatCode>General</c:formatCode>
                 <c:ptCount val="1"/>
                 <c:pt idx="0">
-                  <c:v>483.65855000000005</c:v>
+                  <c:v>483.49955000000006</c:v>
                 </c:pt>
               </c:numCache>
             </c:numRef>
@@ -1766,7 +1766,7 @@
                 <c:formatCode>General</c:formatCode>
                 <c:ptCount val="1"/>
                 <c:pt idx="0">
-                  <c:v>617.2970044317599</c:v>
+                  <c:v>616.873479789939</c:v>
                 </c:pt>
               </c:numCache>
             </c:numRef>
@@ -5853,7 +5853,7 @@
                           </a:solidFill>
                           <a:latin typeface="Calibri"/>
                         </a:rPr>
-                        <a:t>38.847 → 54.032</a:t>
+                        <a:t>38.785 → 53.872</a:t>
                       </a:r>
                     </a:p>
                   </a:txBody>
@@ -5876,7 +5876,7 @@
                           </a:solidFill>
                           <a:latin typeface="Calibri"/>
                         </a:rPr>
-                        <a:t>+%39,1</a:t>
+                        <a:t>+%38,9</a:t>
                       </a:r>
                     </a:p>
                   </a:txBody>
@@ -5899,7 +5899,7 @@
                           </a:solidFill>
                           <a:latin typeface="Calibri"/>
                         </a:rPr>
-                        <a:t>+%91,7</a:t>
+                        <a:t>+%91,4</a:t>
                       </a:r>
                     </a:p>
                   </a:txBody>
@@ -5922,7 +5922,7 @@
                           </a:solidFill>
                           <a:latin typeface="Calibri"/>
                         </a:rPr>
-                        <a:t>+%21,7</a:t>
+                        <a:t>+%21,8</a:t>
                       </a:r>
                     </a:p>
                   </a:txBody>
@@ -5945,7 +5945,7 @@
                           </a:solidFill>
                           <a:latin typeface="Calibri"/>
                         </a:rPr>
-                        <a:t>+%46,2</a:t>
+                        <a:t>+%46,3</a:t>
                       </a:r>
                     </a:p>
                   </a:txBody>
@@ -7394,7 +7394,7 @@
                 </a:solidFill>
                 <a:latin typeface="Calibri"/>
               </a:rPr>
-              <a:t>458.509 → 483.659 adet</a:t>
+              <a:t>458.259 → 483.500 adet</a:t>
             </a:r>
           </a:p>
         </p:txBody>
@@ -7586,7 +7586,7 @@
                 </a:solidFill>
                 <a:latin typeface="Calibri"/>
               </a:rPr>
-              <a:t>617.297</a:t>
+              <a:t>616.873</a:t>
             </a:r>
           </a:p>
         </p:txBody>
@@ -7625,7 +7625,7 @@
                 </a:solidFill>
                 <a:latin typeface="Calibri"/>
               </a:rPr>
-              <a:t>adet tahmini · 102,9 M TL</a:t>
+              <a:t>adet tahmini · 102,7 M TL</a:t>
             </a:r>
           </a:p>
         </p:txBody>
@@ -7817,7 +7817,7 @@
                 </a:solidFill>
                 <a:latin typeface="Calibri"/>
               </a:rPr>
-              <a:t>133.638</a:t>
+              <a:t>133.374</a:t>
             </a:r>
           </a:p>
         </p:txBody>
@@ -7856,7 +7856,7 @@
                 </a:solidFill>
                 <a:latin typeface="Calibri"/>
               </a:rPr>
-              <a:t>adet · 24,7 M TL</a:t>
+              <a:t>adet · 24,6 M TL</a:t>
             </a:r>
           </a:p>
         </p:txBody>
@@ -7975,7 +7975,7 @@
                 </a:solidFill>
                 <a:latin typeface="Calibri"/>
               </a:rPr>
-              <a:t>2025'te okul öncesi alış dalgası 27.08 - 07.09.2025 aralığındaydı: 431.358 adet · 56,9 M TL. Aynı dalga 2026'da 02.09 - 13.09.2026 aralığına denk geliyor; hizalı büyüme oranıyla 580.744 adet · 95,5 M TL beklenmektedir.</a:t>
+              <a:t>2025'te okul öncesi alış dalgası 27.08 - 07.09.2025 aralığındaydı: 430.919 adet · 56,8 M TL. Aynı dalga 2026'da 02.09 - 13.09.2026 aralığına denk geliyor; hizalı büyüme oranıyla 580.071 adet · 95,2 M TL beklenmektedir.</a:t>
             </a:r>
           </a:p>
         </p:txBody>
@@ -11182,7 +11182,7 @@
                           </a:solidFill>
                           <a:latin typeface="Calibri"/>
                         </a:rPr>
-                        <a:t>Mağaza</a:t>
+                        <a:t>İdari İşler</a:t>
                       </a:r>
                     </a:p>
                   </a:txBody>
@@ -11205,7 +11205,7 @@
                           </a:solidFill>
                           <a:latin typeface="Calibri"/>
                         </a:rPr>
-                        <a:t>10</a:t>
+                        <a:t>8</a:t>
                       </a:r>
                     </a:p>
                   </a:txBody>
@@ -11228,7 +11228,7 @@
                           </a:solidFill>
                           <a:latin typeface="Calibri"/>
                         </a:rPr>
-                        <a:t>8</a:t>
+                        <a:t>6</a:t>
                       </a:r>
                     </a:p>
                   </a:txBody>
@@ -11345,7 +11345,7 @@
                           </a:solidFill>
                           <a:latin typeface="Calibri"/>
                         </a:rPr>
-                        <a:t>İdari İşler</a:t>
+                        <a:t>Mağaza</a:t>
                       </a:r>
                     </a:p>
                   </a:txBody>
@@ -11368,30 +11368,30 @@
                           </a:solidFill>
                           <a:latin typeface="Calibri"/>
                         </a:rPr>
+                        <a:t>10</a:t>
+                      </a:r>
+                    </a:p>
+                  </a:txBody>
+                  <a:tcPr>
+                    <a:solidFill>
+                      <a:srgbClr val="FFFFFF"/>
+                    </a:solidFill>
+                  </a:tcPr>
+                </a:tc>
+                <a:tc>
+                  <a:txBody>
+                    <a:bodyPr/>
+                    <a:lstStyle/>
+                    <a:p>
+                      <a:pPr algn="ctr"/>
+                      <a:r>
+                        <a:rPr sz="900" b="0">
+                          <a:solidFill>
+                            <a:srgbClr val="333333"/>
+                          </a:solidFill>
+                          <a:latin typeface="Calibri"/>
+                        </a:rPr>
                         <a:t>8</a:t>
-                      </a:r>
-                    </a:p>
-                  </a:txBody>
-                  <a:tcPr>
-                    <a:solidFill>
-                      <a:srgbClr val="FFFFFF"/>
-                    </a:solidFill>
-                  </a:tcPr>
-                </a:tc>
-                <a:tc>
-                  <a:txBody>
-                    <a:bodyPr/>
-                    <a:lstStyle/>
-                    <a:p>
-                      <a:pPr algn="ctr"/>
-                      <a:r>
-                        <a:rPr sz="900" b="0">
-                          <a:solidFill>
-                            <a:srgbClr val="333333"/>
-                          </a:solidFill>
-                          <a:latin typeface="Calibri"/>
-                        </a:rPr>
-                        <a:t>6</a:t>
                       </a:r>
                     </a:p>
                   </a:txBody>
@@ -11671,7 +11671,7 @@
                           </a:solidFill>
                           <a:latin typeface="Calibri"/>
                         </a:rPr>
-                        <a:t>Kasa</a:t>
+                        <a:t>Muhasebe</a:t>
                       </a:r>
                     </a:p>
                   </a:txBody>
@@ -11694,7 +11694,7 @@
                           </a:solidFill>
                           <a:latin typeface="Calibri"/>
                         </a:rPr>
-                        <a:t>16</a:t>
+                        <a:t>1</a:t>
                       </a:r>
                     </a:p>
                   </a:txBody>
@@ -11717,7 +11717,7 @@
                           </a:solidFill>
                           <a:latin typeface="Calibri"/>
                         </a:rPr>
-                        <a:t>15</a:t>
+                        <a:t>0</a:t>
                       </a:r>
                     </a:p>
                   </a:txBody>
@@ -11809,7 +11809,7 @@
                           </a:solidFill>
                           <a:latin typeface="Calibri"/>
                         </a:rPr>
-                        <a:t>9</a:t>
+                        <a:t>—</a:t>
                       </a:r>
                     </a:p>
                   </a:txBody>
@@ -11834,7 +11834,7 @@
                           </a:solidFill>
                           <a:latin typeface="Calibri"/>
                         </a:rPr>
-                        <a:t>Muhasebe</a:t>
+                        <a:t>Oyun Alanı</a:t>
                       </a:r>
                     </a:p>
                   </a:txBody>
@@ -11997,7 +11997,7 @@
                           </a:solidFill>
                           <a:latin typeface="Calibri"/>
                         </a:rPr>
-                        <a:t>Akademi</a:t>
+                        <a:t>Kasa</a:t>
                       </a:r>
                     </a:p>
                   </a:txBody>
@@ -12020,7 +12020,7 @@
                           </a:solidFill>
                           <a:latin typeface="Calibri"/>
                         </a:rPr>
-                        <a:t>10</a:t>
+                        <a:t>16</a:t>
                       </a:r>
                     </a:p>
                   </a:txBody>
@@ -12043,99 +12043,99 @@
                           </a:solidFill>
                           <a:latin typeface="Calibri"/>
                         </a:rPr>
+                        <a:t>15</a:t>
+                      </a:r>
+                    </a:p>
+                  </a:txBody>
+                  <a:tcPr>
+                    <a:solidFill>
+                      <a:srgbClr val="FFFFFF"/>
+                    </a:solidFill>
+                  </a:tcPr>
+                </a:tc>
+                <a:tc>
+                  <a:txBody>
+                    <a:bodyPr/>
+                    <a:lstStyle/>
+                    <a:p>
+                      <a:pPr algn="ctr"/>
+                      <a:r>
+                        <a:rPr sz="900" b="0">
+                          <a:solidFill>
+                            <a:srgbClr val="333333"/>
+                          </a:solidFill>
+                          <a:latin typeface="Calibri"/>
+                        </a:rPr>
+                        <a:t>—</a:t>
+                      </a:r>
+                    </a:p>
+                  </a:txBody>
+                  <a:tcPr>
+                    <a:solidFill>
+                      <a:srgbClr val="FFFFFF"/>
+                    </a:solidFill>
+                  </a:tcPr>
+                </a:tc>
+                <a:tc>
+                  <a:txBody>
+                    <a:bodyPr/>
+                    <a:lstStyle/>
+                    <a:p>
+                      <a:pPr algn="ctr"/>
+                      <a:r>
+                        <a:rPr sz="900" b="1">
+                          <a:solidFill>
+                            <a:srgbClr val="A6001A"/>
+                          </a:solidFill>
+                          <a:latin typeface="Calibri"/>
+                        </a:rPr>
+                        <a:t>1</a:t>
+                      </a:r>
+                    </a:p>
+                  </a:txBody>
+                  <a:tcPr>
+                    <a:solidFill>
+                      <a:srgbClr val="FFFFFF"/>
+                    </a:solidFill>
+                  </a:tcPr>
+                </a:tc>
+                <a:tc>
+                  <a:txBody>
+                    <a:bodyPr/>
+                    <a:lstStyle/>
+                    <a:p>
+                      <a:pPr algn="ctr"/>
+                      <a:r>
+                        <a:rPr sz="900" b="0">
+                          <a:solidFill>
+                            <a:srgbClr val="333333"/>
+                          </a:solidFill>
+                          <a:latin typeface="Calibri"/>
+                        </a:rPr>
+                        <a:t>—</a:t>
+                      </a:r>
+                    </a:p>
+                  </a:txBody>
+                  <a:tcPr>
+                    <a:solidFill>
+                      <a:srgbClr val="FFFFFF"/>
+                    </a:solidFill>
+                  </a:tcPr>
+                </a:tc>
+                <a:tc>
+                  <a:txBody>
+                    <a:bodyPr/>
+                    <a:lstStyle/>
+                    <a:p>
+                      <a:pPr algn="ctr"/>
+                      <a:r>
+                        <a:rPr sz="900" b="0">
+                          <a:solidFill>
+                            <a:srgbClr val="333333"/>
+                          </a:solidFill>
+                          <a:latin typeface="Calibri"/>
+                        </a:rPr>
                         <a:t>9</a:t>
-                      </a:r>
-                    </a:p>
-                  </a:txBody>
-                  <a:tcPr>
-                    <a:solidFill>
-                      <a:srgbClr val="FFFFFF"/>
-                    </a:solidFill>
-                  </a:tcPr>
-                </a:tc>
-                <a:tc>
-                  <a:txBody>
-                    <a:bodyPr/>
-                    <a:lstStyle/>
-                    <a:p>
-                      <a:pPr algn="ctr"/>
-                      <a:r>
-                        <a:rPr sz="900" b="0">
-                          <a:solidFill>
-                            <a:srgbClr val="333333"/>
-                          </a:solidFill>
-                          <a:latin typeface="Calibri"/>
-                        </a:rPr>
-                        <a:t>—</a:t>
-                      </a:r>
-                    </a:p>
-                  </a:txBody>
-                  <a:tcPr>
-                    <a:solidFill>
-                      <a:srgbClr val="FFFFFF"/>
-                    </a:solidFill>
-                  </a:tcPr>
-                </a:tc>
-                <a:tc>
-                  <a:txBody>
-                    <a:bodyPr/>
-                    <a:lstStyle/>
-                    <a:p>
-                      <a:pPr algn="ctr"/>
-                      <a:r>
-                        <a:rPr sz="900" b="1">
-                          <a:solidFill>
-                            <a:srgbClr val="A6001A"/>
-                          </a:solidFill>
-                          <a:latin typeface="Calibri"/>
-                        </a:rPr>
-                        <a:t>1</a:t>
-                      </a:r>
-                    </a:p>
-                  </a:txBody>
-                  <a:tcPr>
-                    <a:solidFill>
-                      <a:srgbClr val="FFFFFF"/>
-                    </a:solidFill>
-                  </a:tcPr>
-                </a:tc>
-                <a:tc>
-                  <a:txBody>
-                    <a:bodyPr/>
-                    <a:lstStyle/>
-                    <a:p>
-                      <a:pPr algn="ctr"/>
-                      <a:r>
-                        <a:rPr sz="900" b="0">
-                          <a:solidFill>
-                            <a:srgbClr val="333333"/>
-                          </a:solidFill>
-                          <a:latin typeface="Calibri"/>
-                        </a:rPr>
-                        <a:t>—</a:t>
-                      </a:r>
-                    </a:p>
-                  </a:txBody>
-                  <a:tcPr>
-                    <a:solidFill>
-                      <a:srgbClr val="FFFFFF"/>
-                    </a:solidFill>
-                  </a:tcPr>
-                </a:tc>
-                <a:tc>
-                  <a:txBody>
-                    <a:bodyPr/>
-                    <a:lstStyle/>
-                    <a:p>
-                      <a:pPr algn="ctr"/>
-                      <a:r>
-                        <a:rPr sz="900" b="0">
-                          <a:solidFill>
-                            <a:srgbClr val="333333"/>
-                          </a:solidFill>
-                          <a:latin typeface="Calibri"/>
-                        </a:rPr>
-                        <a:t>—</a:t>
                       </a:r>
                     </a:p>
                   </a:txBody>
@@ -12160,7 +12160,7 @@
                           </a:solidFill>
                           <a:latin typeface="Calibri"/>
                         </a:rPr>
-                        <a:t>Oyun Alanı</a:t>
+                        <a:t>Akademi</a:t>
                       </a:r>
                     </a:p>
                   </a:txBody>
@@ -12183,7 +12183,7 @@
                           </a:solidFill>
                           <a:latin typeface="Calibri"/>
                         </a:rPr>
-                        <a:t>1</a:t>
+                        <a:t>10</a:t>
                       </a:r>
                     </a:p>
                   </a:txBody>
@@ -12206,7 +12206,7 @@
                           </a:solidFill>
                           <a:latin typeface="Calibri"/>
                         </a:rPr>
-                        <a:t>0</a:t>
+                        <a:t>9</a:t>
                       </a:r>
                     </a:p>
                   </a:txBody>
@@ -12323,7 +12323,7 @@
                           </a:solidFill>
                           <a:latin typeface="Calibri"/>
                         </a:rPr>
-                        <a:t>Mal Kabul</a:t>
+                        <a:t>Yardımcı Kitap</a:t>
                       </a:r>
                     </a:p>
                   </a:txBody>
@@ -12346,7 +12346,7 @@
                           </a:solidFill>
                           <a:latin typeface="Calibri"/>
                         </a:rPr>
-                        <a:t>6</a:t>
+                        <a:t>18</a:t>
                       </a:r>
                     </a:p>
                   </a:txBody>
@@ -12369,7 +12369,7 @@
                           </a:solidFill>
                           <a:latin typeface="Calibri"/>
                         </a:rPr>
-                        <a:t>5</a:t>
+                        <a:t>21</a:t>
                       </a:r>
                     </a:p>
                   </a:txBody>
@@ -12392,7 +12392,7 @@
                           </a:solidFill>
                           <a:latin typeface="Calibri"/>
                         </a:rPr>
-                        <a:t>1</a:t>
+                        <a:t>—</a:t>
                       </a:r>
                     </a:p>
                   </a:txBody>
@@ -12415,7 +12415,7 @@
                           </a:solidFill>
                           <a:latin typeface="Calibri"/>
                         </a:rPr>
-                        <a:t>1</a:t>
+                        <a:t>—</a:t>
                       </a:r>
                     </a:p>
                   </a:txBody>
@@ -12438,7 +12438,7 @@
                           </a:solidFill>
                           <a:latin typeface="Calibri"/>
                         </a:rPr>
-                        <a:t>—</a:t>
+                        <a:t>3</a:t>
                       </a:r>
                     </a:p>
                   </a:txBody>
@@ -12461,7 +12461,7 @@
                           </a:solidFill>
                           <a:latin typeface="Calibri"/>
                         </a:rPr>
-                        <a:t>1</a:t>
+                        <a:t>15</a:t>
                       </a:r>
                     </a:p>
                   </a:txBody>
@@ -12486,7 +12486,7 @@
                           </a:solidFill>
                           <a:latin typeface="Calibri"/>
                         </a:rPr>
-                        <a:t>Oyuncak</a:t>
+                        <a:t>Mal Kabul</a:t>
                       </a:r>
                     </a:p>
                   </a:txBody>
@@ -12509,7 +12509,7 @@
                           </a:solidFill>
                           <a:latin typeface="Calibri"/>
                         </a:rPr>
-                        <a:t>10</a:t>
+                        <a:t>6</a:t>
                       </a:r>
                     </a:p>
                   </a:txBody>
@@ -12532,7 +12532,7 @@
                           </a:solidFill>
                           <a:latin typeface="Calibri"/>
                         </a:rPr>
-                        <a:t>10</a:t>
+                        <a:t>5</a:t>
                       </a:r>
                     </a:p>
                   </a:txBody>
@@ -12555,6 +12555,52 @@
                           </a:solidFill>
                           <a:latin typeface="Calibri"/>
                         </a:rPr>
+                        <a:t>1</a:t>
+                      </a:r>
+                    </a:p>
+                  </a:txBody>
+                  <a:tcPr>
+                    <a:solidFill>
+                      <a:srgbClr val="FAFAFA"/>
+                    </a:solidFill>
+                  </a:tcPr>
+                </a:tc>
+                <a:tc>
+                  <a:txBody>
+                    <a:bodyPr/>
+                    <a:lstStyle/>
+                    <a:p>
+                      <a:pPr algn="ctr"/>
+                      <a:r>
+                        <a:rPr sz="900" b="1">
+                          <a:solidFill>
+                            <a:srgbClr val="A6001A"/>
+                          </a:solidFill>
+                          <a:latin typeface="Calibri"/>
+                        </a:rPr>
+                        <a:t>1</a:t>
+                      </a:r>
+                    </a:p>
+                  </a:txBody>
+                  <a:tcPr>
+                    <a:solidFill>
+                      <a:srgbClr val="FAFAFA"/>
+                    </a:solidFill>
+                  </a:tcPr>
+                </a:tc>
+                <a:tc>
+                  <a:txBody>
+                    <a:bodyPr/>
+                    <a:lstStyle/>
+                    <a:p>
+                      <a:pPr algn="ctr"/>
+                      <a:r>
+                        <a:rPr sz="900" b="0">
+                          <a:solidFill>
+                            <a:srgbClr val="333333"/>
+                          </a:solidFill>
+                          <a:latin typeface="Calibri"/>
+                        </a:rPr>
                         <a:t>—</a:t>
                       </a:r>
                     </a:p>
@@ -12572,59 +12618,13 @@
                     <a:p>
                       <a:pPr algn="ctr"/>
                       <a:r>
-                        <a:rPr sz="900" b="1">
-                          <a:solidFill>
-                            <a:srgbClr val="A6001A"/>
-                          </a:solidFill>
-                          <a:latin typeface="Calibri"/>
-                        </a:rPr>
-                        <a:t>—</a:t>
-                      </a:r>
-                    </a:p>
-                  </a:txBody>
-                  <a:tcPr>
-                    <a:solidFill>
-                      <a:srgbClr val="FAFAFA"/>
-                    </a:solidFill>
-                  </a:tcPr>
-                </a:tc>
-                <a:tc>
-                  <a:txBody>
-                    <a:bodyPr/>
-                    <a:lstStyle/>
-                    <a:p>
-                      <a:pPr algn="ctr"/>
-                      <a:r>
                         <a:rPr sz="900" b="0">
                           <a:solidFill>
                             <a:srgbClr val="333333"/>
                           </a:solidFill>
                           <a:latin typeface="Calibri"/>
                         </a:rPr>
-                        <a:t>—</a:t>
-                      </a:r>
-                    </a:p>
-                  </a:txBody>
-                  <a:tcPr>
-                    <a:solidFill>
-                      <a:srgbClr val="FAFAFA"/>
-                    </a:solidFill>
-                  </a:tcPr>
-                </a:tc>
-                <a:tc>
-                  <a:txBody>
-                    <a:bodyPr/>
-                    <a:lstStyle/>
-                    <a:p>
-                      <a:pPr algn="ctr"/>
-                      <a:r>
-                        <a:rPr sz="900" b="0">
-                          <a:solidFill>
-                            <a:srgbClr val="333333"/>
-                          </a:solidFill>
-                          <a:latin typeface="Calibri"/>
-                        </a:rPr>
-                        <a:t>—</a:t>
+                        <a:t>1</a:t>
                       </a:r>
                     </a:p>
                   </a:txBody>
@@ -12649,7 +12649,7 @@
                           </a:solidFill>
                           <a:latin typeface="Calibri"/>
                         </a:rPr>
-                        <a:t>Yardımcı Kitap</a:t>
+                        <a:t>Kıyafet</a:t>
                       </a:r>
                     </a:p>
                   </a:txBody>
@@ -12672,7 +12672,7 @@
                           </a:solidFill>
                           <a:latin typeface="Calibri"/>
                         </a:rPr>
-                        <a:t>18</a:t>
+                        <a:t>0</a:t>
                       </a:r>
                     </a:p>
                   </a:txBody>
@@ -12695,7 +12695,7 @@
                           </a:solidFill>
                           <a:latin typeface="Calibri"/>
                         </a:rPr>
-                        <a:t>21</a:t>
+                        <a:t>0</a:t>
                       </a:r>
                     </a:p>
                   </a:txBody>
@@ -12764,7 +12764,7 @@
                           </a:solidFill>
                           <a:latin typeface="Calibri"/>
                         </a:rPr>
-                        <a:t>3</a:t>
+                        <a:t>—</a:t>
                       </a:r>
                     </a:p>
                   </a:txBody>
@@ -12787,7 +12787,7 @@
                           </a:solidFill>
                           <a:latin typeface="Calibri"/>
                         </a:rPr>
-                        <a:t>15</a:t>
+                        <a:t>4</a:t>
                       </a:r>
                     </a:p>
                   </a:txBody>
@@ -12812,7 +12812,7 @@
                           </a:solidFill>
                           <a:latin typeface="Calibri"/>
                         </a:rPr>
-                        <a:t>Kırtasiye</a:t>
+                        <a:t>Oyuncak</a:t>
                       </a:r>
                     </a:p>
                   </a:txBody>
@@ -12835,7 +12835,7 @@
                           </a:solidFill>
                           <a:latin typeface="Calibri"/>
                         </a:rPr>
-                        <a:t>24</a:t>
+                        <a:t>10</a:t>
                       </a:r>
                     </a:p>
                   </a:txBody>
@@ -12858,7 +12858,7 @@
                           </a:solidFill>
                           <a:latin typeface="Calibri"/>
                         </a:rPr>
-                        <a:t>23</a:t>
+                        <a:t>10</a:t>
                       </a:r>
                     </a:p>
                   </a:txBody>
@@ -12881,7 +12881,7 @@
                           </a:solidFill>
                           <a:latin typeface="Calibri"/>
                         </a:rPr>
-                        <a:t>2</a:t>
+                        <a:t>—</a:t>
                       </a:r>
                     </a:p>
                   </a:txBody>
@@ -12904,7 +12904,7 @@
                           </a:solidFill>
                           <a:latin typeface="Calibri"/>
                         </a:rPr>
-                        <a:t>1</a:t>
+                        <a:t>—</a:t>
                       </a:r>
                     </a:p>
                   </a:txBody>
@@ -12950,7 +12950,7 @@
                           </a:solidFill>
                           <a:latin typeface="Calibri"/>
                         </a:rPr>
-                        <a:t>22</a:t>
+                        <a:t>—</a:t>
                       </a:r>
                     </a:p>
                   </a:txBody>
@@ -12975,7 +12975,7 @@
                           </a:solidFill>
                           <a:latin typeface="Calibri"/>
                         </a:rPr>
-                        <a:t>Kıyafet</a:t>
+                        <a:t>Kırtasiye</a:t>
                       </a:r>
                     </a:p>
                   </a:txBody>
@@ -12998,7 +12998,7 @@
                           </a:solidFill>
                           <a:latin typeface="Calibri"/>
                         </a:rPr>
-                        <a:t>0</a:t>
+                        <a:t>24</a:t>
                       </a:r>
                     </a:p>
                   </a:txBody>
@@ -13021,7 +13021,7 @@
                           </a:solidFill>
                           <a:latin typeface="Calibri"/>
                         </a:rPr>
-                        <a:t>0</a:t>
+                        <a:t>23</a:t>
                       </a:r>
                     </a:p>
                   </a:txBody>
@@ -13044,6 +13044,52 @@
                           </a:solidFill>
                           <a:latin typeface="Calibri"/>
                         </a:rPr>
+                        <a:t>2</a:t>
+                      </a:r>
+                    </a:p>
+                  </a:txBody>
+                  <a:tcPr>
+                    <a:solidFill>
+                      <a:srgbClr val="FFFFFF"/>
+                    </a:solidFill>
+                  </a:tcPr>
+                </a:tc>
+                <a:tc>
+                  <a:txBody>
+                    <a:bodyPr/>
+                    <a:lstStyle/>
+                    <a:p>
+                      <a:pPr algn="ctr"/>
+                      <a:r>
+                        <a:rPr sz="900" b="1">
+                          <a:solidFill>
+                            <a:srgbClr val="A6001A"/>
+                          </a:solidFill>
+                          <a:latin typeface="Calibri"/>
+                        </a:rPr>
+                        <a:t>1</a:t>
+                      </a:r>
+                    </a:p>
+                  </a:txBody>
+                  <a:tcPr>
+                    <a:solidFill>
+                      <a:srgbClr val="FFFFFF"/>
+                    </a:solidFill>
+                  </a:tcPr>
+                </a:tc>
+                <a:tc>
+                  <a:txBody>
+                    <a:bodyPr/>
+                    <a:lstStyle/>
+                    <a:p>
+                      <a:pPr algn="ctr"/>
+                      <a:r>
+                        <a:rPr sz="900" b="0">
+                          <a:solidFill>
+                            <a:srgbClr val="333333"/>
+                          </a:solidFill>
+                          <a:latin typeface="Calibri"/>
+                        </a:rPr>
                         <a:t>—</a:t>
                       </a:r>
                     </a:p>
@@ -13061,59 +13107,13 @@
                     <a:p>
                       <a:pPr algn="ctr"/>
                       <a:r>
-                        <a:rPr sz="900" b="1">
-                          <a:solidFill>
-                            <a:srgbClr val="A6001A"/>
-                          </a:solidFill>
-                          <a:latin typeface="Calibri"/>
-                        </a:rPr>
-                        <a:t>—</a:t>
-                      </a:r>
-                    </a:p>
-                  </a:txBody>
-                  <a:tcPr>
-                    <a:solidFill>
-                      <a:srgbClr val="FFFFFF"/>
-                    </a:solidFill>
-                  </a:tcPr>
-                </a:tc>
-                <a:tc>
-                  <a:txBody>
-                    <a:bodyPr/>
-                    <a:lstStyle/>
-                    <a:p>
-                      <a:pPr algn="ctr"/>
-                      <a:r>
                         <a:rPr sz="900" b="0">
                           <a:solidFill>
                             <a:srgbClr val="333333"/>
                           </a:solidFill>
                           <a:latin typeface="Calibri"/>
                         </a:rPr>
-                        <a:t>—</a:t>
-                      </a:r>
-                    </a:p>
-                  </a:txBody>
-                  <a:tcPr>
-                    <a:solidFill>
-                      <a:srgbClr val="FFFFFF"/>
-                    </a:solidFill>
-                  </a:tcPr>
-                </a:tc>
-                <a:tc>
-                  <a:txBody>
-                    <a:bodyPr/>
-                    <a:lstStyle/>
-                    <a:p>
-                      <a:pPr algn="ctr"/>
-                      <a:r>
-                        <a:rPr sz="900" b="0">
-                          <a:solidFill>
-                            <a:srgbClr val="333333"/>
-                          </a:solidFill>
-                          <a:latin typeface="Calibri"/>
-                        </a:rPr>
-                        <a:t>4</a:t>
+                        <a:t>22</a:t>
                       </a:r>
                     </a:p>
                   </a:txBody>
@@ -13642,8 +13642,8 @@
                 <a:latin typeface="Calibri"/>
               </a:rPr>
               <a:t>Çocuk  5 kişi
+İdari İşler  2 kişi
 Mağaza  2 kişi
-İdari İşler  2 kişi
 Kültür  2 kişi</a:t>
             </a:r>
           </a:p>
@@ -14574,7 +14574,7 @@
                 </a:solidFill>
                 <a:latin typeface="Calibri"/>
               </a:rPr>
-              <a:t>137.483 → 171.963 adet</a:t>
+              <a:t>137.483 → 171.957 adet</a:t>
             </a:r>
           </a:p>
         </p:txBody>
@@ -15133,7 +15133,7 @@
                           </a:solidFill>
                           <a:latin typeface="Calibri"/>
                         </a:rPr>
-                        <a:t>171.963</a:t>
+                        <a:t>171.957</a:t>
                       </a:r>
                     </a:p>
                   </a:txBody>
@@ -15204,7 +15204,7 @@
                           </a:solidFill>
                           <a:latin typeface="Calibri"/>
                         </a:rPr>
-                        <a:t>321.026</a:t>
+                        <a:t>320.776</a:t>
                       </a:r>
                     </a:p>
                   </a:txBody>
@@ -15227,7 +15227,7 @@
                           </a:solidFill>
                           <a:latin typeface="Calibri"/>
                         </a:rPr>
-                        <a:t>311.695</a:t>
+                        <a:t>311.542</a:t>
                       </a:r>
                     </a:p>
                   </a:txBody>
@@ -15964,7 +15964,7 @@
                 </a:solidFill>
                 <a:latin typeface="Calibri"/>
               </a:rPr>
-              <a:t>Tersi: Sınav Okulları küçüldü. Ocak–Ağustos cirosu 136,1 → 105,6 milyon TL (−%22,4). Mağaza tarafı +%54,9 büyüdü — büyümenin tamamı raftan geldi.</a:t>
+              <a:t>Tersi: Sınav Okulları küçüldü. Ocak–Ağustos cirosu 136,2 → 105,6 milyon TL (−%22,4). Mağaza tarafı +%54,9 büyüdü — büyümenin tamamı raftan geldi.</a:t>
             </a:r>
           </a:p>
         </p:txBody>
@@ -16963,16 +16963,40 @@
           </a:p>
         </p:txBody>
       </p:sp>
-      <p:sp>
-        <p:nvSpPr>
-          <p:cNvPr id="5" name="TextBox 4"/>
+      <p:pic>
+        <p:nvPicPr>
+          <p:cNvPr id="5" name="Picture 4" descr="alert-triangle.png"/>
+          <p:cNvPicPr>
+            <a:picLocks noChangeAspect="1"/>
+          </p:cNvPicPr>
+          <p:nvPr/>
+        </p:nvPicPr>
+        <p:blipFill>
+          <a:blip r:embed="rId3"/>
+          <a:stretch>
+            <a:fillRect/>
+          </a:stretch>
+        </p:blipFill>
+        <p:spPr>
+          <a:xfrm>
+            <a:off x="5468112" y="1536192"/>
+            <a:ext cx="274320" cy="274320"/>
+          </a:xfrm>
+          <a:prstGeom prst="rect">
+            <a:avLst/>
+          </a:prstGeom>
+        </p:spPr>
+      </p:pic>
+      <p:sp>
+        <p:nvSpPr>
+          <p:cNvPr id="6" name="TextBox 5"/>
           <p:cNvSpPr txBox="1"/>
           <p:nvPr/>
         </p:nvSpPr>
         <p:spPr>
           <a:xfrm>
-            <a:off x="777240" y="1508760"/>
-            <a:ext cx="4937760" cy="365760"/>
+            <a:off x="777240" y="1481328"/>
+            <a:ext cx="4572000" cy="329184"/>
           </a:xfrm>
           <a:prstGeom prst="rect">
             <a:avLst/>
@@ -16991,7 +17015,7 @@
               </a:lnSpc>
             </a:pPr>
             <a:r>
-              <a:rPr sz="1100" b="1">
+              <a:rPr sz="1000" b="1">
                 <a:solidFill>
                   <a:srgbClr val="6E6E6E"/>
                 </a:solidFill>
@@ -17004,14 +17028,14 @@
       </p:sp>
       <p:sp>
         <p:nvSpPr>
-          <p:cNvPr id="6" name="TextBox 5"/>
+          <p:cNvPr id="7" name="TextBox 6"/>
           <p:cNvSpPr txBox="1"/>
           <p:nvPr/>
         </p:nvSpPr>
         <p:spPr>
           <a:xfrm>
-            <a:off x="777240" y="1874519"/>
-            <a:ext cx="4937760" cy="822960"/>
+            <a:off x="777240" y="1847088"/>
+            <a:ext cx="4937760" cy="786384"/>
           </a:xfrm>
           <a:prstGeom prst="rect">
             <a:avLst/>
@@ -17030,7 +17054,7 @@
               </a:lnSpc>
             </a:pPr>
             <a:r>
-              <a:rPr sz="3200" b="1">
+              <a:rPr sz="3000" b="1">
                 <a:solidFill>
                   <a:srgbClr val="A6001A"/>
                 </a:solidFill>
@@ -17043,13 +17067,13 @@
       </p:sp>
       <p:sp>
         <p:nvSpPr>
-          <p:cNvPr id="7" name="TextBox 6"/>
+          <p:cNvPr id="8" name="TextBox 7"/>
           <p:cNvSpPr txBox="1"/>
           <p:nvPr/>
         </p:nvSpPr>
         <p:spPr>
           <a:xfrm>
-            <a:off x="777240" y="2697480"/>
+            <a:off x="777240" y="2670048"/>
             <a:ext cx="4937760" cy="868680"/>
           </a:xfrm>
           <a:prstGeom prst="rect">
@@ -17069,20 +17093,20 @@
               </a:lnSpc>
             </a:pPr>
             <a:r>
-              <a:rPr sz="1100" b="0">
+              <a:rPr sz="1050" b="0">
                 <a:solidFill>
                   <a:srgbClr val="333333"/>
                 </a:solidFill>
                 <a:latin typeface="Calibri"/>
               </a:rPr>
-              <a:t>İlk 14 günü tamamlama oranı. 32 alımdan 10'u kesim tarihine kadar ayrılmıştır (önceki yıl 24 alımdan 2). Aynı pozisyonun iki kez doldurulması maliyet yaratmaktadır.</a:t>
+              <a:t>İlk 14 günü tamamlama oranı (22/23 → 21/28). 32 alımdan 10'si kesim tarihine kadar ayrılmıştır (önceki yıl 24 alımdan 2). Aynı pozisyonun iki kez doldurulması maliyet yaratmaktadır.</a:t>
             </a:r>
           </a:p>
         </p:txBody>
       </p:sp>
       <p:sp>
         <p:nvSpPr>
-          <p:cNvPr id="8" name="Rectangle 7"/>
+          <p:cNvPr id="9" name="Rectangle 8"/>
           <p:cNvSpPr/>
           <p:nvPr/>
         </p:nvSpPr>
@@ -17128,7 +17152,7 @@
       </p:sp>
       <p:sp>
         <p:nvSpPr>
-          <p:cNvPr id="9" name="Rectangle 8"/>
+          <p:cNvPr id="10" name="Rectangle 9"/>
           <p:cNvSpPr/>
           <p:nvPr/>
         </p:nvSpPr>
@@ -17170,16 +17194,40 @@
           </a:p>
         </p:txBody>
       </p:sp>
-      <p:sp>
-        <p:nvSpPr>
-          <p:cNvPr id="10" name="TextBox 9"/>
+      <p:pic>
+        <p:nvPicPr>
+          <p:cNvPr id="11" name="Picture 10" descr="users.png"/>
+          <p:cNvPicPr>
+            <a:picLocks noChangeAspect="1"/>
+          </p:cNvPicPr>
+          <p:nvPr/>
+        </p:nvPicPr>
+        <p:blipFill>
+          <a:blip r:embed="rId4"/>
+          <a:stretch>
+            <a:fillRect/>
+          </a:stretch>
+        </p:blipFill>
+        <p:spPr>
+          <a:xfrm>
+            <a:off x="11091672" y="1536192"/>
+            <a:ext cx="274320" cy="274320"/>
+          </a:xfrm>
+          <a:prstGeom prst="rect">
+            <a:avLst/>
+          </a:prstGeom>
+        </p:spPr>
+      </p:pic>
+      <p:sp>
+        <p:nvSpPr>
+          <p:cNvPr id="12" name="TextBox 11"/>
           <p:cNvSpPr txBox="1"/>
           <p:nvPr/>
         </p:nvSpPr>
         <p:spPr>
           <a:xfrm>
-            <a:off x="6400800" y="1508760"/>
-            <a:ext cx="4937760" cy="365760"/>
+            <a:off x="6400800" y="1481328"/>
+            <a:ext cx="4572000" cy="329184"/>
           </a:xfrm>
           <a:prstGeom prst="rect">
             <a:avLst/>
@@ -17198,7 +17246,7 @@
               </a:lnSpc>
             </a:pPr>
             <a:r>
-              <a:rPr sz="1100" b="1">
+              <a:rPr sz="1000" b="1">
                 <a:solidFill>
                   <a:srgbClr val="6E6E6E"/>
                 </a:solidFill>
@@ -17211,14 +17259,14 @@
       </p:sp>
       <p:sp>
         <p:nvSpPr>
-          <p:cNvPr id="11" name="TextBox 10"/>
+          <p:cNvPr id="13" name="TextBox 12"/>
           <p:cNvSpPr txBox="1"/>
           <p:nvPr/>
         </p:nvSpPr>
         <p:spPr>
           <a:xfrm>
-            <a:off x="6400800" y="1874519"/>
-            <a:ext cx="4937760" cy="822960"/>
+            <a:off x="6400800" y="1847088"/>
+            <a:ext cx="4937760" cy="786384"/>
           </a:xfrm>
           <a:prstGeom prst="rect">
             <a:avLst/>
@@ -17237,9 +17285,9 @@
               </a:lnSpc>
             </a:pPr>
             <a:r>
-              <a:rPr sz="3200" b="1">
+              <a:rPr sz="3000" b="1">
                 <a:solidFill>
-                  <a:srgbClr val="A6001A"/>
+                  <a:srgbClr val="9A9A9A"/>
                 </a:solidFill>
                 <a:latin typeface="Calibri"/>
               </a:rPr>
@@ -17250,13 +17298,13 @@
       </p:sp>
       <p:sp>
         <p:nvSpPr>
-          <p:cNvPr id="12" name="TextBox 11"/>
+          <p:cNvPr id="14" name="TextBox 13"/>
           <p:cNvSpPr txBox="1"/>
           <p:nvPr/>
         </p:nvSpPr>
         <p:spPr>
           <a:xfrm>
-            <a:off x="6400800" y="2697480"/>
+            <a:off x="6400800" y="2670048"/>
             <a:ext cx="4937760" cy="868680"/>
           </a:xfrm>
           <a:prstGeom prst="rect">
@@ -17276,20 +17324,20 @@
               </a:lnSpc>
             </a:pPr>
             <a:r>
-              <a:rPr sz="1100" b="0">
+              <a:rPr sz="1050" b="0">
                 <a:solidFill>
                   <a:srgbClr val="333333"/>
                 </a:solidFill>
                 <a:latin typeface="Calibri"/>
               </a:rPr>
-              <a:t>Sezonluk kadroda kalma oranı yükselmiştir. Sorun sezonluk alımda değil, kadrolu alımın ilk haftasındadır.</a:t>
+              <a:t>Sezonluk kadroda kalma oranı yükselmiştir (46/49 → 39/41). Sorun sezonluk alımda değil, kadrolu alımın ilk haftasındadır.</a:t>
             </a:r>
           </a:p>
         </p:txBody>
       </p:sp>
       <p:sp>
         <p:nvSpPr>
-          <p:cNvPr id="13" name="Rounded Rectangle 12"/>
+          <p:cNvPr id="15" name="Rounded Rectangle 14"/>
           <p:cNvSpPr/>
           <p:nvPr/>
         </p:nvSpPr>
@@ -17335,7 +17383,7 @@
       </p:sp>
       <p:sp>
         <p:nvSpPr>
-          <p:cNvPr id="14" name="TextBox 13"/>
+          <p:cNvPr id="16" name="TextBox 15"/>
           <p:cNvSpPr txBox="1"/>
           <p:nvPr/>
         </p:nvSpPr>
@@ -17392,7 +17440,7 @@
       </p:sp>
       <p:sp>
         <p:nvSpPr>
-          <p:cNvPr id="15" name="TextBox 14"/>
+          <p:cNvPr id="17" name="TextBox 16"/>
           <p:cNvSpPr txBox="1"/>
           <p:nvPr/>
         </p:nvSpPr>
@@ -17431,7 +17479,7 @@
       </p:sp>
       <p:sp>
         <p:nvSpPr>
-          <p:cNvPr id="16" name="TextBox 15"/>
+          <p:cNvPr id="18" name="TextBox 17"/>
           <p:cNvSpPr txBox="1"/>
           <p:nvPr/>
         </p:nvSpPr>
@@ -17537,7 +17585,7 @@
           <a:lstStyle/>
           <a:p>
             <a:r>
-              <a:t>Norma göre -28 kişi · kadrolu −4 · ürün adedi +%34,9 · personel başına iş +%20,6</a:t>
+              <a:t>Norma göre -28 kişi · kadrolu −4 · ürün adedi +%34,9 · personel başına iş +%20,5</a:t>
             </a:r>
           </a:p>
         </p:txBody>
@@ -18565,7 +18613,7 @@
                 </a:solidFill>
                 <a:latin typeface="Calibri"/>
               </a:rPr>
-              <a:t>ürün adedi +%34,9 (574.718 → 775.192) · ciro +%70,7 — eksik kadroyla üretildi</a:t>
+              <a:t>ürün adedi +%34,9 (574.656 → 775.032) · ciro +%70,6 — eksik kadroyla üretildi</a:t>
             </a:r>
           </a:p>
         </p:txBody>
@@ -18604,7 +18652,7 @@
                 </a:solidFill>
                 <a:latin typeface="Calibri"/>
               </a:rPr>
-              <a:t>Kadro farkı sezon ÖNCESİNDE oluştu (taban 30.06: 139 → 153, +14) · sezon içinde kadrolu -4 · personel başına iş +%20,6 · mağaza ve grup kırılımı detay slaytlarında.</a:t>
+              <a:t>Kadro farkı sezon ÖNCESİNDE oluştu (taban 30.06: 139 → 153, +14) · sezon içinde kadrolu -4 · personel başına iş +%20,5 · mağaza ve grup kırılımı detay slaytlarında.</a:t>
             </a:r>
           </a:p>
         </p:txBody>
@@ -22617,7 +22665,7 @@
                 </a:solidFill>
                 <a:latin typeface="Calibri"/>
               </a:rPr>
-              <a:t>574.718 → 775.192 adet</a:t>
+              <a:t>574.656 → 775.032 adet</a:t>
             </a:r>
           </a:p>
         </p:txBody>
@@ -22809,7 +22857,7 @@
                 </a:solidFill>
                 <a:latin typeface="Calibri"/>
               </a:rPr>
-              <a:t>+%70,7</a:t>
+              <a:t>+%70,6</a:t>
             </a:r>
           </a:p>
         </p:txBody>
@@ -22848,7 +22896,7 @@
                 </a:solidFill>
                 <a:latin typeface="Calibri"/>
               </a:rPr>
-              <a:t>71,8 → 122,6 milyon TL</a:t>
+              <a:t>71,8 → 122,5 milyon TL</a:t>
             </a:r>
           </a:p>
         </p:txBody>
@@ -23766,7 +23814,7 @@
                 </a:solidFill>
                 <a:latin typeface="Calibri"/>
               </a:rPr>
-              <a:t>3.468 → 4.232 adet/kişi</a:t>
+              <a:t>3.467 → 4.230 adet/kişi</a:t>
             </a:r>
           </a:p>
         </p:txBody>
@@ -25916,7 +25964,7 @@
                           </a:solidFill>
                           <a:latin typeface="Calibri"/>
                         </a:rPr>
-                        <a:t>+%48,9</a:t>
+                        <a:t>+%48,8</a:t>
                       </a:r>
                     </a:p>
                   </a:txBody>
@@ -25939,7 +25987,7 @@
                           </a:solidFill>
                           <a:latin typeface="Calibri"/>
                         </a:rPr>
-                        <a:t>+%96,1</a:t>
+                        <a:t>+%96,0</a:t>
                       </a:r>
                     </a:p>
                   </a:txBody>
@@ -26265,7 +26313,7 @@
                           </a:solidFill>
                           <a:latin typeface="Calibri"/>
                         </a:rPr>
-                        <a:t>+%70,7</a:t>
+                        <a:t>+%70,6</a:t>
                       </a:r>
                     </a:p>
                   </a:txBody>
@@ -26288,7 +26336,7 @@
                           </a:solidFill>
                           <a:latin typeface="Calibri"/>
                         </a:rPr>
-                        <a:t>+%20,6</a:t>
+                        <a:t>+%20,5</a:t>
                       </a:r>
                     </a:p>
                   </a:txBody>

--- a/briefings/sezon-kadro-20260902/sunum-kadro-sezon2026.pptx
+++ b/briefings/sezon-kadro-20260902/sunum-kadro-sezon2026.pptx
@@ -427,7 +427,7 @@
                   <c:v>775.03155</c:v>
                 </c:pt>
                 <c:pt idx="1">
-                  <c:v>122.53417561000006</c:v>
+                  <c:v>122.53417561000008</c:v>
                 </c:pt>
                 <c:pt idx="2">
                   <c:v>160</c:v>
@@ -620,7 +620,7 @@
                 <c:formatCode>General</c:formatCode>
                 <c:ptCount val="3"/>
                 <c:pt idx="0">
-                  <c:v>5578.70462962963</c:v>
+                  <c:v>5578.704629629629</c:v>
                 </c:pt>
                 <c:pt idx="1">
                   <c:v>4229.647540983607</c:v>
@@ -1334,7 +1334,7 @@
                 <c:formatCode>General</c:formatCode>
                 <c:ptCount val="3"/>
                 <c:pt idx="0">
-                  <c:v>30.5442513521349</c:v>
+                  <c:v>30.54425135213488</c:v>
                 </c:pt>
                 <c:pt idx="1">
                   <c:v>48.848767711265985</c:v>
@@ -1389,13 +1389,13 @@
                 <c:formatCode>General</c:formatCode>
                 <c:ptCount val="3"/>
                 <c:pt idx="0">
-                  <c:v>57.55862375814158</c:v>
+                  <c:v>57.55862375814169</c:v>
                 </c:pt>
                 <c:pt idx="1">
-                  <c:v>96.00493094594302</c:v>
+                  <c:v>96.004930945943</c:v>
                 </c:pt>
                 <c:pt idx="2">
-                  <c:v>62.267526610057274</c:v>
+                  <c:v>62.2675266100573</c:v>
                 </c:pt>
               </c:numCache>
             </c:numRef>
@@ -1766,7 +1766,7 @@
                 <c:formatCode>General</c:formatCode>
                 <c:ptCount val="1"/>
                 <c:pt idx="0">
-                  <c:v>616.873479789939</c:v>
+                  <c:v>614.955640162407</c:v>
                 </c:pt>
               </c:numCache>
             </c:numRef>
@@ -7586,7 +7586,7 @@
                 </a:solidFill>
                 <a:latin typeface="Calibri"/>
               </a:rPr>
-              <a:t>616.873</a:t>
+              <a:t>614.956</a:t>
             </a:r>
           </a:p>
         </p:txBody>
@@ -7625,7 +7625,7 @@
                 </a:solidFill>
                 <a:latin typeface="Calibri"/>
               </a:rPr>
-              <a:t>adet tahmini · 102,7 M TL</a:t>
+              <a:t>adet tahmini · 101,7 M TL</a:t>
             </a:r>
           </a:p>
         </p:txBody>
@@ -7817,7 +7817,7 @@
                 </a:solidFill>
                 <a:latin typeface="Calibri"/>
               </a:rPr>
-              <a:t>133.374</a:t>
+              <a:t>131.456</a:t>
             </a:r>
           </a:p>
         </p:txBody>
@@ -7856,7 +7856,7 @@
                 </a:solidFill>
                 <a:latin typeface="Calibri"/>
               </a:rPr>
-              <a:t>adet · 24,6 M TL</a:t>
+              <a:t>adet · 23,6 M TL</a:t>
             </a:r>
           </a:p>
         </p:txBody>
@@ -7975,7 +7975,7 @@
                 </a:solidFill>
                 <a:latin typeface="Calibri"/>
               </a:rPr>
-              <a:t>2025'te okul öncesi alış dalgası 27.08 - 07.09.2025 aralığındaydı: 430.919 adet · 56,8 M TL. Aynı dalga 2026'da 02.09 - 13.09.2026 aralığına denk geliyor; hizalı büyüme oranıyla 580.071 adet · 95,2 M TL beklenmektedir.</a:t>
+              <a:t>2025'te okul öncesi alış dalgası 28.08 - 07.09.2025 aralığındaydı: 412.212 adet · 54,1 M TL. Aynı dalga 2026'da 03.09 - 13.09.2026 aralığına denk geliyor; hizalı büyüme oranıyla 553.164 adet · 89,8 M TL beklenmektedir.</a:t>
             </a:r>
           </a:p>
         </p:txBody>
@@ -8014,7 +8014,7 @@
                 </a:solidFill>
                 <a:latin typeface="Calibri"/>
               </a:rPr>
-              <a:t>* Kapsam: üç POS mağazası — FSM · Özlüce · İst. Yolu · Hizalı pencere 01.08 – 26.08.2025 ile 07.08 – 01.09.2026 (26 gün; bugün hariç, son tam gün 01.09.2026) · Tahmin yöntemi: hizalı büyüme +%34,6, talep kaybı olmadığı varsayımıyla.</a:t>
+              <a:t>* Kapsam: üç POS mağazası — FSM · Özlüce · İst. Yolu · Hizalı pencere 01.08 – 27.08.2025 ile 07.08 – 02.09.2026 (27 gün; bugün hariç, son tam gün 02.09.2026) · Tahmin yöntemi: hizalı büyüme +%34,2, talep kaybı olmadığı varsayımıyla.</a:t>
             </a:r>
           </a:p>
         </p:txBody>
@@ -11182,7 +11182,7 @@
                           </a:solidFill>
                           <a:latin typeface="Calibri"/>
                         </a:rPr>
-                        <a:t>İdari İşler</a:t>
+                        <a:t>Mağaza</a:t>
                       </a:r>
                     </a:p>
                   </a:txBody>
@@ -11205,30 +11205,30 @@
                           </a:solidFill>
                           <a:latin typeface="Calibri"/>
                         </a:rPr>
+                        <a:t>10</a:t>
+                      </a:r>
+                    </a:p>
+                  </a:txBody>
+                  <a:tcPr>
+                    <a:solidFill>
+                      <a:srgbClr val="FAFAFA"/>
+                    </a:solidFill>
+                  </a:tcPr>
+                </a:tc>
+                <a:tc>
+                  <a:txBody>
+                    <a:bodyPr/>
+                    <a:lstStyle/>
+                    <a:p>
+                      <a:pPr algn="ctr"/>
+                      <a:r>
+                        <a:rPr sz="900" b="0">
+                          <a:solidFill>
+                            <a:srgbClr val="333333"/>
+                          </a:solidFill>
+                          <a:latin typeface="Calibri"/>
+                        </a:rPr>
                         <a:t>8</a:t>
-                      </a:r>
-                    </a:p>
-                  </a:txBody>
-                  <a:tcPr>
-                    <a:solidFill>
-                      <a:srgbClr val="FAFAFA"/>
-                    </a:solidFill>
-                  </a:tcPr>
-                </a:tc>
-                <a:tc>
-                  <a:txBody>
-                    <a:bodyPr/>
-                    <a:lstStyle/>
-                    <a:p>
-                      <a:pPr algn="ctr"/>
-                      <a:r>
-                        <a:rPr sz="900" b="0">
-                          <a:solidFill>
-                            <a:srgbClr val="333333"/>
-                          </a:solidFill>
-                          <a:latin typeface="Calibri"/>
-                        </a:rPr>
-                        <a:t>6</a:t>
                       </a:r>
                     </a:p>
                   </a:txBody>
@@ -11345,7 +11345,7 @@
                           </a:solidFill>
                           <a:latin typeface="Calibri"/>
                         </a:rPr>
-                        <a:t>Mağaza</a:t>
+                        <a:t>İdari İşler</a:t>
                       </a:r>
                     </a:p>
                   </a:txBody>
@@ -11368,7 +11368,7 @@
                           </a:solidFill>
                           <a:latin typeface="Calibri"/>
                         </a:rPr>
-                        <a:t>10</a:t>
+                        <a:t>8</a:t>
                       </a:r>
                     </a:p>
                   </a:txBody>
@@ -11391,7 +11391,7 @@
                           </a:solidFill>
                           <a:latin typeface="Calibri"/>
                         </a:rPr>
-                        <a:t>8</a:t>
+                        <a:t>6</a:t>
                       </a:r>
                     </a:p>
                   </a:txBody>
@@ -12323,7 +12323,7 @@
                           </a:solidFill>
                           <a:latin typeface="Calibri"/>
                         </a:rPr>
-                        <a:t>Yardımcı Kitap</a:t>
+                        <a:t>Kırtasiye</a:t>
                       </a:r>
                     </a:p>
                   </a:txBody>
@@ -12346,7 +12346,7 @@
                           </a:solidFill>
                           <a:latin typeface="Calibri"/>
                         </a:rPr>
-                        <a:t>18</a:t>
+                        <a:t>24</a:t>
                       </a:r>
                     </a:p>
                   </a:txBody>
@@ -12369,7 +12369,7 @@
                           </a:solidFill>
                           <a:latin typeface="Calibri"/>
                         </a:rPr>
-                        <a:t>21</a:t>
+                        <a:t>23</a:t>
                       </a:r>
                     </a:p>
                   </a:txBody>
@@ -12392,6 +12392,52 @@
                           </a:solidFill>
                           <a:latin typeface="Calibri"/>
                         </a:rPr>
+                        <a:t>2</a:t>
+                      </a:r>
+                    </a:p>
+                  </a:txBody>
+                  <a:tcPr>
+                    <a:solidFill>
+                      <a:srgbClr val="FFFFFF"/>
+                    </a:solidFill>
+                  </a:tcPr>
+                </a:tc>
+                <a:tc>
+                  <a:txBody>
+                    <a:bodyPr/>
+                    <a:lstStyle/>
+                    <a:p>
+                      <a:pPr algn="ctr"/>
+                      <a:r>
+                        <a:rPr sz="900" b="1">
+                          <a:solidFill>
+                            <a:srgbClr val="A6001A"/>
+                          </a:solidFill>
+                          <a:latin typeface="Calibri"/>
+                        </a:rPr>
+                        <a:t>1</a:t>
+                      </a:r>
+                    </a:p>
+                  </a:txBody>
+                  <a:tcPr>
+                    <a:solidFill>
+                      <a:srgbClr val="FFFFFF"/>
+                    </a:solidFill>
+                  </a:tcPr>
+                </a:tc>
+                <a:tc>
+                  <a:txBody>
+                    <a:bodyPr/>
+                    <a:lstStyle/>
+                    <a:p>
+                      <a:pPr algn="ctr"/>
+                      <a:r>
+                        <a:rPr sz="900" b="0">
+                          <a:solidFill>
+                            <a:srgbClr val="333333"/>
+                          </a:solidFill>
+                          <a:latin typeface="Calibri"/>
+                        </a:rPr>
                         <a:t>—</a:t>
                       </a:r>
                     </a:p>
@@ -12409,59 +12455,13 @@
                     <a:p>
                       <a:pPr algn="ctr"/>
                       <a:r>
-                        <a:rPr sz="900" b="1">
-                          <a:solidFill>
-                            <a:srgbClr val="A6001A"/>
-                          </a:solidFill>
-                          <a:latin typeface="Calibri"/>
-                        </a:rPr>
-                        <a:t>—</a:t>
-                      </a:r>
-                    </a:p>
-                  </a:txBody>
-                  <a:tcPr>
-                    <a:solidFill>
-                      <a:srgbClr val="FFFFFF"/>
-                    </a:solidFill>
-                  </a:tcPr>
-                </a:tc>
-                <a:tc>
-                  <a:txBody>
-                    <a:bodyPr/>
-                    <a:lstStyle/>
-                    <a:p>
-                      <a:pPr algn="ctr"/>
-                      <a:r>
                         <a:rPr sz="900" b="0">
                           <a:solidFill>
                             <a:srgbClr val="333333"/>
                           </a:solidFill>
                           <a:latin typeface="Calibri"/>
                         </a:rPr>
-                        <a:t>3</a:t>
-                      </a:r>
-                    </a:p>
-                  </a:txBody>
-                  <a:tcPr>
-                    <a:solidFill>
-                      <a:srgbClr val="FFFFFF"/>
-                    </a:solidFill>
-                  </a:tcPr>
-                </a:tc>
-                <a:tc>
-                  <a:txBody>
-                    <a:bodyPr/>
-                    <a:lstStyle/>
-                    <a:p>
-                      <a:pPr algn="ctr"/>
-                      <a:r>
-                        <a:rPr sz="900" b="0">
-                          <a:solidFill>
-                            <a:srgbClr val="333333"/>
-                          </a:solidFill>
-                          <a:latin typeface="Calibri"/>
-                        </a:rPr>
-                        <a:t>15</a:t>
+                        <a:t>22</a:t>
                       </a:r>
                     </a:p>
                   </a:txBody>
@@ -12649,7 +12649,7 @@
                           </a:solidFill>
                           <a:latin typeface="Calibri"/>
                         </a:rPr>
-                        <a:t>Kıyafet</a:t>
+                        <a:t>Oyuncak</a:t>
                       </a:r>
                     </a:p>
                   </a:txBody>
@@ -12672,7 +12672,7 @@
                           </a:solidFill>
                           <a:latin typeface="Calibri"/>
                         </a:rPr>
-                        <a:t>0</a:t>
+                        <a:t>10</a:t>
                       </a:r>
                     </a:p>
                   </a:txBody>
@@ -12695,7 +12695,7 @@
                           </a:solidFill>
                           <a:latin typeface="Calibri"/>
                         </a:rPr>
-                        <a:t>0</a:t>
+                        <a:t>10</a:t>
                       </a:r>
                     </a:p>
                   </a:txBody>
@@ -12787,7 +12787,7 @@
                           </a:solidFill>
                           <a:latin typeface="Calibri"/>
                         </a:rPr>
-                        <a:t>4</a:t>
+                        <a:t>—</a:t>
                       </a:r>
                     </a:p>
                   </a:txBody>
@@ -12812,7 +12812,7 @@
                           </a:solidFill>
                           <a:latin typeface="Calibri"/>
                         </a:rPr>
-                        <a:t>Oyuncak</a:t>
+                        <a:t>Kıyafet</a:t>
                       </a:r>
                     </a:p>
                   </a:txBody>
@@ -12835,7 +12835,7 @@
                           </a:solidFill>
                           <a:latin typeface="Calibri"/>
                         </a:rPr>
-                        <a:t>10</a:t>
+                        <a:t>0</a:t>
                       </a:r>
                     </a:p>
                   </a:txBody>
@@ -12858,7 +12858,7 @@
                           </a:solidFill>
                           <a:latin typeface="Calibri"/>
                         </a:rPr>
-                        <a:t>10</a:t>
+                        <a:t>0</a:t>
                       </a:r>
                     </a:p>
                   </a:txBody>
@@ -12950,7 +12950,7 @@
                           </a:solidFill>
                           <a:latin typeface="Calibri"/>
                         </a:rPr>
-                        <a:t>—</a:t>
+                        <a:t>4</a:t>
                       </a:r>
                     </a:p>
                   </a:txBody>
@@ -12975,7 +12975,7 @@
                           </a:solidFill>
                           <a:latin typeface="Calibri"/>
                         </a:rPr>
-                        <a:t>Kırtasiye</a:t>
+                        <a:t>Yardımcı Kitap</a:t>
                       </a:r>
                     </a:p>
                   </a:txBody>
@@ -12998,7 +12998,7 @@
                           </a:solidFill>
                           <a:latin typeface="Calibri"/>
                         </a:rPr>
-                        <a:t>24</a:t>
+                        <a:t>18</a:t>
                       </a:r>
                     </a:p>
                   </a:txBody>
@@ -13021,7 +13021,7 @@
                           </a:solidFill>
                           <a:latin typeface="Calibri"/>
                         </a:rPr>
-                        <a:t>23</a:t>
+                        <a:t>21</a:t>
                       </a:r>
                     </a:p>
                   </a:txBody>
@@ -13044,7 +13044,7 @@
                           </a:solidFill>
                           <a:latin typeface="Calibri"/>
                         </a:rPr>
-                        <a:t>2</a:t>
+                        <a:t>—</a:t>
                       </a:r>
                     </a:p>
                   </a:txBody>
@@ -13067,7 +13067,7 @@
                           </a:solidFill>
                           <a:latin typeface="Calibri"/>
                         </a:rPr>
-                        <a:t>1</a:t>
+                        <a:t>—</a:t>
                       </a:r>
                     </a:p>
                   </a:txBody>
@@ -13090,7 +13090,7 @@
                           </a:solidFill>
                           <a:latin typeface="Calibri"/>
                         </a:rPr>
-                        <a:t>—</a:t>
+                        <a:t>3</a:t>
                       </a:r>
                     </a:p>
                   </a:txBody>
@@ -13113,7 +13113,7 @@
                           </a:solidFill>
                           <a:latin typeface="Calibri"/>
                         </a:rPr>
-                        <a:t>22</a:t>
+                        <a:t>15</a:t>
                       </a:r>
                     </a:p>
                   </a:txBody>
@@ -13642,8 +13642,8 @@
                 <a:latin typeface="Calibri"/>
               </a:rPr>
               <a:t>Çocuk  5 kişi
+Mağaza  2 kişi
 İdari İşler  2 kişi
-Mağaza  2 kişi
 Kültür  2 kişi</a:t>
             </a:r>
           </a:p>

--- a/briefings/sezon-kadro-20260902/sunum-kadro-sezon2026.pptx
+++ b/briefings/sezon-kadro-20260902/sunum-kadro-sezon2026.pptx
@@ -727,7 +727,7 @@
               <c:strCache>
                 <c:ptCount val="1"/>
                 <c:pt idx="0">
-                  <c:v>adet / kişi</c:v>
+                  <c:v>Oca-Ağu adet ÷ kadrolu</c:v>
                 </c:pt>
               </c:strCache>
             </c:strRef>
@@ -1389,13 +1389,13 @@
                 <c:formatCode>General</c:formatCode>
                 <c:ptCount val="3"/>
                 <c:pt idx="0">
-                  <c:v>57.55862375814169</c:v>
+                  <c:v>57.55862375814167</c:v>
                 </c:pt>
                 <c:pt idx="1">
-                  <c:v>96.004930945943</c:v>
+                  <c:v>96.00493094594296</c:v>
                 </c:pt>
                 <c:pt idx="2">
-                  <c:v>62.2675266100573</c:v>
+                  <c:v>62.267526610057345</c:v>
                 </c:pt>
               </c:numCache>
             </c:numRef>
@@ -5529,7 +5529,7 @@
         </p:nvGraphicFramePr>
         <p:xfrm>
           <a:off x="548640" y="1371600"/>
-          <a:ext cx="11018520" cy="2573383"/>
+          <a:ext cx="11018520" cy="2617470"/>
         </p:xfrm>
         <a:graphic>
           <a:graphicData uri="http://schemas.openxmlformats.org/drawingml/2006/table">
@@ -5793,7 +5793,7 @@
                   </a:tcPr>
                 </a:tc>
               </a:tr>
-              <a:tr h="352697">
+              <a:tr h="308610">
                 <a:tc>
                   <a:txBody>
                     <a:bodyPr/>
@@ -5979,7 +5979,7 @@
                   </a:tcPr>
                 </a:tc>
               </a:tr>
-              <a:tr h="352697">
+              <a:tr h="308610">
                 <a:tc>
                   <a:txBody>
                     <a:bodyPr/>
@@ -6165,7 +6165,7 @@
                   </a:tcPr>
                 </a:tc>
               </a:tr>
-              <a:tr h="352697">
+              <a:tr h="308610">
                 <a:tc>
                   <a:txBody>
                     <a:bodyPr/>
@@ -6351,7 +6351,7 @@
                   </a:tcPr>
                 </a:tc>
               </a:tr>
-              <a:tr h="352697">
+              <a:tr h="308610">
                 <a:tc>
                   <a:txBody>
                     <a:bodyPr/>
@@ -6537,7 +6537,7 @@
                   </a:tcPr>
                 </a:tc>
               </a:tr>
-              <a:tr h="352697">
+              <a:tr h="308610">
                 <a:tc>
                   <a:txBody>
                     <a:bodyPr/>
@@ -6723,7 +6723,7 @@
                   </a:tcPr>
                 </a:tc>
               </a:tr>
-              <a:tr h="352698">
+              <a:tr h="308610">
                 <a:tc>
                   <a:txBody>
                     <a:bodyPr/>
@@ -6905,6 +6905,192 @@
                   <a:tcPr>
                     <a:solidFill>
                       <a:srgbClr val="F2F2F2"/>
+                    </a:solidFill>
+                  </a:tcPr>
+                </a:tc>
+              </a:tr>
+              <a:tr h="308610">
+                <a:tc>
+                  <a:txBody>
+                    <a:bodyPr/>
+                    <a:lstStyle/>
+                    <a:p>
+                      <a:pPr algn="l"/>
+                      <a:r>
+                        <a:rPr sz="1150" b="0">
+                          <a:solidFill>
+                            <a:srgbClr val="333333"/>
+                          </a:solidFill>
+                          <a:latin typeface="Calibri"/>
+                        </a:rPr>
+                        <a:t>DİĞER (6 kategori)</a:t>
+                      </a:r>
+                    </a:p>
+                  </a:txBody>
+                  <a:tcPr>
+                    <a:solidFill>
+                      <a:srgbClr val="FFFFFF"/>
+                    </a:solidFill>
+                  </a:tcPr>
+                </a:tc>
+                <a:tc>
+                  <a:txBody>
+                    <a:bodyPr/>
+                    <a:lstStyle/>
+                    <a:p>
+                      <a:pPr algn="l"/>
+                      <a:r>
+                        <a:rPr sz="1150" b="0">
+                          <a:solidFill>
+                            <a:srgbClr val="333333"/>
+                          </a:solidFill>
+                          <a:latin typeface="Calibri"/>
+                        </a:rPr>
+                        <a:t>bölüm eşleşmesi yok</a:t>
+                      </a:r>
+                    </a:p>
+                  </a:txBody>
+                  <a:tcPr>
+                    <a:solidFill>
+                      <a:srgbClr val="FFFFFF"/>
+                    </a:solidFill>
+                  </a:tcPr>
+                </a:tc>
+                <a:tc>
+                  <a:txBody>
+                    <a:bodyPr/>
+                    <a:lstStyle/>
+                    <a:p>
+                      <a:pPr algn="ctr"/>
+                      <a:r>
+                        <a:rPr sz="1150" b="0">
+                          <a:solidFill>
+                            <a:srgbClr val="333333"/>
+                          </a:solidFill>
+                          <a:latin typeface="Calibri"/>
+                        </a:rPr>
+                        <a:t>129.221 → 170.477</a:t>
+                      </a:r>
+                    </a:p>
+                  </a:txBody>
+                  <a:tcPr>
+                    <a:solidFill>
+                      <a:srgbClr val="FFFFFF"/>
+                    </a:solidFill>
+                  </a:tcPr>
+                </a:tc>
+                <a:tc>
+                  <a:txBody>
+                    <a:bodyPr/>
+                    <a:lstStyle/>
+                    <a:p>
+                      <a:pPr algn="ctr"/>
+                      <a:r>
+                        <a:rPr sz="1150" b="1">
+                          <a:solidFill>
+                            <a:srgbClr val="A6001A"/>
+                          </a:solidFill>
+                          <a:latin typeface="Calibri"/>
+                        </a:rPr>
+                        <a:t>+%31,9</a:t>
+                      </a:r>
+                    </a:p>
+                  </a:txBody>
+                  <a:tcPr>
+                    <a:solidFill>
+                      <a:srgbClr val="FFFFFF"/>
+                    </a:solidFill>
+                  </a:tcPr>
+                </a:tc>
+                <a:tc>
+                  <a:txBody>
+                    <a:bodyPr/>
+                    <a:lstStyle/>
+                    <a:p>
+                      <a:pPr algn="ctr"/>
+                      <a:r>
+                        <a:rPr sz="1150" b="1">
+                          <a:solidFill>
+                            <a:srgbClr val="A6001A"/>
+                          </a:solidFill>
+                          <a:latin typeface="Calibri"/>
+                        </a:rPr>
+                        <a:t>+%41,8</a:t>
+                      </a:r>
+                    </a:p>
+                  </a:txBody>
+                  <a:tcPr>
+                    <a:solidFill>
+                      <a:srgbClr val="FFFFFF"/>
+                    </a:solidFill>
+                  </a:tcPr>
+                </a:tc>
+                <a:tc>
+                  <a:txBody>
+                    <a:bodyPr/>
+                    <a:lstStyle/>
+                    <a:p>
+                      <a:pPr algn="ctr"/>
+                      <a:r>
+                        <a:rPr sz="1150" b="1">
+                          <a:solidFill>
+                            <a:srgbClr val="333333"/>
+                          </a:solidFill>
+                          <a:latin typeface="Calibri"/>
+                        </a:rPr>
+                        <a:t>+%50,5</a:t>
+                      </a:r>
+                    </a:p>
+                  </a:txBody>
+                  <a:tcPr>
+                    <a:solidFill>
+                      <a:srgbClr val="FFFFFF"/>
+                    </a:solidFill>
+                  </a:tcPr>
+                </a:tc>
+                <a:tc>
+                  <a:txBody>
+                    <a:bodyPr/>
+                    <a:lstStyle/>
+                    <a:p>
+                      <a:pPr algn="ctr"/>
+                      <a:r>
+                        <a:rPr sz="1150" b="0">
+                          <a:solidFill>
+                            <a:srgbClr val="333333"/>
+                          </a:solidFill>
+                          <a:latin typeface="Calibri"/>
+                        </a:rPr>
+                        <a:t>+%79,8</a:t>
+                      </a:r>
+                    </a:p>
+                  </a:txBody>
+                  <a:tcPr>
+                    <a:solidFill>
+                      <a:srgbClr val="FFFFFF"/>
+                    </a:solidFill>
+                  </a:tcPr>
+                </a:tc>
+                <a:tc>
+                  <a:txBody>
+                    <a:bodyPr/>
+                    <a:lstStyle/>
+                    <a:p>
+                      <a:pPr algn="ctr"/>
+                      <a:r>
+                        <a:rPr sz="1150" b="0">
+                          <a:solidFill>
+                            <a:srgbClr val="333333"/>
+                          </a:solidFill>
+                          <a:latin typeface="Calibri"/>
+                        </a:rPr>
+                        <a:t>—</a:t>
+                      </a:r>
+                    </a:p>
+                  </a:txBody>
+                  <a:tcPr>
+                    <a:solidFill>
+                      <a:srgbClr val="FFFFFF"/>
                     </a:solidFill>
                   </a:tcPr>
                 </a:tc>
@@ -7040,7 +7226,7 @@
           <a:p>
             <a:pPr algn="l">
               <a:lnSpc>
-                <a:spcPct val="115000"/>
+                <a:spcPct val="112000"/>
               </a:lnSpc>
             </a:pPr>
             <a:r>
@@ -7056,17 +7242,17 @@
           <a:p>
             <a:pPr algn="l">
               <a:lnSpc>
-                <a:spcPct val="115000"/>
+                <a:spcPct val="112000"/>
               </a:lnSpc>
             </a:pPr>
             <a:r>
-              <a:rPr sz="1050" b="0">
+              <a:rPr sz="1000" b="0">
                 <a:solidFill>
                   <a:srgbClr val="333333"/>
                 </a:solidFill>
                 <a:latin typeface="Calibri"/>
               </a:rPr>
-              <a:t>Kadro artışı, ürün adedi en hızlı artan kategorilere yönlendirilmiştir. SEZON kolonları okul-hizalı pencereyi, OCA-AĞU kolonları yılın tamamını (01.01–31.08) gösterir; sıralama iki pencerede de aynıdır.</a:t>
+              <a:t>Kadro artışı, ürün adedi en hızlı artan kategorilere yönlendirilmiştir. SEZON kolonları okul-hizalı pencereyi, OCA-AĞU kolonları yılın tamamını (01.01–31.08) gösterir; sıralama iki pencerede de aynıdır. DİĞER satırı, tek bir reyona atfedilemeyen kategorilerin toplamıdır (kadro eşleşmesi yapılamaz); kapsam bütünlüğü için gösterilir.</a:t>
             </a:r>
           </a:p>
         </p:txBody>
@@ -7105,7 +7291,7 @@
                 </a:solidFill>
                 <a:latin typeface="Calibri"/>
               </a:rPr>
-              <a:t>* Kapsam: üç POS mağazası — FSM · Özlüce · İst. Yolu (Heykel ve Şura POS raporlamasında yok) · Dönem: 01.07 – 25.08.2025 (2025) · 07.07 – 31.08.2026 (2026), her iki yıl 56 gün, okul açılışına hizalı · OCA-AĞU kolonları: 01.01 – 31.08 kümülatif (her iki yıl)</a:t>
+              <a:t>* Kapsam: üç POS mağazası — FSM · Özlüce · İst. Yolu (Heykel ve Şura POS raporlamasında yok) · Dönem: 01.07 – 25.08.2025 (2025) · 07.07 – 31.08.2026 (2026), her iki yıl 56 gün, okul açılışına hizalı · OCA-AĞU kolonları: 01.01 – 31.08 kümülatif (her iki yıl) · Bölüm eşleşmesi olan 6 kategori ayrı satırda = hizalı pencere adedinin %78'i; kalan 6 kategori DİĞER satırında toplandı (eşik: iki yılda da ≥2.000 adet)</a:t>
             </a:r>
           </a:p>
         </p:txBody>
@@ -11182,7 +11368,7 @@
                           </a:solidFill>
                           <a:latin typeface="Calibri"/>
                         </a:rPr>
-                        <a:t>Mağaza</a:t>
+                        <a:t>İdari İşler</a:t>
                       </a:r>
                     </a:p>
                   </a:txBody>
@@ -11205,7 +11391,7 @@
                           </a:solidFill>
                           <a:latin typeface="Calibri"/>
                         </a:rPr>
-                        <a:t>10</a:t>
+                        <a:t>8</a:t>
                       </a:r>
                     </a:p>
                   </a:txBody>
@@ -11228,7 +11414,7 @@
                           </a:solidFill>
                           <a:latin typeface="Calibri"/>
                         </a:rPr>
-                        <a:t>8</a:t>
+                        <a:t>6</a:t>
                       </a:r>
                     </a:p>
                   </a:txBody>
@@ -11345,7 +11531,7 @@
                           </a:solidFill>
                           <a:latin typeface="Calibri"/>
                         </a:rPr>
-                        <a:t>İdari İşler</a:t>
+                        <a:t>Kültür</a:t>
                       </a:r>
                     </a:p>
                   </a:txBody>
@@ -11368,7 +11554,7 @@
                           </a:solidFill>
                           <a:latin typeface="Calibri"/>
                         </a:rPr>
-                        <a:t>8</a:t>
+                        <a:t>22</a:t>
                       </a:r>
                     </a:p>
                   </a:txBody>
@@ -11391,7 +11577,7 @@
                           </a:solidFill>
                           <a:latin typeface="Calibri"/>
                         </a:rPr>
-                        <a:t>6</a:t>
+                        <a:t>20</a:t>
                       </a:r>
                     </a:p>
                   </a:txBody>
@@ -11483,7 +11669,7 @@
                           </a:solidFill>
                           <a:latin typeface="Calibri"/>
                         </a:rPr>
-                        <a:t>—</a:t>
+                        <a:t>2</a:t>
                       </a:r>
                     </a:p>
                   </a:txBody>
@@ -11508,7 +11694,7 @@
                           </a:solidFill>
                           <a:latin typeface="Calibri"/>
                         </a:rPr>
-                        <a:t>Kültür</a:t>
+                        <a:t>Mağaza</a:t>
                       </a:r>
                     </a:p>
                   </a:txBody>
@@ -11531,7 +11717,7 @@
                           </a:solidFill>
                           <a:latin typeface="Calibri"/>
                         </a:rPr>
-                        <a:t>22</a:t>
+                        <a:t>10</a:t>
                       </a:r>
                     </a:p>
                   </a:txBody>
@@ -11554,7 +11740,7 @@
                           </a:solidFill>
                           <a:latin typeface="Calibri"/>
                         </a:rPr>
-                        <a:t>20</a:t>
+                        <a:t>8</a:t>
                       </a:r>
                     </a:p>
                   </a:txBody>
@@ -11646,7 +11832,7 @@
                           </a:solidFill>
                           <a:latin typeface="Calibri"/>
                         </a:rPr>
-                        <a:t>2</a:t>
+                        <a:t>—</a:t>
                       </a:r>
                     </a:p>
                   </a:txBody>
@@ -11671,7 +11857,7 @@
                           </a:solidFill>
                           <a:latin typeface="Calibri"/>
                         </a:rPr>
-                        <a:t>Muhasebe</a:t>
+                        <a:t>Akademi</a:t>
                       </a:r>
                     </a:p>
                   </a:txBody>
@@ -11694,7 +11880,7 @@
                           </a:solidFill>
                           <a:latin typeface="Calibri"/>
                         </a:rPr>
-                        <a:t>1</a:t>
+                        <a:t>10</a:t>
                       </a:r>
                     </a:p>
                   </a:txBody>
@@ -11717,7 +11903,7 @@
                           </a:solidFill>
                           <a:latin typeface="Calibri"/>
                         </a:rPr>
-                        <a:t>0</a:t>
+                        <a:t>9</a:t>
                       </a:r>
                     </a:p>
                   </a:txBody>
@@ -11834,7 +12020,7 @@
                           </a:solidFill>
                           <a:latin typeface="Calibri"/>
                         </a:rPr>
-                        <a:t>Oyun Alanı</a:t>
+                        <a:t>Kasa</a:t>
                       </a:r>
                     </a:p>
                   </a:txBody>
@@ -11857,6 +12043,75 @@
                           </a:solidFill>
                           <a:latin typeface="Calibri"/>
                         </a:rPr>
+                        <a:t>16</a:t>
+                      </a:r>
+                    </a:p>
+                  </a:txBody>
+                  <a:tcPr>
+                    <a:solidFill>
+                      <a:srgbClr val="FAFAFA"/>
+                    </a:solidFill>
+                  </a:tcPr>
+                </a:tc>
+                <a:tc>
+                  <a:txBody>
+                    <a:bodyPr/>
+                    <a:lstStyle/>
+                    <a:p>
+                      <a:pPr algn="ctr"/>
+                      <a:r>
+                        <a:rPr sz="900" b="0">
+                          <a:solidFill>
+                            <a:srgbClr val="333333"/>
+                          </a:solidFill>
+                          <a:latin typeface="Calibri"/>
+                        </a:rPr>
+                        <a:t>15</a:t>
+                      </a:r>
+                    </a:p>
+                  </a:txBody>
+                  <a:tcPr>
+                    <a:solidFill>
+                      <a:srgbClr val="FAFAFA"/>
+                    </a:solidFill>
+                  </a:tcPr>
+                </a:tc>
+                <a:tc>
+                  <a:txBody>
+                    <a:bodyPr/>
+                    <a:lstStyle/>
+                    <a:p>
+                      <a:pPr algn="ctr"/>
+                      <a:r>
+                        <a:rPr sz="900" b="0">
+                          <a:solidFill>
+                            <a:srgbClr val="333333"/>
+                          </a:solidFill>
+                          <a:latin typeface="Calibri"/>
+                        </a:rPr>
+                        <a:t>—</a:t>
+                      </a:r>
+                    </a:p>
+                  </a:txBody>
+                  <a:tcPr>
+                    <a:solidFill>
+                      <a:srgbClr val="FAFAFA"/>
+                    </a:solidFill>
+                  </a:tcPr>
+                </a:tc>
+                <a:tc>
+                  <a:txBody>
+                    <a:bodyPr/>
+                    <a:lstStyle/>
+                    <a:p>
+                      <a:pPr algn="ctr"/>
+                      <a:r>
+                        <a:rPr sz="900" b="1">
+                          <a:solidFill>
+                            <a:srgbClr val="A6001A"/>
+                          </a:solidFill>
+                          <a:latin typeface="Calibri"/>
+                        </a:rPr>
                         <a:t>1</a:t>
                       </a:r>
                     </a:p>
@@ -11880,7 +12135,7 @@
                           </a:solidFill>
                           <a:latin typeface="Calibri"/>
                         </a:rPr>
-                        <a:t>0</a:t>
+                        <a:t>—</a:t>
                       </a:r>
                     </a:p>
                   </a:txBody>
@@ -11903,76 +12158,7 @@
                           </a:solidFill>
                           <a:latin typeface="Calibri"/>
                         </a:rPr>
-                        <a:t>—</a:t>
-                      </a:r>
-                    </a:p>
-                  </a:txBody>
-                  <a:tcPr>
-                    <a:solidFill>
-                      <a:srgbClr val="FAFAFA"/>
-                    </a:solidFill>
-                  </a:tcPr>
-                </a:tc>
-                <a:tc>
-                  <a:txBody>
-                    <a:bodyPr/>
-                    <a:lstStyle/>
-                    <a:p>
-                      <a:pPr algn="ctr"/>
-                      <a:r>
-                        <a:rPr sz="900" b="1">
-                          <a:solidFill>
-                            <a:srgbClr val="A6001A"/>
-                          </a:solidFill>
-                          <a:latin typeface="Calibri"/>
-                        </a:rPr>
-                        <a:t>1</a:t>
-                      </a:r>
-                    </a:p>
-                  </a:txBody>
-                  <a:tcPr>
-                    <a:solidFill>
-                      <a:srgbClr val="FAFAFA"/>
-                    </a:solidFill>
-                  </a:tcPr>
-                </a:tc>
-                <a:tc>
-                  <a:txBody>
-                    <a:bodyPr/>
-                    <a:lstStyle/>
-                    <a:p>
-                      <a:pPr algn="ctr"/>
-                      <a:r>
-                        <a:rPr sz="900" b="0">
-                          <a:solidFill>
-                            <a:srgbClr val="333333"/>
-                          </a:solidFill>
-                          <a:latin typeface="Calibri"/>
-                        </a:rPr>
-                        <a:t>—</a:t>
-                      </a:r>
-                    </a:p>
-                  </a:txBody>
-                  <a:tcPr>
-                    <a:solidFill>
-                      <a:srgbClr val="FAFAFA"/>
-                    </a:solidFill>
-                  </a:tcPr>
-                </a:tc>
-                <a:tc>
-                  <a:txBody>
-                    <a:bodyPr/>
-                    <a:lstStyle/>
-                    <a:p>
-                      <a:pPr algn="ctr"/>
-                      <a:r>
-                        <a:rPr sz="900" b="0">
-                          <a:solidFill>
-                            <a:srgbClr val="333333"/>
-                          </a:solidFill>
-                          <a:latin typeface="Calibri"/>
-                        </a:rPr>
-                        <a:t>—</a:t>
+                        <a:t>9</a:t>
                       </a:r>
                     </a:p>
                   </a:txBody>
@@ -11997,7 +12183,7 @@
                           </a:solidFill>
                           <a:latin typeface="Calibri"/>
                         </a:rPr>
-                        <a:t>Kasa</a:t>
+                        <a:t>Kırtasiye</a:t>
                       </a:r>
                     </a:p>
                   </a:txBody>
@@ -12020,7 +12206,7 @@
                           </a:solidFill>
                           <a:latin typeface="Calibri"/>
                         </a:rPr>
-                        <a:t>16</a:t>
+                        <a:t>24</a:t>
                       </a:r>
                     </a:p>
                   </a:txBody>
@@ -12043,7 +12229,7 @@
                           </a:solidFill>
                           <a:latin typeface="Calibri"/>
                         </a:rPr>
-                        <a:t>15</a:t>
+                        <a:t>23</a:t>
                       </a:r>
                     </a:p>
                   </a:txBody>
@@ -12066,6 +12252,52 @@
                           </a:solidFill>
                           <a:latin typeface="Calibri"/>
                         </a:rPr>
+                        <a:t>2</a:t>
+                      </a:r>
+                    </a:p>
+                  </a:txBody>
+                  <a:tcPr>
+                    <a:solidFill>
+                      <a:srgbClr val="FFFFFF"/>
+                    </a:solidFill>
+                  </a:tcPr>
+                </a:tc>
+                <a:tc>
+                  <a:txBody>
+                    <a:bodyPr/>
+                    <a:lstStyle/>
+                    <a:p>
+                      <a:pPr algn="ctr"/>
+                      <a:r>
+                        <a:rPr sz="900" b="1">
+                          <a:solidFill>
+                            <a:srgbClr val="A6001A"/>
+                          </a:solidFill>
+                          <a:latin typeface="Calibri"/>
+                        </a:rPr>
+                        <a:t>1</a:t>
+                      </a:r>
+                    </a:p>
+                  </a:txBody>
+                  <a:tcPr>
+                    <a:solidFill>
+                      <a:srgbClr val="FFFFFF"/>
+                    </a:solidFill>
+                  </a:tcPr>
+                </a:tc>
+                <a:tc>
+                  <a:txBody>
+                    <a:bodyPr/>
+                    <a:lstStyle/>
+                    <a:p>
+                      <a:pPr algn="ctr"/>
+                      <a:r>
+                        <a:rPr sz="900" b="0">
+                          <a:solidFill>
+                            <a:srgbClr val="333333"/>
+                          </a:solidFill>
+                          <a:latin typeface="Calibri"/>
+                        </a:rPr>
                         <a:t>—</a:t>
                       </a:r>
                     </a:p>
@@ -12083,59 +12315,13 @@
                     <a:p>
                       <a:pPr algn="ctr"/>
                       <a:r>
-                        <a:rPr sz="900" b="1">
-                          <a:solidFill>
-                            <a:srgbClr val="A6001A"/>
-                          </a:solidFill>
-                          <a:latin typeface="Calibri"/>
-                        </a:rPr>
-                        <a:t>1</a:t>
-                      </a:r>
-                    </a:p>
-                  </a:txBody>
-                  <a:tcPr>
-                    <a:solidFill>
-                      <a:srgbClr val="FFFFFF"/>
-                    </a:solidFill>
-                  </a:tcPr>
-                </a:tc>
-                <a:tc>
-                  <a:txBody>
-                    <a:bodyPr/>
-                    <a:lstStyle/>
-                    <a:p>
-                      <a:pPr algn="ctr"/>
-                      <a:r>
                         <a:rPr sz="900" b="0">
                           <a:solidFill>
                             <a:srgbClr val="333333"/>
                           </a:solidFill>
                           <a:latin typeface="Calibri"/>
                         </a:rPr>
-                        <a:t>—</a:t>
-                      </a:r>
-                    </a:p>
-                  </a:txBody>
-                  <a:tcPr>
-                    <a:solidFill>
-                      <a:srgbClr val="FFFFFF"/>
-                    </a:solidFill>
-                  </a:tcPr>
-                </a:tc>
-                <a:tc>
-                  <a:txBody>
-                    <a:bodyPr/>
-                    <a:lstStyle/>
-                    <a:p>
-                      <a:pPr algn="ctr"/>
-                      <a:r>
-                        <a:rPr sz="900" b="0">
-                          <a:solidFill>
-                            <a:srgbClr val="333333"/>
-                          </a:solidFill>
-                          <a:latin typeface="Calibri"/>
-                        </a:rPr>
-                        <a:t>9</a:t>
+                        <a:t>22</a:t>
                       </a:r>
                     </a:p>
                   </a:txBody>
@@ -12160,7 +12346,7 @@
                           </a:solidFill>
                           <a:latin typeface="Calibri"/>
                         </a:rPr>
-                        <a:t>Akademi</a:t>
+                        <a:t>Kıyafet</a:t>
                       </a:r>
                     </a:p>
                   </a:txBody>
@@ -12183,7 +12369,7 @@
                           </a:solidFill>
                           <a:latin typeface="Calibri"/>
                         </a:rPr>
-                        <a:t>10</a:t>
+                        <a:t>0</a:t>
                       </a:r>
                     </a:p>
                   </a:txBody>
@@ -12206,7 +12392,7 @@
                           </a:solidFill>
                           <a:latin typeface="Calibri"/>
                         </a:rPr>
-                        <a:t>9</a:t>
+                        <a:t>0</a:t>
                       </a:r>
                     </a:p>
                   </a:txBody>
@@ -12252,7 +12438,7 @@
                           </a:solidFill>
                           <a:latin typeface="Calibri"/>
                         </a:rPr>
-                        <a:t>1</a:t>
+                        <a:t>—</a:t>
                       </a:r>
                     </a:p>
                   </a:txBody>
@@ -12298,7 +12484,7 @@
                           </a:solidFill>
                           <a:latin typeface="Calibri"/>
                         </a:rPr>
-                        <a:t>—</a:t>
+                        <a:t>4</a:t>
                       </a:r>
                     </a:p>
                   </a:txBody>
@@ -12323,7 +12509,7 @@
                           </a:solidFill>
                           <a:latin typeface="Calibri"/>
                         </a:rPr>
-                        <a:t>Kırtasiye</a:t>
+                        <a:t>Mal Kabul</a:t>
                       </a:r>
                     </a:p>
                   </a:txBody>
@@ -12346,7 +12532,7 @@
                           </a:solidFill>
                           <a:latin typeface="Calibri"/>
                         </a:rPr>
-                        <a:t>24</a:t>
+                        <a:t>6</a:t>
                       </a:r>
                     </a:p>
                   </a:txBody>
@@ -12369,7 +12555,7 @@
                           </a:solidFill>
                           <a:latin typeface="Calibri"/>
                         </a:rPr>
-                        <a:t>23</a:t>
+                        <a:t>5</a:t>
                       </a:r>
                     </a:p>
                   </a:txBody>
@@ -12392,7 +12578,7 @@
                           </a:solidFill>
                           <a:latin typeface="Calibri"/>
                         </a:rPr>
-                        <a:t>2</a:t>
+                        <a:t>1</a:t>
                       </a:r>
                     </a:p>
                   </a:txBody>
@@ -12461,7 +12647,7 @@
                           </a:solidFill>
                           <a:latin typeface="Calibri"/>
                         </a:rPr>
-                        <a:t>22</a:t>
+                        <a:t>1</a:t>
                       </a:r>
                     </a:p>
                   </a:txBody>
@@ -12486,7 +12672,7 @@
                           </a:solidFill>
                           <a:latin typeface="Calibri"/>
                         </a:rPr>
-                        <a:t>Mal Kabul</a:t>
+                        <a:t>Yardımcı Kitap</a:t>
                       </a:r>
                     </a:p>
                   </a:txBody>
@@ -12509,7 +12695,7 @@
                           </a:solidFill>
                           <a:latin typeface="Calibri"/>
                         </a:rPr>
-                        <a:t>6</a:t>
+                        <a:t>18</a:t>
                       </a:r>
                     </a:p>
                   </a:txBody>
@@ -12532,7 +12718,7 @@
                           </a:solidFill>
                           <a:latin typeface="Calibri"/>
                         </a:rPr>
-                        <a:t>5</a:t>
+                        <a:t>21</a:t>
                       </a:r>
                     </a:p>
                   </a:txBody>
@@ -12555,7 +12741,7 @@
                           </a:solidFill>
                           <a:latin typeface="Calibri"/>
                         </a:rPr>
-                        <a:t>1</a:t>
+                        <a:t>—</a:t>
                       </a:r>
                     </a:p>
                   </a:txBody>
@@ -12578,7 +12764,7 @@
                           </a:solidFill>
                           <a:latin typeface="Calibri"/>
                         </a:rPr>
-                        <a:t>1</a:t>
+                        <a:t>—</a:t>
                       </a:r>
                     </a:p>
                   </a:txBody>
@@ -12601,7 +12787,7 @@
                           </a:solidFill>
                           <a:latin typeface="Calibri"/>
                         </a:rPr>
-                        <a:t>—</a:t>
+                        <a:t>3</a:t>
                       </a:r>
                     </a:p>
                   </a:txBody>
@@ -12624,7 +12810,7 @@
                           </a:solidFill>
                           <a:latin typeface="Calibri"/>
                         </a:rPr>
-                        <a:t>1</a:t>
+                        <a:t>15</a:t>
                       </a:r>
                     </a:p>
                   </a:txBody>
@@ -12806,157 +12992,157 @@
                     <a:p>
                       <a:pPr algn="l"/>
                       <a:r>
-                        <a:rPr sz="900" b="0">
-                          <a:solidFill>
-                            <a:srgbClr val="333333"/>
-                          </a:solidFill>
-                          <a:latin typeface="Calibri"/>
-                        </a:rPr>
-                        <a:t>Kıyafet</a:t>
-                      </a:r>
-                    </a:p>
-                  </a:txBody>
-                  <a:tcPr>
-                    <a:solidFill>
-                      <a:srgbClr val="FAFAFA"/>
-                    </a:solidFill>
-                  </a:tcPr>
-                </a:tc>
-                <a:tc>
-                  <a:txBody>
-                    <a:bodyPr/>
-                    <a:lstStyle/>
-                    <a:p>
-                      <a:pPr algn="ctr"/>
-                      <a:r>
-                        <a:rPr sz="900" b="0">
-                          <a:solidFill>
-                            <a:srgbClr val="333333"/>
-                          </a:solidFill>
-                          <a:latin typeface="Calibri"/>
-                        </a:rPr>
-                        <a:t>0</a:t>
-                      </a:r>
-                    </a:p>
-                  </a:txBody>
-                  <a:tcPr>
-                    <a:solidFill>
-                      <a:srgbClr val="FAFAFA"/>
-                    </a:solidFill>
-                  </a:tcPr>
-                </a:tc>
-                <a:tc>
-                  <a:txBody>
-                    <a:bodyPr/>
-                    <a:lstStyle/>
-                    <a:p>
-                      <a:pPr algn="ctr"/>
-                      <a:r>
-                        <a:rPr sz="900" b="0">
-                          <a:solidFill>
-                            <a:srgbClr val="333333"/>
-                          </a:solidFill>
-                          <a:latin typeface="Calibri"/>
-                        </a:rPr>
-                        <a:t>0</a:t>
-                      </a:r>
-                    </a:p>
-                  </a:txBody>
-                  <a:tcPr>
-                    <a:solidFill>
-                      <a:srgbClr val="FAFAFA"/>
-                    </a:solidFill>
-                  </a:tcPr>
-                </a:tc>
-                <a:tc>
-                  <a:txBody>
-                    <a:bodyPr/>
-                    <a:lstStyle/>
-                    <a:p>
-                      <a:pPr algn="ctr"/>
-                      <a:r>
-                        <a:rPr sz="900" b="0">
-                          <a:solidFill>
-                            <a:srgbClr val="333333"/>
-                          </a:solidFill>
-                          <a:latin typeface="Calibri"/>
-                        </a:rPr>
-                        <a:t>—</a:t>
-                      </a:r>
-                    </a:p>
-                  </a:txBody>
-                  <a:tcPr>
-                    <a:solidFill>
-                      <a:srgbClr val="FAFAFA"/>
-                    </a:solidFill>
-                  </a:tcPr>
-                </a:tc>
-                <a:tc>
-                  <a:txBody>
-                    <a:bodyPr/>
-                    <a:lstStyle/>
-                    <a:p>
-                      <a:pPr algn="ctr"/>
-                      <a:r>
                         <a:rPr sz="900" b="1">
                           <a:solidFill>
+                            <a:srgbClr val="333333"/>
+                          </a:solidFill>
+                          <a:latin typeface="Calibri"/>
+                        </a:rPr>
+                        <a:t>TOPLAM (teyit hariç)</a:t>
+                      </a:r>
+                    </a:p>
+                  </a:txBody>
+                  <a:tcPr>
+                    <a:solidFill>
+                      <a:srgbClr val="F2F2F2"/>
+                    </a:solidFill>
+                  </a:tcPr>
+                </a:tc>
+                <a:tc>
+                  <a:txBody>
+                    <a:bodyPr/>
+                    <a:lstStyle/>
+                    <a:p>
+                      <a:pPr algn="ctr"/>
+                      <a:r>
+                        <a:rPr sz="900" b="1">
+                          <a:solidFill>
+                            <a:srgbClr val="333333"/>
+                          </a:solidFill>
+                          <a:latin typeface="Calibri"/>
+                        </a:rPr>
+                        <a:t>143</a:t>
+                      </a:r>
+                    </a:p>
+                  </a:txBody>
+                  <a:tcPr>
+                    <a:solidFill>
+                      <a:srgbClr val="F2F2F2"/>
+                    </a:solidFill>
+                  </a:tcPr>
+                </a:tc>
+                <a:tc>
+                  <a:txBody>
+                    <a:bodyPr/>
+                    <a:lstStyle/>
+                    <a:p>
+                      <a:pPr algn="ctr"/>
+                      <a:r>
+                        <a:rPr sz="900" b="1">
+                          <a:solidFill>
+                            <a:srgbClr val="333333"/>
+                          </a:solidFill>
+                          <a:latin typeface="Calibri"/>
+                        </a:rPr>
+                        <a:t>131</a:t>
+                      </a:r>
+                    </a:p>
+                  </a:txBody>
+                  <a:tcPr>
+                    <a:solidFill>
+                      <a:srgbClr val="F2F2F2"/>
+                    </a:solidFill>
+                  </a:tcPr>
+                </a:tc>
+                <a:tc>
+                  <a:txBody>
+                    <a:bodyPr/>
+                    <a:lstStyle/>
+                    <a:p>
+                      <a:pPr algn="ctr"/>
+                      <a:r>
+                        <a:rPr sz="900" b="1">
+                          <a:solidFill>
+                            <a:srgbClr val="333333"/>
+                          </a:solidFill>
+                          <a:latin typeface="Calibri"/>
+                        </a:rPr>
+                        <a:t>3</a:t>
+                      </a:r>
+                    </a:p>
+                  </a:txBody>
+                  <a:tcPr>
+                    <a:solidFill>
+                      <a:srgbClr val="F2F2F2"/>
+                    </a:solidFill>
+                  </a:tcPr>
+                </a:tc>
+                <a:tc>
+                  <a:txBody>
+                    <a:bodyPr/>
+                    <a:lstStyle/>
+                    <a:p>
+                      <a:pPr algn="ctr"/>
+                      <a:r>
+                        <a:rPr sz="900" b="1">
+                          <a:solidFill>
                             <a:srgbClr val="A6001A"/>
                           </a:solidFill>
                           <a:latin typeface="Calibri"/>
                         </a:rPr>
-                        <a:t>—</a:t>
-                      </a:r>
-                    </a:p>
-                  </a:txBody>
-                  <a:tcPr>
-                    <a:solidFill>
-                      <a:srgbClr val="FAFAFA"/>
-                    </a:solidFill>
-                  </a:tcPr>
-                </a:tc>
-                <a:tc>
-                  <a:txBody>
-                    <a:bodyPr/>
-                    <a:lstStyle/>
-                    <a:p>
-                      <a:pPr algn="ctr"/>
-                      <a:r>
-                        <a:rPr sz="900" b="0">
-                          <a:solidFill>
-                            <a:srgbClr val="333333"/>
-                          </a:solidFill>
-                          <a:latin typeface="Calibri"/>
-                        </a:rPr>
-                        <a:t>—</a:t>
-                      </a:r>
-                    </a:p>
-                  </a:txBody>
-                  <a:tcPr>
-                    <a:solidFill>
-                      <a:srgbClr val="FAFAFA"/>
-                    </a:solidFill>
-                  </a:tcPr>
-                </a:tc>
-                <a:tc>
-                  <a:txBody>
-                    <a:bodyPr/>
-                    <a:lstStyle/>
-                    <a:p>
-                      <a:pPr algn="ctr"/>
-                      <a:r>
-                        <a:rPr sz="900" b="0">
-                          <a:solidFill>
-                            <a:srgbClr val="333333"/>
-                          </a:solidFill>
-                          <a:latin typeface="Calibri"/>
-                        </a:rPr>
-                        <a:t>4</a:t>
-                      </a:r>
-                    </a:p>
-                  </a:txBody>
-                  <a:tcPr>
-                    <a:solidFill>
-                      <a:srgbClr val="FAFAFA"/>
+                        <a:t>15</a:t>
+                      </a:r>
+                    </a:p>
+                  </a:txBody>
+                  <a:tcPr>
+                    <a:solidFill>
+                      <a:srgbClr val="F2F2F2"/>
+                    </a:solidFill>
+                  </a:tcPr>
+                </a:tc>
+                <a:tc>
+                  <a:txBody>
+                    <a:bodyPr/>
+                    <a:lstStyle/>
+                    <a:p>
+                      <a:pPr algn="ctr"/>
+                      <a:r>
+                        <a:rPr sz="900" b="1">
+                          <a:solidFill>
+                            <a:srgbClr val="333333"/>
+                          </a:solidFill>
+                          <a:latin typeface="Calibri"/>
+                        </a:rPr>
+                        <a:t>3</a:t>
+                      </a:r>
+                    </a:p>
+                  </a:txBody>
+                  <a:tcPr>
+                    <a:solidFill>
+                      <a:srgbClr val="F2F2F2"/>
+                    </a:solidFill>
+                  </a:tcPr>
+                </a:tc>
+                <a:tc>
+                  <a:txBody>
+                    <a:bodyPr/>
+                    <a:lstStyle/>
+                    <a:p>
+                      <a:pPr algn="ctr"/>
+                      <a:r>
+                        <a:rPr sz="900" b="1">
+                          <a:solidFill>
+                            <a:srgbClr val="333333"/>
+                          </a:solidFill>
+                          <a:latin typeface="Calibri"/>
+                        </a:rPr>
+                        <a:t>58</a:t>
+                      </a:r>
+                    </a:p>
+                  </a:txBody>
+                  <a:tcPr>
+                    <a:solidFill>
+                      <a:srgbClr val="F2F2F2"/>
                     </a:solidFill>
                   </a:tcPr>
                 </a:tc>
@@ -12975,13 +13161,13 @@
                           </a:solidFill>
                           <a:latin typeface="Calibri"/>
                         </a:rPr>
-                        <a:t>Yardımcı Kitap</a:t>
-                      </a:r>
-                    </a:p>
-                  </a:txBody>
-                  <a:tcPr>
-                    <a:solidFill>
-                      <a:srgbClr val="FFFFFF"/>
+                        <a:t>Oyun Alanı (teyit bekliyor)</a:t>
+                      </a:r>
+                    </a:p>
+                  </a:txBody>
+                  <a:tcPr>
+                    <a:solidFill>
+                      <a:srgbClr val="FFF6E6"/>
                     </a:solidFill>
                   </a:tcPr>
                 </a:tc>
@@ -12998,13 +13184,13 @@
                           </a:solidFill>
                           <a:latin typeface="Calibri"/>
                         </a:rPr>
-                        <a:t>18</a:t>
-                      </a:r>
-                    </a:p>
-                  </a:txBody>
-                  <a:tcPr>
-                    <a:solidFill>
-                      <a:srgbClr val="FFFFFF"/>
+                        <a:t>1</a:t>
+                      </a:r>
+                    </a:p>
+                  </a:txBody>
+                  <a:tcPr>
+                    <a:solidFill>
+                      <a:srgbClr val="FFF6E6"/>
                     </a:solidFill>
                   </a:tcPr>
                 </a:tc>
@@ -13021,13 +13207,13 @@
                           </a:solidFill>
                           <a:latin typeface="Calibri"/>
                         </a:rPr>
-                        <a:t>21</a:t>
-                      </a:r>
-                    </a:p>
-                  </a:txBody>
-                  <a:tcPr>
-                    <a:solidFill>
-                      <a:srgbClr val="FFFFFF"/>
+                        <a:t>0</a:t>
+                      </a:r>
+                    </a:p>
+                  </a:txBody>
+                  <a:tcPr>
+                    <a:solidFill>
+                      <a:srgbClr val="FFF6E6"/>
                     </a:solidFill>
                   </a:tcPr>
                 </a:tc>
@@ -13050,7 +13236,7 @@
                   </a:txBody>
                   <a:tcPr>
                     <a:solidFill>
-                      <a:srgbClr val="FFFFFF"/>
+                      <a:srgbClr val="FFF6E6"/>
                     </a:solidFill>
                   </a:tcPr>
                 </a:tc>
@@ -13073,7 +13259,7 @@
                   </a:txBody>
                   <a:tcPr>
                     <a:solidFill>
-                      <a:srgbClr val="FFFFFF"/>
+                      <a:srgbClr val="FFF6E6"/>
                     </a:solidFill>
                   </a:tcPr>
                 </a:tc>
@@ -13090,13 +13276,13 @@
                           </a:solidFill>
                           <a:latin typeface="Calibri"/>
                         </a:rPr>
-                        <a:t>3</a:t>
-                      </a:r>
-                    </a:p>
-                  </a:txBody>
-                  <a:tcPr>
-                    <a:solidFill>
-                      <a:srgbClr val="FFFFFF"/>
+                        <a:t>—</a:t>
+                      </a:r>
+                    </a:p>
+                  </a:txBody>
+                  <a:tcPr>
+                    <a:solidFill>
+                      <a:srgbClr val="FFF6E6"/>
                     </a:solidFill>
                   </a:tcPr>
                 </a:tc>
@@ -13113,13 +13299,13 @@
                           </a:solidFill>
                           <a:latin typeface="Calibri"/>
                         </a:rPr>
-                        <a:t>15</a:t>
-                      </a:r>
-                    </a:p>
-                  </a:txBody>
-                  <a:tcPr>
-                    <a:solidFill>
-                      <a:srgbClr val="FFFFFF"/>
+                        <a:t>—</a:t>
+                      </a:r>
+                    </a:p>
+                  </a:txBody>
+                  <a:tcPr>
+                    <a:solidFill>
+                      <a:srgbClr val="FFF6E6"/>
                     </a:solidFill>
                   </a:tcPr>
                 </a:tc>
@@ -13132,157 +13318,157 @@
                     <a:p>
                       <a:pPr algn="l"/>
                       <a:r>
+                        <a:rPr sz="900" b="0">
+                          <a:solidFill>
+                            <a:srgbClr val="333333"/>
+                          </a:solidFill>
+                          <a:latin typeface="Calibri"/>
+                        </a:rPr>
+                        <a:t>Muhasebe (teyit bekliyor)</a:t>
+                      </a:r>
+                    </a:p>
+                  </a:txBody>
+                  <a:tcPr>
+                    <a:solidFill>
+                      <a:srgbClr val="FFF6E6"/>
+                    </a:solidFill>
+                  </a:tcPr>
+                </a:tc>
+                <a:tc>
+                  <a:txBody>
+                    <a:bodyPr/>
+                    <a:lstStyle/>
+                    <a:p>
+                      <a:pPr algn="ctr"/>
+                      <a:r>
+                        <a:rPr sz="900" b="0">
+                          <a:solidFill>
+                            <a:srgbClr val="333333"/>
+                          </a:solidFill>
+                          <a:latin typeface="Calibri"/>
+                        </a:rPr>
+                        <a:t>1</a:t>
+                      </a:r>
+                    </a:p>
+                  </a:txBody>
+                  <a:tcPr>
+                    <a:solidFill>
+                      <a:srgbClr val="FFF6E6"/>
+                    </a:solidFill>
+                  </a:tcPr>
+                </a:tc>
+                <a:tc>
+                  <a:txBody>
+                    <a:bodyPr/>
+                    <a:lstStyle/>
+                    <a:p>
+                      <a:pPr algn="ctr"/>
+                      <a:r>
+                        <a:rPr sz="900" b="0">
+                          <a:solidFill>
+                            <a:srgbClr val="333333"/>
+                          </a:solidFill>
+                          <a:latin typeface="Calibri"/>
+                        </a:rPr>
+                        <a:t>0</a:t>
+                      </a:r>
+                    </a:p>
+                  </a:txBody>
+                  <a:tcPr>
+                    <a:solidFill>
+                      <a:srgbClr val="FFF6E6"/>
+                    </a:solidFill>
+                  </a:tcPr>
+                </a:tc>
+                <a:tc>
+                  <a:txBody>
+                    <a:bodyPr/>
+                    <a:lstStyle/>
+                    <a:p>
+                      <a:pPr algn="ctr"/>
+                      <a:r>
+                        <a:rPr sz="900" b="0">
+                          <a:solidFill>
+                            <a:srgbClr val="333333"/>
+                          </a:solidFill>
+                          <a:latin typeface="Calibri"/>
+                        </a:rPr>
+                        <a:t>—</a:t>
+                      </a:r>
+                    </a:p>
+                  </a:txBody>
+                  <a:tcPr>
+                    <a:solidFill>
+                      <a:srgbClr val="FFF6E6"/>
+                    </a:solidFill>
+                  </a:tcPr>
+                </a:tc>
+                <a:tc>
+                  <a:txBody>
+                    <a:bodyPr/>
+                    <a:lstStyle/>
+                    <a:p>
+                      <a:pPr algn="ctr"/>
+                      <a:r>
                         <a:rPr sz="900" b="1">
                           <a:solidFill>
-                            <a:srgbClr val="333333"/>
-                          </a:solidFill>
-                          <a:latin typeface="Calibri"/>
-                        </a:rPr>
-                        <a:t>TOPLAM</a:t>
-                      </a:r>
-                    </a:p>
-                  </a:txBody>
-                  <a:tcPr>
-                    <a:solidFill>
-                      <a:srgbClr val="F2F2F2"/>
-                    </a:solidFill>
-                  </a:tcPr>
-                </a:tc>
-                <a:tc>
-                  <a:txBody>
-                    <a:bodyPr/>
-                    <a:lstStyle/>
-                    <a:p>
-                      <a:pPr algn="ctr"/>
-                      <a:r>
-                        <a:rPr sz="900" b="1">
-                          <a:solidFill>
-                            <a:srgbClr val="333333"/>
-                          </a:solidFill>
-                          <a:latin typeface="Calibri"/>
-                        </a:rPr>
-                        <a:t>145</a:t>
-                      </a:r>
-                    </a:p>
-                  </a:txBody>
-                  <a:tcPr>
-                    <a:solidFill>
-                      <a:srgbClr val="F2F2F2"/>
-                    </a:solidFill>
-                  </a:tcPr>
-                </a:tc>
-                <a:tc>
-                  <a:txBody>
-                    <a:bodyPr/>
-                    <a:lstStyle/>
-                    <a:p>
-                      <a:pPr algn="ctr"/>
-                      <a:r>
-                        <a:rPr sz="900" b="1">
-                          <a:solidFill>
-                            <a:srgbClr val="333333"/>
-                          </a:solidFill>
-                          <a:latin typeface="Calibri"/>
-                        </a:rPr>
-                        <a:t>131</a:t>
-                      </a:r>
-                    </a:p>
-                  </a:txBody>
-                  <a:tcPr>
-                    <a:solidFill>
-                      <a:srgbClr val="F2F2F2"/>
-                    </a:solidFill>
-                  </a:tcPr>
-                </a:tc>
-                <a:tc>
-                  <a:txBody>
-                    <a:bodyPr/>
-                    <a:lstStyle/>
-                    <a:p>
-                      <a:pPr algn="ctr"/>
-                      <a:r>
-                        <a:rPr sz="900" b="1">
-                          <a:solidFill>
-                            <a:srgbClr val="333333"/>
-                          </a:solidFill>
-                          <a:latin typeface="Calibri"/>
-                        </a:rPr>
-                        <a:t>3</a:t>
-                      </a:r>
-                    </a:p>
-                  </a:txBody>
-                  <a:tcPr>
-                    <a:solidFill>
-                      <a:srgbClr val="F2F2F2"/>
-                    </a:solidFill>
-                  </a:tcPr>
-                </a:tc>
-                <a:tc>
-                  <a:txBody>
-                    <a:bodyPr/>
-                    <a:lstStyle/>
-                    <a:p>
-                      <a:pPr algn="ctr"/>
-                      <a:r>
-                        <a:rPr sz="900" b="1">
-                          <a:solidFill>
                             <a:srgbClr val="A6001A"/>
                           </a:solidFill>
                           <a:latin typeface="Calibri"/>
                         </a:rPr>
-                        <a:t>17</a:t>
-                      </a:r>
-                    </a:p>
-                  </a:txBody>
-                  <a:tcPr>
-                    <a:solidFill>
-                      <a:srgbClr val="F2F2F2"/>
-                    </a:solidFill>
-                  </a:tcPr>
-                </a:tc>
-                <a:tc>
-                  <a:txBody>
-                    <a:bodyPr/>
-                    <a:lstStyle/>
-                    <a:p>
-                      <a:pPr algn="ctr"/>
-                      <a:r>
-                        <a:rPr sz="900" b="1">
-                          <a:solidFill>
-                            <a:srgbClr val="333333"/>
-                          </a:solidFill>
-                          <a:latin typeface="Calibri"/>
-                        </a:rPr>
-                        <a:t>3</a:t>
-                      </a:r>
-                    </a:p>
-                  </a:txBody>
-                  <a:tcPr>
-                    <a:solidFill>
-                      <a:srgbClr val="F2F2F2"/>
-                    </a:solidFill>
-                  </a:tcPr>
-                </a:tc>
-                <a:tc>
-                  <a:txBody>
-                    <a:bodyPr/>
-                    <a:lstStyle/>
-                    <a:p>
-                      <a:pPr algn="ctr"/>
-                      <a:r>
-                        <a:rPr sz="900" b="1">
-                          <a:solidFill>
-                            <a:srgbClr val="333333"/>
-                          </a:solidFill>
-                          <a:latin typeface="Calibri"/>
-                        </a:rPr>
-                        <a:t>58</a:t>
-                      </a:r>
-                    </a:p>
-                  </a:txBody>
-                  <a:tcPr>
-                    <a:solidFill>
-                      <a:srgbClr val="F2F2F2"/>
+                        <a:t>—</a:t>
+                      </a:r>
+                    </a:p>
+                  </a:txBody>
+                  <a:tcPr>
+                    <a:solidFill>
+                      <a:srgbClr val="FFF6E6"/>
+                    </a:solidFill>
+                  </a:tcPr>
+                </a:tc>
+                <a:tc>
+                  <a:txBody>
+                    <a:bodyPr/>
+                    <a:lstStyle/>
+                    <a:p>
+                      <a:pPr algn="ctr"/>
+                      <a:r>
+                        <a:rPr sz="900" b="0">
+                          <a:solidFill>
+                            <a:srgbClr val="333333"/>
+                          </a:solidFill>
+                          <a:latin typeface="Calibri"/>
+                        </a:rPr>
+                        <a:t>—</a:t>
+                      </a:r>
+                    </a:p>
+                  </a:txBody>
+                  <a:tcPr>
+                    <a:solidFill>
+                      <a:srgbClr val="FFF6E6"/>
+                    </a:solidFill>
+                  </a:tcPr>
+                </a:tc>
+                <a:tc>
+                  <a:txBody>
+                    <a:bodyPr/>
+                    <a:lstStyle/>
+                    <a:p>
+                      <a:pPr algn="ctr"/>
+                      <a:r>
+                        <a:rPr sz="900" b="0">
+                          <a:solidFill>
+                            <a:srgbClr val="333333"/>
+                          </a:solidFill>
+                          <a:latin typeface="Calibri"/>
+                        </a:rPr>
+                        <a:t>—</a:t>
+                      </a:r>
+                    </a:p>
+                  </a:txBody>
+                  <a:tcPr>
+                    <a:solidFill>
+                      <a:srgbClr val="FFF6E6"/>
                     </a:solidFill>
                   </a:tcPr>
                 </a:tc>
@@ -13642,9 +13828,9 @@
                 <a:latin typeface="Calibri"/>
               </a:rPr>
               <a:t>Çocuk  5 kişi
-Mağaza  2 kişi
 İdari İşler  2 kişi
-Kültür  2 kişi</a:t>
+Kültür  2 kişi
+Mağaza  2 kişi</a:t>
             </a:r>
           </a:p>
         </p:txBody>
@@ -13745,7 +13931,7 @@
                 </a:solidFill>
                 <a:latin typeface="Calibri"/>
               </a:rPr>
-              <a:t>Bölüm bazında açık 17 kişi, mağaza bazında 14. Aradaki fark, bir mağazada bir bölümün fazlasının başka bölümün açığını maskelemesinden gelir. Gerçek ihtiyaç bölüm bazında okunur.</a:t>
+              <a:t>Bölüm bazında açık 15 kişi, mağaza bazında 14. Aradaki fark, bir mağazada bir bölümün fazlasının başka bölümün açığını maskelemesinden gelir. Gerçek ihtiyaç bölüm bazında okunur. Ayrıca normda tanımlı olduğu hâlde kayıtta hiç personeli olmayan 2 kişilik satır (Oyun Alanı · Muhasebe) açığa DAHİL EDİLMEDİ — teyit bekliyor.</a:t>
             </a:r>
           </a:p>
         </p:txBody>
@@ -23421,7 +23607,7 @@
           <a:lstStyle/>
           <a:p>
             <a:r>
-              <a:t>Personel Başına İş Hacmi</a:t>
+              <a:t>Personel Başına İş Hacmi — Okul-Hizalı Pencere</a:t>
             </a:r>
           </a:p>
         </p:txBody>
@@ -24235,7 +24421,7 @@
           <a:lstStyle/>
           <a:p>
             <a:r>
-              <a:t>Personel Başına İş Hacmi — Dört Yıllık Seyir</a:t>
+              <a:t>Dört Yıllık Seyir — Ocak-Ağustos Adedi / Kadrolu</a:t>
             </a:r>
           </a:p>
         </p:txBody>
@@ -24421,7 +24607,7 @@
                 </a:solidFill>
                 <a:latin typeface="Calibri"/>
               </a:rPr>
-              <a:t>Kadrolu 60 → 91. Adet yalnız %11 arttı → kişi başı iş düştü.</a:t>
+              <a:t>Kadrolu 60 → 91. Adet yalnız +%11,3 arttı → kişi başı iş düştü.</a:t>
             </a:r>
           </a:p>
         </p:txBody>
@@ -24757,7 +24943,7 @@
                 </a:solidFill>
                 <a:latin typeface="Calibri"/>
               </a:rPr>
-              <a:t>Kişi başı iş %28,8 arttı; bu yıl kadro büyürken verim de arttı.</a:t>
+              <a:t>Kişi başı iş +%28,8 arttı; bu yıl kadro büyürken verim de arttı.</a:t>
             </a:r>
           </a:p>
         </p:txBody>
@@ -24796,7 +24982,7 @@
                 </a:solidFill>
                 <a:latin typeface="Calibri"/>
               </a:rPr>
-              <a:t>Kadro = 31.08 itibarıyla kadrolu (sezonluk hariç; yıllar arası tahliye zamanlaması kıyası bozar).</a:t>
+              <a:t>Ölçü: Ocak–Ağustos ürün adedi ÷ 31.08 kadrolu (sezonluk HARİÇ; yıllar arası sezonluk zamanlaması kıyası bozar). «Okul-hizalı pencere ÷ TÜM kadro» ölçüsü ayrı slayttadır — iki ölçünün seviyeleri karşılaştırılmaz, yönleri karşılaştırılır.</a:t>
             </a:r>
           </a:p>
         </p:txBody>
@@ -25118,7 +25304,7 @@
                 </a:solidFill>
                 <a:latin typeface="Calibri"/>
               </a:rPr>
-              <a:t>Yönetim +0  ·  Mal Kabul +0  ·  İdari İşler +0</a:t>
+              <a:t>Mağaza +0  ·  Mal Kabul +0  ·  İdari İşler +0</a:t>
             </a:r>
           </a:p>
           <a:p>
@@ -25134,7 +25320,7 @@
                 </a:solidFill>
                 <a:latin typeface="Calibri"/>
               </a:rPr>
-              <a:t>Bu üç bölümde kadro değişimi sıfırdır.</a:t>
+              <a:t>Bu 3 bölümde kadro değişimi sıfırdır.</a:t>
             </a:r>
           </a:p>
         </p:txBody>
@@ -25387,7 +25573,7 @@
                 </a:solidFill>
                 <a:latin typeface="Calibri"/>
               </a:rPr>
-              <a:t>Kadrolu +14 kişilik artışın tamamı satış ve kasa bölümlerindedir; yönetim kadrosunda değişim yoktur.</a:t>
+              <a:t>31 Ağustos kesiminde kadrolu +14 kişilik artışın tamamı satış ve kasa bölümlerindedir; yönetim kadrosunda değişim yoktur.</a:t>
             </a:r>
           </a:p>
         </p:txBody>
@@ -26488,7 +26674,7 @@
                 </a:solidFill>
                 <a:latin typeface="Calibri"/>
               </a:rPr>
-              <a:t>Üç mağazanın tamamında iş hacmi artışı kadro artışının üzerindedir. Kadro artışı en yüksek olan İst. Yolu'nda dahi oran 2,2 katıdır.</a:t>
+              <a:t>Üç mağazanın tamamında iş hacmi artışı kadro artışının üzerindedir. Kadro artışı en yüksek olan İst. Yolu mağazasında dahi oran 2,2 katıdır.</a:t>
             </a:r>
           </a:p>
         </p:txBody>

--- a/briefings/sezon-kadro-20260902/sunum-kadro-sezon2026.pptx
+++ b/briefings/sezon-kadro-20260902/sunum-kadro-sezon2026.pptx
@@ -25021,7 +25021,7 @@
                 </a:solidFill>
                 <a:latin typeface="Calibri"/>
               </a:rPr>
-              <a:t>* Kapsam: üç POS mağazası — FSM · Özlüce · İst. Yolu · Dönem: 01.01 – 31.08 (her iki yıl, kümülatif) · kadro: 31.08 kesimi, her yıl</a:t>
+              <a:t>* Kapsam: üç POS mağazası — FSM · Özlüce · İst. Yolu · Dönem: 01.01 – 31.08 (her iki yıl, kümülatif) · kadro: 31.08 kesimi, her yıl · Sınav Okulları satışı ürün adedinden HARİÇ tutulur; o operasyona bakan personel İK kaydında kanal bazında ayrıştırılamadığı için kadroda kalır — oran her yıl aynı yönde etkilenir, yıllar arası kıyas geçerlidir</a:t>
             </a:r>
           </a:p>
         </p:txBody>

--- a/briefings/sezon-kadro-20260902/sunum-kadro-sezon2026.pptx
+++ b/briefings/sezon-kadro-20260902/sunum-kadro-sezon2026.pptx
@@ -25,6 +25,8 @@
     <p:sldId id="270" r:id="rId21"/>
     <p:sldId id="271" r:id="rId22"/>
     <p:sldId id="272" r:id="rId23"/>
+    <p:sldId id="273" r:id="rId24"/>
+    <p:sldId id="274" r:id="rId25"/>
   </p:sldIdLst>
   <p:sldSz cx="12192000" cy="6858000"/>
   <p:notesSz cx="6858000" cy="9144000"/>
@@ -317,6 +319,264 @@
 </c:chartSpace>
 </file>
 
+<file path=ppt/charts/chart10.xml><?xml version="1.0" encoding="utf-8"?>
+<c:chartSpace xmlns:c="http://schemas.openxmlformats.org/drawingml/2006/chart" xmlns:a="http://schemas.openxmlformats.org/drawingml/2006/main" xmlns:r="http://schemas.openxmlformats.org/officeDocument/2006/relationships">
+  <c:date1904 val="0"/>
+  <c:chart>
+    <c:autoTitleDeleted val="1"/>
+    <c:plotArea>
+      <c:barChart>
+        <c:barDir val="col"/>
+        <c:grouping val="clustered"/>
+        <c:ser>
+          <c:idx val="0"/>
+          <c:order val="0"/>
+          <c:tx>
+            <c:strRef>
+              <c:f>Sheet1!$B$1</c:f>
+              <c:strCache>
+                <c:ptCount val="1"/>
+                <c:pt idx="0">
+                  <c:v>2025 fiili</c:v>
+                </c:pt>
+              </c:strCache>
+            </c:strRef>
+          </c:tx>
+          <c:spPr>
+            <a:solidFill>
+              <a:srgbClr val="9A9A9A"/>
+            </a:solidFill>
+          </c:spPr>
+          <c:cat>
+            <c:strRef>
+              <c:f>Sheet1!$A$2:$A$2</c:f>
+              <c:strCache>
+                <c:ptCount val="1"/>
+                <c:pt idx="0">
+                  <c:v>Kişi başına yıllık fazla mesai (saat)</c:v>
+                </c:pt>
+              </c:strCache>
+            </c:strRef>
+          </c:cat>
+          <c:val>
+            <c:numRef>
+              <c:f>Sheet1!$B$2:$B$2</c:f>
+              <c:numCache>
+                <c:formatCode>General</c:formatCode>
+                <c:ptCount val="1"/>
+                <c:pt idx="0">
+                  <c:v>97.23687580025609</c:v>
+                </c:pt>
+              </c:numCache>
+            </c:numRef>
+          </c:val>
+        </c:ser>
+        <c:ser>
+          <c:idx val="1"/>
+          <c:order val="1"/>
+          <c:tx>
+            <c:strRef>
+              <c:f>Sheet1!$C$1</c:f>
+              <c:strCache>
+                <c:ptCount val="1"/>
+                <c:pt idx="0">
+                  <c:v>2026 fiili</c:v>
+                </c:pt>
+              </c:strCache>
+            </c:strRef>
+          </c:tx>
+          <c:spPr>
+            <a:solidFill>
+              <a:srgbClr val="E30622"/>
+            </a:solidFill>
+          </c:spPr>
+          <c:cat>
+            <c:strRef>
+              <c:f>Sheet1!$A$2:$A$2</c:f>
+              <c:strCache>
+                <c:ptCount val="1"/>
+                <c:pt idx="0">
+                  <c:v>Kişi başına yıllık fazla mesai (saat)</c:v>
+                </c:pt>
+              </c:strCache>
+            </c:strRef>
+          </c:cat>
+          <c:val>
+            <c:numRef>
+              <c:f>Sheet1!$C$2:$C$2</c:f>
+              <c:numCache>
+                <c:formatCode>General</c:formatCode>
+                <c:ptCount val="1"/>
+                <c:pt idx="0">
+                  <c:v>106.94172897196262</c:v>
+                </c:pt>
+              </c:numCache>
+            </c:numRef>
+          </c:val>
+        </c:ser>
+        <c:ser>
+          <c:idx val="2"/>
+          <c:order val="2"/>
+          <c:tx>
+            <c:strRef>
+              <c:f>Sheet1!$D$1</c:f>
+              <c:strCache>
+                <c:ptCount val="1"/>
+                <c:pt idx="0">
+                  <c:v>Kadro artmasaydı</c:v>
+                </c:pt>
+              </c:strCache>
+            </c:strRef>
+          </c:tx>
+          <c:spPr>
+            <a:solidFill>
+              <a:srgbClr val="A6001A"/>
+            </a:solidFill>
+          </c:spPr>
+          <c:cat>
+            <c:strRef>
+              <c:f>Sheet1!$A$2:$A$2</c:f>
+              <c:strCache>
+                <c:ptCount val="1"/>
+                <c:pt idx="0">
+                  <c:v>Kişi başına yıllık fazla mesai (saat)</c:v>
+                </c:pt>
+              </c:strCache>
+            </c:strRef>
+          </c:cat>
+          <c:val>
+            <c:numRef>
+              <c:f>Sheet1!$D$2:$D$2</c:f>
+              <c:numCache>
+                <c:formatCode>General</c:formatCode>
+                <c:ptCount val="1"/>
+                <c:pt idx="0">
+                  <c:v>341.9233290653009</c:v>
+                </c:pt>
+              </c:numCache>
+            </c:numRef>
+          </c:val>
+        </c:ser>
+        <c:ser>
+          <c:idx val="3"/>
+          <c:order val="3"/>
+          <c:tx>
+            <c:strRef>
+              <c:f>Sheet1!$E$1</c:f>
+              <c:strCache>
+                <c:ptCount val="1"/>
+                <c:pt idx="0">
+                  <c:v>Yasal sınır</c:v>
+                </c:pt>
+              </c:strCache>
+            </c:strRef>
+          </c:tx>
+          <c:spPr>
+            <a:solidFill>
+              <a:srgbClr val="4A4A4A"/>
+            </a:solidFill>
+          </c:spPr>
+          <c:cat>
+            <c:strRef>
+              <c:f>Sheet1!$A$2:$A$2</c:f>
+              <c:strCache>
+                <c:ptCount val="1"/>
+                <c:pt idx="0">
+                  <c:v>Kişi başına yıllık fazla mesai (saat)</c:v>
+                </c:pt>
+              </c:strCache>
+            </c:strRef>
+          </c:cat>
+          <c:val>
+            <c:numRef>
+              <c:f>Sheet1!$E$2:$E$2</c:f>
+              <c:numCache>
+                <c:formatCode>General</c:formatCode>
+                <c:ptCount val="1"/>
+                <c:pt idx="0">
+                  <c:v>270.0</c:v>
+                </c:pt>
+              </c:numCache>
+            </c:numRef>
+          </c:val>
+        </c:ser>
+        <c:dLbls>
+          <c:numFmt sourceLinked="0" formatCode="#,##0"/>
+          <c:txPr>
+            <a:bodyPr/>
+            <a:lstStyle/>
+            <a:p>
+              <a:pPr>
+                <a:defRPr sz="900"/>
+              </a:pPr>
+            </a:p>
+          </c:txPr>
+          <c:showLegendKey val="0"/>
+          <c:showVal val="1"/>
+          <c:showCatName val="0"/>
+          <c:showSerName val="0"/>
+          <c:showPercent val="0"/>
+          <c:showBubbleSize val="0"/>
+          <c:showLeaderLines val="1"/>
+        </c:dLbls>
+        <c:gapWidth val="80"/>
+        <c:axId val="-2068027336"/>
+        <c:axId val="-2113994440"/>
+      </c:barChart>
+      <c:catAx>
+        <c:axId val="-2068027336"/>
+        <c:scaling>
+          <c:orientation val="minMax"/>
+        </c:scaling>
+        <c:delete val="0"/>
+        <c:axPos val="b"/>
+        <c:majorTickMark val="out"/>
+        <c:minorTickMark val="none"/>
+        <c:tickLblPos val="nextTo"/>
+        <c:crossAx val="-2113994440"/>
+        <c:crosses val="autoZero"/>
+        <c:auto val="1"/>
+        <c:lblAlgn val="ctr"/>
+        <c:lblOffset val="100"/>
+        <c:noMultiLvlLbl val="0"/>
+      </c:catAx>
+      <c:valAx>
+        <c:axId val="-2113994440"/>
+        <c:scaling/>
+        <c:delete val="0"/>
+        <c:axPos val="l"/>
+        <c:majorGridlines/>
+        <c:majorTickMark val="out"/>
+        <c:minorTickMark val="none"/>
+        <c:tickLblPos val="nextTo"/>
+        <c:crossAx val="-2068027336"/>
+        <c:crosses val="autoZero"/>
+      </c:valAx>
+    </c:plotArea>
+    <c:legend>
+      <c:legendPos val="t"/>
+      <c:overlay val="0"/>
+    </c:legend>
+    <c:dispBlanksAs val="gap"/>
+  </c:chart>
+  <c:txPr>
+    <a:bodyPr/>
+    <a:lstStyle/>
+    <a:p>
+      <a:pPr>
+        <a:defRPr sz="950">
+          <a:latin typeface="Calibri"/>
+        </a:defRPr>
+      </a:pPr>
+      <a:endParaRPr lang="en-US"/>
+    </a:p>
+  </c:txPr>
+  <c:externalData r:id="rId1">
+    <c:autoUpdate val="0"/>
+  </c:externalData>
+</c:chartSpace>
+</file>
+
 <file path=ppt/charts/chart2.xml><?xml version="1.0" encoding="utf-8"?>
 <c:chartSpace xmlns:c="http://schemas.openxmlformats.org/drawingml/2006/chart" xmlns:a="http://schemas.openxmlformats.org/drawingml/2006/main" xmlns:r="http://schemas.openxmlformats.org/officeDocument/2006/relationships">
   <c:date1904 val="0"/>
@@ -427,7 +687,7 @@
                   <c:v>775.03155</c:v>
                 </c:pt>
                 <c:pt idx="1">
-                  <c:v>122.53417561000008</c:v>
+                  <c:v>122.53417561000006</c:v>
                 </c:pt>
                 <c:pt idx="2">
                   <c:v>160</c:v>
@@ -620,7 +880,7 @@
                 <c:formatCode>General</c:formatCode>
                 <c:ptCount val="3"/>
                 <c:pt idx="0">
-                  <c:v>5578.704629629629</c:v>
+                  <c:v>5578.70462962963</c:v>
                 </c:pt>
                 <c:pt idx="1">
                   <c:v>4229.647540983607</c:v>
@@ -1334,7 +1594,7 @@
                 <c:formatCode>General</c:formatCode>
                 <c:ptCount val="3"/>
                 <c:pt idx="0">
-                  <c:v>30.54425135213488</c:v>
+                  <c:v>30.5442513521349</c:v>
                 </c:pt>
                 <c:pt idx="1">
                   <c:v>48.848767711265985</c:v>
@@ -1389,13 +1649,13 @@
                 <c:formatCode>General</c:formatCode>
                 <c:ptCount val="3"/>
                 <c:pt idx="0">
-                  <c:v>57.55862375814167</c:v>
+                  <c:v>57.55862375814162</c:v>
                 </c:pt>
                 <c:pt idx="1">
-                  <c:v>96.00493094594296</c:v>
+                  <c:v>96.00493094594302</c:v>
                 </c:pt>
                 <c:pt idx="2">
-                  <c:v>62.267526610057345</c:v>
+                  <c:v>62.267526610057274</c:v>
                 </c:pt>
               </c:numCache>
             </c:numRef>
@@ -11857,7 +12117,7 @@
                           </a:solidFill>
                           <a:latin typeface="Calibri"/>
                         </a:rPr>
-                        <a:t>Akademi</a:t>
+                        <a:t>Kasa</a:t>
                       </a:r>
                     </a:p>
                   </a:txBody>
@@ -11880,7 +12140,7 @@
                           </a:solidFill>
                           <a:latin typeface="Calibri"/>
                         </a:rPr>
-                        <a:t>10</a:t>
+                        <a:t>16</a:t>
                       </a:r>
                     </a:p>
                   </a:txBody>
@@ -11903,99 +12163,99 @@
                           </a:solidFill>
                           <a:latin typeface="Calibri"/>
                         </a:rPr>
+                        <a:t>15</a:t>
+                      </a:r>
+                    </a:p>
+                  </a:txBody>
+                  <a:tcPr>
+                    <a:solidFill>
+                      <a:srgbClr val="FFFFFF"/>
+                    </a:solidFill>
+                  </a:tcPr>
+                </a:tc>
+                <a:tc>
+                  <a:txBody>
+                    <a:bodyPr/>
+                    <a:lstStyle/>
+                    <a:p>
+                      <a:pPr algn="ctr"/>
+                      <a:r>
+                        <a:rPr sz="900" b="0">
+                          <a:solidFill>
+                            <a:srgbClr val="333333"/>
+                          </a:solidFill>
+                          <a:latin typeface="Calibri"/>
+                        </a:rPr>
+                        <a:t>—</a:t>
+                      </a:r>
+                    </a:p>
+                  </a:txBody>
+                  <a:tcPr>
+                    <a:solidFill>
+                      <a:srgbClr val="FFFFFF"/>
+                    </a:solidFill>
+                  </a:tcPr>
+                </a:tc>
+                <a:tc>
+                  <a:txBody>
+                    <a:bodyPr/>
+                    <a:lstStyle/>
+                    <a:p>
+                      <a:pPr algn="ctr"/>
+                      <a:r>
+                        <a:rPr sz="900" b="1">
+                          <a:solidFill>
+                            <a:srgbClr val="A6001A"/>
+                          </a:solidFill>
+                          <a:latin typeface="Calibri"/>
+                        </a:rPr>
+                        <a:t>1</a:t>
+                      </a:r>
+                    </a:p>
+                  </a:txBody>
+                  <a:tcPr>
+                    <a:solidFill>
+                      <a:srgbClr val="FFFFFF"/>
+                    </a:solidFill>
+                  </a:tcPr>
+                </a:tc>
+                <a:tc>
+                  <a:txBody>
+                    <a:bodyPr/>
+                    <a:lstStyle/>
+                    <a:p>
+                      <a:pPr algn="ctr"/>
+                      <a:r>
+                        <a:rPr sz="900" b="0">
+                          <a:solidFill>
+                            <a:srgbClr val="333333"/>
+                          </a:solidFill>
+                          <a:latin typeface="Calibri"/>
+                        </a:rPr>
+                        <a:t>—</a:t>
+                      </a:r>
+                    </a:p>
+                  </a:txBody>
+                  <a:tcPr>
+                    <a:solidFill>
+                      <a:srgbClr val="FFFFFF"/>
+                    </a:solidFill>
+                  </a:tcPr>
+                </a:tc>
+                <a:tc>
+                  <a:txBody>
+                    <a:bodyPr/>
+                    <a:lstStyle/>
+                    <a:p>
+                      <a:pPr algn="ctr"/>
+                      <a:r>
+                        <a:rPr sz="900" b="0">
+                          <a:solidFill>
+                            <a:srgbClr val="333333"/>
+                          </a:solidFill>
+                          <a:latin typeface="Calibri"/>
+                        </a:rPr>
                         <a:t>9</a:t>
-                      </a:r>
-                    </a:p>
-                  </a:txBody>
-                  <a:tcPr>
-                    <a:solidFill>
-                      <a:srgbClr val="FFFFFF"/>
-                    </a:solidFill>
-                  </a:tcPr>
-                </a:tc>
-                <a:tc>
-                  <a:txBody>
-                    <a:bodyPr/>
-                    <a:lstStyle/>
-                    <a:p>
-                      <a:pPr algn="ctr"/>
-                      <a:r>
-                        <a:rPr sz="900" b="0">
-                          <a:solidFill>
-                            <a:srgbClr val="333333"/>
-                          </a:solidFill>
-                          <a:latin typeface="Calibri"/>
-                        </a:rPr>
-                        <a:t>—</a:t>
-                      </a:r>
-                    </a:p>
-                  </a:txBody>
-                  <a:tcPr>
-                    <a:solidFill>
-                      <a:srgbClr val="FFFFFF"/>
-                    </a:solidFill>
-                  </a:tcPr>
-                </a:tc>
-                <a:tc>
-                  <a:txBody>
-                    <a:bodyPr/>
-                    <a:lstStyle/>
-                    <a:p>
-                      <a:pPr algn="ctr"/>
-                      <a:r>
-                        <a:rPr sz="900" b="1">
-                          <a:solidFill>
-                            <a:srgbClr val="A6001A"/>
-                          </a:solidFill>
-                          <a:latin typeface="Calibri"/>
-                        </a:rPr>
-                        <a:t>1</a:t>
-                      </a:r>
-                    </a:p>
-                  </a:txBody>
-                  <a:tcPr>
-                    <a:solidFill>
-                      <a:srgbClr val="FFFFFF"/>
-                    </a:solidFill>
-                  </a:tcPr>
-                </a:tc>
-                <a:tc>
-                  <a:txBody>
-                    <a:bodyPr/>
-                    <a:lstStyle/>
-                    <a:p>
-                      <a:pPr algn="ctr"/>
-                      <a:r>
-                        <a:rPr sz="900" b="0">
-                          <a:solidFill>
-                            <a:srgbClr val="333333"/>
-                          </a:solidFill>
-                          <a:latin typeface="Calibri"/>
-                        </a:rPr>
-                        <a:t>—</a:t>
-                      </a:r>
-                    </a:p>
-                  </a:txBody>
-                  <a:tcPr>
-                    <a:solidFill>
-                      <a:srgbClr val="FFFFFF"/>
-                    </a:solidFill>
-                  </a:tcPr>
-                </a:tc>
-                <a:tc>
-                  <a:txBody>
-                    <a:bodyPr/>
-                    <a:lstStyle/>
-                    <a:p>
-                      <a:pPr algn="ctr"/>
-                      <a:r>
-                        <a:rPr sz="900" b="0">
-                          <a:solidFill>
-                            <a:srgbClr val="333333"/>
-                          </a:solidFill>
-                          <a:latin typeface="Calibri"/>
-                        </a:rPr>
-                        <a:t>—</a:t>
                       </a:r>
                     </a:p>
                   </a:txBody>
@@ -12020,7 +12280,7 @@
                           </a:solidFill>
                           <a:latin typeface="Calibri"/>
                         </a:rPr>
-                        <a:t>Kasa</a:t>
+                        <a:t>Akademi</a:t>
                       </a:r>
                     </a:p>
                   </a:txBody>
@@ -12043,7 +12303,7 @@
                           </a:solidFill>
                           <a:latin typeface="Calibri"/>
                         </a:rPr>
-                        <a:t>16</a:t>
+                        <a:t>10</a:t>
                       </a:r>
                     </a:p>
                   </a:txBody>
@@ -12066,7 +12326,7 @@
                           </a:solidFill>
                           <a:latin typeface="Calibri"/>
                         </a:rPr>
-                        <a:t>15</a:t>
+                        <a:t>9</a:t>
                       </a:r>
                     </a:p>
                   </a:txBody>
@@ -12158,7 +12418,7 @@
                           </a:solidFill>
                           <a:latin typeface="Calibri"/>
                         </a:rPr>
-                        <a:t>9</a:t>
+                        <a:t>—</a:t>
                       </a:r>
                     </a:p>
                   </a:txBody>
@@ -12183,7 +12443,7 @@
                           </a:solidFill>
                           <a:latin typeface="Calibri"/>
                         </a:rPr>
-                        <a:t>Kırtasiye</a:t>
+                        <a:t>Yardımcı Kitap</a:t>
                       </a:r>
                     </a:p>
                   </a:txBody>
@@ -12206,7 +12466,7 @@
                           </a:solidFill>
                           <a:latin typeface="Calibri"/>
                         </a:rPr>
-                        <a:t>24</a:t>
+                        <a:t>18</a:t>
                       </a:r>
                     </a:p>
                   </a:txBody>
@@ -12229,7 +12489,7 @@
                           </a:solidFill>
                           <a:latin typeface="Calibri"/>
                         </a:rPr>
-                        <a:t>23</a:t>
+                        <a:t>21</a:t>
                       </a:r>
                     </a:p>
                   </a:txBody>
@@ -12252,7 +12512,7 @@
                           </a:solidFill>
                           <a:latin typeface="Calibri"/>
                         </a:rPr>
-                        <a:t>2</a:t>
+                        <a:t>—</a:t>
                       </a:r>
                     </a:p>
                   </a:txBody>
@@ -12275,7 +12535,7 @@
                           </a:solidFill>
                           <a:latin typeface="Calibri"/>
                         </a:rPr>
-                        <a:t>1</a:t>
+                        <a:t>—</a:t>
                       </a:r>
                     </a:p>
                   </a:txBody>
@@ -12298,7 +12558,7 @@
                           </a:solidFill>
                           <a:latin typeface="Calibri"/>
                         </a:rPr>
-                        <a:t>—</a:t>
+                        <a:t>3</a:t>
                       </a:r>
                     </a:p>
                   </a:txBody>
@@ -12321,7 +12581,7 @@
                           </a:solidFill>
                           <a:latin typeface="Calibri"/>
                         </a:rPr>
-                        <a:t>22</a:t>
+                        <a:t>15</a:t>
                       </a:r>
                     </a:p>
                   </a:txBody>
@@ -12346,7 +12606,7 @@
                           </a:solidFill>
                           <a:latin typeface="Calibri"/>
                         </a:rPr>
-                        <a:t>Kıyafet</a:t>
+                        <a:t>Mal Kabul</a:t>
                       </a:r>
                     </a:p>
                   </a:txBody>
@@ -12369,7 +12629,7 @@
                           </a:solidFill>
                           <a:latin typeface="Calibri"/>
                         </a:rPr>
-                        <a:t>0</a:t>
+                        <a:t>6</a:t>
                       </a:r>
                     </a:p>
                   </a:txBody>
@@ -12392,7 +12652,7 @@
                           </a:solidFill>
                           <a:latin typeface="Calibri"/>
                         </a:rPr>
-                        <a:t>0</a:t>
+                        <a:t>5</a:t>
                       </a:r>
                     </a:p>
                   </a:txBody>
@@ -12415,6 +12675,52 @@
                           </a:solidFill>
                           <a:latin typeface="Calibri"/>
                         </a:rPr>
+                        <a:t>1</a:t>
+                      </a:r>
+                    </a:p>
+                  </a:txBody>
+                  <a:tcPr>
+                    <a:solidFill>
+                      <a:srgbClr val="FAFAFA"/>
+                    </a:solidFill>
+                  </a:tcPr>
+                </a:tc>
+                <a:tc>
+                  <a:txBody>
+                    <a:bodyPr/>
+                    <a:lstStyle/>
+                    <a:p>
+                      <a:pPr algn="ctr"/>
+                      <a:r>
+                        <a:rPr sz="900" b="1">
+                          <a:solidFill>
+                            <a:srgbClr val="A6001A"/>
+                          </a:solidFill>
+                          <a:latin typeface="Calibri"/>
+                        </a:rPr>
+                        <a:t>1</a:t>
+                      </a:r>
+                    </a:p>
+                  </a:txBody>
+                  <a:tcPr>
+                    <a:solidFill>
+                      <a:srgbClr val="FAFAFA"/>
+                    </a:solidFill>
+                  </a:tcPr>
+                </a:tc>
+                <a:tc>
+                  <a:txBody>
+                    <a:bodyPr/>
+                    <a:lstStyle/>
+                    <a:p>
+                      <a:pPr algn="ctr"/>
+                      <a:r>
+                        <a:rPr sz="900" b="0">
+                          <a:solidFill>
+                            <a:srgbClr val="333333"/>
+                          </a:solidFill>
+                          <a:latin typeface="Calibri"/>
+                        </a:rPr>
                         <a:t>—</a:t>
                       </a:r>
                     </a:p>
@@ -12432,59 +12738,13 @@
                     <a:p>
                       <a:pPr algn="ctr"/>
                       <a:r>
-                        <a:rPr sz="900" b="1">
-                          <a:solidFill>
-                            <a:srgbClr val="A6001A"/>
-                          </a:solidFill>
-                          <a:latin typeface="Calibri"/>
-                        </a:rPr>
-                        <a:t>—</a:t>
-                      </a:r>
-                    </a:p>
-                  </a:txBody>
-                  <a:tcPr>
-                    <a:solidFill>
-                      <a:srgbClr val="FAFAFA"/>
-                    </a:solidFill>
-                  </a:tcPr>
-                </a:tc>
-                <a:tc>
-                  <a:txBody>
-                    <a:bodyPr/>
-                    <a:lstStyle/>
-                    <a:p>
-                      <a:pPr algn="ctr"/>
-                      <a:r>
                         <a:rPr sz="900" b="0">
                           <a:solidFill>
                             <a:srgbClr val="333333"/>
                           </a:solidFill>
                           <a:latin typeface="Calibri"/>
                         </a:rPr>
-                        <a:t>—</a:t>
-                      </a:r>
-                    </a:p>
-                  </a:txBody>
-                  <a:tcPr>
-                    <a:solidFill>
-                      <a:srgbClr val="FAFAFA"/>
-                    </a:solidFill>
-                  </a:tcPr>
-                </a:tc>
-                <a:tc>
-                  <a:txBody>
-                    <a:bodyPr/>
-                    <a:lstStyle/>
-                    <a:p>
-                      <a:pPr algn="ctr"/>
-                      <a:r>
-                        <a:rPr sz="900" b="0">
-                          <a:solidFill>
-                            <a:srgbClr val="333333"/>
-                          </a:solidFill>
-                          <a:latin typeface="Calibri"/>
-                        </a:rPr>
-                        <a:t>4</a:t>
+                        <a:t>1</a:t>
                       </a:r>
                     </a:p>
                   </a:txBody>
@@ -12509,7 +12769,7 @@
                           </a:solidFill>
                           <a:latin typeface="Calibri"/>
                         </a:rPr>
-                        <a:t>Mal Kabul</a:t>
+                        <a:t>Kırtasiye</a:t>
                       </a:r>
                     </a:p>
                   </a:txBody>
@@ -12532,7 +12792,7 @@
                           </a:solidFill>
                           <a:latin typeface="Calibri"/>
                         </a:rPr>
-                        <a:t>6</a:t>
+                        <a:t>24</a:t>
                       </a:r>
                     </a:p>
                   </a:txBody>
@@ -12555,7 +12815,7 @@
                           </a:solidFill>
                           <a:latin typeface="Calibri"/>
                         </a:rPr>
-                        <a:t>5</a:t>
+                        <a:t>23</a:t>
                       </a:r>
                     </a:p>
                   </a:txBody>
@@ -12578,6 +12838,29 @@
                           </a:solidFill>
                           <a:latin typeface="Calibri"/>
                         </a:rPr>
+                        <a:t>2</a:t>
+                      </a:r>
+                    </a:p>
+                  </a:txBody>
+                  <a:tcPr>
+                    <a:solidFill>
+                      <a:srgbClr val="FFFFFF"/>
+                    </a:solidFill>
+                  </a:tcPr>
+                </a:tc>
+                <a:tc>
+                  <a:txBody>
+                    <a:bodyPr/>
+                    <a:lstStyle/>
+                    <a:p>
+                      <a:pPr algn="ctr"/>
+                      <a:r>
+                        <a:rPr sz="900" b="1">
+                          <a:solidFill>
+                            <a:srgbClr val="A6001A"/>
+                          </a:solidFill>
+                          <a:latin typeface="Calibri"/>
+                        </a:rPr>
                         <a:t>1</a:t>
                       </a:r>
                     </a:p>
@@ -12595,13 +12878,13 @@
                     <a:p>
                       <a:pPr algn="ctr"/>
                       <a:r>
-                        <a:rPr sz="900" b="1">
-                          <a:solidFill>
-                            <a:srgbClr val="A6001A"/>
-                          </a:solidFill>
-                          <a:latin typeface="Calibri"/>
-                        </a:rPr>
-                        <a:t>1</a:t>
+                        <a:rPr sz="900" b="0">
+                          <a:solidFill>
+                            <a:srgbClr val="333333"/>
+                          </a:solidFill>
+                          <a:latin typeface="Calibri"/>
+                        </a:rPr>
+                        <a:t>—</a:t>
                       </a:r>
                     </a:p>
                   </a:txBody>
@@ -12624,30 +12907,7 @@
                           </a:solidFill>
                           <a:latin typeface="Calibri"/>
                         </a:rPr>
-                        <a:t>—</a:t>
-                      </a:r>
-                    </a:p>
-                  </a:txBody>
-                  <a:tcPr>
-                    <a:solidFill>
-                      <a:srgbClr val="FFFFFF"/>
-                    </a:solidFill>
-                  </a:tcPr>
-                </a:tc>
-                <a:tc>
-                  <a:txBody>
-                    <a:bodyPr/>
-                    <a:lstStyle/>
-                    <a:p>
-                      <a:pPr algn="ctr"/>
-                      <a:r>
-                        <a:rPr sz="900" b="0">
-                          <a:solidFill>
-                            <a:srgbClr val="333333"/>
-                          </a:solidFill>
-                          <a:latin typeface="Calibri"/>
-                        </a:rPr>
-                        <a:t>1</a:t>
+                        <a:t>22</a:t>
                       </a:r>
                     </a:p>
                   </a:txBody>
@@ -12672,7 +12932,7 @@
                           </a:solidFill>
                           <a:latin typeface="Calibri"/>
                         </a:rPr>
-                        <a:t>Yardımcı Kitap</a:t>
+                        <a:t>Oyuncak</a:t>
                       </a:r>
                     </a:p>
                   </a:txBody>
@@ -12695,7 +12955,7 @@
                           </a:solidFill>
                           <a:latin typeface="Calibri"/>
                         </a:rPr>
-                        <a:t>18</a:t>
+                        <a:t>10</a:t>
                       </a:r>
                     </a:p>
                   </a:txBody>
@@ -12718,7 +12978,7 @@
                           </a:solidFill>
                           <a:latin typeface="Calibri"/>
                         </a:rPr>
-                        <a:t>21</a:t>
+                        <a:t>10</a:t>
                       </a:r>
                     </a:p>
                   </a:txBody>
@@ -12787,7 +13047,7 @@
                           </a:solidFill>
                           <a:latin typeface="Calibri"/>
                         </a:rPr>
-                        <a:t>3</a:t>
+                        <a:t>—</a:t>
                       </a:r>
                     </a:p>
                   </a:txBody>
@@ -12810,7 +13070,7 @@
                           </a:solidFill>
                           <a:latin typeface="Calibri"/>
                         </a:rPr>
-                        <a:t>15</a:t>
+                        <a:t>—</a:t>
                       </a:r>
                     </a:p>
                   </a:txBody>
@@ -12835,7 +13095,7 @@
                           </a:solidFill>
                           <a:latin typeface="Calibri"/>
                         </a:rPr>
-                        <a:t>Oyuncak</a:t>
+                        <a:t>Kıyafet</a:t>
                       </a:r>
                     </a:p>
                   </a:txBody>
@@ -12858,7 +13118,7 @@
                           </a:solidFill>
                           <a:latin typeface="Calibri"/>
                         </a:rPr>
-                        <a:t>10</a:t>
+                        <a:t>0</a:t>
                       </a:r>
                     </a:p>
                   </a:txBody>
@@ -12881,7 +13141,7 @@
                           </a:solidFill>
                           <a:latin typeface="Calibri"/>
                         </a:rPr>
-                        <a:t>10</a:t>
+                        <a:t>0</a:t>
                       </a:r>
                     </a:p>
                   </a:txBody>
@@ -12973,7 +13233,7 @@
                           </a:solidFill>
                           <a:latin typeface="Calibri"/>
                         </a:rPr>
-                        <a:t>—</a:t>
+                        <a:t>4</a:t>
                       </a:r>
                     </a:p>
                   </a:txBody>
@@ -13161,7 +13421,7 @@
                           </a:solidFill>
                           <a:latin typeface="Calibri"/>
                         </a:rPr>
-                        <a:t>Oyun Alanı (teyit bekliyor)</a:t>
+                        <a:t>Muhasebe (teyit bekliyor)</a:t>
                       </a:r>
                     </a:p>
                   </a:txBody>
@@ -13324,7 +13584,7 @@
                           </a:solidFill>
                           <a:latin typeface="Calibri"/>
                         </a:rPr>
-                        <a:t>Muhasebe (teyit bekliyor)</a:t>
+                        <a:t>Oyun Alanı (teyit bekliyor)</a:t>
                       </a:r>
                     </a:p>
                   </a:txBody>
@@ -13931,7 +14191,7 @@
                 </a:solidFill>
                 <a:latin typeface="Calibri"/>
               </a:rPr>
-              <a:t>Bölüm bazında açık 15 kişi, mağaza bazında 14. Aradaki fark, bir mağazada bir bölümün fazlasının başka bölümün açığını maskelemesinden gelir. Gerçek ihtiyaç bölüm bazında okunur. Ayrıca normda tanımlı olduğu hâlde kayıtta hiç personeli olmayan 2 kişilik satır (Oyun Alanı · Muhasebe) açığa DAHİL EDİLMEDİ — teyit bekliyor.</a:t>
+              <a:t>Bölüm bazında açık 15 kişi, mağaza bazında 14. Aradaki fark, bir mağazada bir bölümün fazlasının başka bölümün açığını maskelemesinden gelir. Gerçek ihtiyaç bölüm bazında okunur. Ayrıca normda tanımlı olduğu hâlde kayıtta hiç personeli olmayan 2 kişilik satır (Muhasebe · Oyun Alanı) açığa DAHİL EDİLMEDİ — teyit bekliyor.</a:t>
             </a:r>
           </a:p>
         </p:txBody>
@@ -14067,7 +14327,7 @@
           <a:lstStyle/>
           <a:p>
             <a:r>
-              <a:t>Sezonluk Alım Zamanlaması</a:t>
+              <a:t>Personel Maliyeti ve Ciro Oranı</a:t>
             </a:r>
           </a:p>
         </p:txBody>
@@ -14133,7 +14393,7 @@
             <a:avLst/>
           </a:prstGeom>
           <a:solidFill>
-            <a:srgbClr val="9A9A9A"/>
+            <a:srgbClr val="A6001A"/>
           </a:solidFill>
           <a:ln>
             <a:noFill/>
@@ -14164,7 +14424,7 @@
       </p:sp>
       <p:pic>
         <p:nvPicPr>
-          <p:cNvPr id="5" name="Picture 4" descr="workflow.png"/>
+          <p:cNvPr id="5" name="Picture 4" descr="layers.png"/>
           <p:cNvPicPr>
             <a:picLocks noChangeAspect="1"/>
           </p:cNvPicPr>
@@ -14220,7 +14480,7 @@
                 </a:solidFill>
                 <a:latin typeface="Calibri"/>
               </a:rPr>
-              <a:t>ORTALAMA ALIM GÜNÜ</a:t>
+              <a:t>PERSONEL MALİYETİ / CİRO</a:t>
             </a:r>
           </a:p>
         </p:txBody>
@@ -14255,11 +14515,11 @@
             <a:r>
               <a:rPr sz="2200" b="1">
                 <a:solidFill>
-                  <a:srgbClr val="9A9A9A"/>
+                  <a:srgbClr val="A6001A"/>
                 </a:solidFill>
                 <a:latin typeface="Calibri"/>
               </a:rPr>
-              <a:t>2,5 gün geç</a:t>
+              <a:t>%12,85 → %12,15</a:t>
             </a:r>
           </a:p>
         </p:txBody>
@@ -14298,7 +14558,7 @@
                 </a:solidFill>
                 <a:latin typeface="Calibri"/>
               </a:rPr>
-              <a:t>takvim ölçüsü · 225. → 228. gün</a:t>
+              <a:t>0,70 puan azaldı</a:t>
             </a:r>
           </a:p>
         </p:txBody>
@@ -14395,7 +14655,7 @@
       </p:sp>
       <p:pic>
         <p:nvPicPr>
-          <p:cNvPr id="11" name="Picture 10" descr="users.png"/>
+          <p:cNvPr id="11" name="Picture 10" descr="package.png"/>
           <p:cNvPicPr>
             <a:picLocks noChangeAspect="1"/>
           </p:cNvPicPr>
@@ -14451,7 +14711,7 @@
                 </a:solidFill>
                 <a:latin typeface="Calibri"/>
               </a:rPr>
-              <a:t>TEMMUZ VE ÖNCESİ ALIM</a:t>
+              <a:t>KİŞİ-AY BAŞINA CİRO</a:t>
             </a:r>
           </a:p>
         </p:txBody>
@@ -14490,7 +14750,7 @@
                 </a:solidFill>
                 <a:latin typeface="Calibri"/>
               </a:rPr>
-              <a:t>6 → 2</a:t>
+              <a:t>+%46,2</a:t>
             </a:r>
           </a:p>
         </p:txBody>
@@ -14529,7 +14789,7 @@
                 </a:solidFill>
                 <a:latin typeface="Calibri"/>
               </a:rPr>
-              <a:t>gerçek erken alım azaldı</a:t>
+              <a:t>310 → 454 bin TL</a:t>
             </a:r>
           </a:p>
         </p:txBody>
@@ -14595,7 +14855,7 @@
             <a:avLst/>
           </a:prstGeom>
           <a:solidFill>
-            <a:srgbClr val="A6001A"/>
+            <a:srgbClr val="9A9A9A"/>
           </a:solidFill>
           <a:ln>
             <a:noFill/>
@@ -14626,7 +14886,7 @@
       </p:sp>
       <p:pic>
         <p:nvPicPr>
-          <p:cNvPr id="17" name="Picture 16" descr="package.png"/>
+          <p:cNvPr id="17" name="Picture 16" descr="users.png"/>
           <p:cNvPicPr>
             <a:picLocks noChangeAspect="1"/>
           </p:cNvPicPr>
@@ -14682,7 +14942,7 @@
                 </a:solidFill>
                 <a:latin typeface="Calibri"/>
               </a:rPr>
-              <a:t>1–14 AĞUSTOS İŞ HACMİ</a:t>
+              <a:t>KİŞİ-AY BAŞINA MALİYET</a:t>
             </a:r>
           </a:p>
         </p:txBody>
@@ -14717,11 +14977,11 @@
             <a:r>
               <a:rPr sz="3000" b="1">
                 <a:solidFill>
-                  <a:srgbClr val="A6001A"/>
+                  <a:srgbClr val="9A9A9A"/>
                 </a:solidFill>
                 <a:latin typeface="Calibri"/>
               </a:rPr>
-              <a:t>+%25,1</a:t>
+              <a:t>+%38,3</a:t>
             </a:r>
           </a:p>
         </p:txBody>
@@ -14760,7 +15020,7 @@
                 </a:solidFill>
                 <a:latin typeface="Calibri"/>
               </a:rPr>
-              <a:t>137.483 → 171.957 adet</a:t>
+              <a:t>40 → 55 bin TL (ücret artışı)</a:t>
             </a:r>
           </a:p>
         </p:txBody>
@@ -14774,8 +15034,8 @@
           <p:nvPr/>
         </p:nvGraphicFramePr>
         <p:xfrm>
-          <a:off x="548640" y="3246120"/>
-          <a:ext cx="11018520" cy="2011680"/>
+          <a:off x="548640" y="3429000"/>
+          <a:ext cx="7223760" cy="1316736"/>
         </p:xfrm>
         <a:graphic>
           <a:graphicData uri="http://schemas.openxmlformats.org/drawingml/2006/table">
@@ -14784,12 +15044,12 @@
                 <a:tableStyleId>{5C22544A-7EE6-4342-B048-85BDC9FD1C3A}</a:tableStyleId>
               </a:tblPr>
               <a:tblGrid>
-                <a:gridCol w="3291840"/>
-                <a:gridCol w="1737360"/>
-                <a:gridCol w="1737360"/>
-                <a:gridCol w="4251960"/>
+                <a:gridCol w="2834640"/>
+                <a:gridCol w="1463040"/>
+                <a:gridCol w="1463040"/>
+                <a:gridCol w="1463040"/>
               </a:tblGrid>
-              <a:tr h="182880">
+              <a:tr h="219456">
                 <a:tc>
                   <a:txBody>
                     <a:bodyPr/>
@@ -14797,7 +15057,7 @@
                     <a:p>
                       <a:pPr algn="l"/>
                       <a:r>
-                        <a:rPr sz="800" b="1">
+                        <a:rPr sz="850" b="1">
                           <a:solidFill>
                             <a:srgbClr val="FFFFFF"/>
                           </a:solidFill>
@@ -14820,7 +15080,7 @@
                     <a:p>
                       <a:pPr algn="ctr"/>
                       <a:r>
-                        <a:rPr sz="800" b="1">
+                        <a:rPr sz="850" b="1">
                           <a:solidFill>
                             <a:srgbClr val="FFFFFF"/>
                           </a:solidFill>
@@ -14843,7 +15103,7 @@
                     <a:p>
                       <a:pPr algn="ctr"/>
                       <a:r>
-                        <a:rPr sz="800" b="1">
+                        <a:rPr sz="850" b="1">
                           <a:solidFill>
                             <a:srgbClr val="FFFFFF"/>
                           </a:solidFill>
@@ -14864,26 +15124,120 @@
                     <a:bodyPr/>
                     <a:lstStyle/>
                     <a:p>
+                      <a:pPr algn="ctr"/>
+                      <a:r>
+                        <a:rPr sz="850" b="1">
+                          <a:solidFill>
+                            <a:srgbClr val="FFFFFF"/>
+                          </a:solidFill>
+                          <a:latin typeface="Calibri"/>
+                        </a:rPr>
+                        <a:t>Değişim</a:t>
+                      </a:r>
+                    </a:p>
+                  </a:txBody>
+                  <a:tcPr>
+                    <a:solidFill>
+                      <a:srgbClr val="E30622"/>
+                    </a:solidFill>
+                  </a:tcPr>
+                </a:tc>
+              </a:tr>
+              <a:tr h="219456">
+                <a:tc>
+                  <a:txBody>
+                    <a:bodyPr/>
+                    <a:lstStyle/>
+                    <a:p>
                       <a:pPr algn="l"/>
                       <a:r>
-                        <a:rPr sz="800" b="1">
-                          <a:solidFill>
-                            <a:srgbClr val="FFFFFF"/>
-                          </a:solidFill>
-                          <a:latin typeface="Calibri"/>
-                        </a:rPr>
-                        <a:t>Yorum</a:t>
-                      </a:r>
-                    </a:p>
-                  </a:txBody>
-                  <a:tcPr>
-                    <a:solidFill>
-                      <a:srgbClr val="E30622"/>
+                        <a:rPr sz="950" b="0">
+                          <a:solidFill>
+                            <a:srgbClr val="333333"/>
+                          </a:solidFill>
+                          <a:latin typeface="Calibri"/>
+                        </a:rPr>
+                        <a:t>Kişi-ay (bordro)</a:t>
+                      </a:r>
+                    </a:p>
+                  </a:txBody>
+                  <a:tcPr>
+                    <a:solidFill>
+                      <a:srgbClr val="FFFFFF"/>
+                    </a:solidFill>
+                  </a:tcPr>
+                </a:tc>
+                <a:tc>
+                  <a:txBody>
+                    <a:bodyPr/>
+                    <a:lstStyle/>
+                    <a:p>
+                      <a:pPr algn="ctr"/>
+                      <a:r>
+                        <a:rPr sz="950" b="0">
+                          <a:solidFill>
+                            <a:srgbClr val="333333"/>
+                          </a:solidFill>
+                          <a:latin typeface="Calibri"/>
+                        </a:rPr>
+                        <a:t>781</a:t>
+                      </a:r>
+                    </a:p>
+                  </a:txBody>
+                  <a:tcPr>
+                    <a:solidFill>
+                      <a:srgbClr val="FFFFFF"/>
+                    </a:solidFill>
+                  </a:tcPr>
+                </a:tc>
+                <a:tc>
+                  <a:txBody>
+                    <a:bodyPr/>
+                    <a:lstStyle/>
+                    <a:p>
+                      <a:pPr algn="ctr"/>
+                      <a:r>
+                        <a:rPr sz="950" b="0">
+                          <a:solidFill>
+                            <a:srgbClr val="333333"/>
+                          </a:solidFill>
+                          <a:latin typeface="Calibri"/>
+                        </a:rPr>
+                        <a:t>856</a:t>
+                      </a:r>
+                    </a:p>
+                  </a:txBody>
+                  <a:tcPr>
+                    <a:solidFill>
+                      <a:srgbClr val="FFFFFF"/>
+                    </a:solidFill>
+                  </a:tcPr>
+                </a:tc>
+                <a:tc>
+                  <a:txBody>
+                    <a:bodyPr/>
+                    <a:lstStyle/>
+                    <a:p>
+                      <a:pPr algn="ctr"/>
+                      <a:r>
+                        <a:rPr sz="950" b="1">
+                          <a:solidFill>
+                            <a:srgbClr val="A6001A"/>
+                          </a:solidFill>
+                          <a:latin typeface="Calibri"/>
+                        </a:rPr>
+                        <a:t>+%9,6</a:t>
+                      </a:r>
+                    </a:p>
+                  </a:txBody>
+                  <a:tcPr>
+                    <a:solidFill>
+                      <a:srgbClr val="FFFFFF"/>
                     </a:solidFill>
                   </a:tcPr>
                 </a:tc>
               </a:tr>
-              <a:tr h="182880">
+              <a:tr h="219456">
                 <a:tc>
                   <a:txBody>
                     <a:bodyPr/>
@@ -14891,13 +15245,107 @@
                     <a:p>
                       <a:pPr algn="l"/>
                       <a:r>
-                        <a:rPr sz="900" b="0">
+                        <a:rPr sz="950" b="0">
                           <a:solidFill>
                             <a:srgbClr val="333333"/>
                           </a:solidFill>
                           <a:latin typeface="Calibri"/>
                         </a:rPr>
-                        <a:t>Ortalama alım günü (takvim)</a:t>
+                        <a:t>Brüt ücret</a:t>
+                      </a:r>
+                    </a:p>
+                  </a:txBody>
+                  <a:tcPr>
+                    <a:solidFill>
+                      <a:srgbClr val="FAFAFA"/>
+                    </a:solidFill>
+                  </a:tcPr>
+                </a:tc>
+                <a:tc>
+                  <a:txBody>
+                    <a:bodyPr/>
+                    <a:lstStyle/>
+                    <a:p>
+                      <a:pPr algn="ctr"/>
+                      <a:r>
+                        <a:rPr sz="950" b="0">
+                          <a:solidFill>
+                            <a:srgbClr val="333333"/>
+                          </a:solidFill>
+                          <a:latin typeface="Calibri"/>
+                        </a:rPr>
+                        <a:t>25,3 M TL</a:t>
+                      </a:r>
+                    </a:p>
+                  </a:txBody>
+                  <a:tcPr>
+                    <a:solidFill>
+                      <a:srgbClr val="FAFAFA"/>
+                    </a:solidFill>
+                  </a:tcPr>
+                </a:tc>
+                <a:tc>
+                  <a:txBody>
+                    <a:bodyPr/>
+                    <a:lstStyle/>
+                    <a:p>
+                      <a:pPr algn="ctr"/>
+                      <a:r>
+                        <a:rPr sz="950" b="0">
+                          <a:solidFill>
+                            <a:srgbClr val="333333"/>
+                          </a:solidFill>
+                          <a:latin typeface="Calibri"/>
+                        </a:rPr>
+                        <a:t>38,1 M TL</a:t>
+                      </a:r>
+                    </a:p>
+                  </a:txBody>
+                  <a:tcPr>
+                    <a:solidFill>
+                      <a:srgbClr val="FAFAFA"/>
+                    </a:solidFill>
+                  </a:tcPr>
+                </a:tc>
+                <a:tc>
+                  <a:txBody>
+                    <a:bodyPr/>
+                    <a:lstStyle/>
+                    <a:p>
+                      <a:pPr algn="ctr"/>
+                      <a:r>
+                        <a:rPr sz="950" b="1">
+                          <a:solidFill>
+                            <a:srgbClr val="A6001A"/>
+                          </a:solidFill>
+                          <a:latin typeface="Calibri"/>
+                        </a:rPr>
+                        <a:t>+%50,5</a:t>
+                      </a:r>
+                    </a:p>
+                  </a:txBody>
+                  <a:tcPr>
+                    <a:solidFill>
+                      <a:srgbClr val="FAFAFA"/>
+                    </a:solidFill>
+                  </a:tcPr>
+                </a:tc>
+              </a:tr>
+              <a:tr h="219456">
+                <a:tc>
+                  <a:txBody>
+                    <a:bodyPr/>
+                    <a:lstStyle/>
+                    <a:p>
+                      <a:pPr algn="l"/>
+                      <a:r>
+                        <a:rPr sz="950" b="0">
+                          <a:solidFill>
+                            <a:srgbClr val="333333"/>
+                          </a:solidFill>
+                          <a:latin typeface="Calibri"/>
+                        </a:rPr>
+                        <a:t>İşveren SGK + işsizlik payı</a:t>
                       </a:r>
                     </a:p>
                   </a:txBody>
@@ -14914,13 +15362,13 @@
                     <a:p>
                       <a:pPr algn="ctr"/>
                       <a:r>
-                        <a:rPr sz="900" b="0">
+                        <a:rPr sz="950" b="0">
                           <a:solidFill>
                             <a:srgbClr val="333333"/>
                           </a:solidFill>
                           <a:latin typeface="Calibri"/>
                         </a:rPr>
-                        <a:t>225. gün</a:t>
+                        <a:t>5,8 M TL</a:t>
                       </a:r>
                     </a:p>
                   </a:txBody>
@@ -14937,13 +15385,13 @@
                     <a:p>
                       <a:pPr algn="ctr"/>
                       <a:r>
-                        <a:rPr sz="900" b="1">
+                        <a:rPr sz="950" b="0">
                           <a:solidFill>
                             <a:srgbClr val="333333"/>
                           </a:solidFill>
                           <a:latin typeface="Calibri"/>
                         </a:rPr>
-                        <a:t>228. gün</a:t>
+                        <a:t>9,1 M TL</a:t>
                       </a:r>
                     </a:p>
                   </a:txBody>
@@ -14958,15 +15406,134 @@
                     <a:bodyPr/>
                     <a:lstStyle/>
                     <a:p>
+                      <a:pPr algn="ctr"/>
+                      <a:r>
+                        <a:rPr sz="950" b="1">
+                          <a:solidFill>
+                            <a:srgbClr val="A6001A"/>
+                          </a:solidFill>
+                          <a:latin typeface="Calibri"/>
+                        </a:rPr>
+                        <a:t>+%56,3</a:t>
+                      </a:r>
+                    </a:p>
+                  </a:txBody>
+                  <a:tcPr>
+                    <a:solidFill>
+                      <a:srgbClr val="FFFFFF"/>
+                    </a:solidFill>
+                  </a:tcPr>
+                </a:tc>
+              </a:tr>
+              <a:tr h="219456">
+                <a:tc>
+                  <a:txBody>
+                    <a:bodyPr/>
+                    <a:lstStyle/>
+                    <a:p>
                       <a:pPr algn="l"/>
                       <a:r>
-                        <a:rPr sz="900" b="0">
+                        <a:rPr sz="950" b="1">
+                          <a:solidFill>
+                            <a:srgbClr val="333333"/>
+                          </a:solidFill>
+                          <a:latin typeface="Calibri"/>
+                        </a:rPr>
+                        <a:t>PERSONEL MALİYETİ (brüt işveren)</a:t>
+                      </a:r>
+                    </a:p>
+                  </a:txBody>
+                  <a:tcPr>
+                    <a:solidFill>
+                      <a:srgbClr val="F2F2F2"/>
+                    </a:solidFill>
+                  </a:tcPr>
+                </a:tc>
+                <a:tc>
+                  <a:txBody>
+                    <a:bodyPr/>
+                    <a:lstStyle/>
+                    <a:p>
+                      <a:pPr algn="ctr"/>
+                      <a:r>
+                        <a:rPr sz="950" b="1">
+                          <a:solidFill>
+                            <a:srgbClr val="333333"/>
+                          </a:solidFill>
+                          <a:latin typeface="Calibri"/>
+                        </a:rPr>
+                        <a:t>31,2 M TL</a:t>
+                      </a:r>
+                    </a:p>
+                  </a:txBody>
+                  <a:tcPr>
+                    <a:solidFill>
+                      <a:srgbClr val="F2F2F2"/>
+                    </a:solidFill>
+                  </a:tcPr>
+                </a:tc>
+                <a:tc>
+                  <a:txBody>
+                    <a:bodyPr/>
+                    <a:lstStyle/>
+                    <a:p>
+                      <a:pPr algn="ctr"/>
+                      <a:r>
+                        <a:rPr sz="950" b="1">
+                          <a:solidFill>
+                            <a:srgbClr val="333333"/>
+                          </a:solidFill>
+                          <a:latin typeface="Calibri"/>
+                        </a:rPr>
+                        <a:t>47,2 M TL</a:t>
+                      </a:r>
+                    </a:p>
+                  </a:txBody>
+                  <a:tcPr>
+                    <a:solidFill>
+                      <a:srgbClr val="F2F2F2"/>
+                    </a:solidFill>
+                  </a:tcPr>
+                </a:tc>
+                <a:tc>
+                  <a:txBody>
+                    <a:bodyPr/>
+                    <a:lstStyle/>
+                    <a:p>
+                      <a:pPr algn="ctr"/>
+                      <a:r>
+                        <a:rPr sz="950" b="1">
                           <a:solidFill>
                             <a:srgbClr val="A6001A"/>
                           </a:solidFill>
                           <a:latin typeface="Calibri"/>
                         </a:rPr>
-                        <a:t>2026 alımı ortalama 2,5 gün DAHA GEÇ</a:t>
+                        <a:t>+%51,5</a:t>
+                      </a:r>
+                    </a:p>
+                  </a:txBody>
+                  <a:tcPr>
+                    <a:solidFill>
+                      <a:srgbClr val="F2F2F2"/>
+                    </a:solidFill>
+                  </a:tcPr>
+                </a:tc>
+              </a:tr>
+              <a:tr h="219456">
+                <a:tc>
+                  <a:txBody>
+                    <a:bodyPr/>
+                    <a:lstStyle/>
+                    <a:p>
+                      <a:pPr algn="l"/>
+                      <a:r>
+                        <a:rPr sz="950" b="0">
+                          <a:solidFill>
+                            <a:srgbClr val="333333"/>
+                          </a:solidFill>
+                          <a:latin typeface="Calibri"/>
+                        </a:rPr>
+                        <a:t>Ciro (KDV hariç)</a:t>
                       </a:r>
                     </a:p>
                   </a:txBody>
@@ -14976,849 +15543,72 @@
                     </a:solidFill>
                   </a:tcPr>
                 </a:tc>
-              </a:tr>
-              <a:tr h="182880">
-                <a:tc>
-                  <a:txBody>
-                    <a:bodyPr/>
-                    <a:lstStyle/>
-                    <a:p>
-                      <a:pPr algn="l"/>
-                      <a:r>
-                        <a:rPr sz="900" b="0">
+                <a:tc>
+                  <a:txBody>
+                    <a:bodyPr/>
+                    <a:lstStyle/>
+                    <a:p>
+                      <a:pPr algn="ctr"/>
+                      <a:r>
+                        <a:rPr sz="950" b="0">
                           <a:solidFill>
                             <a:srgbClr val="333333"/>
                           </a:solidFill>
                           <a:latin typeface="Calibri"/>
                         </a:rPr>
-                        <a:t>Temmuz ve öncesi alınan</a:t>
-                      </a:r>
-                    </a:p>
-                  </a:txBody>
-                  <a:tcPr>
-                    <a:solidFill>
-                      <a:srgbClr val="FAFAFA"/>
-                    </a:solidFill>
-                  </a:tcPr>
-                </a:tc>
-                <a:tc>
-                  <a:txBody>
-                    <a:bodyPr/>
-                    <a:lstStyle/>
-                    <a:p>
-                      <a:pPr algn="ctr"/>
-                      <a:r>
-                        <a:rPr sz="900" b="0">
+                        <a:t>242,5 M TL</a:t>
+                      </a:r>
+                    </a:p>
+                  </a:txBody>
+                  <a:tcPr>
+                    <a:solidFill>
+                      <a:srgbClr val="FFFFFF"/>
+                    </a:solidFill>
+                  </a:tcPr>
+                </a:tc>
+                <a:tc>
+                  <a:txBody>
+                    <a:bodyPr/>
+                    <a:lstStyle/>
+                    <a:p>
+                      <a:pPr algn="ctr"/>
+                      <a:r>
+                        <a:rPr sz="950" b="0">
                           <a:solidFill>
                             <a:srgbClr val="333333"/>
                           </a:solidFill>
                           <a:latin typeface="Calibri"/>
                         </a:rPr>
-                        <a:t>6 kişi</a:t>
-                      </a:r>
-                    </a:p>
-                  </a:txBody>
-                  <a:tcPr>
-                    <a:solidFill>
-                      <a:srgbClr val="FAFAFA"/>
-                    </a:solidFill>
-                  </a:tcPr>
-                </a:tc>
-                <a:tc>
-                  <a:txBody>
-                    <a:bodyPr/>
-                    <a:lstStyle/>
-                    <a:p>
-                      <a:pPr algn="ctr"/>
-                      <a:r>
-                        <a:rPr sz="900" b="1">
-                          <a:solidFill>
-                            <a:srgbClr val="333333"/>
-                          </a:solidFill>
-                          <a:latin typeface="Calibri"/>
-                        </a:rPr>
-                        <a:t>2 kişi</a:t>
-                      </a:r>
-                    </a:p>
-                  </a:txBody>
-                  <a:tcPr>
-                    <a:solidFill>
-                      <a:srgbClr val="FAFAFA"/>
-                    </a:solidFill>
-                  </a:tcPr>
-                </a:tc>
-                <a:tc>
-                  <a:txBody>
-                    <a:bodyPr/>
-                    <a:lstStyle/>
-                    <a:p>
-                      <a:pPr algn="l"/>
-                      <a:r>
-                        <a:rPr sz="900" b="0">
+                        <a:t>388,7 M TL</a:t>
+                      </a:r>
+                    </a:p>
+                  </a:txBody>
+                  <a:tcPr>
+                    <a:solidFill>
+                      <a:srgbClr val="FFFFFF"/>
+                    </a:solidFill>
+                  </a:tcPr>
+                </a:tc>
+                <a:tc>
+                  <a:txBody>
+                    <a:bodyPr/>
+                    <a:lstStyle/>
+                    <a:p>
+                      <a:pPr algn="ctr"/>
+                      <a:r>
+                        <a:rPr sz="950" b="1">
                           <a:solidFill>
                             <a:srgbClr val="A6001A"/>
                           </a:solidFill>
                           <a:latin typeface="Calibri"/>
                         </a:rPr>
-                        <a:t>erken alım azaldı</a:t>
-                      </a:r>
-                    </a:p>
-                  </a:txBody>
-                  <a:tcPr>
-                    <a:solidFill>
-                      <a:srgbClr val="FAFAFA"/>
-                    </a:solidFill>
-                  </a:tcPr>
-                </a:tc>
-              </a:tr>
-              <a:tr h="182880">
-                <a:tc>
-                  <a:txBody>
-                    <a:bodyPr/>
-                    <a:lstStyle/>
-                    <a:p>
-                      <a:pPr algn="l"/>
-                      <a:r>
-                        <a:rPr sz="900" b="0">
-                          <a:solidFill>
-                            <a:srgbClr val="333333"/>
-                          </a:solidFill>
-                          <a:latin typeface="Calibri"/>
-                        </a:rPr>
-                        <a:t>Açılıştan 45+ gün önce alınan</a:t>
+                        <a:t>+%60,3</a:t>
                       </a:r>
                     </a:p>
                   </a:txBody>
                   <a:tcPr>
                     <a:solidFill>
                       <a:srgbClr val="FFFFFF"/>
-                    </a:solidFill>
-                  </a:tcPr>
-                </a:tc>
-                <a:tc>
-                  <a:txBody>
-                    <a:bodyPr/>
-                    <a:lstStyle/>
-                    <a:p>
-                      <a:pPr algn="ctr"/>
-                      <a:r>
-                        <a:rPr sz="900" b="0">
-                          <a:solidFill>
-                            <a:srgbClr val="333333"/>
-                          </a:solidFill>
-                          <a:latin typeface="Calibri"/>
-                        </a:rPr>
-                        <a:t>4 kişi</a:t>
-                      </a:r>
-                    </a:p>
-                  </a:txBody>
-                  <a:tcPr>
-                    <a:solidFill>
-                      <a:srgbClr val="FFFFFF"/>
-                    </a:solidFill>
-                  </a:tcPr>
-                </a:tc>
-                <a:tc>
-                  <a:txBody>
-                    <a:bodyPr/>
-                    <a:lstStyle/>
-                    <a:p>
-                      <a:pPr algn="ctr"/>
-                      <a:r>
-                        <a:rPr sz="900" b="1">
-                          <a:solidFill>
-                            <a:srgbClr val="333333"/>
-                          </a:solidFill>
-                          <a:latin typeface="Calibri"/>
-                        </a:rPr>
-                        <a:t>2 kişi</a:t>
-                      </a:r>
-                    </a:p>
-                  </a:txBody>
-                  <a:tcPr>
-                    <a:solidFill>
-                      <a:srgbClr val="FFFFFF"/>
-                    </a:solidFill>
-                  </a:tcPr>
-                </a:tc>
-                <a:tc>
-                  <a:txBody>
-                    <a:bodyPr/>
-                    <a:lstStyle/>
-                    <a:p>
-                      <a:pPr algn="l"/>
-                      <a:r>
-                        <a:rPr sz="900" b="0">
-                          <a:solidFill>
-                            <a:srgbClr val="A6001A"/>
-                          </a:solidFill>
-                          <a:latin typeface="Calibri"/>
-                        </a:rPr>
-                        <a:t>çok erken alım azaldı</a:t>
-                      </a:r>
-                    </a:p>
-                  </a:txBody>
-                  <a:tcPr>
-                    <a:solidFill>
-                      <a:srgbClr val="FFFFFF"/>
-                    </a:solidFill>
-                  </a:tcPr>
-                </a:tc>
-              </a:tr>
-              <a:tr h="182880">
-                <a:tc>
-                  <a:txBody>
-                    <a:bodyPr/>
-                    <a:lstStyle/>
-                    <a:p>
-                      <a:pPr algn="l"/>
-                      <a:r>
-                        <a:rPr sz="900" b="0">
-                          <a:solidFill>
-                            <a:srgbClr val="333333"/>
-                          </a:solidFill>
-                          <a:latin typeface="Calibri"/>
-                        </a:rPr>
-                        <a:t>1–14 Ağustos alınan</a:t>
-                      </a:r>
-                    </a:p>
-                  </a:txBody>
-                  <a:tcPr>
-                    <a:solidFill>
-                      <a:srgbClr val="FAFAFA"/>
-                    </a:solidFill>
-                  </a:tcPr>
-                </a:tc>
-                <a:tc>
-                  <a:txBody>
-                    <a:bodyPr/>
-                    <a:lstStyle/>
-                    <a:p>
-                      <a:pPr algn="ctr"/>
-                      <a:r>
-                        <a:rPr sz="900" b="0">
-                          <a:solidFill>
-                            <a:srgbClr val="333333"/>
-                          </a:solidFill>
-                          <a:latin typeface="Calibri"/>
-                        </a:rPr>
-                        <a:t>12 kişi</a:t>
-                      </a:r>
-                    </a:p>
-                  </a:txBody>
-                  <a:tcPr>
-                    <a:solidFill>
-                      <a:srgbClr val="FAFAFA"/>
-                    </a:solidFill>
-                  </a:tcPr>
-                </a:tc>
-                <a:tc>
-                  <a:txBody>
-                    <a:bodyPr/>
-                    <a:lstStyle/>
-                    <a:p>
-                      <a:pPr algn="ctr"/>
-                      <a:r>
-                        <a:rPr sz="900" b="1">
-                          <a:solidFill>
-                            <a:srgbClr val="333333"/>
-                          </a:solidFill>
-                          <a:latin typeface="Calibri"/>
-                        </a:rPr>
-                        <a:t>30 kişi</a:t>
-                      </a:r>
-                    </a:p>
-                  </a:txBody>
-                  <a:tcPr>
-                    <a:solidFill>
-                      <a:srgbClr val="FAFAFA"/>
-                    </a:solidFill>
-                  </a:tcPr>
-                </a:tc>
-                <a:tc>
-                  <a:txBody>
-                    <a:bodyPr/>
-                    <a:lstStyle/>
-                    <a:p>
-                      <a:pPr algn="l"/>
-                      <a:r>
-                        <a:rPr sz="900" b="0">
-                          <a:solidFill>
-                            <a:srgbClr val="A6001A"/>
-                          </a:solidFill>
-                          <a:latin typeface="Calibri"/>
-                        </a:rPr>
-                        <a:t>artış bu iki haftada</a:t>
-                      </a:r>
-                    </a:p>
-                  </a:txBody>
-                  <a:tcPr>
-                    <a:solidFill>
-                      <a:srgbClr val="FAFAFA"/>
-                    </a:solidFill>
-                  </a:tcPr>
-                </a:tc>
-              </a:tr>
-              <a:tr h="182880">
-                <a:tc>
-                  <a:txBody>
-                    <a:bodyPr/>
-                    <a:lstStyle/>
-                    <a:p>
-                      <a:pPr algn="l"/>
-                      <a:r>
-                        <a:rPr sz="900" b="0">
-                          <a:solidFill>
-                            <a:srgbClr val="333333"/>
-                          </a:solidFill>
-                          <a:latin typeface="Calibri"/>
-                        </a:rPr>
-                        <a:t>1–14 Ağustos ürün adedi</a:t>
-                      </a:r>
-                    </a:p>
-                  </a:txBody>
-                  <a:tcPr>
-                    <a:solidFill>
-                      <a:srgbClr val="FFFFFF"/>
-                    </a:solidFill>
-                  </a:tcPr>
-                </a:tc>
-                <a:tc>
-                  <a:txBody>
-                    <a:bodyPr/>
-                    <a:lstStyle/>
-                    <a:p>
-                      <a:pPr algn="ctr"/>
-                      <a:r>
-                        <a:rPr sz="900" b="0">
-                          <a:solidFill>
-                            <a:srgbClr val="333333"/>
-                          </a:solidFill>
-                          <a:latin typeface="Calibri"/>
-                        </a:rPr>
-                        <a:t>137.483</a:t>
-                      </a:r>
-                    </a:p>
-                  </a:txBody>
-                  <a:tcPr>
-                    <a:solidFill>
-                      <a:srgbClr val="FFFFFF"/>
-                    </a:solidFill>
-                  </a:tcPr>
-                </a:tc>
-                <a:tc>
-                  <a:txBody>
-                    <a:bodyPr/>
-                    <a:lstStyle/>
-                    <a:p>
-                      <a:pPr algn="ctr"/>
-                      <a:r>
-                        <a:rPr sz="900" b="1">
-                          <a:solidFill>
-                            <a:srgbClr val="333333"/>
-                          </a:solidFill>
-                          <a:latin typeface="Calibri"/>
-                        </a:rPr>
-                        <a:t>171.957</a:t>
-                      </a:r>
-                    </a:p>
-                  </a:txBody>
-                  <a:tcPr>
-                    <a:solidFill>
-                      <a:srgbClr val="FFFFFF"/>
-                    </a:solidFill>
-                  </a:tcPr>
-                </a:tc>
-                <a:tc>
-                  <a:txBody>
-                    <a:bodyPr/>
-                    <a:lstStyle/>
-                    <a:p>
-                      <a:pPr algn="l"/>
-                      <a:r>
-                        <a:rPr sz="900" b="0">
-                          <a:solidFill>
-                            <a:srgbClr val="A6001A"/>
-                          </a:solidFill>
-                          <a:latin typeface="Calibri"/>
-                        </a:rPr>
-                        <a:t>iş +%25,1 büyüdü — alım işi takip etti</a:t>
-                      </a:r>
-                    </a:p>
-                  </a:txBody>
-                  <a:tcPr>
-                    <a:solidFill>
-                      <a:srgbClr val="FFFFFF"/>
-                    </a:solidFill>
-                  </a:tcPr>
-                </a:tc>
-              </a:tr>
-              <a:tr h="182880">
-                <a:tc>
-                  <a:txBody>
-                    <a:bodyPr/>
-                    <a:lstStyle/>
-                    <a:p>
-                      <a:pPr algn="l"/>
-                      <a:r>
-                        <a:rPr sz="900" b="0">
-                          <a:solidFill>
-                            <a:srgbClr val="333333"/>
-                          </a:solidFill>
-                          <a:latin typeface="Calibri"/>
-                        </a:rPr>
-                        <a:t>15–31 Ağustos ürün adedi</a:t>
-                      </a:r>
-                    </a:p>
-                  </a:txBody>
-                  <a:tcPr>
-                    <a:solidFill>
-                      <a:srgbClr val="FAFAFA"/>
-                    </a:solidFill>
-                  </a:tcPr>
-                </a:tc>
-                <a:tc>
-                  <a:txBody>
-                    <a:bodyPr/>
-                    <a:lstStyle/>
-                    <a:p>
-                      <a:pPr algn="ctr"/>
-                      <a:r>
-                        <a:rPr sz="900" b="0">
-                          <a:solidFill>
-                            <a:srgbClr val="333333"/>
-                          </a:solidFill>
-                          <a:latin typeface="Calibri"/>
-                        </a:rPr>
-                        <a:t>320.776</a:t>
-                      </a:r>
-                    </a:p>
-                  </a:txBody>
-                  <a:tcPr>
-                    <a:solidFill>
-                      <a:srgbClr val="FAFAFA"/>
-                    </a:solidFill>
-                  </a:tcPr>
-                </a:tc>
-                <a:tc>
-                  <a:txBody>
-                    <a:bodyPr/>
-                    <a:lstStyle/>
-                    <a:p>
-                      <a:pPr algn="ctr"/>
-                      <a:r>
-                        <a:rPr sz="900" b="1">
-                          <a:solidFill>
-                            <a:srgbClr val="333333"/>
-                          </a:solidFill>
-                          <a:latin typeface="Calibri"/>
-                        </a:rPr>
-                        <a:t>311.542</a:t>
-                      </a:r>
-                    </a:p>
-                  </a:txBody>
-                  <a:tcPr>
-                    <a:solidFill>
-                      <a:srgbClr val="FAFAFA"/>
-                    </a:solidFill>
-                  </a:tcPr>
-                </a:tc>
-                <a:tc>
-                  <a:txBody>
-                    <a:bodyPr/>
-                    <a:lstStyle/>
-                    <a:p>
-                      <a:pPr algn="l"/>
-                      <a:r>
-                        <a:rPr sz="900" b="0">
-                          <a:solidFill>
-                            <a:srgbClr val="A6001A"/>
-                          </a:solidFill>
-                          <a:latin typeface="Calibri"/>
-                        </a:rPr>
-                        <a:t>−%2,9 — dalga Eylül'e kaydı</a:t>
-                      </a:r>
-                    </a:p>
-                  </a:txBody>
-                  <a:tcPr>
-                    <a:solidFill>
-                      <a:srgbClr val="FAFAFA"/>
-                    </a:solidFill>
-                  </a:tcPr>
-                </a:tc>
-              </a:tr>
-              <a:tr h="182880">
-                <a:tc>
-                  <a:txBody>
-                    <a:bodyPr/>
-                    <a:lstStyle/>
-                    <a:p>
-                      <a:pPr algn="l"/>
-                      <a:r>
-                        <a:rPr sz="900" b="0">
-                          <a:solidFill>
-                            <a:srgbClr val="333333"/>
-                          </a:solidFill>
-                          <a:latin typeface="Calibri"/>
-                        </a:rPr>
-                        <a:t>31.08'de çalışan sezonluk</a:t>
-                      </a:r>
-                    </a:p>
-                  </a:txBody>
-                  <a:tcPr>
-                    <a:solidFill>
-                      <a:srgbClr val="FFFFFF"/>
-                    </a:solidFill>
-                  </a:tcPr>
-                </a:tc>
-                <a:tc>
-                  <a:txBody>
-                    <a:bodyPr/>
-                    <a:lstStyle/>
-                    <a:p>
-                      <a:pPr algn="ctr"/>
-                      <a:r>
-                        <a:rPr sz="900" b="0">
-                          <a:solidFill>
-                            <a:srgbClr val="333333"/>
-                          </a:solidFill>
-                          <a:latin typeface="Calibri"/>
-                        </a:rPr>
-                        <a:t>65 kişi</a:t>
-                      </a:r>
-                    </a:p>
-                  </a:txBody>
-                  <a:tcPr>
-                    <a:solidFill>
-                      <a:srgbClr val="FFFFFF"/>
-                    </a:solidFill>
-                  </a:tcPr>
-                </a:tc>
-                <a:tc>
-                  <a:txBody>
-                    <a:bodyPr/>
-                    <a:lstStyle/>
-                    <a:p>
-                      <a:pPr algn="ctr"/>
-                      <a:r>
-                        <a:rPr sz="900" b="1">
-                          <a:solidFill>
-                            <a:srgbClr val="333333"/>
-                          </a:solidFill>
-                          <a:latin typeface="Calibri"/>
-                        </a:rPr>
-                        <a:t>62 kişi</a:t>
-                      </a:r>
-                    </a:p>
-                  </a:txBody>
-                  <a:tcPr>
-                    <a:solidFill>
-                      <a:srgbClr val="FFFFFF"/>
-                    </a:solidFill>
-                  </a:tcPr>
-                </a:tc>
-                <a:tc>
-                  <a:txBody>
-                    <a:bodyPr/>
-                    <a:lstStyle/>
-                    <a:p>
-                      <a:pPr algn="l"/>
-                      <a:r>
-                        <a:rPr sz="900" b="0">
-                          <a:solidFill>
-                            <a:srgbClr val="A6001A"/>
-                          </a:solidFill>
-                          <a:latin typeface="Calibri"/>
-                        </a:rPr>
-                        <a:t>kesimde 3 kişi DAHA AZ</a:t>
-                      </a:r>
-                    </a:p>
-                  </a:txBody>
-                  <a:tcPr>
-                    <a:solidFill>
-                      <a:srgbClr val="FFFFFF"/>
-                    </a:solidFill>
-                  </a:tcPr>
-                </a:tc>
-              </a:tr>
-              <a:tr h="182880">
-                <a:tc>
-                  <a:txBody>
-                    <a:bodyPr/>
-                    <a:lstStyle/>
-                    <a:p>
-                      <a:pPr algn="l"/>
-                      <a:r>
-                        <a:rPr sz="900" b="0">
-                          <a:solidFill>
-                            <a:srgbClr val="333333"/>
-                          </a:solidFill>
-                          <a:latin typeface="Calibri"/>
-                        </a:rPr>
-                        <a:t>   — Temmuz alımı</a:t>
-                      </a:r>
-                    </a:p>
-                  </a:txBody>
-                  <a:tcPr>
-                    <a:solidFill>
-                      <a:srgbClr val="FAFAFA"/>
-                    </a:solidFill>
-                  </a:tcPr>
-                </a:tc>
-                <a:tc>
-                  <a:txBody>
-                    <a:bodyPr/>
-                    <a:lstStyle/>
-                    <a:p>
-                      <a:pPr algn="ctr"/>
-                      <a:r>
-                        <a:rPr sz="900" b="0">
-                          <a:solidFill>
-                            <a:srgbClr val="333333"/>
-                          </a:solidFill>
-                          <a:latin typeface="Calibri"/>
-                        </a:rPr>
-                        <a:t>4 kişi</a:t>
-                      </a:r>
-                    </a:p>
-                  </a:txBody>
-                  <a:tcPr>
-                    <a:solidFill>
-                      <a:srgbClr val="FAFAFA"/>
-                    </a:solidFill>
-                  </a:tcPr>
-                </a:tc>
-                <a:tc>
-                  <a:txBody>
-                    <a:bodyPr/>
-                    <a:lstStyle/>
-                    <a:p>
-                      <a:pPr algn="ctr"/>
-                      <a:r>
-                        <a:rPr sz="900" b="1">
-                          <a:solidFill>
-                            <a:srgbClr val="333333"/>
-                          </a:solidFill>
-                          <a:latin typeface="Calibri"/>
-                        </a:rPr>
-                        <a:t>2 kişi</a:t>
-                      </a:r>
-                    </a:p>
-                  </a:txBody>
-                  <a:tcPr>
-                    <a:solidFill>
-                      <a:srgbClr val="FAFAFA"/>
-                    </a:solidFill>
-                  </a:tcPr>
-                </a:tc>
-                <a:tc>
-                  <a:txBody>
-                    <a:bodyPr/>
-                    <a:lstStyle/>
-                    <a:p>
-                      <a:pPr algn="l"/>
-                      <a:r>
-                        <a:rPr sz="900" b="0">
-                          <a:solidFill>
-                            <a:srgbClr val="A6001A"/>
-                          </a:solidFill>
-                          <a:latin typeface="Calibri"/>
-                        </a:rPr>
-                        <a:t>erken alım payı düştü</a:t>
-                      </a:r>
-                    </a:p>
-                  </a:txBody>
-                  <a:tcPr>
-                    <a:solidFill>
-                      <a:srgbClr val="FAFAFA"/>
-                    </a:solidFill>
-                  </a:tcPr>
-                </a:tc>
-              </a:tr>
-              <a:tr h="182880">
-                <a:tc>
-                  <a:txBody>
-                    <a:bodyPr/>
-                    <a:lstStyle/>
-                    <a:p>
-                      <a:pPr algn="l"/>
-                      <a:r>
-                        <a:rPr sz="900" b="0">
-                          <a:solidFill>
-                            <a:srgbClr val="333333"/>
-                          </a:solidFill>
-                          <a:latin typeface="Calibri"/>
-                        </a:rPr>
-                        <a:t>   — 1–14 Ağustos alımı</a:t>
-                      </a:r>
-                    </a:p>
-                  </a:txBody>
-                  <a:tcPr>
-                    <a:solidFill>
-                      <a:srgbClr val="FFFFFF"/>
-                    </a:solidFill>
-                  </a:tcPr>
-                </a:tc>
-                <a:tc>
-                  <a:txBody>
-                    <a:bodyPr/>
-                    <a:lstStyle/>
-                    <a:p>
-                      <a:pPr algn="ctr"/>
-                      <a:r>
-                        <a:rPr sz="900" b="0">
-                          <a:solidFill>
-                            <a:srgbClr val="333333"/>
-                          </a:solidFill>
-                          <a:latin typeface="Calibri"/>
-                        </a:rPr>
-                        <a:t>12 kişi</a:t>
-                      </a:r>
-                    </a:p>
-                  </a:txBody>
-                  <a:tcPr>
-                    <a:solidFill>
-                      <a:srgbClr val="FFFFFF"/>
-                    </a:solidFill>
-                  </a:tcPr>
-                </a:tc>
-                <a:tc>
-                  <a:txBody>
-                    <a:bodyPr/>
-                    <a:lstStyle/>
-                    <a:p>
-                      <a:pPr algn="ctr"/>
-                      <a:r>
-                        <a:rPr sz="900" b="1">
-                          <a:solidFill>
-                            <a:srgbClr val="333333"/>
-                          </a:solidFill>
-                          <a:latin typeface="Calibri"/>
-                        </a:rPr>
-                        <a:t>27 kişi</a:t>
-                      </a:r>
-                    </a:p>
-                  </a:txBody>
-                  <a:tcPr>
-                    <a:solidFill>
-                      <a:srgbClr val="FFFFFF"/>
-                    </a:solidFill>
-                  </a:tcPr>
-                </a:tc>
-                <a:tc>
-                  <a:txBody>
-                    <a:bodyPr/>
-                    <a:lstStyle/>
-                    <a:p>
-                      <a:pPr algn="l"/>
-                      <a:r>
-                        <a:rPr sz="900" b="0">
-                          <a:solidFill>
-                            <a:srgbClr val="A6001A"/>
-                          </a:solidFill>
-                          <a:latin typeface="Calibri"/>
-                        </a:rPr>
-                        <a:t>iş +%25,1 büyüyen dönem</a:t>
-                      </a:r>
-                    </a:p>
-                  </a:txBody>
-                  <a:tcPr>
-                    <a:solidFill>
-                      <a:srgbClr val="FFFFFF"/>
-                    </a:solidFill>
-                  </a:tcPr>
-                </a:tc>
-              </a:tr>
-              <a:tr h="182880">
-                <a:tc>
-                  <a:txBody>
-                    <a:bodyPr/>
-                    <a:lstStyle/>
-                    <a:p>
-                      <a:pPr algn="l"/>
-                      <a:r>
-                        <a:rPr sz="900" b="0">
-                          <a:solidFill>
-                            <a:srgbClr val="333333"/>
-                          </a:solidFill>
-                          <a:latin typeface="Calibri"/>
-                        </a:rPr>
-                        <a:t>   — 15–31 Ağustos alımı</a:t>
-                      </a:r>
-                    </a:p>
-                  </a:txBody>
-                  <a:tcPr>
-                    <a:solidFill>
-                      <a:srgbClr val="FAFAFA"/>
-                    </a:solidFill>
-                  </a:tcPr>
-                </a:tc>
-                <a:tc>
-                  <a:txBody>
-                    <a:bodyPr/>
-                    <a:lstStyle/>
-                    <a:p>
-                      <a:pPr algn="ctr"/>
-                      <a:r>
-                        <a:rPr sz="900" b="0">
-                          <a:solidFill>
-                            <a:srgbClr val="333333"/>
-                          </a:solidFill>
-                          <a:latin typeface="Calibri"/>
-                        </a:rPr>
-                        <a:t>49 kişi</a:t>
-                      </a:r>
-                    </a:p>
-                  </a:txBody>
-                  <a:tcPr>
-                    <a:solidFill>
-                      <a:srgbClr val="FAFAFA"/>
-                    </a:solidFill>
-                  </a:tcPr>
-                </a:tc>
-                <a:tc>
-                  <a:txBody>
-                    <a:bodyPr/>
-                    <a:lstStyle/>
-                    <a:p>
-                      <a:pPr algn="ctr"/>
-                      <a:r>
-                        <a:rPr sz="900" b="1">
-                          <a:solidFill>
-                            <a:srgbClr val="333333"/>
-                          </a:solidFill>
-                          <a:latin typeface="Calibri"/>
-                        </a:rPr>
-                        <a:t>32 kişi</a:t>
-                      </a:r>
-                    </a:p>
-                  </a:txBody>
-                  <a:tcPr>
-                    <a:solidFill>
-                      <a:srgbClr val="FAFAFA"/>
-                    </a:solidFill>
-                  </a:tcPr>
-                </a:tc>
-                <a:tc>
-                  <a:txBody>
-                    <a:bodyPr/>
-                    <a:lstStyle/>
-                    <a:p>
-                      <a:pPr algn="l"/>
-                      <a:r>
-                        <a:rPr sz="900" b="0">
-                          <a:solidFill>
-                            <a:srgbClr val="A6001A"/>
-                          </a:solidFill>
-                          <a:latin typeface="Calibri"/>
-                        </a:rPr>
-                        <a:t>iş −%2,9 → alım azaltıldı</a:t>
-                      </a:r>
-                    </a:p>
-                  </a:txBody>
-                  <a:tcPr>
-                    <a:solidFill>
-                      <a:srgbClr val="FAFAFA"/>
                     </a:solidFill>
                   </a:tcPr>
                 </a:tc>
@@ -15829,7 +15619,108 @@
       </p:graphicFrame>
       <p:sp>
         <p:nvSpPr>
-          <p:cNvPr id="22" name="TextBox 21"/>
+          <p:cNvPr id="22" name="Rounded Rectangle 21"/>
+          <p:cNvSpPr/>
+          <p:nvPr/>
+        </p:nvSpPr>
+        <p:spPr>
+          <a:xfrm>
+            <a:off x="7955279" y="3429000"/>
+            <a:ext cx="3611880" cy="1737360"/>
+          </a:xfrm>
+          <a:prstGeom prst="roundRect">
+            <a:avLst/>
+          </a:prstGeom>
+          <a:solidFill>
+            <a:srgbClr val="F2F2F2"/>
+          </a:solidFill>
+          <a:ln w="19050">
+            <a:solidFill>
+              <a:srgbClr val="E30622"/>
+            </a:solidFill>
+          </a:ln>
+          <a:effectLst/>
+        </p:spPr>
+        <p:style>
+          <a:lnRef idx="1">
+            <a:schemeClr val="accent1"/>
+          </a:lnRef>
+          <a:fillRef idx="3">
+            <a:schemeClr val="accent1"/>
+          </a:fillRef>
+          <a:effectRef idx="2">
+            <a:schemeClr val="accent1"/>
+          </a:effectRef>
+          <a:fontRef idx="minor">
+            <a:schemeClr val="lt1"/>
+          </a:fontRef>
+        </p:style>
+        <p:txBody>
+          <a:bodyPr rtlCol="0" anchor="ctr"/>
+          <a:lstStyle/>
+          <a:p>
+            <a:pPr algn="ctr"/>
+          </a:p>
+        </p:txBody>
+      </p:sp>
+      <p:sp>
+        <p:nvSpPr>
+          <p:cNvPr id="23" name="TextBox 22"/>
+          <p:cNvSpPr txBox="1"/>
+          <p:nvPr/>
+        </p:nvSpPr>
+        <p:spPr>
+          <a:xfrm>
+            <a:off x="8183879" y="3538728"/>
+            <a:ext cx="3200400" cy="1554480"/>
+          </a:xfrm>
+          <a:prstGeom prst="rect">
+            <a:avLst/>
+          </a:prstGeom>
+          <a:noFill/>
+        </p:spPr>
+        <p:txBody>
+          <a:bodyPr wrap="square" anchor="t">
+            <a:spAutoFit/>
+          </a:bodyPr>
+          <a:lstStyle/>
+          <a:p>
+            <a:pPr algn="l">
+              <a:lnSpc>
+                <a:spcPct val="112000"/>
+              </a:lnSpc>
+            </a:pPr>
+            <a:r>
+              <a:rPr sz="1250" b="1">
+                <a:solidFill>
+                  <a:srgbClr val="A6001A"/>
+                </a:solidFill>
+                <a:latin typeface="Calibri"/>
+              </a:rPr>
+              <a:t>Maliyet arttı, yükü azaldı</a:t>
+            </a:r>
+          </a:p>
+          <a:p>
+            <a:pPr algn="l">
+              <a:lnSpc>
+                <a:spcPct val="112000"/>
+              </a:lnSpc>
+            </a:pPr>
+            <a:r>
+              <a:rPr sz="1000" b="0">
+                <a:solidFill>
+                  <a:srgbClr val="333333"/>
+                </a:solidFill>
+                <a:latin typeface="Calibri"/>
+              </a:rPr>
+              <a:t>Personel maliyeti +%51,5 artmıştır; artışın ana kaynağı kişi başına ücret (+%38,3). Buna karşın cironun içindeki personel yükü 0,70 puan gerilemiştir: %12,85 → %12,15.</a:t>
+            </a:r>
+          </a:p>
+        </p:txBody>
+      </p:sp>
+      <p:sp>
+        <p:nvSpPr>
+          <p:cNvPr id="24" name="TextBox 23"/>
           <p:cNvSpPr txBox="1"/>
           <p:nvPr/>
         </p:nvSpPr>
@@ -15861,14 +15752,14 @@
                 </a:solidFill>
                 <a:latin typeface="Calibri"/>
               </a:rPr>
-              <a:t>* İK'da düzeltme bekleyen 1 kayıt: 2025 girişli bir sezonluk personel çıkış tarihi işlenmediği için 31.08'de aktif görünüyor; düzeltilince sezonluk 62 → 61 olur (rakamlar İK'nın resmi kaydıyla birebir tutulsun diye şimdilik düzeltilmedi) · Kapsam: beş mağaza (FSM · Özlüce · İst. Yolu · Heykel · Şura) · Kohortlar okul açılışına göre AYNI ofsette kesildi (T−12: 27.08.2025 ve 02.09.2026) · İş hacmi üç POS mağazası · ⚠ "açılıştan kaç gün önce" ölçüsü açılış 6 gün kaydığı için 2026'yı mekanik olarak erken gösterir, takvim ölçüsü esastır.</a:t>
+              <a:t>* Kaynak: Zirve bordro (vw_PuanBil) — maliyet = brüt toplam + işveren SGK hissesi + işveren işsizlik payı · Dönem: 01-07 ay (Oca–Tem), her iki yıl (Ağustos bordrosu henüz işlenmediği için son tam bordro ayı esas) · Kapsam: üç POS mağazası · Ciro KDV HARİÇ ve Sınav DAHİL (o satışı da aynı mağaza personeli yapar) · Kıdem karşılığı ve yan haklar hariç.</a:t>
             </a:r>
           </a:p>
         </p:txBody>
       </p:sp>
       <p:sp>
         <p:nvSpPr>
-          <p:cNvPr id="23" name="TextBox 22"/>
+          <p:cNvPr id="25" name="TextBox 24"/>
           <p:cNvSpPr txBox="1"/>
           <p:nvPr/>
         </p:nvSpPr>
@@ -15958,7 +15849,7 @@
           <a:lstStyle/>
           <a:p>
             <a:r>
-              <a:t>Yöntem ve Açıklamalar</a:t>
+              <a:t>Kadro Alınmasaydı: Fazla Mesai Sınırı</a:t>
             </a:r>
           </a:p>
         </p:txBody>
@@ -15971,8 +15862,8 @@
         </p:nvSpPr>
         <p:spPr>
           <a:xfrm>
-            <a:off x="548640" y="1325880"/>
-            <a:ext cx="11018520" cy="740664"/>
+            <a:off x="548640" y="1371600"/>
+            <a:ext cx="3566160" cy="1828800"/>
           </a:xfrm>
           <a:prstGeom prst="rect">
             <a:avLst/>
@@ -16017,14 +15908,14 @@
         </p:nvSpPr>
         <p:spPr>
           <a:xfrm>
-            <a:off x="548640" y="1325880"/>
-            <a:ext cx="68580" cy="740664"/>
+            <a:off x="548640" y="1371600"/>
+            <a:ext cx="68580" cy="1828800"/>
           </a:xfrm>
           <a:prstGeom prst="rect">
             <a:avLst/>
           </a:prstGeom>
           <a:solidFill>
-            <a:srgbClr val="E30622"/>
+            <a:srgbClr val="9A9A9A"/>
           </a:solidFill>
           <a:ln>
             <a:noFill/>
@@ -16055,7 +15946,7 @@
       </p:sp>
       <p:pic>
         <p:nvPicPr>
-          <p:cNvPr id="5" name="Picture 4" descr="circle-check.png"/>
+          <p:cNvPr id="5" name="Picture 4" descr="workflow.png"/>
           <p:cNvPicPr>
             <a:picLocks noChangeAspect="1"/>
           </p:cNvPicPr>
@@ -16069,8 +15960,8 @@
         </p:blipFill>
         <p:spPr>
           <a:xfrm>
-            <a:off x="777240" y="1453895"/>
-            <a:ext cx="256032" cy="256032"/>
+            <a:off x="3639312" y="1536192"/>
+            <a:ext cx="274320" cy="274320"/>
           </a:xfrm>
           <a:prstGeom prst="rect">
             <a:avLst/>
@@ -16085,8 +15976,47 @@
         </p:nvSpPr>
         <p:spPr>
           <a:xfrm>
-            <a:off x="1143000" y="1389888"/>
-            <a:ext cx="10058400" cy="292608"/>
+            <a:off x="804672" y="1536192"/>
+            <a:ext cx="2697480" cy="384048"/>
+          </a:xfrm>
+          <a:prstGeom prst="rect">
+            <a:avLst/>
+          </a:prstGeom>
+          <a:noFill/>
+        </p:spPr>
+        <p:txBody>
+          <a:bodyPr wrap="square" anchor="t">
+            <a:spAutoFit/>
+          </a:bodyPr>
+          <a:lstStyle/>
+          <a:p>
+            <a:pPr algn="l">
+              <a:lnSpc>
+                <a:spcPct val="105000"/>
+              </a:lnSpc>
+            </a:pPr>
+            <a:r>
+              <a:rPr sz="900" b="1">
+                <a:solidFill>
+                  <a:srgbClr val="6E6E6E"/>
+                </a:solidFill>
+                <a:latin typeface="Calibri"/>
+              </a:rPr>
+              <a:t>FİİLİ FAZLA MESAİ · 2026</a:t>
+            </a:r>
+          </a:p>
+        </p:txBody>
+      </p:sp>
+      <p:sp>
+        <p:nvSpPr>
+          <p:cNvPr id="7" name="TextBox 6"/>
+          <p:cNvSpPr txBox="1"/>
+          <p:nvPr/>
+        </p:nvSpPr>
+        <p:spPr>
+          <a:xfrm>
+            <a:off x="804672" y="1975104"/>
+            <a:ext cx="3154679" cy="658368"/>
           </a:xfrm>
           <a:prstGeom prst="rect">
             <a:avLst/>
@@ -16105,27 +16035,27 @@
               </a:lnSpc>
             </a:pPr>
             <a:r>
-              <a:rPr sz="1150" b="1">
+              <a:rPr sz="2600" b="1">
                 <a:solidFill>
-                  <a:srgbClr val="A6001A"/>
+                  <a:srgbClr val="9A9A9A"/>
                 </a:solidFill>
                 <a:latin typeface="Calibri"/>
               </a:rPr>
-              <a:t>Büyüme kurumsal kanaldan mı geldi?</a:t>
+              <a:t>107 sa/yıl</a:t>
             </a:r>
           </a:p>
         </p:txBody>
       </p:sp>
       <p:sp>
         <p:nvSpPr>
-          <p:cNvPr id="7" name="TextBox 6"/>
+          <p:cNvPr id="8" name="TextBox 7"/>
           <p:cNvSpPr txBox="1"/>
           <p:nvPr/>
         </p:nvSpPr>
         <p:spPr>
           <a:xfrm>
-            <a:off x="1143000" y="1673352"/>
-            <a:ext cx="10058400" cy="356615"/>
+            <a:off x="804672" y="2688336"/>
+            <a:ext cx="3154679" cy="457200"/>
           </a:xfrm>
           <a:prstGeom prst="rect">
             <a:avLst/>
@@ -16140,31 +16070,31 @@
           <a:p>
             <a:pPr algn="l">
               <a:lnSpc>
-                <a:spcPct val="106000"/>
+                <a:spcPct val="105000"/>
               </a:lnSpc>
             </a:pPr>
             <a:r>
-              <a:rPr sz="950" b="0">
+              <a:rPr sz="1000" b="0">
                 <a:solidFill>
-                  <a:srgbClr val="333333"/>
+                  <a:srgbClr val="6E6E6E"/>
                 </a:solidFill>
                 <a:latin typeface="Calibri"/>
               </a:rPr>
-              <a:t>Tersi: Sınav Okulları küçüldü. Ocak–Ağustos cirosu 136,2 → 105,6 milyon TL (−%22,4). Mağaza tarafı +%54,9 büyüdü — büyümenin tamamı raftan geldi.</a:t>
+              <a:t>kişi başına · yasal sınır 270 sa</a:t>
             </a:r>
           </a:p>
         </p:txBody>
       </p:sp>
       <p:sp>
         <p:nvSpPr>
-          <p:cNvPr id="8" name="Rectangle 7"/>
+          <p:cNvPr id="9" name="Rectangle 8"/>
           <p:cNvSpPr/>
           <p:nvPr/>
         </p:nvSpPr>
         <p:spPr>
           <a:xfrm>
-            <a:off x="548640" y="2157984"/>
-            <a:ext cx="11018520" cy="740664"/>
+            <a:off x="4279392" y="1371600"/>
+            <a:ext cx="3566160" cy="1828800"/>
           </a:xfrm>
           <a:prstGeom prst="rect">
             <a:avLst/>
@@ -16203,20 +16133,20 @@
       </p:sp>
       <p:sp>
         <p:nvSpPr>
-          <p:cNvPr id="9" name="Rectangle 8"/>
+          <p:cNvPr id="10" name="Rectangle 9"/>
           <p:cNvSpPr/>
           <p:nvPr/>
         </p:nvSpPr>
         <p:spPr>
           <a:xfrm>
-            <a:off x="548640" y="2157984"/>
-            <a:ext cx="68580" cy="740664"/>
+            <a:off x="4279392" y="1371600"/>
+            <a:ext cx="68580" cy="1828800"/>
           </a:xfrm>
           <a:prstGeom prst="rect">
             <a:avLst/>
           </a:prstGeom>
           <a:solidFill>
-            <a:srgbClr val="E30622"/>
+            <a:srgbClr val="A6001A"/>
           </a:solidFill>
           <a:ln>
             <a:noFill/>
@@ -16247,22 +16177,22 @@
       </p:sp>
       <p:pic>
         <p:nvPicPr>
-          <p:cNvPr id="10" name="Picture 9" descr="circle-check.png"/>
+          <p:cNvPr id="11" name="Picture 10" descr="alert-triangle.png"/>
           <p:cNvPicPr>
             <a:picLocks noChangeAspect="1"/>
           </p:cNvPicPr>
           <p:nvPr/>
         </p:nvPicPr>
         <p:blipFill>
-          <a:blip r:embed="rId3"/>
+          <a:blip r:embed="rId4"/>
           <a:stretch>
             <a:fillRect/>
           </a:stretch>
         </p:blipFill>
         <p:spPr>
           <a:xfrm>
-            <a:off x="777240" y="2286000"/>
-            <a:ext cx="256032" cy="256032"/>
+            <a:off x="7370064" y="1536192"/>
+            <a:ext cx="274320" cy="274320"/>
           </a:xfrm>
           <a:prstGeom prst="rect">
             <a:avLst/>
@@ -16271,14 +16201,53 @@
       </p:pic>
       <p:sp>
         <p:nvSpPr>
-          <p:cNvPr id="11" name="TextBox 10"/>
+          <p:cNvPr id="12" name="TextBox 11"/>
           <p:cNvSpPr txBox="1"/>
           <p:nvPr/>
         </p:nvSpPr>
         <p:spPr>
           <a:xfrm>
-            <a:off x="1143000" y="2221991"/>
-            <a:ext cx="10058400" cy="292608"/>
+            <a:off x="4535424" y="1536192"/>
+            <a:ext cx="2697480" cy="384048"/>
+          </a:xfrm>
+          <a:prstGeom prst="rect">
+            <a:avLst/>
+          </a:prstGeom>
+          <a:noFill/>
+        </p:spPr>
+        <p:txBody>
+          <a:bodyPr wrap="square" anchor="t">
+            <a:spAutoFit/>
+          </a:bodyPr>
+          <a:lstStyle/>
+          <a:p>
+            <a:pPr algn="l">
+              <a:lnSpc>
+                <a:spcPct val="105000"/>
+              </a:lnSpc>
+            </a:pPr>
+            <a:r>
+              <a:rPr sz="900" b="1">
+                <a:solidFill>
+                  <a:srgbClr val="6E6E6E"/>
+                </a:solidFill>
+                <a:latin typeface="Calibri"/>
+              </a:rPr>
+              <a:t>KADRO ARTMASAYDI</a:t>
+            </a:r>
+          </a:p>
+        </p:txBody>
+      </p:sp>
+      <p:sp>
+        <p:nvSpPr>
+          <p:cNvPr id="13" name="TextBox 12"/>
+          <p:cNvSpPr txBox="1"/>
+          <p:nvPr/>
+        </p:nvSpPr>
+        <p:spPr>
+          <a:xfrm>
+            <a:off x="4535424" y="1975104"/>
+            <a:ext cx="3154679" cy="658368"/>
           </a:xfrm>
           <a:prstGeom prst="rect">
             <a:avLst/>
@@ -16297,27 +16266,27 @@
               </a:lnSpc>
             </a:pPr>
             <a:r>
-              <a:rPr sz="1150" b="1">
+              <a:rPr sz="2600" b="1">
                 <a:solidFill>
                   <a:srgbClr val="A6001A"/>
                 </a:solidFill>
                 <a:latin typeface="Calibri"/>
               </a:rPr>
-              <a:t>Ciro artışı enflasyon kaynaklı mı?</a:t>
+              <a:t>342 sa/yıl</a:t>
             </a:r>
           </a:p>
         </p:txBody>
       </p:sp>
       <p:sp>
         <p:nvSpPr>
-          <p:cNvPr id="12" name="TextBox 11"/>
+          <p:cNvPr id="14" name="TextBox 13"/>
           <p:cNvSpPr txBox="1"/>
           <p:nvPr/>
         </p:nvSpPr>
         <p:spPr>
           <a:xfrm>
-            <a:off x="1143000" y="2505456"/>
-            <a:ext cx="10058400" cy="356615"/>
+            <a:off x="4535424" y="2688336"/>
+            <a:ext cx="3154679" cy="457200"/>
           </a:xfrm>
           <a:prstGeom prst="rect">
             <a:avLst/>
@@ -16332,31 +16301,31 @@
           <a:p>
             <a:pPr algn="l">
               <a:lnSpc>
-                <a:spcPct val="106000"/>
+                <a:spcPct val="105000"/>
               </a:lnSpc>
             </a:pPr>
             <a:r>
-              <a:rPr sz="950" b="0">
+              <a:rPr sz="1000" b="0">
                 <a:solidFill>
-                  <a:srgbClr val="333333"/>
+                  <a:srgbClr val="6E6E6E"/>
                 </a:solidFill>
                 <a:latin typeface="Calibri"/>
               </a:rPr>
-              <a:t>Kısmen doğru: eşleşen ürünlerde fiyat endeksi +%19,8. Bu yüzden savunma ciroya değil ADEDE dayanıyor: ürün adedi +%34,9 ve adet fiyattan etkilenmez.</a:t>
+              <a:t>aynı iş, 75 kişi-ay eksik kapasite</a:t>
             </a:r>
           </a:p>
         </p:txBody>
       </p:sp>
       <p:sp>
         <p:nvSpPr>
-          <p:cNvPr id="13" name="Rectangle 12"/>
+          <p:cNvPr id="15" name="Rectangle 14"/>
           <p:cNvSpPr/>
           <p:nvPr/>
         </p:nvSpPr>
         <p:spPr>
           <a:xfrm>
-            <a:off x="548640" y="2990087"/>
-            <a:ext cx="11018520" cy="740664"/>
+            <a:off x="8001000" y="1371600"/>
+            <a:ext cx="3566160" cy="1828800"/>
           </a:xfrm>
           <a:prstGeom prst="rect">
             <a:avLst/>
@@ -16395,20 +16364,20 @@
       </p:sp>
       <p:sp>
         <p:nvSpPr>
-          <p:cNvPr id="14" name="Rectangle 13"/>
+          <p:cNvPr id="16" name="Rectangle 15"/>
           <p:cNvSpPr/>
           <p:nvPr/>
         </p:nvSpPr>
         <p:spPr>
           <a:xfrm>
-            <a:off x="548640" y="2990087"/>
-            <a:ext cx="68580" cy="740664"/>
+            <a:off x="8001000" y="1371600"/>
+            <a:ext cx="68580" cy="1828800"/>
           </a:xfrm>
           <a:prstGeom prst="rect">
             <a:avLst/>
           </a:prstGeom>
           <a:solidFill>
-            <a:srgbClr val="E30622"/>
+            <a:srgbClr val="A6001A"/>
           </a:solidFill>
           <a:ln>
             <a:noFill/>
@@ -16439,22 +16408,22 @@
       </p:sp>
       <p:pic>
         <p:nvPicPr>
-          <p:cNvPr id="15" name="Picture 14" descr="circle-check.png"/>
+          <p:cNvPr id="17" name="Picture 16" descr="shield-check.png"/>
           <p:cNvPicPr>
             <a:picLocks noChangeAspect="1"/>
           </p:cNvPicPr>
           <p:nvPr/>
         </p:nvPicPr>
         <p:blipFill>
-          <a:blip r:embed="rId3"/>
+          <a:blip r:embed="rId5"/>
           <a:stretch>
             <a:fillRect/>
           </a:stretch>
         </p:blipFill>
         <p:spPr>
           <a:xfrm>
-            <a:off x="777240" y="3118103"/>
-            <a:ext cx="256032" cy="256032"/>
+            <a:off x="11091672" y="1536192"/>
+            <a:ext cx="274320" cy="274320"/>
           </a:xfrm>
           <a:prstGeom prst="rect">
             <a:avLst/>
@@ -16463,14 +16432,53 @@
       </p:pic>
       <p:sp>
         <p:nvSpPr>
-          <p:cNvPr id="16" name="TextBox 15"/>
+          <p:cNvPr id="18" name="TextBox 17"/>
           <p:cNvSpPr txBox="1"/>
           <p:nvPr/>
         </p:nvSpPr>
         <p:spPr>
           <a:xfrm>
-            <a:off x="1143000" y="3054095"/>
-            <a:ext cx="10058400" cy="292608"/>
+            <a:off x="8257031" y="1536192"/>
+            <a:ext cx="2697480" cy="384048"/>
+          </a:xfrm>
+          <a:prstGeom prst="rect">
+            <a:avLst/>
+          </a:prstGeom>
+          <a:noFill/>
+        </p:spPr>
+        <p:txBody>
+          <a:bodyPr wrap="square" anchor="t">
+            <a:spAutoFit/>
+          </a:bodyPr>
+          <a:lstStyle/>
+          <a:p>
+            <a:pPr algn="l">
+              <a:lnSpc>
+                <a:spcPct val="105000"/>
+              </a:lnSpc>
+            </a:pPr>
+            <a:r>
+              <a:rPr sz="900" b="1">
+                <a:solidFill>
+                  <a:srgbClr val="6E6E6E"/>
+                </a:solidFill>
+                <a:latin typeface="Calibri"/>
+              </a:rPr>
+              <a:t>YASAL ÜST SINIR</a:t>
+            </a:r>
+          </a:p>
+        </p:txBody>
+      </p:sp>
+      <p:sp>
+        <p:nvSpPr>
+          <p:cNvPr id="19" name="TextBox 18"/>
+          <p:cNvSpPr txBox="1"/>
+          <p:nvPr/>
+        </p:nvSpPr>
+        <p:spPr>
+          <a:xfrm>
+            <a:off x="8257031" y="1975104"/>
+            <a:ext cx="3154679" cy="658368"/>
           </a:xfrm>
           <a:prstGeom prst="rect">
             <a:avLst/>
@@ -16489,27 +16497,27 @@
               </a:lnSpc>
             </a:pPr>
             <a:r>
-              <a:rPr sz="1150" b="1">
+              <a:rPr sz="2600" b="1">
                 <a:solidFill>
                   <a:srgbClr val="A6001A"/>
                 </a:solidFill>
                 <a:latin typeface="Calibri"/>
               </a:rPr>
-              <a:t>Kasa sistemi değişti, karşılaştırma geçerli mi?</a:t>
+              <a:t>270 sa/yıl</a:t>
             </a:r>
           </a:p>
         </p:txBody>
       </p:sp>
       <p:sp>
         <p:nvSpPr>
-          <p:cNvPr id="17" name="TextBox 16"/>
+          <p:cNvPr id="20" name="TextBox 19"/>
           <p:cNvSpPr txBox="1"/>
           <p:nvPr/>
         </p:nvSpPr>
         <p:spPr>
           <a:xfrm>
-            <a:off x="1143000" y="3337559"/>
-            <a:ext cx="10058400" cy="356615"/>
+            <a:off x="8257031" y="2688336"/>
+            <a:ext cx="3154679" cy="457200"/>
           </a:xfrm>
           <a:prstGeom prst="rect">
             <a:avLst/>
@@ -16524,41 +16532,59 @@
           <a:p>
             <a:pPr algn="l">
               <a:lnSpc>
-                <a:spcPct val="106000"/>
+                <a:spcPct val="105000"/>
               </a:lnSpc>
             </a:pPr>
             <a:r>
-              <a:rPr sz="950" b="0">
+              <a:rPr sz="1000" b="0">
                 <a:solidFill>
-                  <a:srgbClr val="333333"/>
+                  <a:srgbClr val="6E6E6E"/>
                 </a:solidFill>
                 <a:latin typeface="Calibri"/>
               </a:rPr>
-              <a:t>Bu yüzden ölçüm POS'tan değil ERP'den (DerinSIS) alındı — iki yılda da aynı kaynak, aynı belge tipi. Temmuz 2025 kasa geçişi ölçüye girmiyor.</a:t>
+              <a:t>4857 s.K. m.41 · kişi başına</a:t>
             </a:r>
           </a:p>
         </p:txBody>
       </p:sp>
-      <p:sp>
-        <p:nvSpPr>
-          <p:cNvPr id="18" name="Rectangle 17"/>
+      <p:graphicFrame>
+        <p:nvGraphicFramePr>
+          <p:cNvPr id="21" name="Chart 20"/>
+          <p:cNvGraphicFramePr>
+            <a:graphicFrameLocks noGrp="1"/>
+          </p:cNvGraphicFramePr>
+          <p:nvPr/>
+        </p:nvGraphicFramePr>
+        <p:xfrm>
+          <a:off x="548640" y="3383280"/>
+          <a:ext cx="5760720" cy="2057400"/>
+        </p:xfrm>
+        <a:graphic>
+          <a:graphicData uri="http://schemas.openxmlformats.org/drawingml/2006/chart">
+            <c:chart xmlns:c="http://schemas.openxmlformats.org/drawingml/2006/chart" r:id="rId6"/>
+          </a:graphicData>
+        </a:graphic>
+      </p:graphicFrame>
+      <p:sp>
+        <p:nvSpPr>
+          <p:cNvPr id="22" name="Rounded Rectangle 21"/>
           <p:cNvSpPr/>
           <p:nvPr/>
         </p:nvSpPr>
         <p:spPr>
           <a:xfrm>
-            <a:off x="548640" y="3822191"/>
-            <a:ext cx="11018520" cy="740664"/>
-          </a:xfrm>
-          <a:prstGeom prst="rect">
+            <a:off x="6492240" y="3383280"/>
+            <a:ext cx="5074920" cy="1783080"/>
+          </a:xfrm>
+          <a:prstGeom prst="roundRect">
             <a:avLst/>
           </a:prstGeom>
           <a:solidFill>
-            <a:srgbClr val="FFFFFF"/>
+            <a:srgbClr val="F2F2F2"/>
           </a:solidFill>
-          <a:ln w="12700">
+          <a:ln w="19050">
             <a:solidFill>
-              <a:srgbClr val="DCDCDC"/>
+              <a:srgbClr val="E30622"/>
             </a:solidFill>
           </a:ln>
           <a:effectLst/>
@@ -16587,82 +16613,14 @@
       </p:sp>
       <p:sp>
         <p:nvSpPr>
-          <p:cNvPr id="19" name="Rectangle 18"/>
-          <p:cNvSpPr/>
-          <p:nvPr/>
-        </p:nvSpPr>
-        <p:spPr>
-          <a:xfrm>
-            <a:off x="548640" y="3822191"/>
-            <a:ext cx="68580" cy="740664"/>
-          </a:xfrm>
-          <a:prstGeom prst="rect">
-            <a:avLst/>
-          </a:prstGeom>
-          <a:solidFill>
-            <a:srgbClr val="E30622"/>
-          </a:solidFill>
-          <a:ln>
-            <a:noFill/>
-          </a:ln>
-          <a:effectLst/>
-        </p:spPr>
-        <p:style>
-          <a:lnRef idx="1">
-            <a:schemeClr val="accent1"/>
-          </a:lnRef>
-          <a:fillRef idx="3">
-            <a:schemeClr val="accent1"/>
-          </a:fillRef>
-          <a:effectRef idx="2">
-            <a:schemeClr val="accent1"/>
-          </a:effectRef>
-          <a:fontRef idx="minor">
-            <a:schemeClr val="lt1"/>
-          </a:fontRef>
-        </p:style>
-        <p:txBody>
-          <a:bodyPr rtlCol="0" anchor="ctr"/>
-          <a:lstStyle/>
-          <a:p>
-            <a:pPr algn="ctr"/>
-          </a:p>
-        </p:txBody>
-      </p:sp>
-      <p:pic>
-        <p:nvPicPr>
-          <p:cNvPr id="20" name="Picture 19" descr="circle-check.png"/>
-          <p:cNvPicPr>
-            <a:picLocks noChangeAspect="1"/>
-          </p:cNvPicPr>
-          <p:nvPr/>
-        </p:nvPicPr>
-        <p:blipFill>
-          <a:blip r:embed="rId3"/>
-          <a:stretch>
-            <a:fillRect/>
-          </a:stretch>
-        </p:blipFill>
-        <p:spPr>
-          <a:xfrm>
-            <a:off x="777240" y="3950207"/>
-            <a:ext cx="256032" cy="256032"/>
-          </a:xfrm>
-          <a:prstGeom prst="rect">
-            <a:avLst/>
-          </a:prstGeom>
-        </p:spPr>
-      </p:pic>
-      <p:sp>
-        <p:nvSpPr>
-          <p:cNvPr id="21" name="TextBox 20"/>
+          <p:cNvPr id="23" name="TextBox 22"/>
           <p:cNvSpPr txBox="1"/>
           <p:nvPr/>
         </p:nvSpPr>
         <p:spPr>
           <a:xfrm>
-            <a:off x="1143000" y="3886200"/>
-            <a:ext cx="10058400" cy="292608"/>
+            <a:off x="6720840" y="3493008"/>
+            <a:ext cx="4617720" cy="1627632"/>
           </a:xfrm>
           <a:prstGeom prst="rect">
             <a:avLst/>
@@ -16677,255 +16635,40 @@
           <a:p>
             <a:pPr algn="l">
               <a:lnSpc>
-                <a:spcPct val="100000"/>
+                <a:spcPct val="112000"/>
               </a:lnSpc>
             </a:pPr>
             <a:r>
-              <a:rPr sz="1150" b="1">
+              <a:rPr sz="1250" b="1">
                 <a:solidFill>
                   <a:srgbClr val="A6001A"/>
                 </a:solidFill>
                 <a:latin typeface="Calibri"/>
               </a:rPr>
-              <a:t>Sezonluk personel erken mi alındı?</a:t>
+              <a:t>Alım tercih değil, zorunluluktu</a:t>
             </a:r>
           </a:p>
-        </p:txBody>
-      </p:sp>
-      <p:sp>
-        <p:nvSpPr>
-          <p:cNvPr id="22" name="TextBox 21"/>
-          <p:cNvSpPr txBox="1"/>
-          <p:nvPr/>
-        </p:nvSpPr>
-        <p:spPr>
-          <a:xfrm>
-            <a:off x="1143000" y="4169663"/>
-            <a:ext cx="10058400" cy="356615"/>
-          </a:xfrm>
-          <a:prstGeom prst="rect">
-            <a:avLst/>
-          </a:prstGeom>
-          <a:noFill/>
-        </p:spPr>
-        <p:txBody>
-          <a:bodyPr wrap="square" anchor="t">
-            <a:spAutoFit/>
-          </a:bodyPr>
-          <a:lstStyle/>
           <a:p>
             <a:pPr algn="l">
               <a:lnSpc>
-                <a:spcPct val="106000"/>
+                <a:spcPct val="112000"/>
               </a:lnSpc>
             </a:pPr>
             <a:r>
-              <a:rPr sz="950" b="0">
+              <a:rPr sz="1000" b="0">
                 <a:solidFill>
                   <a:srgbClr val="333333"/>
                 </a:solidFill>
                 <a:latin typeface="Calibri"/>
               </a:rPr>
-              <a:t>Hayır: takvim ölçüsünde 2026 alımı ortalama 2,5 gün DAHA GEÇ; Temmuz ve öncesi alım 6 kişiden 2'ye indi. Artış 1–14 Ağustos'ta ve o iki haftada ürün adedi +%25,1 büyüdü — alım işi takip etti.</a:t>
+              <a:t>Kadro 2025 seviyesinde kalsaydı aynı işi çıkarmak için 14.625 saat ek fazla mesai gerekirdi; kişi başına yıllık 342 saate çıkardı ve 270 saatlik yasal sınır AŞILIRDI. Fiili fazla mesai 107 saat/yıl ile sınırın içindedir; ancak sınır hızında çalışan kişi-ay sayısı 32'den 95'ye yükselmiştir — kadro hâlâ dar.</a:t>
             </a:r>
           </a:p>
         </p:txBody>
       </p:sp>
       <p:sp>
         <p:nvSpPr>
-          <p:cNvPr id="23" name="Rectangle 22"/>
-          <p:cNvSpPr/>
-          <p:nvPr/>
-        </p:nvSpPr>
-        <p:spPr>
-          <a:xfrm>
-            <a:off x="548640" y="4654296"/>
-            <a:ext cx="11018520" cy="740664"/>
-          </a:xfrm>
-          <a:prstGeom prst="rect">
-            <a:avLst/>
-          </a:prstGeom>
-          <a:solidFill>
-            <a:srgbClr val="FFFFFF"/>
-          </a:solidFill>
-          <a:ln w="12700">
-            <a:solidFill>
-              <a:srgbClr val="DCDCDC"/>
-            </a:solidFill>
-          </a:ln>
-          <a:effectLst/>
-        </p:spPr>
-        <p:style>
-          <a:lnRef idx="1">
-            <a:schemeClr val="accent1"/>
-          </a:lnRef>
-          <a:fillRef idx="3">
-            <a:schemeClr val="accent1"/>
-          </a:fillRef>
-          <a:effectRef idx="2">
-            <a:schemeClr val="accent1"/>
-          </a:effectRef>
-          <a:fontRef idx="minor">
-            <a:schemeClr val="lt1"/>
-          </a:fontRef>
-        </p:style>
-        <p:txBody>
-          <a:bodyPr rtlCol="0" anchor="ctr"/>
-          <a:lstStyle/>
-          <a:p>
-            <a:pPr algn="ctr"/>
-          </a:p>
-        </p:txBody>
-      </p:sp>
-      <p:sp>
-        <p:nvSpPr>
-          <p:cNvPr id="24" name="Rectangle 23"/>
-          <p:cNvSpPr/>
-          <p:nvPr/>
-        </p:nvSpPr>
-        <p:spPr>
-          <a:xfrm>
-            <a:off x="548640" y="4654296"/>
-            <a:ext cx="68580" cy="740664"/>
-          </a:xfrm>
-          <a:prstGeom prst="rect">
-            <a:avLst/>
-          </a:prstGeom>
-          <a:solidFill>
-            <a:srgbClr val="E30622"/>
-          </a:solidFill>
-          <a:ln>
-            <a:noFill/>
-          </a:ln>
-          <a:effectLst/>
-        </p:spPr>
-        <p:style>
-          <a:lnRef idx="1">
-            <a:schemeClr val="accent1"/>
-          </a:lnRef>
-          <a:fillRef idx="3">
-            <a:schemeClr val="accent1"/>
-          </a:fillRef>
-          <a:effectRef idx="2">
-            <a:schemeClr val="accent1"/>
-          </a:effectRef>
-          <a:fontRef idx="minor">
-            <a:schemeClr val="lt1"/>
-          </a:fontRef>
-        </p:style>
-        <p:txBody>
-          <a:bodyPr rtlCol="0" anchor="ctr"/>
-          <a:lstStyle/>
-          <a:p>
-            <a:pPr algn="ctr"/>
-          </a:p>
-        </p:txBody>
-      </p:sp>
-      <p:pic>
-        <p:nvPicPr>
-          <p:cNvPr id="25" name="Picture 24" descr="circle-check.png"/>
-          <p:cNvPicPr>
-            <a:picLocks noChangeAspect="1"/>
-          </p:cNvPicPr>
-          <p:nvPr/>
-        </p:nvPicPr>
-        <p:blipFill>
-          <a:blip r:embed="rId3"/>
-          <a:stretch>
-            <a:fillRect/>
-          </a:stretch>
-        </p:blipFill>
-        <p:spPr>
-          <a:xfrm>
-            <a:off x="777240" y="4782312"/>
-            <a:ext cx="256032" cy="256032"/>
-          </a:xfrm>
-          <a:prstGeom prst="rect">
-            <a:avLst/>
-          </a:prstGeom>
-        </p:spPr>
-      </p:pic>
-      <p:sp>
-        <p:nvSpPr>
-          <p:cNvPr id="26" name="TextBox 25"/>
-          <p:cNvSpPr txBox="1"/>
-          <p:nvPr/>
-        </p:nvSpPr>
-        <p:spPr>
-          <a:xfrm>
-            <a:off x="1143000" y="4718304"/>
-            <a:ext cx="10058400" cy="292608"/>
-          </a:xfrm>
-          <a:prstGeom prst="rect">
-            <a:avLst/>
-          </a:prstGeom>
-          <a:noFill/>
-        </p:spPr>
-        <p:txBody>
-          <a:bodyPr wrap="square" anchor="t">
-            <a:spAutoFit/>
-          </a:bodyPr>
-          <a:lstStyle/>
-          <a:p>
-            <a:pPr algn="l">
-              <a:lnSpc>
-                <a:spcPct val="100000"/>
-              </a:lnSpc>
-            </a:pPr>
-            <a:r>
-              <a:rPr sz="1150" b="1">
-                <a:solidFill>
-                  <a:srgbClr val="A6001A"/>
-                </a:solidFill>
-                <a:latin typeface="Calibri"/>
-              </a:rPr>
-              <a:t>Ağustos ayında ivme düşüşü var mı?</a:t>
-            </a:r>
-          </a:p>
-        </p:txBody>
-      </p:sp>
-      <p:sp>
-        <p:nvSpPr>
-          <p:cNvPr id="27" name="TextBox 26"/>
-          <p:cNvSpPr txBox="1"/>
-          <p:nvPr/>
-        </p:nvSpPr>
-        <p:spPr>
-          <a:xfrm>
-            <a:off x="1143000" y="5001768"/>
-            <a:ext cx="10058400" cy="356615"/>
-          </a:xfrm>
-          <a:prstGeom prst="rect">
-            <a:avLst/>
-          </a:prstGeom>
-          <a:noFill/>
-        </p:spPr>
-        <p:txBody>
-          <a:bodyPr wrap="square" anchor="t">
-            <a:spAutoFit/>
-          </a:bodyPr>
-          <a:lstStyle/>
-          <a:p>
-            <a:pPr algn="l">
-              <a:lnSpc>
-                <a:spcPct val="106000"/>
-              </a:lnSpc>
-            </a:pPr>
-            <a:r>
-              <a:rPr sz="950" b="0">
-                <a:solidFill>
-                  <a:srgbClr val="333333"/>
-                </a:solidFill>
-                <a:latin typeface="Calibri"/>
-              </a:rPr>
-              <a:t>Takvim etkisi: okullar 2025'te 8 Eylül, 2026'da 14 Eylül açıldı — sezon 6 gün geriye kaydı. Açılışa hizalanınca haftalık büyüme %65–79 bandında düz seyrediyor.</a:t>
-            </a:r>
-          </a:p>
-        </p:txBody>
-      </p:sp>
-      <p:sp>
-        <p:nvSpPr>
-          <p:cNvPr id="28" name="TextBox 27"/>
+          <p:cNvPr id="24" name="TextBox 23"/>
           <p:cNvSpPr txBox="1"/>
           <p:nvPr/>
         </p:nvSpPr>
@@ -16957,14 +16700,14 @@
                 </a:solidFill>
                 <a:latin typeface="Calibri"/>
               </a:rPr>
-              <a:t>* Kapsam: üç POS mağazası — FSM · Özlüce · İst. Yolu · Dönem: 01.01 – 31.08 (her iki yıl, kümülatif) (kurumsal/mağaza kıyası) · hizalı dönem: 01.07 – 25.08.2025 (2025) · 07.07 – 31.08.2026 (2026), her iki yıl 56 gün, okul açılışına hizalı</a:t>
+              <a:t>* Kaynak: Zirve bordro fazla mesai saatleri (fm1+fm2+fm3) · Dönem: 01-07 ay (Oca–Tem), her iki yıl · Kapsam: üç POS mağazası · VARSAYIM: işgücü ihtiyacı kişi sayısıyla doğru orantılıdır ve eksik kapasite ancak fazla mesaiyle kapanır; kişi-ay başına normal çalışma 195 saat (45 sa/hafta) · Yasal çerçeve 4857 s.K. m.41 (yıllık 270 saat).</a:t>
             </a:r>
           </a:p>
         </p:txBody>
       </p:sp>
       <p:sp>
         <p:nvSpPr>
-          <p:cNvPr id="29" name="TextBox 28"/>
+          <p:cNvPr id="25" name="TextBox 24"/>
           <p:cNvSpPr txBox="1"/>
           <p:nvPr/>
         </p:nvSpPr>
@@ -17054,6 +16797,3185 @@
           <a:lstStyle/>
           <a:p>
             <a:r>
+              <a:t>Sezonluk Alım Zamanlaması</a:t>
+            </a:r>
+          </a:p>
+        </p:txBody>
+      </p:sp>
+      <p:sp>
+        <p:nvSpPr>
+          <p:cNvPr id="3" name="Rectangle 2"/>
+          <p:cNvSpPr/>
+          <p:nvPr/>
+        </p:nvSpPr>
+        <p:spPr>
+          <a:xfrm>
+            <a:off x="548640" y="1371600"/>
+            <a:ext cx="3566160" cy="1828800"/>
+          </a:xfrm>
+          <a:prstGeom prst="rect">
+            <a:avLst/>
+          </a:prstGeom>
+          <a:solidFill>
+            <a:srgbClr val="FFFFFF"/>
+          </a:solidFill>
+          <a:ln w="12700">
+            <a:solidFill>
+              <a:srgbClr val="DCDCDC"/>
+            </a:solidFill>
+          </a:ln>
+          <a:effectLst/>
+        </p:spPr>
+        <p:style>
+          <a:lnRef idx="1">
+            <a:schemeClr val="accent1"/>
+          </a:lnRef>
+          <a:fillRef idx="3">
+            <a:schemeClr val="accent1"/>
+          </a:fillRef>
+          <a:effectRef idx="2">
+            <a:schemeClr val="accent1"/>
+          </a:effectRef>
+          <a:fontRef idx="minor">
+            <a:schemeClr val="lt1"/>
+          </a:fontRef>
+        </p:style>
+        <p:txBody>
+          <a:bodyPr rtlCol="0" anchor="ctr"/>
+          <a:lstStyle/>
+          <a:p>
+            <a:pPr algn="ctr"/>
+          </a:p>
+        </p:txBody>
+      </p:sp>
+      <p:sp>
+        <p:nvSpPr>
+          <p:cNvPr id="4" name="Rectangle 3"/>
+          <p:cNvSpPr/>
+          <p:nvPr/>
+        </p:nvSpPr>
+        <p:spPr>
+          <a:xfrm>
+            <a:off x="548640" y="1371600"/>
+            <a:ext cx="68580" cy="1828800"/>
+          </a:xfrm>
+          <a:prstGeom prst="rect">
+            <a:avLst/>
+          </a:prstGeom>
+          <a:solidFill>
+            <a:srgbClr val="9A9A9A"/>
+          </a:solidFill>
+          <a:ln>
+            <a:noFill/>
+          </a:ln>
+          <a:effectLst/>
+        </p:spPr>
+        <p:style>
+          <a:lnRef idx="1">
+            <a:schemeClr val="accent1"/>
+          </a:lnRef>
+          <a:fillRef idx="3">
+            <a:schemeClr val="accent1"/>
+          </a:fillRef>
+          <a:effectRef idx="2">
+            <a:schemeClr val="accent1"/>
+          </a:effectRef>
+          <a:fontRef idx="minor">
+            <a:schemeClr val="lt1"/>
+          </a:fontRef>
+        </p:style>
+        <p:txBody>
+          <a:bodyPr rtlCol="0" anchor="ctr"/>
+          <a:lstStyle/>
+          <a:p>
+            <a:pPr algn="ctr"/>
+          </a:p>
+        </p:txBody>
+      </p:sp>
+      <p:pic>
+        <p:nvPicPr>
+          <p:cNvPr id="5" name="Picture 4" descr="workflow.png"/>
+          <p:cNvPicPr>
+            <a:picLocks noChangeAspect="1"/>
+          </p:cNvPicPr>
+          <p:nvPr/>
+        </p:nvPicPr>
+        <p:blipFill>
+          <a:blip r:embed="rId3"/>
+          <a:stretch>
+            <a:fillRect/>
+          </a:stretch>
+        </p:blipFill>
+        <p:spPr>
+          <a:xfrm>
+            <a:off x="3639312" y="1536192"/>
+            <a:ext cx="274320" cy="274320"/>
+          </a:xfrm>
+          <a:prstGeom prst="rect">
+            <a:avLst/>
+          </a:prstGeom>
+        </p:spPr>
+      </p:pic>
+      <p:sp>
+        <p:nvSpPr>
+          <p:cNvPr id="6" name="TextBox 5"/>
+          <p:cNvSpPr txBox="1"/>
+          <p:nvPr/>
+        </p:nvSpPr>
+        <p:spPr>
+          <a:xfrm>
+            <a:off x="804672" y="1536192"/>
+            <a:ext cx="2697480" cy="384048"/>
+          </a:xfrm>
+          <a:prstGeom prst="rect">
+            <a:avLst/>
+          </a:prstGeom>
+          <a:noFill/>
+        </p:spPr>
+        <p:txBody>
+          <a:bodyPr wrap="square" anchor="t">
+            <a:spAutoFit/>
+          </a:bodyPr>
+          <a:lstStyle/>
+          <a:p>
+            <a:pPr algn="l">
+              <a:lnSpc>
+                <a:spcPct val="105000"/>
+              </a:lnSpc>
+            </a:pPr>
+            <a:r>
+              <a:rPr sz="900" b="1">
+                <a:solidFill>
+                  <a:srgbClr val="6E6E6E"/>
+                </a:solidFill>
+                <a:latin typeface="Calibri"/>
+              </a:rPr>
+              <a:t>ORTALAMA ALIM GÜNÜ</a:t>
+            </a:r>
+          </a:p>
+        </p:txBody>
+      </p:sp>
+      <p:sp>
+        <p:nvSpPr>
+          <p:cNvPr id="7" name="TextBox 6"/>
+          <p:cNvSpPr txBox="1"/>
+          <p:nvPr/>
+        </p:nvSpPr>
+        <p:spPr>
+          <a:xfrm>
+            <a:off x="804672" y="1975104"/>
+            <a:ext cx="3154679" cy="658368"/>
+          </a:xfrm>
+          <a:prstGeom prst="rect">
+            <a:avLst/>
+          </a:prstGeom>
+          <a:noFill/>
+        </p:spPr>
+        <p:txBody>
+          <a:bodyPr wrap="square" anchor="t">
+            <a:spAutoFit/>
+          </a:bodyPr>
+          <a:lstStyle/>
+          <a:p>
+            <a:pPr algn="l">
+              <a:lnSpc>
+                <a:spcPct val="100000"/>
+              </a:lnSpc>
+            </a:pPr>
+            <a:r>
+              <a:rPr sz="2200" b="1">
+                <a:solidFill>
+                  <a:srgbClr val="9A9A9A"/>
+                </a:solidFill>
+                <a:latin typeface="Calibri"/>
+              </a:rPr>
+              <a:t>2,5 gün geç</a:t>
+            </a:r>
+          </a:p>
+        </p:txBody>
+      </p:sp>
+      <p:sp>
+        <p:nvSpPr>
+          <p:cNvPr id="8" name="TextBox 7"/>
+          <p:cNvSpPr txBox="1"/>
+          <p:nvPr/>
+        </p:nvSpPr>
+        <p:spPr>
+          <a:xfrm>
+            <a:off x="804672" y="2688336"/>
+            <a:ext cx="3154679" cy="457200"/>
+          </a:xfrm>
+          <a:prstGeom prst="rect">
+            <a:avLst/>
+          </a:prstGeom>
+          <a:noFill/>
+        </p:spPr>
+        <p:txBody>
+          <a:bodyPr wrap="square" anchor="t">
+            <a:spAutoFit/>
+          </a:bodyPr>
+          <a:lstStyle/>
+          <a:p>
+            <a:pPr algn="l">
+              <a:lnSpc>
+                <a:spcPct val="105000"/>
+              </a:lnSpc>
+            </a:pPr>
+            <a:r>
+              <a:rPr sz="1000" b="0">
+                <a:solidFill>
+                  <a:srgbClr val="6E6E6E"/>
+                </a:solidFill>
+                <a:latin typeface="Calibri"/>
+              </a:rPr>
+              <a:t>takvim ölçüsü · 225. → 228. gün</a:t>
+            </a:r>
+          </a:p>
+        </p:txBody>
+      </p:sp>
+      <p:sp>
+        <p:nvSpPr>
+          <p:cNvPr id="9" name="Rectangle 8"/>
+          <p:cNvSpPr/>
+          <p:nvPr/>
+        </p:nvSpPr>
+        <p:spPr>
+          <a:xfrm>
+            <a:off x="4279392" y="1371600"/>
+            <a:ext cx="3566160" cy="1828800"/>
+          </a:xfrm>
+          <a:prstGeom prst="rect">
+            <a:avLst/>
+          </a:prstGeom>
+          <a:solidFill>
+            <a:srgbClr val="FFFFFF"/>
+          </a:solidFill>
+          <a:ln w="12700">
+            <a:solidFill>
+              <a:srgbClr val="DCDCDC"/>
+            </a:solidFill>
+          </a:ln>
+          <a:effectLst/>
+        </p:spPr>
+        <p:style>
+          <a:lnRef idx="1">
+            <a:schemeClr val="accent1"/>
+          </a:lnRef>
+          <a:fillRef idx="3">
+            <a:schemeClr val="accent1"/>
+          </a:fillRef>
+          <a:effectRef idx="2">
+            <a:schemeClr val="accent1"/>
+          </a:effectRef>
+          <a:fontRef idx="minor">
+            <a:schemeClr val="lt1"/>
+          </a:fontRef>
+        </p:style>
+        <p:txBody>
+          <a:bodyPr rtlCol="0" anchor="ctr"/>
+          <a:lstStyle/>
+          <a:p>
+            <a:pPr algn="ctr"/>
+          </a:p>
+        </p:txBody>
+      </p:sp>
+      <p:sp>
+        <p:nvSpPr>
+          <p:cNvPr id="10" name="Rectangle 9"/>
+          <p:cNvSpPr/>
+          <p:nvPr/>
+        </p:nvSpPr>
+        <p:spPr>
+          <a:xfrm>
+            <a:off x="4279392" y="1371600"/>
+            <a:ext cx="68580" cy="1828800"/>
+          </a:xfrm>
+          <a:prstGeom prst="rect">
+            <a:avLst/>
+          </a:prstGeom>
+          <a:solidFill>
+            <a:srgbClr val="A6001A"/>
+          </a:solidFill>
+          <a:ln>
+            <a:noFill/>
+          </a:ln>
+          <a:effectLst/>
+        </p:spPr>
+        <p:style>
+          <a:lnRef idx="1">
+            <a:schemeClr val="accent1"/>
+          </a:lnRef>
+          <a:fillRef idx="3">
+            <a:schemeClr val="accent1"/>
+          </a:fillRef>
+          <a:effectRef idx="2">
+            <a:schemeClr val="accent1"/>
+          </a:effectRef>
+          <a:fontRef idx="minor">
+            <a:schemeClr val="lt1"/>
+          </a:fontRef>
+        </p:style>
+        <p:txBody>
+          <a:bodyPr rtlCol="0" anchor="ctr"/>
+          <a:lstStyle/>
+          <a:p>
+            <a:pPr algn="ctr"/>
+          </a:p>
+        </p:txBody>
+      </p:sp>
+      <p:pic>
+        <p:nvPicPr>
+          <p:cNvPr id="11" name="Picture 10" descr="users.png"/>
+          <p:cNvPicPr>
+            <a:picLocks noChangeAspect="1"/>
+          </p:cNvPicPr>
+          <p:nvPr/>
+        </p:nvPicPr>
+        <p:blipFill>
+          <a:blip r:embed="rId4"/>
+          <a:stretch>
+            <a:fillRect/>
+          </a:stretch>
+        </p:blipFill>
+        <p:spPr>
+          <a:xfrm>
+            <a:off x="7370064" y="1536192"/>
+            <a:ext cx="274320" cy="274320"/>
+          </a:xfrm>
+          <a:prstGeom prst="rect">
+            <a:avLst/>
+          </a:prstGeom>
+        </p:spPr>
+      </p:pic>
+      <p:sp>
+        <p:nvSpPr>
+          <p:cNvPr id="12" name="TextBox 11"/>
+          <p:cNvSpPr txBox="1"/>
+          <p:nvPr/>
+        </p:nvSpPr>
+        <p:spPr>
+          <a:xfrm>
+            <a:off x="4535424" y="1536192"/>
+            <a:ext cx="2697480" cy="384048"/>
+          </a:xfrm>
+          <a:prstGeom prst="rect">
+            <a:avLst/>
+          </a:prstGeom>
+          <a:noFill/>
+        </p:spPr>
+        <p:txBody>
+          <a:bodyPr wrap="square" anchor="t">
+            <a:spAutoFit/>
+          </a:bodyPr>
+          <a:lstStyle/>
+          <a:p>
+            <a:pPr algn="l">
+              <a:lnSpc>
+                <a:spcPct val="105000"/>
+              </a:lnSpc>
+            </a:pPr>
+            <a:r>
+              <a:rPr sz="900" b="1">
+                <a:solidFill>
+                  <a:srgbClr val="6E6E6E"/>
+                </a:solidFill>
+                <a:latin typeface="Calibri"/>
+              </a:rPr>
+              <a:t>TEMMUZ VE ÖNCESİ ALIM</a:t>
+            </a:r>
+          </a:p>
+        </p:txBody>
+      </p:sp>
+      <p:sp>
+        <p:nvSpPr>
+          <p:cNvPr id="13" name="TextBox 12"/>
+          <p:cNvSpPr txBox="1"/>
+          <p:nvPr/>
+        </p:nvSpPr>
+        <p:spPr>
+          <a:xfrm>
+            <a:off x="4535424" y="1975104"/>
+            <a:ext cx="3154679" cy="658368"/>
+          </a:xfrm>
+          <a:prstGeom prst="rect">
+            <a:avLst/>
+          </a:prstGeom>
+          <a:noFill/>
+        </p:spPr>
+        <p:txBody>
+          <a:bodyPr wrap="square" anchor="t">
+            <a:spAutoFit/>
+          </a:bodyPr>
+          <a:lstStyle/>
+          <a:p>
+            <a:pPr algn="l">
+              <a:lnSpc>
+                <a:spcPct val="100000"/>
+              </a:lnSpc>
+            </a:pPr>
+            <a:r>
+              <a:rPr sz="3000" b="1">
+                <a:solidFill>
+                  <a:srgbClr val="A6001A"/>
+                </a:solidFill>
+                <a:latin typeface="Calibri"/>
+              </a:rPr>
+              <a:t>6 → 2</a:t>
+            </a:r>
+          </a:p>
+        </p:txBody>
+      </p:sp>
+      <p:sp>
+        <p:nvSpPr>
+          <p:cNvPr id="14" name="TextBox 13"/>
+          <p:cNvSpPr txBox="1"/>
+          <p:nvPr/>
+        </p:nvSpPr>
+        <p:spPr>
+          <a:xfrm>
+            <a:off x="4535424" y="2688336"/>
+            <a:ext cx="3154679" cy="457200"/>
+          </a:xfrm>
+          <a:prstGeom prst="rect">
+            <a:avLst/>
+          </a:prstGeom>
+          <a:noFill/>
+        </p:spPr>
+        <p:txBody>
+          <a:bodyPr wrap="square" anchor="t">
+            <a:spAutoFit/>
+          </a:bodyPr>
+          <a:lstStyle/>
+          <a:p>
+            <a:pPr algn="l">
+              <a:lnSpc>
+                <a:spcPct val="105000"/>
+              </a:lnSpc>
+            </a:pPr>
+            <a:r>
+              <a:rPr sz="1000" b="0">
+                <a:solidFill>
+                  <a:srgbClr val="6E6E6E"/>
+                </a:solidFill>
+                <a:latin typeface="Calibri"/>
+              </a:rPr>
+              <a:t>gerçek erken alım azaldı</a:t>
+            </a:r>
+          </a:p>
+        </p:txBody>
+      </p:sp>
+      <p:sp>
+        <p:nvSpPr>
+          <p:cNvPr id="15" name="Rectangle 14"/>
+          <p:cNvSpPr/>
+          <p:nvPr/>
+        </p:nvSpPr>
+        <p:spPr>
+          <a:xfrm>
+            <a:off x="8001000" y="1371600"/>
+            <a:ext cx="3566160" cy="1828800"/>
+          </a:xfrm>
+          <a:prstGeom prst="rect">
+            <a:avLst/>
+          </a:prstGeom>
+          <a:solidFill>
+            <a:srgbClr val="FFFFFF"/>
+          </a:solidFill>
+          <a:ln w="12700">
+            <a:solidFill>
+              <a:srgbClr val="DCDCDC"/>
+            </a:solidFill>
+          </a:ln>
+          <a:effectLst/>
+        </p:spPr>
+        <p:style>
+          <a:lnRef idx="1">
+            <a:schemeClr val="accent1"/>
+          </a:lnRef>
+          <a:fillRef idx="3">
+            <a:schemeClr val="accent1"/>
+          </a:fillRef>
+          <a:effectRef idx="2">
+            <a:schemeClr val="accent1"/>
+          </a:effectRef>
+          <a:fontRef idx="minor">
+            <a:schemeClr val="lt1"/>
+          </a:fontRef>
+        </p:style>
+        <p:txBody>
+          <a:bodyPr rtlCol="0" anchor="ctr"/>
+          <a:lstStyle/>
+          <a:p>
+            <a:pPr algn="ctr"/>
+          </a:p>
+        </p:txBody>
+      </p:sp>
+      <p:sp>
+        <p:nvSpPr>
+          <p:cNvPr id="16" name="Rectangle 15"/>
+          <p:cNvSpPr/>
+          <p:nvPr/>
+        </p:nvSpPr>
+        <p:spPr>
+          <a:xfrm>
+            <a:off x="8001000" y="1371600"/>
+            <a:ext cx="68580" cy="1828800"/>
+          </a:xfrm>
+          <a:prstGeom prst="rect">
+            <a:avLst/>
+          </a:prstGeom>
+          <a:solidFill>
+            <a:srgbClr val="A6001A"/>
+          </a:solidFill>
+          <a:ln>
+            <a:noFill/>
+          </a:ln>
+          <a:effectLst/>
+        </p:spPr>
+        <p:style>
+          <a:lnRef idx="1">
+            <a:schemeClr val="accent1"/>
+          </a:lnRef>
+          <a:fillRef idx="3">
+            <a:schemeClr val="accent1"/>
+          </a:fillRef>
+          <a:effectRef idx="2">
+            <a:schemeClr val="accent1"/>
+          </a:effectRef>
+          <a:fontRef idx="minor">
+            <a:schemeClr val="lt1"/>
+          </a:fontRef>
+        </p:style>
+        <p:txBody>
+          <a:bodyPr rtlCol="0" anchor="ctr"/>
+          <a:lstStyle/>
+          <a:p>
+            <a:pPr algn="ctr"/>
+          </a:p>
+        </p:txBody>
+      </p:sp>
+      <p:pic>
+        <p:nvPicPr>
+          <p:cNvPr id="17" name="Picture 16" descr="package.png"/>
+          <p:cNvPicPr>
+            <a:picLocks noChangeAspect="1"/>
+          </p:cNvPicPr>
+          <p:nvPr/>
+        </p:nvPicPr>
+        <p:blipFill>
+          <a:blip r:embed="rId5"/>
+          <a:stretch>
+            <a:fillRect/>
+          </a:stretch>
+        </p:blipFill>
+        <p:spPr>
+          <a:xfrm>
+            <a:off x="11091672" y="1536192"/>
+            <a:ext cx="274320" cy="274320"/>
+          </a:xfrm>
+          <a:prstGeom prst="rect">
+            <a:avLst/>
+          </a:prstGeom>
+        </p:spPr>
+      </p:pic>
+      <p:sp>
+        <p:nvSpPr>
+          <p:cNvPr id="18" name="TextBox 17"/>
+          <p:cNvSpPr txBox="1"/>
+          <p:nvPr/>
+        </p:nvSpPr>
+        <p:spPr>
+          <a:xfrm>
+            <a:off x="8257031" y="1536192"/>
+            <a:ext cx="2697480" cy="384048"/>
+          </a:xfrm>
+          <a:prstGeom prst="rect">
+            <a:avLst/>
+          </a:prstGeom>
+          <a:noFill/>
+        </p:spPr>
+        <p:txBody>
+          <a:bodyPr wrap="square" anchor="t">
+            <a:spAutoFit/>
+          </a:bodyPr>
+          <a:lstStyle/>
+          <a:p>
+            <a:pPr algn="l">
+              <a:lnSpc>
+                <a:spcPct val="105000"/>
+              </a:lnSpc>
+            </a:pPr>
+            <a:r>
+              <a:rPr sz="900" b="1">
+                <a:solidFill>
+                  <a:srgbClr val="6E6E6E"/>
+                </a:solidFill>
+                <a:latin typeface="Calibri"/>
+              </a:rPr>
+              <a:t>1–14 AĞUSTOS İŞ HACMİ</a:t>
+            </a:r>
+          </a:p>
+        </p:txBody>
+      </p:sp>
+      <p:sp>
+        <p:nvSpPr>
+          <p:cNvPr id="19" name="TextBox 18"/>
+          <p:cNvSpPr txBox="1"/>
+          <p:nvPr/>
+        </p:nvSpPr>
+        <p:spPr>
+          <a:xfrm>
+            <a:off x="8257031" y="1975104"/>
+            <a:ext cx="3154679" cy="658368"/>
+          </a:xfrm>
+          <a:prstGeom prst="rect">
+            <a:avLst/>
+          </a:prstGeom>
+          <a:noFill/>
+        </p:spPr>
+        <p:txBody>
+          <a:bodyPr wrap="square" anchor="t">
+            <a:spAutoFit/>
+          </a:bodyPr>
+          <a:lstStyle/>
+          <a:p>
+            <a:pPr algn="l">
+              <a:lnSpc>
+                <a:spcPct val="100000"/>
+              </a:lnSpc>
+            </a:pPr>
+            <a:r>
+              <a:rPr sz="3000" b="1">
+                <a:solidFill>
+                  <a:srgbClr val="A6001A"/>
+                </a:solidFill>
+                <a:latin typeface="Calibri"/>
+              </a:rPr>
+              <a:t>+%25,1</a:t>
+            </a:r>
+          </a:p>
+        </p:txBody>
+      </p:sp>
+      <p:sp>
+        <p:nvSpPr>
+          <p:cNvPr id="20" name="TextBox 19"/>
+          <p:cNvSpPr txBox="1"/>
+          <p:nvPr/>
+        </p:nvSpPr>
+        <p:spPr>
+          <a:xfrm>
+            <a:off x="8257031" y="2688336"/>
+            <a:ext cx="3154679" cy="457200"/>
+          </a:xfrm>
+          <a:prstGeom prst="rect">
+            <a:avLst/>
+          </a:prstGeom>
+          <a:noFill/>
+        </p:spPr>
+        <p:txBody>
+          <a:bodyPr wrap="square" anchor="t">
+            <a:spAutoFit/>
+          </a:bodyPr>
+          <a:lstStyle/>
+          <a:p>
+            <a:pPr algn="l">
+              <a:lnSpc>
+                <a:spcPct val="105000"/>
+              </a:lnSpc>
+            </a:pPr>
+            <a:r>
+              <a:rPr sz="1000" b="0">
+                <a:solidFill>
+                  <a:srgbClr val="6E6E6E"/>
+                </a:solidFill>
+                <a:latin typeface="Calibri"/>
+              </a:rPr>
+              <a:t>137.483 → 171.957 adet</a:t>
+            </a:r>
+          </a:p>
+        </p:txBody>
+      </p:sp>
+      <p:graphicFrame>
+        <p:nvGraphicFramePr>
+          <p:cNvPr id="21" name="Table 20"/>
+          <p:cNvGraphicFramePr>
+            <a:graphicFrameLocks noGrp="1"/>
+          </p:cNvGraphicFramePr>
+          <p:nvPr/>
+        </p:nvGraphicFramePr>
+        <p:xfrm>
+          <a:off x="548640" y="3246120"/>
+          <a:ext cx="11018520" cy="2011680"/>
+        </p:xfrm>
+        <a:graphic>
+          <a:graphicData uri="http://schemas.openxmlformats.org/drawingml/2006/table">
+            <a:tbl>
+              <a:tblPr firstRow="1" bandRow="1">
+                <a:tableStyleId>{5C22544A-7EE6-4342-B048-85BDC9FD1C3A}</a:tableStyleId>
+              </a:tblPr>
+              <a:tblGrid>
+                <a:gridCol w="3291840"/>
+                <a:gridCol w="1737360"/>
+                <a:gridCol w="1737360"/>
+                <a:gridCol w="4251960"/>
+              </a:tblGrid>
+              <a:tr h="182880">
+                <a:tc>
+                  <a:txBody>
+                    <a:bodyPr/>
+                    <a:lstStyle/>
+                    <a:p>
+                      <a:pPr algn="l"/>
+                      <a:r>
+                        <a:rPr sz="800" b="1">
+                          <a:solidFill>
+                            <a:srgbClr val="FFFFFF"/>
+                          </a:solidFill>
+                          <a:latin typeface="Calibri"/>
+                        </a:rPr>
+                        <a:t>Ölçü</a:t>
+                      </a:r>
+                    </a:p>
+                  </a:txBody>
+                  <a:tcPr>
+                    <a:solidFill>
+                      <a:srgbClr val="E30622"/>
+                    </a:solidFill>
+                  </a:tcPr>
+                </a:tc>
+                <a:tc>
+                  <a:txBody>
+                    <a:bodyPr/>
+                    <a:lstStyle/>
+                    <a:p>
+                      <a:pPr algn="ctr"/>
+                      <a:r>
+                        <a:rPr sz="800" b="1">
+                          <a:solidFill>
+                            <a:srgbClr val="FFFFFF"/>
+                          </a:solidFill>
+                          <a:latin typeface="Calibri"/>
+                        </a:rPr>
+                        <a:t>2025</a:t>
+                      </a:r>
+                    </a:p>
+                  </a:txBody>
+                  <a:tcPr>
+                    <a:solidFill>
+                      <a:srgbClr val="E30622"/>
+                    </a:solidFill>
+                  </a:tcPr>
+                </a:tc>
+                <a:tc>
+                  <a:txBody>
+                    <a:bodyPr/>
+                    <a:lstStyle/>
+                    <a:p>
+                      <a:pPr algn="ctr"/>
+                      <a:r>
+                        <a:rPr sz="800" b="1">
+                          <a:solidFill>
+                            <a:srgbClr val="FFFFFF"/>
+                          </a:solidFill>
+                          <a:latin typeface="Calibri"/>
+                        </a:rPr>
+                        <a:t>2026</a:t>
+                      </a:r>
+                    </a:p>
+                  </a:txBody>
+                  <a:tcPr>
+                    <a:solidFill>
+                      <a:srgbClr val="E30622"/>
+                    </a:solidFill>
+                  </a:tcPr>
+                </a:tc>
+                <a:tc>
+                  <a:txBody>
+                    <a:bodyPr/>
+                    <a:lstStyle/>
+                    <a:p>
+                      <a:pPr algn="l"/>
+                      <a:r>
+                        <a:rPr sz="800" b="1">
+                          <a:solidFill>
+                            <a:srgbClr val="FFFFFF"/>
+                          </a:solidFill>
+                          <a:latin typeface="Calibri"/>
+                        </a:rPr>
+                        <a:t>Yorum</a:t>
+                      </a:r>
+                    </a:p>
+                  </a:txBody>
+                  <a:tcPr>
+                    <a:solidFill>
+                      <a:srgbClr val="E30622"/>
+                    </a:solidFill>
+                  </a:tcPr>
+                </a:tc>
+              </a:tr>
+              <a:tr h="182880">
+                <a:tc>
+                  <a:txBody>
+                    <a:bodyPr/>
+                    <a:lstStyle/>
+                    <a:p>
+                      <a:pPr algn="l"/>
+                      <a:r>
+                        <a:rPr sz="900" b="0">
+                          <a:solidFill>
+                            <a:srgbClr val="333333"/>
+                          </a:solidFill>
+                          <a:latin typeface="Calibri"/>
+                        </a:rPr>
+                        <a:t>Ortalama alım günü (takvim)</a:t>
+                      </a:r>
+                    </a:p>
+                  </a:txBody>
+                  <a:tcPr>
+                    <a:solidFill>
+                      <a:srgbClr val="FFFFFF"/>
+                    </a:solidFill>
+                  </a:tcPr>
+                </a:tc>
+                <a:tc>
+                  <a:txBody>
+                    <a:bodyPr/>
+                    <a:lstStyle/>
+                    <a:p>
+                      <a:pPr algn="ctr"/>
+                      <a:r>
+                        <a:rPr sz="900" b="0">
+                          <a:solidFill>
+                            <a:srgbClr val="333333"/>
+                          </a:solidFill>
+                          <a:latin typeface="Calibri"/>
+                        </a:rPr>
+                        <a:t>225. gün</a:t>
+                      </a:r>
+                    </a:p>
+                  </a:txBody>
+                  <a:tcPr>
+                    <a:solidFill>
+                      <a:srgbClr val="FFFFFF"/>
+                    </a:solidFill>
+                  </a:tcPr>
+                </a:tc>
+                <a:tc>
+                  <a:txBody>
+                    <a:bodyPr/>
+                    <a:lstStyle/>
+                    <a:p>
+                      <a:pPr algn="ctr"/>
+                      <a:r>
+                        <a:rPr sz="900" b="1">
+                          <a:solidFill>
+                            <a:srgbClr val="333333"/>
+                          </a:solidFill>
+                          <a:latin typeface="Calibri"/>
+                        </a:rPr>
+                        <a:t>228. gün</a:t>
+                      </a:r>
+                    </a:p>
+                  </a:txBody>
+                  <a:tcPr>
+                    <a:solidFill>
+                      <a:srgbClr val="FFFFFF"/>
+                    </a:solidFill>
+                  </a:tcPr>
+                </a:tc>
+                <a:tc>
+                  <a:txBody>
+                    <a:bodyPr/>
+                    <a:lstStyle/>
+                    <a:p>
+                      <a:pPr algn="l"/>
+                      <a:r>
+                        <a:rPr sz="900" b="0">
+                          <a:solidFill>
+                            <a:srgbClr val="A6001A"/>
+                          </a:solidFill>
+                          <a:latin typeface="Calibri"/>
+                        </a:rPr>
+                        <a:t>2026 alımı ortalama 2,5 gün DAHA GEÇ</a:t>
+                      </a:r>
+                    </a:p>
+                  </a:txBody>
+                  <a:tcPr>
+                    <a:solidFill>
+                      <a:srgbClr val="FFFFFF"/>
+                    </a:solidFill>
+                  </a:tcPr>
+                </a:tc>
+              </a:tr>
+              <a:tr h="182880">
+                <a:tc>
+                  <a:txBody>
+                    <a:bodyPr/>
+                    <a:lstStyle/>
+                    <a:p>
+                      <a:pPr algn="l"/>
+                      <a:r>
+                        <a:rPr sz="900" b="0">
+                          <a:solidFill>
+                            <a:srgbClr val="333333"/>
+                          </a:solidFill>
+                          <a:latin typeface="Calibri"/>
+                        </a:rPr>
+                        <a:t>Temmuz ve öncesi alınan</a:t>
+                      </a:r>
+                    </a:p>
+                  </a:txBody>
+                  <a:tcPr>
+                    <a:solidFill>
+                      <a:srgbClr val="FAFAFA"/>
+                    </a:solidFill>
+                  </a:tcPr>
+                </a:tc>
+                <a:tc>
+                  <a:txBody>
+                    <a:bodyPr/>
+                    <a:lstStyle/>
+                    <a:p>
+                      <a:pPr algn="ctr"/>
+                      <a:r>
+                        <a:rPr sz="900" b="0">
+                          <a:solidFill>
+                            <a:srgbClr val="333333"/>
+                          </a:solidFill>
+                          <a:latin typeface="Calibri"/>
+                        </a:rPr>
+                        <a:t>6 kişi</a:t>
+                      </a:r>
+                    </a:p>
+                  </a:txBody>
+                  <a:tcPr>
+                    <a:solidFill>
+                      <a:srgbClr val="FAFAFA"/>
+                    </a:solidFill>
+                  </a:tcPr>
+                </a:tc>
+                <a:tc>
+                  <a:txBody>
+                    <a:bodyPr/>
+                    <a:lstStyle/>
+                    <a:p>
+                      <a:pPr algn="ctr"/>
+                      <a:r>
+                        <a:rPr sz="900" b="1">
+                          <a:solidFill>
+                            <a:srgbClr val="333333"/>
+                          </a:solidFill>
+                          <a:latin typeface="Calibri"/>
+                        </a:rPr>
+                        <a:t>2 kişi</a:t>
+                      </a:r>
+                    </a:p>
+                  </a:txBody>
+                  <a:tcPr>
+                    <a:solidFill>
+                      <a:srgbClr val="FAFAFA"/>
+                    </a:solidFill>
+                  </a:tcPr>
+                </a:tc>
+                <a:tc>
+                  <a:txBody>
+                    <a:bodyPr/>
+                    <a:lstStyle/>
+                    <a:p>
+                      <a:pPr algn="l"/>
+                      <a:r>
+                        <a:rPr sz="900" b="0">
+                          <a:solidFill>
+                            <a:srgbClr val="A6001A"/>
+                          </a:solidFill>
+                          <a:latin typeface="Calibri"/>
+                        </a:rPr>
+                        <a:t>erken alım azaldı</a:t>
+                      </a:r>
+                    </a:p>
+                  </a:txBody>
+                  <a:tcPr>
+                    <a:solidFill>
+                      <a:srgbClr val="FAFAFA"/>
+                    </a:solidFill>
+                  </a:tcPr>
+                </a:tc>
+              </a:tr>
+              <a:tr h="182880">
+                <a:tc>
+                  <a:txBody>
+                    <a:bodyPr/>
+                    <a:lstStyle/>
+                    <a:p>
+                      <a:pPr algn="l"/>
+                      <a:r>
+                        <a:rPr sz="900" b="0">
+                          <a:solidFill>
+                            <a:srgbClr val="333333"/>
+                          </a:solidFill>
+                          <a:latin typeface="Calibri"/>
+                        </a:rPr>
+                        <a:t>Açılıştan 45+ gün önce alınan</a:t>
+                      </a:r>
+                    </a:p>
+                  </a:txBody>
+                  <a:tcPr>
+                    <a:solidFill>
+                      <a:srgbClr val="FFFFFF"/>
+                    </a:solidFill>
+                  </a:tcPr>
+                </a:tc>
+                <a:tc>
+                  <a:txBody>
+                    <a:bodyPr/>
+                    <a:lstStyle/>
+                    <a:p>
+                      <a:pPr algn="ctr"/>
+                      <a:r>
+                        <a:rPr sz="900" b="0">
+                          <a:solidFill>
+                            <a:srgbClr val="333333"/>
+                          </a:solidFill>
+                          <a:latin typeface="Calibri"/>
+                        </a:rPr>
+                        <a:t>4 kişi</a:t>
+                      </a:r>
+                    </a:p>
+                  </a:txBody>
+                  <a:tcPr>
+                    <a:solidFill>
+                      <a:srgbClr val="FFFFFF"/>
+                    </a:solidFill>
+                  </a:tcPr>
+                </a:tc>
+                <a:tc>
+                  <a:txBody>
+                    <a:bodyPr/>
+                    <a:lstStyle/>
+                    <a:p>
+                      <a:pPr algn="ctr"/>
+                      <a:r>
+                        <a:rPr sz="900" b="1">
+                          <a:solidFill>
+                            <a:srgbClr val="333333"/>
+                          </a:solidFill>
+                          <a:latin typeface="Calibri"/>
+                        </a:rPr>
+                        <a:t>2 kişi</a:t>
+                      </a:r>
+                    </a:p>
+                  </a:txBody>
+                  <a:tcPr>
+                    <a:solidFill>
+                      <a:srgbClr val="FFFFFF"/>
+                    </a:solidFill>
+                  </a:tcPr>
+                </a:tc>
+                <a:tc>
+                  <a:txBody>
+                    <a:bodyPr/>
+                    <a:lstStyle/>
+                    <a:p>
+                      <a:pPr algn="l"/>
+                      <a:r>
+                        <a:rPr sz="900" b="0">
+                          <a:solidFill>
+                            <a:srgbClr val="A6001A"/>
+                          </a:solidFill>
+                          <a:latin typeface="Calibri"/>
+                        </a:rPr>
+                        <a:t>çok erken alım azaldı</a:t>
+                      </a:r>
+                    </a:p>
+                  </a:txBody>
+                  <a:tcPr>
+                    <a:solidFill>
+                      <a:srgbClr val="FFFFFF"/>
+                    </a:solidFill>
+                  </a:tcPr>
+                </a:tc>
+              </a:tr>
+              <a:tr h="182880">
+                <a:tc>
+                  <a:txBody>
+                    <a:bodyPr/>
+                    <a:lstStyle/>
+                    <a:p>
+                      <a:pPr algn="l"/>
+                      <a:r>
+                        <a:rPr sz="900" b="0">
+                          <a:solidFill>
+                            <a:srgbClr val="333333"/>
+                          </a:solidFill>
+                          <a:latin typeface="Calibri"/>
+                        </a:rPr>
+                        <a:t>1–14 Ağustos alınan</a:t>
+                      </a:r>
+                    </a:p>
+                  </a:txBody>
+                  <a:tcPr>
+                    <a:solidFill>
+                      <a:srgbClr val="FAFAFA"/>
+                    </a:solidFill>
+                  </a:tcPr>
+                </a:tc>
+                <a:tc>
+                  <a:txBody>
+                    <a:bodyPr/>
+                    <a:lstStyle/>
+                    <a:p>
+                      <a:pPr algn="ctr"/>
+                      <a:r>
+                        <a:rPr sz="900" b="0">
+                          <a:solidFill>
+                            <a:srgbClr val="333333"/>
+                          </a:solidFill>
+                          <a:latin typeface="Calibri"/>
+                        </a:rPr>
+                        <a:t>12 kişi</a:t>
+                      </a:r>
+                    </a:p>
+                  </a:txBody>
+                  <a:tcPr>
+                    <a:solidFill>
+                      <a:srgbClr val="FAFAFA"/>
+                    </a:solidFill>
+                  </a:tcPr>
+                </a:tc>
+                <a:tc>
+                  <a:txBody>
+                    <a:bodyPr/>
+                    <a:lstStyle/>
+                    <a:p>
+                      <a:pPr algn="ctr"/>
+                      <a:r>
+                        <a:rPr sz="900" b="1">
+                          <a:solidFill>
+                            <a:srgbClr val="333333"/>
+                          </a:solidFill>
+                          <a:latin typeface="Calibri"/>
+                        </a:rPr>
+                        <a:t>30 kişi</a:t>
+                      </a:r>
+                    </a:p>
+                  </a:txBody>
+                  <a:tcPr>
+                    <a:solidFill>
+                      <a:srgbClr val="FAFAFA"/>
+                    </a:solidFill>
+                  </a:tcPr>
+                </a:tc>
+                <a:tc>
+                  <a:txBody>
+                    <a:bodyPr/>
+                    <a:lstStyle/>
+                    <a:p>
+                      <a:pPr algn="l"/>
+                      <a:r>
+                        <a:rPr sz="900" b="0">
+                          <a:solidFill>
+                            <a:srgbClr val="A6001A"/>
+                          </a:solidFill>
+                          <a:latin typeface="Calibri"/>
+                        </a:rPr>
+                        <a:t>artış bu iki haftada</a:t>
+                      </a:r>
+                    </a:p>
+                  </a:txBody>
+                  <a:tcPr>
+                    <a:solidFill>
+                      <a:srgbClr val="FAFAFA"/>
+                    </a:solidFill>
+                  </a:tcPr>
+                </a:tc>
+              </a:tr>
+              <a:tr h="182880">
+                <a:tc>
+                  <a:txBody>
+                    <a:bodyPr/>
+                    <a:lstStyle/>
+                    <a:p>
+                      <a:pPr algn="l"/>
+                      <a:r>
+                        <a:rPr sz="900" b="0">
+                          <a:solidFill>
+                            <a:srgbClr val="333333"/>
+                          </a:solidFill>
+                          <a:latin typeface="Calibri"/>
+                        </a:rPr>
+                        <a:t>1–14 Ağustos ürün adedi</a:t>
+                      </a:r>
+                    </a:p>
+                  </a:txBody>
+                  <a:tcPr>
+                    <a:solidFill>
+                      <a:srgbClr val="FFFFFF"/>
+                    </a:solidFill>
+                  </a:tcPr>
+                </a:tc>
+                <a:tc>
+                  <a:txBody>
+                    <a:bodyPr/>
+                    <a:lstStyle/>
+                    <a:p>
+                      <a:pPr algn="ctr"/>
+                      <a:r>
+                        <a:rPr sz="900" b="0">
+                          <a:solidFill>
+                            <a:srgbClr val="333333"/>
+                          </a:solidFill>
+                          <a:latin typeface="Calibri"/>
+                        </a:rPr>
+                        <a:t>137.483</a:t>
+                      </a:r>
+                    </a:p>
+                  </a:txBody>
+                  <a:tcPr>
+                    <a:solidFill>
+                      <a:srgbClr val="FFFFFF"/>
+                    </a:solidFill>
+                  </a:tcPr>
+                </a:tc>
+                <a:tc>
+                  <a:txBody>
+                    <a:bodyPr/>
+                    <a:lstStyle/>
+                    <a:p>
+                      <a:pPr algn="ctr"/>
+                      <a:r>
+                        <a:rPr sz="900" b="1">
+                          <a:solidFill>
+                            <a:srgbClr val="333333"/>
+                          </a:solidFill>
+                          <a:latin typeface="Calibri"/>
+                        </a:rPr>
+                        <a:t>171.957</a:t>
+                      </a:r>
+                    </a:p>
+                  </a:txBody>
+                  <a:tcPr>
+                    <a:solidFill>
+                      <a:srgbClr val="FFFFFF"/>
+                    </a:solidFill>
+                  </a:tcPr>
+                </a:tc>
+                <a:tc>
+                  <a:txBody>
+                    <a:bodyPr/>
+                    <a:lstStyle/>
+                    <a:p>
+                      <a:pPr algn="l"/>
+                      <a:r>
+                        <a:rPr sz="900" b="0">
+                          <a:solidFill>
+                            <a:srgbClr val="A6001A"/>
+                          </a:solidFill>
+                          <a:latin typeface="Calibri"/>
+                        </a:rPr>
+                        <a:t>iş +%25,1 büyüdü — alım işi takip etti</a:t>
+                      </a:r>
+                    </a:p>
+                  </a:txBody>
+                  <a:tcPr>
+                    <a:solidFill>
+                      <a:srgbClr val="FFFFFF"/>
+                    </a:solidFill>
+                  </a:tcPr>
+                </a:tc>
+              </a:tr>
+              <a:tr h="182880">
+                <a:tc>
+                  <a:txBody>
+                    <a:bodyPr/>
+                    <a:lstStyle/>
+                    <a:p>
+                      <a:pPr algn="l"/>
+                      <a:r>
+                        <a:rPr sz="900" b="0">
+                          <a:solidFill>
+                            <a:srgbClr val="333333"/>
+                          </a:solidFill>
+                          <a:latin typeface="Calibri"/>
+                        </a:rPr>
+                        <a:t>15–31 Ağustos ürün adedi</a:t>
+                      </a:r>
+                    </a:p>
+                  </a:txBody>
+                  <a:tcPr>
+                    <a:solidFill>
+                      <a:srgbClr val="FAFAFA"/>
+                    </a:solidFill>
+                  </a:tcPr>
+                </a:tc>
+                <a:tc>
+                  <a:txBody>
+                    <a:bodyPr/>
+                    <a:lstStyle/>
+                    <a:p>
+                      <a:pPr algn="ctr"/>
+                      <a:r>
+                        <a:rPr sz="900" b="0">
+                          <a:solidFill>
+                            <a:srgbClr val="333333"/>
+                          </a:solidFill>
+                          <a:latin typeface="Calibri"/>
+                        </a:rPr>
+                        <a:t>320.776</a:t>
+                      </a:r>
+                    </a:p>
+                  </a:txBody>
+                  <a:tcPr>
+                    <a:solidFill>
+                      <a:srgbClr val="FAFAFA"/>
+                    </a:solidFill>
+                  </a:tcPr>
+                </a:tc>
+                <a:tc>
+                  <a:txBody>
+                    <a:bodyPr/>
+                    <a:lstStyle/>
+                    <a:p>
+                      <a:pPr algn="ctr"/>
+                      <a:r>
+                        <a:rPr sz="900" b="1">
+                          <a:solidFill>
+                            <a:srgbClr val="333333"/>
+                          </a:solidFill>
+                          <a:latin typeface="Calibri"/>
+                        </a:rPr>
+                        <a:t>311.542</a:t>
+                      </a:r>
+                    </a:p>
+                  </a:txBody>
+                  <a:tcPr>
+                    <a:solidFill>
+                      <a:srgbClr val="FAFAFA"/>
+                    </a:solidFill>
+                  </a:tcPr>
+                </a:tc>
+                <a:tc>
+                  <a:txBody>
+                    <a:bodyPr/>
+                    <a:lstStyle/>
+                    <a:p>
+                      <a:pPr algn="l"/>
+                      <a:r>
+                        <a:rPr sz="900" b="0">
+                          <a:solidFill>
+                            <a:srgbClr val="A6001A"/>
+                          </a:solidFill>
+                          <a:latin typeface="Calibri"/>
+                        </a:rPr>
+                        <a:t>−%2,9 — dalga Eylül'e kaydı</a:t>
+                      </a:r>
+                    </a:p>
+                  </a:txBody>
+                  <a:tcPr>
+                    <a:solidFill>
+                      <a:srgbClr val="FAFAFA"/>
+                    </a:solidFill>
+                  </a:tcPr>
+                </a:tc>
+              </a:tr>
+              <a:tr h="182880">
+                <a:tc>
+                  <a:txBody>
+                    <a:bodyPr/>
+                    <a:lstStyle/>
+                    <a:p>
+                      <a:pPr algn="l"/>
+                      <a:r>
+                        <a:rPr sz="900" b="0">
+                          <a:solidFill>
+                            <a:srgbClr val="333333"/>
+                          </a:solidFill>
+                          <a:latin typeface="Calibri"/>
+                        </a:rPr>
+                        <a:t>31.08'de çalışan sezonluk</a:t>
+                      </a:r>
+                    </a:p>
+                  </a:txBody>
+                  <a:tcPr>
+                    <a:solidFill>
+                      <a:srgbClr val="FFFFFF"/>
+                    </a:solidFill>
+                  </a:tcPr>
+                </a:tc>
+                <a:tc>
+                  <a:txBody>
+                    <a:bodyPr/>
+                    <a:lstStyle/>
+                    <a:p>
+                      <a:pPr algn="ctr"/>
+                      <a:r>
+                        <a:rPr sz="900" b="0">
+                          <a:solidFill>
+                            <a:srgbClr val="333333"/>
+                          </a:solidFill>
+                          <a:latin typeface="Calibri"/>
+                        </a:rPr>
+                        <a:t>65 kişi</a:t>
+                      </a:r>
+                    </a:p>
+                  </a:txBody>
+                  <a:tcPr>
+                    <a:solidFill>
+                      <a:srgbClr val="FFFFFF"/>
+                    </a:solidFill>
+                  </a:tcPr>
+                </a:tc>
+                <a:tc>
+                  <a:txBody>
+                    <a:bodyPr/>
+                    <a:lstStyle/>
+                    <a:p>
+                      <a:pPr algn="ctr"/>
+                      <a:r>
+                        <a:rPr sz="900" b="1">
+                          <a:solidFill>
+                            <a:srgbClr val="333333"/>
+                          </a:solidFill>
+                          <a:latin typeface="Calibri"/>
+                        </a:rPr>
+                        <a:t>62 kişi</a:t>
+                      </a:r>
+                    </a:p>
+                  </a:txBody>
+                  <a:tcPr>
+                    <a:solidFill>
+                      <a:srgbClr val="FFFFFF"/>
+                    </a:solidFill>
+                  </a:tcPr>
+                </a:tc>
+                <a:tc>
+                  <a:txBody>
+                    <a:bodyPr/>
+                    <a:lstStyle/>
+                    <a:p>
+                      <a:pPr algn="l"/>
+                      <a:r>
+                        <a:rPr sz="900" b="0">
+                          <a:solidFill>
+                            <a:srgbClr val="A6001A"/>
+                          </a:solidFill>
+                          <a:latin typeface="Calibri"/>
+                        </a:rPr>
+                        <a:t>kesimde 3 kişi DAHA AZ</a:t>
+                      </a:r>
+                    </a:p>
+                  </a:txBody>
+                  <a:tcPr>
+                    <a:solidFill>
+                      <a:srgbClr val="FFFFFF"/>
+                    </a:solidFill>
+                  </a:tcPr>
+                </a:tc>
+              </a:tr>
+              <a:tr h="182880">
+                <a:tc>
+                  <a:txBody>
+                    <a:bodyPr/>
+                    <a:lstStyle/>
+                    <a:p>
+                      <a:pPr algn="l"/>
+                      <a:r>
+                        <a:rPr sz="900" b="0">
+                          <a:solidFill>
+                            <a:srgbClr val="333333"/>
+                          </a:solidFill>
+                          <a:latin typeface="Calibri"/>
+                        </a:rPr>
+                        <a:t>   — Temmuz alımı</a:t>
+                      </a:r>
+                    </a:p>
+                  </a:txBody>
+                  <a:tcPr>
+                    <a:solidFill>
+                      <a:srgbClr val="FAFAFA"/>
+                    </a:solidFill>
+                  </a:tcPr>
+                </a:tc>
+                <a:tc>
+                  <a:txBody>
+                    <a:bodyPr/>
+                    <a:lstStyle/>
+                    <a:p>
+                      <a:pPr algn="ctr"/>
+                      <a:r>
+                        <a:rPr sz="900" b="0">
+                          <a:solidFill>
+                            <a:srgbClr val="333333"/>
+                          </a:solidFill>
+                          <a:latin typeface="Calibri"/>
+                        </a:rPr>
+                        <a:t>4 kişi</a:t>
+                      </a:r>
+                    </a:p>
+                  </a:txBody>
+                  <a:tcPr>
+                    <a:solidFill>
+                      <a:srgbClr val="FAFAFA"/>
+                    </a:solidFill>
+                  </a:tcPr>
+                </a:tc>
+                <a:tc>
+                  <a:txBody>
+                    <a:bodyPr/>
+                    <a:lstStyle/>
+                    <a:p>
+                      <a:pPr algn="ctr"/>
+                      <a:r>
+                        <a:rPr sz="900" b="1">
+                          <a:solidFill>
+                            <a:srgbClr val="333333"/>
+                          </a:solidFill>
+                          <a:latin typeface="Calibri"/>
+                        </a:rPr>
+                        <a:t>2 kişi</a:t>
+                      </a:r>
+                    </a:p>
+                  </a:txBody>
+                  <a:tcPr>
+                    <a:solidFill>
+                      <a:srgbClr val="FAFAFA"/>
+                    </a:solidFill>
+                  </a:tcPr>
+                </a:tc>
+                <a:tc>
+                  <a:txBody>
+                    <a:bodyPr/>
+                    <a:lstStyle/>
+                    <a:p>
+                      <a:pPr algn="l"/>
+                      <a:r>
+                        <a:rPr sz="900" b="0">
+                          <a:solidFill>
+                            <a:srgbClr val="A6001A"/>
+                          </a:solidFill>
+                          <a:latin typeface="Calibri"/>
+                        </a:rPr>
+                        <a:t>erken alım payı düştü</a:t>
+                      </a:r>
+                    </a:p>
+                  </a:txBody>
+                  <a:tcPr>
+                    <a:solidFill>
+                      <a:srgbClr val="FAFAFA"/>
+                    </a:solidFill>
+                  </a:tcPr>
+                </a:tc>
+              </a:tr>
+              <a:tr h="182880">
+                <a:tc>
+                  <a:txBody>
+                    <a:bodyPr/>
+                    <a:lstStyle/>
+                    <a:p>
+                      <a:pPr algn="l"/>
+                      <a:r>
+                        <a:rPr sz="900" b="0">
+                          <a:solidFill>
+                            <a:srgbClr val="333333"/>
+                          </a:solidFill>
+                          <a:latin typeface="Calibri"/>
+                        </a:rPr>
+                        <a:t>   — 1–14 Ağustos alımı</a:t>
+                      </a:r>
+                    </a:p>
+                  </a:txBody>
+                  <a:tcPr>
+                    <a:solidFill>
+                      <a:srgbClr val="FFFFFF"/>
+                    </a:solidFill>
+                  </a:tcPr>
+                </a:tc>
+                <a:tc>
+                  <a:txBody>
+                    <a:bodyPr/>
+                    <a:lstStyle/>
+                    <a:p>
+                      <a:pPr algn="ctr"/>
+                      <a:r>
+                        <a:rPr sz="900" b="0">
+                          <a:solidFill>
+                            <a:srgbClr val="333333"/>
+                          </a:solidFill>
+                          <a:latin typeface="Calibri"/>
+                        </a:rPr>
+                        <a:t>12 kişi</a:t>
+                      </a:r>
+                    </a:p>
+                  </a:txBody>
+                  <a:tcPr>
+                    <a:solidFill>
+                      <a:srgbClr val="FFFFFF"/>
+                    </a:solidFill>
+                  </a:tcPr>
+                </a:tc>
+                <a:tc>
+                  <a:txBody>
+                    <a:bodyPr/>
+                    <a:lstStyle/>
+                    <a:p>
+                      <a:pPr algn="ctr"/>
+                      <a:r>
+                        <a:rPr sz="900" b="1">
+                          <a:solidFill>
+                            <a:srgbClr val="333333"/>
+                          </a:solidFill>
+                          <a:latin typeface="Calibri"/>
+                        </a:rPr>
+                        <a:t>27 kişi</a:t>
+                      </a:r>
+                    </a:p>
+                  </a:txBody>
+                  <a:tcPr>
+                    <a:solidFill>
+                      <a:srgbClr val="FFFFFF"/>
+                    </a:solidFill>
+                  </a:tcPr>
+                </a:tc>
+                <a:tc>
+                  <a:txBody>
+                    <a:bodyPr/>
+                    <a:lstStyle/>
+                    <a:p>
+                      <a:pPr algn="l"/>
+                      <a:r>
+                        <a:rPr sz="900" b="0">
+                          <a:solidFill>
+                            <a:srgbClr val="A6001A"/>
+                          </a:solidFill>
+                          <a:latin typeface="Calibri"/>
+                        </a:rPr>
+                        <a:t>iş +%25,1 büyüyen dönem</a:t>
+                      </a:r>
+                    </a:p>
+                  </a:txBody>
+                  <a:tcPr>
+                    <a:solidFill>
+                      <a:srgbClr val="FFFFFF"/>
+                    </a:solidFill>
+                  </a:tcPr>
+                </a:tc>
+              </a:tr>
+              <a:tr h="182880">
+                <a:tc>
+                  <a:txBody>
+                    <a:bodyPr/>
+                    <a:lstStyle/>
+                    <a:p>
+                      <a:pPr algn="l"/>
+                      <a:r>
+                        <a:rPr sz="900" b="0">
+                          <a:solidFill>
+                            <a:srgbClr val="333333"/>
+                          </a:solidFill>
+                          <a:latin typeface="Calibri"/>
+                        </a:rPr>
+                        <a:t>   — 15–31 Ağustos alımı</a:t>
+                      </a:r>
+                    </a:p>
+                  </a:txBody>
+                  <a:tcPr>
+                    <a:solidFill>
+                      <a:srgbClr val="FAFAFA"/>
+                    </a:solidFill>
+                  </a:tcPr>
+                </a:tc>
+                <a:tc>
+                  <a:txBody>
+                    <a:bodyPr/>
+                    <a:lstStyle/>
+                    <a:p>
+                      <a:pPr algn="ctr"/>
+                      <a:r>
+                        <a:rPr sz="900" b="0">
+                          <a:solidFill>
+                            <a:srgbClr val="333333"/>
+                          </a:solidFill>
+                          <a:latin typeface="Calibri"/>
+                        </a:rPr>
+                        <a:t>49 kişi</a:t>
+                      </a:r>
+                    </a:p>
+                  </a:txBody>
+                  <a:tcPr>
+                    <a:solidFill>
+                      <a:srgbClr val="FAFAFA"/>
+                    </a:solidFill>
+                  </a:tcPr>
+                </a:tc>
+                <a:tc>
+                  <a:txBody>
+                    <a:bodyPr/>
+                    <a:lstStyle/>
+                    <a:p>
+                      <a:pPr algn="ctr"/>
+                      <a:r>
+                        <a:rPr sz="900" b="1">
+                          <a:solidFill>
+                            <a:srgbClr val="333333"/>
+                          </a:solidFill>
+                          <a:latin typeface="Calibri"/>
+                        </a:rPr>
+                        <a:t>32 kişi</a:t>
+                      </a:r>
+                    </a:p>
+                  </a:txBody>
+                  <a:tcPr>
+                    <a:solidFill>
+                      <a:srgbClr val="FAFAFA"/>
+                    </a:solidFill>
+                  </a:tcPr>
+                </a:tc>
+                <a:tc>
+                  <a:txBody>
+                    <a:bodyPr/>
+                    <a:lstStyle/>
+                    <a:p>
+                      <a:pPr algn="l"/>
+                      <a:r>
+                        <a:rPr sz="900" b="0">
+                          <a:solidFill>
+                            <a:srgbClr val="A6001A"/>
+                          </a:solidFill>
+                          <a:latin typeface="Calibri"/>
+                        </a:rPr>
+                        <a:t>iş −%2,9 → alım azaltıldı</a:t>
+                      </a:r>
+                    </a:p>
+                  </a:txBody>
+                  <a:tcPr>
+                    <a:solidFill>
+                      <a:srgbClr val="FAFAFA"/>
+                    </a:solidFill>
+                  </a:tcPr>
+                </a:tc>
+              </a:tr>
+            </a:tbl>
+          </a:graphicData>
+        </a:graphic>
+      </p:graphicFrame>
+      <p:sp>
+        <p:nvSpPr>
+          <p:cNvPr id="22" name="TextBox 21"/>
+          <p:cNvSpPr txBox="1"/>
+          <p:nvPr/>
+        </p:nvSpPr>
+        <p:spPr>
+          <a:xfrm>
+            <a:off x="1920240" y="5669280"/>
+            <a:ext cx="9555480" cy="566928"/>
+          </a:xfrm>
+          <a:prstGeom prst="rect">
+            <a:avLst/>
+          </a:prstGeom>
+          <a:noFill/>
+        </p:spPr>
+        <p:txBody>
+          <a:bodyPr wrap="square" anchor="t">
+            <a:spAutoFit/>
+          </a:bodyPr>
+          <a:lstStyle/>
+          <a:p>
+            <a:pPr algn="l">
+              <a:lnSpc>
+                <a:spcPct val="105000"/>
+              </a:lnSpc>
+            </a:pPr>
+            <a:r>
+              <a:rPr sz="800" b="0">
+                <a:solidFill>
+                  <a:srgbClr val="9A9A9A"/>
+                </a:solidFill>
+                <a:latin typeface="Calibri"/>
+              </a:rPr>
+              <a:t>* İK'da düzeltme bekleyen 1 kayıt: 2025 girişli bir sezonluk personel çıkış tarihi işlenmediği için 31.08'de aktif görünüyor; düzeltilince sezonluk 62 → 61 olur (rakamlar İK'nın resmi kaydıyla birebir tutulsun diye şimdilik düzeltilmedi) · Kapsam: beş mağaza (FSM · Özlüce · İst. Yolu · Heykel · Şura) · Kohortlar okul açılışına göre AYNI ofsette kesildi (T−12: 27.08.2025 ve 02.09.2026) · İş hacmi üç POS mağazası · ⚠ "açılıştan kaç gün önce" ölçüsü açılış 6 gün kaydığı için 2026'yı mekanik olarak erken gösterir, takvim ölçüsü esastır.</a:t>
+            </a:r>
+          </a:p>
+        </p:txBody>
+      </p:sp>
+      <p:sp>
+        <p:nvSpPr>
+          <p:cNvPr id="23" name="TextBox 22"/>
+          <p:cNvSpPr txBox="1"/>
+          <p:nvPr/>
+        </p:nvSpPr>
+        <p:spPr>
+          <a:xfrm>
+            <a:off x="8503920" y="6355080"/>
+            <a:ext cx="3108960" cy="274320"/>
+          </a:xfrm>
+          <a:prstGeom prst="rect">
+            <a:avLst/>
+          </a:prstGeom>
+          <a:noFill/>
+        </p:spPr>
+        <p:txBody>
+          <a:bodyPr wrap="square" anchor="t">
+            <a:spAutoFit/>
+          </a:bodyPr>
+          <a:lstStyle/>
+          <a:p>
+            <a:pPr algn="r">
+              <a:lnSpc>
+                <a:spcPct val="100000"/>
+              </a:lnSpc>
+            </a:pPr>
+            <a:r>
+              <a:rPr sz="900" b="0">
+                <a:solidFill>
+                  <a:srgbClr val="9A9A9A"/>
+                </a:solidFill>
+                <a:latin typeface="Calibri"/>
+              </a:rPr>
+              <a:t>© Fikri Eren 2026</a:t>
+            </a:r>
+          </a:p>
+        </p:txBody>
+      </p:sp>
+    </p:spTree>
+  </p:cSld>
+  <p:clrMapOvr>
+    <a:masterClrMapping/>
+  </p:clrMapOvr>
+</p:sld>
+</file>
+
+<file path=ppt/slides/slide17.xml><?xml version="1.0" encoding="utf-8"?>
+<p:sld xmlns:a="http://schemas.openxmlformats.org/drawingml/2006/main" xmlns:p="http://schemas.openxmlformats.org/presentationml/2006/main" xmlns:r="http://schemas.openxmlformats.org/officeDocument/2006/relationships">
+  <p:cSld>
+    <p:bg>
+      <p:bgPr>
+        <a:blipFill dpi="0" rotWithShape="1">
+          <a:blip r:embed="rId2">
+            <a:lum/>
+          </a:blip>
+          <a:srcRect/>
+          <a:stretch>
+            <a:fillRect/>
+          </a:stretch>
+        </a:blipFill>
+        <a:effectLst/>
+      </p:bgPr>
+    </p:bg>
+    <p:spTree>
+      <p:nvGrpSpPr>
+        <p:cNvPr id="1" name=""/>
+        <p:cNvGrpSpPr/>
+        <p:nvPr/>
+      </p:nvGrpSpPr>
+      <p:grpSpPr/>
+      <p:sp>
+        <p:nvSpPr>
+          <p:cNvPr id="2" name="Title 1"/>
+          <p:cNvSpPr>
+            <a:spLocks noGrp="1"/>
+          </p:cNvSpPr>
+          <p:nvPr>
+            <p:ph type="title"/>
+          </p:nvPr>
+        </p:nvSpPr>
+        <p:spPr>
+          <a:xfrm>
+            <a:off x="548640" y="274320"/>
+            <a:ext cx="11018520" cy="914400"/>
+          </a:xfrm>
+        </p:spPr>
+        <p:txBody>
+          <a:bodyPr/>
+          <a:lstStyle/>
+          <a:p>
+            <a:r>
+              <a:t>Yöntem ve Açıklamalar</a:t>
+            </a:r>
+          </a:p>
+        </p:txBody>
+      </p:sp>
+      <p:sp>
+        <p:nvSpPr>
+          <p:cNvPr id="3" name="Rectangle 2"/>
+          <p:cNvSpPr/>
+          <p:nvPr/>
+        </p:nvSpPr>
+        <p:spPr>
+          <a:xfrm>
+            <a:off x="548640" y="1325880"/>
+            <a:ext cx="11018520" cy="601980"/>
+          </a:xfrm>
+          <a:prstGeom prst="rect">
+            <a:avLst/>
+          </a:prstGeom>
+          <a:solidFill>
+            <a:srgbClr val="FFFFFF"/>
+          </a:solidFill>
+          <a:ln w="12700">
+            <a:solidFill>
+              <a:srgbClr val="DCDCDC"/>
+            </a:solidFill>
+          </a:ln>
+          <a:effectLst/>
+        </p:spPr>
+        <p:style>
+          <a:lnRef idx="1">
+            <a:schemeClr val="accent1"/>
+          </a:lnRef>
+          <a:fillRef idx="3">
+            <a:schemeClr val="accent1"/>
+          </a:fillRef>
+          <a:effectRef idx="2">
+            <a:schemeClr val="accent1"/>
+          </a:effectRef>
+          <a:fontRef idx="minor">
+            <a:schemeClr val="lt1"/>
+          </a:fontRef>
+        </p:style>
+        <p:txBody>
+          <a:bodyPr rtlCol="0" anchor="ctr"/>
+          <a:lstStyle/>
+          <a:p>
+            <a:pPr algn="ctr"/>
+          </a:p>
+        </p:txBody>
+      </p:sp>
+      <p:sp>
+        <p:nvSpPr>
+          <p:cNvPr id="4" name="Rectangle 3"/>
+          <p:cNvSpPr/>
+          <p:nvPr/>
+        </p:nvSpPr>
+        <p:spPr>
+          <a:xfrm>
+            <a:off x="548640" y="1325880"/>
+            <a:ext cx="68580" cy="601980"/>
+          </a:xfrm>
+          <a:prstGeom prst="rect">
+            <a:avLst/>
+          </a:prstGeom>
+          <a:solidFill>
+            <a:srgbClr val="E30622"/>
+          </a:solidFill>
+          <a:ln>
+            <a:noFill/>
+          </a:ln>
+          <a:effectLst/>
+        </p:spPr>
+        <p:style>
+          <a:lnRef idx="1">
+            <a:schemeClr val="accent1"/>
+          </a:lnRef>
+          <a:fillRef idx="3">
+            <a:schemeClr val="accent1"/>
+          </a:fillRef>
+          <a:effectRef idx="2">
+            <a:schemeClr val="accent1"/>
+          </a:effectRef>
+          <a:fontRef idx="minor">
+            <a:schemeClr val="lt1"/>
+          </a:fontRef>
+        </p:style>
+        <p:txBody>
+          <a:bodyPr rtlCol="0" anchor="ctr"/>
+          <a:lstStyle/>
+          <a:p>
+            <a:pPr algn="ctr"/>
+          </a:p>
+        </p:txBody>
+      </p:sp>
+      <p:pic>
+        <p:nvPicPr>
+          <p:cNvPr id="5" name="Picture 4" descr="circle-check.png"/>
+          <p:cNvPicPr>
+            <a:picLocks noChangeAspect="1"/>
+          </p:cNvPicPr>
+          <p:nvPr/>
+        </p:nvPicPr>
+        <p:blipFill>
+          <a:blip r:embed="rId3"/>
+          <a:stretch>
+            <a:fillRect/>
+          </a:stretch>
+        </p:blipFill>
+        <p:spPr>
+          <a:xfrm>
+            <a:off x="777240" y="1453895"/>
+            <a:ext cx="256032" cy="256032"/>
+          </a:xfrm>
+          <a:prstGeom prst="rect">
+            <a:avLst/>
+          </a:prstGeom>
+        </p:spPr>
+      </p:pic>
+      <p:sp>
+        <p:nvSpPr>
+          <p:cNvPr id="6" name="TextBox 5"/>
+          <p:cNvSpPr txBox="1"/>
+          <p:nvPr/>
+        </p:nvSpPr>
+        <p:spPr>
+          <a:xfrm>
+            <a:off x="1143000" y="1389888"/>
+            <a:ext cx="10058400" cy="292608"/>
+          </a:xfrm>
+          <a:prstGeom prst="rect">
+            <a:avLst/>
+          </a:prstGeom>
+          <a:noFill/>
+        </p:spPr>
+        <p:txBody>
+          <a:bodyPr wrap="square" anchor="t">
+            <a:spAutoFit/>
+          </a:bodyPr>
+          <a:lstStyle/>
+          <a:p>
+            <a:pPr algn="l">
+              <a:lnSpc>
+                <a:spcPct val="100000"/>
+              </a:lnSpc>
+            </a:pPr>
+            <a:r>
+              <a:rPr sz="1150" b="1">
+                <a:solidFill>
+                  <a:srgbClr val="A6001A"/>
+                </a:solidFill>
+                <a:latin typeface="Calibri"/>
+              </a:rPr>
+              <a:t>Büyüme kurumsal kanaldan mı geldi?</a:t>
+            </a:r>
+          </a:p>
+        </p:txBody>
+      </p:sp>
+      <p:sp>
+        <p:nvSpPr>
+          <p:cNvPr id="7" name="TextBox 6"/>
+          <p:cNvSpPr txBox="1"/>
+          <p:nvPr/>
+        </p:nvSpPr>
+        <p:spPr>
+          <a:xfrm>
+            <a:off x="1143000" y="1673352"/>
+            <a:ext cx="10058400" cy="217932"/>
+          </a:xfrm>
+          <a:prstGeom prst="rect">
+            <a:avLst/>
+          </a:prstGeom>
+          <a:noFill/>
+        </p:spPr>
+        <p:txBody>
+          <a:bodyPr wrap="square" anchor="t">
+            <a:spAutoFit/>
+          </a:bodyPr>
+          <a:lstStyle/>
+          <a:p>
+            <a:pPr algn="l">
+              <a:lnSpc>
+                <a:spcPct val="106000"/>
+              </a:lnSpc>
+            </a:pPr>
+            <a:r>
+              <a:rPr sz="950" b="0">
+                <a:solidFill>
+                  <a:srgbClr val="333333"/>
+                </a:solidFill>
+                <a:latin typeface="Calibri"/>
+              </a:rPr>
+              <a:t>Tersi: Sınav Okulları küçüldü. Ocak–Ağustos cirosu 136,2 → 105,6 milyon TL (−%22,4). Mağaza tarafı +%54,9 büyüdü — büyümenin tamamı raftan geldi.</a:t>
+            </a:r>
+          </a:p>
+        </p:txBody>
+      </p:sp>
+      <p:sp>
+        <p:nvSpPr>
+          <p:cNvPr id="8" name="Rectangle 7"/>
+          <p:cNvSpPr/>
+          <p:nvPr/>
+        </p:nvSpPr>
+        <p:spPr>
+          <a:xfrm>
+            <a:off x="548640" y="2019299"/>
+            <a:ext cx="11018520" cy="601980"/>
+          </a:xfrm>
+          <a:prstGeom prst="rect">
+            <a:avLst/>
+          </a:prstGeom>
+          <a:solidFill>
+            <a:srgbClr val="FFFFFF"/>
+          </a:solidFill>
+          <a:ln w="12700">
+            <a:solidFill>
+              <a:srgbClr val="DCDCDC"/>
+            </a:solidFill>
+          </a:ln>
+          <a:effectLst/>
+        </p:spPr>
+        <p:style>
+          <a:lnRef idx="1">
+            <a:schemeClr val="accent1"/>
+          </a:lnRef>
+          <a:fillRef idx="3">
+            <a:schemeClr val="accent1"/>
+          </a:fillRef>
+          <a:effectRef idx="2">
+            <a:schemeClr val="accent1"/>
+          </a:effectRef>
+          <a:fontRef idx="minor">
+            <a:schemeClr val="lt1"/>
+          </a:fontRef>
+        </p:style>
+        <p:txBody>
+          <a:bodyPr rtlCol="0" anchor="ctr"/>
+          <a:lstStyle/>
+          <a:p>
+            <a:pPr algn="ctr"/>
+          </a:p>
+        </p:txBody>
+      </p:sp>
+      <p:sp>
+        <p:nvSpPr>
+          <p:cNvPr id="9" name="Rectangle 8"/>
+          <p:cNvSpPr/>
+          <p:nvPr/>
+        </p:nvSpPr>
+        <p:spPr>
+          <a:xfrm>
+            <a:off x="548640" y="2019299"/>
+            <a:ext cx="68580" cy="601980"/>
+          </a:xfrm>
+          <a:prstGeom prst="rect">
+            <a:avLst/>
+          </a:prstGeom>
+          <a:solidFill>
+            <a:srgbClr val="E30622"/>
+          </a:solidFill>
+          <a:ln>
+            <a:noFill/>
+          </a:ln>
+          <a:effectLst/>
+        </p:spPr>
+        <p:style>
+          <a:lnRef idx="1">
+            <a:schemeClr val="accent1"/>
+          </a:lnRef>
+          <a:fillRef idx="3">
+            <a:schemeClr val="accent1"/>
+          </a:fillRef>
+          <a:effectRef idx="2">
+            <a:schemeClr val="accent1"/>
+          </a:effectRef>
+          <a:fontRef idx="minor">
+            <a:schemeClr val="lt1"/>
+          </a:fontRef>
+        </p:style>
+        <p:txBody>
+          <a:bodyPr rtlCol="0" anchor="ctr"/>
+          <a:lstStyle/>
+          <a:p>
+            <a:pPr algn="ctr"/>
+          </a:p>
+        </p:txBody>
+      </p:sp>
+      <p:pic>
+        <p:nvPicPr>
+          <p:cNvPr id="10" name="Picture 9" descr="circle-check.png"/>
+          <p:cNvPicPr>
+            <a:picLocks noChangeAspect="1"/>
+          </p:cNvPicPr>
+          <p:nvPr/>
+        </p:nvPicPr>
+        <p:blipFill>
+          <a:blip r:embed="rId3"/>
+          <a:stretch>
+            <a:fillRect/>
+          </a:stretch>
+        </p:blipFill>
+        <p:spPr>
+          <a:xfrm>
+            <a:off x="777240" y="2147316"/>
+            <a:ext cx="256032" cy="256032"/>
+          </a:xfrm>
+          <a:prstGeom prst="rect">
+            <a:avLst/>
+          </a:prstGeom>
+        </p:spPr>
+      </p:pic>
+      <p:sp>
+        <p:nvSpPr>
+          <p:cNvPr id="11" name="TextBox 10"/>
+          <p:cNvSpPr txBox="1"/>
+          <p:nvPr/>
+        </p:nvSpPr>
+        <p:spPr>
+          <a:xfrm>
+            <a:off x="1143000" y="2083307"/>
+            <a:ext cx="10058400" cy="292608"/>
+          </a:xfrm>
+          <a:prstGeom prst="rect">
+            <a:avLst/>
+          </a:prstGeom>
+          <a:noFill/>
+        </p:spPr>
+        <p:txBody>
+          <a:bodyPr wrap="square" anchor="t">
+            <a:spAutoFit/>
+          </a:bodyPr>
+          <a:lstStyle/>
+          <a:p>
+            <a:pPr algn="l">
+              <a:lnSpc>
+                <a:spcPct val="100000"/>
+              </a:lnSpc>
+            </a:pPr>
+            <a:r>
+              <a:rPr sz="1150" b="1">
+                <a:solidFill>
+                  <a:srgbClr val="A6001A"/>
+                </a:solidFill>
+                <a:latin typeface="Calibri"/>
+              </a:rPr>
+              <a:t>Ciro artışı enflasyon kaynaklı mı?</a:t>
+            </a:r>
+          </a:p>
+        </p:txBody>
+      </p:sp>
+      <p:sp>
+        <p:nvSpPr>
+          <p:cNvPr id="12" name="TextBox 11"/>
+          <p:cNvSpPr txBox="1"/>
+          <p:nvPr/>
+        </p:nvSpPr>
+        <p:spPr>
+          <a:xfrm>
+            <a:off x="1143000" y="2366771"/>
+            <a:ext cx="10058400" cy="217932"/>
+          </a:xfrm>
+          <a:prstGeom prst="rect">
+            <a:avLst/>
+          </a:prstGeom>
+          <a:noFill/>
+        </p:spPr>
+        <p:txBody>
+          <a:bodyPr wrap="square" anchor="t">
+            <a:spAutoFit/>
+          </a:bodyPr>
+          <a:lstStyle/>
+          <a:p>
+            <a:pPr algn="l">
+              <a:lnSpc>
+                <a:spcPct val="106000"/>
+              </a:lnSpc>
+            </a:pPr>
+            <a:r>
+              <a:rPr sz="950" b="0">
+                <a:solidFill>
+                  <a:srgbClr val="333333"/>
+                </a:solidFill>
+                <a:latin typeface="Calibri"/>
+              </a:rPr>
+              <a:t>Kısmen doğru: eşleşen ürünlerde fiyat endeksi +%19,8. Bu yüzden savunma ciroya değil ADEDE dayanıyor: ürün adedi +%34,9 ve adet fiyattan etkilenmez.</a:t>
+            </a:r>
+          </a:p>
+        </p:txBody>
+      </p:sp>
+      <p:sp>
+        <p:nvSpPr>
+          <p:cNvPr id="13" name="Rectangle 12"/>
+          <p:cNvSpPr/>
+          <p:nvPr/>
+        </p:nvSpPr>
+        <p:spPr>
+          <a:xfrm>
+            <a:off x="548640" y="2712719"/>
+            <a:ext cx="11018520" cy="601980"/>
+          </a:xfrm>
+          <a:prstGeom prst="rect">
+            <a:avLst/>
+          </a:prstGeom>
+          <a:solidFill>
+            <a:srgbClr val="FFFFFF"/>
+          </a:solidFill>
+          <a:ln w="12700">
+            <a:solidFill>
+              <a:srgbClr val="DCDCDC"/>
+            </a:solidFill>
+          </a:ln>
+          <a:effectLst/>
+        </p:spPr>
+        <p:style>
+          <a:lnRef idx="1">
+            <a:schemeClr val="accent1"/>
+          </a:lnRef>
+          <a:fillRef idx="3">
+            <a:schemeClr val="accent1"/>
+          </a:fillRef>
+          <a:effectRef idx="2">
+            <a:schemeClr val="accent1"/>
+          </a:effectRef>
+          <a:fontRef idx="minor">
+            <a:schemeClr val="lt1"/>
+          </a:fontRef>
+        </p:style>
+        <p:txBody>
+          <a:bodyPr rtlCol="0" anchor="ctr"/>
+          <a:lstStyle/>
+          <a:p>
+            <a:pPr algn="ctr"/>
+          </a:p>
+        </p:txBody>
+      </p:sp>
+      <p:sp>
+        <p:nvSpPr>
+          <p:cNvPr id="14" name="Rectangle 13"/>
+          <p:cNvSpPr/>
+          <p:nvPr/>
+        </p:nvSpPr>
+        <p:spPr>
+          <a:xfrm>
+            <a:off x="548640" y="2712719"/>
+            <a:ext cx="68580" cy="601980"/>
+          </a:xfrm>
+          <a:prstGeom prst="rect">
+            <a:avLst/>
+          </a:prstGeom>
+          <a:solidFill>
+            <a:srgbClr val="E30622"/>
+          </a:solidFill>
+          <a:ln>
+            <a:noFill/>
+          </a:ln>
+          <a:effectLst/>
+        </p:spPr>
+        <p:style>
+          <a:lnRef idx="1">
+            <a:schemeClr val="accent1"/>
+          </a:lnRef>
+          <a:fillRef idx="3">
+            <a:schemeClr val="accent1"/>
+          </a:fillRef>
+          <a:effectRef idx="2">
+            <a:schemeClr val="accent1"/>
+          </a:effectRef>
+          <a:fontRef idx="minor">
+            <a:schemeClr val="lt1"/>
+          </a:fontRef>
+        </p:style>
+        <p:txBody>
+          <a:bodyPr rtlCol="0" anchor="ctr"/>
+          <a:lstStyle/>
+          <a:p>
+            <a:pPr algn="ctr"/>
+          </a:p>
+        </p:txBody>
+      </p:sp>
+      <p:pic>
+        <p:nvPicPr>
+          <p:cNvPr id="15" name="Picture 14" descr="circle-check.png"/>
+          <p:cNvPicPr>
+            <a:picLocks noChangeAspect="1"/>
+          </p:cNvPicPr>
+          <p:nvPr/>
+        </p:nvPicPr>
+        <p:blipFill>
+          <a:blip r:embed="rId3"/>
+          <a:stretch>
+            <a:fillRect/>
+          </a:stretch>
+        </p:blipFill>
+        <p:spPr>
+          <a:xfrm>
+            <a:off x="777240" y="2840736"/>
+            <a:ext cx="256032" cy="256032"/>
+          </a:xfrm>
+          <a:prstGeom prst="rect">
+            <a:avLst/>
+          </a:prstGeom>
+        </p:spPr>
+      </p:pic>
+      <p:sp>
+        <p:nvSpPr>
+          <p:cNvPr id="16" name="TextBox 15"/>
+          <p:cNvSpPr txBox="1"/>
+          <p:nvPr/>
+        </p:nvSpPr>
+        <p:spPr>
+          <a:xfrm>
+            <a:off x="1143000" y="2776727"/>
+            <a:ext cx="10058400" cy="292608"/>
+          </a:xfrm>
+          <a:prstGeom prst="rect">
+            <a:avLst/>
+          </a:prstGeom>
+          <a:noFill/>
+        </p:spPr>
+        <p:txBody>
+          <a:bodyPr wrap="square" anchor="t">
+            <a:spAutoFit/>
+          </a:bodyPr>
+          <a:lstStyle/>
+          <a:p>
+            <a:pPr algn="l">
+              <a:lnSpc>
+                <a:spcPct val="100000"/>
+              </a:lnSpc>
+            </a:pPr>
+            <a:r>
+              <a:rPr sz="1150" b="1">
+                <a:solidFill>
+                  <a:srgbClr val="A6001A"/>
+                </a:solidFill>
+                <a:latin typeface="Calibri"/>
+              </a:rPr>
+              <a:t>Kasa sistemi değişti, karşılaştırma geçerli mi?</a:t>
+            </a:r>
+          </a:p>
+        </p:txBody>
+      </p:sp>
+      <p:sp>
+        <p:nvSpPr>
+          <p:cNvPr id="17" name="TextBox 16"/>
+          <p:cNvSpPr txBox="1"/>
+          <p:nvPr/>
+        </p:nvSpPr>
+        <p:spPr>
+          <a:xfrm>
+            <a:off x="1143000" y="3060191"/>
+            <a:ext cx="10058400" cy="217932"/>
+          </a:xfrm>
+          <a:prstGeom prst="rect">
+            <a:avLst/>
+          </a:prstGeom>
+          <a:noFill/>
+        </p:spPr>
+        <p:txBody>
+          <a:bodyPr wrap="square" anchor="t">
+            <a:spAutoFit/>
+          </a:bodyPr>
+          <a:lstStyle/>
+          <a:p>
+            <a:pPr algn="l">
+              <a:lnSpc>
+                <a:spcPct val="106000"/>
+              </a:lnSpc>
+            </a:pPr>
+            <a:r>
+              <a:rPr sz="950" b="0">
+                <a:solidFill>
+                  <a:srgbClr val="333333"/>
+                </a:solidFill>
+                <a:latin typeface="Calibri"/>
+              </a:rPr>
+              <a:t>Bu yüzden ölçüm POS'tan değil ERP'den (DerinSIS) alındı — iki yılda da aynı kaynak, aynı belge tipi. Temmuz 2025 kasa geçişi ölçüye girmiyor.</a:t>
+            </a:r>
+          </a:p>
+        </p:txBody>
+      </p:sp>
+      <p:sp>
+        <p:nvSpPr>
+          <p:cNvPr id="18" name="Rectangle 17"/>
+          <p:cNvSpPr/>
+          <p:nvPr/>
+        </p:nvSpPr>
+        <p:spPr>
+          <a:xfrm>
+            <a:off x="548640" y="3406139"/>
+            <a:ext cx="11018520" cy="601980"/>
+          </a:xfrm>
+          <a:prstGeom prst="rect">
+            <a:avLst/>
+          </a:prstGeom>
+          <a:solidFill>
+            <a:srgbClr val="FFFFFF"/>
+          </a:solidFill>
+          <a:ln w="12700">
+            <a:solidFill>
+              <a:srgbClr val="DCDCDC"/>
+            </a:solidFill>
+          </a:ln>
+          <a:effectLst/>
+        </p:spPr>
+        <p:style>
+          <a:lnRef idx="1">
+            <a:schemeClr val="accent1"/>
+          </a:lnRef>
+          <a:fillRef idx="3">
+            <a:schemeClr val="accent1"/>
+          </a:fillRef>
+          <a:effectRef idx="2">
+            <a:schemeClr val="accent1"/>
+          </a:effectRef>
+          <a:fontRef idx="minor">
+            <a:schemeClr val="lt1"/>
+          </a:fontRef>
+        </p:style>
+        <p:txBody>
+          <a:bodyPr rtlCol="0" anchor="ctr"/>
+          <a:lstStyle/>
+          <a:p>
+            <a:pPr algn="ctr"/>
+          </a:p>
+        </p:txBody>
+      </p:sp>
+      <p:sp>
+        <p:nvSpPr>
+          <p:cNvPr id="19" name="Rectangle 18"/>
+          <p:cNvSpPr/>
+          <p:nvPr/>
+        </p:nvSpPr>
+        <p:spPr>
+          <a:xfrm>
+            <a:off x="548640" y="3406139"/>
+            <a:ext cx="68580" cy="601980"/>
+          </a:xfrm>
+          <a:prstGeom prst="rect">
+            <a:avLst/>
+          </a:prstGeom>
+          <a:solidFill>
+            <a:srgbClr val="E30622"/>
+          </a:solidFill>
+          <a:ln>
+            <a:noFill/>
+          </a:ln>
+          <a:effectLst/>
+        </p:spPr>
+        <p:style>
+          <a:lnRef idx="1">
+            <a:schemeClr val="accent1"/>
+          </a:lnRef>
+          <a:fillRef idx="3">
+            <a:schemeClr val="accent1"/>
+          </a:fillRef>
+          <a:effectRef idx="2">
+            <a:schemeClr val="accent1"/>
+          </a:effectRef>
+          <a:fontRef idx="minor">
+            <a:schemeClr val="lt1"/>
+          </a:fontRef>
+        </p:style>
+        <p:txBody>
+          <a:bodyPr rtlCol="0" anchor="ctr"/>
+          <a:lstStyle/>
+          <a:p>
+            <a:pPr algn="ctr"/>
+          </a:p>
+        </p:txBody>
+      </p:sp>
+      <p:pic>
+        <p:nvPicPr>
+          <p:cNvPr id="20" name="Picture 19" descr="circle-check.png"/>
+          <p:cNvPicPr>
+            <a:picLocks noChangeAspect="1"/>
+          </p:cNvPicPr>
+          <p:nvPr/>
+        </p:nvPicPr>
+        <p:blipFill>
+          <a:blip r:embed="rId3"/>
+          <a:stretch>
+            <a:fillRect/>
+          </a:stretch>
+        </p:blipFill>
+        <p:spPr>
+          <a:xfrm>
+            <a:off x="777240" y="3534156"/>
+            <a:ext cx="256032" cy="256032"/>
+          </a:xfrm>
+          <a:prstGeom prst="rect">
+            <a:avLst/>
+          </a:prstGeom>
+        </p:spPr>
+      </p:pic>
+      <p:sp>
+        <p:nvSpPr>
+          <p:cNvPr id="21" name="TextBox 20"/>
+          <p:cNvSpPr txBox="1"/>
+          <p:nvPr/>
+        </p:nvSpPr>
+        <p:spPr>
+          <a:xfrm>
+            <a:off x="1143000" y="3470147"/>
+            <a:ext cx="10058400" cy="292608"/>
+          </a:xfrm>
+          <a:prstGeom prst="rect">
+            <a:avLst/>
+          </a:prstGeom>
+          <a:noFill/>
+        </p:spPr>
+        <p:txBody>
+          <a:bodyPr wrap="square" anchor="t">
+            <a:spAutoFit/>
+          </a:bodyPr>
+          <a:lstStyle/>
+          <a:p>
+            <a:pPr algn="l">
+              <a:lnSpc>
+                <a:spcPct val="100000"/>
+              </a:lnSpc>
+            </a:pPr>
+            <a:r>
+              <a:rPr sz="1150" b="1">
+                <a:solidFill>
+                  <a:srgbClr val="A6001A"/>
+                </a:solidFill>
+                <a:latin typeface="Calibri"/>
+              </a:rPr>
+              <a:t>Sezonluk personel erken mi alındı?</a:t>
+            </a:r>
+          </a:p>
+        </p:txBody>
+      </p:sp>
+      <p:sp>
+        <p:nvSpPr>
+          <p:cNvPr id="22" name="TextBox 21"/>
+          <p:cNvSpPr txBox="1"/>
+          <p:nvPr/>
+        </p:nvSpPr>
+        <p:spPr>
+          <a:xfrm>
+            <a:off x="1143000" y="3753611"/>
+            <a:ext cx="10058400" cy="217932"/>
+          </a:xfrm>
+          <a:prstGeom prst="rect">
+            <a:avLst/>
+          </a:prstGeom>
+          <a:noFill/>
+        </p:spPr>
+        <p:txBody>
+          <a:bodyPr wrap="square" anchor="t">
+            <a:spAutoFit/>
+          </a:bodyPr>
+          <a:lstStyle/>
+          <a:p>
+            <a:pPr algn="l">
+              <a:lnSpc>
+                <a:spcPct val="106000"/>
+              </a:lnSpc>
+            </a:pPr>
+            <a:r>
+              <a:rPr sz="950" b="0">
+                <a:solidFill>
+                  <a:srgbClr val="333333"/>
+                </a:solidFill>
+                <a:latin typeface="Calibri"/>
+              </a:rPr>
+              <a:t>Hayır: takvim ölçüsünde 2026 alımı ortalama 2,5 gün DAHA GEÇ; Temmuz ve öncesi alım 6 kişiden 2'ye indi. Artış 1–14 Ağustos'ta ve o iki haftada ürün adedi +%25,1 büyüdü — alım işi takip etti.</a:t>
+            </a:r>
+          </a:p>
+        </p:txBody>
+      </p:sp>
+      <p:sp>
+        <p:nvSpPr>
+          <p:cNvPr id="23" name="Rectangle 22"/>
+          <p:cNvSpPr/>
+          <p:nvPr/>
+        </p:nvSpPr>
+        <p:spPr>
+          <a:xfrm>
+            <a:off x="548640" y="4099559"/>
+            <a:ext cx="11018520" cy="601980"/>
+          </a:xfrm>
+          <a:prstGeom prst="rect">
+            <a:avLst/>
+          </a:prstGeom>
+          <a:solidFill>
+            <a:srgbClr val="FFFFFF"/>
+          </a:solidFill>
+          <a:ln w="12700">
+            <a:solidFill>
+              <a:srgbClr val="DCDCDC"/>
+            </a:solidFill>
+          </a:ln>
+          <a:effectLst/>
+        </p:spPr>
+        <p:style>
+          <a:lnRef idx="1">
+            <a:schemeClr val="accent1"/>
+          </a:lnRef>
+          <a:fillRef idx="3">
+            <a:schemeClr val="accent1"/>
+          </a:fillRef>
+          <a:effectRef idx="2">
+            <a:schemeClr val="accent1"/>
+          </a:effectRef>
+          <a:fontRef idx="minor">
+            <a:schemeClr val="lt1"/>
+          </a:fontRef>
+        </p:style>
+        <p:txBody>
+          <a:bodyPr rtlCol="0" anchor="ctr"/>
+          <a:lstStyle/>
+          <a:p>
+            <a:pPr algn="ctr"/>
+          </a:p>
+        </p:txBody>
+      </p:sp>
+      <p:sp>
+        <p:nvSpPr>
+          <p:cNvPr id="24" name="Rectangle 23"/>
+          <p:cNvSpPr/>
+          <p:nvPr/>
+        </p:nvSpPr>
+        <p:spPr>
+          <a:xfrm>
+            <a:off x="548640" y="4099559"/>
+            <a:ext cx="68580" cy="601980"/>
+          </a:xfrm>
+          <a:prstGeom prst="rect">
+            <a:avLst/>
+          </a:prstGeom>
+          <a:solidFill>
+            <a:srgbClr val="E30622"/>
+          </a:solidFill>
+          <a:ln>
+            <a:noFill/>
+          </a:ln>
+          <a:effectLst/>
+        </p:spPr>
+        <p:style>
+          <a:lnRef idx="1">
+            <a:schemeClr val="accent1"/>
+          </a:lnRef>
+          <a:fillRef idx="3">
+            <a:schemeClr val="accent1"/>
+          </a:fillRef>
+          <a:effectRef idx="2">
+            <a:schemeClr val="accent1"/>
+          </a:effectRef>
+          <a:fontRef idx="minor">
+            <a:schemeClr val="lt1"/>
+          </a:fontRef>
+        </p:style>
+        <p:txBody>
+          <a:bodyPr rtlCol="0" anchor="ctr"/>
+          <a:lstStyle/>
+          <a:p>
+            <a:pPr algn="ctr"/>
+          </a:p>
+        </p:txBody>
+      </p:sp>
+      <p:pic>
+        <p:nvPicPr>
+          <p:cNvPr id="25" name="Picture 24" descr="circle-check.png"/>
+          <p:cNvPicPr>
+            <a:picLocks noChangeAspect="1"/>
+          </p:cNvPicPr>
+          <p:nvPr/>
+        </p:nvPicPr>
+        <p:blipFill>
+          <a:blip r:embed="rId3"/>
+          <a:stretch>
+            <a:fillRect/>
+          </a:stretch>
+        </p:blipFill>
+        <p:spPr>
+          <a:xfrm>
+            <a:off x="777240" y="4227575"/>
+            <a:ext cx="256032" cy="256032"/>
+          </a:xfrm>
+          <a:prstGeom prst="rect">
+            <a:avLst/>
+          </a:prstGeom>
+        </p:spPr>
+      </p:pic>
+      <p:sp>
+        <p:nvSpPr>
+          <p:cNvPr id="26" name="TextBox 25"/>
+          <p:cNvSpPr txBox="1"/>
+          <p:nvPr/>
+        </p:nvSpPr>
+        <p:spPr>
+          <a:xfrm>
+            <a:off x="1143000" y="4163567"/>
+            <a:ext cx="10058400" cy="292608"/>
+          </a:xfrm>
+          <a:prstGeom prst="rect">
+            <a:avLst/>
+          </a:prstGeom>
+          <a:noFill/>
+        </p:spPr>
+        <p:txBody>
+          <a:bodyPr wrap="square" anchor="t">
+            <a:spAutoFit/>
+          </a:bodyPr>
+          <a:lstStyle/>
+          <a:p>
+            <a:pPr algn="l">
+              <a:lnSpc>
+                <a:spcPct val="100000"/>
+              </a:lnSpc>
+            </a:pPr>
+            <a:r>
+              <a:rPr sz="1150" b="1">
+                <a:solidFill>
+                  <a:srgbClr val="A6001A"/>
+                </a:solidFill>
+                <a:latin typeface="Calibri"/>
+              </a:rPr>
+              <a:t>Personel maliyeti çok mu arttı?</a:t>
+            </a:r>
+          </a:p>
+        </p:txBody>
+      </p:sp>
+      <p:sp>
+        <p:nvSpPr>
+          <p:cNvPr id="27" name="TextBox 26"/>
+          <p:cNvSpPr txBox="1"/>
+          <p:nvPr/>
+        </p:nvSpPr>
+        <p:spPr>
+          <a:xfrm>
+            <a:off x="1143000" y="4447031"/>
+            <a:ext cx="10058400" cy="217932"/>
+          </a:xfrm>
+          <a:prstGeom prst="rect">
+            <a:avLst/>
+          </a:prstGeom>
+          <a:noFill/>
+        </p:spPr>
+        <p:txBody>
+          <a:bodyPr wrap="square" anchor="t">
+            <a:spAutoFit/>
+          </a:bodyPr>
+          <a:lstStyle/>
+          <a:p>
+            <a:pPr algn="l">
+              <a:lnSpc>
+                <a:spcPct val="106000"/>
+              </a:lnSpc>
+            </a:pPr>
+            <a:r>
+              <a:rPr sz="950" b="0">
+                <a:solidFill>
+                  <a:srgbClr val="333333"/>
+                </a:solidFill>
+                <a:latin typeface="Calibri"/>
+              </a:rPr>
+              <a:t>Maliyet +%51,5 artmıştır; artışın ana kaynağı kişi başına ücret (+%38,3), kadro artışı değil. Cironun içindeki personel yükü ise 0,70 puan GERİLEMİŞTİR: %12,85 → %12,15.</a:t>
+            </a:r>
+          </a:p>
+        </p:txBody>
+      </p:sp>
+      <p:sp>
+        <p:nvSpPr>
+          <p:cNvPr id="28" name="Rectangle 27"/>
+          <p:cNvSpPr/>
+          <p:nvPr/>
+        </p:nvSpPr>
+        <p:spPr>
+          <a:xfrm>
+            <a:off x="548640" y="4792979"/>
+            <a:ext cx="11018520" cy="601980"/>
+          </a:xfrm>
+          <a:prstGeom prst="rect">
+            <a:avLst/>
+          </a:prstGeom>
+          <a:solidFill>
+            <a:srgbClr val="FFFFFF"/>
+          </a:solidFill>
+          <a:ln w="12700">
+            <a:solidFill>
+              <a:srgbClr val="DCDCDC"/>
+            </a:solidFill>
+          </a:ln>
+          <a:effectLst/>
+        </p:spPr>
+        <p:style>
+          <a:lnRef idx="1">
+            <a:schemeClr val="accent1"/>
+          </a:lnRef>
+          <a:fillRef idx="3">
+            <a:schemeClr val="accent1"/>
+          </a:fillRef>
+          <a:effectRef idx="2">
+            <a:schemeClr val="accent1"/>
+          </a:effectRef>
+          <a:fontRef idx="minor">
+            <a:schemeClr val="lt1"/>
+          </a:fontRef>
+        </p:style>
+        <p:txBody>
+          <a:bodyPr rtlCol="0" anchor="ctr"/>
+          <a:lstStyle/>
+          <a:p>
+            <a:pPr algn="ctr"/>
+          </a:p>
+        </p:txBody>
+      </p:sp>
+      <p:sp>
+        <p:nvSpPr>
+          <p:cNvPr id="29" name="Rectangle 28"/>
+          <p:cNvSpPr/>
+          <p:nvPr/>
+        </p:nvSpPr>
+        <p:spPr>
+          <a:xfrm>
+            <a:off x="548640" y="4792979"/>
+            <a:ext cx="68580" cy="601980"/>
+          </a:xfrm>
+          <a:prstGeom prst="rect">
+            <a:avLst/>
+          </a:prstGeom>
+          <a:solidFill>
+            <a:srgbClr val="E30622"/>
+          </a:solidFill>
+          <a:ln>
+            <a:noFill/>
+          </a:ln>
+          <a:effectLst/>
+        </p:spPr>
+        <p:style>
+          <a:lnRef idx="1">
+            <a:schemeClr val="accent1"/>
+          </a:lnRef>
+          <a:fillRef idx="3">
+            <a:schemeClr val="accent1"/>
+          </a:fillRef>
+          <a:effectRef idx="2">
+            <a:schemeClr val="accent1"/>
+          </a:effectRef>
+          <a:fontRef idx="minor">
+            <a:schemeClr val="lt1"/>
+          </a:fontRef>
+        </p:style>
+        <p:txBody>
+          <a:bodyPr rtlCol="0" anchor="ctr"/>
+          <a:lstStyle/>
+          <a:p>
+            <a:pPr algn="ctr"/>
+          </a:p>
+        </p:txBody>
+      </p:sp>
+      <p:pic>
+        <p:nvPicPr>
+          <p:cNvPr id="30" name="Picture 29" descr="circle-check.png"/>
+          <p:cNvPicPr>
+            <a:picLocks noChangeAspect="1"/>
+          </p:cNvPicPr>
+          <p:nvPr/>
+        </p:nvPicPr>
+        <p:blipFill>
+          <a:blip r:embed="rId3"/>
+          <a:stretch>
+            <a:fillRect/>
+          </a:stretch>
+        </p:blipFill>
+        <p:spPr>
+          <a:xfrm>
+            <a:off x="777240" y="4920995"/>
+            <a:ext cx="256032" cy="256032"/>
+          </a:xfrm>
+          <a:prstGeom prst="rect">
+            <a:avLst/>
+          </a:prstGeom>
+        </p:spPr>
+      </p:pic>
+      <p:sp>
+        <p:nvSpPr>
+          <p:cNvPr id="31" name="TextBox 30"/>
+          <p:cNvSpPr txBox="1"/>
+          <p:nvPr/>
+        </p:nvSpPr>
+        <p:spPr>
+          <a:xfrm>
+            <a:off x="1143000" y="4856987"/>
+            <a:ext cx="10058400" cy="292608"/>
+          </a:xfrm>
+          <a:prstGeom prst="rect">
+            <a:avLst/>
+          </a:prstGeom>
+          <a:noFill/>
+        </p:spPr>
+        <p:txBody>
+          <a:bodyPr wrap="square" anchor="t">
+            <a:spAutoFit/>
+          </a:bodyPr>
+          <a:lstStyle/>
+          <a:p>
+            <a:pPr algn="l">
+              <a:lnSpc>
+                <a:spcPct val="100000"/>
+              </a:lnSpc>
+            </a:pPr>
+            <a:r>
+              <a:rPr sz="1150" b="1">
+                <a:solidFill>
+                  <a:srgbClr val="A6001A"/>
+                </a:solidFill>
+                <a:latin typeface="Calibri"/>
+              </a:rPr>
+              <a:t>Ağustos ayında ivme düşüşü var mı?</a:t>
+            </a:r>
+          </a:p>
+        </p:txBody>
+      </p:sp>
+      <p:sp>
+        <p:nvSpPr>
+          <p:cNvPr id="32" name="TextBox 31"/>
+          <p:cNvSpPr txBox="1"/>
+          <p:nvPr/>
+        </p:nvSpPr>
+        <p:spPr>
+          <a:xfrm>
+            <a:off x="1143000" y="5140451"/>
+            <a:ext cx="10058400" cy="217932"/>
+          </a:xfrm>
+          <a:prstGeom prst="rect">
+            <a:avLst/>
+          </a:prstGeom>
+          <a:noFill/>
+        </p:spPr>
+        <p:txBody>
+          <a:bodyPr wrap="square" anchor="t">
+            <a:spAutoFit/>
+          </a:bodyPr>
+          <a:lstStyle/>
+          <a:p>
+            <a:pPr algn="l">
+              <a:lnSpc>
+                <a:spcPct val="106000"/>
+              </a:lnSpc>
+            </a:pPr>
+            <a:r>
+              <a:rPr sz="950" b="0">
+                <a:solidFill>
+                  <a:srgbClr val="333333"/>
+                </a:solidFill>
+                <a:latin typeface="Calibri"/>
+              </a:rPr>
+              <a:t>Takvim etkisi: okullar 2025'te 8 Eylül, 2026'da 14 Eylül açıldı — sezon 6 gün geriye kaydı. Açılışa hizalanınca haftalık büyüme %65–79 bandında düz seyrediyor.</a:t>
+            </a:r>
+          </a:p>
+        </p:txBody>
+      </p:sp>
+      <p:sp>
+        <p:nvSpPr>
+          <p:cNvPr id="33" name="TextBox 32"/>
+          <p:cNvSpPr txBox="1"/>
+          <p:nvPr/>
+        </p:nvSpPr>
+        <p:spPr>
+          <a:xfrm>
+            <a:off x="1920240" y="5669280"/>
+            <a:ext cx="9555480" cy="566928"/>
+          </a:xfrm>
+          <a:prstGeom prst="rect">
+            <a:avLst/>
+          </a:prstGeom>
+          <a:noFill/>
+        </p:spPr>
+        <p:txBody>
+          <a:bodyPr wrap="square" anchor="t">
+            <a:spAutoFit/>
+          </a:bodyPr>
+          <a:lstStyle/>
+          <a:p>
+            <a:pPr algn="l">
+              <a:lnSpc>
+                <a:spcPct val="105000"/>
+              </a:lnSpc>
+            </a:pPr>
+            <a:r>
+              <a:rPr sz="800" b="0">
+                <a:solidFill>
+                  <a:srgbClr val="9A9A9A"/>
+                </a:solidFill>
+                <a:latin typeface="Calibri"/>
+              </a:rPr>
+              <a:t>* Kapsam: üç POS mağazası — FSM · Özlüce · İst. Yolu · Dönem: 01.01 – 31.08 (her iki yıl, kümülatif) (kurumsal/mağaza kıyası) · hizalı dönem: 01.07 – 25.08.2025 (2025) · 07.07 – 31.08.2026 (2026), her iki yıl 56 gün, okul açılışına hizalı</a:t>
+            </a:r>
+          </a:p>
+        </p:txBody>
+      </p:sp>
+      <p:sp>
+        <p:nvSpPr>
+          <p:cNvPr id="34" name="TextBox 33"/>
+          <p:cNvSpPr txBox="1"/>
+          <p:nvPr/>
+        </p:nvSpPr>
+        <p:spPr>
+          <a:xfrm>
+            <a:off x="8503920" y="6355080"/>
+            <a:ext cx="3108960" cy="274320"/>
+          </a:xfrm>
+          <a:prstGeom prst="rect">
+            <a:avLst/>
+          </a:prstGeom>
+          <a:noFill/>
+        </p:spPr>
+        <p:txBody>
+          <a:bodyPr wrap="square" anchor="t">
+            <a:spAutoFit/>
+          </a:bodyPr>
+          <a:lstStyle/>
+          <a:p>
+            <a:pPr algn="r">
+              <a:lnSpc>
+                <a:spcPct val="100000"/>
+              </a:lnSpc>
+            </a:pPr>
+            <a:r>
+              <a:rPr sz="900" b="0">
+                <a:solidFill>
+                  <a:srgbClr val="9A9A9A"/>
+                </a:solidFill>
+                <a:latin typeface="Calibri"/>
+              </a:rPr>
+              <a:t>© Fikri Eren 2026</a:t>
+            </a:r>
+          </a:p>
+        </p:txBody>
+      </p:sp>
+    </p:spTree>
+  </p:cSld>
+  <p:clrMapOvr>
+    <a:masterClrMapping/>
+  </p:clrMapOvr>
+</p:sld>
+</file>
+
+<file path=ppt/slides/slide18.xml><?xml version="1.0" encoding="utf-8"?>
+<p:sld xmlns:a="http://schemas.openxmlformats.org/drawingml/2006/main" xmlns:p="http://schemas.openxmlformats.org/presentationml/2006/main" xmlns:r="http://schemas.openxmlformats.org/officeDocument/2006/relationships">
+  <p:cSld>
+    <p:bg>
+      <p:bgPr>
+        <a:blipFill dpi="0" rotWithShape="1">
+          <a:blip r:embed="rId2">
+            <a:lum/>
+          </a:blip>
+          <a:srcRect/>
+          <a:stretch>
+            <a:fillRect/>
+          </a:stretch>
+        </a:blipFill>
+        <a:effectLst/>
+      </p:bgPr>
+    </p:bg>
+    <p:spTree>
+      <p:nvGrpSpPr>
+        <p:cNvPr id="1" name=""/>
+        <p:cNvGrpSpPr/>
+        <p:nvPr/>
+      </p:nvGrpSpPr>
+      <p:grpSpPr/>
+      <p:sp>
+        <p:nvSpPr>
+          <p:cNvPr id="2" name="Title 1"/>
+          <p:cNvSpPr>
+            <a:spLocks noGrp="1"/>
+          </p:cNvSpPr>
+          <p:nvPr>
+            <p:ph type="title"/>
+          </p:nvPr>
+        </p:nvSpPr>
+        <p:spPr>
+          <a:xfrm>
+            <a:off x="548640" y="274320"/>
+            <a:ext cx="11018520" cy="914400"/>
+          </a:xfrm>
+        </p:spPr>
+        <p:txBody>
+          <a:bodyPr/>
+          <a:lstStyle/>
+          <a:p>
+            <a:r>
               <a:t>İyileştirme Alanı</a:t>
             </a:r>
           </a:p>
@@ -17710,7 +20632,7 @@
 </p:sld>
 </file>
 
-<file path=ppt/slides/slide17.xml><?xml version="1.0" encoding="utf-8"?>
+<file path=ppt/slides/slide19.xml><?xml version="1.0" encoding="utf-8"?>
 <p:sld xmlns:a="http://schemas.openxmlformats.org/drawingml/2006/main" xmlns:p="http://schemas.openxmlformats.org/presentationml/2006/main" xmlns:r="http://schemas.openxmlformats.org/officeDocument/2006/relationships">
   <p:cSld>
     <p:bg>

--- a/briefings/sezon-kadro-20260902/sunum-kadro-sezon2026.pptx
+++ b/briefings/sezon-kadro-20260902/sunum-kadro-sezon2026.pptx
@@ -687,7 +687,7 @@
                   <c:v>775.03155</c:v>
                 </c:pt>
                 <c:pt idx="1">
-                  <c:v>122.53417561000006</c:v>
+                  <c:v>122.53417561000009</c:v>
                 </c:pt>
                 <c:pt idx="2">
                   <c:v>160</c:v>
@@ -1649,13 +1649,13 @@
                 <c:formatCode>General</c:formatCode>
                 <c:ptCount val="3"/>
                 <c:pt idx="0">
-                  <c:v>57.55862375814162</c:v>
+                  <c:v>57.55862375814169</c:v>
                 </c:pt>
                 <c:pt idx="1">
-                  <c:v>96.00493094594302</c:v>
+                  <c:v>96.00493094594309</c:v>
                 </c:pt>
                 <c:pt idx="2">
-                  <c:v>62.267526610057274</c:v>
+                  <c:v>62.26752661005725</c:v>
                 </c:pt>
               </c:numCache>
             </c:numRef>
@@ -11628,7 +11628,7 @@
                           </a:solidFill>
                           <a:latin typeface="Calibri"/>
                         </a:rPr>
-                        <a:t>İdari İşler</a:t>
+                        <a:t>Kültür</a:t>
                       </a:r>
                     </a:p>
                   </a:txBody>
@@ -11651,7 +11651,7 @@
                           </a:solidFill>
                           <a:latin typeface="Calibri"/>
                         </a:rPr>
-                        <a:t>8</a:t>
+                        <a:t>22</a:t>
                       </a:r>
                     </a:p>
                   </a:txBody>
@@ -11674,7 +11674,7 @@
                           </a:solidFill>
                           <a:latin typeface="Calibri"/>
                         </a:rPr>
-                        <a:t>6</a:t>
+                        <a:t>20</a:t>
                       </a:r>
                     </a:p>
                   </a:txBody>
@@ -11766,7 +11766,7 @@
                           </a:solidFill>
                           <a:latin typeface="Calibri"/>
                         </a:rPr>
-                        <a:t>—</a:t>
+                        <a:t>2</a:t>
                       </a:r>
                     </a:p>
                   </a:txBody>
@@ -11791,7 +11791,7 @@
                           </a:solidFill>
                           <a:latin typeface="Calibri"/>
                         </a:rPr>
-                        <a:t>Kültür</a:t>
+                        <a:t>Mağaza</a:t>
                       </a:r>
                     </a:p>
                   </a:txBody>
@@ -11814,7 +11814,7 @@
                           </a:solidFill>
                           <a:latin typeface="Calibri"/>
                         </a:rPr>
-                        <a:t>22</a:t>
+                        <a:t>10</a:t>
                       </a:r>
                     </a:p>
                   </a:txBody>
@@ -11837,7 +11837,7 @@
                           </a:solidFill>
                           <a:latin typeface="Calibri"/>
                         </a:rPr>
-                        <a:t>20</a:t>
+                        <a:t>8</a:t>
                       </a:r>
                     </a:p>
                   </a:txBody>
@@ -11929,7 +11929,7 @@
                           </a:solidFill>
                           <a:latin typeface="Calibri"/>
                         </a:rPr>
-                        <a:t>2</a:t>
+                        <a:t>—</a:t>
                       </a:r>
                     </a:p>
                   </a:txBody>
@@ -11954,7 +11954,7 @@
                           </a:solidFill>
                           <a:latin typeface="Calibri"/>
                         </a:rPr>
-                        <a:t>Mağaza</a:t>
+                        <a:t>İdari İşler</a:t>
                       </a:r>
                     </a:p>
                   </a:txBody>
@@ -11977,7 +11977,7 @@
                           </a:solidFill>
                           <a:latin typeface="Calibri"/>
                         </a:rPr>
-                        <a:t>10</a:t>
+                        <a:t>8</a:t>
                       </a:r>
                     </a:p>
                   </a:txBody>
@@ -12000,7 +12000,7 @@
                           </a:solidFill>
                           <a:latin typeface="Calibri"/>
                         </a:rPr>
-                        <a:t>8</a:t>
+                        <a:t>6</a:t>
                       </a:r>
                     </a:p>
                   </a:txBody>
@@ -12117,7 +12117,7 @@
                           </a:solidFill>
                           <a:latin typeface="Calibri"/>
                         </a:rPr>
-                        <a:t>Kasa</a:t>
+                        <a:t>Akademi</a:t>
                       </a:r>
                     </a:p>
                   </a:txBody>
@@ -12140,7 +12140,7 @@
                           </a:solidFill>
                           <a:latin typeface="Calibri"/>
                         </a:rPr>
-                        <a:t>16</a:t>
+                        <a:t>10</a:t>
                       </a:r>
                     </a:p>
                   </a:txBody>
@@ -12163,7 +12163,7 @@
                           </a:solidFill>
                           <a:latin typeface="Calibri"/>
                         </a:rPr>
-                        <a:t>15</a:t>
+                        <a:t>9</a:t>
                       </a:r>
                     </a:p>
                   </a:txBody>
@@ -12255,7 +12255,7 @@
                           </a:solidFill>
                           <a:latin typeface="Calibri"/>
                         </a:rPr>
-                        <a:t>9</a:t>
+                        <a:t>—</a:t>
                       </a:r>
                     </a:p>
                   </a:txBody>
@@ -12280,7 +12280,7 @@
                           </a:solidFill>
                           <a:latin typeface="Calibri"/>
                         </a:rPr>
-                        <a:t>Akademi</a:t>
+                        <a:t>Kasa</a:t>
                       </a:r>
                     </a:p>
                   </a:txBody>
@@ -12303,7 +12303,7 @@
                           </a:solidFill>
                           <a:latin typeface="Calibri"/>
                         </a:rPr>
-                        <a:t>10</a:t>
+                        <a:t>16</a:t>
                       </a:r>
                     </a:p>
                   </a:txBody>
@@ -12326,99 +12326,99 @@
                           </a:solidFill>
                           <a:latin typeface="Calibri"/>
                         </a:rPr>
+                        <a:t>15</a:t>
+                      </a:r>
+                    </a:p>
+                  </a:txBody>
+                  <a:tcPr>
+                    <a:solidFill>
+                      <a:srgbClr val="FAFAFA"/>
+                    </a:solidFill>
+                  </a:tcPr>
+                </a:tc>
+                <a:tc>
+                  <a:txBody>
+                    <a:bodyPr/>
+                    <a:lstStyle/>
+                    <a:p>
+                      <a:pPr algn="ctr"/>
+                      <a:r>
+                        <a:rPr sz="900" b="0">
+                          <a:solidFill>
+                            <a:srgbClr val="333333"/>
+                          </a:solidFill>
+                          <a:latin typeface="Calibri"/>
+                        </a:rPr>
+                        <a:t>—</a:t>
+                      </a:r>
+                    </a:p>
+                  </a:txBody>
+                  <a:tcPr>
+                    <a:solidFill>
+                      <a:srgbClr val="FAFAFA"/>
+                    </a:solidFill>
+                  </a:tcPr>
+                </a:tc>
+                <a:tc>
+                  <a:txBody>
+                    <a:bodyPr/>
+                    <a:lstStyle/>
+                    <a:p>
+                      <a:pPr algn="ctr"/>
+                      <a:r>
+                        <a:rPr sz="900" b="1">
+                          <a:solidFill>
+                            <a:srgbClr val="A6001A"/>
+                          </a:solidFill>
+                          <a:latin typeface="Calibri"/>
+                        </a:rPr>
+                        <a:t>1</a:t>
+                      </a:r>
+                    </a:p>
+                  </a:txBody>
+                  <a:tcPr>
+                    <a:solidFill>
+                      <a:srgbClr val="FAFAFA"/>
+                    </a:solidFill>
+                  </a:tcPr>
+                </a:tc>
+                <a:tc>
+                  <a:txBody>
+                    <a:bodyPr/>
+                    <a:lstStyle/>
+                    <a:p>
+                      <a:pPr algn="ctr"/>
+                      <a:r>
+                        <a:rPr sz="900" b="0">
+                          <a:solidFill>
+                            <a:srgbClr val="333333"/>
+                          </a:solidFill>
+                          <a:latin typeface="Calibri"/>
+                        </a:rPr>
+                        <a:t>—</a:t>
+                      </a:r>
+                    </a:p>
+                  </a:txBody>
+                  <a:tcPr>
+                    <a:solidFill>
+                      <a:srgbClr val="FAFAFA"/>
+                    </a:solidFill>
+                  </a:tcPr>
+                </a:tc>
+                <a:tc>
+                  <a:txBody>
+                    <a:bodyPr/>
+                    <a:lstStyle/>
+                    <a:p>
+                      <a:pPr algn="ctr"/>
+                      <a:r>
+                        <a:rPr sz="900" b="0">
+                          <a:solidFill>
+                            <a:srgbClr val="333333"/>
+                          </a:solidFill>
+                          <a:latin typeface="Calibri"/>
+                        </a:rPr>
                         <a:t>9</a:t>
-                      </a:r>
-                    </a:p>
-                  </a:txBody>
-                  <a:tcPr>
-                    <a:solidFill>
-                      <a:srgbClr val="FAFAFA"/>
-                    </a:solidFill>
-                  </a:tcPr>
-                </a:tc>
-                <a:tc>
-                  <a:txBody>
-                    <a:bodyPr/>
-                    <a:lstStyle/>
-                    <a:p>
-                      <a:pPr algn="ctr"/>
-                      <a:r>
-                        <a:rPr sz="900" b="0">
-                          <a:solidFill>
-                            <a:srgbClr val="333333"/>
-                          </a:solidFill>
-                          <a:latin typeface="Calibri"/>
-                        </a:rPr>
-                        <a:t>—</a:t>
-                      </a:r>
-                    </a:p>
-                  </a:txBody>
-                  <a:tcPr>
-                    <a:solidFill>
-                      <a:srgbClr val="FAFAFA"/>
-                    </a:solidFill>
-                  </a:tcPr>
-                </a:tc>
-                <a:tc>
-                  <a:txBody>
-                    <a:bodyPr/>
-                    <a:lstStyle/>
-                    <a:p>
-                      <a:pPr algn="ctr"/>
-                      <a:r>
-                        <a:rPr sz="900" b="1">
-                          <a:solidFill>
-                            <a:srgbClr val="A6001A"/>
-                          </a:solidFill>
-                          <a:latin typeface="Calibri"/>
-                        </a:rPr>
-                        <a:t>1</a:t>
-                      </a:r>
-                    </a:p>
-                  </a:txBody>
-                  <a:tcPr>
-                    <a:solidFill>
-                      <a:srgbClr val="FAFAFA"/>
-                    </a:solidFill>
-                  </a:tcPr>
-                </a:tc>
-                <a:tc>
-                  <a:txBody>
-                    <a:bodyPr/>
-                    <a:lstStyle/>
-                    <a:p>
-                      <a:pPr algn="ctr"/>
-                      <a:r>
-                        <a:rPr sz="900" b="0">
-                          <a:solidFill>
-                            <a:srgbClr val="333333"/>
-                          </a:solidFill>
-                          <a:latin typeface="Calibri"/>
-                        </a:rPr>
-                        <a:t>—</a:t>
-                      </a:r>
-                    </a:p>
-                  </a:txBody>
-                  <a:tcPr>
-                    <a:solidFill>
-                      <a:srgbClr val="FAFAFA"/>
-                    </a:solidFill>
-                  </a:tcPr>
-                </a:tc>
-                <a:tc>
-                  <a:txBody>
-                    <a:bodyPr/>
-                    <a:lstStyle/>
-                    <a:p>
-                      <a:pPr algn="ctr"/>
-                      <a:r>
-                        <a:rPr sz="900" b="0">
-                          <a:solidFill>
-                            <a:srgbClr val="333333"/>
-                          </a:solidFill>
-                          <a:latin typeface="Calibri"/>
-                        </a:rPr>
-                        <a:t>—</a:t>
                       </a:r>
                     </a:p>
                   </a:txBody>
@@ -12443,7 +12443,7 @@
                           </a:solidFill>
                           <a:latin typeface="Calibri"/>
                         </a:rPr>
-                        <a:t>Yardımcı Kitap</a:t>
+                        <a:t>Kırtasiye</a:t>
                       </a:r>
                     </a:p>
                   </a:txBody>
@@ -12466,7 +12466,7 @@
                           </a:solidFill>
                           <a:latin typeface="Calibri"/>
                         </a:rPr>
-                        <a:t>18</a:t>
+                        <a:t>24</a:t>
                       </a:r>
                     </a:p>
                   </a:txBody>
@@ -12489,7 +12489,7 @@
                           </a:solidFill>
                           <a:latin typeface="Calibri"/>
                         </a:rPr>
-                        <a:t>21</a:t>
+                        <a:t>23</a:t>
                       </a:r>
                     </a:p>
                   </a:txBody>
@@ -12512,6 +12512,52 @@
                           </a:solidFill>
                           <a:latin typeface="Calibri"/>
                         </a:rPr>
+                        <a:t>2</a:t>
+                      </a:r>
+                    </a:p>
+                  </a:txBody>
+                  <a:tcPr>
+                    <a:solidFill>
+                      <a:srgbClr val="FFFFFF"/>
+                    </a:solidFill>
+                  </a:tcPr>
+                </a:tc>
+                <a:tc>
+                  <a:txBody>
+                    <a:bodyPr/>
+                    <a:lstStyle/>
+                    <a:p>
+                      <a:pPr algn="ctr"/>
+                      <a:r>
+                        <a:rPr sz="900" b="1">
+                          <a:solidFill>
+                            <a:srgbClr val="A6001A"/>
+                          </a:solidFill>
+                          <a:latin typeface="Calibri"/>
+                        </a:rPr>
+                        <a:t>1</a:t>
+                      </a:r>
+                    </a:p>
+                  </a:txBody>
+                  <a:tcPr>
+                    <a:solidFill>
+                      <a:srgbClr val="FFFFFF"/>
+                    </a:solidFill>
+                  </a:tcPr>
+                </a:tc>
+                <a:tc>
+                  <a:txBody>
+                    <a:bodyPr/>
+                    <a:lstStyle/>
+                    <a:p>
+                      <a:pPr algn="ctr"/>
+                      <a:r>
+                        <a:rPr sz="900" b="0">
+                          <a:solidFill>
+                            <a:srgbClr val="333333"/>
+                          </a:solidFill>
+                          <a:latin typeface="Calibri"/>
+                        </a:rPr>
                         <a:t>—</a:t>
                       </a:r>
                     </a:p>
@@ -12529,59 +12575,13 @@
                     <a:p>
                       <a:pPr algn="ctr"/>
                       <a:r>
-                        <a:rPr sz="900" b="1">
-                          <a:solidFill>
-                            <a:srgbClr val="A6001A"/>
-                          </a:solidFill>
-                          <a:latin typeface="Calibri"/>
-                        </a:rPr>
-                        <a:t>—</a:t>
-                      </a:r>
-                    </a:p>
-                  </a:txBody>
-                  <a:tcPr>
-                    <a:solidFill>
-                      <a:srgbClr val="FFFFFF"/>
-                    </a:solidFill>
-                  </a:tcPr>
-                </a:tc>
-                <a:tc>
-                  <a:txBody>
-                    <a:bodyPr/>
-                    <a:lstStyle/>
-                    <a:p>
-                      <a:pPr algn="ctr"/>
-                      <a:r>
                         <a:rPr sz="900" b="0">
                           <a:solidFill>
                             <a:srgbClr val="333333"/>
                           </a:solidFill>
                           <a:latin typeface="Calibri"/>
                         </a:rPr>
-                        <a:t>3</a:t>
-                      </a:r>
-                    </a:p>
-                  </a:txBody>
-                  <a:tcPr>
-                    <a:solidFill>
-                      <a:srgbClr val="FFFFFF"/>
-                    </a:solidFill>
-                  </a:tcPr>
-                </a:tc>
-                <a:tc>
-                  <a:txBody>
-                    <a:bodyPr/>
-                    <a:lstStyle/>
-                    <a:p>
-                      <a:pPr algn="ctr"/>
-                      <a:r>
-                        <a:rPr sz="900" b="0">
-                          <a:solidFill>
-                            <a:srgbClr val="333333"/>
-                          </a:solidFill>
-                          <a:latin typeface="Calibri"/>
-                        </a:rPr>
-                        <a:t>15</a:t>
+                        <a:t>22</a:t>
                       </a:r>
                     </a:p>
                   </a:txBody>
@@ -12606,7 +12606,7 @@
                           </a:solidFill>
                           <a:latin typeface="Calibri"/>
                         </a:rPr>
-                        <a:t>Mal Kabul</a:t>
+                        <a:t>Kıyafet</a:t>
                       </a:r>
                     </a:p>
                   </a:txBody>
@@ -12629,7 +12629,7 @@
                           </a:solidFill>
                           <a:latin typeface="Calibri"/>
                         </a:rPr>
-                        <a:t>6</a:t>
+                        <a:t>0</a:t>
                       </a:r>
                     </a:p>
                   </a:txBody>
@@ -12652,7 +12652,7 @@
                           </a:solidFill>
                           <a:latin typeface="Calibri"/>
                         </a:rPr>
-                        <a:t>5</a:t>
+                        <a:t>0</a:t>
                       </a:r>
                     </a:p>
                   </a:txBody>
@@ -12675,7 +12675,7 @@
                           </a:solidFill>
                           <a:latin typeface="Calibri"/>
                         </a:rPr>
-                        <a:t>1</a:t>
+                        <a:t>—</a:t>
                       </a:r>
                     </a:p>
                   </a:txBody>
@@ -12698,7 +12698,7 @@
                           </a:solidFill>
                           <a:latin typeface="Calibri"/>
                         </a:rPr>
-                        <a:t>1</a:t>
+                        <a:t>—</a:t>
                       </a:r>
                     </a:p>
                   </a:txBody>
@@ -12744,7 +12744,7 @@
                           </a:solidFill>
                           <a:latin typeface="Calibri"/>
                         </a:rPr>
-                        <a:t>1</a:t>
+                        <a:t>4</a:t>
                       </a:r>
                     </a:p>
                   </a:txBody>
@@ -12769,7 +12769,7 @@
                           </a:solidFill>
                           <a:latin typeface="Calibri"/>
                         </a:rPr>
-                        <a:t>Kırtasiye</a:t>
+                        <a:t>Mal Kabul</a:t>
                       </a:r>
                     </a:p>
                   </a:txBody>
@@ -12792,7 +12792,7 @@
                           </a:solidFill>
                           <a:latin typeface="Calibri"/>
                         </a:rPr>
-                        <a:t>24</a:t>
+                        <a:t>6</a:t>
                       </a:r>
                     </a:p>
                   </a:txBody>
@@ -12815,7 +12815,7 @@
                           </a:solidFill>
                           <a:latin typeface="Calibri"/>
                         </a:rPr>
-                        <a:t>23</a:t>
+                        <a:t>5</a:t>
                       </a:r>
                     </a:p>
                   </a:txBody>
@@ -12838,7 +12838,7 @@
                           </a:solidFill>
                           <a:latin typeface="Calibri"/>
                         </a:rPr>
-                        <a:t>2</a:t>
+                        <a:t>1</a:t>
                       </a:r>
                     </a:p>
                   </a:txBody>
@@ -12907,7 +12907,7 @@
                           </a:solidFill>
                           <a:latin typeface="Calibri"/>
                         </a:rPr>
-                        <a:t>22</a:t>
+                        <a:t>1</a:t>
                       </a:r>
                     </a:p>
                   </a:txBody>
@@ -13095,7 +13095,7 @@
                           </a:solidFill>
                           <a:latin typeface="Calibri"/>
                         </a:rPr>
-                        <a:t>Kıyafet</a:t>
+                        <a:t>Yardımcı Kitap</a:t>
                       </a:r>
                     </a:p>
                   </a:txBody>
@@ -13118,7 +13118,7 @@
                           </a:solidFill>
                           <a:latin typeface="Calibri"/>
                         </a:rPr>
-                        <a:t>0</a:t>
+                        <a:t>18</a:t>
                       </a:r>
                     </a:p>
                   </a:txBody>
@@ -13141,7 +13141,7 @@
                           </a:solidFill>
                           <a:latin typeface="Calibri"/>
                         </a:rPr>
-                        <a:t>0</a:t>
+                        <a:t>21</a:t>
                       </a:r>
                     </a:p>
                   </a:txBody>
@@ -13210,7 +13210,7 @@
                           </a:solidFill>
                           <a:latin typeface="Calibri"/>
                         </a:rPr>
-                        <a:t>—</a:t>
+                        <a:t>3</a:t>
                       </a:r>
                     </a:p>
                   </a:txBody>
@@ -13233,7 +13233,7 @@
                           </a:solidFill>
                           <a:latin typeface="Calibri"/>
                         </a:rPr>
-                        <a:t>4</a:t>
+                        <a:t>15</a:t>
                       </a:r>
                     </a:p>
                   </a:txBody>
@@ -14088,9 +14088,9 @@
                 <a:latin typeface="Calibri"/>
               </a:rPr>
               <a:t>Çocuk  5 kişi
-İdari İşler  2 kişi
 Kültür  2 kişi
-Mağaza  2 kişi</a:t>
+Mağaza  2 kişi
+İdari İşler  2 kişi</a:t>
             </a:r>
           </a:p>
         </p:txBody>

--- a/briefings/sezon-kadro-20260902/sunum-kadro-sezon2026.pptx
+++ b/briefings/sezon-kadro-20260902/sunum-kadro-sezon2026.pptx
@@ -27,6 +27,7 @@
     <p:sldId id="272" r:id="rId23"/>
     <p:sldId id="273" r:id="rId24"/>
     <p:sldId id="274" r:id="rId25"/>
+    <p:sldId id="275" r:id="rId26"/>
   </p:sldIdLst>
   <p:sldSz cx="12192000" cy="6858000"/>
   <p:notesSz cx="6858000" cy="9144000"/>
@@ -365,7 +366,7 @@
                 <c:formatCode>General</c:formatCode>
                 <c:ptCount val="1"/>
                 <c:pt idx="0">
-                  <c:v>97.23687580025609</c:v>
+                  <c:v>70.14545454545456</c:v>
                 </c:pt>
               </c:numCache>
             </c:numRef>
@@ -408,7 +409,7 @@
                 <c:formatCode>General</c:formatCode>
                 <c:ptCount val="1"/>
                 <c:pt idx="0">
-                  <c:v>106.94172897196262</c:v>
+                  <c:v>73.98425196850394</c:v>
                 </c:pt>
               </c:numCache>
             </c:numRef>
@@ -451,7 +452,7 @@
                 <c:formatCode>General</c:formatCode>
                 <c:ptCount val="1"/>
                 <c:pt idx="0">
-                  <c:v>341.9233290653009</c:v>
+                  <c:v>447.0545454545455</c:v>
                 </c:pt>
               </c:numCache>
             </c:numRef>
@@ -577,6 +578,494 @@
 </c:chartSpace>
 </file>
 
+<file path=ppt/charts/chart11.xml><?xml version="1.0" encoding="utf-8"?>
+<c:chartSpace xmlns:c="http://schemas.openxmlformats.org/drawingml/2006/chart" xmlns:a="http://schemas.openxmlformats.org/drawingml/2006/main" xmlns:r="http://schemas.openxmlformats.org/officeDocument/2006/relationships">
+  <c:date1904 val="0"/>
+  <c:chart>
+    <c:autoTitleDeleted val="1"/>
+    <c:plotArea>
+      <c:barChart>
+        <c:barDir val="col"/>
+        <c:grouping val="clustered"/>
+        <c:ser>
+          <c:idx val="0"/>
+          <c:order val="0"/>
+          <c:tx>
+            <c:strRef>
+              <c:f>Sheet1!$B$1</c:f>
+              <c:strCache>
+                <c:ptCount val="1"/>
+                <c:pt idx="0">
+                  <c:v>2025 kişi-ay</c:v>
+                </c:pt>
+              </c:strCache>
+            </c:strRef>
+          </c:tx>
+          <c:spPr>
+            <a:solidFill>
+              <a:srgbClr val="9A9A9A"/>
+            </a:solidFill>
+          </c:spPr>
+          <c:cat>
+            <c:strRef>
+              <c:f>Sheet1!$A$2:$A$8</c:f>
+              <c:strCache>
+                <c:ptCount val="7"/>
+                <c:pt idx="0">
+                  <c:v>Oca</c:v>
+                </c:pt>
+                <c:pt idx="1">
+                  <c:v>Şub</c:v>
+                </c:pt>
+                <c:pt idx="2">
+                  <c:v>Mar</c:v>
+                </c:pt>
+                <c:pt idx="3">
+                  <c:v>Nis</c:v>
+                </c:pt>
+                <c:pt idx="4">
+                  <c:v>May</c:v>
+                </c:pt>
+                <c:pt idx="5">
+                  <c:v>Haz</c:v>
+                </c:pt>
+                <c:pt idx="6">
+                  <c:v>Tem*</c:v>
+                </c:pt>
+              </c:strCache>
+            </c:strRef>
+          </c:cat>
+          <c:val>
+            <c:numRef>
+              <c:f>Sheet1!$B$2:$B$8</c:f>
+              <c:numCache>
+                <c:formatCode>General</c:formatCode>
+                <c:ptCount val="7"/>
+                <c:pt idx="0">
+                  <c:v>117</c:v>
+                </c:pt>
+                <c:pt idx="1">
+                  <c:v>116</c:v>
+                </c:pt>
+                <c:pt idx="2">
+                  <c:v>112</c:v>
+                </c:pt>
+                <c:pt idx="3">
+                  <c:v>114</c:v>
+                </c:pt>
+                <c:pt idx="4">
+                  <c:v>107</c:v>
+                </c:pt>
+                <c:pt idx="5">
+                  <c:v>105</c:v>
+                </c:pt>
+                <c:pt idx="6">
+                  <c:v>110</c:v>
+                </c:pt>
+              </c:numCache>
+            </c:numRef>
+          </c:val>
+        </c:ser>
+        <c:ser>
+          <c:idx val="1"/>
+          <c:order val="1"/>
+          <c:tx>
+            <c:strRef>
+              <c:f>Sheet1!$C$1</c:f>
+              <c:strCache>
+                <c:ptCount val="1"/>
+                <c:pt idx="0">
+                  <c:v>2026 kişi-ay</c:v>
+                </c:pt>
+              </c:strCache>
+            </c:strRef>
+          </c:tx>
+          <c:spPr>
+            <a:solidFill>
+              <a:srgbClr val="E30622"/>
+            </a:solidFill>
+          </c:spPr>
+          <c:cat>
+            <c:strRef>
+              <c:f>Sheet1!$A$2:$A$8</c:f>
+              <c:strCache>
+                <c:ptCount val="7"/>
+                <c:pt idx="0">
+                  <c:v>Oca</c:v>
+                </c:pt>
+                <c:pt idx="1">
+                  <c:v>Şub</c:v>
+                </c:pt>
+                <c:pt idx="2">
+                  <c:v>Mar</c:v>
+                </c:pt>
+                <c:pt idx="3">
+                  <c:v>Nis</c:v>
+                </c:pt>
+                <c:pt idx="4">
+                  <c:v>May</c:v>
+                </c:pt>
+                <c:pt idx="5">
+                  <c:v>Haz</c:v>
+                </c:pt>
+                <c:pt idx="6">
+                  <c:v>Tem*</c:v>
+                </c:pt>
+              </c:strCache>
+            </c:strRef>
+          </c:cat>
+          <c:val>
+            <c:numRef>
+              <c:f>Sheet1!$C$2:$C$8</c:f>
+              <c:numCache>
+                <c:formatCode>General</c:formatCode>
+                <c:ptCount val="7"/>
+                <c:pt idx="0">
+                  <c:v>121</c:v>
+                </c:pt>
+                <c:pt idx="1">
+                  <c:v>123</c:v>
+                </c:pt>
+                <c:pt idx="2">
+                  <c:v>119</c:v>
+                </c:pt>
+                <c:pt idx="3">
+                  <c:v>124</c:v>
+                </c:pt>
+                <c:pt idx="4">
+                  <c:v>124</c:v>
+                </c:pt>
+                <c:pt idx="5">
+                  <c:v>118</c:v>
+                </c:pt>
+                <c:pt idx="6">
+                  <c:v>127</c:v>
+                </c:pt>
+              </c:numCache>
+            </c:numRef>
+          </c:val>
+        </c:ser>
+        <c:dLbls>
+          <c:numFmt sourceLinked="0" formatCode="#,##0"/>
+          <c:txPr>
+            <a:bodyPr/>
+            <a:lstStyle/>
+            <a:p>
+              <a:pPr>
+                <a:defRPr sz="800"/>
+              </a:pPr>
+            </a:p>
+          </c:txPr>
+          <c:showLegendKey val="0"/>
+          <c:showVal val="1"/>
+          <c:showCatName val="0"/>
+          <c:showSerName val="0"/>
+          <c:showPercent val="0"/>
+          <c:showBubbleSize val="0"/>
+          <c:showLeaderLines val="1"/>
+        </c:dLbls>
+        <c:gapWidth val="60"/>
+        <c:axId val="-2068027336"/>
+        <c:axId val="-2113994440"/>
+      </c:barChart>
+      <c:catAx>
+        <c:axId val="-2068027336"/>
+        <c:scaling>
+          <c:orientation val="minMax"/>
+        </c:scaling>
+        <c:delete val="0"/>
+        <c:axPos val="b"/>
+        <c:majorTickMark val="out"/>
+        <c:minorTickMark val="none"/>
+        <c:tickLblPos val="nextTo"/>
+        <c:crossAx val="-2113994440"/>
+        <c:crosses val="autoZero"/>
+        <c:auto val="1"/>
+        <c:lblAlgn val="ctr"/>
+        <c:lblOffset val="100"/>
+        <c:noMultiLvlLbl val="0"/>
+      </c:catAx>
+      <c:valAx>
+        <c:axId val="-2113994440"/>
+        <c:scaling/>
+        <c:delete val="0"/>
+        <c:axPos val="l"/>
+        <c:majorGridlines/>
+        <c:majorTickMark val="out"/>
+        <c:minorTickMark val="none"/>
+        <c:tickLblPos val="nextTo"/>
+        <c:crossAx val="-2068027336"/>
+        <c:crosses val="autoZero"/>
+      </c:valAx>
+    </c:plotArea>
+    <c:legend>
+      <c:legendPos val="t"/>
+      <c:overlay val="0"/>
+    </c:legend>
+    <c:dispBlanksAs val="gap"/>
+  </c:chart>
+  <c:txPr>
+    <a:bodyPr/>
+    <a:lstStyle/>
+    <a:p>
+      <a:pPr>
+        <a:defRPr sz="900">
+          <a:latin typeface="Calibri"/>
+        </a:defRPr>
+      </a:pPr>
+      <a:endParaRPr lang="en-US"/>
+    </a:p>
+  </c:txPr>
+  <c:externalData r:id="rId1">
+    <c:autoUpdate val="0"/>
+  </c:externalData>
+</c:chartSpace>
+</file>
+
+<file path=ppt/charts/chart12.xml><?xml version="1.0" encoding="utf-8"?>
+<c:chartSpace xmlns:c="http://schemas.openxmlformats.org/drawingml/2006/chart" xmlns:a="http://schemas.openxmlformats.org/drawingml/2006/main" xmlns:r="http://schemas.openxmlformats.org/officeDocument/2006/relationships">
+  <c:date1904 val="0"/>
+  <c:chart>
+    <c:autoTitleDeleted val="1"/>
+    <c:plotArea>
+      <c:barChart>
+        <c:barDir val="col"/>
+        <c:grouping val="clustered"/>
+        <c:ser>
+          <c:idx val="0"/>
+          <c:order val="0"/>
+          <c:tx>
+            <c:strRef>
+              <c:f>Sheet1!$B$1</c:f>
+              <c:strCache>
+                <c:ptCount val="1"/>
+                <c:pt idx="0">
+                  <c:v>2025</c:v>
+                </c:pt>
+              </c:strCache>
+            </c:strRef>
+          </c:tx>
+          <c:spPr>
+            <a:solidFill>
+              <a:srgbClr val="9A9A9A"/>
+            </a:solidFill>
+          </c:spPr>
+          <c:cat>
+            <c:strRef>
+              <c:f>Sheet1!$A$2:$A$8</c:f>
+              <c:strCache>
+                <c:ptCount val="7"/>
+                <c:pt idx="0">
+                  <c:v>Oca</c:v>
+                </c:pt>
+                <c:pt idx="1">
+                  <c:v>Şub</c:v>
+                </c:pt>
+                <c:pt idx="2">
+                  <c:v>Mar</c:v>
+                </c:pt>
+                <c:pt idx="3">
+                  <c:v>Nis</c:v>
+                </c:pt>
+                <c:pt idx="4">
+                  <c:v>May</c:v>
+                </c:pt>
+                <c:pt idx="5">
+                  <c:v>Haz</c:v>
+                </c:pt>
+                <c:pt idx="6">
+                  <c:v>Tem*</c:v>
+                </c:pt>
+              </c:strCache>
+            </c:strRef>
+          </c:cat>
+          <c:val>
+            <c:numRef>
+              <c:f>Sheet1!$B$2:$B$8</c:f>
+              <c:numCache>
+                <c:formatCode>General</c:formatCode>
+                <c:ptCount val="7"/>
+                <c:pt idx="0">
+                  <c:v>10.64043589756458</c:v>
+                </c:pt>
+                <c:pt idx="1">
+                  <c:v>10.971390826419269</c:v>
+                </c:pt>
+                <c:pt idx="2">
+                  <c:v>13.882458998021423</c:v>
+                </c:pt>
+                <c:pt idx="3">
+                  <c:v>11.502227588672248</c:v>
+                </c:pt>
+                <c:pt idx="4">
+                  <c:v>15.964872627552756</c:v>
+                </c:pt>
+                <c:pt idx="5">
+                  <c:v>14.25960097198796</c:v>
+                </c:pt>
+                <c:pt idx="6">
+                  <c:v>14.29703378344554</c:v>
+                </c:pt>
+              </c:numCache>
+            </c:numRef>
+          </c:val>
+        </c:ser>
+        <c:ser>
+          <c:idx val="1"/>
+          <c:order val="1"/>
+          <c:tx>
+            <c:strRef>
+              <c:f>Sheet1!$C$1</c:f>
+              <c:strCache>
+                <c:ptCount val="1"/>
+                <c:pt idx="0">
+                  <c:v>2026</c:v>
+                </c:pt>
+              </c:strCache>
+            </c:strRef>
+          </c:tx>
+          <c:spPr>
+            <a:solidFill>
+              <a:srgbClr val="E30622"/>
+            </a:solidFill>
+          </c:spPr>
+          <c:cat>
+            <c:strRef>
+              <c:f>Sheet1!$A$2:$A$8</c:f>
+              <c:strCache>
+                <c:ptCount val="7"/>
+                <c:pt idx="0">
+                  <c:v>Oca</c:v>
+                </c:pt>
+                <c:pt idx="1">
+                  <c:v>Şub</c:v>
+                </c:pt>
+                <c:pt idx="2">
+                  <c:v>Mar</c:v>
+                </c:pt>
+                <c:pt idx="3">
+                  <c:v>Nis</c:v>
+                </c:pt>
+                <c:pt idx="4">
+                  <c:v>May</c:v>
+                </c:pt>
+                <c:pt idx="5">
+                  <c:v>Haz</c:v>
+                </c:pt>
+                <c:pt idx="6">
+                  <c:v>Tem*</c:v>
+                </c:pt>
+              </c:strCache>
+            </c:strRef>
+          </c:cat>
+          <c:val>
+            <c:numRef>
+              <c:f>Sheet1!$C$2:$C$8</c:f>
+              <c:numCache>
+                <c:formatCode>General</c:formatCode>
+                <c:ptCount val="7"/>
+                <c:pt idx="0">
+                  <c:v>9.342797291737972</c:v>
+                </c:pt>
+                <c:pt idx="1">
+                  <c:v>11.288098438412124</c:v>
+                </c:pt>
+                <c:pt idx="2">
+                  <c:v>11.702927412298237</c:v>
+                </c:pt>
+                <c:pt idx="3">
+                  <c:v>13.23692598350995</c:v>
+                </c:pt>
+                <c:pt idx="4">
+                  <c:v>13.848433011968734</c:v>
+                </c:pt>
+                <c:pt idx="5">
+                  <c:v>13.921476943829806</c:v>
+                </c:pt>
+                <c:pt idx="6">
+                  <c:v>12.711606463897567</c:v>
+                </c:pt>
+              </c:numCache>
+            </c:numRef>
+          </c:val>
+        </c:ser>
+        <c:dLbls>
+          <c:numFmt sourceLinked="0" formatCode="0.0&quot;%&quot;"/>
+          <c:txPr>
+            <a:bodyPr/>
+            <a:lstStyle/>
+            <a:p>
+              <a:pPr>
+                <a:defRPr sz="800"/>
+              </a:pPr>
+            </a:p>
+          </c:txPr>
+          <c:showLegendKey val="0"/>
+          <c:showVal val="1"/>
+          <c:showCatName val="0"/>
+          <c:showSerName val="0"/>
+          <c:showPercent val="0"/>
+          <c:showBubbleSize val="0"/>
+          <c:showLeaderLines val="1"/>
+        </c:dLbls>
+        <c:gapWidth val="60"/>
+        <c:axId val="-2068027336"/>
+        <c:axId val="-2113994440"/>
+      </c:barChart>
+      <c:catAx>
+        <c:axId val="-2068027336"/>
+        <c:scaling>
+          <c:orientation val="minMax"/>
+        </c:scaling>
+        <c:delete val="0"/>
+        <c:axPos val="b"/>
+        <c:majorTickMark val="out"/>
+        <c:minorTickMark val="none"/>
+        <c:tickLblPos val="nextTo"/>
+        <c:crossAx val="-2113994440"/>
+        <c:crosses val="autoZero"/>
+        <c:auto val="1"/>
+        <c:lblAlgn val="ctr"/>
+        <c:lblOffset val="100"/>
+        <c:noMultiLvlLbl val="0"/>
+      </c:catAx>
+      <c:valAx>
+        <c:axId val="-2113994440"/>
+        <c:scaling/>
+        <c:delete val="0"/>
+        <c:axPos val="l"/>
+        <c:majorGridlines/>
+        <c:majorTickMark val="out"/>
+        <c:minorTickMark val="none"/>
+        <c:tickLblPos val="nextTo"/>
+        <c:crossAx val="-2068027336"/>
+        <c:crosses val="autoZero"/>
+      </c:valAx>
+    </c:plotArea>
+    <c:legend>
+      <c:legendPos val="t"/>
+      <c:overlay val="0"/>
+    </c:legend>
+    <c:dispBlanksAs val="gap"/>
+  </c:chart>
+  <c:txPr>
+    <a:bodyPr/>
+    <a:lstStyle/>
+    <a:p>
+      <a:pPr>
+        <a:defRPr sz="900">
+          <a:latin typeface="Calibri"/>
+        </a:defRPr>
+      </a:pPr>
+      <a:endParaRPr lang="en-US"/>
+    </a:p>
+  </c:txPr>
+  <c:externalData r:id="rId1">
+    <c:autoUpdate val="0"/>
+  </c:externalData>
+</c:chartSpace>
+</file>
+
 <file path=ppt/charts/chart2.xml><?xml version="1.0" encoding="utf-8"?>
 <c:chartSpace xmlns:c="http://schemas.openxmlformats.org/drawingml/2006/chart" xmlns:a="http://schemas.openxmlformats.org/drawingml/2006/main" xmlns:r="http://schemas.openxmlformats.org/officeDocument/2006/relationships">
   <c:date1904 val="0"/>
@@ -632,7 +1121,7 @@
                   <c:v>574.6556999999999</c:v>
                 </c:pt>
                 <c:pt idx="1">
-                  <c:v>71.8170457700001</c:v>
+                  <c:v>71.81704577000014</c:v>
                 </c:pt>
                 <c:pt idx="2">
                   <c:v>143</c:v>
@@ -1649,10 +2138,10 @@
                 <c:formatCode>General</c:formatCode>
                 <c:ptCount val="3"/>
                 <c:pt idx="0">
-                  <c:v>57.55862375814169</c:v>
+                  <c:v>57.55862375814162</c:v>
                 </c:pt>
                 <c:pt idx="1">
-                  <c:v>96.00493094594309</c:v>
+                  <c:v>96.004930945943</c:v>
                 </c:pt>
                 <c:pt idx="2">
                   <c:v>62.26752661005725</c:v>
@@ -14327,7 +14816,7 @@
           <a:lstStyle/>
           <a:p>
             <a:r>
-              <a:t>Personel Maliyeti ve Ciro Oranı</a:t>
+              <a:t>Personel Maliyeti ve Ciro Oranı — Sezon (Tem)</a:t>
             </a:r>
           </a:p>
         </p:txBody>
@@ -14519,7 +15008,7 @@
                 </a:solidFill>
                 <a:latin typeface="Calibri"/>
               </a:rPr>
-              <a:t>%12,85 → %12,15</a:t>
+              <a:t>%14,30 → %12,71</a:t>
             </a:r>
           </a:p>
         </p:txBody>
@@ -14558,7 +15047,7 @@
                 </a:solidFill>
                 <a:latin typeface="Calibri"/>
               </a:rPr>
-              <a:t>0,70 puan azaldı</a:t>
+              <a:t>1,59 puan azaldı</a:t>
             </a:r>
           </a:p>
         </p:txBody>
@@ -14750,7 +15239,7 @@
                 </a:solidFill>
                 <a:latin typeface="Calibri"/>
               </a:rPr>
-              <a:t>+%46,2</a:t>
+              <a:t>+%50,6</a:t>
             </a:r>
           </a:p>
         </p:txBody>
@@ -14789,7 +15278,7 @@
                 </a:solidFill>
                 <a:latin typeface="Calibri"/>
               </a:rPr>
-              <a:t>310 → 454 bin TL</a:t>
+              <a:t>279 → 420 bin TL</a:t>
             </a:r>
           </a:p>
         </p:txBody>
@@ -14981,7 +15470,7 @@
                 </a:solidFill>
                 <a:latin typeface="Calibri"/>
               </a:rPr>
-              <a:t>+%38,3</a:t>
+              <a:t>+%33,9</a:t>
             </a:r>
           </a:p>
         </p:txBody>
@@ -15020,7 +15509,7 @@
                 </a:solidFill>
                 <a:latin typeface="Calibri"/>
               </a:rPr>
-              <a:t>40 → 55 bin TL (ücret artışı)</a:t>
+              <a:t>40 → 53 bin TL (ücret artışı)</a:t>
             </a:r>
           </a:p>
         </p:txBody>
@@ -15034,8 +15523,8 @@
           <p:nvPr/>
         </p:nvGraphicFramePr>
         <p:xfrm>
-          <a:off x="548640" y="3429000"/>
-          <a:ext cx="7223760" cy="1316736"/>
+          <a:off x="548640" y="3291840"/>
+          <a:ext cx="7223760" cy="1536192"/>
         </p:xfrm>
         <a:graphic>
           <a:graphicData uri="http://schemas.openxmlformats.org/drawingml/2006/table">
@@ -15044,10 +15533,11 @@
                 <a:tableStyleId>{5C22544A-7EE6-4342-B048-85BDC9FD1C3A}</a:tableStyleId>
               </a:tblPr>
               <a:tblGrid>
-                <a:gridCol w="2834640"/>
-                <a:gridCol w="1463040"/>
-                <a:gridCol w="1463040"/>
-                <a:gridCol w="1463040"/>
+                <a:gridCol w="2331720"/>
+                <a:gridCol w="1234440"/>
+                <a:gridCol w="1234440"/>
+                <a:gridCol w="1188720"/>
+                <a:gridCol w="1234440"/>
               </a:tblGrid>
               <a:tr h="219456">
                 <a:tc>
@@ -15086,7 +15576,7 @@
                           </a:solidFill>
                           <a:latin typeface="Calibri"/>
                         </a:rPr>
-                        <a:t>2025</a:t>
+                        <a:t>SEZON 2025</a:t>
                       </a:r>
                     </a:p>
                   </a:txBody>
@@ -15109,7 +15599,7 @@
                           </a:solidFill>
                           <a:latin typeface="Calibri"/>
                         </a:rPr>
-                        <a:t>2026</a:t>
+                        <a:t>SEZON 2026</a:t>
                       </a:r>
                     </a:p>
                   </a:txBody>
@@ -15132,7 +15622,30 @@
                           </a:solidFill>
                           <a:latin typeface="Calibri"/>
                         </a:rPr>
-                        <a:t>Değişim</a:t>
+                        <a:t>SEZON Δ</a:t>
+                      </a:r>
+                    </a:p>
+                  </a:txBody>
+                  <a:tcPr>
+                    <a:solidFill>
+                      <a:srgbClr val="E30622"/>
+                    </a:solidFill>
+                  </a:tcPr>
+                </a:tc>
+                <a:tc>
+                  <a:txBody>
+                    <a:bodyPr/>
+                    <a:lstStyle/>
+                    <a:p>
+                      <a:pPr algn="ctr"/>
+                      <a:r>
+                        <a:rPr sz="850" b="1">
+                          <a:solidFill>
+                            <a:srgbClr val="FFFFFF"/>
+                          </a:solidFill>
+                          <a:latin typeface="Calibri"/>
+                        </a:rPr>
+                        <a:t>Yıl geneli Δ</a:t>
                       </a:r>
                     </a:p>
                   </a:txBody>
@@ -15180,7 +15693,7 @@
                           </a:solidFill>
                           <a:latin typeface="Calibri"/>
                         </a:rPr>
-                        <a:t>781</a:t>
+                        <a:t>110</a:t>
                       </a:r>
                     </a:p>
                   </a:txBody>
@@ -15203,7 +15716,7 @@
                           </a:solidFill>
                           <a:latin typeface="Calibri"/>
                         </a:rPr>
-                        <a:t>856</a:t>
+                        <a:t>127</a:t>
                       </a:r>
                     </a:p>
                   </a:txBody>
@@ -15223,6 +15736,29 @@
                         <a:rPr sz="950" b="1">
                           <a:solidFill>
                             <a:srgbClr val="A6001A"/>
+                          </a:solidFill>
+                          <a:latin typeface="Calibri"/>
+                        </a:rPr>
+                        <a:t>+%15,5</a:t>
+                      </a:r>
+                    </a:p>
+                  </a:txBody>
+                  <a:tcPr>
+                    <a:solidFill>
+                      <a:srgbClr val="FFFFFF"/>
+                    </a:solidFill>
+                  </a:tcPr>
+                </a:tc>
+                <a:tc>
+                  <a:txBody>
+                    <a:bodyPr/>
+                    <a:lstStyle/>
+                    <a:p>
+                      <a:pPr algn="ctr"/>
+                      <a:r>
+                        <a:rPr sz="950" b="0">
+                          <a:solidFill>
+                            <a:srgbClr val="9A9A9A"/>
                           </a:solidFill>
                           <a:latin typeface="Calibri"/>
                         </a:rPr>
@@ -15274,7 +15810,7 @@
                           </a:solidFill>
                           <a:latin typeface="Calibri"/>
                         </a:rPr>
-                        <a:t>25,3 M TL</a:t>
+                        <a:t>3,6 M TL</a:t>
                       </a:r>
                     </a:p>
                   </a:txBody>
@@ -15297,7 +15833,7 @@
                           </a:solidFill>
                           <a:latin typeface="Calibri"/>
                         </a:rPr>
-                        <a:t>38,1 M TL</a:t>
+                        <a:t>5,5 M TL</a:t>
                       </a:r>
                     </a:p>
                   </a:txBody>
@@ -15317,6 +15853,29 @@
                         <a:rPr sz="950" b="1">
                           <a:solidFill>
                             <a:srgbClr val="A6001A"/>
+                          </a:solidFill>
+                          <a:latin typeface="Calibri"/>
+                        </a:rPr>
+                        <a:t>+%53,5</a:t>
+                      </a:r>
+                    </a:p>
+                  </a:txBody>
+                  <a:tcPr>
+                    <a:solidFill>
+                      <a:srgbClr val="FAFAFA"/>
+                    </a:solidFill>
+                  </a:tcPr>
+                </a:tc>
+                <a:tc>
+                  <a:txBody>
+                    <a:bodyPr/>
+                    <a:lstStyle/>
+                    <a:p>
+                      <a:pPr algn="ctr"/>
+                      <a:r>
+                        <a:rPr sz="950" b="0">
+                          <a:solidFill>
+                            <a:srgbClr val="9A9A9A"/>
                           </a:solidFill>
                           <a:latin typeface="Calibri"/>
                         </a:rPr>
@@ -15345,7 +15904,7 @@
                           </a:solidFill>
                           <a:latin typeface="Calibri"/>
                         </a:rPr>
-                        <a:t>İşveren SGK + işsizlik payı</a:t>
+                        <a:t>İşveren SGK + işsizlik</a:t>
                       </a:r>
                     </a:p>
                   </a:txBody>
@@ -15368,7 +15927,7 @@
                           </a:solidFill>
                           <a:latin typeface="Calibri"/>
                         </a:rPr>
-                        <a:t>5,8 M TL</a:t>
+                        <a:t>0,8 M TL</a:t>
                       </a:r>
                     </a:p>
                   </a:txBody>
@@ -15391,7 +15950,7 @@
                           </a:solidFill>
                           <a:latin typeface="Calibri"/>
                         </a:rPr>
-                        <a:t>9,1 M TL</a:t>
+                        <a:t>1,3 M TL</a:t>
                       </a:r>
                     </a:p>
                   </a:txBody>
@@ -15411,6 +15970,29 @@
                         <a:rPr sz="950" b="1">
                           <a:solidFill>
                             <a:srgbClr val="A6001A"/>
+                          </a:solidFill>
+                          <a:latin typeface="Calibri"/>
+                        </a:rPr>
+                        <a:t>+%59,5</a:t>
+                      </a:r>
+                    </a:p>
+                  </a:txBody>
+                  <a:tcPr>
+                    <a:solidFill>
+                      <a:srgbClr val="FFFFFF"/>
+                    </a:solidFill>
+                  </a:tcPr>
+                </a:tc>
+                <a:tc>
+                  <a:txBody>
+                    <a:bodyPr/>
+                    <a:lstStyle/>
+                    <a:p>
+                      <a:pPr algn="ctr"/>
+                      <a:r>
+                        <a:rPr sz="950" b="0">
+                          <a:solidFill>
+                            <a:srgbClr val="9A9A9A"/>
                           </a:solidFill>
                           <a:latin typeface="Calibri"/>
                         </a:rPr>
@@ -15462,7 +16044,7 @@
                           </a:solidFill>
                           <a:latin typeface="Calibri"/>
                         </a:rPr>
-                        <a:t>31,2 M TL</a:t>
+                        <a:t>4,4 M TL</a:t>
                       </a:r>
                     </a:p>
                   </a:txBody>
@@ -15485,7 +16067,7 @@
                           </a:solidFill>
                           <a:latin typeface="Calibri"/>
                         </a:rPr>
-                        <a:t>47,2 M TL</a:t>
+                        <a:t>6,8 M TL</a:t>
                       </a:r>
                     </a:p>
                   </a:txBody>
@@ -15505,6 +16087,29 @@
                         <a:rPr sz="950" b="1">
                           <a:solidFill>
                             <a:srgbClr val="A6001A"/>
+                          </a:solidFill>
+                          <a:latin typeface="Calibri"/>
+                        </a:rPr>
+                        <a:t>+%54,6</a:t>
+                      </a:r>
+                    </a:p>
+                  </a:txBody>
+                  <a:tcPr>
+                    <a:solidFill>
+                      <a:srgbClr val="F2F2F2"/>
+                    </a:solidFill>
+                  </a:tcPr>
+                </a:tc>
+                <a:tc>
+                  <a:txBody>
+                    <a:bodyPr/>
+                    <a:lstStyle/>
+                    <a:p>
+                      <a:pPr algn="ctr"/>
+                      <a:r>
+                        <a:rPr sz="950" b="1">
+                          <a:solidFill>
+                            <a:srgbClr val="9A9A9A"/>
                           </a:solidFill>
                           <a:latin typeface="Calibri"/>
                         </a:rPr>
@@ -15556,7 +16161,7 @@
                           </a:solidFill>
                           <a:latin typeface="Calibri"/>
                         </a:rPr>
-                        <a:t>242,5 M TL</a:t>
+                        <a:t>30,7 M TL</a:t>
                       </a:r>
                     </a:p>
                   </a:txBody>
@@ -15579,7 +16184,7 @@
                           </a:solidFill>
                           <a:latin typeface="Calibri"/>
                         </a:rPr>
-                        <a:t>388,7 M TL</a:t>
+                        <a:t>53,4 M TL</a:t>
                       </a:r>
                     </a:p>
                   </a:txBody>
@@ -15602,6 +16207,29 @@
                           </a:solidFill>
                           <a:latin typeface="Calibri"/>
                         </a:rPr>
+                        <a:t>+%73,9</a:t>
+                      </a:r>
+                    </a:p>
+                  </a:txBody>
+                  <a:tcPr>
+                    <a:solidFill>
+                      <a:srgbClr val="FFFFFF"/>
+                    </a:solidFill>
+                  </a:tcPr>
+                </a:tc>
+                <a:tc>
+                  <a:txBody>
+                    <a:bodyPr/>
+                    <a:lstStyle/>
+                    <a:p>
+                      <a:pPr algn="ctr"/>
+                      <a:r>
+                        <a:rPr sz="950" b="0">
+                          <a:solidFill>
+                            <a:srgbClr val="9A9A9A"/>
+                          </a:solidFill>
+                          <a:latin typeface="Calibri"/>
+                        </a:rPr>
                         <a:t>+%60,3</a:t>
                       </a:r>
                     </a:p>
@@ -15609,6 +16237,123 @@
                   <a:tcPr>
                     <a:solidFill>
                       <a:srgbClr val="FFFFFF"/>
+                    </a:solidFill>
+                  </a:tcPr>
+                </a:tc>
+              </a:tr>
+              <a:tr h="219456">
+                <a:tc>
+                  <a:txBody>
+                    <a:bodyPr/>
+                    <a:lstStyle/>
+                    <a:p>
+                      <a:pPr algn="l"/>
+                      <a:r>
+                        <a:rPr sz="950" b="1">
+                          <a:solidFill>
+                            <a:srgbClr val="333333"/>
+                          </a:solidFill>
+                          <a:latin typeface="Calibri"/>
+                        </a:rPr>
+                        <a:t>MALİYET / CİRO ORANI</a:t>
+                      </a:r>
+                    </a:p>
+                  </a:txBody>
+                  <a:tcPr>
+                    <a:solidFill>
+                      <a:srgbClr val="F2F2F2"/>
+                    </a:solidFill>
+                  </a:tcPr>
+                </a:tc>
+                <a:tc>
+                  <a:txBody>
+                    <a:bodyPr/>
+                    <a:lstStyle/>
+                    <a:p>
+                      <a:pPr algn="ctr"/>
+                      <a:r>
+                        <a:rPr sz="950" b="1">
+                          <a:solidFill>
+                            <a:srgbClr val="333333"/>
+                          </a:solidFill>
+                          <a:latin typeface="Calibri"/>
+                        </a:rPr>
+                        <a:t>%14,30</a:t>
+                      </a:r>
+                    </a:p>
+                  </a:txBody>
+                  <a:tcPr>
+                    <a:solidFill>
+                      <a:srgbClr val="F2F2F2"/>
+                    </a:solidFill>
+                  </a:tcPr>
+                </a:tc>
+                <a:tc>
+                  <a:txBody>
+                    <a:bodyPr/>
+                    <a:lstStyle/>
+                    <a:p>
+                      <a:pPr algn="ctr"/>
+                      <a:r>
+                        <a:rPr sz="950" b="1">
+                          <a:solidFill>
+                            <a:srgbClr val="333333"/>
+                          </a:solidFill>
+                          <a:latin typeface="Calibri"/>
+                        </a:rPr>
+                        <a:t>%12,71</a:t>
+                      </a:r>
+                    </a:p>
+                  </a:txBody>
+                  <a:tcPr>
+                    <a:solidFill>
+                      <a:srgbClr val="F2F2F2"/>
+                    </a:solidFill>
+                  </a:tcPr>
+                </a:tc>
+                <a:tc>
+                  <a:txBody>
+                    <a:bodyPr/>
+                    <a:lstStyle/>
+                    <a:p>
+                      <a:pPr algn="ctr"/>
+                      <a:r>
+                        <a:rPr sz="950" b="1">
+                          <a:solidFill>
+                            <a:srgbClr val="A6001A"/>
+                          </a:solidFill>
+                          <a:latin typeface="Calibri"/>
+                        </a:rPr>
+                        <a:t>-1,59 puan</a:t>
+                      </a:r>
+                    </a:p>
+                  </a:txBody>
+                  <a:tcPr>
+                    <a:solidFill>
+                      <a:srgbClr val="F2F2F2"/>
+                    </a:solidFill>
+                  </a:tcPr>
+                </a:tc>
+                <a:tc>
+                  <a:txBody>
+                    <a:bodyPr/>
+                    <a:lstStyle/>
+                    <a:p>
+                      <a:pPr algn="ctr"/>
+                      <a:r>
+                        <a:rPr sz="950" b="1">
+                          <a:solidFill>
+                            <a:srgbClr val="9A9A9A"/>
+                          </a:solidFill>
+                          <a:latin typeface="Calibri"/>
+                        </a:rPr>
+                        <a:t>-0,70 puan</a:t>
+                      </a:r>
+                    </a:p>
+                  </a:txBody>
+                  <a:tcPr>
+                    <a:solidFill>
+                      <a:srgbClr val="F2F2F2"/>
                     </a:solidFill>
                   </a:tcPr>
                 </a:tc>
@@ -15625,8 +16370,8 @@
         </p:nvSpPr>
         <p:spPr>
           <a:xfrm>
-            <a:off x="7955279" y="3429000"/>
-            <a:ext cx="3611880" cy="1737360"/>
+            <a:off x="7955279" y="3291840"/>
+            <a:ext cx="3611880" cy="1874519"/>
           </a:xfrm>
           <a:prstGeom prst="roundRect">
             <a:avLst/>
@@ -15671,8 +16416,8 @@
         </p:nvSpPr>
         <p:spPr>
           <a:xfrm>
-            <a:off x="8183879" y="3538728"/>
-            <a:ext cx="3200400" cy="1554480"/>
+            <a:off x="8183879" y="3401568"/>
+            <a:ext cx="3200400" cy="1737360"/>
           </a:xfrm>
           <a:prstGeom prst="rect">
             <a:avLst/>
@@ -15687,7 +16432,7 @@
           <a:p>
             <a:pPr algn="l">
               <a:lnSpc>
-                <a:spcPct val="112000"/>
+                <a:spcPct val="110000"/>
               </a:lnSpc>
             </a:pPr>
             <a:r>
@@ -15703,17 +16448,33 @@
           <a:p>
             <a:pPr algn="l">
               <a:lnSpc>
-                <a:spcPct val="112000"/>
+                <a:spcPct val="110000"/>
               </a:lnSpc>
             </a:pPr>
             <a:r>
-              <a:rPr sz="1000" b="0">
+              <a:rPr sz="950" b="0">
                 <a:solidFill>
                   <a:srgbClr val="333333"/>
                 </a:solidFill>
                 <a:latin typeface="Calibri"/>
               </a:rPr>
-              <a:t>Personel maliyeti +%51,5 artmıştır; artışın ana kaynağı kişi başına ücret (+%38,3). Buna karşın cironun içindeki personel yükü 0,70 puan gerilemiştir: %12,85 → %12,15.</a:t>
+              <a:t>Personel maliyeti +%54,6 artmıştır; artışın ana kaynağı kişi başına ücret (+%33,9). Buna karşın cironun içindeki personel yükü 1,59 puan gerilemiştir: %14,30 → %12,71.</a:t>
+            </a:r>
+          </a:p>
+          <a:p>
+            <a:pPr algn="l">
+              <a:lnSpc>
+                <a:spcPct val="110000"/>
+              </a:lnSpc>
+            </a:pPr>
+            <a:r>
+              <a:rPr sz="900" b="0">
+                <a:solidFill>
+                  <a:srgbClr val="9A9A9A"/>
+                </a:solidFill>
+                <a:latin typeface="Calibri"/>
+              </a:rPr>
+              <a:t>Ölçüm SEZON penceresindedir; yıl geneli (01-07 ay (Oca–Tem), her iki yıl) oranı da -0,70 puan gerilemiştir.</a:t>
             </a:r>
           </a:p>
         </p:txBody>
@@ -15752,7 +16513,7 @@
                 </a:solidFill>
                 <a:latin typeface="Calibri"/>
               </a:rPr>
-              <a:t>* Kaynak: Zirve bordro (vw_PuanBil) — maliyet = brüt toplam + işveren SGK hissesi + işveren işsizlik payı · Dönem: 01-07 ay (Oca–Tem), her iki yıl (Ağustos bordrosu henüz işlenmediği için son tam bordro ayı esas) · Kapsam: üç POS mağazası · Ciro KDV HARİÇ ve Sınav DAHİL (o satışı da aynı mağaza personeli yapar) · Kıdem karşılığı ve yan haklar hariç.</a:t>
+              <a:t>* Kaynak: Zirve bordro (vw_PuanBil) — maliyet = brüt toplam + işveren SGK hissesi + işveren işsizlik payı · ESAS DÖNEM: Tem · Yıl geneli referansı: 01-07 ay (Oca–Tem), her iki yıl · SEZON PENCERESİ EKSİK: Ağu ayı bordrosu henüz koşmadı (2026 yılı). Sezon karşılaştırması Tem ayı/ayları ile sınırlıdır; Ağustos bordrosu işlendiğinde bu blok kendiliğinden tamamlanır. Yıl geneli için «kümülatif» pencereye bakılır. · Kapsam: üç POS mağazası · Ciro KDV HARİÇ ve Sınav DAHİL (o satışı da aynı mağaza personeli yapar) · Kıdem karşılığı ve yan haklar hariç → maliyet alt sınır.</a:t>
             </a:r>
           </a:p>
         </p:txBody>
@@ -15849,7 +16610,7 @@
           <a:lstStyle/>
           <a:p>
             <a:r>
-              <a:t>Kadro Alınmasaydı: Fazla Mesai Sınırı</a:t>
+              <a:t>Kadro Alınmasaydı: Fazla Mesai Sınırı — Sezon (Tem)</a:t>
             </a:r>
           </a:p>
         </p:txBody>
@@ -16002,7 +16763,7 @@
                 </a:solidFill>
                 <a:latin typeface="Calibri"/>
               </a:rPr>
-              <a:t>FİİLİ FAZLA MESAİ · 2026</a:t>
+              <a:t>FİİLİ · SEZON 2026</a:t>
             </a:r>
           </a:p>
         </p:txBody>
@@ -16041,7 +16802,7 @@
                 </a:solidFill>
                 <a:latin typeface="Calibri"/>
               </a:rPr>
-              <a:t>107 sa/yıl</a:t>
+              <a:t>74 sa/yıl</a:t>
             </a:r>
           </a:p>
         </p:txBody>
@@ -16080,7 +16841,7 @@
                 </a:solidFill>
                 <a:latin typeface="Calibri"/>
               </a:rPr>
-              <a:t>kişi başına · yasal sınır 270 sa</a:t>
+              <a:t>kişi başına (sezon hızı × 12) · yıl geneli 107 sa</a:t>
             </a:r>
           </a:p>
         </p:txBody>
@@ -16272,7 +17033,7 @@
                 </a:solidFill>
                 <a:latin typeface="Calibri"/>
               </a:rPr>
-              <a:t>342 sa/yıl</a:t>
+              <a:t>447 sa/yıl</a:t>
             </a:r>
           </a:p>
         </p:txBody>
@@ -16311,7 +17072,7 @@
                 </a:solidFill>
                 <a:latin typeface="Calibri"/>
               </a:rPr>
-              <a:t>aynı iş, 75 kişi-ay eksik kapasite</a:t>
+              <a:t>aynı iş, 17 kişi-ay eksik kapasite</a:t>
             </a:r>
           </a:p>
         </p:txBody>
@@ -16661,7 +17422,7 @@
                 </a:solidFill>
                 <a:latin typeface="Calibri"/>
               </a:rPr>
-              <a:t>Kadro 2025 seviyesinde kalsaydı aynı işi çıkarmak için 14.625 saat ek fazla mesai gerekirdi; kişi başına yıllık 342 saate çıkardı ve 270 saatlik yasal sınır AŞILIRDI. Fiili fazla mesai 107 saat/yıl ile sınırın içindedir; ancak sınır hızında çalışan kişi-ay sayısı 32'den 95'ye yükselmiştir — kadro hâlâ dar.</a:t>
+              <a:t>Kadro 2025 seviyesinde kalsaydı aynı işi çıkarmak için 3.315 saat ek fazla mesai gerekirdi; kişi başına yıllık 447 saate çıkardı ve 270 saatlik yasal sınır AŞILIRDI. Fiili fazla mesai 74 saat/yıl ile sınırın içindedir; ancak sınır hızında çalışan kişi-ay sayısı 1'den 2'ye yükselmiştir — kadro hâlâ dar.</a:t>
             </a:r>
           </a:p>
         </p:txBody>
@@ -16700,7 +17461,7 @@
                 </a:solidFill>
                 <a:latin typeface="Calibri"/>
               </a:rPr>
-              <a:t>* Kaynak: Zirve bordro fazla mesai saatleri (fm1+fm2+fm3) · Dönem: 01-07 ay (Oca–Tem), her iki yıl · Kapsam: üç POS mağazası · VARSAYIM: işgücü ihtiyacı kişi sayısıyla doğru orantılıdır ve eksik kapasite ancak fazla mesaiyle kapanır; kişi-ay başına normal çalışma 195 saat (45 sa/hafta) · Yasal çerçeve 4857 s.K. m.41 (yıllık 270 saat).</a:t>
+              <a:t>* Kaynak: Zirve bordro fazla mesai saatleri (fm1+fm2+fm3) · ESAS DÖNEM: Tem (sezon ayı) · yıl geneli referansı 01-07 ay (Oca–Tem), her iki yıl · Kapsam: üç POS mağazası · VARSAYIM: işgücü ihtiyacı kişi sayısıyla doğru orantılıdır ve eksik kapasite ancak fazla mesaiyle kapanır; kişi-ay başına normal çalışma 195 saat (45 sa/hafta); yıllıklandırma = sezon ayı hızı × 12 · Yasal çerçeve 4857 s.K. m.41 (yıllık 270 saat).</a:t>
             </a:r>
           </a:p>
         </p:txBody>
@@ -16797,7 +17558,7 @@
           <a:lstStyle/>
           <a:p>
             <a:r>
-              <a:t>Sezonluk Alım Zamanlaması</a:t>
+              <a:t>Aylık Kadro ve Personel Maliyeti</a:t>
             </a:r>
           </a:p>
         </p:txBody>
@@ -16863,7 +17624,7 @@
             <a:avLst/>
           </a:prstGeom>
           <a:solidFill>
-            <a:srgbClr val="9A9A9A"/>
+            <a:srgbClr val="E30622"/>
           </a:solidFill>
           <a:ln>
             <a:noFill/>
@@ -16894,7 +17655,7 @@
       </p:sp>
       <p:pic>
         <p:nvPicPr>
-          <p:cNvPr id="5" name="Picture 4" descr="workflow.png"/>
+          <p:cNvPr id="5" name="Picture 4" descr="users.png"/>
           <p:cNvPicPr>
             <a:picLocks noChangeAspect="1"/>
           </p:cNvPicPr>
@@ -16950,7 +17711,7 @@
                 </a:solidFill>
                 <a:latin typeface="Calibri"/>
               </a:rPr>
-              <a:t>ORTALAMA ALIM GÜNÜ</a:t>
+              <a:t>SEZON AYI KADRO</a:t>
             </a:r>
           </a:p>
         </p:txBody>
@@ -16983,13 +17744,13 @@
               </a:lnSpc>
             </a:pPr>
             <a:r>
-              <a:rPr sz="2200" b="1">
+              <a:rPr sz="3000" b="1">
                 <a:solidFill>
-                  <a:srgbClr val="9A9A9A"/>
+                  <a:srgbClr val="E30622"/>
                 </a:solidFill>
                 <a:latin typeface="Calibri"/>
               </a:rPr>
-              <a:t>2,5 gün geç</a:t>
+              <a:t>110 → 127</a:t>
             </a:r>
           </a:p>
         </p:txBody>
@@ -17028,7 +17789,7 @@
                 </a:solidFill>
                 <a:latin typeface="Calibri"/>
               </a:rPr>
-              <a:t>takvim ölçüsü · 225. → 228. gün</a:t>
+              <a:t>Tem kişi-ay (bordro) · +%15,5</a:t>
             </a:r>
           </a:p>
         </p:txBody>
@@ -17125,7 +17886,7 @@
       </p:sp>
       <p:pic>
         <p:nvPicPr>
-          <p:cNvPr id="11" name="Picture 10" descr="users.png"/>
+          <p:cNvPr id="11" name="Picture 10" descr="layers.png"/>
           <p:cNvPicPr>
             <a:picLocks noChangeAspect="1"/>
           </p:cNvPicPr>
@@ -17181,7 +17942,7 @@
                 </a:solidFill>
                 <a:latin typeface="Calibri"/>
               </a:rPr>
-              <a:t>TEMMUZ VE ÖNCESİ ALIM</a:t>
+              <a:t>SEZON AYI MALİYET/CİRO</a:t>
             </a:r>
           </a:p>
         </p:txBody>
@@ -17214,13 +17975,13 @@
               </a:lnSpc>
             </a:pPr>
             <a:r>
-              <a:rPr sz="3000" b="1">
+              <a:rPr sz="2400" b="1">
                 <a:solidFill>
                   <a:srgbClr val="A6001A"/>
                 </a:solidFill>
                 <a:latin typeface="Calibri"/>
               </a:rPr>
-              <a:t>6 → 2</a:t>
+              <a:t>%14,3 → %12,7</a:t>
             </a:r>
           </a:p>
         </p:txBody>
@@ -17259,7 +18020,7 @@
                 </a:solidFill>
                 <a:latin typeface="Calibri"/>
               </a:rPr>
-              <a:t>gerçek erken alım azaldı</a:t>
+              <a:t>Tem ayı · -1,6 puan</a:t>
             </a:r>
           </a:p>
         </p:txBody>
@@ -17325,7 +18086,7 @@
             <a:avLst/>
           </a:prstGeom>
           <a:solidFill>
-            <a:srgbClr val="A6001A"/>
+            <a:srgbClr val="9A9A9A"/>
           </a:solidFill>
           <a:ln>
             <a:noFill/>
@@ -17356,7 +18117,7 @@
       </p:sp>
       <p:pic>
         <p:nvPicPr>
-          <p:cNvPr id="17" name="Picture 16" descr="package.png"/>
+          <p:cNvPr id="17" name="Picture 16" descr="workflow.png"/>
           <p:cNvPicPr>
             <a:picLocks noChangeAspect="1"/>
           </p:cNvPicPr>
@@ -17412,7 +18173,7 @@
                 </a:solidFill>
                 <a:latin typeface="Calibri"/>
               </a:rPr>
-              <a:t>1–14 AĞUSTOS İŞ HACMİ</a:t>
+              <a:t>KADRO ARTIŞI OLAN AY</a:t>
             </a:r>
           </a:p>
         </p:txBody>
@@ -17447,11 +18208,11 @@
             <a:r>
               <a:rPr sz="3000" b="1">
                 <a:solidFill>
-                  <a:srgbClr val="A6001A"/>
+                  <a:srgbClr val="9A9A9A"/>
                 </a:solidFill>
                 <a:latin typeface="Calibri"/>
               </a:rPr>
-              <a:t>+%25,1</a:t>
+              <a:t>7 / 7</a:t>
             </a:r>
           </a:p>
         </p:txBody>
@@ -17490,1076 +18251,128 @@
                 </a:solidFill>
                 <a:latin typeface="Calibri"/>
               </a:rPr>
-              <a:t>137.483 → 171.957 adet</a:t>
+              <a:t>artış tek ayda değil, tüm aylara yayılı</a:t>
             </a:r>
           </a:p>
         </p:txBody>
       </p:sp>
       <p:graphicFrame>
         <p:nvGraphicFramePr>
-          <p:cNvPr id="21" name="Table 20"/>
+          <p:cNvPr id="21" name="Chart 20"/>
           <p:cNvGraphicFramePr>
             <a:graphicFrameLocks noGrp="1"/>
           </p:cNvGraphicFramePr>
           <p:nvPr/>
         </p:nvGraphicFramePr>
         <p:xfrm>
-          <a:off x="548640" y="3246120"/>
-          <a:ext cx="11018520" cy="2011680"/>
+          <a:off x="548640" y="3520440"/>
+          <a:ext cx="5486400" cy="1965960"/>
         </p:xfrm>
         <a:graphic>
-          <a:graphicData uri="http://schemas.openxmlformats.org/drawingml/2006/table">
-            <a:tbl>
-              <a:tblPr firstRow="1" bandRow="1">
-                <a:tableStyleId>{5C22544A-7EE6-4342-B048-85BDC9FD1C3A}</a:tableStyleId>
-              </a:tblPr>
-              <a:tblGrid>
-                <a:gridCol w="3291840"/>
-                <a:gridCol w="1737360"/>
-                <a:gridCol w="1737360"/>
-                <a:gridCol w="4251960"/>
-              </a:tblGrid>
-              <a:tr h="182880">
-                <a:tc>
-                  <a:txBody>
-                    <a:bodyPr/>
-                    <a:lstStyle/>
-                    <a:p>
-                      <a:pPr algn="l"/>
-                      <a:r>
-                        <a:rPr sz="800" b="1">
-                          <a:solidFill>
-                            <a:srgbClr val="FFFFFF"/>
-                          </a:solidFill>
-                          <a:latin typeface="Calibri"/>
-                        </a:rPr>
-                        <a:t>Ölçü</a:t>
-                      </a:r>
-                    </a:p>
-                  </a:txBody>
-                  <a:tcPr>
-                    <a:solidFill>
-                      <a:srgbClr val="E30622"/>
-                    </a:solidFill>
-                  </a:tcPr>
-                </a:tc>
-                <a:tc>
-                  <a:txBody>
-                    <a:bodyPr/>
-                    <a:lstStyle/>
-                    <a:p>
-                      <a:pPr algn="ctr"/>
-                      <a:r>
-                        <a:rPr sz="800" b="1">
-                          <a:solidFill>
-                            <a:srgbClr val="FFFFFF"/>
-                          </a:solidFill>
-                          <a:latin typeface="Calibri"/>
-                        </a:rPr>
-                        <a:t>2025</a:t>
-                      </a:r>
-                    </a:p>
-                  </a:txBody>
-                  <a:tcPr>
-                    <a:solidFill>
-                      <a:srgbClr val="E30622"/>
-                    </a:solidFill>
-                  </a:tcPr>
-                </a:tc>
-                <a:tc>
-                  <a:txBody>
-                    <a:bodyPr/>
-                    <a:lstStyle/>
-                    <a:p>
-                      <a:pPr algn="ctr"/>
-                      <a:r>
-                        <a:rPr sz="800" b="1">
-                          <a:solidFill>
-                            <a:srgbClr val="FFFFFF"/>
-                          </a:solidFill>
-                          <a:latin typeface="Calibri"/>
-                        </a:rPr>
-                        <a:t>2026</a:t>
-                      </a:r>
-                    </a:p>
-                  </a:txBody>
-                  <a:tcPr>
-                    <a:solidFill>
-                      <a:srgbClr val="E30622"/>
-                    </a:solidFill>
-                  </a:tcPr>
-                </a:tc>
-                <a:tc>
-                  <a:txBody>
-                    <a:bodyPr/>
-                    <a:lstStyle/>
-                    <a:p>
-                      <a:pPr algn="l"/>
-                      <a:r>
-                        <a:rPr sz="800" b="1">
-                          <a:solidFill>
-                            <a:srgbClr val="FFFFFF"/>
-                          </a:solidFill>
-                          <a:latin typeface="Calibri"/>
-                        </a:rPr>
-                        <a:t>Yorum</a:t>
-                      </a:r>
-                    </a:p>
-                  </a:txBody>
-                  <a:tcPr>
-                    <a:solidFill>
-                      <a:srgbClr val="E30622"/>
-                    </a:solidFill>
-                  </a:tcPr>
-                </a:tc>
-              </a:tr>
-              <a:tr h="182880">
-                <a:tc>
-                  <a:txBody>
-                    <a:bodyPr/>
-                    <a:lstStyle/>
-                    <a:p>
-                      <a:pPr algn="l"/>
-                      <a:r>
-                        <a:rPr sz="900" b="0">
-                          <a:solidFill>
-                            <a:srgbClr val="333333"/>
-                          </a:solidFill>
-                          <a:latin typeface="Calibri"/>
-                        </a:rPr>
-                        <a:t>Ortalama alım günü (takvim)</a:t>
-                      </a:r>
-                    </a:p>
-                  </a:txBody>
-                  <a:tcPr>
-                    <a:solidFill>
-                      <a:srgbClr val="FFFFFF"/>
-                    </a:solidFill>
-                  </a:tcPr>
-                </a:tc>
-                <a:tc>
-                  <a:txBody>
-                    <a:bodyPr/>
-                    <a:lstStyle/>
-                    <a:p>
-                      <a:pPr algn="ctr"/>
-                      <a:r>
-                        <a:rPr sz="900" b="0">
-                          <a:solidFill>
-                            <a:srgbClr val="333333"/>
-                          </a:solidFill>
-                          <a:latin typeface="Calibri"/>
-                        </a:rPr>
-                        <a:t>225. gün</a:t>
-                      </a:r>
-                    </a:p>
-                  </a:txBody>
-                  <a:tcPr>
-                    <a:solidFill>
-                      <a:srgbClr val="FFFFFF"/>
-                    </a:solidFill>
-                  </a:tcPr>
-                </a:tc>
-                <a:tc>
-                  <a:txBody>
-                    <a:bodyPr/>
-                    <a:lstStyle/>
-                    <a:p>
-                      <a:pPr algn="ctr"/>
-                      <a:r>
-                        <a:rPr sz="900" b="1">
-                          <a:solidFill>
-                            <a:srgbClr val="333333"/>
-                          </a:solidFill>
-                          <a:latin typeface="Calibri"/>
-                        </a:rPr>
-                        <a:t>228. gün</a:t>
-                      </a:r>
-                    </a:p>
-                  </a:txBody>
-                  <a:tcPr>
-                    <a:solidFill>
-                      <a:srgbClr val="FFFFFF"/>
-                    </a:solidFill>
-                  </a:tcPr>
-                </a:tc>
-                <a:tc>
-                  <a:txBody>
-                    <a:bodyPr/>
-                    <a:lstStyle/>
-                    <a:p>
-                      <a:pPr algn="l"/>
-                      <a:r>
-                        <a:rPr sz="900" b="0">
-                          <a:solidFill>
-                            <a:srgbClr val="A6001A"/>
-                          </a:solidFill>
-                          <a:latin typeface="Calibri"/>
-                        </a:rPr>
-                        <a:t>2026 alımı ortalama 2,5 gün DAHA GEÇ</a:t>
-                      </a:r>
-                    </a:p>
-                  </a:txBody>
-                  <a:tcPr>
-                    <a:solidFill>
-                      <a:srgbClr val="FFFFFF"/>
-                    </a:solidFill>
-                  </a:tcPr>
-                </a:tc>
-              </a:tr>
-              <a:tr h="182880">
-                <a:tc>
-                  <a:txBody>
-                    <a:bodyPr/>
-                    <a:lstStyle/>
-                    <a:p>
-                      <a:pPr algn="l"/>
-                      <a:r>
-                        <a:rPr sz="900" b="0">
-                          <a:solidFill>
-                            <a:srgbClr val="333333"/>
-                          </a:solidFill>
-                          <a:latin typeface="Calibri"/>
-                        </a:rPr>
-                        <a:t>Temmuz ve öncesi alınan</a:t>
-                      </a:r>
-                    </a:p>
-                  </a:txBody>
-                  <a:tcPr>
-                    <a:solidFill>
-                      <a:srgbClr val="FAFAFA"/>
-                    </a:solidFill>
-                  </a:tcPr>
-                </a:tc>
-                <a:tc>
-                  <a:txBody>
-                    <a:bodyPr/>
-                    <a:lstStyle/>
-                    <a:p>
-                      <a:pPr algn="ctr"/>
-                      <a:r>
-                        <a:rPr sz="900" b="0">
-                          <a:solidFill>
-                            <a:srgbClr val="333333"/>
-                          </a:solidFill>
-                          <a:latin typeface="Calibri"/>
-                        </a:rPr>
-                        <a:t>6 kişi</a:t>
-                      </a:r>
-                    </a:p>
-                  </a:txBody>
-                  <a:tcPr>
-                    <a:solidFill>
-                      <a:srgbClr val="FAFAFA"/>
-                    </a:solidFill>
-                  </a:tcPr>
-                </a:tc>
-                <a:tc>
-                  <a:txBody>
-                    <a:bodyPr/>
-                    <a:lstStyle/>
-                    <a:p>
-                      <a:pPr algn="ctr"/>
-                      <a:r>
-                        <a:rPr sz="900" b="1">
-                          <a:solidFill>
-                            <a:srgbClr val="333333"/>
-                          </a:solidFill>
-                          <a:latin typeface="Calibri"/>
-                        </a:rPr>
-                        <a:t>2 kişi</a:t>
-                      </a:r>
-                    </a:p>
-                  </a:txBody>
-                  <a:tcPr>
-                    <a:solidFill>
-                      <a:srgbClr val="FAFAFA"/>
-                    </a:solidFill>
-                  </a:tcPr>
-                </a:tc>
-                <a:tc>
-                  <a:txBody>
-                    <a:bodyPr/>
-                    <a:lstStyle/>
-                    <a:p>
-                      <a:pPr algn="l"/>
-                      <a:r>
-                        <a:rPr sz="900" b="0">
-                          <a:solidFill>
-                            <a:srgbClr val="A6001A"/>
-                          </a:solidFill>
-                          <a:latin typeface="Calibri"/>
-                        </a:rPr>
-                        <a:t>erken alım azaldı</a:t>
-                      </a:r>
-                    </a:p>
-                  </a:txBody>
-                  <a:tcPr>
-                    <a:solidFill>
-                      <a:srgbClr val="FAFAFA"/>
-                    </a:solidFill>
-                  </a:tcPr>
-                </a:tc>
-              </a:tr>
-              <a:tr h="182880">
-                <a:tc>
-                  <a:txBody>
-                    <a:bodyPr/>
-                    <a:lstStyle/>
-                    <a:p>
-                      <a:pPr algn="l"/>
-                      <a:r>
-                        <a:rPr sz="900" b="0">
-                          <a:solidFill>
-                            <a:srgbClr val="333333"/>
-                          </a:solidFill>
-                          <a:latin typeface="Calibri"/>
-                        </a:rPr>
-                        <a:t>Açılıştan 45+ gün önce alınan</a:t>
-                      </a:r>
-                    </a:p>
-                  </a:txBody>
-                  <a:tcPr>
-                    <a:solidFill>
-                      <a:srgbClr val="FFFFFF"/>
-                    </a:solidFill>
-                  </a:tcPr>
-                </a:tc>
-                <a:tc>
-                  <a:txBody>
-                    <a:bodyPr/>
-                    <a:lstStyle/>
-                    <a:p>
-                      <a:pPr algn="ctr"/>
-                      <a:r>
-                        <a:rPr sz="900" b="0">
-                          <a:solidFill>
-                            <a:srgbClr val="333333"/>
-                          </a:solidFill>
-                          <a:latin typeface="Calibri"/>
-                        </a:rPr>
-                        <a:t>4 kişi</a:t>
-                      </a:r>
-                    </a:p>
-                  </a:txBody>
-                  <a:tcPr>
-                    <a:solidFill>
-                      <a:srgbClr val="FFFFFF"/>
-                    </a:solidFill>
-                  </a:tcPr>
-                </a:tc>
-                <a:tc>
-                  <a:txBody>
-                    <a:bodyPr/>
-                    <a:lstStyle/>
-                    <a:p>
-                      <a:pPr algn="ctr"/>
-                      <a:r>
-                        <a:rPr sz="900" b="1">
-                          <a:solidFill>
-                            <a:srgbClr val="333333"/>
-                          </a:solidFill>
-                          <a:latin typeface="Calibri"/>
-                        </a:rPr>
-                        <a:t>2 kişi</a:t>
-                      </a:r>
-                    </a:p>
-                  </a:txBody>
-                  <a:tcPr>
-                    <a:solidFill>
-                      <a:srgbClr val="FFFFFF"/>
-                    </a:solidFill>
-                  </a:tcPr>
-                </a:tc>
-                <a:tc>
-                  <a:txBody>
-                    <a:bodyPr/>
-                    <a:lstStyle/>
-                    <a:p>
-                      <a:pPr algn="l"/>
-                      <a:r>
-                        <a:rPr sz="900" b="0">
-                          <a:solidFill>
-                            <a:srgbClr val="A6001A"/>
-                          </a:solidFill>
-                          <a:latin typeface="Calibri"/>
-                        </a:rPr>
-                        <a:t>çok erken alım azaldı</a:t>
-                      </a:r>
-                    </a:p>
-                  </a:txBody>
-                  <a:tcPr>
-                    <a:solidFill>
-                      <a:srgbClr val="FFFFFF"/>
-                    </a:solidFill>
-                  </a:tcPr>
-                </a:tc>
-              </a:tr>
-              <a:tr h="182880">
-                <a:tc>
-                  <a:txBody>
-                    <a:bodyPr/>
-                    <a:lstStyle/>
-                    <a:p>
-                      <a:pPr algn="l"/>
-                      <a:r>
-                        <a:rPr sz="900" b="0">
-                          <a:solidFill>
-                            <a:srgbClr val="333333"/>
-                          </a:solidFill>
-                          <a:latin typeface="Calibri"/>
-                        </a:rPr>
-                        <a:t>1–14 Ağustos alınan</a:t>
-                      </a:r>
-                    </a:p>
-                  </a:txBody>
-                  <a:tcPr>
-                    <a:solidFill>
-                      <a:srgbClr val="FAFAFA"/>
-                    </a:solidFill>
-                  </a:tcPr>
-                </a:tc>
-                <a:tc>
-                  <a:txBody>
-                    <a:bodyPr/>
-                    <a:lstStyle/>
-                    <a:p>
-                      <a:pPr algn="ctr"/>
-                      <a:r>
-                        <a:rPr sz="900" b="0">
-                          <a:solidFill>
-                            <a:srgbClr val="333333"/>
-                          </a:solidFill>
-                          <a:latin typeface="Calibri"/>
-                        </a:rPr>
-                        <a:t>12 kişi</a:t>
-                      </a:r>
-                    </a:p>
-                  </a:txBody>
-                  <a:tcPr>
-                    <a:solidFill>
-                      <a:srgbClr val="FAFAFA"/>
-                    </a:solidFill>
-                  </a:tcPr>
-                </a:tc>
-                <a:tc>
-                  <a:txBody>
-                    <a:bodyPr/>
-                    <a:lstStyle/>
-                    <a:p>
-                      <a:pPr algn="ctr"/>
-                      <a:r>
-                        <a:rPr sz="900" b="1">
-                          <a:solidFill>
-                            <a:srgbClr val="333333"/>
-                          </a:solidFill>
-                          <a:latin typeface="Calibri"/>
-                        </a:rPr>
-                        <a:t>30 kişi</a:t>
-                      </a:r>
-                    </a:p>
-                  </a:txBody>
-                  <a:tcPr>
-                    <a:solidFill>
-                      <a:srgbClr val="FAFAFA"/>
-                    </a:solidFill>
-                  </a:tcPr>
-                </a:tc>
-                <a:tc>
-                  <a:txBody>
-                    <a:bodyPr/>
-                    <a:lstStyle/>
-                    <a:p>
-                      <a:pPr algn="l"/>
-                      <a:r>
-                        <a:rPr sz="900" b="0">
-                          <a:solidFill>
-                            <a:srgbClr val="A6001A"/>
-                          </a:solidFill>
-                          <a:latin typeface="Calibri"/>
-                        </a:rPr>
-                        <a:t>artış bu iki haftada</a:t>
-                      </a:r>
-                    </a:p>
-                  </a:txBody>
-                  <a:tcPr>
-                    <a:solidFill>
-                      <a:srgbClr val="FAFAFA"/>
-                    </a:solidFill>
-                  </a:tcPr>
-                </a:tc>
-              </a:tr>
-              <a:tr h="182880">
-                <a:tc>
-                  <a:txBody>
-                    <a:bodyPr/>
-                    <a:lstStyle/>
-                    <a:p>
-                      <a:pPr algn="l"/>
-                      <a:r>
-                        <a:rPr sz="900" b="0">
-                          <a:solidFill>
-                            <a:srgbClr val="333333"/>
-                          </a:solidFill>
-                          <a:latin typeface="Calibri"/>
-                        </a:rPr>
-                        <a:t>1–14 Ağustos ürün adedi</a:t>
-                      </a:r>
-                    </a:p>
-                  </a:txBody>
-                  <a:tcPr>
-                    <a:solidFill>
-                      <a:srgbClr val="FFFFFF"/>
-                    </a:solidFill>
-                  </a:tcPr>
-                </a:tc>
-                <a:tc>
-                  <a:txBody>
-                    <a:bodyPr/>
-                    <a:lstStyle/>
-                    <a:p>
-                      <a:pPr algn="ctr"/>
-                      <a:r>
-                        <a:rPr sz="900" b="0">
-                          <a:solidFill>
-                            <a:srgbClr val="333333"/>
-                          </a:solidFill>
-                          <a:latin typeface="Calibri"/>
-                        </a:rPr>
-                        <a:t>137.483</a:t>
-                      </a:r>
-                    </a:p>
-                  </a:txBody>
-                  <a:tcPr>
-                    <a:solidFill>
-                      <a:srgbClr val="FFFFFF"/>
-                    </a:solidFill>
-                  </a:tcPr>
-                </a:tc>
-                <a:tc>
-                  <a:txBody>
-                    <a:bodyPr/>
-                    <a:lstStyle/>
-                    <a:p>
-                      <a:pPr algn="ctr"/>
-                      <a:r>
-                        <a:rPr sz="900" b="1">
-                          <a:solidFill>
-                            <a:srgbClr val="333333"/>
-                          </a:solidFill>
-                          <a:latin typeface="Calibri"/>
-                        </a:rPr>
-                        <a:t>171.957</a:t>
-                      </a:r>
-                    </a:p>
-                  </a:txBody>
-                  <a:tcPr>
-                    <a:solidFill>
-                      <a:srgbClr val="FFFFFF"/>
-                    </a:solidFill>
-                  </a:tcPr>
-                </a:tc>
-                <a:tc>
-                  <a:txBody>
-                    <a:bodyPr/>
-                    <a:lstStyle/>
-                    <a:p>
-                      <a:pPr algn="l"/>
-                      <a:r>
-                        <a:rPr sz="900" b="0">
-                          <a:solidFill>
-                            <a:srgbClr val="A6001A"/>
-                          </a:solidFill>
-                          <a:latin typeface="Calibri"/>
-                        </a:rPr>
-                        <a:t>iş +%25,1 büyüdü — alım işi takip etti</a:t>
-                      </a:r>
-                    </a:p>
-                  </a:txBody>
-                  <a:tcPr>
-                    <a:solidFill>
-                      <a:srgbClr val="FFFFFF"/>
-                    </a:solidFill>
-                  </a:tcPr>
-                </a:tc>
-              </a:tr>
-              <a:tr h="182880">
-                <a:tc>
-                  <a:txBody>
-                    <a:bodyPr/>
-                    <a:lstStyle/>
-                    <a:p>
-                      <a:pPr algn="l"/>
-                      <a:r>
-                        <a:rPr sz="900" b="0">
-                          <a:solidFill>
-                            <a:srgbClr val="333333"/>
-                          </a:solidFill>
-                          <a:latin typeface="Calibri"/>
-                        </a:rPr>
-                        <a:t>15–31 Ağustos ürün adedi</a:t>
-                      </a:r>
-                    </a:p>
-                  </a:txBody>
-                  <a:tcPr>
-                    <a:solidFill>
-                      <a:srgbClr val="FAFAFA"/>
-                    </a:solidFill>
-                  </a:tcPr>
-                </a:tc>
-                <a:tc>
-                  <a:txBody>
-                    <a:bodyPr/>
-                    <a:lstStyle/>
-                    <a:p>
-                      <a:pPr algn="ctr"/>
-                      <a:r>
-                        <a:rPr sz="900" b="0">
-                          <a:solidFill>
-                            <a:srgbClr val="333333"/>
-                          </a:solidFill>
-                          <a:latin typeface="Calibri"/>
-                        </a:rPr>
-                        <a:t>320.776</a:t>
-                      </a:r>
-                    </a:p>
-                  </a:txBody>
-                  <a:tcPr>
-                    <a:solidFill>
-                      <a:srgbClr val="FAFAFA"/>
-                    </a:solidFill>
-                  </a:tcPr>
-                </a:tc>
-                <a:tc>
-                  <a:txBody>
-                    <a:bodyPr/>
-                    <a:lstStyle/>
-                    <a:p>
-                      <a:pPr algn="ctr"/>
-                      <a:r>
-                        <a:rPr sz="900" b="1">
-                          <a:solidFill>
-                            <a:srgbClr val="333333"/>
-                          </a:solidFill>
-                          <a:latin typeface="Calibri"/>
-                        </a:rPr>
-                        <a:t>311.542</a:t>
-                      </a:r>
-                    </a:p>
-                  </a:txBody>
-                  <a:tcPr>
-                    <a:solidFill>
-                      <a:srgbClr val="FAFAFA"/>
-                    </a:solidFill>
-                  </a:tcPr>
-                </a:tc>
-                <a:tc>
-                  <a:txBody>
-                    <a:bodyPr/>
-                    <a:lstStyle/>
-                    <a:p>
-                      <a:pPr algn="l"/>
-                      <a:r>
-                        <a:rPr sz="900" b="0">
-                          <a:solidFill>
-                            <a:srgbClr val="A6001A"/>
-                          </a:solidFill>
-                          <a:latin typeface="Calibri"/>
-                        </a:rPr>
-                        <a:t>−%2,9 — dalga Eylül'e kaydı</a:t>
-                      </a:r>
-                    </a:p>
-                  </a:txBody>
-                  <a:tcPr>
-                    <a:solidFill>
-                      <a:srgbClr val="FAFAFA"/>
-                    </a:solidFill>
-                  </a:tcPr>
-                </a:tc>
-              </a:tr>
-              <a:tr h="182880">
-                <a:tc>
-                  <a:txBody>
-                    <a:bodyPr/>
-                    <a:lstStyle/>
-                    <a:p>
-                      <a:pPr algn="l"/>
-                      <a:r>
-                        <a:rPr sz="900" b="0">
-                          <a:solidFill>
-                            <a:srgbClr val="333333"/>
-                          </a:solidFill>
-                          <a:latin typeface="Calibri"/>
-                        </a:rPr>
-                        <a:t>31.08'de çalışan sezonluk</a:t>
-                      </a:r>
-                    </a:p>
-                  </a:txBody>
-                  <a:tcPr>
-                    <a:solidFill>
-                      <a:srgbClr val="FFFFFF"/>
-                    </a:solidFill>
-                  </a:tcPr>
-                </a:tc>
-                <a:tc>
-                  <a:txBody>
-                    <a:bodyPr/>
-                    <a:lstStyle/>
-                    <a:p>
-                      <a:pPr algn="ctr"/>
-                      <a:r>
-                        <a:rPr sz="900" b="0">
-                          <a:solidFill>
-                            <a:srgbClr val="333333"/>
-                          </a:solidFill>
-                          <a:latin typeface="Calibri"/>
-                        </a:rPr>
-                        <a:t>65 kişi</a:t>
-                      </a:r>
-                    </a:p>
-                  </a:txBody>
-                  <a:tcPr>
-                    <a:solidFill>
-                      <a:srgbClr val="FFFFFF"/>
-                    </a:solidFill>
-                  </a:tcPr>
-                </a:tc>
-                <a:tc>
-                  <a:txBody>
-                    <a:bodyPr/>
-                    <a:lstStyle/>
-                    <a:p>
-                      <a:pPr algn="ctr"/>
-                      <a:r>
-                        <a:rPr sz="900" b="1">
-                          <a:solidFill>
-                            <a:srgbClr val="333333"/>
-                          </a:solidFill>
-                          <a:latin typeface="Calibri"/>
-                        </a:rPr>
-                        <a:t>62 kişi</a:t>
-                      </a:r>
-                    </a:p>
-                  </a:txBody>
-                  <a:tcPr>
-                    <a:solidFill>
-                      <a:srgbClr val="FFFFFF"/>
-                    </a:solidFill>
-                  </a:tcPr>
-                </a:tc>
-                <a:tc>
-                  <a:txBody>
-                    <a:bodyPr/>
-                    <a:lstStyle/>
-                    <a:p>
-                      <a:pPr algn="l"/>
-                      <a:r>
-                        <a:rPr sz="900" b="0">
-                          <a:solidFill>
-                            <a:srgbClr val="A6001A"/>
-                          </a:solidFill>
-                          <a:latin typeface="Calibri"/>
-                        </a:rPr>
-                        <a:t>kesimde 3 kişi DAHA AZ</a:t>
-                      </a:r>
-                    </a:p>
-                  </a:txBody>
-                  <a:tcPr>
-                    <a:solidFill>
-                      <a:srgbClr val="FFFFFF"/>
-                    </a:solidFill>
-                  </a:tcPr>
-                </a:tc>
-              </a:tr>
-              <a:tr h="182880">
-                <a:tc>
-                  <a:txBody>
-                    <a:bodyPr/>
-                    <a:lstStyle/>
-                    <a:p>
-                      <a:pPr algn="l"/>
-                      <a:r>
-                        <a:rPr sz="900" b="0">
-                          <a:solidFill>
-                            <a:srgbClr val="333333"/>
-                          </a:solidFill>
-                          <a:latin typeface="Calibri"/>
-                        </a:rPr>
-                        <a:t>   — Temmuz alımı</a:t>
-                      </a:r>
-                    </a:p>
-                  </a:txBody>
-                  <a:tcPr>
-                    <a:solidFill>
-                      <a:srgbClr val="FAFAFA"/>
-                    </a:solidFill>
-                  </a:tcPr>
-                </a:tc>
-                <a:tc>
-                  <a:txBody>
-                    <a:bodyPr/>
-                    <a:lstStyle/>
-                    <a:p>
-                      <a:pPr algn="ctr"/>
-                      <a:r>
-                        <a:rPr sz="900" b="0">
-                          <a:solidFill>
-                            <a:srgbClr val="333333"/>
-                          </a:solidFill>
-                          <a:latin typeface="Calibri"/>
-                        </a:rPr>
-                        <a:t>4 kişi</a:t>
-                      </a:r>
-                    </a:p>
-                  </a:txBody>
-                  <a:tcPr>
-                    <a:solidFill>
-                      <a:srgbClr val="FAFAFA"/>
-                    </a:solidFill>
-                  </a:tcPr>
-                </a:tc>
-                <a:tc>
-                  <a:txBody>
-                    <a:bodyPr/>
-                    <a:lstStyle/>
-                    <a:p>
-                      <a:pPr algn="ctr"/>
-                      <a:r>
-                        <a:rPr sz="900" b="1">
-                          <a:solidFill>
-                            <a:srgbClr val="333333"/>
-                          </a:solidFill>
-                          <a:latin typeface="Calibri"/>
-                        </a:rPr>
-                        <a:t>2 kişi</a:t>
-                      </a:r>
-                    </a:p>
-                  </a:txBody>
-                  <a:tcPr>
-                    <a:solidFill>
-                      <a:srgbClr val="FAFAFA"/>
-                    </a:solidFill>
-                  </a:tcPr>
-                </a:tc>
-                <a:tc>
-                  <a:txBody>
-                    <a:bodyPr/>
-                    <a:lstStyle/>
-                    <a:p>
-                      <a:pPr algn="l"/>
-                      <a:r>
-                        <a:rPr sz="900" b="0">
-                          <a:solidFill>
-                            <a:srgbClr val="A6001A"/>
-                          </a:solidFill>
-                          <a:latin typeface="Calibri"/>
-                        </a:rPr>
-                        <a:t>erken alım payı düştü</a:t>
-                      </a:r>
-                    </a:p>
-                  </a:txBody>
-                  <a:tcPr>
-                    <a:solidFill>
-                      <a:srgbClr val="FAFAFA"/>
-                    </a:solidFill>
-                  </a:tcPr>
-                </a:tc>
-              </a:tr>
-              <a:tr h="182880">
-                <a:tc>
-                  <a:txBody>
-                    <a:bodyPr/>
-                    <a:lstStyle/>
-                    <a:p>
-                      <a:pPr algn="l"/>
-                      <a:r>
-                        <a:rPr sz="900" b="0">
-                          <a:solidFill>
-                            <a:srgbClr val="333333"/>
-                          </a:solidFill>
-                          <a:latin typeface="Calibri"/>
-                        </a:rPr>
-                        <a:t>   — 1–14 Ağustos alımı</a:t>
-                      </a:r>
-                    </a:p>
-                  </a:txBody>
-                  <a:tcPr>
-                    <a:solidFill>
-                      <a:srgbClr val="FFFFFF"/>
-                    </a:solidFill>
-                  </a:tcPr>
-                </a:tc>
-                <a:tc>
-                  <a:txBody>
-                    <a:bodyPr/>
-                    <a:lstStyle/>
-                    <a:p>
-                      <a:pPr algn="ctr"/>
-                      <a:r>
-                        <a:rPr sz="900" b="0">
-                          <a:solidFill>
-                            <a:srgbClr val="333333"/>
-                          </a:solidFill>
-                          <a:latin typeface="Calibri"/>
-                        </a:rPr>
-                        <a:t>12 kişi</a:t>
-                      </a:r>
-                    </a:p>
-                  </a:txBody>
-                  <a:tcPr>
-                    <a:solidFill>
-                      <a:srgbClr val="FFFFFF"/>
-                    </a:solidFill>
-                  </a:tcPr>
-                </a:tc>
-                <a:tc>
-                  <a:txBody>
-                    <a:bodyPr/>
-                    <a:lstStyle/>
-                    <a:p>
-                      <a:pPr algn="ctr"/>
-                      <a:r>
-                        <a:rPr sz="900" b="1">
-                          <a:solidFill>
-                            <a:srgbClr val="333333"/>
-                          </a:solidFill>
-                          <a:latin typeface="Calibri"/>
-                        </a:rPr>
-                        <a:t>27 kişi</a:t>
-                      </a:r>
-                    </a:p>
-                  </a:txBody>
-                  <a:tcPr>
-                    <a:solidFill>
-                      <a:srgbClr val="FFFFFF"/>
-                    </a:solidFill>
-                  </a:tcPr>
-                </a:tc>
-                <a:tc>
-                  <a:txBody>
-                    <a:bodyPr/>
-                    <a:lstStyle/>
-                    <a:p>
-                      <a:pPr algn="l"/>
-                      <a:r>
-                        <a:rPr sz="900" b="0">
-                          <a:solidFill>
-                            <a:srgbClr val="A6001A"/>
-                          </a:solidFill>
-                          <a:latin typeface="Calibri"/>
-                        </a:rPr>
-                        <a:t>iş +%25,1 büyüyen dönem</a:t>
-                      </a:r>
-                    </a:p>
-                  </a:txBody>
-                  <a:tcPr>
-                    <a:solidFill>
-                      <a:srgbClr val="FFFFFF"/>
-                    </a:solidFill>
-                  </a:tcPr>
-                </a:tc>
-              </a:tr>
-              <a:tr h="182880">
-                <a:tc>
-                  <a:txBody>
-                    <a:bodyPr/>
-                    <a:lstStyle/>
-                    <a:p>
-                      <a:pPr algn="l"/>
-                      <a:r>
-                        <a:rPr sz="900" b="0">
-                          <a:solidFill>
-                            <a:srgbClr val="333333"/>
-                          </a:solidFill>
-                          <a:latin typeface="Calibri"/>
-                        </a:rPr>
-                        <a:t>   — 15–31 Ağustos alımı</a:t>
-                      </a:r>
-                    </a:p>
-                  </a:txBody>
-                  <a:tcPr>
-                    <a:solidFill>
-                      <a:srgbClr val="FAFAFA"/>
-                    </a:solidFill>
-                  </a:tcPr>
-                </a:tc>
-                <a:tc>
-                  <a:txBody>
-                    <a:bodyPr/>
-                    <a:lstStyle/>
-                    <a:p>
-                      <a:pPr algn="ctr"/>
-                      <a:r>
-                        <a:rPr sz="900" b="0">
-                          <a:solidFill>
-                            <a:srgbClr val="333333"/>
-                          </a:solidFill>
-                          <a:latin typeface="Calibri"/>
-                        </a:rPr>
-                        <a:t>49 kişi</a:t>
-                      </a:r>
-                    </a:p>
-                  </a:txBody>
-                  <a:tcPr>
-                    <a:solidFill>
-                      <a:srgbClr val="FAFAFA"/>
-                    </a:solidFill>
-                  </a:tcPr>
-                </a:tc>
-                <a:tc>
-                  <a:txBody>
-                    <a:bodyPr/>
-                    <a:lstStyle/>
-                    <a:p>
-                      <a:pPr algn="ctr"/>
-                      <a:r>
-                        <a:rPr sz="900" b="1">
-                          <a:solidFill>
-                            <a:srgbClr val="333333"/>
-                          </a:solidFill>
-                          <a:latin typeface="Calibri"/>
-                        </a:rPr>
-                        <a:t>32 kişi</a:t>
-                      </a:r>
-                    </a:p>
-                  </a:txBody>
-                  <a:tcPr>
-                    <a:solidFill>
-                      <a:srgbClr val="FAFAFA"/>
-                    </a:solidFill>
-                  </a:tcPr>
-                </a:tc>
-                <a:tc>
-                  <a:txBody>
-                    <a:bodyPr/>
-                    <a:lstStyle/>
-                    <a:p>
-                      <a:pPr algn="l"/>
-                      <a:r>
-                        <a:rPr sz="900" b="0">
-                          <a:solidFill>
-                            <a:srgbClr val="A6001A"/>
-                          </a:solidFill>
-                          <a:latin typeface="Calibri"/>
-                        </a:rPr>
-                        <a:t>iş −%2,9 → alım azaltıldı</a:t>
-                      </a:r>
-                    </a:p>
-                  </a:txBody>
-                  <a:tcPr>
-                    <a:solidFill>
-                      <a:srgbClr val="FAFAFA"/>
-                    </a:solidFill>
-                  </a:tcPr>
-                </a:tc>
-              </a:tr>
-            </a:tbl>
+          <a:graphicData uri="http://schemas.openxmlformats.org/drawingml/2006/chart">
+            <c:chart xmlns:c="http://schemas.openxmlformats.org/drawingml/2006/chart" r:id="rId6"/>
           </a:graphicData>
         </a:graphic>
       </p:graphicFrame>
       <p:sp>
         <p:nvSpPr>
           <p:cNvPr id="22" name="TextBox 21"/>
+          <p:cNvSpPr txBox="1"/>
+          <p:nvPr/>
+        </p:nvSpPr>
+        <p:spPr>
+          <a:xfrm>
+            <a:off x="548640" y="3291840"/>
+            <a:ext cx="5486400" cy="219456"/>
+          </a:xfrm>
+          <a:prstGeom prst="rect">
+            <a:avLst/>
+          </a:prstGeom>
+          <a:noFill/>
+        </p:spPr>
+        <p:txBody>
+          <a:bodyPr wrap="square" anchor="t">
+            <a:spAutoFit/>
+          </a:bodyPr>
+          <a:lstStyle/>
+          <a:p>
+            <a:pPr algn="l">
+              <a:lnSpc>
+                <a:spcPct val="100000"/>
+              </a:lnSpc>
+            </a:pPr>
+            <a:r>
+              <a:rPr sz="950" b="1">
+                <a:solidFill>
+                  <a:srgbClr val="6E6E6E"/>
+                </a:solidFill>
+                <a:latin typeface="Calibri"/>
+              </a:rPr>
+              <a:t>Kadro — aylık kişi-ay (bordro satırı)</a:t>
+            </a:r>
+          </a:p>
+        </p:txBody>
+      </p:sp>
+      <p:graphicFrame>
+        <p:nvGraphicFramePr>
+          <p:cNvPr id="23" name="Chart 22"/>
+          <p:cNvGraphicFramePr>
+            <a:graphicFrameLocks noGrp="1"/>
+          </p:cNvGraphicFramePr>
+          <p:nvPr/>
+        </p:nvGraphicFramePr>
+        <p:xfrm>
+          <a:off x="6172200" y="3520440"/>
+          <a:ext cx="5394960" cy="1965960"/>
+        </p:xfrm>
+        <a:graphic>
+          <a:graphicData uri="http://schemas.openxmlformats.org/drawingml/2006/chart">
+            <c:chart xmlns:c="http://schemas.openxmlformats.org/drawingml/2006/chart" r:id="rId7"/>
+          </a:graphicData>
+        </a:graphic>
+      </p:graphicFrame>
+      <p:sp>
+        <p:nvSpPr>
+          <p:cNvPr id="24" name="TextBox 23"/>
+          <p:cNvSpPr txBox="1"/>
+          <p:nvPr/>
+        </p:nvSpPr>
+        <p:spPr>
+          <a:xfrm>
+            <a:off x="6172200" y="3291840"/>
+            <a:ext cx="5394960" cy="219456"/>
+          </a:xfrm>
+          <a:prstGeom prst="rect">
+            <a:avLst/>
+          </a:prstGeom>
+          <a:noFill/>
+        </p:spPr>
+        <p:txBody>
+          <a:bodyPr wrap="square" anchor="t">
+            <a:spAutoFit/>
+          </a:bodyPr>
+          <a:lstStyle/>
+          <a:p>
+            <a:pPr algn="l">
+              <a:lnSpc>
+                <a:spcPct val="100000"/>
+              </a:lnSpc>
+            </a:pPr>
+            <a:r>
+              <a:rPr sz="950" b="1">
+                <a:solidFill>
+                  <a:srgbClr val="6E6E6E"/>
+                </a:solidFill>
+                <a:latin typeface="Calibri"/>
+              </a:rPr>
+              <a:t>Personel maliyetinin ciro içindeki payı (%) — aylık</a:t>
+            </a:r>
+          </a:p>
+        </p:txBody>
+      </p:sp>
+      <p:sp>
+        <p:nvSpPr>
+          <p:cNvPr id="25" name="TextBox 24"/>
           <p:cNvSpPr txBox="1"/>
           <p:nvPr/>
         </p:nvSpPr>
@@ -18591,14 +18404,14 @@
                 </a:solidFill>
                 <a:latin typeface="Calibri"/>
               </a:rPr>
-              <a:t>* İK'da düzeltme bekleyen 1 kayıt: 2025 girişli bir sezonluk personel çıkış tarihi işlenmediği için 31.08'de aktif görünüyor; düzeltilince sezonluk 62 → 61 olur (rakamlar İK'nın resmi kaydıyla birebir tutulsun diye şimdilik düzeltilmedi) · Kapsam: beş mağaza (FSM · Özlüce · İst. Yolu · Heykel · Şura) · Kohortlar okul açılışına göre AYNI ofsette kesildi (T−12: 27.08.2025 ve 02.09.2026) · İş hacmi üç POS mağazası · ⚠ "açılıştan kaç gün önce" ölçüsü açılış 6 gün kaydığı için 2026'yı mekanik olarak erken gösterir, takvim ölçüsü esastır.</a:t>
+              <a:t>* Kaynak: Zirve bordro (vw_PuanBil) aylık · ciro DerinSIS KDV hariç, Sınav dahil · Kapsam: üç POS mağazası · * işaretli ay = sezon ayı (01.07–31.08) · Ağustos bordrosu işlendiğinde tabloya eklenir · Kişi-ay = o ay bordrosu koşan kişi sayısı.</a:t>
             </a:r>
           </a:p>
         </p:txBody>
       </p:sp>
       <p:sp>
         <p:nvSpPr>
-          <p:cNvPr id="23" name="TextBox 22"/>
+          <p:cNvPr id="26" name="TextBox 25"/>
           <p:cNvSpPr txBox="1"/>
           <p:nvPr/>
         </p:nvSpPr>
@@ -18688,7 +18501,7 @@
           <a:lstStyle/>
           <a:p>
             <a:r>
-              <a:t>Yöntem ve Açıklamalar</a:t>
+              <a:t>Sezonluk Alım Zamanlaması</a:t>
             </a:r>
           </a:p>
         </p:txBody>
@@ -18701,8 +18514,8 @@
         </p:nvSpPr>
         <p:spPr>
           <a:xfrm>
-            <a:off x="548640" y="1325880"/>
-            <a:ext cx="11018520" cy="601980"/>
+            <a:off x="548640" y="1371600"/>
+            <a:ext cx="3566160" cy="1828800"/>
           </a:xfrm>
           <a:prstGeom prst="rect">
             <a:avLst/>
@@ -18747,14 +18560,14 @@
         </p:nvSpPr>
         <p:spPr>
           <a:xfrm>
-            <a:off x="548640" y="1325880"/>
-            <a:ext cx="68580" cy="601980"/>
+            <a:off x="548640" y="1371600"/>
+            <a:ext cx="68580" cy="1828800"/>
           </a:xfrm>
           <a:prstGeom prst="rect">
             <a:avLst/>
           </a:prstGeom>
           <a:solidFill>
-            <a:srgbClr val="E30622"/>
+            <a:srgbClr val="9A9A9A"/>
           </a:solidFill>
           <a:ln>
             <a:noFill/>
@@ -18785,7 +18598,7 @@
       </p:sp>
       <p:pic>
         <p:nvPicPr>
-          <p:cNvPr id="5" name="Picture 4" descr="circle-check.png"/>
+          <p:cNvPr id="5" name="Picture 4" descr="workflow.png"/>
           <p:cNvPicPr>
             <a:picLocks noChangeAspect="1"/>
           </p:cNvPicPr>
@@ -18799,8 +18612,8 @@
         </p:blipFill>
         <p:spPr>
           <a:xfrm>
-            <a:off x="777240" y="1453895"/>
-            <a:ext cx="256032" cy="256032"/>
+            <a:off x="3639312" y="1536192"/>
+            <a:ext cx="274320" cy="274320"/>
           </a:xfrm>
           <a:prstGeom prst="rect">
             <a:avLst/>
@@ -18815,8 +18628,47 @@
         </p:nvSpPr>
         <p:spPr>
           <a:xfrm>
-            <a:off x="1143000" y="1389888"/>
-            <a:ext cx="10058400" cy="292608"/>
+            <a:off x="804672" y="1536192"/>
+            <a:ext cx="2697480" cy="384048"/>
+          </a:xfrm>
+          <a:prstGeom prst="rect">
+            <a:avLst/>
+          </a:prstGeom>
+          <a:noFill/>
+        </p:spPr>
+        <p:txBody>
+          <a:bodyPr wrap="square" anchor="t">
+            <a:spAutoFit/>
+          </a:bodyPr>
+          <a:lstStyle/>
+          <a:p>
+            <a:pPr algn="l">
+              <a:lnSpc>
+                <a:spcPct val="105000"/>
+              </a:lnSpc>
+            </a:pPr>
+            <a:r>
+              <a:rPr sz="900" b="1">
+                <a:solidFill>
+                  <a:srgbClr val="6E6E6E"/>
+                </a:solidFill>
+                <a:latin typeface="Calibri"/>
+              </a:rPr>
+              <a:t>ORTALAMA ALIM GÜNÜ</a:t>
+            </a:r>
+          </a:p>
+        </p:txBody>
+      </p:sp>
+      <p:sp>
+        <p:nvSpPr>
+          <p:cNvPr id="7" name="TextBox 6"/>
+          <p:cNvSpPr txBox="1"/>
+          <p:nvPr/>
+        </p:nvSpPr>
+        <p:spPr>
+          <a:xfrm>
+            <a:off x="804672" y="1975104"/>
+            <a:ext cx="3154679" cy="658368"/>
           </a:xfrm>
           <a:prstGeom prst="rect">
             <a:avLst/>
@@ -18835,27 +18687,27 @@
               </a:lnSpc>
             </a:pPr>
             <a:r>
-              <a:rPr sz="1150" b="1">
+              <a:rPr sz="2200" b="1">
                 <a:solidFill>
-                  <a:srgbClr val="A6001A"/>
+                  <a:srgbClr val="9A9A9A"/>
                 </a:solidFill>
                 <a:latin typeface="Calibri"/>
               </a:rPr>
-              <a:t>Büyüme kurumsal kanaldan mı geldi?</a:t>
+              <a:t>2,5 gün geç</a:t>
             </a:r>
           </a:p>
         </p:txBody>
       </p:sp>
       <p:sp>
         <p:nvSpPr>
-          <p:cNvPr id="7" name="TextBox 6"/>
+          <p:cNvPr id="8" name="TextBox 7"/>
           <p:cNvSpPr txBox="1"/>
           <p:nvPr/>
         </p:nvSpPr>
         <p:spPr>
           <a:xfrm>
-            <a:off x="1143000" y="1673352"/>
-            <a:ext cx="10058400" cy="217932"/>
+            <a:off x="804672" y="2688336"/>
+            <a:ext cx="3154679" cy="457200"/>
           </a:xfrm>
           <a:prstGeom prst="rect">
             <a:avLst/>
@@ -18870,31 +18722,31 @@
           <a:p>
             <a:pPr algn="l">
               <a:lnSpc>
-                <a:spcPct val="106000"/>
+                <a:spcPct val="105000"/>
               </a:lnSpc>
             </a:pPr>
             <a:r>
-              <a:rPr sz="950" b="0">
+              <a:rPr sz="1000" b="0">
                 <a:solidFill>
-                  <a:srgbClr val="333333"/>
+                  <a:srgbClr val="6E6E6E"/>
                 </a:solidFill>
                 <a:latin typeface="Calibri"/>
               </a:rPr>
-              <a:t>Tersi: Sınav Okulları küçüldü. Ocak–Ağustos cirosu 136,2 → 105,6 milyon TL (−%22,4). Mağaza tarafı +%54,9 büyüdü — büyümenin tamamı raftan geldi.</a:t>
+              <a:t>takvim ölçüsü · 225. → 228. gün</a:t>
             </a:r>
           </a:p>
         </p:txBody>
       </p:sp>
       <p:sp>
         <p:nvSpPr>
-          <p:cNvPr id="8" name="Rectangle 7"/>
+          <p:cNvPr id="9" name="Rectangle 8"/>
           <p:cNvSpPr/>
           <p:nvPr/>
         </p:nvSpPr>
         <p:spPr>
           <a:xfrm>
-            <a:off x="548640" y="2019299"/>
-            <a:ext cx="11018520" cy="601980"/>
+            <a:off x="4279392" y="1371600"/>
+            <a:ext cx="3566160" cy="1828800"/>
           </a:xfrm>
           <a:prstGeom prst="rect">
             <a:avLst/>
@@ -18933,20 +18785,20 @@
       </p:sp>
       <p:sp>
         <p:nvSpPr>
-          <p:cNvPr id="9" name="Rectangle 8"/>
+          <p:cNvPr id="10" name="Rectangle 9"/>
           <p:cNvSpPr/>
           <p:nvPr/>
         </p:nvSpPr>
         <p:spPr>
           <a:xfrm>
-            <a:off x="548640" y="2019299"/>
-            <a:ext cx="68580" cy="601980"/>
+            <a:off x="4279392" y="1371600"/>
+            <a:ext cx="68580" cy="1828800"/>
           </a:xfrm>
           <a:prstGeom prst="rect">
             <a:avLst/>
           </a:prstGeom>
           <a:solidFill>
-            <a:srgbClr val="E30622"/>
+            <a:srgbClr val="A6001A"/>
           </a:solidFill>
           <a:ln>
             <a:noFill/>
@@ -18977,22 +18829,22 @@
       </p:sp>
       <p:pic>
         <p:nvPicPr>
-          <p:cNvPr id="10" name="Picture 9" descr="circle-check.png"/>
+          <p:cNvPr id="11" name="Picture 10" descr="users.png"/>
           <p:cNvPicPr>
             <a:picLocks noChangeAspect="1"/>
           </p:cNvPicPr>
           <p:nvPr/>
         </p:nvPicPr>
         <p:blipFill>
-          <a:blip r:embed="rId3"/>
+          <a:blip r:embed="rId4"/>
           <a:stretch>
             <a:fillRect/>
           </a:stretch>
         </p:blipFill>
         <p:spPr>
           <a:xfrm>
-            <a:off x="777240" y="2147316"/>
-            <a:ext cx="256032" cy="256032"/>
+            <a:off x="7370064" y="1536192"/>
+            <a:ext cx="274320" cy="274320"/>
           </a:xfrm>
           <a:prstGeom prst="rect">
             <a:avLst/>
@@ -19001,14 +18853,53 @@
       </p:pic>
       <p:sp>
         <p:nvSpPr>
-          <p:cNvPr id="11" name="TextBox 10"/>
+          <p:cNvPr id="12" name="TextBox 11"/>
           <p:cNvSpPr txBox="1"/>
           <p:nvPr/>
         </p:nvSpPr>
         <p:spPr>
           <a:xfrm>
-            <a:off x="1143000" y="2083307"/>
-            <a:ext cx="10058400" cy="292608"/>
+            <a:off x="4535424" y="1536192"/>
+            <a:ext cx="2697480" cy="384048"/>
+          </a:xfrm>
+          <a:prstGeom prst="rect">
+            <a:avLst/>
+          </a:prstGeom>
+          <a:noFill/>
+        </p:spPr>
+        <p:txBody>
+          <a:bodyPr wrap="square" anchor="t">
+            <a:spAutoFit/>
+          </a:bodyPr>
+          <a:lstStyle/>
+          <a:p>
+            <a:pPr algn="l">
+              <a:lnSpc>
+                <a:spcPct val="105000"/>
+              </a:lnSpc>
+            </a:pPr>
+            <a:r>
+              <a:rPr sz="900" b="1">
+                <a:solidFill>
+                  <a:srgbClr val="6E6E6E"/>
+                </a:solidFill>
+                <a:latin typeface="Calibri"/>
+              </a:rPr>
+              <a:t>TEMMUZ VE ÖNCESİ ALIM</a:t>
+            </a:r>
+          </a:p>
+        </p:txBody>
+      </p:sp>
+      <p:sp>
+        <p:nvSpPr>
+          <p:cNvPr id="13" name="TextBox 12"/>
+          <p:cNvSpPr txBox="1"/>
+          <p:nvPr/>
+        </p:nvSpPr>
+        <p:spPr>
+          <a:xfrm>
+            <a:off x="4535424" y="1975104"/>
+            <a:ext cx="3154679" cy="658368"/>
           </a:xfrm>
           <a:prstGeom prst="rect">
             <a:avLst/>
@@ -19027,27 +18918,27 @@
               </a:lnSpc>
             </a:pPr>
             <a:r>
-              <a:rPr sz="1150" b="1">
+              <a:rPr sz="3000" b="1">
                 <a:solidFill>
                   <a:srgbClr val="A6001A"/>
                 </a:solidFill>
                 <a:latin typeface="Calibri"/>
               </a:rPr>
-              <a:t>Ciro artışı enflasyon kaynaklı mı?</a:t>
+              <a:t>6 → 2</a:t>
             </a:r>
           </a:p>
         </p:txBody>
       </p:sp>
       <p:sp>
         <p:nvSpPr>
-          <p:cNvPr id="12" name="TextBox 11"/>
+          <p:cNvPr id="14" name="TextBox 13"/>
           <p:cNvSpPr txBox="1"/>
           <p:nvPr/>
         </p:nvSpPr>
         <p:spPr>
           <a:xfrm>
-            <a:off x="1143000" y="2366771"/>
-            <a:ext cx="10058400" cy="217932"/>
+            <a:off x="4535424" y="2688336"/>
+            <a:ext cx="3154679" cy="457200"/>
           </a:xfrm>
           <a:prstGeom prst="rect">
             <a:avLst/>
@@ -19062,31 +18953,31 @@
           <a:p>
             <a:pPr algn="l">
               <a:lnSpc>
-                <a:spcPct val="106000"/>
+                <a:spcPct val="105000"/>
               </a:lnSpc>
             </a:pPr>
             <a:r>
-              <a:rPr sz="950" b="0">
+              <a:rPr sz="1000" b="0">
                 <a:solidFill>
-                  <a:srgbClr val="333333"/>
+                  <a:srgbClr val="6E6E6E"/>
                 </a:solidFill>
                 <a:latin typeface="Calibri"/>
               </a:rPr>
-              <a:t>Kısmen doğru: eşleşen ürünlerde fiyat endeksi +%19,8. Bu yüzden savunma ciroya değil ADEDE dayanıyor: ürün adedi +%34,9 ve adet fiyattan etkilenmez.</a:t>
+              <a:t>gerçek erken alım azaldı</a:t>
             </a:r>
           </a:p>
         </p:txBody>
       </p:sp>
       <p:sp>
         <p:nvSpPr>
-          <p:cNvPr id="13" name="Rectangle 12"/>
+          <p:cNvPr id="15" name="Rectangle 14"/>
           <p:cNvSpPr/>
           <p:nvPr/>
         </p:nvSpPr>
         <p:spPr>
           <a:xfrm>
-            <a:off x="548640" y="2712719"/>
-            <a:ext cx="11018520" cy="601980"/>
+            <a:off x="8001000" y="1371600"/>
+            <a:ext cx="3566160" cy="1828800"/>
           </a:xfrm>
           <a:prstGeom prst="rect">
             <a:avLst/>
@@ -19125,20 +19016,20 @@
       </p:sp>
       <p:sp>
         <p:nvSpPr>
-          <p:cNvPr id="14" name="Rectangle 13"/>
+          <p:cNvPr id="16" name="Rectangle 15"/>
           <p:cNvSpPr/>
           <p:nvPr/>
         </p:nvSpPr>
         <p:spPr>
           <a:xfrm>
-            <a:off x="548640" y="2712719"/>
-            <a:ext cx="68580" cy="601980"/>
+            <a:off x="8001000" y="1371600"/>
+            <a:ext cx="68580" cy="1828800"/>
           </a:xfrm>
           <a:prstGeom prst="rect">
             <a:avLst/>
           </a:prstGeom>
           <a:solidFill>
-            <a:srgbClr val="E30622"/>
+            <a:srgbClr val="A6001A"/>
           </a:solidFill>
           <a:ln>
             <a:noFill/>
@@ -19169,22 +19060,22 @@
       </p:sp>
       <p:pic>
         <p:nvPicPr>
-          <p:cNvPr id="15" name="Picture 14" descr="circle-check.png"/>
+          <p:cNvPr id="17" name="Picture 16" descr="package.png"/>
           <p:cNvPicPr>
             <a:picLocks noChangeAspect="1"/>
           </p:cNvPicPr>
           <p:nvPr/>
         </p:nvPicPr>
         <p:blipFill>
-          <a:blip r:embed="rId3"/>
+          <a:blip r:embed="rId5"/>
           <a:stretch>
             <a:fillRect/>
           </a:stretch>
         </p:blipFill>
         <p:spPr>
           <a:xfrm>
-            <a:off x="777240" y="2840736"/>
-            <a:ext cx="256032" cy="256032"/>
+            <a:off x="11091672" y="1536192"/>
+            <a:ext cx="274320" cy="274320"/>
           </a:xfrm>
           <a:prstGeom prst="rect">
             <a:avLst/>
@@ -19193,14 +19084,53 @@
       </p:pic>
       <p:sp>
         <p:nvSpPr>
-          <p:cNvPr id="16" name="TextBox 15"/>
+          <p:cNvPr id="18" name="TextBox 17"/>
           <p:cNvSpPr txBox="1"/>
           <p:nvPr/>
         </p:nvSpPr>
         <p:spPr>
           <a:xfrm>
-            <a:off x="1143000" y="2776727"/>
-            <a:ext cx="10058400" cy="292608"/>
+            <a:off x="8257031" y="1536192"/>
+            <a:ext cx="2697480" cy="384048"/>
+          </a:xfrm>
+          <a:prstGeom prst="rect">
+            <a:avLst/>
+          </a:prstGeom>
+          <a:noFill/>
+        </p:spPr>
+        <p:txBody>
+          <a:bodyPr wrap="square" anchor="t">
+            <a:spAutoFit/>
+          </a:bodyPr>
+          <a:lstStyle/>
+          <a:p>
+            <a:pPr algn="l">
+              <a:lnSpc>
+                <a:spcPct val="105000"/>
+              </a:lnSpc>
+            </a:pPr>
+            <a:r>
+              <a:rPr sz="900" b="1">
+                <a:solidFill>
+                  <a:srgbClr val="6E6E6E"/>
+                </a:solidFill>
+                <a:latin typeface="Calibri"/>
+              </a:rPr>
+              <a:t>1–14 AĞUSTOS İŞ HACMİ</a:t>
+            </a:r>
+          </a:p>
+        </p:txBody>
+      </p:sp>
+      <p:sp>
+        <p:nvSpPr>
+          <p:cNvPr id="19" name="TextBox 18"/>
+          <p:cNvSpPr txBox="1"/>
+          <p:nvPr/>
+        </p:nvSpPr>
+        <p:spPr>
+          <a:xfrm>
+            <a:off x="8257031" y="1975104"/>
+            <a:ext cx="3154679" cy="658368"/>
           </a:xfrm>
           <a:prstGeom prst="rect">
             <a:avLst/>
@@ -19219,27 +19149,27 @@
               </a:lnSpc>
             </a:pPr>
             <a:r>
-              <a:rPr sz="1150" b="1">
+              <a:rPr sz="3000" b="1">
                 <a:solidFill>
                   <a:srgbClr val="A6001A"/>
                 </a:solidFill>
                 <a:latin typeface="Calibri"/>
               </a:rPr>
-              <a:t>Kasa sistemi değişti, karşılaştırma geçerli mi?</a:t>
+              <a:t>+%25,1</a:t>
             </a:r>
           </a:p>
         </p:txBody>
       </p:sp>
       <p:sp>
         <p:nvSpPr>
-          <p:cNvPr id="17" name="TextBox 16"/>
+          <p:cNvPr id="20" name="TextBox 19"/>
           <p:cNvSpPr txBox="1"/>
           <p:nvPr/>
         </p:nvSpPr>
         <p:spPr>
           <a:xfrm>
-            <a:off x="1143000" y="3060191"/>
-            <a:ext cx="10058400" cy="217932"/>
+            <a:off x="8257031" y="2688336"/>
+            <a:ext cx="3154679" cy="457200"/>
           </a:xfrm>
           <a:prstGeom prst="rect">
             <a:avLst/>
@@ -19254,600 +19184,1086 @@
           <a:p>
             <a:pPr algn="l">
               <a:lnSpc>
-                <a:spcPct val="106000"/>
+                <a:spcPct val="105000"/>
               </a:lnSpc>
             </a:pPr>
             <a:r>
-              <a:rPr sz="950" b="0">
+              <a:rPr sz="1000" b="0">
                 <a:solidFill>
-                  <a:srgbClr val="333333"/>
+                  <a:srgbClr val="6E6E6E"/>
                 </a:solidFill>
                 <a:latin typeface="Calibri"/>
               </a:rPr>
-              <a:t>Bu yüzden ölçüm POS'tan değil ERP'den (DerinSIS) alındı — iki yılda da aynı kaynak, aynı belge tipi. Temmuz 2025 kasa geçişi ölçüye girmiyor.</a:t>
+              <a:t>137.483 → 171.957 adet</a:t>
             </a:r>
           </a:p>
         </p:txBody>
       </p:sp>
-      <p:sp>
-        <p:nvSpPr>
-          <p:cNvPr id="18" name="Rectangle 17"/>
-          <p:cNvSpPr/>
-          <p:nvPr/>
-        </p:nvSpPr>
-        <p:spPr>
-          <a:xfrm>
-            <a:off x="548640" y="3406139"/>
-            <a:ext cx="11018520" cy="601980"/>
-          </a:xfrm>
-          <a:prstGeom prst="rect">
-            <a:avLst/>
-          </a:prstGeom>
-          <a:solidFill>
-            <a:srgbClr val="FFFFFF"/>
-          </a:solidFill>
-          <a:ln w="12700">
-            <a:solidFill>
-              <a:srgbClr val="DCDCDC"/>
-            </a:solidFill>
-          </a:ln>
-          <a:effectLst/>
-        </p:spPr>
-        <p:style>
-          <a:lnRef idx="1">
-            <a:schemeClr val="accent1"/>
-          </a:lnRef>
-          <a:fillRef idx="3">
-            <a:schemeClr val="accent1"/>
-          </a:fillRef>
-          <a:effectRef idx="2">
-            <a:schemeClr val="accent1"/>
-          </a:effectRef>
-          <a:fontRef idx="minor">
-            <a:schemeClr val="lt1"/>
-          </a:fontRef>
-        </p:style>
-        <p:txBody>
-          <a:bodyPr rtlCol="0" anchor="ctr"/>
-          <a:lstStyle/>
-          <a:p>
-            <a:pPr algn="ctr"/>
-          </a:p>
-        </p:txBody>
-      </p:sp>
-      <p:sp>
-        <p:nvSpPr>
-          <p:cNvPr id="19" name="Rectangle 18"/>
-          <p:cNvSpPr/>
-          <p:nvPr/>
-        </p:nvSpPr>
-        <p:spPr>
-          <a:xfrm>
-            <a:off x="548640" y="3406139"/>
-            <a:ext cx="68580" cy="601980"/>
-          </a:xfrm>
-          <a:prstGeom prst="rect">
-            <a:avLst/>
-          </a:prstGeom>
-          <a:solidFill>
-            <a:srgbClr val="E30622"/>
-          </a:solidFill>
-          <a:ln>
-            <a:noFill/>
-          </a:ln>
-          <a:effectLst/>
-        </p:spPr>
-        <p:style>
-          <a:lnRef idx="1">
-            <a:schemeClr val="accent1"/>
-          </a:lnRef>
-          <a:fillRef idx="3">
-            <a:schemeClr val="accent1"/>
-          </a:fillRef>
-          <a:effectRef idx="2">
-            <a:schemeClr val="accent1"/>
-          </a:effectRef>
-          <a:fontRef idx="minor">
-            <a:schemeClr val="lt1"/>
-          </a:fontRef>
-        </p:style>
-        <p:txBody>
-          <a:bodyPr rtlCol="0" anchor="ctr"/>
-          <a:lstStyle/>
-          <a:p>
-            <a:pPr algn="ctr"/>
-          </a:p>
-        </p:txBody>
-      </p:sp>
-      <p:pic>
-        <p:nvPicPr>
-          <p:cNvPr id="20" name="Picture 19" descr="circle-check.png"/>
-          <p:cNvPicPr>
-            <a:picLocks noChangeAspect="1"/>
-          </p:cNvPicPr>
-          <p:nvPr/>
-        </p:nvPicPr>
-        <p:blipFill>
-          <a:blip r:embed="rId3"/>
-          <a:stretch>
-            <a:fillRect/>
-          </a:stretch>
-        </p:blipFill>
-        <p:spPr>
-          <a:xfrm>
-            <a:off x="777240" y="3534156"/>
-            <a:ext cx="256032" cy="256032"/>
-          </a:xfrm>
-          <a:prstGeom prst="rect">
-            <a:avLst/>
-          </a:prstGeom>
-        </p:spPr>
-      </p:pic>
-      <p:sp>
-        <p:nvSpPr>
-          <p:cNvPr id="21" name="TextBox 20"/>
-          <p:cNvSpPr txBox="1"/>
-          <p:nvPr/>
-        </p:nvSpPr>
-        <p:spPr>
-          <a:xfrm>
-            <a:off x="1143000" y="3470147"/>
-            <a:ext cx="10058400" cy="292608"/>
-          </a:xfrm>
-          <a:prstGeom prst="rect">
-            <a:avLst/>
-          </a:prstGeom>
-          <a:noFill/>
-        </p:spPr>
-        <p:txBody>
-          <a:bodyPr wrap="square" anchor="t">
-            <a:spAutoFit/>
-          </a:bodyPr>
-          <a:lstStyle/>
-          <a:p>
-            <a:pPr algn="l">
-              <a:lnSpc>
-                <a:spcPct val="100000"/>
-              </a:lnSpc>
-            </a:pPr>
-            <a:r>
-              <a:rPr sz="1150" b="1">
-                <a:solidFill>
-                  <a:srgbClr val="A6001A"/>
-                </a:solidFill>
-                <a:latin typeface="Calibri"/>
-              </a:rPr>
-              <a:t>Sezonluk personel erken mi alındı?</a:t>
-            </a:r>
-          </a:p>
-        </p:txBody>
-      </p:sp>
+      <p:graphicFrame>
+        <p:nvGraphicFramePr>
+          <p:cNvPr id="21" name="Table 20"/>
+          <p:cNvGraphicFramePr>
+            <a:graphicFrameLocks noGrp="1"/>
+          </p:cNvGraphicFramePr>
+          <p:nvPr/>
+        </p:nvGraphicFramePr>
+        <p:xfrm>
+          <a:off x="548640" y="3246120"/>
+          <a:ext cx="11018520" cy="2011680"/>
+        </p:xfrm>
+        <a:graphic>
+          <a:graphicData uri="http://schemas.openxmlformats.org/drawingml/2006/table">
+            <a:tbl>
+              <a:tblPr firstRow="1" bandRow="1">
+                <a:tableStyleId>{5C22544A-7EE6-4342-B048-85BDC9FD1C3A}</a:tableStyleId>
+              </a:tblPr>
+              <a:tblGrid>
+                <a:gridCol w="3291840"/>
+                <a:gridCol w="1737360"/>
+                <a:gridCol w="1737360"/>
+                <a:gridCol w="4251960"/>
+              </a:tblGrid>
+              <a:tr h="182880">
+                <a:tc>
+                  <a:txBody>
+                    <a:bodyPr/>
+                    <a:lstStyle/>
+                    <a:p>
+                      <a:pPr algn="l"/>
+                      <a:r>
+                        <a:rPr sz="800" b="1">
+                          <a:solidFill>
+                            <a:srgbClr val="FFFFFF"/>
+                          </a:solidFill>
+                          <a:latin typeface="Calibri"/>
+                        </a:rPr>
+                        <a:t>Ölçü</a:t>
+                      </a:r>
+                    </a:p>
+                  </a:txBody>
+                  <a:tcPr>
+                    <a:solidFill>
+                      <a:srgbClr val="E30622"/>
+                    </a:solidFill>
+                  </a:tcPr>
+                </a:tc>
+                <a:tc>
+                  <a:txBody>
+                    <a:bodyPr/>
+                    <a:lstStyle/>
+                    <a:p>
+                      <a:pPr algn="ctr"/>
+                      <a:r>
+                        <a:rPr sz="800" b="1">
+                          <a:solidFill>
+                            <a:srgbClr val="FFFFFF"/>
+                          </a:solidFill>
+                          <a:latin typeface="Calibri"/>
+                        </a:rPr>
+                        <a:t>2025</a:t>
+                      </a:r>
+                    </a:p>
+                  </a:txBody>
+                  <a:tcPr>
+                    <a:solidFill>
+                      <a:srgbClr val="E30622"/>
+                    </a:solidFill>
+                  </a:tcPr>
+                </a:tc>
+                <a:tc>
+                  <a:txBody>
+                    <a:bodyPr/>
+                    <a:lstStyle/>
+                    <a:p>
+                      <a:pPr algn="ctr"/>
+                      <a:r>
+                        <a:rPr sz="800" b="1">
+                          <a:solidFill>
+                            <a:srgbClr val="FFFFFF"/>
+                          </a:solidFill>
+                          <a:latin typeface="Calibri"/>
+                        </a:rPr>
+                        <a:t>2026</a:t>
+                      </a:r>
+                    </a:p>
+                  </a:txBody>
+                  <a:tcPr>
+                    <a:solidFill>
+                      <a:srgbClr val="E30622"/>
+                    </a:solidFill>
+                  </a:tcPr>
+                </a:tc>
+                <a:tc>
+                  <a:txBody>
+                    <a:bodyPr/>
+                    <a:lstStyle/>
+                    <a:p>
+                      <a:pPr algn="l"/>
+                      <a:r>
+                        <a:rPr sz="800" b="1">
+                          <a:solidFill>
+                            <a:srgbClr val="FFFFFF"/>
+                          </a:solidFill>
+                          <a:latin typeface="Calibri"/>
+                        </a:rPr>
+                        <a:t>Yorum</a:t>
+                      </a:r>
+                    </a:p>
+                  </a:txBody>
+                  <a:tcPr>
+                    <a:solidFill>
+                      <a:srgbClr val="E30622"/>
+                    </a:solidFill>
+                  </a:tcPr>
+                </a:tc>
+              </a:tr>
+              <a:tr h="182880">
+                <a:tc>
+                  <a:txBody>
+                    <a:bodyPr/>
+                    <a:lstStyle/>
+                    <a:p>
+                      <a:pPr algn="l"/>
+                      <a:r>
+                        <a:rPr sz="900" b="0">
+                          <a:solidFill>
+                            <a:srgbClr val="333333"/>
+                          </a:solidFill>
+                          <a:latin typeface="Calibri"/>
+                        </a:rPr>
+                        <a:t>Ortalama alım günü (takvim)</a:t>
+                      </a:r>
+                    </a:p>
+                  </a:txBody>
+                  <a:tcPr>
+                    <a:solidFill>
+                      <a:srgbClr val="FFFFFF"/>
+                    </a:solidFill>
+                  </a:tcPr>
+                </a:tc>
+                <a:tc>
+                  <a:txBody>
+                    <a:bodyPr/>
+                    <a:lstStyle/>
+                    <a:p>
+                      <a:pPr algn="ctr"/>
+                      <a:r>
+                        <a:rPr sz="900" b="0">
+                          <a:solidFill>
+                            <a:srgbClr val="333333"/>
+                          </a:solidFill>
+                          <a:latin typeface="Calibri"/>
+                        </a:rPr>
+                        <a:t>225. gün</a:t>
+                      </a:r>
+                    </a:p>
+                  </a:txBody>
+                  <a:tcPr>
+                    <a:solidFill>
+                      <a:srgbClr val="FFFFFF"/>
+                    </a:solidFill>
+                  </a:tcPr>
+                </a:tc>
+                <a:tc>
+                  <a:txBody>
+                    <a:bodyPr/>
+                    <a:lstStyle/>
+                    <a:p>
+                      <a:pPr algn="ctr"/>
+                      <a:r>
+                        <a:rPr sz="900" b="1">
+                          <a:solidFill>
+                            <a:srgbClr val="333333"/>
+                          </a:solidFill>
+                          <a:latin typeface="Calibri"/>
+                        </a:rPr>
+                        <a:t>228. gün</a:t>
+                      </a:r>
+                    </a:p>
+                  </a:txBody>
+                  <a:tcPr>
+                    <a:solidFill>
+                      <a:srgbClr val="FFFFFF"/>
+                    </a:solidFill>
+                  </a:tcPr>
+                </a:tc>
+                <a:tc>
+                  <a:txBody>
+                    <a:bodyPr/>
+                    <a:lstStyle/>
+                    <a:p>
+                      <a:pPr algn="l"/>
+                      <a:r>
+                        <a:rPr sz="900" b="0">
+                          <a:solidFill>
+                            <a:srgbClr val="A6001A"/>
+                          </a:solidFill>
+                          <a:latin typeface="Calibri"/>
+                        </a:rPr>
+                        <a:t>2026 alımı ortalama 2,5 gün DAHA GEÇ</a:t>
+                      </a:r>
+                    </a:p>
+                  </a:txBody>
+                  <a:tcPr>
+                    <a:solidFill>
+                      <a:srgbClr val="FFFFFF"/>
+                    </a:solidFill>
+                  </a:tcPr>
+                </a:tc>
+              </a:tr>
+              <a:tr h="182880">
+                <a:tc>
+                  <a:txBody>
+                    <a:bodyPr/>
+                    <a:lstStyle/>
+                    <a:p>
+                      <a:pPr algn="l"/>
+                      <a:r>
+                        <a:rPr sz="900" b="0">
+                          <a:solidFill>
+                            <a:srgbClr val="333333"/>
+                          </a:solidFill>
+                          <a:latin typeface="Calibri"/>
+                        </a:rPr>
+                        <a:t>Temmuz ve öncesi alınan</a:t>
+                      </a:r>
+                    </a:p>
+                  </a:txBody>
+                  <a:tcPr>
+                    <a:solidFill>
+                      <a:srgbClr val="FAFAFA"/>
+                    </a:solidFill>
+                  </a:tcPr>
+                </a:tc>
+                <a:tc>
+                  <a:txBody>
+                    <a:bodyPr/>
+                    <a:lstStyle/>
+                    <a:p>
+                      <a:pPr algn="ctr"/>
+                      <a:r>
+                        <a:rPr sz="900" b="0">
+                          <a:solidFill>
+                            <a:srgbClr val="333333"/>
+                          </a:solidFill>
+                          <a:latin typeface="Calibri"/>
+                        </a:rPr>
+                        <a:t>6 kişi</a:t>
+                      </a:r>
+                    </a:p>
+                  </a:txBody>
+                  <a:tcPr>
+                    <a:solidFill>
+                      <a:srgbClr val="FAFAFA"/>
+                    </a:solidFill>
+                  </a:tcPr>
+                </a:tc>
+                <a:tc>
+                  <a:txBody>
+                    <a:bodyPr/>
+                    <a:lstStyle/>
+                    <a:p>
+                      <a:pPr algn="ctr"/>
+                      <a:r>
+                        <a:rPr sz="900" b="1">
+                          <a:solidFill>
+                            <a:srgbClr val="333333"/>
+                          </a:solidFill>
+                          <a:latin typeface="Calibri"/>
+                        </a:rPr>
+                        <a:t>2 kişi</a:t>
+                      </a:r>
+                    </a:p>
+                  </a:txBody>
+                  <a:tcPr>
+                    <a:solidFill>
+                      <a:srgbClr val="FAFAFA"/>
+                    </a:solidFill>
+                  </a:tcPr>
+                </a:tc>
+                <a:tc>
+                  <a:txBody>
+                    <a:bodyPr/>
+                    <a:lstStyle/>
+                    <a:p>
+                      <a:pPr algn="l"/>
+                      <a:r>
+                        <a:rPr sz="900" b="0">
+                          <a:solidFill>
+                            <a:srgbClr val="A6001A"/>
+                          </a:solidFill>
+                          <a:latin typeface="Calibri"/>
+                        </a:rPr>
+                        <a:t>erken alım azaldı</a:t>
+                      </a:r>
+                    </a:p>
+                  </a:txBody>
+                  <a:tcPr>
+                    <a:solidFill>
+                      <a:srgbClr val="FAFAFA"/>
+                    </a:solidFill>
+                  </a:tcPr>
+                </a:tc>
+              </a:tr>
+              <a:tr h="182880">
+                <a:tc>
+                  <a:txBody>
+                    <a:bodyPr/>
+                    <a:lstStyle/>
+                    <a:p>
+                      <a:pPr algn="l"/>
+                      <a:r>
+                        <a:rPr sz="900" b="0">
+                          <a:solidFill>
+                            <a:srgbClr val="333333"/>
+                          </a:solidFill>
+                          <a:latin typeface="Calibri"/>
+                        </a:rPr>
+                        <a:t>Açılıştan 45+ gün önce alınan</a:t>
+                      </a:r>
+                    </a:p>
+                  </a:txBody>
+                  <a:tcPr>
+                    <a:solidFill>
+                      <a:srgbClr val="FFFFFF"/>
+                    </a:solidFill>
+                  </a:tcPr>
+                </a:tc>
+                <a:tc>
+                  <a:txBody>
+                    <a:bodyPr/>
+                    <a:lstStyle/>
+                    <a:p>
+                      <a:pPr algn="ctr"/>
+                      <a:r>
+                        <a:rPr sz="900" b="0">
+                          <a:solidFill>
+                            <a:srgbClr val="333333"/>
+                          </a:solidFill>
+                          <a:latin typeface="Calibri"/>
+                        </a:rPr>
+                        <a:t>4 kişi</a:t>
+                      </a:r>
+                    </a:p>
+                  </a:txBody>
+                  <a:tcPr>
+                    <a:solidFill>
+                      <a:srgbClr val="FFFFFF"/>
+                    </a:solidFill>
+                  </a:tcPr>
+                </a:tc>
+                <a:tc>
+                  <a:txBody>
+                    <a:bodyPr/>
+                    <a:lstStyle/>
+                    <a:p>
+                      <a:pPr algn="ctr"/>
+                      <a:r>
+                        <a:rPr sz="900" b="1">
+                          <a:solidFill>
+                            <a:srgbClr val="333333"/>
+                          </a:solidFill>
+                          <a:latin typeface="Calibri"/>
+                        </a:rPr>
+                        <a:t>2 kişi</a:t>
+                      </a:r>
+                    </a:p>
+                  </a:txBody>
+                  <a:tcPr>
+                    <a:solidFill>
+                      <a:srgbClr val="FFFFFF"/>
+                    </a:solidFill>
+                  </a:tcPr>
+                </a:tc>
+                <a:tc>
+                  <a:txBody>
+                    <a:bodyPr/>
+                    <a:lstStyle/>
+                    <a:p>
+                      <a:pPr algn="l"/>
+                      <a:r>
+                        <a:rPr sz="900" b="0">
+                          <a:solidFill>
+                            <a:srgbClr val="A6001A"/>
+                          </a:solidFill>
+                          <a:latin typeface="Calibri"/>
+                        </a:rPr>
+                        <a:t>çok erken alım azaldı</a:t>
+                      </a:r>
+                    </a:p>
+                  </a:txBody>
+                  <a:tcPr>
+                    <a:solidFill>
+                      <a:srgbClr val="FFFFFF"/>
+                    </a:solidFill>
+                  </a:tcPr>
+                </a:tc>
+              </a:tr>
+              <a:tr h="182880">
+                <a:tc>
+                  <a:txBody>
+                    <a:bodyPr/>
+                    <a:lstStyle/>
+                    <a:p>
+                      <a:pPr algn="l"/>
+                      <a:r>
+                        <a:rPr sz="900" b="0">
+                          <a:solidFill>
+                            <a:srgbClr val="333333"/>
+                          </a:solidFill>
+                          <a:latin typeface="Calibri"/>
+                        </a:rPr>
+                        <a:t>1–14 Ağustos alınan</a:t>
+                      </a:r>
+                    </a:p>
+                  </a:txBody>
+                  <a:tcPr>
+                    <a:solidFill>
+                      <a:srgbClr val="FAFAFA"/>
+                    </a:solidFill>
+                  </a:tcPr>
+                </a:tc>
+                <a:tc>
+                  <a:txBody>
+                    <a:bodyPr/>
+                    <a:lstStyle/>
+                    <a:p>
+                      <a:pPr algn="ctr"/>
+                      <a:r>
+                        <a:rPr sz="900" b="0">
+                          <a:solidFill>
+                            <a:srgbClr val="333333"/>
+                          </a:solidFill>
+                          <a:latin typeface="Calibri"/>
+                        </a:rPr>
+                        <a:t>12 kişi</a:t>
+                      </a:r>
+                    </a:p>
+                  </a:txBody>
+                  <a:tcPr>
+                    <a:solidFill>
+                      <a:srgbClr val="FAFAFA"/>
+                    </a:solidFill>
+                  </a:tcPr>
+                </a:tc>
+                <a:tc>
+                  <a:txBody>
+                    <a:bodyPr/>
+                    <a:lstStyle/>
+                    <a:p>
+                      <a:pPr algn="ctr"/>
+                      <a:r>
+                        <a:rPr sz="900" b="1">
+                          <a:solidFill>
+                            <a:srgbClr val="333333"/>
+                          </a:solidFill>
+                          <a:latin typeface="Calibri"/>
+                        </a:rPr>
+                        <a:t>30 kişi</a:t>
+                      </a:r>
+                    </a:p>
+                  </a:txBody>
+                  <a:tcPr>
+                    <a:solidFill>
+                      <a:srgbClr val="FAFAFA"/>
+                    </a:solidFill>
+                  </a:tcPr>
+                </a:tc>
+                <a:tc>
+                  <a:txBody>
+                    <a:bodyPr/>
+                    <a:lstStyle/>
+                    <a:p>
+                      <a:pPr algn="l"/>
+                      <a:r>
+                        <a:rPr sz="900" b="0">
+                          <a:solidFill>
+                            <a:srgbClr val="A6001A"/>
+                          </a:solidFill>
+                          <a:latin typeface="Calibri"/>
+                        </a:rPr>
+                        <a:t>artış bu iki haftada</a:t>
+                      </a:r>
+                    </a:p>
+                  </a:txBody>
+                  <a:tcPr>
+                    <a:solidFill>
+                      <a:srgbClr val="FAFAFA"/>
+                    </a:solidFill>
+                  </a:tcPr>
+                </a:tc>
+              </a:tr>
+              <a:tr h="182880">
+                <a:tc>
+                  <a:txBody>
+                    <a:bodyPr/>
+                    <a:lstStyle/>
+                    <a:p>
+                      <a:pPr algn="l"/>
+                      <a:r>
+                        <a:rPr sz="900" b="0">
+                          <a:solidFill>
+                            <a:srgbClr val="333333"/>
+                          </a:solidFill>
+                          <a:latin typeface="Calibri"/>
+                        </a:rPr>
+                        <a:t>1–14 Ağustos ürün adedi</a:t>
+                      </a:r>
+                    </a:p>
+                  </a:txBody>
+                  <a:tcPr>
+                    <a:solidFill>
+                      <a:srgbClr val="FFFFFF"/>
+                    </a:solidFill>
+                  </a:tcPr>
+                </a:tc>
+                <a:tc>
+                  <a:txBody>
+                    <a:bodyPr/>
+                    <a:lstStyle/>
+                    <a:p>
+                      <a:pPr algn="ctr"/>
+                      <a:r>
+                        <a:rPr sz="900" b="0">
+                          <a:solidFill>
+                            <a:srgbClr val="333333"/>
+                          </a:solidFill>
+                          <a:latin typeface="Calibri"/>
+                        </a:rPr>
+                        <a:t>137.483</a:t>
+                      </a:r>
+                    </a:p>
+                  </a:txBody>
+                  <a:tcPr>
+                    <a:solidFill>
+                      <a:srgbClr val="FFFFFF"/>
+                    </a:solidFill>
+                  </a:tcPr>
+                </a:tc>
+                <a:tc>
+                  <a:txBody>
+                    <a:bodyPr/>
+                    <a:lstStyle/>
+                    <a:p>
+                      <a:pPr algn="ctr"/>
+                      <a:r>
+                        <a:rPr sz="900" b="1">
+                          <a:solidFill>
+                            <a:srgbClr val="333333"/>
+                          </a:solidFill>
+                          <a:latin typeface="Calibri"/>
+                        </a:rPr>
+                        <a:t>171.957</a:t>
+                      </a:r>
+                    </a:p>
+                  </a:txBody>
+                  <a:tcPr>
+                    <a:solidFill>
+                      <a:srgbClr val="FFFFFF"/>
+                    </a:solidFill>
+                  </a:tcPr>
+                </a:tc>
+                <a:tc>
+                  <a:txBody>
+                    <a:bodyPr/>
+                    <a:lstStyle/>
+                    <a:p>
+                      <a:pPr algn="l"/>
+                      <a:r>
+                        <a:rPr sz="900" b="0">
+                          <a:solidFill>
+                            <a:srgbClr val="A6001A"/>
+                          </a:solidFill>
+                          <a:latin typeface="Calibri"/>
+                        </a:rPr>
+                        <a:t>iş +%25,1 büyüdü — alım işi takip etti</a:t>
+                      </a:r>
+                    </a:p>
+                  </a:txBody>
+                  <a:tcPr>
+                    <a:solidFill>
+                      <a:srgbClr val="FFFFFF"/>
+                    </a:solidFill>
+                  </a:tcPr>
+                </a:tc>
+              </a:tr>
+              <a:tr h="182880">
+                <a:tc>
+                  <a:txBody>
+                    <a:bodyPr/>
+                    <a:lstStyle/>
+                    <a:p>
+                      <a:pPr algn="l"/>
+                      <a:r>
+                        <a:rPr sz="900" b="0">
+                          <a:solidFill>
+                            <a:srgbClr val="333333"/>
+                          </a:solidFill>
+                          <a:latin typeface="Calibri"/>
+                        </a:rPr>
+                        <a:t>15–31 Ağustos ürün adedi</a:t>
+                      </a:r>
+                    </a:p>
+                  </a:txBody>
+                  <a:tcPr>
+                    <a:solidFill>
+                      <a:srgbClr val="FAFAFA"/>
+                    </a:solidFill>
+                  </a:tcPr>
+                </a:tc>
+                <a:tc>
+                  <a:txBody>
+                    <a:bodyPr/>
+                    <a:lstStyle/>
+                    <a:p>
+                      <a:pPr algn="ctr"/>
+                      <a:r>
+                        <a:rPr sz="900" b="0">
+                          <a:solidFill>
+                            <a:srgbClr val="333333"/>
+                          </a:solidFill>
+                          <a:latin typeface="Calibri"/>
+                        </a:rPr>
+                        <a:t>320.776</a:t>
+                      </a:r>
+                    </a:p>
+                  </a:txBody>
+                  <a:tcPr>
+                    <a:solidFill>
+                      <a:srgbClr val="FAFAFA"/>
+                    </a:solidFill>
+                  </a:tcPr>
+                </a:tc>
+                <a:tc>
+                  <a:txBody>
+                    <a:bodyPr/>
+                    <a:lstStyle/>
+                    <a:p>
+                      <a:pPr algn="ctr"/>
+                      <a:r>
+                        <a:rPr sz="900" b="1">
+                          <a:solidFill>
+                            <a:srgbClr val="333333"/>
+                          </a:solidFill>
+                          <a:latin typeface="Calibri"/>
+                        </a:rPr>
+                        <a:t>311.542</a:t>
+                      </a:r>
+                    </a:p>
+                  </a:txBody>
+                  <a:tcPr>
+                    <a:solidFill>
+                      <a:srgbClr val="FAFAFA"/>
+                    </a:solidFill>
+                  </a:tcPr>
+                </a:tc>
+                <a:tc>
+                  <a:txBody>
+                    <a:bodyPr/>
+                    <a:lstStyle/>
+                    <a:p>
+                      <a:pPr algn="l"/>
+                      <a:r>
+                        <a:rPr sz="900" b="0">
+                          <a:solidFill>
+                            <a:srgbClr val="A6001A"/>
+                          </a:solidFill>
+                          <a:latin typeface="Calibri"/>
+                        </a:rPr>
+                        <a:t>−%2,9 — dalga Eylül'e kaydı</a:t>
+                      </a:r>
+                    </a:p>
+                  </a:txBody>
+                  <a:tcPr>
+                    <a:solidFill>
+                      <a:srgbClr val="FAFAFA"/>
+                    </a:solidFill>
+                  </a:tcPr>
+                </a:tc>
+              </a:tr>
+              <a:tr h="182880">
+                <a:tc>
+                  <a:txBody>
+                    <a:bodyPr/>
+                    <a:lstStyle/>
+                    <a:p>
+                      <a:pPr algn="l"/>
+                      <a:r>
+                        <a:rPr sz="900" b="0">
+                          <a:solidFill>
+                            <a:srgbClr val="333333"/>
+                          </a:solidFill>
+                          <a:latin typeface="Calibri"/>
+                        </a:rPr>
+                        <a:t>31.08'de çalışan sezonluk</a:t>
+                      </a:r>
+                    </a:p>
+                  </a:txBody>
+                  <a:tcPr>
+                    <a:solidFill>
+                      <a:srgbClr val="FFFFFF"/>
+                    </a:solidFill>
+                  </a:tcPr>
+                </a:tc>
+                <a:tc>
+                  <a:txBody>
+                    <a:bodyPr/>
+                    <a:lstStyle/>
+                    <a:p>
+                      <a:pPr algn="ctr"/>
+                      <a:r>
+                        <a:rPr sz="900" b="0">
+                          <a:solidFill>
+                            <a:srgbClr val="333333"/>
+                          </a:solidFill>
+                          <a:latin typeface="Calibri"/>
+                        </a:rPr>
+                        <a:t>65 kişi</a:t>
+                      </a:r>
+                    </a:p>
+                  </a:txBody>
+                  <a:tcPr>
+                    <a:solidFill>
+                      <a:srgbClr val="FFFFFF"/>
+                    </a:solidFill>
+                  </a:tcPr>
+                </a:tc>
+                <a:tc>
+                  <a:txBody>
+                    <a:bodyPr/>
+                    <a:lstStyle/>
+                    <a:p>
+                      <a:pPr algn="ctr"/>
+                      <a:r>
+                        <a:rPr sz="900" b="1">
+                          <a:solidFill>
+                            <a:srgbClr val="333333"/>
+                          </a:solidFill>
+                          <a:latin typeface="Calibri"/>
+                        </a:rPr>
+                        <a:t>62 kişi</a:t>
+                      </a:r>
+                    </a:p>
+                  </a:txBody>
+                  <a:tcPr>
+                    <a:solidFill>
+                      <a:srgbClr val="FFFFFF"/>
+                    </a:solidFill>
+                  </a:tcPr>
+                </a:tc>
+                <a:tc>
+                  <a:txBody>
+                    <a:bodyPr/>
+                    <a:lstStyle/>
+                    <a:p>
+                      <a:pPr algn="l"/>
+                      <a:r>
+                        <a:rPr sz="900" b="0">
+                          <a:solidFill>
+                            <a:srgbClr val="A6001A"/>
+                          </a:solidFill>
+                          <a:latin typeface="Calibri"/>
+                        </a:rPr>
+                        <a:t>kesimde 3 kişi DAHA AZ</a:t>
+                      </a:r>
+                    </a:p>
+                  </a:txBody>
+                  <a:tcPr>
+                    <a:solidFill>
+                      <a:srgbClr val="FFFFFF"/>
+                    </a:solidFill>
+                  </a:tcPr>
+                </a:tc>
+              </a:tr>
+              <a:tr h="182880">
+                <a:tc>
+                  <a:txBody>
+                    <a:bodyPr/>
+                    <a:lstStyle/>
+                    <a:p>
+                      <a:pPr algn="l"/>
+                      <a:r>
+                        <a:rPr sz="900" b="0">
+                          <a:solidFill>
+                            <a:srgbClr val="333333"/>
+                          </a:solidFill>
+                          <a:latin typeface="Calibri"/>
+                        </a:rPr>
+                        <a:t>   — Temmuz alımı</a:t>
+                      </a:r>
+                    </a:p>
+                  </a:txBody>
+                  <a:tcPr>
+                    <a:solidFill>
+                      <a:srgbClr val="FAFAFA"/>
+                    </a:solidFill>
+                  </a:tcPr>
+                </a:tc>
+                <a:tc>
+                  <a:txBody>
+                    <a:bodyPr/>
+                    <a:lstStyle/>
+                    <a:p>
+                      <a:pPr algn="ctr"/>
+                      <a:r>
+                        <a:rPr sz="900" b="0">
+                          <a:solidFill>
+                            <a:srgbClr val="333333"/>
+                          </a:solidFill>
+                          <a:latin typeface="Calibri"/>
+                        </a:rPr>
+                        <a:t>4 kişi</a:t>
+                      </a:r>
+                    </a:p>
+                  </a:txBody>
+                  <a:tcPr>
+                    <a:solidFill>
+                      <a:srgbClr val="FAFAFA"/>
+                    </a:solidFill>
+                  </a:tcPr>
+                </a:tc>
+                <a:tc>
+                  <a:txBody>
+                    <a:bodyPr/>
+                    <a:lstStyle/>
+                    <a:p>
+                      <a:pPr algn="ctr"/>
+                      <a:r>
+                        <a:rPr sz="900" b="1">
+                          <a:solidFill>
+                            <a:srgbClr val="333333"/>
+                          </a:solidFill>
+                          <a:latin typeface="Calibri"/>
+                        </a:rPr>
+                        <a:t>2 kişi</a:t>
+                      </a:r>
+                    </a:p>
+                  </a:txBody>
+                  <a:tcPr>
+                    <a:solidFill>
+                      <a:srgbClr val="FAFAFA"/>
+                    </a:solidFill>
+                  </a:tcPr>
+                </a:tc>
+                <a:tc>
+                  <a:txBody>
+                    <a:bodyPr/>
+                    <a:lstStyle/>
+                    <a:p>
+                      <a:pPr algn="l"/>
+                      <a:r>
+                        <a:rPr sz="900" b="0">
+                          <a:solidFill>
+                            <a:srgbClr val="A6001A"/>
+                          </a:solidFill>
+                          <a:latin typeface="Calibri"/>
+                        </a:rPr>
+                        <a:t>erken alım payı düştü</a:t>
+                      </a:r>
+                    </a:p>
+                  </a:txBody>
+                  <a:tcPr>
+                    <a:solidFill>
+                      <a:srgbClr val="FAFAFA"/>
+                    </a:solidFill>
+                  </a:tcPr>
+                </a:tc>
+              </a:tr>
+              <a:tr h="182880">
+                <a:tc>
+                  <a:txBody>
+                    <a:bodyPr/>
+                    <a:lstStyle/>
+                    <a:p>
+                      <a:pPr algn="l"/>
+                      <a:r>
+                        <a:rPr sz="900" b="0">
+                          <a:solidFill>
+                            <a:srgbClr val="333333"/>
+                          </a:solidFill>
+                          <a:latin typeface="Calibri"/>
+                        </a:rPr>
+                        <a:t>   — 1–14 Ağustos alımı</a:t>
+                      </a:r>
+                    </a:p>
+                  </a:txBody>
+                  <a:tcPr>
+                    <a:solidFill>
+                      <a:srgbClr val="FFFFFF"/>
+                    </a:solidFill>
+                  </a:tcPr>
+                </a:tc>
+                <a:tc>
+                  <a:txBody>
+                    <a:bodyPr/>
+                    <a:lstStyle/>
+                    <a:p>
+                      <a:pPr algn="ctr"/>
+                      <a:r>
+                        <a:rPr sz="900" b="0">
+                          <a:solidFill>
+                            <a:srgbClr val="333333"/>
+                          </a:solidFill>
+                          <a:latin typeface="Calibri"/>
+                        </a:rPr>
+                        <a:t>12 kişi</a:t>
+                      </a:r>
+                    </a:p>
+                  </a:txBody>
+                  <a:tcPr>
+                    <a:solidFill>
+                      <a:srgbClr val="FFFFFF"/>
+                    </a:solidFill>
+                  </a:tcPr>
+                </a:tc>
+                <a:tc>
+                  <a:txBody>
+                    <a:bodyPr/>
+                    <a:lstStyle/>
+                    <a:p>
+                      <a:pPr algn="ctr"/>
+                      <a:r>
+                        <a:rPr sz="900" b="1">
+                          <a:solidFill>
+                            <a:srgbClr val="333333"/>
+                          </a:solidFill>
+                          <a:latin typeface="Calibri"/>
+                        </a:rPr>
+                        <a:t>27 kişi</a:t>
+                      </a:r>
+                    </a:p>
+                  </a:txBody>
+                  <a:tcPr>
+                    <a:solidFill>
+                      <a:srgbClr val="FFFFFF"/>
+                    </a:solidFill>
+                  </a:tcPr>
+                </a:tc>
+                <a:tc>
+                  <a:txBody>
+                    <a:bodyPr/>
+                    <a:lstStyle/>
+                    <a:p>
+                      <a:pPr algn="l"/>
+                      <a:r>
+                        <a:rPr sz="900" b="0">
+                          <a:solidFill>
+                            <a:srgbClr val="A6001A"/>
+                          </a:solidFill>
+                          <a:latin typeface="Calibri"/>
+                        </a:rPr>
+                        <a:t>iş +%25,1 büyüyen dönem</a:t>
+                      </a:r>
+                    </a:p>
+                  </a:txBody>
+                  <a:tcPr>
+                    <a:solidFill>
+                      <a:srgbClr val="FFFFFF"/>
+                    </a:solidFill>
+                  </a:tcPr>
+                </a:tc>
+              </a:tr>
+              <a:tr h="182880">
+                <a:tc>
+                  <a:txBody>
+                    <a:bodyPr/>
+                    <a:lstStyle/>
+                    <a:p>
+                      <a:pPr algn="l"/>
+                      <a:r>
+                        <a:rPr sz="900" b="0">
+                          <a:solidFill>
+                            <a:srgbClr val="333333"/>
+                          </a:solidFill>
+                          <a:latin typeface="Calibri"/>
+                        </a:rPr>
+                        <a:t>   — 15–31 Ağustos alımı</a:t>
+                      </a:r>
+                    </a:p>
+                  </a:txBody>
+                  <a:tcPr>
+                    <a:solidFill>
+                      <a:srgbClr val="FAFAFA"/>
+                    </a:solidFill>
+                  </a:tcPr>
+                </a:tc>
+                <a:tc>
+                  <a:txBody>
+                    <a:bodyPr/>
+                    <a:lstStyle/>
+                    <a:p>
+                      <a:pPr algn="ctr"/>
+                      <a:r>
+                        <a:rPr sz="900" b="0">
+                          <a:solidFill>
+                            <a:srgbClr val="333333"/>
+                          </a:solidFill>
+                          <a:latin typeface="Calibri"/>
+                        </a:rPr>
+                        <a:t>49 kişi</a:t>
+                      </a:r>
+                    </a:p>
+                  </a:txBody>
+                  <a:tcPr>
+                    <a:solidFill>
+                      <a:srgbClr val="FAFAFA"/>
+                    </a:solidFill>
+                  </a:tcPr>
+                </a:tc>
+                <a:tc>
+                  <a:txBody>
+                    <a:bodyPr/>
+                    <a:lstStyle/>
+                    <a:p>
+                      <a:pPr algn="ctr"/>
+                      <a:r>
+                        <a:rPr sz="900" b="1">
+                          <a:solidFill>
+                            <a:srgbClr val="333333"/>
+                          </a:solidFill>
+                          <a:latin typeface="Calibri"/>
+                        </a:rPr>
+                        <a:t>32 kişi</a:t>
+                      </a:r>
+                    </a:p>
+                  </a:txBody>
+                  <a:tcPr>
+                    <a:solidFill>
+                      <a:srgbClr val="FAFAFA"/>
+                    </a:solidFill>
+                  </a:tcPr>
+                </a:tc>
+                <a:tc>
+                  <a:txBody>
+                    <a:bodyPr/>
+                    <a:lstStyle/>
+                    <a:p>
+                      <a:pPr algn="l"/>
+                      <a:r>
+                        <a:rPr sz="900" b="0">
+                          <a:solidFill>
+                            <a:srgbClr val="A6001A"/>
+                          </a:solidFill>
+                          <a:latin typeface="Calibri"/>
+                        </a:rPr>
+                        <a:t>iş −%2,9 → alım azaltıldı</a:t>
+                      </a:r>
+                    </a:p>
+                  </a:txBody>
+                  <a:tcPr>
+                    <a:solidFill>
+                      <a:srgbClr val="FAFAFA"/>
+                    </a:solidFill>
+                  </a:tcPr>
+                </a:tc>
+              </a:tr>
+            </a:tbl>
+          </a:graphicData>
+        </a:graphic>
+      </p:graphicFrame>
       <p:sp>
         <p:nvSpPr>
           <p:cNvPr id="22" name="TextBox 21"/>
-          <p:cNvSpPr txBox="1"/>
-          <p:nvPr/>
-        </p:nvSpPr>
-        <p:spPr>
-          <a:xfrm>
-            <a:off x="1143000" y="3753611"/>
-            <a:ext cx="10058400" cy="217932"/>
-          </a:xfrm>
-          <a:prstGeom prst="rect">
-            <a:avLst/>
-          </a:prstGeom>
-          <a:noFill/>
-        </p:spPr>
-        <p:txBody>
-          <a:bodyPr wrap="square" anchor="t">
-            <a:spAutoFit/>
-          </a:bodyPr>
-          <a:lstStyle/>
-          <a:p>
-            <a:pPr algn="l">
-              <a:lnSpc>
-                <a:spcPct val="106000"/>
-              </a:lnSpc>
-            </a:pPr>
-            <a:r>
-              <a:rPr sz="950" b="0">
-                <a:solidFill>
-                  <a:srgbClr val="333333"/>
-                </a:solidFill>
-                <a:latin typeface="Calibri"/>
-              </a:rPr>
-              <a:t>Hayır: takvim ölçüsünde 2026 alımı ortalama 2,5 gün DAHA GEÇ; Temmuz ve öncesi alım 6 kişiden 2'ye indi. Artış 1–14 Ağustos'ta ve o iki haftada ürün adedi +%25,1 büyüdü — alım işi takip etti.</a:t>
-            </a:r>
-          </a:p>
-        </p:txBody>
-      </p:sp>
-      <p:sp>
-        <p:nvSpPr>
-          <p:cNvPr id="23" name="Rectangle 22"/>
-          <p:cNvSpPr/>
-          <p:nvPr/>
-        </p:nvSpPr>
-        <p:spPr>
-          <a:xfrm>
-            <a:off x="548640" y="4099559"/>
-            <a:ext cx="11018520" cy="601980"/>
-          </a:xfrm>
-          <a:prstGeom prst="rect">
-            <a:avLst/>
-          </a:prstGeom>
-          <a:solidFill>
-            <a:srgbClr val="FFFFFF"/>
-          </a:solidFill>
-          <a:ln w="12700">
-            <a:solidFill>
-              <a:srgbClr val="DCDCDC"/>
-            </a:solidFill>
-          </a:ln>
-          <a:effectLst/>
-        </p:spPr>
-        <p:style>
-          <a:lnRef idx="1">
-            <a:schemeClr val="accent1"/>
-          </a:lnRef>
-          <a:fillRef idx="3">
-            <a:schemeClr val="accent1"/>
-          </a:fillRef>
-          <a:effectRef idx="2">
-            <a:schemeClr val="accent1"/>
-          </a:effectRef>
-          <a:fontRef idx="minor">
-            <a:schemeClr val="lt1"/>
-          </a:fontRef>
-        </p:style>
-        <p:txBody>
-          <a:bodyPr rtlCol="0" anchor="ctr"/>
-          <a:lstStyle/>
-          <a:p>
-            <a:pPr algn="ctr"/>
-          </a:p>
-        </p:txBody>
-      </p:sp>
-      <p:sp>
-        <p:nvSpPr>
-          <p:cNvPr id="24" name="Rectangle 23"/>
-          <p:cNvSpPr/>
-          <p:nvPr/>
-        </p:nvSpPr>
-        <p:spPr>
-          <a:xfrm>
-            <a:off x="548640" y="4099559"/>
-            <a:ext cx="68580" cy="601980"/>
-          </a:xfrm>
-          <a:prstGeom prst="rect">
-            <a:avLst/>
-          </a:prstGeom>
-          <a:solidFill>
-            <a:srgbClr val="E30622"/>
-          </a:solidFill>
-          <a:ln>
-            <a:noFill/>
-          </a:ln>
-          <a:effectLst/>
-        </p:spPr>
-        <p:style>
-          <a:lnRef idx="1">
-            <a:schemeClr val="accent1"/>
-          </a:lnRef>
-          <a:fillRef idx="3">
-            <a:schemeClr val="accent1"/>
-          </a:fillRef>
-          <a:effectRef idx="2">
-            <a:schemeClr val="accent1"/>
-          </a:effectRef>
-          <a:fontRef idx="minor">
-            <a:schemeClr val="lt1"/>
-          </a:fontRef>
-        </p:style>
-        <p:txBody>
-          <a:bodyPr rtlCol="0" anchor="ctr"/>
-          <a:lstStyle/>
-          <a:p>
-            <a:pPr algn="ctr"/>
-          </a:p>
-        </p:txBody>
-      </p:sp>
-      <p:pic>
-        <p:nvPicPr>
-          <p:cNvPr id="25" name="Picture 24" descr="circle-check.png"/>
-          <p:cNvPicPr>
-            <a:picLocks noChangeAspect="1"/>
-          </p:cNvPicPr>
-          <p:nvPr/>
-        </p:nvPicPr>
-        <p:blipFill>
-          <a:blip r:embed="rId3"/>
-          <a:stretch>
-            <a:fillRect/>
-          </a:stretch>
-        </p:blipFill>
-        <p:spPr>
-          <a:xfrm>
-            <a:off x="777240" y="4227575"/>
-            <a:ext cx="256032" cy="256032"/>
-          </a:xfrm>
-          <a:prstGeom prst="rect">
-            <a:avLst/>
-          </a:prstGeom>
-        </p:spPr>
-      </p:pic>
-      <p:sp>
-        <p:nvSpPr>
-          <p:cNvPr id="26" name="TextBox 25"/>
-          <p:cNvSpPr txBox="1"/>
-          <p:nvPr/>
-        </p:nvSpPr>
-        <p:spPr>
-          <a:xfrm>
-            <a:off x="1143000" y="4163567"/>
-            <a:ext cx="10058400" cy="292608"/>
-          </a:xfrm>
-          <a:prstGeom prst="rect">
-            <a:avLst/>
-          </a:prstGeom>
-          <a:noFill/>
-        </p:spPr>
-        <p:txBody>
-          <a:bodyPr wrap="square" anchor="t">
-            <a:spAutoFit/>
-          </a:bodyPr>
-          <a:lstStyle/>
-          <a:p>
-            <a:pPr algn="l">
-              <a:lnSpc>
-                <a:spcPct val="100000"/>
-              </a:lnSpc>
-            </a:pPr>
-            <a:r>
-              <a:rPr sz="1150" b="1">
-                <a:solidFill>
-                  <a:srgbClr val="A6001A"/>
-                </a:solidFill>
-                <a:latin typeface="Calibri"/>
-              </a:rPr>
-              <a:t>Personel maliyeti çok mu arttı?</a:t>
-            </a:r>
-          </a:p>
-        </p:txBody>
-      </p:sp>
-      <p:sp>
-        <p:nvSpPr>
-          <p:cNvPr id="27" name="TextBox 26"/>
-          <p:cNvSpPr txBox="1"/>
-          <p:nvPr/>
-        </p:nvSpPr>
-        <p:spPr>
-          <a:xfrm>
-            <a:off x="1143000" y="4447031"/>
-            <a:ext cx="10058400" cy="217932"/>
-          </a:xfrm>
-          <a:prstGeom prst="rect">
-            <a:avLst/>
-          </a:prstGeom>
-          <a:noFill/>
-        </p:spPr>
-        <p:txBody>
-          <a:bodyPr wrap="square" anchor="t">
-            <a:spAutoFit/>
-          </a:bodyPr>
-          <a:lstStyle/>
-          <a:p>
-            <a:pPr algn="l">
-              <a:lnSpc>
-                <a:spcPct val="106000"/>
-              </a:lnSpc>
-            </a:pPr>
-            <a:r>
-              <a:rPr sz="950" b="0">
-                <a:solidFill>
-                  <a:srgbClr val="333333"/>
-                </a:solidFill>
-                <a:latin typeface="Calibri"/>
-              </a:rPr>
-              <a:t>Maliyet +%51,5 artmıştır; artışın ana kaynağı kişi başına ücret (+%38,3), kadro artışı değil. Cironun içindeki personel yükü ise 0,70 puan GERİLEMİŞTİR: %12,85 → %12,15.</a:t>
-            </a:r>
-          </a:p>
-        </p:txBody>
-      </p:sp>
-      <p:sp>
-        <p:nvSpPr>
-          <p:cNvPr id="28" name="Rectangle 27"/>
-          <p:cNvSpPr/>
-          <p:nvPr/>
-        </p:nvSpPr>
-        <p:spPr>
-          <a:xfrm>
-            <a:off x="548640" y="4792979"/>
-            <a:ext cx="11018520" cy="601980"/>
-          </a:xfrm>
-          <a:prstGeom prst="rect">
-            <a:avLst/>
-          </a:prstGeom>
-          <a:solidFill>
-            <a:srgbClr val="FFFFFF"/>
-          </a:solidFill>
-          <a:ln w="12700">
-            <a:solidFill>
-              <a:srgbClr val="DCDCDC"/>
-            </a:solidFill>
-          </a:ln>
-          <a:effectLst/>
-        </p:spPr>
-        <p:style>
-          <a:lnRef idx="1">
-            <a:schemeClr val="accent1"/>
-          </a:lnRef>
-          <a:fillRef idx="3">
-            <a:schemeClr val="accent1"/>
-          </a:fillRef>
-          <a:effectRef idx="2">
-            <a:schemeClr val="accent1"/>
-          </a:effectRef>
-          <a:fontRef idx="minor">
-            <a:schemeClr val="lt1"/>
-          </a:fontRef>
-        </p:style>
-        <p:txBody>
-          <a:bodyPr rtlCol="0" anchor="ctr"/>
-          <a:lstStyle/>
-          <a:p>
-            <a:pPr algn="ctr"/>
-          </a:p>
-        </p:txBody>
-      </p:sp>
-      <p:sp>
-        <p:nvSpPr>
-          <p:cNvPr id="29" name="Rectangle 28"/>
-          <p:cNvSpPr/>
-          <p:nvPr/>
-        </p:nvSpPr>
-        <p:spPr>
-          <a:xfrm>
-            <a:off x="548640" y="4792979"/>
-            <a:ext cx="68580" cy="601980"/>
-          </a:xfrm>
-          <a:prstGeom prst="rect">
-            <a:avLst/>
-          </a:prstGeom>
-          <a:solidFill>
-            <a:srgbClr val="E30622"/>
-          </a:solidFill>
-          <a:ln>
-            <a:noFill/>
-          </a:ln>
-          <a:effectLst/>
-        </p:spPr>
-        <p:style>
-          <a:lnRef idx="1">
-            <a:schemeClr val="accent1"/>
-          </a:lnRef>
-          <a:fillRef idx="3">
-            <a:schemeClr val="accent1"/>
-          </a:fillRef>
-          <a:effectRef idx="2">
-            <a:schemeClr val="accent1"/>
-          </a:effectRef>
-          <a:fontRef idx="minor">
-            <a:schemeClr val="lt1"/>
-          </a:fontRef>
-        </p:style>
-        <p:txBody>
-          <a:bodyPr rtlCol="0" anchor="ctr"/>
-          <a:lstStyle/>
-          <a:p>
-            <a:pPr algn="ctr"/>
-          </a:p>
-        </p:txBody>
-      </p:sp>
-      <p:pic>
-        <p:nvPicPr>
-          <p:cNvPr id="30" name="Picture 29" descr="circle-check.png"/>
-          <p:cNvPicPr>
-            <a:picLocks noChangeAspect="1"/>
-          </p:cNvPicPr>
-          <p:nvPr/>
-        </p:nvPicPr>
-        <p:blipFill>
-          <a:blip r:embed="rId3"/>
-          <a:stretch>
-            <a:fillRect/>
-          </a:stretch>
-        </p:blipFill>
-        <p:spPr>
-          <a:xfrm>
-            <a:off x="777240" y="4920995"/>
-            <a:ext cx="256032" cy="256032"/>
-          </a:xfrm>
-          <a:prstGeom prst="rect">
-            <a:avLst/>
-          </a:prstGeom>
-        </p:spPr>
-      </p:pic>
-      <p:sp>
-        <p:nvSpPr>
-          <p:cNvPr id="31" name="TextBox 30"/>
-          <p:cNvSpPr txBox="1"/>
-          <p:nvPr/>
-        </p:nvSpPr>
-        <p:spPr>
-          <a:xfrm>
-            <a:off x="1143000" y="4856987"/>
-            <a:ext cx="10058400" cy="292608"/>
-          </a:xfrm>
-          <a:prstGeom prst="rect">
-            <a:avLst/>
-          </a:prstGeom>
-          <a:noFill/>
-        </p:spPr>
-        <p:txBody>
-          <a:bodyPr wrap="square" anchor="t">
-            <a:spAutoFit/>
-          </a:bodyPr>
-          <a:lstStyle/>
-          <a:p>
-            <a:pPr algn="l">
-              <a:lnSpc>
-                <a:spcPct val="100000"/>
-              </a:lnSpc>
-            </a:pPr>
-            <a:r>
-              <a:rPr sz="1150" b="1">
-                <a:solidFill>
-                  <a:srgbClr val="A6001A"/>
-                </a:solidFill>
-                <a:latin typeface="Calibri"/>
-              </a:rPr>
-              <a:t>Ağustos ayında ivme düşüşü var mı?</a:t>
-            </a:r>
-          </a:p>
-        </p:txBody>
-      </p:sp>
-      <p:sp>
-        <p:nvSpPr>
-          <p:cNvPr id="32" name="TextBox 31"/>
-          <p:cNvSpPr txBox="1"/>
-          <p:nvPr/>
-        </p:nvSpPr>
-        <p:spPr>
-          <a:xfrm>
-            <a:off x="1143000" y="5140451"/>
-            <a:ext cx="10058400" cy="217932"/>
-          </a:xfrm>
-          <a:prstGeom prst="rect">
-            <a:avLst/>
-          </a:prstGeom>
-          <a:noFill/>
-        </p:spPr>
-        <p:txBody>
-          <a:bodyPr wrap="square" anchor="t">
-            <a:spAutoFit/>
-          </a:bodyPr>
-          <a:lstStyle/>
-          <a:p>
-            <a:pPr algn="l">
-              <a:lnSpc>
-                <a:spcPct val="106000"/>
-              </a:lnSpc>
-            </a:pPr>
-            <a:r>
-              <a:rPr sz="950" b="0">
-                <a:solidFill>
-                  <a:srgbClr val="333333"/>
-                </a:solidFill>
-                <a:latin typeface="Calibri"/>
-              </a:rPr>
-              <a:t>Takvim etkisi: okullar 2025'te 8 Eylül, 2026'da 14 Eylül açıldı — sezon 6 gün geriye kaydı. Açılışa hizalanınca haftalık büyüme %65–79 bandında düz seyrediyor.</a:t>
-            </a:r>
-          </a:p>
-        </p:txBody>
-      </p:sp>
-      <p:sp>
-        <p:nvSpPr>
-          <p:cNvPr id="33" name="TextBox 32"/>
           <p:cNvSpPr txBox="1"/>
           <p:nvPr/>
         </p:nvSpPr>
@@ -19879,14 +20295,14 @@
                 </a:solidFill>
                 <a:latin typeface="Calibri"/>
               </a:rPr>
-              <a:t>* Kapsam: üç POS mağazası — FSM · Özlüce · İst. Yolu · Dönem: 01.01 – 31.08 (her iki yıl, kümülatif) (kurumsal/mağaza kıyası) · hizalı dönem: 01.07 – 25.08.2025 (2025) · 07.07 – 31.08.2026 (2026), her iki yıl 56 gün, okul açılışına hizalı</a:t>
+              <a:t>* İK'da düzeltme bekleyen 1 kayıt: 2025 girişli bir sezonluk personel çıkış tarihi işlenmediği için 31.08'de aktif görünüyor; düzeltilince sezonluk 62 → 61 olur (rakamlar İK'nın resmi kaydıyla birebir tutulsun diye şimdilik düzeltilmedi) · Kapsam: beş mağaza (FSM · Özlüce · İst. Yolu · Heykel · Şura) · Kohortlar okul açılışına göre AYNI ofsette kesildi (T−12: 27.08.2025 ve 02.09.2026) · İş hacmi üç POS mağazası · ⚠ "açılıştan kaç gün önce" ölçüsü açılış 6 gün kaydığı için 2026'yı mekanik olarak erken gösterir, takvim ölçüsü esastır.</a:t>
             </a:r>
           </a:p>
         </p:txBody>
       </p:sp>
       <p:sp>
         <p:nvSpPr>
-          <p:cNvPr id="34" name="TextBox 33"/>
+          <p:cNvPr id="23" name="TextBox 22"/>
           <p:cNvSpPr txBox="1"/>
           <p:nvPr/>
         </p:nvSpPr>
@@ -19976,7 +20392,7 @@
           <a:lstStyle/>
           <a:p>
             <a:r>
-              <a:t>İyileştirme Alanı</a:t>
+              <a:t>Yöntem ve Açıklamalar</a:t>
             </a:r>
           </a:p>
         </p:txBody>
@@ -19989,8 +20405,8 @@
         </p:nvSpPr>
         <p:spPr>
           <a:xfrm>
-            <a:off x="548640" y="1371600"/>
-            <a:ext cx="5394960" cy="2286000"/>
+            <a:off x="548640" y="1325880"/>
+            <a:ext cx="11018520" cy="601980"/>
           </a:xfrm>
           <a:prstGeom prst="rect">
             <a:avLst/>
@@ -20035,14 +20451,14 @@
         </p:nvSpPr>
         <p:spPr>
           <a:xfrm>
-            <a:off x="548640" y="1371600"/>
-            <a:ext cx="68580" cy="2286000"/>
+            <a:off x="548640" y="1325880"/>
+            <a:ext cx="68580" cy="601980"/>
           </a:xfrm>
           <a:prstGeom prst="rect">
             <a:avLst/>
           </a:prstGeom>
           <a:solidFill>
-            <a:srgbClr val="A6001A"/>
+            <a:srgbClr val="E30622"/>
           </a:solidFill>
           <a:ln>
             <a:noFill/>
@@ -20073,7 +20489,7 @@
       </p:sp>
       <p:pic>
         <p:nvPicPr>
-          <p:cNvPr id="5" name="Picture 4" descr="alert-triangle.png"/>
+          <p:cNvPr id="5" name="Picture 4" descr="circle-check.png"/>
           <p:cNvPicPr>
             <a:picLocks noChangeAspect="1"/>
           </p:cNvPicPr>
@@ -20087,8 +20503,8 @@
         </p:blipFill>
         <p:spPr>
           <a:xfrm>
-            <a:off x="5468112" y="1536192"/>
-            <a:ext cx="274320" cy="274320"/>
+            <a:off x="777240" y="1453895"/>
+            <a:ext cx="256032" cy="256032"/>
           </a:xfrm>
           <a:prstGeom prst="rect">
             <a:avLst/>
@@ -20103,8 +20519,8 @@
         </p:nvSpPr>
         <p:spPr>
           <a:xfrm>
-            <a:off x="777240" y="1481328"/>
-            <a:ext cx="4572000" cy="329184"/>
+            <a:off x="1143000" y="1389888"/>
+            <a:ext cx="10058400" cy="292608"/>
           </a:xfrm>
           <a:prstGeom prst="rect">
             <a:avLst/>
@@ -20123,66 +20539,27 @@
               </a:lnSpc>
             </a:pPr>
             <a:r>
-              <a:rPr sz="1000" b="1">
-                <a:solidFill>
-                  <a:srgbClr val="6E6E6E"/>
-                </a:solidFill>
-                <a:latin typeface="Calibri"/>
-              </a:rPr>
-              <a:t>KADROLU ALIMDA KALMA ORANI</a:t>
-            </a:r>
-          </a:p>
-        </p:txBody>
-      </p:sp>
-      <p:sp>
-        <p:nvSpPr>
-          <p:cNvPr id="7" name="TextBox 6"/>
-          <p:cNvSpPr txBox="1"/>
-          <p:nvPr/>
-        </p:nvSpPr>
-        <p:spPr>
-          <a:xfrm>
-            <a:off x="777240" y="1847088"/>
-            <a:ext cx="4937760" cy="786384"/>
-          </a:xfrm>
-          <a:prstGeom prst="rect">
-            <a:avLst/>
-          </a:prstGeom>
-          <a:noFill/>
-        </p:spPr>
-        <p:txBody>
-          <a:bodyPr wrap="square" anchor="t">
-            <a:spAutoFit/>
-          </a:bodyPr>
-          <a:lstStyle/>
-          <a:p>
-            <a:pPr algn="l">
-              <a:lnSpc>
-                <a:spcPct val="100000"/>
-              </a:lnSpc>
-            </a:pPr>
-            <a:r>
-              <a:rPr sz="3000" b="1">
+              <a:rPr sz="1150" b="1">
                 <a:solidFill>
                   <a:srgbClr val="A6001A"/>
                 </a:solidFill>
                 <a:latin typeface="Calibri"/>
               </a:rPr>
-              <a:t>%95,7 → %75,0</a:t>
+              <a:t>Büyüme kurumsal kanaldan mı geldi?</a:t>
             </a:r>
           </a:p>
         </p:txBody>
       </p:sp>
       <p:sp>
         <p:nvSpPr>
-          <p:cNvPr id="8" name="TextBox 7"/>
+          <p:cNvPr id="7" name="TextBox 6"/>
           <p:cNvSpPr txBox="1"/>
           <p:nvPr/>
         </p:nvSpPr>
         <p:spPr>
           <a:xfrm>
-            <a:off x="777240" y="2670048"/>
-            <a:ext cx="4937760" cy="868680"/>
+            <a:off x="1143000" y="1673352"/>
+            <a:ext cx="10058400" cy="217932"/>
           </a:xfrm>
           <a:prstGeom prst="rect">
             <a:avLst/>
@@ -20197,31 +20574,31 @@
           <a:p>
             <a:pPr algn="l">
               <a:lnSpc>
-                <a:spcPct val="110000"/>
+                <a:spcPct val="106000"/>
               </a:lnSpc>
             </a:pPr>
             <a:r>
-              <a:rPr sz="1050" b="0">
+              <a:rPr sz="950" b="0">
                 <a:solidFill>
                   <a:srgbClr val="333333"/>
                 </a:solidFill>
                 <a:latin typeface="Calibri"/>
               </a:rPr>
-              <a:t>İlk 14 günü tamamlama oranı (22/23 → 21/28). 32 alımdan 10'si kesim tarihine kadar ayrılmıştır (önceki yıl 24 alımdan 2). Aynı pozisyonun iki kez doldurulması maliyet yaratmaktadır.</a:t>
+              <a:t>Tersi: Sınav Okulları küçüldü. Ocak–Ağustos cirosu 136,2 → 105,6 milyon TL (−%22,4). Mağaza tarafı +%54,9 büyüdü — büyümenin tamamı raftan geldi.</a:t>
             </a:r>
           </a:p>
         </p:txBody>
       </p:sp>
       <p:sp>
         <p:nvSpPr>
-          <p:cNvPr id="9" name="Rectangle 8"/>
+          <p:cNvPr id="8" name="Rectangle 7"/>
           <p:cNvSpPr/>
           <p:nvPr/>
         </p:nvSpPr>
         <p:spPr>
           <a:xfrm>
-            <a:off x="6172200" y="1371600"/>
-            <a:ext cx="5394960" cy="2286000"/>
+            <a:off x="548640" y="2019299"/>
+            <a:ext cx="11018520" cy="601980"/>
           </a:xfrm>
           <a:prstGeom prst="rect">
             <a:avLst/>
@@ -20260,20 +20637,20 @@
       </p:sp>
       <p:sp>
         <p:nvSpPr>
-          <p:cNvPr id="10" name="Rectangle 9"/>
+          <p:cNvPr id="9" name="Rectangle 8"/>
           <p:cNvSpPr/>
           <p:nvPr/>
         </p:nvSpPr>
         <p:spPr>
           <a:xfrm>
-            <a:off x="6172200" y="1371600"/>
-            <a:ext cx="68580" cy="2286000"/>
+            <a:off x="548640" y="2019299"/>
+            <a:ext cx="68580" cy="601980"/>
           </a:xfrm>
           <a:prstGeom prst="rect">
             <a:avLst/>
           </a:prstGeom>
           <a:solidFill>
-            <a:srgbClr val="9A9A9A"/>
+            <a:srgbClr val="E30622"/>
           </a:solidFill>
           <a:ln>
             <a:noFill/>
@@ -20304,22 +20681,22 @@
       </p:sp>
       <p:pic>
         <p:nvPicPr>
-          <p:cNvPr id="11" name="Picture 10" descr="users.png"/>
+          <p:cNvPr id="10" name="Picture 9" descr="circle-check.png"/>
           <p:cNvPicPr>
             <a:picLocks noChangeAspect="1"/>
           </p:cNvPicPr>
           <p:nvPr/>
         </p:nvPicPr>
         <p:blipFill>
-          <a:blip r:embed="rId4"/>
+          <a:blip r:embed="rId3"/>
           <a:stretch>
             <a:fillRect/>
           </a:stretch>
         </p:blipFill>
         <p:spPr>
           <a:xfrm>
-            <a:off x="11091672" y="1536192"/>
-            <a:ext cx="274320" cy="274320"/>
+            <a:off x="777240" y="2147316"/>
+            <a:ext cx="256032" cy="256032"/>
           </a:xfrm>
           <a:prstGeom prst="rect">
             <a:avLst/>
@@ -20328,14 +20705,14 @@
       </p:pic>
       <p:sp>
         <p:nvSpPr>
-          <p:cNvPr id="12" name="TextBox 11"/>
+          <p:cNvPr id="11" name="TextBox 10"/>
           <p:cNvSpPr txBox="1"/>
           <p:nvPr/>
         </p:nvSpPr>
         <p:spPr>
           <a:xfrm>
-            <a:off x="6400800" y="1481328"/>
-            <a:ext cx="4572000" cy="329184"/>
+            <a:off x="1143000" y="2083307"/>
+            <a:ext cx="10058400" cy="292608"/>
           </a:xfrm>
           <a:prstGeom prst="rect">
             <a:avLst/>
@@ -20354,27 +20731,27 @@
               </a:lnSpc>
             </a:pPr>
             <a:r>
-              <a:rPr sz="1000" b="1">
+              <a:rPr sz="1150" b="1">
                 <a:solidFill>
-                  <a:srgbClr val="6E6E6E"/>
+                  <a:srgbClr val="A6001A"/>
                 </a:solidFill>
                 <a:latin typeface="Calibri"/>
               </a:rPr>
-              <a:t>SEZONLUK KADRODA KALMA ORANI</a:t>
+              <a:t>Ciro artışı enflasyon kaynaklı mı?</a:t>
             </a:r>
           </a:p>
         </p:txBody>
       </p:sp>
       <p:sp>
         <p:nvSpPr>
-          <p:cNvPr id="13" name="TextBox 12"/>
+          <p:cNvPr id="12" name="TextBox 11"/>
           <p:cNvSpPr txBox="1"/>
           <p:nvPr/>
         </p:nvSpPr>
         <p:spPr>
           <a:xfrm>
-            <a:off x="6400800" y="1847088"/>
-            <a:ext cx="4937760" cy="786384"/>
+            <a:off x="1143000" y="2366771"/>
+            <a:ext cx="10058400" cy="217932"/>
           </a:xfrm>
           <a:prstGeom prst="rect">
             <a:avLst/>
@@ -20389,80 +20766,41 @@
           <a:p>
             <a:pPr algn="l">
               <a:lnSpc>
-                <a:spcPct val="100000"/>
+                <a:spcPct val="106000"/>
               </a:lnSpc>
             </a:pPr>
             <a:r>
-              <a:rPr sz="3000" b="1">
-                <a:solidFill>
-                  <a:srgbClr val="9A9A9A"/>
-                </a:solidFill>
-                <a:latin typeface="Calibri"/>
-              </a:rPr>
-              <a:t>%93,9 → %95,1</a:t>
-            </a:r>
-          </a:p>
-        </p:txBody>
-      </p:sp>
-      <p:sp>
-        <p:nvSpPr>
-          <p:cNvPr id="14" name="TextBox 13"/>
-          <p:cNvSpPr txBox="1"/>
-          <p:nvPr/>
-        </p:nvSpPr>
-        <p:spPr>
-          <a:xfrm>
-            <a:off x="6400800" y="2670048"/>
-            <a:ext cx="4937760" cy="868680"/>
-          </a:xfrm>
-          <a:prstGeom prst="rect">
-            <a:avLst/>
-          </a:prstGeom>
-          <a:noFill/>
-        </p:spPr>
-        <p:txBody>
-          <a:bodyPr wrap="square" anchor="t">
-            <a:spAutoFit/>
-          </a:bodyPr>
-          <a:lstStyle/>
-          <a:p>
-            <a:pPr algn="l">
-              <a:lnSpc>
-                <a:spcPct val="110000"/>
-              </a:lnSpc>
-            </a:pPr>
-            <a:r>
-              <a:rPr sz="1050" b="0">
+              <a:rPr sz="950" b="0">
                 <a:solidFill>
                   <a:srgbClr val="333333"/>
                 </a:solidFill>
                 <a:latin typeface="Calibri"/>
               </a:rPr>
-              <a:t>Sezonluk kadroda kalma oranı yükselmiştir (46/49 → 39/41). Sorun sezonluk alımda değil, kadrolu alımın ilk haftasındadır.</a:t>
+              <a:t>Kısmen doğru: eşleşen ürünlerde fiyat endeksi +%19,8. Bu yüzden savunma ciroya değil ADEDE dayanıyor: ürün adedi +%34,9 ve adet fiyattan etkilenmez.</a:t>
             </a:r>
           </a:p>
         </p:txBody>
       </p:sp>
       <p:sp>
         <p:nvSpPr>
-          <p:cNvPr id="15" name="Rounded Rectangle 14"/>
+          <p:cNvPr id="13" name="Rectangle 12"/>
           <p:cNvSpPr/>
           <p:nvPr/>
         </p:nvSpPr>
         <p:spPr>
           <a:xfrm>
-            <a:off x="548640" y="3840480"/>
-            <a:ext cx="11018520" cy="1600200"/>
-          </a:xfrm>
-          <a:prstGeom prst="roundRect">
+            <a:off x="548640" y="2712719"/>
+            <a:ext cx="11018520" cy="601980"/>
+          </a:xfrm>
+          <a:prstGeom prst="rect">
             <a:avLst/>
           </a:prstGeom>
           <a:solidFill>
-            <a:srgbClr val="F2F2F2"/>
+            <a:srgbClr val="FFFFFF"/>
           </a:solidFill>
-          <a:ln w="19050">
+          <a:ln w="12700">
             <a:solidFill>
-              <a:srgbClr val="E30622"/>
+              <a:srgbClr val="DCDCDC"/>
             </a:solidFill>
           </a:ln>
           <a:effectLst/>
@@ -20491,14 +20829,82 @@
       </p:sp>
       <p:sp>
         <p:nvSpPr>
+          <p:cNvPr id="14" name="Rectangle 13"/>
+          <p:cNvSpPr/>
+          <p:nvPr/>
+        </p:nvSpPr>
+        <p:spPr>
+          <a:xfrm>
+            <a:off x="548640" y="2712719"/>
+            <a:ext cx="68580" cy="601980"/>
+          </a:xfrm>
+          <a:prstGeom prst="rect">
+            <a:avLst/>
+          </a:prstGeom>
+          <a:solidFill>
+            <a:srgbClr val="E30622"/>
+          </a:solidFill>
+          <a:ln>
+            <a:noFill/>
+          </a:ln>
+          <a:effectLst/>
+        </p:spPr>
+        <p:style>
+          <a:lnRef idx="1">
+            <a:schemeClr val="accent1"/>
+          </a:lnRef>
+          <a:fillRef idx="3">
+            <a:schemeClr val="accent1"/>
+          </a:fillRef>
+          <a:effectRef idx="2">
+            <a:schemeClr val="accent1"/>
+          </a:effectRef>
+          <a:fontRef idx="minor">
+            <a:schemeClr val="lt1"/>
+          </a:fontRef>
+        </p:style>
+        <p:txBody>
+          <a:bodyPr rtlCol="0" anchor="ctr"/>
+          <a:lstStyle/>
+          <a:p>
+            <a:pPr algn="ctr"/>
+          </a:p>
+        </p:txBody>
+      </p:sp>
+      <p:pic>
+        <p:nvPicPr>
+          <p:cNvPr id="15" name="Picture 14" descr="circle-check.png"/>
+          <p:cNvPicPr>
+            <a:picLocks noChangeAspect="1"/>
+          </p:cNvPicPr>
+          <p:nvPr/>
+        </p:nvPicPr>
+        <p:blipFill>
+          <a:blip r:embed="rId3"/>
+          <a:stretch>
+            <a:fillRect/>
+          </a:stretch>
+        </p:blipFill>
+        <p:spPr>
+          <a:xfrm>
+            <a:off x="777240" y="2840736"/>
+            <a:ext cx="256032" cy="256032"/>
+          </a:xfrm>
+          <a:prstGeom prst="rect">
+            <a:avLst/>
+          </a:prstGeom>
+        </p:spPr>
+      </p:pic>
+      <p:sp>
+        <p:nvSpPr>
           <p:cNvPr id="16" name="TextBox 15"/>
           <p:cNvSpPr txBox="1"/>
           <p:nvPr/>
         </p:nvSpPr>
         <p:spPr>
           <a:xfrm>
-            <a:off x="822960" y="3977639"/>
-            <a:ext cx="10515600" cy="1371600"/>
+            <a:off x="1143000" y="2776727"/>
+            <a:ext cx="10058400" cy="292608"/>
           </a:xfrm>
           <a:prstGeom prst="rect">
             <a:avLst/>
@@ -20513,42 +20919,639 @@
           <a:p>
             <a:pPr algn="l">
               <a:lnSpc>
-                <a:spcPct val="125000"/>
+                <a:spcPct val="100000"/>
               </a:lnSpc>
             </a:pPr>
             <a:r>
-              <a:rPr sz="1350" b="1">
+              <a:rPr sz="1150" b="1">
                 <a:solidFill>
                   <a:srgbClr val="A6001A"/>
                 </a:solidFill>
                 <a:latin typeface="Calibri"/>
               </a:rPr>
-              <a:t>Planlanan Aksiyonlar</a:t>
+              <a:t>Kasa sistemi değişti, karşılaştırma geçerli mi?</a:t>
             </a:r>
           </a:p>
+        </p:txBody>
+      </p:sp>
+      <p:sp>
+        <p:nvSpPr>
+          <p:cNvPr id="17" name="TextBox 16"/>
+          <p:cNvSpPr txBox="1"/>
+          <p:nvPr/>
+        </p:nvSpPr>
+        <p:spPr>
+          <a:xfrm>
+            <a:off x="1143000" y="3060191"/>
+            <a:ext cx="10058400" cy="217932"/>
+          </a:xfrm>
+          <a:prstGeom prst="rect">
+            <a:avLst/>
+          </a:prstGeom>
+          <a:noFill/>
+        </p:spPr>
+        <p:txBody>
+          <a:bodyPr wrap="square" anchor="t">
+            <a:spAutoFit/>
+          </a:bodyPr>
+          <a:lstStyle/>
           <a:p>
             <a:pPr algn="l">
               <a:lnSpc>
-                <a:spcPct val="125000"/>
+                <a:spcPct val="106000"/>
               </a:lnSpc>
             </a:pPr>
             <a:r>
-              <a:rPr sz="1200" b="0">
+              <a:rPr sz="950" b="0">
                 <a:solidFill>
                   <a:srgbClr val="333333"/>
                 </a:solidFill>
                 <a:latin typeface="Calibri"/>
               </a:rPr>
-              <a:t>• En bozuk üç nokta: Özlüce, Heykel, Merkez Depo → ilk hafta karşılama protokolü.
-• İdari İşler pozisyonunda ücret–vardiya revizyonu.
-• Ölçüt: gelecek sezon Eylül öncesi kayıp %20'den %12'ye (2025 seviyesi).</a:t>
+              <a:t>Bu yüzden ölçüm POS'tan değil ERP'den (DerinSIS) alındı — iki yılda da aynı kaynak, aynı belge tipi. Temmuz 2025 kasa geçişi ölçüye girmiyor.</a:t>
             </a:r>
           </a:p>
         </p:txBody>
       </p:sp>
       <p:sp>
         <p:nvSpPr>
-          <p:cNvPr id="17" name="TextBox 16"/>
+          <p:cNvPr id="18" name="Rectangle 17"/>
+          <p:cNvSpPr/>
+          <p:nvPr/>
+        </p:nvSpPr>
+        <p:spPr>
+          <a:xfrm>
+            <a:off x="548640" y="3406139"/>
+            <a:ext cx="11018520" cy="601980"/>
+          </a:xfrm>
+          <a:prstGeom prst="rect">
+            <a:avLst/>
+          </a:prstGeom>
+          <a:solidFill>
+            <a:srgbClr val="FFFFFF"/>
+          </a:solidFill>
+          <a:ln w="12700">
+            <a:solidFill>
+              <a:srgbClr val="DCDCDC"/>
+            </a:solidFill>
+          </a:ln>
+          <a:effectLst/>
+        </p:spPr>
+        <p:style>
+          <a:lnRef idx="1">
+            <a:schemeClr val="accent1"/>
+          </a:lnRef>
+          <a:fillRef idx="3">
+            <a:schemeClr val="accent1"/>
+          </a:fillRef>
+          <a:effectRef idx="2">
+            <a:schemeClr val="accent1"/>
+          </a:effectRef>
+          <a:fontRef idx="minor">
+            <a:schemeClr val="lt1"/>
+          </a:fontRef>
+        </p:style>
+        <p:txBody>
+          <a:bodyPr rtlCol="0" anchor="ctr"/>
+          <a:lstStyle/>
+          <a:p>
+            <a:pPr algn="ctr"/>
+          </a:p>
+        </p:txBody>
+      </p:sp>
+      <p:sp>
+        <p:nvSpPr>
+          <p:cNvPr id="19" name="Rectangle 18"/>
+          <p:cNvSpPr/>
+          <p:nvPr/>
+        </p:nvSpPr>
+        <p:spPr>
+          <a:xfrm>
+            <a:off x="548640" y="3406139"/>
+            <a:ext cx="68580" cy="601980"/>
+          </a:xfrm>
+          <a:prstGeom prst="rect">
+            <a:avLst/>
+          </a:prstGeom>
+          <a:solidFill>
+            <a:srgbClr val="E30622"/>
+          </a:solidFill>
+          <a:ln>
+            <a:noFill/>
+          </a:ln>
+          <a:effectLst/>
+        </p:spPr>
+        <p:style>
+          <a:lnRef idx="1">
+            <a:schemeClr val="accent1"/>
+          </a:lnRef>
+          <a:fillRef idx="3">
+            <a:schemeClr val="accent1"/>
+          </a:fillRef>
+          <a:effectRef idx="2">
+            <a:schemeClr val="accent1"/>
+          </a:effectRef>
+          <a:fontRef idx="minor">
+            <a:schemeClr val="lt1"/>
+          </a:fontRef>
+        </p:style>
+        <p:txBody>
+          <a:bodyPr rtlCol="0" anchor="ctr"/>
+          <a:lstStyle/>
+          <a:p>
+            <a:pPr algn="ctr"/>
+          </a:p>
+        </p:txBody>
+      </p:sp>
+      <p:pic>
+        <p:nvPicPr>
+          <p:cNvPr id="20" name="Picture 19" descr="circle-check.png"/>
+          <p:cNvPicPr>
+            <a:picLocks noChangeAspect="1"/>
+          </p:cNvPicPr>
+          <p:nvPr/>
+        </p:nvPicPr>
+        <p:blipFill>
+          <a:blip r:embed="rId3"/>
+          <a:stretch>
+            <a:fillRect/>
+          </a:stretch>
+        </p:blipFill>
+        <p:spPr>
+          <a:xfrm>
+            <a:off x="777240" y="3534156"/>
+            <a:ext cx="256032" cy="256032"/>
+          </a:xfrm>
+          <a:prstGeom prst="rect">
+            <a:avLst/>
+          </a:prstGeom>
+        </p:spPr>
+      </p:pic>
+      <p:sp>
+        <p:nvSpPr>
+          <p:cNvPr id="21" name="TextBox 20"/>
+          <p:cNvSpPr txBox="1"/>
+          <p:nvPr/>
+        </p:nvSpPr>
+        <p:spPr>
+          <a:xfrm>
+            <a:off x="1143000" y="3470147"/>
+            <a:ext cx="10058400" cy="292608"/>
+          </a:xfrm>
+          <a:prstGeom prst="rect">
+            <a:avLst/>
+          </a:prstGeom>
+          <a:noFill/>
+        </p:spPr>
+        <p:txBody>
+          <a:bodyPr wrap="square" anchor="t">
+            <a:spAutoFit/>
+          </a:bodyPr>
+          <a:lstStyle/>
+          <a:p>
+            <a:pPr algn="l">
+              <a:lnSpc>
+                <a:spcPct val="100000"/>
+              </a:lnSpc>
+            </a:pPr>
+            <a:r>
+              <a:rPr sz="1150" b="1">
+                <a:solidFill>
+                  <a:srgbClr val="A6001A"/>
+                </a:solidFill>
+                <a:latin typeface="Calibri"/>
+              </a:rPr>
+              <a:t>Sezonluk personel erken mi alındı?</a:t>
+            </a:r>
+          </a:p>
+        </p:txBody>
+      </p:sp>
+      <p:sp>
+        <p:nvSpPr>
+          <p:cNvPr id="22" name="TextBox 21"/>
+          <p:cNvSpPr txBox="1"/>
+          <p:nvPr/>
+        </p:nvSpPr>
+        <p:spPr>
+          <a:xfrm>
+            <a:off x="1143000" y="3753611"/>
+            <a:ext cx="10058400" cy="217932"/>
+          </a:xfrm>
+          <a:prstGeom prst="rect">
+            <a:avLst/>
+          </a:prstGeom>
+          <a:noFill/>
+        </p:spPr>
+        <p:txBody>
+          <a:bodyPr wrap="square" anchor="t">
+            <a:spAutoFit/>
+          </a:bodyPr>
+          <a:lstStyle/>
+          <a:p>
+            <a:pPr algn="l">
+              <a:lnSpc>
+                <a:spcPct val="106000"/>
+              </a:lnSpc>
+            </a:pPr>
+            <a:r>
+              <a:rPr sz="950" b="0">
+                <a:solidFill>
+                  <a:srgbClr val="333333"/>
+                </a:solidFill>
+                <a:latin typeface="Calibri"/>
+              </a:rPr>
+              <a:t>Hayır: takvim ölçüsünde 2026 alımı ortalama 2,5 gün DAHA GEÇ; Temmuz ve öncesi alım 6 kişiden 2'ye indi. Artış 1–14 Ağustos'ta ve o iki haftada ürün adedi +%25,1 büyüdü — alım işi takip etti.</a:t>
+            </a:r>
+          </a:p>
+        </p:txBody>
+      </p:sp>
+      <p:sp>
+        <p:nvSpPr>
+          <p:cNvPr id="23" name="Rectangle 22"/>
+          <p:cNvSpPr/>
+          <p:nvPr/>
+        </p:nvSpPr>
+        <p:spPr>
+          <a:xfrm>
+            <a:off x="548640" y="4099559"/>
+            <a:ext cx="11018520" cy="601980"/>
+          </a:xfrm>
+          <a:prstGeom prst="rect">
+            <a:avLst/>
+          </a:prstGeom>
+          <a:solidFill>
+            <a:srgbClr val="FFFFFF"/>
+          </a:solidFill>
+          <a:ln w="12700">
+            <a:solidFill>
+              <a:srgbClr val="DCDCDC"/>
+            </a:solidFill>
+          </a:ln>
+          <a:effectLst/>
+        </p:spPr>
+        <p:style>
+          <a:lnRef idx="1">
+            <a:schemeClr val="accent1"/>
+          </a:lnRef>
+          <a:fillRef idx="3">
+            <a:schemeClr val="accent1"/>
+          </a:fillRef>
+          <a:effectRef idx="2">
+            <a:schemeClr val="accent1"/>
+          </a:effectRef>
+          <a:fontRef idx="minor">
+            <a:schemeClr val="lt1"/>
+          </a:fontRef>
+        </p:style>
+        <p:txBody>
+          <a:bodyPr rtlCol="0" anchor="ctr"/>
+          <a:lstStyle/>
+          <a:p>
+            <a:pPr algn="ctr"/>
+          </a:p>
+        </p:txBody>
+      </p:sp>
+      <p:sp>
+        <p:nvSpPr>
+          <p:cNvPr id="24" name="Rectangle 23"/>
+          <p:cNvSpPr/>
+          <p:nvPr/>
+        </p:nvSpPr>
+        <p:spPr>
+          <a:xfrm>
+            <a:off x="548640" y="4099559"/>
+            <a:ext cx="68580" cy="601980"/>
+          </a:xfrm>
+          <a:prstGeom prst="rect">
+            <a:avLst/>
+          </a:prstGeom>
+          <a:solidFill>
+            <a:srgbClr val="E30622"/>
+          </a:solidFill>
+          <a:ln>
+            <a:noFill/>
+          </a:ln>
+          <a:effectLst/>
+        </p:spPr>
+        <p:style>
+          <a:lnRef idx="1">
+            <a:schemeClr val="accent1"/>
+          </a:lnRef>
+          <a:fillRef idx="3">
+            <a:schemeClr val="accent1"/>
+          </a:fillRef>
+          <a:effectRef idx="2">
+            <a:schemeClr val="accent1"/>
+          </a:effectRef>
+          <a:fontRef idx="minor">
+            <a:schemeClr val="lt1"/>
+          </a:fontRef>
+        </p:style>
+        <p:txBody>
+          <a:bodyPr rtlCol="0" anchor="ctr"/>
+          <a:lstStyle/>
+          <a:p>
+            <a:pPr algn="ctr"/>
+          </a:p>
+        </p:txBody>
+      </p:sp>
+      <p:pic>
+        <p:nvPicPr>
+          <p:cNvPr id="25" name="Picture 24" descr="circle-check.png"/>
+          <p:cNvPicPr>
+            <a:picLocks noChangeAspect="1"/>
+          </p:cNvPicPr>
+          <p:nvPr/>
+        </p:nvPicPr>
+        <p:blipFill>
+          <a:blip r:embed="rId3"/>
+          <a:stretch>
+            <a:fillRect/>
+          </a:stretch>
+        </p:blipFill>
+        <p:spPr>
+          <a:xfrm>
+            <a:off x="777240" y="4227575"/>
+            <a:ext cx="256032" cy="256032"/>
+          </a:xfrm>
+          <a:prstGeom prst="rect">
+            <a:avLst/>
+          </a:prstGeom>
+        </p:spPr>
+      </p:pic>
+      <p:sp>
+        <p:nvSpPr>
+          <p:cNvPr id="26" name="TextBox 25"/>
+          <p:cNvSpPr txBox="1"/>
+          <p:nvPr/>
+        </p:nvSpPr>
+        <p:spPr>
+          <a:xfrm>
+            <a:off x="1143000" y="4163567"/>
+            <a:ext cx="10058400" cy="292608"/>
+          </a:xfrm>
+          <a:prstGeom prst="rect">
+            <a:avLst/>
+          </a:prstGeom>
+          <a:noFill/>
+        </p:spPr>
+        <p:txBody>
+          <a:bodyPr wrap="square" anchor="t">
+            <a:spAutoFit/>
+          </a:bodyPr>
+          <a:lstStyle/>
+          <a:p>
+            <a:pPr algn="l">
+              <a:lnSpc>
+                <a:spcPct val="100000"/>
+              </a:lnSpc>
+            </a:pPr>
+            <a:r>
+              <a:rPr sz="1150" b="1">
+                <a:solidFill>
+                  <a:srgbClr val="A6001A"/>
+                </a:solidFill>
+                <a:latin typeface="Calibri"/>
+              </a:rPr>
+              <a:t>Personel maliyeti çok mu arttı?</a:t>
+            </a:r>
+          </a:p>
+        </p:txBody>
+      </p:sp>
+      <p:sp>
+        <p:nvSpPr>
+          <p:cNvPr id="27" name="TextBox 26"/>
+          <p:cNvSpPr txBox="1"/>
+          <p:nvPr/>
+        </p:nvSpPr>
+        <p:spPr>
+          <a:xfrm>
+            <a:off x="1143000" y="4447031"/>
+            <a:ext cx="10058400" cy="217932"/>
+          </a:xfrm>
+          <a:prstGeom prst="rect">
+            <a:avLst/>
+          </a:prstGeom>
+          <a:noFill/>
+        </p:spPr>
+        <p:txBody>
+          <a:bodyPr wrap="square" anchor="t">
+            <a:spAutoFit/>
+          </a:bodyPr>
+          <a:lstStyle/>
+          <a:p>
+            <a:pPr algn="l">
+              <a:lnSpc>
+                <a:spcPct val="106000"/>
+              </a:lnSpc>
+            </a:pPr>
+            <a:r>
+              <a:rPr sz="950" b="0">
+                <a:solidFill>
+                  <a:srgbClr val="333333"/>
+                </a:solidFill>
+                <a:latin typeface="Calibri"/>
+              </a:rPr>
+              <a:t>Sezonda maliyet +%54,6 artmıştır; artışın ana kaynağı kişi başına ücret (+%33,9), kadro artışı değil. Cironun içindeki personel yükü 1,59 puan GERİLEMİŞTİR: %14,30 → %12,71 (yıl geneli -0,70 puan).</a:t>
+            </a:r>
+          </a:p>
+        </p:txBody>
+      </p:sp>
+      <p:sp>
+        <p:nvSpPr>
+          <p:cNvPr id="28" name="Rectangle 27"/>
+          <p:cNvSpPr/>
+          <p:nvPr/>
+        </p:nvSpPr>
+        <p:spPr>
+          <a:xfrm>
+            <a:off x="548640" y="4792979"/>
+            <a:ext cx="11018520" cy="601980"/>
+          </a:xfrm>
+          <a:prstGeom prst="rect">
+            <a:avLst/>
+          </a:prstGeom>
+          <a:solidFill>
+            <a:srgbClr val="FFFFFF"/>
+          </a:solidFill>
+          <a:ln w="12700">
+            <a:solidFill>
+              <a:srgbClr val="DCDCDC"/>
+            </a:solidFill>
+          </a:ln>
+          <a:effectLst/>
+        </p:spPr>
+        <p:style>
+          <a:lnRef idx="1">
+            <a:schemeClr val="accent1"/>
+          </a:lnRef>
+          <a:fillRef idx="3">
+            <a:schemeClr val="accent1"/>
+          </a:fillRef>
+          <a:effectRef idx="2">
+            <a:schemeClr val="accent1"/>
+          </a:effectRef>
+          <a:fontRef idx="minor">
+            <a:schemeClr val="lt1"/>
+          </a:fontRef>
+        </p:style>
+        <p:txBody>
+          <a:bodyPr rtlCol="0" anchor="ctr"/>
+          <a:lstStyle/>
+          <a:p>
+            <a:pPr algn="ctr"/>
+          </a:p>
+        </p:txBody>
+      </p:sp>
+      <p:sp>
+        <p:nvSpPr>
+          <p:cNvPr id="29" name="Rectangle 28"/>
+          <p:cNvSpPr/>
+          <p:nvPr/>
+        </p:nvSpPr>
+        <p:spPr>
+          <a:xfrm>
+            <a:off x="548640" y="4792979"/>
+            <a:ext cx="68580" cy="601980"/>
+          </a:xfrm>
+          <a:prstGeom prst="rect">
+            <a:avLst/>
+          </a:prstGeom>
+          <a:solidFill>
+            <a:srgbClr val="E30622"/>
+          </a:solidFill>
+          <a:ln>
+            <a:noFill/>
+          </a:ln>
+          <a:effectLst/>
+        </p:spPr>
+        <p:style>
+          <a:lnRef idx="1">
+            <a:schemeClr val="accent1"/>
+          </a:lnRef>
+          <a:fillRef idx="3">
+            <a:schemeClr val="accent1"/>
+          </a:fillRef>
+          <a:effectRef idx="2">
+            <a:schemeClr val="accent1"/>
+          </a:effectRef>
+          <a:fontRef idx="minor">
+            <a:schemeClr val="lt1"/>
+          </a:fontRef>
+        </p:style>
+        <p:txBody>
+          <a:bodyPr rtlCol="0" anchor="ctr"/>
+          <a:lstStyle/>
+          <a:p>
+            <a:pPr algn="ctr"/>
+          </a:p>
+        </p:txBody>
+      </p:sp>
+      <p:pic>
+        <p:nvPicPr>
+          <p:cNvPr id="30" name="Picture 29" descr="circle-check.png"/>
+          <p:cNvPicPr>
+            <a:picLocks noChangeAspect="1"/>
+          </p:cNvPicPr>
+          <p:nvPr/>
+        </p:nvPicPr>
+        <p:blipFill>
+          <a:blip r:embed="rId3"/>
+          <a:stretch>
+            <a:fillRect/>
+          </a:stretch>
+        </p:blipFill>
+        <p:spPr>
+          <a:xfrm>
+            <a:off x="777240" y="4920995"/>
+            <a:ext cx="256032" cy="256032"/>
+          </a:xfrm>
+          <a:prstGeom prst="rect">
+            <a:avLst/>
+          </a:prstGeom>
+        </p:spPr>
+      </p:pic>
+      <p:sp>
+        <p:nvSpPr>
+          <p:cNvPr id="31" name="TextBox 30"/>
+          <p:cNvSpPr txBox="1"/>
+          <p:nvPr/>
+        </p:nvSpPr>
+        <p:spPr>
+          <a:xfrm>
+            <a:off x="1143000" y="4856987"/>
+            <a:ext cx="10058400" cy="292608"/>
+          </a:xfrm>
+          <a:prstGeom prst="rect">
+            <a:avLst/>
+          </a:prstGeom>
+          <a:noFill/>
+        </p:spPr>
+        <p:txBody>
+          <a:bodyPr wrap="square" anchor="t">
+            <a:spAutoFit/>
+          </a:bodyPr>
+          <a:lstStyle/>
+          <a:p>
+            <a:pPr algn="l">
+              <a:lnSpc>
+                <a:spcPct val="100000"/>
+              </a:lnSpc>
+            </a:pPr>
+            <a:r>
+              <a:rPr sz="1150" b="1">
+                <a:solidFill>
+                  <a:srgbClr val="A6001A"/>
+                </a:solidFill>
+                <a:latin typeface="Calibri"/>
+              </a:rPr>
+              <a:t>Ağustos ayında ivme düşüşü var mı?</a:t>
+            </a:r>
+          </a:p>
+        </p:txBody>
+      </p:sp>
+      <p:sp>
+        <p:nvSpPr>
+          <p:cNvPr id="32" name="TextBox 31"/>
+          <p:cNvSpPr txBox="1"/>
+          <p:nvPr/>
+        </p:nvSpPr>
+        <p:spPr>
+          <a:xfrm>
+            <a:off x="1143000" y="5140451"/>
+            <a:ext cx="10058400" cy="217932"/>
+          </a:xfrm>
+          <a:prstGeom prst="rect">
+            <a:avLst/>
+          </a:prstGeom>
+          <a:noFill/>
+        </p:spPr>
+        <p:txBody>
+          <a:bodyPr wrap="square" anchor="t">
+            <a:spAutoFit/>
+          </a:bodyPr>
+          <a:lstStyle/>
+          <a:p>
+            <a:pPr algn="l">
+              <a:lnSpc>
+                <a:spcPct val="106000"/>
+              </a:lnSpc>
+            </a:pPr>
+            <a:r>
+              <a:rPr sz="950" b="0">
+                <a:solidFill>
+                  <a:srgbClr val="333333"/>
+                </a:solidFill>
+                <a:latin typeface="Calibri"/>
+              </a:rPr>
+              <a:t>Takvim etkisi: okullar 2025'te 8 Eylül, 2026'da 14 Eylül açıldı — sezon 6 gün geriye kaydı. Açılışa hizalanınca haftalık büyüme %65–79 bandında düz seyrediyor.</a:t>
+            </a:r>
+          </a:p>
+        </p:txBody>
+      </p:sp>
+      <p:sp>
+        <p:nvSpPr>
+          <p:cNvPr id="33" name="TextBox 32"/>
           <p:cNvSpPr txBox="1"/>
           <p:nvPr/>
         </p:nvSpPr>
@@ -20580,14 +21583,14 @@
                 </a:solidFill>
                 <a:latin typeface="Calibri"/>
               </a:rPr>
-              <a:t>* Kapsam: beş mağazanın tamamı — FSM · Özlüce · İst. Yolu · Heykel · Şura · Ölçüm noktaları: 30.06 tabanı ve 31.08 kesimi (tarih aralığı değil, o gün fiilen çalışan kişi) Tutunma ölçümü mağaza kadrosu üzerinden yapılmıştır.</a:t>
+              <a:t>* Kapsam: üç POS mağazası — FSM · Özlüce · İst. Yolu · Dönem: 01.01 – 31.08 (her iki yıl, kümülatif) (kurumsal/mağaza kıyası) · hizalı dönem: 01.07 – 25.08.2025 (2025) · 07.07 – 31.08.2026 (2026), her iki yıl 56 gün, okul açılışına hizalı</a:t>
             </a:r>
           </a:p>
         </p:txBody>
       </p:sp>
       <p:sp>
         <p:nvSpPr>
-          <p:cNvPr id="18" name="TextBox 17"/>
+          <p:cNvPr id="34" name="TextBox 33"/>
           <p:cNvSpPr txBox="1"/>
           <p:nvPr/>
         </p:nvSpPr>
@@ -20663,37 +21666,664 @@
             <a:spLocks noGrp="1"/>
           </p:cNvSpPr>
           <p:nvPr>
-            <p:ph type="ctrTitle"/>
+            <p:ph type="title"/>
           </p:nvPr>
         </p:nvSpPr>
-        <p:spPr/>
+        <p:spPr>
+          <a:xfrm>
+            <a:off x="548640" y="274320"/>
+            <a:ext cx="11018520" cy="914400"/>
+          </a:xfrm>
+        </p:spPr>
         <p:txBody>
           <a:bodyPr/>
           <a:lstStyle/>
           <a:p>
             <a:r>
-              <a:t>Sonuç</a:t>
+              <a:t>İyileştirme Alanı</a:t>
             </a:r>
           </a:p>
         </p:txBody>
       </p:sp>
       <p:sp>
         <p:nvSpPr>
-          <p:cNvPr id="3" name="Subtitle 2"/>
-          <p:cNvSpPr>
-            <a:spLocks noGrp="1"/>
-          </p:cNvSpPr>
-          <p:nvPr>
-            <p:ph type="subTitle" idx="1"/>
-          </p:nvPr>
-        </p:nvSpPr>
-        <p:spPr/>
-        <p:txBody>
-          <a:bodyPr/>
-          <a:lstStyle/>
-          <a:p>
+          <p:cNvPr id="3" name="Rectangle 2"/>
+          <p:cNvSpPr/>
+          <p:nvPr/>
+        </p:nvSpPr>
+        <p:spPr>
+          <a:xfrm>
+            <a:off x="548640" y="1371600"/>
+            <a:ext cx="5394960" cy="2286000"/>
+          </a:xfrm>
+          <a:prstGeom prst="rect">
+            <a:avLst/>
+          </a:prstGeom>
+          <a:solidFill>
+            <a:srgbClr val="FFFFFF"/>
+          </a:solidFill>
+          <a:ln w="12700">
+            <a:solidFill>
+              <a:srgbClr val="DCDCDC"/>
+            </a:solidFill>
+          </a:ln>
+          <a:effectLst/>
+        </p:spPr>
+        <p:style>
+          <a:lnRef idx="1">
+            <a:schemeClr val="accent1"/>
+          </a:lnRef>
+          <a:fillRef idx="3">
+            <a:schemeClr val="accent1"/>
+          </a:fillRef>
+          <a:effectRef idx="2">
+            <a:schemeClr val="accent1"/>
+          </a:effectRef>
+          <a:fontRef idx="minor">
+            <a:schemeClr val="lt1"/>
+          </a:fontRef>
+        </p:style>
+        <p:txBody>
+          <a:bodyPr rtlCol="0" anchor="ctr"/>
+          <a:lstStyle/>
+          <a:p>
+            <a:pPr algn="ctr"/>
+          </a:p>
+        </p:txBody>
+      </p:sp>
+      <p:sp>
+        <p:nvSpPr>
+          <p:cNvPr id="4" name="Rectangle 3"/>
+          <p:cNvSpPr/>
+          <p:nvPr/>
+        </p:nvSpPr>
+        <p:spPr>
+          <a:xfrm>
+            <a:off x="548640" y="1371600"/>
+            <a:ext cx="68580" cy="2286000"/>
+          </a:xfrm>
+          <a:prstGeom prst="rect">
+            <a:avLst/>
+          </a:prstGeom>
+          <a:solidFill>
+            <a:srgbClr val="A6001A"/>
+          </a:solidFill>
+          <a:ln>
+            <a:noFill/>
+          </a:ln>
+          <a:effectLst/>
+        </p:spPr>
+        <p:style>
+          <a:lnRef idx="1">
+            <a:schemeClr val="accent1"/>
+          </a:lnRef>
+          <a:fillRef idx="3">
+            <a:schemeClr val="accent1"/>
+          </a:fillRef>
+          <a:effectRef idx="2">
+            <a:schemeClr val="accent1"/>
+          </a:effectRef>
+          <a:fontRef idx="minor">
+            <a:schemeClr val="lt1"/>
+          </a:fontRef>
+        </p:style>
+        <p:txBody>
+          <a:bodyPr rtlCol="0" anchor="ctr"/>
+          <a:lstStyle/>
+          <a:p>
+            <a:pPr algn="ctr"/>
+          </a:p>
+        </p:txBody>
+      </p:sp>
+      <p:pic>
+        <p:nvPicPr>
+          <p:cNvPr id="5" name="Picture 4" descr="alert-triangle.png"/>
+          <p:cNvPicPr>
+            <a:picLocks noChangeAspect="1"/>
+          </p:cNvPicPr>
+          <p:nvPr/>
+        </p:nvPicPr>
+        <p:blipFill>
+          <a:blip r:embed="rId3"/>
+          <a:stretch>
+            <a:fillRect/>
+          </a:stretch>
+        </p:blipFill>
+        <p:spPr>
+          <a:xfrm>
+            <a:off x="5468112" y="1536192"/>
+            <a:ext cx="274320" cy="274320"/>
+          </a:xfrm>
+          <a:prstGeom prst="rect">
+            <a:avLst/>
+          </a:prstGeom>
+        </p:spPr>
+      </p:pic>
+      <p:sp>
+        <p:nvSpPr>
+          <p:cNvPr id="6" name="TextBox 5"/>
+          <p:cNvSpPr txBox="1"/>
+          <p:nvPr/>
+        </p:nvSpPr>
+        <p:spPr>
+          <a:xfrm>
+            <a:off x="777240" y="1481328"/>
+            <a:ext cx="4572000" cy="329184"/>
+          </a:xfrm>
+          <a:prstGeom prst="rect">
+            <a:avLst/>
+          </a:prstGeom>
+          <a:noFill/>
+        </p:spPr>
+        <p:txBody>
+          <a:bodyPr wrap="square" anchor="t">
+            <a:spAutoFit/>
+          </a:bodyPr>
+          <a:lstStyle/>
+          <a:p>
+            <a:pPr algn="l">
+              <a:lnSpc>
+                <a:spcPct val="100000"/>
+              </a:lnSpc>
+            </a:pPr>
             <a:r>
-              <a:t>Norma göre -28 kişi · kadrolu −4 · ürün adedi +%34,9 · personel başına iş +%20,5</a:t>
+              <a:rPr sz="1000" b="1">
+                <a:solidFill>
+                  <a:srgbClr val="6E6E6E"/>
+                </a:solidFill>
+                <a:latin typeface="Calibri"/>
+              </a:rPr>
+              <a:t>KADROLU ALIMDA KALMA ORANI</a:t>
+            </a:r>
+          </a:p>
+        </p:txBody>
+      </p:sp>
+      <p:sp>
+        <p:nvSpPr>
+          <p:cNvPr id="7" name="TextBox 6"/>
+          <p:cNvSpPr txBox="1"/>
+          <p:nvPr/>
+        </p:nvSpPr>
+        <p:spPr>
+          <a:xfrm>
+            <a:off x="777240" y="1847088"/>
+            <a:ext cx="4937760" cy="786384"/>
+          </a:xfrm>
+          <a:prstGeom prst="rect">
+            <a:avLst/>
+          </a:prstGeom>
+          <a:noFill/>
+        </p:spPr>
+        <p:txBody>
+          <a:bodyPr wrap="square" anchor="t">
+            <a:spAutoFit/>
+          </a:bodyPr>
+          <a:lstStyle/>
+          <a:p>
+            <a:pPr algn="l">
+              <a:lnSpc>
+                <a:spcPct val="100000"/>
+              </a:lnSpc>
+            </a:pPr>
+            <a:r>
+              <a:rPr sz="3000" b="1">
+                <a:solidFill>
+                  <a:srgbClr val="A6001A"/>
+                </a:solidFill>
+                <a:latin typeface="Calibri"/>
+              </a:rPr>
+              <a:t>%95,7 → %75,0</a:t>
+            </a:r>
+          </a:p>
+        </p:txBody>
+      </p:sp>
+      <p:sp>
+        <p:nvSpPr>
+          <p:cNvPr id="8" name="TextBox 7"/>
+          <p:cNvSpPr txBox="1"/>
+          <p:nvPr/>
+        </p:nvSpPr>
+        <p:spPr>
+          <a:xfrm>
+            <a:off x="777240" y="2670048"/>
+            <a:ext cx="4937760" cy="868680"/>
+          </a:xfrm>
+          <a:prstGeom prst="rect">
+            <a:avLst/>
+          </a:prstGeom>
+          <a:noFill/>
+        </p:spPr>
+        <p:txBody>
+          <a:bodyPr wrap="square" anchor="t">
+            <a:spAutoFit/>
+          </a:bodyPr>
+          <a:lstStyle/>
+          <a:p>
+            <a:pPr algn="l">
+              <a:lnSpc>
+                <a:spcPct val="110000"/>
+              </a:lnSpc>
+            </a:pPr>
+            <a:r>
+              <a:rPr sz="1050" b="0">
+                <a:solidFill>
+                  <a:srgbClr val="333333"/>
+                </a:solidFill>
+                <a:latin typeface="Calibri"/>
+              </a:rPr>
+              <a:t>İlk 14 günü tamamlama oranı (22/23 → 21/28). 32 alımdan 10'si kesim tarihine kadar ayrılmıştır (önceki yıl 24 alımdan 2). Aynı pozisyonun iki kez doldurulması maliyet yaratmaktadır.</a:t>
+            </a:r>
+          </a:p>
+        </p:txBody>
+      </p:sp>
+      <p:sp>
+        <p:nvSpPr>
+          <p:cNvPr id="9" name="Rectangle 8"/>
+          <p:cNvSpPr/>
+          <p:nvPr/>
+        </p:nvSpPr>
+        <p:spPr>
+          <a:xfrm>
+            <a:off x="6172200" y="1371600"/>
+            <a:ext cx="5394960" cy="2286000"/>
+          </a:xfrm>
+          <a:prstGeom prst="rect">
+            <a:avLst/>
+          </a:prstGeom>
+          <a:solidFill>
+            <a:srgbClr val="FFFFFF"/>
+          </a:solidFill>
+          <a:ln w="12700">
+            <a:solidFill>
+              <a:srgbClr val="DCDCDC"/>
+            </a:solidFill>
+          </a:ln>
+          <a:effectLst/>
+        </p:spPr>
+        <p:style>
+          <a:lnRef idx="1">
+            <a:schemeClr val="accent1"/>
+          </a:lnRef>
+          <a:fillRef idx="3">
+            <a:schemeClr val="accent1"/>
+          </a:fillRef>
+          <a:effectRef idx="2">
+            <a:schemeClr val="accent1"/>
+          </a:effectRef>
+          <a:fontRef idx="minor">
+            <a:schemeClr val="lt1"/>
+          </a:fontRef>
+        </p:style>
+        <p:txBody>
+          <a:bodyPr rtlCol="0" anchor="ctr"/>
+          <a:lstStyle/>
+          <a:p>
+            <a:pPr algn="ctr"/>
+          </a:p>
+        </p:txBody>
+      </p:sp>
+      <p:sp>
+        <p:nvSpPr>
+          <p:cNvPr id="10" name="Rectangle 9"/>
+          <p:cNvSpPr/>
+          <p:nvPr/>
+        </p:nvSpPr>
+        <p:spPr>
+          <a:xfrm>
+            <a:off x="6172200" y="1371600"/>
+            <a:ext cx="68580" cy="2286000"/>
+          </a:xfrm>
+          <a:prstGeom prst="rect">
+            <a:avLst/>
+          </a:prstGeom>
+          <a:solidFill>
+            <a:srgbClr val="9A9A9A"/>
+          </a:solidFill>
+          <a:ln>
+            <a:noFill/>
+          </a:ln>
+          <a:effectLst/>
+        </p:spPr>
+        <p:style>
+          <a:lnRef idx="1">
+            <a:schemeClr val="accent1"/>
+          </a:lnRef>
+          <a:fillRef idx="3">
+            <a:schemeClr val="accent1"/>
+          </a:fillRef>
+          <a:effectRef idx="2">
+            <a:schemeClr val="accent1"/>
+          </a:effectRef>
+          <a:fontRef idx="minor">
+            <a:schemeClr val="lt1"/>
+          </a:fontRef>
+        </p:style>
+        <p:txBody>
+          <a:bodyPr rtlCol="0" anchor="ctr"/>
+          <a:lstStyle/>
+          <a:p>
+            <a:pPr algn="ctr"/>
+          </a:p>
+        </p:txBody>
+      </p:sp>
+      <p:pic>
+        <p:nvPicPr>
+          <p:cNvPr id="11" name="Picture 10" descr="users.png"/>
+          <p:cNvPicPr>
+            <a:picLocks noChangeAspect="1"/>
+          </p:cNvPicPr>
+          <p:nvPr/>
+        </p:nvPicPr>
+        <p:blipFill>
+          <a:blip r:embed="rId4"/>
+          <a:stretch>
+            <a:fillRect/>
+          </a:stretch>
+        </p:blipFill>
+        <p:spPr>
+          <a:xfrm>
+            <a:off x="11091672" y="1536192"/>
+            <a:ext cx="274320" cy="274320"/>
+          </a:xfrm>
+          <a:prstGeom prst="rect">
+            <a:avLst/>
+          </a:prstGeom>
+        </p:spPr>
+      </p:pic>
+      <p:sp>
+        <p:nvSpPr>
+          <p:cNvPr id="12" name="TextBox 11"/>
+          <p:cNvSpPr txBox="1"/>
+          <p:nvPr/>
+        </p:nvSpPr>
+        <p:spPr>
+          <a:xfrm>
+            <a:off x="6400800" y="1481328"/>
+            <a:ext cx="4572000" cy="329184"/>
+          </a:xfrm>
+          <a:prstGeom prst="rect">
+            <a:avLst/>
+          </a:prstGeom>
+          <a:noFill/>
+        </p:spPr>
+        <p:txBody>
+          <a:bodyPr wrap="square" anchor="t">
+            <a:spAutoFit/>
+          </a:bodyPr>
+          <a:lstStyle/>
+          <a:p>
+            <a:pPr algn="l">
+              <a:lnSpc>
+                <a:spcPct val="100000"/>
+              </a:lnSpc>
+            </a:pPr>
+            <a:r>
+              <a:rPr sz="1000" b="1">
+                <a:solidFill>
+                  <a:srgbClr val="6E6E6E"/>
+                </a:solidFill>
+                <a:latin typeface="Calibri"/>
+              </a:rPr>
+              <a:t>SEZONLUK KADRODA KALMA ORANI</a:t>
+            </a:r>
+          </a:p>
+        </p:txBody>
+      </p:sp>
+      <p:sp>
+        <p:nvSpPr>
+          <p:cNvPr id="13" name="TextBox 12"/>
+          <p:cNvSpPr txBox="1"/>
+          <p:nvPr/>
+        </p:nvSpPr>
+        <p:spPr>
+          <a:xfrm>
+            <a:off x="6400800" y="1847088"/>
+            <a:ext cx="4937760" cy="786384"/>
+          </a:xfrm>
+          <a:prstGeom prst="rect">
+            <a:avLst/>
+          </a:prstGeom>
+          <a:noFill/>
+        </p:spPr>
+        <p:txBody>
+          <a:bodyPr wrap="square" anchor="t">
+            <a:spAutoFit/>
+          </a:bodyPr>
+          <a:lstStyle/>
+          <a:p>
+            <a:pPr algn="l">
+              <a:lnSpc>
+                <a:spcPct val="100000"/>
+              </a:lnSpc>
+            </a:pPr>
+            <a:r>
+              <a:rPr sz="3000" b="1">
+                <a:solidFill>
+                  <a:srgbClr val="9A9A9A"/>
+                </a:solidFill>
+                <a:latin typeface="Calibri"/>
+              </a:rPr>
+              <a:t>%93,9 → %95,1</a:t>
+            </a:r>
+          </a:p>
+        </p:txBody>
+      </p:sp>
+      <p:sp>
+        <p:nvSpPr>
+          <p:cNvPr id="14" name="TextBox 13"/>
+          <p:cNvSpPr txBox="1"/>
+          <p:nvPr/>
+        </p:nvSpPr>
+        <p:spPr>
+          <a:xfrm>
+            <a:off x="6400800" y="2670048"/>
+            <a:ext cx="4937760" cy="868680"/>
+          </a:xfrm>
+          <a:prstGeom prst="rect">
+            <a:avLst/>
+          </a:prstGeom>
+          <a:noFill/>
+        </p:spPr>
+        <p:txBody>
+          <a:bodyPr wrap="square" anchor="t">
+            <a:spAutoFit/>
+          </a:bodyPr>
+          <a:lstStyle/>
+          <a:p>
+            <a:pPr algn="l">
+              <a:lnSpc>
+                <a:spcPct val="110000"/>
+              </a:lnSpc>
+            </a:pPr>
+            <a:r>
+              <a:rPr sz="1050" b="0">
+                <a:solidFill>
+                  <a:srgbClr val="333333"/>
+                </a:solidFill>
+                <a:latin typeface="Calibri"/>
+              </a:rPr>
+              <a:t>Sezonluk kadroda kalma oranı yükselmiştir (46/49 → 39/41). Sorun sezonluk alımda değil, kadrolu alımın ilk haftasındadır.</a:t>
+            </a:r>
+          </a:p>
+        </p:txBody>
+      </p:sp>
+      <p:sp>
+        <p:nvSpPr>
+          <p:cNvPr id="15" name="Rounded Rectangle 14"/>
+          <p:cNvSpPr/>
+          <p:nvPr/>
+        </p:nvSpPr>
+        <p:spPr>
+          <a:xfrm>
+            <a:off x="548640" y="3840480"/>
+            <a:ext cx="11018520" cy="1600200"/>
+          </a:xfrm>
+          <a:prstGeom prst="roundRect">
+            <a:avLst/>
+          </a:prstGeom>
+          <a:solidFill>
+            <a:srgbClr val="F2F2F2"/>
+          </a:solidFill>
+          <a:ln w="19050">
+            <a:solidFill>
+              <a:srgbClr val="E30622"/>
+            </a:solidFill>
+          </a:ln>
+          <a:effectLst/>
+        </p:spPr>
+        <p:style>
+          <a:lnRef idx="1">
+            <a:schemeClr val="accent1"/>
+          </a:lnRef>
+          <a:fillRef idx="3">
+            <a:schemeClr val="accent1"/>
+          </a:fillRef>
+          <a:effectRef idx="2">
+            <a:schemeClr val="accent1"/>
+          </a:effectRef>
+          <a:fontRef idx="minor">
+            <a:schemeClr val="lt1"/>
+          </a:fontRef>
+        </p:style>
+        <p:txBody>
+          <a:bodyPr rtlCol="0" anchor="ctr"/>
+          <a:lstStyle/>
+          <a:p>
+            <a:pPr algn="ctr"/>
+          </a:p>
+        </p:txBody>
+      </p:sp>
+      <p:sp>
+        <p:nvSpPr>
+          <p:cNvPr id="16" name="TextBox 15"/>
+          <p:cNvSpPr txBox="1"/>
+          <p:nvPr/>
+        </p:nvSpPr>
+        <p:spPr>
+          <a:xfrm>
+            <a:off x="822960" y="3977639"/>
+            <a:ext cx="10515600" cy="1371600"/>
+          </a:xfrm>
+          <a:prstGeom prst="rect">
+            <a:avLst/>
+          </a:prstGeom>
+          <a:noFill/>
+        </p:spPr>
+        <p:txBody>
+          <a:bodyPr wrap="square" anchor="t">
+            <a:spAutoFit/>
+          </a:bodyPr>
+          <a:lstStyle/>
+          <a:p>
+            <a:pPr algn="l">
+              <a:lnSpc>
+                <a:spcPct val="125000"/>
+              </a:lnSpc>
+            </a:pPr>
+            <a:r>
+              <a:rPr sz="1350" b="1">
+                <a:solidFill>
+                  <a:srgbClr val="A6001A"/>
+                </a:solidFill>
+                <a:latin typeface="Calibri"/>
+              </a:rPr>
+              <a:t>Planlanan Aksiyonlar</a:t>
+            </a:r>
+          </a:p>
+          <a:p>
+            <a:pPr algn="l">
+              <a:lnSpc>
+                <a:spcPct val="125000"/>
+              </a:lnSpc>
+            </a:pPr>
+            <a:r>
+              <a:rPr sz="1200" b="0">
+                <a:solidFill>
+                  <a:srgbClr val="333333"/>
+                </a:solidFill>
+                <a:latin typeface="Calibri"/>
+              </a:rPr>
+              <a:t>• En bozuk üç nokta: Özlüce, Heykel, Merkez Depo → ilk hafta karşılama protokolü.
+• İdari İşler pozisyonunda ücret–vardiya revizyonu.
+• Ölçüt: gelecek sezon Eylül öncesi kayıp %20'den %12'ye (2025 seviyesi).</a:t>
+            </a:r>
+          </a:p>
+        </p:txBody>
+      </p:sp>
+      <p:sp>
+        <p:nvSpPr>
+          <p:cNvPr id="17" name="TextBox 16"/>
+          <p:cNvSpPr txBox="1"/>
+          <p:nvPr/>
+        </p:nvSpPr>
+        <p:spPr>
+          <a:xfrm>
+            <a:off x="1920240" y="5669280"/>
+            <a:ext cx="9555480" cy="566928"/>
+          </a:xfrm>
+          <a:prstGeom prst="rect">
+            <a:avLst/>
+          </a:prstGeom>
+          <a:noFill/>
+        </p:spPr>
+        <p:txBody>
+          <a:bodyPr wrap="square" anchor="t">
+            <a:spAutoFit/>
+          </a:bodyPr>
+          <a:lstStyle/>
+          <a:p>
+            <a:pPr algn="l">
+              <a:lnSpc>
+                <a:spcPct val="105000"/>
+              </a:lnSpc>
+            </a:pPr>
+            <a:r>
+              <a:rPr sz="800" b="0">
+                <a:solidFill>
+                  <a:srgbClr val="9A9A9A"/>
+                </a:solidFill>
+                <a:latin typeface="Calibri"/>
+              </a:rPr>
+              <a:t>* Kapsam: beş mağazanın tamamı — FSM · Özlüce · İst. Yolu · Heykel · Şura · Ölçüm noktaları: 30.06 tabanı ve 31.08 kesimi (tarih aralığı değil, o gün fiilen çalışan kişi) Tutunma ölçümü mağaza kadrosu üzerinden yapılmıştır.</a:t>
+            </a:r>
+          </a:p>
+        </p:txBody>
+      </p:sp>
+      <p:sp>
+        <p:nvSpPr>
+          <p:cNvPr id="18" name="TextBox 17"/>
+          <p:cNvSpPr txBox="1"/>
+          <p:nvPr/>
+        </p:nvSpPr>
+        <p:spPr>
+          <a:xfrm>
+            <a:off x="8503920" y="6355080"/>
+            <a:ext cx="3108960" cy="274320"/>
+          </a:xfrm>
+          <a:prstGeom prst="rect">
+            <a:avLst/>
+          </a:prstGeom>
+          <a:noFill/>
+        </p:spPr>
+        <p:txBody>
+          <a:bodyPr wrap="square" anchor="t">
+            <a:spAutoFit/>
+          </a:bodyPr>
+          <a:lstStyle/>
+          <a:p>
+            <a:pPr algn="r">
+              <a:lnSpc>
+                <a:spcPct val="100000"/>
+              </a:lnSpc>
+            </a:pPr>
+            <a:r>
+              <a:rPr sz="900" b="0">
+                <a:solidFill>
+                  <a:srgbClr val="9A9A9A"/>
+                </a:solidFill>
+                <a:latin typeface="Calibri"/>
+              </a:rPr>
+              <a:t>© Fikri Eren 2026</a:t>
             </a:r>
           </a:p>
         </p:txBody>
@@ -21839,6 +23469,80 @@
                 <a:latin typeface="Calibri"/>
               </a:rPr>
               <a:t>© Fikri Eren 2026</a:t>
+            </a:r>
+          </a:p>
+        </p:txBody>
+      </p:sp>
+    </p:spTree>
+  </p:cSld>
+  <p:clrMapOvr>
+    <a:masterClrMapping/>
+  </p:clrMapOvr>
+</p:sld>
+</file>
+
+<file path=ppt/slides/slide20.xml><?xml version="1.0" encoding="utf-8"?>
+<p:sld xmlns:a="http://schemas.openxmlformats.org/drawingml/2006/main" xmlns:p="http://schemas.openxmlformats.org/presentationml/2006/main" xmlns:r="http://schemas.openxmlformats.org/officeDocument/2006/relationships">
+  <p:cSld>
+    <p:bg>
+      <p:bgPr>
+        <a:blipFill dpi="0" rotWithShape="1">
+          <a:blip r:embed="rId2">
+            <a:lum/>
+          </a:blip>
+          <a:srcRect/>
+          <a:stretch>
+            <a:fillRect/>
+          </a:stretch>
+        </a:blipFill>
+        <a:effectLst/>
+      </p:bgPr>
+    </p:bg>
+    <p:spTree>
+      <p:nvGrpSpPr>
+        <p:cNvPr id="1" name=""/>
+        <p:cNvGrpSpPr/>
+        <p:nvPr/>
+      </p:nvGrpSpPr>
+      <p:grpSpPr/>
+      <p:sp>
+        <p:nvSpPr>
+          <p:cNvPr id="2" name="Title 1"/>
+          <p:cNvSpPr>
+            <a:spLocks noGrp="1"/>
+          </p:cNvSpPr>
+          <p:nvPr>
+            <p:ph type="ctrTitle"/>
+          </p:nvPr>
+        </p:nvSpPr>
+        <p:spPr/>
+        <p:txBody>
+          <a:bodyPr/>
+          <a:lstStyle/>
+          <a:p>
+            <a:r>
+              <a:t>Sonuç</a:t>
+            </a:r>
+          </a:p>
+        </p:txBody>
+      </p:sp>
+      <p:sp>
+        <p:nvSpPr>
+          <p:cNvPr id="3" name="Subtitle 2"/>
+          <p:cNvSpPr>
+            <a:spLocks noGrp="1"/>
+          </p:cNvSpPr>
+          <p:nvPr>
+            <p:ph type="subTitle" idx="1"/>
+          </p:nvPr>
+        </p:nvSpPr>
+        <p:spPr/>
+        <p:txBody>
+          <a:bodyPr/>
+          <a:lstStyle/>
+          <a:p>
+            <a:r>
+              <a:t>Norma göre -28 kişi · kadrolu −4 · ürün adedi +%34,9 · personel başına iş +%20,5</a:t>
             </a:r>
           </a:p>
         </p:txBody>

--- a/briefings/sezon-kadro-20260902/sunum-kadro-sezon2026.pptx
+++ b/briefings/sezon-kadro-20260902/sunum-kadro-sezon2026.pptx
@@ -366,7 +366,7 @@
                 <c:formatCode>General</c:formatCode>
                 <c:ptCount val="1"/>
                 <c:pt idx="0">
-                  <c:v>70.14545454545456</c:v>
+                  <c:v>79.43719972546329</c:v>
                 </c:pt>
               </c:numCache>
             </c:numRef>
@@ -409,7 +409,7 @@
                 <c:formatCode>General</c:formatCode>
                 <c:ptCount val="1"/>
                 <c:pt idx="0">
-                  <c:v>73.98425196850394</c:v>
+                  <c:v>83.56952268010673</c:v>
                 </c:pt>
               </c:numCache>
             </c:numRef>
@@ -452,7 +452,7 @@
                 <c:formatCode>General</c:formatCode>
                 <c:ptCount val="1"/>
                 <c:pt idx="0">
-                  <c:v>447.0545454545455</c:v>
+                  <c:v>465.3191489361705</c:v>
                 </c:pt>
               </c:numCache>
             </c:numRef>
@@ -596,7 +596,7 @@
               <c:strCache>
                 <c:ptCount val="1"/>
                 <c:pt idx="0">
-                  <c:v>2025 kişi-ay</c:v>
+                  <c:v>2025 FTE</c:v>
                 </c:pt>
               </c:strCache>
             </c:strRef>
@@ -642,25 +642,25 @@
                 <c:formatCode>General</c:formatCode>
                 <c:ptCount val="7"/>
                 <c:pt idx="0">
-                  <c:v>117</c:v>
+                  <c:v>107.5</c:v>
                 </c:pt>
                 <c:pt idx="1">
-                  <c:v>116</c:v>
+                  <c:v>100.7</c:v>
                 </c:pt>
                 <c:pt idx="2">
-                  <c:v>112</c:v>
+                  <c:v>102.8</c:v>
                 </c:pt>
                 <c:pt idx="3">
-                  <c:v>114</c:v>
+                  <c:v>97.6</c:v>
                 </c:pt>
                 <c:pt idx="4">
-                  <c:v>107</c:v>
+                  <c:v>93.9</c:v>
                 </c:pt>
                 <c:pt idx="5">
-                  <c:v>105</c:v>
+                  <c:v>97.5</c:v>
                 </c:pt>
                 <c:pt idx="6">
-                  <c:v>110</c:v>
+                  <c:v>97.1</c:v>
                 </c:pt>
               </c:numCache>
             </c:numRef>
@@ -675,7 +675,7 @@
               <c:strCache>
                 <c:ptCount val="1"/>
                 <c:pt idx="0">
-                  <c:v>2026 kişi-ay</c:v>
+                  <c:v>2026 FTE</c:v>
                 </c:pt>
               </c:strCache>
             </c:strRef>
@@ -721,32 +721,32 @@
                 <c:formatCode>General</c:formatCode>
                 <c:ptCount val="7"/>
                 <c:pt idx="0">
-                  <c:v>121</c:v>
+                  <c:v>109.9</c:v>
                 </c:pt>
                 <c:pt idx="1">
-                  <c:v>123</c:v>
+                  <c:v>110.9</c:v>
                 </c:pt>
                 <c:pt idx="2">
-                  <c:v>119</c:v>
+                  <c:v>112.6</c:v>
                 </c:pt>
                 <c:pt idx="3">
-                  <c:v>124</c:v>
+                  <c:v>110.0</c:v>
                 </c:pt>
                 <c:pt idx="4">
-                  <c:v>124</c:v>
+                  <c:v>112.0</c:v>
                 </c:pt>
                 <c:pt idx="5">
-                  <c:v>118</c:v>
+                  <c:v>108.2</c:v>
                 </c:pt>
                 <c:pt idx="6">
-                  <c:v>127</c:v>
+                  <c:v>112.4</c:v>
                 </c:pt>
               </c:numCache>
             </c:numRef>
           </c:val>
         </c:ser>
         <c:dLbls>
-          <c:numFmt sourceLinked="0" formatCode="#,##0"/>
+          <c:numFmt sourceLinked="0" formatCode="#,##0.0"/>
           <c:txPr>
             <a:bodyPr/>
             <a:lstStyle/>
@@ -886,13 +886,13 @@
                 <c:formatCode>General</c:formatCode>
                 <c:ptCount val="7"/>
                 <c:pt idx="0">
-                  <c:v>10.64043589756458</c:v>
+                  <c:v>10.640435897564577</c:v>
                 </c:pt>
                 <c:pt idx="1">
                   <c:v>10.971390826419269</c:v>
                 </c:pt>
                 <c:pt idx="2">
-                  <c:v>13.882458998021423</c:v>
+                  <c:v>13.882458998021422</c:v>
                 </c:pt>
                 <c:pt idx="3">
                   <c:v>11.502227588672248</c:v>
@@ -1121,7 +1121,7 @@
                   <c:v>574.6556999999999</c:v>
                 </c:pt>
                 <c:pt idx="1">
-                  <c:v>71.81704577000014</c:v>
+                  <c:v>71.81704577000012</c:v>
                 </c:pt>
                 <c:pt idx="2">
                   <c:v>143</c:v>
@@ -1176,7 +1176,7 @@
                   <c:v>775.03155</c:v>
                 </c:pt>
                 <c:pt idx="1">
-                  <c:v>122.53417561000009</c:v>
+                  <c:v>122.53417561000005</c:v>
                 </c:pt>
                 <c:pt idx="2">
                   <c:v>160</c:v>
@@ -1369,7 +1369,7 @@
                 <c:formatCode>General</c:formatCode>
                 <c:ptCount val="3"/>
                 <c:pt idx="0">
-                  <c:v>5578.70462962963</c:v>
+                  <c:v>5578.704629629629</c:v>
                 </c:pt>
                 <c:pt idx="1">
                   <c:v>4229.647540983607</c:v>
@@ -1532,7 +1532,7 @@
                   <c:v>34377.72383333333</c:v>
                 </c:pt>
                 <c:pt idx="1">
-                  <c:v>25227.68604395604</c:v>
+                  <c:v>25227.686043956044</c:v>
                 </c:pt>
                 <c:pt idx="2">
                   <c:v>28668.031666666666</c:v>
@@ -2083,7 +2083,7 @@
                 <c:formatCode>General</c:formatCode>
                 <c:ptCount val="3"/>
                 <c:pt idx="0">
-                  <c:v>30.5442513521349</c:v>
+                  <c:v>30.54425135213488</c:v>
                 </c:pt>
                 <c:pt idx="1">
                   <c:v>48.848767711265985</c:v>
@@ -2141,10 +2141,10 @@
                   <c:v>57.55862375814162</c:v>
                 </c:pt>
                 <c:pt idx="1">
-                  <c:v>96.004930945943</c:v>
+                  <c:v>96.00493094594296</c:v>
                 </c:pt>
                 <c:pt idx="2">
-                  <c:v>62.26752661005725</c:v>
+                  <c:v>62.267526610057104</c:v>
                 </c:pt>
               </c:numCache>
             </c:numRef>
@@ -15200,7 +15200,7 @@
                 </a:solidFill>
                 <a:latin typeface="Calibri"/>
               </a:rPr>
-              <a:t>KİŞİ-AY BAŞINA CİRO</a:t>
+              <a:t>FTE BAŞINA CİRO</a:t>
             </a:r>
           </a:p>
         </p:txBody>
@@ -15239,7 +15239,7 @@
                 </a:solidFill>
                 <a:latin typeface="Calibri"/>
               </a:rPr>
-              <a:t>+%50,6</a:t>
+              <a:t>+%50,2</a:t>
             </a:r>
           </a:p>
         </p:txBody>
@@ -15278,7 +15278,7 @@
                 </a:solidFill>
                 <a:latin typeface="Calibri"/>
               </a:rPr>
-              <a:t>279 → 420 bin TL</a:t>
+              <a:t>316 → 475 bin TL</a:t>
             </a:r>
           </a:p>
         </p:txBody>
@@ -15431,7 +15431,7 @@
                 </a:solidFill>
                 <a:latin typeface="Calibri"/>
               </a:rPr>
-              <a:t>KİŞİ-AY BAŞINA MALİYET</a:t>
+              <a:t>FTE BAŞINA MALİYET</a:t>
             </a:r>
           </a:p>
         </p:txBody>
@@ -15470,7 +15470,7 @@
                 </a:solidFill>
                 <a:latin typeface="Calibri"/>
               </a:rPr>
-              <a:t>+%33,9</a:t>
+              <a:t>+%33,6</a:t>
             </a:r>
           </a:p>
         </p:txBody>
@@ -15509,7 +15509,7 @@
                 </a:solidFill>
                 <a:latin typeface="Calibri"/>
               </a:rPr>
-              <a:t>40 → 53 bin TL (ücret artışı)</a:t>
+              <a:t>45 → 60 bin TL (ücret artışı)</a:t>
             </a:r>
           </a:p>
         </p:txBody>
@@ -15524,7 +15524,7 @@
         </p:nvGraphicFramePr>
         <p:xfrm>
           <a:off x="548640" y="3291840"/>
-          <a:ext cx="7223760" cy="1536192"/>
+          <a:ext cx="7223760" cy="1755648"/>
         </p:xfrm>
         <a:graphic>
           <a:graphicData uri="http://schemas.openxmlformats.org/drawingml/2006/table">
@@ -15670,7 +15670,7 @@
                           </a:solidFill>
                           <a:latin typeface="Calibri"/>
                         </a:rPr>
-                        <a:t>Kişi-ay (bordro)</a:t>
+                        <a:t>FTE (tam zaman eşdeğer)</a:t>
                       </a:r>
                     </a:p>
                   </a:txBody>
@@ -15693,7 +15693,7 @@
                           </a:solidFill>
                           <a:latin typeface="Calibri"/>
                         </a:rPr>
-                        <a:t>110</a:t>
+                        <a:t>97,1</a:t>
                       </a:r>
                     </a:p>
                   </a:txBody>
@@ -15716,7 +15716,7 @@
                           </a:solidFill>
                           <a:latin typeface="Calibri"/>
                         </a:rPr>
-                        <a:t>127</a:t>
+                        <a:t>112,4</a:t>
                       </a:r>
                     </a:p>
                   </a:txBody>
@@ -15739,7 +15739,7 @@
                           </a:solidFill>
                           <a:latin typeface="Calibri"/>
                         </a:rPr>
-                        <a:t>+%15,5</a:t>
+                        <a:t>+%15,8</a:t>
                       </a:r>
                     </a:p>
                   </a:txBody>
@@ -15762,7 +15762,7 @@
                           </a:solidFill>
                           <a:latin typeface="Calibri"/>
                         </a:rPr>
-                        <a:t>+%9,6</a:t>
+                        <a:t>+%11,3</a:t>
                       </a:r>
                     </a:p>
                   </a:txBody>
@@ -15787,7 +15787,7 @@
                           </a:solidFill>
                           <a:latin typeface="Calibri"/>
                         </a:rPr>
-                        <a:t>Brüt ücret</a:t>
+                        <a:t>  — bordro kaydı (bilgi)</a:t>
                       </a:r>
                     </a:p>
                   </a:txBody>
@@ -15810,7 +15810,7 @@
                           </a:solidFill>
                           <a:latin typeface="Calibri"/>
                         </a:rPr>
-                        <a:t>3,6 M TL</a:t>
+                        <a:t>110</a:t>
                       </a:r>
                     </a:p>
                   </a:txBody>
@@ -15833,7 +15833,7 @@
                           </a:solidFill>
                           <a:latin typeface="Calibri"/>
                         </a:rPr>
-                        <a:t>5,5 M TL</a:t>
+                        <a:t>127</a:t>
                       </a:r>
                     </a:p>
                   </a:txBody>
@@ -15856,7 +15856,7 @@
                           </a:solidFill>
                           <a:latin typeface="Calibri"/>
                         </a:rPr>
-                        <a:t>+%53,5</a:t>
+                        <a:t>+%15,5</a:t>
                       </a:r>
                     </a:p>
                   </a:txBody>
@@ -15879,7 +15879,7 @@
                           </a:solidFill>
                           <a:latin typeface="Calibri"/>
                         </a:rPr>
-                        <a:t>+%50,5</a:t>
+                        <a:t>+%9,6</a:t>
                       </a:r>
                     </a:p>
                   </a:txBody>
@@ -15904,7 +15904,7 @@
                           </a:solidFill>
                           <a:latin typeface="Calibri"/>
                         </a:rPr>
-                        <a:t>İşveren SGK + işsizlik</a:t>
+                        <a:t>Brüt ücret</a:t>
                       </a:r>
                     </a:p>
                   </a:txBody>
@@ -15927,7 +15927,7 @@
                           </a:solidFill>
                           <a:latin typeface="Calibri"/>
                         </a:rPr>
-                        <a:t>0,8 M TL</a:t>
+                        <a:t>3,6 M TL</a:t>
                       </a:r>
                     </a:p>
                   </a:txBody>
@@ -15950,7 +15950,7 @@
                           </a:solidFill>
                           <a:latin typeface="Calibri"/>
                         </a:rPr>
-                        <a:t>1,3 M TL</a:t>
+                        <a:t>5,5 M TL</a:t>
                       </a:r>
                     </a:p>
                   </a:txBody>
@@ -15973,7 +15973,7 @@
                           </a:solidFill>
                           <a:latin typeface="Calibri"/>
                         </a:rPr>
-                        <a:t>+%59,5</a:t>
+                        <a:t>+%53,5</a:t>
                       </a:r>
                     </a:p>
                   </a:txBody>
@@ -15996,7 +15996,7 @@
                           </a:solidFill>
                           <a:latin typeface="Calibri"/>
                         </a:rPr>
-                        <a:t>+%56,3</a:t>
+                        <a:t>+%50,5</a:t>
                       </a:r>
                     </a:p>
                   </a:txBody>
@@ -16015,111 +16015,111 @@
                     <a:p>
                       <a:pPr algn="l"/>
                       <a:r>
+                        <a:rPr sz="950" b="0">
+                          <a:solidFill>
+                            <a:srgbClr val="333333"/>
+                          </a:solidFill>
+                          <a:latin typeface="Calibri"/>
+                        </a:rPr>
+                        <a:t>İşveren SGK + işsizlik</a:t>
+                      </a:r>
+                    </a:p>
+                  </a:txBody>
+                  <a:tcPr>
+                    <a:solidFill>
+                      <a:srgbClr val="FAFAFA"/>
+                    </a:solidFill>
+                  </a:tcPr>
+                </a:tc>
+                <a:tc>
+                  <a:txBody>
+                    <a:bodyPr/>
+                    <a:lstStyle/>
+                    <a:p>
+                      <a:pPr algn="ctr"/>
+                      <a:r>
+                        <a:rPr sz="950" b="0">
+                          <a:solidFill>
+                            <a:srgbClr val="333333"/>
+                          </a:solidFill>
+                          <a:latin typeface="Calibri"/>
+                        </a:rPr>
+                        <a:t>0,8 M TL</a:t>
+                      </a:r>
+                    </a:p>
+                  </a:txBody>
+                  <a:tcPr>
+                    <a:solidFill>
+                      <a:srgbClr val="FAFAFA"/>
+                    </a:solidFill>
+                  </a:tcPr>
+                </a:tc>
+                <a:tc>
+                  <a:txBody>
+                    <a:bodyPr/>
+                    <a:lstStyle/>
+                    <a:p>
+                      <a:pPr algn="ctr"/>
+                      <a:r>
+                        <a:rPr sz="950" b="0">
+                          <a:solidFill>
+                            <a:srgbClr val="333333"/>
+                          </a:solidFill>
+                          <a:latin typeface="Calibri"/>
+                        </a:rPr>
+                        <a:t>1,3 M TL</a:t>
+                      </a:r>
+                    </a:p>
+                  </a:txBody>
+                  <a:tcPr>
+                    <a:solidFill>
+                      <a:srgbClr val="FAFAFA"/>
+                    </a:solidFill>
+                  </a:tcPr>
+                </a:tc>
+                <a:tc>
+                  <a:txBody>
+                    <a:bodyPr/>
+                    <a:lstStyle/>
+                    <a:p>
+                      <a:pPr algn="ctr"/>
+                      <a:r>
                         <a:rPr sz="950" b="1">
                           <a:solidFill>
-                            <a:srgbClr val="333333"/>
-                          </a:solidFill>
-                          <a:latin typeface="Calibri"/>
-                        </a:rPr>
-                        <a:t>PERSONEL MALİYETİ (brüt işveren)</a:t>
-                      </a:r>
-                    </a:p>
-                  </a:txBody>
-                  <a:tcPr>
-                    <a:solidFill>
-                      <a:srgbClr val="F2F2F2"/>
-                    </a:solidFill>
-                  </a:tcPr>
-                </a:tc>
-                <a:tc>
-                  <a:txBody>
-                    <a:bodyPr/>
-                    <a:lstStyle/>
-                    <a:p>
-                      <a:pPr algn="ctr"/>
-                      <a:r>
-                        <a:rPr sz="950" b="1">
-                          <a:solidFill>
-                            <a:srgbClr val="333333"/>
-                          </a:solidFill>
-                          <a:latin typeface="Calibri"/>
-                        </a:rPr>
-                        <a:t>4,4 M TL</a:t>
-                      </a:r>
-                    </a:p>
-                  </a:txBody>
-                  <a:tcPr>
-                    <a:solidFill>
-                      <a:srgbClr val="F2F2F2"/>
-                    </a:solidFill>
-                  </a:tcPr>
-                </a:tc>
-                <a:tc>
-                  <a:txBody>
-                    <a:bodyPr/>
-                    <a:lstStyle/>
-                    <a:p>
-                      <a:pPr algn="ctr"/>
-                      <a:r>
-                        <a:rPr sz="950" b="1">
-                          <a:solidFill>
-                            <a:srgbClr val="333333"/>
-                          </a:solidFill>
-                          <a:latin typeface="Calibri"/>
-                        </a:rPr>
-                        <a:t>6,8 M TL</a:t>
-                      </a:r>
-                    </a:p>
-                  </a:txBody>
-                  <a:tcPr>
-                    <a:solidFill>
-                      <a:srgbClr val="F2F2F2"/>
-                    </a:solidFill>
-                  </a:tcPr>
-                </a:tc>
-                <a:tc>
-                  <a:txBody>
-                    <a:bodyPr/>
-                    <a:lstStyle/>
-                    <a:p>
-                      <a:pPr algn="ctr"/>
-                      <a:r>
-                        <a:rPr sz="950" b="1">
-                          <a:solidFill>
                             <a:srgbClr val="A6001A"/>
                           </a:solidFill>
                           <a:latin typeface="Calibri"/>
                         </a:rPr>
-                        <a:t>+%54,6</a:t>
-                      </a:r>
-                    </a:p>
-                  </a:txBody>
-                  <a:tcPr>
-                    <a:solidFill>
-                      <a:srgbClr val="F2F2F2"/>
-                    </a:solidFill>
-                  </a:tcPr>
-                </a:tc>
-                <a:tc>
-                  <a:txBody>
-                    <a:bodyPr/>
-                    <a:lstStyle/>
-                    <a:p>
-                      <a:pPr algn="ctr"/>
-                      <a:r>
-                        <a:rPr sz="950" b="1">
+                        <a:t>+%59,5</a:t>
+                      </a:r>
+                    </a:p>
+                  </a:txBody>
+                  <a:tcPr>
+                    <a:solidFill>
+                      <a:srgbClr val="FAFAFA"/>
+                    </a:solidFill>
+                  </a:tcPr>
+                </a:tc>
+                <a:tc>
+                  <a:txBody>
+                    <a:bodyPr/>
+                    <a:lstStyle/>
+                    <a:p>
+                      <a:pPr algn="ctr"/>
+                      <a:r>
+                        <a:rPr sz="950" b="0">
                           <a:solidFill>
                             <a:srgbClr val="9A9A9A"/>
                           </a:solidFill>
                           <a:latin typeface="Calibri"/>
                         </a:rPr>
-                        <a:t>+%51,5</a:t>
-                      </a:r>
-                    </a:p>
-                  </a:txBody>
-                  <a:tcPr>
-                    <a:solidFill>
-                      <a:srgbClr val="F2F2F2"/>
+                        <a:t>+%56,3</a:t>
+                      </a:r>
+                    </a:p>
+                  </a:txBody>
+                  <a:tcPr>
+                    <a:solidFill>
+                      <a:srgbClr val="FAFAFA"/>
                     </a:solidFill>
                   </a:tcPr>
                 </a:tc>
@@ -16132,6 +16132,123 @@
                     <a:p>
                       <a:pPr algn="l"/>
                       <a:r>
+                        <a:rPr sz="950" b="1">
+                          <a:solidFill>
+                            <a:srgbClr val="333333"/>
+                          </a:solidFill>
+                          <a:latin typeface="Calibri"/>
+                        </a:rPr>
+                        <a:t>PERSONEL MALİYETİ (brüt işveren)</a:t>
+                      </a:r>
+                    </a:p>
+                  </a:txBody>
+                  <a:tcPr>
+                    <a:solidFill>
+                      <a:srgbClr val="F2F2F2"/>
+                    </a:solidFill>
+                  </a:tcPr>
+                </a:tc>
+                <a:tc>
+                  <a:txBody>
+                    <a:bodyPr/>
+                    <a:lstStyle/>
+                    <a:p>
+                      <a:pPr algn="ctr"/>
+                      <a:r>
+                        <a:rPr sz="950" b="1">
+                          <a:solidFill>
+                            <a:srgbClr val="333333"/>
+                          </a:solidFill>
+                          <a:latin typeface="Calibri"/>
+                        </a:rPr>
+                        <a:t>4,4 M TL</a:t>
+                      </a:r>
+                    </a:p>
+                  </a:txBody>
+                  <a:tcPr>
+                    <a:solidFill>
+                      <a:srgbClr val="F2F2F2"/>
+                    </a:solidFill>
+                  </a:tcPr>
+                </a:tc>
+                <a:tc>
+                  <a:txBody>
+                    <a:bodyPr/>
+                    <a:lstStyle/>
+                    <a:p>
+                      <a:pPr algn="ctr"/>
+                      <a:r>
+                        <a:rPr sz="950" b="1">
+                          <a:solidFill>
+                            <a:srgbClr val="333333"/>
+                          </a:solidFill>
+                          <a:latin typeface="Calibri"/>
+                        </a:rPr>
+                        <a:t>6,8 M TL</a:t>
+                      </a:r>
+                    </a:p>
+                  </a:txBody>
+                  <a:tcPr>
+                    <a:solidFill>
+                      <a:srgbClr val="F2F2F2"/>
+                    </a:solidFill>
+                  </a:tcPr>
+                </a:tc>
+                <a:tc>
+                  <a:txBody>
+                    <a:bodyPr/>
+                    <a:lstStyle/>
+                    <a:p>
+                      <a:pPr algn="ctr"/>
+                      <a:r>
+                        <a:rPr sz="950" b="1">
+                          <a:solidFill>
+                            <a:srgbClr val="A6001A"/>
+                          </a:solidFill>
+                          <a:latin typeface="Calibri"/>
+                        </a:rPr>
+                        <a:t>+%54,6</a:t>
+                      </a:r>
+                    </a:p>
+                  </a:txBody>
+                  <a:tcPr>
+                    <a:solidFill>
+                      <a:srgbClr val="F2F2F2"/>
+                    </a:solidFill>
+                  </a:tcPr>
+                </a:tc>
+                <a:tc>
+                  <a:txBody>
+                    <a:bodyPr/>
+                    <a:lstStyle/>
+                    <a:p>
+                      <a:pPr algn="ctr"/>
+                      <a:r>
+                        <a:rPr sz="950" b="1">
+                          <a:solidFill>
+                            <a:srgbClr val="9A9A9A"/>
+                          </a:solidFill>
+                          <a:latin typeface="Calibri"/>
+                        </a:rPr>
+                        <a:t>+%51,5</a:t>
+                      </a:r>
+                    </a:p>
+                  </a:txBody>
+                  <a:tcPr>
+                    <a:solidFill>
+                      <a:srgbClr val="F2F2F2"/>
+                    </a:solidFill>
+                  </a:tcPr>
+                </a:tc>
+              </a:tr>
+              <a:tr h="219456">
+                <a:tc>
+                  <a:txBody>
+                    <a:bodyPr/>
+                    <a:lstStyle/>
+                    <a:p>
+                      <a:pPr algn="l"/>
+                      <a:r>
                         <a:rPr sz="950" b="0">
                           <a:solidFill>
                             <a:srgbClr val="333333"/>
@@ -16144,7 +16261,7 @@
                   </a:txBody>
                   <a:tcPr>
                     <a:solidFill>
-                      <a:srgbClr val="FFFFFF"/>
+                      <a:srgbClr val="FAFAFA"/>
                     </a:solidFill>
                   </a:tcPr>
                 </a:tc>
@@ -16167,7 +16284,7 @@
                   </a:txBody>
                   <a:tcPr>
                     <a:solidFill>
-                      <a:srgbClr val="FFFFFF"/>
+                      <a:srgbClr val="FAFAFA"/>
                     </a:solidFill>
                   </a:tcPr>
                 </a:tc>
@@ -16190,7 +16307,7 @@
                   </a:txBody>
                   <a:tcPr>
                     <a:solidFill>
-                      <a:srgbClr val="FFFFFF"/>
+                      <a:srgbClr val="FAFAFA"/>
                     </a:solidFill>
                   </a:tcPr>
                 </a:tc>
@@ -16213,7 +16330,7 @@
                   </a:txBody>
                   <a:tcPr>
                     <a:solidFill>
-                      <a:srgbClr val="FFFFFF"/>
+                      <a:srgbClr val="FAFAFA"/>
                     </a:solidFill>
                   </a:tcPr>
                 </a:tc>
@@ -16236,7 +16353,7 @@
                   </a:txBody>
                   <a:tcPr>
                     <a:solidFill>
-                      <a:srgbClr val="FFFFFF"/>
+                      <a:srgbClr val="FAFAFA"/>
                     </a:solidFill>
                   </a:tcPr>
                 </a:tc>
@@ -16458,7 +16575,7 @@
                 </a:solidFill>
                 <a:latin typeface="Calibri"/>
               </a:rPr>
-              <a:t>Personel maliyeti +%54,6 artmıştır; artışın ana kaynağı kişi başına ücret (+%33,9). Buna karşın cironun içindeki personel yükü 1,59 puan gerilemiştir: %14,30 → %12,71.</a:t>
+              <a:t>Personel maliyeti +%54,6 artmıştır; artışın ana kaynağı FTE başına ücret (+%33,6). Buna karşın cironun içindeki personel yükü 1,59 puan gerilemiştir: %14,30 → %12,71.</a:t>
             </a:r>
           </a:p>
           <a:p>
@@ -16513,7 +16630,7 @@
                 </a:solidFill>
                 <a:latin typeface="Calibri"/>
               </a:rPr>
-              <a:t>* Kaynak: Zirve bordro (vw_PuanBil) — maliyet = brüt toplam + işveren SGK hissesi + işveren işsizlik payı · ESAS DÖNEM: Tem · Yıl geneli referansı: 01-07 ay (Oca–Tem), her iki yıl · SEZON PENCERESİ EKSİK: Ağu ayı bordrosu henüz koşmadı (2026 yılı). Sezon karşılaştırması Tem ayı/ayları ile sınırlıdır; Ağustos bordrosu işlendiğinde bu blok kendiliğinden tamamlanır. Yıl geneli için «kümülatif» pencereye bakılır. · Kapsam: üç POS mağazası · Ciro KDV HARİÇ ve Sınav DAHİL (o satışı da aynı mağaza personeli yapar) · Kıdem karşılığı ve yan haklar hariç → maliyet alt sınır.</a:t>
+              <a:t>* Ölçü birimi FTE (tam zaman eşdeğer) = SGK prim günü ÷ 30 — ay içinde yarım çalışan tam sayılmaz · Kaynak: Zirve bordro (vw_PuanBil) — maliyet = brüt toplam + işveren SGK hissesi + işveren işsizlik payı · ESAS DÖNEM: Tem · Yıl geneli referansı: 01-07 ay (Oca–Tem), her iki yıl · SEZON PENCERESİ EKSİK: Ağu ayı bordrosu henüz koşmadı (2026 yılı). Sezon karşılaştırması Tem ayı/ayları ile sınırlıdır; Ağustos bordrosu işlendiğinde bu blok kendiliğinden tamamlanır. Yıl geneli için «kümülatif» pencereye bakılır. · Kapsam: üç POS mağazası · Ciro KDV HARİÇ ve Sınav DAHİL (o satışı da aynı mağaza personeli yapar) · Kıdem karşılığı ve yan haklar hariç → maliyet alt sınır.</a:t>
             </a:r>
           </a:p>
         </p:txBody>
@@ -16802,7 +16919,7 @@
                 </a:solidFill>
                 <a:latin typeface="Calibri"/>
               </a:rPr>
-              <a:t>74 sa/yıl</a:t>
+              <a:t>84 sa/yıl</a:t>
             </a:r>
           </a:p>
         </p:txBody>
@@ -16841,7 +16958,7 @@
                 </a:solidFill>
                 <a:latin typeface="Calibri"/>
               </a:rPr>
-              <a:t>kişi başına (sezon hızı × 12) · yıl geneli 107 sa</a:t>
+              <a:t>kişi başına (sezon hızı × 12) · yıl geneli 118 sa</a:t>
             </a:r>
           </a:p>
         </p:txBody>
@@ -17033,7 +17150,7 @@
                 </a:solidFill>
                 <a:latin typeface="Calibri"/>
               </a:rPr>
-              <a:t>447 sa/yıl</a:t>
+              <a:t>465 sa/yıl</a:t>
             </a:r>
           </a:p>
         </p:txBody>
@@ -17072,7 +17189,7 @@
                 </a:solidFill>
                 <a:latin typeface="Calibri"/>
               </a:rPr>
-              <a:t>aynı iş, 17 kişi-ay eksik kapasite</a:t>
+              <a:t>aynı iş, 15,3 FTE eksik kapasite</a:t>
             </a:r>
           </a:p>
         </p:txBody>
@@ -17422,7 +17539,7 @@
                 </a:solidFill>
                 <a:latin typeface="Calibri"/>
               </a:rPr>
-              <a:t>Kadro 2025 seviyesinde kalsaydı aynı işi çıkarmak için 3.315 saat ek fazla mesai gerekirdi; kişi başına yıllık 447 saate çıkardı ve 270 saatlik yasal sınır AŞILIRDI. Fiili fazla mesai 74 saat/yıl ile sınırın içindedir; ancak sınır hızında çalışan kişi-ay sayısı 1'den 2'ye yükselmiştir — kadro hâlâ dar.</a:t>
+              <a:t>Kadro 2025 seviyesinde kalsaydı aynı işi çıkarmak için 2.984 saat ek fazla mesai gerekirdi; kişi başına yıllık 465 saate çıkardı ve 270 saatlik yasal sınır AŞILIRDI. Fiili fazla mesai 84 saat/yıl ile sınırın içindedir; ancak sınır hızında çalışan kişi-ay sayısı 1'den 2'ye yükselmiştir — kadro hâlâ dar.</a:t>
             </a:r>
           </a:p>
         </p:txBody>
@@ -17711,7 +17828,7 @@
                 </a:solidFill>
                 <a:latin typeface="Calibri"/>
               </a:rPr>
-              <a:t>SEZON AYI KADRO</a:t>
+              <a:t>SEZON AYI KADRO (FTE)</a:t>
             </a:r>
           </a:p>
         </p:txBody>
@@ -17744,13 +17861,13 @@
               </a:lnSpc>
             </a:pPr>
             <a:r>
-              <a:rPr sz="3000" b="1">
+              <a:rPr sz="2600" b="1">
                 <a:solidFill>
                   <a:srgbClr val="E30622"/>
                 </a:solidFill>
                 <a:latin typeface="Calibri"/>
               </a:rPr>
-              <a:t>110 → 127</a:t>
+              <a:t>97,1 → 112,4</a:t>
             </a:r>
           </a:p>
         </p:txBody>
@@ -17789,7 +17906,7 @@
                 </a:solidFill>
                 <a:latin typeface="Calibri"/>
               </a:rPr>
-              <a:t>Tem kişi-ay (bordro) · +%15,5</a:t>
+              <a:t>Tem · +%15,8 · bordro kaydı 110 → 127</a:t>
             </a:r>
           </a:p>
         </p:txBody>
@@ -18308,7 +18425,7 @@
                 </a:solidFill>
                 <a:latin typeface="Calibri"/>
               </a:rPr>
-              <a:t>Kadro — aylık kişi-ay (bordro satırı)</a:t>
+              <a:t>Kadro — aylık FTE (tam zaman eşdeğer = prim günü ÷ 30)</a:t>
             </a:r>
           </a:p>
         </p:txBody>
@@ -18404,7 +18521,7 @@
                 </a:solidFill>
                 <a:latin typeface="Calibri"/>
               </a:rPr>
-              <a:t>* Kaynak: Zirve bordro (vw_PuanBil) aylık · ciro DerinSIS KDV hariç, Sınav dahil · Kapsam: üç POS mağazası · * işaretli ay = sezon ayı (01.07–31.08) · Ağustos bordrosu işlendiğinde tabloya eklenir · Kişi-ay = o ay bordrosu koşan kişi sayısı.</a:t>
+              <a:t>* Ölçü FTE = SGK prim günü ÷ 30 (bordro kaydı sayılsaydı ay içinde 1 gün çalışan da 1 sayılırdı) · Kaynak: Zirve bordro (vw_PuanBil) aylık · ciro DerinSIS KDV hariç, Sınav dahil · Kapsam: üç POS mağazası · * işaretli ay = sezon ayı (01.07–31.08) · Ağustos bordrosu işlendiğinde tabloya eklenir · Bordro kaydı ve ortalama prim günü Excel «Maliyet» sayfasında.</a:t>
             </a:r>
           </a:p>
         </p:txBody>
@@ -21352,7 +21469,7 @@
                 </a:solidFill>
                 <a:latin typeface="Calibri"/>
               </a:rPr>
-              <a:t>Sezonda maliyet +%54,6 artmıştır; artışın ana kaynağı kişi başına ücret (+%33,9), kadro artışı değil. Cironun içindeki personel yükü 1,59 puan GERİLEMİŞTİR: %14,30 → %12,71 (yıl geneli -0,70 puan).</a:t>
+              <a:t>Sezonda maliyet +%54,6 artmıştır; artışın ana kaynağı FTE başına ücret (+%33,6), kadro artışı değil. Cironun içindeki personel yükü 1,59 puan GERİLEMİŞTİR: %14,30 → %12,71 (yıl geneli -0,70 puan).</a:t>
             </a:r>
           </a:p>
         </p:txBody>

--- a/briefings/sezon-kadro-20260902/sunum-kadro-sezon2026.pptx
+++ b/briefings/sezon-kadro-20260902/sunum-kadro-sezon2026.pptx
@@ -596,7 +596,7 @@
               <c:strCache>
                 <c:ptCount val="1"/>
                 <c:pt idx="0">
-                  <c:v>2025 FTE</c:v>
+                  <c:v>2025 kadrolu</c:v>
                 </c:pt>
               </c:strCache>
             </c:strRef>
@@ -608,9 +608,9 @@
           </c:spPr>
           <c:cat>
             <c:strRef>
-              <c:f>Sheet1!$A$2:$A$8</c:f>
+              <c:f>Sheet1!$A$2:$A$11</c:f>
               <c:strCache>
-                <c:ptCount val="7"/>
+                <c:ptCount val="10"/>
                 <c:pt idx="0">
                   <c:v>Oca</c:v>
                 </c:pt>
@@ -632,15 +632,24 @@
                 <c:pt idx="6">
                   <c:v>Tem*</c:v>
                 </c:pt>
+                <c:pt idx="7">
+                  <c:v>Ağu*</c:v>
+                </c:pt>
+                <c:pt idx="8">
+                  <c:v>Eyl*</c:v>
+                </c:pt>
+                <c:pt idx="9">
+                  <c:v>Eki*</c:v>
+                </c:pt>
               </c:strCache>
             </c:strRef>
           </c:cat>
           <c:val>
             <c:numRef>
-              <c:f>Sheet1!$B$2:$B$8</c:f>
+              <c:f>Sheet1!$B$2:$B$11</c:f>
               <c:numCache>
                 <c:formatCode>General</c:formatCode>
-                <c:ptCount val="7"/>
+                <c:ptCount val="10"/>
                 <c:pt idx="0">
                   <c:v>107.5</c:v>
                 </c:pt>
@@ -660,7 +669,16 @@
                   <c:v>97.5</c:v>
                 </c:pt>
                 <c:pt idx="6">
-                  <c:v>97.1</c:v>
+                  <c:v>93.8</c:v>
+                </c:pt>
+                <c:pt idx="7">
+                  <c:v>94.1</c:v>
+                </c:pt>
+                <c:pt idx="8">
+                  <c:v>95.8</c:v>
+                </c:pt>
+                <c:pt idx="9">
+                  <c:v>98.4</c:v>
                 </c:pt>
               </c:numCache>
             </c:numRef>
@@ -675,21 +693,21 @@
               <c:strCache>
                 <c:ptCount val="1"/>
                 <c:pt idx="0">
-                  <c:v>2026 FTE</c:v>
+                  <c:v>2025 sezonluk</c:v>
                 </c:pt>
               </c:strCache>
             </c:strRef>
           </c:tx>
           <c:spPr>
             <a:solidFill>
-              <a:srgbClr val="E30622"/>
+              <a:srgbClr val="7A1020"/>
             </a:solidFill>
           </c:spPr>
           <c:cat>
             <c:strRef>
-              <c:f>Sheet1!$A$2:$A$8</c:f>
+              <c:f>Sheet1!$A$2:$A$11</c:f>
               <c:strCache>
-                <c:ptCount val="7"/>
+                <c:ptCount val="10"/>
                 <c:pt idx="0">
                   <c:v>Oca</c:v>
                 </c:pt>
@@ -711,35 +729,229 @@
                 <c:pt idx="6">
                   <c:v>Tem*</c:v>
                 </c:pt>
+                <c:pt idx="7">
+                  <c:v>Ağu*</c:v>
+                </c:pt>
+                <c:pt idx="8">
+                  <c:v>Eyl*</c:v>
+                </c:pt>
+                <c:pt idx="9">
+                  <c:v>Eki*</c:v>
+                </c:pt>
               </c:strCache>
             </c:strRef>
           </c:cat>
           <c:val>
             <c:numRef>
-              <c:f>Sheet1!$C$2:$C$8</c:f>
+              <c:f>Sheet1!$C$2:$C$11</c:f>
               <c:numCache>
                 <c:formatCode>General</c:formatCode>
-                <c:ptCount val="7"/>
+                <c:ptCount val="10"/>
                 <c:pt idx="0">
-                  <c:v>109.9</c:v>
+                  <c:v>0</c:v>
                 </c:pt>
                 <c:pt idx="1">
+                  <c:v>0</c:v>
+                </c:pt>
+                <c:pt idx="2">
+                  <c:v>0</c:v>
+                </c:pt>
+                <c:pt idx="3">
+                  <c:v>0</c:v>
+                </c:pt>
+                <c:pt idx="4">
+                  <c:v>0</c:v>
+                </c:pt>
+                <c:pt idx="5">
+                  <c:v>0</c:v>
+                </c:pt>
+                <c:pt idx="6">
+                  <c:v>3.4</c:v>
+                </c:pt>
+                <c:pt idx="7">
+                  <c:v>26.5</c:v>
+                </c:pt>
+                <c:pt idx="8">
+                  <c:v>37.1</c:v>
+                </c:pt>
+                <c:pt idx="9">
+                  <c:v>9.7</c:v>
+                </c:pt>
+              </c:numCache>
+            </c:numRef>
+          </c:val>
+        </c:ser>
+        <c:ser>
+          <c:idx val="2"/>
+          <c:order val="2"/>
+          <c:tx>
+            <c:strRef>
+              <c:f>Sheet1!$D$1</c:f>
+              <c:strCache>
+                <c:ptCount val="1"/>
+                <c:pt idx="0">
+                  <c:v>2026 kadrolu</c:v>
+                </c:pt>
+              </c:strCache>
+            </c:strRef>
+          </c:tx>
+          <c:spPr>
+            <a:solidFill>
+              <a:srgbClr val="E30622"/>
+            </a:solidFill>
+          </c:spPr>
+          <c:cat>
+            <c:strRef>
+              <c:f>Sheet1!$A$2:$A$11</c:f>
+              <c:strCache>
+                <c:ptCount val="10"/>
+                <c:pt idx="0">
+                  <c:v>Oca</c:v>
+                </c:pt>
+                <c:pt idx="1">
+                  <c:v>Şub</c:v>
+                </c:pt>
+                <c:pt idx="2">
+                  <c:v>Mar</c:v>
+                </c:pt>
+                <c:pt idx="3">
+                  <c:v>Nis</c:v>
+                </c:pt>
+                <c:pt idx="4">
+                  <c:v>May</c:v>
+                </c:pt>
+                <c:pt idx="5">
+                  <c:v>Haz</c:v>
+                </c:pt>
+                <c:pt idx="6">
+                  <c:v>Tem*</c:v>
+                </c:pt>
+                <c:pt idx="7">
+                  <c:v>Ağu*</c:v>
+                </c:pt>
+                <c:pt idx="8">
+                  <c:v>Eyl*</c:v>
+                </c:pt>
+                <c:pt idx="9">
+                  <c:v>Eki*</c:v>
+                </c:pt>
+              </c:strCache>
+            </c:strRef>
+          </c:cat>
+          <c:val>
+            <c:numRef>
+              <c:f>Sheet1!$D$2:$D$11</c:f>
+              <c:numCache>
+                <c:formatCode>General</c:formatCode>
+                <c:ptCount val="10"/>
+                <c:pt idx="0">
+                  <c:v>106.0</c:v>
+                </c:pt>
+                <c:pt idx="1">
+                  <c:v>107.0</c:v>
+                </c:pt>
+                <c:pt idx="2">
+                  <c:v>108.6</c:v>
+                </c:pt>
+                <c:pt idx="3">
+                  <c:v>106.9</c:v>
+                </c:pt>
+                <c:pt idx="4">
+                  <c:v>109.2</c:v>
+                </c:pt>
+                <c:pt idx="5">
+                  <c:v>107.0</c:v>
+                </c:pt>
+                <c:pt idx="6">
                   <c:v>110.9</c:v>
                 </c:pt>
+              </c:numCache>
+            </c:numRef>
+          </c:val>
+        </c:ser>
+        <c:ser>
+          <c:idx val="3"/>
+          <c:order val="3"/>
+          <c:tx>
+            <c:strRef>
+              <c:f>Sheet1!$E$1</c:f>
+              <c:strCache>
+                <c:ptCount val="1"/>
+                <c:pt idx="0">
+                  <c:v>2026 sezonluk</c:v>
+                </c:pt>
+              </c:strCache>
+            </c:strRef>
+          </c:tx>
+          <c:spPr>
+            <a:solidFill>
+              <a:srgbClr val="A6001A"/>
+            </a:solidFill>
+          </c:spPr>
+          <c:cat>
+            <c:strRef>
+              <c:f>Sheet1!$A$2:$A$11</c:f>
+              <c:strCache>
+                <c:ptCount val="10"/>
+                <c:pt idx="0">
+                  <c:v>Oca</c:v>
+                </c:pt>
+                <c:pt idx="1">
+                  <c:v>Şub</c:v>
+                </c:pt>
                 <c:pt idx="2">
-                  <c:v>112.6</c:v>
+                  <c:v>Mar</c:v>
                 </c:pt>
                 <c:pt idx="3">
-                  <c:v>110.0</c:v>
+                  <c:v>Nis</c:v>
                 </c:pt>
                 <c:pt idx="4">
-                  <c:v>112.0</c:v>
+                  <c:v>May</c:v>
                 </c:pt>
                 <c:pt idx="5">
-                  <c:v>108.2</c:v>
+                  <c:v>Haz</c:v>
                 </c:pt>
                 <c:pt idx="6">
-                  <c:v>112.4</c:v>
+                  <c:v>Tem*</c:v>
+                </c:pt>
+                <c:pt idx="7">
+                  <c:v>Ağu*</c:v>
+                </c:pt>
+                <c:pt idx="8">
+                  <c:v>Eyl*</c:v>
+                </c:pt>
+                <c:pt idx="9">
+                  <c:v>Eki*</c:v>
+                </c:pt>
+              </c:strCache>
+            </c:strRef>
+          </c:cat>
+          <c:val>
+            <c:numRef>
+              <c:f>Sheet1!$E$2:$E$11</c:f>
+              <c:numCache>
+                <c:formatCode>General</c:formatCode>
+                <c:ptCount val="10"/>
+                <c:pt idx="0">
+                  <c:v>4.0</c:v>
+                </c:pt>
+                <c:pt idx="1">
+                  <c:v>3.9</c:v>
+                </c:pt>
+                <c:pt idx="2">
+                  <c:v>4.0</c:v>
+                </c:pt>
+                <c:pt idx="3">
+                  <c:v>3.1</c:v>
+                </c:pt>
+                <c:pt idx="4">
+                  <c:v>2.9</c:v>
+                </c:pt>
+                <c:pt idx="5">
+                  <c:v>1.2</c:v>
+                </c:pt>
+                <c:pt idx="6">
+                  <c:v>1.5</c:v>
                 </c:pt>
               </c:numCache>
             </c:numRef>
@@ -852,9 +1064,9 @@
           </c:spPr>
           <c:cat>
             <c:strRef>
-              <c:f>Sheet1!$A$2:$A$8</c:f>
+              <c:f>Sheet1!$A$2:$A$11</c:f>
               <c:strCache>
-                <c:ptCount val="7"/>
+                <c:ptCount val="10"/>
                 <c:pt idx="0">
                   <c:v>Oca</c:v>
                 </c:pt>
@@ -876,15 +1088,24 @@
                 <c:pt idx="6">
                   <c:v>Tem*</c:v>
                 </c:pt>
+                <c:pt idx="7">
+                  <c:v>Ağu*</c:v>
+                </c:pt>
+                <c:pt idx="8">
+                  <c:v>Eyl*</c:v>
+                </c:pt>
+                <c:pt idx="9">
+                  <c:v>Eki*</c:v>
+                </c:pt>
               </c:strCache>
             </c:strRef>
           </c:cat>
           <c:val>
             <c:numRef>
-              <c:f>Sheet1!$B$2:$B$8</c:f>
+              <c:f>Sheet1!$B$2:$B$11</c:f>
               <c:numCache>
                 <c:formatCode>General</c:formatCode>
-                <c:ptCount val="7"/>
+                <c:ptCount val="10"/>
                 <c:pt idx="0">
                   <c:v>10.640435897564577</c:v>
                 </c:pt>
@@ -892,10 +1113,10 @@
                   <c:v>10.971390826419269</c:v>
                 </c:pt>
                 <c:pt idx="2">
-                  <c:v>13.882458998021422</c:v>
+                  <c:v>13.882458998021423</c:v>
                 </c:pt>
                 <c:pt idx="3">
-                  <c:v>11.502227588672248</c:v>
+                  <c:v>11.50222758867225</c:v>
                 </c:pt>
                 <c:pt idx="4">
                   <c:v>15.964872627552756</c:v>
@@ -905,6 +1126,15 @@
                 </c:pt>
                 <c:pt idx="6">
                   <c:v>14.29703378344554</c:v>
+                </c:pt>
+                <c:pt idx="7">
+                  <c:v>2.9123977005804367</c:v>
+                </c:pt>
+                <c:pt idx="8">
+                  <c:v>2.0983488104808345</c:v>
+                </c:pt>
+                <c:pt idx="9">
+                  <c:v>6.8726114631878845</c:v>
                 </c:pt>
               </c:numCache>
             </c:numRef>
@@ -931,9 +1161,9 @@
           </c:spPr>
           <c:cat>
             <c:strRef>
-              <c:f>Sheet1!$A$2:$A$8</c:f>
+              <c:f>Sheet1!$A$2:$A$11</c:f>
               <c:strCache>
-                <c:ptCount val="7"/>
+                <c:ptCount val="10"/>
                 <c:pt idx="0">
                   <c:v>Oca</c:v>
                 </c:pt>
@@ -955,32 +1185,41 @@
                 <c:pt idx="6">
                   <c:v>Tem*</c:v>
                 </c:pt>
+                <c:pt idx="7">
+                  <c:v>Ağu*</c:v>
+                </c:pt>
+                <c:pt idx="8">
+                  <c:v>Eyl*</c:v>
+                </c:pt>
+                <c:pt idx="9">
+                  <c:v>Eki*</c:v>
+                </c:pt>
               </c:strCache>
             </c:strRef>
           </c:cat>
           <c:val>
             <c:numRef>
-              <c:f>Sheet1!$C$2:$C$8</c:f>
+              <c:f>Sheet1!$C$2:$C$11</c:f>
               <c:numCache>
                 <c:formatCode>General</c:formatCode>
-                <c:ptCount val="7"/>
+                <c:ptCount val="10"/>
                 <c:pt idx="0">
-                  <c:v>9.342797291737972</c:v>
+                  <c:v>9.342797291737968</c:v>
                 </c:pt>
                 <c:pt idx="1">
                   <c:v>11.288098438412124</c:v>
                 </c:pt>
                 <c:pt idx="2">
-                  <c:v>11.702927412298237</c:v>
+                  <c:v>11.702927412298235</c:v>
                 </c:pt>
                 <c:pt idx="3">
                   <c:v>13.23692598350995</c:v>
                 </c:pt>
                 <c:pt idx="4">
-                  <c:v>13.848433011968734</c:v>
+                  <c:v>13.84843301196873</c:v>
                 </c:pt>
                 <c:pt idx="5">
-                  <c:v>13.921476943829806</c:v>
+                  <c:v>13.921476943829802</c:v>
                 </c:pt>
                 <c:pt idx="6">
                   <c:v>12.711606463897567</c:v>
@@ -1176,7 +1415,7 @@
                   <c:v>775.03155</c:v>
                 </c:pt>
                 <c:pt idx="1">
-                  <c:v>122.53417561000005</c:v>
+                  <c:v>122.53417561000008</c:v>
                 </c:pt>
                 <c:pt idx="2">
                   <c:v>160</c:v>
@@ -1369,7 +1608,7 @@
                 <c:formatCode>General</c:formatCode>
                 <c:ptCount val="3"/>
                 <c:pt idx="0">
-                  <c:v>5578.704629629629</c:v>
+                  <c:v>5578.70462962963</c:v>
                 </c:pt>
                 <c:pt idx="1">
                   <c:v>4229.647540983607</c:v>
@@ -1532,7 +1771,7 @@
                   <c:v>34377.72383333333</c:v>
                 </c:pt>
                 <c:pt idx="1">
-                  <c:v>25227.686043956044</c:v>
+                  <c:v>25227.68604395604</c:v>
                 </c:pt>
                 <c:pt idx="2">
                   <c:v>28668.031666666666</c:v>
@@ -2083,7 +2322,7 @@
                 <c:formatCode>General</c:formatCode>
                 <c:ptCount val="3"/>
                 <c:pt idx="0">
-                  <c:v>30.54425135213488</c:v>
+                  <c:v>30.5442513521349</c:v>
                 </c:pt>
                 <c:pt idx="1">
                   <c:v>48.848767711265985</c:v>
@@ -2141,10 +2380,10 @@
                   <c:v>57.55862375814162</c:v>
                 </c:pt>
                 <c:pt idx="1">
-                  <c:v>96.00493094594296</c:v>
+                  <c:v>96.004930945943</c:v>
                 </c:pt>
                 <c:pt idx="2">
-                  <c:v>62.267526610057104</c:v>
+                  <c:v>62.267526610057274</c:v>
                 </c:pt>
               </c:numCache>
             </c:numRef>
@@ -14816,7 +15055,7 @@
           <a:lstStyle/>
           <a:p>
             <a:r>
-              <a:t>Personel Maliyeti ve Ciro Oranı — Sezon (Tem)</a:t>
+              <a:t>Personel Maliyeti ve Ciro Oranı — Sezonun Tamamlanan Kısmı (Tem)</a:t>
             </a:r>
           </a:p>
         </p:txBody>
@@ -15524,7 +15763,7 @@
         </p:nvGraphicFramePr>
         <p:xfrm>
           <a:off x="548640" y="3291840"/>
-          <a:ext cx="7223760" cy="1755648"/>
+          <a:ext cx="7223760" cy="2194560"/>
         </p:xfrm>
         <a:graphic>
           <a:graphicData uri="http://schemas.openxmlformats.org/drawingml/2006/table">
@@ -15787,6 +16026,240 @@
                           </a:solidFill>
                           <a:latin typeface="Calibri"/>
                         </a:rPr>
+                        <a:t>  — kadrolu FTE</a:t>
+                      </a:r>
+                    </a:p>
+                  </a:txBody>
+                  <a:tcPr>
+                    <a:solidFill>
+                      <a:srgbClr val="FAFAFA"/>
+                    </a:solidFill>
+                  </a:tcPr>
+                </a:tc>
+                <a:tc>
+                  <a:txBody>
+                    <a:bodyPr/>
+                    <a:lstStyle/>
+                    <a:p>
+                      <a:pPr algn="ctr"/>
+                      <a:r>
+                        <a:rPr sz="950" b="0">
+                          <a:solidFill>
+                            <a:srgbClr val="333333"/>
+                          </a:solidFill>
+                          <a:latin typeface="Calibri"/>
+                        </a:rPr>
+                        <a:t>93,8</a:t>
+                      </a:r>
+                    </a:p>
+                  </a:txBody>
+                  <a:tcPr>
+                    <a:solidFill>
+                      <a:srgbClr val="FAFAFA"/>
+                    </a:solidFill>
+                  </a:tcPr>
+                </a:tc>
+                <a:tc>
+                  <a:txBody>
+                    <a:bodyPr/>
+                    <a:lstStyle/>
+                    <a:p>
+                      <a:pPr algn="ctr"/>
+                      <a:r>
+                        <a:rPr sz="950" b="0">
+                          <a:solidFill>
+                            <a:srgbClr val="333333"/>
+                          </a:solidFill>
+                          <a:latin typeface="Calibri"/>
+                        </a:rPr>
+                        <a:t>110,9</a:t>
+                      </a:r>
+                    </a:p>
+                  </a:txBody>
+                  <a:tcPr>
+                    <a:solidFill>
+                      <a:srgbClr val="FAFAFA"/>
+                    </a:solidFill>
+                  </a:tcPr>
+                </a:tc>
+                <a:tc>
+                  <a:txBody>
+                    <a:bodyPr/>
+                    <a:lstStyle/>
+                    <a:p>
+                      <a:pPr algn="ctr"/>
+                      <a:r>
+                        <a:rPr sz="950" b="1">
+                          <a:solidFill>
+                            <a:srgbClr val="A6001A"/>
+                          </a:solidFill>
+                          <a:latin typeface="Calibri"/>
+                        </a:rPr>
+                        <a:t>+%18,3</a:t>
+                      </a:r>
+                    </a:p>
+                  </a:txBody>
+                  <a:tcPr>
+                    <a:solidFill>
+                      <a:srgbClr val="FAFAFA"/>
+                    </a:solidFill>
+                  </a:tcPr>
+                </a:tc>
+                <a:tc>
+                  <a:txBody>
+                    <a:bodyPr/>
+                    <a:lstStyle/>
+                    <a:p>
+                      <a:pPr algn="ctr"/>
+                      <a:r>
+                        <a:rPr sz="950" b="0">
+                          <a:solidFill>
+                            <a:srgbClr val="9A9A9A"/>
+                          </a:solidFill>
+                          <a:latin typeface="Calibri"/>
+                        </a:rPr>
+                        <a:t>+%8,9</a:t>
+                      </a:r>
+                    </a:p>
+                  </a:txBody>
+                  <a:tcPr>
+                    <a:solidFill>
+                      <a:srgbClr val="FAFAFA"/>
+                    </a:solidFill>
+                  </a:tcPr>
+                </a:tc>
+              </a:tr>
+              <a:tr h="219456">
+                <a:tc>
+                  <a:txBody>
+                    <a:bodyPr/>
+                    <a:lstStyle/>
+                    <a:p>
+                      <a:pPr algn="l"/>
+                      <a:r>
+                        <a:rPr sz="950" b="0">
+                          <a:solidFill>
+                            <a:srgbClr val="333333"/>
+                          </a:solidFill>
+                          <a:latin typeface="Calibri"/>
+                        </a:rPr>
+                        <a:t>  — sezonluk FTE</a:t>
+                      </a:r>
+                    </a:p>
+                  </a:txBody>
+                  <a:tcPr>
+                    <a:solidFill>
+                      <a:srgbClr val="FFFFFF"/>
+                    </a:solidFill>
+                  </a:tcPr>
+                </a:tc>
+                <a:tc>
+                  <a:txBody>
+                    <a:bodyPr/>
+                    <a:lstStyle/>
+                    <a:p>
+                      <a:pPr algn="ctr"/>
+                      <a:r>
+                        <a:rPr sz="950" b="0">
+                          <a:solidFill>
+                            <a:srgbClr val="333333"/>
+                          </a:solidFill>
+                          <a:latin typeface="Calibri"/>
+                        </a:rPr>
+                        <a:t>3,4</a:t>
+                      </a:r>
+                    </a:p>
+                  </a:txBody>
+                  <a:tcPr>
+                    <a:solidFill>
+                      <a:srgbClr val="FFFFFF"/>
+                    </a:solidFill>
+                  </a:tcPr>
+                </a:tc>
+                <a:tc>
+                  <a:txBody>
+                    <a:bodyPr/>
+                    <a:lstStyle/>
+                    <a:p>
+                      <a:pPr algn="ctr"/>
+                      <a:r>
+                        <a:rPr sz="950" b="0">
+                          <a:solidFill>
+                            <a:srgbClr val="333333"/>
+                          </a:solidFill>
+                          <a:latin typeface="Calibri"/>
+                        </a:rPr>
+                        <a:t>1,5</a:t>
+                      </a:r>
+                    </a:p>
+                  </a:txBody>
+                  <a:tcPr>
+                    <a:solidFill>
+                      <a:srgbClr val="FFFFFF"/>
+                    </a:solidFill>
+                  </a:tcPr>
+                </a:tc>
+                <a:tc>
+                  <a:txBody>
+                    <a:bodyPr/>
+                    <a:lstStyle/>
+                    <a:p>
+                      <a:pPr algn="ctr"/>
+                      <a:r>
+                        <a:rPr sz="950" b="1">
+                          <a:solidFill>
+                            <a:srgbClr val="A6001A"/>
+                          </a:solidFill>
+                          <a:latin typeface="Calibri"/>
+                        </a:rPr>
+                        <a:t>−%54,5</a:t>
+                      </a:r>
+                    </a:p>
+                  </a:txBody>
+                  <a:tcPr>
+                    <a:solidFill>
+                      <a:srgbClr val="FFFFFF"/>
+                    </a:solidFill>
+                  </a:tcPr>
+                </a:tc>
+                <a:tc>
+                  <a:txBody>
+                    <a:bodyPr/>
+                    <a:lstStyle/>
+                    <a:p>
+                      <a:pPr algn="ctr"/>
+                      <a:r>
+                        <a:rPr sz="950" b="0">
+                          <a:solidFill>
+                            <a:srgbClr val="9A9A9A"/>
+                          </a:solidFill>
+                          <a:latin typeface="Calibri"/>
+                        </a:rPr>
+                        <a:t>+%512,9</a:t>
+                      </a:r>
+                    </a:p>
+                  </a:txBody>
+                  <a:tcPr>
+                    <a:solidFill>
+                      <a:srgbClr val="FFFFFF"/>
+                    </a:solidFill>
+                  </a:tcPr>
+                </a:tc>
+              </a:tr>
+              <a:tr h="219456">
+                <a:tc>
+                  <a:txBody>
+                    <a:bodyPr/>
+                    <a:lstStyle/>
+                    <a:p>
+                      <a:pPr algn="l"/>
+                      <a:r>
+                        <a:rPr sz="950" b="0">
+                          <a:solidFill>
+                            <a:srgbClr val="333333"/>
+                          </a:solidFill>
+                          <a:latin typeface="Calibri"/>
+                        </a:rPr>
                         <a:t>  — bordro kaydı (bilgi)</a:t>
                       </a:r>
                     </a:p>
@@ -16549,7 +17022,7 @@
           <a:p>
             <a:pPr algn="l">
               <a:lnSpc>
-                <a:spcPct val="110000"/>
+                <a:spcPct val="108000"/>
               </a:lnSpc>
             </a:pPr>
             <a:r>
@@ -16565,7 +17038,7 @@
           <a:p>
             <a:pPr algn="l">
               <a:lnSpc>
-                <a:spcPct val="110000"/>
+                <a:spcPct val="108000"/>
               </a:lnSpc>
             </a:pPr>
             <a:r>
@@ -16581,17 +17054,17 @@
           <a:p>
             <a:pPr algn="l">
               <a:lnSpc>
-                <a:spcPct val="110000"/>
+                <a:spcPct val="108000"/>
               </a:lnSpc>
             </a:pPr>
             <a:r>
-              <a:rPr sz="900" b="0">
+              <a:rPr sz="850" b="0">
                 <a:solidFill>
                   <a:srgbClr val="9A9A9A"/>
                 </a:solidFill>
                 <a:latin typeface="Calibri"/>
               </a:rPr>
-              <a:t>Ölçüm SEZON penceresindedir; yıl geneli (01-07 ay (Oca–Tem), her iki yıl) oranı da -0,70 puan gerilemiştir.</a:t>
+              <a:t>Sezon Tem–Eki'dir; 2026 sezonu henüz tamamlanmadığı için kıyas Tem ayı iledir. Yıl geneli (01-07 ay (Oca–Tem), her iki yıl) oranı da -0,70 puan gerilemiştir. Geçen yılın TAM sezonunda (Tem–Eki) oran %3,54 idi — sezonda ciro birkaç kat arttığı için oran doğal olarak çok düşüktür.</a:t>
             </a:r>
           </a:p>
         </p:txBody>
@@ -16630,7 +17103,7 @@
                 </a:solidFill>
                 <a:latin typeface="Calibri"/>
               </a:rPr>
-              <a:t>* Ölçü birimi FTE (tam zaman eşdeğer) = SGK prim günü ÷ 30 — ay içinde yarım çalışan tam sayılmaz · Kaynak: Zirve bordro (vw_PuanBil) — maliyet = brüt toplam + işveren SGK hissesi + işveren işsizlik payı · ESAS DÖNEM: Tem · Yıl geneli referansı: 01-07 ay (Oca–Tem), her iki yıl · SEZON PENCERESİ EKSİK: Ağu ayı bordrosu henüz koşmadı (2026 yılı). Sezon karşılaştırması Tem ayı/ayları ile sınırlıdır; Ağustos bordrosu işlendiğinde bu blok kendiliğinden tamamlanır. Yıl geneli için «kümülatif» pencereye bakılır. · Kapsam: üç POS mağazası · Ciro KDV HARİÇ ve Sınav DAHİL (o satışı da aynı mağaza personeli yapar) · Kıdem karşılığı ve yan haklar hariç → maliyet alt sınır.</a:t>
+              <a:t>* Ölçü birimi FTE (tam zaman eşdeğer) = SGK prim günü ÷ 30 — ay içinde yarım çalışan tam sayılmaz · Kaynak: Zirve bordro (vw_PuanBil) — maliyet = brüt toplam + işveren SGK hissesi + işveren işsizlik payı · ESAS DÖNEM: Tem · Yıl geneli referansı: 01-07 ay (Oca–Tem), her iki yıl · 2026 SEZONU HENÜZ TAMAMLANMADI. Sezon = Tem–Eki ayları; Ağu, Eyl, Eki ayı/ayları için bordro henüz işlenmedi (Ağustos bordrosu koşmadı, Eylül–Ekim daha gelmedi). Karşılaştırma tamamlanan ortak ay(lar) ile sınırlıdır: Tem. Geçen yılın TAM sezonu ayrıca referans olarak verilmiştir. · Kapsam: üç POS mağazası · Ciro KDV HARİÇ ve Sınav DAHİL (o satışı da aynı mağaza personeli yapar) · Kıdem karşılığı ve yan haklar hariç → maliyet alt sınır · KADROLU/SEZONLUK ayracı bugünkü Kadro alanıdır (tarihlenmiyor); sezonluk alımın büyük kısmı Ağustos'ta olduğu için sezonluk ağırlığı Ağustos bordrosu işlenince gerçek seviyesine çıkar.</a:t>
             </a:r>
           </a:p>
         </p:txBody>
@@ -18290,7 +18763,7 @@
                 </a:solidFill>
                 <a:latin typeface="Calibri"/>
               </a:rPr>
-              <a:t>KADRO ARTIŞI OLAN AY</a:t>
+              <a:t>SEZON AYI · KADROLU / SEZONLUK</a:t>
             </a:r>
           </a:p>
         </p:txBody>
@@ -18323,13 +18796,13 @@
               </a:lnSpc>
             </a:pPr>
             <a:r>
-              <a:rPr sz="3000" b="1">
+              <a:rPr sz="2400" b="1">
                 <a:solidFill>
                   <a:srgbClr val="9A9A9A"/>
                 </a:solidFill>
                 <a:latin typeface="Calibri"/>
               </a:rPr>
-              <a:t>7 / 7</a:t>
+              <a:t>110,9 / 1,5</a:t>
             </a:r>
           </a:p>
         </p:txBody>
@@ -18368,7 +18841,7 @@
                 </a:solidFill>
                 <a:latin typeface="Calibri"/>
               </a:rPr>
-              <a:t>artış tek ayda değil, tüm aylara yayılı</a:t>
+              <a:t>FTE · kadro artışı 7/7 ayda</a:t>
             </a:r>
           </a:p>
         </p:txBody>
@@ -18425,7 +18898,7 @@
                 </a:solidFill>
                 <a:latin typeface="Calibri"/>
               </a:rPr>
-              <a:t>Kadro — aylık FTE (tam zaman eşdeğer = prim günü ÷ 30)</a:t>
+              <a:t>Kadro — aylık FTE: kadrolu + sezonluk, iki yıl (2026 sezonu Ağu–Eki'de dolacak)</a:t>
             </a:r>
           </a:p>
         </p:txBody>
@@ -18521,7 +18994,7 @@
                 </a:solidFill>
                 <a:latin typeface="Calibri"/>
               </a:rPr>
-              <a:t>* Ölçü FTE = SGK prim günü ÷ 30 (bordro kaydı sayılsaydı ay içinde 1 gün çalışan da 1 sayılırdı) · Kaynak: Zirve bordro (vw_PuanBil) aylık · ciro DerinSIS KDV hariç, Sınav dahil · Kapsam: üç POS mağazası · * işaretli ay = sezon ayı (01.07–31.08) · Ağustos bordrosu işlendiğinde tabloya eklenir · Bordro kaydı ve ortalama prim günü Excel «Maliyet» sayfasında.</a:t>
+              <a:t>* Sezon = Tem–Eki (Temmuz hazırlık; asıl hacim ve sezonluk kadro Ağustos–Ekim) · 2026 sezonunun boş ayları bordrosu henüz koşmadığı için çizilmemiştir · Ölçü FTE = SGK prim günü ÷ 30 (bordro kaydı sayılsaydı ay içinde 1 gün çalışan da 1 sayılırdı) · Kaynak: Zirve bordro (vw_PuanBil) aylık · ciro DerinSIS KDV hariç, Sınav dahil · Kapsam: üç POS mağazası · * işaretli ay = sezon ayı (Tem–Eki) · Ağustos, Eylül, Ekim bordrosu işlendiğinde tabloya eklenir · Bordro kaydı ve ortalama prim günü Excel «Maliyet» sayfasında.</a:t>
             </a:r>
           </a:p>
         </p:txBody>

--- a/briefings/sezon-kadro-20260902/sunum-kadro-sezon2026.pptx
+++ b/briefings/sezon-kadro-20260902/sunum-kadro-sezon2026.pptx
@@ -28,6 +28,7 @@
     <p:sldId id="273" r:id="rId24"/>
     <p:sldId id="274" r:id="rId25"/>
     <p:sldId id="275" r:id="rId26"/>
+    <p:sldId id="276" r:id="rId27"/>
   </p:sldIdLst>
   <p:sldSz cx="12192000" cy="6858000"/>
   <p:notesSz cx="6858000" cy="9144000"/>
@@ -1107,34 +1108,34 @@
                 <c:formatCode>General</c:formatCode>
                 <c:ptCount val="10"/>
                 <c:pt idx="0">
-                  <c:v>10.640435897564577</c:v>
+                  <c:v>10.640435897565483</c:v>
                 </c:pt>
                 <c:pt idx="1">
-                  <c:v>10.971390826419269</c:v>
+                  <c:v>10.971390826419475</c:v>
                 </c:pt>
                 <c:pt idx="2">
-                  <c:v>13.882458998021423</c:v>
+                  <c:v>13.88245899802121</c:v>
                 </c:pt>
                 <c:pt idx="3">
-                  <c:v>11.50222758867225</c:v>
+                  <c:v>11.502227588672273</c:v>
                 </c:pt>
                 <c:pt idx="4">
-                  <c:v>15.964872627552756</c:v>
+                  <c:v>15.964872627552854</c:v>
                 </c:pt>
                 <c:pt idx="5">
-                  <c:v>14.25960097198796</c:v>
+                  <c:v>14.259600971987444</c:v>
                 </c:pt>
                 <c:pt idx="6">
-                  <c:v>14.29703378344554</c:v>
+                  <c:v>14.297033783446004</c:v>
                 </c:pt>
                 <c:pt idx="7">
-                  <c:v>2.9123977005804367</c:v>
+                  <c:v>2.912397700580454</c:v>
                 </c:pt>
                 <c:pt idx="8">
-                  <c:v>2.0983488104808345</c:v>
+                  <c:v>2.0983488104807693</c:v>
                 </c:pt>
                 <c:pt idx="9">
-                  <c:v>6.8726114631878845</c:v>
+                  <c:v>6.872611463188822</c:v>
                 </c:pt>
               </c:numCache>
             </c:numRef>
@@ -1204,25 +1205,25 @@
                 <c:formatCode>General</c:formatCode>
                 <c:ptCount val="10"/>
                 <c:pt idx="0">
-                  <c:v>9.342797291737968</c:v>
+                  <c:v>9.342797291737561</c:v>
                 </c:pt>
                 <c:pt idx="1">
-                  <c:v>11.288098438412124</c:v>
+                  <c:v>11.288098438411463</c:v>
                 </c:pt>
                 <c:pt idx="2">
-                  <c:v>11.702927412298235</c:v>
+                  <c:v>11.702927412298179</c:v>
                 </c:pt>
                 <c:pt idx="3">
-                  <c:v>13.23692598350995</c:v>
+                  <c:v>13.236925983510183</c:v>
                 </c:pt>
                 <c:pt idx="4">
-                  <c:v>13.84843301196873</c:v>
+                  <c:v>13.848433011968481</c:v>
                 </c:pt>
                 <c:pt idx="5">
-                  <c:v>13.921476943829802</c:v>
+                  <c:v>13.921476943829141</c:v>
                 </c:pt>
                 <c:pt idx="6">
-                  <c:v>12.711606463897567</c:v>
+                  <c:v>12.711606463897192</c:v>
                 </c:pt>
               </c:numCache>
             </c:numRef>
@@ -1305,6 +1306,257 @@
 </c:chartSpace>
 </file>
 
+<file path=ppt/charts/chart13.xml><?xml version="1.0" encoding="utf-8"?>
+<c:chartSpace xmlns:c="http://schemas.openxmlformats.org/drawingml/2006/chart" xmlns:a="http://schemas.openxmlformats.org/drawingml/2006/main" xmlns:r="http://schemas.openxmlformats.org/officeDocument/2006/relationships">
+  <c:date1904 val="0"/>
+  <c:chart>
+    <c:autoTitleDeleted val="1"/>
+    <c:plotArea>
+      <c:barChart>
+        <c:barDir val="col"/>
+        <c:grouping val="stacked"/>
+        <c:ser>
+          <c:idx val="0"/>
+          <c:order val="0"/>
+          <c:tx>
+            <c:strRef>
+              <c:f>Sheet1!$B$1</c:f>
+              <c:strCache>
+                <c:ptCount val="1"/>
+                <c:pt idx="0">
+                  <c:v>2025 gerçekleşen</c:v>
+                </c:pt>
+              </c:strCache>
+            </c:strRef>
+          </c:tx>
+          <c:spPr>
+            <a:solidFill>
+              <a:srgbClr val="9A9A9A"/>
+            </a:solidFill>
+          </c:spPr>
+          <c:cat>
+            <c:strRef>
+              <c:f>Sheet1!$A$2:$A$5</c:f>
+              <c:strCache>
+                <c:ptCount val="4"/>
+                <c:pt idx="0">
+                  <c:v>Tem</c:v>
+                </c:pt>
+                <c:pt idx="1">
+                  <c:v>Ağu</c:v>
+                </c:pt>
+                <c:pt idx="2">
+                  <c:v>Eyl</c:v>
+                </c:pt>
+                <c:pt idx="3">
+                  <c:v>Eki</c:v>
+                </c:pt>
+              </c:strCache>
+            </c:strRef>
+          </c:cat>
+          <c:val>
+            <c:numRef>
+              <c:f>Sheet1!$B$2:$B$5</c:f>
+              <c:numCache>
+                <c:formatCode>General</c:formatCode>
+                <c:ptCount val="4"/>
+                <c:pt idx="0">
+                  <c:v>30.7</c:v>
+                </c:pt>
+                <c:pt idx="1">
+                  <c:v>186.9</c:v>
+                </c:pt>
+                <c:pt idx="2">
+                  <c:v>313.0</c:v>
+                </c:pt>
+                <c:pt idx="3">
+                  <c:v>71.4</c:v>
+                </c:pt>
+              </c:numCache>
+            </c:numRef>
+          </c:val>
+        </c:ser>
+        <c:ser>
+          <c:idx val="1"/>
+          <c:order val="1"/>
+          <c:tx>
+            <c:strRef>
+              <c:f>Sheet1!$C$1</c:f>
+              <c:strCache>
+                <c:ptCount val="1"/>
+                <c:pt idx="0">
+                  <c:v>2026 gerçekleşen</c:v>
+                </c:pt>
+              </c:strCache>
+            </c:strRef>
+          </c:tx>
+          <c:spPr>
+            <a:solidFill>
+              <a:srgbClr val="E30622"/>
+            </a:solidFill>
+          </c:spPr>
+          <c:cat>
+            <c:strRef>
+              <c:f>Sheet1!$A$2:$A$5</c:f>
+              <c:strCache>
+                <c:ptCount val="4"/>
+                <c:pt idx="0">
+                  <c:v>Tem</c:v>
+                </c:pt>
+                <c:pt idx="1">
+                  <c:v>Ağu</c:v>
+                </c:pt>
+                <c:pt idx="2">
+                  <c:v>Eyl</c:v>
+                </c:pt>
+                <c:pt idx="3">
+                  <c:v>Eki</c:v>
+                </c:pt>
+              </c:strCache>
+            </c:strRef>
+          </c:cat>
+          <c:val>
+            <c:numRef>
+              <c:f>Sheet1!$C$2:$C$5</c:f>
+              <c:numCache>
+                <c:formatCode>General</c:formatCode>
+                <c:ptCount val="4"/>
+                <c:pt idx="0">
+                  <c:v>53.4</c:v>
+                </c:pt>
+                <c:pt idx="1">
+                  <c:v>172.1</c:v>
+                </c:pt>
+                <c:pt idx="2">
+                  <c:v>20.7</c:v>
+                </c:pt>
+                <c:pt idx="3">
+                  <c:v>0.0</c:v>
+                </c:pt>
+              </c:numCache>
+            </c:numRef>
+          </c:val>
+        </c:ser>
+        <c:ser>
+          <c:idx val="2"/>
+          <c:order val="2"/>
+          <c:tx>
+            <c:strRef>
+              <c:f>Sheet1!$D$1</c:f>
+              <c:strCache>
+                <c:ptCount val="1"/>
+                <c:pt idx="0">
+                  <c:v>2026 tahmin</c:v>
+                </c:pt>
+              </c:strCache>
+            </c:strRef>
+          </c:tx>
+          <c:spPr>
+            <a:solidFill>
+              <a:srgbClr val="E8A0A8"/>
+            </a:solidFill>
+          </c:spPr>
+          <c:cat>
+            <c:strRef>
+              <c:f>Sheet1!$A$2:$A$5</c:f>
+              <c:strCache>
+                <c:ptCount val="4"/>
+                <c:pt idx="0">
+                  <c:v>Tem</c:v>
+                </c:pt>
+                <c:pt idx="1">
+                  <c:v>Ağu</c:v>
+                </c:pt>
+                <c:pt idx="2">
+                  <c:v>Eyl</c:v>
+                </c:pt>
+                <c:pt idx="3">
+                  <c:v>Eki</c:v>
+                </c:pt>
+              </c:strCache>
+            </c:strRef>
+          </c:cat>
+          <c:val>
+            <c:numRef>
+              <c:f>Sheet1!$D$2:$D$5</c:f>
+              <c:numCache>
+                <c:formatCode>General</c:formatCode>
+                <c:ptCount val="4"/>
+                <c:pt idx="0">
+                  <c:v>0.0</c:v>
+                </c:pt>
+                <c:pt idx="1">
+                  <c:v>0.0</c:v>
+                </c:pt>
+                <c:pt idx="2">
+                  <c:v>611.2</c:v>
+                </c:pt>
+                <c:pt idx="3">
+                  <c:v>133.0</c:v>
+                </c:pt>
+              </c:numCache>
+            </c:numRef>
+          </c:val>
+        </c:ser>
+        <c:gapWidth val="60"/>
+        <c:overlap val="100"/>
+        <c:axId val="-2068027336"/>
+        <c:axId val="-2113994440"/>
+      </c:barChart>
+      <c:catAx>
+        <c:axId val="-2068027336"/>
+        <c:scaling>
+          <c:orientation val="minMax"/>
+        </c:scaling>
+        <c:delete val="0"/>
+        <c:axPos val="b"/>
+        <c:majorTickMark val="out"/>
+        <c:minorTickMark val="none"/>
+        <c:tickLblPos val="nextTo"/>
+        <c:crossAx val="-2113994440"/>
+        <c:crosses val="autoZero"/>
+        <c:auto val="1"/>
+        <c:lblAlgn val="ctr"/>
+        <c:lblOffset val="100"/>
+        <c:noMultiLvlLbl val="0"/>
+      </c:catAx>
+      <c:valAx>
+        <c:axId val="-2113994440"/>
+        <c:scaling/>
+        <c:delete val="0"/>
+        <c:axPos val="l"/>
+        <c:majorGridlines/>
+        <c:majorTickMark val="out"/>
+        <c:minorTickMark val="none"/>
+        <c:tickLblPos val="nextTo"/>
+        <c:crossAx val="-2068027336"/>
+        <c:crosses val="autoZero"/>
+      </c:valAx>
+    </c:plotArea>
+    <c:legend>
+      <c:legendPos val="t"/>
+      <c:overlay val="0"/>
+    </c:legend>
+    <c:dispBlanksAs val="gap"/>
+  </c:chart>
+  <c:txPr>
+    <a:bodyPr/>
+    <a:lstStyle/>
+    <a:p>
+      <a:pPr>
+        <a:defRPr sz="800">
+          <a:latin typeface="Calibri"/>
+        </a:defRPr>
+      </a:pPr>
+      <a:endParaRPr lang="en-US"/>
+    </a:p>
+  </c:txPr>
+  <c:externalData r:id="rId1">
+    <c:autoUpdate val="0"/>
+  </c:externalData>
+</c:chartSpace>
+</file>
+
 <file path=ppt/charts/chart2.xml><?xml version="1.0" encoding="utf-8"?>
 <c:chartSpace xmlns:c="http://schemas.openxmlformats.org/drawingml/2006/chart" xmlns:a="http://schemas.openxmlformats.org/drawingml/2006/main" xmlns:r="http://schemas.openxmlformats.org/officeDocument/2006/relationships">
   <c:date1904 val="0"/>
@@ -1360,7 +1612,7 @@
                   <c:v>574.6556999999999</c:v>
                 </c:pt>
                 <c:pt idx="1">
-                  <c:v>71.81704577000012</c:v>
+                  <c:v>71.81704576999546</c:v>
                 </c:pt>
                 <c:pt idx="2">
                   <c:v>143</c:v>
@@ -1415,7 +1667,7 @@
                   <c:v>775.03155</c:v>
                 </c:pt>
                 <c:pt idx="1">
-                  <c:v>122.53417561000008</c:v>
+                  <c:v>122.53417560999475</c:v>
                 </c:pt>
                 <c:pt idx="2">
                   <c:v>160</c:v>
@@ -1771,7 +2023,7 @@
                   <c:v>34377.72383333333</c:v>
                 </c:pt>
                 <c:pt idx="1">
-                  <c:v>25227.68604395604</c:v>
+                  <c:v>25227.686043956044</c:v>
                 </c:pt>
                 <c:pt idx="2">
                   <c:v>28668.031666666666</c:v>
@@ -2377,13 +2629,13 @@
                 <c:formatCode>General</c:formatCode>
                 <c:ptCount val="3"/>
                 <c:pt idx="0">
-                  <c:v>57.55862375814162</c:v>
+                  <c:v>57.558623758167606</c:v>
                 </c:pt>
                 <c:pt idx="1">
-                  <c:v>96.004930945943</c:v>
+                  <c:v>96.00493094592596</c:v>
                 </c:pt>
                 <c:pt idx="2">
-                  <c:v>62.267526610057274</c:v>
+                  <c:v>62.267526610043845</c:v>
                 </c:pt>
               </c:numCache>
             </c:numRef>
@@ -19091,7 +19343,7 @@
           <a:lstStyle/>
           <a:p>
             <a:r>
-              <a:t>Sezonluk Alım Zamanlaması</a:t>
+              <a:t>Sezonun Kalanı — Eylül–Ekim Tahmini</a:t>
             </a:r>
           </a:p>
         </p:txBody>
@@ -19157,7 +19409,7 @@
             <a:avLst/>
           </a:prstGeom>
           <a:solidFill>
-            <a:srgbClr val="9A9A9A"/>
+            <a:srgbClr val="A6001A"/>
           </a:solidFill>
           <a:ln>
             <a:noFill/>
@@ -19188,7 +19440,7 @@
       </p:sp>
       <p:pic>
         <p:nvPicPr>
-          <p:cNvPr id="5" name="Picture 4" descr="workflow.png"/>
+          <p:cNvPr id="5" name="Picture 4" descr="package.png"/>
           <p:cNvPicPr>
             <a:picLocks noChangeAspect="1"/>
           </p:cNvPicPr>
@@ -19244,7 +19496,7 @@
                 </a:solidFill>
                 <a:latin typeface="Calibri"/>
               </a:rPr>
-              <a:t>ORTALAMA ALIM GÜNÜ</a:t>
+              <a:t>SEZON CİROSU (TAHMİN)</a:t>
             </a:r>
           </a:p>
         </p:txBody>
@@ -19277,13 +19529,13 @@
               </a:lnSpc>
             </a:pPr>
             <a:r>
-              <a:rPr sz="2200" b="1">
+              <a:rPr sz="2600" b="1">
                 <a:solidFill>
-                  <a:srgbClr val="9A9A9A"/>
+                  <a:srgbClr val="A6001A"/>
                 </a:solidFill>
                 <a:latin typeface="Calibri"/>
               </a:rPr>
-              <a:t>2,5 gün geç</a:t>
+              <a:t>990 M TL</a:t>
             </a:r>
           </a:p>
         </p:txBody>
@@ -19322,7 +19574,7 @@
                 </a:solidFill>
                 <a:latin typeface="Calibri"/>
               </a:rPr>
-              <a:t>takvim ölçüsü · 225. → 228. gün</a:t>
+              <a:t>2025: 602 M · +%64,5</a:t>
             </a:r>
           </a:p>
         </p:txBody>
@@ -19388,7 +19640,7 @@
             <a:avLst/>
           </a:prstGeom>
           <a:solidFill>
-            <a:srgbClr val="A6001A"/>
+            <a:srgbClr val="9A9A9A"/>
           </a:solidFill>
           <a:ln>
             <a:noFill/>
@@ -19475,7 +19727,7 @@
                 </a:solidFill>
                 <a:latin typeface="Calibri"/>
               </a:rPr>
-              <a:t>TEMMUZ VE ÖNCESİ ALIM</a:t>
+              <a:t>SEZON KADROSU (TAHMİN)</a:t>
             </a:r>
           </a:p>
         </p:txBody>
@@ -19508,13 +19760,13 @@
               </a:lnSpc>
             </a:pPr>
             <a:r>
-              <a:rPr sz="3000" b="1">
+              <a:rPr sz="2600" b="1">
                 <a:solidFill>
-                  <a:srgbClr val="A6001A"/>
+                  <a:srgbClr val="9A9A9A"/>
                 </a:solidFill>
                 <a:latin typeface="Calibri"/>
               </a:rPr>
-              <a:t>6 → 2</a:t>
+              <a:t>531,0 FTE</a:t>
             </a:r>
           </a:p>
         </p:txBody>
@@ -19553,7 +19805,7 @@
                 </a:solidFill>
                 <a:latin typeface="Calibri"/>
               </a:rPr>
-              <a:t>gerçek erken alım azaldı</a:t>
+              <a:t>2025: 458,7 FTE · +%15,8</a:t>
             </a:r>
           </a:p>
         </p:txBody>
@@ -19650,7 +19902,7 @@
       </p:sp>
       <p:pic>
         <p:nvPicPr>
-          <p:cNvPr id="17" name="Picture 16" descr="package.png"/>
+          <p:cNvPr id="17" name="Picture 16" descr="layers.png"/>
           <p:cNvPicPr>
             <a:picLocks noChangeAspect="1"/>
           </p:cNvPicPr>
@@ -19706,7 +19958,7 @@
                 </a:solidFill>
                 <a:latin typeface="Calibri"/>
               </a:rPr>
-              <a:t>1–14 AĞUSTOS İŞ HACMİ</a:t>
+              <a:t>SEZON MALİYET / CİRO</a:t>
             </a:r>
           </a:p>
         </p:txBody>
@@ -19739,13 +19991,13 @@
               </a:lnSpc>
             </a:pPr>
             <a:r>
-              <a:rPr sz="3000" b="1">
+              <a:rPr sz="2600" b="1">
                 <a:solidFill>
                   <a:srgbClr val="A6001A"/>
                 </a:solidFill>
                 <a:latin typeface="Calibri"/>
               </a:rPr>
-              <a:t>+%25,1</a:t>
+              <a:t>%3,23</a:t>
             </a:r>
           </a:p>
         </p:txBody>
@@ -19784,7 +20036,7 @@
                 </a:solidFill>
                 <a:latin typeface="Calibri"/>
               </a:rPr>
-              <a:t>137.483 → 171.957 adet</a:t>
+              <a:t>2025: %3,54 · tahmini personel yükü</a:t>
             </a:r>
           </a:p>
         </p:txBody>
@@ -19798,8 +20050,8 @@
           <p:nvPr/>
         </p:nvGraphicFramePr>
         <p:xfrm>
-          <a:off x="548640" y="3246120"/>
-          <a:ext cx="11018520" cy="2011680"/>
+          <a:off x="548640" y="3337560"/>
+          <a:ext cx="7223760" cy="1408176"/>
         </p:xfrm>
         <a:graphic>
           <a:graphicData uri="http://schemas.openxmlformats.org/drawingml/2006/table">
@@ -19808,12 +20060,16 @@
                 <a:tableStyleId>{5C22544A-7EE6-4342-B048-85BDC9FD1C3A}</a:tableStyleId>
               </a:tblPr>
               <a:tblGrid>
-                <a:gridCol w="3291840"/>
-                <a:gridCol w="1737360"/>
-                <a:gridCol w="1737360"/>
-                <a:gridCol w="4251960"/>
+                <a:gridCol w="777240"/>
+                <a:gridCol w="777240"/>
+                <a:gridCol w="868680"/>
+                <a:gridCol w="1051560"/>
+                <a:gridCol w="1051560"/>
+                <a:gridCol w="777240"/>
+                <a:gridCol w="822960"/>
+                <a:gridCol w="1097280"/>
               </a:tblGrid>
-              <a:tr h="182880">
+              <a:tr h="201168">
                 <a:tc>
                   <a:txBody>
                     <a:bodyPr/>
@@ -19827,7 +20083,7 @@
                           </a:solidFill>
                           <a:latin typeface="Calibri"/>
                         </a:rPr>
-                        <a:t>Ölçü</a:t>
+                        <a:t>Ay</a:t>
                       </a:r>
                     </a:p>
                   </a:txBody>
@@ -19842,7 +20098,7 @@
                     <a:bodyPr/>
                     <a:lstStyle/>
                     <a:p>
-                      <a:pPr algn="ctr"/>
+                      <a:pPr algn="l"/>
                       <a:r>
                         <a:rPr sz="800" b="1">
                           <a:solidFill>
@@ -19850,7 +20106,7 @@
                           </a:solidFill>
                           <a:latin typeface="Calibri"/>
                         </a:rPr>
-                        <a:t>2025</a:t>
+                        <a:t>Ciro</a:t>
                       </a:r>
                     </a:p>
                   </a:txBody>
@@ -19873,7 +20129,7 @@
                           </a:solidFill>
                           <a:latin typeface="Calibri"/>
                         </a:rPr>
-                        <a:t>2026</a:t>
+                        <a:t>Maliyet</a:t>
                       </a:r>
                     </a:p>
                   </a:txBody>
@@ -19888,26 +20144,304 @@
                     <a:bodyPr/>
                     <a:lstStyle/>
                     <a:p>
+                      <a:pPr algn="ctr"/>
+                      <a:r>
+                        <a:rPr sz="800" b="1">
+                          <a:solidFill>
+                            <a:srgbClr val="FFFFFF"/>
+                          </a:solidFill>
+                          <a:latin typeface="Calibri"/>
+                        </a:rPr>
+                        <a:t>Ciro 2025</a:t>
+                      </a:r>
+                    </a:p>
+                  </a:txBody>
+                  <a:tcPr>
+                    <a:solidFill>
+                      <a:srgbClr val="E30622"/>
+                    </a:solidFill>
+                  </a:tcPr>
+                </a:tc>
+                <a:tc>
+                  <a:txBody>
+                    <a:bodyPr/>
+                    <a:lstStyle/>
+                    <a:p>
+                      <a:pPr algn="ctr"/>
+                      <a:r>
+                        <a:rPr sz="800" b="1">
+                          <a:solidFill>
+                            <a:srgbClr val="FFFFFF"/>
+                          </a:solidFill>
+                          <a:latin typeface="Calibri"/>
+                        </a:rPr>
+                        <a:t>Ciro 2026</a:t>
+                      </a:r>
+                    </a:p>
+                  </a:txBody>
+                  <a:tcPr>
+                    <a:solidFill>
+                      <a:srgbClr val="E30622"/>
+                    </a:solidFill>
+                  </a:tcPr>
+                </a:tc>
+                <a:tc>
+                  <a:txBody>
+                    <a:bodyPr/>
+                    <a:lstStyle/>
+                    <a:p>
+                      <a:pPr algn="ctr"/>
+                      <a:r>
+                        <a:rPr sz="800" b="1">
+                          <a:solidFill>
+                            <a:srgbClr val="FFFFFF"/>
+                          </a:solidFill>
+                          <a:latin typeface="Calibri"/>
+                        </a:rPr>
+                        <a:t>Δ</a:t>
+                      </a:r>
+                    </a:p>
+                  </a:txBody>
+                  <a:tcPr>
+                    <a:solidFill>
+                      <a:srgbClr val="E30622"/>
+                    </a:solidFill>
+                  </a:tcPr>
+                </a:tc>
+                <a:tc>
+                  <a:txBody>
+                    <a:bodyPr/>
+                    <a:lstStyle/>
+                    <a:p>
+                      <a:pPr algn="ctr"/>
+                      <a:r>
+                        <a:rPr sz="800" b="1">
+                          <a:solidFill>
+                            <a:srgbClr val="FFFFFF"/>
+                          </a:solidFill>
+                          <a:latin typeface="Calibri"/>
+                        </a:rPr>
+                        <a:t>FTE 2026</a:t>
+                      </a:r>
+                    </a:p>
+                  </a:txBody>
+                  <a:tcPr>
+                    <a:solidFill>
+                      <a:srgbClr val="E30622"/>
+                    </a:solidFill>
+                  </a:tcPr>
+                </a:tc>
+                <a:tc>
+                  <a:txBody>
+                    <a:bodyPr/>
+                    <a:lstStyle/>
+                    <a:p>
+                      <a:pPr algn="ctr"/>
+                      <a:r>
+                        <a:rPr sz="800" b="1">
+                          <a:solidFill>
+                            <a:srgbClr val="FFFFFF"/>
+                          </a:solidFill>
+                          <a:latin typeface="Calibri"/>
+                        </a:rPr>
+                        <a:t>Maliyet 2026</a:t>
+                      </a:r>
+                    </a:p>
+                  </a:txBody>
+                  <a:tcPr>
+                    <a:solidFill>
+                      <a:srgbClr val="E30622"/>
+                    </a:solidFill>
+                  </a:tcPr>
+                </a:tc>
+              </a:tr>
+              <a:tr h="201168">
+                <a:tc>
+                  <a:txBody>
+                    <a:bodyPr/>
+                    <a:lstStyle/>
+                    <a:p>
                       <a:pPr algn="l"/>
                       <a:r>
-                        <a:rPr sz="800" b="1">
-                          <a:solidFill>
-                            <a:srgbClr val="FFFFFF"/>
-                          </a:solidFill>
-                          <a:latin typeface="Calibri"/>
-                        </a:rPr>
-                        <a:t>Yorum</a:t>
-                      </a:r>
-                    </a:p>
-                  </a:txBody>
-                  <a:tcPr>
-                    <a:solidFill>
-                      <a:srgbClr val="E30622"/>
+                        <a:rPr sz="850" b="0">
+                          <a:solidFill>
+                            <a:srgbClr val="333333"/>
+                          </a:solidFill>
+                          <a:latin typeface="Calibri"/>
+                        </a:rPr>
+                        <a:t>Tem</a:t>
+                      </a:r>
+                    </a:p>
+                  </a:txBody>
+                  <a:tcPr>
+                    <a:solidFill>
+                      <a:srgbClr val="FFFFFF"/>
+                    </a:solidFill>
+                  </a:tcPr>
+                </a:tc>
+                <a:tc>
+                  <a:txBody>
+                    <a:bodyPr/>
+                    <a:lstStyle/>
+                    <a:p>
+                      <a:pPr algn="l"/>
+                      <a:r>
+                        <a:rPr sz="850" b="0">
+                          <a:solidFill>
+                            <a:srgbClr val="333333"/>
+                          </a:solidFill>
+                          <a:latin typeface="Calibri"/>
+                        </a:rPr>
+                        <a:t>gerçek</a:t>
+                      </a:r>
+                    </a:p>
+                  </a:txBody>
+                  <a:tcPr>
+                    <a:solidFill>
+                      <a:srgbClr val="FFFFFF"/>
+                    </a:solidFill>
+                  </a:tcPr>
+                </a:tc>
+                <a:tc>
+                  <a:txBody>
+                    <a:bodyPr/>
+                    <a:lstStyle/>
+                    <a:p>
+                      <a:pPr algn="ctr"/>
+                      <a:r>
+                        <a:rPr sz="850" b="0">
+                          <a:solidFill>
+                            <a:srgbClr val="333333"/>
+                          </a:solidFill>
+                          <a:latin typeface="Calibri"/>
+                        </a:rPr>
+                        <a:t>gerçek</a:t>
+                      </a:r>
+                    </a:p>
+                  </a:txBody>
+                  <a:tcPr>
+                    <a:solidFill>
+                      <a:srgbClr val="FFFFFF"/>
+                    </a:solidFill>
+                  </a:tcPr>
+                </a:tc>
+                <a:tc>
+                  <a:txBody>
+                    <a:bodyPr/>
+                    <a:lstStyle/>
+                    <a:p>
+                      <a:pPr algn="ctr"/>
+                      <a:r>
+                        <a:rPr sz="850" b="0">
+                          <a:solidFill>
+                            <a:srgbClr val="333333"/>
+                          </a:solidFill>
+                          <a:latin typeface="Calibri"/>
+                        </a:rPr>
+                        <a:t>30,7 M</a:t>
+                      </a:r>
+                    </a:p>
+                  </a:txBody>
+                  <a:tcPr>
+                    <a:solidFill>
+                      <a:srgbClr val="FFFFFF"/>
+                    </a:solidFill>
+                  </a:tcPr>
+                </a:tc>
+                <a:tc>
+                  <a:txBody>
+                    <a:bodyPr/>
+                    <a:lstStyle/>
+                    <a:p>
+                      <a:pPr algn="ctr"/>
+                      <a:r>
+                        <a:rPr sz="850" b="0">
+                          <a:solidFill>
+                            <a:srgbClr val="333333"/>
+                          </a:solidFill>
+                          <a:latin typeface="Calibri"/>
+                        </a:rPr>
+                        <a:t>53,4 M</a:t>
+                      </a:r>
+                    </a:p>
+                  </a:txBody>
+                  <a:tcPr>
+                    <a:solidFill>
+                      <a:srgbClr val="FFFFFF"/>
+                    </a:solidFill>
+                  </a:tcPr>
+                </a:tc>
+                <a:tc>
+                  <a:txBody>
+                    <a:bodyPr/>
+                    <a:lstStyle/>
+                    <a:p>
+                      <a:pPr algn="ctr"/>
+                      <a:r>
+                        <a:rPr sz="850" b="0">
+                          <a:solidFill>
+                            <a:srgbClr val="333333"/>
+                          </a:solidFill>
+                          <a:latin typeface="Calibri"/>
+                        </a:rPr>
+                        <a:t>+%73,9</a:t>
+                      </a:r>
+                    </a:p>
+                  </a:txBody>
+                  <a:tcPr>
+                    <a:solidFill>
+                      <a:srgbClr val="FFFFFF"/>
+                    </a:solidFill>
+                  </a:tcPr>
+                </a:tc>
+                <a:tc>
+                  <a:txBody>
+                    <a:bodyPr/>
+                    <a:lstStyle/>
+                    <a:p>
+                      <a:pPr algn="ctr"/>
+                      <a:r>
+                        <a:rPr sz="850" b="0">
+                          <a:solidFill>
+                            <a:srgbClr val="333333"/>
+                          </a:solidFill>
+                          <a:latin typeface="Calibri"/>
+                        </a:rPr>
+                        <a:t>112,4</a:t>
+                      </a:r>
+                    </a:p>
+                  </a:txBody>
+                  <a:tcPr>
+                    <a:solidFill>
+                      <a:srgbClr val="FFFFFF"/>
+                    </a:solidFill>
+                  </a:tcPr>
+                </a:tc>
+                <a:tc>
+                  <a:txBody>
+                    <a:bodyPr/>
+                    <a:lstStyle/>
+                    <a:p>
+                      <a:pPr algn="ctr"/>
+                      <a:r>
+                        <a:rPr sz="850" b="0">
+                          <a:solidFill>
+                            <a:srgbClr val="333333"/>
+                          </a:solidFill>
+                          <a:latin typeface="Calibri"/>
+                        </a:rPr>
+                        <a:t>6,8 M</a:t>
+                      </a:r>
+                    </a:p>
+                  </a:txBody>
+                  <a:tcPr>
+                    <a:solidFill>
+                      <a:srgbClr val="FFFFFF"/>
                     </a:solidFill>
                   </a:tcPr>
                 </a:tc>
               </a:tr>
-              <a:tr h="182880">
+              <a:tr h="201168">
                 <a:tc>
                   <a:txBody>
                     <a:bodyPr/>
@@ -19915,68 +20449,185 @@
                     <a:p>
                       <a:pPr algn="l"/>
                       <a:r>
-                        <a:rPr sz="900" b="0">
+                        <a:rPr sz="850" b="0">
                           <a:solidFill>
                             <a:srgbClr val="333333"/>
                           </a:solidFill>
                           <a:latin typeface="Calibri"/>
                         </a:rPr>
-                        <a:t>Ortalama alım günü (takvim)</a:t>
-                      </a:r>
-                    </a:p>
-                  </a:txBody>
-                  <a:tcPr>
-                    <a:solidFill>
-                      <a:srgbClr val="FFFFFF"/>
-                    </a:solidFill>
-                  </a:tcPr>
-                </a:tc>
-                <a:tc>
-                  <a:txBody>
-                    <a:bodyPr/>
-                    <a:lstStyle/>
-                    <a:p>
-                      <a:pPr algn="ctr"/>
-                      <a:r>
-                        <a:rPr sz="900" b="0">
+                        <a:t>Ağu</a:t>
+                      </a:r>
+                    </a:p>
+                  </a:txBody>
+                  <a:tcPr>
+                    <a:solidFill>
+                      <a:srgbClr val="FFF6E6"/>
+                    </a:solidFill>
+                  </a:tcPr>
+                </a:tc>
+                <a:tc>
+                  <a:txBody>
+                    <a:bodyPr/>
+                    <a:lstStyle/>
+                    <a:p>
+                      <a:pPr algn="l"/>
+                      <a:r>
+                        <a:rPr sz="850" b="1">
+                          <a:solidFill>
+                            <a:srgbClr val="A6001A"/>
+                          </a:solidFill>
+                          <a:latin typeface="Calibri"/>
+                        </a:rPr>
+                        <a:t>gerçek</a:t>
+                      </a:r>
+                    </a:p>
+                  </a:txBody>
+                  <a:tcPr>
+                    <a:solidFill>
+                      <a:srgbClr val="FFF6E6"/>
+                    </a:solidFill>
+                  </a:tcPr>
+                </a:tc>
+                <a:tc>
+                  <a:txBody>
+                    <a:bodyPr/>
+                    <a:lstStyle/>
+                    <a:p>
+                      <a:pPr algn="ctr"/>
+                      <a:r>
+                        <a:rPr sz="850" b="1">
+                          <a:solidFill>
+                            <a:srgbClr val="A6001A"/>
+                          </a:solidFill>
+                          <a:latin typeface="Calibri"/>
+                        </a:rPr>
+                        <a:t>TAHMİN</a:t>
+                      </a:r>
+                    </a:p>
+                  </a:txBody>
+                  <a:tcPr>
+                    <a:solidFill>
+                      <a:srgbClr val="FFF6E6"/>
+                    </a:solidFill>
+                  </a:tcPr>
+                </a:tc>
+                <a:tc>
+                  <a:txBody>
+                    <a:bodyPr/>
+                    <a:lstStyle/>
+                    <a:p>
+                      <a:pPr algn="ctr"/>
+                      <a:r>
+                        <a:rPr sz="850" b="0">
                           <a:solidFill>
                             <a:srgbClr val="333333"/>
                           </a:solidFill>
                           <a:latin typeface="Calibri"/>
                         </a:rPr>
-                        <a:t>225. gün</a:t>
-                      </a:r>
-                    </a:p>
-                  </a:txBody>
-                  <a:tcPr>
-                    <a:solidFill>
-                      <a:srgbClr val="FFFFFF"/>
-                    </a:solidFill>
-                  </a:tcPr>
-                </a:tc>
-                <a:tc>
-                  <a:txBody>
-                    <a:bodyPr/>
-                    <a:lstStyle/>
-                    <a:p>
-                      <a:pPr algn="ctr"/>
-                      <a:r>
-                        <a:rPr sz="900" b="1">
+                        <a:t>186,9 M</a:t>
+                      </a:r>
+                    </a:p>
+                  </a:txBody>
+                  <a:tcPr>
+                    <a:solidFill>
+                      <a:srgbClr val="FFF6E6"/>
+                    </a:solidFill>
+                  </a:tcPr>
+                </a:tc>
+                <a:tc>
+                  <a:txBody>
+                    <a:bodyPr/>
+                    <a:lstStyle/>
+                    <a:p>
+                      <a:pPr algn="ctr"/>
+                      <a:r>
+                        <a:rPr sz="850" b="0">
                           <a:solidFill>
                             <a:srgbClr val="333333"/>
                           </a:solidFill>
                           <a:latin typeface="Calibri"/>
                         </a:rPr>
-                        <a:t>228. gün</a:t>
-                      </a:r>
-                    </a:p>
-                  </a:txBody>
-                  <a:tcPr>
-                    <a:solidFill>
-                      <a:srgbClr val="FFFFFF"/>
-                    </a:solidFill>
-                  </a:tcPr>
-                </a:tc>
+                        <a:t>172,1 M</a:t>
+                      </a:r>
+                    </a:p>
+                  </a:txBody>
+                  <a:tcPr>
+                    <a:solidFill>
+                      <a:srgbClr val="FFF6E6"/>
+                    </a:solidFill>
+                  </a:tcPr>
+                </a:tc>
+                <a:tc>
+                  <a:txBody>
+                    <a:bodyPr/>
+                    <a:lstStyle/>
+                    <a:p>
+                      <a:pPr algn="ctr"/>
+                      <a:r>
+                        <a:rPr sz="850" b="0">
+                          <a:solidFill>
+                            <a:srgbClr val="333333"/>
+                          </a:solidFill>
+                          <a:latin typeface="Calibri"/>
+                        </a:rPr>
+                        <a:t>−%7,9</a:t>
+                      </a:r>
+                    </a:p>
+                  </a:txBody>
+                  <a:tcPr>
+                    <a:solidFill>
+                      <a:srgbClr val="FFF6E6"/>
+                    </a:solidFill>
+                  </a:tcPr>
+                </a:tc>
+                <a:tc>
+                  <a:txBody>
+                    <a:bodyPr/>
+                    <a:lstStyle/>
+                    <a:p>
+                      <a:pPr algn="ctr"/>
+                      <a:r>
+                        <a:rPr sz="850" b="0">
+                          <a:solidFill>
+                            <a:srgbClr val="333333"/>
+                          </a:solidFill>
+                          <a:latin typeface="Calibri"/>
+                        </a:rPr>
+                        <a:t>139,6</a:t>
+                      </a:r>
+                    </a:p>
+                  </a:txBody>
+                  <a:tcPr>
+                    <a:solidFill>
+                      <a:srgbClr val="FFF6E6"/>
+                    </a:solidFill>
+                  </a:tcPr>
+                </a:tc>
+                <a:tc>
+                  <a:txBody>
+                    <a:bodyPr/>
+                    <a:lstStyle/>
+                    <a:p>
+                      <a:pPr algn="ctr"/>
+                      <a:r>
+                        <a:rPr sz="850" b="0">
+                          <a:solidFill>
+                            <a:srgbClr val="333333"/>
+                          </a:solidFill>
+                          <a:latin typeface="Calibri"/>
+                        </a:rPr>
+                        <a:t>8,4 M</a:t>
+                      </a:r>
+                    </a:p>
+                  </a:txBody>
+                  <a:tcPr>
+                    <a:solidFill>
+                      <a:srgbClr val="FFF6E6"/>
+                    </a:solidFill>
+                  </a:tcPr>
+                </a:tc>
+              </a:tr>
+              <a:tr h="201168">
                 <a:tc>
                   <a:txBody>
                     <a:bodyPr/>
@@ -19984,24 +20635,185 @@
                     <a:p>
                       <a:pPr algn="l"/>
                       <a:r>
-                        <a:rPr sz="900" b="0">
+                        <a:rPr sz="850" b="0">
+                          <a:solidFill>
+                            <a:srgbClr val="333333"/>
+                          </a:solidFill>
+                          <a:latin typeface="Calibri"/>
+                        </a:rPr>
+                        <a:t>Eyl</a:t>
+                      </a:r>
+                    </a:p>
+                  </a:txBody>
+                  <a:tcPr>
+                    <a:solidFill>
+                      <a:srgbClr val="FFF6E6"/>
+                    </a:solidFill>
+                  </a:tcPr>
+                </a:tc>
+                <a:tc>
+                  <a:txBody>
+                    <a:bodyPr/>
+                    <a:lstStyle/>
+                    <a:p>
+                      <a:pPr algn="l"/>
+                      <a:r>
+                        <a:rPr sz="850" b="1">
                           <a:solidFill>
                             <a:srgbClr val="A6001A"/>
                           </a:solidFill>
                           <a:latin typeface="Calibri"/>
                         </a:rPr>
-                        <a:t>2026 alımı ortalama 2,5 gün DAHA GEÇ</a:t>
-                      </a:r>
-                    </a:p>
-                  </a:txBody>
-                  <a:tcPr>
-                    <a:solidFill>
-                      <a:srgbClr val="FFFFFF"/>
+                        <a:t>KISMI</a:t>
+                      </a:r>
+                    </a:p>
+                  </a:txBody>
+                  <a:tcPr>
+                    <a:solidFill>
+                      <a:srgbClr val="FFF6E6"/>
+                    </a:solidFill>
+                  </a:tcPr>
+                </a:tc>
+                <a:tc>
+                  <a:txBody>
+                    <a:bodyPr/>
+                    <a:lstStyle/>
+                    <a:p>
+                      <a:pPr algn="ctr"/>
+                      <a:r>
+                        <a:rPr sz="850" b="1">
+                          <a:solidFill>
+                            <a:srgbClr val="A6001A"/>
+                          </a:solidFill>
+                          <a:latin typeface="Calibri"/>
+                        </a:rPr>
+                        <a:t>TAHMİN</a:t>
+                      </a:r>
+                    </a:p>
+                  </a:txBody>
+                  <a:tcPr>
+                    <a:solidFill>
+                      <a:srgbClr val="FFF6E6"/>
+                    </a:solidFill>
+                  </a:tcPr>
+                </a:tc>
+                <a:tc>
+                  <a:txBody>
+                    <a:bodyPr/>
+                    <a:lstStyle/>
+                    <a:p>
+                      <a:pPr algn="ctr"/>
+                      <a:r>
+                        <a:rPr sz="850" b="0">
+                          <a:solidFill>
+                            <a:srgbClr val="333333"/>
+                          </a:solidFill>
+                          <a:latin typeface="Calibri"/>
+                        </a:rPr>
+                        <a:t>313,0 M</a:t>
+                      </a:r>
+                    </a:p>
+                  </a:txBody>
+                  <a:tcPr>
+                    <a:solidFill>
+                      <a:srgbClr val="FFF6E6"/>
+                    </a:solidFill>
+                  </a:tcPr>
+                </a:tc>
+                <a:tc>
+                  <a:txBody>
+                    <a:bodyPr/>
+                    <a:lstStyle/>
+                    <a:p>
+                      <a:pPr algn="ctr"/>
+                      <a:r>
+                        <a:rPr sz="850" b="0">
+                          <a:solidFill>
+                            <a:srgbClr val="333333"/>
+                          </a:solidFill>
+                          <a:latin typeface="Calibri"/>
+                        </a:rPr>
+                        <a:t>631,9 M</a:t>
+                      </a:r>
+                    </a:p>
+                  </a:txBody>
+                  <a:tcPr>
+                    <a:solidFill>
+                      <a:srgbClr val="FFF6E6"/>
+                    </a:solidFill>
+                  </a:tcPr>
+                </a:tc>
+                <a:tc>
+                  <a:txBody>
+                    <a:bodyPr/>
+                    <a:lstStyle/>
+                    <a:p>
+                      <a:pPr algn="ctr"/>
+                      <a:r>
+                        <a:rPr sz="850" b="0">
+                          <a:solidFill>
+                            <a:srgbClr val="333333"/>
+                          </a:solidFill>
+                          <a:latin typeface="Calibri"/>
+                        </a:rPr>
+                        <a:t>+%101,9</a:t>
+                      </a:r>
+                    </a:p>
+                  </a:txBody>
+                  <a:tcPr>
+                    <a:solidFill>
+                      <a:srgbClr val="FFF6E6"/>
+                    </a:solidFill>
+                  </a:tcPr>
+                </a:tc>
+                <a:tc>
+                  <a:txBody>
+                    <a:bodyPr/>
+                    <a:lstStyle/>
+                    <a:p>
+                      <a:pPr algn="ctr"/>
+                      <a:r>
+                        <a:rPr sz="850" b="0">
+                          <a:solidFill>
+                            <a:srgbClr val="333333"/>
+                          </a:solidFill>
+                          <a:latin typeface="Calibri"/>
+                        </a:rPr>
+                        <a:t>153,8</a:t>
+                      </a:r>
+                    </a:p>
+                  </a:txBody>
+                  <a:tcPr>
+                    <a:solidFill>
+                      <a:srgbClr val="FFF6E6"/>
+                    </a:solidFill>
+                  </a:tcPr>
+                </a:tc>
+                <a:tc>
+                  <a:txBody>
+                    <a:bodyPr/>
+                    <a:lstStyle/>
+                    <a:p>
+                      <a:pPr algn="ctr"/>
+                      <a:r>
+                        <a:rPr sz="850" b="0">
+                          <a:solidFill>
+                            <a:srgbClr val="333333"/>
+                          </a:solidFill>
+                          <a:latin typeface="Calibri"/>
+                        </a:rPr>
+                        <a:t>9,3 M</a:t>
+                      </a:r>
+                    </a:p>
+                  </a:txBody>
+                  <a:tcPr>
+                    <a:solidFill>
+                      <a:srgbClr val="FFF6E6"/>
                     </a:solidFill>
                   </a:tcPr>
                 </a:tc>
               </a:tr>
-              <a:tr h="182880">
+              <a:tr h="201168">
                 <a:tc>
                   <a:txBody>
                     <a:bodyPr/>
@@ -20009,68 +20821,185 @@
                     <a:p>
                       <a:pPr algn="l"/>
                       <a:r>
-                        <a:rPr sz="900" b="0">
+                        <a:rPr sz="850" b="0">
                           <a:solidFill>
                             <a:srgbClr val="333333"/>
                           </a:solidFill>
                           <a:latin typeface="Calibri"/>
                         </a:rPr>
-                        <a:t>Temmuz ve öncesi alınan</a:t>
-                      </a:r>
-                    </a:p>
-                  </a:txBody>
-                  <a:tcPr>
-                    <a:solidFill>
-                      <a:srgbClr val="FAFAFA"/>
-                    </a:solidFill>
-                  </a:tcPr>
-                </a:tc>
-                <a:tc>
-                  <a:txBody>
-                    <a:bodyPr/>
-                    <a:lstStyle/>
-                    <a:p>
-                      <a:pPr algn="ctr"/>
-                      <a:r>
-                        <a:rPr sz="900" b="0">
+                        <a:t>Eki</a:t>
+                      </a:r>
+                    </a:p>
+                  </a:txBody>
+                  <a:tcPr>
+                    <a:solidFill>
+                      <a:srgbClr val="FFF6E6"/>
+                    </a:solidFill>
+                  </a:tcPr>
+                </a:tc>
+                <a:tc>
+                  <a:txBody>
+                    <a:bodyPr/>
+                    <a:lstStyle/>
+                    <a:p>
+                      <a:pPr algn="l"/>
+                      <a:r>
+                        <a:rPr sz="850" b="1">
+                          <a:solidFill>
+                            <a:srgbClr val="A6001A"/>
+                          </a:solidFill>
+                          <a:latin typeface="Calibri"/>
+                        </a:rPr>
+                        <a:t>TAHMIN</a:t>
+                      </a:r>
+                    </a:p>
+                  </a:txBody>
+                  <a:tcPr>
+                    <a:solidFill>
+                      <a:srgbClr val="FFF6E6"/>
+                    </a:solidFill>
+                  </a:tcPr>
+                </a:tc>
+                <a:tc>
+                  <a:txBody>
+                    <a:bodyPr/>
+                    <a:lstStyle/>
+                    <a:p>
+                      <a:pPr algn="ctr"/>
+                      <a:r>
+                        <a:rPr sz="850" b="1">
+                          <a:solidFill>
+                            <a:srgbClr val="A6001A"/>
+                          </a:solidFill>
+                          <a:latin typeface="Calibri"/>
+                        </a:rPr>
+                        <a:t>TAHMİN</a:t>
+                      </a:r>
+                    </a:p>
+                  </a:txBody>
+                  <a:tcPr>
+                    <a:solidFill>
+                      <a:srgbClr val="FFF6E6"/>
+                    </a:solidFill>
+                  </a:tcPr>
+                </a:tc>
+                <a:tc>
+                  <a:txBody>
+                    <a:bodyPr/>
+                    <a:lstStyle/>
+                    <a:p>
+                      <a:pPr algn="ctr"/>
+                      <a:r>
+                        <a:rPr sz="850" b="0">
                           <a:solidFill>
                             <a:srgbClr val="333333"/>
                           </a:solidFill>
                           <a:latin typeface="Calibri"/>
                         </a:rPr>
-                        <a:t>6 kişi</a:t>
-                      </a:r>
-                    </a:p>
-                  </a:txBody>
-                  <a:tcPr>
-                    <a:solidFill>
-                      <a:srgbClr val="FAFAFA"/>
-                    </a:solidFill>
-                  </a:tcPr>
-                </a:tc>
-                <a:tc>
-                  <a:txBody>
-                    <a:bodyPr/>
-                    <a:lstStyle/>
-                    <a:p>
-                      <a:pPr algn="ctr"/>
-                      <a:r>
-                        <a:rPr sz="900" b="1">
+                        <a:t>71,4 M</a:t>
+                      </a:r>
+                    </a:p>
+                  </a:txBody>
+                  <a:tcPr>
+                    <a:solidFill>
+                      <a:srgbClr val="FFF6E6"/>
+                    </a:solidFill>
+                  </a:tcPr>
+                </a:tc>
+                <a:tc>
+                  <a:txBody>
+                    <a:bodyPr/>
+                    <a:lstStyle/>
+                    <a:p>
+                      <a:pPr algn="ctr"/>
+                      <a:r>
+                        <a:rPr sz="850" b="0">
                           <a:solidFill>
                             <a:srgbClr val="333333"/>
                           </a:solidFill>
                           <a:latin typeface="Calibri"/>
                         </a:rPr>
-                        <a:t>2 kişi</a:t>
-                      </a:r>
-                    </a:p>
-                  </a:txBody>
-                  <a:tcPr>
-                    <a:solidFill>
-                      <a:srgbClr val="FAFAFA"/>
-                    </a:solidFill>
-                  </a:tcPr>
-                </a:tc>
+                        <a:t>133,0 M</a:t>
+                      </a:r>
+                    </a:p>
+                  </a:txBody>
+                  <a:tcPr>
+                    <a:solidFill>
+                      <a:srgbClr val="FFF6E6"/>
+                    </a:solidFill>
+                  </a:tcPr>
+                </a:tc>
+                <a:tc>
+                  <a:txBody>
+                    <a:bodyPr/>
+                    <a:lstStyle/>
+                    <a:p>
+                      <a:pPr algn="ctr"/>
+                      <a:r>
+                        <a:rPr sz="850" b="0">
+                          <a:solidFill>
+                            <a:srgbClr val="333333"/>
+                          </a:solidFill>
+                          <a:latin typeface="Calibri"/>
+                        </a:rPr>
+                        <a:t>+%86,3</a:t>
+                      </a:r>
+                    </a:p>
+                  </a:txBody>
+                  <a:tcPr>
+                    <a:solidFill>
+                      <a:srgbClr val="FFF6E6"/>
+                    </a:solidFill>
+                  </a:tcPr>
+                </a:tc>
+                <a:tc>
+                  <a:txBody>
+                    <a:bodyPr/>
+                    <a:lstStyle/>
+                    <a:p>
+                      <a:pPr algn="ctr"/>
+                      <a:r>
+                        <a:rPr sz="850" b="0">
+                          <a:solidFill>
+                            <a:srgbClr val="333333"/>
+                          </a:solidFill>
+                          <a:latin typeface="Calibri"/>
+                        </a:rPr>
+                        <a:t>125,2</a:t>
+                      </a:r>
+                    </a:p>
+                  </a:txBody>
+                  <a:tcPr>
+                    <a:solidFill>
+                      <a:srgbClr val="FFF6E6"/>
+                    </a:solidFill>
+                  </a:tcPr>
+                </a:tc>
+                <a:tc>
+                  <a:txBody>
+                    <a:bodyPr/>
+                    <a:lstStyle/>
+                    <a:p>
+                      <a:pPr algn="ctr"/>
+                      <a:r>
+                        <a:rPr sz="850" b="0">
+                          <a:solidFill>
+                            <a:srgbClr val="333333"/>
+                          </a:solidFill>
+                          <a:latin typeface="Calibri"/>
+                        </a:rPr>
+                        <a:t>7,6 M</a:t>
+                      </a:r>
+                    </a:p>
+                  </a:txBody>
+                  <a:tcPr>
+                    <a:solidFill>
+                      <a:srgbClr val="FFF6E6"/>
+                    </a:solidFill>
+                  </a:tcPr>
+                </a:tc>
+              </a:tr>
+              <a:tr h="201168">
                 <a:tc>
                   <a:txBody>
                     <a:bodyPr/>
@@ -20078,24 +21007,185 @@
                     <a:p>
                       <a:pPr algn="l"/>
                       <a:r>
-                        <a:rPr sz="900" b="0">
-                          <a:solidFill>
-                            <a:srgbClr val="A6001A"/>
-                          </a:solidFill>
-                          <a:latin typeface="Calibri"/>
-                        </a:rPr>
-                        <a:t>erken alım azaldı</a:t>
-                      </a:r>
-                    </a:p>
-                  </a:txBody>
-                  <a:tcPr>
-                    <a:solidFill>
-                      <a:srgbClr val="FAFAFA"/>
+                        <a:rPr sz="850" b="1">
+                          <a:solidFill>
+                            <a:srgbClr val="333333"/>
+                          </a:solidFill>
+                          <a:latin typeface="Calibri"/>
+                        </a:rPr>
+                        <a:t>Ağu+Eyl</a:t>
+                      </a:r>
+                    </a:p>
+                  </a:txBody>
+                  <a:tcPr>
+                    <a:solidFill>
+                      <a:srgbClr val="F2F2F2"/>
+                    </a:solidFill>
+                  </a:tcPr>
+                </a:tc>
+                <a:tc>
+                  <a:txBody>
+                    <a:bodyPr/>
+                    <a:lstStyle/>
+                    <a:p>
+                      <a:pPr algn="l"/>
+                      <a:r>
+                        <a:rPr sz="850" b="1">
+                          <a:solidFill>
+                            <a:srgbClr val="333333"/>
+                          </a:solidFill>
+                          <a:latin typeface="Calibri"/>
+                        </a:rPr>
+                        <a:t>kayma</a:t>
+                      </a:r>
+                    </a:p>
+                  </a:txBody>
+                  <a:tcPr>
+                    <a:solidFill>
+                      <a:srgbClr val="F2F2F2"/>
+                    </a:solidFill>
+                  </a:tcPr>
+                </a:tc>
+                <a:tc>
+                  <a:txBody>
+                    <a:bodyPr/>
+                    <a:lstStyle/>
+                    <a:p>
+                      <a:pPr algn="ctr"/>
+                      <a:r>
+                        <a:rPr sz="850" b="1">
+                          <a:solidFill>
+                            <a:srgbClr val="333333"/>
+                          </a:solidFill>
+                          <a:latin typeface="Calibri"/>
+                        </a:rPr>
+                        <a:t>nötr</a:t>
+                      </a:r>
+                    </a:p>
+                  </a:txBody>
+                  <a:tcPr>
+                    <a:solidFill>
+                      <a:srgbClr val="F2F2F2"/>
+                    </a:solidFill>
+                  </a:tcPr>
+                </a:tc>
+                <a:tc>
+                  <a:txBody>
+                    <a:bodyPr/>
+                    <a:lstStyle/>
+                    <a:p>
+                      <a:pPr algn="ctr"/>
+                      <a:r>
+                        <a:rPr sz="850" b="1">
+                          <a:solidFill>
+                            <a:srgbClr val="333333"/>
+                          </a:solidFill>
+                          <a:latin typeface="Calibri"/>
+                        </a:rPr>
+                        <a:t>499,9 M</a:t>
+                      </a:r>
+                    </a:p>
+                  </a:txBody>
+                  <a:tcPr>
+                    <a:solidFill>
+                      <a:srgbClr val="F2F2F2"/>
+                    </a:solidFill>
+                  </a:tcPr>
+                </a:tc>
+                <a:tc>
+                  <a:txBody>
+                    <a:bodyPr/>
+                    <a:lstStyle/>
+                    <a:p>
+                      <a:pPr algn="ctr"/>
+                      <a:r>
+                        <a:rPr sz="850" b="1">
+                          <a:solidFill>
+                            <a:srgbClr val="333333"/>
+                          </a:solidFill>
+                          <a:latin typeface="Calibri"/>
+                        </a:rPr>
+                        <a:t>804,0 M</a:t>
+                      </a:r>
+                    </a:p>
+                  </a:txBody>
+                  <a:tcPr>
+                    <a:solidFill>
+                      <a:srgbClr val="F2F2F2"/>
+                    </a:solidFill>
+                  </a:tcPr>
+                </a:tc>
+                <a:tc>
+                  <a:txBody>
+                    <a:bodyPr/>
+                    <a:lstStyle/>
+                    <a:p>
+                      <a:pPr algn="ctr"/>
+                      <a:r>
+                        <a:rPr sz="850" b="1">
+                          <a:solidFill>
+                            <a:srgbClr val="333333"/>
+                          </a:solidFill>
+                          <a:latin typeface="Calibri"/>
+                        </a:rPr>
+                        <a:t>+%60,8</a:t>
+                      </a:r>
+                    </a:p>
+                  </a:txBody>
+                  <a:tcPr>
+                    <a:solidFill>
+                      <a:srgbClr val="F2F2F2"/>
+                    </a:solidFill>
+                  </a:tcPr>
+                </a:tc>
+                <a:tc>
+                  <a:txBody>
+                    <a:bodyPr/>
+                    <a:lstStyle/>
+                    <a:p>
+                      <a:pPr algn="ctr"/>
+                      <a:r>
+                        <a:rPr sz="850" b="1">
+                          <a:solidFill>
+                            <a:srgbClr val="333333"/>
+                          </a:solidFill>
+                          <a:latin typeface="Calibri"/>
+                        </a:rPr>
+                        <a:t>293,4</a:t>
+                      </a:r>
+                    </a:p>
+                  </a:txBody>
+                  <a:tcPr>
+                    <a:solidFill>
+                      <a:srgbClr val="F2F2F2"/>
+                    </a:solidFill>
+                  </a:tcPr>
+                </a:tc>
+                <a:tc>
+                  <a:txBody>
+                    <a:bodyPr/>
+                    <a:lstStyle/>
+                    <a:p>
+                      <a:pPr algn="ctr"/>
+                      <a:r>
+                        <a:rPr sz="850" b="1">
+                          <a:solidFill>
+                            <a:srgbClr val="333333"/>
+                          </a:solidFill>
+                          <a:latin typeface="Calibri"/>
+                        </a:rPr>
+                        <a:t>17,7 M</a:t>
+                      </a:r>
+                    </a:p>
+                  </a:txBody>
+                  <a:tcPr>
+                    <a:solidFill>
+                      <a:srgbClr val="F2F2F2"/>
                     </a:solidFill>
                   </a:tcPr>
                 </a:tc>
               </a:tr>
-              <a:tr h="182880">
+              <a:tr h="201168">
                 <a:tc>
                   <a:txBody>
                     <a:bodyPr/>
@@ -20103,746 +21193,162 @@
                     <a:p>
                       <a:pPr algn="l"/>
                       <a:r>
-                        <a:rPr sz="900" b="0">
+                        <a:rPr sz="850" b="1">
                           <a:solidFill>
                             <a:srgbClr val="333333"/>
                           </a:solidFill>
                           <a:latin typeface="Calibri"/>
                         </a:rPr>
-                        <a:t>Açılıştan 45+ gün önce alınan</a:t>
-                      </a:r>
-                    </a:p>
-                  </a:txBody>
-                  <a:tcPr>
-                    <a:solidFill>
-                      <a:srgbClr val="FFFFFF"/>
-                    </a:solidFill>
-                  </a:tcPr>
-                </a:tc>
-                <a:tc>
-                  <a:txBody>
-                    <a:bodyPr/>
-                    <a:lstStyle/>
-                    <a:p>
-                      <a:pPr algn="ctr"/>
-                      <a:r>
-                        <a:rPr sz="900" b="0">
+                        <a:t>TOPLAM</a:t>
+                      </a:r>
+                    </a:p>
+                  </a:txBody>
+                  <a:tcPr>
+                    <a:solidFill>
+                      <a:srgbClr val="F2F2F2"/>
+                    </a:solidFill>
+                  </a:tcPr>
+                </a:tc>
+                <a:tc>
+                  <a:txBody>
+                    <a:bodyPr/>
+                    <a:lstStyle/>
+                    <a:p>
+                      <a:pPr algn="l"/>
+                    </a:p>
+                  </a:txBody>
+                  <a:tcPr>
+                    <a:solidFill>
+                      <a:srgbClr val="F2F2F2"/>
+                    </a:solidFill>
+                  </a:tcPr>
+                </a:tc>
+                <a:tc>
+                  <a:txBody>
+                    <a:bodyPr/>
+                    <a:lstStyle/>
+                    <a:p>
+                      <a:pPr algn="ctr"/>
+                    </a:p>
+                  </a:txBody>
+                  <a:tcPr>
+                    <a:solidFill>
+                      <a:srgbClr val="F2F2F2"/>
+                    </a:solidFill>
+                  </a:tcPr>
+                </a:tc>
+                <a:tc>
+                  <a:txBody>
+                    <a:bodyPr/>
+                    <a:lstStyle/>
+                    <a:p>
+                      <a:pPr algn="ctr"/>
+                      <a:r>
+                        <a:rPr sz="850" b="1">
                           <a:solidFill>
                             <a:srgbClr val="333333"/>
                           </a:solidFill>
                           <a:latin typeface="Calibri"/>
                         </a:rPr>
-                        <a:t>4 kişi</a:t>
-                      </a:r>
-                    </a:p>
-                  </a:txBody>
-                  <a:tcPr>
-                    <a:solidFill>
-                      <a:srgbClr val="FFFFFF"/>
-                    </a:solidFill>
-                  </a:tcPr>
-                </a:tc>
-                <a:tc>
-                  <a:txBody>
-                    <a:bodyPr/>
-                    <a:lstStyle/>
-                    <a:p>
-                      <a:pPr algn="ctr"/>
-                      <a:r>
-                        <a:rPr sz="900" b="1">
+                        <a:t>602,0 M</a:t>
+                      </a:r>
+                    </a:p>
+                  </a:txBody>
+                  <a:tcPr>
+                    <a:solidFill>
+                      <a:srgbClr val="F2F2F2"/>
+                    </a:solidFill>
+                  </a:tcPr>
+                </a:tc>
+                <a:tc>
+                  <a:txBody>
+                    <a:bodyPr/>
+                    <a:lstStyle/>
+                    <a:p>
+                      <a:pPr algn="ctr"/>
+                      <a:r>
+                        <a:rPr sz="850" b="1">
                           <a:solidFill>
                             <a:srgbClr val="333333"/>
                           </a:solidFill>
                           <a:latin typeface="Calibri"/>
                         </a:rPr>
-                        <a:t>2 kişi</a:t>
-                      </a:r>
-                    </a:p>
-                  </a:txBody>
-                  <a:tcPr>
-                    <a:solidFill>
-                      <a:srgbClr val="FFFFFF"/>
-                    </a:solidFill>
-                  </a:tcPr>
-                </a:tc>
-                <a:tc>
-                  <a:txBody>
-                    <a:bodyPr/>
-                    <a:lstStyle/>
-                    <a:p>
-                      <a:pPr algn="l"/>
-                      <a:r>
-                        <a:rPr sz="900" b="0">
-                          <a:solidFill>
-                            <a:srgbClr val="A6001A"/>
-                          </a:solidFill>
-                          <a:latin typeface="Calibri"/>
-                        </a:rPr>
-                        <a:t>çok erken alım azaldı</a:t>
-                      </a:r>
-                    </a:p>
-                  </a:txBody>
-                  <a:tcPr>
-                    <a:solidFill>
-                      <a:srgbClr val="FFFFFF"/>
-                    </a:solidFill>
-                  </a:tcPr>
-                </a:tc>
-              </a:tr>
-              <a:tr h="182880">
-                <a:tc>
-                  <a:txBody>
-                    <a:bodyPr/>
-                    <a:lstStyle/>
-                    <a:p>
-                      <a:pPr algn="l"/>
-                      <a:r>
-                        <a:rPr sz="900" b="0">
+                        <a:t>990,4 M</a:t>
+                      </a:r>
+                    </a:p>
+                  </a:txBody>
+                  <a:tcPr>
+                    <a:solidFill>
+                      <a:srgbClr val="F2F2F2"/>
+                    </a:solidFill>
+                  </a:tcPr>
+                </a:tc>
+                <a:tc>
+                  <a:txBody>
+                    <a:bodyPr/>
+                    <a:lstStyle/>
+                    <a:p>
+                      <a:pPr algn="ctr"/>
+                      <a:r>
+                        <a:rPr sz="850" b="1">
                           <a:solidFill>
                             <a:srgbClr val="333333"/>
                           </a:solidFill>
                           <a:latin typeface="Calibri"/>
                         </a:rPr>
-                        <a:t>1–14 Ağustos alınan</a:t>
-                      </a:r>
-                    </a:p>
-                  </a:txBody>
-                  <a:tcPr>
-                    <a:solidFill>
-                      <a:srgbClr val="FAFAFA"/>
-                    </a:solidFill>
-                  </a:tcPr>
-                </a:tc>
-                <a:tc>
-                  <a:txBody>
-                    <a:bodyPr/>
-                    <a:lstStyle/>
-                    <a:p>
-                      <a:pPr algn="ctr"/>
-                      <a:r>
-                        <a:rPr sz="900" b="0">
+                        <a:t>+%64,5</a:t>
+                      </a:r>
+                    </a:p>
+                  </a:txBody>
+                  <a:tcPr>
+                    <a:solidFill>
+                      <a:srgbClr val="F2F2F2"/>
+                    </a:solidFill>
+                  </a:tcPr>
+                </a:tc>
+                <a:tc>
+                  <a:txBody>
+                    <a:bodyPr/>
+                    <a:lstStyle/>
+                    <a:p>
+                      <a:pPr algn="ctr"/>
+                      <a:r>
+                        <a:rPr sz="850" b="1">
                           <a:solidFill>
                             <a:srgbClr val="333333"/>
                           </a:solidFill>
                           <a:latin typeface="Calibri"/>
                         </a:rPr>
-                        <a:t>12 kişi</a:t>
-                      </a:r>
-                    </a:p>
-                  </a:txBody>
-                  <a:tcPr>
-                    <a:solidFill>
-                      <a:srgbClr val="FAFAFA"/>
-                    </a:solidFill>
-                  </a:tcPr>
-                </a:tc>
-                <a:tc>
-                  <a:txBody>
-                    <a:bodyPr/>
-                    <a:lstStyle/>
-                    <a:p>
-                      <a:pPr algn="ctr"/>
-                      <a:r>
-                        <a:rPr sz="900" b="1">
+                        <a:t>531,0</a:t>
+                      </a:r>
+                    </a:p>
+                  </a:txBody>
+                  <a:tcPr>
+                    <a:solidFill>
+                      <a:srgbClr val="F2F2F2"/>
+                    </a:solidFill>
+                  </a:tcPr>
+                </a:tc>
+                <a:tc>
+                  <a:txBody>
+                    <a:bodyPr/>
+                    <a:lstStyle/>
+                    <a:p>
+                      <a:pPr algn="ctr"/>
+                      <a:r>
+                        <a:rPr sz="850" b="1">
                           <a:solidFill>
                             <a:srgbClr val="333333"/>
                           </a:solidFill>
                           <a:latin typeface="Calibri"/>
                         </a:rPr>
-                        <a:t>30 kişi</a:t>
-                      </a:r>
-                    </a:p>
-                  </a:txBody>
-                  <a:tcPr>
-                    <a:solidFill>
-                      <a:srgbClr val="FAFAFA"/>
-                    </a:solidFill>
-                  </a:tcPr>
-                </a:tc>
-                <a:tc>
-                  <a:txBody>
-                    <a:bodyPr/>
-                    <a:lstStyle/>
-                    <a:p>
-                      <a:pPr algn="l"/>
-                      <a:r>
-                        <a:rPr sz="900" b="0">
-                          <a:solidFill>
-                            <a:srgbClr val="A6001A"/>
-                          </a:solidFill>
-                          <a:latin typeface="Calibri"/>
-                        </a:rPr>
-                        <a:t>artış bu iki haftada</a:t>
-                      </a:r>
-                    </a:p>
-                  </a:txBody>
-                  <a:tcPr>
-                    <a:solidFill>
-                      <a:srgbClr val="FAFAFA"/>
-                    </a:solidFill>
-                  </a:tcPr>
-                </a:tc>
-              </a:tr>
-              <a:tr h="182880">
-                <a:tc>
-                  <a:txBody>
-                    <a:bodyPr/>
-                    <a:lstStyle/>
-                    <a:p>
-                      <a:pPr algn="l"/>
-                      <a:r>
-                        <a:rPr sz="900" b="0">
-                          <a:solidFill>
-                            <a:srgbClr val="333333"/>
-                          </a:solidFill>
-                          <a:latin typeface="Calibri"/>
-                        </a:rPr>
-                        <a:t>1–14 Ağustos ürün adedi</a:t>
-                      </a:r>
-                    </a:p>
-                  </a:txBody>
-                  <a:tcPr>
-                    <a:solidFill>
-                      <a:srgbClr val="FFFFFF"/>
-                    </a:solidFill>
-                  </a:tcPr>
-                </a:tc>
-                <a:tc>
-                  <a:txBody>
-                    <a:bodyPr/>
-                    <a:lstStyle/>
-                    <a:p>
-                      <a:pPr algn="ctr"/>
-                      <a:r>
-                        <a:rPr sz="900" b="0">
-                          <a:solidFill>
-                            <a:srgbClr val="333333"/>
-                          </a:solidFill>
-                          <a:latin typeface="Calibri"/>
-                        </a:rPr>
-                        <a:t>137.483</a:t>
-                      </a:r>
-                    </a:p>
-                  </a:txBody>
-                  <a:tcPr>
-                    <a:solidFill>
-                      <a:srgbClr val="FFFFFF"/>
-                    </a:solidFill>
-                  </a:tcPr>
-                </a:tc>
-                <a:tc>
-                  <a:txBody>
-                    <a:bodyPr/>
-                    <a:lstStyle/>
-                    <a:p>
-                      <a:pPr algn="ctr"/>
-                      <a:r>
-                        <a:rPr sz="900" b="1">
-                          <a:solidFill>
-                            <a:srgbClr val="333333"/>
-                          </a:solidFill>
-                          <a:latin typeface="Calibri"/>
-                        </a:rPr>
-                        <a:t>171.957</a:t>
-                      </a:r>
-                    </a:p>
-                  </a:txBody>
-                  <a:tcPr>
-                    <a:solidFill>
-                      <a:srgbClr val="FFFFFF"/>
-                    </a:solidFill>
-                  </a:tcPr>
-                </a:tc>
-                <a:tc>
-                  <a:txBody>
-                    <a:bodyPr/>
-                    <a:lstStyle/>
-                    <a:p>
-                      <a:pPr algn="l"/>
-                      <a:r>
-                        <a:rPr sz="900" b="0">
-                          <a:solidFill>
-                            <a:srgbClr val="A6001A"/>
-                          </a:solidFill>
-                          <a:latin typeface="Calibri"/>
-                        </a:rPr>
-                        <a:t>iş +%25,1 büyüdü — alım işi takip etti</a:t>
-                      </a:r>
-                    </a:p>
-                  </a:txBody>
-                  <a:tcPr>
-                    <a:solidFill>
-                      <a:srgbClr val="FFFFFF"/>
-                    </a:solidFill>
-                  </a:tcPr>
-                </a:tc>
-              </a:tr>
-              <a:tr h="182880">
-                <a:tc>
-                  <a:txBody>
-                    <a:bodyPr/>
-                    <a:lstStyle/>
-                    <a:p>
-                      <a:pPr algn="l"/>
-                      <a:r>
-                        <a:rPr sz="900" b="0">
-                          <a:solidFill>
-                            <a:srgbClr val="333333"/>
-                          </a:solidFill>
-                          <a:latin typeface="Calibri"/>
-                        </a:rPr>
-                        <a:t>15–31 Ağustos ürün adedi</a:t>
-                      </a:r>
-                    </a:p>
-                  </a:txBody>
-                  <a:tcPr>
-                    <a:solidFill>
-                      <a:srgbClr val="FAFAFA"/>
-                    </a:solidFill>
-                  </a:tcPr>
-                </a:tc>
-                <a:tc>
-                  <a:txBody>
-                    <a:bodyPr/>
-                    <a:lstStyle/>
-                    <a:p>
-                      <a:pPr algn="ctr"/>
-                      <a:r>
-                        <a:rPr sz="900" b="0">
-                          <a:solidFill>
-                            <a:srgbClr val="333333"/>
-                          </a:solidFill>
-                          <a:latin typeface="Calibri"/>
-                        </a:rPr>
-                        <a:t>320.776</a:t>
-                      </a:r>
-                    </a:p>
-                  </a:txBody>
-                  <a:tcPr>
-                    <a:solidFill>
-                      <a:srgbClr val="FAFAFA"/>
-                    </a:solidFill>
-                  </a:tcPr>
-                </a:tc>
-                <a:tc>
-                  <a:txBody>
-                    <a:bodyPr/>
-                    <a:lstStyle/>
-                    <a:p>
-                      <a:pPr algn="ctr"/>
-                      <a:r>
-                        <a:rPr sz="900" b="1">
-                          <a:solidFill>
-                            <a:srgbClr val="333333"/>
-                          </a:solidFill>
-                          <a:latin typeface="Calibri"/>
-                        </a:rPr>
-                        <a:t>311.542</a:t>
-                      </a:r>
-                    </a:p>
-                  </a:txBody>
-                  <a:tcPr>
-                    <a:solidFill>
-                      <a:srgbClr val="FAFAFA"/>
-                    </a:solidFill>
-                  </a:tcPr>
-                </a:tc>
-                <a:tc>
-                  <a:txBody>
-                    <a:bodyPr/>
-                    <a:lstStyle/>
-                    <a:p>
-                      <a:pPr algn="l"/>
-                      <a:r>
-                        <a:rPr sz="900" b="0">
-                          <a:solidFill>
-                            <a:srgbClr val="A6001A"/>
-                          </a:solidFill>
-                          <a:latin typeface="Calibri"/>
-                        </a:rPr>
-                        <a:t>−%2,9 — dalga Eylül'e kaydı</a:t>
-                      </a:r>
-                    </a:p>
-                  </a:txBody>
-                  <a:tcPr>
-                    <a:solidFill>
-                      <a:srgbClr val="FAFAFA"/>
-                    </a:solidFill>
-                  </a:tcPr>
-                </a:tc>
-              </a:tr>
-              <a:tr h="182880">
-                <a:tc>
-                  <a:txBody>
-                    <a:bodyPr/>
-                    <a:lstStyle/>
-                    <a:p>
-                      <a:pPr algn="l"/>
-                      <a:r>
-                        <a:rPr sz="900" b="0">
-                          <a:solidFill>
-                            <a:srgbClr val="333333"/>
-                          </a:solidFill>
-                          <a:latin typeface="Calibri"/>
-                        </a:rPr>
-                        <a:t>31.08'de çalışan sezonluk</a:t>
-                      </a:r>
-                    </a:p>
-                  </a:txBody>
-                  <a:tcPr>
-                    <a:solidFill>
-                      <a:srgbClr val="FFFFFF"/>
-                    </a:solidFill>
-                  </a:tcPr>
-                </a:tc>
-                <a:tc>
-                  <a:txBody>
-                    <a:bodyPr/>
-                    <a:lstStyle/>
-                    <a:p>
-                      <a:pPr algn="ctr"/>
-                      <a:r>
-                        <a:rPr sz="900" b="0">
-                          <a:solidFill>
-                            <a:srgbClr val="333333"/>
-                          </a:solidFill>
-                          <a:latin typeface="Calibri"/>
-                        </a:rPr>
-                        <a:t>65 kişi</a:t>
-                      </a:r>
-                    </a:p>
-                  </a:txBody>
-                  <a:tcPr>
-                    <a:solidFill>
-                      <a:srgbClr val="FFFFFF"/>
-                    </a:solidFill>
-                  </a:tcPr>
-                </a:tc>
-                <a:tc>
-                  <a:txBody>
-                    <a:bodyPr/>
-                    <a:lstStyle/>
-                    <a:p>
-                      <a:pPr algn="ctr"/>
-                      <a:r>
-                        <a:rPr sz="900" b="1">
-                          <a:solidFill>
-                            <a:srgbClr val="333333"/>
-                          </a:solidFill>
-                          <a:latin typeface="Calibri"/>
-                        </a:rPr>
-                        <a:t>62 kişi</a:t>
-                      </a:r>
-                    </a:p>
-                  </a:txBody>
-                  <a:tcPr>
-                    <a:solidFill>
-                      <a:srgbClr val="FFFFFF"/>
-                    </a:solidFill>
-                  </a:tcPr>
-                </a:tc>
-                <a:tc>
-                  <a:txBody>
-                    <a:bodyPr/>
-                    <a:lstStyle/>
-                    <a:p>
-                      <a:pPr algn="l"/>
-                      <a:r>
-                        <a:rPr sz="900" b="0">
-                          <a:solidFill>
-                            <a:srgbClr val="A6001A"/>
-                          </a:solidFill>
-                          <a:latin typeface="Calibri"/>
-                        </a:rPr>
-                        <a:t>kesimde 3 kişi DAHA AZ</a:t>
-                      </a:r>
-                    </a:p>
-                  </a:txBody>
-                  <a:tcPr>
-                    <a:solidFill>
-                      <a:srgbClr val="FFFFFF"/>
-                    </a:solidFill>
-                  </a:tcPr>
-                </a:tc>
-              </a:tr>
-              <a:tr h="182880">
-                <a:tc>
-                  <a:txBody>
-                    <a:bodyPr/>
-                    <a:lstStyle/>
-                    <a:p>
-                      <a:pPr algn="l"/>
-                      <a:r>
-                        <a:rPr sz="900" b="0">
-                          <a:solidFill>
-                            <a:srgbClr val="333333"/>
-                          </a:solidFill>
-                          <a:latin typeface="Calibri"/>
-                        </a:rPr>
-                        <a:t>   — Temmuz alımı</a:t>
-                      </a:r>
-                    </a:p>
-                  </a:txBody>
-                  <a:tcPr>
-                    <a:solidFill>
-                      <a:srgbClr val="FAFAFA"/>
-                    </a:solidFill>
-                  </a:tcPr>
-                </a:tc>
-                <a:tc>
-                  <a:txBody>
-                    <a:bodyPr/>
-                    <a:lstStyle/>
-                    <a:p>
-                      <a:pPr algn="ctr"/>
-                      <a:r>
-                        <a:rPr sz="900" b="0">
-                          <a:solidFill>
-                            <a:srgbClr val="333333"/>
-                          </a:solidFill>
-                          <a:latin typeface="Calibri"/>
-                        </a:rPr>
-                        <a:t>4 kişi</a:t>
-                      </a:r>
-                    </a:p>
-                  </a:txBody>
-                  <a:tcPr>
-                    <a:solidFill>
-                      <a:srgbClr val="FAFAFA"/>
-                    </a:solidFill>
-                  </a:tcPr>
-                </a:tc>
-                <a:tc>
-                  <a:txBody>
-                    <a:bodyPr/>
-                    <a:lstStyle/>
-                    <a:p>
-                      <a:pPr algn="ctr"/>
-                      <a:r>
-                        <a:rPr sz="900" b="1">
-                          <a:solidFill>
-                            <a:srgbClr val="333333"/>
-                          </a:solidFill>
-                          <a:latin typeface="Calibri"/>
-                        </a:rPr>
-                        <a:t>2 kişi</a:t>
-                      </a:r>
-                    </a:p>
-                  </a:txBody>
-                  <a:tcPr>
-                    <a:solidFill>
-                      <a:srgbClr val="FAFAFA"/>
-                    </a:solidFill>
-                  </a:tcPr>
-                </a:tc>
-                <a:tc>
-                  <a:txBody>
-                    <a:bodyPr/>
-                    <a:lstStyle/>
-                    <a:p>
-                      <a:pPr algn="l"/>
-                      <a:r>
-                        <a:rPr sz="900" b="0">
-                          <a:solidFill>
-                            <a:srgbClr val="A6001A"/>
-                          </a:solidFill>
-                          <a:latin typeface="Calibri"/>
-                        </a:rPr>
-                        <a:t>erken alım payı düştü</a:t>
-                      </a:r>
-                    </a:p>
-                  </a:txBody>
-                  <a:tcPr>
-                    <a:solidFill>
-                      <a:srgbClr val="FAFAFA"/>
-                    </a:solidFill>
-                  </a:tcPr>
-                </a:tc>
-              </a:tr>
-              <a:tr h="182880">
-                <a:tc>
-                  <a:txBody>
-                    <a:bodyPr/>
-                    <a:lstStyle/>
-                    <a:p>
-                      <a:pPr algn="l"/>
-                      <a:r>
-                        <a:rPr sz="900" b="0">
-                          <a:solidFill>
-                            <a:srgbClr val="333333"/>
-                          </a:solidFill>
-                          <a:latin typeface="Calibri"/>
-                        </a:rPr>
-                        <a:t>   — 1–14 Ağustos alımı</a:t>
-                      </a:r>
-                    </a:p>
-                  </a:txBody>
-                  <a:tcPr>
-                    <a:solidFill>
-                      <a:srgbClr val="FFFFFF"/>
-                    </a:solidFill>
-                  </a:tcPr>
-                </a:tc>
-                <a:tc>
-                  <a:txBody>
-                    <a:bodyPr/>
-                    <a:lstStyle/>
-                    <a:p>
-                      <a:pPr algn="ctr"/>
-                      <a:r>
-                        <a:rPr sz="900" b="0">
-                          <a:solidFill>
-                            <a:srgbClr val="333333"/>
-                          </a:solidFill>
-                          <a:latin typeface="Calibri"/>
-                        </a:rPr>
-                        <a:t>12 kişi</a:t>
-                      </a:r>
-                    </a:p>
-                  </a:txBody>
-                  <a:tcPr>
-                    <a:solidFill>
-                      <a:srgbClr val="FFFFFF"/>
-                    </a:solidFill>
-                  </a:tcPr>
-                </a:tc>
-                <a:tc>
-                  <a:txBody>
-                    <a:bodyPr/>
-                    <a:lstStyle/>
-                    <a:p>
-                      <a:pPr algn="ctr"/>
-                      <a:r>
-                        <a:rPr sz="900" b="1">
-                          <a:solidFill>
-                            <a:srgbClr val="333333"/>
-                          </a:solidFill>
-                          <a:latin typeface="Calibri"/>
-                        </a:rPr>
-                        <a:t>27 kişi</a:t>
-                      </a:r>
-                    </a:p>
-                  </a:txBody>
-                  <a:tcPr>
-                    <a:solidFill>
-                      <a:srgbClr val="FFFFFF"/>
-                    </a:solidFill>
-                  </a:tcPr>
-                </a:tc>
-                <a:tc>
-                  <a:txBody>
-                    <a:bodyPr/>
-                    <a:lstStyle/>
-                    <a:p>
-                      <a:pPr algn="l"/>
-                      <a:r>
-                        <a:rPr sz="900" b="0">
-                          <a:solidFill>
-                            <a:srgbClr val="A6001A"/>
-                          </a:solidFill>
-                          <a:latin typeface="Calibri"/>
-                        </a:rPr>
-                        <a:t>iş +%25,1 büyüyen dönem</a:t>
-                      </a:r>
-                    </a:p>
-                  </a:txBody>
-                  <a:tcPr>
-                    <a:solidFill>
-                      <a:srgbClr val="FFFFFF"/>
-                    </a:solidFill>
-                  </a:tcPr>
-                </a:tc>
-              </a:tr>
-              <a:tr h="182880">
-                <a:tc>
-                  <a:txBody>
-                    <a:bodyPr/>
-                    <a:lstStyle/>
-                    <a:p>
-                      <a:pPr algn="l"/>
-                      <a:r>
-                        <a:rPr sz="900" b="0">
-                          <a:solidFill>
-                            <a:srgbClr val="333333"/>
-                          </a:solidFill>
-                          <a:latin typeface="Calibri"/>
-                        </a:rPr>
-                        <a:t>   — 15–31 Ağustos alımı</a:t>
-                      </a:r>
-                    </a:p>
-                  </a:txBody>
-                  <a:tcPr>
-                    <a:solidFill>
-                      <a:srgbClr val="FAFAFA"/>
-                    </a:solidFill>
-                  </a:tcPr>
-                </a:tc>
-                <a:tc>
-                  <a:txBody>
-                    <a:bodyPr/>
-                    <a:lstStyle/>
-                    <a:p>
-                      <a:pPr algn="ctr"/>
-                      <a:r>
-                        <a:rPr sz="900" b="0">
-                          <a:solidFill>
-                            <a:srgbClr val="333333"/>
-                          </a:solidFill>
-                          <a:latin typeface="Calibri"/>
-                        </a:rPr>
-                        <a:t>49 kişi</a:t>
-                      </a:r>
-                    </a:p>
-                  </a:txBody>
-                  <a:tcPr>
-                    <a:solidFill>
-                      <a:srgbClr val="FAFAFA"/>
-                    </a:solidFill>
-                  </a:tcPr>
-                </a:tc>
-                <a:tc>
-                  <a:txBody>
-                    <a:bodyPr/>
-                    <a:lstStyle/>
-                    <a:p>
-                      <a:pPr algn="ctr"/>
-                      <a:r>
-                        <a:rPr sz="900" b="1">
-                          <a:solidFill>
-                            <a:srgbClr val="333333"/>
-                          </a:solidFill>
-                          <a:latin typeface="Calibri"/>
-                        </a:rPr>
-                        <a:t>32 kişi</a:t>
-                      </a:r>
-                    </a:p>
-                  </a:txBody>
-                  <a:tcPr>
-                    <a:solidFill>
-                      <a:srgbClr val="FAFAFA"/>
-                    </a:solidFill>
-                  </a:tcPr>
-                </a:tc>
-                <a:tc>
-                  <a:txBody>
-                    <a:bodyPr/>
-                    <a:lstStyle/>
-                    <a:p>
-                      <a:pPr algn="l"/>
-                      <a:r>
-                        <a:rPr sz="900" b="0">
-                          <a:solidFill>
-                            <a:srgbClr val="A6001A"/>
-                          </a:solidFill>
-                          <a:latin typeface="Calibri"/>
-                        </a:rPr>
-                        <a:t>iş −%2,9 → alım azaltıldı</a:t>
-                      </a:r>
-                    </a:p>
-                  </a:txBody>
-                  <a:tcPr>
-                    <a:solidFill>
-                      <a:srgbClr val="FAFAFA"/>
+                        <a:t>32,0 M</a:t>
+                      </a:r>
+                    </a:p>
+                  </a:txBody>
+                  <a:tcPr>
+                    <a:solidFill>
+                      <a:srgbClr val="F2F2F2"/>
                     </a:solidFill>
                   </a:tcPr>
                 </a:tc>
@@ -20851,9 +21357,105 @@
           </a:graphicData>
         </a:graphic>
       </p:graphicFrame>
-      <p:sp>
-        <p:nvSpPr>
-          <p:cNvPr id="22" name="TextBox 21"/>
+      <p:graphicFrame>
+        <p:nvGraphicFramePr>
+          <p:cNvPr id="22" name="Chart 21"/>
+          <p:cNvGraphicFramePr>
+            <a:graphicFrameLocks noGrp="1"/>
+          </p:cNvGraphicFramePr>
+          <p:nvPr/>
+        </p:nvGraphicFramePr>
+        <p:xfrm>
+          <a:off x="7955279" y="3520440"/>
+          <a:ext cx="3611880" cy="1920240"/>
+        </p:xfrm>
+        <a:graphic>
+          <a:graphicData uri="http://schemas.openxmlformats.org/drawingml/2006/chart">
+            <c:chart xmlns:c="http://schemas.openxmlformats.org/drawingml/2006/chart" r:id="rId6"/>
+          </a:graphicData>
+        </a:graphic>
+      </p:graphicFrame>
+      <p:sp>
+        <p:nvSpPr>
+          <p:cNvPr id="23" name="TextBox 22"/>
+          <p:cNvSpPr txBox="1"/>
+          <p:nvPr/>
+        </p:nvSpPr>
+        <p:spPr>
+          <a:xfrm>
+            <a:off x="7955279" y="3291840"/>
+            <a:ext cx="3611880" cy="219456"/>
+          </a:xfrm>
+          <a:prstGeom prst="rect">
+            <a:avLst/>
+          </a:prstGeom>
+          <a:noFill/>
+        </p:spPr>
+        <p:txBody>
+          <a:bodyPr wrap="square" anchor="t">
+            <a:spAutoFit/>
+          </a:bodyPr>
+          <a:lstStyle/>
+          <a:p>
+            <a:pPr algn="l">
+              <a:lnSpc>
+                <a:spcPct val="100000"/>
+              </a:lnSpc>
+            </a:pPr>
+            <a:r>
+              <a:rPr sz="900" b="1">
+                <a:solidFill>
+                  <a:srgbClr val="6E6E6E"/>
+                </a:solidFill>
+                <a:latin typeface="Calibri"/>
+              </a:rPr>
+              <a:t>Ciro (M TL) — gerçekleşen + tahmin</a:t>
+            </a:r>
+          </a:p>
+        </p:txBody>
+      </p:sp>
+      <p:sp>
+        <p:nvSpPr>
+          <p:cNvPr id="24" name="TextBox 23"/>
+          <p:cNvSpPr txBox="1"/>
+          <p:nvPr/>
+        </p:nvSpPr>
+        <p:spPr>
+          <a:xfrm>
+            <a:off x="548640" y="5047488"/>
+            <a:ext cx="7223760" cy="402336"/>
+          </a:xfrm>
+          <a:prstGeom prst="rect">
+            <a:avLst/>
+          </a:prstGeom>
+          <a:noFill/>
+        </p:spPr>
+        <p:txBody>
+          <a:bodyPr wrap="square" anchor="t">
+            <a:spAutoFit/>
+          </a:bodyPr>
+          <a:lstStyle/>
+          <a:p>
+            <a:pPr algn="l">
+              <a:lnSpc>
+                <a:spcPct val="105000"/>
+              </a:lnSpc>
+            </a:pPr>
+            <a:r>
+              <a:rPr sz="850" b="0">
+                <a:solidFill>
+                  <a:srgbClr val="A6001A"/>
+                </a:solidFill>
+                <a:latin typeface="Calibri"/>
+              </a:rPr>
+              <a:t>TAKVİM AYI KIYASI KAYMAYI YANSITIR: okul 08.09.2025'de değil 14.09.2026'te açıldı — 2025'te Ağustos sonunda gerçekleşen yoğunluk 2026'da Eylül başına düştü. Bu yüzden Ağustos -8%, Eylül +102% görünür; ay ay okumak yanıltır, SEZON TOPLAMI (veya Ağustos+Eylül birlikte) esas alınır.</a:t>
+            </a:r>
+          </a:p>
+        </p:txBody>
+      </p:sp>
+      <p:sp>
+        <p:nvSpPr>
+          <p:cNvPr id="25" name="TextBox 24"/>
           <p:cNvSpPr txBox="1"/>
           <p:nvPr/>
         </p:nvSpPr>
@@ -20885,14 +21487,14 @@
                 </a:solidFill>
                 <a:latin typeface="Calibri"/>
               </a:rPr>
-              <a:t>* İK'da düzeltme bekleyen 1 kayıt: 2025 girişli bir sezonluk personel çıkış tarihi işlenmediği için 31.08'de aktif görünüyor; düzeltilince sezonluk 62 → 61 olur (rakamlar İK'nın resmi kaydıyla birebir tutulsun diye şimdilik düzeltilmedi) · Kapsam: beş mağaza (FSM · Özlüce · İst. Yolu · Heykel · Şura) · Kohortlar okul açılışına göre AYNI ofsette kesildi (T−12: 27.08.2025 ve 02.09.2026) · İş hacmi üç POS mağazası · ⚠ "açılıştan kaç gün önce" ölçüsü açılış 6 gün kaydığı için 2026'yı mekanik olarak erken gösterir, takvim ölçüsü esastır.</a:t>
+              <a:t>* TAHMİN — 02.09.2026 tarihine kadar gerçek veri, sonrası model. Yöntem: okul-hizalı gün eşleme (ciro) + sezon şekli×seviye (FTE) + FTE başına maliyet · Büyüme oranı ayrıca varsayılmadı, okul-hizalı pencerede ÖLÇÜLEN +%66,0 ciro büyümesi uygulandı · Okul açılışı 08.09.2025 → 14.09.2026 (6 gün kayma gün eşlemesinde dikkate alındı) · Ücret seviyesi sabit varsayıldı → maliyet tahmini ALT SINIR · Kapsam: üç POS mağazası, ciro KDV hariç ve Sınav dahil.</a:t>
             </a:r>
           </a:p>
         </p:txBody>
       </p:sp>
       <p:sp>
         <p:nvSpPr>
-          <p:cNvPr id="23" name="TextBox 22"/>
+          <p:cNvPr id="26" name="TextBox 25"/>
           <p:cNvSpPr txBox="1"/>
           <p:nvPr/>
         </p:nvSpPr>
@@ -20982,7 +21584,7 @@
           <a:lstStyle/>
           <a:p>
             <a:r>
-              <a:t>Yöntem ve Açıklamalar</a:t>
+              <a:t>Sezonluk Alım Zamanlaması</a:t>
             </a:r>
           </a:p>
         </p:txBody>
@@ -20995,8 +21597,8 @@
         </p:nvSpPr>
         <p:spPr>
           <a:xfrm>
-            <a:off x="548640" y="1325880"/>
-            <a:ext cx="11018520" cy="601980"/>
+            <a:off x="548640" y="1371600"/>
+            <a:ext cx="3566160" cy="1828800"/>
           </a:xfrm>
           <a:prstGeom prst="rect">
             <a:avLst/>
@@ -21041,14 +21643,14 @@
         </p:nvSpPr>
         <p:spPr>
           <a:xfrm>
-            <a:off x="548640" y="1325880"/>
-            <a:ext cx="68580" cy="601980"/>
+            <a:off x="548640" y="1371600"/>
+            <a:ext cx="68580" cy="1828800"/>
           </a:xfrm>
           <a:prstGeom prst="rect">
             <a:avLst/>
           </a:prstGeom>
           <a:solidFill>
-            <a:srgbClr val="E30622"/>
+            <a:srgbClr val="9A9A9A"/>
           </a:solidFill>
           <a:ln>
             <a:noFill/>
@@ -21079,7 +21681,7 @@
       </p:sp>
       <p:pic>
         <p:nvPicPr>
-          <p:cNvPr id="5" name="Picture 4" descr="circle-check.png"/>
+          <p:cNvPr id="5" name="Picture 4" descr="workflow.png"/>
           <p:cNvPicPr>
             <a:picLocks noChangeAspect="1"/>
           </p:cNvPicPr>
@@ -21093,8 +21695,8 @@
         </p:blipFill>
         <p:spPr>
           <a:xfrm>
-            <a:off x="777240" y="1453895"/>
-            <a:ext cx="256032" cy="256032"/>
+            <a:off x="3639312" y="1536192"/>
+            <a:ext cx="274320" cy="274320"/>
           </a:xfrm>
           <a:prstGeom prst="rect">
             <a:avLst/>
@@ -21109,8 +21711,47 @@
         </p:nvSpPr>
         <p:spPr>
           <a:xfrm>
-            <a:off x="1143000" y="1389888"/>
-            <a:ext cx="10058400" cy="292608"/>
+            <a:off x="804672" y="1536192"/>
+            <a:ext cx="2697480" cy="384048"/>
+          </a:xfrm>
+          <a:prstGeom prst="rect">
+            <a:avLst/>
+          </a:prstGeom>
+          <a:noFill/>
+        </p:spPr>
+        <p:txBody>
+          <a:bodyPr wrap="square" anchor="t">
+            <a:spAutoFit/>
+          </a:bodyPr>
+          <a:lstStyle/>
+          <a:p>
+            <a:pPr algn="l">
+              <a:lnSpc>
+                <a:spcPct val="105000"/>
+              </a:lnSpc>
+            </a:pPr>
+            <a:r>
+              <a:rPr sz="900" b="1">
+                <a:solidFill>
+                  <a:srgbClr val="6E6E6E"/>
+                </a:solidFill>
+                <a:latin typeface="Calibri"/>
+              </a:rPr>
+              <a:t>ORTALAMA ALIM GÜNÜ</a:t>
+            </a:r>
+          </a:p>
+        </p:txBody>
+      </p:sp>
+      <p:sp>
+        <p:nvSpPr>
+          <p:cNvPr id="7" name="TextBox 6"/>
+          <p:cNvSpPr txBox="1"/>
+          <p:nvPr/>
+        </p:nvSpPr>
+        <p:spPr>
+          <a:xfrm>
+            <a:off x="804672" y="1975104"/>
+            <a:ext cx="3154679" cy="658368"/>
           </a:xfrm>
           <a:prstGeom prst="rect">
             <a:avLst/>
@@ -21129,27 +21770,27 @@
               </a:lnSpc>
             </a:pPr>
             <a:r>
-              <a:rPr sz="1150" b="1">
+              <a:rPr sz="2200" b="1">
                 <a:solidFill>
-                  <a:srgbClr val="A6001A"/>
+                  <a:srgbClr val="9A9A9A"/>
                 </a:solidFill>
                 <a:latin typeface="Calibri"/>
               </a:rPr>
-              <a:t>Büyüme kurumsal kanaldan mı geldi?</a:t>
+              <a:t>2,5 gün geç</a:t>
             </a:r>
           </a:p>
         </p:txBody>
       </p:sp>
       <p:sp>
         <p:nvSpPr>
-          <p:cNvPr id="7" name="TextBox 6"/>
+          <p:cNvPr id="8" name="TextBox 7"/>
           <p:cNvSpPr txBox="1"/>
           <p:nvPr/>
         </p:nvSpPr>
         <p:spPr>
           <a:xfrm>
-            <a:off x="1143000" y="1673352"/>
-            <a:ext cx="10058400" cy="217932"/>
+            <a:off x="804672" y="2688336"/>
+            <a:ext cx="3154679" cy="457200"/>
           </a:xfrm>
           <a:prstGeom prst="rect">
             <a:avLst/>
@@ -21164,31 +21805,31 @@
           <a:p>
             <a:pPr algn="l">
               <a:lnSpc>
-                <a:spcPct val="106000"/>
+                <a:spcPct val="105000"/>
               </a:lnSpc>
             </a:pPr>
             <a:r>
-              <a:rPr sz="950" b="0">
+              <a:rPr sz="1000" b="0">
                 <a:solidFill>
-                  <a:srgbClr val="333333"/>
+                  <a:srgbClr val="6E6E6E"/>
                 </a:solidFill>
                 <a:latin typeface="Calibri"/>
               </a:rPr>
-              <a:t>Tersi: Sınav Okulları küçüldü. Ocak–Ağustos cirosu 136,2 → 105,6 milyon TL (−%22,4). Mağaza tarafı +%54,9 büyüdü — büyümenin tamamı raftan geldi.</a:t>
+              <a:t>takvim ölçüsü · 225. → 228. gün</a:t>
             </a:r>
           </a:p>
         </p:txBody>
       </p:sp>
       <p:sp>
         <p:nvSpPr>
-          <p:cNvPr id="8" name="Rectangle 7"/>
+          <p:cNvPr id="9" name="Rectangle 8"/>
           <p:cNvSpPr/>
           <p:nvPr/>
         </p:nvSpPr>
         <p:spPr>
           <a:xfrm>
-            <a:off x="548640" y="2019299"/>
-            <a:ext cx="11018520" cy="601980"/>
+            <a:off x="4279392" y="1371600"/>
+            <a:ext cx="3566160" cy="1828800"/>
           </a:xfrm>
           <a:prstGeom prst="rect">
             <a:avLst/>
@@ -21227,20 +21868,20 @@
       </p:sp>
       <p:sp>
         <p:nvSpPr>
-          <p:cNvPr id="9" name="Rectangle 8"/>
+          <p:cNvPr id="10" name="Rectangle 9"/>
           <p:cNvSpPr/>
           <p:nvPr/>
         </p:nvSpPr>
         <p:spPr>
           <a:xfrm>
-            <a:off x="548640" y="2019299"/>
-            <a:ext cx="68580" cy="601980"/>
+            <a:off x="4279392" y="1371600"/>
+            <a:ext cx="68580" cy="1828800"/>
           </a:xfrm>
           <a:prstGeom prst="rect">
             <a:avLst/>
           </a:prstGeom>
           <a:solidFill>
-            <a:srgbClr val="E30622"/>
+            <a:srgbClr val="A6001A"/>
           </a:solidFill>
           <a:ln>
             <a:noFill/>
@@ -21271,22 +21912,22 @@
       </p:sp>
       <p:pic>
         <p:nvPicPr>
-          <p:cNvPr id="10" name="Picture 9" descr="circle-check.png"/>
+          <p:cNvPr id="11" name="Picture 10" descr="users.png"/>
           <p:cNvPicPr>
             <a:picLocks noChangeAspect="1"/>
           </p:cNvPicPr>
           <p:nvPr/>
         </p:nvPicPr>
         <p:blipFill>
-          <a:blip r:embed="rId3"/>
+          <a:blip r:embed="rId4"/>
           <a:stretch>
             <a:fillRect/>
           </a:stretch>
         </p:blipFill>
         <p:spPr>
           <a:xfrm>
-            <a:off x="777240" y="2147316"/>
-            <a:ext cx="256032" cy="256032"/>
+            <a:off x="7370064" y="1536192"/>
+            <a:ext cx="274320" cy="274320"/>
           </a:xfrm>
           <a:prstGeom prst="rect">
             <a:avLst/>
@@ -21295,14 +21936,53 @@
       </p:pic>
       <p:sp>
         <p:nvSpPr>
-          <p:cNvPr id="11" name="TextBox 10"/>
+          <p:cNvPr id="12" name="TextBox 11"/>
           <p:cNvSpPr txBox="1"/>
           <p:nvPr/>
         </p:nvSpPr>
         <p:spPr>
           <a:xfrm>
-            <a:off x="1143000" y="2083307"/>
-            <a:ext cx="10058400" cy="292608"/>
+            <a:off x="4535424" y="1536192"/>
+            <a:ext cx="2697480" cy="384048"/>
+          </a:xfrm>
+          <a:prstGeom prst="rect">
+            <a:avLst/>
+          </a:prstGeom>
+          <a:noFill/>
+        </p:spPr>
+        <p:txBody>
+          <a:bodyPr wrap="square" anchor="t">
+            <a:spAutoFit/>
+          </a:bodyPr>
+          <a:lstStyle/>
+          <a:p>
+            <a:pPr algn="l">
+              <a:lnSpc>
+                <a:spcPct val="105000"/>
+              </a:lnSpc>
+            </a:pPr>
+            <a:r>
+              <a:rPr sz="900" b="1">
+                <a:solidFill>
+                  <a:srgbClr val="6E6E6E"/>
+                </a:solidFill>
+                <a:latin typeface="Calibri"/>
+              </a:rPr>
+              <a:t>TEMMUZ VE ÖNCESİ ALIM</a:t>
+            </a:r>
+          </a:p>
+        </p:txBody>
+      </p:sp>
+      <p:sp>
+        <p:nvSpPr>
+          <p:cNvPr id="13" name="TextBox 12"/>
+          <p:cNvSpPr txBox="1"/>
+          <p:nvPr/>
+        </p:nvSpPr>
+        <p:spPr>
+          <a:xfrm>
+            <a:off x="4535424" y="1975104"/>
+            <a:ext cx="3154679" cy="658368"/>
           </a:xfrm>
           <a:prstGeom prst="rect">
             <a:avLst/>
@@ -21321,27 +22001,27 @@
               </a:lnSpc>
             </a:pPr>
             <a:r>
-              <a:rPr sz="1150" b="1">
+              <a:rPr sz="3000" b="1">
                 <a:solidFill>
                   <a:srgbClr val="A6001A"/>
                 </a:solidFill>
                 <a:latin typeface="Calibri"/>
               </a:rPr>
-              <a:t>Ciro artışı enflasyon kaynaklı mı?</a:t>
+              <a:t>6 → 2</a:t>
             </a:r>
           </a:p>
         </p:txBody>
       </p:sp>
       <p:sp>
         <p:nvSpPr>
-          <p:cNvPr id="12" name="TextBox 11"/>
+          <p:cNvPr id="14" name="TextBox 13"/>
           <p:cNvSpPr txBox="1"/>
           <p:nvPr/>
         </p:nvSpPr>
         <p:spPr>
           <a:xfrm>
-            <a:off x="1143000" y="2366771"/>
-            <a:ext cx="10058400" cy="217932"/>
+            <a:off x="4535424" y="2688336"/>
+            <a:ext cx="3154679" cy="457200"/>
           </a:xfrm>
           <a:prstGeom prst="rect">
             <a:avLst/>
@@ -21356,31 +22036,31 @@
           <a:p>
             <a:pPr algn="l">
               <a:lnSpc>
-                <a:spcPct val="106000"/>
+                <a:spcPct val="105000"/>
               </a:lnSpc>
             </a:pPr>
             <a:r>
-              <a:rPr sz="950" b="0">
+              <a:rPr sz="1000" b="0">
                 <a:solidFill>
-                  <a:srgbClr val="333333"/>
+                  <a:srgbClr val="6E6E6E"/>
                 </a:solidFill>
                 <a:latin typeface="Calibri"/>
               </a:rPr>
-              <a:t>Kısmen doğru: eşleşen ürünlerde fiyat endeksi +%19,8. Bu yüzden savunma ciroya değil ADEDE dayanıyor: ürün adedi +%34,9 ve adet fiyattan etkilenmez.</a:t>
+              <a:t>gerçek erken alım azaldı</a:t>
             </a:r>
           </a:p>
         </p:txBody>
       </p:sp>
       <p:sp>
         <p:nvSpPr>
-          <p:cNvPr id="13" name="Rectangle 12"/>
+          <p:cNvPr id="15" name="Rectangle 14"/>
           <p:cNvSpPr/>
           <p:nvPr/>
         </p:nvSpPr>
         <p:spPr>
           <a:xfrm>
-            <a:off x="548640" y="2712719"/>
-            <a:ext cx="11018520" cy="601980"/>
+            <a:off x="8001000" y="1371600"/>
+            <a:ext cx="3566160" cy="1828800"/>
           </a:xfrm>
           <a:prstGeom prst="rect">
             <a:avLst/>
@@ -21419,20 +22099,20 @@
       </p:sp>
       <p:sp>
         <p:nvSpPr>
-          <p:cNvPr id="14" name="Rectangle 13"/>
+          <p:cNvPr id="16" name="Rectangle 15"/>
           <p:cNvSpPr/>
           <p:nvPr/>
         </p:nvSpPr>
         <p:spPr>
           <a:xfrm>
-            <a:off x="548640" y="2712719"/>
-            <a:ext cx="68580" cy="601980"/>
+            <a:off x="8001000" y="1371600"/>
+            <a:ext cx="68580" cy="1828800"/>
           </a:xfrm>
           <a:prstGeom prst="rect">
             <a:avLst/>
           </a:prstGeom>
           <a:solidFill>
-            <a:srgbClr val="E30622"/>
+            <a:srgbClr val="A6001A"/>
           </a:solidFill>
           <a:ln>
             <a:noFill/>
@@ -21463,22 +22143,22 @@
       </p:sp>
       <p:pic>
         <p:nvPicPr>
-          <p:cNvPr id="15" name="Picture 14" descr="circle-check.png"/>
+          <p:cNvPr id="17" name="Picture 16" descr="package.png"/>
           <p:cNvPicPr>
             <a:picLocks noChangeAspect="1"/>
           </p:cNvPicPr>
           <p:nvPr/>
         </p:nvPicPr>
         <p:blipFill>
-          <a:blip r:embed="rId3"/>
+          <a:blip r:embed="rId5"/>
           <a:stretch>
             <a:fillRect/>
           </a:stretch>
         </p:blipFill>
         <p:spPr>
           <a:xfrm>
-            <a:off x="777240" y="2840736"/>
-            <a:ext cx="256032" cy="256032"/>
+            <a:off x="11091672" y="1536192"/>
+            <a:ext cx="274320" cy="274320"/>
           </a:xfrm>
           <a:prstGeom prst="rect">
             <a:avLst/>
@@ -21487,14 +22167,53 @@
       </p:pic>
       <p:sp>
         <p:nvSpPr>
-          <p:cNvPr id="16" name="TextBox 15"/>
+          <p:cNvPr id="18" name="TextBox 17"/>
           <p:cNvSpPr txBox="1"/>
           <p:nvPr/>
         </p:nvSpPr>
         <p:spPr>
           <a:xfrm>
-            <a:off x="1143000" y="2776727"/>
-            <a:ext cx="10058400" cy="292608"/>
+            <a:off x="8257031" y="1536192"/>
+            <a:ext cx="2697480" cy="384048"/>
+          </a:xfrm>
+          <a:prstGeom prst="rect">
+            <a:avLst/>
+          </a:prstGeom>
+          <a:noFill/>
+        </p:spPr>
+        <p:txBody>
+          <a:bodyPr wrap="square" anchor="t">
+            <a:spAutoFit/>
+          </a:bodyPr>
+          <a:lstStyle/>
+          <a:p>
+            <a:pPr algn="l">
+              <a:lnSpc>
+                <a:spcPct val="105000"/>
+              </a:lnSpc>
+            </a:pPr>
+            <a:r>
+              <a:rPr sz="900" b="1">
+                <a:solidFill>
+                  <a:srgbClr val="6E6E6E"/>
+                </a:solidFill>
+                <a:latin typeface="Calibri"/>
+              </a:rPr>
+              <a:t>1–14 AĞUSTOS İŞ HACMİ</a:t>
+            </a:r>
+          </a:p>
+        </p:txBody>
+      </p:sp>
+      <p:sp>
+        <p:nvSpPr>
+          <p:cNvPr id="19" name="TextBox 18"/>
+          <p:cNvSpPr txBox="1"/>
+          <p:nvPr/>
+        </p:nvSpPr>
+        <p:spPr>
+          <a:xfrm>
+            <a:off x="8257031" y="1975104"/>
+            <a:ext cx="3154679" cy="658368"/>
           </a:xfrm>
           <a:prstGeom prst="rect">
             <a:avLst/>
@@ -21513,27 +22232,27 @@
               </a:lnSpc>
             </a:pPr>
             <a:r>
-              <a:rPr sz="1150" b="1">
+              <a:rPr sz="3000" b="1">
                 <a:solidFill>
                   <a:srgbClr val="A6001A"/>
                 </a:solidFill>
                 <a:latin typeface="Calibri"/>
               </a:rPr>
-              <a:t>Kasa sistemi değişti, karşılaştırma geçerli mi?</a:t>
+              <a:t>+%25,1</a:t>
             </a:r>
           </a:p>
         </p:txBody>
       </p:sp>
       <p:sp>
         <p:nvSpPr>
-          <p:cNvPr id="17" name="TextBox 16"/>
+          <p:cNvPr id="20" name="TextBox 19"/>
           <p:cNvSpPr txBox="1"/>
           <p:nvPr/>
         </p:nvSpPr>
         <p:spPr>
           <a:xfrm>
-            <a:off x="1143000" y="3060191"/>
-            <a:ext cx="10058400" cy="217932"/>
+            <a:off x="8257031" y="2688336"/>
+            <a:ext cx="3154679" cy="457200"/>
           </a:xfrm>
           <a:prstGeom prst="rect">
             <a:avLst/>
@@ -21548,600 +22267,1086 @@
           <a:p>
             <a:pPr algn="l">
               <a:lnSpc>
-                <a:spcPct val="106000"/>
+                <a:spcPct val="105000"/>
               </a:lnSpc>
             </a:pPr>
             <a:r>
-              <a:rPr sz="950" b="0">
+              <a:rPr sz="1000" b="0">
                 <a:solidFill>
-                  <a:srgbClr val="333333"/>
+                  <a:srgbClr val="6E6E6E"/>
                 </a:solidFill>
                 <a:latin typeface="Calibri"/>
               </a:rPr>
-              <a:t>Bu yüzden ölçüm POS'tan değil ERP'den (DerinSIS) alındı — iki yılda da aynı kaynak, aynı belge tipi. Temmuz 2025 kasa geçişi ölçüye girmiyor.</a:t>
+              <a:t>137.483 → 171.957 adet</a:t>
             </a:r>
           </a:p>
         </p:txBody>
       </p:sp>
-      <p:sp>
-        <p:nvSpPr>
-          <p:cNvPr id="18" name="Rectangle 17"/>
-          <p:cNvSpPr/>
-          <p:nvPr/>
-        </p:nvSpPr>
-        <p:spPr>
-          <a:xfrm>
-            <a:off x="548640" y="3406139"/>
-            <a:ext cx="11018520" cy="601980"/>
-          </a:xfrm>
-          <a:prstGeom prst="rect">
-            <a:avLst/>
-          </a:prstGeom>
-          <a:solidFill>
-            <a:srgbClr val="FFFFFF"/>
-          </a:solidFill>
-          <a:ln w="12700">
-            <a:solidFill>
-              <a:srgbClr val="DCDCDC"/>
-            </a:solidFill>
-          </a:ln>
-          <a:effectLst/>
-        </p:spPr>
-        <p:style>
-          <a:lnRef idx="1">
-            <a:schemeClr val="accent1"/>
-          </a:lnRef>
-          <a:fillRef idx="3">
-            <a:schemeClr val="accent1"/>
-          </a:fillRef>
-          <a:effectRef idx="2">
-            <a:schemeClr val="accent1"/>
-          </a:effectRef>
-          <a:fontRef idx="minor">
-            <a:schemeClr val="lt1"/>
-          </a:fontRef>
-        </p:style>
-        <p:txBody>
-          <a:bodyPr rtlCol="0" anchor="ctr"/>
-          <a:lstStyle/>
-          <a:p>
-            <a:pPr algn="ctr"/>
-          </a:p>
-        </p:txBody>
-      </p:sp>
-      <p:sp>
-        <p:nvSpPr>
-          <p:cNvPr id="19" name="Rectangle 18"/>
-          <p:cNvSpPr/>
-          <p:nvPr/>
-        </p:nvSpPr>
-        <p:spPr>
-          <a:xfrm>
-            <a:off x="548640" y="3406139"/>
-            <a:ext cx="68580" cy="601980"/>
-          </a:xfrm>
-          <a:prstGeom prst="rect">
-            <a:avLst/>
-          </a:prstGeom>
-          <a:solidFill>
-            <a:srgbClr val="E30622"/>
-          </a:solidFill>
-          <a:ln>
-            <a:noFill/>
-          </a:ln>
-          <a:effectLst/>
-        </p:spPr>
-        <p:style>
-          <a:lnRef idx="1">
-            <a:schemeClr val="accent1"/>
-          </a:lnRef>
-          <a:fillRef idx="3">
-            <a:schemeClr val="accent1"/>
-          </a:fillRef>
-          <a:effectRef idx="2">
-            <a:schemeClr val="accent1"/>
-          </a:effectRef>
-          <a:fontRef idx="minor">
-            <a:schemeClr val="lt1"/>
-          </a:fontRef>
-        </p:style>
-        <p:txBody>
-          <a:bodyPr rtlCol="0" anchor="ctr"/>
-          <a:lstStyle/>
-          <a:p>
-            <a:pPr algn="ctr"/>
-          </a:p>
-        </p:txBody>
-      </p:sp>
-      <p:pic>
-        <p:nvPicPr>
-          <p:cNvPr id="20" name="Picture 19" descr="circle-check.png"/>
-          <p:cNvPicPr>
-            <a:picLocks noChangeAspect="1"/>
-          </p:cNvPicPr>
-          <p:nvPr/>
-        </p:nvPicPr>
-        <p:blipFill>
-          <a:blip r:embed="rId3"/>
-          <a:stretch>
-            <a:fillRect/>
-          </a:stretch>
-        </p:blipFill>
-        <p:spPr>
-          <a:xfrm>
-            <a:off x="777240" y="3534156"/>
-            <a:ext cx="256032" cy="256032"/>
-          </a:xfrm>
-          <a:prstGeom prst="rect">
-            <a:avLst/>
-          </a:prstGeom>
-        </p:spPr>
-      </p:pic>
-      <p:sp>
-        <p:nvSpPr>
-          <p:cNvPr id="21" name="TextBox 20"/>
-          <p:cNvSpPr txBox="1"/>
-          <p:nvPr/>
-        </p:nvSpPr>
-        <p:spPr>
-          <a:xfrm>
-            <a:off x="1143000" y="3470147"/>
-            <a:ext cx="10058400" cy="292608"/>
-          </a:xfrm>
-          <a:prstGeom prst="rect">
-            <a:avLst/>
-          </a:prstGeom>
-          <a:noFill/>
-        </p:spPr>
-        <p:txBody>
-          <a:bodyPr wrap="square" anchor="t">
-            <a:spAutoFit/>
-          </a:bodyPr>
-          <a:lstStyle/>
-          <a:p>
-            <a:pPr algn="l">
-              <a:lnSpc>
-                <a:spcPct val="100000"/>
-              </a:lnSpc>
-            </a:pPr>
-            <a:r>
-              <a:rPr sz="1150" b="1">
-                <a:solidFill>
-                  <a:srgbClr val="A6001A"/>
-                </a:solidFill>
-                <a:latin typeface="Calibri"/>
-              </a:rPr>
-              <a:t>Sezonluk personel erken mi alındı?</a:t>
-            </a:r>
-          </a:p>
-        </p:txBody>
-      </p:sp>
+      <p:graphicFrame>
+        <p:nvGraphicFramePr>
+          <p:cNvPr id="21" name="Table 20"/>
+          <p:cNvGraphicFramePr>
+            <a:graphicFrameLocks noGrp="1"/>
+          </p:cNvGraphicFramePr>
+          <p:nvPr/>
+        </p:nvGraphicFramePr>
+        <p:xfrm>
+          <a:off x="548640" y="3246120"/>
+          <a:ext cx="11018520" cy="2011680"/>
+        </p:xfrm>
+        <a:graphic>
+          <a:graphicData uri="http://schemas.openxmlformats.org/drawingml/2006/table">
+            <a:tbl>
+              <a:tblPr firstRow="1" bandRow="1">
+                <a:tableStyleId>{5C22544A-7EE6-4342-B048-85BDC9FD1C3A}</a:tableStyleId>
+              </a:tblPr>
+              <a:tblGrid>
+                <a:gridCol w="3291840"/>
+                <a:gridCol w="1737360"/>
+                <a:gridCol w="1737360"/>
+                <a:gridCol w="4251960"/>
+              </a:tblGrid>
+              <a:tr h="182880">
+                <a:tc>
+                  <a:txBody>
+                    <a:bodyPr/>
+                    <a:lstStyle/>
+                    <a:p>
+                      <a:pPr algn="l"/>
+                      <a:r>
+                        <a:rPr sz="800" b="1">
+                          <a:solidFill>
+                            <a:srgbClr val="FFFFFF"/>
+                          </a:solidFill>
+                          <a:latin typeface="Calibri"/>
+                        </a:rPr>
+                        <a:t>Ölçü</a:t>
+                      </a:r>
+                    </a:p>
+                  </a:txBody>
+                  <a:tcPr>
+                    <a:solidFill>
+                      <a:srgbClr val="E30622"/>
+                    </a:solidFill>
+                  </a:tcPr>
+                </a:tc>
+                <a:tc>
+                  <a:txBody>
+                    <a:bodyPr/>
+                    <a:lstStyle/>
+                    <a:p>
+                      <a:pPr algn="ctr"/>
+                      <a:r>
+                        <a:rPr sz="800" b="1">
+                          <a:solidFill>
+                            <a:srgbClr val="FFFFFF"/>
+                          </a:solidFill>
+                          <a:latin typeface="Calibri"/>
+                        </a:rPr>
+                        <a:t>2025</a:t>
+                      </a:r>
+                    </a:p>
+                  </a:txBody>
+                  <a:tcPr>
+                    <a:solidFill>
+                      <a:srgbClr val="E30622"/>
+                    </a:solidFill>
+                  </a:tcPr>
+                </a:tc>
+                <a:tc>
+                  <a:txBody>
+                    <a:bodyPr/>
+                    <a:lstStyle/>
+                    <a:p>
+                      <a:pPr algn="ctr"/>
+                      <a:r>
+                        <a:rPr sz="800" b="1">
+                          <a:solidFill>
+                            <a:srgbClr val="FFFFFF"/>
+                          </a:solidFill>
+                          <a:latin typeface="Calibri"/>
+                        </a:rPr>
+                        <a:t>2026</a:t>
+                      </a:r>
+                    </a:p>
+                  </a:txBody>
+                  <a:tcPr>
+                    <a:solidFill>
+                      <a:srgbClr val="E30622"/>
+                    </a:solidFill>
+                  </a:tcPr>
+                </a:tc>
+                <a:tc>
+                  <a:txBody>
+                    <a:bodyPr/>
+                    <a:lstStyle/>
+                    <a:p>
+                      <a:pPr algn="l"/>
+                      <a:r>
+                        <a:rPr sz="800" b="1">
+                          <a:solidFill>
+                            <a:srgbClr val="FFFFFF"/>
+                          </a:solidFill>
+                          <a:latin typeface="Calibri"/>
+                        </a:rPr>
+                        <a:t>Yorum</a:t>
+                      </a:r>
+                    </a:p>
+                  </a:txBody>
+                  <a:tcPr>
+                    <a:solidFill>
+                      <a:srgbClr val="E30622"/>
+                    </a:solidFill>
+                  </a:tcPr>
+                </a:tc>
+              </a:tr>
+              <a:tr h="182880">
+                <a:tc>
+                  <a:txBody>
+                    <a:bodyPr/>
+                    <a:lstStyle/>
+                    <a:p>
+                      <a:pPr algn="l"/>
+                      <a:r>
+                        <a:rPr sz="900" b="0">
+                          <a:solidFill>
+                            <a:srgbClr val="333333"/>
+                          </a:solidFill>
+                          <a:latin typeface="Calibri"/>
+                        </a:rPr>
+                        <a:t>Ortalama alım günü (takvim)</a:t>
+                      </a:r>
+                    </a:p>
+                  </a:txBody>
+                  <a:tcPr>
+                    <a:solidFill>
+                      <a:srgbClr val="FFFFFF"/>
+                    </a:solidFill>
+                  </a:tcPr>
+                </a:tc>
+                <a:tc>
+                  <a:txBody>
+                    <a:bodyPr/>
+                    <a:lstStyle/>
+                    <a:p>
+                      <a:pPr algn="ctr"/>
+                      <a:r>
+                        <a:rPr sz="900" b="0">
+                          <a:solidFill>
+                            <a:srgbClr val="333333"/>
+                          </a:solidFill>
+                          <a:latin typeface="Calibri"/>
+                        </a:rPr>
+                        <a:t>225. gün</a:t>
+                      </a:r>
+                    </a:p>
+                  </a:txBody>
+                  <a:tcPr>
+                    <a:solidFill>
+                      <a:srgbClr val="FFFFFF"/>
+                    </a:solidFill>
+                  </a:tcPr>
+                </a:tc>
+                <a:tc>
+                  <a:txBody>
+                    <a:bodyPr/>
+                    <a:lstStyle/>
+                    <a:p>
+                      <a:pPr algn="ctr"/>
+                      <a:r>
+                        <a:rPr sz="900" b="1">
+                          <a:solidFill>
+                            <a:srgbClr val="333333"/>
+                          </a:solidFill>
+                          <a:latin typeface="Calibri"/>
+                        </a:rPr>
+                        <a:t>228. gün</a:t>
+                      </a:r>
+                    </a:p>
+                  </a:txBody>
+                  <a:tcPr>
+                    <a:solidFill>
+                      <a:srgbClr val="FFFFFF"/>
+                    </a:solidFill>
+                  </a:tcPr>
+                </a:tc>
+                <a:tc>
+                  <a:txBody>
+                    <a:bodyPr/>
+                    <a:lstStyle/>
+                    <a:p>
+                      <a:pPr algn="l"/>
+                      <a:r>
+                        <a:rPr sz="900" b="0">
+                          <a:solidFill>
+                            <a:srgbClr val="A6001A"/>
+                          </a:solidFill>
+                          <a:latin typeface="Calibri"/>
+                        </a:rPr>
+                        <a:t>2026 alımı ortalama 2,5 gün DAHA GEÇ</a:t>
+                      </a:r>
+                    </a:p>
+                  </a:txBody>
+                  <a:tcPr>
+                    <a:solidFill>
+                      <a:srgbClr val="FFFFFF"/>
+                    </a:solidFill>
+                  </a:tcPr>
+                </a:tc>
+              </a:tr>
+              <a:tr h="182880">
+                <a:tc>
+                  <a:txBody>
+                    <a:bodyPr/>
+                    <a:lstStyle/>
+                    <a:p>
+                      <a:pPr algn="l"/>
+                      <a:r>
+                        <a:rPr sz="900" b="0">
+                          <a:solidFill>
+                            <a:srgbClr val="333333"/>
+                          </a:solidFill>
+                          <a:latin typeface="Calibri"/>
+                        </a:rPr>
+                        <a:t>Temmuz ve öncesi alınan</a:t>
+                      </a:r>
+                    </a:p>
+                  </a:txBody>
+                  <a:tcPr>
+                    <a:solidFill>
+                      <a:srgbClr val="FAFAFA"/>
+                    </a:solidFill>
+                  </a:tcPr>
+                </a:tc>
+                <a:tc>
+                  <a:txBody>
+                    <a:bodyPr/>
+                    <a:lstStyle/>
+                    <a:p>
+                      <a:pPr algn="ctr"/>
+                      <a:r>
+                        <a:rPr sz="900" b="0">
+                          <a:solidFill>
+                            <a:srgbClr val="333333"/>
+                          </a:solidFill>
+                          <a:latin typeface="Calibri"/>
+                        </a:rPr>
+                        <a:t>6 kişi</a:t>
+                      </a:r>
+                    </a:p>
+                  </a:txBody>
+                  <a:tcPr>
+                    <a:solidFill>
+                      <a:srgbClr val="FAFAFA"/>
+                    </a:solidFill>
+                  </a:tcPr>
+                </a:tc>
+                <a:tc>
+                  <a:txBody>
+                    <a:bodyPr/>
+                    <a:lstStyle/>
+                    <a:p>
+                      <a:pPr algn="ctr"/>
+                      <a:r>
+                        <a:rPr sz="900" b="1">
+                          <a:solidFill>
+                            <a:srgbClr val="333333"/>
+                          </a:solidFill>
+                          <a:latin typeface="Calibri"/>
+                        </a:rPr>
+                        <a:t>2 kişi</a:t>
+                      </a:r>
+                    </a:p>
+                  </a:txBody>
+                  <a:tcPr>
+                    <a:solidFill>
+                      <a:srgbClr val="FAFAFA"/>
+                    </a:solidFill>
+                  </a:tcPr>
+                </a:tc>
+                <a:tc>
+                  <a:txBody>
+                    <a:bodyPr/>
+                    <a:lstStyle/>
+                    <a:p>
+                      <a:pPr algn="l"/>
+                      <a:r>
+                        <a:rPr sz="900" b="0">
+                          <a:solidFill>
+                            <a:srgbClr val="A6001A"/>
+                          </a:solidFill>
+                          <a:latin typeface="Calibri"/>
+                        </a:rPr>
+                        <a:t>erken alım azaldı</a:t>
+                      </a:r>
+                    </a:p>
+                  </a:txBody>
+                  <a:tcPr>
+                    <a:solidFill>
+                      <a:srgbClr val="FAFAFA"/>
+                    </a:solidFill>
+                  </a:tcPr>
+                </a:tc>
+              </a:tr>
+              <a:tr h="182880">
+                <a:tc>
+                  <a:txBody>
+                    <a:bodyPr/>
+                    <a:lstStyle/>
+                    <a:p>
+                      <a:pPr algn="l"/>
+                      <a:r>
+                        <a:rPr sz="900" b="0">
+                          <a:solidFill>
+                            <a:srgbClr val="333333"/>
+                          </a:solidFill>
+                          <a:latin typeface="Calibri"/>
+                        </a:rPr>
+                        <a:t>Açılıştan 45+ gün önce alınan</a:t>
+                      </a:r>
+                    </a:p>
+                  </a:txBody>
+                  <a:tcPr>
+                    <a:solidFill>
+                      <a:srgbClr val="FFFFFF"/>
+                    </a:solidFill>
+                  </a:tcPr>
+                </a:tc>
+                <a:tc>
+                  <a:txBody>
+                    <a:bodyPr/>
+                    <a:lstStyle/>
+                    <a:p>
+                      <a:pPr algn="ctr"/>
+                      <a:r>
+                        <a:rPr sz="900" b="0">
+                          <a:solidFill>
+                            <a:srgbClr val="333333"/>
+                          </a:solidFill>
+                          <a:latin typeface="Calibri"/>
+                        </a:rPr>
+                        <a:t>4 kişi</a:t>
+                      </a:r>
+                    </a:p>
+                  </a:txBody>
+                  <a:tcPr>
+                    <a:solidFill>
+                      <a:srgbClr val="FFFFFF"/>
+                    </a:solidFill>
+                  </a:tcPr>
+                </a:tc>
+                <a:tc>
+                  <a:txBody>
+                    <a:bodyPr/>
+                    <a:lstStyle/>
+                    <a:p>
+                      <a:pPr algn="ctr"/>
+                      <a:r>
+                        <a:rPr sz="900" b="1">
+                          <a:solidFill>
+                            <a:srgbClr val="333333"/>
+                          </a:solidFill>
+                          <a:latin typeface="Calibri"/>
+                        </a:rPr>
+                        <a:t>2 kişi</a:t>
+                      </a:r>
+                    </a:p>
+                  </a:txBody>
+                  <a:tcPr>
+                    <a:solidFill>
+                      <a:srgbClr val="FFFFFF"/>
+                    </a:solidFill>
+                  </a:tcPr>
+                </a:tc>
+                <a:tc>
+                  <a:txBody>
+                    <a:bodyPr/>
+                    <a:lstStyle/>
+                    <a:p>
+                      <a:pPr algn="l"/>
+                      <a:r>
+                        <a:rPr sz="900" b="0">
+                          <a:solidFill>
+                            <a:srgbClr val="A6001A"/>
+                          </a:solidFill>
+                          <a:latin typeface="Calibri"/>
+                        </a:rPr>
+                        <a:t>çok erken alım azaldı</a:t>
+                      </a:r>
+                    </a:p>
+                  </a:txBody>
+                  <a:tcPr>
+                    <a:solidFill>
+                      <a:srgbClr val="FFFFFF"/>
+                    </a:solidFill>
+                  </a:tcPr>
+                </a:tc>
+              </a:tr>
+              <a:tr h="182880">
+                <a:tc>
+                  <a:txBody>
+                    <a:bodyPr/>
+                    <a:lstStyle/>
+                    <a:p>
+                      <a:pPr algn="l"/>
+                      <a:r>
+                        <a:rPr sz="900" b="0">
+                          <a:solidFill>
+                            <a:srgbClr val="333333"/>
+                          </a:solidFill>
+                          <a:latin typeface="Calibri"/>
+                        </a:rPr>
+                        <a:t>1–14 Ağustos alınan</a:t>
+                      </a:r>
+                    </a:p>
+                  </a:txBody>
+                  <a:tcPr>
+                    <a:solidFill>
+                      <a:srgbClr val="FAFAFA"/>
+                    </a:solidFill>
+                  </a:tcPr>
+                </a:tc>
+                <a:tc>
+                  <a:txBody>
+                    <a:bodyPr/>
+                    <a:lstStyle/>
+                    <a:p>
+                      <a:pPr algn="ctr"/>
+                      <a:r>
+                        <a:rPr sz="900" b="0">
+                          <a:solidFill>
+                            <a:srgbClr val="333333"/>
+                          </a:solidFill>
+                          <a:latin typeface="Calibri"/>
+                        </a:rPr>
+                        <a:t>12 kişi</a:t>
+                      </a:r>
+                    </a:p>
+                  </a:txBody>
+                  <a:tcPr>
+                    <a:solidFill>
+                      <a:srgbClr val="FAFAFA"/>
+                    </a:solidFill>
+                  </a:tcPr>
+                </a:tc>
+                <a:tc>
+                  <a:txBody>
+                    <a:bodyPr/>
+                    <a:lstStyle/>
+                    <a:p>
+                      <a:pPr algn="ctr"/>
+                      <a:r>
+                        <a:rPr sz="900" b="1">
+                          <a:solidFill>
+                            <a:srgbClr val="333333"/>
+                          </a:solidFill>
+                          <a:latin typeface="Calibri"/>
+                        </a:rPr>
+                        <a:t>30 kişi</a:t>
+                      </a:r>
+                    </a:p>
+                  </a:txBody>
+                  <a:tcPr>
+                    <a:solidFill>
+                      <a:srgbClr val="FAFAFA"/>
+                    </a:solidFill>
+                  </a:tcPr>
+                </a:tc>
+                <a:tc>
+                  <a:txBody>
+                    <a:bodyPr/>
+                    <a:lstStyle/>
+                    <a:p>
+                      <a:pPr algn="l"/>
+                      <a:r>
+                        <a:rPr sz="900" b="0">
+                          <a:solidFill>
+                            <a:srgbClr val="A6001A"/>
+                          </a:solidFill>
+                          <a:latin typeface="Calibri"/>
+                        </a:rPr>
+                        <a:t>artış bu iki haftada</a:t>
+                      </a:r>
+                    </a:p>
+                  </a:txBody>
+                  <a:tcPr>
+                    <a:solidFill>
+                      <a:srgbClr val="FAFAFA"/>
+                    </a:solidFill>
+                  </a:tcPr>
+                </a:tc>
+              </a:tr>
+              <a:tr h="182880">
+                <a:tc>
+                  <a:txBody>
+                    <a:bodyPr/>
+                    <a:lstStyle/>
+                    <a:p>
+                      <a:pPr algn="l"/>
+                      <a:r>
+                        <a:rPr sz="900" b="0">
+                          <a:solidFill>
+                            <a:srgbClr val="333333"/>
+                          </a:solidFill>
+                          <a:latin typeface="Calibri"/>
+                        </a:rPr>
+                        <a:t>1–14 Ağustos ürün adedi</a:t>
+                      </a:r>
+                    </a:p>
+                  </a:txBody>
+                  <a:tcPr>
+                    <a:solidFill>
+                      <a:srgbClr val="FFFFFF"/>
+                    </a:solidFill>
+                  </a:tcPr>
+                </a:tc>
+                <a:tc>
+                  <a:txBody>
+                    <a:bodyPr/>
+                    <a:lstStyle/>
+                    <a:p>
+                      <a:pPr algn="ctr"/>
+                      <a:r>
+                        <a:rPr sz="900" b="0">
+                          <a:solidFill>
+                            <a:srgbClr val="333333"/>
+                          </a:solidFill>
+                          <a:latin typeface="Calibri"/>
+                        </a:rPr>
+                        <a:t>137.483</a:t>
+                      </a:r>
+                    </a:p>
+                  </a:txBody>
+                  <a:tcPr>
+                    <a:solidFill>
+                      <a:srgbClr val="FFFFFF"/>
+                    </a:solidFill>
+                  </a:tcPr>
+                </a:tc>
+                <a:tc>
+                  <a:txBody>
+                    <a:bodyPr/>
+                    <a:lstStyle/>
+                    <a:p>
+                      <a:pPr algn="ctr"/>
+                      <a:r>
+                        <a:rPr sz="900" b="1">
+                          <a:solidFill>
+                            <a:srgbClr val="333333"/>
+                          </a:solidFill>
+                          <a:latin typeface="Calibri"/>
+                        </a:rPr>
+                        <a:t>171.957</a:t>
+                      </a:r>
+                    </a:p>
+                  </a:txBody>
+                  <a:tcPr>
+                    <a:solidFill>
+                      <a:srgbClr val="FFFFFF"/>
+                    </a:solidFill>
+                  </a:tcPr>
+                </a:tc>
+                <a:tc>
+                  <a:txBody>
+                    <a:bodyPr/>
+                    <a:lstStyle/>
+                    <a:p>
+                      <a:pPr algn="l"/>
+                      <a:r>
+                        <a:rPr sz="900" b="0">
+                          <a:solidFill>
+                            <a:srgbClr val="A6001A"/>
+                          </a:solidFill>
+                          <a:latin typeface="Calibri"/>
+                        </a:rPr>
+                        <a:t>iş +%25,1 büyüdü — alım işi takip etti</a:t>
+                      </a:r>
+                    </a:p>
+                  </a:txBody>
+                  <a:tcPr>
+                    <a:solidFill>
+                      <a:srgbClr val="FFFFFF"/>
+                    </a:solidFill>
+                  </a:tcPr>
+                </a:tc>
+              </a:tr>
+              <a:tr h="182880">
+                <a:tc>
+                  <a:txBody>
+                    <a:bodyPr/>
+                    <a:lstStyle/>
+                    <a:p>
+                      <a:pPr algn="l"/>
+                      <a:r>
+                        <a:rPr sz="900" b="0">
+                          <a:solidFill>
+                            <a:srgbClr val="333333"/>
+                          </a:solidFill>
+                          <a:latin typeface="Calibri"/>
+                        </a:rPr>
+                        <a:t>15–31 Ağustos ürün adedi</a:t>
+                      </a:r>
+                    </a:p>
+                  </a:txBody>
+                  <a:tcPr>
+                    <a:solidFill>
+                      <a:srgbClr val="FAFAFA"/>
+                    </a:solidFill>
+                  </a:tcPr>
+                </a:tc>
+                <a:tc>
+                  <a:txBody>
+                    <a:bodyPr/>
+                    <a:lstStyle/>
+                    <a:p>
+                      <a:pPr algn="ctr"/>
+                      <a:r>
+                        <a:rPr sz="900" b="0">
+                          <a:solidFill>
+                            <a:srgbClr val="333333"/>
+                          </a:solidFill>
+                          <a:latin typeface="Calibri"/>
+                        </a:rPr>
+                        <a:t>320.776</a:t>
+                      </a:r>
+                    </a:p>
+                  </a:txBody>
+                  <a:tcPr>
+                    <a:solidFill>
+                      <a:srgbClr val="FAFAFA"/>
+                    </a:solidFill>
+                  </a:tcPr>
+                </a:tc>
+                <a:tc>
+                  <a:txBody>
+                    <a:bodyPr/>
+                    <a:lstStyle/>
+                    <a:p>
+                      <a:pPr algn="ctr"/>
+                      <a:r>
+                        <a:rPr sz="900" b="1">
+                          <a:solidFill>
+                            <a:srgbClr val="333333"/>
+                          </a:solidFill>
+                          <a:latin typeface="Calibri"/>
+                        </a:rPr>
+                        <a:t>311.542</a:t>
+                      </a:r>
+                    </a:p>
+                  </a:txBody>
+                  <a:tcPr>
+                    <a:solidFill>
+                      <a:srgbClr val="FAFAFA"/>
+                    </a:solidFill>
+                  </a:tcPr>
+                </a:tc>
+                <a:tc>
+                  <a:txBody>
+                    <a:bodyPr/>
+                    <a:lstStyle/>
+                    <a:p>
+                      <a:pPr algn="l"/>
+                      <a:r>
+                        <a:rPr sz="900" b="0">
+                          <a:solidFill>
+                            <a:srgbClr val="A6001A"/>
+                          </a:solidFill>
+                          <a:latin typeface="Calibri"/>
+                        </a:rPr>
+                        <a:t>−%2,9 — dalga Eylül'e kaydı</a:t>
+                      </a:r>
+                    </a:p>
+                  </a:txBody>
+                  <a:tcPr>
+                    <a:solidFill>
+                      <a:srgbClr val="FAFAFA"/>
+                    </a:solidFill>
+                  </a:tcPr>
+                </a:tc>
+              </a:tr>
+              <a:tr h="182880">
+                <a:tc>
+                  <a:txBody>
+                    <a:bodyPr/>
+                    <a:lstStyle/>
+                    <a:p>
+                      <a:pPr algn="l"/>
+                      <a:r>
+                        <a:rPr sz="900" b="0">
+                          <a:solidFill>
+                            <a:srgbClr val="333333"/>
+                          </a:solidFill>
+                          <a:latin typeface="Calibri"/>
+                        </a:rPr>
+                        <a:t>31.08'de çalışan sezonluk</a:t>
+                      </a:r>
+                    </a:p>
+                  </a:txBody>
+                  <a:tcPr>
+                    <a:solidFill>
+                      <a:srgbClr val="FFFFFF"/>
+                    </a:solidFill>
+                  </a:tcPr>
+                </a:tc>
+                <a:tc>
+                  <a:txBody>
+                    <a:bodyPr/>
+                    <a:lstStyle/>
+                    <a:p>
+                      <a:pPr algn="ctr"/>
+                      <a:r>
+                        <a:rPr sz="900" b="0">
+                          <a:solidFill>
+                            <a:srgbClr val="333333"/>
+                          </a:solidFill>
+                          <a:latin typeface="Calibri"/>
+                        </a:rPr>
+                        <a:t>65 kişi</a:t>
+                      </a:r>
+                    </a:p>
+                  </a:txBody>
+                  <a:tcPr>
+                    <a:solidFill>
+                      <a:srgbClr val="FFFFFF"/>
+                    </a:solidFill>
+                  </a:tcPr>
+                </a:tc>
+                <a:tc>
+                  <a:txBody>
+                    <a:bodyPr/>
+                    <a:lstStyle/>
+                    <a:p>
+                      <a:pPr algn="ctr"/>
+                      <a:r>
+                        <a:rPr sz="900" b="1">
+                          <a:solidFill>
+                            <a:srgbClr val="333333"/>
+                          </a:solidFill>
+                          <a:latin typeface="Calibri"/>
+                        </a:rPr>
+                        <a:t>62 kişi</a:t>
+                      </a:r>
+                    </a:p>
+                  </a:txBody>
+                  <a:tcPr>
+                    <a:solidFill>
+                      <a:srgbClr val="FFFFFF"/>
+                    </a:solidFill>
+                  </a:tcPr>
+                </a:tc>
+                <a:tc>
+                  <a:txBody>
+                    <a:bodyPr/>
+                    <a:lstStyle/>
+                    <a:p>
+                      <a:pPr algn="l"/>
+                      <a:r>
+                        <a:rPr sz="900" b="0">
+                          <a:solidFill>
+                            <a:srgbClr val="A6001A"/>
+                          </a:solidFill>
+                          <a:latin typeface="Calibri"/>
+                        </a:rPr>
+                        <a:t>kesimde 3 kişi DAHA AZ</a:t>
+                      </a:r>
+                    </a:p>
+                  </a:txBody>
+                  <a:tcPr>
+                    <a:solidFill>
+                      <a:srgbClr val="FFFFFF"/>
+                    </a:solidFill>
+                  </a:tcPr>
+                </a:tc>
+              </a:tr>
+              <a:tr h="182880">
+                <a:tc>
+                  <a:txBody>
+                    <a:bodyPr/>
+                    <a:lstStyle/>
+                    <a:p>
+                      <a:pPr algn="l"/>
+                      <a:r>
+                        <a:rPr sz="900" b="0">
+                          <a:solidFill>
+                            <a:srgbClr val="333333"/>
+                          </a:solidFill>
+                          <a:latin typeface="Calibri"/>
+                        </a:rPr>
+                        <a:t>   — Temmuz alımı</a:t>
+                      </a:r>
+                    </a:p>
+                  </a:txBody>
+                  <a:tcPr>
+                    <a:solidFill>
+                      <a:srgbClr val="FAFAFA"/>
+                    </a:solidFill>
+                  </a:tcPr>
+                </a:tc>
+                <a:tc>
+                  <a:txBody>
+                    <a:bodyPr/>
+                    <a:lstStyle/>
+                    <a:p>
+                      <a:pPr algn="ctr"/>
+                      <a:r>
+                        <a:rPr sz="900" b="0">
+                          <a:solidFill>
+                            <a:srgbClr val="333333"/>
+                          </a:solidFill>
+                          <a:latin typeface="Calibri"/>
+                        </a:rPr>
+                        <a:t>4 kişi</a:t>
+                      </a:r>
+                    </a:p>
+                  </a:txBody>
+                  <a:tcPr>
+                    <a:solidFill>
+                      <a:srgbClr val="FAFAFA"/>
+                    </a:solidFill>
+                  </a:tcPr>
+                </a:tc>
+                <a:tc>
+                  <a:txBody>
+                    <a:bodyPr/>
+                    <a:lstStyle/>
+                    <a:p>
+                      <a:pPr algn="ctr"/>
+                      <a:r>
+                        <a:rPr sz="900" b="1">
+                          <a:solidFill>
+                            <a:srgbClr val="333333"/>
+                          </a:solidFill>
+                          <a:latin typeface="Calibri"/>
+                        </a:rPr>
+                        <a:t>2 kişi</a:t>
+                      </a:r>
+                    </a:p>
+                  </a:txBody>
+                  <a:tcPr>
+                    <a:solidFill>
+                      <a:srgbClr val="FAFAFA"/>
+                    </a:solidFill>
+                  </a:tcPr>
+                </a:tc>
+                <a:tc>
+                  <a:txBody>
+                    <a:bodyPr/>
+                    <a:lstStyle/>
+                    <a:p>
+                      <a:pPr algn="l"/>
+                      <a:r>
+                        <a:rPr sz="900" b="0">
+                          <a:solidFill>
+                            <a:srgbClr val="A6001A"/>
+                          </a:solidFill>
+                          <a:latin typeface="Calibri"/>
+                        </a:rPr>
+                        <a:t>erken alım payı düştü</a:t>
+                      </a:r>
+                    </a:p>
+                  </a:txBody>
+                  <a:tcPr>
+                    <a:solidFill>
+                      <a:srgbClr val="FAFAFA"/>
+                    </a:solidFill>
+                  </a:tcPr>
+                </a:tc>
+              </a:tr>
+              <a:tr h="182880">
+                <a:tc>
+                  <a:txBody>
+                    <a:bodyPr/>
+                    <a:lstStyle/>
+                    <a:p>
+                      <a:pPr algn="l"/>
+                      <a:r>
+                        <a:rPr sz="900" b="0">
+                          <a:solidFill>
+                            <a:srgbClr val="333333"/>
+                          </a:solidFill>
+                          <a:latin typeface="Calibri"/>
+                        </a:rPr>
+                        <a:t>   — 1–14 Ağustos alımı</a:t>
+                      </a:r>
+                    </a:p>
+                  </a:txBody>
+                  <a:tcPr>
+                    <a:solidFill>
+                      <a:srgbClr val="FFFFFF"/>
+                    </a:solidFill>
+                  </a:tcPr>
+                </a:tc>
+                <a:tc>
+                  <a:txBody>
+                    <a:bodyPr/>
+                    <a:lstStyle/>
+                    <a:p>
+                      <a:pPr algn="ctr"/>
+                      <a:r>
+                        <a:rPr sz="900" b="0">
+                          <a:solidFill>
+                            <a:srgbClr val="333333"/>
+                          </a:solidFill>
+                          <a:latin typeface="Calibri"/>
+                        </a:rPr>
+                        <a:t>12 kişi</a:t>
+                      </a:r>
+                    </a:p>
+                  </a:txBody>
+                  <a:tcPr>
+                    <a:solidFill>
+                      <a:srgbClr val="FFFFFF"/>
+                    </a:solidFill>
+                  </a:tcPr>
+                </a:tc>
+                <a:tc>
+                  <a:txBody>
+                    <a:bodyPr/>
+                    <a:lstStyle/>
+                    <a:p>
+                      <a:pPr algn="ctr"/>
+                      <a:r>
+                        <a:rPr sz="900" b="1">
+                          <a:solidFill>
+                            <a:srgbClr val="333333"/>
+                          </a:solidFill>
+                          <a:latin typeface="Calibri"/>
+                        </a:rPr>
+                        <a:t>27 kişi</a:t>
+                      </a:r>
+                    </a:p>
+                  </a:txBody>
+                  <a:tcPr>
+                    <a:solidFill>
+                      <a:srgbClr val="FFFFFF"/>
+                    </a:solidFill>
+                  </a:tcPr>
+                </a:tc>
+                <a:tc>
+                  <a:txBody>
+                    <a:bodyPr/>
+                    <a:lstStyle/>
+                    <a:p>
+                      <a:pPr algn="l"/>
+                      <a:r>
+                        <a:rPr sz="900" b="0">
+                          <a:solidFill>
+                            <a:srgbClr val="A6001A"/>
+                          </a:solidFill>
+                          <a:latin typeface="Calibri"/>
+                        </a:rPr>
+                        <a:t>iş +%25,1 büyüyen dönem</a:t>
+                      </a:r>
+                    </a:p>
+                  </a:txBody>
+                  <a:tcPr>
+                    <a:solidFill>
+                      <a:srgbClr val="FFFFFF"/>
+                    </a:solidFill>
+                  </a:tcPr>
+                </a:tc>
+              </a:tr>
+              <a:tr h="182880">
+                <a:tc>
+                  <a:txBody>
+                    <a:bodyPr/>
+                    <a:lstStyle/>
+                    <a:p>
+                      <a:pPr algn="l"/>
+                      <a:r>
+                        <a:rPr sz="900" b="0">
+                          <a:solidFill>
+                            <a:srgbClr val="333333"/>
+                          </a:solidFill>
+                          <a:latin typeface="Calibri"/>
+                        </a:rPr>
+                        <a:t>   — 15–31 Ağustos alımı</a:t>
+                      </a:r>
+                    </a:p>
+                  </a:txBody>
+                  <a:tcPr>
+                    <a:solidFill>
+                      <a:srgbClr val="FAFAFA"/>
+                    </a:solidFill>
+                  </a:tcPr>
+                </a:tc>
+                <a:tc>
+                  <a:txBody>
+                    <a:bodyPr/>
+                    <a:lstStyle/>
+                    <a:p>
+                      <a:pPr algn="ctr"/>
+                      <a:r>
+                        <a:rPr sz="900" b="0">
+                          <a:solidFill>
+                            <a:srgbClr val="333333"/>
+                          </a:solidFill>
+                          <a:latin typeface="Calibri"/>
+                        </a:rPr>
+                        <a:t>49 kişi</a:t>
+                      </a:r>
+                    </a:p>
+                  </a:txBody>
+                  <a:tcPr>
+                    <a:solidFill>
+                      <a:srgbClr val="FAFAFA"/>
+                    </a:solidFill>
+                  </a:tcPr>
+                </a:tc>
+                <a:tc>
+                  <a:txBody>
+                    <a:bodyPr/>
+                    <a:lstStyle/>
+                    <a:p>
+                      <a:pPr algn="ctr"/>
+                      <a:r>
+                        <a:rPr sz="900" b="1">
+                          <a:solidFill>
+                            <a:srgbClr val="333333"/>
+                          </a:solidFill>
+                          <a:latin typeface="Calibri"/>
+                        </a:rPr>
+                        <a:t>32 kişi</a:t>
+                      </a:r>
+                    </a:p>
+                  </a:txBody>
+                  <a:tcPr>
+                    <a:solidFill>
+                      <a:srgbClr val="FAFAFA"/>
+                    </a:solidFill>
+                  </a:tcPr>
+                </a:tc>
+                <a:tc>
+                  <a:txBody>
+                    <a:bodyPr/>
+                    <a:lstStyle/>
+                    <a:p>
+                      <a:pPr algn="l"/>
+                      <a:r>
+                        <a:rPr sz="900" b="0">
+                          <a:solidFill>
+                            <a:srgbClr val="A6001A"/>
+                          </a:solidFill>
+                          <a:latin typeface="Calibri"/>
+                        </a:rPr>
+                        <a:t>iş −%2,9 → alım azaltıldı</a:t>
+                      </a:r>
+                    </a:p>
+                  </a:txBody>
+                  <a:tcPr>
+                    <a:solidFill>
+                      <a:srgbClr val="FAFAFA"/>
+                    </a:solidFill>
+                  </a:tcPr>
+                </a:tc>
+              </a:tr>
+            </a:tbl>
+          </a:graphicData>
+        </a:graphic>
+      </p:graphicFrame>
       <p:sp>
         <p:nvSpPr>
           <p:cNvPr id="22" name="TextBox 21"/>
-          <p:cNvSpPr txBox="1"/>
-          <p:nvPr/>
-        </p:nvSpPr>
-        <p:spPr>
-          <a:xfrm>
-            <a:off x="1143000" y="3753611"/>
-            <a:ext cx="10058400" cy="217932"/>
-          </a:xfrm>
-          <a:prstGeom prst="rect">
-            <a:avLst/>
-          </a:prstGeom>
-          <a:noFill/>
-        </p:spPr>
-        <p:txBody>
-          <a:bodyPr wrap="square" anchor="t">
-            <a:spAutoFit/>
-          </a:bodyPr>
-          <a:lstStyle/>
-          <a:p>
-            <a:pPr algn="l">
-              <a:lnSpc>
-                <a:spcPct val="106000"/>
-              </a:lnSpc>
-            </a:pPr>
-            <a:r>
-              <a:rPr sz="950" b="0">
-                <a:solidFill>
-                  <a:srgbClr val="333333"/>
-                </a:solidFill>
-                <a:latin typeface="Calibri"/>
-              </a:rPr>
-              <a:t>Hayır: takvim ölçüsünde 2026 alımı ortalama 2,5 gün DAHA GEÇ; Temmuz ve öncesi alım 6 kişiden 2'ye indi. Artış 1–14 Ağustos'ta ve o iki haftada ürün adedi +%25,1 büyüdü — alım işi takip etti.</a:t>
-            </a:r>
-          </a:p>
-        </p:txBody>
-      </p:sp>
-      <p:sp>
-        <p:nvSpPr>
-          <p:cNvPr id="23" name="Rectangle 22"/>
-          <p:cNvSpPr/>
-          <p:nvPr/>
-        </p:nvSpPr>
-        <p:spPr>
-          <a:xfrm>
-            <a:off x="548640" y="4099559"/>
-            <a:ext cx="11018520" cy="601980"/>
-          </a:xfrm>
-          <a:prstGeom prst="rect">
-            <a:avLst/>
-          </a:prstGeom>
-          <a:solidFill>
-            <a:srgbClr val="FFFFFF"/>
-          </a:solidFill>
-          <a:ln w="12700">
-            <a:solidFill>
-              <a:srgbClr val="DCDCDC"/>
-            </a:solidFill>
-          </a:ln>
-          <a:effectLst/>
-        </p:spPr>
-        <p:style>
-          <a:lnRef idx="1">
-            <a:schemeClr val="accent1"/>
-          </a:lnRef>
-          <a:fillRef idx="3">
-            <a:schemeClr val="accent1"/>
-          </a:fillRef>
-          <a:effectRef idx="2">
-            <a:schemeClr val="accent1"/>
-          </a:effectRef>
-          <a:fontRef idx="minor">
-            <a:schemeClr val="lt1"/>
-          </a:fontRef>
-        </p:style>
-        <p:txBody>
-          <a:bodyPr rtlCol="0" anchor="ctr"/>
-          <a:lstStyle/>
-          <a:p>
-            <a:pPr algn="ctr"/>
-          </a:p>
-        </p:txBody>
-      </p:sp>
-      <p:sp>
-        <p:nvSpPr>
-          <p:cNvPr id="24" name="Rectangle 23"/>
-          <p:cNvSpPr/>
-          <p:nvPr/>
-        </p:nvSpPr>
-        <p:spPr>
-          <a:xfrm>
-            <a:off x="548640" y="4099559"/>
-            <a:ext cx="68580" cy="601980"/>
-          </a:xfrm>
-          <a:prstGeom prst="rect">
-            <a:avLst/>
-          </a:prstGeom>
-          <a:solidFill>
-            <a:srgbClr val="E30622"/>
-          </a:solidFill>
-          <a:ln>
-            <a:noFill/>
-          </a:ln>
-          <a:effectLst/>
-        </p:spPr>
-        <p:style>
-          <a:lnRef idx="1">
-            <a:schemeClr val="accent1"/>
-          </a:lnRef>
-          <a:fillRef idx="3">
-            <a:schemeClr val="accent1"/>
-          </a:fillRef>
-          <a:effectRef idx="2">
-            <a:schemeClr val="accent1"/>
-          </a:effectRef>
-          <a:fontRef idx="minor">
-            <a:schemeClr val="lt1"/>
-          </a:fontRef>
-        </p:style>
-        <p:txBody>
-          <a:bodyPr rtlCol="0" anchor="ctr"/>
-          <a:lstStyle/>
-          <a:p>
-            <a:pPr algn="ctr"/>
-          </a:p>
-        </p:txBody>
-      </p:sp>
-      <p:pic>
-        <p:nvPicPr>
-          <p:cNvPr id="25" name="Picture 24" descr="circle-check.png"/>
-          <p:cNvPicPr>
-            <a:picLocks noChangeAspect="1"/>
-          </p:cNvPicPr>
-          <p:nvPr/>
-        </p:nvPicPr>
-        <p:blipFill>
-          <a:blip r:embed="rId3"/>
-          <a:stretch>
-            <a:fillRect/>
-          </a:stretch>
-        </p:blipFill>
-        <p:spPr>
-          <a:xfrm>
-            <a:off x="777240" y="4227575"/>
-            <a:ext cx="256032" cy="256032"/>
-          </a:xfrm>
-          <a:prstGeom prst="rect">
-            <a:avLst/>
-          </a:prstGeom>
-        </p:spPr>
-      </p:pic>
-      <p:sp>
-        <p:nvSpPr>
-          <p:cNvPr id="26" name="TextBox 25"/>
-          <p:cNvSpPr txBox="1"/>
-          <p:nvPr/>
-        </p:nvSpPr>
-        <p:spPr>
-          <a:xfrm>
-            <a:off x="1143000" y="4163567"/>
-            <a:ext cx="10058400" cy="292608"/>
-          </a:xfrm>
-          <a:prstGeom prst="rect">
-            <a:avLst/>
-          </a:prstGeom>
-          <a:noFill/>
-        </p:spPr>
-        <p:txBody>
-          <a:bodyPr wrap="square" anchor="t">
-            <a:spAutoFit/>
-          </a:bodyPr>
-          <a:lstStyle/>
-          <a:p>
-            <a:pPr algn="l">
-              <a:lnSpc>
-                <a:spcPct val="100000"/>
-              </a:lnSpc>
-            </a:pPr>
-            <a:r>
-              <a:rPr sz="1150" b="1">
-                <a:solidFill>
-                  <a:srgbClr val="A6001A"/>
-                </a:solidFill>
-                <a:latin typeface="Calibri"/>
-              </a:rPr>
-              <a:t>Personel maliyeti çok mu arttı?</a:t>
-            </a:r>
-          </a:p>
-        </p:txBody>
-      </p:sp>
-      <p:sp>
-        <p:nvSpPr>
-          <p:cNvPr id="27" name="TextBox 26"/>
-          <p:cNvSpPr txBox="1"/>
-          <p:nvPr/>
-        </p:nvSpPr>
-        <p:spPr>
-          <a:xfrm>
-            <a:off x="1143000" y="4447031"/>
-            <a:ext cx="10058400" cy="217932"/>
-          </a:xfrm>
-          <a:prstGeom prst="rect">
-            <a:avLst/>
-          </a:prstGeom>
-          <a:noFill/>
-        </p:spPr>
-        <p:txBody>
-          <a:bodyPr wrap="square" anchor="t">
-            <a:spAutoFit/>
-          </a:bodyPr>
-          <a:lstStyle/>
-          <a:p>
-            <a:pPr algn="l">
-              <a:lnSpc>
-                <a:spcPct val="106000"/>
-              </a:lnSpc>
-            </a:pPr>
-            <a:r>
-              <a:rPr sz="950" b="0">
-                <a:solidFill>
-                  <a:srgbClr val="333333"/>
-                </a:solidFill>
-                <a:latin typeface="Calibri"/>
-              </a:rPr>
-              <a:t>Sezonda maliyet +%54,6 artmıştır; artışın ana kaynağı FTE başına ücret (+%33,6), kadro artışı değil. Cironun içindeki personel yükü 1,59 puan GERİLEMİŞTİR: %14,30 → %12,71 (yıl geneli -0,70 puan).</a:t>
-            </a:r>
-          </a:p>
-        </p:txBody>
-      </p:sp>
-      <p:sp>
-        <p:nvSpPr>
-          <p:cNvPr id="28" name="Rectangle 27"/>
-          <p:cNvSpPr/>
-          <p:nvPr/>
-        </p:nvSpPr>
-        <p:spPr>
-          <a:xfrm>
-            <a:off x="548640" y="4792979"/>
-            <a:ext cx="11018520" cy="601980"/>
-          </a:xfrm>
-          <a:prstGeom prst="rect">
-            <a:avLst/>
-          </a:prstGeom>
-          <a:solidFill>
-            <a:srgbClr val="FFFFFF"/>
-          </a:solidFill>
-          <a:ln w="12700">
-            <a:solidFill>
-              <a:srgbClr val="DCDCDC"/>
-            </a:solidFill>
-          </a:ln>
-          <a:effectLst/>
-        </p:spPr>
-        <p:style>
-          <a:lnRef idx="1">
-            <a:schemeClr val="accent1"/>
-          </a:lnRef>
-          <a:fillRef idx="3">
-            <a:schemeClr val="accent1"/>
-          </a:fillRef>
-          <a:effectRef idx="2">
-            <a:schemeClr val="accent1"/>
-          </a:effectRef>
-          <a:fontRef idx="minor">
-            <a:schemeClr val="lt1"/>
-          </a:fontRef>
-        </p:style>
-        <p:txBody>
-          <a:bodyPr rtlCol="0" anchor="ctr"/>
-          <a:lstStyle/>
-          <a:p>
-            <a:pPr algn="ctr"/>
-          </a:p>
-        </p:txBody>
-      </p:sp>
-      <p:sp>
-        <p:nvSpPr>
-          <p:cNvPr id="29" name="Rectangle 28"/>
-          <p:cNvSpPr/>
-          <p:nvPr/>
-        </p:nvSpPr>
-        <p:spPr>
-          <a:xfrm>
-            <a:off x="548640" y="4792979"/>
-            <a:ext cx="68580" cy="601980"/>
-          </a:xfrm>
-          <a:prstGeom prst="rect">
-            <a:avLst/>
-          </a:prstGeom>
-          <a:solidFill>
-            <a:srgbClr val="E30622"/>
-          </a:solidFill>
-          <a:ln>
-            <a:noFill/>
-          </a:ln>
-          <a:effectLst/>
-        </p:spPr>
-        <p:style>
-          <a:lnRef idx="1">
-            <a:schemeClr val="accent1"/>
-          </a:lnRef>
-          <a:fillRef idx="3">
-            <a:schemeClr val="accent1"/>
-          </a:fillRef>
-          <a:effectRef idx="2">
-            <a:schemeClr val="accent1"/>
-          </a:effectRef>
-          <a:fontRef idx="minor">
-            <a:schemeClr val="lt1"/>
-          </a:fontRef>
-        </p:style>
-        <p:txBody>
-          <a:bodyPr rtlCol="0" anchor="ctr"/>
-          <a:lstStyle/>
-          <a:p>
-            <a:pPr algn="ctr"/>
-          </a:p>
-        </p:txBody>
-      </p:sp>
-      <p:pic>
-        <p:nvPicPr>
-          <p:cNvPr id="30" name="Picture 29" descr="circle-check.png"/>
-          <p:cNvPicPr>
-            <a:picLocks noChangeAspect="1"/>
-          </p:cNvPicPr>
-          <p:nvPr/>
-        </p:nvPicPr>
-        <p:blipFill>
-          <a:blip r:embed="rId3"/>
-          <a:stretch>
-            <a:fillRect/>
-          </a:stretch>
-        </p:blipFill>
-        <p:spPr>
-          <a:xfrm>
-            <a:off x="777240" y="4920995"/>
-            <a:ext cx="256032" cy="256032"/>
-          </a:xfrm>
-          <a:prstGeom prst="rect">
-            <a:avLst/>
-          </a:prstGeom>
-        </p:spPr>
-      </p:pic>
-      <p:sp>
-        <p:nvSpPr>
-          <p:cNvPr id="31" name="TextBox